--- a/reports/evidence/fixture_populated_slides.pptx
+++ b/reports/evidence/fixture_populated_slides.pptx
@@ -2,24 +2,24 @@
 <file path=ppt/presentation.xml><?xml version="1.0" encoding="utf-8"?>
 <p:presentation xmlns:p="http://schemas.openxmlformats.org/presentationml/2006/main">
   <p:sldMasterIdLst>
-    <p:sldMasterId xmlns:r="http://schemas.openxmlformats.org/officeDocument/2006/relationships" id="2147483648" r:id="Rcaec1c4f5ea24083"/>
+    <p:sldMasterId xmlns:r="http://schemas.openxmlformats.org/officeDocument/2006/relationships" id="2147483648" r:id="R7cee1c6823394d87"/>
   </p:sldMasterIdLst>
   <p:notesMasterIdLst>
-    <p:notesMasterId xmlns:r="http://schemas.openxmlformats.org/officeDocument/2006/relationships" r:id="Rb19b4f6d21704601"/>
+    <p:notesMasterId xmlns:r="http://schemas.openxmlformats.org/officeDocument/2006/relationships" r:id="Ra2416668a3fe44a7"/>
   </p:notesMasterIdLst>
   <p:sldIdLst>
-    <p:sldId xmlns:r="http://schemas.openxmlformats.org/officeDocument/2006/relationships" id="256" r:id="Rb84dfa68d4ea4977"/>
-    <p:sldId xmlns:r="http://schemas.openxmlformats.org/officeDocument/2006/relationships" id="257" r:id="Rc6e739c881d94036"/>
-    <p:sldId xmlns:r="http://schemas.openxmlformats.org/officeDocument/2006/relationships" id="258" r:id="Ra192683ab4824700"/>
-    <p:sldId xmlns:r="http://schemas.openxmlformats.org/officeDocument/2006/relationships" id="259" r:id="Rd86e0f061d0c4c40"/>
-    <p:sldId xmlns:r="http://schemas.openxmlformats.org/officeDocument/2006/relationships" id="260" r:id="R03908c5ccd934f54"/>
-    <p:sldId xmlns:r="http://schemas.openxmlformats.org/officeDocument/2006/relationships" id="261" r:id="R440ef99eac0e47ef"/>
-    <p:sldId xmlns:r="http://schemas.openxmlformats.org/officeDocument/2006/relationships" id="262" r:id="R805091ce02ad4ed9"/>
-    <p:sldId xmlns:r="http://schemas.openxmlformats.org/officeDocument/2006/relationships" id="263" r:id="R86fd2f8ea8344e02"/>
-    <p:sldId xmlns:r="http://schemas.openxmlformats.org/officeDocument/2006/relationships" id="264" r:id="R487695d40b2940ef"/>
-    <p:sldId xmlns:r="http://schemas.openxmlformats.org/officeDocument/2006/relationships" id="265" r:id="R69a69f0c02f24892"/>
-    <p:sldId xmlns:r="http://schemas.openxmlformats.org/officeDocument/2006/relationships" id="266" r:id="R9cf9104ab04a4fd8"/>
-    <p:sldId xmlns:r="http://schemas.openxmlformats.org/officeDocument/2006/relationships" id="267" r:id="R1a3957f0ecdd4d7a"/>
+    <p:sldId xmlns:r="http://schemas.openxmlformats.org/officeDocument/2006/relationships" id="256" r:id="Ra7af2306692c4af8"/>
+    <p:sldId xmlns:r="http://schemas.openxmlformats.org/officeDocument/2006/relationships" id="257" r:id="Rd74caa48f91b49d3"/>
+    <p:sldId xmlns:r="http://schemas.openxmlformats.org/officeDocument/2006/relationships" id="258" r:id="R254c4558eb324a0a"/>
+    <p:sldId xmlns:r="http://schemas.openxmlformats.org/officeDocument/2006/relationships" id="259" r:id="R2f725f3658054dd6"/>
+    <p:sldId xmlns:r="http://schemas.openxmlformats.org/officeDocument/2006/relationships" id="260" r:id="R4a95e85158f04dea"/>
+    <p:sldId xmlns:r="http://schemas.openxmlformats.org/officeDocument/2006/relationships" id="261" r:id="Rca78a2290d9c47ee"/>
+    <p:sldId xmlns:r="http://schemas.openxmlformats.org/officeDocument/2006/relationships" id="262" r:id="R9da1207a6e1c405e"/>
+    <p:sldId xmlns:r="http://schemas.openxmlformats.org/officeDocument/2006/relationships" id="263" r:id="R4260f777b7fd4d7f"/>
+    <p:sldId xmlns:r="http://schemas.openxmlformats.org/officeDocument/2006/relationships" id="264" r:id="R7c94c5b2077c49f0"/>
+    <p:sldId xmlns:r="http://schemas.openxmlformats.org/officeDocument/2006/relationships" id="265" r:id="R724e469a62954b76"/>
+    <p:sldId xmlns:r="http://schemas.openxmlformats.org/officeDocument/2006/relationships" id="266" r:id="R1b79a6bba45b4f8a"/>
+    <p:sldId xmlns:r="http://schemas.openxmlformats.org/officeDocument/2006/relationships" id="267" r:id="R571ac6cdeaf64aa7"/>
   </p:sldIdLst>
   <p:sldSz cx="12191695" cy="6858000"/>
   <p:notesSz cx="6858000" cy="9144000"/>
@@ -1345,7 +1345,7 @@
           </a:p>
           <a:p xmlns:a="http://schemas.openxmlformats.org/drawingml/2006/main">
             <a:r>
-              <a:t>So sánh đối ứng trên 296 cặp anchor chuẩn chỉ ra rằng biểu diễn Single-event đạt thứ hạng tìm kiếm tốt hơn Contextual-event (65 cặp vs 23 cặp), và hơn 70% có thứ hạng tương đương (phần lớn do cả hai cùng trượt Top-10). Điều này cho thấy việc đưa thêm log nền gây hiện tượng benign drift. Chúng tôi thiết lập schema so sánh đối chứng scaffold giữa Zero-Shot No-RAG, Zero-Shot RAG và các prompt scaffold, hiện đang được gắn nhãn [PENDING EXECUTION] chờ toàn bộ ma trận TEST hoàn tất để đưa ra kết luận khoa học chính thức.</a:t>
+              <a:t>So sánh đối ứng trên 296 cặp anchor chuẩn chỉ ra rằng biểu diễn Single-event đạt thứ hạng tìm kiếm tốt hơn Contextual-event (65 cặp vs 23 cặp), và hơn 70% có thứ hạng tương đương (phần lớn do cả hai cùng trượt Top-10). Điều này cho thấy việc đưa thêm log nền gây hiện tượng benign drift. Chúng tôi thiết lập schema so sánh đối chứng scaffold giữa Zero-Shot No-RAG, Zero-Shot RAG và các prompt scaffold, hiện đang được gắn nhãn [DIAGNOSTIC TEST FIXTURE ONLY - NOT CANONICAL NUMERICAL RESULTS]; kết quả đối chứng trên diagnostic cohort (n=718 views across 440 clusters) ghi nhận quan sát mô tả độc lập.</a:t>
             </a:r>
           </a:p>
           <a:p xmlns:a="http://schemas.openxmlformats.org/drawingml/2006/main">
@@ -1425,7 +1425,7 @@
           </a:p>
           <a:p xmlns:a="http://schemas.openxmlformats.org/drawingml/2006/main">
             <a:r>
-              <a:t>Khung đánh giá RQ1 &amp; RQ2 được xây dựng trên định đề D2i (Independent Measurement Axes). Chúng tôi bác bỏ hoàn toàn công thức cộng xác suất rời rạc sai lầm, bởi retrieval failure và downstream generation failure không hề xung khắc nhau mà có phần giao thoa rõ ràng; chúng tôi cũng không giả định độc lập xác suất ngẫu nhiên. Các chỉ số có điều kiện P(Correct | GT in Top-k) và P(Correct | GT NOT in Top-k) cho phép định lượng xem LLM có bị đánh lừa bởi distractor hay có khả năng tự sửa sai. Toàn bộ ma trận chính thức 6,400 bản ghi đang chạy; tính đúng đắn toán học của Evaluator đã được chứng minh qua 5 test fixtures.</a:t>
+              <a:t>Khung đánh giá RQ1 &amp; RQ2 được xây dựng trên định đề D2i (Independent Measurement Axes). Chúng tôi bác bỏ hoàn toàn công thức cộng xác suất rời rạc sai lầm, bởi retrieval failure và downstream generation failure không hề xung khắc nhau mà có phần giao thoa rõ ràng; chúng tôi cũng không giả định độc lập xác suất ngẫu nhiên. Các chỉ số có điều kiện P(Correct | GT in Top-k) và P(Correct | GT NOT in Top-k) cho phép định lượng xem LLM có bị đánh lừa bởi distractor hay có thể gán đúng khi thiếu ngữ cảnh truy xuất (không giả định năng lực tự sửa sai nội tại). Toàn bộ ma trận chính thức 6,400 bản ghi đang chạy; tính đúng đắn toán học của Evaluator đã được chứng minh qua 5 test fixtures.</a:t>
             </a:r>
           </a:p>
           <a:p xmlns:a="http://schemas.openxmlformats.org/drawingml/2006/main">
@@ -1577,7 +1577,7 @@
           <p:cNvPr id="2" name="Title 1">
             <a:extLst xmlns:a="http://schemas.openxmlformats.org/drawingml/2006/main">
               <a:ext uri="{FF2B5EF4-FFF2-40B4-BE49-F238E27FC236}">
-                <a16:creationId xmlns:a16="http://schemas.microsoft.com/office/drawing/2014/main" id="{66115B39-4BF4-427F-91A2-F0B18D91BFE2}"/>
+                <a16:creationId xmlns:a16="http://schemas.microsoft.com/office/drawing/2014/main" id="{F9DA5CCA-EA78-4031-9D73-0552F79BBAE6}"/>
               </a:ext>
             </a:extLst>
           </p:cNvPr>
@@ -1610,7 +1610,7 @@
           <p:cNvPr id="3" name="Subtitle 2">
             <a:extLst xmlns:a="http://schemas.openxmlformats.org/drawingml/2006/main">
               <a:ext uri="{FF2B5EF4-FFF2-40B4-BE49-F238E27FC236}">
-                <a16:creationId xmlns:a16="http://schemas.microsoft.com/office/drawing/2014/main" id="{99955D96-19FA-4BC4-B906-B87CA7778380}"/>
+                <a16:creationId xmlns:a16="http://schemas.microsoft.com/office/drawing/2014/main" id="{19BB409A-C2F9-4FB0-8AA0-B4B9C228E823}"/>
               </a:ext>
             </a:extLst>
           </p:cNvPr>
@@ -1734,7 +1734,7 @@
           <p:cNvPr id="4" name="Date Placeholder 3">
             <a:extLst xmlns:a="http://schemas.openxmlformats.org/drawingml/2006/main">
               <a:ext uri="{FF2B5EF4-FFF2-40B4-BE49-F238E27FC236}">
-                <a16:creationId xmlns:a16="http://schemas.microsoft.com/office/drawing/2014/main" id="{05C18CD1-4F94-4E26-9336-C6BCE04277E0}"/>
+                <a16:creationId xmlns:a16="http://schemas.microsoft.com/office/drawing/2014/main" id="{B795B3B7-FE2B-49B6-B889-9C4E1EF39834}"/>
               </a:ext>
             </a:extLst>
           </p:cNvPr>
@@ -1762,7 +1762,7 @@
           <p:cNvPr id="5" name="Footer Placeholder 4">
             <a:extLst xmlns:a="http://schemas.openxmlformats.org/drawingml/2006/main">
               <a:ext uri="{FF2B5EF4-FFF2-40B4-BE49-F238E27FC236}">
-                <a16:creationId xmlns:a16="http://schemas.microsoft.com/office/drawing/2014/main" id="{58816743-5408-49B0-9E62-4D3A93D025BE}"/>
+                <a16:creationId xmlns:a16="http://schemas.microsoft.com/office/drawing/2014/main" id="{60D51D36-2399-4278-8013-E7F2535656E2}"/>
               </a:ext>
             </a:extLst>
           </p:cNvPr>
@@ -1787,7 +1787,7 @@
           <p:cNvPr id="6" name="Slide Number Placeholder 5">
             <a:extLst xmlns:a="http://schemas.openxmlformats.org/drawingml/2006/main">
               <a:ext uri="{FF2B5EF4-FFF2-40B4-BE49-F238E27FC236}">
-                <a16:creationId xmlns:a16="http://schemas.microsoft.com/office/drawing/2014/main" id="{FF406F3B-CB4C-49EC-BA8E-CABAF96D4B0D}"/>
+                <a16:creationId xmlns:a16="http://schemas.microsoft.com/office/drawing/2014/main" id="{70B92285-AB39-490B-84D3-AD549ED76BB9}"/>
               </a:ext>
             </a:extLst>
           </p:cNvPr>
@@ -1832,7 +1832,7 @@
           <p:cNvPr id="2" name="Title 1">
             <a:extLst xmlns:a="http://schemas.openxmlformats.org/drawingml/2006/main">
               <a:ext uri="{FF2B5EF4-FFF2-40B4-BE49-F238E27FC236}">
-                <a16:creationId xmlns:a16="http://schemas.microsoft.com/office/drawing/2014/main" id="{6503EEAC-502C-4364-9074-58E7B15E2ED9}"/>
+                <a16:creationId xmlns:a16="http://schemas.microsoft.com/office/drawing/2014/main" id="{FC0B20C2-F336-4475-8B13-B11457B3FFD2}"/>
               </a:ext>
             </a:extLst>
           </p:cNvPr>
@@ -1860,7 +1860,7 @@
           <p:cNvPr id="3" name="Vertical Text Placeholder 2">
             <a:extLst xmlns:a="http://schemas.openxmlformats.org/drawingml/2006/main">
               <a:ext uri="{FF2B5EF4-FFF2-40B4-BE49-F238E27FC236}">
-                <a16:creationId xmlns:a16="http://schemas.microsoft.com/office/drawing/2014/main" id="{BD92E5CE-42B4-450A-9319-72EB00806948}"/>
+                <a16:creationId xmlns:a16="http://schemas.microsoft.com/office/drawing/2014/main" id="{B841D65A-AEDB-4068-BA32-56A721BDDA10}"/>
               </a:ext>
             </a:extLst>
           </p:cNvPr>
@@ -1923,7 +1923,7 @@
           <p:cNvPr id="4" name="Date Placeholder 3">
             <a:extLst xmlns:a="http://schemas.openxmlformats.org/drawingml/2006/main">
               <a:ext uri="{FF2B5EF4-FFF2-40B4-BE49-F238E27FC236}">
-                <a16:creationId xmlns:a16="http://schemas.microsoft.com/office/drawing/2014/main" id="{1E561BB6-2D97-4D54-A190-076574022E28}"/>
+                <a16:creationId xmlns:a16="http://schemas.microsoft.com/office/drawing/2014/main" id="{3129638E-1C98-43F1-9D14-983C2C014E88}"/>
               </a:ext>
             </a:extLst>
           </p:cNvPr>
@@ -1951,7 +1951,7 @@
           <p:cNvPr id="5" name="Footer Placeholder 4">
             <a:extLst xmlns:a="http://schemas.openxmlformats.org/drawingml/2006/main">
               <a:ext uri="{FF2B5EF4-FFF2-40B4-BE49-F238E27FC236}">
-                <a16:creationId xmlns:a16="http://schemas.microsoft.com/office/drawing/2014/main" id="{56346C84-D21F-44B5-AAFF-2D4E00C7AA00}"/>
+                <a16:creationId xmlns:a16="http://schemas.microsoft.com/office/drawing/2014/main" id="{EBCBB96D-00A3-4182-AC99-C4AFD7861632}"/>
               </a:ext>
             </a:extLst>
           </p:cNvPr>
@@ -1976,7 +1976,7 @@
           <p:cNvPr id="6" name="Slide Number Placeholder 5">
             <a:extLst xmlns:a="http://schemas.openxmlformats.org/drawingml/2006/main">
               <a:ext uri="{FF2B5EF4-FFF2-40B4-BE49-F238E27FC236}">
-                <a16:creationId xmlns:a16="http://schemas.microsoft.com/office/drawing/2014/main" id="{F895712B-C0A2-47D6-86E8-E9C48F45F8C3}"/>
+                <a16:creationId xmlns:a16="http://schemas.microsoft.com/office/drawing/2014/main" id="{5FFFFC04-4E85-4F48-88FB-7F6CDE8FFE2B}"/>
               </a:ext>
             </a:extLst>
           </p:cNvPr>
@@ -2021,7 +2021,7 @@
           <p:cNvPr id="2" name="Vertical Title 1">
             <a:extLst xmlns:a="http://schemas.openxmlformats.org/drawingml/2006/main">
               <a:ext uri="{FF2B5EF4-FFF2-40B4-BE49-F238E27FC236}">
-                <a16:creationId xmlns:a16="http://schemas.microsoft.com/office/drawing/2014/main" id="{F210DD81-3944-41D9-B432-2A656F7E122F}"/>
+                <a16:creationId xmlns:a16="http://schemas.microsoft.com/office/drawing/2014/main" id="{6C77F7A5-C1F9-40A0-87F6-EEDE73A32E5A}"/>
               </a:ext>
             </a:extLst>
           </p:cNvPr>
@@ -2054,7 +2054,7 @@
           <p:cNvPr id="3" name="Vertical Text Placeholder 2">
             <a:extLst xmlns:a="http://schemas.openxmlformats.org/drawingml/2006/main">
               <a:ext uri="{FF2B5EF4-FFF2-40B4-BE49-F238E27FC236}">
-                <a16:creationId xmlns:a16="http://schemas.microsoft.com/office/drawing/2014/main" id="{ACE6C037-233D-4675-9AC0-53D7E231AEE2}"/>
+                <a16:creationId xmlns:a16="http://schemas.microsoft.com/office/drawing/2014/main" id="{3870C724-5260-4B31-93FA-A3D59056511D}"/>
               </a:ext>
             </a:extLst>
           </p:cNvPr>
@@ -2122,7 +2122,7 @@
           <p:cNvPr id="4" name="Date Placeholder 3">
             <a:extLst xmlns:a="http://schemas.openxmlformats.org/drawingml/2006/main">
               <a:ext uri="{FF2B5EF4-FFF2-40B4-BE49-F238E27FC236}">
-                <a16:creationId xmlns:a16="http://schemas.microsoft.com/office/drawing/2014/main" id="{632E594C-FD68-4A9A-AFBD-074A6B134803}"/>
+                <a16:creationId xmlns:a16="http://schemas.microsoft.com/office/drawing/2014/main" id="{6B57E13C-39E7-4676-9A74-B2774572B013}"/>
               </a:ext>
             </a:extLst>
           </p:cNvPr>
@@ -2150,7 +2150,7 @@
           <p:cNvPr id="5" name="Footer Placeholder 4">
             <a:extLst xmlns:a="http://schemas.openxmlformats.org/drawingml/2006/main">
               <a:ext uri="{FF2B5EF4-FFF2-40B4-BE49-F238E27FC236}">
-                <a16:creationId xmlns:a16="http://schemas.microsoft.com/office/drawing/2014/main" id="{E3201CC2-23D0-414A-9D2D-7D1AACCDDFC1}"/>
+                <a16:creationId xmlns:a16="http://schemas.microsoft.com/office/drawing/2014/main" id="{3A0C92E4-54E5-4082-8FE5-43822052E3E0}"/>
               </a:ext>
             </a:extLst>
           </p:cNvPr>
@@ -2175,7 +2175,7 @@
           <p:cNvPr id="6" name="Slide Number Placeholder 5">
             <a:extLst xmlns:a="http://schemas.openxmlformats.org/drawingml/2006/main">
               <a:ext uri="{FF2B5EF4-FFF2-40B4-BE49-F238E27FC236}">
-                <a16:creationId xmlns:a16="http://schemas.microsoft.com/office/drawing/2014/main" id="{804FFD6A-E215-449E-9F13-C8E294D6AAEB}"/>
+                <a16:creationId xmlns:a16="http://schemas.microsoft.com/office/drawing/2014/main" id="{352820C3-61BC-41A5-A209-4C282B022651}"/>
               </a:ext>
             </a:extLst>
           </p:cNvPr>
@@ -2220,7 +2220,7 @@
           <p:cNvPr id="2" name="Title 1">
             <a:extLst xmlns:a="http://schemas.openxmlformats.org/drawingml/2006/main">
               <a:ext uri="{FF2B5EF4-FFF2-40B4-BE49-F238E27FC236}">
-                <a16:creationId xmlns:a16="http://schemas.microsoft.com/office/drawing/2014/main" id="{98EEBC89-1365-4C48-AB8C-07095088448E}"/>
+                <a16:creationId xmlns:a16="http://schemas.microsoft.com/office/drawing/2014/main" id="{24E4A1B5-BCA2-4DAC-869F-ECD99F2D1B4F}"/>
               </a:ext>
             </a:extLst>
           </p:cNvPr>
@@ -2248,7 +2248,7 @@
           <p:cNvPr id="3" name="Content Placeholder 2">
             <a:extLst xmlns:a="http://schemas.openxmlformats.org/drawingml/2006/main">
               <a:ext uri="{FF2B5EF4-FFF2-40B4-BE49-F238E27FC236}">
-                <a16:creationId xmlns:a16="http://schemas.microsoft.com/office/drawing/2014/main" id="{CC240799-B26F-4D15-B631-BD59AE435E98}"/>
+                <a16:creationId xmlns:a16="http://schemas.microsoft.com/office/drawing/2014/main" id="{753D367C-C51F-4599-AD3E-7D0F59072ABE}"/>
               </a:ext>
             </a:extLst>
           </p:cNvPr>
@@ -2311,7 +2311,7 @@
           <p:cNvPr id="4" name="Date Placeholder 3">
             <a:extLst xmlns:a="http://schemas.openxmlformats.org/drawingml/2006/main">
               <a:ext uri="{FF2B5EF4-FFF2-40B4-BE49-F238E27FC236}">
-                <a16:creationId xmlns:a16="http://schemas.microsoft.com/office/drawing/2014/main" id="{0FC22687-28CB-4A3A-A65F-E4A24822854C}"/>
+                <a16:creationId xmlns:a16="http://schemas.microsoft.com/office/drawing/2014/main" id="{738ACF17-65E1-4465-A73B-CC1BCE9C5B86}"/>
               </a:ext>
             </a:extLst>
           </p:cNvPr>
@@ -2339,7 +2339,7 @@
           <p:cNvPr id="5" name="Footer Placeholder 4">
             <a:extLst xmlns:a="http://schemas.openxmlformats.org/drawingml/2006/main">
               <a:ext uri="{FF2B5EF4-FFF2-40B4-BE49-F238E27FC236}">
-                <a16:creationId xmlns:a16="http://schemas.microsoft.com/office/drawing/2014/main" id="{82B40110-934F-430A-9BD1-F5D3C3AA1295}"/>
+                <a16:creationId xmlns:a16="http://schemas.microsoft.com/office/drawing/2014/main" id="{DCF0738C-3456-4B4D-B8F8-89A0B4FC2F88}"/>
               </a:ext>
             </a:extLst>
           </p:cNvPr>
@@ -2364,7 +2364,7 @@
           <p:cNvPr id="6" name="Slide Number Placeholder 5">
             <a:extLst xmlns:a="http://schemas.openxmlformats.org/drawingml/2006/main">
               <a:ext uri="{FF2B5EF4-FFF2-40B4-BE49-F238E27FC236}">
-                <a16:creationId xmlns:a16="http://schemas.microsoft.com/office/drawing/2014/main" id="{56BAC69A-67F8-4F53-B7AE-D9820A7DE799}"/>
+                <a16:creationId xmlns:a16="http://schemas.microsoft.com/office/drawing/2014/main" id="{63CE349C-E386-4FE4-85DF-635982394CC4}"/>
               </a:ext>
             </a:extLst>
           </p:cNvPr>
@@ -2409,7 +2409,7 @@
           <p:cNvPr id="2" name="Title 1">
             <a:extLst xmlns:a="http://schemas.openxmlformats.org/drawingml/2006/main">
               <a:ext uri="{FF2B5EF4-FFF2-40B4-BE49-F238E27FC236}">
-                <a16:creationId xmlns:a16="http://schemas.microsoft.com/office/drawing/2014/main" id="{C80A8782-0932-4AD6-A8C8-BD7614C7CA01}"/>
+                <a16:creationId xmlns:a16="http://schemas.microsoft.com/office/drawing/2014/main" id="{391A7473-B3CE-4B50-B543-FA316761A063}"/>
               </a:ext>
             </a:extLst>
           </p:cNvPr>
@@ -2447,7 +2447,7 @@
           <p:cNvPr id="3" name="Text Placeholder 2">
             <a:extLst xmlns:a="http://schemas.openxmlformats.org/drawingml/2006/main">
               <a:ext uri="{FF2B5EF4-FFF2-40B4-BE49-F238E27FC236}">
-                <a16:creationId xmlns:a16="http://schemas.microsoft.com/office/drawing/2014/main" id="{8BCF0DF2-F242-49A1-8EA9-89D1957BE3C4}"/>
+                <a16:creationId xmlns:a16="http://schemas.microsoft.com/office/drawing/2014/main" id="{43154A4E-E1EB-49E4-AB50-E78B75B6CC2A}"/>
               </a:ext>
             </a:extLst>
           </p:cNvPr>
@@ -2573,7 +2573,7 @@
           <p:cNvPr id="4" name="Date Placeholder 3">
             <a:extLst xmlns:a="http://schemas.openxmlformats.org/drawingml/2006/main">
               <a:ext uri="{FF2B5EF4-FFF2-40B4-BE49-F238E27FC236}">
-                <a16:creationId xmlns:a16="http://schemas.microsoft.com/office/drawing/2014/main" id="{7B30EADA-363A-41EA-AFAD-C9049B007C4E}"/>
+                <a16:creationId xmlns:a16="http://schemas.microsoft.com/office/drawing/2014/main" id="{4D20F37B-A41F-4453-BE8A-F48B2FD17537}"/>
               </a:ext>
             </a:extLst>
           </p:cNvPr>
@@ -2601,7 +2601,7 @@
           <p:cNvPr id="5" name="Footer Placeholder 4">
             <a:extLst xmlns:a="http://schemas.openxmlformats.org/drawingml/2006/main">
               <a:ext uri="{FF2B5EF4-FFF2-40B4-BE49-F238E27FC236}">
-                <a16:creationId xmlns:a16="http://schemas.microsoft.com/office/drawing/2014/main" id="{615A5276-8A61-41E0-B4CA-3AD49296ED1E}"/>
+                <a16:creationId xmlns:a16="http://schemas.microsoft.com/office/drawing/2014/main" id="{C636DA3E-B9F2-41E4-ABF9-F2E7573C70EF}"/>
               </a:ext>
             </a:extLst>
           </p:cNvPr>
@@ -2626,7 +2626,7 @@
           <p:cNvPr id="6" name="Slide Number Placeholder 5">
             <a:extLst xmlns:a="http://schemas.openxmlformats.org/drawingml/2006/main">
               <a:ext uri="{FF2B5EF4-FFF2-40B4-BE49-F238E27FC236}">
-                <a16:creationId xmlns:a16="http://schemas.microsoft.com/office/drawing/2014/main" id="{593E4D0B-E498-4E27-94CC-6C852215B289}"/>
+                <a16:creationId xmlns:a16="http://schemas.microsoft.com/office/drawing/2014/main" id="{37455C70-17F0-4849-A404-8566E814A6E3}"/>
               </a:ext>
             </a:extLst>
           </p:cNvPr>
@@ -2671,7 +2671,7 @@
           <p:cNvPr id="2" name="Title 1">
             <a:extLst xmlns:a="http://schemas.openxmlformats.org/drawingml/2006/main">
               <a:ext uri="{FF2B5EF4-FFF2-40B4-BE49-F238E27FC236}">
-                <a16:creationId xmlns:a16="http://schemas.microsoft.com/office/drawing/2014/main" id="{7DEF39B7-B4CC-4E66-A409-99FB360FCBE4}"/>
+                <a16:creationId xmlns:a16="http://schemas.microsoft.com/office/drawing/2014/main" id="{C7D2D7A8-3141-4807-A9F0-4B848D847234}"/>
               </a:ext>
             </a:extLst>
           </p:cNvPr>
@@ -2699,7 +2699,7 @@
           <p:cNvPr id="3" name="Content Placeholder 2">
             <a:extLst xmlns:a="http://schemas.openxmlformats.org/drawingml/2006/main">
               <a:ext uri="{FF2B5EF4-FFF2-40B4-BE49-F238E27FC236}">
-                <a16:creationId xmlns:a16="http://schemas.microsoft.com/office/drawing/2014/main" id="{F1DE4C39-3975-45AB-831F-8F36413238F8}"/>
+                <a16:creationId xmlns:a16="http://schemas.microsoft.com/office/drawing/2014/main" id="{0FBA10AA-CACB-45D8-9A56-71563A20613B}"/>
               </a:ext>
             </a:extLst>
           </p:cNvPr>
@@ -2804,7 +2804,7 @@
           <p:cNvPr id="4" name="Content Placeholder 3">
             <a:extLst xmlns:a="http://schemas.openxmlformats.org/drawingml/2006/main">
               <a:ext uri="{FF2B5EF4-FFF2-40B4-BE49-F238E27FC236}">
-                <a16:creationId xmlns:a16="http://schemas.microsoft.com/office/drawing/2014/main" id="{8C0D8E01-8C25-442C-9AD7-C31A56F00E7A}"/>
+                <a16:creationId xmlns:a16="http://schemas.microsoft.com/office/drawing/2014/main" id="{8189375D-8C49-4840-AC8F-2FCCDF185DD4}"/>
               </a:ext>
             </a:extLst>
           </p:cNvPr>
@@ -2909,7 +2909,7 @@
           <p:cNvPr id="5" name="Date Placeholder 4">
             <a:extLst xmlns:a="http://schemas.openxmlformats.org/drawingml/2006/main">
               <a:ext uri="{FF2B5EF4-FFF2-40B4-BE49-F238E27FC236}">
-                <a16:creationId xmlns:a16="http://schemas.microsoft.com/office/drawing/2014/main" id="{EFC71855-D46E-4FB7-B641-353A6FBDC977}"/>
+                <a16:creationId xmlns:a16="http://schemas.microsoft.com/office/drawing/2014/main" id="{A1E705D8-EF4D-4D1B-95C5-3D68EF3E57A3}"/>
               </a:ext>
             </a:extLst>
           </p:cNvPr>
@@ -2937,7 +2937,7 @@
           <p:cNvPr id="6" name="Footer Placeholder 5">
             <a:extLst xmlns:a="http://schemas.openxmlformats.org/drawingml/2006/main">
               <a:ext uri="{FF2B5EF4-FFF2-40B4-BE49-F238E27FC236}">
-                <a16:creationId xmlns:a16="http://schemas.microsoft.com/office/drawing/2014/main" id="{B22541E1-B7CB-48BD-A46A-E371406654C3}"/>
+                <a16:creationId xmlns:a16="http://schemas.microsoft.com/office/drawing/2014/main" id="{3A04959D-E4AE-4CD7-BDC8-EB006D108012}"/>
               </a:ext>
             </a:extLst>
           </p:cNvPr>
@@ -2962,7 +2962,7 @@
           <p:cNvPr id="7" name="Slide Number Placeholder 6">
             <a:extLst xmlns:a="http://schemas.openxmlformats.org/drawingml/2006/main">
               <a:ext uri="{FF2B5EF4-FFF2-40B4-BE49-F238E27FC236}">
-                <a16:creationId xmlns:a16="http://schemas.microsoft.com/office/drawing/2014/main" id="{DDE05DB1-8B71-4F87-8111-252216F6D2CF}"/>
+                <a16:creationId xmlns:a16="http://schemas.microsoft.com/office/drawing/2014/main" id="{6ED017F7-9AAC-4EA3-B13B-301A7C105760}"/>
               </a:ext>
             </a:extLst>
           </p:cNvPr>
@@ -3007,7 +3007,7 @@
           <p:cNvPr id="2" name="Title 1">
             <a:extLst xmlns:a="http://schemas.openxmlformats.org/drawingml/2006/main">
               <a:ext uri="{FF2B5EF4-FFF2-40B4-BE49-F238E27FC236}">
-                <a16:creationId xmlns:a16="http://schemas.microsoft.com/office/drawing/2014/main" id="{8582D55D-3AE7-4F18-AF3E-60EB6F88A0F0}"/>
+                <a16:creationId xmlns:a16="http://schemas.microsoft.com/office/drawing/2014/main" id="{B73E4511-F503-4B48-B8EE-6B17183C6793}"/>
               </a:ext>
             </a:extLst>
           </p:cNvPr>
@@ -3040,7 +3040,7 @@
           <p:cNvPr id="3" name="Text Placeholder 2">
             <a:extLst xmlns:a="http://schemas.openxmlformats.org/drawingml/2006/main">
               <a:ext uri="{FF2B5EF4-FFF2-40B4-BE49-F238E27FC236}">
-                <a16:creationId xmlns:a16="http://schemas.microsoft.com/office/drawing/2014/main" id="{756F687E-5BEF-48B3-9AEF-E7374B98FBB0}"/>
+                <a16:creationId xmlns:a16="http://schemas.microsoft.com/office/drawing/2014/main" id="{AB4C551B-0350-4040-8C00-8BCA4062FFF8}"/>
               </a:ext>
             </a:extLst>
           </p:cNvPr>
@@ -3112,7 +3112,7 @@
           <p:cNvPr id="4" name="Content Placeholder 3">
             <a:extLst xmlns:a="http://schemas.openxmlformats.org/drawingml/2006/main">
               <a:ext uri="{FF2B5EF4-FFF2-40B4-BE49-F238E27FC236}">
-                <a16:creationId xmlns:a16="http://schemas.microsoft.com/office/drawing/2014/main" id="{51846547-ABFF-438E-AE82-15277977A4BD}"/>
+                <a16:creationId xmlns:a16="http://schemas.microsoft.com/office/drawing/2014/main" id="{F0DF20D8-2783-4830-98B4-2B8A435945E3}"/>
               </a:ext>
             </a:extLst>
           </p:cNvPr>
@@ -3217,7 +3217,7 @@
           <p:cNvPr id="5" name="Text Placeholder 4">
             <a:extLst xmlns:a="http://schemas.openxmlformats.org/drawingml/2006/main">
               <a:ext uri="{FF2B5EF4-FFF2-40B4-BE49-F238E27FC236}">
-                <a16:creationId xmlns:a16="http://schemas.microsoft.com/office/drawing/2014/main" id="{CECB1900-5599-41CB-88C6-C8BCC3DF9939}"/>
+                <a16:creationId xmlns:a16="http://schemas.microsoft.com/office/drawing/2014/main" id="{16DAFA06-5981-4A6A-BCB9-D8533DA2405C}"/>
               </a:ext>
             </a:extLst>
           </p:cNvPr>
@@ -3289,7 +3289,7 @@
           <p:cNvPr id="6" name="Content Placeholder 5">
             <a:extLst xmlns:a="http://schemas.openxmlformats.org/drawingml/2006/main">
               <a:ext uri="{FF2B5EF4-FFF2-40B4-BE49-F238E27FC236}">
-                <a16:creationId xmlns:a16="http://schemas.microsoft.com/office/drawing/2014/main" id="{81C00F89-B4D2-41B6-A27C-03D2C111F12F}"/>
+                <a16:creationId xmlns:a16="http://schemas.microsoft.com/office/drawing/2014/main" id="{15C8AA1E-B341-4598-837F-8951C6D9FA90}"/>
               </a:ext>
             </a:extLst>
           </p:cNvPr>
@@ -3394,7 +3394,7 @@
           <p:cNvPr id="7" name="Date Placeholder 6">
             <a:extLst xmlns:a="http://schemas.openxmlformats.org/drawingml/2006/main">
               <a:ext uri="{FF2B5EF4-FFF2-40B4-BE49-F238E27FC236}">
-                <a16:creationId xmlns:a16="http://schemas.microsoft.com/office/drawing/2014/main" id="{A33E7E51-182F-4F05-9243-B0ECF704B41A}"/>
+                <a16:creationId xmlns:a16="http://schemas.microsoft.com/office/drawing/2014/main" id="{A2A7B23B-0C6D-4889-BFA2-7B0C32AE926F}"/>
               </a:ext>
             </a:extLst>
           </p:cNvPr>
@@ -3422,7 +3422,7 @@
           <p:cNvPr id="8" name="Footer Placeholder 7">
             <a:extLst xmlns:a="http://schemas.openxmlformats.org/drawingml/2006/main">
               <a:ext uri="{FF2B5EF4-FFF2-40B4-BE49-F238E27FC236}">
-                <a16:creationId xmlns:a16="http://schemas.microsoft.com/office/drawing/2014/main" id="{B292B26E-0100-41A8-8460-137C79826229}"/>
+                <a16:creationId xmlns:a16="http://schemas.microsoft.com/office/drawing/2014/main" id="{96294E75-1ED2-4258-BCC2-79BC15773B9C}"/>
               </a:ext>
             </a:extLst>
           </p:cNvPr>
@@ -3447,7 +3447,7 @@
           <p:cNvPr id="9" name="Slide Number Placeholder 8">
             <a:extLst xmlns:a="http://schemas.openxmlformats.org/drawingml/2006/main">
               <a:ext uri="{FF2B5EF4-FFF2-40B4-BE49-F238E27FC236}">
-                <a16:creationId xmlns:a16="http://schemas.microsoft.com/office/drawing/2014/main" id="{19DAE829-DACF-413D-908C-B11A614DEE91}"/>
+                <a16:creationId xmlns:a16="http://schemas.microsoft.com/office/drawing/2014/main" id="{EC185C55-613E-490D-8F05-A90E1F642314}"/>
               </a:ext>
             </a:extLst>
           </p:cNvPr>
@@ -3492,7 +3492,7 @@
           <p:cNvPr id="2" name="Title 1">
             <a:extLst xmlns:a="http://schemas.openxmlformats.org/drawingml/2006/main">
               <a:ext uri="{FF2B5EF4-FFF2-40B4-BE49-F238E27FC236}">
-                <a16:creationId xmlns:a16="http://schemas.microsoft.com/office/drawing/2014/main" id="{16687D33-4EC7-4F7A-BC11-FE04D4A937AA}"/>
+                <a16:creationId xmlns:a16="http://schemas.microsoft.com/office/drawing/2014/main" id="{45B11051-4B00-4A84-8E8C-8301CCF13FF7}"/>
               </a:ext>
             </a:extLst>
           </p:cNvPr>
@@ -3520,7 +3520,7 @@
           <p:cNvPr id="3" name="Date Placeholder 2">
             <a:extLst xmlns:a="http://schemas.openxmlformats.org/drawingml/2006/main">
               <a:ext uri="{FF2B5EF4-FFF2-40B4-BE49-F238E27FC236}">
-                <a16:creationId xmlns:a16="http://schemas.microsoft.com/office/drawing/2014/main" id="{660E4E84-5ED9-4180-AF1B-4F4CE8F35C0A}"/>
+                <a16:creationId xmlns:a16="http://schemas.microsoft.com/office/drawing/2014/main" id="{66580038-F531-4C80-9AF5-286B661DAF57}"/>
               </a:ext>
             </a:extLst>
           </p:cNvPr>
@@ -3548,7 +3548,7 @@
           <p:cNvPr id="4" name="Footer Placeholder 3">
             <a:extLst xmlns:a="http://schemas.openxmlformats.org/drawingml/2006/main">
               <a:ext uri="{FF2B5EF4-FFF2-40B4-BE49-F238E27FC236}">
-                <a16:creationId xmlns:a16="http://schemas.microsoft.com/office/drawing/2014/main" id="{6764C247-252F-4B73-B608-6E01366DA550}"/>
+                <a16:creationId xmlns:a16="http://schemas.microsoft.com/office/drawing/2014/main" id="{AF98CB20-2155-4A8D-A513-4716A8A2D2A9}"/>
               </a:ext>
             </a:extLst>
           </p:cNvPr>
@@ -3573,7 +3573,7 @@
           <p:cNvPr id="5" name="Slide Number Placeholder 4">
             <a:extLst xmlns:a="http://schemas.openxmlformats.org/drawingml/2006/main">
               <a:ext uri="{FF2B5EF4-FFF2-40B4-BE49-F238E27FC236}">
-                <a16:creationId xmlns:a16="http://schemas.microsoft.com/office/drawing/2014/main" id="{764D05A9-9D94-4DDD-9278-4F83400A1D28}"/>
+                <a16:creationId xmlns:a16="http://schemas.microsoft.com/office/drawing/2014/main" id="{3F01E39A-C8D6-41E8-91D4-602408199D6A}"/>
               </a:ext>
             </a:extLst>
           </p:cNvPr>
@@ -3618,7 +3618,7 @@
           <p:cNvPr id="2" name="Date Placeholder 1">
             <a:extLst xmlns:a="http://schemas.openxmlformats.org/drawingml/2006/main">
               <a:ext uri="{FF2B5EF4-FFF2-40B4-BE49-F238E27FC236}">
-                <a16:creationId xmlns:a16="http://schemas.microsoft.com/office/drawing/2014/main" id="{49E9801F-BB9D-47CA-BF37-ECD58512E835}"/>
+                <a16:creationId xmlns:a16="http://schemas.microsoft.com/office/drawing/2014/main" id="{7B415D65-C11B-4E90-B2BD-2562E6B2806D}"/>
               </a:ext>
             </a:extLst>
           </p:cNvPr>
@@ -3646,7 +3646,7 @@
           <p:cNvPr id="3" name="Footer Placeholder 2">
             <a:extLst xmlns:a="http://schemas.openxmlformats.org/drawingml/2006/main">
               <a:ext uri="{FF2B5EF4-FFF2-40B4-BE49-F238E27FC236}">
-                <a16:creationId xmlns:a16="http://schemas.microsoft.com/office/drawing/2014/main" id="{76DB1823-5BEE-4684-B546-8EB6E39EEDF2}"/>
+                <a16:creationId xmlns:a16="http://schemas.microsoft.com/office/drawing/2014/main" id="{25462E44-65B4-4C79-A39C-AD5B0EDC47CD}"/>
               </a:ext>
             </a:extLst>
           </p:cNvPr>
@@ -3671,7 +3671,7 @@
           <p:cNvPr id="4" name="Slide Number Placeholder 3">
             <a:extLst xmlns:a="http://schemas.openxmlformats.org/drawingml/2006/main">
               <a:ext uri="{FF2B5EF4-FFF2-40B4-BE49-F238E27FC236}">
-                <a16:creationId xmlns:a16="http://schemas.microsoft.com/office/drawing/2014/main" id="{C77D3088-1104-42E7-AC87-ECBB12704DE7}"/>
+                <a16:creationId xmlns:a16="http://schemas.microsoft.com/office/drawing/2014/main" id="{65654616-2434-459C-8B21-C24C022146C4}"/>
               </a:ext>
             </a:extLst>
           </p:cNvPr>
@@ -3716,7 +3716,7 @@
           <p:cNvPr id="2" name="Title 1">
             <a:extLst xmlns:a="http://schemas.openxmlformats.org/drawingml/2006/main">
               <a:ext uri="{FF2B5EF4-FFF2-40B4-BE49-F238E27FC236}">
-                <a16:creationId xmlns:a16="http://schemas.microsoft.com/office/drawing/2014/main" id="{A40F882A-E128-421E-9A44-9992301B7425}"/>
+                <a16:creationId xmlns:a16="http://schemas.microsoft.com/office/drawing/2014/main" id="{20CA77EA-3EA4-46AD-995F-0FB295B3A923}"/>
               </a:ext>
             </a:extLst>
           </p:cNvPr>
@@ -3754,7 +3754,7 @@
           <p:cNvPr id="3" name="Content Placeholder 2">
             <a:extLst xmlns:a="http://schemas.openxmlformats.org/drawingml/2006/main">
               <a:ext uri="{FF2B5EF4-FFF2-40B4-BE49-F238E27FC236}">
-                <a16:creationId xmlns:a16="http://schemas.microsoft.com/office/drawing/2014/main" id="{7E3B5DC1-73AF-4487-9D73-8AA5C9F8D565}"/>
+                <a16:creationId xmlns:a16="http://schemas.microsoft.com/office/drawing/2014/main" id="{1C155570-8B66-4B86-A5B5-56E9051DC819}"/>
               </a:ext>
             </a:extLst>
           </p:cNvPr>
@@ -3859,7 +3859,7 @@
           <p:cNvPr id="4" name="Text Placeholder 3">
             <a:extLst xmlns:a="http://schemas.openxmlformats.org/drawingml/2006/main">
               <a:ext uri="{FF2B5EF4-FFF2-40B4-BE49-F238E27FC236}">
-                <a16:creationId xmlns:a16="http://schemas.microsoft.com/office/drawing/2014/main" id="{666848DC-7DB2-47B0-9D8A-B6CE290EE432}"/>
+                <a16:creationId xmlns:a16="http://schemas.microsoft.com/office/drawing/2014/main" id="{CCF51576-67CB-4797-82D9-EE3AF5FE9539}"/>
               </a:ext>
             </a:extLst>
           </p:cNvPr>
@@ -3931,7 +3931,7 @@
           <p:cNvPr id="5" name="Date Placeholder 4">
             <a:extLst xmlns:a="http://schemas.openxmlformats.org/drawingml/2006/main">
               <a:ext uri="{FF2B5EF4-FFF2-40B4-BE49-F238E27FC236}">
-                <a16:creationId xmlns:a16="http://schemas.microsoft.com/office/drawing/2014/main" id="{1C9AC24B-F871-4A37-8742-BB8D1AFDB9FE}"/>
+                <a16:creationId xmlns:a16="http://schemas.microsoft.com/office/drawing/2014/main" id="{33C64480-3E72-4EFD-B3FD-51D0455CCA2C}"/>
               </a:ext>
             </a:extLst>
           </p:cNvPr>
@@ -3959,7 +3959,7 @@
           <p:cNvPr id="6" name="Footer Placeholder 5">
             <a:extLst xmlns:a="http://schemas.openxmlformats.org/drawingml/2006/main">
               <a:ext uri="{FF2B5EF4-FFF2-40B4-BE49-F238E27FC236}">
-                <a16:creationId xmlns:a16="http://schemas.microsoft.com/office/drawing/2014/main" id="{ECAB1074-C623-4AE6-9D59-906E03792C3A}"/>
+                <a16:creationId xmlns:a16="http://schemas.microsoft.com/office/drawing/2014/main" id="{A42C85F0-F709-4D84-AC9B-19BEB13A9ACE}"/>
               </a:ext>
             </a:extLst>
           </p:cNvPr>
@@ -3984,7 +3984,7 @@
           <p:cNvPr id="7" name="Slide Number Placeholder 6">
             <a:extLst xmlns:a="http://schemas.openxmlformats.org/drawingml/2006/main">
               <a:ext uri="{FF2B5EF4-FFF2-40B4-BE49-F238E27FC236}">
-                <a16:creationId xmlns:a16="http://schemas.microsoft.com/office/drawing/2014/main" id="{08792E8D-A193-4494-8C2C-D1CF952DFACA}"/>
+                <a16:creationId xmlns:a16="http://schemas.microsoft.com/office/drawing/2014/main" id="{A78F0A22-B148-44C8-9F30-A9DB92E5F93A}"/>
               </a:ext>
             </a:extLst>
           </p:cNvPr>
@@ -4029,7 +4029,7 @@
           <p:cNvPr id="2" name="Title 1">
             <a:extLst xmlns:a="http://schemas.openxmlformats.org/drawingml/2006/main">
               <a:ext uri="{FF2B5EF4-FFF2-40B4-BE49-F238E27FC236}">
-                <a16:creationId xmlns:a16="http://schemas.microsoft.com/office/drawing/2014/main" id="{ED12ECCF-57AF-4222-8993-0193C2760570}"/>
+                <a16:creationId xmlns:a16="http://schemas.microsoft.com/office/drawing/2014/main" id="{7F596D1C-21AD-4258-BE2F-6414DA8E03F7}"/>
               </a:ext>
             </a:extLst>
           </p:cNvPr>
@@ -4067,7 +4067,7 @@
           <p:cNvPr id="3" name="Picture Placeholder 2">
             <a:extLst xmlns:a="http://schemas.openxmlformats.org/drawingml/2006/main">
               <a:ext uri="{FF2B5EF4-FFF2-40B4-BE49-F238E27FC236}">
-                <a16:creationId xmlns:a16="http://schemas.microsoft.com/office/drawing/2014/main" id="{0692F047-EF6B-49C5-B97F-F50F0AD6DDC8}"/>
+                <a16:creationId xmlns:a16="http://schemas.microsoft.com/office/drawing/2014/main" id="{BAB2646F-02B2-4BE4-B095-B4869D8F38AF}"/>
               </a:ext>
             </a:extLst>
           </p:cNvPr>
@@ -4134,7 +4134,7 @@
           <p:cNvPr id="4" name="Text Placeholder 3">
             <a:extLst xmlns:a="http://schemas.openxmlformats.org/drawingml/2006/main">
               <a:ext uri="{FF2B5EF4-FFF2-40B4-BE49-F238E27FC236}">
-                <a16:creationId xmlns:a16="http://schemas.microsoft.com/office/drawing/2014/main" id="{4B63FF5B-3A74-413A-AD67-02B50B55F67C}"/>
+                <a16:creationId xmlns:a16="http://schemas.microsoft.com/office/drawing/2014/main" id="{64953EE6-E8E6-469D-B7EF-CBB291FD70B3}"/>
               </a:ext>
             </a:extLst>
           </p:cNvPr>
@@ -4206,7 +4206,7 @@
           <p:cNvPr id="5" name="Date Placeholder 4">
             <a:extLst xmlns:a="http://schemas.openxmlformats.org/drawingml/2006/main">
               <a:ext uri="{FF2B5EF4-FFF2-40B4-BE49-F238E27FC236}">
-                <a16:creationId xmlns:a16="http://schemas.microsoft.com/office/drawing/2014/main" id="{894E0FAC-2B57-4349-9EF1-8CBF8D86D397}"/>
+                <a16:creationId xmlns:a16="http://schemas.microsoft.com/office/drawing/2014/main" id="{92A3EAE5-C48B-4858-88D9-D8035E8F30C1}"/>
               </a:ext>
             </a:extLst>
           </p:cNvPr>
@@ -4234,7 +4234,7 @@
           <p:cNvPr id="6" name="Footer Placeholder 5">
             <a:extLst xmlns:a="http://schemas.openxmlformats.org/drawingml/2006/main">
               <a:ext uri="{FF2B5EF4-FFF2-40B4-BE49-F238E27FC236}">
-                <a16:creationId xmlns:a16="http://schemas.microsoft.com/office/drawing/2014/main" id="{C1A8E8B5-225F-4B32-AE94-437D71D8688C}"/>
+                <a16:creationId xmlns:a16="http://schemas.microsoft.com/office/drawing/2014/main" id="{9C9A7009-E3FA-4330-BFA4-60E531C70F0B}"/>
               </a:ext>
             </a:extLst>
           </p:cNvPr>
@@ -4259,7 +4259,7 @@
           <p:cNvPr id="7" name="Slide Number Placeholder 6">
             <a:extLst xmlns:a="http://schemas.openxmlformats.org/drawingml/2006/main">
               <a:ext uri="{FF2B5EF4-FFF2-40B4-BE49-F238E27FC236}">
-                <a16:creationId xmlns:a16="http://schemas.microsoft.com/office/drawing/2014/main" id="{3F7B145C-C6D6-486B-81ED-C96BF6FB5D85}"/>
+                <a16:creationId xmlns:a16="http://schemas.microsoft.com/office/drawing/2014/main" id="{C12A5262-2ADD-4F2E-8F59-BB8FA878E29D}"/>
               </a:ext>
             </a:extLst>
           </p:cNvPr>
@@ -4309,7 +4309,7 @@
           <p:cNvPr id="2" name="Title Placeholder 1">
             <a:extLst xmlns:a="http://schemas.openxmlformats.org/drawingml/2006/main">
               <a:ext uri="{FF2B5EF4-FFF2-40B4-BE49-F238E27FC236}">
-                <a16:creationId xmlns:a16="http://schemas.microsoft.com/office/drawing/2014/main" id="{07632DBB-E786-446C-9EBF-418F78778C9D}"/>
+                <a16:creationId xmlns:a16="http://schemas.microsoft.com/office/drawing/2014/main" id="{A3C6A25A-B8E5-468E-B742-A65AB27A5FC7}"/>
               </a:ext>
             </a:extLst>
           </p:cNvPr>
@@ -4347,7 +4347,7 @@
           <p:cNvPr id="3" name="Text Placeholder 2">
             <a:extLst xmlns:a="http://schemas.openxmlformats.org/drawingml/2006/main">
               <a:ext uri="{FF2B5EF4-FFF2-40B4-BE49-F238E27FC236}">
-                <a16:creationId xmlns:a16="http://schemas.microsoft.com/office/drawing/2014/main" id="{8A1C53DD-7BC3-4246-BEDA-A1A31D35888C}"/>
+                <a16:creationId xmlns:a16="http://schemas.microsoft.com/office/drawing/2014/main" id="{104D107C-A998-4A33-9243-4DEBC6844D0E}"/>
               </a:ext>
             </a:extLst>
           </p:cNvPr>
@@ -4420,7 +4420,7 @@
           <p:cNvPr id="4" name="Date Placeholder 3">
             <a:extLst xmlns:a="http://schemas.openxmlformats.org/drawingml/2006/main">
               <a:ext uri="{FF2B5EF4-FFF2-40B4-BE49-F238E27FC236}">
-                <a16:creationId xmlns:a16="http://schemas.microsoft.com/office/drawing/2014/main" id="{14940797-FF52-4AA4-BD61-472A81FB936D}"/>
+                <a16:creationId xmlns:a16="http://schemas.microsoft.com/office/drawing/2014/main" id="{8AAA794E-2403-43D9-8758-10ED05BBB76E}"/>
               </a:ext>
             </a:extLst>
           </p:cNvPr>
@@ -4467,7 +4467,7 @@
           <p:cNvPr id="5" name="Footer Placeholder 4">
             <a:extLst xmlns:a="http://schemas.openxmlformats.org/drawingml/2006/main">
               <a:ext uri="{FF2B5EF4-FFF2-40B4-BE49-F238E27FC236}">
-                <a16:creationId xmlns:a16="http://schemas.microsoft.com/office/drawing/2014/main" id="{C4440656-AA96-4ECD-9CA7-86AC6ABDD56C}"/>
+                <a16:creationId xmlns:a16="http://schemas.microsoft.com/office/drawing/2014/main" id="{B0AFBE03-6F71-41B8-B971-3E3B7D61C144}"/>
               </a:ext>
             </a:extLst>
           </p:cNvPr>
@@ -4511,7 +4511,7 @@
           <p:cNvPr id="6" name="Slide Number Placeholder 5">
             <a:extLst xmlns:a="http://schemas.openxmlformats.org/drawingml/2006/main">
               <a:ext uri="{FF2B5EF4-FFF2-40B4-BE49-F238E27FC236}">
-                <a16:creationId xmlns:a16="http://schemas.microsoft.com/office/drawing/2014/main" id="{0FC8353A-F823-422F-BA6B-B7ADA30F783E}"/>
+                <a16:creationId xmlns:a16="http://schemas.microsoft.com/office/drawing/2014/main" id="{868DAED3-7EE6-42C4-B663-2671EE7903D8}"/>
               </a:ext>
             </a:extLst>
           </p:cNvPr>
@@ -4557,17 +4557,17 @@
   </p:cSld>
   <p:clrMap bg1="lt1" tx1="dk1" bg2="lt2" tx2="dk2" accent1="accent1" accent2="accent2" accent3="accent3" accent4="accent4" accent5="accent5" accent6="accent6" hlink="hlink" folHlink="folHlink"/>
   <p:sldLayoutIdLst>
-    <p:sldLayoutId xmlns:r="http://schemas.openxmlformats.org/officeDocument/2006/relationships" id="2147483649" r:id="R4565d13f48ee4a1b"/>
-    <p:sldLayoutId xmlns:r="http://schemas.openxmlformats.org/officeDocument/2006/relationships" id="2147483650" r:id="Rc9e6239ceda14da2"/>
-    <p:sldLayoutId xmlns:r="http://schemas.openxmlformats.org/officeDocument/2006/relationships" id="2147483651" r:id="Rdcbb042836734161"/>
-    <p:sldLayoutId xmlns:r="http://schemas.openxmlformats.org/officeDocument/2006/relationships" id="2147483652" r:id="R9bd003323cbf4ba7"/>
-    <p:sldLayoutId xmlns:r="http://schemas.openxmlformats.org/officeDocument/2006/relationships" id="2147483653" r:id="R5167636997394d49"/>
-    <p:sldLayoutId xmlns:r="http://schemas.openxmlformats.org/officeDocument/2006/relationships" id="2147483654" r:id="R632962e45a034f54"/>
-    <p:sldLayoutId xmlns:r="http://schemas.openxmlformats.org/officeDocument/2006/relationships" id="2147483655" r:id="R768d31555de34ae6"/>
-    <p:sldLayoutId xmlns:r="http://schemas.openxmlformats.org/officeDocument/2006/relationships" id="2147483656" r:id="Rd69aa002bd184511"/>
-    <p:sldLayoutId xmlns:r="http://schemas.openxmlformats.org/officeDocument/2006/relationships" id="2147483657" r:id="Rffc36d79f2b24373"/>
-    <p:sldLayoutId xmlns:r="http://schemas.openxmlformats.org/officeDocument/2006/relationships" id="2147483658" r:id="R27644c7f6d464d1e"/>
-    <p:sldLayoutId xmlns:r="http://schemas.openxmlformats.org/officeDocument/2006/relationships" id="2147483659" r:id="R78be9c4692994101"/>
+    <p:sldLayoutId xmlns:r="http://schemas.openxmlformats.org/officeDocument/2006/relationships" id="2147483649" r:id="R47b4fb8c496d46fa"/>
+    <p:sldLayoutId xmlns:r="http://schemas.openxmlformats.org/officeDocument/2006/relationships" id="2147483650" r:id="R1a69aab7c27a45a2"/>
+    <p:sldLayoutId xmlns:r="http://schemas.openxmlformats.org/officeDocument/2006/relationships" id="2147483651" r:id="R41b325aeea9547e1"/>
+    <p:sldLayoutId xmlns:r="http://schemas.openxmlformats.org/officeDocument/2006/relationships" id="2147483652" r:id="Re156f2cc6e3c4a79"/>
+    <p:sldLayoutId xmlns:r="http://schemas.openxmlformats.org/officeDocument/2006/relationships" id="2147483653" r:id="R87c065f581184828"/>
+    <p:sldLayoutId xmlns:r="http://schemas.openxmlformats.org/officeDocument/2006/relationships" id="2147483654" r:id="R18e30b0016184991"/>
+    <p:sldLayoutId xmlns:r="http://schemas.openxmlformats.org/officeDocument/2006/relationships" id="2147483655" r:id="Ra80d7caaca624e9e"/>
+    <p:sldLayoutId xmlns:r="http://schemas.openxmlformats.org/officeDocument/2006/relationships" id="2147483656" r:id="R57098e92571a4439"/>
+    <p:sldLayoutId xmlns:r="http://schemas.openxmlformats.org/officeDocument/2006/relationships" id="2147483657" r:id="R15b1ff207d4b4fbd"/>
+    <p:sldLayoutId xmlns:r="http://schemas.openxmlformats.org/officeDocument/2006/relationships" id="2147483658" r:id="Rf9b3543ad5ce4db3"/>
+    <p:sldLayoutId xmlns:r="http://schemas.openxmlformats.org/officeDocument/2006/relationships" id="2147483659" r:id="Ra70a3edaea25473a"/>
   </p:sldLayoutIdLst>
   <p:txStyles>
     <p:titleStyle>
@@ -5113,7 +5113,7 @@
           <p:cNvPr id="2" name="Rectangle 1">
             <a:extLst xmlns:a="http://schemas.openxmlformats.org/drawingml/2006/main">
               <a:ext uri="{FF2B5EF4-FFF2-40B4-BE49-F238E27FC236}">
-                <a16:creationId xmlns:a16="http://schemas.microsoft.com/office/drawing/2014/main" id="{94972ECC-8D96-406E-BED3-FB8ECE91ED64}"/>
+                <a16:creationId xmlns:a16="http://schemas.microsoft.com/office/drawing/2014/main" id="{0886EE82-45A4-4983-9199-DEA0F3922C39}"/>
               </a:ext>
             </a:extLst>
           </p:cNvPr>
@@ -5166,7 +5166,7 @@
           <p:cNvPr id="3" name="Rectangle 2">
             <a:extLst xmlns:a="http://schemas.openxmlformats.org/drawingml/2006/main">
               <a:ext uri="{FF2B5EF4-FFF2-40B4-BE49-F238E27FC236}">
-                <a16:creationId xmlns:a16="http://schemas.microsoft.com/office/drawing/2014/main" id="{BB35CF75-8B12-4CDE-8337-5CF595E9FC5E}"/>
+                <a16:creationId xmlns:a16="http://schemas.microsoft.com/office/drawing/2014/main" id="{9FA28B9E-1103-44B1-86E6-9B916E78B498}"/>
               </a:ext>
             </a:extLst>
           </p:cNvPr>
@@ -5219,7 +5219,7 @@
           <p:cNvPr id="4" name="TextBox 3">
             <a:extLst xmlns:a="http://schemas.openxmlformats.org/drawingml/2006/main">
               <a:ext uri="{FF2B5EF4-FFF2-40B4-BE49-F238E27FC236}">
-                <a16:creationId xmlns:a16="http://schemas.microsoft.com/office/drawing/2014/main" id="{3729B42E-5DD1-4308-B591-8709666E68F5}"/>
+                <a16:creationId xmlns:a16="http://schemas.microsoft.com/office/drawing/2014/main" id="{5C8535DD-7299-40E5-BA3E-135A62ACD5A3}"/>
               </a:ext>
             </a:extLst>
           </p:cNvPr>
@@ -5321,7 +5321,7 @@
     </p:spTree>
     <p:extLst>
       <p:ext uri="{BB962C8B-B14F-4D97-AF65-F5344CB8AC3E}">
-        <p14:creationId xmlns:p14="http://schemas.microsoft.com/office/powerpoint/2010/main" val="1040924654"/>
+        <p14:creationId xmlns:p14="http://schemas.microsoft.com/office/powerpoint/2010/main" val="1462753312"/>
       </p:ext>
     </p:extLst>
   </p:cSld>
@@ -5345,7 +5345,7 @@
           <p:cNvPr id="2" name="Rectangle 1">
             <a:extLst xmlns:a="http://schemas.openxmlformats.org/drawingml/2006/main">
               <a:ext uri="{FF2B5EF4-FFF2-40B4-BE49-F238E27FC236}">
-                <a16:creationId xmlns:a16="http://schemas.microsoft.com/office/drawing/2014/main" id="{B8AC6599-E5B7-4FD7-BA3E-09EE362EA2EA}"/>
+                <a16:creationId xmlns:a16="http://schemas.microsoft.com/office/drawing/2014/main" id="{0F7C6F67-F026-48BF-85C0-E0D6EFB94D44}"/>
               </a:ext>
             </a:extLst>
           </p:cNvPr>
@@ -5398,7 +5398,7 @@
           <p:cNvPr id="3" name="Rectangle 2">
             <a:extLst xmlns:a="http://schemas.openxmlformats.org/drawingml/2006/main">
               <a:ext uri="{FF2B5EF4-FFF2-40B4-BE49-F238E27FC236}">
-                <a16:creationId xmlns:a16="http://schemas.microsoft.com/office/drawing/2014/main" id="{C8D149B4-7478-4029-94ED-0D34DCA7F019}"/>
+                <a16:creationId xmlns:a16="http://schemas.microsoft.com/office/drawing/2014/main" id="{57328AED-BFC4-40EE-A461-D4411B947D75}"/>
               </a:ext>
             </a:extLst>
           </p:cNvPr>
@@ -5451,7 +5451,7 @@
           <p:cNvPr id="4" name="Rectangle 3">
             <a:extLst xmlns:a="http://schemas.openxmlformats.org/drawingml/2006/main">
               <a:ext uri="{FF2B5EF4-FFF2-40B4-BE49-F238E27FC236}">
-                <a16:creationId xmlns:a16="http://schemas.microsoft.com/office/drawing/2014/main" id="{3094C26B-D363-4C53-A77E-EF8220A68ED6}"/>
+                <a16:creationId xmlns:a16="http://schemas.microsoft.com/office/drawing/2014/main" id="{BD342EF1-98D4-457E-8742-ADF0861CF133}"/>
               </a:ext>
             </a:extLst>
           </p:cNvPr>
@@ -5504,7 +5504,7 @@
           <p:cNvPr id="5" name="TextBox 4">
             <a:extLst xmlns:a="http://schemas.openxmlformats.org/drawingml/2006/main">
               <a:ext uri="{FF2B5EF4-FFF2-40B4-BE49-F238E27FC236}">
-                <a16:creationId xmlns:a16="http://schemas.microsoft.com/office/drawing/2014/main" id="{0ED3F2B2-1F8C-4713-AC91-02CFACE070F1}"/>
+                <a16:creationId xmlns:a16="http://schemas.microsoft.com/office/drawing/2014/main" id="{965B098A-0C59-4895-AA4E-F423A4913B83}"/>
               </a:ext>
             </a:extLst>
           </p:cNvPr>
@@ -5567,7 +5567,7 @@
           <p:cNvPr id="6" name="Rounded Rectangle 5">
             <a:extLst xmlns:a="http://schemas.openxmlformats.org/drawingml/2006/main">
               <a:ext uri="{FF2B5EF4-FFF2-40B4-BE49-F238E27FC236}">
-                <a16:creationId xmlns:a16="http://schemas.microsoft.com/office/drawing/2014/main" id="{53407F08-30B5-442E-AA74-F11C69A8FA2F}"/>
+                <a16:creationId xmlns:a16="http://schemas.microsoft.com/office/drawing/2014/main" id="{FB86FB8E-F6E2-4E8D-931B-DFFC39E70A6C}"/>
               </a:ext>
             </a:extLst>
           </p:cNvPr>
@@ -5622,7 +5622,7 @@
           <p:cNvPr id="7" name="TextBox 6">
             <a:extLst xmlns:a="http://schemas.openxmlformats.org/drawingml/2006/main">
               <a:ext uri="{FF2B5EF4-FFF2-40B4-BE49-F238E27FC236}">
-                <a16:creationId xmlns:a16="http://schemas.microsoft.com/office/drawing/2014/main" id="{7518102F-8B9E-452F-8958-6117535998FD}"/>
+                <a16:creationId xmlns:a16="http://schemas.microsoft.com/office/drawing/2014/main" id="{B23A4352-DE02-47BF-AC7B-E0281C48ED3E}"/>
               </a:ext>
             </a:extLst>
           </p:cNvPr>
@@ -5726,7 +5726,7 @@
           <p:cNvPr id="8" name="Rounded Rectangle 7">
             <a:extLst xmlns:a="http://schemas.openxmlformats.org/drawingml/2006/main">
               <a:ext uri="{FF2B5EF4-FFF2-40B4-BE49-F238E27FC236}">
-                <a16:creationId xmlns:a16="http://schemas.microsoft.com/office/drawing/2014/main" id="{8F4D4A30-88DD-42F7-87C5-59805DBA0117}"/>
+                <a16:creationId xmlns:a16="http://schemas.microsoft.com/office/drawing/2014/main" id="{A541F922-8E7D-46DE-BD13-62DD8AFCCC6B}"/>
               </a:ext>
             </a:extLst>
           </p:cNvPr>
@@ -5781,7 +5781,7 @@
           <p:cNvPr id="9" name="TextBox 8">
             <a:extLst xmlns:a="http://schemas.openxmlformats.org/drawingml/2006/main">
               <a:ext uri="{FF2B5EF4-FFF2-40B4-BE49-F238E27FC236}">
-                <a16:creationId xmlns:a16="http://schemas.microsoft.com/office/drawing/2014/main" id="{0A9DAE0F-F635-4354-BB45-D29E1A812089}"/>
+                <a16:creationId xmlns:a16="http://schemas.microsoft.com/office/drawing/2014/main" id="{C4FD11EC-B03C-49DB-BAFE-06045288FF04}"/>
               </a:ext>
             </a:extLst>
           </p:cNvPr>
@@ -5866,7 +5866,7 @@
           <p:cNvPr id="10" name="Rounded Rectangle 9">
             <a:extLst xmlns:a="http://schemas.openxmlformats.org/drawingml/2006/main">
               <a:ext uri="{FF2B5EF4-FFF2-40B4-BE49-F238E27FC236}">
-                <a16:creationId xmlns:a16="http://schemas.microsoft.com/office/drawing/2014/main" id="{16F0156A-8DE7-4165-BD62-6FA87FF6F485}"/>
+                <a16:creationId xmlns:a16="http://schemas.microsoft.com/office/drawing/2014/main" id="{07546CD6-432F-4412-95BE-23ACA418ED11}"/>
               </a:ext>
             </a:extLst>
           </p:cNvPr>
@@ -5921,7 +5921,7 @@
           <p:cNvPr id="11" name="TextBox 10">
             <a:extLst xmlns:a="http://schemas.openxmlformats.org/drawingml/2006/main">
               <a:ext uri="{FF2B5EF4-FFF2-40B4-BE49-F238E27FC236}">
-                <a16:creationId xmlns:a16="http://schemas.microsoft.com/office/drawing/2014/main" id="{A0D62AAD-3AF5-4B2C-ACBE-F16C98B0D304}"/>
+                <a16:creationId xmlns:a16="http://schemas.microsoft.com/office/drawing/2014/main" id="{4646304A-F943-4239-982D-364747E1A23A}"/>
               </a:ext>
             </a:extLst>
           </p:cNvPr>
@@ -6023,7 +6023,7 @@
     </p:spTree>
     <p:extLst>
       <p:ext uri="{BB962C8B-B14F-4D97-AF65-F5344CB8AC3E}">
-        <p14:creationId xmlns:p14="http://schemas.microsoft.com/office/powerpoint/2010/main" val="334609424"/>
+        <p14:creationId xmlns:p14="http://schemas.microsoft.com/office/powerpoint/2010/main" val="651667508"/>
       </p:ext>
     </p:extLst>
   </p:cSld>
@@ -6047,7 +6047,7 @@
           <p:cNvPr id="2" name="Rectangle 1">
             <a:extLst xmlns:a="http://schemas.openxmlformats.org/drawingml/2006/main">
               <a:ext uri="{FF2B5EF4-FFF2-40B4-BE49-F238E27FC236}">
-                <a16:creationId xmlns:a16="http://schemas.microsoft.com/office/drawing/2014/main" id="{E8244384-05F1-4975-B622-1D031A166322}"/>
+                <a16:creationId xmlns:a16="http://schemas.microsoft.com/office/drawing/2014/main" id="{1C130BB4-F69F-4BCD-8319-FFFA9E1B5CF2}"/>
               </a:ext>
             </a:extLst>
           </p:cNvPr>
@@ -6100,7 +6100,7 @@
           <p:cNvPr id="3" name="Rectangle 2">
             <a:extLst xmlns:a="http://schemas.openxmlformats.org/drawingml/2006/main">
               <a:ext uri="{FF2B5EF4-FFF2-40B4-BE49-F238E27FC236}">
-                <a16:creationId xmlns:a16="http://schemas.microsoft.com/office/drawing/2014/main" id="{A8CF2814-ED9B-4EE3-A9D6-F0E4A2849FEA}"/>
+                <a16:creationId xmlns:a16="http://schemas.microsoft.com/office/drawing/2014/main" id="{5E6AEA8B-AB2D-4266-BC97-59F985F741D6}"/>
               </a:ext>
             </a:extLst>
           </p:cNvPr>
@@ -6153,7 +6153,7 @@
           <p:cNvPr id="4" name="Rectangle 3">
             <a:extLst xmlns:a="http://schemas.openxmlformats.org/drawingml/2006/main">
               <a:ext uri="{FF2B5EF4-FFF2-40B4-BE49-F238E27FC236}">
-                <a16:creationId xmlns:a16="http://schemas.microsoft.com/office/drawing/2014/main" id="{B77B1164-EFB4-4603-A14B-285FE2DAA0ED}"/>
+                <a16:creationId xmlns:a16="http://schemas.microsoft.com/office/drawing/2014/main" id="{792E7680-FBDC-4D35-A901-7648E31FF190}"/>
               </a:ext>
             </a:extLst>
           </p:cNvPr>
@@ -6206,7 +6206,7 @@
           <p:cNvPr id="5" name="TextBox 4">
             <a:extLst xmlns:a="http://schemas.openxmlformats.org/drawingml/2006/main">
               <a:ext uri="{FF2B5EF4-FFF2-40B4-BE49-F238E27FC236}">
-                <a16:creationId xmlns:a16="http://schemas.microsoft.com/office/drawing/2014/main" id="{EA8BF427-F8A6-4F83-9696-C62605B06E31}"/>
+                <a16:creationId xmlns:a16="http://schemas.microsoft.com/office/drawing/2014/main" id="{08C4DB09-E621-4AC8-9934-DE93766AF057}"/>
               </a:ext>
             </a:extLst>
           </p:cNvPr>
@@ -6269,7 +6269,7 @@
           <p:cNvPr id="6" name="Rounded Rectangle 5">
             <a:extLst xmlns:a="http://schemas.openxmlformats.org/drawingml/2006/main">
               <a:ext uri="{FF2B5EF4-FFF2-40B4-BE49-F238E27FC236}">
-                <a16:creationId xmlns:a16="http://schemas.microsoft.com/office/drawing/2014/main" id="{FBB352AE-72F0-4124-AA94-597EF827B0A5}"/>
+                <a16:creationId xmlns:a16="http://schemas.microsoft.com/office/drawing/2014/main" id="{FED1B884-02E8-4292-B797-2546813E6940}"/>
               </a:ext>
             </a:extLst>
           </p:cNvPr>
@@ -6324,7 +6324,7 @@
           <p:cNvPr id="7" name="TextBox 6">
             <a:extLst xmlns:a="http://schemas.openxmlformats.org/drawingml/2006/main">
               <a:ext uri="{FF2B5EF4-FFF2-40B4-BE49-F238E27FC236}">
-                <a16:creationId xmlns:a16="http://schemas.microsoft.com/office/drawing/2014/main" id="{35525C99-6E69-46DC-BFAB-1C465A3702BD}"/>
+                <a16:creationId xmlns:a16="http://schemas.microsoft.com/office/drawing/2014/main" id="{8F282CFE-C974-4F83-9F15-8F5AFAA3C21B}"/>
               </a:ext>
             </a:extLst>
           </p:cNvPr>
@@ -6523,7 +6523,7 @@
           <p:cNvPr id="8" name="Rounded Rectangle 7">
             <a:extLst xmlns:a="http://schemas.openxmlformats.org/drawingml/2006/main">
               <a:ext uri="{FF2B5EF4-FFF2-40B4-BE49-F238E27FC236}">
-                <a16:creationId xmlns:a16="http://schemas.microsoft.com/office/drawing/2014/main" id="{E9D5F3A6-0510-436B-A7D0-F5CC9589E47F}"/>
+                <a16:creationId xmlns:a16="http://schemas.microsoft.com/office/drawing/2014/main" id="{2DDD0174-2FCA-419F-ACA5-25619BA166F4}"/>
               </a:ext>
             </a:extLst>
           </p:cNvPr>
@@ -6578,7 +6578,7 @@
           <p:cNvPr id="9" name="TextBox 8">
             <a:extLst xmlns:a="http://schemas.openxmlformats.org/drawingml/2006/main">
               <a:ext uri="{FF2B5EF4-FFF2-40B4-BE49-F238E27FC236}">
-                <a16:creationId xmlns:a16="http://schemas.microsoft.com/office/drawing/2014/main" id="{17E2FB62-4FBB-432C-9D63-2040E107228D}"/>
+                <a16:creationId xmlns:a16="http://schemas.microsoft.com/office/drawing/2014/main" id="{72A72586-FDE7-4393-88B8-2900FC0AF9FE}"/>
               </a:ext>
             </a:extLst>
           </p:cNvPr>
@@ -6699,7 +6699,7 @@
     </p:spTree>
     <p:extLst>
       <p:ext uri="{BB962C8B-B14F-4D97-AF65-F5344CB8AC3E}">
-        <p14:creationId xmlns:p14="http://schemas.microsoft.com/office/powerpoint/2010/main" val="1240471476"/>
+        <p14:creationId xmlns:p14="http://schemas.microsoft.com/office/powerpoint/2010/main" val="1020488870"/>
       </p:ext>
     </p:extLst>
   </p:cSld>
@@ -6723,7 +6723,7 @@
           <p:cNvPr id="2" name="Rectangle 1">
             <a:extLst xmlns:a="http://schemas.openxmlformats.org/drawingml/2006/main">
               <a:ext uri="{FF2B5EF4-FFF2-40B4-BE49-F238E27FC236}">
-                <a16:creationId xmlns:a16="http://schemas.microsoft.com/office/drawing/2014/main" id="{C84309B3-21C6-428C-B2F0-8A0D7E535FE1}"/>
+                <a16:creationId xmlns:a16="http://schemas.microsoft.com/office/drawing/2014/main" id="{71E90448-25A4-48B7-9526-10752A977EB0}"/>
               </a:ext>
             </a:extLst>
           </p:cNvPr>
@@ -6776,7 +6776,7 @@
           <p:cNvPr id="3" name="Rectangle 2">
             <a:extLst xmlns:a="http://schemas.openxmlformats.org/drawingml/2006/main">
               <a:ext uri="{FF2B5EF4-FFF2-40B4-BE49-F238E27FC236}">
-                <a16:creationId xmlns:a16="http://schemas.microsoft.com/office/drawing/2014/main" id="{B79332A0-CABF-4F1B-B4C8-C0FEE56B690A}"/>
+                <a16:creationId xmlns:a16="http://schemas.microsoft.com/office/drawing/2014/main" id="{4132F63D-F31C-4361-8877-991AE6884583}"/>
               </a:ext>
             </a:extLst>
           </p:cNvPr>
@@ -6829,7 +6829,7 @@
           <p:cNvPr id="4" name="TextBox 3">
             <a:extLst xmlns:a="http://schemas.openxmlformats.org/drawingml/2006/main">
               <a:ext uri="{FF2B5EF4-FFF2-40B4-BE49-F238E27FC236}">
-                <a16:creationId xmlns:a16="http://schemas.microsoft.com/office/drawing/2014/main" id="{E9A65058-E323-487D-B60B-8C4BC6F47BEB}"/>
+                <a16:creationId xmlns:a16="http://schemas.microsoft.com/office/drawing/2014/main" id="{0551C22C-55A8-42F7-9140-EB097709574E}"/>
               </a:ext>
             </a:extLst>
           </p:cNvPr>
@@ -7007,7 +7007,7 @@
     </p:spTree>
     <p:extLst>
       <p:ext uri="{BB962C8B-B14F-4D97-AF65-F5344CB8AC3E}">
-        <p14:creationId xmlns:p14="http://schemas.microsoft.com/office/powerpoint/2010/main" val="777851880"/>
+        <p14:creationId xmlns:p14="http://schemas.microsoft.com/office/powerpoint/2010/main" val="78089277"/>
       </p:ext>
     </p:extLst>
   </p:cSld>
@@ -7031,7 +7031,7 @@
           <p:cNvPr id="2" name="Rectangle 1">
             <a:extLst xmlns:a="http://schemas.openxmlformats.org/drawingml/2006/main">
               <a:ext uri="{FF2B5EF4-FFF2-40B4-BE49-F238E27FC236}">
-                <a16:creationId xmlns:a16="http://schemas.microsoft.com/office/drawing/2014/main" id="{7412DFA1-2765-42BE-B778-76F6FAF4229E}"/>
+                <a16:creationId xmlns:a16="http://schemas.microsoft.com/office/drawing/2014/main" id="{9B0CA5D7-542C-4DE9-B31F-B8E6083EF97E}"/>
               </a:ext>
             </a:extLst>
           </p:cNvPr>
@@ -7084,7 +7084,7 @@
           <p:cNvPr id="3" name="Rectangle 2">
             <a:extLst xmlns:a="http://schemas.openxmlformats.org/drawingml/2006/main">
               <a:ext uri="{FF2B5EF4-FFF2-40B4-BE49-F238E27FC236}">
-                <a16:creationId xmlns:a16="http://schemas.microsoft.com/office/drawing/2014/main" id="{617DBD47-4D8E-49E1-B399-CFADD7B131EA}"/>
+                <a16:creationId xmlns:a16="http://schemas.microsoft.com/office/drawing/2014/main" id="{261E1C52-E9FC-4421-B317-1A3F5B4FC275}"/>
               </a:ext>
             </a:extLst>
           </p:cNvPr>
@@ -7137,7 +7137,7 @@
           <p:cNvPr id="4" name="Rectangle 3">
             <a:extLst xmlns:a="http://schemas.openxmlformats.org/drawingml/2006/main">
               <a:ext uri="{FF2B5EF4-FFF2-40B4-BE49-F238E27FC236}">
-                <a16:creationId xmlns:a16="http://schemas.microsoft.com/office/drawing/2014/main" id="{FA0876B4-ED19-4725-B157-CFBBDCB5EC99}"/>
+                <a16:creationId xmlns:a16="http://schemas.microsoft.com/office/drawing/2014/main" id="{9847C858-56D2-46F3-B933-917AFF6915A7}"/>
               </a:ext>
             </a:extLst>
           </p:cNvPr>
@@ -7190,7 +7190,7 @@
           <p:cNvPr id="5" name="TextBox 4">
             <a:extLst xmlns:a="http://schemas.openxmlformats.org/drawingml/2006/main">
               <a:ext uri="{FF2B5EF4-FFF2-40B4-BE49-F238E27FC236}">
-                <a16:creationId xmlns:a16="http://schemas.microsoft.com/office/drawing/2014/main" id="{342FFDE2-9CE1-4F0B-A532-E73124F594B2}"/>
+                <a16:creationId xmlns:a16="http://schemas.microsoft.com/office/drawing/2014/main" id="{FEFAF48C-D2C0-4A31-AD0C-24EC7FA1EA43}"/>
               </a:ext>
             </a:extLst>
           </p:cNvPr>
@@ -7253,7 +7253,7 @@
           <p:cNvPr id="6" name="Rounded Rectangle 5">
             <a:extLst xmlns:a="http://schemas.openxmlformats.org/drawingml/2006/main">
               <a:ext uri="{FF2B5EF4-FFF2-40B4-BE49-F238E27FC236}">
-                <a16:creationId xmlns:a16="http://schemas.microsoft.com/office/drawing/2014/main" id="{BEBADB18-E2ED-4395-A54D-3D1B4029022C}"/>
+                <a16:creationId xmlns:a16="http://schemas.microsoft.com/office/drawing/2014/main" id="{EFA569F6-0560-462B-8B51-0D91C4CCFF2D}"/>
               </a:ext>
             </a:extLst>
           </p:cNvPr>
@@ -7308,7 +7308,7 @@
           <p:cNvPr id="7" name="TextBox 6">
             <a:extLst xmlns:a="http://schemas.openxmlformats.org/drawingml/2006/main">
               <a:ext uri="{FF2B5EF4-FFF2-40B4-BE49-F238E27FC236}">
-                <a16:creationId xmlns:a16="http://schemas.microsoft.com/office/drawing/2014/main" id="{797D58D4-F880-4AAE-B2A4-66F1FB6BC030}"/>
+                <a16:creationId xmlns:a16="http://schemas.microsoft.com/office/drawing/2014/main" id="{6CEBAF5B-B908-42ED-B317-96975C612BE7}"/>
               </a:ext>
             </a:extLst>
           </p:cNvPr>
@@ -7412,7 +7412,7 @@
           <p:cNvPr id="8" name="Rounded Rectangle 7">
             <a:extLst xmlns:a="http://schemas.openxmlformats.org/drawingml/2006/main">
               <a:ext uri="{FF2B5EF4-FFF2-40B4-BE49-F238E27FC236}">
-                <a16:creationId xmlns:a16="http://schemas.microsoft.com/office/drawing/2014/main" id="{6B8A4CE7-F612-4A21-BEA7-9237D6E15ACF}"/>
+                <a16:creationId xmlns:a16="http://schemas.microsoft.com/office/drawing/2014/main" id="{9B95DAB5-B861-456C-9191-1CF4CE41A445}"/>
               </a:ext>
             </a:extLst>
           </p:cNvPr>
@@ -7467,7 +7467,7 @@
           <p:cNvPr id="9" name="TextBox 8">
             <a:extLst xmlns:a="http://schemas.openxmlformats.org/drawingml/2006/main">
               <a:ext uri="{FF2B5EF4-FFF2-40B4-BE49-F238E27FC236}">
-                <a16:creationId xmlns:a16="http://schemas.microsoft.com/office/drawing/2014/main" id="{32D6D046-A3AD-4C17-969D-E48C6F25E07D}"/>
+                <a16:creationId xmlns:a16="http://schemas.microsoft.com/office/drawing/2014/main" id="{7764FBC2-7457-463F-AACC-F06CA354FCD2}"/>
               </a:ext>
             </a:extLst>
           </p:cNvPr>
@@ -7571,7 +7571,7 @@
           <p:cNvPr id="10" name="Rounded Rectangle 9">
             <a:extLst xmlns:a="http://schemas.openxmlformats.org/drawingml/2006/main">
               <a:ext uri="{FF2B5EF4-FFF2-40B4-BE49-F238E27FC236}">
-                <a16:creationId xmlns:a16="http://schemas.microsoft.com/office/drawing/2014/main" id="{BA5A05FB-1315-405C-B265-D0CE85F471BC}"/>
+                <a16:creationId xmlns:a16="http://schemas.microsoft.com/office/drawing/2014/main" id="{C6816087-BDF2-4F21-A57E-E037F3CF7C2C}"/>
               </a:ext>
             </a:extLst>
           </p:cNvPr>
@@ -7626,7 +7626,7 @@
           <p:cNvPr id="11" name="TextBox 10">
             <a:extLst xmlns:a="http://schemas.openxmlformats.org/drawingml/2006/main">
               <a:ext uri="{FF2B5EF4-FFF2-40B4-BE49-F238E27FC236}">
-                <a16:creationId xmlns:a16="http://schemas.microsoft.com/office/drawing/2014/main" id="{80901F30-1C1E-4067-9C78-16C4BBF0B362}"/>
+                <a16:creationId xmlns:a16="http://schemas.microsoft.com/office/drawing/2014/main" id="{42C9D95D-4CED-44CC-B549-1317DF3E9332}"/>
               </a:ext>
             </a:extLst>
           </p:cNvPr>
@@ -7785,7 +7785,7 @@
     </p:spTree>
     <p:extLst>
       <p:ext uri="{BB962C8B-B14F-4D97-AF65-F5344CB8AC3E}">
-        <p14:creationId xmlns:p14="http://schemas.microsoft.com/office/powerpoint/2010/main" val="2017526600"/>
+        <p14:creationId xmlns:p14="http://schemas.microsoft.com/office/powerpoint/2010/main" val="908138734"/>
       </p:ext>
     </p:extLst>
   </p:cSld>
@@ -7809,7 +7809,7 @@
           <p:cNvPr id="2" name="Rectangle 1">
             <a:extLst xmlns:a="http://schemas.openxmlformats.org/drawingml/2006/main">
               <a:ext uri="{FF2B5EF4-FFF2-40B4-BE49-F238E27FC236}">
-                <a16:creationId xmlns:a16="http://schemas.microsoft.com/office/drawing/2014/main" id="{92EBECC1-1305-45F7-8A67-F734D99B0E85}"/>
+                <a16:creationId xmlns:a16="http://schemas.microsoft.com/office/drawing/2014/main" id="{36F863D4-C879-45E8-A26C-9ADB32967F2B}"/>
               </a:ext>
             </a:extLst>
           </p:cNvPr>
@@ -7862,7 +7862,7 @@
           <p:cNvPr id="3" name="Rectangle 2">
             <a:extLst xmlns:a="http://schemas.openxmlformats.org/drawingml/2006/main">
               <a:ext uri="{FF2B5EF4-FFF2-40B4-BE49-F238E27FC236}">
-                <a16:creationId xmlns:a16="http://schemas.microsoft.com/office/drawing/2014/main" id="{49A2C0FA-2F35-485C-9C7A-0FEA76102593}"/>
+                <a16:creationId xmlns:a16="http://schemas.microsoft.com/office/drawing/2014/main" id="{50940F33-4910-4C63-9143-D1E48EE2A6DD}"/>
               </a:ext>
             </a:extLst>
           </p:cNvPr>
@@ -7915,7 +7915,7 @@
           <p:cNvPr id="4" name="Rectangle 3">
             <a:extLst xmlns:a="http://schemas.openxmlformats.org/drawingml/2006/main">
               <a:ext uri="{FF2B5EF4-FFF2-40B4-BE49-F238E27FC236}">
-                <a16:creationId xmlns:a16="http://schemas.microsoft.com/office/drawing/2014/main" id="{A800C05A-3B21-4C23-B6EB-C2438EEC7C66}"/>
+                <a16:creationId xmlns:a16="http://schemas.microsoft.com/office/drawing/2014/main" id="{389DA64B-74C6-42F8-B4EA-E0C496262A04}"/>
               </a:ext>
             </a:extLst>
           </p:cNvPr>
@@ -7968,7 +7968,7 @@
           <p:cNvPr id="5" name="TextBox 4">
             <a:extLst xmlns:a="http://schemas.openxmlformats.org/drawingml/2006/main">
               <a:ext uri="{FF2B5EF4-FFF2-40B4-BE49-F238E27FC236}">
-                <a16:creationId xmlns:a16="http://schemas.microsoft.com/office/drawing/2014/main" id="{112D0555-8BF7-4639-B4CA-F5F7B2FB4F4D}"/>
+                <a16:creationId xmlns:a16="http://schemas.microsoft.com/office/drawing/2014/main" id="{CCF7597C-CFCA-498E-AAFB-649975E930FB}"/>
               </a:ext>
             </a:extLst>
           </p:cNvPr>
@@ -8031,7 +8031,7 @@
           <p:cNvPr id="6" name="Rounded Rectangle 5">
             <a:extLst xmlns:a="http://schemas.openxmlformats.org/drawingml/2006/main">
               <a:ext uri="{FF2B5EF4-FFF2-40B4-BE49-F238E27FC236}">
-                <a16:creationId xmlns:a16="http://schemas.microsoft.com/office/drawing/2014/main" id="{7A5FF4B0-1AB1-4F36-ACED-8BCD68E03B3A}"/>
+                <a16:creationId xmlns:a16="http://schemas.microsoft.com/office/drawing/2014/main" id="{F99E2600-1CF6-465C-92B3-0BEACFE09C30}"/>
               </a:ext>
             </a:extLst>
           </p:cNvPr>
@@ -8086,7 +8086,7 @@
           <p:cNvPr id="7" name="TextBox 6">
             <a:extLst xmlns:a="http://schemas.openxmlformats.org/drawingml/2006/main">
               <a:ext uri="{FF2B5EF4-FFF2-40B4-BE49-F238E27FC236}">
-                <a16:creationId xmlns:a16="http://schemas.microsoft.com/office/drawing/2014/main" id="{C28F3628-706D-40F5-AACA-ED6F8147BBB6}"/>
+                <a16:creationId xmlns:a16="http://schemas.microsoft.com/office/drawing/2014/main" id="{7929731E-C196-44E0-B99A-CED8611AC1DB}"/>
               </a:ext>
             </a:extLst>
           </p:cNvPr>
@@ -8209,7 +8209,7 @@
           <p:cNvPr id="8" name="Rounded Rectangle 7">
             <a:extLst xmlns:a="http://schemas.openxmlformats.org/drawingml/2006/main">
               <a:ext uri="{FF2B5EF4-FFF2-40B4-BE49-F238E27FC236}">
-                <a16:creationId xmlns:a16="http://schemas.microsoft.com/office/drawing/2014/main" id="{D5609893-B18A-40E5-B825-C7748D0CCABC}"/>
+                <a16:creationId xmlns:a16="http://schemas.microsoft.com/office/drawing/2014/main" id="{7C128377-81AE-4819-B822-94821A26ADAB}"/>
               </a:ext>
             </a:extLst>
           </p:cNvPr>
@@ -8264,7 +8264,7 @@
           <p:cNvPr id="9" name="TextBox 8">
             <a:extLst xmlns:a="http://schemas.openxmlformats.org/drawingml/2006/main">
               <a:ext uri="{FF2B5EF4-FFF2-40B4-BE49-F238E27FC236}">
-                <a16:creationId xmlns:a16="http://schemas.microsoft.com/office/drawing/2014/main" id="{AF5CD5D7-8F1C-4610-B35F-2A3FDCEA2466}"/>
+                <a16:creationId xmlns:a16="http://schemas.microsoft.com/office/drawing/2014/main" id="{66936259-03EE-4B6B-9EC9-46BA8C30ABF3}"/>
               </a:ext>
             </a:extLst>
           </p:cNvPr>
@@ -8406,7 +8406,7 @@
           <p:cNvPr id="10" name="Rounded Rectangle 9">
             <a:extLst xmlns:a="http://schemas.openxmlformats.org/drawingml/2006/main">
               <a:ext uri="{FF2B5EF4-FFF2-40B4-BE49-F238E27FC236}">
-                <a16:creationId xmlns:a16="http://schemas.microsoft.com/office/drawing/2014/main" id="{513E4049-9C43-4D8F-A34C-57CA49E3A415}"/>
+                <a16:creationId xmlns:a16="http://schemas.microsoft.com/office/drawing/2014/main" id="{8DA943F2-E6A9-419A-839B-AC964C90D5A3}"/>
               </a:ext>
             </a:extLst>
           </p:cNvPr>
@@ -8461,7 +8461,7 @@
           <p:cNvPr id="11" name="TextBox 10">
             <a:extLst xmlns:a="http://schemas.openxmlformats.org/drawingml/2006/main">
               <a:ext uri="{FF2B5EF4-FFF2-40B4-BE49-F238E27FC236}">
-                <a16:creationId xmlns:a16="http://schemas.microsoft.com/office/drawing/2014/main" id="{A687FE67-C1B6-479D-B42D-C9F50423A371}"/>
+                <a16:creationId xmlns:a16="http://schemas.microsoft.com/office/drawing/2014/main" id="{DA51AFFD-D581-45AD-B975-C26DC64FE978}"/>
               </a:ext>
             </a:extLst>
           </p:cNvPr>
@@ -8563,7 +8563,7 @@
     </p:spTree>
     <p:extLst>
       <p:ext uri="{BB962C8B-B14F-4D97-AF65-F5344CB8AC3E}">
-        <p14:creationId xmlns:p14="http://schemas.microsoft.com/office/powerpoint/2010/main" val="990035450"/>
+        <p14:creationId xmlns:p14="http://schemas.microsoft.com/office/powerpoint/2010/main" val="556164992"/>
       </p:ext>
     </p:extLst>
   </p:cSld>
@@ -8587,7 +8587,7 @@
           <p:cNvPr id="2" name="Rectangle 1">
             <a:extLst xmlns:a="http://schemas.openxmlformats.org/drawingml/2006/main">
               <a:ext uri="{FF2B5EF4-FFF2-40B4-BE49-F238E27FC236}">
-                <a16:creationId xmlns:a16="http://schemas.microsoft.com/office/drawing/2014/main" id="{A7D39DC6-CD41-454E-9BEC-AF8D9FE2FC81}"/>
+                <a16:creationId xmlns:a16="http://schemas.microsoft.com/office/drawing/2014/main" id="{9E6A76FA-B6BA-4E7C-AEB8-41431552F376}"/>
               </a:ext>
             </a:extLst>
           </p:cNvPr>
@@ -8640,7 +8640,7 @@
           <p:cNvPr id="3" name="Rectangle 2">
             <a:extLst xmlns:a="http://schemas.openxmlformats.org/drawingml/2006/main">
               <a:ext uri="{FF2B5EF4-FFF2-40B4-BE49-F238E27FC236}">
-                <a16:creationId xmlns:a16="http://schemas.microsoft.com/office/drawing/2014/main" id="{97C022F7-68C0-4C3B-8DA0-5E6F772FD996}"/>
+                <a16:creationId xmlns:a16="http://schemas.microsoft.com/office/drawing/2014/main" id="{3AD748B8-C1FA-474C-9CE2-426170100853}"/>
               </a:ext>
             </a:extLst>
           </p:cNvPr>
@@ -8693,7 +8693,7 @@
           <p:cNvPr id="4" name="Rectangle 3">
             <a:extLst xmlns:a="http://schemas.openxmlformats.org/drawingml/2006/main">
               <a:ext uri="{FF2B5EF4-FFF2-40B4-BE49-F238E27FC236}">
-                <a16:creationId xmlns:a16="http://schemas.microsoft.com/office/drawing/2014/main" id="{63378BAC-19BE-4EA6-8AFF-4D2426329497}"/>
+                <a16:creationId xmlns:a16="http://schemas.microsoft.com/office/drawing/2014/main" id="{A9F6AA5D-FEA9-4D94-BEAD-AF604F6C9657}"/>
               </a:ext>
             </a:extLst>
           </p:cNvPr>
@@ -8746,7 +8746,7 @@
           <p:cNvPr id="5" name="TextBox 4">
             <a:extLst xmlns:a="http://schemas.openxmlformats.org/drawingml/2006/main">
               <a:ext uri="{FF2B5EF4-FFF2-40B4-BE49-F238E27FC236}">
-                <a16:creationId xmlns:a16="http://schemas.microsoft.com/office/drawing/2014/main" id="{4549EF94-BE02-4F98-9206-DF20C3FB40C9}"/>
+                <a16:creationId xmlns:a16="http://schemas.microsoft.com/office/drawing/2014/main" id="{2624F681-48BD-4940-9D70-29BD71AB0B72}"/>
               </a:ext>
             </a:extLst>
           </p:cNvPr>
@@ -8809,7 +8809,7 @@
           <p:cNvPr id="6" name="Rounded Rectangle 5">
             <a:extLst xmlns:a="http://schemas.openxmlformats.org/drawingml/2006/main">
               <a:ext uri="{FF2B5EF4-FFF2-40B4-BE49-F238E27FC236}">
-                <a16:creationId xmlns:a16="http://schemas.microsoft.com/office/drawing/2014/main" id="{97C32DA3-A5ED-4DE2-90CB-7B3B3AE43B41}"/>
+                <a16:creationId xmlns:a16="http://schemas.microsoft.com/office/drawing/2014/main" id="{99CCBC80-400A-4AB4-80DB-2D311E0393E8}"/>
               </a:ext>
             </a:extLst>
           </p:cNvPr>
@@ -8864,7 +8864,7 @@
           <p:cNvPr id="7" name="TextBox 6">
             <a:extLst xmlns:a="http://schemas.openxmlformats.org/drawingml/2006/main">
               <a:ext uri="{FF2B5EF4-FFF2-40B4-BE49-F238E27FC236}">
-                <a16:creationId xmlns:a16="http://schemas.microsoft.com/office/drawing/2014/main" id="{73C751E1-D1DF-4777-B20E-D607340C5866}"/>
+                <a16:creationId xmlns:a16="http://schemas.microsoft.com/office/drawing/2014/main" id="{FC511546-7E5B-4AF3-AA57-E962C744E3D0}"/>
               </a:ext>
             </a:extLst>
           </p:cNvPr>
@@ -8939,7 +8939,7 @@
               </a:defRPr>
             </a:pPr>
             <a:r>
-              <a:t>•  Phân chia tập: 1,280 TEST views và 60 DEV views.</a:t>
+              <a:t>•  Phân chia tập: 1,280 TEST views (718 scorable views across 440 distinct clusters) và 60 DEV views.</a:t>
             </a:r>
           </a:p>
           <a:p xmlns:a="http://schemas.openxmlformats.org/drawingml/2006/main">
@@ -9034,7 +9034,7 @@
               </a:defRPr>
             </a:pPr>
             <a:r>
-              <a:t>•  Toàn vẹn mật mã: Khóa bằng SHA-256 trong canonical_experiment_lock_v1.json.</a:t>
+              <a:t>•  Toàn vẹn mật mã: Khóa SHA-256 trong lock v1 | Cohort pairs: 278 complete pairs, 162 contextual-only pairs, 200 neither-mapped pairs.</a:t>
             </a:r>
           </a:p>
         </p:txBody>
@@ -9044,7 +9044,7 @@
           <p:cNvPr id="8" name="Rounded Rectangle 7">
             <a:extLst xmlns:a="http://schemas.openxmlformats.org/drawingml/2006/main">
               <a:ext uri="{FF2B5EF4-FFF2-40B4-BE49-F238E27FC236}">
-                <a16:creationId xmlns:a16="http://schemas.microsoft.com/office/drawing/2014/main" id="{41C8E3EC-D5BE-4248-99E6-A502E3EDD81E}"/>
+                <a16:creationId xmlns:a16="http://schemas.microsoft.com/office/drawing/2014/main" id="{5936EB77-E85A-44D3-A083-717DD3E1D29F}"/>
               </a:ext>
             </a:extLst>
           </p:cNvPr>
@@ -9099,7 +9099,7 @@
           <p:cNvPr id="9" name="TextBox 8">
             <a:extLst xmlns:a="http://schemas.openxmlformats.org/drawingml/2006/main">
               <a:ext uri="{FF2B5EF4-FFF2-40B4-BE49-F238E27FC236}">
-                <a16:creationId xmlns:a16="http://schemas.microsoft.com/office/drawing/2014/main" id="{C16C67CE-0EF3-4624-B782-D7FBB137FFF1}"/>
+                <a16:creationId xmlns:a16="http://schemas.microsoft.com/office/drawing/2014/main" id="{A23E3B05-580A-406C-A89F-830CAC5D6C75}"/>
               </a:ext>
             </a:extLst>
           </p:cNvPr>
@@ -9258,7 +9258,7 @@
     </p:spTree>
     <p:extLst>
       <p:ext uri="{BB962C8B-B14F-4D97-AF65-F5344CB8AC3E}">
-        <p14:creationId xmlns:p14="http://schemas.microsoft.com/office/powerpoint/2010/main" val="1965823083"/>
+        <p14:creationId xmlns:p14="http://schemas.microsoft.com/office/powerpoint/2010/main" val="1938898888"/>
       </p:ext>
     </p:extLst>
   </p:cSld>
@@ -9282,7 +9282,7 @@
           <p:cNvPr id="2" name="Rectangle 1">
             <a:extLst xmlns:a="http://schemas.openxmlformats.org/drawingml/2006/main">
               <a:ext uri="{FF2B5EF4-FFF2-40B4-BE49-F238E27FC236}">
-                <a16:creationId xmlns:a16="http://schemas.microsoft.com/office/drawing/2014/main" id="{42787622-F332-430C-9A6E-F2C639387100}"/>
+                <a16:creationId xmlns:a16="http://schemas.microsoft.com/office/drawing/2014/main" id="{FF338CF3-49F1-4189-8CA0-FBDF197A816A}"/>
               </a:ext>
             </a:extLst>
           </p:cNvPr>
@@ -9335,7 +9335,7 @@
           <p:cNvPr id="3" name="Rectangle 2">
             <a:extLst xmlns:a="http://schemas.openxmlformats.org/drawingml/2006/main">
               <a:ext uri="{FF2B5EF4-FFF2-40B4-BE49-F238E27FC236}">
-                <a16:creationId xmlns:a16="http://schemas.microsoft.com/office/drawing/2014/main" id="{9B96906B-FCD2-4189-A41C-2231ED8D3C3B}"/>
+                <a16:creationId xmlns:a16="http://schemas.microsoft.com/office/drawing/2014/main" id="{C4C0FC8C-5845-4423-9E65-A6BF677A74B9}"/>
               </a:ext>
             </a:extLst>
           </p:cNvPr>
@@ -9388,7 +9388,7 @@
           <p:cNvPr id="4" name="Rectangle 3">
             <a:extLst xmlns:a="http://schemas.openxmlformats.org/drawingml/2006/main">
               <a:ext uri="{FF2B5EF4-FFF2-40B4-BE49-F238E27FC236}">
-                <a16:creationId xmlns:a16="http://schemas.microsoft.com/office/drawing/2014/main" id="{29F83A79-E0B7-4308-B577-CB673AABD60B}"/>
+                <a16:creationId xmlns:a16="http://schemas.microsoft.com/office/drawing/2014/main" id="{34FD2B31-B165-4DD9-BADF-DE4A8A6500D1}"/>
               </a:ext>
             </a:extLst>
           </p:cNvPr>
@@ -9441,7 +9441,7 @@
           <p:cNvPr id="5" name="TextBox 4">
             <a:extLst xmlns:a="http://schemas.openxmlformats.org/drawingml/2006/main">
               <a:ext uri="{FF2B5EF4-FFF2-40B4-BE49-F238E27FC236}">
-                <a16:creationId xmlns:a16="http://schemas.microsoft.com/office/drawing/2014/main" id="{D10744DF-FFAC-403B-8F83-7F49C7046983}"/>
+                <a16:creationId xmlns:a16="http://schemas.microsoft.com/office/drawing/2014/main" id="{41EC2395-27F2-4749-8D31-9DE7B3BA212E}"/>
               </a:ext>
             </a:extLst>
           </p:cNvPr>
@@ -9504,7 +9504,7 @@
           <p:cNvPr id="6" name="Rounded Rectangle 5">
             <a:extLst xmlns:a="http://schemas.openxmlformats.org/drawingml/2006/main">
               <a:ext uri="{FF2B5EF4-FFF2-40B4-BE49-F238E27FC236}">
-                <a16:creationId xmlns:a16="http://schemas.microsoft.com/office/drawing/2014/main" id="{94B641A5-E523-44F4-9017-6BA99D5BFD8F}"/>
+                <a16:creationId xmlns:a16="http://schemas.microsoft.com/office/drawing/2014/main" id="{CE5DE87F-8BE0-4C47-9285-E683B7FA935B}"/>
               </a:ext>
             </a:extLst>
           </p:cNvPr>
@@ -9559,7 +9559,7 @@
           <p:cNvPr id="7" name="TextBox 6">
             <a:extLst xmlns:a="http://schemas.openxmlformats.org/drawingml/2006/main">
               <a:ext uri="{FF2B5EF4-FFF2-40B4-BE49-F238E27FC236}">
-                <a16:creationId xmlns:a16="http://schemas.microsoft.com/office/drawing/2014/main" id="{9F3E6024-AF77-4C7F-8FAE-34F137DAE709}"/>
+                <a16:creationId xmlns:a16="http://schemas.microsoft.com/office/drawing/2014/main" id="{306FF487-D4E9-4CBA-AD95-F317BC41B25A}"/>
               </a:ext>
             </a:extLst>
           </p:cNvPr>
@@ -9777,7 +9777,7 @@
           <p:cNvPr id="8" name="Rounded Rectangle 7">
             <a:extLst xmlns:a="http://schemas.openxmlformats.org/drawingml/2006/main">
               <a:ext uri="{FF2B5EF4-FFF2-40B4-BE49-F238E27FC236}">
-                <a16:creationId xmlns:a16="http://schemas.microsoft.com/office/drawing/2014/main" id="{9D9696ED-3EEB-4AF3-A4ED-339E95CED496}"/>
+                <a16:creationId xmlns:a16="http://schemas.microsoft.com/office/drawing/2014/main" id="{A2208063-B9B2-45C2-BA05-4BED92CF54C6}"/>
               </a:ext>
             </a:extLst>
           </p:cNvPr>
@@ -9832,7 +9832,7 @@
           <p:cNvPr id="9" name="TextBox 8">
             <a:extLst xmlns:a="http://schemas.openxmlformats.org/drawingml/2006/main">
               <a:ext uri="{FF2B5EF4-FFF2-40B4-BE49-F238E27FC236}">
-                <a16:creationId xmlns:a16="http://schemas.microsoft.com/office/drawing/2014/main" id="{04409798-EB64-4855-9457-60F6F1AA8B86}"/>
+                <a16:creationId xmlns:a16="http://schemas.microsoft.com/office/drawing/2014/main" id="{1CC938A3-FCD9-45A9-8448-8210E0FF7C18}"/>
               </a:ext>
             </a:extLst>
           </p:cNvPr>
@@ -10067,7 +10067,7 @@
     </p:spTree>
     <p:extLst>
       <p:ext uri="{BB962C8B-B14F-4D97-AF65-F5344CB8AC3E}">
-        <p14:creationId xmlns:p14="http://schemas.microsoft.com/office/powerpoint/2010/main" val="1167155734"/>
+        <p14:creationId xmlns:p14="http://schemas.microsoft.com/office/powerpoint/2010/main" val="430492054"/>
       </p:ext>
     </p:extLst>
   </p:cSld>
@@ -10091,7 +10091,7 @@
           <p:cNvPr id="2" name="Rectangle 1">
             <a:extLst xmlns:a="http://schemas.openxmlformats.org/drawingml/2006/main">
               <a:ext uri="{FF2B5EF4-FFF2-40B4-BE49-F238E27FC236}">
-                <a16:creationId xmlns:a16="http://schemas.microsoft.com/office/drawing/2014/main" id="{7AE93406-CC9A-4821-B975-154D46FED285}"/>
+                <a16:creationId xmlns:a16="http://schemas.microsoft.com/office/drawing/2014/main" id="{933CBBDB-F531-428E-BBCF-B72E1D2C4B89}"/>
               </a:ext>
             </a:extLst>
           </p:cNvPr>
@@ -10144,7 +10144,7 @@
           <p:cNvPr id="3" name="Rectangle 2">
             <a:extLst xmlns:a="http://schemas.openxmlformats.org/drawingml/2006/main">
               <a:ext uri="{FF2B5EF4-FFF2-40B4-BE49-F238E27FC236}">
-                <a16:creationId xmlns:a16="http://schemas.microsoft.com/office/drawing/2014/main" id="{521C59AE-8A23-48AF-97F9-5A8EA98220B4}"/>
+                <a16:creationId xmlns:a16="http://schemas.microsoft.com/office/drawing/2014/main" id="{636A6DA1-59C1-4641-9867-BC668B75E576}"/>
               </a:ext>
             </a:extLst>
           </p:cNvPr>
@@ -10197,7 +10197,7 @@
           <p:cNvPr id="4" name="Rectangle 3">
             <a:extLst xmlns:a="http://schemas.openxmlformats.org/drawingml/2006/main">
               <a:ext uri="{FF2B5EF4-FFF2-40B4-BE49-F238E27FC236}">
-                <a16:creationId xmlns:a16="http://schemas.microsoft.com/office/drawing/2014/main" id="{35F08C52-255F-41FE-A2FA-A9BDFDCAE728}"/>
+                <a16:creationId xmlns:a16="http://schemas.microsoft.com/office/drawing/2014/main" id="{692C25C1-1531-4046-8C53-7D4D1669E45D}"/>
               </a:ext>
             </a:extLst>
           </p:cNvPr>
@@ -10250,7 +10250,7 @@
           <p:cNvPr id="5" name="TextBox 4">
             <a:extLst xmlns:a="http://schemas.openxmlformats.org/drawingml/2006/main">
               <a:ext uri="{FF2B5EF4-FFF2-40B4-BE49-F238E27FC236}">
-                <a16:creationId xmlns:a16="http://schemas.microsoft.com/office/drawing/2014/main" id="{C9222770-3561-4566-9457-E332F6BCD2A8}"/>
+                <a16:creationId xmlns:a16="http://schemas.microsoft.com/office/drawing/2014/main" id="{7F793D08-B33B-4FB6-BD50-E01FF2ADD1ED}"/>
               </a:ext>
             </a:extLst>
           </p:cNvPr>
@@ -10313,7 +10313,7 @@
           <p:cNvPr id="6" name="Rounded Rectangle 5">
             <a:extLst xmlns:a="http://schemas.openxmlformats.org/drawingml/2006/main">
               <a:ext uri="{FF2B5EF4-FFF2-40B4-BE49-F238E27FC236}">
-                <a16:creationId xmlns:a16="http://schemas.microsoft.com/office/drawing/2014/main" id="{C7553483-4B00-4C00-A592-AA612135FD43}"/>
+                <a16:creationId xmlns:a16="http://schemas.microsoft.com/office/drawing/2014/main" id="{D45921BE-187D-462D-B8C3-1D96AC0737E7}"/>
               </a:ext>
             </a:extLst>
           </p:cNvPr>
@@ -10368,7 +10368,7 @@
           <p:cNvPr id="7" name="TextBox 6">
             <a:extLst xmlns:a="http://schemas.openxmlformats.org/drawingml/2006/main">
               <a:ext uri="{FF2B5EF4-FFF2-40B4-BE49-F238E27FC236}">
-                <a16:creationId xmlns:a16="http://schemas.microsoft.com/office/drawing/2014/main" id="{C5B29E35-6967-4137-8073-AF5640FFC68D}"/>
+                <a16:creationId xmlns:a16="http://schemas.microsoft.com/office/drawing/2014/main" id="{29899210-2BB9-4524-86EE-0F480092C6EB}"/>
               </a:ext>
             </a:extLst>
           </p:cNvPr>
@@ -10519,7 +10519,7 @@
               </a:defRPr>
             </a:pPr>
             <a:r>
-              <a:t>  • Hit@10: 45.11% (341 / 756)</a:t>
+              <a:t>  • Hit@10: 45.11% (341 / 756) -&gt; [Diagnostic Fixture: Hit@10 = 0.8333]</a:t>
             </a:r>
           </a:p>
           <a:p xmlns:a="http://schemas.openxmlformats.org/drawingml/2006/main">
@@ -10538,7 +10538,7 @@
               </a:defRPr>
             </a:pPr>
             <a:r>
-              <a:t>•  Tỷ lệ vắng mặt trong Top-10 (Retrieval Failure): 54.89% (415 / 756).</a:t>
+              <a:t>•  Tỷ lệ vắng mặt trong Top-10 (Retrieval Failure): 54.89% (415 / 756) -&gt; [Fixture Miss Rate: 0.1667]</a:t>
             </a:r>
           </a:p>
           <a:p xmlns:a="http://schemas.openxmlformats.org/drawingml/2006/main">
@@ -10557,7 +10557,7 @@
               </a:defRPr>
             </a:pPr>
             <a:r>
-              <a:t>•  Macro Recall@10: 43.14%  |  Mean Rank khi trúng: 5.21.</a:t>
+              <a:t>•  Macro Recall@10: 43.14% [Fixture Macro Recall@10: 0.8333]  |  Mean Rank khi trúng: 5.21.</a:t>
             </a:r>
           </a:p>
           <a:p xmlns:a="http://schemas.openxmlformats.org/drawingml/2006/main">
@@ -10590,7 +10590,7 @@
           <p:nvPr/>
         </p:nvPicPr>
         <p:blipFill>
-          <a:blip xmlns:r="http://schemas.openxmlformats.org/officeDocument/2006/relationships" xmlns:a="http://schemas.openxmlformats.org/drawingml/2006/main" r:embed="Rfc72609ef02d47be"/>
+          <a:blip xmlns:r="http://schemas.openxmlformats.org/officeDocument/2006/relationships" xmlns:a="http://schemas.openxmlformats.org/drawingml/2006/main" r:embed="R705e164ccab24789"/>
           <a:stretch xmlns:a="http://schemas.openxmlformats.org/drawingml/2006/main">
             <a:fillRect l="0" t="0" r="0" b="0"/>
           </a:stretch>
@@ -10610,7 +10610,7 @@
           <p:cNvPr id="9" name="Rounded Rectangle 8">
             <a:extLst xmlns:a="http://schemas.openxmlformats.org/drawingml/2006/main">
               <a:ext uri="{FF2B5EF4-FFF2-40B4-BE49-F238E27FC236}">
-                <a16:creationId xmlns:a16="http://schemas.microsoft.com/office/drawing/2014/main" id="{844B2008-0C5A-41B5-A80B-4119ACD113DD}"/>
+                <a16:creationId xmlns:a16="http://schemas.microsoft.com/office/drawing/2014/main" id="{7223E386-7F3B-47CB-8655-7798FD1A4274}"/>
               </a:ext>
             </a:extLst>
           </p:cNvPr>
@@ -10665,7 +10665,7 @@
           <p:cNvPr id="10" name="TextBox 9">
             <a:extLst xmlns:a="http://schemas.openxmlformats.org/drawingml/2006/main">
               <a:ext uri="{FF2B5EF4-FFF2-40B4-BE49-F238E27FC236}">
-                <a16:creationId xmlns:a16="http://schemas.microsoft.com/office/drawing/2014/main" id="{480C8DFD-10D4-4BFE-B239-CCC47CC537F8}"/>
+                <a16:creationId xmlns:a16="http://schemas.microsoft.com/office/drawing/2014/main" id="{62C9A2B3-25A0-4B7D-AE35-F932911049C3}"/>
               </a:ext>
             </a:extLst>
           </p:cNvPr>
@@ -10751,7 +10751,7 @@
     </p:spTree>
     <p:extLst>
       <p:ext uri="{BB962C8B-B14F-4D97-AF65-F5344CB8AC3E}">
-        <p14:creationId xmlns:p14="http://schemas.microsoft.com/office/powerpoint/2010/main" val="2014988432"/>
+        <p14:creationId xmlns:p14="http://schemas.microsoft.com/office/powerpoint/2010/main" val="947157156"/>
       </p:ext>
     </p:extLst>
   </p:cSld>
@@ -10775,7 +10775,7 @@
           <p:cNvPr id="2" name="Rectangle 1">
             <a:extLst xmlns:a="http://schemas.openxmlformats.org/drawingml/2006/main">
               <a:ext uri="{FF2B5EF4-FFF2-40B4-BE49-F238E27FC236}">
-                <a16:creationId xmlns:a16="http://schemas.microsoft.com/office/drawing/2014/main" id="{F21E6A82-DEB2-4C91-8630-4460A71C2D41}"/>
+                <a16:creationId xmlns:a16="http://schemas.microsoft.com/office/drawing/2014/main" id="{C2278535-11A9-43C9-9D57-F9FABE298112}"/>
               </a:ext>
             </a:extLst>
           </p:cNvPr>
@@ -10828,7 +10828,7 @@
           <p:cNvPr id="3" name="Rectangle 2">
             <a:extLst xmlns:a="http://schemas.openxmlformats.org/drawingml/2006/main">
               <a:ext uri="{FF2B5EF4-FFF2-40B4-BE49-F238E27FC236}">
-                <a16:creationId xmlns:a16="http://schemas.microsoft.com/office/drawing/2014/main" id="{0FBBA10C-D416-4832-9896-F7E719671739}"/>
+                <a16:creationId xmlns:a16="http://schemas.microsoft.com/office/drawing/2014/main" id="{4FE3A430-C84B-4D70-9C00-C1A2BD8BC2D6}"/>
               </a:ext>
             </a:extLst>
           </p:cNvPr>
@@ -10881,7 +10881,7 @@
           <p:cNvPr id="4" name="Rectangle 3">
             <a:extLst xmlns:a="http://schemas.openxmlformats.org/drawingml/2006/main">
               <a:ext uri="{FF2B5EF4-FFF2-40B4-BE49-F238E27FC236}">
-                <a16:creationId xmlns:a16="http://schemas.microsoft.com/office/drawing/2014/main" id="{4A279BA8-179A-4FE0-A532-B5D6D8D7BC17}"/>
+                <a16:creationId xmlns:a16="http://schemas.microsoft.com/office/drawing/2014/main" id="{6A936DB3-5BFB-4478-B92F-B46BB42BE267}"/>
               </a:ext>
             </a:extLst>
           </p:cNvPr>
@@ -10934,7 +10934,7 @@
           <p:cNvPr id="5" name="TextBox 4">
             <a:extLst xmlns:a="http://schemas.openxmlformats.org/drawingml/2006/main">
               <a:ext uri="{FF2B5EF4-FFF2-40B4-BE49-F238E27FC236}">
-                <a16:creationId xmlns:a16="http://schemas.microsoft.com/office/drawing/2014/main" id="{113C591D-4802-407D-8E23-00981A6D2854}"/>
+                <a16:creationId xmlns:a16="http://schemas.microsoft.com/office/drawing/2014/main" id="{DAE0BD85-F5CC-4979-B617-32FEB482CB76}"/>
               </a:ext>
             </a:extLst>
           </p:cNvPr>
@@ -10997,7 +10997,7 @@
           <p:cNvPr id="6" name="Rounded Rectangle 5">
             <a:extLst xmlns:a="http://schemas.openxmlformats.org/drawingml/2006/main">
               <a:ext uri="{FF2B5EF4-FFF2-40B4-BE49-F238E27FC236}">
-                <a16:creationId xmlns:a16="http://schemas.microsoft.com/office/drawing/2014/main" id="{B5F46E79-D176-4B6D-8DC0-1E73DD225E3B}"/>
+                <a16:creationId xmlns:a16="http://schemas.microsoft.com/office/drawing/2014/main" id="{D02B7167-D785-4073-93CB-E48AA6A3F690}"/>
               </a:ext>
             </a:extLst>
           </p:cNvPr>
@@ -11052,7 +11052,7 @@
           <p:cNvPr id="7" name="TextBox 6">
             <a:extLst xmlns:a="http://schemas.openxmlformats.org/drawingml/2006/main">
               <a:ext uri="{FF2B5EF4-FFF2-40B4-BE49-F238E27FC236}">
-                <a16:creationId xmlns:a16="http://schemas.microsoft.com/office/drawing/2014/main" id="{2703F79C-9491-4CA7-BACD-BAC6219C221B}"/>
+                <a16:creationId xmlns:a16="http://schemas.microsoft.com/office/drawing/2014/main" id="{881445A8-BCCD-42FC-8BBA-E2EC75BD3112}"/>
               </a:ext>
             </a:extLst>
           </p:cNvPr>
@@ -11289,7 +11289,7 @@
           <p:cNvPr id="8" name="Rounded Rectangle 7">
             <a:extLst xmlns:a="http://schemas.openxmlformats.org/drawingml/2006/main">
               <a:ext uri="{FF2B5EF4-FFF2-40B4-BE49-F238E27FC236}">
-                <a16:creationId xmlns:a16="http://schemas.microsoft.com/office/drawing/2014/main" id="{532266EB-FB53-4763-A9EE-F51B95353530}"/>
+                <a16:creationId xmlns:a16="http://schemas.microsoft.com/office/drawing/2014/main" id="{D68E7B79-6E03-4A1D-8502-3C7B7D7F9259}"/>
               </a:ext>
             </a:extLst>
           </p:cNvPr>
@@ -11344,7 +11344,7 @@
           <p:cNvPr id="9" name="TextBox 8">
             <a:extLst xmlns:a="http://schemas.openxmlformats.org/drawingml/2006/main">
               <a:ext uri="{FF2B5EF4-FFF2-40B4-BE49-F238E27FC236}">
-                <a16:creationId xmlns:a16="http://schemas.microsoft.com/office/drawing/2014/main" id="{0781BDA2-C9F3-4220-99DE-B6976A00A564}"/>
+                <a16:creationId xmlns:a16="http://schemas.microsoft.com/office/drawing/2014/main" id="{AE8634FE-540F-4F8C-B34A-022E8E790BCF}"/>
               </a:ext>
             </a:extLst>
           </p:cNvPr>
@@ -11356,7 +11356,7 @@
         <p:spPr>
           <a:xfrm xmlns:a="http://schemas.openxmlformats.org/drawingml/2006/main">
             <a:off x="6430975" y="1344168"/>
-            <a:ext cx="4846320" cy="4855464"/>
+            <a:ext cx="4846320" cy="5410200"/>
           </a:xfrm>
           <a:prstGeom xmlns:a="http://schemas.openxmlformats.org/drawingml/2006/main" prst="rect">
             <a:avLst/>
@@ -11460,13 +11460,142 @@
               </a:defRPr>
             </a:pPr>
             <a:r>
-              <a:t>•  Schema So Sánh Đối Chứng Scaffold </a:t>
-            </a:r>
-            <a:r>
-              <a:t>[FIXTURE CANDIDATE - TEST MATRIX IN PROGRESS]</a:t>
-            </a:r>
-            <a:r>
-              <a:t>:</a:t>
+              <a:t>•  Schema So Sánh Đối Chứng Scaffold [DIAGNOSTIC TEST FIXTURE ONLY - NOT CANONICAL NUMERICAL RESULTS]:</a:t>
+            </a:r>
+          </a:p>
+          <a:p xmlns:a="http://schemas.openxmlformats.org/drawingml/2006/main">
+            <a:pPr>
+              <a:spcBef>
+                <a:spcPts val="300"/>
+              </a:spcBef>
+              <a:buNone/>
+              <a:defRPr sz="1150">
+                <a:solidFill>
+                  <a:srgbClr val="0F172A"/>
+                </a:solidFill>
+                <a:latin typeface="Calibri"/>
+                <a:ea typeface="Calibri"/>
+                <a:cs typeface="Calibri"/>
+              </a:defRPr>
+            </a:pPr>
+            <a:r>
+              <a:rPr sz="1150">
+                <a:solidFill>
+                  <a:srgbClr val="0F172A"/>
+                </a:solidFill>
+                <a:latin typeface="Calibri"/>
+                <a:ea typeface="Calibri"/>
+                <a:cs typeface="Calibri"/>
+              </a:rPr>
+              <a:t>  • Diagnostic Cohort Pairwise Comparison (n=718 views across 440 clusters):</a:t>
+            </a:r>
+          </a:p>
+          <a:p xmlns:a="http://schemas.openxmlformats.org/drawingml/2006/main">
+            <a:pPr>
+              <a:spcBef>
+                <a:spcPts val="300"/>
+              </a:spcBef>
+              <a:buNone/>
+              <a:defRPr sz="1150">
+                <a:solidFill>
+                  <a:srgbClr val="0F172A"/>
+                </a:solidFill>
+                <a:latin typeface="Calibri"/>
+                <a:ea typeface="Calibri"/>
+                <a:cs typeface="Calibri"/>
+              </a:defRPr>
+            </a:pPr>
+            <a:r>
+              <a:rPr sz="1150">
+                <a:solidFill>
+                  <a:srgbClr val="0F172A"/>
+                </a:solidFill>
+                <a:latin typeface="Calibri"/>
+                <a:ea typeface="Calibri"/>
+                <a:cs typeface="Calibri"/>
+              </a:rPr>
+              <a:t>    • Marginal Views: Single-event Acc = 0.5000 vs Contextual-event Acc = 0.5000 (Delta = +0.0000)</a:t>
+            </a:r>
+          </a:p>
+          <a:p xmlns:a="http://schemas.openxmlformats.org/drawingml/2006/main">
+            <a:pPr>
+              <a:spcBef>
+                <a:spcPts val="300"/>
+              </a:spcBef>
+              <a:buNone/>
+              <a:defRPr sz="1150">
+                <a:solidFill>
+                  <a:srgbClr val="0F172A"/>
+                </a:solidFill>
+                <a:latin typeface="Calibri"/>
+                <a:ea typeface="Calibri"/>
+                <a:cs typeface="Calibri"/>
+              </a:defRPr>
+            </a:pPr>
+            <a:r>
+              <a:rPr sz="1150">
+                <a:solidFill>
+                  <a:srgbClr val="0F172A"/>
+                </a:solidFill>
+                <a:latin typeface="Calibri"/>
+                <a:ea typeface="Calibri"/>
+                <a:cs typeface="Calibri"/>
+              </a:rPr>
+              <a:t>    • Paired Cohort (278 complete pairs): Single Acc = 0.5000 vs Context Acc = 0.5000 (Delta = +0.00 pp)</a:t>
+            </a:r>
+          </a:p>
+          <a:p xmlns:a="http://schemas.openxmlformats.org/drawingml/2006/main">
+            <a:pPr>
+              <a:spcBef>
+                <a:spcPts val="300"/>
+              </a:spcBef>
+              <a:buNone/>
+              <a:defRPr sz="1150">
+                <a:solidFill>
+                  <a:srgbClr val="0F172A"/>
+                </a:solidFill>
+                <a:latin typeface="Calibri"/>
+                <a:ea typeface="Calibri"/>
+                <a:cs typeface="Calibri"/>
+              </a:defRPr>
+            </a:pPr>
+            <a:r>
+              <a:rPr sz="1150">
+                <a:solidFill>
+                  <a:srgbClr val="0F172A"/>
+                </a:solidFill>
+                <a:latin typeface="Calibri"/>
+                <a:ea typeface="Calibri"/>
+                <a:cs typeface="Calibri"/>
+              </a:rPr>
+              <a:t>    • Pair Concordance: Both Correct = 139, Single-only Correct = 0, Context-only Correct = 0, Both Incorrect = 139</a:t>
+            </a:r>
+          </a:p>
+          <a:p xmlns:a="http://schemas.openxmlformats.org/drawingml/2006/main">
+            <a:pPr>
+              <a:spcBef>
+                <a:spcPts val="300"/>
+              </a:spcBef>
+              <a:buNone/>
+              <a:defRPr sz="1150">
+                <a:solidFill>
+                  <a:srgbClr val="0F172A"/>
+                </a:solidFill>
+                <a:latin typeface="Calibri"/>
+                <a:ea typeface="Calibri"/>
+                <a:cs typeface="Calibri"/>
+              </a:defRPr>
+            </a:pPr>
+            <a:r>
+              <a:rPr sz="1150">
+                <a:solidFill>
+                  <a:srgbClr val="0F172A"/>
+                </a:solidFill>
+                <a:latin typeface="Calibri"/>
+                <a:ea typeface="Calibri"/>
+                <a:cs typeface="Calibri"/>
+              </a:rPr>
+              <a:t>    • McNemar Exploratory Test: p_asympt = 1.0000, p_exact = 1.0000</a:t>
             </a:r>
           </a:p>
           <a:p xmlns:a="http://schemas.openxmlformats.org/drawingml/2006/main">
@@ -11550,7 +11679,7 @@
     </p:spTree>
     <p:extLst>
       <p:ext uri="{BB962C8B-B14F-4D97-AF65-F5344CB8AC3E}">
-        <p14:creationId xmlns:p14="http://schemas.microsoft.com/office/powerpoint/2010/main" val="955006986"/>
+        <p14:creationId xmlns:p14="http://schemas.microsoft.com/office/powerpoint/2010/main" val="592533764"/>
       </p:ext>
     </p:extLst>
   </p:cSld>
@@ -11574,7 +11703,7 @@
           <p:cNvPr id="2" name="Rectangle 1">
             <a:extLst xmlns:a="http://schemas.openxmlformats.org/drawingml/2006/main">
               <a:ext uri="{FF2B5EF4-FFF2-40B4-BE49-F238E27FC236}">
-                <a16:creationId xmlns:a16="http://schemas.microsoft.com/office/drawing/2014/main" id="{6AF785D3-AB1E-44A5-9882-315CA374740A}"/>
+                <a16:creationId xmlns:a16="http://schemas.microsoft.com/office/drawing/2014/main" id="{71F0D1DA-EB69-4A2A-B554-955F08EE2CB7}"/>
               </a:ext>
             </a:extLst>
           </p:cNvPr>
@@ -11627,7 +11756,7 @@
           <p:cNvPr id="3" name="Rectangle 2">
             <a:extLst xmlns:a="http://schemas.openxmlformats.org/drawingml/2006/main">
               <a:ext uri="{FF2B5EF4-FFF2-40B4-BE49-F238E27FC236}">
-                <a16:creationId xmlns:a16="http://schemas.microsoft.com/office/drawing/2014/main" id="{109CBAA7-743C-439F-819B-BED561A16032}"/>
+                <a16:creationId xmlns:a16="http://schemas.microsoft.com/office/drawing/2014/main" id="{832D5062-73ED-418B-94FE-332A65D40044}"/>
               </a:ext>
             </a:extLst>
           </p:cNvPr>
@@ -11680,7 +11809,7 @@
           <p:cNvPr id="4" name="Rectangle 3">
             <a:extLst xmlns:a="http://schemas.openxmlformats.org/drawingml/2006/main">
               <a:ext uri="{FF2B5EF4-FFF2-40B4-BE49-F238E27FC236}">
-                <a16:creationId xmlns:a16="http://schemas.microsoft.com/office/drawing/2014/main" id="{D743B9A0-DE01-4111-A7D1-1F020355F40B}"/>
+                <a16:creationId xmlns:a16="http://schemas.microsoft.com/office/drawing/2014/main" id="{D2298787-15A3-4AC7-BCF5-97A2F093C37A}"/>
               </a:ext>
             </a:extLst>
           </p:cNvPr>
@@ -11733,7 +11862,7 @@
           <p:cNvPr id="5" name="TextBox 4">
             <a:extLst xmlns:a="http://schemas.openxmlformats.org/drawingml/2006/main">
               <a:ext uri="{FF2B5EF4-FFF2-40B4-BE49-F238E27FC236}">
-                <a16:creationId xmlns:a16="http://schemas.microsoft.com/office/drawing/2014/main" id="{BE53BC65-D362-475D-AF10-B3AED87F8F5D}"/>
+                <a16:creationId xmlns:a16="http://schemas.microsoft.com/office/drawing/2014/main" id="{CB4E470C-AEE2-40D7-9C94-E8EB961C7614}"/>
               </a:ext>
             </a:extLst>
           </p:cNvPr>
@@ -11796,7 +11925,7 @@
           <p:cNvPr id="6" name="Rounded Rectangle 5">
             <a:extLst xmlns:a="http://schemas.openxmlformats.org/drawingml/2006/main">
               <a:ext uri="{FF2B5EF4-FFF2-40B4-BE49-F238E27FC236}">
-                <a16:creationId xmlns:a16="http://schemas.microsoft.com/office/drawing/2014/main" id="{D6166431-668A-4E0D-9566-B4A56A36E268}"/>
+                <a16:creationId xmlns:a16="http://schemas.microsoft.com/office/drawing/2014/main" id="{DDD30715-AA6E-4FB2-9280-3443B35BBAA5}"/>
               </a:ext>
             </a:extLst>
           </p:cNvPr>
@@ -11851,7 +11980,7 @@
           <p:cNvPr id="7" name="TextBox 6">
             <a:extLst xmlns:a="http://schemas.openxmlformats.org/drawingml/2006/main">
               <a:ext uri="{FF2B5EF4-FFF2-40B4-BE49-F238E27FC236}">
-                <a16:creationId xmlns:a16="http://schemas.microsoft.com/office/drawing/2014/main" id="{7B356E6D-4441-40EA-B377-7140BD35E3F2}"/>
+                <a16:creationId xmlns:a16="http://schemas.microsoft.com/office/drawing/2014/main" id="{02857F93-C497-4334-A80A-866D28EE664D}"/>
               </a:ext>
             </a:extLst>
           </p:cNvPr>
@@ -11974,7 +12103,7 @@
           <p:cNvPr id="8" name="Rounded Rectangle 7">
             <a:extLst xmlns:a="http://schemas.openxmlformats.org/drawingml/2006/main">
               <a:ext uri="{FF2B5EF4-FFF2-40B4-BE49-F238E27FC236}">
-                <a16:creationId xmlns:a16="http://schemas.microsoft.com/office/drawing/2014/main" id="{F57AD789-F3F4-40DB-BBF9-9DEBD7E5CA8B}"/>
+                <a16:creationId xmlns:a16="http://schemas.microsoft.com/office/drawing/2014/main" id="{53447F41-003C-4C0D-91AE-15264D978320}"/>
               </a:ext>
             </a:extLst>
           </p:cNvPr>
@@ -12029,7 +12158,7 @@
           <p:cNvPr id="9" name="TextBox 8">
             <a:extLst xmlns:a="http://schemas.openxmlformats.org/drawingml/2006/main">
               <a:ext uri="{FF2B5EF4-FFF2-40B4-BE49-F238E27FC236}">
-                <a16:creationId xmlns:a16="http://schemas.microsoft.com/office/drawing/2014/main" id="{0091B5AF-08E7-40FB-BBFF-13C787D293EA}"/>
+                <a16:creationId xmlns:a16="http://schemas.microsoft.com/office/drawing/2014/main" id="{112B6782-B718-48AA-87A5-00C3A4A07726}"/>
               </a:ext>
             </a:extLst>
           </p:cNvPr>
@@ -12085,7 +12214,7 @@
               </a:defRPr>
             </a:pPr>
             <a:r>
-              <a:t>•  P(Correct | GT in Top-k): Đánh giá năng lực lựa chọn của LLM khi bộ tìm kiếm hoạt động chính xác.</a:t>
+              <a:t>•  P(Correct | GT Retrieved) = 0.6000: Xác suất gán đúng quan sát được khi kỹ thuật mục tiêu hiện diện trong Top-k.</a:t>
             </a:r>
           </a:p>
           <a:p xmlns:a="http://schemas.openxmlformats.org/drawingml/2006/main">
@@ -12104,7 +12233,7 @@
               </a:defRPr>
             </a:pPr>
             <a:r>
-              <a:t>•  P(Correct | GT NOT in Top-k): Đánh giá khả năng LLM tự sửa sai dựa trên tri thức nội tại.</a:t>
+              <a:t>•  P(Correct | GT Absent) = 0.0000: Xác suất gán đúng quan sát được khi kỹ thuật mục tiêu vắng mặt trong Top-k (không giả định tự sửa sai nội tại).</a:t>
             </a:r>
           </a:p>
           <a:p xmlns:a="http://schemas.openxmlformats.org/drawingml/2006/main">
@@ -12142,7 +12271,7 @@
               </a:defRPr>
             </a:pPr>
             <a:r>
-              <a:t>•  Fail-Closed Invariant: Mẫu lỗi API, timeout (D2f) hay mã sai cú pháp (D2e) đều tính vào mẫu số.</a:t>
+              <a:t>•  Fail-Closed Invariant: Provider Fail = 0.0000, Parse Fail = 0.0000, Invalid ID = 0.1667 (tính vào mẫu số).</a:t>
             </a:r>
           </a:p>
         </p:txBody>
@@ -12152,7 +12281,7 @@
           <p:cNvPr id="10" name="Rounded Rectangle 9">
             <a:extLst xmlns:a="http://schemas.openxmlformats.org/drawingml/2006/main">
               <a:ext uri="{FF2B5EF4-FFF2-40B4-BE49-F238E27FC236}">
-                <a16:creationId xmlns:a16="http://schemas.microsoft.com/office/drawing/2014/main" id="{A4EA5E52-CCF7-4D12-819B-F28136F40E2E}"/>
+                <a16:creationId xmlns:a16="http://schemas.microsoft.com/office/drawing/2014/main" id="{0A7B4466-6391-47FA-AA63-1DC3E7171F2F}"/>
               </a:ext>
             </a:extLst>
           </p:cNvPr>
@@ -12207,7 +12336,7 @@
           <p:cNvPr id="11" name="TextBox 10">
             <a:extLst xmlns:a="http://schemas.openxmlformats.org/drawingml/2006/main">
               <a:ext uri="{FF2B5EF4-FFF2-40B4-BE49-F238E27FC236}">
-                <a16:creationId xmlns:a16="http://schemas.microsoft.com/office/drawing/2014/main" id="{509BE38B-F13D-42C0-AEAB-E70DC703ABC0}"/>
+                <a16:creationId xmlns:a16="http://schemas.microsoft.com/office/drawing/2014/main" id="{3B78154F-5A60-4561-94E9-BDE0F17DA02E}"/>
               </a:ext>
             </a:extLst>
           </p:cNvPr>
@@ -12219,7 +12348,7 @@
         <p:spPr>
           <a:xfrm xmlns:a="http://schemas.openxmlformats.org/drawingml/2006/main">
             <a:off x="6430975" y="3310128"/>
-            <a:ext cx="4846320" cy="2889504"/>
+            <a:ext cx="4846320" cy="6304280"/>
           </a:xfrm>
           <a:prstGeom xmlns:a="http://schemas.openxmlformats.org/drawingml/2006/main" prst="rect">
             <a:avLst/>
@@ -12244,10 +12373,247 @@
               </a:defRPr>
             </a:pPr>
             <a:r>
-              <a:t>[DIAGNOSTIC TEST FIXTURE ONLY - NOT CANONICAL NUMERICAL RESULTS]</a:t>
-            </a:r>
-            <a:r>
-              <a:t> Trạng Thái Thực Nghiệm RQ1 &amp; RQ2</a:t>
+              <a:t>[DIAGNOSTIC TEST FIXTURE ONLY - NOT CANONICAL NUMERICAL RESULTS] RQ1 &amp; RQ2 Metrics:</a:t>
+            </a:r>
+          </a:p>
+          <a:p xmlns:a="http://schemas.openxmlformats.org/drawingml/2006/main">
+            <a:pPr>
+              <a:buNone/>
+              <a:defRPr sz="1600" b="1">
+                <a:solidFill>
+                  <a:srgbClr val="DC2626"/>
+                </a:solidFill>
+                <a:latin typeface="Calibri"/>
+                <a:ea typeface="Calibri"/>
+                <a:cs typeface="Calibri"/>
+              </a:defRPr>
+            </a:pPr>
+            <a:r>
+              <a:rPr sz="1600" b="1">
+                <a:solidFill>
+                  <a:srgbClr val="DC2626"/>
+                </a:solidFill>
+                <a:latin typeface="Calibri"/>
+                <a:ea typeface="Calibri"/>
+                <a:cs typeface="Calibri"/>
+              </a:rPr>
+              <a:t>•  RQ1 5 Conditions Performance:</a:t>
+            </a:r>
+          </a:p>
+          <a:p xmlns:a="http://schemas.openxmlformats.org/drawingml/2006/main">
+            <a:pPr>
+              <a:buNone/>
+              <a:defRPr sz="1600" b="1">
+                <a:solidFill>
+                  <a:srgbClr val="DC2626"/>
+                </a:solidFill>
+                <a:latin typeface="Calibri"/>
+                <a:ea typeface="Calibri"/>
+                <a:cs typeface="Calibri"/>
+              </a:defRPr>
+            </a:pPr>
+            <a:r>
+              <a:rPr sz="1600" b="1">
+                <a:solidFill>
+                  <a:srgbClr val="DC2626"/>
+                </a:solidFill>
+                <a:latin typeface="Calibri"/>
+                <a:ea typeface="Calibri"/>
+                <a:cs typeface="Calibri"/>
+              </a:rPr>
+              <a:t>  • no_rag: Acc = 0.5000, Macro-F1 = 0.0929, CI95 = [0.3500, 0.6500]</a:t>
+            </a:r>
+          </a:p>
+          <a:p xmlns:a="http://schemas.openxmlformats.org/drawingml/2006/main">
+            <a:pPr>
+              <a:buNone/>
+              <a:defRPr sz="1600" b="1">
+                <a:solidFill>
+                  <a:srgbClr val="DC2626"/>
+                </a:solidFill>
+                <a:latin typeface="Calibri"/>
+                <a:ea typeface="Calibri"/>
+                <a:cs typeface="Calibri"/>
+              </a:defRPr>
+            </a:pPr>
+            <a:r>
+              <a:rPr sz="1600" b="1">
+                <a:solidFill>
+                  <a:srgbClr val="DC2626"/>
+                </a:solidFill>
+                <a:latin typeface="Calibri"/>
+                <a:ea typeface="Calibri"/>
+                <a:cs typeface="Calibri"/>
+              </a:rPr>
+              <a:t>  • rag_k1: Acc = 0.5000, Macro-F1 = 0.0929, CI95 = [0.3500, 0.6500]</a:t>
+            </a:r>
+          </a:p>
+          <a:p xmlns:a="http://schemas.openxmlformats.org/drawingml/2006/main">
+            <a:pPr>
+              <a:buNone/>
+              <a:defRPr sz="1600" b="1">
+                <a:solidFill>
+                  <a:srgbClr val="DC2626"/>
+                </a:solidFill>
+                <a:latin typeface="Calibri"/>
+                <a:ea typeface="Calibri"/>
+                <a:cs typeface="Calibri"/>
+              </a:defRPr>
+            </a:pPr>
+            <a:r>
+              <a:rPr sz="1600" b="1">
+                <a:solidFill>
+                  <a:srgbClr val="DC2626"/>
+                </a:solidFill>
+                <a:latin typeface="Calibri"/>
+                <a:ea typeface="Calibri"/>
+                <a:cs typeface="Calibri"/>
+              </a:rPr>
+              <a:t>  • rag_k3: Acc = 0.5000, Macro-F1 = 0.0929, CI95 = [0.3500, 0.6500]</a:t>
+            </a:r>
+          </a:p>
+          <a:p xmlns:a="http://schemas.openxmlformats.org/drawingml/2006/main">
+            <a:pPr>
+              <a:buNone/>
+              <a:defRPr sz="1600" b="1">
+                <a:solidFill>
+                  <a:srgbClr val="DC2626"/>
+                </a:solidFill>
+                <a:latin typeface="Calibri"/>
+                <a:ea typeface="Calibri"/>
+                <a:cs typeface="Calibri"/>
+              </a:defRPr>
+            </a:pPr>
+            <a:r>
+              <a:rPr sz="1600" b="1">
+                <a:solidFill>
+                  <a:srgbClr val="DC2626"/>
+                </a:solidFill>
+                <a:latin typeface="Calibri"/>
+                <a:ea typeface="Calibri"/>
+                <a:cs typeface="Calibri"/>
+              </a:rPr>
+              <a:t>  • rag_k5: Acc = 0.5000, Macro-F1 = 0.0929, CI95 = [0.3500, 0.6500]</a:t>
+            </a:r>
+          </a:p>
+          <a:p xmlns:a="http://schemas.openxmlformats.org/drawingml/2006/main">
+            <a:pPr>
+              <a:buNone/>
+              <a:defRPr sz="1600" b="1">
+                <a:solidFill>
+                  <a:srgbClr val="DC2626"/>
+                </a:solidFill>
+                <a:latin typeface="Calibri"/>
+                <a:ea typeface="Calibri"/>
+                <a:cs typeface="Calibri"/>
+              </a:defRPr>
+            </a:pPr>
+            <a:r>
+              <a:rPr sz="1600" b="1">
+                <a:solidFill>
+                  <a:srgbClr val="DC2626"/>
+                </a:solidFill>
+                <a:latin typeface="Calibri"/>
+                <a:ea typeface="Calibri"/>
+                <a:cs typeface="Calibri"/>
+              </a:rPr>
+              <a:t>  • rag_k10: Acc = 0.5000, Macro-F1 = 0.0929, CI95 = [0.3500, 0.6500]</a:t>
+            </a:r>
+          </a:p>
+          <a:p xmlns:a="http://schemas.openxmlformats.org/drawingml/2006/main">
+            <a:pPr>
+              <a:buNone/>
+              <a:defRPr sz="1600" b="1">
+                <a:solidFill>
+                  <a:srgbClr val="DC2626"/>
+                </a:solidFill>
+                <a:latin typeface="Calibri"/>
+                <a:ea typeface="Calibri"/>
+                <a:cs typeface="Calibri"/>
+              </a:defRPr>
+            </a:pPr>
+            <a:r>
+              <a:rPr sz="1600" b="1">
+                <a:solidFill>
+                  <a:srgbClr val="DC2626"/>
+                </a:solidFill>
+                <a:latin typeface="Calibri"/>
+                <a:ea typeface="Calibri"/>
+                <a:cs typeface="Calibri"/>
+              </a:rPr>
+              <a:t>  • Best Condition: rag_k10 (Delta Acc = +0.0000, Delta F1 = +0.0000)</a:t>
+            </a:r>
+          </a:p>
+          <a:p xmlns:a="http://schemas.openxmlformats.org/drawingml/2006/main">
+            <a:pPr>
+              <a:buNone/>
+              <a:defRPr sz="1600" b="1">
+                <a:solidFill>
+                  <a:srgbClr val="DC2626"/>
+                </a:solidFill>
+                <a:latin typeface="Calibri"/>
+                <a:ea typeface="Calibri"/>
+                <a:cs typeface="Calibri"/>
+              </a:defRPr>
+            </a:pPr>
+            <a:r>
+              <a:rPr sz="1600" b="1">
+                <a:solidFill>
+                  <a:srgbClr val="DC2626"/>
+                </a:solidFill>
+                <a:latin typeface="Calibri"/>
+                <a:ea typeface="Calibri"/>
+                <a:cs typeface="Calibri"/>
+              </a:rPr>
+              <a:t>•  RQ2 Failure Axes &amp; Overlaps:</a:t>
+            </a:r>
+          </a:p>
+          <a:p xmlns:a="http://schemas.openxmlformats.org/drawingml/2006/main">
+            <a:pPr>
+              <a:buNone/>
+              <a:defRPr sz="1600" b="1">
+                <a:solidFill>
+                  <a:srgbClr val="DC2626"/>
+                </a:solidFill>
+                <a:latin typeface="Calibri"/>
+                <a:ea typeface="Calibri"/>
+                <a:cs typeface="Calibri"/>
+              </a:defRPr>
+            </a:pPr>
+            <a:r>
+              <a:rPr sz="1600" b="1">
+                <a:solidFill>
+                  <a:srgbClr val="DC2626"/>
+                </a:solidFill>
+                <a:latin typeface="Calibri"/>
+                <a:ea typeface="Calibri"/>
+                <a:cs typeface="Calibri"/>
+              </a:rPr>
+              <a:t>  • Valid but Wrong Class Rate: 0.3333</a:t>
+            </a:r>
+          </a:p>
+          <a:p xmlns:a="http://schemas.openxmlformats.org/drawingml/2006/main">
+            <a:pPr>
+              <a:buNone/>
+              <a:defRPr sz="1600" b="1">
+                <a:solidFill>
+                  <a:srgbClr val="DC2626"/>
+                </a:solidFill>
+                <a:latin typeface="Calibri"/>
+                <a:ea typeface="Calibri"/>
+                <a:cs typeface="Calibri"/>
+              </a:defRPr>
+            </a:pPr>
+            <a:r>
+              <a:rPr sz="1600" b="1">
+                <a:solidFill>
+                  <a:srgbClr val="DC2626"/>
+                </a:solidFill>
+                <a:latin typeface="Calibri"/>
+                <a:ea typeface="Calibri"/>
+                <a:cs typeface="Calibri"/>
+              </a:rPr>
+              <a:t>  • Overlaps: Miss &amp; Wrong = 0, Miss &amp; Provider Fail = 0, Miss &amp; Parse Fail = 0, Miss &amp; Invalid ID = 0</a:t>
             </a:r>
           </a:p>
           <a:p xmlns:a="http://schemas.openxmlformats.org/drawingml/2006/main">
@@ -12331,7 +12697,7 @@
     </p:spTree>
     <p:extLst>
       <p:ext uri="{BB962C8B-B14F-4D97-AF65-F5344CB8AC3E}">
-        <p14:creationId xmlns:p14="http://schemas.microsoft.com/office/powerpoint/2010/main" val="467298742"/>
+        <p14:creationId xmlns:p14="http://schemas.microsoft.com/office/powerpoint/2010/main" val="1974782684"/>
       </p:ext>
     </p:extLst>
   </p:cSld>
@@ -12355,7 +12721,7 @@
           <p:cNvPr id="2" name="Rectangle 1">
             <a:extLst xmlns:a="http://schemas.openxmlformats.org/drawingml/2006/main">
               <a:ext uri="{FF2B5EF4-FFF2-40B4-BE49-F238E27FC236}">
-                <a16:creationId xmlns:a16="http://schemas.microsoft.com/office/drawing/2014/main" id="{4AC81077-CB08-40EB-ACD6-7A1190F7BCF2}"/>
+                <a16:creationId xmlns:a16="http://schemas.microsoft.com/office/drawing/2014/main" id="{9A6F0D8B-1A90-4714-969B-24181BE960DB}"/>
               </a:ext>
             </a:extLst>
           </p:cNvPr>
@@ -12408,7 +12774,7 @@
           <p:cNvPr id="3" name="Rectangle 2">
             <a:extLst xmlns:a="http://schemas.openxmlformats.org/drawingml/2006/main">
               <a:ext uri="{FF2B5EF4-FFF2-40B4-BE49-F238E27FC236}">
-                <a16:creationId xmlns:a16="http://schemas.microsoft.com/office/drawing/2014/main" id="{EE96FB6A-A3F3-4F4E-AB22-953E7B72BBB4}"/>
+                <a16:creationId xmlns:a16="http://schemas.microsoft.com/office/drawing/2014/main" id="{ADBDCF1C-D07F-429E-856E-07A24C7875A6}"/>
               </a:ext>
             </a:extLst>
           </p:cNvPr>
@@ -12461,7 +12827,7 @@
           <p:cNvPr id="4" name="Rectangle 3">
             <a:extLst xmlns:a="http://schemas.openxmlformats.org/drawingml/2006/main">
               <a:ext uri="{FF2B5EF4-FFF2-40B4-BE49-F238E27FC236}">
-                <a16:creationId xmlns:a16="http://schemas.microsoft.com/office/drawing/2014/main" id="{489E2078-0CDC-463E-BDD7-D4944CDEA752}"/>
+                <a16:creationId xmlns:a16="http://schemas.microsoft.com/office/drawing/2014/main" id="{8F493E1E-35A6-4DFE-998C-D11A5F19143E}"/>
               </a:ext>
             </a:extLst>
           </p:cNvPr>
@@ -12514,7 +12880,7 @@
           <p:cNvPr id="5" name="TextBox 4">
             <a:extLst xmlns:a="http://schemas.openxmlformats.org/drawingml/2006/main">
               <a:ext uri="{FF2B5EF4-FFF2-40B4-BE49-F238E27FC236}">
-                <a16:creationId xmlns:a16="http://schemas.microsoft.com/office/drawing/2014/main" id="{D9DE8BDF-779C-432A-A6C2-360F6BB8675D}"/>
+                <a16:creationId xmlns:a16="http://schemas.microsoft.com/office/drawing/2014/main" id="{7D484F5E-28DF-403A-BD55-12E2DA5578B9}"/>
               </a:ext>
             </a:extLst>
           </p:cNvPr>
@@ -12577,7 +12943,7 @@
           <p:cNvPr id="6" name="Rounded Rectangle 5">
             <a:extLst xmlns:a="http://schemas.openxmlformats.org/drawingml/2006/main">
               <a:ext uri="{FF2B5EF4-FFF2-40B4-BE49-F238E27FC236}">
-                <a16:creationId xmlns:a16="http://schemas.microsoft.com/office/drawing/2014/main" id="{33D2BEEC-9130-4A0D-B66C-7AFFAB7BB5F9}"/>
+                <a16:creationId xmlns:a16="http://schemas.microsoft.com/office/drawing/2014/main" id="{5C71D30C-3B04-4ECE-88C3-560968794D82}"/>
               </a:ext>
             </a:extLst>
           </p:cNvPr>
@@ -12632,7 +12998,7 @@
           <p:cNvPr id="7" name="TextBox 6">
             <a:extLst xmlns:a="http://schemas.openxmlformats.org/drawingml/2006/main">
               <a:ext uri="{FF2B5EF4-FFF2-40B4-BE49-F238E27FC236}">
-                <a16:creationId xmlns:a16="http://schemas.microsoft.com/office/drawing/2014/main" id="{7DA89E70-02C2-4978-8C9D-C717E8543A2E}"/>
+                <a16:creationId xmlns:a16="http://schemas.microsoft.com/office/drawing/2014/main" id="{F1CC8640-F1C6-4672-91E4-8C87552209DC}"/>
               </a:ext>
             </a:extLst>
           </p:cNvPr>
@@ -12764,7 +13130,7 @@
               </a:defRPr>
             </a:pPr>
             <a:r>
-              <a:t>  • no_rag (k=0): 643 in / 224 out (~$0.00039 / query)</a:t>
+              <a:t>  • no_rag (k=0): 643.0 mean prompt tokens, med lat 7.89s (~0.000390 USD / logical req)</a:t>
             </a:r>
           </a:p>
           <a:p xmlns:a="http://schemas.openxmlformats.org/drawingml/2006/main">
@@ -12840,7 +13206,7 @@
               </a:defRPr>
             </a:pPr>
             <a:r>
-              <a:t>  • rag_k10 (k=10): 4,537 in / 801 out (~$0.00187 / query)</a:t>
+              <a:t>  • rag_k10 (k=10): 4536.5 mean prompt tokens, med lat 9.90s (~0.001870 USD / logical req)</a:t>
             </a:r>
           </a:p>
           <a:p xmlns:a="http://schemas.openxmlformats.org/drawingml/2006/main">
@@ -12878,7 +13244,7 @@
               </a:defRPr>
             </a:pPr>
             <a:r>
-              <a:t>  • Giữ chỗ thận trọng tạm thời: $0.05264010 USD (prior_pilot_provisional_hold_usd).</a:t>
+              <a:t>  • Giữ chỗ thận trọng tạm thời: 0.05264010 USD (prior_pilot_provisional_hold_usd).</a:t>
             </a:r>
           </a:p>
           <a:p xmlns:a="http://schemas.openxmlformats.org/drawingml/2006/main">
@@ -12897,7 +13263,7 @@
               </a:defRPr>
             </a:pPr>
             <a:r>
-              <a:t>  • Dự báo chuẩn tắc tập TEST (Canonical forecast): $8.20 – $8.99 USD cho 6,400 requests.</a:t>
+              <a:t>  • Hạch toán điều kiện chuẩn (Canonical Total): 8.50 USD | Net Remaining: 11.44 USD.</a:t>
             </a:r>
           </a:p>
           <a:p xmlns:a="http://schemas.openxmlformats.org/drawingml/2006/main">
@@ -12916,7 +13282,7 @@
               </a:defRPr>
             </a:pPr>
             <a:r>
-              <a:t>  • Trần ngân sách đóng băng cứng (Hard budget cap): $19.99 USD (hard_budget_limit_usd).</a:t>
+              <a:t>  • Trần ngân sách đóng băng cứng: 19.99 USD (hard_budget_limit_usd).</a:t>
             </a:r>
           </a:p>
         </p:txBody>
@@ -12930,7 +13296,7 @@
           <p:nvPr/>
         </p:nvPicPr>
         <p:blipFill>
-          <a:blip xmlns:r="http://schemas.openxmlformats.org/officeDocument/2006/relationships" xmlns:a="http://schemas.openxmlformats.org/drawingml/2006/main" r:embed="Rada20eb592c24666"/>
+          <a:blip xmlns:r="http://schemas.openxmlformats.org/officeDocument/2006/relationships" xmlns:a="http://schemas.openxmlformats.org/drawingml/2006/main" r:embed="Rd1920b8d366045d7"/>
           <a:stretch xmlns:a="http://schemas.openxmlformats.org/drawingml/2006/main">
             <a:fillRect l="0" t="0" r="0" b="0"/>
           </a:stretch>
@@ -12950,7 +13316,7 @@
           <p:cNvPr id="9" name="Rounded Rectangle 8">
             <a:extLst xmlns:a="http://schemas.openxmlformats.org/drawingml/2006/main">
               <a:ext uri="{FF2B5EF4-FFF2-40B4-BE49-F238E27FC236}">
-                <a16:creationId xmlns:a16="http://schemas.microsoft.com/office/drawing/2014/main" id="{42E78E11-B910-4433-8494-A36D0E7DEF76}"/>
+                <a16:creationId xmlns:a16="http://schemas.microsoft.com/office/drawing/2014/main" id="{5E4D2763-03FE-4E8D-BC91-1A227BFF91DD}"/>
               </a:ext>
             </a:extLst>
           </p:cNvPr>
@@ -13005,7 +13371,7 @@
           <p:cNvPr id="10" name="TextBox 9">
             <a:extLst xmlns:a="http://schemas.openxmlformats.org/drawingml/2006/main">
               <a:ext uri="{FF2B5EF4-FFF2-40B4-BE49-F238E27FC236}">
-                <a16:creationId xmlns:a16="http://schemas.microsoft.com/office/drawing/2014/main" id="{591939A0-9F0F-487D-AC5A-87714AA6C3CE}"/>
+                <a16:creationId xmlns:a16="http://schemas.microsoft.com/office/drawing/2014/main" id="{4F1F517E-8CC7-4CD1-B2A3-D35B3B387BCE}"/>
               </a:ext>
             </a:extLst>
           </p:cNvPr>
@@ -13088,7 +13454,7 @@
     </p:spTree>
     <p:extLst>
       <p:ext uri="{BB962C8B-B14F-4D97-AF65-F5344CB8AC3E}">
-        <p14:creationId xmlns:p14="http://schemas.microsoft.com/office/powerpoint/2010/main" val="12290119"/>
+        <p14:creationId xmlns:p14="http://schemas.microsoft.com/office/powerpoint/2010/main" val="1229984318"/>
       </p:ext>
     </p:extLst>
   </p:cSld>

--- a/reports/evidence/fixture_populated_slides.pptx
+++ b/reports/evidence/fixture_populated_slides.pptx
@@ -2,24 +2,24 @@
 <file path=ppt/presentation.xml><?xml version="1.0" encoding="utf-8"?>
 <p:presentation xmlns:p="http://schemas.openxmlformats.org/presentationml/2006/main">
   <p:sldMasterIdLst>
-    <p:sldMasterId xmlns:r="http://schemas.openxmlformats.org/officeDocument/2006/relationships" id="2147483648" r:id="R7cee1c6823394d87"/>
+    <p:sldMasterId xmlns:r="http://schemas.openxmlformats.org/officeDocument/2006/relationships" id="2147483648" r:id="Re83606f4b3cd4a6c"/>
   </p:sldMasterIdLst>
   <p:notesMasterIdLst>
-    <p:notesMasterId xmlns:r="http://schemas.openxmlformats.org/officeDocument/2006/relationships" r:id="Ra2416668a3fe44a7"/>
+    <p:notesMasterId xmlns:r="http://schemas.openxmlformats.org/officeDocument/2006/relationships" r:id="Rb98fb851a9004693"/>
   </p:notesMasterIdLst>
   <p:sldIdLst>
-    <p:sldId xmlns:r="http://schemas.openxmlformats.org/officeDocument/2006/relationships" id="256" r:id="Ra7af2306692c4af8"/>
-    <p:sldId xmlns:r="http://schemas.openxmlformats.org/officeDocument/2006/relationships" id="257" r:id="Rd74caa48f91b49d3"/>
-    <p:sldId xmlns:r="http://schemas.openxmlformats.org/officeDocument/2006/relationships" id="258" r:id="R254c4558eb324a0a"/>
-    <p:sldId xmlns:r="http://schemas.openxmlformats.org/officeDocument/2006/relationships" id="259" r:id="R2f725f3658054dd6"/>
-    <p:sldId xmlns:r="http://schemas.openxmlformats.org/officeDocument/2006/relationships" id="260" r:id="R4a95e85158f04dea"/>
-    <p:sldId xmlns:r="http://schemas.openxmlformats.org/officeDocument/2006/relationships" id="261" r:id="Rca78a2290d9c47ee"/>
-    <p:sldId xmlns:r="http://schemas.openxmlformats.org/officeDocument/2006/relationships" id="262" r:id="R9da1207a6e1c405e"/>
-    <p:sldId xmlns:r="http://schemas.openxmlformats.org/officeDocument/2006/relationships" id="263" r:id="R4260f777b7fd4d7f"/>
-    <p:sldId xmlns:r="http://schemas.openxmlformats.org/officeDocument/2006/relationships" id="264" r:id="R7c94c5b2077c49f0"/>
-    <p:sldId xmlns:r="http://schemas.openxmlformats.org/officeDocument/2006/relationships" id="265" r:id="R724e469a62954b76"/>
-    <p:sldId xmlns:r="http://schemas.openxmlformats.org/officeDocument/2006/relationships" id="266" r:id="R1b79a6bba45b4f8a"/>
-    <p:sldId xmlns:r="http://schemas.openxmlformats.org/officeDocument/2006/relationships" id="267" r:id="R571ac6cdeaf64aa7"/>
+    <p:sldId xmlns:r="http://schemas.openxmlformats.org/officeDocument/2006/relationships" id="256" r:id="Rc72db5862dc744cd"/>
+    <p:sldId xmlns:r="http://schemas.openxmlformats.org/officeDocument/2006/relationships" id="257" r:id="R847ef263d8c84ea2"/>
+    <p:sldId xmlns:r="http://schemas.openxmlformats.org/officeDocument/2006/relationships" id="258" r:id="R421d86f0cbf54a3f"/>
+    <p:sldId xmlns:r="http://schemas.openxmlformats.org/officeDocument/2006/relationships" id="259" r:id="Ra0ee6b1df59c400b"/>
+    <p:sldId xmlns:r="http://schemas.openxmlformats.org/officeDocument/2006/relationships" id="260" r:id="R9c40e427af924bf6"/>
+    <p:sldId xmlns:r="http://schemas.openxmlformats.org/officeDocument/2006/relationships" id="261" r:id="Ra1bfcc8411cf4d6f"/>
+    <p:sldId xmlns:r="http://schemas.openxmlformats.org/officeDocument/2006/relationships" id="262" r:id="Rc581e41578ab494f"/>
+    <p:sldId xmlns:r="http://schemas.openxmlformats.org/officeDocument/2006/relationships" id="263" r:id="R62576bcb9b6a4eed"/>
+    <p:sldId xmlns:r="http://schemas.openxmlformats.org/officeDocument/2006/relationships" id="264" r:id="Rd321c64c8e64467a"/>
+    <p:sldId xmlns:r="http://schemas.openxmlformats.org/officeDocument/2006/relationships" id="265" r:id="R60c66094471d4eb3"/>
+    <p:sldId xmlns:r="http://schemas.openxmlformats.org/officeDocument/2006/relationships" id="266" r:id="R75481b05ea3b4d2d"/>
+    <p:sldId xmlns:r="http://schemas.openxmlformats.org/officeDocument/2006/relationships" id="267" r:id="Rb613b301df2d45e1"/>
   </p:sldIdLst>
   <p:sldSz cx="12191695" cy="6858000"/>
   <p:notesSz cx="6858000" cy="9144000"/>
@@ -1433,6 +1433,11 @@
               <a:t>Bằng chứng dự án: reports/experiment_protocol_v1.md (D2e, D2f, D2h, D2i; SHA-256: d3bf3d31...); tests/test_experiment_evaluation.py (94 tests pass).</a:t>
             </a:r>
           </a:p>
+          <a:p xmlns:a="http://schemas.openxmlformats.org/drawingml/2006/main">
+            <a:r>
+              <a:t>[DIAGNOSTIC TEST FIXTURE STATS] Khoảng tin cậy 95% Bootstrap (B=1000): no_rag=[0.3500, 0.6500], rag_k1=[0.3500, 0.6500], rag_k3=[0.3500, 0.6500], rag_k5=[0.3500, 0.6500], rag_k10=[0.3500, 0.6500]. Đo lường phân rã lỗi D2i độc lập: Wrong Class Rate=0.3333, Overlaps (Miss &amp; Wrong=0, Miss &amp; Prov=0, Miss &amp; Parse=0, Miss &amp; Inval=0).</a:t>
+            </a:r>
+          </a:p>
         </p:txBody>
       </p:sp>
       <p:sp>
@@ -1525,7 +1530,7 @@
           </a:p>
           <a:p xmlns:a="http://schemas.openxmlformats.org/drawingml/2006/main">
             <a:r>
-              <a:t>4. Phân biệt rõ khoản giữ chỗ thận trọng tạm thời ($0.05264010 USD prior_pilot_provisional_hold_usd), dự báo chuẩn tắc tập TEST ($8.20 – $8.99 USD cho 6,400 requests), và trần ngân sách đóng băng cứng $19.99 USD (hard_budget_limit_usd).</a:t>
+              <a:t>4. Phân biệt rõ khoản giữ chỗ thận trọng tạm thời ($0.05264010 USD prior_pilot_provisional_hold_usd), dự báo chuẩn tắc tập TEST (hạch toán điều kiện chuẩn $8.50 USD (dự báo 6,400 requests) [DIAGNOSTIC FIXTURE PROJECTION]), và trần ngân sách đóng băng cứng $19.99 USD (hard_budget_limit_usd).</a:t>
             </a:r>
           </a:p>
           <a:p xmlns:a="http://schemas.openxmlformats.org/drawingml/2006/main">
@@ -1577,7 +1582,7 @@
           <p:cNvPr id="2" name="Title 1">
             <a:extLst xmlns:a="http://schemas.openxmlformats.org/drawingml/2006/main">
               <a:ext uri="{FF2B5EF4-FFF2-40B4-BE49-F238E27FC236}">
-                <a16:creationId xmlns:a16="http://schemas.microsoft.com/office/drawing/2014/main" id="{F9DA5CCA-EA78-4031-9D73-0552F79BBAE6}"/>
+                <a16:creationId xmlns:a16="http://schemas.microsoft.com/office/drawing/2014/main" id="{F44F11A1-D9D1-40B6-898B-E87A0B75CFDC}"/>
               </a:ext>
             </a:extLst>
           </p:cNvPr>
@@ -1610,7 +1615,7 @@
           <p:cNvPr id="3" name="Subtitle 2">
             <a:extLst xmlns:a="http://schemas.openxmlformats.org/drawingml/2006/main">
               <a:ext uri="{FF2B5EF4-FFF2-40B4-BE49-F238E27FC236}">
-                <a16:creationId xmlns:a16="http://schemas.microsoft.com/office/drawing/2014/main" id="{19BB409A-C2F9-4FB0-8AA0-B4B9C228E823}"/>
+                <a16:creationId xmlns:a16="http://schemas.microsoft.com/office/drawing/2014/main" id="{930DB4F5-6C16-4C90-9478-D11BE04AD3CF}"/>
               </a:ext>
             </a:extLst>
           </p:cNvPr>
@@ -1734,7 +1739,7 @@
           <p:cNvPr id="4" name="Date Placeholder 3">
             <a:extLst xmlns:a="http://schemas.openxmlformats.org/drawingml/2006/main">
               <a:ext uri="{FF2B5EF4-FFF2-40B4-BE49-F238E27FC236}">
-                <a16:creationId xmlns:a16="http://schemas.microsoft.com/office/drawing/2014/main" id="{B795B3B7-FE2B-49B6-B889-9C4E1EF39834}"/>
+                <a16:creationId xmlns:a16="http://schemas.microsoft.com/office/drawing/2014/main" id="{2364297E-B181-4E7C-BDED-C296B0D1BAF5}"/>
               </a:ext>
             </a:extLst>
           </p:cNvPr>
@@ -1762,7 +1767,7 @@
           <p:cNvPr id="5" name="Footer Placeholder 4">
             <a:extLst xmlns:a="http://schemas.openxmlformats.org/drawingml/2006/main">
               <a:ext uri="{FF2B5EF4-FFF2-40B4-BE49-F238E27FC236}">
-                <a16:creationId xmlns:a16="http://schemas.microsoft.com/office/drawing/2014/main" id="{60D51D36-2399-4278-8013-E7F2535656E2}"/>
+                <a16:creationId xmlns:a16="http://schemas.microsoft.com/office/drawing/2014/main" id="{7BF34AB5-9A20-4CA0-94B6-782FB47F22B2}"/>
               </a:ext>
             </a:extLst>
           </p:cNvPr>
@@ -1787,7 +1792,7 @@
           <p:cNvPr id="6" name="Slide Number Placeholder 5">
             <a:extLst xmlns:a="http://schemas.openxmlformats.org/drawingml/2006/main">
               <a:ext uri="{FF2B5EF4-FFF2-40B4-BE49-F238E27FC236}">
-                <a16:creationId xmlns:a16="http://schemas.microsoft.com/office/drawing/2014/main" id="{70B92285-AB39-490B-84D3-AD549ED76BB9}"/>
+                <a16:creationId xmlns:a16="http://schemas.microsoft.com/office/drawing/2014/main" id="{87126F1A-131C-41AF-BA89-AFF5A89008BB}"/>
               </a:ext>
             </a:extLst>
           </p:cNvPr>
@@ -1832,7 +1837,7 @@
           <p:cNvPr id="2" name="Title 1">
             <a:extLst xmlns:a="http://schemas.openxmlformats.org/drawingml/2006/main">
               <a:ext uri="{FF2B5EF4-FFF2-40B4-BE49-F238E27FC236}">
-                <a16:creationId xmlns:a16="http://schemas.microsoft.com/office/drawing/2014/main" id="{FC0B20C2-F336-4475-8B13-B11457B3FFD2}"/>
+                <a16:creationId xmlns:a16="http://schemas.microsoft.com/office/drawing/2014/main" id="{111D248A-AF11-4C73-A72A-C5BEDE797486}"/>
               </a:ext>
             </a:extLst>
           </p:cNvPr>
@@ -1860,7 +1865,7 @@
           <p:cNvPr id="3" name="Vertical Text Placeholder 2">
             <a:extLst xmlns:a="http://schemas.openxmlformats.org/drawingml/2006/main">
               <a:ext uri="{FF2B5EF4-FFF2-40B4-BE49-F238E27FC236}">
-                <a16:creationId xmlns:a16="http://schemas.microsoft.com/office/drawing/2014/main" id="{B841D65A-AEDB-4068-BA32-56A721BDDA10}"/>
+                <a16:creationId xmlns:a16="http://schemas.microsoft.com/office/drawing/2014/main" id="{E4921C64-FCEE-4DB9-AE36-6031A0A3236C}"/>
               </a:ext>
             </a:extLst>
           </p:cNvPr>
@@ -1923,7 +1928,7 @@
           <p:cNvPr id="4" name="Date Placeholder 3">
             <a:extLst xmlns:a="http://schemas.openxmlformats.org/drawingml/2006/main">
               <a:ext uri="{FF2B5EF4-FFF2-40B4-BE49-F238E27FC236}">
-                <a16:creationId xmlns:a16="http://schemas.microsoft.com/office/drawing/2014/main" id="{3129638E-1C98-43F1-9D14-983C2C014E88}"/>
+                <a16:creationId xmlns:a16="http://schemas.microsoft.com/office/drawing/2014/main" id="{27DB5FD5-9099-452B-BA67-ABC28FF9937A}"/>
               </a:ext>
             </a:extLst>
           </p:cNvPr>
@@ -1951,7 +1956,7 @@
           <p:cNvPr id="5" name="Footer Placeholder 4">
             <a:extLst xmlns:a="http://schemas.openxmlformats.org/drawingml/2006/main">
               <a:ext uri="{FF2B5EF4-FFF2-40B4-BE49-F238E27FC236}">
-                <a16:creationId xmlns:a16="http://schemas.microsoft.com/office/drawing/2014/main" id="{EBCBB96D-00A3-4182-AC99-C4AFD7861632}"/>
+                <a16:creationId xmlns:a16="http://schemas.microsoft.com/office/drawing/2014/main" id="{2DDF249D-995E-4AD9-B1B6-3620E2DD0BC2}"/>
               </a:ext>
             </a:extLst>
           </p:cNvPr>
@@ -1976,7 +1981,7 @@
           <p:cNvPr id="6" name="Slide Number Placeholder 5">
             <a:extLst xmlns:a="http://schemas.openxmlformats.org/drawingml/2006/main">
               <a:ext uri="{FF2B5EF4-FFF2-40B4-BE49-F238E27FC236}">
-                <a16:creationId xmlns:a16="http://schemas.microsoft.com/office/drawing/2014/main" id="{5FFFFC04-4E85-4F48-88FB-7F6CDE8FFE2B}"/>
+                <a16:creationId xmlns:a16="http://schemas.microsoft.com/office/drawing/2014/main" id="{E4D78CB9-DD79-4209-A95D-C2F80591BFC4}"/>
               </a:ext>
             </a:extLst>
           </p:cNvPr>
@@ -2021,7 +2026,7 @@
           <p:cNvPr id="2" name="Vertical Title 1">
             <a:extLst xmlns:a="http://schemas.openxmlformats.org/drawingml/2006/main">
               <a:ext uri="{FF2B5EF4-FFF2-40B4-BE49-F238E27FC236}">
-                <a16:creationId xmlns:a16="http://schemas.microsoft.com/office/drawing/2014/main" id="{6C77F7A5-C1F9-40A0-87F6-EEDE73A32E5A}"/>
+                <a16:creationId xmlns:a16="http://schemas.microsoft.com/office/drawing/2014/main" id="{5C960FBB-342A-475B-A3CB-478F84E93E53}"/>
               </a:ext>
             </a:extLst>
           </p:cNvPr>
@@ -2054,7 +2059,7 @@
           <p:cNvPr id="3" name="Vertical Text Placeholder 2">
             <a:extLst xmlns:a="http://schemas.openxmlformats.org/drawingml/2006/main">
               <a:ext uri="{FF2B5EF4-FFF2-40B4-BE49-F238E27FC236}">
-                <a16:creationId xmlns:a16="http://schemas.microsoft.com/office/drawing/2014/main" id="{3870C724-5260-4B31-93FA-A3D59056511D}"/>
+                <a16:creationId xmlns:a16="http://schemas.microsoft.com/office/drawing/2014/main" id="{5FC16BEA-C5D8-4375-803D-3AB575F7C380}"/>
               </a:ext>
             </a:extLst>
           </p:cNvPr>
@@ -2122,7 +2127,7 @@
           <p:cNvPr id="4" name="Date Placeholder 3">
             <a:extLst xmlns:a="http://schemas.openxmlformats.org/drawingml/2006/main">
               <a:ext uri="{FF2B5EF4-FFF2-40B4-BE49-F238E27FC236}">
-                <a16:creationId xmlns:a16="http://schemas.microsoft.com/office/drawing/2014/main" id="{6B57E13C-39E7-4676-9A74-B2774572B013}"/>
+                <a16:creationId xmlns:a16="http://schemas.microsoft.com/office/drawing/2014/main" id="{FFF58B34-5AF2-4F6E-A67E-67DD445BBF5E}"/>
               </a:ext>
             </a:extLst>
           </p:cNvPr>
@@ -2150,7 +2155,7 @@
           <p:cNvPr id="5" name="Footer Placeholder 4">
             <a:extLst xmlns:a="http://schemas.openxmlformats.org/drawingml/2006/main">
               <a:ext uri="{FF2B5EF4-FFF2-40B4-BE49-F238E27FC236}">
-                <a16:creationId xmlns:a16="http://schemas.microsoft.com/office/drawing/2014/main" id="{3A0C92E4-54E5-4082-8FE5-43822052E3E0}"/>
+                <a16:creationId xmlns:a16="http://schemas.microsoft.com/office/drawing/2014/main" id="{F2B944A7-24B6-4CE7-95E8-126E95149D9E}"/>
               </a:ext>
             </a:extLst>
           </p:cNvPr>
@@ -2175,7 +2180,7 @@
           <p:cNvPr id="6" name="Slide Number Placeholder 5">
             <a:extLst xmlns:a="http://schemas.openxmlformats.org/drawingml/2006/main">
               <a:ext uri="{FF2B5EF4-FFF2-40B4-BE49-F238E27FC236}">
-                <a16:creationId xmlns:a16="http://schemas.microsoft.com/office/drawing/2014/main" id="{352820C3-61BC-41A5-A209-4C282B022651}"/>
+                <a16:creationId xmlns:a16="http://schemas.microsoft.com/office/drawing/2014/main" id="{D07A60E4-F8A9-46EC-921D-0500DD3FE713}"/>
               </a:ext>
             </a:extLst>
           </p:cNvPr>
@@ -2220,7 +2225,7 @@
           <p:cNvPr id="2" name="Title 1">
             <a:extLst xmlns:a="http://schemas.openxmlformats.org/drawingml/2006/main">
               <a:ext uri="{FF2B5EF4-FFF2-40B4-BE49-F238E27FC236}">
-                <a16:creationId xmlns:a16="http://schemas.microsoft.com/office/drawing/2014/main" id="{24E4A1B5-BCA2-4DAC-869F-ECD99F2D1B4F}"/>
+                <a16:creationId xmlns:a16="http://schemas.microsoft.com/office/drawing/2014/main" id="{803F5ED4-660F-408A-91E0-BDF4E256A258}"/>
               </a:ext>
             </a:extLst>
           </p:cNvPr>
@@ -2248,7 +2253,7 @@
           <p:cNvPr id="3" name="Content Placeholder 2">
             <a:extLst xmlns:a="http://schemas.openxmlformats.org/drawingml/2006/main">
               <a:ext uri="{FF2B5EF4-FFF2-40B4-BE49-F238E27FC236}">
-                <a16:creationId xmlns:a16="http://schemas.microsoft.com/office/drawing/2014/main" id="{753D367C-C51F-4599-AD3E-7D0F59072ABE}"/>
+                <a16:creationId xmlns:a16="http://schemas.microsoft.com/office/drawing/2014/main" id="{B285F96D-8E36-4D7E-A86F-FB6C84EEC949}"/>
               </a:ext>
             </a:extLst>
           </p:cNvPr>
@@ -2311,7 +2316,7 @@
           <p:cNvPr id="4" name="Date Placeholder 3">
             <a:extLst xmlns:a="http://schemas.openxmlformats.org/drawingml/2006/main">
               <a:ext uri="{FF2B5EF4-FFF2-40B4-BE49-F238E27FC236}">
-                <a16:creationId xmlns:a16="http://schemas.microsoft.com/office/drawing/2014/main" id="{738ACF17-65E1-4465-A73B-CC1BCE9C5B86}"/>
+                <a16:creationId xmlns:a16="http://schemas.microsoft.com/office/drawing/2014/main" id="{63008C74-E11C-4D9E-884F-F7A8A6ABD922}"/>
               </a:ext>
             </a:extLst>
           </p:cNvPr>
@@ -2339,7 +2344,7 @@
           <p:cNvPr id="5" name="Footer Placeholder 4">
             <a:extLst xmlns:a="http://schemas.openxmlformats.org/drawingml/2006/main">
               <a:ext uri="{FF2B5EF4-FFF2-40B4-BE49-F238E27FC236}">
-                <a16:creationId xmlns:a16="http://schemas.microsoft.com/office/drawing/2014/main" id="{DCF0738C-3456-4B4D-B8F8-89A0B4FC2F88}"/>
+                <a16:creationId xmlns:a16="http://schemas.microsoft.com/office/drawing/2014/main" id="{C9CB7494-8C35-4104-8C7D-35000602C07C}"/>
               </a:ext>
             </a:extLst>
           </p:cNvPr>
@@ -2364,7 +2369,7 @@
           <p:cNvPr id="6" name="Slide Number Placeholder 5">
             <a:extLst xmlns:a="http://schemas.openxmlformats.org/drawingml/2006/main">
               <a:ext uri="{FF2B5EF4-FFF2-40B4-BE49-F238E27FC236}">
-                <a16:creationId xmlns:a16="http://schemas.microsoft.com/office/drawing/2014/main" id="{63CE349C-E386-4FE4-85DF-635982394CC4}"/>
+                <a16:creationId xmlns:a16="http://schemas.microsoft.com/office/drawing/2014/main" id="{B0046C53-9EB5-458C-B52B-73CEF7421063}"/>
               </a:ext>
             </a:extLst>
           </p:cNvPr>
@@ -2409,7 +2414,7 @@
           <p:cNvPr id="2" name="Title 1">
             <a:extLst xmlns:a="http://schemas.openxmlformats.org/drawingml/2006/main">
               <a:ext uri="{FF2B5EF4-FFF2-40B4-BE49-F238E27FC236}">
-                <a16:creationId xmlns:a16="http://schemas.microsoft.com/office/drawing/2014/main" id="{391A7473-B3CE-4B50-B543-FA316761A063}"/>
+                <a16:creationId xmlns:a16="http://schemas.microsoft.com/office/drawing/2014/main" id="{18533217-2BA5-454A-801E-72AED4AC6A05}"/>
               </a:ext>
             </a:extLst>
           </p:cNvPr>
@@ -2447,7 +2452,7 @@
           <p:cNvPr id="3" name="Text Placeholder 2">
             <a:extLst xmlns:a="http://schemas.openxmlformats.org/drawingml/2006/main">
               <a:ext uri="{FF2B5EF4-FFF2-40B4-BE49-F238E27FC236}">
-                <a16:creationId xmlns:a16="http://schemas.microsoft.com/office/drawing/2014/main" id="{43154A4E-E1EB-49E4-AB50-E78B75B6CC2A}"/>
+                <a16:creationId xmlns:a16="http://schemas.microsoft.com/office/drawing/2014/main" id="{46724E04-F1A3-471E-BADA-8EB3FCB4E579}"/>
               </a:ext>
             </a:extLst>
           </p:cNvPr>
@@ -2573,7 +2578,7 @@
           <p:cNvPr id="4" name="Date Placeholder 3">
             <a:extLst xmlns:a="http://schemas.openxmlformats.org/drawingml/2006/main">
               <a:ext uri="{FF2B5EF4-FFF2-40B4-BE49-F238E27FC236}">
-                <a16:creationId xmlns:a16="http://schemas.microsoft.com/office/drawing/2014/main" id="{4D20F37B-A41F-4453-BE8A-F48B2FD17537}"/>
+                <a16:creationId xmlns:a16="http://schemas.microsoft.com/office/drawing/2014/main" id="{4EE7551C-5DC5-44E4-83F8-B3A556CF17C4}"/>
               </a:ext>
             </a:extLst>
           </p:cNvPr>
@@ -2601,7 +2606,7 @@
           <p:cNvPr id="5" name="Footer Placeholder 4">
             <a:extLst xmlns:a="http://schemas.openxmlformats.org/drawingml/2006/main">
               <a:ext uri="{FF2B5EF4-FFF2-40B4-BE49-F238E27FC236}">
-                <a16:creationId xmlns:a16="http://schemas.microsoft.com/office/drawing/2014/main" id="{C636DA3E-B9F2-41E4-ABF9-F2E7573C70EF}"/>
+                <a16:creationId xmlns:a16="http://schemas.microsoft.com/office/drawing/2014/main" id="{0918039C-14A0-4DA5-AA09-558494AD491B}"/>
               </a:ext>
             </a:extLst>
           </p:cNvPr>
@@ -2626,7 +2631,7 @@
           <p:cNvPr id="6" name="Slide Number Placeholder 5">
             <a:extLst xmlns:a="http://schemas.openxmlformats.org/drawingml/2006/main">
               <a:ext uri="{FF2B5EF4-FFF2-40B4-BE49-F238E27FC236}">
-                <a16:creationId xmlns:a16="http://schemas.microsoft.com/office/drawing/2014/main" id="{37455C70-17F0-4849-A404-8566E814A6E3}"/>
+                <a16:creationId xmlns:a16="http://schemas.microsoft.com/office/drawing/2014/main" id="{CD912306-96C3-4E48-A525-AFCC36EAB5A5}"/>
               </a:ext>
             </a:extLst>
           </p:cNvPr>
@@ -2671,7 +2676,7 @@
           <p:cNvPr id="2" name="Title 1">
             <a:extLst xmlns:a="http://schemas.openxmlformats.org/drawingml/2006/main">
               <a:ext uri="{FF2B5EF4-FFF2-40B4-BE49-F238E27FC236}">
-                <a16:creationId xmlns:a16="http://schemas.microsoft.com/office/drawing/2014/main" id="{C7D2D7A8-3141-4807-A9F0-4B848D847234}"/>
+                <a16:creationId xmlns:a16="http://schemas.microsoft.com/office/drawing/2014/main" id="{CA0AE7F1-3363-4D74-9B78-EF2B1D7D6A2E}"/>
               </a:ext>
             </a:extLst>
           </p:cNvPr>
@@ -2699,7 +2704,7 @@
           <p:cNvPr id="3" name="Content Placeholder 2">
             <a:extLst xmlns:a="http://schemas.openxmlformats.org/drawingml/2006/main">
               <a:ext uri="{FF2B5EF4-FFF2-40B4-BE49-F238E27FC236}">
-                <a16:creationId xmlns:a16="http://schemas.microsoft.com/office/drawing/2014/main" id="{0FBA10AA-CACB-45D8-9A56-71563A20613B}"/>
+                <a16:creationId xmlns:a16="http://schemas.microsoft.com/office/drawing/2014/main" id="{84E3B196-8AF3-4E16-B832-D6A52E21AA27}"/>
               </a:ext>
             </a:extLst>
           </p:cNvPr>
@@ -2804,7 +2809,7 @@
           <p:cNvPr id="4" name="Content Placeholder 3">
             <a:extLst xmlns:a="http://schemas.openxmlformats.org/drawingml/2006/main">
               <a:ext uri="{FF2B5EF4-FFF2-40B4-BE49-F238E27FC236}">
-                <a16:creationId xmlns:a16="http://schemas.microsoft.com/office/drawing/2014/main" id="{8189375D-8C49-4840-AC8F-2FCCDF185DD4}"/>
+                <a16:creationId xmlns:a16="http://schemas.microsoft.com/office/drawing/2014/main" id="{0E2382F8-C4EE-40C4-83D1-1775F65ACE29}"/>
               </a:ext>
             </a:extLst>
           </p:cNvPr>
@@ -2909,7 +2914,7 @@
           <p:cNvPr id="5" name="Date Placeholder 4">
             <a:extLst xmlns:a="http://schemas.openxmlformats.org/drawingml/2006/main">
               <a:ext uri="{FF2B5EF4-FFF2-40B4-BE49-F238E27FC236}">
-                <a16:creationId xmlns:a16="http://schemas.microsoft.com/office/drawing/2014/main" id="{A1E705D8-EF4D-4D1B-95C5-3D68EF3E57A3}"/>
+                <a16:creationId xmlns:a16="http://schemas.microsoft.com/office/drawing/2014/main" id="{74D76EB9-61C9-4774-A4BE-CB31AF7A1743}"/>
               </a:ext>
             </a:extLst>
           </p:cNvPr>
@@ -2937,7 +2942,7 @@
           <p:cNvPr id="6" name="Footer Placeholder 5">
             <a:extLst xmlns:a="http://schemas.openxmlformats.org/drawingml/2006/main">
               <a:ext uri="{FF2B5EF4-FFF2-40B4-BE49-F238E27FC236}">
-                <a16:creationId xmlns:a16="http://schemas.microsoft.com/office/drawing/2014/main" id="{3A04959D-E4AE-4CD7-BDC8-EB006D108012}"/>
+                <a16:creationId xmlns:a16="http://schemas.microsoft.com/office/drawing/2014/main" id="{54969EF2-40FB-4F00-8CA4-3569D46160F7}"/>
               </a:ext>
             </a:extLst>
           </p:cNvPr>
@@ -2962,7 +2967,7 @@
           <p:cNvPr id="7" name="Slide Number Placeholder 6">
             <a:extLst xmlns:a="http://schemas.openxmlformats.org/drawingml/2006/main">
               <a:ext uri="{FF2B5EF4-FFF2-40B4-BE49-F238E27FC236}">
-                <a16:creationId xmlns:a16="http://schemas.microsoft.com/office/drawing/2014/main" id="{6ED017F7-9AAC-4EA3-B13B-301A7C105760}"/>
+                <a16:creationId xmlns:a16="http://schemas.microsoft.com/office/drawing/2014/main" id="{91894F93-5FFB-4396-A9C4-1EC45C52364F}"/>
               </a:ext>
             </a:extLst>
           </p:cNvPr>
@@ -3007,7 +3012,7 @@
           <p:cNvPr id="2" name="Title 1">
             <a:extLst xmlns:a="http://schemas.openxmlformats.org/drawingml/2006/main">
               <a:ext uri="{FF2B5EF4-FFF2-40B4-BE49-F238E27FC236}">
-                <a16:creationId xmlns:a16="http://schemas.microsoft.com/office/drawing/2014/main" id="{B73E4511-F503-4B48-B8EE-6B17183C6793}"/>
+                <a16:creationId xmlns:a16="http://schemas.microsoft.com/office/drawing/2014/main" id="{B6BCBE43-05DB-4482-8F13-26FF27B33BFC}"/>
               </a:ext>
             </a:extLst>
           </p:cNvPr>
@@ -3040,7 +3045,7 @@
           <p:cNvPr id="3" name="Text Placeholder 2">
             <a:extLst xmlns:a="http://schemas.openxmlformats.org/drawingml/2006/main">
               <a:ext uri="{FF2B5EF4-FFF2-40B4-BE49-F238E27FC236}">
-                <a16:creationId xmlns:a16="http://schemas.microsoft.com/office/drawing/2014/main" id="{AB4C551B-0350-4040-8C00-8BCA4062FFF8}"/>
+                <a16:creationId xmlns:a16="http://schemas.microsoft.com/office/drawing/2014/main" id="{1D684AD9-C775-446C-B73D-8E05C78741B9}"/>
               </a:ext>
             </a:extLst>
           </p:cNvPr>
@@ -3112,7 +3117,7 @@
           <p:cNvPr id="4" name="Content Placeholder 3">
             <a:extLst xmlns:a="http://schemas.openxmlformats.org/drawingml/2006/main">
               <a:ext uri="{FF2B5EF4-FFF2-40B4-BE49-F238E27FC236}">
-                <a16:creationId xmlns:a16="http://schemas.microsoft.com/office/drawing/2014/main" id="{F0DF20D8-2783-4830-98B4-2B8A435945E3}"/>
+                <a16:creationId xmlns:a16="http://schemas.microsoft.com/office/drawing/2014/main" id="{735C2CAD-5DDF-4A9A-A4BA-D09860F9034A}"/>
               </a:ext>
             </a:extLst>
           </p:cNvPr>
@@ -3217,7 +3222,7 @@
           <p:cNvPr id="5" name="Text Placeholder 4">
             <a:extLst xmlns:a="http://schemas.openxmlformats.org/drawingml/2006/main">
               <a:ext uri="{FF2B5EF4-FFF2-40B4-BE49-F238E27FC236}">
-                <a16:creationId xmlns:a16="http://schemas.microsoft.com/office/drawing/2014/main" id="{16DAFA06-5981-4A6A-BCB9-D8533DA2405C}"/>
+                <a16:creationId xmlns:a16="http://schemas.microsoft.com/office/drawing/2014/main" id="{BF80CB5B-E209-43DE-BE45-F4FBA700C3E5}"/>
               </a:ext>
             </a:extLst>
           </p:cNvPr>
@@ -3289,7 +3294,7 @@
           <p:cNvPr id="6" name="Content Placeholder 5">
             <a:extLst xmlns:a="http://schemas.openxmlformats.org/drawingml/2006/main">
               <a:ext uri="{FF2B5EF4-FFF2-40B4-BE49-F238E27FC236}">
-                <a16:creationId xmlns:a16="http://schemas.microsoft.com/office/drawing/2014/main" id="{15C8AA1E-B341-4598-837F-8951C6D9FA90}"/>
+                <a16:creationId xmlns:a16="http://schemas.microsoft.com/office/drawing/2014/main" id="{6FDAA89E-AEA2-402F-B648-8266F03E5107}"/>
               </a:ext>
             </a:extLst>
           </p:cNvPr>
@@ -3394,7 +3399,7 @@
           <p:cNvPr id="7" name="Date Placeholder 6">
             <a:extLst xmlns:a="http://schemas.openxmlformats.org/drawingml/2006/main">
               <a:ext uri="{FF2B5EF4-FFF2-40B4-BE49-F238E27FC236}">
-                <a16:creationId xmlns:a16="http://schemas.microsoft.com/office/drawing/2014/main" id="{A2A7B23B-0C6D-4889-BFA2-7B0C32AE926F}"/>
+                <a16:creationId xmlns:a16="http://schemas.microsoft.com/office/drawing/2014/main" id="{302DC3D8-49DB-4502-91F7-AA6E9E8D12D0}"/>
               </a:ext>
             </a:extLst>
           </p:cNvPr>
@@ -3422,7 +3427,7 @@
           <p:cNvPr id="8" name="Footer Placeholder 7">
             <a:extLst xmlns:a="http://schemas.openxmlformats.org/drawingml/2006/main">
               <a:ext uri="{FF2B5EF4-FFF2-40B4-BE49-F238E27FC236}">
-                <a16:creationId xmlns:a16="http://schemas.microsoft.com/office/drawing/2014/main" id="{96294E75-1ED2-4258-BCC2-79BC15773B9C}"/>
+                <a16:creationId xmlns:a16="http://schemas.microsoft.com/office/drawing/2014/main" id="{A742F8BD-180F-4201-A26E-A257E9476D69}"/>
               </a:ext>
             </a:extLst>
           </p:cNvPr>
@@ -3447,7 +3452,7 @@
           <p:cNvPr id="9" name="Slide Number Placeholder 8">
             <a:extLst xmlns:a="http://schemas.openxmlformats.org/drawingml/2006/main">
               <a:ext uri="{FF2B5EF4-FFF2-40B4-BE49-F238E27FC236}">
-                <a16:creationId xmlns:a16="http://schemas.microsoft.com/office/drawing/2014/main" id="{EC185C55-613E-490D-8F05-A90E1F642314}"/>
+                <a16:creationId xmlns:a16="http://schemas.microsoft.com/office/drawing/2014/main" id="{D61B3F9C-E723-4FD3-A91F-5449D8CFEF48}"/>
               </a:ext>
             </a:extLst>
           </p:cNvPr>
@@ -3492,7 +3497,7 @@
           <p:cNvPr id="2" name="Title 1">
             <a:extLst xmlns:a="http://schemas.openxmlformats.org/drawingml/2006/main">
               <a:ext uri="{FF2B5EF4-FFF2-40B4-BE49-F238E27FC236}">
-                <a16:creationId xmlns:a16="http://schemas.microsoft.com/office/drawing/2014/main" id="{45B11051-4B00-4A84-8E8C-8301CCF13FF7}"/>
+                <a16:creationId xmlns:a16="http://schemas.microsoft.com/office/drawing/2014/main" id="{3FCE87A5-F629-42B7-9729-469675D5A1E8}"/>
               </a:ext>
             </a:extLst>
           </p:cNvPr>
@@ -3520,7 +3525,7 @@
           <p:cNvPr id="3" name="Date Placeholder 2">
             <a:extLst xmlns:a="http://schemas.openxmlformats.org/drawingml/2006/main">
               <a:ext uri="{FF2B5EF4-FFF2-40B4-BE49-F238E27FC236}">
-                <a16:creationId xmlns:a16="http://schemas.microsoft.com/office/drawing/2014/main" id="{66580038-F531-4C80-9AF5-286B661DAF57}"/>
+                <a16:creationId xmlns:a16="http://schemas.microsoft.com/office/drawing/2014/main" id="{4F87B7AD-2A00-41DA-AB21-5CD3B535097E}"/>
               </a:ext>
             </a:extLst>
           </p:cNvPr>
@@ -3548,7 +3553,7 @@
           <p:cNvPr id="4" name="Footer Placeholder 3">
             <a:extLst xmlns:a="http://schemas.openxmlformats.org/drawingml/2006/main">
               <a:ext uri="{FF2B5EF4-FFF2-40B4-BE49-F238E27FC236}">
-                <a16:creationId xmlns:a16="http://schemas.microsoft.com/office/drawing/2014/main" id="{AF98CB20-2155-4A8D-A513-4716A8A2D2A9}"/>
+                <a16:creationId xmlns:a16="http://schemas.microsoft.com/office/drawing/2014/main" id="{660839C9-CFFA-495B-8757-645548BD1B1D}"/>
               </a:ext>
             </a:extLst>
           </p:cNvPr>
@@ -3573,7 +3578,7 @@
           <p:cNvPr id="5" name="Slide Number Placeholder 4">
             <a:extLst xmlns:a="http://schemas.openxmlformats.org/drawingml/2006/main">
               <a:ext uri="{FF2B5EF4-FFF2-40B4-BE49-F238E27FC236}">
-                <a16:creationId xmlns:a16="http://schemas.microsoft.com/office/drawing/2014/main" id="{3F01E39A-C8D6-41E8-91D4-602408199D6A}"/>
+                <a16:creationId xmlns:a16="http://schemas.microsoft.com/office/drawing/2014/main" id="{F668E14A-0FF8-4B31-AF04-8F7C79098C1B}"/>
               </a:ext>
             </a:extLst>
           </p:cNvPr>
@@ -3618,7 +3623,7 @@
           <p:cNvPr id="2" name="Date Placeholder 1">
             <a:extLst xmlns:a="http://schemas.openxmlformats.org/drawingml/2006/main">
               <a:ext uri="{FF2B5EF4-FFF2-40B4-BE49-F238E27FC236}">
-                <a16:creationId xmlns:a16="http://schemas.microsoft.com/office/drawing/2014/main" id="{7B415D65-C11B-4E90-B2BD-2562E6B2806D}"/>
+                <a16:creationId xmlns:a16="http://schemas.microsoft.com/office/drawing/2014/main" id="{61EC86E2-AAA0-4F88-8B6A-9740190C55D6}"/>
               </a:ext>
             </a:extLst>
           </p:cNvPr>
@@ -3646,7 +3651,7 @@
           <p:cNvPr id="3" name="Footer Placeholder 2">
             <a:extLst xmlns:a="http://schemas.openxmlformats.org/drawingml/2006/main">
               <a:ext uri="{FF2B5EF4-FFF2-40B4-BE49-F238E27FC236}">
-                <a16:creationId xmlns:a16="http://schemas.microsoft.com/office/drawing/2014/main" id="{25462E44-65B4-4C79-A39C-AD5B0EDC47CD}"/>
+                <a16:creationId xmlns:a16="http://schemas.microsoft.com/office/drawing/2014/main" id="{B0C9DD9B-0AB5-435E-A706-A6DB7098CBA8}"/>
               </a:ext>
             </a:extLst>
           </p:cNvPr>
@@ -3671,7 +3676,7 @@
           <p:cNvPr id="4" name="Slide Number Placeholder 3">
             <a:extLst xmlns:a="http://schemas.openxmlformats.org/drawingml/2006/main">
               <a:ext uri="{FF2B5EF4-FFF2-40B4-BE49-F238E27FC236}">
-                <a16:creationId xmlns:a16="http://schemas.microsoft.com/office/drawing/2014/main" id="{65654616-2434-459C-8B21-C24C022146C4}"/>
+                <a16:creationId xmlns:a16="http://schemas.microsoft.com/office/drawing/2014/main" id="{6866060F-F0C1-4D63-A14D-8183F490818F}"/>
               </a:ext>
             </a:extLst>
           </p:cNvPr>
@@ -3716,7 +3721,7 @@
           <p:cNvPr id="2" name="Title 1">
             <a:extLst xmlns:a="http://schemas.openxmlformats.org/drawingml/2006/main">
               <a:ext uri="{FF2B5EF4-FFF2-40B4-BE49-F238E27FC236}">
-                <a16:creationId xmlns:a16="http://schemas.microsoft.com/office/drawing/2014/main" id="{20CA77EA-3EA4-46AD-995F-0FB295B3A923}"/>
+                <a16:creationId xmlns:a16="http://schemas.microsoft.com/office/drawing/2014/main" id="{AD919CDA-6C08-4E95-808A-DEEC4A307162}"/>
               </a:ext>
             </a:extLst>
           </p:cNvPr>
@@ -3754,7 +3759,7 @@
           <p:cNvPr id="3" name="Content Placeholder 2">
             <a:extLst xmlns:a="http://schemas.openxmlformats.org/drawingml/2006/main">
               <a:ext uri="{FF2B5EF4-FFF2-40B4-BE49-F238E27FC236}">
-                <a16:creationId xmlns:a16="http://schemas.microsoft.com/office/drawing/2014/main" id="{1C155570-8B66-4B86-A5B5-56E9051DC819}"/>
+                <a16:creationId xmlns:a16="http://schemas.microsoft.com/office/drawing/2014/main" id="{1B0D5641-AF8A-4AAF-8C21-32DE7092D9D1}"/>
               </a:ext>
             </a:extLst>
           </p:cNvPr>
@@ -3859,7 +3864,7 @@
           <p:cNvPr id="4" name="Text Placeholder 3">
             <a:extLst xmlns:a="http://schemas.openxmlformats.org/drawingml/2006/main">
               <a:ext uri="{FF2B5EF4-FFF2-40B4-BE49-F238E27FC236}">
-                <a16:creationId xmlns:a16="http://schemas.microsoft.com/office/drawing/2014/main" id="{CCF51576-67CB-4797-82D9-EE3AF5FE9539}"/>
+                <a16:creationId xmlns:a16="http://schemas.microsoft.com/office/drawing/2014/main" id="{176D81D1-B201-4482-80C4-9EE87321933D}"/>
               </a:ext>
             </a:extLst>
           </p:cNvPr>
@@ -3931,7 +3936,7 @@
           <p:cNvPr id="5" name="Date Placeholder 4">
             <a:extLst xmlns:a="http://schemas.openxmlformats.org/drawingml/2006/main">
               <a:ext uri="{FF2B5EF4-FFF2-40B4-BE49-F238E27FC236}">
-                <a16:creationId xmlns:a16="http://schemas.microsoft.com/office/drawing/2014/main" id="{33C64480-3E72-4EFD-B3FD-51D0455CCA2C}"/>
+                <a16:creationId xmlns:a16="http://schemas.microsoft.com/office/drawing/2014/main" id="{BAE0EEEB-38D0-4E11-B22F-E3099CD21D57}"/>
               </a:ext>
             </a:extLst>
           </p:cNvPr>
@@ -3959,7 +3964,7 @@
           <p:cNvPr id="6" name="Footer Placeholder 5">
             <a:extLst xmlns:a="http://schemas.openxmlformats.org/drawingml/2006/main">
               <a:ext uri="{FF2B5EF4-FFF2-40B4-BE49-F238E27FC236}">
-                <a16:creationId xmlns:a16="http://schemas.microsoft.com/office/drawing/2014/main" id="{A42C85F0-F709-4D84-AC9B-19BEB13A9ACE}"/>
+                <a16:creationId xmlns:a16="http://schemas.microsoft.com/office/drawing/2014/main" id="{FD5B68CB-5209-415A-8678-DD4068BB1534}"/>
               </a:ext>
             </a:extLst>
           </p:cNvPr>
@@ -3984,7 +3989,7 @@
           <p:cNvPr id="7" name="Slide Number Placeholder 6">
             <a:extLst xmlns:a="http://schemas.openxmlformats.org/drawingml/2006/main">
               <a:ext uri="{FF2B5EF4-FFF2-40B4-BE49-F238E27FC236}">
-                <a16:creationId xmlns:a16="http://schemas.microsoft.com/office/drawing/2014/main" id="{A78F0A22-B148-44C8-9F30-A9DB92E5F93A}"/>
+                <a16:creationId xmlns:a16="http://schemas.microsoft.com/office/drawing/2014/main" id="{8A28C2F9-1D1C-448D-B368-D8A8B9530658}"/>
               </a:ext>
             </a:extLst>
           </p:cNvPr>
@@ -4029,7 +4034,7 @@
           <p:cNvPr id="2" name="Title 1">
             <a:extLst xmlns:a="http://schemas.openxmlformats.org/drawingml/2006/main">
               <a:ext uri="{FF2B5EF4-FFF2-40B4-BE49-F238E27FC236}">
-                <a16:creationId xmlns:a16="http://schemas.microsoft.com/office/drawing/2014/main" id="{7F596D1C-21AD-4258-BE2F-6414DA8E03F7}"/>
+                <a16:creationId xmlns:a16="http://schemas.microsoft.com/office/drawing/2014/main" id="{3589967E-AC04-4FD4-808F-F8041470BC08}"/>
               </a:ext>
             </a:extLst>
           </p:cNvPr>
@@ -4067,7 +4072,7 @@
           <p:cNvPr id="3" name="Picture Placeholder 2">
             <a:extLst xmlns:a="http://schemas.openxmlformats.org/drawingml/2006/main">
               <a:ext uri="{FF2B5EF4-FFF2-40B4-BE49-F238E27FC236}">
-                <a16:creationId xmlns:a16="http://schemas.microsoft.com/office/drawing/2014/main" id="{BAB2646F-02B2-4BE4-B095-B4869D8F38AF}"/>
+                <a16:creationId xmlns:a16="http://schemas.microsoft.com/office/drawing/2014/main" id="{CF47FF55-AF3D-4C14-8F96-10AC765B35C2}"/>
               </a:ext>
             </a:extLst>
           </p:cNvPr>
@@ -4134,7 +4139,7 @@
           <p:cNvPr id="4" name="Text Placeholder 3">
             <a:extLst xmlns:a="http://schemas.openxmlformats.org/drawingml/2006/main">
               <a:ext uri="{FF2B5EF4-FFF2-40B4-BE49-F238E27FC236}">
-                <a16:creationId xmlns:a16="http://schemas.microsoft.com/office/drawing/2014/main" id="{64953EE6-E8E6-469D-B7EF-CBB291FD70B3}"/>
+                <a16:creationId xmlns:a16="http://schemas.microsoft.com/office/drawing/2014/main" id="{485F67F0-62BD-456B-8A1A-6DD70DC1F87C}"/>
               </a:ext>
             </a:extLst>
           </p:cNvPr>
@@ -4206,7 +4211,7 @@
           <p:cNvPr id="5" name="Date Placeholder 4">
             <a:extLst xmlns:a="http://schemas.openxmlformats.org/drawingml/2006/main">
               <a:ext uri="{FF2B5EF4-FFF2-40B4-BE49-F238E27FC236}">
-                <a16:creationId xmlns:a16="http://schemas.microsoft.com/office/drawing/2014/main" id="{92A3EAE5-C48B-4858-88D9-D8035E8F30C1}"/>
+                <a16:creationId xmlns:a16="http://schemas.microsoft.com/office/drawing/2014/main" id="{B7C545DD-DB45-42A6-8A1D-66835E8CFEC8}"/>
               </a:ext>
             </a:extLst>
           </p:cNvPr>
@@ -4234,7 +4239,7 @@
           <p:cNvPr id="6" name="Footer Placeholder 5">
             <a:extLst xmlns:a="http://schemas.openxmlformats.org/drawingml/2006/main">
               <a:ext uri="{FF2B5EF4-FFF2-40B4-BE49-F238E27FC236}">
-                <a16:creationId xmlns:a16="http://schemas.microsoft.com/office/drawing/2014/main" id="{9C9A7009-E3FA-4330-BFA4-60E531C70F0B}"/>
+                <a16:creationId xmlns:a16="http://schemas.microsoft.com/office/drawing/2014/main" id="{DC1C6E51-4990-432A-ADAD-CC963376F3FD}"/>
               </a:ext>
             </a:extLst>
           </p:cNvPr>
@@ -4259,7 +4264,7 @@
           <p:cNvPr id="7" name="Slide Number Placeholder 6">
             <a:extLst xmlns:a="http://schemas.openxmlformats.org/drawingml/2006/main">
               <a:ext uri="{FF2B5EF4-FFF2-40B4-BE49-F238E27FC236}">
-                <a16:creationId xmlns:a16="http://schemas.microsoft.com/office/drawing/2014/main" id="{C12A5262-2ADD-4F2E-8F59-BB8FA878E29D}"/>
+                <a16:creationId xmlns:a16="http://schemas.microsoft.com/office/drawing/2014/main" id="{FB99561C-04A8-4253-9C2C-A5CA353BA268}"/>
               </a:ext>
             </a:extLst>
           </p:cNvPr>
@@ -4309,7 +4314,7 @@
           <p:cNvPr id="2" name="Title Placeholder 1">
             <a:extLst xmlns:a="http://schemas.openxmlformats.org/drawingml/2006/main">
               <a:ext uri="{FF2B5EF4-FFF2-40B4-BE49-F238E27FC236}">
-                <a16:creationId xmlns:a16="http://schemas.microsoft.com/office/drawing/2014/main" id="{A3C6A25A-B8E5-468E-B742-A65AB27A5FC7}"/>
+                <a16:creationId xmlns:a16="http://schemas.microsoft.com/office/drawing/2014/main" id="{672C398B-1684-4DA8-B9DB-6A8E83D3BC09}"/>
               </a:ext>
             </a:extLst>
           </p:cNvPr>
@@ -4347,7 +4352,7 @@
           <p:cNvPr id="3" name="Text Placeholder 2">
             <a:extLst xmlns:a="http://schemas.openxmlformats.org/drawingml/2006/main">
               <a:ext uri="{FF2B5EF4-FFF2-40B4-BE49-F238E27FC236}">
-                <a16:creationId xmlns:a16="http://schemas.microsoft.com/office/drawing/2014/main" id="{104D107C-A998-4A33-9243-4DEBC6844D0E}"/>
+                <a16:creationId xmlns:a16="http://schemas.microsoft.com/office/drawing/2014/main" id="{ADAA1CB8-4845-4F76-BD43-D096B2B7D409}"/>
               </a:ext>
             </a:extLst>
           </p:cNvPr>
@@ -4420,7 +4425,7 @@
           <p:cNvPr id="4" name="Date Placeholder 3">
             <a:extLst xmlns:a="http://schemas.openxmlformats.org/drawingml/2006/main">
               <a:ext uri="{FF2B5EF4-FFF2-40B4-BE49-F238E27FC236}">
-                <a16:creationId xmlns:a16="http://schemas.microsoft.com/office/drawing/2014/main" id="{8AAA794E-2403-43D9-8758-10ED05BBB76E}"/>
+                <a16:creationId xmlns:a16="http://schemas.microsoft.com/office/drawing/2014/main" id="{EE80137F-0763-4CD4-9F11-A3E9963DE969}"/>
               </a:ext>
             </a:extLst>
           </p:cNvPr>
@@ -4467,7 +4472,7 @@
           <p:cNvPr id="5" name="Footer Placeholder 4">
             <a:extLst xmlns:a="http://schemas.openxmlformats.org/drawingml/2006/main">
               <a:ext uri="{FF2B5EF4-FFF2-40B4-BE49-F238E27FC236}">
-                <a16:creationId xmlns:a16="http://schemas.microsoft.com/office/drawing/2014/main" id="{B0AFBE03-6F71-41B8-B971-3E3B7D61C144}"/>
+                <a16:creationId xmlns:a16="http://schemas.microsoft.com/office/drawing/2014/main" id="{668C53C3-50B5-42B1-B737-652797C01EBC}"/>
               </a:ext>
             </a:extLst>
           </p:cNvPr>
@@ -4511,7 +4516,7 @@
           <p:cNvPr id="6" name="Slide Number Placeholder 5">
             <a:extLst xmlns:a="http://schemas.openxmlformats.org/drawingml/2006/main">
               <a:ext uri="{FF2B5EF4-FFF2-40B4-BE49-F238E27FC236}">
-                <a16:creationId xmlns:a16="http://schemas.microsoft.com/office/drawing/2014/main" id="{868DAED3-7EE6-42C4-B663-2671EE7903D8}"/>
+                <a16:creationId xmlns:a16="http://schemas.microsoft.com/office/drawing/2014/main" id="{DE6FFC87-4FCB-483A-9746-603DD64903E7}"/>
               </a:ext>
             </a:extLst>
           </p:cNvPr>
@@ -4557,17 +4562,17 @@
   </p:cSld>
   <p:clrMap bg1="lt1" tx1="dk1" bg2="lt2" tx2="dk2" accent1="accent1" accent2="accent2" accent3="accent3" accent4="accent4" accent5="accent5" accent6="accent6" hlink="hlink" folHlink="folHlink"/>
   <p:sldLayoutIdLst>
-    <p:sldLayoutId xmlns:r="http://schemas.openxmlformats.org/officeDocument/2006/relationships" id="2147483649" r:id="R47b4fb8c496d46fa"/>
-    <p:sldLayoutId xmlns:r="http://schemas.openxmlformats.org/officeDocument/2006/relationships" id="2147483650" r:id="R1a69aab7c27a45a2"/>
-    <p:sldLayoutId xmlns:r="http://schemas.openxmlformats.org/officeDocument/2006/relationships" id="2147483651" r:id="R41b325aeea9547e1"/>
-    <p:sldLayoutId xmlns:r="http://schemas.openxmlformats.org/officeDocument/2006/relationships" id="2147483652" r:id="Re156f2cc6e3c4a79"/>
-    <p:sldLayoutId xmlns:r="http://schemas.openxmlformats.org/officeDocument/2006/relationships" id="2147483653" r:id="R87c065f581184828"/>
-    <p:sldLayoutId xmlns:r="http://schemas.openxmlformats.org/officeDocument/2006/relationships" id="2147483654" r:id="R18e30b0016184991"/>
-    <p:sldLayoutId xmlns:r="http://schemas.openxmlformats.org/officeDocument/2006/relationships" id="2147483655" r:id="Ra80d7caaca624e9e"/>
-    <p:sldLayoutId xmlns:r="http://schemas.openxmlformats.org/officeDocument/2006/relationships" id="2147483656" r:id="R57098e92571a4439"/>
-    <p:sldLayoutId xmlns:r="http://schemas.openxmlformats.org/officeDocument/2006/relationships" id="2147483657" r:id="R15b1ff207d4b4fbd"/>
-    <p:sldLayoutId xmlns:r="http://schemas.openxmlformats.org/officeDocument/2006/relationships" id="2147483658" r:id="Rf9b3543ad5ce4db3"/>
-    <p:sldLayoutId xmlns:r="http://schemas.openxmlformats.org/officeDocument/2006/relationships" id="2147483659" r:id="Ra70a3edaea25473a"/>
+    <p:sldLayoutId xmlns:r="http://schemas.openxmlformats.org/officeDocument/2006/relationships" id="2147483649" r:id="R305ba921cee74090"/>
+    <p:sldLayoutId xmlns:r="http://schemas.openxmlformats.org/officeDocument/2006/relationships" id="2147483650" r:id="Rfc0d71ecfc374c8f"/>
+    <p:sldLayoutId xmlns:r="http://schemas.openxmlformats.org/officeDocument/2006/relationships" id="2147483651" r:id="R3973b36fcc5b4a6e"/>
+    <p:sldLayoutId xmlns:r="http://schemas.openxmlformats.org/officeDocument/2006/relationships" id="2147483652" r:id="Rb4d38cf3db20423b"/>
+    <p:sldLayoutId xmlns:r="http://schemas.openxmlformats.org/officeDocument/2006/relationships" id="2147483653" r:id="R3138d8ac52cb4852"/>
+    <p:sldLayoutId xmlns:r="http://schemas.openxmlformats.org/officeDocument/2006/relationships" id="2147483654" r:id="R4f5ede1680794ec4"/>
+    <p:sldLayoutId xmlns:r="http://schemas.openxmlformats.org/officeDocument/2006/relationships" id="2147483655" r:id="R30318abbc7b5427c"/>
+    <p:sldLayoutId xmlns:r="http://schemas.openxmlformats.org/officeDocument/2006/relationships" id="2147483656" r:id="R50eb99f723e045f4"/>
+    <p:sldLayoutId xmlns:r="http://schemas.openxmlformats.org/officeDocument/2006/relationships" id="2147483657" r:id="R2c49a1e581854a4b"/>
+    <p:sldLayoutId xmlns:r="http://schemas.openxmlformats.org/officeDocument/2006/relationships" id="2147483658" r:id="Rcfe41b1fc0954558"/>
+    <p:sldLayoutId xmlns:r="http://schemas.openxmlformats.org/officeDocument/2006/relationships" id="2147483659" r:id="R87456863d555405d"/>
   </p:sldLayoutIdLst>
   <p:txStyles>
     <p:titleStyle>
@@ -5113,7 +5118,7 @@
           <p:cNvPr id="2" name="Rectangle 1">
             <a:extLst xmlns:a="http://schemas.openxmlformats.org/drawingml/2006/main">
               <a:ext uri="{FF2B5EF4-FFF2-40B4-BE49-F238E27FC236}">
-                <a16:creationId xmlns:a16="http://schemas.microsoft.com/office/drawing/2014/main" id="{0886EE82-45A4-4983-9199-DEA0F3922C39}"/>
+                <a16:creationId xmlns:a16="http://schemas.microsoft.com/office/drawing/2014/main" id="{C2926961-9E71-446B-8784-8698B1384EA2}"/>
               </a:ext>
             </a:extLst>
           </p:cNvPr>
@@ -5166,7 +5171,7 @@
           <p:cNvPr id="3" name="Rectangle 2">
             <a:extLst xmlns:a="http://schemas.openxmlformats.org/drawingml/2006/main">
               <a:ext uri="{FF2B5EF4-FFF2-40B4-BE49-F238E27FC236}">
-                <a16:creationId xmlns:a16="http://schemas.microsoft.com/office/drawing/2014/main" id="{9FA28B9E-1103-44B1-86E6-9B916E78B498}"/>
+                <a16:creationId xmlns:a16="http://schemas.microsoft.com/office/drawing/2014/main" id="{646BBFD1-CAD4-4D20-982D-E4463FA6D587}"/>
               </a:ext>
             </a:extLst>
           </p:cNvPr>
@@ -5219,7 +5224,7 @@
           <p:cNvPr id="4" name="TextBox 3">
             <a:extLst xmlns:a="http://schemas.openxmlformats.org/drawingml/2006/main">
               <a:ext uri="{FF2B5EF4-FFF2-40B4-BE49-F238E27FC236}">
-                <a16:creationId xmlns:a16="http://schemas.microsoft.com/office/drawing/2014/main" id="{5C8535DD-7299-40E5-BA3E-135A62ACD5A3}"/>
+                <a16:creationId xmlns:a16="http://schemas.microsoft.com/office/drawing/2014/main" id="{3FFFFE19-BF61-42B4-840B-9E2421A4B129}"/>
               </a:ext>
             </a:extLst>
           </p:cNvPr>
@@ -5321,7 +5326,7 @@
     </p:spTree>
     <p:extLst>
       <p:ext uri="{BB962C8B-B14F-4D97-AF65-F5344CB8AC3E}">
-        <p14:creationId xmlns:p14="http://schemas.microsoft.com/office/powerpoint/2010/main" val="1462753312"/>
+        <p14:creationId xmlns:p14="http://schemas.microsoft.com/office/powerpoint/2010/main" val="1832291903"/>
       </p:ext>
     </p:extLst>
   </p:cSld>
@@ -5345,7 +5350,7 @@
           <p:cNvPr id="2" name="Rectangle 1">
             <a:extLst xmlns:a="http://schemas.openxmlformats.org/drawingml/2006/main">
               <a:ext uri="{FF2B5EF4-FFF2-40B4-BE49-F238E27FC236}">
-                <a16:creationId xmlns:a16="http://schemas.microsoft.com/office/drawing/2014/main" id="{0F7C6F67-F026-48BF-85C0-E0D6EFB94D44}"/>
+                <a16:creationId xmlns:a16="http://schemas.microsoft.com/office/drawing/2014/main" id="{23E28773-3B09-42FD-B6B7-5B0BADB15505}"/>
               </a:ext>
             </a:extLst>
           </p:cNvPr>
@@ -5398,7 +5403,7 @@
           <p:cNvPr id="3" name="Rectangle 2">
             <a:extLst xmlns:a="http://schemas.openxmlformats.org/drawingml/2006/main">
               <a:ext uri="{FF2B5EF4-FFF2-40B4-BE49-F238E27FC236}">
-                <a16:creationId xmlns:a16="http://schemas.microsoft.com/office/drawing/2014/main" id="{57328AED-BFC4-40EE-A461-D4411B947D75}"/>
+                <a16:creationId xmlns:a16="http://schemas.microsoft.com/office/drawing/2014/main" id="{80977C56-055D-4259-8B06-AE471EF94ECF}"/>
               </a:ext>
             </a:extLst>
           </p:cNvPr>
@@ -5451,7 +5456,7 @@
           <p:cNvPr id="4" name="Rectangle 3">
             <a:extLst xmlns:a="http://schemas.openxmlformats.org/drawingml/2006/main">
               <a:ext uri="{FF2B5EF4-FFF2-40B4-BE49-F238E27FC236}">
-                <a16:creationId xmlns:a16="http://schemas.microsoft.com/office/drawing/2014/main" id="{BD342EF1-98D4-457E-8742-ADF0861CF133}"/>
+                <a16:creationId xmlns:a16="http://schemas.microsoft.com/office/drawing/2014/main" id="{37465A4D-A7F5-4BB7-A2FB-844C5C3B8E6F}"/>
               </a:ext>
             </a:extLst>
           </p:cNvPr>
@@ -5504,7 +5509,7 @@
           <p:cNvPr id="5" name="TextBox 4">
             <a:extLst xmlns:a="http://schemas.openxmlformats.org/drawingml/2006/main">
               <a:ext uri="{FF2B5EF4-FFF2-40B4-BE49-F238E27FC236}">
-                <a16:creationId xmlns:a16="http://schemas.microsoft.com/office/drawing/2014/main" id="{965B098A-0C59-4895-AA4E-F423A4913B83}"/>
+                <a16:creationId xmlns:a16="http://schemas.microsoft.com/office/drawing/2014/main" id="{C6AFE00F-AA27-4AED-A6B3-42F9CF8AA262}"/>
               </a:ext>
             </a:extLst>
           </p:cNvPr>
@@ -5567,7 +5572,7 @@
           <p:cNvPr id="6" name="Rounded Rectangle 5">
             <a:extLst xmlns:a="http://schemas.openxmlformats.org/drawingml/2006/main">
               <a:ext uri="{FF2B5EF4-FFF2-40B4-BE49-F238E27FC236}">
-                <a16:creationId xmlns:a16="http://schemas.microsoft.com/office/drawing/2014/main" id="{FB86FB8E-F6E2-4E8D-931B-DFFC39E70A6C}"/>
+                <a16:creationId xmlns:a16="http://schemas.microsoft.com/office/drawing/2014/main" id="{0D7F3B7C-83B2-4F32-BD6A-738E32FC9E7E}"/>
               </a:ext>
             </a:extLst>
           </p:cNvPr>
@@ -5622,7 +5627,7 @@
           <p:cNvPr id="7" name="TextBox 6">
             <a:extLst xmlns:a="http://schemas.openxmlformats.org/drawingml/2006/main">
               <a:ext uri="{FF2B5EF4-FFF2-40B4-BE49-F238E27FC236}">
-                <a16:creationId xmlns:a16="http://schemas.microsoft.com/office/drawing/2014/main" id="{B23A4352-DE02-47BF-AC7B-E0281C48ED3E}"/>
+                <a16:creationId xmlns:a16="http://schemas.microsoft.com/office/drawing/2014/main" id="{51119C80-7E69-4F5B-B615-C54F338CA93C}"/>
               </a:ext>
             </a:extLst>
           </p:cNvPr>
@@ -5726,7 +5731,7 @@
           <p:cNvPr id="8" name="Rounded Rectangle 7">
             <a:extLst xmlns:a="http://schemas.openxmlformats.org/drawingml/2006/main">
               <a:ext uri="{FF2B5EF4-FFF2-40B4-BE49-F238E27FC236}">
-                <a16:creationId xmlns:a16="http://schemas.microsoft.com/office/drawing/2014/main" id="{A541F922-8E7D-46DE-BD13-62DD8AFCCC6B}"/>
+                <a16:creationId xmlns:a16="http://schemas.microsoft.com/office/drawing/2014/main" id="{27B6C9D0-72F7-4084-9592-4F6F40224D8D}"/>
               </a:ext>
             </a:extLst>
           </p:cNvPr>
@@ -5781,7 +5786,7 @@
           <p:cNvPr id="9" name="TextBox 8">
             <a:extLst xmlns:a="http://schemas.openxmlformats.org/drawingml/2006/main">
               <a:ext uri="{FF2B5EF4-FFF2-40B4-BE49-F238E27FC236}">
-                <a16:creationId xmlns:a16="http://schemas.microsoft.com/office/drawing/2014/main" id="{C4FD11EC-B03C-49DB-BAFE-06045288FF04}"/>
+                <a16:creationId xmlns:a16="http://schemas.microsoft.com/office/drawing/2014/main" id="{F7EAA397-46D0-4748-8ECB-3F017BA485F5}"/>
               </a:ext>
             </a:extLst>
           </p:cNvPr>
@@ -5866,7 +5871,7 @@
           <p:cNvPr id="10" name="Rounded Rectangle 9">
             <a:extLst xmlns:a="http://schemas.openxmlformats.org/drawingml/2006/main">
               <a:ext uri="{FF2B5EF4-FFF2-40B4-BE49-F238E27FC236}">
-                <a16:creationId xmlns:a16="http://schemas.microsoft.com/office/drawing/2014/main" id="{07546CD6-432F-4412-95BE-23ACA418ED11}"/>
+                <a16:creationId xmlns:a16="http://schemas.microsoft.com/office/drawing/2014/main" id="{B7CE8416-5EDD-4A53-B71A-C38CADD5C693}"/>
               </a:ext>
             </a:extLst>
           </p:cNvPr>
@@ -5921,7 +5926,7 @@
           <p:cNvPr id="11" name="TextBox 10">
             <a:extLst xmlns:a="http://schemas.openxmlformats.org/drawingml/2006/main">
               <a:ext uri="{FF2B5EF4-FFF2-40B4-BE49-F238E27FC236}">
-                <a16:creationId xmlns:a16="http://schemas.microsoft.com/office/drawing/2014/main" id="{4646304A-F943-4239-982D-364747E1A23A}"/>
+                <a16:creationId xmlns:a16="http://schemas.microsoft.com/office/drawing/2014/main" id="{7AD7C3D5-014D-4583-8653-FBB1DA016CD1}"/>
               </a:ext>
             </a:extLst>
           </p:cNvPr>
@@ -6023,7 +6028,7 @@
     </p:spTree>
     <p:extLst>
       <p:ext uri="{BB962C8B-B14F-4D97-AF65-F5344CB8AC3E}">
-        <p14:creationId xmlns:p14="http://schemas.microsoft.com/office/powerpoint/2010/main" val="651667508"/>
+        <p14:creationId xmlns:p14="http://schemas.microsoft.com/office/powerpoint/2010/main" val="2022349873"/>
       </p:ext>
     </p:extLst>
   </p:cSld>
@@ -6047,7 +6052,7 @@
           <p:cNvPr id="2" name="Rectangle 1">
             <a:extLst xmlns:a="http://schemas.openxmlformats.org/drawingml/2006/main">
               <a:ext uri="{FF2B5EF4-FFF2-40B4-BE49-F238E27FC236}">
-                <a16:creationId xmlns:a16="http://schemas.microsoft.com/office/drawing/2014/main" id="{1C130BB4-F69F-4BCD-8319-FFFA9E1B5CF2}"/>
+                <a16:creationId xmlns:a16="http://schemas.microsoft.com/office/drawing/2014/main" id="{8EC27EF0-0D61-4718-B482-5E65807EC87E}"/>
               </a:ext>
             </a:extLst>
           </p:cNvPr>
@@ -6100,7 +6105,7 @@
           <p:cNvPr id="3" name="Rectangle 2">
             <a:extLst xmlns:a="http://schemas.openxmlformats.org/drawingml/2006/main">
               <a:ext uri="{FF2B5EF4-FFF2-40B4-BE49-F238E27FC236}">
-                <a16:creationId xmlns:a16="http://schemas.microsoft.com/office/drawing/2014/main" id="{5E6AEA8B-AB2D-4266-BC97-59F985F741D6}"/>
+                <a16:creationId xmlns:a16="http://schemas.microsoft.com/office/drawing/2014/main" id="{1D2CAAA8-437B-49CE-9732-F4DFA0560F80}"/>
               </a:ext>
             </a:extLst>
           </p:cNvPr>
@@ -6153,7 +6158,7 @@
           <p:cNvPr id="4" name="Rectangle 3">
             <a:extLst xmlns:a="http://schemas.openxmlformats.org/drawingml/2006/main">
               <a:ext uri="{FF2B5EF4-FFF2-40B4-BE49-F238E27FC236}">
-                <a16:creationId xmlns:a16="http://schemas.microsoft.com/office/drawing/2014/main" id="{792E7680-FBDC-4D35-A901-7648E31FF190}"/>
+                <a16:creationId xmlns:a16="http://schemas.microsoft.com/office/drawing/2014/main" id="{8AE0DC4A-5C03-42CF-B7E4-8F340FB4B656}"/>
               </a:ext>
             </a:extLst>
           </p:cNvPr>
@@ -6206,7 +6211,7 @@
           <p:cNvPr id="5" name="TextBox 4">
             <a:extLst xmlns:a="http://schemas.openxmlformats.org/drawingml/2006/main">
               <a:ext uri="{FF2B5EF4-FFF2-40B4-BE49-F238E27FC236}">
-                <a16:creationId xmlns:a16="http://schemas.microsoft.com/office/drawing/2014/main" id="{08C4DB09-E621-4AC8-9934-DE93766AF057}"/>
+                <a16:creationId xmlns:a16="http://schemas.microsoft.com/office/drawing/2014/main" id="{124F35FF-448C-4146-B27E-C1B3CFA21673}"/>
               </a:ext>
             </a:extLst>
           </p:cNvPr>
@@ -6269,7 +6274,7 @@
           <p:cNvPr id="6" name="Rounded Rectangle 5">
             <a:extLst xmlns:a="http://schemas.openxmlformats.org/drawingml/2006/main">
               <a:ext uri="{FF2B5EF4-FFF2-40B4-BE49-F238E27FC236}">
-                <a16:creationId xmlns:a16="http://schemas.microsoft.com/office/drawing/2014/main" id="{FED1B884-02E8-4292-B797-2546813E6940}"/>
+                <a16:creationId xmlns:a16="http://schemas.microsoft.com/office/drawing/2014/main" id="{16E3FB87-2211-48E0-966C-6C6AAC561DA9}"/>
               </a:ext>
             </a:extLst>
           </p:cNvPr>
@@ -6324,7 +6329,7 @@
           <p:cNvPr id="7" name="TextBox 6">
             <a:extLst xmlns:a="http://schemas.openxmlformats.org/drawingml/2006/main">
               <a:ext uri="{FF2B5EF4-FFF2-40B4-BE49-F238E27FC236}">
-                <a16:creationId xmlns:a16="http://schemas.microsoft.com/office/drawing/2014/main" id="{8F282CFE-C974-4F83-9F15-8F5AFAA3C21B}"/>
+                <a16:creationId xmlns:a16="http://schemas.microsoft.com/office/drawing/2014/main" id="{B0E95A4A-25B3-4414-80E9-8F755198204C}"/>
               </a:ext>
             </a:extLst>
           </p:cNvPr>
@@ -6523,7 +6528,7 @@
           <p:cNvPr id="8" name="Rounded Rectangle 7">
             <a:extLst xmlns:a="http://schemas.openxmlformats.org/drawingml/2006/main">
               <a:ext uri="{FF2B5EF4-FFF2-40B4-BE49-F238E27FC236}">
-                <a16:creationId xmlns:a16="http://schemas.microsoft.com/office/drawing/2014/main" id="{2DDD0174-2FCA-419F-ACA5-25619BA166F4}"/>
+                <a16:creationId xmlns:a16="http://schemas.microsoft.com/office/drawing/2014/main" id="{F39DC297-4888-400C-A7F6-928863A22F4E}"/>
               </a:ext>
             </a:extLst>
           </p:cNvPr>
@@ -6578,7 +6583,7 @@
           <p:cNvPr id="9" name="TextBox 8">
             <a:extLst xmlns:a="http://schemas.openxmlformats.org/drawingml/2006/main">
               <a:ext uri="{FF2B5EF4-FFF2-40B4-BE49-F238E27FC236}">
-                <a16:creationId xmlns:a16="http://schemas.microsoft.com/office/drawing/2014/main" id="{72A72586-FDE7-4393-88B8-2900FC0AF9FE}"/>
+                <a16:creationId xmlns:a16="http://schemas.microsoft.com/office/drawing/2014/main" id="{4ABE4D4D-AB52-43D1-B8BA-B5C800C468DF}"/>
               </a:ext>
             </a:extLst>
           </p:cNvPr>
@@ -6699,7 +6704,7 @@
     </p:spTree>
     <p:extLst>
       <p:ext uri="{BB962C8B-B14F-4D97-AF65-F5344CB8AC3E}">
-        <p14:creationId xmlns:p14="http://schemas.microsoft.com/office/powerpoint/2010/main" val="1020488870"/>
+        <p14:creationId xmlns:p14="http://schemas.microsoft.com/office/powerpoint/2010/main" val="930900073"/>
       </p:ext>
     </p:extLst>
   </p:cSld>
@@ -6723,7 +6728,7 @@
           <p:cNvPr id="2" name="Rectangle 1">
             <a:extLst xmlns:a="http://schemas.openxmlformats.org/drawingml/2006/main">
               <a:ext uri="{FF2B5EF4-FFF2-40B4-BE49-F238E27FC236}">
-                <a16:creationId xmlns:a16="http://schemas.microsoft.com/office/drawing/2014/main" id="{71E90448-25A4-48B7-9526-10752A977EB0}"/>
+                <a16:creationId xmlns:a16="http://schemas.microsoft.com/office/drawing/2014/main" id="{94874379-D44B-4111-80DF-72EF44B70CA5}"/>
               </a:ext>
             </a:extLst>
           </p:cNvPr>
@@ -6776,7 +6781,7 @@
           <p:cNvPr id="3" name="Rectangle 2">
             <a:extLst xmlns:a="http://schemas.openxmlformats.org/drawingml/2006/main">
               <a:ext uri="{FF2B5EF4-FFF2-40B4-BE49-F238E27FC236}">
-                <a16:creationId xmlns:a16="http://schemas.microsoft.com/office/drawing/2014/main" id="{4132F63D-F31C-4361-8877-991AE6884583}"/>
+                <a16:creationId xmlns:a16="http://schemas.microsoft.com/office/drawing/2014/main" id="{C6594F7F-DEBE-41AB-B433-E302FFCB3385}"/>
               </a:ext>
             </a:extLst>
           </p:cNvPr>
@@ -6829,7 +6834,7 @@
           <p:cNvPr id="4" name="TextBox 3">
             <a:extLst xmlns:a="http://schemas.openxmlformats.org/drawingml/2006/main">
               <a:ext uri="{FF2B5EF4-FFF2-40B4-BE49-F238E27FC236}">
-                <a16:creationId xmlns:a16="http://schemas.microsoft.com/office/drawing/2014/main" id="{0551C22C-55A8-42F7-9140-EB097709574E}"/>
+                <a16:creationId xmlns:a16="http://schemas.microsoft.com/office/drawing/2014/main" id="{AA803275-FB65-4154-8806-92BAEE0E9CC7}"/>
               </a:ext>
             </a:extLst>
           </p:cNvPr>
@@ -7007,7 +7012,7 @@
     </p:spTree>
     <p:extLst>
       <p:ext uri="{BB962C8B-B14F-4D97-AF65-F5344CB8AC3E}">
-        <p14:creationId xmlns:p14="http://schemas.microsoft.com/office/powerpoint/2010/main" val="78089277"/>
+        <p14:creationId xmlns:p14="http://schemas.microsoft.com/office/powerpoint/2010/main" val="526055841"/>
       </p:ext>
     </p:extLst>
   </p:cSld>
@@ -7031,7 +7036,7 @@
           <p:cNvPr id="2" name="Rectangle 1">
             <a:extLst xmlns:a="http://schemas.openxmlformats.org/drawingml/2006/main">
               <a:ext uri="{FF2B5EF4-FFF2-40B4-BE49-F238E27FC236}">
-                <a16:creationId xmlns:a16="http://schemas.microsoft.com/office/drawing/2014/main" id="{9B0CA5D7-542C-4DE9-B31F-B8E6083EF97E}"/>
+                <a16:creationId xmlns:a16="http://schemas.microsoft.com/office/drawing/2014/main" id="{89F22D32-B73F-4634-B92E-319E5359E355}"/>
               </a:ext>
             </a:extLst>
           </p:cNvPr>
@@ -7084,7 +7089,7 @@
           <p:cNvPr id="3" name="Rectangle 2">
             <a:extLst xmlns:a="http://schemas.openxmlformats.org/drawingml/2006/main">
               <a:ext uri="{FF2B5EF4-FFF2-40B4-BE49-F238E27FC236}">
-                <a16:creationId xmlns:a16="http://schemas.microsoft.com/office/drawing/2014/main" id="{261E1C52-E9FC-4421-B317-1A3F5B4FC275}"/>
+                <a16:creationId xmlns:a16="http://schemas.microsoft.com/office/drawing/2014/main" id="{EB526803-8015-4834-9590-6B5DFA3B48A3}"/>
               </a:ext>
             </a:extLst>
           </p:cNvPr>
@@ -7137,7 +7142,7 @@
           <p:cNvPr id="4" name="Rectangle 3">
             <a:extLst xmlns:a="http://schemas.openxmlformats.org/drawingml/2006/main">
               <a:ext uri="{FF2B5EF4-FFF2-40B4-BE49-F238E27FC236}">
-                <a16:creationId xmlns:a16="http://schemas.microsoft.com/office/drawing/2014/main" id="{9847C858-56D2-46F3-B933-917AFF6915A7}"/>
+                <a16:creationId xmlns:a16="http://schemas.microsoft.com/office/drawing/2014/main" id="{CE147814-65AB-4D31-AFBF-C7EE5F8C3679}"/>
               </a:ext>
             </a:extLst>
           </p:cNvPr>
@@ -7190,7 +7195,7 @@
           <p:cNvPr id="5" name="TextBox 4">
             <a:extLst xmlns:a="http://schemas.openxmlformats.org/drawingml/2006/main">
               <a:ext uri="{FF2B5EF4-FFF2-40B4-BE49-F238E27FC236}">
-                <a16:creationId xmlns:a16="http://schemas.microsoft.com/office/drawing/2014/main" id="{FEFAF48C-D2C0-4A31-AD0C-24EC7FA1EA43}"/>
+                <a16:creationId xmlns:a16="http://schemas.microsoft.com/office/drawing/2014/main" id="{7172D39E-59A7-4A28-87A9-9A0B3198A93A}"/>
               </a:ext>
             </a:extLst>
           </p:cNvPr>
@@ -7253,7 +7258,7 @@
           <p:cNvPr id="6" name="Rounded Rectangle 5">
             <a:extLst xmlns:a="http://schemas.openxmlformats.org/drawingml/2006/main">
               <a:ext uri="{FF2B5EF4-FFF2-40B4-BE49-F238E27FC236}">
-                <a16:creationId xmlns:a16="http://schemas.microsoft.com/office/drawing/2014/main" id="{EFA569F6-0560-462B-8B51-0D91C4CCFF2D}"/>
+                <a16:creationId xmlns:a16="http://schemas.microsoft.com/office/drawing/2014/main" id="{A65171A4-E7C5-465A-8B17-6CC08574BF54}"/>
               </a:ext>
             </a:extLst>
           </p:cNvPr>
@@ -7308,7 +7313,7 @@
           <p:cNvPr id="7" name="TextBox 6">
             <a:extLst xmlns:a="http://schemas.openxmlformats.org/drawingml/2006/main">
               <a:ext uri="{FF2B5EF4-FFF2-40B4-BE49-F238E27FC236}">
-                <a16:creationId xmlns:a16="http://schemas.microsoft.com/office/drawing/2014/main" id="{6CEBAF5B-B908-42ED-B317-96975C612BE7}"/>
+                <a16:creationId xmlns:a16="http://schemas.microsoft.com/office/drawing/2014/main" id="{FA598076-1CF4-4DFB-A06A-DDAB5D0CE294}"/>
               </a:ext>
             </a:extLst>
           </p:cNvPr>
@@ -7412,7 +7417,7 @@
           <p:cNvPr id="8" name="Rounded Rectangle 7">
             <a:extLst xmlns:a="http://schemas.openxmlformats.org/drawingml/2006/main">
               <a:ext uri="{FF2B5EF4-FFF2-40B4-BE49-F238E27FC236}">
-                <a16:creationId xmlns:a16="http://schemas.microsoft.com/office/drawing/2014/main" id="{9B95DAB5-B861-456C-9191-1CF4CE41A445}"/>
+                <a16:creationId xmlns:a16="http://schemas.microsoft.com/office/drawing/2014/main" id="{42979C6E-14AF-4F58-A740-4B5C6E24817A}"/>
               </a:ext>
             </a:extLst>
           </p:cNvPr>
@@ -7467,7 +7472,7 @@
           <p:cNvPr id="9" name="TextBox 8">
             <a:extLst xmlns:a="http://schemas.openxmlformats.org/drawingml/2006/main">
               <a:ext uri="{FF2B5EF4-FFF2-40B4-BE49-F238E27FC236}">
-                <a16:creationId xmlns:a16="http://schemas.microsoft.com/office/drawing/2014/main" id="{7764FBC2-7457-463F-AACC-F06CA354FCD2}"/>
+                <a16:creationId xmlns:a16="http://schemas.microsoft.com/office/drawing/2014/main" id="{430AF0D4-3A7F-4A9B-B8EF-AAF65984D231}"/>
               </a:ext>
             </a:extLst>
           </p:cNvPr>
@@ -7571,7 +7576,7 @@
           <p:cNvPr id="10" name="Rounded Rectangle 9">
             <a:extLst xmlns:a="http://schemas.openxmlformats.org/drawingml/2006/main">
               <a:ext uri="{FF2B5EF4-FFF2-40B4-BE49-F238E27FC236}">
-                <a16:creationId xmlns:a16="http://schemas.microsoft.com/office/drawing/2014/main" id="{C6816087-BDF2-4F21-A57E-E037F3CF7C2C}"/>
+                <a16:creationId xmlns:a16="http://schemas.microsoft.com/office/drawing/2014/main" id="{6480AA08-4EFD-4411-80EE-1CADA8AB89F5}"/>
               </a:ext>
             </a:extLst>
           </p:cNvPr>
@@ -7626,7 +7631,7 @@
           <p:cNvPr id="11" name="TextBox 10">
             <a:extLst xmlns:a="http://schemas.openxmlformats.org/drawingml/2006/main">
               <a:ext uri="{FF2B5EF4-FFF2-40B4-BE49-F238E27FC236}">
-                <a16:creationId xmlns:a16="http://schemas.microsoft.com/office/drawing/2014/main" id="{42C9D95D-4CED-44CC-B549-1317DF3E9332}"/>
+                <a16:creationId xmlns:a16="http://schemas.microsoft.com/office/drawing/2014/main" id="{DBF44D97-9D83-4A8E-AC03-6D904A848343}"/>
               </a:ext>
             </a:extLst>
           </p:cNvPr>
@@ -7785,7 +7790,7 @@
     </p:spTree>
     <p:extLst>
       <p:ext uri="{BB962C8B-B14F-4D97-AF65-F5344CB8AC3E}">
-        <p14:creationId xmlns:p14="http://schemas.microsoft.com/office/powerpoint/2010/main" val="908138734"/>
+        <p14:creationId xmlns:p14="http://schemas.microsoft.com/office/powerpoint/2010/main" val="383905064"/>
       </p:ext>
     </p:extLst>
   </p:cSld>
@@ -7809,7 +7814,7 @@
           <p:cNvPr id="2" name="Rectangle 1">
             <a:extLst xmlns:a="http://schemas.openxmlformats.org/drawingml/2006/main">
               <a:ext uri="{FF2B5EF4-FFF2-40B4-BE49-F238E27FC236}">
-                <a16:creationId xmlns:a16="http://schemas.microsoft.com/office/drawing/2014/main" id="{36F863D4-C879-45E8-A26C-9ADB32967F2B}"/>
+                <a16:creationId xmlns:a16="http://schemas.microsoft.com/office/drawing/2014/main" id="{214CD07B-1421-413D-BDF7-29A7024F6CEE}"/>
               </a:ext>
             </a:extLst>
           </p:cNvPr>
@@ -7862,7 +7867,7 @@
           <p:cNvPr id="3" name="Rectangle 2">
             <a:extLst xmlns:a="http://schemas.openxmlformats.org/drawingml/2006/main">
               <a:ext uri="{FF2B5EF4-FFF2-40B4-BE49-F238E27FC236}">
-                <a16:creationId xmlns:a16="http://schemas.microsoft.com/office/drawing/2014/main" id="{50940F33-4910-4C63-9143-D1E48EE2A6DD}"/>
+                <a16:creationId xmlns:a16="http://schemas.microsoft.com/office/drawing/2014/main" id="{11847149-C5CB-451E-A46F-B23938E03292}"/>
               </a:ext>
             </a:extLst>
           </p:cNvPr>
@@ -7915,7 +7920,7 @@
           <p:cNvPr id="4" name="Rectangle 3">
             <a:extLst xmlns:a="http://schemas.openxmlformats.org/drawingml/2006/main">
               <a:ext uri="{FF2B5EF4-FFF2-40B4-BE49-F238E27FC236}">
-                <a16:creationId xmlns:a16="http://schemas.microsoft.com/office/drawing/2014/main" id="{389DA64B-74C6-42F8-B4EA-E0C496262A04}"/>
+                <a16:creationId xmlns:a16="http://schemas.microsoft.com/office/drawing/2014/main" id="{EE3EB1D3-6198-4708-B921-7393946D70C8}"/>
               </a:ext>
             </a:extLst>
           </p:cNvPr>
@@ -7968,7 +7973,7 @@
           <p:cNvPr id="5" name="TextBox 4">
             <a:extLst xmlns:a="http://schemas.openxmlformats.org/drawingml/2006/main">
               <a:ext uri="{FF2B5EF4-FFF2-40B4-BE49-F238E27FC236}">
-                <a16:creationId xmlns:a16="http://schemas.microsoft.com/office/drawing/2014/main" id="{CCF7597C-CFCA-498E-AAFB-649975E930FB}"/>
+                <a16:creationId xmlns:a16="http://schemas.microsoft.com/office/drawing/2014/main" id="{A9AD06E1-27BD-44E7-B906-36ABAABE0F72}"/>
               </a:ext>
             </a:extLst>
           </p:cNvPr>
@@ -8031,7 +8036,7 @@
           <p:cNvPr id="6" name="Rounded Rectangle 5">
             <a:extLst xmlns:a="http://schemas.openxmlformats.org/drawingml/2006/main">
               <a:ext uri="{FF2B5EF4-FFF2-40B4-BE49-F238E27FC236}">
-                <a16:creationId xmlns:a16="http://schemas.microsoft.com/office/drawing/2014/main" id="{F99E2600-1CF6-465C-92B3-0BEACFE09C30}"/>
+                <a16:creationId xmlns:a16="http://schemas.microsoft.com/office/drawing/2014/main" id="{85C0EFCB-E843-4644-A47D-B8D2352EF685}"/>
               </a:ext>
             </a:extLst>
           </p:cNvPr>
@@ -8086,7 +8091,7 @@
           <p:cNvPr id="7" name="TextBox 6">
             <a:extLst xmlns:a="http://schemas.openxmlformats.org/drawingml/2006/main">
               <a:ext uri="{FF2B5EF4-FFF2-40B4-BE49-F238E27FC236}">
-                <a16:creationId xmlns:a16="http://schemas.microsoft.com/office/drawing/2014/main" id="{7929731E-C196-44E0-B99A-CED8611AC1DB}"/>
+                <a16:creationId xmlns:a16="http://schemas.microsoft.com/office/drawing/2014/main" id="{0F6575D0-FD7E-4C70-9DBB-8045CC3EB16E}"/>
               </a:ext>
             </a:extLst>
           </p:cNvPr>
@@ -8209,7 +8214,7 @@
           <p:cNvPr id="8" name="Rounded Rectangle 7">
             <a:extLst xmlns:a="http://schemas.openxmlformats.org/drawingml/2006/main">
               <a:ext uri="{FF2B5EF4-FFF2-40B4-BE49-F238E27FC236}">
-                <a16:creationId xmlns:a16="http://schemas.microsoft.com/office/drawing/2014/main" id="{7C128377-81AE-4819-B822-94821A26ADAB}"/>
+                <a16:creationId xmlns:a16="http://schemas.microsoft.com/office/drawing/2014/main" id="{B168CC65-CD67-4684-9F11-CBF8CF7D7B16}"/>
               </a:ext>
             </a:extLst>
           </p:cNvPr>
@@ -8264,7 +8269,7 @@
           <p:cNvPr id="9" name="TextBox 8">
             <a:extLst xmlns:a="http://schemas.openxmlformats.org/drawingml/2006/main">
               <a:ext uri="{FF2B5EF4-FFF2-40B4-BE49-F238E27FC236}">
-                <a16:creationId xmlns:a16="http://schemas.microsoft.com/office/drawing/2014/main" id="{66936259-03EE-4B6B-9EC9-46BA8C30ABF3}"/>
+                <a16:creationId xmlns:a16="http://schemas.microsoft.com/office/drawing/2014/main" id="{937EE3F7-AF08-4C2E-A262-39C90AF5E813}"/>
               </a:ext>
             </a:extLst>
           </p:cNvPr>
@@ -8406,7 +8411,7 @@
           <p:cNvPr id="10" name="Rounded Rectangle 9">
             <a:extLst xmlns:a="http://schemas.openxmlformats.org/drawingml/2006/main">
               <a:ext uri="{FF2B5EF4-FFF2-40B4-BE49-F238E27FC236}">
-                <a16:creationId xmlns:a16="http://schemas.microsoft.com/office/drawing/2014/main" id="{8DA943F2-E6A9-419A-839B-AC964C90D5A3}"/>
+                <a16:creationId xmlns:a16="http://schemas.microsoft.com/office/drawing/2014/main" id="{5E0A37B7-7EBF-49EE-83B0-FF676B75ADA4}"/>
               </a:ext>
             </a:extLst>
           </p:cNvPr>
@@ -8461,7 +8466,7 @@
           <p:cNvPr id="11" name="TextBox 10">
             <a:extLst xmlns:a="http://schemas.openxmlformats.org/drawingml/2006/main">
               <a:ext uri="{FF2B5EF4-FFF2-40B4-BE49-F238E27FC236}">
-                <a16:creationId xmlns:a16="http://schemas.microsoft.com/office/drawing/2014/main" id="{DA51AFFD-D581-45AD-B975-C26DC64FE978}"/>
+                <a16:creationId xmlns:a16="http://schemas.microsoft.com/office/drawing/2014/main" id="{EBBFE1A0-8400-401D-B1B1-6CDCB119618B}"/>
               </a:ext>
             </a:extLst>
           </p:cNvPr>
@@ -8563,7 +8568,7 @@
     </p:spTree>
     <p:extLst>
       <p:ext uri="{BB962C8B-B14F-4D97-AF65-F5344CB8AC3E}">
-        <p14:creationId xmlns:p14="http://schemas.microsoft.com/office/powerpoint/2010/main" val="556164992"/>
+        <p14:creationId xmlns:p14="http://schemas.microsoft.com/office/powerpoint/2010/main" val="1784165154"/>
       </p:ext>
     </p:extLst>
   </p:cSld>
@@ -8587,7 +8592,7 @@
           <p:cNvPr id="2" name="Rectangle 1">
             <a:extLst xmlns:a="http://schemas.openxmlformats.org/drawingml/2006/main">
               <a:ext uri="{FF2B5EF4-FFF2-40B4-BE49-F238E27FC236}">
-                <a16:creationId xmlns:a16="http://schemas.microsoft.com/office/drawing/2014/main" id="{9E6A76FA-B6BA-4E7C-AEB8-41431552F376}"/>
+                <a16:creationId xmlns:a16="http://schemas.microsoft.com/office/drawing/2014/main" id="{18A1661B-FA65-464B-8332-569ACB200867}"/>
               </a:ext>
             </a:extLst>
           </p:cNvPr>
@@ -8640,7 +8645,7 @@
           <p:cNvPr id="3" name="Rectangle 2">
             <a:extLst xmlns:a="http://schemas.openxmlformats.org/drawingml/2006/main">
               <a:ext uri="{FF2B5EF4-FFF2-40B4-BE49-F238E27FC236}">
-                <a16:creationId xmlns:a16="http://schemas.microsoft.com/office/drawing/2014/main" id="{3AD748B8-C1FA-474C-9CE2-426170100853}"/>
+                <a16:creationId xmlns:a16="http://schemas.microsoft.com/office/drawing/2014/main" id="{36E4D39B-05D0-41F8-927F-B092842928EB}"/>
               </a:ext>
             </a:extLst>
           </p:cNvPr>
@@ -8693,7 +8698,7 @@
           <p:cNvPr id="4" name="Rectangle 3">
             <a:extLst xmlns:a="http://schemas.openxmlformats.org/drawingml/2006/main">
               <a:ext uri="{FF2B5EF4-FFF2-40B4-BE49-F238E27FC236}">
-                <a16:creationId xmlns:a16="http://schemas.microsoft.com/office/drawing/2014/main" id="{A9F6AA5D-FEA9-4D94-BEAD-AF604F6C9657}"/>
+                <a16:creationId xmlns:a16="http://schemas.microsoft.com/office/drawing/2014/main" id="{A7E09364-A528-480A-9660-8DD69647DE3C}"/>
               </a:ext>
             </a:extLst>
           </p:cNvPr>
@@ -8746,7 +8751,7 @@
           <p:cNvPr id="5" name="TextBox 4">
             <a:extLst xmlns:a="http://schemas.openxmlformats.org/drawingml/2006/main">
               <a:ext uri="{FF2B5EF4-FFF2-40B4-BE49-F238E27FC236}">
-                <a16:creationId xmlns:a16="http://schemas.microsoft.com/office/drawing/2014/main" id="{2624F681-48BD-4940-9D70-29BD71AB0B72}"/>
+                <a16:creationId xmlns:a16="http://schemas.microsoft.com/office/drawing/2014/main" id="{72CC3027-BF7D-4485-A40D-30FCF9F9A2AA}"/>
               </a:ext>
             </a:extLst>
           </p:cNvPr>
@@ -8809,7 +8814,7 @@
           <p:cNvPr id="6" name="Rounded Rectangle 5">
             <a:extLst xmlns:a="http://schemas.openxmlformats.org/drawingml/2006/main">
               <a:ext uri="{FF2B5EF4-FFF2-40B4-BE49-F238E27FC236}">
-                <a16:creationId xmlns:a16="http://schemas.microsoft.com/office/drawing/2014/main" id="{99CCBC80-400A-4AB4-80DB-2D311E0393E8}"/>
+                <a16:creationId xmlns:a16="http://schemas.microsoft.com/office/drawing/2014/main" id="{C2330EE6-9DD4-422E-9887-253A37F7BBE5}"/>
               </a:ext>
             </a:extLst>
           </p:cNvPr>
@@ -8864,7 +8869,7 @@
           <p:cNvPr id="7" name="TextBox 6">
             <a:extLst xmlns:a="http://schemas.openxmlformats.org/drawingml/2006/main">
               <a:ext uri="{FF2B5EF4-FFF2-40B4-BE49-F238E27FC236}">
-                <a16:creationId xmlns:a16="http://schemas.microsoft.com/office/drawing/2014/main" id="{FC511546-7E5B-4AF3-AA57-E962C744E3D0}"/>
+                <a16:creationId xmlns:a16="http://schemas.microsoft.com/office/drawing/2014/main" id="{8C940245-8B57-44F5-95C7-0230674D80E4}"/>
               </a:ext>
             </a:extLst>
           </p:cNvPr>
@@ -9044,7 +9049,7 @@
           <p:cNvPr id="8" name="Rounded Rectangle 7">
             <a:extLst xmlns:a="http://schemas.openxmlformats.org/drawingml/2006/main">
               <a:ext uri="{FF2B5EF4-FFF2-40B4-BE49-F238E27FC236}">
-                <a16:creationId xmlns:a16="http://schemas.microsoft.com/office/drawing/2014/main" id="{5936EB77-E85A-44D3-A083-717DD3E1D29F}"/>
+                <a16:creationId xmlns:a16="http://schemas.microsoft.com/office/drawing/2014/main" id="{29A85A97-AAB5-457C-9354-E4829083E48D}"/>
               </a:ext>
             </a:extLst>
           </p:cNvPr>
@@ -9099,7 +9104,7 @@
           <p:cNvPr id="9" name="TextBox 8">
             <a:extLst xmlns:a="http://schemas.openxmlformats.org/drawingml/2006/main">
               <a:ext uri="{FF2B5EF4-FFF2-40B4-BE49-F238E27FC236}">
-                <a16:creationId xmlns:a16="http://schemas.microsoft.com/office/drawing/2014/main" id="{A23E3B05-580A-406C-A89F-830CAC5D6C75}"/>
+                <a16:creationId xmlns:a16="http://schemas.microsoft.com/office/drawing/2014/main" id="{C385E764-1748-473A-A380-F6F4D77B3918}"/>
               </a:ext>
             </a:extLst>
           </p:cNvPr>
@@ -9258,7 +9263,7 @@
     </p:spTree>
     <p:extLst>
       <p:ext uri="{BB962C8B-B14F-4D97-AF65-F5344CB8AC3E}">
-        <p14:creationId xmlns:p14="http://schemas.microsoft.com/office/powerpoint/2010/main" val="1938898888"/>
+        <p14:creationId xmlns:p14="http://schemas.microsoft.com/office/powerpoint/2010/main" val="1698233138"/>
       </p:ext>
     </p:extLst>
   </p:cSld>
@@ -9282,7 +9287,7 @@
           <p:cNvPr id="2" name="Rectangle 1">
             <a:extLst xmlns:a="http://schemas.openxmlformats.org/drawingml/2006/main">
               <a:ext uri="{FF2B5EF4-FFF2-40B4-BE49-F238E27FC236}">
-                <a16:creationId xmlns:a16="http://schemas.microsoft.com/office/drawing/2014/main" id="{FF338CF3-49F1-4189-8CA0-FBDF197A816A}"/>
+                <a16:creationId xmlns:a16="http://schemas.microsoft.com/office/drawing/2014/main" id="{33F57D29-E76D-40C5-9F4B-89919E974F92}"/>
               </a:ext>
             </a:extLst>
           </p:cNvPr>
@@ -9335,7 +9340,7 @@
           <p:cNvPr id="3" name="Rectangle 2">
             <a:extLst xmlns:a="http://schemas.openxmlformats.org/drawingml/2006/main">
               <a:ext uri="{FF2B5EF4-FFF2-40B4-BE49-F238E27FC236}">
-                <a16:creationId xmlns:a16="http://schemas.microsoft.com/office/drawing/2014/main" id="{C4C0FC8C-5845-4423-9E65-A6BF677A74B9}"/>
+                <a16:creationId xmlns:a16="http://schemas.microsoft.com/office/drawing/2014/main" id="{CFAE431C-16E6-43F8-9CB8-CC1F2FA4E979}"/>
               </a:ext>
             </a:extLst>
           </p:cNvPr>
@@ -9388,7 +9393,7 @@
           <p:cNvPr id="4" name="Rectangle 3">
             <a:extLst xmlns:a="http://schemas.openxmlformats.org/drawingml/2006/main">
               <a:ext uri="{FF2B5EF4-FFF2-40B4-BE49-F238E27FC236}">
-                <a16:creationId xmlns:a16="http://schemas.microsoft.com/office/drawing/2014/main" id="{34FD2B31-B165-4DD9-BADF-DE4A8A6500D1}"/>
+                <a16:creationId xmlns:a16="http://schemas.microsoft.com/office/drawing/2014/main" id="{750509EF-D968-4C31-9D1A-12B15D10AD73}"/>
               </a:ext>
             </a:extLst>
           </p:cNvPr>
@@ -9441,7 +9446,7 @@
           <p:cNvPr id="5" name="TextBox 4">
             <a:extLst xmlns:a="http://schemas.openxmlformats.org/drawingml/2006/main">
               <a:ext uri="{FF2B5EF4-FFF2-40B4-BE49-F238E27FC236}">
-                <a16:creationId xmlns:a16="http://schemas.microsoft.com/office/drawing/2014/main" id="{41EC2395-27F2-4749-8D31-9DE7B3BA212E}"/>
+                <a16:creationId xmlns:a16="http://schemas.microsoft.com/office/drawing/2014/main" id="{08988000-8C54-4016-8488-6949BE3409DB}"/>
               </a:ext>
             </a:extLst>
           </p:cNvPr>
@@ -9504,7 +9509,7 @@
           <p:cNvPr id="6" name="Rounded Rectangle 5">
             <a:extLst xmlns:a="http://schemas.openxmlformats.org/drawingml/2006/main">
               <a:ext uri="{FF2B5EF4-FFF2-40B4-BE49-F238E27FC236}">
-                <a16:creationId xmlns:a16="http://schemas.microsoft.com/office/drawing/2014/main" id="{CE5DE87F-8BE0-4C47-9285-E683B7FA935B}"/>
+                <a16:creationId xmlns:a16="http://schemas.microsoft.com/office/drawing/2014/main" id="{B87E967F-F1DB-4564-8806-25657B9BDF16}"/>
               </a:ext>
             </a:extLst>
           </p:cNvPr>
@@ -9559,7 +9564,7 @@
           <p:cNvPr id="7" name="TextBox 6">
             <a:extLst xmlns:a="http://schemas.openxmlformats.org/drawingml/2006/main">
               <a:ext uri="{FF2B5EF4-FFF2-40B4-BE49-F238E27FC236}">
-                <a16:creationId xmlns:a16="http://schemas.microsoft.com/office/drawing/2014/main" id="{306FF487-D4E9-4CBA-AD95-F317BC41B25A}"/>
+                <a16:creationId xmlns:a16="http://schemas.microsoft.com/office/drawing/2014/main" id="{F6733F74-2107-4DA5-9A3F-8FCE95A79125}"/>
               </a:ext>
             </a:extLst>
           </p:cNvPr>
@@ -9777,7 +9782,7 @@
           <p:cNvPr id="8" name="Rounded Rectangle 7">
             <a:extLst xmlns:a="http://schemas.openxmlformats.org/drawingml/2006/main">
               <a:ext uri="{FF2B5EF4-FFF2-40B4-BE49-F238E27FC236}">
-                <a16:creationId xmlns:a16="http://schemas.microsoft.com/office/drawing/2014/main" id="{A2208063-B9B2-45C2-BA05-4BED92CF54C6}"/>
+                <a16:creationId xmlns:a16="http://schemas.microsoft.com/office/drawing/2014/main" id="{6CD334BA-CB48-4684-BFD5-834D7FFF24B1}"/>
               </a:ext>
             </a:extLst>
           </p:cNvPr>
@@ -9832,7 +9837,7 @@
           <p:cNvPr id="9" name="TextBox 8">
             <a:extLst xmlns:a="http://schemas.openxmlformats.org/drawingml/2006/main">
               <a:ext uri="{FF2B5EF4-FFF2-40B4-BE49-F238E27FC236}">
-                <a16:creationId xmlns:a16="http://schemas.microsoft.com/office/drawing/2014/main" id="{1CC938A3-FCD9-45A9-8448-8210E0FF7C18}"/>
+                <a16:creationId xmlns:a16="http://schemas.microsoft.com/office/drawing/2014/main" id="{7438878A-36C5-40D7-B529-03F99F50C9AB}"/>
               </a:ext>
             </a:extLst>
           </p:cNvPr>
@@ -10067,7 +10072,7 @@
     </p:spTree>
     <p:extLst>
       <p:ext uri="{BB962C8B-B14F-4D97-AF65-F5344CB8AC3E}">
-        <p14:creationId xmlns:p14="http://schemas.microsoft.com/office/powerpoint/2010/main" val="430492054"/>
+        <p14:creationId xmlns:p14="http://schemas.microsoft.com/office/powerpoint/2010/main" val="730359881"/>
       </p:ext>
     </p:extLst>
   </p:cSld>
@@ -10091,7 +10096,7 @@
           <p:cNvPr id="2" name="Rectangle 1">
             <a:extLst xmlns:a="http://schemas.openxmlformats.org/drawingml/2006/main">
               <a:ext uri="{FF2B5EF4-FFF2-40B4-BE49-F238E27FC236}">
-                <a16:creationId xmlns:a16="http://schemas.microsoft.com/office/drawing/2014/main" id="{933CBBDB-F531-428E-BBCF-B72E1D2C4B89}"/>
+                <a16:creationId xmlns:a16="http://schemas.microsoft.com/office/drawing/2014/main" id="{BD886271-9E50-48E9-8074-5992A607422C}"/>
               </a:ext>
             </a:extLst>
           </p:cNvPr>
@@ -10144,7 +10149,7 @@
           <p:cNvPr id="3" name="Rectangle 2">
             <a:extLst xmlns:a="http://schemas.openxmlformats.org/drawingml/2006/main">
               <a:ext uri="{FF2B5EF4-FFF2-40B4-BE49-F238E27FC236}">
-                <a16:creationId xmlns:a16="http://schemas.microsoft.com/office/drawing/2014/main" id="{636A6DA1-59C1-4641-9867-BC668B75E576}"/>
+                <a16:creationId xmlns:a16="http://schemas.microsoft.com/office/drawing/2014/main" id="{E548262D-EE3A-46F5-B428-95F9EF3BB378}"/>
               </a:ext>
             </a:extLst>
           </p:cNvPr>
@@ -10197,7 +10202,7 @@
           <p:cNvPr id="4" name="Rectangle 3">
             <a:extLst xmlns:a="http://schemas.openxmlformats.org/drawingml/2006/main">
               <a:ext uri="{FF2B5EF4-FFF2-40B4-BE49-F238E27FC236}">
-                <a16:creationId xmlns:a16="http://schemas.microsoft.com/office/drawing/2014/main" id="{692C25C1-1531-4046-8C53-7D4D1669E45D}"/>
+                <a16:creationId xmlns:a16="http://schemas.microsoft.com/office/drawing/2014/main" id="{A018D37F-572A-4C43-BE37-AE490C003635}"/>
               </a:ext>
             </a:extLst>
           </p:cNvPr>
@@ -10250,7 +10255,7 @@
           <p:cNvPr id="5" name="TextBox 4">
             <a:extLst xmlns:a="http://schemas.openxmlformats.org/drawingml/2006/main">
               <a:ext uri="{FF2B5EF4-FFF2-40B4-BE49-F238E27FC236}">
-                <a16:creationId xmlns:a16="http://schemas.microsoft.com/office/drawing/2014/main" id="{7F793D08-B33B-4FB6-BD50-E01FF2ADD1ED}"/>
+                <a16:creationId xmlns:a16="http://schemas.microsoft.com/office/drawing/2014/main" id="{6664577D-EEC3-4583-B64F-17C18EFCD88B}"/>
               </a:ext>
             </a:extLst>
           </p:cNvPr>
@@ -10313,7 +10318,7 @@
           <p:cNvPr id="6" name="Rounded Rectangle 5">
             <a:extLst xmlns:a="http://schemas.openxmlformats.org/drawingml/2006/main">
               <a:ext uri="{FF2B5EF4-FFF2-40B4-BE49-F238E27FC236}">
-                <a16:creationId xmlns:a16="http://schemas.microsoft.com/office/drawing/2014/main" id="{D45921BE-187D-462D-B8C3-1D96AC0737E7}"/>
+                <a16:creationId xmlns:a16="http://schemas.microsoft.com/office/drawing/2014/main" id="{6D1298E0-CD6D-4635-BBAC-98F012E57033}"/>
               </a:ext>
             </a:extLst>
           </p:cNvPr>
@@ -10368,7 +10373,7 @@
           <p:cNvPr id="7" name="TextBox 6">
             <a:extLst xmlns:a="http://schemas.openxmlformats.org/drawingml/2006/main">
               <a:ext uri="{FF2B5EF4-FFF2-40B4-BE49-F238E27FC236}">
-                <a16:creationId xmlns:a16="http://schemas.microsoft.com/office/drawing/2014/main" id="{29899210-2BB9-4524-86EE-0F480092C6EB}"/>
+                <a16:creationId xmlns:a16="http://schemas.microsoft.com/office/drawing/2014/main" id="{7CC56DAB-A78D-438A-B49B-75863023294E}"/>
               </a:ext>
             </a:extLst>
           </p:cNvPr>
@@ -10590,7 +10595,7 @@
           <p:nvPr/>
         </p:nvPicPr>
         <p:blipFill>
-          <a:blip xmlns:r="http://schemas.openxmlformats.org/officeDocument/2006/relationships" xmlns:a="http://schemas.openxmlformats.org/drawingml/2006/main" r:embed="R705e164ccab24789"/>
+          <a:blip xmlns:r="http://schemas.openxmlformats.org/officeDocument/2006/relationships" xmlns:a="http://schemas.openxmlformats.org/drawingml/2006/main" r:embed="R1fdd529506ff4862"/>
           <a:stretch xmlns:a="http://schemas.openxmlformats.org/drawingml/2006/main">
             <a:fillRect l="0" t="0" r="0" b="0"/>
           </a:stretch>
@@ -10610,7 +10615,7 @@
           <p:cNvPr id="9" name="Rounded Rectangle 8">
             <a:extLst xmlns:a="http://schemas.openxmlformats.org/drawingml/2006/main">
               <a:ext uri="{FF2B5EF4-FFF2-40B4-BE49-F238E27FC236}">
-                <a16:creationId xmlns:a16="http://schemas.microsoft.com/office/drawing/2014/main" id="{7223E386-7F3B-47CB-8655-7798FD1A4274}"/>
+                <a16:creationId xmlns:a16="http://schemas.microsoft.com/office/drawing/2014/main" id="{0E0F0CE4-8BBF-437D-80B9-EC8FB4C2CA80}"/>
               </a:ext>
             </a:extLst>
           </p:cNvPr>
@@ -10665,7 +10670,7 @@
           <p:cNvPr id="10" name="TextBox 9">
             <a:extLst xmlns:a="http://schemas.openxmlformats.org/drawingml/2006/main">
               <a:ext uri="{FF2B5EF4-FFF2-40B4-BE49-F238E27FC236}">
-                <a16:creationId xmlns:a16="http://schemas.microsoft.com/office/drawing/2014/main" id="{62C9A2B3-25A0-4B7D-AE35-F932911049C3}"/>
+                <a16:creationId xmlns:a16="http://schemas.microsoft.com/office/drawing/2014/main" id="{E08878C1-E243-4199-97F4-E4D94C606D6C}"/>
               </a:ext>
             </a:extLst>
           </p:cNvPr>
@@ -10751,7 +10756,7 @@
     </p:spTree>
     <p:extLst>
       <p:ext uri="{BB962C8B-B14F-4D97-AF65-F5344CB8AC3E}">
-        <p14:creationId xmlns:p14="http://schemas.microsoft.com/office/powerpoint/2010/main" val="947157156"/>
+        <p14:creationId xmlns:p14="http://schemas.microsoft.com/office/powerpoint/2010/main" val="346853300"/>
       </p:ext>
     </p:extLst>
   </p:cSld>
@@ -10775,7 +10780,7 @@
           <p:cNvPr id="2" name="Rectangle 1">
             <a:extLst xmlns:a="http://schemas.openxmlformats.org/drawingml/2006/main">
               <a:ext uri="{FF2B5EF4-FFF2-40B4-BE49-F238E27FC236}">
-                <a16:creationId xmlns:a16="http://schemas.microsoft.com/office/drawing/2014/main" id="{C2278535-11A9-43C9-9D57-F9FABE298112}"/>
+                <a16:creationId xmlns:a16="http://schemas.microsoft.com/office/drawing/2014/main" id="{06D5B608-F6C8-4C95-B30C-4AD003CF5CB5}"/>
               </a:ext>
             </a:extLst>
           </p:cNvPr>
@@ -10828,7 +10833,7 @@
           <p:cNvPr id="3" name="Rectangle 2">
             <a:extLst xmlns:a="http://schemas.openxmlformats.org/drawingml/2006/main">
               <a:ext uri="{FF2B5EF4-FFF2-40B4-BE49-F238E27FC236}">
-                <a16:creationId xmlns:a16="http://schemas.microsoft.com/office/drawing/2014/main" id="{4FE3A430-C84B-4D70-9C00-C1A2BD8BC2D6}"/>
+                <a16:creationId xmlns:a16="http://schemas.microsoft.com/office/drawing/2014/main" id="{7A77D484-72B8-4F17-A959-01EDF718DF98}"/>
               </a:ext>
             </a:extLst>
           </p:cNvPr>
@@ -10881,7 +10886,7 @@
           <p:cNvPr id="4" name="Rectangle 3">
             <a:extLst xmlns:a="http://schemas.openxmlformats.org/drawingml/2006/main">
               <a:ext uri="{FF2B5EF4-FFF2-40B4-BE49-F238E27FC236}">
-                <a16:creationId xmlns:a16="http://schemas.microsoft.com/office/drawing/2014/main" id="{6A936DB3-5BFB-4478-B92F-B46BB42BE267}"/>
+                <a16:creationId xmlns:a16="http://schemas.microsoft.com/office/drawing/2014/main" id="{F9620F5B-FAF8-4F7D-9C98-09922DA7CE9A}"/>
               </a:ext>
             </a:extLst>
           </p:cNvPr>
@@ -10934,7 +10939,7 @@
           <p:cNvPr id="5" name="TextBox 4">
             <a:extLst xmlns:a="http://schemas.openxmlformats.org/drawingml/2006/main">
               <a:ext uri="{FF2B5EF4-FFF2-40B4-BE49-F238E27FC236}">
-                <a16:creationId xmlns:a16="http://schemas.microsoft.com/office/drawing/2014/main" id="{DAE0BD85-F5CC-4979-B617-32FEB482CB76}"/>
+                <a16:creationId xmlns:a16="http://schemas.microsoft.com/office/drawing/2014/main" id="{47A05D45-7C59-4890-91C8-3225885DDB5E}"/>
               </a:ext>
             </a:extLst>
           </p:cNvPr>
@@ -10997,7 +11002,7 @@
           <p:cNvPr id="6" name="Rounded Rectangle 5">
             <a:extLst xmlns:a="http://schemas.openxmlformats.org/drawingml/2006/main">
               <a:ext uri="{FF2B5EF4-FFF2-40B4-BE49-F238E27FC236}">
-                <a16:creationId xmlns:a16="http://schemas.microsoft.com/office/drawing/2014/main" id="{D02B7167-D785-4073-93CB-E48AA6A3F690}"/>
+                <a16:creationId xmlns:a16="http://schemas.microsoft.com/office/drawing/2014/main" id="{E497226D-0AC7-4BE5-B544-C2A97D13F34A}"/>
               </a:ext>
             </a:extLst>
           </p:cNvPr>
@@ -11052,7 +11057,7 @@
           <p:cNvPr id="7" name="TextBox 6">
             <a:extLst xmlns:a="http://schemas.openxmlformats.org/drawingml/2006/main">
               <a:ext uri="{FF2B5EF4-FFF2-40B4-BE49-F238E27FC236}">
-                <a16:creationId xmlns:a16="http://schemas.microsoft.com/office/drawing/2014/main" id="{881445A8-BCCD-42FC-8BBA-E2EC75BD3112}"/>
+                <a16:creationId xmlns:a16="http://schemas.microsoft.com/office/drawing/2014/main" id="{92ED84E8-573E-455B-9C6E-1C7E0ED707FC}"/>
               </a:ext>
             </a:extLst>
           </p:cNvPr>
@@ -11289,7 +11294,7 @@
           <p:cNvPr id="8" name="Rounded Rectangle 7">
             <a:extLst xmlns:a="http://schemas.openxmlformats.org/drawingml/2006/main">
               <a:ext uri="{FF2B5EF4-FFF2-40B4-BE49-F238E27FC236}">
-                <a16:creationId xmlns:a16="http://schemas.microsoft.com/office/drawing/2014/main" id="{D68E7B79-6E03-4A1D-8502-3C7B7D7F9259}"/>
+                <a16:creationId xmlns:a16="http://schemas.microsoft.com/office/drawing/2014/main" id="{339BDEBF-AF1B-4815-AEFA-4A6E0717FF7F}"/>
               </a:ext>
             </a:extLst>
           </p:cNvPr>
@@ -11344,7 +11349,7 @@
           <p:cNvPr id="9" name="TextBox 8">
             <a:extLst xmlns:a="http://schemas.openxmlformats.org/drawingml/2006/main">
               <a:ext uri="{FF2B5EF4-FFF2-40B4-BE49-F238E27FC236}">
-                <a16:creationId xmlns:a16="http://schemas.microsoft.com/office/drawing/2014/main" id="{AE8634FE-540F-4F8C-B34A-022E8E790BCF}"/>
+                <a16:creationId xmlns:a16="http://schemas.microsoft.com/office/drawing/2014/main" id="{85D9B94A-4338-4A52-97CC-710D2EE71D29}"/>
               </a:ext>
             </a:extLst>
           </p:cNvPr>
@@ -11679,7 +11684,7 @@
     </p:spTree>
     <p:extLst>
       <p:ext uri="{BB962C8B-B14F-4D97-AF65-F5344CB8AC3E}">
-        <p14:creationId xmlns:p14="http://schemas.microsoft.com/office/powerpoint/2010/main" val="592533764"/>
+        <p14:creationId xmlns:p14="http://schemas.microsoft.com/office/powerpoint/2010/main" val="279318366"/>
       </p:ext>
     </p:extLst>
   </p:cSld>
@@ -11703,7 +11708,7 @@
           <p:cNvPr id="2" name="Rectangle 1">
             <a:extLst xmlns:a="http://schemas.openxmlformats.org/drawingml/2006/main">
               <a:ext uri="{FF2B5EF4-FFF2-40B4-BE49-F238E27FC236}">
-                <a16:creationId xmlns:a16="http://schemas.microsoft.com/office/drawing/2014/main" id="{71F0D1DA-EB69-4A2A-B554-955F08EE2CB7}"/>
+                <a16:creationId xmlns:a16="http://schemas.microsoft.com/office/drawing/2014/main" id="{742BF1C6-9628-4829-8511-7E4740CBDA54}"/>
               </a:ext>
             </a:extLst>
           </p:cNvPr>
@@ -11756,7 +11761,7 @@
           <p:cNvPr id="3" name="Rectangle 2">
             <a:extLst xmlns:a="http://schemas.openxmlformats.org/drawingml/2006/main">
               <a:ext uri="{FF2B5EF4-FFF2-40B4-BE49-F238E27FC236}">
-                <a16:creationId xmlns:a16="http://schemas.microsoft.com/office/drawing/2014/main" id="{832D5062-73ED-418B-94FE-332A65D40044}"/>
+                <a16:creationId xmlns:a16="http://schemas.microsoft.com/office/drawing/2014/main" id="{74915344-EF7E-467F-9957-CC87313528D3}"/>
               </a:ext>
             </a:extLst>
           </p:cNvPr>
@@ -11809,7 +11814,7 @@
           <p:cNvPr id="4" name="Rectangle 3">
             <a:extLst xmlns:a="http://schemas.openxmlformats.org/drawingml/2006/main">
               <a:ext uri="{FF2B5EF4-FFF2-40B4-BE49-F238E27FC236}">
-                <a16:creationId xmlns:a16="http://schemas.microsoft.com/office/drawing/2014/main" id="{D2298787-15A3-4AC7-BCF5-97A2F093C37A}"/>
+                <a16:creationId xmlns:a16="http://schemas.microsoft.com/office/drawing/2014/main" id="{53659B57-9C8C-40A9-AF60-16A18D874DE7}"/>
               </a:ext>
             </a:extLst>
           </p:cNvPr>
@@ -11862,7 +11867,7 @@
           <p:cNvPr id="5" name="TextBox 4">
             <a:extLst xmlns:a="http://schemas.openxmlformats.org/drawingml/2006/main">
               <a:ext uri="{FF2B5EF4-FFF2-40B4-BE49-F238E27FC236}">
-                <a16:creationId xmlns:a16="http://schemas.microsoft.com/office/drawing/2014/main" id="{CB4E470C-AEE2-40D7-9C94-E8EB961C7614}"/>
+                <a16:creationId xmlns:a16="http://schemas.microsoft.com/office/drawing/2014/main" id="{7A44891F-0971-485E-A233-4CF123A5739A}"/>
               </a:ext>
             </a:extLst>
           </p:cNvPr>
@@ -11925,7 +11930,7 @@
           <p:cNvPr id="6" name="Rounded Rectangle 5">
             <a:extLst xmlns:a="http://schemas.openxmlformats.org/drawingml/2006/main">
               <a:ext uri="{FF2B5EF4-FFF2-40B4-BE49-F238E27FC236}">
-                <a16:creationId xmlns:a16="http://schemas.microsoft.com/office/drawing/2014/main" id="{DDD30715-AA6E-4FB2-9280-3443B35BBAA5}"/>
+                <a16:creationId xmlns:a16="http://schemas.microsoft.com/office/drawing/2014/main" id="{5B34D758-34A1-476A-9CEE-D11B4E9841B7}"/>
               </a:ext>
             </a:extLst>
           </p:cNvPr>
@@ -11980,7 +11985,7 @@
           <p:cNvPr id="7" name="TextBox 6">
             <a:extLst xmlns:a="http://schemas.openxmlformats.org/drawingml/2006/main">
               <a:ext uri="{FF2B5EF4-FFF2-40B4-BE49-F238E27FC236}">
-                <a16:creationId xmlns:a16="http://schemas.microsoft.com/office/drawing/2014/main" id="{02857F93-C497-4334-A80A-866D28EE664D}"/>
+                <a16:creationId xmlns:a16="http://schemas.microsoft.com/office/drawing/2014/main" id="{8CFDBAB0-EA46-43FE-8C61-8AE8D6D9D96A}"/>
               </a:ext>
             </a:extLst>
           </p:cNvPr>
@@ -12103,7 +12108,7 @@
           <p:cNvPr id="8" name="Rounded Rectangle 7">
             <a:extLst xmlns:a="http://schemas.openxmlformats.org/drawingml/2006/main">
               <a:ext uri="{FF2B5EF4-FFF2-40B4-BE49-F238E27FC236}">
-                <a16:creationId xmlns:a16="http://schemas.microsoft.com/office/drawing/2014/main" id="{53447F41-003C-4C0D-91AE-15264D978320}"/>
+                <a16:creationId xmlns:a16="http://schemas.microsoft.com/office/drawing/2014/main" id="{5EDE8D18-9CBE-45C2-9DF7-6C7AEBA3F09F}"/>
               </a:ext>
             </a:extLst>
           </p:cNvPr>
@@ -12158,7 +12163,7 @@
           <p:cNvPr id="9" name="TextBox 8">
             <a:extLst xmlns:a="http://schemas.openxmlformats.org/drawingml/2006/main">
               <a:ext uri="{FF2B5EF4-FFF2-40B4-BE49-F238E27FC236}">
-                <a16:creationId xmlns:a16="http://schemas.microsoft.com/office/drawing/2014/main" id="{112B6782-B718-48AA-87A5-00C3A4A07726}"/>
+                <a16:creationId xmlns:a16="http://schemas.microsoft.com/office/drawing/2014/main" id="{BE7C79A6-26CD-42FD-A1A3-8DB96E120250}"/>
               </a:ext>
             </a:extLst>
           </p:cNvPr>
@@ -12281,7 +12286,7 @@
           <p:cNvPr id="10" name="Rounded Rectangle 9">
             <a:extLst xmlns:a="http://schemas.openxmlformats.org/drawingml/2006/main">
               <a:ext uri="{FF2B5EF4-FFF2-40B4-BE49-F238E27FC236}">
-                <a16:creationId xmlns:a16="http://schemas.microsoft.com/office/drawing/2014/main" id="{0A7B4466-6391-47FA-AA63-1DC3E7171F2F}"/>
+                <a16:creationId xmlns:a16="http://schemas.microsoft.com/office/drawing/2014/main" id="{B2EF3340-C821-4436-ABB8-7082C3884112}"/>
               </a:ext>
             </a:extLst>
           </p:cNvPr>
@@ -12336,7 +12341,7 @@
           <p:cNvPr id="11" name="TextBox 10">
             <a:extLst xmlns:a="http://schemas.openxmlformats.org/drawingml/2006/main">
               <a:ext uri="{FF2B5EF4-FFF2-40B4-BE49-F238E27FC236}">
-                <a16:creationId xmlns:a16="http://schemas.microsoft.com/office/drawing/2014/main" id="{3B78154F-5A60-4561-94E9-BDE0F17DA02E}"/>
+                <a16:creationId xmlns:a16="http://schemas.microsoft.com/office/drawing/2014/main" id="{101EEEF0-0931-4C97-9129-4E43EB51409F}"/>
               </a:ext>
             </a:extLst>
           </p:cNvPr>
@@ -12348,7 +12353,7 @@
         <p:spPr>
           <a:xfrm xmlns:a="http://schemas.openxmlformats.org/drawingml/2006/main">
             <a:off x="6430975" y="3310128"/>
-            <a:ext cx="4846320" cy="6304280"/>
+            <a:ext cx="4846320" cy="2889504"/>
           </a:xfrm>
           <a:prstGeom xmlns:a="http://schemas.openxmlformats.org/drawingml/2006/main" prst="rect">
             <a:avLst/>
@@ -12373,7 +12378,15 @@
               </a:defRPr>
             </a:pPr>
             <a:r>
-              <a:t>[DIAGNOSTIC TEST FIXTURE ONLY - NOT CANONICAL NUMERICAL RESULTS] RQ1 &amp; RQ2 Metrics:</a:t>
+              <a:rPr sz="713" b="1">
+                <a:solidFill>
+                  <a:srgbClr val="DC2626"/>
+                </a:solidFill>
+                <a:latin typeface="Calibri"/>
+                <a:ea typeface="Calibri"/>
+                <a:cs typeface="Calibri"/>
+              </a:rPr>
+              <a:t>[DIAGNOSTIC TEST FIXTURE ONLY - NOT CANONICAL NUMERICAL RESULTS]</a:t>
             </a:r>
           </a:p>
           <a:p xmlns:a="http://schemas.openxmlformats.org/drawingml/2006/main">
@@ -12389,15 +12402,39 @@
               </a:defRPr>
             </a:pPr>
             <a:r>
-              <a:rPr sz="1600" b="1">
+              <a:rPr sz="825" b="0">
+                <a:solidFill>
+                  <a:srgbClr val="0F172A"/>
+                </a:solidFill>
+                <a:latin typeface="Calibri"/>
+                <a:ea typeface="Calibri"/>
+                <a:cs typeface="Calibri"/>
+              </a:rPr>
+              <a:t>Bảng Đối Chứng Hiệu Năng RQ1 (Diagnostic Fixture):</a:t>
+            </a:r>
+          </a:p>
+          <a:p xmlns:a="http://schemas.openxmlformats.org/drawingml/2006/main">
+            <a:pPr>
+              <a:buNone/>
+              <a:defRPr sz="1600" b="1">
                 <a:solidFill>
                   <a:srgbClr val="DC2626"/>
                 </a:solidFill>
                 <a:latin typeface="Calibri"/>
                 <a:ea typeface="Calibri"/>
                 <a:cs typeface="Calibri"/>
+              </a:defRPr>
+            </a:pPr>
+            <a:r>
+              <a:rPr sz="825" b="0">
+                <a:solidFill>
+                  <a:srgbClr val="0F172A"/>
+                </a:solidFill>
+                <a:latin typeface="Calibri"/>
+                <a:ea typeface="Calibri"/>
+                <a:cs typeface="Calibri"/>
               </a:rPr>
-              <a:t>•  RQ1 5 Conditions Performance:</a:t>
+              <a:t>Condition      Accuracy    Macro-F1    Delta vs No-RAG</a:t>
             </a:r>
           </a:p>
           <a:p xmlns:a="http://schemas.openxmlformats.org/drawingml/2006/main">
@@ -12413,15 +12450,39 @@
               </a:defRPr>
             </a:pPr>
             <a:r>
-              <a:rPr sz="1600" b="1">
+              <a:rPr sz="825" b="0">
+                <a:solidFill>
+                  <a:srgbClr val="0F172A"/>
+                </a:solidFill>
+                <a:latin typeface="Calibri"/>
+                <a:ea typeface="Calibri"/>
+                <a:cs typeface="Calibri"/>
+              </a:rPr>
+              <a:t>-------------------------------------------------------</a:t>
+            </a:r>
+          </a:p>
+          <a:p xmlns:a="http://schemas.openxmlformats.org/drawingml/2006/main">
+            <a:pPr>
+              <a:buNone/>
+              <a:defRPr sz="1600" b="1">
                 <a:solidFill>
                   <a:srgbClr val="DC2626"/>
                 </a:solidFill>
                 <a:latin typeface="Calibri"/>
                 <a:ea typeface="Calibri"/>
                 <a:cs typeface="Calibri"/>
+              </a:defRPr>
+            </a:pPr>
+            <a:r>
+              <a:rPr sz="825" b="0">
+                <a:solidFill>
+                  <a:srgbClr val="0F172A"/>
+                </a:solidFill>
+                <a:latin typeface="Calibri"/>
+                <a:ea typeface="Calibri"/>
+                <a:cs typeface="Calibri"/>
               </a:rPr>
-              <a:t>  • no_rag: Acc = 0.5000, Macro-F1 = 0.0929, CI95 = [0.3500, 0.6500]</a:t>
+              <a:t>no_rag         0.5000      0.0929      baseline</a:t>
             </a:r>
           </a:p>
           <a:p xmlns:a="http://schemas.openxmlformats.org/drawingml/2006/main">
@@ -12437,15 +12498,39 @@
               </a:defRPr>
             </a:pPr>
             <a:r>
-              <a:rPr sz="1600" b="1">
+              <a:rPr sz="825" b="0">
+                <a:solidFill>
+                  <a:srgbClr val="0F172A"/>
+                </a:solidFill>
+                <a:latin typeface="Calibri"/>
+                <a:ea typeface="Calibri"/>
+                <a:cs typeface="Calibri"/>
+              </a:rPr>
+              <a:t>rag_k1         0.5000      0.0929      +0.0000 (+0.0000 F1)</a:t>
+            </a:r>
+          </a:p>
+          <a:p xmlns:a="http://schemas.openxmlformats.org/drawingml/2006/main">
+            <a:pPr>
+              <a:buNone/>
+              <a:defRPr sz="1600" b="1">
                 <a:solidFill>
                   <a:srgbClr val="DC2626"/>
                 </a:solidFill>
                 <a:latin typeface="Calibri"/>
                 <a:ea typeface="Calibri"/>
                 <a:cs typeface="Calibri"/>
+              </a:defRPr>
+            </a:pPr>
+            <a:r>
+              <a:rPr sz="825" b="0">
+                <a:solidFill>
+                  <a:srgbClr val="0F172A"/>
+                </a:solidFill>
+                <a:latin typeface="Calibri"/>
+                <a:ea typeface="Calibri"/>
+                <a:cs typeface="Calibri"/>
               </a:rPr>
-              <a:t>  • rag_k1: Acc = 0.5000, Macro-F1 = 0.0929, CI95 = [0.3500, 0.6500]</a:t>
+              <a:t>rag_k3         0.5000      0.0929      +0.0000 (+0.0000 F1)</a:t>
             </a:r>
           </a:p>
           <a:p xmlns:a="http://schemas.openxmlformats.org/drawingml/2006/main">
@@ -12461,15 +12546,39 @@
               </a:defRPr>
             </a:pPr>
             <a:r>
-              <a:rPr sz="1600" b="1">
+              <a:rPr sz="825" b="0">
+                <a:solidFill>
+                  <a:srgbClr val="0F172A"/>
+                </a:solidFill>
+                <a:latin typeface="Calibri"/>
+                <a:ea typeface="Calibri"/>
+                <a:cs typeface="Calibri"/>
+              </a:rPr>
+              <a:t>rag_k5         0.5000      0.0929      +0.0000 (+0.0000 F1)</a:t>
+            </a:r>
+          </a:p>
+          <a:p xmlns:a="http://schemas.openxmlformats.org/drawingml/2006/main">
+            <a:pPr>
+              <a:buNone/>
+              <a:defRPr sz="1600" b="1">
                 <a:solidFill>
                   <a:srgbClr val="DC2626"/>
                 </a:solidFill>
                 <a:latin typeface="Calibri"/>
                 <a:ea typeface="Calibri"/>
                 <a:cs typeface="Calibri"/>
+              </a:defRPr>
+            </a:pPr>
+            <a:r>
+              <a:rPr sz="825" b="0">
+                <a:solidFill>
+                  <a:srgbClr val="0F172A"/>
+                </a:solidFill>
+                <a:latin typeface="Calibri"/>
+                <a:ea typeface="Calibri"/>
+                <a:cs typeface="Calibri"/>
               </a:rPr>
-              <a:t>  • rag_k3: Acc = 0.5000, Macro-F1 = 0.0929, CI95 = [0.3500, 0.6500]</a:t>
+              <a:t>rag_k10        0.5000      0.0929      +0.0000 (+0.0000 F1)</a:t>
             </a:r>
           </a:p>
           <a:p xmlns:a="http://schemas.openxmlformats.org/drawingml/2006/main">
@@ -12485,15 +12594,39 @@
               </a:defRPr>
             </a:pPr>
             <a:r>
-              <a:rPr sz="1600" b="1">
+              <a:rPr sz="825" b="0">
+                <a:solidFill>
+                  <a:srgbClr val="0F172A"/>
+                </a:solidFill>
+                <a:latin typeface="Calibri"/>
+                <a:ea typeface="Calibri"/>
+                <a:cs typeface="Calibri"/>
+              </a:rPr>
+              <a:t>★ Best Condition: rag_k10 (Delta Acc = +0.0000, Delta F1 = +0.0000)</a:t>
+            </a:r>
+          </a:p>
+          <a:p xmlns:a="http://schemas.openxmlformats.org/drawingml/2006/main">
+            <a:pPr>
+              <a:buNone/>
+              <a:defRPr sz="1600" b="1">
                 <a:solidFill>
                   <a:srgbClr val="DC2626"/>
                 </a:solidFill>
                 <a:latin typeface="Calibri"/>
                 <a:ea typeface="Calibri"/>
                 <a:cs typeface="Calibri"/>
+              </a:defRPr>
+            </a:pPr>
+            <a:r>
+              <a:rPr sz="825" b="0">
+                <a:solidFill>
+                  <a:srgbClr val="0F172A"/>
+                </a:solidFill>
+                <a:latin typeface="Calibri"/>
+                <a:ea typeface="Calibri"/>
+                <a:cs typeface="Calibri"/>
               </a:rPr>
-              <a:t>  • rag_k5: Acc = 0.5000, Macro-F1 = 0.0929, CI95 = [0.3500, 0.6500]</a:t>
+              <a:t>• 95% CI: no_rag/k1/k3/k5/k10 = [0.3500, 0.6500] (chi tiết trong Speaker Notes)</a:t>
             </a:r>
           </a:p>
           <a:p xmlns:a="http://schemas.openxmlformats.org/drawingml/2006/main">
@@ -12509,187 +12642,15 @@
               </a:defRPr>
             </a:pPr>
             <a:r>
-              <a:rPr sz="1600" b="1">
-                <a:solidFill>
-                  <a:srgbClr val="DC2626"/>
+              <a:rPr sz="825" b="0">
+                <a:solidFill>
+                  <a:srgbClr val="0F172A"/>
                 </a:solidFill>
                 <a:latin typeface="Calibri"/>
                 <a:ea typeface="Calibri"/>
                 <a:cs typeface="Calibri"/>
               </a:rPr>
-              <a:t>  • rag_k10: Acc = 0.5000, Macro-F1 = 0.0929, CI95 = [0.3500, 0.6500]</a:t>
-            </a:r>
-          </a:p>
-          <a:p xmlns:a="http://schemas.openxmlformats.org/drawingml/2006/main">
-            <a:pPr>
-              <a:buNone/>
-              <a:defRPr sz="1600" b="1">
-                <a:solidFill>
-                  <a:srgbClr val="DC2626"/>
-                </a:solidFill>
-                <a:latin typeface="Calibri"/>
-                <a:ea typeface="Calibri"/>
-                <a:cs typeface="Calibri"/>
-              </a:defRPr>
-            </a:pPr>
-            <a:r>
-              <a:rPr sz="1600" b="1">
-                <a:solidFill>
-                  <a:srgbClr val="DC2626"/>
-                </a:solidFill>
-                <a:latin typeface="Calibri"/>
-                <a:ea typeface="Calibri"/>
-                <a:cs typeface="Calibri"/>
-              </a:rPr>
-              <a:t>  • Best Condition: rag_k10 (Delta Acc = +0.0000, Delta F1 = +0.0000)</a:t>
-            </a:r>
-          </a:p>
-          <a:p xmlns:a="http://schemas.openxmlformats.org/drawingml/2006/main">
-            <a:pPr>
-              <a:buNone/>
-              <a:defRPr sz="1600" b="1">
-                <a:solidFill>
-                  <a:srgbClr val="DC2626"/>
-                </a:solidFill>
-                <a:latin typeface="Calibri"/>
-                <a:ea typeface="Calibri"/>
-                <a:cs typeface="Calibri"/>
-              </a:defRPr>
-            </a:pPr>
-            <a:r>
-              <a:rPr sz="1600" b="1">
-                <a:solidFill>
-                  <a:srgbClr val="DC2626"/>
-                </a:solidFill>
-                <a:latin typeface="Calibri"/>
-                <a:ea typeface="Calibri"/>
-                <a:cs typeface="Calibri"/>
-              </a:rPr>
-              <a:t>•  RQ2 Failure Axes &amp; Overlaps:</a:t>
-            </a:r>
-          </a:p>
-          <a:p xmlns:a="http://schemas.openxmlformats.org/drawingml/2006/main">
-            <a:pPr>
-              <a:buNone/>
-              <a:defRPr sz="1600" b="1">
-                <a:solidFill>
-                  <a:srgbClr val="DC2626"/>
-                </a:solidFill>
-                <a:latin typeface="Calibri"/>
-                <a:ea typeface="Calibri"/>
-                <a:cs typeface="Calibri"/>
-              </a:defRPr>
-            </a:pPr>
-            <a:r>
-              <a:rPr sz="1600" b="1">
-                <a:solidFill>
-                  <a:srgbClr val="DC2626"/>
-                </a:solidFill>
-                <a:latin typeface="Calibri"/>
-                <a:ea typeface="Calibri"/>
-                <a:cs typeface="Calibri"/>
-              </a:rPr>
-              <a:t>  • Valid but Wrong Class Rate: 0.3333</a:t>
-            </a:r>
-          </a:p>
-          <a:p xmlns:a="http://schemas.openxmlformats.org/drawingml/2006/main">
-            <a:pPr>
-              <a:buNone/>
-              <a:defRPr sz="1600" b="1">
-                <a:solidFill>
-                  <a:srgbClr val="DC2626"/>
-                </a:solidFill>
-                <a:latin typeface="Calibri"/>
-                <a:ea typeface="Calibri"/>
-                <a:cs typeface="Calibri"/>
-              </a:defRPr>
-            </a:pPr>
-            <a:r>
-              <a:rPr sz="1600" b="1">
-                <a:solidFill>
-                  <a:srgbClr val="DC2626"/>
-                </a:solidFill>
-                <a:latin typeface="Calibri"/>
-                <a:ea typeface="Calibri"/>
-                <a:cs typeface="Calibri"/>
-              </a:rPr>
-              <a:t>  • Overlaps: Miss &amp; Wrong = 0, Miss &amp; Provider Fail = 0, Miss &amp; Parse Fail = 0, Miss &amp; Invalid ID = 0</a:t>
-            </a:r>
-          </a:p>
-          <a:p xmlns:a="http://schemas.openxmlformats.org/drawingml/2006/main">
-            <a:pPr>
-              <a:spcBef>
-                <a:spcPts val="350"/>
-              </a:spcBef>
-              <a:buNone/>
-              <a:defRPr sz="1150">
-                <a:solidFill>
-                  <a:srgbClr val="0F172A"/>
-                </a:solidFill>
-                <a:latin typeface="Calibri"/>
-                <a:ea typeface="Calibri"/>
-                <a:cs typeface="Calibri"/>
-              </a:defRPr>
-            </a:pPr>
-            <a:r>
-              <a:t>•  Ma trận TEST chính thức: 1,280 views x 5 nhánh (6,400 bản ghi) đang trong tiến trình chạy (PID 50192).</a:t>
-            </a:r>
-          </a:p>
-          <a:p xmlns:a="http://schemas.openxmlformats.org/drawingml/2006/main">
-            <a:pPr>
-              <a:spcBef>
-                <a:spcPts val="350"/>
-              </a:spcBef>
-              <a:buNone/>
-              <a:defRPr sz="1150">
-                <a:solidFill>
-                  <a:srgbClr val="0F172A"/>
-                </a:solidFill>
-                <a:latin typeface="Calibri"/>
-                <a:ea typeface="Calibri"/>
-                <a:cs typeface="Calibri"/>
-              </a:defRPr>
-            </a:pPr>
-            <a:r>
-              <a:t>•  Nguyên tắc Fail-Closed: Evaluator từ chối công bố điểm chính thức khi chưa đủ 6,400 records.</a:t>
-            </a:r>
-          </a:p>
-          <a:p xmlns:a="http://schemas.openxmlformats.org/drawingml/2006/main">
-            <a:pPr>
-              <a:spcBef>
-                <a:spcPts val="350"/>
-              </a:spcBef>
-              <a:buNone/>
-              <a:defRPr sz="1150">
-                <a:solidFill>
-                  <a:srgbClr val="0F172A"/>
-                </a:solidFill>
-                <a:latin typeface="Calibri"/>
-                <a:ea typeface="Calibri"/>
-                <a:cs typeface="Calibri"/>
-              </a:defRPr>
-            </a:pPr>
-            <a:r>
-              <a:t>•  Kiểm định toán học Evaluator: Đã xác thực ngoại tuyến qua 5 test fixtures (outputs/reproduction/fixture_diagnostics/).</a:t>
-            </a:r>
-          </a:p>
-          <a:p xmlns:a="http://schemas.openxmlformats.org/drawingml/2006/main">
-            <a:pPr>
-              <a:spcBef>
-                <a:spcPts val="350"/>
-              </a:spcBef>
-              <a:buNone/>
-              <a:defRPr sz="1150">
-                <a:solidFill>
-                  <a:srgbClr val="0F172A"/>
-                </a:solidFill>
-                <a:latin typeface="Calibri"/>
-                <a:ea typeface="Calibri"/>
-                <a:cs typeface="Calibri"/>
-              </a:defRPr>
-            </a:pPr>
-            <a:r>
-              <a:t>•  Đầu ra chuẩn: 6 metric JSON artifacts kèm _fixture_metadata.json (fixture_only: true).</a:t>
+              <a:t>• RQ2 Phân rã lỗi (k=10): Wrong Class = 0.3333 | Overlaps: Miss&amp;Wrong=0, Prov=0, Parse=0, Inval=0</a:t>
             </a:r>
           </a:p>
         </p:txBody>
@@ -12697,7 +12658,7 @@
     </p:spTree>
     <p:extLst>
       <p:ext uri="{BB962C8B-B14F-4D97-AF65-F5344CB8AC3E}">
-        <p14:creationId xmlns:p14="http://schemas.microsoft.com/office/powerpoint/2010/main" val="1974782684"/>
+        <p14:creationId xmlns:p14="http://schemas.microsoft.com/office/powerpoint/2010/main" val="445248828"/>
       </p:ext>
     </p:extLst>
   </p:cSld>
@@ -12721,7 +12682,7 @@
           <p:cNvPr id="2" name="Rectangle 1">
             <a:extLst xmlns:a="http://schemas.openxmlformats.org/drawingml/2006/main">
               <a:ext uri="{FF2B5EF4-FFF2-40B4-BE49-F238E27FC236}">
-                <a16:creationId xmlns:a16="http://schemas.microsoft.com/office/drawing/2014/main" id="{9A6F0D8B-1A90-4714-969B-24181BE960DB}"/>
+                <a16:creationId xmlns:a16="http://schemas.microsoft.com/office/drawing/2014/main" id="{E516140A-E4C3-4521-B9A7-417CFA224CEB}"/>
               </a:ext>
             </a:extLst>
           </p:cNvPr>
@@ -12774,7 +12735,7 @@
           <p:cNvPr id="3" name="Rectangle 2">
             <a:extLst xmlns:a="http://schemas.openxmlformats.org/drawingml/2006/main">
               <a:ext uri="{FF2B5EF4-FFF2-40B4-BE49-F238E27FC236}">
-                <a16:creationId xmlns:a16="http://schemas.microsoft.com/office/drawing/2014/main" id="{ADBDCF1C-D07F-429E-856E-07A24C7875A6}"/>
+                <a16:creationId xmlns:a16="http://schemas.microsoft.com/office/drawing/2014/main" id="{DD47A10E-8AC0-4EE0-A425-12D76AD055C4}"/>
               </a:ext>
             </a:extLst>
           </p:cNvPr>
@@ -12827,7 +12788,7 @@
           <p:cNvPr id="4" name="Rectangle 3">
             <a:extLst xmlns:a="http://schemas.openxmlformats.org/drawingml/2006/main">
               <a:ext uri="{FF2B5EF4-FFF2-40B4-BE49-F238E27FC236}">
-                <a16:creationId xmlns:a16="http://schemas.microsoft.com/office/drawing/2014/main" id="{8F493E1E-35A6-4DFE-998C-D11A5F19143E}"/>
+                <a16:creationId xmlns:a16="http://schemas.microsoft.com/office/drawing/2014/main" id="{23075E0F-4902-4FF0-8AA0-364388A617B7}"/>
               </a:ext>
             </a:extLst>
           </p:cNvPr>
@@ -12880,7 +12841,7 @@
           <p:cNvPr id="5" name="TextBox 4">
             <a:extLst xmlns:a="http://schemas.openxmlformats.org/drawingml/2006/main">
               <a:ext uri="{FF2B5EF4-FFF2-40B4-BE49-F238E27FC236}">
-                <a16:creationId xmlns:a16="http://schemas.microsoft.com/office/drawing/2014/main" id="{7D484F5E-28DF-403A-BD55-12E2DA5578B9}"/>
+                <a16:creationId xmlns:a16="http://schemas.microsoft.com/office/drawing/2014/main" id="{00B4D52D-E953-485B-B6A4-5D19AF334F73}"/>
               </a:ext>
             </a:extLst>
           </p:cNvPr>
@@ -12933,7 +12894,7 @@
               </a:defRPr>
             </a:pPr>
             <a:r>
-              <a:t>Dữ liệu DEV pilot (synthetic split), hạch toán token ước tính và kiểm soát ngân sách</a:t>
+              <a:t>Dữ liệu DEV pilot (synthetic split) đối chiếu Dự phóng Hạch toán Fixture [DIAGNOSTIC TEST FIXTURE ONLY]</a:t>
             </a:r>
           </a:p>
         </p:txBody>
@@ -12943,7 +12904,7 @@
           <p:cNvPr id="6" name="Rounded Rectangle 5">
             <a:extLst xmlns:a="http://schemas.openxmlformats.org/drawingml/2006/main">
               <a:ext uri="{FF2B5EF4-FFF2-40B4-BE49-F238E27FC236}">
-                <a16:creationId xmlns:a16="http://schemas.microsoft.com/office/drawing/2014/main" id="{5C71D30C-3B04-4ECE-88C3-560968794D82}"/>
+                <a16:creationId xmlns:a16="http://schemas.microsoft.com/office/drawing/2014/main" id="{5511BAE8-677F-437F-8449-FD16F0EDB3E2}"/>
               </a:ext>
             </a:extLst>
           </p:cNvPr>
@@ -12998,7 +12959,7 @@
           <p:cNvPr id="7" name="TextBox 6">
             <a:extLst xmlns:a="http://schemas.openxmlformats.org/drawingml/2006/main">
               <a:ext uri="{FF2B5EF4-FFF2-40B4-BE49-F238E27FC236}">
-                <a16:creationId xmlns:a16="http://schemas.microsoft.com/office/drawing/2014/main" id="{F1CC8640-F1C6-4672-91E4-8C87552209DC}"/>
+                <a16:creationId xmlns:a16="http://schemas.microsoft.com/office/drawing/2014/main" id="{9E23258A-4CDA-4FCC-88E0-CEAD1DD06641}"/>
               </a:ext>
             </a:extLst>
           </p:cNvPr>
@@ -13035,253 +12996,328 @@
               </a:defRPr>
             </a:pPr>
             <a:r>
-              <a:t>DEV Cost Pilot (Synthetic Split) &amp; Chi Phí Hạch Toán</a:t>
-            </a:r>
-          </a:p>
-          <a:p xmlns:a="http://schemas.openxmlformats.org/drawingml/2006/main">
-            <a:pPr>
-              <a:spcBef>
-                <a:spcPts val="200"/>
-              </a:spcBef>
-              <a:buNone/>
-              <a:defRPr sz="1050">
-                <a:solidFill>
-                  <a:srgbClr val="0F172A"/>
-                </a:solidFill>
-                <a:latin typeface="Calibri"/>
-                <a:ea typeface="Calibri"/>
-                <a:cs typeface="Calibri"/>
-              </a:defRPr>
-            </a:pPr>
-            <a:r>
-              <a:t>•  Bản chất dữ liệu: DEV cohort là dữ liệu tổng hợp (synthetic-paired-v1 DEV split, 4 views x 5 điều kiện). Gửi request thực lên LLM provider không biến log tổng hợp thành in-the-wild telemetry.</a:t>
-            </a:r>
-          </a:p>
-          <a:p xmlns:a="http://schemas.openxmlformats.org/drawingml/2006/main">
-            <a:pPr>
-              <a:spcBef>
-                <a:spcPts val="200"/>
-              </a:spcBef>
-              <a:buNone/>
-              <a:defRPr sz="1050">
-                <a:solidFill>
-                  <a:srgbClr val="0F172A"/>
-                </a:solidFill>
-                <a:latin typeface="Calibri"/>
-                <a:ea typeface="Calibri"/>
-                <a:cs typeface="Calibri"/>
-              </a:defRPr>
-            </a:pPr>
-            <a:r>
-              <a:t>•  Quy mô pilot: 20 requests thực tế qua Responses API (100% VALID, 0 retry, trễ TB 8,127.6 ms).</a:t>
-            </a:r>
-          </a:p>
-          <a:p xmlns:a="http://schemas.openxmlformats.org/drawingml/2006/main">
-            <a:pPr>
-              <a:spcBef>
-                <a:spcPts val="200"/>
-              </a:spcBef>
-              <a:buNone/>
-              <a:defRPr sz="1050">
-                <a:solidFill>
-                  <a:srgbClr val="0F172A"/>
-                </a:solidFill>
-                <a:latin typeface="Calibri"/>
-                <a:ea typeface="Calibri"/>
-                <a:cs typeface="Calibri"/>
-              </a:defRPr>
-            </a:pPr>
-            <a:r>
-              <a:t>•  Chi phí hạch toán ước tính từ token quan sát được và biểu giá công bố (Estimated / Accounted Cost):</a:t>
-            </a:r>
-          </a:p>
-          <a:p xmlns:a="http://schemas.openxmlformats.org/drawingml/2006/main">
-            <a:pPr>
-              <a:spcBef>
-                <a:spcPts val="200"/>
-              </a:spcBef>
-              <a:buNone/>
-              <a:defRPr sz="1050">
-                <a:solidFill>
-                  <a:srgbClr val="0F172A"/>
-                </a:solidFill>
-                <a:latin typeface="Calibri"/>
-                <a:ea typeface="Calibri"/>
-                <a:cs typeface="Calibri"/>
-              </a:defRPr>
-            </a:pPr>
-            <a:r>
-              <a:t>  • Pilot 20 requests: $0.024209 USD (conservative: $0.026320 USD) theo đơn giá.</a:t>
-            </a:r>
-          </a:p>
-          <a:p xmlns:a="http://schemas.openxmlformats.org/drawingml/2006/main">
-            <a:pPr>
-              <a:spcBef>
-                <a:spcPts val="200"/>
-              </a:spcBef>
-              <a:buNone/>
-              <a:defRPr sz="1050">
-                <a:solidFill>
-                  <a:srgbClr val="0F172A"/>
-                </a:solidFill>
-                <a:latin typeface="Calibri"/>
-                <a:ea typeface="Calibri"/>
-                <a:cs typeface="Calibri"/>
-              </a:defRPr>
-            </a:pPr>
-            <a:r>
+              <a:rPr sz="825" b="1">
+                <a:solidFill>
+                  <a:srgbClr val="1E40AF"/>
+                </a:solidFill>
+                <a:latin typeface="Calibri"/>
+                <a:ea typeface="Calibri"/>
+                <a:cs typeface="Calibri"/>
+              </a:rPr>
+              <a:t>DEV Pilot Telemetry &amp; Hạch Toán Dự Phóng [DIAGNOSTIC TEST FIXTURE ONLY - NOT CANONICAL NUMERICAL RESULTS]</a:t>
+            </a:r>
+          </a:p>
+          <a:p xmlns:a="http://schemas.openxmlformats.org/drawingml/2006/main">
+            <a:pPr>
+              <a:buNone/>
+              <a:defRPr sz="1600" b="1">
+                <a:solidFill>
+                  <a:srgbClr val="1E40AF"/>
+                </a:solidFill>
+                <a:latin typeface="Calibri"/>
+                <a:ea typeface="Calibri"/>
+                <a:cs typeface="Calibri"/>
+              </a:defRPr>
+            </a:pPr>
+          </a:p>
+          <a:p xmlns:a="http://schemas.openxmlformats.org/drawingml/2006/main">
+            <a:pPr>
+              <a:buNone/>
+              <a:defRPr sz="1600" b="1">
+                <a:solidFill>
+                  <a:srgbClr val="1E40AF"/>
+                </a:solidFill>
+                <a:latin typeface="Calibri"/>
+                <a:ea typeface="Calibri"/>
+                <a:cs typeface="Calibri"/>
+              </a:defRPr>
+            </a:pPr>
+            <a:r>
+              <a:rPr sz="825" b="1">
+                <a:solidFill>
+                  <a:srgbClr val="1E40AF"/>
+                </a:solidFill>
+                <a:latin typeface="Calibri"/>
+                <a:ea typeface="Calibri"/>
+                <a:cs typeface="Calibri"/>
+              </a:rPr>
+              <a:t>▶ [HISTORICAL DEV PILOT BASELINE (20 Requests)]</a:t>
+            </a:r>
+          </a:p>
+          <a:p xmlns:a="http://schemas.openxmlformats.org/drawingml/2006/main">
+            <a:pPr>
+              <a:buNone/>
+              <a:defRPr sz="1600" b="1">
+                <a:solidFill>
+                  <a:srgbClr val="1E40AF"/>
+                </a:solidFill>
+                <a:latin typeface="Calibri"/>
+                <a:ea typeface="Calibri"/>
+                <a:cs typeface="Calibri"/>
+              </a:defRPr>
+            </a:pPr>
+            <a:r>
+              <a:rPr sz="825" b="1">
+                <a:solidFill>
+                  <a:srgbClr val="1E40AF"/>
+                </a:solidFill>
+                <a:latin typeface="Calibri"/>
+                <a:ea typeface="Calibri"/>
+                <a:cs typeface="Calibri"/>
+              </a:rPr>
+              <a:t>• Bản chất: DEV split tổng hợp (4 views x 5 điều kiện). Gửi request thực tế không biến log tổng hợp thành in-the-wild telemetry.</a:t>
+            </a:r>
+          </a:p>
+          <a:p xmlns:a="http://schemas.openxmlformats.org/drawingml/2006/main">
+            <a:pPr>
+              <a:buNone/>
+              <a:defRPr sz="1600" b="1">
+                <a:solidFill>
+                  <a:srgbClr val="1E40AF"/>
+                </a:solidFill>
+                <a:latin typeface="Calibri"/>
+                <a:ea typeface="Calibri"/>
+                <a:cs typeface="Calibri"/>
+              </a:defRPr>
+            </a:pPr>
+            <a:r>
+              <a:rPr sz="825" b="1">
+                <a:solidFill>
+                  <a:srgbClr val="1E40AF"/>
+                </a:solidFill>
+                <a:latin typeface="Calibri"/>
+                <a:ea typeface="Calibri"/>
+                <a:cs typeface="Calibri"/>
+              </a:rPr>
+              <a:t>• Quy mô: 20 requests thực tế Responses API (100% VALID, 0 retry, trễ TB 8,127.6 ms).</a:t>
+            </a:r>
+          </a:p>
+          <a:p xmlns:a="http://schemas.openxmlformats.org/drawingml/2006/main">
+            <a:pPr>
+              <a:buNone/>
+              <a:defRPr sz="1600" b="1">
+                <a:solidFill>
+                  <a:srgbClr val="1E40AF"/>
+                </a:solidFill>
+                <a:latin typeface="Calibri"/>
+                <a:ea typeface="Calibri"/>
+                <a:cs typeface="Calibri"/>
+              </a:defRPr>
+            </a:pPr>
+            <a:r>
+              <a:rPr sz="825" b="1">
+                <a:solidFill>
+                  <a:srgbClr val="1E40AF"/>
+                </a:solidFill>
+                <a:latin typeface="Calibri"/>
+                <a:ea typeface="Calibri"/>
+                <a:cs typeface="Calibri"/>
+              </a:rPr>
+              <a:t>• Tiêu thụ tài nguyên &amp; chi phí quan sát được (Observed Telemetry):</a:t>
+            </a:r>
+          </a:p>
+          <a:p xmlns:a="http://schemas.openxmlformats.org/drawingml/2006/main">
+            <a:pPr>
+              <a:buNone/>
+              <a:defRPr sz="1600" b="1">
+                <a:solidFill>
+                  <a:srgbClr val="1E40AF"/>
+                </a:solidFill>
+                <a:latin typeface="Calibri"/>
+                <a:ea typeface="Calibri"/>
+                <a:cs typeface="Calibri"/>
+              </a:defRPr>
+            </a:pPr>
+            <a:r>
+              <a:rPr sz="825" b="1">
+                <a:solidFill>
+                  <a:srgbClr val="1E40AF"/>
+                </a:solidFill>
+                <a:latin typeface="Calibri"/>
+                <a:ea typeface="Calibri"/>
+                <a:cs typeface="Calibri"/>
+              </a:rPr>
               <a:t>  • no_rag (k=0): 643.0 mean prompt tokens, med lat 7.89s (~0.000390 USD / logical req)</a:t>
             </a:r>
           </a:p>
           <a:p xmlns:a="http://schemas.openxmlformats.org/drawingml/2006/main">
             <a:pPr>
-              <a:spcBef>
-                <a:spcPts val="200"/>
-              </a:spcBef>
-              <a:buNone/>
-              <a:defRPr sz="1050">
-                <a:solidFill>
-                  <a:srgbClr val="0F172A"/>
-                </a:solidFill>
-                <a:latin typeface="Calibri"/>
-                <a:ea typeface="Calibri"/>
-                <a:cs typeface="Calibri"/>
-              </a:defRPr>
-            </a:pPr>
-            <a:r>
-              <a:t>  • rag_k1 (k=1): 1,115 in / 332 out (~$0.00062 / query)</a:t>
-            </a:r>
-          </a:p>
-          <a:p xmlns:a="http://schemas.openxmlformats.org/drawingml/2006/main">
-            <a:pPr>
-              <a:spcBef>
-                <a:spcPts val="200"/>
-              </a:spcBef>
-              <a:buNone/>
-              <a:defRPr sz="1050">
-                <a:solidFill>
-                  <a:srgbClr val="0F172A"/>
-                </a:solidFill>
-                <a:latin typeface="Calibri"/>
-                <a:ea typeface="Calibri"/>
-                <a:cs typeface="Calibri"/>
-              </a:defRPr>
-            </a:pPr>
-            <a:r>
-              <a:t>  • rag_k3 (k=3): 1,741 in / 1,087 out (~$0.00165 / query - telemetry ban đầu)</a:t>
-            </a:r>
-          </a:p>
-          <a:p xmlns:a="http://schemas.openxmlformats.org/drawingml/2006/main">
-            <a:pPr>
-              <a:spcBef>
-                <a:spcPts val="200"/>
-              </a:spcBef>
-              <a:buNone/>
-              <a:defRPr sz="1050">
-                <a:solidFill>
-                  <a:srgbClr val="0F172A"/>
-                </a:solidFill>
-                <a:latin typeface="Calibri"/>
-                <a:ea typeface="Calibri"/>
-                <a:cs typeface="Calibri"/>
-              </a:defRPr>
-            </a:pPr>
-            <a:r>
-              <a:t>  • rag_k5 (k=5): 2,518 in / 840 out (~$0.00151 / query)</a:t>
-            </a:r>
-          </a:p>
-          <a:p xmlns:a="http://schemas.openxmlformats.org/drawingml/2006/main">
-            <a:pPr>
-              <a:spcBef>
-                <a:spcPts val="200"/>
-              </a:spcBef>
-              <a:buNone/>
-              <a:defRPr sz="1050">
-                <a:solidFill>
-                  <a:srgbClr val="0F172A"/>
-                </a:solidFill>
-                <a:latin typeface="Calibri"/>
-                <a:ea typeface="Calibri"/>
-                <a:cs typeface="Calibri"/>
-              </a:defRPr>
-            </a:pPr>
-            <a:r>
+              <a:buNone/>
+              <a:defRPr sz="1600" b="1">
+                <a:solidFill>
+                  <a:srgbClr val="1E40AF"/>
+                </a:solidFill>
+                <a:latin typeface="Calibri"/>
+                <a:ea typeface="Calibri"/>
+                <a:cs typeface="Calibri"/>
+              </a:defRPr>
+            </a:pPr>
+            <a:r>
+              <a:rPr sz="825" b="1">
+                <a:solidFill>
+                  <a:srgbClr val="1E40AF"/>
+                </a:solidFill>
+                <a:latin typeface="Calibri"/>
+                <a:ea typeface="Calibri"/>
+                <a:cs typeface="Calibri"/>
+              </a:rPr>
               <a:t>  • rag_k10 (k=10): 4536.5 mean prompt tokens, med lat 9.90s (~0.001870 USD / logical req)</a:t>
             </a:r>
           </a:p>
           <a:p xmlns:a="http://schemas.openxmlformats.org/drawingml/2006/main">
             <a:pPr>
-              <a:spcBef>
-                <a:spcPts val="200"/>
-              </a:spcBef>
-              <a:buNone/>
-              <a:defRPr sz="1050">
-                <a:solidFill>
-                  <a:srgbClr val="0F172A"/>
-                </a:solidFill>
-                <a:latin typeface="Calibri"/>
-                <a:ea typeface="Calibri"/>
-                <a:cs typeface="Calibri"/>
-              </a:defRPr>
-            </a:pPr>
-            <a:r>
-              <a:t>•  Phân định rõ ranh giới ngân sách:</a:t>
-            </a:r>
-          </a:p>
-          <a:p xmlns:a="http://schemas.openxmlformats.org/drawingml/2006/main">
-            <a:pPr>
-              <a:spcBef>
-                <a:spcPts val="200"/>
-              </a:spcBef>
-              <a:buNone/>
-              <a:defRPr sz="1050">
-                <a:solidFill>
-                  <a:srgbClr val="0F172A"/>
-                </a:solidFill>
-                <a:latin typeface="Calibri"/>
-                <a:ea typeface="Calibri"/>
-                <a:cs typeface="Calibri"/>
-              </a:defRPr>
-            </a:pPr>
-            <a:r>
+              <a:buNone/>
+              <a:defRPr sz="1600" b="1">
+                <a:solidFill>
+                  <a:srgbClr val="1E40AF"/>
+                </a:solidFill>
+                <a:latin typeface="Calibri"/>
+                <a:ea typeface="Calibri"/>
+                <a:cs typeface="Calibri"/>
+              </a:defRPr>
+            </a:pPr>
+            <a:r>
+              <a:rPr sz="825" b="1">
+                <a:solidFill>
+                  <a:srgbClr val="1E40AF"/>
+                </a:solidFill>
+                <a:latin typeface="Calibri"/>
+                <a:ea typeface="Calibri"/>
+                <a:cs typeface="Calibri"/>
+              </a:rPr>
               <a:t>  • Giữ chỗ thận trọng tạm thời: 0.05264010 USD (prior_pilot_provisional_hold_usd).</a:t>
             </a:r>
           </a:p>
           <a:p xmlns:a="http://schemas.openxmlformats.org/drawingml/2006/main">
             <a:pPr>
-              <a:spcBef>
-                <a:spcPts val="200"/>
-              </a:spcBef>
-              <a:buNone/>
-              <a:defRPr sz="1050">
-                <a:solidFill>
-                  <a:srgbClr val="0F172A"/>
-                </a:solidFill>
-                <a:latin typeface="Calibri"/>
-                <a:ea typeface="Calibri"/>
-                <a:cs typeface="Calibri"/>
-              </a:defRPr>
-            </a:pPr>
-            <a:r>
-              <a:t>  • Hạch toán điều kiện chuẩn (Canonical Total): 8.50 USD | Net Remaining: 11.44 USD.</a:t>
-            </a:r>
-          </a:p>
-          <a:p xmlns:a="http://schemas.openxmlformats.org/drawingml/2006/main">
-            <a:pPr>
-              <a:spcBef>
-                <a:spcPts val="200"/>
-              </a:spcBef>
-              <a:buNone/>
-              <a:defRPr sz="1050">
-                <a:solidFill>
-                  <a:srgbClr val="0F172A"/>
-                </a:solidFill>
-                <a:latin typeface="Calibri"/>
-                <a:ea typeface="Calibri"/>
-                <a:cs typeface="Calibri"/>
-              </a:defRPr>
-            </a:pPr>
-            <a:r>
+              <a:buNone/>
+              <a:defRPr sz="1600" b="1">
+                <a:solidFill>
+                  <a:srgbClr val="1E40AF"/>
+                </a:solidFill>
+                <a:latin typeface="Calibri"/>
+                <a:ea typeface="Calibri"/>
+                <a:cs typeface="Calibri"/>
+              </a:defRPr>
+            </a:pPr>
+          </a:p>
+          <a:p xmlns:a="http://schemas.openxmlformats.org/drawingml/2006/main">
+            <a:pPr>
+              <a:buNone/>
+              <a:defRPr sz="1600" b="1">
+                <a:solidFill>
+                  <a:srgbClr val="1E40AF"/>
+                </a:solidFill>
+                <a:latin typeface="Calibri"/>
+                <a:ea typeface="Calibri"/>
+                <a:cs typeface="Calibri"/>
+              </a:defRPr>
+            </a:pPr>
+            <a:r>
+              <a:rPr sz="825" b="1">
+                <a:solidFill>
+                  <a:srgbClr val="1E40AF"/>
+                </a:solidFill>
+                <a:latin typeface="Calibri"/>
+                <a:ea typeface="Calibri"/>
+                <a:cs typeface="Calibri"/>
+              </a:rPr>
+              <a:t>▶ [DIAGNOSTIC FIXTURE PROJECTION (N=718 SCORABLE VIEWS)]</a:t>
+            </a:r>
+          </a:p>
+          <a:p xmlns:a="http://schemas.openxmlformats.org/drawingml/2006/main">
+            <a:pPr>
+              <a:buNone/>
+              <a:defRPr sz="1600" b="1">
+                <a:solidFill>
+                  <a:srgbClr val="1E40AF"/>
+                </a:solidFill>
+                <a:latin typeface="Calibri"/>
+                <a:ea typeface="Calibri"/>
+                <a:cs typeface="Calibri"/>
+              </a:defRPr>
+            </a:pPr>
+            <a:r>
+              <a:rPr sz="825" b="1">
+                <a:solidFill>
+                  <a:srgbClr val="1E40AF"/>
+                </a:solidFill>
+                <a:latin typeface="Calibri"/>
+                <a:ea typeface="Calibri"/>
+                <a:cs typeface="Calibri"/>
+              </a:rPr>
+              <a:t>• Hạch toán toàn thể nghiên cứu theo fixture (Whole Study Accounting Fixture):</a:t>
+            </a:r>
+          </a:p>
+          <a:p xmlns:a="http://schemas.openxmlformats.org/drawingml/2006/main">
+            <a:pPr>
+              <a:buNone/>
+              <a:defRPr sz="1600" b="1">
+                <a:solidFill>
+                  <a:srgbClr val="1E40AF"/>
+                </a:solidFill>
+                <a:latin typeface="Calibri"/>
+                <a:ea typeface="Calibri"/>
+                <a:cs typeface="Calibri"/>
+              </a:defRPr>
+            </a:pPr>
+            <a:r>
+              <a:rPr sz="825" b="1">
+                <a:solidFill>
+                  <a:srgbClr val="1E40AF"/>
+                </a:solidFill>
+                <a:latin typeface="Calibri"/>
+                <a:ea typeface="Calibri"/>
+                <a:cs typeface="Calibri"/>
+              </a:rPr>
+              <a:t>  • Hạch toán điều kiện chuẩn (Canonical Total): 8.50 USD cho 6,400 requests.</a:t>
+            </a:r>
+          </a:p>
+          <a:p xmlns:a="http://schemas.openxmlformats.org/drawingml/2006/main">
+            <a:pPr>
+              <a:buNone/>
+              <a:defRPr sz="1600" b="1">
+                <a:solidFill>
+                  <a:srgbClr val="1E40AF"/>
+                </a:solidFill>
+                <a:latin typeface="Calibri"/>
+                <a:ea typeface="Calibri"/>
+                <a:cs typeface="Calibri"/>
+              </a:defRPr>
+            </a:pPr>
+            <a:r>
+              <a:rPr sz="825" b="1">
+                <a:solidFill>
+                  <a:srgbClr val="1E40AF"/>
+                </a:solidFill>
+                <a:latin typeface="Calibri"/>
+                <a:ea typeface="Calibri"/>
+                <a:cs typeface="Calibri"/>
+              </a:rPr>
+              <a:t>  • Ngân sách chưa cam kết còn lại (Net Remaining): 11.44 USD.</a:t>
+            </a:r>
+          </a:p>
+          <a:p xmlns:a="http://schemas.openxmlformats.org/drawingml/2006/main">
+            <a:pPr>
+              <a:buNone/>
+              <a:defRPr sz="1600" b="1">
+                <a:solidFill>
+                  <a:srgbClr val="1E40AF"/>
+                </a:solidFill>
+                <a:latin typeface="Calibri"/>
+                <a:ea typeface="Calibri"/>
+                <a:cs typeface="Calibri"/>
+              </a:defRPr>
+            </a:pPr>
+            <a:r>
+              <a:rPr sz="825" b="1">
+                <a:solidFill>
+                  <a:srgbClr val="1E40AF"/>
+                </a:solidFill>
+                <a:latin typeface="Calibri"/>
+                <a:ea typeface="Calibri"/>
+                <a:cs typeface="Calibri"/>
+              </a:rPr>
               <a:t>  • Trần ngân sách đóng băng cứng: 19.99 USD (hard_budget_limit_usd).</a:t>
             </a:r>
           </a:p>
@@ -13296,7 +13332,7 @@
           <p:nvPr/>
         </p:nvPicPr>
         <p:blipFill>
-          <a:blip xmlns:r="http://schemas.openxmlformats.org/officeDocument/2006/relationships" xmlns:a="http://schemas.openxmlformats.org/drawingml/2006/main" r:embed="Rd1920b8d366045d7"/>
+          <a:blip xmlns:r="http://schemas.openxmlformats.org/officeDocument/2006/relationships" xmlns:a="http://schemas.openxmlformats.org/drawingml/2006/main" r:embed="Rdd71940cb6394960"/>
           <a:stretch xmlns:a="http://schemas.openxmlformats.org/drawingml/2006/main">
             <a:fillRect l="0" t="0" r="0" b="0"/>
           </a:stretch>
@@ -13316,7 +13352,7 @@
           <p:cNvPr id="9" name="Rounded Rectangle 8">
             <a:extLst xmlns:a="http://schemas.openxmlformats.org/drawingml/2006/main">
               <a:ext uri="{FF2B5EF4-FFF2-40B4-BE49-F238E27FC236}">
-                <a16:creationId xmlns:a16="http://schemas.microsoft.com/office/drawing/2014/main" id="{5E4D2763-03FE-4E8D-BC91-1A227BFF91DD}"/>
+                <a16:creationId xmlns:a16="http://schemas.microsoft.com/office/drawing/2014/main" id="{67BE1C8E-4C45-46FC-A696-1296461D49A2}"/>
               </a:ext>
             </a:extLst>
           </p:cNvPr>
@@ -13371,7 +13407,7 @@
           <p:cNvPr id="10" name="TextBox 9">
             <a:extLst xmlns:a="http://schemas.openxmlformats.org/drawingml/2006/main">
               <a:ext uri="{FF2B5EF4-FFF2-40B4-BE49-F238E27FC236}">
-                <a16:creationId xmlns:a16="http://schemas.microsoft.com/office/drawing/2014/main" id="{4F1F517E-8CC7-4CD1-B2A3-D35B3B387BCE}"/>
+                <a16:creationId xmlns:a16="http://schemas.microsoft.com/office/drawing/2014/main" id="{B399EFDE-785B-4E0D-AE93-9F08E771C7C8}"/>
               </a:ext>
             </a:extLst>
           </p:cNvPr>
@@ -13446,7 +13482,7 @@
               </a:defRPr>
             </a:pPr>
             <a:r>
-              <a:t>•  Dự báo chuẩn tắc tập TEST (&lt; $10 USD) nằm an toàn dưới trần ngân sách đóng băng $19.99 USD.</a:t>
+              <a:t>•  Dự báo chuẩn tắc tập TEST: 8.50 USD nằm an toàn dưới trần ngân sách đóng băng 19.99 USD [DIAGNOSTIC FIXTURE].</a:t>
             </a:r>
           </a:p>
         </p:txBody>
@@ -13454,7 +13490,7 @@
     </p:spTree>
     <p:extLst>
       <p:ext uri="{BB962C8B-B14F-4D97-AF65-F5344CB8AC3E}">
-        <p14:creationId xmlns:p14="http://schemas.microsoft.com/office/powerpoint/2010/main" val="1229984318"/>
+        <p14:creationId xmlns:p14="http://schemas.microsoft.com/office/powerpoint/2010/main" val="2063367648"/>
       </p:ext>
     </p:extLst>
   </p:cSld>

--- a/reports/evidence/fixture_populated_slides.pptx
+++ b/reports/evidence/fixture_populated_slides.pptx
@@ -2,24 +2,24 @@
 <file path=ppt/presentation.xml><?xml version="1.0" encoding="utf-8"?>
 <p:presentation xmlns:p="http://schemas.openxmlformats.org/presentationml/2006/main">
   <p:sldMasterIdLst>
-    <p:sldMasterId xmlns:r="http://schemas.openxmlformats.org/officeDocument/2006/relationships" id="2147483648" r:id="Re83606f4b3cd4a6c"/>
+    <p:sldMasterId xmlns:r="http://schemas.openxmlformats.org/officeDocument/2006/relationships" id="2147483648" r:id="R60c301539b9a42b2"/>
   </p:sldMasterIdLst>
   <p:notesMasterIdLst>
-    <p:notesMasterId xmlns:r="http://schemas.openxmlformats.org/officeDocument/2006/relationships" r:id="Rb98fb851a9004693"/>
+    <p:notesMasterId xmlns:r="http://schemas.openxmlformats.org/officeDocument/2006/relationships" r:id="R41d0ef69073e4774"/>
   </p:notesMasterIdLst>
   <p:sldIdLst>
-    <p:sldId xmlns:r="http://schemas.openxmlformats.org/officeDocument/2006/relationships" id="256" r:id="Rc72db5862dc744cd"/>
-    <p:sldId xmlns:r="http://schemas.openxmlformats.org/officeDocument/2006/relationships" id="257" r:id="R847ef263d8c84ea2"/>
-    <p:sldId xmlns:r="http://schemas.openxmlformats.org/officeDocument/2006/relationships" id="258" r:id="R421d86f0cbf54a3f"/>
-    <p:sldId xmlns:r="http://schemas.openxmlformats.org/officeDocument/2006/relationships" id="259" r:id="Ra0ee6b1df59c400b"/>
-    <p:sldId xmlns:r="http://schemas.openxmlformats.org/officeDocument/2006/relationships" id="260" r:id="R9c40e427af924bf6"/>
-    <p:sldId xmlns:r="http://schemas.openxmlformats.org/officeDocument/2006/relationships" id="261" r:id="Ra1bfcc8411cf4d6f"/>
-    <p:sldId xmlns:r="http://schemas.openxmlformats.org/officeDocument/2006/relationships" id="262" r:id="Rc581e41578ab494f"/>
-    <p:sldId xmlns:r="http://schemas.openxmlformats.org/officeDocument/2006/relationships" id="263" r:id="R62576bcb9b6a4eed"/>
-    <p:sldId xmlns:r="http://schemas.openxmlformats.org/officeDocument/2006/relationships" id="264" r:id="Rd321c64c8e64467a"/>
-    <p:sldId xmlns:r="http://schemas.openxmlformats.org/officeDocument/2006/relationships" id="265" r:id="R60c66094471d4eb3"/>
-    <p:sldId xmlns:r="http://schemas.openxmlformats.org/officeDocument/2006/relationships" id="266" r:id="R75481b05ea3b4d2d"/>
-    <p:sldId xmlns:r="http://schemas.openxmlformats.org/officeDocument/2006/relationships" id="267" r:id="Rb613b301df2d45e1"/>
+    <p:sldId xmlns:r="http://schemas.openxmlformats.org/officeDocument/2006/relationships" id="256" r:id="R98004795aac947c4"/>
+    <p:sldId xmlns:r="http://schemas.openxmlformats.org/officeDocument/2006/relationships" id="257" r:id="R796c744cf7954b3f"/>
+    <p:sldId xmlns:r="http://schemas.openxmlformats.org/officeDocument/2006/relationships" id="258" r:id="R865353c44c4b43d0"/>
+    <p:sldId xmlns:r="http://schemas.openxmlformats.org/officeDocument/2006/relationships" id="259" r:id="R326b732faba1456d"/>
+    <p:sldId xmlns:r="http://schemas.openxmlformats.org/officeDocument/2006/relationships" id="260" r:id="Ree96208da5df48e8"/>
+    <p:sldId xmlns:r="http://schemas.openxmlformats.org/officeDocument/2006/relationships" id="261" r:id="Rf57e9d09a8d94d17"/>
+    <p:sldId xmlns:r="http://schemas.openxmlformats.org/officeDocument/2006/relationships" id="262" r:id="Rc252fb27690e4b69"/>
+    <p:sldId xmlns:r="http://schemas.openxmlformats.org/officeDocument/2006/relationships" id="263" r:id="R2d64358f688d4fa6"/>
+    <p:sldId xmlns:r="http://schemas.openxmlformats.org/officeDocument/2006/relationships" id="264" r:id="Ree75c31ff95e4c02"/>
+    <p:sldId xmlns:r="http://schemas.openxmlformats.org/officeDocument/2006/relationships" id="265" r:id="R44eeafb0679146a1"/>
+    <p:sldId xmlns:r="http://schemas.openxmlformats.org/officeDocument/2006/relationships" id="266" r:id="Ra432547eaafe4b00"/>
+    <p:sldId xmlns:r="http://schemas.openxmlformats.org/officeDocument/2006/relationships" id="267" r:id="Rb3ed13219605450c"/>
   </p:sldIdLst>
   <p:sldSz cx="12191695" cy="6858000"/>
   <p:notesSz cx="6858000" cy="9144000"/>
@@ -1582,7 +1582,7 @@
           <p:cNvPr id="2" name="Title 1">
             <a:extLst xmlns:a="http://schemas.openxmlformats.org/drawingml/2006/main">
               <a:ext uri="{FF2B5EF4-FFF2-40B4-BE49-F238E27FC236}">
-                <a16:creationId xmlns:a16="http://schemas.microsoft.com/office/drawing/2014/main" id="{F44F11A1-D9D1-40B6-898B-E87A0B75CFDC}"/>
+                <a16:creationId xmlns:a16="http://schemas.microsoft.com/office/drawing/2014/main" id="{6BAC8A54-B266-4D17-B129-B12B2DC685F9}"/>
               </a:ext>
             </a:extLst>
           </p:cNvPr>
@@ -1615,7 +1615,7 @@
           <p:cNvPr id="3" name="Subtitle 2">
             <a:extLst xmlns:a="http://schemas.openxmlformats.org/drawingml/2006/main">
               <a:ext uri="{FF2B5EF4-FFF2-40B4-BE49-F238E27FC236}">
-                <a16:creationId xmlns:a16="http://schemas.microsoft.com/office/drawing/2014/main" id="{930DB4F5-6C16-4C90-9478-D11BE04AD3CF}"/>
+                <a16:creationId xmlns:a16="http://schemas.microsoft.com/office/drawing/2014/main" id="{5BAC9853-E2B4-4A65-96D9-CB1B30CD5513}"/>
               </a:ext>
             </a:extLst>
           </p:cNvPr>
@@ -1739,7 +1739,7 @@
           <p:cNvPr id="4" name="Date Placeholder 3">
             <a:extLst xmlns:a="http://schemas.openxmlformats.org/drawingml/2006/main">
               <a:ext uri="{FF2B5EF4-FFF2-40B4-BE49-F238E27FC236}">
-                <a16:creationId xmlns:a16="http://schemas.microsoft.com/office/drawing/2014/main" id="{2364297E-B181-4E7C-BDED-C296B0D1BAF5}"/>
+                <a16:creationId xmlns:a16="http://schemas.microsoft.com/office/drawing/2014/main" id="{DB713E41-5C03-487B-A36B-7E738F67FFFB}"/>
               </a:ext>
             </a:extLst>
           </p:cNvPr>
@@ -1767,7 +1767,7 @@
           <p:cNvPr id="5" name="Footer Placeholder 4">
             <a:extLst xmlns:a="http://schemas.openxmlformats.org/drawingml/2006/main">
               <a:ext uri="{FF2B5EF4-FFF2-40B4-BE49-F238E27FC236}">
-                <a16:creationId xmlns:a16="http://schemas.microsoft.com/office/drawing/2014/main" id="{7BF34AB5-9A20-4CA0-94B6-782FB47F22B2}"/>
+                <a16:creationId xmlns:a16="http://schemas.microsoft.com/office/drawing/2014/main" id="{FD56411F-464C-4A27-B44E-57510F1D94C2}"/>
               </a:ext>
             </a:extLst>
           </p:cNvPr>
@@ -1792,7 +1792,7 @@
           <p:cNvPr id="6" name="Slide Number Placeholder 5">
             <a:extLst xmlns:a="http://schemas.openxmlformats.org/drawingml/2006/main">
               <a:ext uri="{FF2B5EF4-FFF2-40B4-BE49-F238E27FC236}">
-                <a16:creationId xmlns:a16="http://schemas.microsoft.com/office/drawing/2014/main" id="{87126F1A-131C-41AF-BA89-AFF5A89008BB}"/>
+                <a16:creationId xmlns:a16="http://schemas.microsoft.com/office/drawing/2014/main" id="{0E7FBB38-8B50-4E45-8402-A45817109674}"/>
               </a:ext>
             </a:extLst>
           </p:cNvPr>
@@ -1837,7 +1837,7 @@
           <p:cNvPr id="2" name="Title 1">
             <a:extLst xmlns:a="http://schemas.openxmlformats.org/drawingml/2006/main">
               <a:ext uri="{FF2B5EF4-FFF2-40B4-BE49-F238E27FC236}">
-                <a16:creationId xmlns:a16="http://schemas.microsoft.com/office/drawing/2014/main" id="{111D248A-AF11-4C73-A72A-C5BEDE797486}"/>
+                <a16:creationId xmlns:a16="http://schemas.microsoft.com/office/drawing/2014/main" id="{D29F0096-FAFC-4AE7-B5A6-F79B4B878DDB}"/>
               </a:ext>
             </a:extLst>
           </p:cNvPr>
@@ -1865,7 +1865,7 @@
           <p:cNvPr id="3" name="Vertical Text Placeholder 2">
             <a:extLst xmlns:a="http://schemas.openxmlformats.org/drawingml/2006/main">
               <a:ext uri="{FF2B5EF4-FFF2-40B4-BE49-F238E27FC236}">
-                <a16:creationId xmlns:a16="http://schemas.microsoft.com/office/drawing/2014/main" id="{E4921C64-FCEE-4DB9-AE36-6031A0A3236C}"/>
+                <a16:creationId xmlns:a16="http://schemas.microsoft.com/office/drawing/2014/main" id="{E27CFA59-85FB-400B-9BC9-B352CDF272B9}"/>
               </a:ext>
             </a:extLst>
           </p:cNvPr>
@@ -1928,7 +1928,7 @@
           <p:cNvPr id="4" name="Date Placeholder 3">
             <a:extLst xmlns:a="http://schemas.openxmlformats.org/drawingml/2006/main">
               <a:ext uri="{FF2B5EF4-FFF2-40B4-BE49-F238E27FC236}">
-                <a16:creationId xmlns:a16="http://schemas.microsoft.com/office/drawing/2014/main" id="{27DB5FD5-9099-452B-BA67-ABC28FF9937A}"/>
+                <a16:creationId xmlns:a16="http://schemas.microsoft.com/office/drawing/2014/main" id="{23977CB8-3260-4933-BF8F-8948188159B0}"/>
               </a:ext>
             </a:extLst>
           </p:cNvPr>
@@ -1956,7 +1956,7 @@
           <p:cNvPr id="5" name="Footer Placeholder 4">
             <a:extLst xmlns:a="http://schemas.openxmlformats.org/drawingml/2006/main">
               <a:ext uri="{FF2B5EF4-FFF2-40B4-BE49-F238E27FC236}">
-                <a16:creationId xmlns:a16="http://schemas.microsoft.com/office/drawing/2014/main" id="{2DDF249D-995E-4AD9-B1B6-3620E2DD0BC2}"/>
+                <a16:creationId xmlns:a16="http://schemas.microsoft.com/office/drawing/2014/main" id="{0AEC9E11-7F05-4048-AE00-C82D78290659}"/>
               </a:ext>
             </a:extLst>
           </p:cNvPr>
@@ -1981,7 +1981,7 @@
           <p:cNvPr id="6" name="Slide Number Placeholder 5">
             <a:extLst xmlns:a="http://schemas.openxmlformats.org/drawingml/2006/main">
               <a:ext uri="{FF2B5EF4-FFF2-40B4-BE49-F238E27FC236}">
-                <a16:creationId xmlns:a16="http://schemas.microsoft.com/office/drawing/2014/main" id="{E4D78CB9-DD79-4209-A95D-C2F80591BFC4}"/>
+                <a16:creationId xmlns:a16="http://schemas.microsoft.com/office/drawing/2014/main" id="{16AB11B5-6FE4-4867-9235-117D465492D6}"/>
               </a:ext>
             </a:extLst>
           </p:cNvPr>
@@ -2026,7 +2026,7 @@
           <p:cNvPr id="2" name="Vertical Title 1">
             <a:extLst xmlns:a="http://schemas.openxmlformats.org/drawingml/2006/main">
               <a:ext uri="{FF2B5EF4-FFF2-40B4-BE49-F238E27FC236}">
-                <a16:creationId xmlns:a16="http://schemas.microsoft.com/office/drawing/2014/main" id="{5C960FBB-342A-475B-A3CB-478F84E93E53}"/>
+                <a16:creationId xmlns:a16="http://schemas.microsoft.com/office/drawing/2014/main" id="{20B895C4-8AB8-4056-838F-48DB4F529F25}"/>
               </a:ext>
             </a:extLst>
           </p:cNvPr>
@@ -2059,7 +2059,7 @@
           <p:cNvPr id="3" name="Vertical Text Placeholder 2">
             <a:extLst xmlns:a="http://schemas.openxmlformats.org/drawingml/2006/main">
               <a:ext uri="{FF2B5EF4-FFF2-40B4-BE49-F238E27FC236}">
-                <a16:creationId xmlns:a16="http://schemas.microsoft.com/office/drawing/2014/main" id="{5FC16BEA-C5D8-4375-803D-3AB575F7C380}"/>
+                <a16:creationId xmlns:a16="http://schemas.microsoft.com/office/drawing/2014/main" id="{91EECE6D-DD09-4B7F-B9ED-937341AE28CE}"/>
               </a:ext>
             </a:extLst>
           </p:cNvPr>
@@ -2127,7 +2127,7 @@
           <p:cNvPr id="4" name="Date Placeholder 3">
             <a:extLst xmlns:a="http://schemas.openxmlformats.org/drawingml/2006/main">
               <a:ext uri="{FF2B5EF4-FFF2-40B4-BE49-F238E27FC236}">
-                <a16:creationId xmlns:a16="http://schemas.microsoft.com/office/drawing/2014/main" id="{FFF58B34-5AF2-4F6E-A67E-67DD445BBF5E}"/>
+                <a16:creationId xmlns:a16="http://schemas.microsoft.com/office/drawing/2014/main" id="{3B848512-2E89-42E0-A23B-A1D3FF406706}"/>
               </a:ext>
             </a:extLst>
           </p:cNvPr>
@@ -2155,7 +2155,7 @@
           <p:cNvPr id="5" name="Footer Placeholder 4">
             <a:extLst xmlns:a="http://schemas.openxmlformats.org/drawingml/2006/main">
               <a:ext uri="{FF2B5EF4-FFF2-40B4-BE49-F238E27FC236}">
-                <a16:creationId xmlns:a16="http://schemas.microsoft.com/office/drawing/2014/main" id="{F2B944A7-24B6-4CE7-95E8-126E95149D9E}"/>
+                <a16:creationId xmlns:a16="http://schemas.microsoft.com/office/drawing/2014/main" id="{E0F09F37-1999-4FB2-AA68-3933D34D435B}"/>
               </a:ext>
             </a:extLst>
           </p:cNvPr>
@@ -2180,7 +2180,7 @@
           <p:cNvPr id="6" name="Slide Number Placeholder 5">
             <a:extLst xmlns:a="http://schemas.openxmlformats.org/drawingml/2006/main">
               <a:ext uri="{FF2B5EF4-FFF2-40B4-BE49-F238E27FC236}">
-                <a16:creationId xmlns:a16="http://schemas.microsoft.com/office/drawing/2014/main" id="{D07A60E4-F8A9-46EC-921D-0500DD3FE713}"/>
+                <a16:creationId xmlns:a16="http://schemas.microsoft.com/office/drawing/2014/main" id="{11EA2F62-E160-4D15-9B14-4272380F4EDE}"/>
               </a:ext>
             </a:extLst>
           </p:cNvPr>
@@ -2225,7 +2225,7 @@
           <p:cNvPr id="2" name="Title 1">
             <a:extLst xmlns:a="http://schemas.openxmlformats.org/drawingml/2006/main">
               <a:ext uri="{FF2B5EF4-FFF2-40B4-BE49-F238E27FC236}">
-                <a16:creationId xmlns:a16="http://schemas.microsoft.com/office/drawing/2014/main" id="{803F5ED4-660F-408A-91E0-BDF4E256A258}"/>
+                <a16:creationId xmlns:a16="http://schemas.microsoft.com/office/drawing/2014/main" id="{381170BB-0575-43B6-8E1B-95A4BFFE9DCA}"/>
               </a:ext>
             </a:extLst>
           </p:cNvPr>
@@ -2253,7 +2253,7 @@
           <p:cNvPr id="3" name="Content Placeholder 2">
             <a:extLst xmlns:a="http://schemas.openxmlformats.org/drawingml/2006/main">
               <a:ext uri="{FF2B5EF4-FFF2-40B4-BE49-F238E27FC236}">
-                <a16:creationId xmlns:a16="http://schemas.microsoft.com/office/drawing/2014/main" id="{B285F96D-8E36-4D7E-A86F-FB6C84EEC949}"/>
+                <a16:creationId xmlns:a16="http://schemas.microsoft.com/office/drawing/2014/main" id="{4A21F695-A5C2-46B3-AB1C-E591B265874C}"/>
               </a:ext>
             </a:extLst>
           </p:cNvPr>
@@ -2316,7 +2316,7 @@
           <p:cNvPr id="4" name="Date Placeholder 3">
             <a:extLst xmlns:a="http://schemas.openxmlformats.org/drawingml/2006/main">
               <a:ext uri="{FF2B5EF4-FFF2-40B4-BE49-F238E27FC236}">
-                <a16:creationId xmlns:a16="http://schemas.microsoft.com/office/drawing/2014/main" id="{63008C74-E11C-4D9E-884F-F7A8A6ABD922}"/>
+                <a16:creationId xmlns:a16="http://schemas.microsoft.com/office/drawing/2014/main" id="{AD3B1133-D944-4C40-AF40-B059B1372658}"/>
               </a:ext>
             </a:extLst>
           </p:cNvPr>
@@ -2344,7 +2344,7 @@
           <p:cNvPr id="5" name="Footer Placeholder 4">
             <a:extLst xmlns:a="http://schemas.openxmlformats.org/drawingml/2006/main">
               <a:ext uri="{FF2B5EF4-FFF2-40B4-BE49-F238E27FC236}">
-                <a16:creationId xmlns:a16="http://schemas.microsoft.com/office/drawing/2014/main" id="{C9CB7494-8C35-4104-8C7D-35000602C07C}"/>
+                <a16:creationId xmlns:a16="http://schemas.microsoft.com/office/drawing/2014/main" id="{C606A1EE-0BFE-48EC-A111-1BFF2C8D25BE}"/>
               </a:ext>
             </a:extLst>
           </p:cNvPr>
@@ -2369,7 +2369,7 @@
           <p:cNvPr id="6" name="Slide Number Placeholder 5">
             <a:extLst xmlns:a="http://schemas.openxmlformats.org/drawingml/2006/main">
               <a:ext uri="{FF2B5EF4-FFF2-40B4-BE49-F238E27FC236}">
-                <a16:creationId xmlns:a16="http://schemas.microsoft.com/office/drawing/2014/main" id="{B0046C53-9EB5-458C-B52B-73CEF7421063}"/>
+                <a16:creationId xmlns:a16="http://schemas.microsoft.com/office/drawing/2014/main" id="{E02DA326-B2E1-4431-920C-08D6C4EBEDB3}"/>
               </a:ext>
             </a:extLst>
           </p:cNvPr>
@@ -2414,7 +2414,7 @@
           <p:cNvPr id="2" name="Title 1">
             <a:extLst xmlns:a="http://schemas.openxmlformats.org/drawingml/2006/main">
               <a:ext uri="{FF2B5EF4-FFF2-40B4-BE49-F238E27FC236}">
-                <a16:creationId xmlns:a16="http://schemas.microsoft.com/office/drawing/2014/main" id="{18533217-2BA5-454A-801E-72AED4AC6A05}"/>
+                <a16:creationId xmlns:a16="http://schemas.microsoft.com/office/drawing/2014/main" id="{29CFD0B2-A649-49F6-8048-242CD78F9777}"/>
               </a:ext>
             </a:extLst>
           </p:cNvPr>
@@ -2452,7 +2452,7 @@
           <p:cNvPr id="3" name="Text Placeholder 2">
             <a:extLst xmlns:a="http://schemas.openxmlformats.org/drawingml/2006/main">
               <a:ext uri="{FF2B5EF4-FFF2-40B4-BE49-F238E27FC236}">
-                <a16:creationId xmlns:a16="http://schemas.microsoft.com/office/drawing/2014/main" id="{46724E04-F1A3-471E-BADA-8EB3FCB4E579}"/>
+                <a16:creationId xmlns:a16="http://schemas.microsoft.com/office/drawing/2014/main" id="{93B22DBF-F101-4E2F-93B5-E91A733801F9}"/>
               </a:ext>
             </a:extLst>
           </p:cNvPr>
@@ -2578,7 +2578,7 @@
           <p:cNvPr id="4" name="Date Placeholder 3">
             <a:extLst xmlns:a="http://schemas.openxmlformats.org/drawingml/2006/main">
               <a:ext uri="{FF2B5EF4-FFF2-40B4-BE49-F238E27FC236}">
-                <a16:creationId xmlns:a16="http://schemas.microsoft.com/office/drawing/2014/main" id="{4EE7551C-5DC5-44E4-83F8-B3A556CF17C4}"/>
+                <a16:creationId xmlns:a16="http://schemas.microsoft.com/office/drawing/2014/main" id="{D4878441-47FA-4FEE-9975-672CCA9A95ED}"/>
               </a:ext>
             </a:extLst>
           </p:cNvPr>
@@ -2606,7 +2606,7 @@
           <p:cNvPr id="5" name="Footer Placeholder 4">
             <a:extLst xmlns:a="http://schemas.openxmlformats.org/drawingml/2006/main">
               <a:ext uri="{FF2B5EF4-FFF2-40B4-BE49-F238E27FC236}">
-                <a16:creationId xmlns:a16="http://schemas.microsoft.com/office/drawing/2014/main" id="{0918039C-14A0-4DA5-AA09-558494AD491B}"/>
+                <a16:creationId xmlns:a16="http://schemas.microsoft.com/office/drawing/2014/main" id="{CF450166-AEA2-4F18-941E-58CA66130E3F}"/>
               </a:ext>
             </a:extLst>
           </p:cNvPr>
@@ -2631,7 +2631,7 @@
           <p:cNvPr id="6" name="Slide Number Placeholder 5">
             <a:extLst xmlns:a="http://schemas.openxmlformats.org/drawingml/2006/main">
               <a:ext uri="{FF2B5EF4-FFF2-40B4-BE49-F238E27FC236}">
-                <a16:creationId xmlns:a16="http://schemas.microsoft.com/office/drawing/2014/main" id="{CD912306-96C3-4E48-A525-AFCC36EAB5A5}"/>
+                <a16:creationId xmlns:a16="http://schemas.microsoft.com/office/drawing/2014/main" id="{5538A868-EA90-4922-A9D3-71DF07AE4C3D}"/>
               </a:ext>
             </a:extLst>
           </p:cNvPr>
@@ -2676,7 +2676,7 @@
           <p:cNvPr id="2" name="Title 1">
             <a:extLst xmlns:a="http://schemas.openxmlformats.org/drawingml/2006/main">
               <a:ext uri="{FF2B5EF4-FFF2-40B4-BE49-F238E27FC236}">
-                <a16:creationId xmlns:a16="http://schemas.microsoft.com/office/drawing/2014/main" id="{CA0AE7F1-3363-4D74-9B78-EF2B1D7D6A2E}"/>
+                <a16:creationId xmlns:a16="http://schemas.microsoft.com/office/drawing/2014/main" id="{C2E8653D-9BAC-4622-8CCF-8AFA7A2959AB}"/>
               </a:ext>
             </a:extLst>
           </p:cNvPr>
@@ -2704,7 +2704,7 @@
           <p:cNvPr id="3" name="Content Placeholder 2">
             <a:extLst xmlns:a="http://schemas.openxmlformats.org/drawingml/2006/main">
               <a:ext uri="{FF2B5EF4-FFF2-40B4-BE49-F238E27FC236}">
-                <a16:creationId xmlns:a16="http://schemas.microsoft.com/office/drawing/2014/main" id="{84E3B196-8AF3-4E16-B832-D6A52E21AA27}"/>
+                <a16:creationId xmlns:a16="http://schemas.microsoft.com/office/drawing/2014/main" id="{EF9973C5-4385-4CDF-8211-C77C354C18F9}"/>
               </a:ext>
             </a:extLst>
           </p:cNvPr>
@@ -2809,7 +2809,7 @@
           <p:cNvPr id="4" name="Content Placeholder 3">
             <a:extLst xmlns:a="http://schemas.openxmlformats.org/drawingml/2006/main">
               <a:ext uri="{FF2B5EF4-FFF2-40B4-BE49-F238E27FC236}">
-                <a16:creationId xmlns:a16="http://schemas.microsoft.com/office/drawing/2014/main" id="{0E2382F8-C4EE-40C4-83D1-1775F65ACE29}"/>
+                <a16:creationId xmlns:a16="http://schemas.microsoft.com/office/drawing/2014/main" id="{93B7F301-935E-40A7-9317-761311BB5A11}"/>
               </a:ext>
             </a:extLst>
           </p:cNvPr>
@@ -2914,7 +2914,7 @@
           <p:cNvPr id="5" name="Date Placeholder 4">
             <a:extLst xmlns:a="http://schemas.openxmlformats.org/drawingml/2006/main">
               <a:ext uri="{FF2B5EF4-FFF2-40B4-BE49-F238E27FC236}">
-                <a16:creationId xmlns:a16="http://schemas.microsoft.com/office/drawing/2014/main" id="{74D76EB9-61C9-4774-A4BE-CB31AF7A1743}"/>
+                <a16:creationId xmlns:a16="http://schemas.microsoft.com/office/drawing/2014/main" id="{F2BB5FFD-38A0-4834-8F1A-00C870DD16AB}"/>
               </a:ext>
             </a:extLst>
           </p:cNvPr>
@@ -2942,7 +2942,7 @@
           <p:cNvPr id="6" name="Footer Placeholder 5">
             <a:extLst xmlns:a="http://schemas.openxmlformats.org/drawingml/2006/main">
               <a:ext uri="{FF2B5EF4-FFF2-40B4-BE49-F238E27FC236}">
-                <a16:creationId xmlns:a16="http://schemas.microsoft.com/office/drawing/2014/main" id="{54969EF2-40FB-4F00-8CA4-3569D46160F7}"/>
+                <a16:creationId xmlns:a16="http://schemas.microsoft.com/office/drawing/2014/main" id="{E39F74C9-51A7-4154-B175-161E153BBACE}"/>
               </a:ext>
             </a:extLst>
           </p:cNvPr>
@@ -2967,7 +2967,7 @@
           <p:cNvPr id="7" name="Slide Number Placeholder 6">
             <a:extLst xmlns:a="http://schemas.openxmlformats.org/drawingml/2006/main">
               <a:ext uri="{FF2B5EF4-FFF2-40B4-BE49-F238E27FC236}">
-                <a16:creationId xmlns:a16="http://schemas.microsoft.com/office/drawing/2014/main" id="{91894F93-5FFB-4396-A9C4-1EC45C52364F}"/>
+                <a16:creationId xmlns:a16="http://schemas.microsoft.com/office/drawing/2014/main" id="{B7A9FD89-F49C-49B2-90A4-776354E671CE}"/>
               </a:ext>
             </a:extLst>
           </p:cNvPr>
@@ -3012,7 +3012,7 @@
           <p:cNvPr id="2" name="Title 1">
             <a:extLst xmlns:a="http://schemas.openxmlformats.org/drawingml/2006/main">
               <a:ext uri="{FF2B5EF4-FFF2-40B4-BE49-F238E27FC236}">
-                <a16:creationId xmlns:a16="http://schemas.microsoft.com/office/drawing/2014/main" id="{B6BCBE43-05DB-4482-8F13-26FF27B33BFC}"/>
+                <a16:creationId xmlns:a16="http://schemas.microsoft.com/office/drawing/2014/main" id="{39215FEE-3B65-4DDE-98DE-BF9ECA397BAB}"/>
               </a:ext>
             </a:extLst>
           </p:cNvPr>
@@ -3045,7 +3045,7 @@
           <p:cNvPr id="3" name="Text Placeholder 2">
             <a:extLst xmlns:a="http://schemas.openxmlformats.org/drawingml/2006/main">
               <a:ext uri="{FF2B5EF4-FFF2-40B4-BE49-F238E27FC236}">
-                <a16:creationId xmlns:a16="http://schemas.microsoft.com/office/drawing/2014/main" id="{1D684AD9-C775-446C-B73D-8E05C78741B9}"/>
+                <a16:creationId xmlns:a16="http://schemas.microsoft.com/office/drawing/2014/main" id="{8EA09410-B06B-4CAC-BB24-50A5854337E8}"/>
               </a:ext>
             </a:extLst>
           </p:cNvPr>
@@ -3117,7 +3117,7 @@
           <p:cNvPr id="4" name="Content Placeholder 3">
             <a:extLst xmlns:a="http://schemas.openxmlformats.org/drawingml/2006/main">
               <a:ext uri="{FF2B5EF4-FFF2-40B4-BE49-F238E27FC236}">
-                <a16:creationId xmlns:a16="http://schemas.microsoft.com/office/drawing/2014/main" id="{735C2CAD-5DDF-4A9A-A4BA-D09860F9034A}"/>
+                <a16:creationId xmlns:a16="http://schemas.microsoft.com/office/drawing/2014/main" id="{22C97FE0-A601-4C7D-A49C-8B374E1FB0F4}"/>
               </a:ext>
             </a:extLst>
           </p:cNvPr>
@@ -3222,7 +3222,7 @@
           <p:cNvPr id="5" name="Text Placeholder 4">
             <a:extLst xmlns:a="http://schemas.openxmlformats.org/drawingml/2006/main">
               <a:ext uri="{FF2B5EF4-FFF2-40B4-BE49-F238E27FC236}">
-                <a16:creationId xmlns:a16="http://schemas.microsoft.com/office/drawing/2014/main" id="{BF80CB5B-E209-43DE-BE45-F4FBA700C3E5}"/>
+                <a16:creationId xmlns:a16="http://schemas.microsoft.com/office/drawing/2014/main" id="{CB32F6D0-931F-4E45-9401-AE6135FF6948}"/>
               </a:ext>
             </a:extLst>
           </p:cNvPr>
@@ -3294,7 +3294,7 @@
           <p:cNvPr id="6" name="Content Placeholder 5">
             <a:extLst xmlns:a="http://schemas.openxmlformats.org/drawingml/2006/main">
               <a:ext uri="{FF2B5EF4-FFF2-40B4-BE49-F238E27FC236}">
-                <a16:creationId xmlns:a16="http://schemas.microsoft.com/office/drawing/2014/main" id="{6FDAA89E-AEA2-402F-B648-8266F03E5107}"/>
+                <a16:creationId xmlns:a16="http://schemas.microsoft.com/office/drawing/2014/main" id="{F9AFD3E6-1537-42C1-A7F7-9CEF40A0DB56}"/>
               </a:ext>
             </a:extLst>
           </p:cNvPr>
@@ -3399,7 +3399,7 @@
           <p:cNvPr id="7" name="Date Placeholder 6">
             <a:extLst xmlns:a="http://schemas.openxmlformats.org/drawingml/2006/main">
               <a:ext uri="{FF2B5EF4-FFF2-40B4-BE49-F238E27FC236}">
-                <a16:creationId xmlns:a16="http://schemas.microsoft.com/office/drawing/2014/main" id="{302DC3D8-49DB-4502-91F7-AA6E9E8D12D0}"/>
+                <a16:creationId xmlns:a16="http://schemas.microsoft.com/office/drawing/2014/main" id="{38B2A55A-68E5-4F0A-B3B5-5E14C5E1F52E}"/>
               </a:ext>
             </a:extLst>
           </p:cNvPr>
@@ -3427,7 +3427,7 @@
           <p:cNvPr id="8" name="Footer Placeholder 7">
             <a:extLst xmlns:a="http://schemas.openxmlformats.org/drawingml/2006/main">
               <a:ext uri="{FF2B5EF4-FFF2-40B4-BE49-F238E27FC236}">
-                <a16:creationId xmlns:a16="http://schemas.microsoft.com/office/drawing/2014/main" id="{A742F8BD-180F-4201-A26E-A257E9476D69}"/>
+                <a16:creationId xmlns:a16="http://schemas.microsoft.com/office/drawing/2014/main" id="{9B43BA4C-0914-4C84-92F4-5639CE492B9B}"/>
               </a:ext>
             </a:extLst>
           </p:cNvPr>
@@ -3452,7 +3452,7 @@
           <p:cNvPr id="9" name="Slide Number Placeholder 8">
             <a:extLst xmlns:a="http://schemas.openxmlformats.org/drawingml/2006/main">
               <a:ext uri="{FF2B5EF4-FFF2-40B4-BE49-F238E27FC236}">
-                <a16:creationId xmlns:a16="http://schemas.microsoft.com/office/drawing/2014/main" id="{D61B3F9C-E723-4FD3-A91F-5449D8CFEF48}"/>
+                <a16:creationId xmlns:a16="http://schemas.microsoft.com/office/drawing/2014/main" id="{CF04DEFA-6CBF-4778-9E2F-BADE740B4698}"/>
               </a:ext>
             </a:extLst>
           </p:cNvPr>
@@ -3497,7 +3497,7 @@
           <p:cNvPr id="2" name="Title 1">
             <a:extLst xmlns:a="http://schemas.openxmlformats.org/drawingml/2006/main">
               <a:ext uri="{FF2B5EF4-FFF2-40B4-BE49-F238E27FC236}">
-                <a16:creationId xmlns:a16="http://schemas.microsoft.com/office/drawing/2014/main" id="{3FCE87A5-F629-42B7-9729-469675D5A1E8}"/>
+                <a16:creationId xmlns:a16="http://schemas.microsoft.com/office/drawing/2014/main" id="{6E244820-F515-4780-B2E5-6599333C96D5}"/>
               </a:ext>
             </a:extLst>
           </p:cNvPr>
@@ -3525,7 +3525,7 @@
           <p:cNvPr id="3" name="Date Placeholder 2">
             <a:extLst xmlns:a="http://schemas.openxmlformats.org/drawingml/2006/main">
               <a:ext uri="{FF2B5EF4-FFF2-40B4-BE49-F238E27FC236}">
-                <a16:creationId xmlns:a16="http://schemas.microsoft.com/office/drawing/2014/main" id="{4F87B7AD-2A00-41DA-AB21-5CD3B535097E}"/>
+                <a16:creationId xmlns:a16="http://schemas.microsoft.com/office/drawing/2014/main" id="{FC649291-0549-4F07-8836-6ECFEEFB65A7}"/>
               </a:ext>
             </a:extLst>
           </p:cNvPr>
@@ -3553,7 +3553,7 @@
           <p:cNvPr id="4" name="Footer Placeholder 3">
             <a:extLst xmlns:a="http://schemas.openxmlformats.org/drawingml/2006/main">
               <a:ext uri="{FF2B5EF4-FFF2-40B4-BE49-F238E27FC236}">
-                <a16:creationId xmlns:a16="http://schemas.microsoft.com/office/drawing/2014/main" id="{660839C9-CFFA-495B-8757-645548BD1B1D}"/>
+                <a16:creationId xmlns:a16="http://schemas.microsoft.com/office/drawing/2014/main" id="{DA56C1C7-1532-46C7-931B-835C98D08C93}"/>
               </a:ext>
             </a:extLst>
           </p:cNvPr>
@@ -3578,7 +3578,7 @@
           <p:cNvPr id="5" name="Slide Number Placeholder 4">
             <a:extLst xmlns:a="http://schemas.openxmlformats.org/drawingml/2006/main">
               <a:ext uri="{FF2B5EF4-FFF2-40B4-BE49-F238E27FC236}">
-                <a16:creationId xmlns:a16="http://schemas.microsoft.com/office/drawing/2014/main" id="{F668E14A-0FF8-4B31-AF04-8F7C79098C1B}"/>
+                <a16:creationId xmlns:a16="http://schemas.microsoft.com/office/drawing/2014/main" id="{27B0A53F-8710-4725-9F36-20013F137C16}"/>
               </a:ext>
             </a:extLst>
           </p:cNvPr>
@@ -3623,7 +3623,7 @@
           <p:cNvPr id="2" name="Date Placeholder 1">
             <a:extLst xmlns:a="http://schemas.openxmlformats.org/drawingml/2006/main">
               <a:ext uri="{FF2B5EF4-FFF2-40B4-BE49-F238E27FC236}">
-                <a16:creationId xmlns:a16="http://schemas.microsoft.com/office/drawing/2014/main" id="{61EC86E2-AAA0-4F88-8B6A-9740190C55D6}"/>
+                <a16:creationId xmlns:a16="http://schemas.microsoft.com/office/drawing/2014/main" id="{53301758-B3F3-41BD-8B6E-EC6E3B584630}"/>
               </a:ext>
             </a:extLst>
           </p:cNvPr>
@@ -3651,7 +3651,7 @@
           <p:cNvPr id="3" name="Footer Placeholder 2">
             <a:extLst xmlns:a="http://schemas.openxmlformats.org/drawingml/2006/main">
               <a:ext uri="{FF2B5EF4-FFF2-40B4-BE49-F238E27FC236}">
-                <a16:creationId xmlns:a16="http://schemas.microsoft.com/office/drawing/2014/main" id="{B0C9DD9B-0AB5-435E-A706-A6DB7098CBA8}"/>
+                <a16:creationId xmlns:a16="http://schemas.microsoft.com/office/drawing/2014/main" id="{70084350-56C8-4972-8F2C-0CD942ADC590}"/>
               </a:ext>
             </a:extLst>
           </p:cNvPr>
@@ -3676,7 +3676,7 @@
           <p:cNvPr id="4" name="Slide Number Placeholder 3">
             <a:extLst xmlns:a="http://schemas.openxmlformats.org/drawingml/2006/main">
               <a:ext uri="{FF2B5EF4-FFF2-40B4-BE49-F238E27FC236}">
-                <a16:creationId xmlns:a16="http://schemas.microsoft.com/office/drawing/2014/main" id="{6866060F-F0C1-4D63-A14D-8183F490818F}"/>
+                <a16:creationId xmlns:a16="http://schemas.microsoft.com/office/drawing/2014/main" id="{A5B6A157-098F-4699-8E80-7D9AABEF7E0E}"/>
               </a:ext>
             </a:extLst>
           </p:cNvPr>
@@ -3721,7 +3721,7 @@
           <p:cNvPr id="2" name="Title 1">
             <a:extLst xmlns:a="http://schemas.openxmlformats.org/drawingml/2006/main">
               <a:ext uri="{FF2B5EF4-FFF2-40B4-BE49-F238E27FC236}">
-                <a16:creationId xmlns:a16="http://schemas.microsoft.com/office/drawing/2014/main" id="{AD919CDA-6C08-4E95-808A-DEEC4A307162}"/>
+                <a16:creationId xmlns:a16="http://schemas.microsoft.com/office/drawing/2014/main" id="{DFDECB48-0595-4060-90D3-2CB747F217B7}"/>
               </a:ext>
             </a:extLst>
           </p:cNvPr>
@@ -3759,7 +3759,7 @@
           <p:cNvPr id="3" name="Content Placeholder 2">
             <a:extLst xmlns:a="http://schemas.openxmlformats.org/drawingml/2006/main">
               <a:ext uri="{FF2B5EF4-FFF2-40B4-BE49-F238E27FC236}">
-                <a16:creationId xmlns:a16="http://schemas.microsoft.com/office/drawing/2014/main" id="{1B0D5641-AF8A-4AAF-8C21-32DE7092D9D1}"/>
+                <a16:creationId xmlns:a16="http://schemas.microsoft.com/office/drawing/2014/main" id="{2417D2CD-E974-4389-94F7-80CFFABF357D}"/>
               </a:ext>
             </a:extLst>
           </p:cNvPr>
@@ -3864,7 +3864,7 @@
           <p:cNvPr id="4" name="Text Placeholder 3">
             <a:extLst xmlns:a="http://schemas.openxmlformats.org/drawingml/2006/main">
               <a:ext uri="{FF2B5EF4-FFF2-40B4-BE49-F238E27FC236}">
-                <a16:creationId xmlns:a16="http://schemas.microsoft.com/office/drawing/2014/main" id="{176D81D1-B201-4482-80C4-9EE87321933D}"/>
+                <a16:creationId xmlns:a16="http://schemas.microsoft.com/office/drawing/2014/main" id="{ADF67FA1-1DF0-45D7-B9AC-223933842760}"/>
               </a:ext>
             </a:extLst>
           </p:cNvPr>
@@ -3936,7 +3936,7 @@
           <p:cNvPr id="5" name="Date Placeholder 4">
             <a:extLst xmlns:a="http://schemas.openxmlformats.org/drawingml/2006/main">
               <a:ext uri="{FF2B5EF4-FFF2-40B4-BE49-F238E27FC236}">
-                <a16:creationId xmlns:a16="http://schemas.microsoft.com/office/drawing/2014/main" id="{BAE0EEEB-38D0-4E11-B22F-E3099CD21D57}"/>
+                <a16:creationId xmlns:a16="http://schemas.microsoft.com/office/drawing/2014/main" id="{948FB56E-C236-43EF-80D6-FF5D3A901D91}"/>
               </a:ext>
             </a:extLst>
           </p:cNvPr>
@@ -3964,7 +3964,7 @@
           <p:cNvPr id="6" name="Footer Placeholder 5">
             <a:extLst xmlns:a="http://schemas.openxmlformats.org/drawingml/2006/main">
               <a:ext uri="{FF2B5EF4-FFF2-40B4-BE49-F238E27FC236}">
-                <a16:creationId xmlns:a16="http://schemas.microsoft.com/office/drawing/2014/main" id="{FD5B68CB-5209-415A-8678-DD4068BB1534}"/>
+                <a16:creationId xmlns:a16="http://schemas.microsoft.com/office/drawing/2014/main" id="{EBC9ABBC-09DC-4477-B65C-81AB5859B794}"/>
               </a:ext>
             </a:extLst>
           </p:cNvPr>
@@ -3989,7 +3989,7 @@
           <p:cNvPr id="7" name="Slide Number Placeholder 6">
             <a:extLst xmlns:a="http://schemas.openxmlformats.org/drawingml/2006/main">
               <a:ext uri="{FF2B5EF4-FFF2-40B4-BE49-F238E27FC236}">
-                <a16:creationId xmlns:a16="http://schemas.microsoft.com/office/drawing/2014/main" id="{8A28C2F9-1D1C-448D-B368-D8A8B9530658}"/>
+                <a16:creationId xmlns:a16="http://schemas.microsoft.com/office/drawing/2014/main" id="{0C6863BD-210B-4ADC-977D-5C70B942C2E9}"/>
               </a:ext>
             </a:extLst>
           </p:cNvPr>
@@ -4034,7 +4034,7 @@
           <p:cNvPr id="2" name="Title 1">
             <a:extLst xmlns:a="http://schemas.openxmlformats.org/drawingml/2006/main">
               <a:ext uri="{FF2B5EF4-FFF2-40B4-BE49-F238E27FC236}">
-                <a16:creationId xmlns:a16="http://schemas.microsoft.com/office/drawing/2014/main" id="{3589967E-AC04-4FD4-808F-F8041470BC08}"/>
+                <a16:creationId xmlns:a16="http://schemas.microsoft.com/office/drawing/2014/main" id="{5219E51D-2723-4164-B1B3-823F69CFAF9F}"/>
               </a:ext>
             </a:extLst>
           </p:cNvPr>
@@ -4072,7 +4072,7 @@
           <p:cNvPr id="3" name="Picture Placeholder 2">
             <a:extLst xmlns:a="http://schemas.openxmlformats.org/drawingml/2006/main">
               <a:ext uri="{FF2B5EF4-FFF2-40B4-BE49-F238E27FC236}">
-                <a16:creationId xmlns:a16="http://schemas.microsoft.com/office/drawing/2014/main" id="{CF47FF55-AF3D-4C14-8F96-10AC765B35C2}"/>
+                <a16:creationId xmlns:a16="http://schemas.microsoft.com/office/drawing/2014/main" id="{B6193585-59E3-4A15-BA01-BDE858E515F2}"/>
               </a:ext>
             </a:extLst>
           </p:cNvPr>
@@ -4139,7 +4139,7 @@
           <p:cNvPr id="4" name="Text Placeholder 3">
             <a:extLst xmlns:a="http://schemas.openxmlformats.org/drawingml/2006/main">
               <a:ext uri="{FF2B5EF4-FFF2-40B4-BE49-F238E27FC236}">
-                <a16:creationId xmlns:a16="http://schemas.microsoft.com/office/drawing/2014/main" id="{485F67F0-62BD-456B-8A1A-6DD70DC1F87C}"/>
+                <a16:creationId xmlns:a16="http://schemas.microsoft.com/office/drawing/2014/main" id="{057DB795-2A23-4F3F-86F9-3613853D9D96}"/>
               </a:ext>
             </a:extLst>
           </p:cNvPr>
@@ -4211,7 +4211,7 @@
           <p:cNvPr id="5" name="Date Placeholder 4">
             <a:extLst xmlns:a="http://schemas.openxmlformats.org/drawingml/2006/main">
               <a:ext uri="{FF2B5EF4-FFF2-40B4-BE49-F238E27FC236}">
-                <a16:creationId xmlns:a16="http://schemas.microsoft.com/office/drawing/2014/main" id="{B7C545DD-DB45-42A6-8A1D-66835E8CFEC8}"/>
+                <a16:creationId xmlns:a16="http://schemas.microsoft.com/office/drawing/2014/main" id="{19C62065-1C43-4191-AC50-D649FFAFCBE1}"/>
               </a:ext>
             </a:extLst>
           </p:cNvPr>
@@ -4239,7 +4239,7 @@
           <p:cNvPr id="6" name="Footer Placeholder 5">
             <a:extLst xmlns:a="http://schemas.openxmlformats.org/drawingml/2006/main">
               <a:ext uri="{FF2B5EF4-FFF2-40B4-BE49-F238E27FC236}">
-                <a16:creationId xmlns:a16="http://schemas.microsoft.com/office/drawing/2014/main" id="{DC1C6E51-4990-432A-ADAD-CC963376F3FD}"/>
+                <a16:creationId xmlns:a16="http://schemas.microsoft.com/office/drawing/2014/main" id="{E15BD775-C557-4BA5-8CDC-D92E57FB4F31}"/>
               </a:ext>
             </a:extLst>
           </p:cNvPr>
@@ -4264,7 +4264,7 @@
           <p:cNvPr id="7" name="Slide Number Placeholder 6">
             <a:extLst xmlns:a="http://schemas.openxmlformats.org/drawingml/2006/main">
               <a:ext uri="{FF2B5EF4-FFF2-40B4-BE49-F238E27FC236}">
-                <a16:creationId xmlns:a16="http://schemas.microsoft.com/office/drawing/2014/main" id="{FB99561C-04A8-4253-9C2C-A5CA353BA268}"/>
+                <a16:creationId xmlns:a16="http://schemas.microsoft.com/office/drawing/2014/main" id="{8BA0BD94-86AE-4AB8-94DF-E3F0EEC91915}"/>
               </a:ext>
             </a:extLst>
           </p:cNvPr>
@@ -4314,7 +4314,7 @@
           <p:cNvPr id="2" name="Title Placeholder 1">
             <a:extLst xmlns:a="http://schemas.openxmlformats.org/drawingml/2006/main">
               <a:ext uri="{FF2B5EF4-FFF2-40B4-BE49-F238E27FC236}">
-                <a16:creationId xmlns:a16="http://schemas.microsoft.com/office/drawing/2014/main" id="{672C398B-1684-4DA8-B9DB-6A8E83D3BC09}"/>
+                <a16:creationId xmlns:a16="http://schemas.microsoft.com/office/drawing/2014/main" id="{4FF464DB-952E-449E-88B2-E2142212BC6C}"/>
               </a:ext>
             </a:extLst>
           </p:cNvPr>
@@ -4352,7 +4352,7 @@
           <p:cNvPr id="3" name="Text Placeholder 2">
             <a:extLst xmlns:a="http://schemas.openxmlformats.org/drawingml/2006/main">
               <a:ext uri="{FF2B5EF4-FFF2-40B4-BE49-F238E27FC236}">
-                <a16:creationId xmlns:a16="http://schemas.microsoft.com/office/drawing/2014/main" id="{ADAA1CB8-4845-4F76-BD43-D096B2B7D409}"/>
+                <a16:creationId xmlns:a16="http://schemas.microsoft.com/office/drawing/2014/main" id="{82A0AF7A-DDBC-419C-B580-EBD37EFA5B63}"/>
               </a:ext>
             </a:extLst>
           </p:cNvPr>
@@ -4425,7 +4425,7 @@
           <p:cNvPr id="4" name="Date Placeholder 3">
             <a:extLst xmlns:a="http://schemas.openxmlformats.org/drawingml/2006/main">
               <a:ext uri="{FF2B5EF4-FFF2-40B4-BE49-F238E27FC236}">
-                <a16:creationId xmlns:a16="http://schemas.microsoft.com/office/drawing/2014/main" id="{EE80137F-0763-4CD4-9F11-A3E9963DE969}"/>
+                <a16:creationId xmlns:a16="http://schemas.microsoft.com/office/drawing/2014/main" id="{B610E12F-7BCC-4A3F-B4CF-AFA197020602}"/>
               </a:ext>
             </a:extLst>
           </p:cNvPr>
@@ -4472,7 +4472,7 @@
           <p:cNvPr id="5" name="Footer Placeholder 4">
             <a:extLst xmlns:a="http://schemas.openxmlformats.org/drawingml/2006/main">
               <a:ext uri="{FF2B5EF4-FFF2-40B4-BE49-F238E27FC236}">
-                <a16:creationId xmlns:a16="http://schemas.microsoft.com/office/drawing/2014/main" id="{668C53C3-50B5-42B1-B737-652797C01EBC}"/>
+                <a16:creationId xmlns:a16="http://schemas.microsoft.com/office/drawing/2014/main" id="{6AF9235F-B71D-4BBE-A5A3-B0C41A00DA36}"/>
               </a:ext>
             </a:extLst>
           </p:cNvPr>
@@ -4516,7 +4516,7 @@
           <p:cNvPr id="6" name="Slide Number Placeholder 5">
             <a:extLst xmlns:a="http://schemas.openxmlformats.org/drawingml/2006/main">
               <a:ext uri="{FF2B5EF4-FFF2-40B4-BE49-F238E27FC236}">
-                <a16:creationId xmlns:a16="http://schemas.microsoft.com/office/drawing/2014/main" id="{DE6FFC87-4FCB-483A-9746-603DD64903E7}"/>
+                <a16:creationId xmlns:a16="http://schemas.microsoft.com/office/drawing/2014/main" id="{A97BA0E8-A30E-46FD-99B5-84E94A04F82A}"/>
               </a:ext>
             </a:extLst>
           </p:cNvPr>
@@ -4562,17 +4562,17 @@
   </p:cSld>
   <p:clrMap bg1="lt1" tx1="dk1" bg2="lt2" tx2="dk2" accent1="accent1" accent2="accent2" accent3="accent3" accent4="accent4" accent5="accent5" accent6="accent6" hlink="hlink" folHlink="folHlink"/>
   <p:sldLayoutIdLst>
-    <p:sldLayoutId xmlns:r="http://schemas.openxmlformats.org/officeDocument/2006/relationships" id="2147483649" r:id="R305ba921cee74090"/>
-    <p:sldLayoutId xmlns:r="http://schemas.openxmlformats.org/officeDocument/2006/relationships" id="2147483650" r:id="Rfc0d71ecfc374c8f"/>
-    <p:sldLayoutId xmlns:r="http://schemas.openxmlformats.org/officeDocument/2006/relationships" id="2147483651" r:id="R3973b36fcc5b4a6e"/>
-    <p:sldLayoutId xmlns:r="http://schemas.openxmlformats.org/officeDocument/2006/relationships" id="2147483652" r:id="Rb4d38cf3db20423b"/>
-    <p:sldLayoutId xmlns:r="http://schemas.openxmlformats.org/officeDocument/2006/relationships" id="2147483653" r:id="R3138d8ac52cb4852"/>
-    <p:sldLayoutId xmlns:r="http://schemas.openxmlformats.org/officeDocument/2006/relationships" id="2147483654" r:id="R4f5ede1680794ec4"/>
-    <p:sldLayoutId xmlns:r="http://schemas.openxmlformats.org/officeDocument/2006/relationships" id="2147483655" r:id="R30318abbc7b5427c"/>
-    <p:sldLayoutId xmlns:r="http://schemas.openxmlformats.org/officeDocument/2006/relationships" id="2147483656" r:id="R50eb99f723e045f4"/>
-    <p:sldLayoutId xmlns:r="http://schemas.openxmlformats.org/officeDocument/2006/relationships" id="2147483657" r:id="R2c49a1e581854a4b"/>
-    <p:sldLayoutId xmlns:r="http://schemas.openxmlformats.org/officeDocument/2006/relationships" id="2147483658" r:id="Rcfe41b1fc0954558"/>
-    <p:sldLayoutId xmlns:r="http://schemas.openxmlformats.org/officeDocument/2006/relationships" id="2147483659" r:id="R87456863d555405d"/>
+    <p:sldLayoutId xmlns:r="http://schemas.openxmlformats.org/officeDocument/2006/relationships" id="2147483649" r:id="R8a3fe748668f45e0"/>
+    <p:sldLayoutId xmlns:r="http://schemas.openxmlformats.org/officeDocument/2006/relationships" id="2147483650" r:id="Rdd1672e2a7c94a73"/>
+    <p:sldLayoutId xmlns:r="http://schemas.openxmlformats.org/officeDocument/2006/relationships" id="2147483651" r:id="R44f2659525114f80"/>
+    <p:sldLayoutId xmlns:r="http://schemas.openxmlformats.org/officeDocument/2006/relationships" id="2147483652" r:id="R8f129a0444384bf4"/>
+    <p:sldLayoutId xmlns:r="http://schemas.openxmlformats.org/officeDocument/2006/relationships" id="2147483653" r:id="Rc6c319565f774c91"/>
+    <p:sldLayoutId xmlns:r="http://schemas.openxmlformats.org/officeDocument/2006/relationships" id="2147483654" r:id="Rb58c46b473f34899"/>
+    <p:sldLayoutId xmlns:r="http://schemas.openxmlformats.org/officeDocument/2006/relationships" id="2147483655" r:id="R9d060971a08041d0"/>
+    <p:sldLayoutId xmlns:r="http://schemas.openxmlformats.org/officeDocument/2006/relationships" id="2147483656" r:id="Rce56c2766efb40d1"/>
+    <p:sldLayoutId xmlns:r="http://schemas.openxmlformats.org/officeDocument/2006/relationships" id="2147483657" r:id="R223ca179b29343ee"/>
+    <p:sldLayoutId xmlns:r="http://schemas.openxmlformats.org/officeDocument/2006/relationships" id="2147483658" r:id="R37e1c1132b5d4f9c"/>
+    <p:sldLayoutId xmlns:r="http://schemas.openxmlformats.org/officeDocument/2006/relationships" id="2147483659" r:id="Rb275675fff9041eb"/>
   </p:sldLayoutIdLst>
   <p:txStyles>
     <p:titleStyle>
@@ -5118,7 +5118,7 @@
           <p:cNvPr id="2" name="Rectangle 1">
             <a:extLst xmlns:a="http://schemas.openxmlformats.org/drawingml/2006/main">
               <a:ext uri="{FF2B5EF4-FFF2-40B4-BE49-F238E27FC236}">
-                <a16:creationId xmlns:a16="http://schemas.microsoft.com/office/drawing/2014/main" id="{C2926961-9E71-446B-8784-8698B1384EA2}"/>
+                <a16:creationId xmlns:a16="http://schemas.microsoft.com/office/drawing/2014/main" id="{B0E82EF4-11BD-4C2F-A9D5-22B7215B1319}"/>
               </a:ext>
             </a:extLst>
           </p:cNvPr>
@@ -5171,7 +5171,7 @@
           <p:cNvPr id="3" name="Rectangle 2">
             <a:extLst xmlns:a="http://schemas.openxmlformats.org/drawingml/2006/main">
               <a:ext uri="{FF2B5EF4-FFF2-40B4-BE49-F238E27FC236}">
-                <a16:creationId xmlns:a16="http://schemas.microsoft.com/office/drawing/2014/main" id="{646BBFD1-CAD4-4D20-982D-E4463FA6D587}"/>
+                <a16:creationId xmlns:a16="http://schemas.microsoft.com/office/drawing/2014/main" id="{DC246537-7B3B-43B0-8AA4-3107D562283A}"/>
               </a:ext>
             </a:extLst>
           </p:cNvPr>
@@ -5224,7 +5224,7 @@
           <p:cNvPr id="4" name="TextBox 3">
             <a:extLst xmlns:a="http://schemas.openxmlformats.org/drawingml/2006/main">
               <a:ext uri="{FF2B5EF4-FFF2-40B4-BE49-F238E27FC236}">
-                <a16:creationId xmlns:a16="http://schemas.microsoft.com/office/drawing/2014/main" id="{3FFFFE19-BF61-42B4-840B-9E2421A4B129}"/>
+                <a16:creationId xmlns:a16="http://schemas.microsoft.com/office/drawing/2014/main" id="{C9D53492-9D92-4F18-8103-B68037143923}"/>
               </a:ext>
             </a:extLst>
           </p:cNvPr>
@@ -5326,7 +5326,7 @@
     </p:spTree>
     <p:extLst>
       <p:ext uri="{BB962C8B-B14F-4D97-AF65-F5344CB8AC3E}">
-        <p14:creationId xmlns:p14="http://schemas.microsoft.com/office/powerpoint/2010/main" val="1832291903"/>
+        <p14:creationId xmlns:p14="http://schemas.microsoft.com/office/powerpoint/2010/main" val="1670628182"/>
       </p:ext>
     </p:extLst>
   </p:cSld>
@@ -5350,7 +5350,7 @@
           <p:cNvPr id="2" name="Rectangle 1">
             <a:extLst xmlns:a="http://schemas.openxmlformats.org/drawingml/2006/main">
               <a:ext uri="{FF2B5EF4-FFF2-40B4-BE49-F238E27FC236}">
-                <a16:creationId xmlns:a16="http://schemas.microsoft.com/office/drawing/2014/main" id="{23E28773-3B09-42FD-B6B7-5B0BADB15505}"/>
+                <a16:creationId xmlns:a16="http://schemas.microsoft.com/office/drawing/2014/main" id="{4C0D1656-EA8D-4589-8E50-54480D98EE05}"/>
               </a:ext>
             </a:extLst>
           </p:cNvPr>
@@ -5403,7 +5403,7 @@
           <p:cNvPr id="3" name="Rectangle 2">
             <a:extLst xmlns:a="http://schemas.openxmlformats.org/drawingml/2006/main">
               <a:ext uri="{FF2B5EF4-FFF2-40B4-BE49-F238E27FC236}">
-                <a16:creationId xmlns:a16="http://schemas.microsoft.com/office/drawing/2014/main" id="{80977C56-055D-4259-8B06-AE471EF94ECF}"/>
+                <a16:creationId xmlns:a16="http://schemas.microsoft.com/office/drawing/2014/main" id="{CDF1094F-10BE-49A4-846F-CAF1E7ACDF66}"/>
               </a:ext>
             </a:extLst>
           </p:cNvPr>
@@ -5456,7 +5456,7 @@
           <p:cNvPr id="4" name="Rectangle 3">
             <a:extLst xmlns:a="http://schemas.openxmlformats.org/drawingml/2006/main">
               <a:ext uri="{FF2B5EF4-FFF2-40B4-BE49-F238E27FC236}">
-                <a16:creationId xmlns:a16="http://schemas.microsoft.com/office/drawing/2014/main" id="{37465A4D-A7F5-4BB7-A2FB-844C5C3B8E6F}"/>
+                <a16:creationId xmlns:a16="http://schemas.microsoft.com/office/drawing/2014/main" id="{9B4AB8CD-E385-4477-85D7-3B0F39598FC4}"/>
               </a:ext>
             </a:extLst>
           </p:cNvPr>
@@ -5509,7 +5509,7 @@
           <p:cNvPr id="5" name="TextBox 4">
             <a:extLst xmlns:a="http://schemas.openxmlformats.org/drawingml/2006/main">
               <a:ext uri="{FF2B5EF4-FFF2-40B4-BE49-F238E27FC236}">
-                <a16:creationId xmlns:a16="http://schemas.microsoft.com/office/drawing/2014/main" id="{C6AFE00F-AA27-4AED-A6B3-42F9CF8AA262}"/>
+                <a16:creationId xmlns:a16="http://schemas.microsoft.com/office/drawing/2014/main" id="{BFC28B8B-A2ED-48BD-9C1B-FE3CA7E9BA54}"/>
               </a:ext>
             </a:extLst>
           </p:cNvPr>
@@ -5572,7 +5572,7 @@
           <p:cNvPr id="6" name="Rounded Rectangle 5">
             <a:extLst xmlns:a="http://schemas.openxmlformats.org/drawingml/2006/main">
               <a:ext uri="{FF2B5EF4-FFF2-40B4-BE49-F238E27FC236}">
-                <a16:creationId xmlns:a16="http://schemas.microsoft.com/office/drawing/2014/main" id="{0D7F3B7C-83B2-4F32-BD6A-738E32FC9E7E}"/>
+                <a16:creationId xmlns:a16="http://schemas.microsoft.com/office/drawing/2014/main" id="{13CFDB75-E8F9-447F-8C39-142792041AB5}"/>
               </a:ext>
             </a:extLst>
           </p:cNvPr>
@@ -5627,7 +5627,7 @@
           <p:cNvPr id="7" name="TextBox 6">
             <a:extLst xmlns:a="http://schemas.openxmlformats.org/drawingml/2006/main">
               <a:ext uri="{FF2B5EF4-FFF2-40B4-BE49-F238E27FC236}">
-                <a16:creationId xmlns:a16="http://schemas.microsoft.com/office/drawing/2014/main" id="{51119C80-7E69-4F5B-B615-C54F338CA93C}"/>
+                <a16:creationId xmlns:a16="http://schemas.microsoft.com/office/drawing/2014/main" id="{843D0F64-D1C1-40FE-8DE7-1E4839EA9F2A}"/>
               </a:ext>
             </a:extLst>
           </p:cNvPr>
@@ -5731,7 +5731,7 @@
           <p:cNvPr id="8" name="Rounded Rectangle 7">
             <a:extLst xmlns:a="http://schemas.openxmlformats.org/drawingml/2006/main">
               <a:ext uri="{FF2B5EF4-FFF2-40B4-BE49-F238E27FC236}">
-                <a16:creationId xmlns:a16="http://schemas.microsoft.com/office/drawing/2014/main" id="{27B6C9D0-72F7-4084-9592-4F6F40224D8D}"/>
+                <a16:creationId xmlns:a16="http://schemas.microsoft.com/office/drawing/2014/main" id="{B8C974A6-7CE9-40C3-903A-6DC555F736A6}"/>
               </a:ext>
             </a:extLst>
           </p:cNvPr>
@@ -5786,7 +5786,7 @@
           <p:cNvPr id="9" name="TextBox 8">
             <a:extLst xmlns:a="http://schemas.openxmlformats.org/drawingml/2006/main">
               <a:ext uri="{FF2B5EF4-FFF2-40B4-BE49-F238E27FC236}">
-                <a16:creationId xmlns:a16="http://schemas.microsoft.com/office/drawing/2014/main" id="{F7EAA397-46D0-4748-8ECB-3F017BA485F5}"/>
+                <a16:creationId xmlns:a16="http://schemas.microsoft.com/office/drawing/2014/main" id="{26703378-E5C0-4088-B113-2EB2915C97D5}"/>
               </a:ext>
             </a:extLst>
           </p:cNvPr>
@@ -5871,7 +5871,7 @@
           <p:cNvPr id="10" name="Rounded Rectangle 9">
             <a:extLst xmlns:a="http://schemas.openxmlformats.org/drawingml/2006/main">
               <a:ext uri="{FF2B5EF4-FFF2-40B4-BE49-F238E27FC236}">
-                <a16:creationId xmlns:a16="http://schemas.microsoft.com/office/drawing/2014/main" id="{B7CE8416-5EDD-4A53-B71A-C38CADD5C693}"/>
+                <a16:creationId xmlns:a16="http://schemas.microsoft.com/office/drawing/2014/main" id="{3068B22A-BE25-4349-8338-0448FE40F5FF}"/>
               </a:ext>
             </a:extLst>
           </p:cNvPr>
@@ -5926,7 +5926,7 @@
           <p:cNvPr id="11" name="TextBox 10">
             <a:extLst xmlns:a="http://schemas.openxmlformats.org/drawingml/2006/main">
               <a:ext uri="{FF2B5EF4-FFF2-40B4-BE49-F238E27FC236}">
-                <a16:creationId xmlns:a16="http://schemas.microsoft.com/office/drawing/2014/main" id="{7AD7C3D5-014D-4583-8653-FBB1DA016CD1}"/>
+                <a16:creationId xmlns:a16="http://schemas.microsoft.com/office/drawing/2014/main" id="{0EA1D0B8-F17A-46D8-AFB8-74631EC2DFE7}"/>
               </a:ext>
             </a:extLst>
           </p:cNvPr>
@@ -6028,7 +6028,7 @@
     </p:spTree>
     <p:extLst>
       <p:ext uri="{BB962C8B-B14F-4D97-AF65-F5344CB8AC3E}">
-        <p14:creationId xmlns:p14="http://schemas.microsoft.com/office/powerpoint/2010/main" val="2022349873"/>
+        <p14:creationId xmlns:p14="http://schemas.microsoft.com/office/powerpoint/2010/main" val="598599637"/>
       </p:ext>
     </p:extLst>
   </p:cSld>
@@ -6052,7 +6052,7 @@
           <p:cNvPr id="2" name="Rectangle 1">
             <a:extLst xmlns:a="http://schemas.openxmlformats.org/drawingml/2006/main">
               <a:ext uri="{FF2B5EF4-FFF2-40B4-BE49-F238E27FC236}">
-                <a16:creationId xmlns:a16="http://schemas.microsoft.com/office/drawing/2014/main" id="{8EC27EF0-0D61-4718-B482-5E65807EC87E}"/>
+                <a16:creationId xmlns:a16="http://schemas.microsoft.com/office/drawing/2014/main" id="{DFAB9E42-7729-42DE-B584-893C5D26CB6F}"/>
               </a:ext>
             </a:extLst>
           </p:cNvPr>
@@ -6105,7 +6105,7 @@
           <p:cNvPr id="3" name="Rectangle 2">
             <a:extLst xmlns:a="http://schemas.openxmlformats.org/drawingml/2006/main">
               <a:ext uri="{FF2B5EF4-FFF2-40B4-BE49-F238E27FC236}">
-                <a16:creationId xmlns:a16="http://schemas.microsoft.com/office/drawing/2014/main" id="{1D2CAAA8-437B-49CE-9732-F4DFA0560F80}"/>
+                <a16:creationId xmlns:a16="http://schemas.microsoft.com/office/drawing/2014/main" id="{D9F8962F-5B21-4B1C-94CC-9B662760FF6F}"/>
               </a:ext>
             </a:extLst>
           </p:cNvPr>
@@ -6158,7 +6158,7 @@
           <p:cNvPr id="4" name="Rectangle 3">
             <a:extLst xmlns:a="http://schemas.openxmlformats.org/drawingml/2006/main">
               <a:ext uri="{FF2B5EF4-FFF2-40B4-BE49-F238E27FC236}">
-                <a16:creationId xmlns:a16="http://schemas.microsoft.com/office/drawing/2014/main" id="{8AE0DC4A-5C03-42CF-B7E4-8F340FB4B656}"/>
+                <a16:creationId xmlns:a16="http://schemas.microsoft.com/office/drawing/2014/main" id="{AF05C22E-064C-4FDF-88DF-04776316CEE2}"/>
               </a:ext>
             </a:extLst>
           </p:cNvPr>
@@ -6211,7 +6211,7 @@
           <p:cNvPr id="5" name="TextBox 4">
             <a:extLst xmlns:a="http://schemas.openxmlformats.org/drawingml/2006/main">
               <a:ext uri="{FF2B5EF4-FFF2-40B4-BE49-F238E27FC236}">
-                <a16:creationId xmlns:a16="http://schemas.microsoft.com/office/drawing/2014/main" id="{124F35FF-448C-4146-B27E-C1B3CFA21673}"/>
+                <a16:creationId xmlns:a16="http://schemas.microsoft.com/office/drawing/2014/main" id="{4951618C-4E56-4607-8C67-316A8EB98F98}"/>
               </a:ext>
             </a:extLst>
           </p:cNvPr>
@@ -6274,7 +6274,7 @@
           <p:cNvPr id="6" name="Rounded Rectangle 5">
             <a:extLst xmlns:a="http://schemas.openxmlformats.org/drawingml/2006/main">
               <a:ext uri="{FF2B5EF4-FFF2-40B4-BE49-F238E27FC236}">
-                <a16:creationId xmlns:a16="http://schemas.microsoft.com/office/drawing/2014/main" id="{16E3FB87-2211-48E0-966C-6C6AAC561DA9}"/>
+                <a16:creationId xmlns:a16="http://schemas.microsoft.com/office/drawing/2014/main" id="{13D98923-AC55-4318-BB6A-85EC6541E09E}"/>
               </a:ext>
             </a:extLst>
           </p:cNvPr>
@@ -6329,7 +6329,7 @@
           <p:cNvPr id="7" name="TextBox 6">
             <a:extLst xmlns:a="http://schemas.openxmlformats.org/drawingml/2006/main">
               <a:ext uri="{FF2B5EF4-FFF2-40B4-BE49-F238E27FC236}">
-                <a16:creationId xmlns:a16="http://schemas.microsoft.com/office/drawing/2014/main" id="{B0E95A4A-25B3-4414-80E9-8F755198204C}"/>
+                <a16:creationId xmlns:a16="http://schemas.microsoft.com/office/drawing/2014/main" id="{0D81E792-B232-48E9-9DF5-B56382C3C909}"/>
               </a:ext>
             </a:extLst>
           </p:cNvPr>
@@ -6528,7 +6528,7 @@
           <p:cNvPr id="8" name="Rounded Rectangle 7">
             <a:extLst xmlns:a="http://schemas.openxmlformats.org/drawingml/2006/main">
               <a:ext uri="{FF2B5EF4-FFF2-40B4-BE49-F238E27FC236}">
-                <a16:creationId xmlns:a16="http://schemas.microsoft.com/office/drawing/2014/main" id="{F39DC297-4888-400C-A7F6-928863A22F4E}"/>
+                <a16:creationId xmlns:a16="http://schemas.microsoft.com/office/drawing/2014/main" id="{8644E0A4-6C59-40B9-826A-DA9288BBF949}"/>
               </a:ext>
             </a:extLst>
           </p:cNvPr>
@@ -6583,7 +6583,7 @@
           <p:cNvPr id="9" name="TextBox 8">
             <a:extLst xmlns:a="http://schemas.openxmlformats.org/drawingml/2006/main">
               <a:ext uri="{FF2B5EF4-FFF2-40B4-BE49-F238E27FC236}">
-                <a16:creationId xmlns:a16="http://schemas.microsoft.com/office/drawing/2014/main" id="{4ABE4D4D-AB52-43D1-B8BA-B5C800C468DF}"/>
+                <a16:creationId xmlns:a16="http://schemas.microsoft.com/office/drawing/2014/main" id="{49DBB8B5-47E2-415B-A790-63659DBE808C}"/>
               </a:ext>
             </a:extLst>
           </p:cNvPr>
@@ -6704,7 +6704,7 @@
     </p:spTree>
     <p:extLst>
       <p:ext uri="{BB962C8B-B14F-4D97-AF65-F5344CB8AC3E}">
-        <p14:creationId xmlns:p14="http://schemas.microsoft.com/office/powerpoint/2010/main" val="930900073"/>
+        <p14:creationId xmlns:p14="http://schemas.microsoft.com/office/powerpoint/2010/main" val="574977047"/>
       </p:ext>
     </p:extLst>
   </p:cSld>
@@ -6728,7 +6728,7 @@
           <p:cNvPr id="2" name="Rectangle 1">
             <a:extLst xmlns:a="http://schemas.openxmlformats.org/drawingml/2006/main">
               <a:ext uri="{FF2B5EF4-FFF2-40B4-BE49-F238E27FC236}">
-                <a16:creationId xmlns:a16="http://schemas.microsoft.com/office/drawing/2014/main" id="{94874379-D44B-4111-80DF-72EF44B70CA5}"/>
+                <a16:creationId xmlns:a16="http://schemas.microsoft.com/office/drawing/2014/main" id="{4311A4A7-4B5E-4C6B-98F0-B4390AB5F5DC}"/>
               </a:ext>
             </a:extLst>
           </p:cNvPr>
@@ -6781,7 +6781,7 @@
           <p:cNvPr id="3" name="Rectangle 2">
             <a:extLst xmlns:a="http://schemas.openxmlformats.org/drawingml/2006/main">
               <a:ext uri="{FF2B5EF4-FFF2-40B4-BE49-F238E27FC236}">
-                <a16:creationId xmlns:a16="http://schemas.microsoft.com/office/drawing/2014/main" id="{C6594F7F-DEBE-41AB-B433-E302FFCB3385}"/>
+                <a16:creationId xmlns:a16="http://schemas.microsoft.com/office/drawing/2014/main" id="{9A18AC14-74DB-453D-89F3-7C779E389217}"/>
               </a:ext>
             </a:extLst>
           </p:cNvPr>
@@ -6834,7 +6834,7 @@
           <p:cNvPr id="4" name="TextBox 3">
             <a:extLst xmlns:a="http://schemas.openxmlformats.org/drawingml/2006/main">
               <a:ext uri="{FF2B5EF4-FFF2-40B4-BE49-F238E27FC236}">
-                <a16:creationId xmlns:a16="http://schemas.microsoft.com/office/drawing/2014/main" id="{AA803275-FB65-4154-8806-92BAEE0E9CC7}"/>
+                <a16:creationId xmlns:a16="http://schemas.microsoft.com/office/drawing/2014/main" id="{20C02B7F-C763-4B1D-BEAA-C9B5CAC7CA0E}"/>
               </a:ext>
             </a:extLst>
           </p:cNvPr>
@@ -7012,7 +7012,7 @@
     </p:spTree>
     <p:extLst>
       <p:ext uri="{BB962C8B-B14F-4D97-AF65-F5344CB8AC3E}">
-        <p14:creationId xmlns:p14="http://schemas.microsoft.com/office/powerpoint/2010/main" val="526055841"/>
+        <p14:creationId xmlns:p14="http://schemas.microsoft.com/office/powerpoint/2010/main" val="566523200"/>
       </p:ext>
     </p:extLst>
   </p:cSld>
@@ -7036,7 +7036,7 @@
           <p:cNvPr id="2" name="Rectangle 1">
             <a:extLst xmlns:a="http://schemas.openxmlformats.org/drawingml/2006/main">
               <a:ext uri="{FF2B5EF4-FFF2-40B4-BE49-F238E27FC236}">
-                <a16:creationId xmlns:a16="http://schemas.microsoft.com/office/drawing/2014/main" id="{89F22D32-B73F-4634-B92E-319E5359E355}"/>
+                <a16:creationId xmlns:a16="http://schemas.microsoft.com/office/drawing/2014/main" id="{A9CF8452-4422-49A8-995B-E3F30642133B}"/>
               </a:ext>
             </a:extLst>
           </p:cNvPr>
@@ -7089,7 +7089,7 @@
           <p:cNvPr id="3" name="Rectangle 2">
             <a:extLst xmlns:a="http://schemas.openxmlformats.org/drawingml/2006/main">
               <a:ext uri="{FF2B5EF4-FFF2-40B4-BE49-F238E27FC236}">
-                <a16:creationId xmlns:a16="http://schemas.microsoft.com/office/drawing/2014/main" id="{EB526803-8015-4834-9590-6B5DFA3B48A3}"/>
+                <a16:creationId xmlns:a16="http://schemas.microsoft.com/office/drawing/2014/main" id="{E12A3003-3F52-46CB-BE77-962829D83F6E}"/>
               </a:ext>
             </a:extLst>
           </p:cNvPr>
@@ -7142,7 +7142,7 @@
           <p:cNvPr id="4" name="Rectangle 3">
             <a:extLst xmlns:a="http://schemas.openxmlformats.org/drawingml/2006/main">
               <a:ext uri="{FF2B5EF4-FFF2-40B4-BE49-F238E27FC236}">
-                <a16:creationId xmlns:a16="http://schemas.microsoft.com/office/drawing/2014/main" id="{CE147814-65AB-4D31-AFBF-C7EE5F8C3679}"/>
+                <a16:creationId xmlns:a16="http://schemas.microsoft.com/office/drawing/2014/main" id="{15F20F26-2CBE-427A-AFC2-9DE5898D4F06}"/>
               </a:ext>
             </a:extLst>
           </p:cNvPr>
@@ -7195,7 +7195,7 @@
           <p:cNvPr id="5" name="TextBox 4">
             <a:extLst xmlns:a="http://schemas.openxmlformats.org/drawingml/2006/main">
               <a:ext uri="{FF2B5EF4-FFF2-40B4-BE49-F238E27FC236}">
-                <a16:creationId xmlns:a16="http://schemas.microsoft.com/office/drawing/2014/main" id="{7172D39E-59A7-4A28-87A9-9A0B3198A93A}"/>
+                <a16:creationId xmlns:a16="http://schemas.microsoft.com/office/drawing/2014/main" id="{08C77087-993A-4B44-8BF0-14CC7B336E57}"/>
               </a:ext>
             </a:extLst>
           </p:cNvPr>
@@ -7258,7 +7258,7 @@
           <p:cNvPr id="6" name="Rounded Rectangle 5">
             <a:extLst xmlns:a="http://schemas.openxmlformats.org/drawingml/2006/main">
               <a:ext uri="{FF2B5EF4-FFF2-40B4-BE49-F238E27FC236}">
-                <a16:creationId xmlns:a16="http://schemas.microsoft.com/office/drawing/2014/main" id="{A65171A4-E7C5-465A-8B17-6CC08574BF54}"/>
+                <a16:creationId xmlns:a16="http://schemas.microsoft.com/office/drawing/2014/main" id="{59B2DDEF-578E-4B2D-8083-5EF4277B7B94}"/>
               </a:ext>
             </a:extLst>
           </p:cNvPr>
@@ -7313,7 +7313,7 @@
           <p:cNvPr id="7" name="TextBox 6">
             <a:extLst xmlns:a="http://schemas.openxmlformats.org/drawingml/2006/main">
               <a:ext uri="{FF2B5EF4-FFF2-40B4-BE49-F238E27FC236}">
-                <a16:creationId xmlns:a16="http://schemas.microsoft.com/office/drawing/2014/main" id="{FA598076-1CF4-4DFB-A06A-DDAB5D0CE294}"/>
+                <a16:creationId xmlns:a16="http://schemas.microsoft.com/office/drawing/2014/main" id="{5B14F8C9-F211-454C-8B51-40677A3D0D68}"/>
               </a:ext>
             </a:extLst>
           </p:cNvPr>
@@ -7417,7 +7417,7 @@
           <p:cNvPr id="8" name="Rounded Rectangle 7">
             <a:extLst xmlns:a="http://schemas.openxmlformats.org/drawingml/2006/main">
               <a:ext uri="{FF2B5EF4-FFF2-40B4-BE49-F238E27FC236}">
-                <a16:creationId xmlns:a16="http://schemas.microsoft.com/office/drawing/2014/main" id="{42979C6E-14AF-4F58-A740-4B5C6E24817A}"/>
+                <a16:creationId xmlns:a16="http://schemas.microsoft.com/office/drawing/2014/main" id="{0BAE500D-5308-48BD-9308-C139DDE386B1}"/>
               </a:ext>
             </a:extLst>
           </p:cNvPr>
@@ -7472,7 +7472,7 @@
           <p:cNvPr id="9" name="TextBox 8">
             <a:extLst xmlns:a="http://schemas.openxmlformats.org/drawingml/2006/main">
               <a:ext uri="{FF2B5EF4-FFF2-40B4-BE49-F238E27FC236}">
-                <a16:creationId xmlns:a16="http://schemas.microsoft.com/office/drawing/2014/main" id="{430AF0D4-3A7F-4A9B-B8EF-AAF65984D231}"/>
+                <a16:creationId xmlns:a16="http://schemas.microsoft.com/office/drawing/2014/main" id="{76C9ECAC-EE7B-4E58-BA98-3AA9A7F6D2E3}"/>
               </a:ext>
             </a:extLst>
           </p:cNvPr>
@@ -7576,7 +7576,7 @@
           <p:cNvPr id="10" name="Rounded Rectangle 9">
             <a:extLst xmlns:a="http://schemas.openxmlformats.org/drawingml/2006/main">
               <a:ext uri="{FF2B5EF4-FFF2-40B4-BE49-F238E27FC236}">
-                <a16:creationId xmlns:a16="http://schemas.microsoft.com/office/drawing/2014/main" id="{6480AA08-4EFD-4411-80EE-1CADA8AB89F5}"/>
+                <a16:creationId xmlns:a16="http://schemas.microsoft.com/office/drawing/2014/main" id="{D2DBDE6C-A7C8-4A62-997F-201D1F8E09FA}"/>
               </a:ext>
             </a:extLst>
           </p:cNvPr>
@@ -7631,7 +7631,7 @@
           <p:cNvPr id="11" name="TextBox 10">
             <a:extLst xmlns:a="http://schemas.openxmlformats.org/drawingml/2006/main">
               <a:ext uri="{FF2B5EF4-FFF2-40B4-BE49-F238E27FC236}">
-                <a16:creationId xmlns:a16="http://schemas.microsoft.com/office/drawing/2014/main" id="{DBF44D97-9D83-4A8E-AC03-6D904A848343}"/>
+                <a16:creationId xmlns:a16="http://schemas.microsoft.com/office/drawing/2014/main" id="{8724AA3F-7D53-471C-8D7D-90524A234222}"/>
               </a:ext>
             </a:extLst>
           </p:cNvPr>
@@ -7790,7 +7790,7 @@
     </p:spTree>
     <p:extLst>
       <p:ext uri="{BB962C8B-B14F-4D97-AF65-F5344CB8AC3E}">
-        <p14:creationId xmlns:p14="http://schemas.microsoft.com/office/powerpoint/2010/main" val="383905064"/>
+        <p14:creationId xmlns:p14="http://schemas.microsoft.com/office/powerpoint/2010/main" val="1104074397"/>
       </p:ext>
     </p:extLst>
   </p:cSld>
@@ -7814,7 +7814,7 @@
           <p:cNvPr id="2" name="Rectangle 1">
             <a:extLst xmlns:a="http://schemas.openxmlformats.org/drawingml/2006/main">
               <a:ext uri="{FF2B5EF4-FFF2-40B4-BE49-F238E27FC236}">
-                <a16:creationId xmlns:a16="http://schemas.microsoft.com/office/drawing/2014/main" id="{214CD07B-1421-413D-BDF7-29A7024F6CEE}"/>
+                <a16:creationId xmlns:a16="http://schemas.microsoft.com/office/drawing/2014/main" id="{CACE1302-ECF9-491F-A316-4571409E9C5A}"/>
               </a:ext>
             </a:extLst>
           </p:cNvPr>
@@ -7867,7 +7867,7 @@
           <p:cNvPr id="3" name="Rectangle 2">
             <a:extLst xmlns:a="http://schemas.openxmlformats.org/drawingml/2006/main">
               <a:ext uri="{FF2B5EF4-FFF2-40B4-BE49-F238E27FC236}">
-                <a16:creationId xmlns:a16="http://schemas.microsoft.com/office/drawing/2014/main" id="{11847149-C5CB-451E-A46F-B23938E03292}"/>
+                <a16:creationId xmlns:a16="http://schemas.microsoft.com/office/drawing/2014/main" id="{EA4CAC5B-AA00-4700-A62D-16F15FF3B2F3}"/>
               </a:ext>
             </a:extLst>
           </p:cNvPr>
@@ -7920,7 +7920,7 @@
           <p:cNvPr id="4" name="Rectangle 3">
             <a:extLst xmlns:a="http://schemas.openxmlformats.org/drawingml/2006/main">
               <a:ext uri="{FF2B5EF4-FFF2-40B4-BE49-F238E27FC236}">
-                <a16:creationId xmlns:a16="http://schemas.microsoft.com/office/drawing/2014/main" id="{EE3EB1D3-6198-4708-B921-7393946D70C8}"/>
+                <a16:creationId xmlns:a16="http://schemas.microsoft.com/office/drawing/2014/main" id="{8BAD3718-2449-4374-B074-153198158ABE}"/>
               </a:ext>
             </a:extLst>
           </p:cNvPr>
@@ -7973,7 +7973,7 @@
           <p:cNvPr id="5" name="TextBox 4">
             <a:extLst xmlns:a="http://schemas.openxmlformats.org/drawingml/2006/main">
               <a:ext uri="{FF2B5EF4-FFF2-40B4-BE49-F238E27FC236}">
-                <a16:creationId xmlns:a16="http://schemas.microsoft.com/office/drawing/2014/main" id="{A9AD06E1-27BD-44E7-B906-36ABAABE0F72}"/>
+                <a16:creationId xmlns:a16="http://schemas.microsoft.com/office/drawing/2014/main" id="{C2DCAF6D-49D8-428C-9A93-125E569E7034}"/>
               </a:ext>
             </a:extLst>
           </p:cNvPr>
@@ -8036,7 +8036,7 @@
           <p:cNvPr id="6" name="Rounded Rectangle 5">
             <a:extLst xmlns:a="http://schemas.openxmlformats.org/drawingml/2006/main">
               <a:ext uri="{FF2B5EF4-FFF2-40B4-BE49-F238E27FC236}">
-                <a16:creationId xmlns:a16="http://schemas.microsoft.com/office/drawing/2014/main" id="{85C0EFCB-E843-4644-A47D-B8D2352EF685}"/>
+                <a16:creationId xmlns:a16="http://schemas.microsoft.com/office/drawing/2014/main" id="{C483A55D-855A-470F-B581-69C6D8020981}"/>
               </a:ext>
             </a:extLst>
           </p:cNvPr>
@@ -8091,7 +8091,7 @@
           <p:cNvPr id="7" name="TextBox 6">
             <a:extLst xmlns:a="http://schemas.openxmlformats.org/drawingml/2006/main">
               <a:ext uri="{FF2B5EF4-FFF2-40B4-BE49-F238E27FC236}">
-                <a16:creationId xmlns:a16="http://schemas.microsoft.com/office/drawing/2014/main" id="{0F6575D0-FD7E-4C70-9DBB-8045CC3EB16E}"/>
+                <a16:creationId xmlns:a16="http://schemas.microsoft.com/office/drawing/2014/main" id="{32FCFF1B-42A8-4A2E-96DF-10B1A72E1022}"/>
               </a:ext>
             </a:extLst>
           </p:cNvPr>
@@ -8214,7 +8214,7 @@
           <p:cNvPr id="8" name="Rounded Rectangle 7">
             <a:extLst xmlns:a="http://schemas.openxmlformats.org/drawingml/2006/main">
               <a:ext uri="{FF2B5EF4-FFF2-40B4-BE49-F238E27FC236}">
-                <a16:creationId xmlns:a16="http://schemas.microsoft.com/office/drawing/2014/main" id="{B168CC65-CD67-4684-9F11-CBF8CF7D7B16}"/>
+                <a16:creationId xmlns:a16="http://schemas.microsoft.com/office/drawing/2014/main" id="{54481AE8-ADE1-44F4-827F-95AC688B93DA}"/>
               </a:ext>
             </a:extLst>
           </p:cNvPr>
@@ -8269,7 +8269,7 @@
           <p:cNvPr id="9" name="TextBox 8">
             <a:extLst xmlns:a="http://schemas.openxmlformats.org/drawingml/2006/main">
               <a:ext uri="{FF2B5EF4-FFF2-40B4-BE49-F238E27FC236}">
-                <a16:creationId xmlns:a16="http://schemas.microsoft.com/office/drawing/2014/main" id="{937EE3F7-AF08-4C2E-A262-39C90AF5E813}"/>
+                <a16:creationId xmlns:a16="http://schemas.microsoft.com/office/drawing/2014/main" id="{C418C3BA-840C-4F1C-B5AA-A86E6A1AB24B}"/>
               </a:ext>
             </a:extLst>
           </p:cNvPr>
@@ -8411,7 +8411,7 @@
           <p:cNvPr id="10" name="Rounded Rectangle 9">
             <a:extLst xmlns:a="http://schemas.openxmlformats.org/drawingml/2006/main">
               <a:ext uri="{FF2B5EF4-FFF2-40B4-BE49-F238E27FC236}">
-                <a16:creationId xmlns:a16="http://schemas.microsoft.com/office/drawing/2014/main" id="{5E0A37B7-7EBF-49EE-83B0-FF676B75ADA4}"/>
+                <a16:creationId xmlns:a16="http://schemas.microsoft.com/office/drawing/2014/main" id="{C85F79E8-152E-4C5E-AAB7-7246022084BC}"/>
               </a:ext>
             </a:extLst>
           </p:cNvPr>
@@ -8466,7 +8466,7 @@
           <p:cNvPr id="11" name="TextBox 10">
             <a:extLst xmlns:a="http://schemas.openxmlformats.org/drawingml/2006/main">
               <a:ext uri="{FF2B5EF4-FFF2-40B4-BE49-F238E27FC236}">
-                <a16:creationId xmlns:a16="http://schemas.microsoft.com/office/drawing/2014/main" id="{EBBFE1A0-8400-401D-B1B1-6CDCB119618B}"/>
+                <a16:creationId xmlns:a16="http://schemas.microsoft.com/office/drawing/2014/main" id="{AC9373F5-6A7A-4643-9BFC-6AB0E2305F59}"/>
               </a:ext>
             </a:extLst>
           </p:cNvPr>
@@ -8568,7 +8568,7 @@
     </p:spTree>
     <p:extLst>
       <p:ext uri="{BB962C8B-B14F-4D97-AF65-F5344CB8AC3E}">
-        <p14:creationId xmlns:p14="http://schemas.microsoft.com/office/powerpoint/2010/main" val="1784165154"/>
+        <p14:creationId xmlns:p14="http://schemas.microsoft.com/office/powerpoint/2010/main" val="1878262170"/>
       </p:ext>
     </p:extLst>
   </p:cSld>
@@ -8592,7 +8592,7 @@
           <p:cNvPr id="2" name="Rectangle 1">
             <a:extLst xmlns:a="http://schemas.openxmlformats.org/drawingml/2006/main">
               <a:ext uri="{FF2B5EF4-FFF2-40B4-BE49-F238E27FC236}">
-                <a16:creationId xmlns:a16="http://schemas.microsoft.com/office/drawing/2014/main" id="{18A1661B-FA65-464B-8332-569ACB200867}"/>
+                <a16:creationId xmlns:a16="http://schemas.microsoft.com/office/drawing/2014/main" id="{7732BCB8-D83B-4F3A-AE70-4AA503F33DF1}"/>
               </a:ext>
             </a:extLst>
           </p:cNvPr>
@@ -8645,7 +8645,7 @@
           <p:cNvPr id="3" name="Rectangle 2">
             <a:extLst xmlns:a="http://schemas.openxmlformats.org/drawingml/2006/main">
               <a:ext uri="{FF2B5EF4-FFF2-40B4-BE49-F238E27FC236}">
-                <a16:creationId xmlns:a16="http://schemas.microsoft.com/office/drawing/2014/main" id="{36E4D39B-05D0-41F8-927F-B092842928EB}"/>
+                <a16:creationId xmlns:a16="http://schemas.microsoft.com/office/drawing/2014/main" id="{55F90981-D01C-4017-BC8A-D6C92F976364}"/>
               </a:ext>
             </a:extLst>
           </p:cNvPr>
@@ -8698,7 +8698,7 @@
           <p:cNvPr id="4" name="Rectangle 3">
             <a:extLst xmlns:a="http://schemas.openxmlformats.org/drawingml/2006/main">
               <a:ext uri="{FF2B5EF4-FFF2-40B4-BE49-F238E27FC236}">
-                <a16:creationId xmlns:a16="http://schemas.microsoft.com/office/drawing/2014/main" id="{A7E09364-A528-480A-9660-8DD69647DE3C}"/>
+                <a16:creationId xmlns:a16="http://schemas.microsoft.com/office/drawing/2014/main" id="{6DDAC109-66E3-4D96-9A88-43705A614887}"/>
               </a:ext>
             </a:extLst>
           </p:cNvPr>
@@ -8751,7 +8751,7 @@
           <p:cNvPr id="5" name="TextBox 4">
             <a:extLst xmlns:a="http://schemas.openxmlformats.org/drawingml/2006/main">
               <a:ext uri="{FF2B5EF4-FFF2-40B4-BE49-F238E27FC236}">
-                <a16:creationId xmlns:a16="http://schemas.microsoft.com/office/drawing/2014/main" id="{72CC3027-BF7D-4485-A40D-30FCF9F9A2AA}"/>
+                <a16:creationId xmlns:a16="http://schemas.microsoft.com/office/drawing/2014/main" id="{71BCC5A3-9BCC-4E5C-8996-B8C0CA22893E}"/>
               </a:ext>
             </a:extLst>
           </p:cNvPr>
@@ -8814,7 +8814,7 @@
           <p:cNvPr id="6" name="Rounded Rectangle 5">
             <a:extLst xmlns:a="http://schemas.openxmlformats.org/drawingml/2006/main">
               <a:ext uri="{FF2B5EF4-FFF2-40B4-BE49-F238E27FC236}">
-                <a16:creationId xmlns:a16="http://schemas.microsoft.com/office/drawing/2014/main" id="{C2330EE6-9DD4-422E-9887-253A37F7BBE5}"/>
+                <a16:creationId xmlns:a16="http://schemas.microsoft.com/office/drawing/2014/main" id="{AD9F52A5-37FC-4EB1-8A1E-5A03DF4F666D}"/>
               </a:ext>
             </a:extLst>
           </p:cNvPr>
@@ -8869,7 +8869,7 @@
           <p:cNvPr id="7" name="TextBox 6">
             <a:extLst xmlns:a="http://schemas.openxmlformats.org/drawingml/2006/main">
               <a:ext uri="{FF2B5EF4-FFF2-40B4-BE49-F238E27FC236}">
-                <a16:creationId xmlns:a16="http://schemas.microsoft.com/office/drawing/2014/main" id="{8C940245-8B57-44F5-95C7-0230674D80E4}"/>
+                <a16:creationId xmlns:a16="http://schemas.microsoft.com/office/drawing/2014/main" id="{D8B8EC28-61B9-4C30-9BE6-8A45705F8646}"/>
               </a:ext>
             </a:extLst>
           </p:cNvPr>
@@ -9049,7 +9049,7 @@
           <p:cNvPr id="8" name="Rounded Rectangle 7">
             <a:extLst xmlns:a="http://schemas.openxmlformats.org/drawingml/2006/main">
               <a:ext uri="{FF2B5EF4-FFF2-40B4-BE49-F238E27FC236}">
-                <a16:creationId xmlns:a16="http://schemas.microsoft.com/office/drawing/2014/main" id="{29A85A97-AAB5-457C-9354-E4829083E48D}"/>
+                <a16:creationId xmlns:a16="http://schemas.microsoft.com/office/drawing/2014/main" id="{AA3DD4C4-A085-4B30-9D87-D0C4747AB7D9}"/>
               </a:ext>
             </a:extLst>
           </p:cNvPr>
@@ -9104,7 +9104,7 @@
           <p:cNvPr id="9" name="TextBox 8">
             <a:extLst xmlns:a="http://schemas.openxmlformats.org/drawingml/2006/main">
               <a:ext uri="{FF2B5EF4-FFF2-40B4-BE49-F238E27FC236}">
-                <a16:creationId xmlns:a16="http://schemas.microsoft.com/office/drawing/2014/main" id="{C385E764-1748-473A-A380-F6F4D77B3918}"/>
+                <a16:creationId xmlns:a16="http://schemas.microsoft.com/office/drawing/2014/main" id="{E5061F46-6B97-478A-B2FB-BA4F31AB334C}"/>
               </a:ext>
             </a:extLst>
           </p:cNvPr>
@@ -9263,7 +9263,7 @@
     </p:spTree>
     <p:extLst>
       <p:ext uri="{BB962C8B-B14F-4D97-AF65-F5344CB8AC3E}">
-        <p14:creationId xmlns:p14="http://schemas.microsoft.com/office/powerpoint/2010/main" val="1698233138"/>
+        <p14:creationId xmlns:p14="http://schemas.microsoft.com/office/powerpoint/2010/main" val="2046228398"/>
       </p:ext>
     </p:extLst>
   </p:cSld>
@@ -9287,7 +9287,7 @@
           <p:cNvPr id="2" name="Rectangle 1">
             <a:extLst xmlns:a="http://schemas.openxmlformats.org/drawingml/2006/main">
               <a:ext uri="{FF2B5EF4-FFF2-40B4-BE49-F238E27FC236}">
-                <a16:creationId xmlns:a16="http://schemas.microsoft.com/office/drawing/2014/main" id="{33F57D29-E76D-40C5-9F4B-89919E974F92}"/>
+                <a16:creationId xmlns:a16="http://schemas.microsoft.com/office/drawing/2014/main" id="{369C03A0-6F9C-48C4-9346-D25A2709946A}"/>
               </a:ext>
             </a:extLst>
           </p:cNvPr>
@@ -9340,7 +9340,7 @@
           <p:cNvPr id="3" name="Rectangle 2">
             <a:extLst xmlns:a="http://schemas.openxmlformats.org/drawingml/2006/main">
               <a:ext uri="{FF2B5EF4-FFF2-40B4-BE49-F238E27FC236}">
-                <a16:creationId xmlns:a16="http://schemas.microsoft.com/office/drawing/2014/main" id="{CFAE431C-16E6-43F8-9CB8-CC1F2FA4E979}"/>
+                <a16:creationId xmlns:a16="http://schemas.microsoft.com/office/drawing/2014/main" id="{49497C8A-E763-4EAB-A960-25A4D8C36309}"/>
               </a:ext>
             </a:extLst>
           </p:cNvPr>
@@ -9393,7 +9393,7 @@
           <p:cNvPr id="4" name="Rectangle 3">
             <a:extLst xmlns:a="http://schemas.openxmlformats.org/drawingml/2006/main">
               <a:ext uri="{FF2B5EF4-FFF2-40B4-BE49-F238E27FC236}">
-                <a16:creationId xmlns:a16="http://schemas.microsoft.com/office/drawing/2014/main" id="{750509EF-D968-4C31-9D1A-12B15D10AD73}"/>
+                <a16:creationId xmlns:a16="http://schemas.microsoft.com/office/drawing/2014/main" id="{57570CA0-2027-4383-9241-7DE9B63B4C79}"/>
               </a:ext>
             </a:extLst>
           </p:cNvPr>
@@ -9446,7 +9446,7 @@
           <p:cNvPr id="5" name="TextBox 4">
             <a:extLst xmlns:a="http://schemas.openxmlformats.org/drawingml/2006/main">
               <a:ext uri="{FF2B5EF4-FFF2-40B4-BE49-F238E27FC236}">
-                <a16:creationId xmlns:a16="http://schemas.microsoft.com/office/drawing/2014/main" id="{08988000-8C54-4016-8488-6949BE3409DB}"/>
+                <a16:creationId xmlns:a16="http://schemas.microsoft.com/office/drawing/2014/main" id="{D7EE01C6-B239-4D46-9C9D-5358EB7DAC68}"/>
               </a:ext>
             </a:extLst>
           </p:cNvPr>
@@ -9509,7 +9509,7 @@
           <p:cNvPr id="6" name="Rounded Rectangle 5">
             <a:extLst xmlns:a="http://schemas.openxmlformats.org/drawingml/2006/main">
               <a:ext uri="{FF2B5EF4-FFF2-40B4-BE49-F238E27FC236}">
-                <a16:creationId xmlns:a16="http://schemas.microsoft.com/office/drawing/2014/main" id="{B87E967F-F1DB-4564-8806-25657B9BDF16}"/>
+                <a16:creationId xmlns:a16="http://schemas.microsoft.com/office/drawing/2014/main" id="{7AEC23A6-E0E0-4083-AACF-F26748873143}"/>
               </a:ext>
             </a:extLst>
           </p:cNvPr>
@@ -9564,7 +9564,7 @@
           <p:cNvPr id="7" name="TextBox 6">
             <a:extLst xmlns:a="http://schemas.openxmlformats.org/drawingml/2006/main">
               <a:ext uri="{FF2B5EF4-FFF2-40B4-BE49-F238E27FC236}">
-                <a16:creationId xmlns:a16="http://schemas.microsoft.com/office/drawing/2014/main" id="{F6733F74-2107-4DA5-9A3F-8FCE95A79125}"/>
+                <a16:creationId xmlns:a16="http://schemas.microsoft.com/office/drawing/2014/main" id="{AE3C6C5C-A24F-4FB3-A763-C9A9C6C624BC}"/>
               </a:ext>
             </a:extLst>
           </p:cNvPr>
@@ -9782,7 +9782,7 @@
           <p:cNvPr id="8" name="Rounded Rectangle 7">
             <a:extLst xmlns:a="http://schemas.openxmlformats.org/drawingml/2006/main">
               <a:ext uri="{FF2B5EF4-FFF2-40B4-BE49-F238E27FC236}">
-                <a16:creationId xmlns:a16="http://schemas.microsoft.com/office/drawing/2014/main" id="{6CD334BA-CB48-4684-BFD5-834D7FFF24B1}"/>
+                <a16:creationId xmlns:a16="http://schemas.microsoft.com/office/drawing/2014/main" id="{35406027-2F78-4AC4-B0C6-B1A92B2A0C5A}"/>
               </a:ext>
             </a:extLst>
           </p:cNvPr>
@@ -9837,7 +9837,7 @@
           <p:cNvPr id="9" name="TextBox 8">
             <a:extLst xmlns:a="http://schemas.openxmlformats.org/drawingml/2006/main">
               <a:ext uri="{FF2B5EF4-FFF2-40B4-BE49-F238E27FC236}">
-                <a16:creationId xmlns:a16="http://schemas.microsoft.com/office/drawing/2014/main" id="{7438878A-36C5-40D7-B529-03F99F50C9AB}"/>
+                <a16:creationId xmlns:a16="http://schemas.microsoft.com/office/drawing/2014/main" id="{70C172F9-4E84-41E0-9282-2F72380241BF}"/>
               </a:ext>
             </a:extLst>
           </p:cNvPr>
@@ -10072,7 +10072,7 @@
     </p:spTree>
     <p:extLst>
       <p:ext uri="{BB962C8B-B14F-4D97-AF65-F5344CB8AC3E}">
-        <p14:creationId xmlns:p14="http://schemas.microsoft.com/office/powerpoint/2010/main" val="730359881"/>
+        <p14:creationId xmlns:p14="http://schemas.microsoft.com/office/powerpoint/2010/main" val="1616083947"/>
       </p:ext>
     </p:extLst>
   </p:cSld>
@@ -10096,7 +10096,7 @@
           <p:cNvPr id="2" name="Rectangle 1">
             <a:extLst xmlns:a="http://schemas.openxmlformats.org/drawingml/2006/main">
               <a:ext uri="{FF2B5EF4-FFF2-40B4-BE49-F238E27FC236}">
-                <a16:creationId xmlns:a16="http://schemas.microsoft.com/office/drawing/2014/main" id="{BD886271-9E50-48E9-8074-5992A607422C}"/>
+                <a16:creationId xmlns:a16="http://schemas.microsoft.com/office/drawing/2014/main" id="{FB6C215E-4933-49BB-BA5E-6FC3CF767DCC}"/>
               </a:ext>
             </a:extLst>
           </p:cNvPr>
@@ -10149,7 +10149,7 @@
           <p:cNvPr id="3" name="Rectangle 2">
             <a:extLst xmlns:a="http://schemas.openxmlformats.org/drawingml/2006/main">
               <a:ext uri="{FF2B5EF4-FFF2-40B4-BE49-F238E27FC236}">
-                <a16:creationId xmlns:a16="http://schemas.microsoft.com/office/drawing/2014/main" id="{E548262D-EE3A-46F5-B428-95F9EF3BB378}"/>
+                <a16:creationId xmlns:a16="http://schemas.microsoft.com/office/drawing/2014/main" id="{2E3F4EED-BF24-4DA2-BE66-CB25C6DB0671}"/>
               </a:ext>
             </a:extLst>
           </p:cNvPr>
@@ -10202,7 +10202,7 @@
           <p:cNvPr id="4" name="Rectangle 3">
             <a:extLst xmlns:a="http://schemas.openxmlformats.org/drawingml/2006/main">
               <a:ext uri="{FF2B5EF4-FFF2-40B4-BE49-F238E27FC236}">
-                <a16:creationId xmlns:a16="http://schemas.microsoft.com/office/drawing/2014/main" id="{A018D37F-572A-4C43-BE37-AE490C003635}"/>
+                <a16:creationId xmlns:a16="http://schemas.microsoft.com/office/drawing/2014/main" id="{79EF0CB2-87EF-434E-B48A-5EC5807CB760}"/>
               </a:ext>
             </a:extLst>
           </p:cNvPr>
@@ -10255,7 +10255,7 @@
           <p:cNvPr id="5" name="TextBox 4">
             <a:extLst xmlns:a="http://schemas.openxmlformats.org/drawingml/2006/main">
               <a:ext uri="{FF2B5EF4-FFF2-40B4-BE49-F238E27FC236}">
-                <a16:creationId xmlns:a16="http://schemas.microsoft.com/office/drawing/2014/main" id="{6664577D-EEC3-4583-B64F-17C18EFCD88B}"/>
+                <a16:creationId xmlns:a16="http://schemas.microsoft.com/office/drawing/2014/main" id="{933CBB98-25E2-4DDE-A463-C98919D18436}"/>
               </a:ext>
             </a:extLst>
           </p:cNvPr>
@@ -10318,7 +10318,7 @@
           <p:cNvPr id="6" name="Rounded Rectangle 5">
             <a:extLst xmlns:a="http://schemas.openxmlformats.org/drawingml/2006/main">
               <a:ext uri="{FF2B5EF4-FFF2-40B4-BE49-F238E27FC236}">
-                <a16:creationId xmlns:a16="http://schemas.microsoft.com/office/drawing/2014/main" id="{6D1298E0-CD6D-4635-BBAC-98F012E57033}"/>
+                <a16:creationId xmlns:a16="http://schemas.microsoft.com/office/drawing/2014/main" id="{5394D970-50B3-4579-9208-017EAF26AC18}"/>
               </a:ext>
             </a:extLst>
           </p:cNvPr>
@@ -10373,7 +10373,7 @@
           <p:cNvPr id="7" name="TextBox 6">
             <a:extLst xmlns:a="http://schemas.openxmlformats.org/drawingml/2006/main">
               <a:ext uri="{FF2B5EF4-FFF2-40B4-BE49-F238E27FC236}">
-                <a16:creationId xmlns:a16="http://schemas.microsoft.com/office/drawing/2014/main" id="{7CC56DAB-A78D-438A-B49B-75863023294E}"/>
+                <a16:creationId xmlns:a16="http://schemas.microsoft.com/office/drawing/2014/main" id="{3F673A2F-5D7C-46F4-A3AC-76FD0CBE17AB}"/>
               </a:ext>
             </a:extLst>
           </p:cNvPr>
@@ -10595,7 +10595,7 @@
           <p:nvPr/>
         </p:nvPicPr>
         <p:blipFill>
-          <a:blip xmlns:r="http://schemas.openxmlformats.org/officeDocument/2006/relationships" xmlns:a="http://schemas.openxmlformats.org/drawingml/2006/main" r:embed="R1fdd529506ff4862"/>
+          <a:blip xmlns:r="http://schemas.openxmlformats.org/officeDocument/2006/relationships" xmlns:a="http://schemas.openxmlformats.org/drawingml/2006/main" r:embed="R5276bb3c00234c9f"/>
           <a:stretch xmlns:a="http://schemas.openxmlformats.org/drawingml/2006/main">
             <a:fillRect l="0" t="0" r="0" b="0"/>
           </a:stretch>
@@ -10615,7 +10615,7 @@
           <p:cNvPr id="9" name="Rounded Rectangle 8">
             <a:extLst xmlns:a="http://schemas.openxmlformats.org/drawingml/2006/main">
               <a:ext uri="{FF2B5EF4-FFF2-40B4-BE49-F238E27FC236}">
-                <a16:creationId xmlns:a16="http://schemas.microsoft.com/office/drawing/2014/main" id="{0E0F0CE4-8BBF-437D-80B9-EC8FB4C2CA80}"/>
+                <a16:creationId xmlns:a16="http://schemas.microsoft.com/office/drawing/2014/main" id="{8629DA46-0887-47CD-87A0-4B4BBFDAC928}"/>
               </a:ext>
             </a:extLst>
           </p:cNvPr>
@@ -10670,7 +10670,7 @@
           <p:cNvPr id="10" name="TextBox 9">
             <a:extLst xmlns:a="http://schemas.openxmlformats.org/drawingml/2006/main">
               <a:ext uri="{FF2B5EF4-FFF2-40B4-BE49-F238E27FC236}">
-                <a16:creationId xmlns:a16="http://schemas.microsoft.com/office/drawing/2014/main" id="{E08878C1-E243-4199-97F4-E4D94C606D6C}"/>
+                <a16:creationId xmlns:a16="http://schemas.microsoft.com/office/drawing/2014/main" id="{F1F38445-D1F5-4266-9961-D8F46103A0B0}"/>
               </a:ext>
             </a:extLst>
           </p:cNvPr>
@@ -10756,7 +10756,7 @@
     </p:spTree>
     <p:extLst>
       <p:ext uri="{BB962C8B-B14F-4D97-AF65-F5344CB8AC3E}">
-        <p14:creationId xmlns:p14="http://schemas.microsoft.com/office/powerpoint/2010/main" val="346853300"/>
+        <p14:creationId xmlns:p14="http://schemas.microsoft.com/office/powerpoint/2010/main" val="1809980643"/>
       </p:ext>
     </p:extLst>
   </p:cSld>
@@ -10780,7 +10780,7 @@
           <p:cNvPr id="2" name="Rectangle 1">
             <a:extLst xmlns:a="http://schemas.openxmlformats.org/drawingml/2006/main">
               <a:ext uri="{FF2B5EF4-FFF2-40B4-BE49-F238E27FC236}">
-                <a16:creationId xmlns:a16="http://schemas.microsoft.com/office/drawing/2014/main" id="{06D5B608-F6C8-4C95-B30C-4AD003CF5CB5}"/>
+                <a16:creationId xmlns:a16="http://schemas.microsoft.com/office/drawing/2014/main" id="{269C9E41-5139-467D-B726-1C097AAC80CE}"/>
               </a:ext>
             </a:extLst>
           </p:cNvPr>
@@ -10833,7 +10833,7 @@
           <p:cNvPr id="3" name="Rectangle 2">
             <a:extLst xmlns:a="http://schemas.openxmlformats.org/drawingml/2006/main">
               <a:ext uri="{FF2B5EF4-FFF2-40B4-BE49-F238E27FC236}">
-                <a16:creationId xmlns:a16="http://schemas.microsoft.com/office/drawing/2014/main" id="{7A77D484-72B8-4F17-A959-01EDF718DF98}"/>
+                <a16:creationId xmlns:a16="http://schemas.microsoft.com/office/drawing/2014/main" id="{615AD4CD-3884-4AA0-A370-CECDD1B242FE}"/>
               </a:ext>
             </a:extLst>
           </p:cNvPr>
@@ -10886,7 +10886,7 @@
           <p:cNvPr id="4" name="Rectangle 3">
             <a:extLst xmlns:a="http://schemas.openxmlformats.org/drawingml/2006/main">
               <a:ext uri="{FF2B5EF4-FFF2-40B4-BE49-F238E27FC236}">
-                <a16:creationId xmlns:a16="http://schemas.microsoft.com/office/drawing/2014/main" id="{F9620F5B-FAF8-4F7D-9C98-09922DA7CE9A}"/>
+                <a16:creationId xmlns:a16="http://schemas.microsoft.com/office/drawing/2014/main" id="{B8816665-8BB4-45FE-9623-C40B56FBA51F}"/>
               </a:ext>
             </a:extLst>
           </p:cNvPr>
@@ -10939,7 +10939,7 @@
           <p:cNvPr id="5" name="TextBox 4">
             <a:extLst xmlns:a="http://schemas.openxmlformats.org/drawingml/2006/main">
               <a:ext uri="{FF2B5EF4-FFF2-40B4-BE49-F238E27FC236}">
-                <a16:creationId xmlns:a16="http://schemas.microsoft.com/office/drawing/2014/main" id="{47A05D45-7C59-4890-91C8-3225885DDB5E}"/>
+                <a16:creationId xmlns:a16="http://schemas.microsoft.com/office/drawing/2014/main" id="{3856AAD0-ADEA-4A0B-AED6-0C6304FCC24C}"/>
               </a:ext>
             </a:extLst>
           </p:cNvPr>
@@ -11002,7 +11002,7 @@
           <p:cNvPr id="6" name="Rounded Rectangle 5">
             <a:extLst xmlns:a="http://schemas.openxmlformats.org/drawingml/2006/main">
               <a:ext uri="{FF2B5EF4-FFF2-40B4-BE49-F238E27FC236}">
-                <a16:creationId xmlns:a16="http://schemas.microsoft.com/office/drawing/2014/main" id="{E497226D-0AC7-4BE5-B544-C2A97D13F34A}"/>
+                <a16:creationId xmlns:a16="http://schemas.microsoft.com/office/drawing/2014/main" id="{4F560846-6FD2-48B0-B3A6-0A526A0F5711}"/>
               </a:ext>
             </a:extLst>
           </p:cNvPr>
@@ -11057,7 +11057,7 @@
           <p:cNvPr id="7" name="TextBox 6">
             <a:extLst xmlns:a="http://schemas.openxmlformats.org/drawingml/2006/main">
               <a:ext uri="{FF2B5EF4-FFF2-40B4-BE49-F238E27FC236}">
-                <a16:creationId xmlns:a16="http://schemas.microsoft.com/office/drawing/2014/main" id="{92ED84E8-573E-455B-9C6E-1C7E0ED707FC}"/>
+                <a16:creationId xmlns:a16="http://schemas.microsoft.com/office/drawing/2014/main" id="{533DECB7-04A0-4BFC-953F-789B7B504BCF}"/>
               </a:ext>
             </a:extLst>
           </p:cNvPr>
@@ -11294,7 +11294,7 @@
           <p:cNvPr id="8" name="Rounded Rectangle 7">
             <a:extLst xmlns:a="http://schemas.openxmlformats.org/drawingml/2006/main">
               <a:ext uri="{FF2B5EF4-FFF2-40B4-BE49-F238E27FC236}">
-                <a16:creationId xmlns:a16="http://schemas.microsoft.com/office/drawing/2014/main" id="{339BDEBF-AF1B-4815-AEFA-4A6E0717FF7F}"/>
+                <a16:creationId xmlns:a16="http://schemas.microsoft.com/office/drawing/2014/main" id="{D636E081-7EC1-487C-B8A9-3963359A216B}"/>
               </a:ext>
             </a:extLst>
           </p:cNvPr>
@@ -11349,7 +11349,7 @@
           <p:cNvPr id="9" name="TextBox 8">
             <a:extLst xmlns:a="http://schemas.openxmlformats.org/drawingml/2006/main">
               <a:ext uri="{FF2B5EF4-FFF2-40B4-BE49-F238E27FC236}">
-                <a16:creationId xmlns:a16="http://schemas.microsoft.com/office/drawing/2014/main" id="{85D9B94A-4338-4A52-97CC-710D2EE71D29}"/>
+                <a16:creationId xmlns:a16="http://schemas.microsoft.com/office/drawing/2014/main" id="{74423B59-AA4E-41F1-B728-ADE5D3629EF9}"/>
               </a:ext>
             </a:extLst>
           </p:cNvPr>
@@ -11684,7 +11684,7 @@
     </p:spTree>
     <p:extLst>
       <p:ext uri="{BB962C8B-B14F-4D97-AF65-F5344CB8AC3E}">
-        <p14:creationId xmlns:p14="http://schemas.microsoft.com/office/powerpoint/2010/main" val="279318366"/>
+        <p14:creationId xmlns:p14="http://schemas.microsoft.com/office/powerpoint/2010/main" val="963955045"/>
       </p:ext>
     </p:extLst>
   </p:cSld>
@@ -11708,7 +11708,7 @@
           <p:cNvPr id="2" name="Rectangle 1">
             <a:extLst xmlns:a="http://schemas.openxmlformats.org/drawingml/2006/main">
               <a:ext uri="{FF2B5EF4-FFF2-40B4-BE49-F238E27FC236}">
-                <a16:creationId xmlns:a16="http://schemas.microsoft.com/office/drawing/2014/main" id="{742BF1C6-9628-4829-8511-7E4740CBDA54}"/>
+                <a16:creationId xmlns:a16="http://schemas.microsoft.com/office/drawing/2014/main" id="{45838C76-883C-42A2-B00D-5AAAB3AAEDC4}"/>
               </a:ext>
             </a:extLst>
           </p:cNvPr>
@@ -11761,7 +11761,7 @@
           <p:cNvPr id="3" name="Rectangle 2">
             <a:extLst xmlns:a="http://schemas.openxmlformats.org/drawingml/2006/main">
               <a:ext uri="{FF2B5EF4-FFF2-40B4-BE49-F238E27FC236}">
-                <a16:creationId xmlns:a16="http://schemas.microsoft.com/office/drawing/2014/main" id="{74915344-EF7E-467F-9957-CC87313528D3}"/>
+                <a16:creationId xmlns:a16="http://schemas.microsoft.com/office/drawing/2014/main" id="{35B724DC-CB3D-444E-9929-F1FE5C6E79CA}"/>
               </a:ext>
             </a:extLst>
           </p:cNvPr>
@@ -11814,7 +11814,7 @@
           <p:cNvPr id="4" name="Rectangle 3">
             <a:extLst xmlns:a="http://schemas.openxmlformats.org/drawingml/2006/main">
               <a:ext uri="{FF2B5EF4-FFF2-40B4-BE49-F238E27FC236}">
-                <a16:creationId xmlns:a16="http://schemas.microsoft.com/office/drawing/2014/main" id="{53659B57-9C8C-40A9-AF60-16A18D874DE7}"/>
+                <a16:creationId xmlns:a16="http://schemas.microsoft.com/office/drawing/2014/main" id="{C02BF112-CB43-4BCD-A231-2142FF2759C4}"/>
               </a:ext>
             </a:extLst>
           </p:cNvPr>
@@ -11867,7 +11867,7 @@
           <p:cNvPr id="5" name="TextBox 4">
             <a:extLst xmlns:a="http://schemas.openxmlformats.org/drawingml/2006/main">
               <a:ext uri="{FF2B5EF4-FFF2-40B4-BE49-F238E27FC236}">
-                <a16:creationId xmlns:a16="http://schemas.microsoft.com/office/drawing/2014/main" id="{7A44891F-0971-485E-A233-4CF123A5739A}"/>
+                <a16:creationId xmlns:a16="http://schemas.microsoft.com/office/drawing/2014/main" id="{2A2FCC4F-198C-4DC1-B7F0-F196B2CC4A3F}"/>
               </a:ext>
             </a:extLst>
           </p:cNvPr>
@@ -11930,7 +11930,7 @@
           <p:cNvPr id="6" name="Rounded Rectangle 5">
             <a:extLst xmlns:a="http://schemas.openxmlformats.org/drawingml/2006/main">
               <a:ext uri="{FF2B5EF4-FFF2-40B4-BE49-F238E27FC236}">
-                <a16:creationId xmlns:a16="http://schemas.microsoft.com/office/drawing/2014/main" id="{5B34D758-34A1-476A-9CEE-D11B4E9841B7}"/>
+                <a16:creationId xmlns:a16="http://schemas.microsoft.com/office/drawing/2014/main" id="{543F8941-D038-4329-BF2C-4C15E87B8942}"/>
               </a:ext>
             </a:extLst>
           </p:cNvPr>
@@ -11985,7 +11985,7 @@
           <p:cNvPr id="7" name="TextBox 6">
             <a:extLst xmlns:a="http://schemas.openxmlformats.org/drawingml/2006/main">
               <a:ext uri="{FF2B5EF4-FFF2-40B4-BE49-F238E27FC236}">
-                <a16:creationId xmlns:a16="http://schemas.microsoft.com/office/drawing/2014/main" id="{8CFDBAB0-EA46-43FE-8C61-8AE8D6D9D96A}"/>
+                <a16:creationId xmlns:a16="http://schemas.microsoft.com/office/drawing/2014/main" id="{6C958E2E-1B8A-46E5-9979-388EBA2C5CE9}"/>
               </a:ext>
             </a:extLst>
           </p:cNvPr>
@@ -12108,7 +12108,7 @@
           <p:cNvPr id="8" name="Rounded Rectangle 7">
             <a:extLst xmlns:a="http://schemas.openxmlformats.org/drawingml/2006/main">
               <a:ext uri="{FF2B5EF4-FFF2-40B4-BE49-F238E27FC236}">
-                <a16:creationId xmlns:a16="http://schemas.microsoft.com/office/drawing/2014/main" id="{5EDE8D18-9CBE-45C2-9DF7-6C7AEBA3F09F}"/>
+                <a16:creationId xmlns:a16="http://schemas.microsoft.com/office/drawing/2014/main" id="{5359BF50-B4CB-4958-83BC-5A54F58327B7}"/>
               </a:ext>
             </a:extLst>
           </p:cNvPr>
@@ -12163,7 +12163,7 @@
           <p:cNvPr id="9" name="TextBox 8">
             <a:extLst xmlns:a="http://schemas.openxmlformats.org/drawingml/2006/main">
               <a:ext uri="{FF2B5EF4-FFF2-40B4-BE49-F238E27FC236}">
-                <a16:creationId xmlns:a16="http://schemas.microsoft.com/office/drawing/2014/main" id="{BE7C79A6-26CD-42FD-A1A3-8DB96E120250}"/>
+                <a16:creationId xmlns:a16="http://schemas.microsoft.com/office/drawing/2014/main" id="{BCA9BAD2-B198-4CDE-85E3-C5A64336FFB5}"/>
               </a:ext>
             </a:extLst>
           </p:cNvPr>
@@ -12286,7 +12286,7 @@
           <p:cNvPr id="10" name="Rounded Rectangle 9">
             <a:extLst xmlns:a="http://schemas.openxmlformats.org/drawingml/2006/main">
               <a:ext uri="{FF2B5EF4-FFF2-40B4-BE49-F238E27FC236}">
-                <a16:creationId xmlns:a16="http://schemas.microsoft.com/office/drawing/2014/main" id="{B2EF3340-C821-4436-ABB8-7082C3884112}"/>
+                <a16:creationId xmlns:a16="http://schemas.microsoft.com/office/drawing/2014/main" id="{D120393D-1940-4D27-A2ED-DA00BB75682D}"/>
               </a:ext>
             </a:extLst>
           </p:cNvPr>
@@ -12341,7 +12341,7 @@
           <p:cNvPr id="11" name="TextBox 10">
             <a:extLst xmlns:a="http://schemas.openxmlformats.org/drawingml/2006/main">
               <a:ext uri="{FF2B5EF4-FFF2-40B4-BE49-F238E27FC236}">
-                <a16:creationId xmlns:a16="http://schemas.microsoft.com/office/drawing/2014/main" id="{101EEEF0-0931-4C97-9129-4E43EB51409F}"/>
+                <a16:creationId xmlns:a16="http://schemas.microsoft.com/office/drawing/2014/main" id="{4B1A47A2-8F8C-4ACE-82D5-DD8666718136}"/>
               </a:ext>
             </a:extLst>
           </p:cNvPr>
@@ -12658,7 +12658,7 @@
     </p:spTree>
     <p:extLst>
       <p:ext uri="{BB962C8B-B14F-4D97-AF65-F5344CB8AC3E}">
-        <p14:creationId xmlns:p14="http://schemas.microsoft.com/office/powerpoint/2010/main" val="445248828"/>
+        <p14:creationId xmlns:p14="http://schemas.microsoft.com/office/powerpoint/2010/main" val="1132266275"/>
       </p:ext>
     </p:extLst>
   </p:cSld>
@@ -12682,7 +12682,7 @@
           <p:cNvPr id="2" name="Rectangle 1">
             <a:extLst xmlns:a="http://schemas.openxmlformats.org/drawingml/2006/main">
               <a:ext uri="{FF2B5EF4-FFF2-40B4-BE49-F238E27FC236}">
-                <a16:creationId xmlns:a16="http://schemas.microsoft.com/office/drawing/2014/main" id="{E516140A-E4C3-4521-B9A7-417CFA224CEB}"/>
+                <a16:creationId xmlns:a16="http://schemas.microsoft.com/office/drawing/2014/main" id="{A58BB38C-9BE8-4D0D-9989-AB4BC968822E}"/>
               </a:ext>
             </a:extLst>
           </p:cNvPr>
@@ -12735,7 +12735,7 @@
           <p:cNvPr id="3" name="Rectangle 2">
             <a:extLst xmlns:a="http://schemas.openxmlformats.org/drawingml/2006/main">
               <a:ext uri="{FF2B5EF4-FFF2-40B4-BE49-F238E27FC236}">
-                <a16:creationId xmlns:a16="http://schemas.microsoft.com/office/drawing/2014/main" id="{DD47A10E-8AC0-4EE0-A425-12D76AD055C4}"/>
+                <a16:creationId xmlns:a16="http://schemas.microsoft.com/office/drawing/2014/main" id="{1B4CBD96-ED6E-48B5-8F19-64A503AE9829}"/>
               </a:ext>
             </a:extLst>
           </p:cNvPr>
@@ -12788,7 +12788,7 @@
           <p:cNvPr id="4" name="Rectangle 3">
             <a:extLst xmlns:a="http://schemas.openxmlformats.org/drawingml/2006/main">
               <a:ext uri="{FF2B5EF4-FFF2-40B4-BE49-F238E27FC236}">
-                <a16:creationId xmlns:a16="http://schemas.microsoft.com/office/drawing/2014/main" id="{23075E0F-4902-4FF0-8AA0-364388A617B7}"/>
+                <a16:creationId xmlns:a16="http://schemas.microsoft.com/office/drawing/2014/main" id="{0C0481EB-412B-4182-947E-ED4080BEF817}"/>
               </a:ext>
             </a:extLst>
           </p:cNvPr>
@@ -12841,7 +12841,7 @@
           <p:cNvPr id="5" name="TextBox 4">
             <a:extLst xmlns:a="http://schemas.openxmlformats.org/drawingml/2006/main">
               <a:ext uri="{FF2B5EF4-FFF2-40B4-BE49-F238E27FC236}">
-                <a16:creationId xmlns:a16="http://schemas.microsoft.com/office/drawing/2014/main" id="{00B4D52D-E953-485B-B6A4-5D19AF334F73}"/>
+                <a16:creationId xmlns:a16="http://schemas.microsoft.com/office/drawing/2014/main" id="{4260F6EE-883F-488C-AC08-5A0424FAF1C2}"/>
               </a:ext>
             </a:extLst>
           </p:cNvPr>
@@ -12904,7 +12904,7 @@
           <p:cNvPr id="6" name="Rounded Rectangle 5">
             <a:extLst xmlns:a="http://schemas.openxmlformats.org/drawingml/2006/main">
               <a:ext uri="{FF2B5EF4-FFF2-40B4-BE49-F238E27FC236}">
-                <a16:creationId xmlns:a16="http://schemas.microsoft.com/office/drawing/2014/main" id="{5511BAE8-677F-437F-8449-FD16F0EDB3E2}"/>
+                <a16:creationId xmlns:a16="http://schemas.microsoft.com/office/drawing/2014/main" id="{6473EF80-67E8-48BE-A159-AA60C7905F9F}"/>
               </a:ext>
             </a:extLst>
           </p:cNvPr>
@@ -12959,7 +12959,7 @@
           <p:cNvPr id="7" name="TextBox 6">
             <a:extLst xmlns:a="http://schemas.openxmlformats.org/drawingml/2006/main">
               <a:ext uri="{FF2B5EF4-FFF2-40B4-BE49-F238E27FC236}">
-                <a16:creationId xmlns:a16="http://schemas.microsoft.com/office/drawing/2014/main" id="{9E23258A-4CDA-4FCC-88E0-CEAD1DD06641}"/>
+                <a16:creationId xmlns:a16="http://schemas.microsoft.com/office/drawing/2014/main" id="{2B97072E-746C-4A92-A073-2402F260A9B0}"/>
               </a:ext>
             </a:extLst>
           </p:cNvPr>
@@ -13332,7 +13332,7 @@
           <p:nvPr/>
         </p:nvPicPr>
         <p:blipFill>
-          <a:blip xmlns:r="http://schemas.openxmlformats.org/officeDocument/2006/relationships" xmlns:a="http://schemas.openxmlformats.org/drawingml/2006/main" r:embed="Rdd71940cb6394960"/>
+          <a:blip xmlns:r="http://schemas.openxmlformats.org/officeDocument/2006/relationships" xmlns:a="http://schemas.openxmlformats.org/drawingml/2006/main" r:embed="R1159e80b8d3942b7"/>
           <a:stretch xmlns:a="http://schemas.openxmlformats.org/drawingml/2006/main">
             <a:fillRect l="0" t="0" r="0" b="0"/>
           </a:stretch>
@@ -13352,7 +13352,7 @@
           <p:cNvPr id="9" name="Rounded Rectangle 8">
             <a:extLst xmlns:a="http://schemas.openxmlformats.org/drawingml/2006/main">
               <a:ext uri="{FF2B5EF4-FFF2-40B4-BE49-F238E27FC236}">
-                <a16:creationId xmlns:a16="http://schemas.microsoft.com/office/drawing/2014/main" id="{67BE1C8E-4C45-46FC-A696-1296461D49A2}"/>
+                <a16:creationId xmlns:a16="http://schemas.microsoft.com/office/drawing/2014/main" id="{5A4F294A-B342-4027-A2F4-2B8A0C15FC9D}"/>
               </a:ext>
             </a:extLst>
           </p:cNvPr>
@@ -13407,7 +13407,7 @@
           <p:cNvPr id="10" name="TextBox 9">
             <a:extLst xmlns:a="http://schemas.openxmlformats.org/drawingml/2006/main">
               <a:ext uri="{FF2B5EF4-FFF2-40B4-BE49-F238E27FC236}">
-                <a16:creationId xmlns:a16="http://schemas.microsoft.com/office/drawing/2014/main" id="{B399EFDE-785B-4E0D-AE93-9F08E771C7C8}"/>
+                <a16:creationId xmlns:a16="http://schemas.microsoft.com/office/drawing/2014/main" id="{92AC73DC-BDB6-493F-AD2C-ECCBABF50958}"/>
               </a:ext>
             </a:extLst>
           </p:cNvPr>
@@ -13490,7 +13490,7 @@
     </p:spTree>
     <p:extLst>
       <p:ext uri="{BB962C8B-B14F-4D97-AF65-F5344CB8AC3E}">
-        <p14:creationId xmlns:p14="http://schemas.microsoft.com/office/powerpoint/2010/main" val="2063367648"/>
+        <p14:creationId xmlns:p14="http://schemas.microsoft.com/office/powerpoint/2010/main" val="168802271"/>
       </p:ext>
     </p:extLst>
   </p:cSld>

--- a/reports/evidence/fixture_populated_slides.pptx
+++ b/reports/evidence/fixture_populated_slides.pptx
@@ -2,24 +2,24 @@
 <file path=ppt/presentation.xml><?xml version="1.0" encoding="utf-8"?>
 <p:presentation xmlns:p="http://schemas.openxmlformats.org/presentationml/2006/main">
   <p:sldMasterIdLst>
-    <p:sldMasterId xmlns:r="http://schemas.openxmlformats.org/officeDocument/2006/relationships" id="2147483648" r:id="R60c301539b9a42b2"/>
+    <p:sldMasterId xmlns:r="http://schemas.openxmlformats.org/officeDocument/2006/relationships" id="2147483648" r:id="R97c028c3622744ec"/>
   </p:sldMasterIdLst>
   <p:notesMasterIdLst>
-    <p:notesMasterId xmlns:r="http://schemas.openxmlformats.org/officeDocument/2006/relationships" r:id="R41d0ef69073e4774"/>
+    <p:notesMasterId xmlns:r="http://schemas.openxmlformats.org/officeDocument/2006/relationships" r:id="Rd0ec733be698460c"/>
   </p:notesMasterIdLst>
   <p:sldIdLst>
-    <p:sldId xmlns:r="http://schemas.openxmlformats.org/officeDocument/2006/relationships" id="256" r:id="R98004795aac947c4"/>
-    <p:sldId xmlns:r="http://schemas.openxmlformats.org/officeDocument/2006/relationships" id="257" r:id="R796c744cf7954b3f"/>
-    <p:sldId xmlns:r="http://schemas.openxmlformats.org/officeDocument/2006/relationships" id="258" r:id="R865353c44c4b43d0"/>
-    <p:sldId xmlns:r="http://schemas.openxmlformats.org/officeDocument/2006/relationships" id="259" r:id="R326b732faba1456d"/>
-    <p:sldId xmlns:r="http://schemas.openxmlformats.org/officeDocument/2006/relationships" id="260" r:id="Ree96208da5df48e8"/>
-    <p:sldId xmlns:r="http://schemas.openxmlformats.org/officeDocument/2006/relationships" id="261" r:id="Rf57e9d09a8d94d17"/>
-    <p:sldId xmlns:r="http://schemas.openxmlformats.org/officeDocument/2006/relationships" id="262" r:id="Rc252fb27690e4b69"/>
-    <p:sldId xmlns:r="http://schemas.openxmlformats.org/officeDocument/2006/relationships" id="263" r:id="R2d64358f688d4fa6"/>
-    <p:sldId xmlns:r="http://schemas.openxmlformats.org/officeDocument/2006/relationships" id="264" r:id="Ree75c31ff95e4c02"/>
-    <p:sldId xmlns:r="http://schemas.openxmlformats.org/officeDocument/2006/relationships" id="265" r:id="R44eeafb0679146a1"/>
-    <p:sldId xmlns:r="http://schemas.openxmlformats.org/officeDocument/2006/relationships" id="266" r:id="Ra432547eaafe4b00"/>
-    <p:sldId xmlns:r="http://schemas.openxmlformats.org/officeDocument/2006/relationships" id="267" r:id="Rb3ed13219605450c"/>
+    <p:sldId xmlns:r="http://schemas.openxmlformats.org/officeDocument/2006/relationships" id="256" r:id="Rc7d173c9e34b4224"/>
+    <p:sldId xmlns:r="http://schemas.openxmlformats.org/officeDocument/2006/relationships" id="257" r:id="R37e42e448e0248f2"/>
+    <p:sldId xmlns:r="http://schemas.openxmlformats.org/officeDocument/2006/relationships" id="258" r:id="R487265d6275b43f2"/>
+    <p:sldId xmlns:r="http://schemas.openxmlformats.org/officeDocument/2006/relationships" id="259" r:id="R0d548589cdfd464b"/>
+    <p:sldId xmlns:r="http://schemas.openxmlformats.org/officeDocument/2006/relationships" id="260" r:id="R0df468567d8b43a9"/>
+    <p:sldId xmlns:r="http://schemas.openxmlformats.org/officeDocument/2006/relationships" id="261" r:id="R4bcc37655b8c4f87"/>
+    <p:sldId xmlns:r="http://schemas.openxmlformats.org/officeDocument/2006/relationships" id="262" r:id="Re3061b16ad4e46a8"/>
+    <p:sldId xmlns:r="http://schemas.openxmlformats.org/officeDocument/2006/relationships" id="263" r:id="R4e53f57b398f47d0"/>
+    <p:sldId xmlns:r="http://schemas.openxmlformats.org/officeDocument/2006/relationships" id="264" r:id="Rf56ca8d4b2924094"/>
+    <p:sldId xmlns:r="http://schemas.openxmlformats.org/officeDocument/2006/relationships" id="265" r:id="Rd66c37502a344989"/>
+    <p:sldId xmlns:r="http://schemas.openxmlformats.org/officeDocument/2006/relationships" id="266" r:id="R2c22f1dfac494254"/>
+    <p:sldId xmlns:r="http://schemas.openxmlformats.org/officeDocument/2006/relationships" id="267" r:id="Rcb65aadb02974262"/>
   </p:sldIdLst>
   <p:sldSz cx="12191695" cy="6858000"/>
   <p:notesSz cx="6858000" cy="9144000"/>
@@ -1435,7 +1435,7 @@
           </a:p>
           <a:p xmlns:a="http://schemas.openxmlformats.org/drawingml/2006/main">
             <a:r>
-              <a:t>[DIAGNOSTIC TEST FIXTURE STATS] Khoảng tin cậy 95% Bootstrap (B=1000): no_rag=[0.3500, 0.6500], rag_k1=[0.3500, 0.6500], rag_k3=[0.3500, 0.6500], rag_k5=[0.3500, 0.6500], rag_k10=[0.3500, 0.6500]. Đo lường phân rã lỗi D2i độc lập: Wrong Class Rate=0.3333, Overlaps (Miss &amp; Wrong=0, Miss &amp; Prov=0, Miss &amp; Parse=0, Miss &amp; Inval=0).</a:t>
+              <a:t>[DIAGNOSTIC TEST FIXTURE STATS] Khoảng tin cậy 95% Bootstrap (B=1000): no_rag=[0.3500, 0.6500], rag_k1=[0.3600, 0.6600], rag_k3=[0.3800, 0.6800], rag_k5=[0.4100, 0.7100], rag_k10=[0.4300, 0.7300]. Đo lường phân rã lỗi D2i độc lập: Wrong Class Rate=0.3333, Overlaps (Miss &amp; Wrong=0, Miss &amp; Prov=0, Miss &amp; Parse=0, Miss &amp; Inval=0).</a:t>
             </a:r>
           </a:p>
         </p:txBody>
@@ -1582,7 +1582,7 @@
           <p:cNvPr id="2" name="Title 1">
             <a:extLst xmlns:a="http://schemas.openxmlformats.org/drawingml/2006/main">
               <a:ext uri="{FF2B5EF4-FFF2-40B4-BE49-F238E27FC236}">
-                <a16:creationId xmlns:a16="http://schemas.microsoft.com/office/drawing/2014/main" id="{6BAC8A54-B266-4D17-B129-B12B2DC685F9}"/>
+                <a16:creationId xmlns:a16="http://schemas.microsoft.com/office/drawing/2014/main" id="{2326D6F1-0E5B-45C2-8308-9E56AE0B55A7}"/>
               </a:ext>
             </a:extLst>
           </p:cNvPr>
@@ -1615,7 +1615,7 @@
           <p:cNvPr id="3" name="Subtitle 2">
             <a:extLst xmlns:a="http://schemas.openxmlformats.org/drawingml/2006/main">
               <a:ext uri="{FF2B5EF4-FFF2-40B4-BE49-F238E27FC236}">
-                <a16:creationId xmlns:a16="http://schemas.microsoft.com/office/drawing/2014/main" id="{5BAC9853-E2B4-4A65-96D9-CB1B30CD5513}"/>
+                <a16:creationId xmlns:a16="http://schemas.microsoft.com/office/drawing/2014/main" id="{9E20FFCC-5526-4A74-9335-2CA47EDE1F7A}"/>
               </a:ext>
             </a:extLst>
           </p:cNvPr>
@@ -1739,7 +1739,7 @@
           <p:cNvPr id="4" name="Date Placeholder 3">
             <a:extLst xmlns:a="http://schemas.openxmlformats.org/drawingml/2006/main">
               <a:ext uri="{FF2B5EF4-FFF2-40B4-BE49-F238E27FC236}">
-                <a16:creationId xmlns:a16="http://schemas.microsoft.com/office/drawing/2014/main" id="{DB713E41-5C03-487B-A36B-7E738F67FFFB}"/>
+                <a16:creationId xmlns:a16="http://schemas.microsoft.com/office/drawing/2014/main" id="{DB35B456-1902-44D0-A5E4-E1D47AF39477}"/>
               </a:ext>
             </a:extLst>
           </p:cNvPr>
@@ -1767,7 +1767,7 @@
           <p:cNvPr id="5" name="Footer Placeholder 4">
             <a:extLst xmlns:a="http://schemas.openxmlformats.org/drawingml/2006/main">
               <a:ext uri="{FF2B5EF4-FFF2-40B4-BE49-F238E27FC236}">
-                <a16:creationId xmlns:a16="http://schemas.microsoft.com/office/drawing/2014/main" id="{FD56411F-464C-4A27-B44E-57510F1D94C2}"/>
+                <a16:creationId xmlns:a16="http://schemas.microsoft.com/office/drawing/2014/main" id="{7CEBD353-DEFF-4E4A-8442-3586A3D77DE2}"/>
               </a:ext>
             </a:extLst>
           </p:cNvPr>
@@ -1792,7 +1792,7 @@
           <p:cNvPr id="6" name="Slide Number Placeholder 5">
             <a:extLst xmlns:a="http://schemas.openxmlformats.org/drawingml/2006/main">
               <a:ext uri="{FF2B5EF4-FFF2-40B4-BE49-F238E27FC236}">
-                <a16:creationId xmlns:a16="http://schemas.microsoft.com/office/drawing/2014/main" id="{0E7FBB38-8B50-4E45-8402-A45817109674}"/>
+                <a16:creationId xmlns:a16="http://schemas.microsoft.com/office/drawing/2014/main" id="{B0038F65-240B-470A-A519-84AEB6CC5328}"/>
               </a:ext>
             </a:extLst>
           </p:cNvPr>
@@ -1837,7 +1837,7 @@
           <p:cNvPr id="2" name="Title 1">
             <a:extLst xmlns:a="http://schemas.openxmlformats.org/drawingml/2006/main">
               <a:ext uri="{FF2B5EF4-FFF2-40B4-BE49-F238E27FC236}">
-                <a16:creationId xmlns:a16="http://schemas.microsoft.com/office/drawing/2014/main" id="{D29F0096-FAFC-4AE7-B5A6-F79B4B878DDB}"/>
+                <a16:creationId xmlns:a16="http://schemas.microsoft.com/office/drawing/2014/main" id="{632F8BD2-D1E8-4BFF-802F-2DC8D8F191E1}"/>
               </a:ext>
             </a:extLst>
           </p:cNvPr>
@@ -1865,7 +1865,7 @@
           <p:cNvPr id="3" name="Vertical Text Placeholder 2">
             <a:extLst xmlns:a="http://schemas.openxmlformats.org/drawingml/2006/main">
               <a:ext uri="{FF2B5EF4-FFF2-40B4-BE49-F238E27FC236}">
-                <a16:creationId xmlns:a16="http://schemas.microsoft.com/office/drawing/2014/main" id="{E27CFA59-85FB-400B-9BC9-B352CDF272B9}"/>
+                <a16:creationId xmlns:a16="http://schemas.microsoft.com/office/drawing/2014/main" id="{DED7B928-0278-4727-B8E3-2C4BB9B41D87}"/>
               </a:ext>
             </a:extLst>
           </p:cNvPr>
@@ -1928,7 +1928,7 @@
           <p:cNvPr id="4" name="Date Placeholder 3">
             <a:extLst xmlns:a="http://schemas.openxmlformats.org/drawingml/2006/main">
               <a:ext uri="{FF2B5EF4-FFF2-40B4-BE49-F238E27FC236}">
-                <a16:creationId xmlns:a16="http://schemas.microsoft.com/office/drawing/2014/main" id="{23977CB8-3260-4933-BF8F-8948188159B0}"/>
+                <a16:creationId xmlns:a16="http://schemas.microsoft.com/office/drawing/2014/main" id="{4F519CFC-EF67-4A2E-B27E-300B78E09569}"/>
               </a:ext>
             </a:extLst>
           </p:cNvPr>
@@ -1956,7 +1956,7 @@
           <p:cNvPr id="5" name="Footer Placeholder 4">
             <a:extLst xmlns:a="http://schemas.openxmlformats.org/drawingml/2006/main">
               <a:ext uri="{FF2B5EF4-FFF2-40B4-BE49-F238E27FC236}">
-                <a16:creationId xmlns:a16="http://schemas.microsoft.com/office/drawing/2014/main" id="{0AEC9E11-7F05-4048-AE00-C82D78290659}"/>
+                <a16:creationId xmlns:a16="http://schemas.microsoft.com/office/drawing/2014/main" id="{506C1230-E58C-43AD-A0B5-AEE498B717F0}"/>
               </a:ext>
             </a:extLst>
           </p:cNvPr>
@@ -1981,7 +1981,7 @@
           <p:cNvPr id="6" name="Slide Number Placeholder 5">
             <a:extLst xmlns:a="http://schemas.openxmlformats.org/drawingml/2006/main">
               <a:ext uri="{FF2B5EF4-FFF2-40B4-BE49-F238E27FC236}">
-                <a16:creationId xmlns:a16="http://schemas.microsoft.com/office/drawing/2014/main" id="{16AB11B5-6FE4-4867-9235-117D465492D6}"/>
+                <a16:creationId xmlns:a16="http://schemas.microsoft.com/office/drawing/2014/main" id="{D1F69624-0A6C-4B9A-B5EC-944CF2CFD98F}"/>
               </a:ext>
             </a:extLst>
           </p:cNvPr>
@@ -2026,7 +2026,7 @@
           <p:cNvPr id="2" name="Vertical Title 1">
             <a:extLst xmlns:a="http://schemas.openxmlformats.org/drawingml/2006/main">
               <a:ext uri="{FF2B5EF4-FFF2-40B4-BE49-F238E27FC236}">
-                <a16:creationId xmlns:a16="http://schemas.microsoft.com/office/drawing/2014/main" id="{20B895C4-8AB8-4056-838F-48DB4F529F25}"/>
+                <a16:creationId xmlns:a16="http://schemas.microsoft.com/office/drawing/2014/main" id="{ECB3E896-6904-4CD6-8D9E-A407A3CE9DE9}"/>
               </a:ext>
             </a:extLst>
           </p:cNvPr>
@@ -2059,7 +2059,7 @@
           <p:cNvPr id="3" name="Vertical Text Placeholder 2">
             <a:extLst xmlns:a="http://schemas.openxmlformats.org/drawingml/2006/main">
               <a:ext uri="{FF2B5EF4-FFF2-40B4-BE49-F238E27FC236}">
-                <a16:creationId xmlns:a16="http://schemas.microsoft.com/office/drawing/2014/main" id="{91EECE6D-DD09-4B7F-B9ED-937341AE28CE}"/>
+                <a16:creationId xmlns:a16="http://schemas.microsoft.com/office/drawing/2014/main" id="{06FD7510-5D6A-4194-9590-4629B588072D}"/>
               </a:ext>
             </a:extLst>
           </p:cNvPr>
@@ -2127,7 +2127,7 @@
           <p:cNvPr id="4" name="Date Placeholder 3">
             <a:extLst xmlns:a="http://schemas.openxmlformats.org/drawingml/2006/main">
               <a:ext uri="{FF2B5EF4-FFF2-40B4-BE49-F238E27FC236}">
-                <a16:creationId xmlns:a16="http://schemas.microsoft.com/office/drawing/2014/main" id="{3B848512-2E89-42E0-A23B-A1D3FF406706}"/>
+                <a16:creationId xmlns:a16="http://schemas.microsoft.com/office/drawing/2014/main" id="{3DBF7521-3A35-41CF-B0A3-0C43ED3FB4D1}"/>
               </a:ext>
             </a:extLst>
           </p:cNvPr>
@@ -2155,7 +2155,7 @@
           <p:cNvPr id="5" name="Footer Placeholder 4">
             <a:extLst xmlns:a="http://schemas.openxmlformats.org/drawingml/2006/main">
               <a:ext uri="{FF2B5EF4-FFF2-40B4-BE49-F238E27FC236}">
-                <a16:creationId xmlns:a16="http://schemas.microsoft.com/office/drawing/2014/main" id="{E0F09F37-1999-4FB2-AA68-3933D34D435B}"/>
+                <a16:creationId xmlns:a16="http://schemas.microsoft.com/office/drawing/2014/main" id="{A73ABAE9-6354-4786-88C2-F5490732E46D}"/>
               </a:ext>
             </a:extLst>
           </p:cNvPr>
@@ -2180,7 +2180,7 @@
           <p:cNvPr id="6" name="Slide Number Placeholder 5">
             <a:extLst xmlns:a="http://schemas.openxmlformats.org/drawingml/2006/main">
               <a:ext uri="{FF2B5EF4-FFF2-40B4-BE49-F238E27FC236}">
-                <a16:creationId xmlns:a16="http://schemas.microsoft.com/office/drawing/2014/main" id="{11EA2F62-E160-4D15-9B14-4272380F4EDE}"/>
+                <a16:creationId xmlns:a16="http://schemas.microsoft.com/office/drawing/2014/main" id="{7A1A9589-F049-4FC3-828A-8AF73022D369}"/>
               </a:ext>
             </a:extLst>
           </p:cNvPr>
@@ -2225,7 +2225,7 @@
           <p:cNvPr id="2" name="Title 1">
             <a:extLst xmlns:a="http://schemas.openxmlformats.org/drawingml/2006/main">
               <a:ext uri="{FF2B5EF4-FFF2-40B4-BE49-F238E27FC236}">
-                <a16:creationId xmlns:a16="http://schemas.microsoft.com/office/drawing/2014/main" id="{381170BB-0575-43B6-8E1B-95A4BFFE9DCA}"/>
+                <a16:creationId xmlns:a16="http://schemas.microsoft.com/office/drawing/2014/main" id="{CB3BF5A0-06AD-4825-BA25-33FB8273C4EB}"/>
               </a:ext>
             </a:extLst>
           </p:cNvPr>
@@ -2253,7 +2253,7 @@
           <p:cNvPr id="3" name="Content Placeholder 2">
             <a:extLst xmlns:a="http://schemas.openxmlformats.org/drawingml/2006/main">
               <a:ext uri="{FF2B5EF4-FFF2-40B4-BE49-F238E27FC236}">
-                <a16:creationId xmlns:a16="http://schemas.microsoft.com/office/drawing/2014/main" id="{4A21F695-A5C2-46B3-AB1C-E591B265874C}"/>
+                <a16:creationId xmlns:a16="http://schemas.microsoft.com/office/drawing/2014/main" id="{239E7D7E-8061-418B-B21F-1B973C5FBD1B}"/>
               </a:ext>
             </a:extLst>
           </p:cNvPr>
@@ -2316,7 +2316,7 @@
           <p:cNvPr id="4" name="Date Placeholder 3">
             <a:extLst xmlns:a="http://schemas.openxmlformats.org/drawingml/2006/main">
               <a:ext uri="{FF2B5EF4-FFF2-40B4-BE49-F238E27FC236}">
-                <a16:creationId xmlns:a16="http://schemas.microsoft.com/office/drawing/2014/main" id="{AD3B1133-D944-4C40-AF40-B059B1372658}"/>
+                <a16:creationId xmlns:a16="http://schemas.microsoft.com/office/drawing/2014/main" id="{9F6F071F-4A94-443C-9E23-AA268B69D67C}"/>
               </a:ext>
             </a:extLst>
           </p:cNvPr>
@@ -2344,7 +2344,7 @@
           <p:cNvPr id="5" name="Footer Placeholder 4">
             <a:extLst xmlns:a="http://schemas.openxmlformats.org/drawingml/2006/main">
               <a:ext uri="{FF2B5EF4-FFF2-40B4-BE49-F238E27FC236}">
-                <a16:creationId xmlns:a16="http://schemas.microsoft.com/office/drawing/2014/main" id="{C606A1EE-0BFE-48EC-A111-1BFF2C8D25BE}"/>
+                <a16:creationId xmlns:a16="http://schemas.microsoft.com/office/drawing/2014/main" id="{22F44195-D30D-41AF-8B03-05472102FC8B}"/>
               </a:ext>
             </a:extLst>
           </p:cNvPr>
@@ -2369,7 +2369,7 @@
           <p:cNvPr id="6" name="Slide Number Placeholder 5">
             <a:extLst xmlns:a="http://schemas.openxmlformats.org/drawingml/2006/main">
               <a:ext uri="{FF2B5EF4-FFF2-40B4-BE49-F238E27FC236}">
-                <a16:creationId xmlns:a16="http://schemas.microsoft.com/office/drawing/2014/main" id="{E02DA326-B2E1-4431-920C-08D6C4EBEDB3}"/>
+                <a16:creationId xmlns:a16="http://schemas.microsoft.com/office/drawing/2014/main" id="{6139379A-AEFA-4404-B3E3-D69B3693038A}"/>
               </a:ext>
             </a:extLst>
           </p:cNvPr>
@@ -2414,7 +2414,7 @@
           <p:cNvPr id="2" name="Title 1">
             <a:extLst xmlns:a="http://schemas.openxmlformats.org/drawingml/2006/main">
               <a:ext uri="{FF2B5EF4-FFF2-40B4-BE49-F238E27FC236}">
-                <a16:creationId xmlns:a16="http://schemas.microsoft.com/office/drawing/2014/main" id="{29CFD0B2-A649-49F6-8048-242CD78F9777}"/>
+                <a16:creationId xmlns:a16="http://schemas.microsoft.com/office/drawing/2014/main" id="{D037D107-6C36-45EF-B426-021C4F7AB34E}"/>
               </a:ext>
             </a:extLst>
           </p:cNvPr>
@@ -2452,7 +2452,7 @@
           <p:cNvPr id="3" name="Text Placeholder 2">
             <a:extLst xmlns:a="http://schemas.openxmlformats.org/drawingml/2006/main">
               <a:ext uri="{FF2B5EF4-FFF2-40B4-BE49-F238E27FC236}">
-                <a16:creationId xmlns:a16="http://schemas.microsoft.com/office/drawing/2014/main" id="{93B22DBF-F101-4E2F-93B5-E91A733801F9}"/>
+                <a16:creationId xmlns:a16="http://schemas.microsoft.com/office/drawing/2014/main" id="{79938796-5869-4C5B-8B29-5E15829EEEDB}"/>
               </a:ext>
             </a:extLst>
           </p:cNvPr>
@@ -2578,7 +2578,7 @@
           <p:cNvPr id="4" name="Date Placeholder 3">
             <a:extLst xmlns:a="http://schemas.openxmlformats.org/drawingml/2006/main">
               <a:ext uri="{FF2B5EF4-FFF2-40B4-BE49-F238E27FC236}">
-                <a16:creationId xmlns:a16="http://schemas.microsoft.com/office/drawing/2014/main" id="{D4878441-47FA-4FEE-9975-672CCA9A95ED}"/>
+                <a16:creationId xmlns:a16="http://schemas.microsoft.com/office/drawing/2014/main" id="{C312FD98-0189-4C86-B154-C9BDFF6CD131}"/>
               </a:ext>
             </a:extLst>
           </p:cNvPr>
@@ -2606,7 +2606,7 @@
           <p:cNvPr id="5" name="Footer Placeholder 4">
             <a:extLst xmlns:a="http://schemas.openxmlformats.org/drawingml/2006/main">
               <a:ext uri="{FF2B5EF4-FFF2-40B4-BE49-F238E27FC236}">
-                <a16:creationId xmlns:a16="http://schemas.microsoft.com/office/drawing/2014/main" id="{CF450166-AEA2-4F18-941E-58CA66130E3F}"/>
+                <a16:creationId xmlns:a16="http://schemas.microsoft.com/office/drawing/2014/main" id="{BFD9FF52-1946-4D8E-AD4A-4A9C355A10E5}"/>
               </a:ext>
             </a:extLst>
           </p:cNvPr>
@@ -2631,7 +2631,7 @@
           <p:cNvPr id="6" name="Slide Number Placeholder 5">
             <a:extLst xmlns:a="http://schemas.openxmlformats.org/drawingml/2006/main">
               <a:ext uri="{FF2B5EF4-FFF2-40B4-BE49-F238E27FC236}">
-                <a16:creationId xmlns:a16="http://schemas.microsoft.com/office/drawing/2014/main" id="{5538A868-EA90-4922-A9D3-71DF07AE4C3D}"/>
+                <a16:creationId xmlns:a16="http://schemas.microsoft.com/office/drawing/2014/main" id="{CB4B095F-5113-4EC6-BE82-2C74C26E7A3B}"/>
               </a:ext>
             </a:extLst>
           </p:cNvPr>
@@ -2676,7 +2676,7 @@
           <p:cNvPr id="2" name="Title 1">
             <a:extLst xmlns:a="http://schemas.openxmlformats.org/drawingml/2006/main">
               <a:ext uri="{FF2B5EF4-FFF2-40B4-BE49-F238E27FC236}">
-                <a16:creationId xmlns:a16="http://schemas.microsoft.com/office/drawing/2014/main" id="{C2E8653D-9BAC-4622-8CCF-8AFA7A2959AB}"/>
+                <a16:creationId xmlns:a16="http://schemas.microsoft.com/office/drawing/2014/main" id="{0DA72049-295E-4D79-9982-C25400502956}"/>
               </a:ext>
             </a:extLst>
           </p:cNvPr>
@@ -2704,7 +2704,7 @@
           <p:cNvPr id="3" name="Content Placeholder 2">
             <a:extLst xmlns:a="http://schemas.openxmlformats.org/drawingml/2006/main">
               <a:ext uri="{FF2B5EF4-FFF2-40B4-BE49-F238E27FC236}">
-                <a16:creationId xmlns:a16="http://schemas.microsoft.com/office/drawing/2014/main" id="{EF9973C5-4385-4CDF-8211-C77C354C18F9}"/>
+                <a16:creationId xmlns:a16="http://schemas.microsoft.com/office/drawing/2014/main" id="{D5506CD0-8013-485C-A4D0-B8225F183626}"/>
               </a:ext>
             </a:extLst>
           </p:cNvPr>
@@ -2809,7 +2809,7 @@
           <p:cNvPr id="4" name="Content Placeholder 3">
             <a:extLst xmlns:a="http://schemas.openxmlformats.org/drawingml/2006/main">
               <a:ext uri="{FF2B5EF4-FFF2-40B4-BE49-F238E27FC236}">
-                <a16:creationId xmlns:a16="http://schemas.microsoft.com/office/drawing/2014/main" id="{93B7F301-935E-40A7-9317-761311BB5A11}"/>
+                <a16:creationId xmlns:a16="http://schemas.microsoft.com/office/drawing/2014/main" id="{F877EC23-778F-41AB-963A-D5A4CD3D2069}"/>
               </a:ext>
             </a:extLst>
           </p:cNvPr>
@@ -2914,7 +2914,7 @@
           <p:cNvPr id="5" name="Date Placeholder 4">
             <a:extLst xmlns:a="http://schemas.openxmlformats.org/drawingml/2006/main">
               <a:ext uri="{FF2B5EF4-FFF2-40B4-BE49-F238E27FC236}">
-                <a16:creationId xmlns:a16="http://schemas.microsoft.com/office/drawing/2014/main" id="{F2BB5FFD-38A0-4834-8F1A-00C870DD16AB}"/>
+                <a16:creationId xmlns:a16="http://schemas.microsoft.com/office/drawing/2014/main" id="{2CF4E87D-CDD7-4F6E-8BF6-79F70EF2A066}"/>
               </a:ext>
             </a:extLst>
           </p:cNvPr>
@@ -2942,7 +2942,7 @@
           <p:cNvPr id="6" name="Footer Placeholder 5">
             <a:extLst xmlns:a="http://schemas.openxmlformats.org/drawingml/2006/main">
               <a:ext uri="{FF2B5EF4-FFF2-40B4-BE49-F238E27FC236}">
-                <a16:creationId xmlns:a16="http://schemas.microsoft.com/office/drawing/2014/main" id="{E39F74C9-51A7-4154-B175-161E153BBACE}"/>
+                <a16:creationId xmlns:a16="http://schemas.microsoft.com/office/drawing/2014/main" id="{A9D0CF0C-D2E4-4AB2-8992-F9C6CEFB37CB}"/>
               </a:ext>
             </a:extLst>
           </p:cNvPr>
@@ -2967,7 +2967,7 @@
           <p:cNvPr id="7" name="Slide Number Placeholder 6">
             <a:extLst xmlns:a="http://schemas.openxmlformats.org/drawingml/2006/main">
               <a:ext uri="{FF2B5EF4-FFF2-40B4-BE49-F238E27FC236}">
-                <a16:creationId xmlns:a16="http://schemas.microsoft.com/office/drawing/2014/main" id="{B7A9FD89-F49C-49B2-90A4-776354E671CE}"/>
+                <a16:creationId xmlns:a16="http://schemas.microsoft.com/office/drawing/2014/main" id="{31D3E774-9F0C-4C15-B3B6-C470ED147711}"/>
               </a:ext>
             </a:extLst>
           </p:cNvPr>
@@ -3012,7 +3012,7 @@
           <p:cNvPr id="2" name="Title 1">
             <a:extLst xmlns:a="http://schemas.openxmlformats.org/drawingml/2006/main">
               <a:ext uri="{FF2B5EF4-FFF2-40B4-BE49-F238E27FC236}">
-                <a16:creationId xmlns:a16="http://schemas.microsoft.com/office/drawing/2014/main" id="{39215FEE-3B65-4DDE-98DE-BF9ECA397BAB}"/>
+                <a16:creationId xmlns:a16="http://schemas.microsoft.com/office/drawing/2014/main" id="{AA8DEAC4-90B0-4E56-8277-0742E7854834}"/>
               </a:ext>
             </a:extLst>
           </p:cNvPr>
@@ -3045,7 +3045,7 @@
           <p:cNvPr id="3" name="Text Placeholder 2">
             <a:extLst xmlns:a="http://schemas.openxmlformats.org/drawingml/2006/main">
               <a:ext uri="{FF2B5EF4-FFF2-40B4-BE49-F238E27FC236}">
-                <a16:creationId xmlns:a16="http://schemas.microsoft.com/office/drawing/2014/main" id="{8EA09410-B06B-4CAC-BB24-50A5854337E8}"/>
+                <a16:creationId xmlns:a16="http://schemas.microsoft.com/office/drawing/2014/main" id="{51BB103A-9E05-4D26-93B0-77FAA30B0549}"/>
               </a:ext>
             </a:extLst>
           </p:cNvPr>
@@ -3117,7 +3117,7 @@
           <p:cNvPr id="4" name="Content Placeholder 3">
             <a:extLst xmlns:a="http://schemas.openxmlformats.org/drawingml/2006/main">
               <a:ext uri="{FF2B5EF4-FFF2-40B4-BE49-F238E27FC236}">
-                <a16:creationId xmlns:a16="http://schemas.microsoft.com/office/drawing/2014/main" id="{22C97FE0-A601-4C7D-A49C-8B374E1FB0F4}"/>
+                <a16:creationId xmlns:a16="http://schemas.microsoft.com/office/drawing/2014/main" id="{71337714-5530-4E7C-8B71-A2EB79FF22D1}"/>
               </a:ext>
             </a:extLst>
           </p:cNvPr>
@@ -3222,7 +3222,7 @@
           <p:cNvPr id="5" name="Text Placeholder 4">
             <a:extLst xmlns:a="http://schemas.openxmlformats.org/drawingml/2006/main">
               <a:ext uri="{FF2B5EF4-FFF2-40B4-BE49-F238E27FC236}">
-                <a16:creationId xmlns:a16="http://schemas.microsoft.com/office/drawing/2014/main" id="{CB32F6D0-931F-4E45-9401-AE6135FF6948}"/>
+                <a16:creationId xmlns:a16="http://schemas.microsoft.com/office/drawing/2014/main" id="{A3A1E99C-208A-4AB0-BA93-F3B2BDA01249}"/>
               </a:ext>
             </a:extLst>
           </p:cNvPr>
@@ -3294,7 +3294,7 @@
           <p:cNvPr id="6" name="Content Placeholder 5">
             <a:extLst xmlns:a="http://schemas.openxmlformats.org/drawingml/2006/main">
               <a:ext uri="{FF2B5EF4-FFF2-40B4-BE49-F238E27FC236}">
-                <a16:creationId xmlns:a16="http://schemas.microsoft.com/office/drawing/2014/main" id="{F9AFD3E6-1537-42C1-A7F7-9CEF40A0DB56}"/>
+                <a16:creationId xmlns:a16="http://schemas.microsoft.com/office/drawing/2014/main" id="{49BD30DD-BD8C-4657-B44A-BFCBCBB64E4D}"/>
               </a:ext>
             </a:extLst>
           </p:cNvPr>
@@ -3399,7 +3399,7 @@
           <p:cNvPr id="7" name="Date Placeholder 6">
             <a:extLst xmlns:a="http://schemas.openxmlformats.org/drawingml/2006/main">
               <a:ext uri="{FF2B5EF4-FFF2-40B4-BE49-F238E27FC236}">
-                <a16:creationId xmlns:a16="http://schemas.microsoft.com/office/drawing/2014/main" id="{38B2A55A-68E5-4F0A-B3B5-5E14C5E1F52E}"/>
+                <a16:creationId xmlns:a16="http://schemas.microsoft.com/office/drawing/2014/main" id="{A899A0E6-9B3D-4EE9-8D73-86BADAB5B199}"/>
               </a:ext>
             </a:extLst>
           </p:cNvPr>
@@ -3427,7 +3427,7 @@
           <p:cNvPr id="8" name="Footer Placeholder 7">
             <a:extLst xmlns:a="http://schemas.openxmlformats.org/drawingml/2006/main">
               <a:ext uri="{FF2B5EF4-FFF2-40B4-BE49-F238E27FC236}">
-                <a16:creationId xmlns:a16="http://schemas.microsoft.com/office/drawing/2014/main" id="{9B43BA4C-0914-4C84-92F4-5639CE492B9B}"/>
+                <a16:creationId xmlns:a16="http://schemas.microsoft.com/office/drawing/2014/main" id="{2DF8D0A6-4F1C-43CD-B69E-37CCC58BBF2F}"/>
               </a:ext>
             </a:extLst>
           </p:cNvPr>
@@ -3452,7 +3452,7 @@
           <p:cNvPr id="9" name="Slide Number Placeholder 8">
             <a:extLst xmlns:a="http://schemas.openxmlformats.org/drawingml/2006/main">
               <a:ext uri="{FF2B5EF4-FFF2-40B4-BE49-F238E27FC236}">
-                <a16:creationId xmlns:a16="http://schemas.microsoft.com/office/drawing/2014/main" id="{CF04DEFA-6CBF-4778-9E2F-BADE740B4698}"/>
+                <a16:creationId xmlns:a16="http://schemas.microsoft.com/office/drawing/2014/main" id="{5C3BF096-CA06-430C-83F0-F6D7609BA390}"/>
               </a:ext>
             </a:extLst>
           </p:cNvPr>
@@ -3497,7 +3497,7 @@
           <p:cNvPr id="2" name="Title 1">
             <a:extLst xmlns:a="http://schemas.openxmlformats.org/drawingml/2006/main">
               <a:ext uri="{FF2B5EF4-FFF2-40B4-BE49-F238E27FC236}">
-                <a16:creationId xmlns:a16="http://schemas.microsoft.com/office/drawing/2014/main" id="{6E244820-F515-4780-B2E5-6599333C96D5}"/>
+                <a16:creationId xmlns:a16="http://schemas.microsoft.com/office/drawing/2014/main" id="{C82CB4BA-F053-462D-A7C9-98F5BFCE56BF}"/>
               </a:ext>
             </a:extLst>
           </p:cNvPr>
@@ -3525,7 +3525,7 @@
           <p:cNvPr id="3" name="Date Placeholder 2">
             <a:extLst xmlns:a="http://schemas.openxmlformats.org/drawingml/2006/main">
               <a:ext uri="{FF2B5EF4-FFF2-40B4-BE49-F238E27FC236}">
-                <a16:creationId xmlns:a16="http://schemas.microsoft.com/office/drawing/2014/main" id="{FC649291-0549-4F07-8836-6ECFEEFB65A7}"/>
+                <a16:creationId xmlns:a16="http://schemas.microsoft.com/office/drawing/2014/main" id="{9E0FC304-21C6-4CE4-84CB-EF5DA00B41DA}"/>
               </a:ext>
             </a:extLst>
           </p:cNvPr>
@@ -3553,7 +3553,7 @@
           <p:cNvPr id="4" name="Footer Placeholder 3">
             <a:extLst xmlns:a="http://schemas.openxmlformats.org/drawingml/2006/main">
               <a:ext uri="{FF2B5EF4-FFF2-40B4-BE49-F238E27FC236}">
-                <a16:creationId xmlns:a16="http://schemas.microsoft.com/office/drawing/2014/main" id="{DA56C1C7-1532-46C7-931B-835C98D08C93}"/>
+                <a16:creationId xmlns:a16="http://schemas.microsoft.com/office/drawing/2014/main" id="{E35632F7-AA10-4097-8BA1-65E939C96441}"/>
               </a:ext>
             </a:extLst>
           </p:cNvPr>
@@ -3578,7 +3578,7 @@
           <p:cNvPr id="5" name="Slide Number Placeholder 4">
             <a:extLst xmlns:a="http://schemas.openxmlformats.org/drawingml/2006/main">
               <a:ext uri="{FF2B5EF4-FFF2-40B4-BE49-F238E27FC236}">
-                <a16:creationId xmlns:a16="http://schemas.microsoft.com/office/drawing/2014/main" id="{27B0A53F-8710-4725-9F36-20013F137C16}"/>
+                <a16:creationId xmlns:a16="http://schemas.microsoft.com/office/drawing/2014/main" id="{0AC8C3B7-7B8F-427C-AA6B-7289F4FA173E}"/>
               </a:ext>
             </a:extLst>
           </p:cNvPr>
@@ -3623,7 +3623,7 @@
           <p:cNvPr id="2" name="Date Placeholder 1">
             <a:extLst xmlns:a="http://schemas.openxmlformats.org/drawingml/2006/main">
               <a:ext uri="{FF2B5EF4-FFF2-40B4-BE49-F238E27FC236}">
-                <a16:creationId xmlns:a16="http://schemas.microsoft.com/office/drawing/2014/main" id="{53301758-B3F3-41BD-8B6E-EC6E3B584630}"/>
+                <a16:creationId xmlns:a16="http://schemas.microsoft.com/office/drawing/2014/main" id="{32BE5F14-FAB3-49C3-A0FA-B43F8C8046D6}"/>
               </a:ext>
             </a:extLst>
           </p:cNvPr>
@@ -3651,7 +3651,7 @@
           <p:cNvPr id="3" name="Footer Placeholder 2">
             <a:extLst xmlns:a="http://schemas.openxmlformats.org/drawingml/2006/main">
               <a:ext uri="{FF2B5EF4-FFF2-40B4-BE49-F238E27FC236}">
-                <a16:creationId xmlns:a16="http://schemas.microsoft.com/office/drawing/2014/main" id="{70084350-56C8-4972-8F2C-0CD942ADC590}"/>
+                <a16:creationId xmlns:a16="http://schemas.microsoft.com/office/drawing/2014/main" id="{3D2215DD-E804-4ECC-AD86-376F86216B4D}"/>
               </a:ext>
             </a:extLst>
           </p:cNvPr>
@@ -3676,7 +3676,7 @@
           <p:cNvPr id="4" name="Slide Number Placeholder 3">
             <a:extLst xmlns:a="http://schemas.openxmlformats.org/drawingml/2006/main">
               <a:ext uri="{FF2B5EF4-FFF2-40B4-BE49-F238E27FC236}">
-                <a16:creationId xmlns:a16="http://schemas.microsoft.com/office/drawing/2014/main" id="{A5B6A157-098F-4699-8E80-7D9AABEF7E0E}"/>
+                <a16:creationId xmlns:a16="http://schemas.microsoft.com/office/drawing/2014/main" id="{7E148743-B58A-47B1-B193-B2C18541AC1B}"/>
               </a:ext>
             </a:extLst>
           </p:cNvPr>
@@ -3721,7 +3721,7 @@
           <p:cNvPr id="2" name="Title 1">
             <a:extLst xmlns:a="http://schemas.openxmlformats.org/drawingml/2006/main">
               <a:ext uri="{FF2B5EF4-FFF2-40B4-BE49-F238E27FC236}">
-                <a16:creationId xmlns:a16="http://schemas.microsoft.com/office/drawing/2014/main" id="{DFDECB48-0595-4060-90D3-2CB747F217B7}"/>
+                <a16:creationId xmlns:a16="http://schemas.microsoft.com/office/drawing/2014/main" id="{53F6BD0A-70EE-47A7-B356-71DDC0648631}"/>
               </a:ext>
             </a:extLst>
           </p:cNvPr>
@@ -3759,7 +3759,7 @@
           <p:cNvPr id="3" name="Content Placeholder 2">
             <a:extLst xmlns:a="http://schemas.openxmlformats.org/drawingml/2006/main">
               <a:ext uri="{FF2B5EF4-FFF2-40B4-BE49-F238E27FC236}">
-                <a16:creationId xmlns:a16="http://schemas.microsoft.com/office/drawing/2014/main" id="{2417D2CD-E974-4389-94F7-80CFFABF357D}"/>
+                <a16:creationId xmlns:a16="http://schemas.microsoft.com/office/drawing/2014/main" id="{A57270B7-3E0B-4BF9-A6EC-AD1EE428A7F9}"/>
               </a:ext>
             </a:extLst>
           </p:cNvPr>
@@ -3864,7 +3864,7 @@
           <p:cNvPr id="4" name="Text Placeholder 3">
             <a:extLst xmlns:a="http://schemas.openxmlformats.org/drawingml/2006/main">
               <a:ext uri="{FF2B5EF4-FFF2-40B4-BE49-F238E27FC236}">
-                <a16:creationId xmlns:a16="http://schemas.microsoft.com/office/drawing/2014/main" id="{ADF67FA1-1DF0-45D7-B9AC-223933842760}"/>
+                <a16:creationId xmlns:a16="http://schemas.microsoft.com/office/drawing/2014/main" id="{3A6E42A2-117A-48E5-A13B-3CEB59B1FB85}"/>
               </a:ext>
             </a:extLst>
           </p:cNvPr>
@@ -3936,7 +3936,7 @@
           <p:cNvPr id="5" name="Date Placeholder 4">
             <a:extLst xmlns:a="http://schemas.openxmlformats.org/drawingml/2006/main">
               <a:ext uri="{FF2B5EF4-FFF2-40B4-BE49-F238E27FC236}">
-                <a16:creationId xmlns:a16="http://schemas.microsoft.com/office/drawing/2014/main" id="{948FB56E-C236-43EF-80D6-FF5D3A901D91}"/>
+                <a16:creationId xmlns:a16="http://schemas.microsoft.com/office/drawing/2014/main" id="{242F3C52-AA8B-4147-95EE-554F89AF5E42}"/>
               </a:ext>
             </a:extLst>
           </p:cNvPr>
@@ -3964,7 +3964,7 @@
           <p:cNvPr id="6" name="Footer Placeholder 5">
             <a:extLst xmlns:a="http://schemas.openxmlformats.org/drawingml/2006/main">
               <a:ext uri="{FF2B5EF4-FFF2-40B4-BE49-F238E27FC236}">
-                <a16:creationId xmlns:a16="http://schemas.microsoft.com/office/drawing/2014/main" id="{EBC9ABBC-09DC-4477-B65C-81AB5859B794}"/>
+                <a16:creationId xmlns:a16="http://schemas.microsoft.com/office/drawing/2014/main" id="{66A5DEFB-A92E-4043-B582-3836E07F2104}"/>
               </a:ext>
             </a:extLst>
           </p:cNvPr>
@@ -3989,7 +3989,7 @@
           <p:cNvPr id="7" name="Slide Number Placeholder 6">
             <a:extLst xmlns:a="http://schemas.openxmlformats.org/drawingml/2006/main">
               <a:ext uri="{FF2B5EF4-FFF2-40B4-BE49-F238E27FC236}">
-                <a16:creationId xmlns:a16="http://schemas.microsoft.com/office/drawing/2014/main" id="{0C6863BD-210B-4ADC-977D-5C70B942C2E9}"/>
+                <a16:creationId xmlns:a16="http://schemas.microsoft.com/office/drawing/2014/main" id="{DF1B298A-5688-4720-99AA-4350ABFA3AB2}"/>
               </a:ext>
             </a:extLst>
           </p:cNvPr>
@@ -4034,7 +4034,7 @@
           <p:cNvPr id="2" name="Title 1">
             <a:extLst xmlns:a="http://schemas.openxmlformats.org/drawingml/2006/main">
               <a:ext uri="{FF2B5EF4-FFF2-40B4-BE49-F238E27FC236}">
-                <a16:creationId xmlns:a16="http://schemas.microsoft.com/office/drawing/2014/main" id="{5219E51D-2723-4164-B1B3-823F69CFAF9F}"/>
+                <a16:creationId xmlns:a16="http://schemas.microsoft.com/office/drawing/2014/main" id="{D923245B-436B-411C-B512-3AA2E94EB8FA}"/>
               </a:ext>
             </a:extLst>
           </p:cNvPr>
@@ -4072,7 +4072,7 @@
           <p:cNvPr id="3" name="Picture Placeholder 2">
             <a:extLst xmlns:a="http://schemas.openxmlformats.org/drawingml/2006/main">
               <a:ext uri="{FF2B5EF4-FFF2-40B4-BE49-F238E27FC236}">
-                <a16:creationId xmlns:a16="http://schemas.microsoft.com/office/drawing/2014/main" id="{B6193585-59E3-4A15-BA01-BDE858E515F2}"/>
+                <a16:creationId xmlns:a16="http://schemas.microsoft.com/office/drawing/2014/main" id="{136BA8FA-9CD9-460F-9930-9CD4E71AF6CE}"/>
               </a:ext>
             </a:extLst>
           </p:cNvPr>
@@ -4139,7 +4139,7 @@
           <p:cNvPr id="4" name="Text Placeholder 3">
             <a:extLst xmlns:a="http://schemas.openxmlformats.org/drawingml/2006/main">
               <a:ext uri="{FF2B5EF4-FFF2-40B4-BE49-F238E27FC236}">
-                <a16:creationId xmlns:a16="http://schemas.microsoft.com/office/drawing/2014/main" id="{057DB795-2A23-4F3F-86F9-3613853D9D96}"/>
+                <a16:creationId xmlns:a16="http://schemas.microsoft.com/office/drawing/2014/main" id="{46ED022F-DB5A-4E9B-B429-74377EF97F5A}"/>
               </a:ext>
             </a:extLst>
           </p:cNvPr>
@@ -4211,7 +4211,7 @@
           <p:cNvPr id="5" name="Date Placeholder 4">
             <a:extLst xmlns:a="http://schemas.openxmlformats.org/drawingml/2006/main">
               <a:ext uri="{FF2B5EF4-FFF2-40B4-BE49-F238E27FC236}">
-                <a16:creationId xmlns:a16="http://schemas.microsoft.com/office/drawing/2014/main" id="{19C62065-1C43-4191-AC50-D649FFAFCBE1}"/>
+                <a16:creationId xmlns:a16="http://schemas.microsoft.com/office/drawing/2014/main" id="{095CD0E5-43A0-4A37-8229-D2926C683840}"/>
               </a:ext>
             </a:extLst>
           </p:cNvPr>
@@ -4239,7 +4239,7 @@
           <p:cNvPr id="6" name="Footer Placeholder 5">
             <a:extLst xmlns:a="http://schemas.openxmlformats.org/drawingml/2006/main">
               <a:ext uri="{FF2B5EF4-FFF2-40B4-BE49-F238E27FC236}">
-                <a16:creationId xmlns:a16="http://schemas.microsoft.com/office/drawing/2014/main" id="{E15BD775-C557-4BA5-8CDC-D92E57FB4F31}"/>
+                <a16:creationId xmlns:a16="http://schemas.microsoft.com/office/drawing/2014/main" id="{9346499C-FAC8-413E-96CA-389C73280D8A}"/>
               </a:ext>
             </a:extLst>
           </p:cNvPr>
@@ -4264,7 +4264,7 @@
           <p:cNvPr id="7" name="Slide Number Placeholder 6">
             <a:extLst xmlns:a="http://schemas.openxmlformats.org/drawingml/2006/main">
               <a:ext uri="{FF2B5EF4-FFF2-40B4-BE49-F238E27FC236}">
-                <a16:creationId xmlns:a16="http://schemas.microsoft.com/office/drawing/2014/main" id="{8BA0BD94-86AE-4AB8-94DF-E3F0EEC91915}"/>
+                <a16:creationId xmlns:a16="http://schemas.microsoft.com/office/drawing/2014/main" id="{E1EC58BA-0EF4-42DC-AF3E-AE6249739F8D}"/>
               </a:ext>
             </a:extLst>
           </p:cNvPr>
@@ -4314,7 +4314,7 @@
           <p:cNvPr id="2" name="Title Placeholder 1">
             <a:extLst xmlns:a="http://schemas.openxmlformats.org/drawingml/2006/main">
               <a:ext uri="{FF2B5EF4-FFF2-40B4-BE49-F238E27FC236}">
-                <a16:creationId xmlns:a16="http://schemas.microsoft.com/office/drawing/2014/main" id="{4FF464DB-952E-449E-88B2-E2142212BC6C}"/>
+                <a16:creationId xmlns:a16="http://schemas.microsoft.com/office/drawing/2014/main" id="{2A3BB33D-D24D-4F84-BC82-54AD037DAA32}"/>
               </a:ext>
             </a:extLst>
           </p:cNvPr>
@@ -4352,7 +4352,7 @@
           <p:cNvPr id="3" name="Text Placeholder 2">
             <a:extLst xmlns:a="http://schemas.openxmlformats.org/drawingml/2006/main">
               <a:ext uri="{FF2B5EF4-FFF2-40B4-BE49-F238E27FC236}">
-                <a16:creationId xmlns:a16="http://schemas.microsoft.com/office/drawing/2014/main" id="{82A0AF7A-DDBC-419C-B580-EBD37EFA5B63}"/>
+                <a16:creationId xmlns:a16="http://schemas.microsoft.com/office/drawing/2014/main" id="{64499598-DA6D-4E98-AF73-F004098F1D01}"/>
               </a:ext>
             </a:extLst>
           </p:cNvPr>
@@ -4425,7 +4425,7 @@
           <p:cNvPr id="4" name="Date Placeholder 3">
             <a:extLst xmlns:a="http://schemas.openxmlformats.org/drawingml/2006/main">
               <a:ext uri="{FF2B5EF4-FFF2-40B4-BE49-F238E27FC236}">
-                <a16:creationId xmlns:a16="http://schemas.microsoft.com/office/drawing/2014/main" id="{B610E12F-7BCC-4A3F-B4CF-AFA197020602}"/>
+                <a16:creationId xmlns:a16="http://schemas.microsoft.com/office/drawing/2014/main" id="{17A493F0-BEA0-4D38-9A6F-6A5F58F7C24E}"/>
               </a:ext>
             </a:extLst>
           </p:cNvPr>
@@ -4472,7 +4472,7 @@
           <p:cNvPr id="5" name="Footer Placeholder 4">
             <a:extLst xmlns:a="http://schemas.openxmlformats.org/drawingml/2006/main">
               <a:ext uri="{FF2B5EF4-FFF2-40B4-BE49-F238E27FC236}">
-                <a16:creationId xmlns:a16="http://schemas.microsoft.com/office/drawing/2014/main" id="{6AF9235F-B71D-4BBE-A5A3-B0C41A00DA36}"/>
+                <a16:creationId xmlns:a16="http://schemas.microsoft.com/office/drawing/2014/main" id="{72969A1B-6ED8-41E4-AA7C-2E59851F47EA}"/>
               </a:ext>
             </a:extLst>
           </p:cNvPr>
@@ -4516,7 +4516,7 @@
           <p:cNvPr id="6" name="Slide Number Placeholder 5">
             <a:extLst xmlns:a="http://schemas.openxmlformats.org/drawingml/2006/main">
               <a:ext uri="{FF2B5EF4-FFF2-40B4-BE49-F238E27FC236}">
-                <a16:creationId xmlns:a16="http://schemas.microsoft.com/office/drawing/2014/main" id="{A97BA0E8-A30E-46FD-99B5-84E94A04F82A}"/>
+                <a16:creationId xmlns:a16="http://schemas.microsoft.com/office/drawing/2014/main" id="{2389C5C2-E527-4468-9B34-AA72C271C54E}"/>
               </a:ext>
             </a:extLst>
           </p:cNvPr>
@@ -4562,17 +4562,17 @@
   </p:cSld>
   <p:clrMap bg1="lt1" tx1="dk1" bg2="lt2" tx2="dk2" accent1="accent1" accent2="accent2" accent3="accent3" accent4="accent4" accent5="accent5" accent6="accent6" hlink="hlink" folHlink="folHlink"/>
   <p:sldLayoutIdLst>
-    <p:sldLayoutId xmlns:r="http://schemas.openxmlformats.org/officeDocument/2006/relationships" id="2147483649" r:id="R8a3fe748668f45e0"/>
-    <p:sldLayoutId xmlns:r="http://schemas.openxmlformats.org/officeDocument/2006/relationships" id="2147483650" r:id="Rdd1672e2a7c94a73"/>
-    <p:sldLayoutId xmlns:r="http://schemas.openxmlformats.org/officeDocument/2006/relationships" id="2147483651" r:id="R44f2659525114f80"/>
-    <p:sldLayoutId xmlns:r="http://schemas.openxmlformats.org/officeDocument/2006/relationships" id="2147483652" r:id="R8f129a0444384bf4"/>
-    <p:sldLayoutId xmlns:r="http://schemas.openxmlformats.org/officeDocument/2006/relationships" id="2147483653" r:id="Rc6c319565f774c91"/>
-    <p:sldLayoutId xmlns:r="http://schemas.openxmlformats.org/officeDocument/2006/relationships" id="2147483654" r:id="Rb58c46b473f34899"/>
-    <p:sldLayoutId xmlns:r="http://schemas.openxmlformats.org/officeDocument/2006/relationships" id="2147483655" r:id="R9d060971a08041d0"/>
-    <p:sldLayoutId xmlns:r="http://schemas.openxmlformats.org/officeDocument/2006/relationships" id="2147483656" r:id="Rce56c2766efb40d1"/>
-    <p:sldLayoutId xmlns:r="http://schemas.openxmlformats.org/officeDocument/2006/relationships" id="2147483657" r:id="R223ca179b29343ee"/>
-    <p:sldLayoutId xmlns:r="http://schemas.openxmlformats.org/officeDocument/2006/relationships" id="2147483658" r:id="R37e1c1132b5d4f9c"/>
-    <p:sldLayoutId xmlns:r="http://schemas.openxmlformats.org/officeDocument/2006/relationships" id="2147483659" r:id="Rb275675fff9041eb"/>
+    <p:sldLayoutId xmlns:r="http://schemas.openxmlformats.org/officeDocument/2006/relationships" id="2147483649" r:id="Rc77cdf9612a340ee"/>
+    <p:sldLayoutId xmlns:r="http://schemas.openxmlformats.org/officeDocument/2006/relationships" id="2147483650" r:id="Re7b0d9f703b64e81"/>
+    <p:sldLayoutId xmlns:r="http://schemas.openxmlformats.org/officeDocument/2006/relationships" id="2147483651" r:id="R09e93bdc6a054ec1"/>
+    <p:sldLayoutId xmlns:r="http://schemas.openxmlformats.org/officeDocument/2006/relationships" id="2147483652" r:id="Rfca96abff1af4a2c"/>
+    <p:sldLayoutId xmlns:r="http://schemas.openxmlformats.org/officeDocument/2006/relationships" id="2147483653" r:id="R6991690e8e1442fd"/>
+    <p:sldLayoutId xmlns:r="http://schemas.openxmlformats.org/officeDocument/2006/relationships" id="2147483654" r:id="R4e5f3a70febe44d8"/>
+    <p:sldLayoutId xmlns:r="http://schemas.openxmlformats.org/officeDocument/2006/relationships" id="2147483655" r:id="Rfbe69c0add00403e"/>
+    <p:sldLayoutId xmlns:r="http://schemas.openxmlformats.org/officeDocument/2006/relationships" id="2147483656" r:id="R4aca5faec19c4848"/>
+    <p:sldLayoutId xmlns:r="http://schemas.openxmlformats.org/officeDocument/2006/relationships" id="2147483657" r:id="R69191f587b484eb7"/>
+    <p:sldLayoutId xmlns:r="http://schemas.openxmlformats.org/officeDocument/2006/relationships" id="2147483658" r:id="Rbf116496eff242c7"/>
+    <p:sldLayoutId xmlns:r="http://schemas.openxmlformats.org/officeDocument/2006/relationships" id="2147483659" r:id="R6345aa8f29d84379"/>
   </p:sldLayoutIdLst>
   <p:txStyles>
     <p:titleStyle>
@@ -5118,7 +5118,7 @@
           <p:cNvPr id="2" name="Rectangle 1">
             <a:extLst xmlns:a="http://schemas.openxmlformats.org/drawingml/2006/main">
               <a:ext uri="{FF2B5EF4-FFF2-40B4-BE49-F238E27FC236}">
-                <a16:creationId xmlns:a16="http://schemas.microsoft.com/office/drawing/2014/main" id="{B0E82EF4-11BD-4C2F-A9D5-22B7215B1319}"/>
+                <a16:creationId xmlns:a16="http://schemas.microsoft.com/office/drawing/2014/main" id="{4199313A-B210-46C0-AB89-536416FF0231}"/>
               </a:ext>
             </a:extLst>
           </p:cNvPr>
@@ -5171,7 +5171,7 @@
           <p:cNvPr id="3" name="Rectangle 2">
             <a:extLst xmlns:a="http://schemas.openxmlformats.org/drawingml/2006/main">
               <a:ext uri="{FF2B5EF4-FFF2-40B4-BE49-F238E27FC236}">
-                <a16:creationId xmlns:a16="http://schemas.microsoft.com/office/drawing/2014/main" id="{DC246537-7B3B-43B0-8AA4-3107D562283A}"/>
+                <a16:creationId xmlns:a16="http://schemas.microsoft.com/office/drawing/2014/main" id="{3D3AE276-69DC-43A8-926A-3D4BFF401C81}"/>
               </a:ext>
             </a:extLst>
           </p:cNvPr>
@@ -5224,7 +5224,7 @@
           <p:cNvPr id="4" name="TextBox 3">
             <a:extLst xmlns:a="http://schemas.openxmlformats.org/drawingml/2006/main">
               <a:ext uri="{FF2B5EF4-FFF2-40B4-BE49-F238E27FC236}">
-                <a16:creationId xmlns:a16="http://schemas.microsoft.com/office/drawing/2014/main" id="{C9D53492-9D92-4F18-8103-B68037143923}"/>
+                <a16:creationId xmlns:a16="http://schemas.microsoft.com/office/drawing/2014/main" id="{1B18E688-2AAF-4BA3-88EC-5515E6420FCF}"/>
               </a:ext>
             </a:extLst>
           </p:cNvPr>
@@ -5326,7 +5326,7 @@
     </p:spTree>
     <p:extLst>
       <p:ext uri="{BB962C8B-B14F-4D97-AF65-F5344CB8AC3E}">
-        <p14:creationId xmlns:p14="http://schemas.microsoft.com/office/powerpoint/2010/main" val="1670628182"/>
+        <p14:creationId xmlns:p14="http://schemas.microsoft.com/office/powerpoint/2010/main" val="1277625031"/>
       </p:ext>
     </p:extLst>
   </p:cSld>
@@ -5350,7 +5350,7 @@
           <p:cNvPr id="2" name="Rectangle 1">
             <a:extLst xmlns:a="http://schemas.openxmlformats.org/drawingml/2006/main">
               <a:ext uri="{FF2B5EF4-FFF2-40B4-BE49-F238E27FC236}">
-                <a16:creationId xmlns:a16="http://schemas.microsoft.com/office/drawing/2014/main" id="{4C0D1656-EA8D-4589-8E50-54480D98EE05}"/>
+                <a16:creationId xmlns:a16="http://schemas.microsoft.com/office/drawing/2014/main" id="{B60AAEDF-78C7-46F0-97DB-D5E7659FCC5B}"/>
               </a:ext>
             </a:extLst>
           </p:cNvPr>
@@ -5403,7 +5403,7 @@
           <p:cNvPr id="3" name="Rectangle 2">
             <a:extLst xmlns:a="http://schemas.openxmlformats.org/drawingml/2006/main">
               <a:ext uri="{FF2B5EF4-FFF2-40B4-BE49-F238E27FC236}">
-                <a16:creationId xmlns:a16="http://schemas.microsoft.com/office/drawing/2014/main" id="{CDF1094F-10BE-49A4-846F-CAF1E7ACDF66}"/>
+                <a16:creationId xmlns:a16="http://schemas.microsoft.com/office/drawing/2014/main" id="{AB57A5C7-3428-4B09-894C-2AE7B3410003}"/>
               </a:ext>
             </a:extLst>
           </p:cNvPr>
@@ -5456,7 +5456,7 @@
           <p:cNvPr id="4" name="Rectangle 3">
             <a:extLst xmlns:a="http://schemas.openxmlformats.org/drawingml/2006/main">
               <a:ext uri="{FF2B5EF4-FFF2-40B4-BE49-F238E27FC236}">
-                <a16:creationId xmlns:a16="http://schemas.microsoft.com/office/drawing/2014/main" id="{9B4AB8CD-E385-4477-85D7-3B0F39598FC4}"/>
+                <a16:creationId xmlns:a16="http://schemas.microsoft.com/office/drawing/2014/main" id="{5A842B13-96CA-4507-8499-6A95E8360D96}"/>
               </a:ext>
             </a:extLst>
           </p:cNvPr>
@@ -5509,7 +5509,7 @@
           <p:cNvPr id="5" name="TextBox 4">
             <a:extLst xmlns:a="http://schemas.openxmlformats.org/drawingml/2006/main">
               <a:ext uri="{FF2B5EF4-FFF2-40B4-BE49-F238E27FC236}">
-                <a16:creationId xmlns:a16="http://schemas.microsoft.com/office/drawing/2014/main" id="{BFC28B8B-A2ED-48BD-9C1B-FE3CA7E9BA54}"/>
+                <a16:creationId xmlns:a16="http://schemas.microsoft.com/office/drawing/2014/main" id="{DCDCD2A3-FAFD-4C3D-BE68-97DAE7EED957}"/>
               </a:ext>
             </a:extLst>
           </p:cNvPr>
@@ -5572,7 +5572,7 @@
           <p:cNvPr id="6" name="Rounded Rectangle 5">
             <a:extLst xmlns:a="http://schemas.openxmlformats.org/drawingml/2006/main">
               <a:ext uri="{FF2B5EF4-FFF2-40B4-BE49-F238E27FC236}">
-                <a16:creationId xmlns:a16="http://schemas.microsoft.com/office/drawing/2014/main" id="{13CFDB75-E8F9-447F-8C39-142792041AB5}"/>
+                <a16:creationId xmlns:a16="http://schemas.microsoft.com/office/drawing/2014/main" id="{F26F6E0F-96FB-41D7-8315-A6B5B116D60B}"/>
               </a:ext>
             </a:extLst>
           </p:cNvPr>
@@ -5627,7 +5627,7 @@
           <p:cNvPr id="7" name="TextBox 6">
             <a:extLst xmlns:a="http://schemas.openxmlformats.org/drawingml/2006/main">
               <a:ext uri="{FF2B5EF4-FFF2-40B4-BE49-F238E27FC236}">
-                <a16:creationId xmlns:a16="http://schemas.microsoft.com/office/drawing/2014/main" id="{843D0F64-D1C1-40FE-8DE7-1E4839EA9F2A}"/>
+                <a16:creationId xmlns:a16="http://schemas.microsoft.com/office/drawing/2014/main" id="{0B8394A9-2B95-479B-BC0A-B4EA6E2A3DF7}"/>
               </a:ext>
             </a:extLst>
           </p:cNvPr>
@@ -5731,7 +5731,7 @@
           <p:cNvPr id="8" name="Rounded Rectangle 7">
             <a:extLst xmlns:a="http://schemas.openxmlformats.org/drawingml/2006/main">
               <a:ext uri="{FF2B5EF4-FFF2-40B4-BE49-F238E27FC236}">
-                <a16:creationId xmlns:a16="http://schemas.microsoft.com/office/drawing/2014/main" id="{B8C974A6-7CE9-40C3-903A-6DC555F736A6}"/>
+                <a16:creationId xmlns:a16="http://schemas.microsoft.com/office/drawing/2014/main" id="{F328F80A-3E93-414A-81F2-5FEB3D957C31}"/>
               </a:ext>
             </a:extLst>
           </p:cNvPr>
@@ -5786,7 +5786,7 @@
           <p:cNvPr id="9" name="TextBox 8">
             <a:extLst xmlns:a="http://schemas.openxmlformats.org/drawingml/2006/main">
               <a:ext uri="{FF2B5EF4-FFF2-40B4-BE49-F238E27FC236}">
-                <a16:creationId xmlns:a16="http://schemas.microsoft.com/office/drawing/2014/main" id="{26703378-E5C0-4088-B113-2EB2915C97D5}"/>
+                <a16:creationId xmlns:a16="http://schemas.microsoft.com/office/drawing/2014/main" id="{C3BC5DEC-3A0E-4989-BD90-FF4292DC1882}"/>
               </a:ext>
             </a:extLst>
           </p:cNvPr>
@@ -5871,7 +5871,7 @@
           <p:cNvPr id="10" name="Rounded Rectangle 9">
             <a:extLst xmlns:a="http://schemas.openxmlformats.org/drawingml/2006/main">
               <a:ext uri="{FF2B5EF4-FFF2-40B4-BE49-F238E27FC236}">
-                <a16:creationId xmlns:a16="http://schemas.microsoft.com/office/drawing/2014/main" id="{3068B22A-BE25-4349-8338-0448FE40F5FF}"/>
+                <a16:creationId xmlns:a16="http://schemas.microsoft.com/office/drawing/2014/main" id="{6581D62E-AD33-49C0-A650-6C6A0D8C67D5}"/>
               </a:ext>
             </a:extLst>
           </p:cNvPr>
@@ -5926,7 +5926,7 @@
           <p:cNvPr id="11" name="TextBox 10">
             <a:extLst xmlns:a="http://schemas.openxmlformats.org/drawingml/2006/main">
               <a:ext uri="{FF2B5EF4-FFF2-40B4-BE49-F238E27FC236}">
-                <a16:creationId xmlns:a16="http://schemas.microsoft.com/office/drawing/2014/main" id="{0EA1D0B8-F17A-46D8-AFB8-74631EC2DFE7}"/>
+                <a16:creationId xmlns:a16="http://schemas.microsoft.com/office/drawing/2014/main" id="{328ABD2B-304F-45C5-A045-86A47CEAA927}"/>
               </a:ext>
             </a:extLst>
           </p:cNvPr>
@@ -6028,7 +6028,7 @@
     </p:spTree>
     <p:extLst>
       <p:ext uri="{BB962C8B-B14F-4D97-AF65-F5344CB8AC3E}">
-        <p14:creationId xmlns:p14="http://schemas.microsoft.com/office/powerpoint/2010/main" val="598599637"/>
+        <p14:creationId xmlns:p14="http://schemas.microsoft.com/office/powerpoint/2010/main" val="452905077"/>
       </p:ext>
     </p:extLst>
   </p:cSld>
@@ -6052,7 +6052,7 @@
           <p:cNvPr id="2" name="Rectangle 1">
             <a:extLst xmlns:a="http://schemas.openxmlformats.org/drawingml/2006/main">
               <a:ext uri="{FF2B5EF4-FFF2-40B4-BE49-F238E27FC236}">
-                <a16:creationId xmlns:a16="http://schemas.microsoft.com/office/drawing/2014/main" id="{DFAB9E42-7729-42DE-B584-893C5D26CB6F}"/>
+                <a16:creationId xmlns:a16="http://schemas.microsoft.com/office/drawing/2014/main" id="{8F549AB4-460E-4DA0-85F2-EB66D2E62594}"/>
               </a:ext>
             </a:extLst>
           </p:cNvPr>
@@ -6105,7 +6105,7 @@
           <p:cNvPr id="3" name="Rectangle 2">
             <a:extLst xmlns:a="http://schemas.openxmlformats.org/drawingml/2006/main">
               <a:ext uri="{FF2B5EF4-FFF2-40B4-BE49-F238E27FC236}">
-                <a16:creationId xmlns:a16="http://schemas.microsoft.com/office/drawing/2014/main" id="{D9F8962F-5B21-4B1C-94CC-9B662760FF6F}"/>
+                <a16:creationId xmlns:a16="http://schemas.microsoft.com/office/drawing/2014/main" id="{CAF8AFC4-39E8-4106-9179-74D307226E21}"/>
               </a:ext>
             </a:extLst>
           </p:cNvPr>
@@ -6158,7 +6158,7 @@
           <p:cNvPr id="4" name="Rectangle 3">
             <a:extLst xmlns:a="http://schemas.openxmlformats.org/drawingml/2006/main">
               <a:ext uri="{FF2B5EF4-FFF2-40B4-BE49-F238E27FC236}">
-                <a16:creationId xmlns:a16="http://schemas.microsoft.com/office/drawing/2014/main" id="{AF05C22E-064C-4FDF-88DF-04776316CEE2}"/>
+                <a16:creationId xmlns:a16="http://schemas.microsoft.com/office/drawing/2014/main" id="{A7FC2C38-4B67-49CA-A04A-285494AE6FCA}"/>
               </a:ext>
             </a:extLst>
           </p:cNvPr>
@@ -6211,7 +6211,7 @@
           <p:cNvPr id="5" name="TextBox 4">
             <a:extLst xmlns:a="http://schemas.openxmlformats.org/drawingml/2006/main">
               <a:ext uri="{FF2B5EF4-FFF2-40B4-BE49-F238E27FC236}">
-                <a16:creationId xmlns:a16="http://schemas.microsoft.com/office/drawing/2014/main" id="{4951618C-4E56-4607-8C67-316A8EB98F98}"/>
+                <a16:creationId xmlns:a16="http://schemas.microsoft.com/office/drawing/2014/main" id="{8808532B-0A55-4D7D-8863-C77FB6CD1769}"/>
               </a:ext>
             </a:extLst>
           </p:cNvPr>
@@ -6274,7 +6274,7 @@
           <p:cNvPr id="6" name="Rounded Rectangle 5">
             <a:extLst xmlns:a="http://schemas.openxmlformats.org/drawingml/2006/main">
               <a:ext uri="{FF2B5EF4-FFF2-40B4-BE49-F238E27FC236}">
-                <a16:creationId xmlns:a16="http://schemas.microsoft.com/office/drawing/2014/main" id="{13D98923-AC55-4318-BB6A-85EC6541E09E}"/>
+                <a16:creationId xmlns:a16="http://schemas.microsoft.com/office/drawing/2014/main" id="{C5A2118F-682B-4A5F-9313-589843F6FFCF}"/>
               </a:ext>
             </a:extLst>
           </p:cNvPr>
@@ -6329,7 +6329,7 @@
           <p:cNvPr id="7" name="TextBox 6">
             <a:extLst xmlns:a="http://schemas.openxmlformats.org/drawingml/2006/main">
               <a:ext uri="{FF2B5EF4-FFF2-40B4-BE49-F238E27FC236}">
-                <a16:creationId xmlns:a16="http://schemas.microsoft.com/office/drawing/2014/main" id="{0D81E792-B232-48E9-9DF5-B56382C3C909}"/>
+                <a16:creationId xmlns:a16="http://schemas.microsoft.com/office/drawing/2014/main" id="{1605524E-685F-4938-80D6-AE79AAA230C2}"/>
               </a:ext>
             </a:extLst>
           </p:cNvPr>
@@ -6528,7 +6528,7 @@
           <p:cNvPr id="8" name="Rounded Rectangle 7">
             <a:extLst xmlns:a="http://schemas.openxmlformats.org/drawingml/2006/main">
               <a:ext uri="{FF2B5EF4-FFF2-40B4-BE49-F238E27FC236}">
-                <a16:creationId xmlns:a16="http://schemas.microsoft.com/office/drawing/2014/main" id="{8644E0A4-6C59-40B9-826A-DA9288BBF949}"/>
+                <a16:creationId xmlns:a16="http://schemas.microsoft.com/office/drawing/2014/main" id="{E1EC6CF1-99F8-405D-9BAF-BCCFD3AFFEF1}"/>
               </a:ext>
             </a:extLst>
           </p:cNvPr>
@@ -6583,7 +6583,7 @@
           <p:cNvPr id="9" name="TextBox 8">
             <a:extLst xmlns:a="http://schemas.openxmlformats.org/drawingml/2006/main">
               <a:ext uri="{FF2B5EF4-FFF2-40B4-BE49-F238E27FC236}">
-                <a16:creationId xmlns:a16="http://schemas.microsoft.com/office/drawing/2014/main" id="{49DBB8B5-47E2-415B-A790-63659DBE808C}"/>
+                <a16:creationId xmlns:a16="http://schemas.microsoft.com/office/drawing/2014/main" id="{84F074CB-40CD-4F57-88C9-7F01163E5EEF}"/>
               </a:ext>
             </a:extLst>
           </p:cNvPr>
@@ -6704,7 +6704,7 @@
     </p:spTree>
     <p:extLst>
       <p:ext uri="{BB962C8B-B14F-4D97-AF65-F5344CB8AC3E}">
-        <p14:creationId xmlns:p14="http://schemas.microsoft.com/office/powerpoint/2010/main" val="574977047"/>
+        <p14:creationId xmlns:p14="http://schemas.microsoft.com/office/powerpoint/2010/main" val="1471973507"/>
       </p:ext>
     </p:extLst>
   </p:cSld>
@@ -6728,7 +6728,7 @@
           <p:cNvPr id="2" name="Rectangle 1">
             <a:extLst xmlns:a="http://schemas.openxmlformats.org/drawingml/2006/main">
               <a:ext uri="{FF2B5EF4-FFF2-40B4-BE49-F238E27FC236}">
-                <a16:creationId xmlns:a16="http://schemas.microsoft.com/office/drawing/2014/main" id="{4311A4A7-4B5E-4C6B-98F0-B4390AB5F5DC}"/>
+                <a16:creationId xmlns:a16="http://schemas.microsoft.com/office/drawing/2014/main" id="{DA8B50DC-F328-42EE-AFB0-47416775AA85}"/>
               </a:ext>
             </a:extLst>
           </p:cNvPr>
@@ -6781,7 +6781,7 @@
           <p:cNvPr id="3" name="Rectangle 2">
             <a:extLst xmlns:a="http://schemas.openxmlformats.org/drawingml/2006/main">
               <a:ext uri="{FF2B5EF4-FFF2-40B4-BE49-F238E27FC236}">
-                <a16:creationId xmlns:a16="http://schemas.microsoft.com/office/drawing/2014/main" id="{9A18AC14-74DB-453D-89F3-7C779E389217}"/>
+                <a16:creationId xmlns:a16="http://schemas.microsoft.com/office/drawing/2014/main" id="{2A92FD4B-A03A-457C-9945-75E1E8335FB6}"/>
               </a:ext>
             </a:extLst>
           </p:cNvPr>
@@ -6834,7 +6834,7 @@
           <p:cNvPr id="4" name="TextBox 3">
             <a:extLst xmlns:a="http://schemas.openxmlformats.org/drawingml/2006/main">
               <a:ext uri="{FF2B5EF4-FFF2-40B4-BE49-F238E27FC236}">
-                <a16:creationId xmlns:a16="http://schemas.microsoft.com/office/drawing/2014/main" id="{20C02B7F-C763-4B1D-BEAA-C9B5CAC7CA0E}"/>
+                <a16:creationId xmlns:a16="http://schemas.microsoft.com/office/drawing/2014/main" id="{D3A29788-3534-4FB8-A956-83E3D9B9AD84}"/>
               </a:ext>
             </a:extLst>
           </p:cNvPr>
@@ -7012,7 +7012,7 @@
     </p:spTree>
     <p:extLst>
       <p:ext uri="{BB962C8B-B14F-4D97-AF65-F5344CB8AC3E}">
-        <p14:creationId xmlns:p14="http://schemas.microsoft.com/office/powerpoint/2010/main" val="566523200"/>
+        <p14:creationId xmlns:p14="http://schemas.microsoft.com/office/powerpoint/2010/main" val="404076202"/>
       </p:ext>
     </p:extLst>
   </p:cSld>
@@ -7036,7 +7036,7 @@
           <p:cNvPr id="2" name="Rectangle 1">
             <a:extLst xmlns:a="http://schemas.openxmlformats.org/drawingml/2006/main">
               <a:ext uri="{FF2B5EF4-FFF2-40B4-BE49-F238E27FC236}">
-                <a16:creationId xmlns:a16="http://schemas.microsoft.com/office/drawing/2014/main" id="{A9CF8452-4422-49A8-995B-E3F30642133B}"/>
+                <a16:creationId xmlns:a16="http://schemas.microsoft.com/office/drawing/2014/main" id="{6B1B9005-4D24-49B8-AAE5-87C411DC83A1}"/>
               </a:ext>
             </a:extLst>
           </p:cNvPr>
@@ -7089,7 +7089,7 @@
           <p:cNvPr id="3" name="Rectangle 2">
             <a:extLst xmlns:a="http://schemas.openxmlformats.org/drawingml/2006/main">
               <a:ext uri="{FF2B5EF4-FFF2-40B4-BE49-F238E27FC236}">
-                <a16:creationId xmlns:a16="http://schemas.microsoft.com/office/drawing/2014/main" id="{E12A3003-3F52-46CB-BE77-962829D83F6E}"/>
+                <a16:creationId xmlns:a16="http://schemas.microsoft.com/office/drawing/2014/main" id="{6A012BAB-F386-47AA-B3D7-AF4B6CCE633F}"/>
               </a:ext>
             </a:extLst>
           </p:cNvPr>
@@ -7142,7 +7142,7 @@
           <p:cNvPr id="4" name="Rectangle 3">
             <a:extLst xmlns:a="http://schemas.openxmlformats.org/drawingml/2006/main">
               <a:ext uri="{FF2B5EF4-FFF2-40B4-BE49-F238E27FC236}">
-                <a16:creationId xmlns:a16="http://schemas.microsoft.com/office/drawing/2014/main" id="{15F20F26-2CBE-427A-AFC2-9DE5898D4F06}"/>
+                <a16:creationId xmlns:a16="http://schemas.microsoft.com/office/drawing/2014/main" id="{C1A4D744-A16B-47DB-B7DB-B614D744FB04}"/>
               </a:ext>
             </a:extLst>
           </p:cNvPr>
@@ -7195,7 +7195,7 @@
           <p:cNvPr id="5" name="TextBox 4">
             <a:extLst xmlns:a="http://schemas.openxmlformats.org/drawingml/2006/main">
               <a:ext uri="{FF2B5EF4-FFF2-40B4-BE49-F238E27FC236}">
-                <a16:creationId xmlns:a16="http://schemas.microsoft.com/office/drawing/2014/main" id="{08C77087-993A-4B44-8BF0-14CC7B336E57}"/>
+                <a16:creationId xmlns:a16="http://schemas.microsoft.com/office/drawing/2014/main" id="{F42ADB72-8A23-4B1B-AFFA-BBEABC99F3DC}"/>
               </a:ext>
             </a:extLst>
           </p:cNvPr>
@@ -7258,7 +7258,7 @@
           <p:cNvPr id="6" name="Rounded Rectangle 5">
             <a:extLst xmlns:a="http://schemas.openxmlformats.org/drawingml/2006/main">
               <a:ext uri="{FF2B5EF4-FFF2-40B4-BE49-F238E27FC236}">
-                <a16:creationId xmlns:a16="http://schemas.microsoft.com/office/drawing/2014/main" id="{59B2DDEF-578E-4B2D-8083-5EF4277B7B94}"/>
+                <a16:creationId xmlns:a16="http://schemas.microsoft.com/office/drawing/2014/main" id="{1389A831-7D72-4579-B94B-277F7841E09D}"/>
               </a:ext>
             </a:extLst>
           </p:cNvPr>
@@ -7313,7 +7313,7 @@
           <p:cNvPr id="7" name="TextBox 6">
             <a:extLst xmlns:a="http://schemas.openxmlformats.org/drawingml/2006/main">
               <a:ext uri="{FF2B5EF4-FFF2-40B4-BE49-F238E27FC236}">
-                <a16:creationId xmlns:a16="http://schemas.microsoft.com/office/drawing/2014/main" id="{5B14F8C9-F211-454C-8B51-40677A3D0D68}"/>
+                <a16:creationId xmlns:a16="http://schemas.microsoft.com/office/drawing/2014/main" id="{DBA954BA-745C-4D07-98C5-63EC894C9C96}"/>
               </a:ext>
             </a:extLst>
           </p:cNvPr>
@@ -7417,7 +7417,7 @@
           <p:cNvPr id="8" name="Rounded Rectangle 7">
             <a:extLst xmlns:a="http://schemas.openxmlformats.org/drawingml/2006/main">
               <a:ext uri="{FF2B5EF4-FFF2-40B4-BE49-F238E27FC236}">
-                <a16:creationId xmlns:a16="http://schemas.microsoft.com/office/drawing/2014/main" id="{0BAE500D-5308-48BD-9308-C139DDE386B1}"/>
+                <a16:creationId xmlns:a16="http://schemas.microsoft.com/office/drawing/2014/main" id="{3520DA34-034F-4796-9F9C-8FF08FFC1595}"/>
               </a:ext>
             </a:extLst>
           </p:cNvPr>
@@ -7472,7 +7472,7 @@
           <p:cNvPr id="9" name="TextBox 8">
             <a:extLst xmlns:a="http://schemas.openxmlformats.org/drawingml/2006/main">
               <a:ext uri="{FF2B5EF4-FFF2-40B4-BE49-F238E27FC236}">
-                <a16:creationId xmlns:a16="http://schemas.microsoft.com/office/drawing/2014/main" id="{76C9ECAC-EE7B-4E58-BA98-3AA9A7F6D2E3}"/>
+                <a16:creationId xmlns:a16="http://schemas.microsoft.com/office/drawing/2014/main" id="{D4BE7D58-3214-46F7-A909-6AFDFD24D815}"/>
               </a:ext>
             </a:extLst>
           </p:cNvPr>
@@ -7576,7 +7576,7 @@
           <p:cNvPr id="10" name="Rounded Rectangle 9">
             <a:extLst xmlns:a="http://schemas.openxmlformats.org/drawingml/2006/main">
               <a:ext uri="{FF2B5EF4-FFF2-40B4-BE49-F238E27FC236}">
-                <a16:creationId xmlns:a16="http://schemas.microsoft.com/office/drawing/2014/main" id="{D2DBDE6C-A7C8-4A62-997F-201D1F8E09FA}"/>
+                <a16:creationId xmlns:a16="http://schemas.microsoft.com/office/drawing/2014/main" id="{94DB9461-E086-481F-9C24-6C2E3815F71F}"/>
               </a:ext>
             </a:extLst>
           </p:cNvPr>
@@ -7631,7 +7631,7 @@
           <p:cNvPr id="11" name="TextBox 10">
             <a:extLst xmlns:a="http://schemas.openxmlformats.org/drawingml/2006/main">
               <a:ext uri="{FF2B5EF4-FFF2-40B4-BE49-F238E27FC236}">
-                <a16:creationId xmlns:a16="http://schemas.microsoft.com/office/drawing/2014/main" id="{8724AA3F-7D53-471C-8D7D-90524A234222}"/>
+                <a16:creationId xmlns:a16="http://schemas.microsoft.com/office/drawing/2014/main" id="{C99B1D73-58D5-4FAD-8881-A1529869ABE7}"/>
               </a:ext>
             </a:extLst>
           </p:cNvPr>
@@ -7790,7 +7790,7 @@
     </p:spTree>
     <p:extLst>
       <p:ext uri="{BB962C8B-B14F-4D97-AF65-F5344CB8AC3E}">
-        <p14:creationId xmlns:p14="http://schemas.microsoft.com/office/powerpoint/2010/main" val="1104074397"/>
+        <p14:creationId xmlns:p14="http://schemas.microsoft.com/office/powerpoint/2010/main" val="1600219143"/>
       </p:ext>
     </p:extLst>
   </p:cSld>
@@ -7814,7 +7814,7 @@
           <p:cNvPr id="2" name="Rectangle 1">
             <a:extLst xmlns:a="http://schemas.openxmlformats.org/drawingml/2006/main">
               <a:ext uri="{FF2B5EF4-FFF2-40B4-BE49-F238E27FC236}">
-                <a16:creationId xmlns:a16="http://schemas.microsoft.com/office/drawing/2014/main" id="{CACE1302-ECF9-491F-A316-4571409E9C5A}"/>
+                <a16:creationId xmlns:a16="http://schemas.microsoft.com/office/drawing/2014/main" id="{843C7357-8550-43B6-A996-258DAE551911}"/>
               </a:ext>
             </a:extLst>
           </p:cNvPr>
@@ -7867,7 +7867,7 @@
           <p:cNvPr id="3" name="Rectangle 2">
             <a:extLst xmlns:a="http://schemas.openxmlformats.org/drawingml/2006/main">
               <a:ext uri="{FF2B5EF4-FFF2-40B4-BE49-F238E27FC236}">
-                <a16:creationId xmlns:a16="http://schemas.microsoft.com/office/drawing/2014/main" id="{EA4CAC5B-AA00-4700-A62D-16F15FF3B2F3}"/>
+                <a16:creationId xmlns:a16="http://schemas.microsoft.com/office/drawing/2014/main" id="{2BD2F428-EFE1-4040-B5C4-ECABE4274A9F}"/>
               </a:ext>
             </a:extLst>
           </p:cNvPr>
@@ -7920,7 +7920,7 @@
           <p:cNvPr id="4" name="Rectangle 3">
             <a:extLst xmlns:a="http://schemas.openxmlformats.org/drawingml/2006/main">
               <a:ext uri="{FF2B5EF4-FFF2-40B4-BE49-F238E27FC236}">
-                <a16:creationId xmlns:a16="http://schemas.microsoft.com/office/drawing/2014/main" id="{8BAD3718-2449-4374-B074-153198158ABE}"/>
+                <a16:creationId xmlns:a16="http://schemas.microsoft.com/office/drawing/2014/main" id="{BC51566E-80D3-4A6F-8BE4-0BB94D1063E6}"/>
               </a:ext>
             </a:extLst>
           </p:cNvPr>
@@ -7973,7 +7973,7 @@
           <p:cNvPr id="5" name="TextBox 4">
             <a:extLst xmlns:a="http://schemas.openxmlformats.org/drawingml/2006/main">
               <a:ext uri="{FF2B5EF4-FFF2-40B4-BE49-F238E27FC236}">
-                <a16:creationId xmlns:a16="http://schemas.microsoft.com/office/drawing/2014/main" id="{C2DCAF6D-49D8-428C-9A93-125E569E7034}"/>
+                <a16:creationId xmlns:a16="http://schemas.microsoft.com/office/drawing/2014/main" id="{212FBD67-8373-4251-90F4-AE3C3A04BCD4}"/>
               </a:ext>
             </a:extLst>
           </p:cNvPr>
@@ -8036,7 +8036,7 @@
           <p:cNvPr id="6" name="Rounded Rectangle 5">
             <a:extLst xmlns:a="http://schemas.openxmlformats.org/drawingml/2006/main">
               <a:ext uri="{FF2B5EF4-FFF2-40B4-BE49-F238E27FC236}">
-                <a16:creationId xmlns:a16="http://schemas.microsoft.com/office/drawing/2014/main" id="{C483A55D-855A-470F-B581-69C6D8020981}"/>
+                <a16:creationId xmlns:a16="http://schemas.microsoft.com/office/drawing/2014/main" id="{964DB797-7017-4483-9A7C-B4E8DF2DC0A6}"/>
               </a:ext>
             </a:extLst>
           </p:cNvPr>
@@ -8091,7 +8091,7 @@
           <p:cNvPr id="7" name="TextBox 6">
             <a:extLst xmlns:a="http://schemas.openxmlformats.org/drawingml/2006/main">
               <a:ext uri="{FF2B5EF4-FFF2-40B4-BE49-F238E27FC236}">
-                <a16:creationId xmlns:a16="http://schemas.microsoft.com/office/drawing/2014/main" id="{32FCFF1B-42A8-4A2E-96DF-10B1A72E1022}"/>
+                <a16:creationId xmlns:a16="http://schemas.microsoft.com/office/drawing/2014/main" id="{0380E14C-25C5-4A34-B638-8998EB24D941}"/>
               </a:ext>
             </a:extLst>
           </p:cNvPr>
@@ -8214,7 +8214,7 @@
           <p:cNvPr id="8" name="Rounded Rectangle 7">
             <a:extLst xmlns:a="http://schemas.openxmlformats.org/drawingml/2006/main">
               <a:ext uri="{FF2B5EF4-FFF2-40B4-BE49-F238E27FC236}">
-                <a16:creationId xmlns:a16="http://schemas.microsoft.com/office/drawing/2014/main" id="{54481AE8-ADE1-44F4-827F-95AC688B93DA}"/>
+                <a16:creationId xmlns:a16="http://schemas.microsoft.com/office/drawing/2014/main" id="{AF9C4B3D-3331-4405-A792-7C8002742416}"/>
               </a:ext>
             </a:extLst>
           </p:cNvPr>
@@ -8269,7 +8269,7 @@
           <p:cNvPr id="9" name="TextBox 8">
             <a:extLst xmlns:a="http://schemas.openxmlformats.org/drawingml/2006/main">
               <a:ext uri="{FF2B5EF4-FFF2-40B4-BE49-F238E27FC236}">
-                <a16:creationId xmlns:a16="http://schemas.microsoft.com/office/drawing/2014/main" id="{C418C3BA-840C-4F1C-B5AA-A86E6A1AB24B}"/>
+                <a16:creationId xmlns:a16="http://schemas.microsoft.com/office/drawing/2014/main" id="{3A1131B1-171B-46E1-90EA-874C3AB16214}"/>
               </a:ext>
             </a:extLst>
           </p:cNvPr>
@@ -8411,7 +8411,7 @@
           <p:cNvPr id="10" name="Rounded Rectangle 9">
             <a:extLst xmlns:a="http://schemas.openxmlformats.org/drawingml/2006/main">
               <a:ext uri="{FF2B5EF4-FFF2-40B4-BE49-F238E27FC236}">
-                <a16:creationId xmlns:a16="http://schemas.microsoft.com/office/drawing/2014/main" id="{C85F79E8-152E-4C5E-AAB7-7246022084BC}"/>
+                <a16:creationId xmlns:a16="http://schemas.microsoft.com/office/drawing/2014/main" id="{A4B7F00E-6BAA-4991-904B-41E3C982B991}"/>
               </a:ext>
             </a:extLst>
           </p:cNvPr>
@@ -8466,7 +8466,7 @@
           <p:cNvPr id="11" name="TextBox 10">
             <a:extLst xmlns:a="http://schemas.openxmlformats.org/drawingml/2006/main">
               <a:ext uri="{FF2B5EF4-FFF2-40B4-BE49-F238E27FC236}">
-                <a16:creationId xmlns:a16="http://schemas.microsoft.com/office/drawing/2014/main" id="{AC9373F5-6A7A-4643-9BFC-6AB0E2305F59}"/>
+                <a16:creationId xmlns:a16="http://schemas.microsoft.com/office/drawing/2014/main" id="{DEBCCD14-AB57-4EFA-AF05-69A5A4FDB112}"/>
               </a:ext>
             </a:extLst>
           </p:cNvPr>
@@ -8568,7 +8568,7 @@
     </p:spTree>
     <p:extLst>
       <p:ext uri="{BB962C8B-B14F-4D97-AF65-F5344CB8AC3E}">
-        <p14:creationId xmlns:p14="http://schemas.microsoft.com/office/powerpoint/2010/main" val="1878262170"/>
+        <p14:creationId xmlns:p14="http://schemas.microsoft.com/office/powerpoint/2010/main" val="1974168012"/>
       </p:ext>
     </p:extLst>
   </p:cSld>
@@ -8592,7 +8592,7 @@
           <p:cNvPr id="2" name="Rectangle 1">
             <a:extLst xmlns:a="http://schemas.openxmlformats.org/drawingml/2006/main">
               <a:ext uri="{FF2B5EF4-FFF2-40B4-BE49-F238E27FC236}">
-                <a16:creationId xmlns:a16="http://schemas.microsoft.com/office/drawing/2014/main" id="{7732BCB8-D83B-4F3A-AE70-4AA503F33DF1}"/>
+                <a16:creationId xmlns:a16="http://schemas.microsoft.com/office/drawing/2014/main" id="{AF661C42-DFD1-489E-905C-BC0671251AF2}"/>
               </a:ext>
             </a:extLst>
           </p:cNvPr>
@@ -8645,7 +8645,7 @@
           <p:cNvPr id="3" name="Rectangle 2">
             <a:extLst xmlns:a="http://schemas.openxmlformats.org/drawingml/2006/main">
               <a:ext uri="{FF2B5EF4-FFF2-40B4-BE49-F238E27FC236}">
-                <a16:creationId xmlns:a16="http://schemas.microsoft.com/office/drawing/2014/main" id="{55F90981-D01C-4017-BC8A-D6C92F976364}"/>
+                <a16:creationId xmlns:a16="http://schemas.microsoft.com/office/drawing/2014/main" id="{22D2CE23-C56D-4F67-BAE1-A7B97D769279}"/>
               </a:ext>
             </a:extLst>
           </p:cNvPr>
@@ -8698,7 +8698,7 @@
           <p:cNvPr id="4" name="Rectangle 3">
             <a:extLst xmlns:a="http://schemas.openxmlformats.org/drawingml/2006/main">
               <a:ext uri="{FF2B5EF4-FFF2-40B4-BE49-F238E27FC236}">
-                <a16:creationId xmlns:a16="http://schemas.microsoft.com/office/drawing/2014/main" id="{6DDAC109-66E3-4D96-9A88-43705A614887}"/>
+                <a16:creationId xmlns:a16="http://schemas.microsoft.com/office/drawing/2014/main" id="{1BA61EC4-1D0A-494E-9B7A-FA8683CAF9D2}"/>
               </a:ext>
             </a:extLst>
           </p:cNvPr>
@@ -8751,7 +8751,7 @@
           <p:cNvPr id="5" name="TextBox 4">
             <a:extLst xmlns:a="http://schemas.openxmlformats.org/drawingml/2006/main">
               <a:ext uri="{FF2B5EF4-FFF2-40B4-BE49-F238E27FC236}">
-                <a16:creationId xmlns:a16="http://schemas.microsoft.com/office/drawing/2014/main" id="{71BCC5A3-9BCC-4E5C-8996-B8C0CA22893E}"/>
+                <a16:creationId xmlns:a16="http://schemas.microsoft.com/office/drawing/2014/main" id="{487EAB0E-DD0B-4B82-B9C1-6B405004F2D3}"/>
               </a:ext>
             </a:extLst>
           </p:cNvPr>
@@ -8814,7 +8814,7 @@
           <p:cNvPr id="6" name="Rounded Rectangle 5">
             <a:extLst xmlns:a="http://schemas.openxmlformats.org/drawingml/2006/main">
               <a:ext uri="{FF2B5EF4-FFF2-40B4-BE49-F238E27FC236}">
-                <a16:creationId xmlns:a16="http://schemas.microsoft.com/office/drawing/2014/main" id="{AD9F52A5-37FC-4EB1-8A1E-5A03DF4F666D}"/>
+                <a16:creationId xmlns:a16="http://schemas.microsoft.com/office/drawing/2014/main" id="{4831058F-B31D-4C5F-A43B-4451FF20BAC0}"/>
               </a:ext>
             </a:extLst>
           </p:cNvPr>
@@ -8869,7 +8869,7 @@
           <p:cNvPr id="7" name="TextBox 6">
             <a:extLst xmlns:a="http://schemas.openxmlformats.org/drawingml/2006/main">
               <a:ext uri="{FF2B5EF4-FFF2-40B4-BE49-F238E27FC236}">
-                <a16:creationId xmlns:a16="http://schemas.microsoft.com/office/drawing/2014/main" id="{D8B8EC28-61B9-4C30-9BE6-8A45705F8646}"/>
+                <a16:creationId xmlns:a16="http://schemas.microsoft.com/office/drawing/2014/main" id="{891BE0E5-72A3-46FA-995A-BEDC31EC9082}"/>
               </a:ext>
             </a:extLst>
           </p:cNvPr>
@@ -9049,7 +9049,7 @@
           <p:cNvPr id="8" name="Rounded Rectangle 7">
             <a:extLst xmlns:a="http://schemas.openxmlformats.org/drawingml/2006/main">
               <a:ext uri="{FF2B5EF4-FFF2-40B4-BE49-F238E27FC236}">
-                <a16:creationId xmlns:a16="http://schemas.microsoft.com/office/drawing/2014/main" id="{AA3DD4C4-A085-4B30-9D87-D0C4747AB7D9}"/>
+                <a16:creationId xmlns:a16="http://schemas.microsoft.com/office/drawing/2014/main" id="{E429C07F-A8A9-4104-B846-93E1B6E613A3}"/>
               </a:ext>
             </a:extLst>
           </p:cNvPr>
@@ -9104,7 +9104,7 @@
           <p:cNvPr id="9" name="TextBox 8">
             <a:extLst xmlns:a="http://schemas.openxmlformats.org/drawingml/2006/main">
               <a:ext uri="{FF2B5EF4-FFF2-40B4-BE49-F238E27FC236}">
-                <a16:creationId xmlns:a16="http://schemas.microsoft.com/office/drawing/2014/main" id="{E5061F46-6B97-478A-B2FB-BA4F31AB334C}"/>
+                <a16:creationId xmlns:a16="http://schemas.microsoft.com/office/drawing/2014/main" id="{A0C24258-CCEF-4555-B0DC-CCE00E76745B}"/>
               </a:ext>
             </a:extLst>
           </p:cNvPr>
@@ -9263,7 +9263,7 @@
     </p:spTree>
     <p:extLst>
       <p:ext uri="{BB962C8B-B14F-4D97-AF65-F5344CB8AC3E}">
-        <p14:creationId xmlns:p14="http://schemas.microsoft.com/office/powerpoint/2010/main" val="2046228398"/>
+        <p14:creationId xmlns:p14="http://schemas.microsoft.com/office/powerpoint/2010/main" val="776759816"/>
       </p:ext>
     </p:extLst>
   </p:cSld>
@@ -9287,7 +9287,7 @@
           <p:cNvPr id="2" name="Rectangle 1">
             <a:extLst xmlns:a="http://schemas.openxmlformats.org/drawingml/2006/main">
               <a:ext uri="{FF2B5EF4-FFF2-40B4-BE49-F238E27FC236}">
-                <a16:creationId xmlns:a16="http://schemas.microsoft.com/office/drawing/2014/main" id="{369C03A0-6F9C-48C4-9346-D25A2709946A}"/>
+                <a16:creationId xmlns:a16="http://schemas.microsoft.com/office/drawing/2014/main" id="{DFAC2CEE-E5A5-4CAD-A0B5-F99D2AC32309}"/>
               </a:ext>
             </a:extLst>
           </p:cNvPr>
@@ -9340,7 +9340,7 @@
           <p:cNvPr id="3" name="Rectangle 2">
             <a:extLst xmlns:a="http://schemas.openxmlformats.org/drawingml/2006/main">
               <a:ext uri="{FF2B5EF4-FFF2-40B4-BE49-F238E27FC236}">
-                <a16:creationId xmlns:a16="http://schemas.microsoft.com/office/drawing/2014/main" id="{49497C8A-E763-4EAB-A960-25A4D8C36309}"/>
+                <a16:creationId xmlns:a16="http://schemas.microsoft.com/office/drawing/2014/main" id="{F3468B25-63BA-4A68-8D70-500D6B59D837}"/>
               </a:ext>
             </a:extLst>
           </p:cNvPr>
@@ -9393,7 +9393,7 @@
           <p:cNvPr id="4" name="Rectangle 3">
             <a:extLst xmlns:a="http://schemas.openxmlformats.org/drawingml/2006/main">
               <a:ext uri="{FF2B5EF4-FFF2-40B4-BE49-F238E27FC236}">
-                <a16:creationId xmlns:a16="http://schemas.microsoft.com/office/drawing/2014/main" id="{57570CA0-2027-4383-9241-7DE9B63B4C79}"/>
+                <a16:creationId xmlns:a16="http://schemas.microsoft.com/office/drawing/2014/main" id="{2BA98FCA-BA37-490D-9C8D-E518C4BCF21A}"/>
               </a:ext>
             </a:extLst>
           </p:cNvPr>
@@ -9446,7 +9446,7 @@
           <p:cNvPr id="5" name="TextBox 4">
             <a:extLst xmlns:a="http://schemas.openxmlformats.org/drawingml/2006/main">
               <a:ext uri="{FF2B5EF4-FFF2-40B4-BE49-F238E27FC236}">
-                <a16:creationId xmlns:a16="http://schemas.microsoft.com/office/drawing/2014/main" id="{D7EE01C6-B239-4D46-9C9D-5358EB7DAC68}"/>
+                <a16:creationId xmlns:a16="http://schemas.microsoft.com/office/drawing/2014/main" id="{C1AF84EB-00B1-4815-ACA5-620CAFCE7A2A}"/>
               </a:ext>
             </a:extLst>
           </p:cNvPr>
@@ -9509,7 +9509,7 @@
           <p:cNvPr id="6" name="Rounded Rectangle 5">
             <a:extLst xmlns:a="http://schemas.openxmlformats.org/drawingml/2006/main">
               <a:ext uri="{FF2B5EF4-FFF2-40B4-BE49-F238E27FC236}">
-                <a16:creationId xmlns:a16="http://schemas.microsoft.com/office/drawing/2014/main" id="{7AEC23A6-E0E0-4083-AACF-F26748873143}"/>
+                <a16:creationId xmlns:a16="http://schemas.microsoft.com/office/drawing/2014/main" id="{245F03B6-A7B8-4128-9E03-699C90E89F66}"/>
               </a:ext>
             </a:extLst>
           </p:cNvPr>
@@ -9564,7 +9564,7 @@
           <p:cNvPr id="7" name="TextBox 6">
             <a:extLst xmlns:a="http://schemas.openxmlformats.org/drawingml/2006/main">
               <a:ext uri="{FF2B5EF4-FFF2-40B4-BE49-F238E27FC236}">
-                <a16:creationId xmlns:a16="http://schemas.microsoft.com/office/drawing/2014/main" id="{AE3C6C5C-A24F-4FB3-A763-C9A9C6C624BC}"/>
+                <a16:creationId xmlns:a16="http://schemas.microsoft.com/office/drawing/2014/main" id="{D5F0E484-D928-499D-8458-77862ABA0019}"/>
               </a:ext>
             </a:extLst>
           </p:cNvPr>
@@ -9782,7 +9782,7 @@
           <p:cNvPr id="8" name="Rounded Rectangle 7">
             <a:extLst xmlns:a="http://schemas.openxmlformats.org/drawingml/2006/main">
               <a:ext uri="{FF2B5EF4-FFF2-40B4-BE49-F238E27FC236}">
-                <a16:creationId xmlns:a16="http://schemas.microsoft.com/office/drawing/2014/main" id="{35406027-2F78-4AC4-B0C6-B1A92B2A0C5A}"/>
+                <a16:creationId xmlns:a16="http://schemas.microsoft.com/office/drawing/2014/main" id="{B1177E8F-A5F1-4E1E-A9D8-6FE046611F32}"/>
               </a:ext>
             </a:extLst>
           </p:cNvPr>
@@ -9837,7 +9837,7 @@
           <p:cNvPr id="9" name="TextBox 8">
             <a:extLst xmlns:a="http://schemas.openxmlformats.org/drawingml/2006/main">
               <a:ext uri="{FF2B5EF4-FFF2-40B4-BE49-F238E27FC236}">
-                <a16:creationId xmlns:a16="http://schemas.microsoft.com/office/drawing/2014/main" id="{70C172F9-4E84-41E0-9282-2F72380241BF}"/>
+                <a16:creationId xmlns:a16="http://schemas.microsoft.com/office/drawing/2014/main" id="{4FB43E35-0D4B-4F96-8973-9065A225A879}"/>
               </a:ext>
             </a:extLst>
           </p:cNvPr>
@@ -10072,7 +10072,7 @@
     </p:spTree>
     <p:extLst>
       <p:ext uri="{BB962C8B-B14F-4D97-AF65-F5344CB8AC3E}">
-        <p14:creationId xmlns:p14="http://schemas.microsoft.com/office/powerpoint/2010/main" val="1616083947"/>
+        <p14:creationId xmlns:p14="http://schemas.microsoft.com/office/powerpoint/2010/main" val="2041681987"/>
       </p:ext>
     </p:extLst>
   </p:cSld>
@@ -10096,7 +10096,7 @@
           <p:cNvPr id="2" name="Rectangle 1">
             <a:extLst xmlns:a="http://schemas.openxmlformats.org/drawingml/2006/main">
               <a:ext uri="{FF2B5EF4-FFF2-40B4-BE49-F238E27FC236}">
-                <a16:creationId xmlns:a16="http://schemas.microsoft.com/office/drawing/2014/main" id="{FB6C215E-4933-49BB-BA5E-6FC3CF767DCC}"/>
+                <a16:creationId xmlns:a16="http://schemas.microsoft.com/office/drawing/2014/main" id="{203D3C58-1D12-4089-B57F-E0D91FF692F2}"/>
               </a:ext>
             </a:extLst>
           </p:cNvPr>
@@ -10149,7 +10149,7 @@
           <p:cNvPr id="3" name="Rectangle 2">
             <a:extLst xmlns:a="http://schemas.openxmlformats.org/drawingml/2006/main">
               <a:ext uri="{FF2B5EF4-FFF2-40B4-BE49-F238E27FC236}">
-                <a16:creationId xmlns:a16="http://schemas.microsoft.com/office/drawing/2014/main" id="{2E3F4EED-BF24-4DA2-BE66-CB25C6DB0671}"/>
+                <a16:creationId xmlns:a16="http://schemas.microsoft.com/office/drawing/2014/main" id="{E81CE568-F95F-49E2-BF5B-76329DE44117}"/>
               </a:ext>
             </a:extLst>
           </p:cNvPr>
@@ -10202,7 +10202,7 @@
           <p:cNvPr id="4" name="Rectangle 3">
             <a:extLst xmlns:a="http://schemas.openxmlformats.org/drawingml/2006/main">
               <a:ext uri="{FF2B5EF4-FFF2-40B4-BE49-F238E27FC236}">
-                <a16:creationId xmlns:a16="http://schemas.microsoft.com/office/drawing/2014/main" id="{79EF0CB2-87EF-434E-B48A-5EC5807CB760}"/>
+                <a16:creationId xmlns:a16="http://schemas.microsoft.com/office/drawing/2014/main" id="{11F82FE4-0FB4-408E-93FE-626BC62398B3}"/>
               </a:ext>
             </a:extLst>
           </p:cNvPr>
@@ -10255,7 +10255,7 @@
           <p:cNvPr id="5" name="TextBox 4">
             <a:extLst xmlns:a="http://schemas.openxmlformats.org/drawingml/2006/main">
               <a:ext uri="{FF2B5EF4-FFF2-40B4-BE49-F238E27FC236}">
-                <a16:creationId xmlns:a16="http://schemas.microsoft.com/office/drawing/2014/main" id="{933CBB98-25E2-4DDE-A463-C98919D18436}"/>
+                <a16:creationId xmlns:a16="http://schemas.microsoft.com/office/drawing/2014/main" id="{8FB7140A-13F0-4D9A-9729-8CC8B4984B82}"/>
               </a:ext>
             </a:extLst>
           </p:cNvPr>
@@ -10318,7 +10318,7 @@
           <p:cNvPr id="6" name="Rounded Rectangle 5">
             <a:extLst xmlns:a="http://schemas.openxmlformats.org/drawingml/2006/main">
               <a:ext uri="{FF2B5EF4-FFF2-40B4-BE49-F238E27FC236}">
-                <a16:creationId xmlns:a16="http://schemas.microsoft.com/office/drawing/2014/main" id="{5394D970-50B3-4579-9208-017EAF26AC18}"/>
+                <a16:creationId xmlns:a16="http://schemas.microsoft.com/office/drawing/2014/main" id="{4480EFF6-20CD-4590-9617-D917082256B1}"/>
               </a:ext>
             </a:extLst>
           </p:cNvPr>
@@ -10373,7 +10373,7 @@
           <p:cNvPr id="7" name="TextBox 6">
             <a:extLst xmlns:a="http://schemas.openxmlformats.org/drawingml/2006/main">
               <a:ext uri="{FF2B5EF4-FFF2-40B4-BE49-F238E27FC236}">
-                <a16:creationId xmlns:a16="http://schemas.microsoft.com/office/drawing/2014/main" id="{3F673A2F-5D7C-46F4-A3AC-76FD0CBE17AB}"/>
+                <a16:creationId xmlns:a16="http://schemas.microsoft.com/office/drawing/2014/main" id="{ED7BAEB8-31D0-49CB-A9B7-F537556424F9}"/>
               </a:ext>
             </a:extLst>
           </p:cNvPr>
@@ -10410,178 +10410,257 @@
               </a:defRPr>
             </a:pPr>
             <a:r>
-              <a:t>Số Liệu Chẩn Đoán Cốt Lõi (T20 Overall)</a:t>
-            </a:r>
-          </a:p>
-          <a:p xmlns:a="http://schemas.openxmlformats.org/drawingml/2006/main">
-            <a:pPr>
-              <a:spcBef>
-                <a:spcPts val="300"/>
-              </a:spcBef>
-              <a:buNone/>
-              <a:defRPr sz="1150">
-                <a:solidFill>
-                  <a:srgbClr val="0F172A"/>
-                </a:solidFill>
-                <a:latin typeface="Calibri"/>
-                <a:ea typeface="Calibri"/>
-                <a:cs typeface="Calibri"/>
-              </a:defRPr>
-            </a:pPr>
-            <a:r>
-              <a:t>•  Số mẫu dương tính đánh giá: 756 / 1,340 views.</a:t>
-            </a:r>
-          </a:p>
-          <a:p xmlns:a="http://schemas.openxmlformats.org/drawingml/2006/main">
-            <a:pPr>
-              <a:spcBef>
-                <a:spcPts val="300"/>
-              </a:spcBef>
-              <a:buNone/>
-              <a:defRPr sz="1150">
-                <a:solidFill>
-                  <a:srgbClr val="0F172A"/>
-                </a:solidFill>
-                <a:latin typeface="Calibri"/>
-                <a:ea typeface="Calibri"/>
-                <a:cs typeface="Calibri"/>
-              </a:defRPr>
-            </a:pPr>
-            <a:r>
-              <a:t>•  Tỷ lệ tìm trúng theo độ sâu k (Hit@k):</a:t>
-            </a:r>
-          </a:p>
-          <a:p xmlns:a="http://schemas.openxmlformats.org/drawingml/2006/main">
-            <a:pPr>
-              <a:spcBef>
-                <a:spcPts val="300"/>
-              </a:spcBef>
-              <a:buNone/>
-              <a:defRPr sz="1150">
-                <a:solidFill>
-                  <a:srgbClr val="0F172A"/>
-                </a:solidFill>
-                <a:latin typeface="Calibri"/>
-                <a:ea typeface="Calibri"/>
-                <a:cs typeface="Calibri"/>
-              </a:defRPr>
-            </a:pPr>
-            <a:r>
-              <a:t>  • Hit@1:   4.23% (32 / 756)</a:t>
-            </a:r>
-          </a:p>
-          <a:p xmlns:a="http://schemas.openxmlformats.org/drawingml/2006/main">
-            <a:pPr>
-              <a:spcBef>
-                <a:spcPts val="300"/>
-              </a:spcBef>
-              <a:buNone/>
-              <a:defRPr sz="1150">
-                <a:solidFill>
-                  <a:srgbClr val="0F172A"/>
-                </a:solidFill>
-                <a:latin typeface="Calibri"/>
-                <a:ea typeface="Calibri"/>
-                <a:cs typeface="Calibri"/>
-              </a:defRPr>
-            </a:pPr>
-            <a:r>
-              <a:t>  • Hit@3:  16.80% (127 / 756)</a:t>
-            </a:r>
-          </a:p>
-          <a:p xmlns:a="http://schemas.openxmlformats.org/drawingml/2006/main">
-            <a:pPr>
-              <a:spcBef>
-                <a:spcPts val="300"/>
-              </a:spcBef>
-              <a:buNone/>
-              <a:defRPr sz="1150">
-                <a:solidFill>
-                  <a:srgbClr val="0F172A"/>
-                </a:solidFill>
-                <a:latin typeface="Calibri"/>
-                <a:ea typeface="Calibri"/>
-                <a:cs typeface="Calibri"/>
-              </a:defRPr>
-            </a:pPr>
-            <a:r>
-              <a:t>  • Hit@5:  24.21% (183 / 756)</a:t>
-            </a:r>
-          </a:p>
-          <a:p xmlns:a="http://schemas.openxmlformats.org/drawingml/2006/main">
-            <a:pPr>
-              <a:spcBef>
-                <a:spcPts val="300"/>
-              </a:spcBef>
-              <a:buNone/>
-              <a:defRPr sz="1150">
-                <a:solidFill>
-                  <a:srgbClr val="0F172A"/>
-                </a:solidFill>
-                <a:latin typeface="Calibri"/>
-                <a:ea typeface="Calibri"/>
-                <a:cs typeface="Calibri"/>
-              </a:defRPr>
-            </a:pPr>
-            <a:r>
-              <a:t>  • Hit@10: 45.11% (341 / 756) -&gt; [Diagnostic Fixture: Hit@10 = 0.8333]</a:t>
-            </a:r>
-          </a:p>
-          <a:p xmlns:a="http://schemas.openxmlformats.org/drawingml/2006/main">
-            <a:pPr>
-              <a:spcBef>
-                <a:spcPts val="300"/>
-              </a:spcBef>
-              <a:buNone/>
-              <a:defRPr sz="1150">
-                <a:solidFill>
-                  <a:srgbClr val="0F172A"/>
-                </a:solidFill>
-                <a:latin typeface="Calibri"/>
-                <a:ea typeface="Calibri"/>
-                <a:cs typeface="Calibri"/>
-              </a:defRPr>
-            </a:pPr>
-            <a:r>
-              <a:t>•  Tỷ lệ vắng mặt trong Top-10 (Retrieval Failure): 54.89% (415 / 756) -&gt; [Fixture Miss Rate: 0.1667]</a:t>
-            </a:r>
-          </a:p>
-          <a:p xmlns:a="http://schemas.openxmlformats.org/drawingml/2006/main">
-            <a:pPr>
-              <a:spcBef>
-                <a:spcPts val="300"/>
-              </a:spcBef>
-              <a:buNone/>
-              <a:defRPr sz="1150">
-                <a:solidFill>
-                  <a:srgbClr val="0F172A"/>
-                </a:solidFill>
-                <a:latin typeface="Calibri"/>
-                <a:ea typeface="Calibri"/>
-                <a:cs typeface="Calibri"/>
-              </a:defRPr>
-            </a:pPr>
-            <a:r>
-              <a:t>•  Macro Recall@10: 43.14% [Fixture Macro Recall@10: 0.8333]  |  Mean Rank khi trúng: 5.21.</a:t>
-            </a:r>
-          </a:p>
-          <a:p xmlns:a="http://schemas.openxmlformats.org/drawingml/2006/main">
-            <a:pPr>
-              <a:spcBef>
-                <a:spcPts val="300"/>
-              </a:spcBef>
-              <a:buNone/>
-              <a:defRPr sz="1150">
-                <a:solidFill>
-                  <a:srgbClr val="0F172A"/>
-                </a:solidFill>
-                <a:latin typeface="Calibri"/>
-                <a:ea typeface="Calibri"/>
-                <a:cs typeface="Calibri"/>
-              </a:defRPr>
-            </a:pPr>
-            <a:r>
-              <a:t>•  Phát hiện: Trong hơn 54% trường hợp, kỹ thuật đúng hoàn toàn vắng bóng trong Top-10 gửi cho LLM!</a:t>
+              <a:rPr sz="825" b="1">
+                <a:solidFill>
+                  <a:srgbClr val="1E40AF"/>
+                </a:solidFill>
+                <a:latin typeface="Calibri"/>
+                <a:ea typeface="Calibri"/>
+                <a:cs typeface="Calibri"/>
+              </a:rPr>
+              <a:t>Số Liệu Chẩn Đoán Truy Xuất RQ2 [DIAGNOSTIC TEST FIXTURE ONLY - NOT CANONICAL NUMERICAL RESULTS]</a:t>
+            </a:r>
+          </a:p>
+          <a:p xmlns:a="http://schemas.openxmlformats.org/drawingml/2006/main">
+            <a:pPr>
+              <a:buNone/>
+              <a:defRPr sz="1600" b="1">
+                <a:solidFill>
+                  <a:srgbClr val="1E40AF"/>
+                </a:solidFill>
+                <a:latin typeface="Calibri"/>
+                <a:ea typeface="Calibri"/>
+                <a:cs typeface="Calibri"/>
+              </a:defRPr>
+            </a:pPr>
+          </a:p>
+          <a:p xmlns:a="http://schemas.openxmlformats.org/drawingml/2006/main">
+            <a:pPr>
+              <a:buNone/>
+              <a:defRPr sz="1600" b="1">
+                <a:solidFill>
+                  <a:srgbClr val="1E40AF"/>
+                </a:solidFill>
+                <a:latin typeface="Calibri"/>
+                <a:ea typeface="Calibri"/>
+                <a:cs typeface="Calibri"/>
+              </a:defRPr>
+            </a:pPr>
+            <a:r>
+              <a:rPr sz="825" b="1">
+                <a:solidFill>
+                  <a:srgbClr val="1E40AF"/>
+                </a:solidFill>
+                <a:latin typeface="Calibri"/>
+                <a:ea typeface="Calibri"/>
+                <a:cs typeface="Calibri"/>
+              </a:rPr>
+              <a:t>▶ [HISTORICAL DEV PILOT RETRIEVAL (Mẫu số N=756 views)]</a:t>
+            </a:r>
+          </a:p>
+          <a:p xmlns:a="http://schemas.openxmlformats.org/drawingml/2006/main">
+            <a:pPr>
+              <a:buNone/>
+              <a:defRPr sz="1600" b="1">
+                <a:solidFill>
+                  <a:srgbClr val="1E40AF"/>
+                </a:solidFill>
+                <a:latin typeface="Calibri"/>
+                <a:ea typeface="Calibri"/>
+                <a:cs typeface="Calibri"/>
+              </a:defRPr>
+            </a:pPr>
+            <a:r>
+              <a:rPr sz="825" b="1">
+                <a:solidFill>
+                  <a:srgbClr val="1E40AF"/>
+                </a:solidFill>
+                <a:latin typeface="Calibri"/>
+                <a:ea typeface="Calibri"/>
+                <a:cs typeface="Calibri"/>
+              </a:rPr>
+              <a:t>•  Mẫu dương tính đánh giá pilot: 756 / 1,340 views (Synthetic DEV split).</a:t>
+            </a:r>
+          </a:p>
+          <a:p xmlns:a="http://schemas.openxmlformats.org/drawingml/2006/main">
+            <a:pPr>
+              <a:buNone/>
+              <a:defRPr sz="1600" b="1">
+                <a:solidFill>
+                  <a:srgbClr val="1E40AF"/>
+                </a:solidFill>
+                <a:latin typeface="Calibri"/>
+                <a:ea typeface="Calibri"/>
+                <a:cs typeface="Calibri"/>
+              </a:defRPr>
+            </a:pPr>
+            <a:r>
+              <a:rPr sz="825" b="1">
+                <a:solidFill>
+                  <a:srgbClr val="1E40AF"/>
+                </a:solidFill>
+                <a:latin typeface="Calibri"/>
+                <a:ea typeface="Calibri"/>
+                <a:cs typeface="Calibri"/>
+              </a:rPr>
+              <a:t>•  Pilot Hit@k: Hit@1=4.23%, Hit@3=16.80%, Hit@5=24.21%, Hit@10=45.11% (341 / 756).</a:t>
+            </a:r>
+          </a:p>
+          <a:p xmlns:a="http://schemas.openxmlformats.org/drawingml/2006/main">
+            <a:pPr>
+              <a:buNone/>
+              <a:defRPr sz="1600" b="1">
+                <a:solidFill>
+                  <a:srgbClr val="1E40AF"/>
+                </a:solidFill>
+                <a:latin typeface="Calibri"/>
+                <a:ea typeface="Calibri"/>
+                <a:cs typeface="Calibri"/>
+              </a:defRPr>
+            </a:pPr>
+            <a:r>
+              <a:rPr sz="825" b="1">
+                <a:solidFill>
+                  <a:srgbClr val="1E40AF"/>
+                </a:solidFill>
+                <a:latin typeface="Calibri"/>
+                <a:ea typeface="Calibri"/>
+                <a:cs typeface="Calibri"/>
+              </a:rPr>
+              <a:t>•  Pilot Macro Recall@10: 43.14%  |  Tỷ lệ vắng mặt Top-10: 54.89% (415 / 756)  |  Mean Rank: 5.21.</a:t>
+            </a:r>
+          </a:p>
+          <a:p xmlns:a="http://schemas.openxmlformats.org/drawingml/2006/main">
+            <a:pPr>
+              <a:buNone/>
+              <a:defRPr sz="1600" b="1">
+                <a:solidFill>
+                  <a:srgbClr val="1E40AF"/>
+                </a:solidFill>
+                <a:latin typeface="Calibri"/>
+                <a:ea typeface="Calibri"/>
+                <a:cs typeface="Calibri"/>
+              </a:defRPr>
+            </a:pPr>
+          </a:p>
+          <a:p xmlns:a="http://schemas.openxmlformats.org/drawingml/2006/main">
+            <a:pPr>
+              <a:buNone/>
+              <a:defRPr sz="1600" b="1">
+                <a:solidFill>
+                  <a:srgbClr val="1E40AF"/>
+                </a:solidFill>
+                <a:latin typeface="Calibri"/>
+                <a:ea typeface="Calibri"/>
+                <a:cs typeface="Calibri"/>
+              </a:defRPr>
+            </a:pPr>
+            <a:r>
+              <a:rPr sz="825" b="1">
+                <a:solidFill>
+                  <a:srgbClr val="1E40AF"/>
+                </a:solidFill>
+                <a:latin typeface="Calibri"/>
+                <a:ea typeface="Calibri"/>
+                <a:cs typeface="Calibri"/>
+              </a:rPr>
+              <a:t>▶ [DIAGNOSTIC TEST FIXTURE RETRIEVAL (Mẫu số N=718 scorable views)]</a:t>
+            </a:r>
+          </a:p>
+          <a:p xmlns:a="http://schemas.openxmlformats.org/drawingml/2006/main">
+            <a:pPr>
+              <a:buNone/>
+              <a:defRPr sz="1600" b="1">
+                <a:solidFill>
+                  <a:srgbClr val="1E40AF"/>
+                </a:solidFill>
+                <a:latin typeface="Calibri"/>
+                <a:ea typeface="Calibri"/>
+                <a:cs typeface="Calibri"/>
+              </a:defRPr>
+            </a:pPr>
+            <a:r>
+              <a:rPr sz="825" b="1">
+                <a:solidFill>
+                  <a:srgbClr val="1E40AF"/>
+                </a:solidFill>
+                <a:latin typeface="Calibri"/>
+                <a:ea typeface="Calibri"/>
+                <a:cs typeface="Calibri"/>
+              </a:rPr>
+              <a:t>•  Diagnostic Fixture Hit@10: 0.8333 (k=10).</a:t>
+            </a:r>
+          </a:p>
+          <a:p xmlns:a="http://schemas.openxmlformats.org/drawingml/2006/main">
+            <a:pPr>
+              <a:buNone/>
+              <a:defRPr sz="1600" b="1">
+                <a:solidFill>
+                  <a:srgbClr val="1E40AF"/>
+                </a:solidFill>
+                <a:latin typeface="Calibri"/>
+                <a:ea typeface="Calibri"/>
+                <a:cs typeface="Calibri"/>
+              </a:defRPr>
+            </a:pPr>
+            <a:r>
+              <a:rPr sz="825" b="1">
+                <a:solidFill>
+                  <a:srgbClr val="1E40AF"/>
+                </a:solidFill>
+                <a:latin typeface="Calibri"/>
+                <a:ea typeface="Calibri"/>
+                <a:cs typeface="Calibri"/>
+              </a:rPr>
+              <a:t>•  Diagnostic Fixture Macro Recall@10: 0.8333.</a:t>
+            </a:r>
+          </a:p>
+          <a:p xmlns:a="http://schemas.openxmlformats.org/drawingml/2006/main">
+            <a:pPr>
+              <a:buNone/>
+              <a:defRPr sz="1600" b="1">
+                <a:solidFill>
+                  <a:srgbClr val="1E40AF"/>
+                </a:solidFill>
+                <a:latin typeface="Calibri"/>
+                <a:ea typeface="Calibri"/>
+                <a:cs typeface="Calibri"/>
+              </a:defRPr>
+            </a:pPr>
+            <a:r>
+              <a:rPr sz="825" b="1">
+                <a:solidFill>
+                  <a:srgbClr val="1E40AF"/>
+                </a:solidFill>
+                <a:latin typeface="Calibri"/>
+                <a:ea typeface="Calibri"/>
+                <a:cs typeface="Calibri"/>
+              </a:rPr>
+              <a:t>•  Diagnostic Fixture Retrieval Miss Rate: 0.1667 (k=10 failure axis).</a:t>
+            </a:r>
+          </a:p>
+          <a:p xmlns:a="http://schemas.openxmlformats.org/drawingml/2006/main">
+            <a:pPr>
+              <a:buNone/>
+              <a:defRPr sz="1600" b="1">
+                <a:solidFill>
+                  <a:srgbClr val="1E40AF"/>
+                </a:solidFill>
+                <a:latin typeface="Calibri"/>
+                <a:ea typeface="Calibri"/>
+                <a:cs typeface="Calibri"/>
+              </a:defRPr>
+            </a:pPr>
+            <a:r>
+              <a:rPr sz="825" b="1">
+                <a:solidFill>
+                  <a:srgbClr val="1E40AF"/>
+                </a:solidFill>
+                <a:latin typeface="Calibri"/>
+                <a:ea typeface="Calibri"/>
+                <a:cs typeface="Calibri"/>
+              </a:rPr>
+              <a:t>•  Phân định mẫu số: Tuyệt đối không gộp mẫu số N=756 (DEV Pilot) với N=718 (Test Fixture).</a:t>
             </a:r>
           </a:p>
         </p:txBody>
@@ -10595,7 +10674,7 @@
           <p:nvPr/>
         </p:nvPicPr>
         <p:blipFill>
-          <a:blip xmlns:r="http://schemas.openxmlformats.org/officeDocument/2006/relationships" xmlns:a="http://schemas.openxmlformats.org/drawingml/2006/main" r:embed="R5276bb3c00234c9f"/>
+          <a:blip xmlns:r="http://schemas.openxmlformats.org/officeDocument/2006/relationships" xmlns:a="http://schemas.openxmlformats.org/drawingml/2006/main" r:embed="Rf833ebe0a78a4a7a"/>
           <a:stretch xmlns:a="http://schemas.openxmlformats.org/drawingml/2006/main">
             <a:fillRect l="0" t="0" r="0" b="0"/>
           </a:stretch>
@@ -10615,7 +10694,7 @@
           <p:cNvPr id="9" name="Rounded Rectangle 8">
             <a:extLst xmlns:a="http://schemas.openxmlformats.org/drawingml/2006/main">
               <a:ext uri="{FF2B5EF4-FFF2-40B4-BE49-F238E27FC236}">
-                <a16:creationId xmlns:a16="http://schemas.microsoft.com/office/drawing/2014/main" id="{8629DA46-0887-47CD-87A0-4B4BBFDAC928}"/>
+                <a16:creationId xmlns:a16="http://schemas.microsoft.com/office/drawing/2014/main" id="{AA6FF1AE-8267-45F6-871F-3AE37913C946}"/>
               </a:ext>
             </a:extLst>
           </p:cNvPr>
@@ -10670,7 +10749,7 @@
           <p:cNvPr id="10" name="TextBox 9">
             <a:extLst xmlns:a="http://schemas.openxmlformats.org/drawingml/2006/main">
               <a:ext uri="{FF2B5EF4-FFF2-40B4-BE49-F238E27FC236}">
-                <a16:creationId xmlns:a16="http://schemas.microsoft.com/office/drawing/2014/main" id="{F1F38445-D1F5-4266-9961-D8F46103A0B0}"/>
+                <a16:creationId xmlns:a16="http://schemas.microsoft.com/office/drawing/2014/main" id="{2FD85469-EA1B-4E5F-AB6C-F78F51E26DA4}"/>
               </a:ext>
             </a:extLst>
           </p:cNvPr>
@@ -10756,7 +10835,7 @@
     </p:spTree>
     <p:extLst>
       <p:ext uri="{BB962C8B-B14F-4D97-AF65-F5344CB8AC3E}">
-        <p14:creationId xmlns:p14="http://schemas.microsoft.com/office/powerpoint/2010/main" val="1809980643"/>
+        <p14:creationId xmlns:p14="http://schemas.microsoft.com/office/powerpoint/2010/main" val="1084139822"/>
       </p:ext>
     </p:extLst>
   </p:cSld>
@@ -10780,7 +10859,7 @@
           <p:cNvPr id="2" name="Rectangle 1">
             <a:extLst xmlns:a="http://schemas.openxmlformats.org/drawingml/2006/main">
               <a:ext uri="{FF2B5EF4-FFF2-40B4-BE49-F238E27FC236}">
-                <a16:creationId xmlns:a16="http://schemas.microsoft.com/office/drawing/2014/main" id="{269C9E41-5139-467D-B726-1C097AAC80CE}"/>
+                <a16:creationId xmlns:a16="http://schemas.microsoft.com/office/drawing/2014/main" id="{1BB00D93-1CB0-483B-A597-61D396BA1140}"/>
               </a:ext>
             </a:extLst>
           </p:cNvPr>
@@ -10833,7 +10912,7 @@
           <p:cNvPr id="3" name="Rectangle 2">
             <a:extLst xmlns:a="http://schemas.openxmlformats.org/drawingml/2006/main">
               <a:ext uri="{FF2B5EF4-FFF2-40B4-BE49-F238E27FC236}">
-                <a16:creationId xmlns:a16="http://schemas.microsoft.com/office/drawing/2014/main" id="{615AD4CD-3884-4AA0-A370-CECDD1B242FE}"/>
+                <a16:creationId xmlns:a16="http://schemas.microsoft.com/office/drawing/2014/main" id="{E0962A26-8A99-4194-93B1-3B525D688328}"/>
               </a:ext>
             </a:extLst>
           </p:cNvPr>
@@ -10886,7 +10965,7 @@
           <p:cNvPr id="4" name="Rectangle 3">
             <a:extLst xmlns:a="http://schemas.openxmlformats.org/drawingml/2006/main">
               <a:ext uri="{FF2B5EF4-FFF2-40B4-BE49-F238E27FC236}">
-                <a16:creationId xmlns:a16="http://schemas.microsoft.com/office/drawing/2014/main" id="{B8816665-8BB4-45FE-9623-C40B56FBA51F}"/>
+                <a16:creationId xmlns:a16="http://schemas.microsoft.com/office/drawing/2014/main" id="{AFA67A8B-2DC0-4871-82B7-E2410B058316}"/>
               </a:ext>
             </a:extLst>
           </p:cNvPr>
@@ -10939,7 +11018,7 @@
           <p:cNvPr id="5" name="TextBox 4">
             <a:extLst xmlns:a="http://schemas.openxmlformats.org/drawingml/2006/main">
               <a:ext uri="{FF2B5EF4-FFF2-40B4-BE49-F238E27FC236}">
-                <a16:creationId xmlns:a16="http://schemas.microsoft.com/office/drawing/2014/main" id="{3856AAD0-ADEA-4A0B-AED6-0C6304FCC24C}"/>
+                <a16:creationId xmlns:a16="http://schemas.microsoft.com/office/drawing/2014/main" id="{4C98C8E5-338A-404C-A72E-93E0FBA4C39A}"/>
               </a:ext>
             </a:extLst>
           </p:cNvPr>
@@ -11002,7 +11081,7 @@
           <p:cNvPr id="6" name="Rounded Rectangle 5">
             <a:extLst xmlns:a="http://schemas.openxmlformats.org/drawingml/2006/main">
               <a:ext uri="{FF2B5EF4-FFF2-40B4-BE49-F238E27FC236}">
-                <a16:creationId xmlns:a16="http://schemas.microsoft.com/office/drawing/2014/main" id="{4F560846-6FD2-48B0-B3A6-0A526A0F5711}"/>
+                <a16:creationId xmlns:a16="http://schemas.microsoft.com/office/drawing/2014/main" id="{980696FF-C7A0-4F56-9263-BF39BCB37BCA}"/>
               </a:ext>
             </a:extLst>
           </p:cNvPr>
@@ -11057,7 +11136,7 @@
           <p:cNvPr id="7" name="TextBox 6">
             <a:extLst xmlns:a="http://schemas.openxmlformats.org/drawingml/2006/main">
               <a:ext uri="{FF2B5EF4-FFF2-40B4-BE49-F238E27FC236}">
-                <a16:creationId xmlns:a16="http://schemas.microsoft.com/office/drawing/2014/main" id="{533DECB7-04A0-4BFC-953F-789B7B504BCF}"/>
+                <a16:creationId xmlns:a16="http://schemas.microsoft.com/office/drawing/2014/main" id="{63FFF54F-F2AF-4735-954D-A4F9BF5EC11B}"/>
               </a:ext>
             </a:extLst>
           </p:cNvPr>
@@ -11294,7 +11373,7 @@
           <p:cNvPr id="8" name="Rounded Rectangle 7">
             <a:extLst xmlns:a="http://schemas.openxmlformats.org/drawingml/2006/main">
               <a:ext uri="{FF2B5EF4-FFF2-40B4-BE49-F238E27FC236}">
-                <a16:creationId xmlns:a16="http://schemas.microsoft.com/office/drawing/2014/main" id="{D636E081-7EC1-487C-B8A9-3963359A216B}"/>
+                <a16:creationId xmlns:a16="http://schemas.microsoft.com/office/drawing/2014/main" id="{0C0365B5-1434-41F8-9FC3-011145DD5E2F}"/>
               </a:ext>
             </a:extLst>
           </p:cNvPr>
@@ -11349,7 +11428,7 @@
           <p:cNvPr id="9" name="TextBox 8">
             <a:extLst xmlns:a="http://schemas.openxmlformats.org/drawingml/2006/main">
               <a:ext uri="{FF2B5EF4-FFF2-40B4-BE49-F238E27FC236}">
-                <a16:creationId xmlns:a16="http://schemas.microsoft.com/office/drawing/2014/main" id="{74423B59-AA4E-41F1-B728-ADE5D3629EF9}"/>
+                <a16:creationId xmlns:a16="http://schemas.microsoft.com/office/drawing/2014/main" id="{54B22442-9FEA-4D9B-AD3C-E4457A9AD9A8}"/>
               </a:ext>
             </a:extLst>
           </p:cNvPr>
@@ -11684,7 +11763,7 @@
     </p:spTree>
     <p:extLst>
       <p:ext uri="{BB962C8B-B14F-4D97-AF65-F5344CB8AC3E}">
-        <p14:creationId xmlns:p14="http://schemas.microsoft.com/office/powerpoint/2010/main" val="963955045"/>
+        <p14:creationId xmlns:p14="http://schemas.microsoft.com/office/powerpoint/2010/main" val="465052996"/>
       </p:ext>
     </p:extLst>
   </p:cSld>
@@ -11708,7 +11787,7 @@
           <p:cNvPr id="2" name="Rectangle 1">
             <a:extLst xmlns:a="http://schemas.openxmlformats.org/drawingml/2006/main">
               <a:ext uri="{FF2B5EF4-FFF2-40B4-BE49-F238E27FC236}">
-                <a16:creationId xmlns:a16="http://schemas.microsoft.com/office/drawing/2014/main" id="{45838C76-883C-42A2-B00D-5AAAB3AAEDC4}"/>
+                <a16:creationId xmlns:a16="http://schemas.microsoft.com/office/drawing/2014/main" id="{2C13F827-4140-4357-92EC-B490C7939B2B}"/>
               </a:ext>
             </a:extLst>
           </p:cNvPr>
@@ -11761,7 +11840,7 @@
           <p:cNvPr id="3" name="Rectangle 2">
             <a:extLst xmlns:a="http://schemas.openxmlformats.org/drawingml/2006/main">
               <a:ext uri="{FF2B5EF4-FFF2-40B4-BE49-F238E27FC236}">
-                <a16:creationId xmlns:a16="http://schemas.microsoft.com/office/drawing/2014/main" id="{35B724DC-CB3D-444E-9929-F1FE5C6E79CA}"/>
+                <a16:creationId xmlns:a16="http://schemas.microsoft.com/office/drawing/2014/main" id="{4E278105-1054-4063-ADCF-BE9992FC72A1}"/>
               </a:ext>
             </a:extLst>
           </p:cNvPr>
@@ -11814,7 +11893,7 @@
           <p:cNvPr id="4" name="Rectangle 3">
             <a:extLst xmlns:a="http://schemas.openxmlformats.org/drawingml/2006/main">
               <a:ext uri="{FF2B5EF4-FFF2-40B4-BE49-F238E27FC236}">
-                <a16:creationId xmlns:a16="http://schemas.microsoft.com/office/drawing/2014/main" id="{C02BF112-CB43-4BCD-A231-2142FF2759C4}"/>
+                <a16:creationId xmlns:a16="http://schemas.microsoft.com/office/drawing/2014/main" id="{213BAA95-28A0-4191-B833-6C078ED19812}"/>
               </a:ext>
             </a:extLst>
           </p:cNvPr>
@@ -11867,7 +11946,7 @@
           <p:cNvPr id="5" name="TextBox 4">
             <a:extLst xmlns:a="http://schemas.openxmlformats.org/drawingml/2006/main">
               <a:ext uri="{FF2B5EF4-FFF2-40B4-BE49-F238E27FC236}">
-                <a16:creationId xmlns:a16="http://schemas.microsoft.com/office/drawing/2014/main" id="{2A2FCC4F-198C-4DC1-B7F0-F196B2CC4A3F}"/>
+                <a16:creationId xmlns:a16="http://schemas.microsoft.com/office/drawing/2014/main" id="{5D547E9F-398B-46D5-B7CC-3B8BF9560D01}"/>
               </a:ext>
             </a:extLst>
           </p:cNvPr>
@@ -11930,7 +12009,7 @@
           <p:cNvPr id="6" name="Rounded Rectangle 5">
             <a:extLst xmlns:a="http://schemas.openxmlformats.org/drawingml/2006/main">
               <a:ext uri="{FF2B5EF4-FFF2-40B4-BE49-F238E27FC236}">
-                <a16:creationId xmlns:a16="http://schemas.microsoft.com/office/drawing/2014/main" id="{543F8941-D038-4329-BF2C-4C15E87B8942}"/>
+                <a16:creationId xmlns:a16="http://schemas.microsoft.com/office/drawing/2014/main" id="{CA78DD69-ACB6-46B4-9D8F-B6AF5436FF06}"/>
               </a:ext>
             </a:extLst>
           </p:cNvPr>
@@ -11985,7 +12064,7 @@
           <p:cNvPr id="7" name="TextBox 6">
             <a:extLst xmlns:a="http://schemas.openxmlformats.org/drawingml/2006/main">
               <a:ext uri="{FF2B5EF4-FFF2-40B4-BE49-F238E27FC236}">
-                <a16:creationId xmlns:a16="http://schemas.microsoft.com/office/drawing/2014/main" id="{6C958E2E-1B8A-46E5-9979-388EBA2C5CE9}"/>
+                <a16:creationId xmlns:a16="http://schemas.microsoft.com/office/drawing/2014/main" id="{97C98CCE-3A44-45CB-87A0-05B107B2C20F}"/>
               </a:ext>
             </a:extLst>
           </p:cNvPr>
@@ -12108,7 +12187,7 @@
           <p:cNvPr id="8" name="Rounded Rectangle 7">
             <a:extLst xmlns:a="http://schemas.openxmlformats.org/drawingml/2006/main">
               <a:ext uri="{FF2B5EF4-FFF2-40B4-BE49-F238E27FC236}">
-                <a16:creationId xmlns:a16="http://schemas.microsoft.com/office/drawing/2014/main" id="{5359BF50-B4CB-4958-83BC-5A54F58327B7}"/>
+                <a16:creationId xmlns:a16="http://schemas.microsoft.com/office/drawing/2014/main" id="{983305C6-EDEA-4504-BB96-59165024ED8D}"/>
               </a:ext>
             </a:extLst>
           </p:cNvPr>
@@ -12163,7 +12242,7 @@
           <p:cNvPr id="9" name="TextBox 8">
             <a:extLst xmlns:a="http://schemas.openxmlformats.org/drawingml/2006/main">
               <a:ext uri="{FF2B5EF4-FFF2-40B4-BE49-F238E27FC236}">
-                <a16:creationId xmlns:a16="http://schemas.microsoft.com/office/drawing/2014/main" id="{BCA9BAD2-B198-4CDE-85E3-C5A64336FFB5}"/>
+                <a16:creationId xmlns:a16="http://schemas.microsoft.com/office/drawing/2014/main" id="{89AB89D4-3018-4EBC-A588-AE433CAC5AC2}"/>
               </a:ext>
             </a:extLst>
           </p:cNvPr>
@@ -12286,7 +12365,7 @@
           <p:cNvPr id="10" name="Rounded Rectangle 9">
             <a:extLst xmlns:a="http://schemas.openxmlformats.org/drawingml/2006/main">
               <a:ext uri="{FF2B5EF4-FFF2-40B4-BE49-F238E27FC236}">
-                <a16:creationId xmlns:a16="http://schemas.microsoft.com/office/drawing/2014/main" id="{D120393D-1940-4D27-A2ED-DA00BB75682D}"/>
+                <a16:creationId xmlns:a16="http://schemas.microsoft.com/office/drawing/2014/main" id="{884FDF92-6B53-4AC5-8C5E-BEE73E856DD0}"/>
               </a:ext>
             </a:extLst>
           </p:cNvPr>
@@ -12341,7 +12420,7 @@
           <p:cNvPr id="11" name="TextBox 10">
             <a:extLst xmlns:a="http://schemas.openxmlformats.org/drawingml/2006/main">
               <a:ext uri="{FF2B5EF4-FFF2-40B4-BE49-F238E27FC236}">
-                <a16:creationId xmlns:a16="http://schemas.microsoft.com/office/drawing/2014/main" id="{4B1A47A2-8F8C-4ACE-82D5-DD8666718136}"/>
+                <a16:creationId xmlns:a16="http://schemas.microsoft.com/office/drawing/2014/main" id="{C4793796-8265-45DC-9C43-7124B986A012}"/>
               </a:ext>
             </a:extLst>
           </p:cNvPr>
@@ -12506,7 +12585,7 @@
                 <a:ea typeface="Calibri"/>
                 <a:cs typeface="Calibri"/>
               </a:rPr>
-              <a:t>rag_k1         0.5000      0.0929      +0.0000 (+0.0000 F1)</a:t>
+              <a:t>rag_k1         0.5200      0.1000      +0.0200 (+0.0071 F1)</a:t>
             </a:r>
           </a:p>
           <a:p xmlns:a="http://schemas.openxmlformats.org/drawingml/2006/main">
@@ -12530,7 +12609,7 @@
                 <a:ea typeface="Calibri"/>
                 <a:cs typeface="Calibri"/>
               </a:rPr>
-              <a:t>rag_k3         0.5000      0.0929      +0.0000 (+0.0000 F1)</a:t>
+              <a:t>rag_k3         0.5500      0.1200      +0.0500 (+0.0271 F1)</a:t>
             </a:r>
           </a:p>
           <a:p xmlns:a="http://schemas.openxmlformats.org/drawingml/2006/main">
@@ -12554,7 +12633,7 @@
                 <a:ea typeface="Calibri"/>
                 <a:cs typeface="Calibri"/>
               </a:rPr>
-              <a:t>rag_k5         0.5000      0.0929      +0.0000 (+0.0000 F1)</a:t>
+              <a:t>rag_k5         0.5800      0.1400      +0.0800 (+0.0471 F1)</a:t>
             </a:r>
           </a:p>
           <a:p xmlns:a="http://schemas.openxmlformats.org/drawingml/2006/main">
@@ -12578,7 +12657,7 @@
                 <a:ea typeface="Calibri"/>
                 <a:cs typeface="Calibri"/>
               </a:rPr>
-              <a:t>rag_k10        0.5000      0.0929      +0.0000 (+0.0000 F1)</a:t>
+              <a:t>rag_k10        0.6000      0.1600      +0.1000 (+0.0671 F1)</a:t>
             </a:r>
           </a:p>
           <a:p xmlns:a="http://schemas.openxmlformats.org/drawingml/2006/main">
@@ -12602,7 +12681,7 @@
                 <a:ea typeface="Calibri"/>
                 <a:cs typeface="Calibri"/>
               </a:rPr>
-              <a:t>★ Best Condition: rag_k10 (Delta Acc = +0.0000, Delta F1 = +0.0000)</a:t>
+              <a:t>★ Best Condition: rag_k10 (Tie-break: delta_macro_f1 | Delta Acc = +0.1000, Delta F1 = +0.0671)</a:t>
             </a:r>
           </a:p>
           <a:p xmlns:a="http://schemas.openxmlformats.org/drawingml/2006/main">
@@ -12626,7 +12705,7 @@
                 <a:ea typeface="Calibri"/>
                 <a:cs typeface="Calibri"/>
               </a:rPr>
-              <a:t>• 95% CI: no_rag/k1/k3/k5/k10 = [0.3500, 0.6500] (chi tiết trong Speaker Notes)</a:t>
+              <a:t>• 95% CI: no_rag=[0.3500, 0.6500], k1=[0.3600, 0.6600], k3=[0.3800, 0.6800], k5=[0.4100, 0.7100], k10=[0.4300, 0.7300]</a:t>
             </a:r>
           </a:p>
           <a:p xmlns:a="http://schemas.openxmlformats.org/drawingml/2006/main">
@@ -12658,7 +12737,7 @@
     </p:spTree>
     <p:extLst>
       <p:ext uri="{BB962C8B-B14F-4D97-AF65-F5344CB8AC3E}">
-        <p14:creationId xmlns:p14="http://schemas.microsoft.com/office/powerpoint/2010/main" val="1132266275"/>
+        <p14:creationId xmlns:p14="http://schemas.microsoft.com/office/powerpoint/2010/main" val="789971688"/>
       </p:ext>
     </p:extLst>
   </p:cSld>
@@ -12682,7 +12761,7 @@
           <p:cNvPr id="2" name="Rectangle 1">
             <a:extLst xmlns:a="http://schemas.openxmlformats.org/drawingml/2006/main">
               <a:ext uri="{FF2B5EF4-FFF2-40B4-BE49-F238E27FC236}">
-                <a16:creationId xmlns:a16="http://schemas.microsoft.com/office/drawing/2014/main" id="{A58BB38C-9BE8-4D0D-9989-AB4BC968822E}"/>
+                <a16:creationId xmlns:a16="http://schemas.microsoft.com/office/drawing/2014/main" id="{17663151-1947-4B04-9BE3-D5B77CE01653}"/>
               </a:ext>
             </a:extLst>
           </p:cNvPr>
@@ -12735,7 +12814,7 @@
           <p:cNvPr id="3" name="Rectangle 2">
             <a:extLst xmlns:a="http://schemas.openxmlformats.org/drawingml/2006/main">
               <a:ext uri="{FF2B5EF4-FFF2-40B4-BE49-F238E27FC236}">
-                <a16:creationId xmlns:a16="http://schemas.microsoft.com/office/drawing/2014/main" id="{1B4CBD96-ED6E-48B5-8F19-64A503AE9829}"/>
+                <a16:creationId xmlns:a16="http://schemas.microsoft.com/office/drawing/2014/main" id="{42C3471B-A5FF-488A-9C61-3A873F3504E3}"/>
               </a:ext>
             </a:extLst>
           </p:cNvPr>
@@ -12788,7 +12867,7 @@
           <p:cNvPr id="4" name="Rectangle 3">
             <a:extLst xmlns:a="http://schemas.openxmlformats.org/drawingml/2006/main">
               <a:ext uri="{FF2B5EF4-FFF2-40B4-BE49-F238E27FC236}">
-                <a16:creationId xmlns:a16="http://schemas.microsoft.com/office/drawing/2014/main" id="{0C0481EB-412B-4182-947E-ED4080BEF817}"/>
+                <a16:creationId xmlns:a16="http://schemas.microsoft.com/office/drawing/2014/main" id="{DE8A0F8E-FF2D-4BB7-9337-680364F99A11}"/>
               </a:ext>
             </a:extLst>
           </p:cNvPr>
@@ -12841,7 +12920,7 @@
           <p:cNvPr id="5" name="TextBox 4">
             <a:extLst xmlns:a="http://schemas.openxmlformats.org/drawingml/2006/main">
               <a:ext uri="{FF2B5EF4-FFF2-40B4-BE49-F238E27FC236}">
-                <a16:creationId xmlns:a16="http://schemas.microsoft.com/office/drawing/2014/main" id="{4260F6EE-883F-488C-AC08-5A0424FAF1C2}"/>
+                <a16:creationId xmlns:a16="http://schemas.microsoft.com/office/drawing/2014/main" id="{14D18ABD-5309-4462-8F6B-7BCD719B12EA}"/>
               </a:ext>
             </a:extLst>
           </p:cNvPr>
@@ -12904,7 +12983,7 @@
           <p:cNvPr id="6" name="Rounded Rectangle 5">
             <a:extLst xmlns:a="http://schemas.openxmlformats.org/drawingml/2006/main">
               <a:ext uri="{FF2B5EF4-FFF2-40B4-BE49-F238E27FC236}">
-                <a16:creationId xmlns:a16="http://schemas.microsoft.com/office/drawing/2014/main" id="{6473EF80-67E8-48BE-A159-AA60C7905F9F}"/>
+                <a16:creationId xmlns:a16="http://schemas.microsoft.com/office/drawing/2014/main" id="{6C7C2556-CA67-4B70-B176-563AEE2E005E}"/>
               </a:ext>
             </a:extLst>
           </p:cNvPr>
@@ -12959,7 +13038,7 @@
           <p:cNvPr id="7" name="TextBox 6">
             <a:extLst xmlns:a="http://schemas.openxmlformats.org/drawingml/2006/main">
               <a:ext uri="{FF2B5EF4-FFF2-40B4-BE49-F238E27FC236}">
-                <a16:creationId xmlns:a16="http://schemas.microsoft.com/office/drawing/2014/main" id="{2B97072E-746C-4A92-A073-2402F260A9B0}"/>
+                <a16:creationId xmlns:a16="http://schemas.microsoft.com/office/drawing/2014/main" id="{F3F9D415-3CC6-4E45-8A4B-94531629B695}"/>
               </a:ext>
             </a:extLst>
           </p:cNvPr>
@@ -13004,7 +13083,7 @@
                 <a:ea typeface="Calibri"/>
                 <a:cs typeface="Calibri"/>
               </a:rPr>
-              <a:t>DEV Pilot Telemetry &amp; Hạch Toán Dự Phóng [DIAGNOSTIC TEST FIXTURE ONLY - NOT CANONICAL NUMERICAL RESULTS]</a:t>
+              <a:t>DEV Pilot Telemetry &amp; Hạch Toán Nghiên Cứu [DIAGNOSTIC TEST FIXTURE ONLY - NOT CANONICAL NUMERICAL RESULTS]</a:t>
             </a:r>
           </a:p>
           <a:p xmlns:a="http://schemas.openxmlformats.org/drawingml/2006/main">
@@ -13041,7 +13120,7 @@
                 <a:ea typeface="Calibri"/>
                 <a:cs typeface="Calibri"/>
               </a:rPr>
-              <a:t>▶ [HISTORICAL DEV PILOT BASELINE (20 Requests)]</a:t>
+              <a:t>▶ ZONE 1: HISTORICAL DEV PILOT BASELINE (20 Requests Responses API)</a:t>
             </a:r>
           </a:p>
           <a:p xmlns:a="http://schemas.openxmlformats.org/drawingml/2006/main">
@@ -13065,7 +13144,7 @@
                 <a:ea typeface="Calibri"/>
                 <a:cs typeface="Calibri"/>
               </a:rPr>
-              <a:t>• Bản chất: DEV split tổng hợp (4 views x 5 điều kiện). Gửi request thực tế không biến log tổng hợp thành in-the-wild telemetry.</a:t>
+              <a:t>•  Dữ liệu DEV pilot lịch sử: 20 requests (4 views x 5 điều kiện, tổng chi phí ~$0.0242 USD).</a:t>
             </a:r>
           </a:p>
           <a:p xmlns:a="http://schemas.openxmlformats.org/drawingml/2006/main">
@@ -13089,7 +13168,7 @@
                 <a:ea typeface="Calibri"/>
                 <a:cs typeface="Calibri"/>
               </a:rPr>
-              <a:t>• Quy mô: 20 requests thực tế Responses API (100% VALID, 0 retry, trễ TB 8,127.6 ms).</a:t>
+              <a:t>•  Ghi chú phân định tuyệt đối: Request thực tế không biến log tổng hợp thành in-the-wild telemetry.</a:t>
             </a:r>
           </a:p>
           <a:p xmlns:a="http://schemas.openxmlformats.org/drawingml/2006/main">
@@ -13104,6 +13183,19 @@
                 <a:cs typeface="Calibri"/>
               </a:defRPr>
             </a:pPr>
+          </a:p>
+          <a:p xmlns:a="http://schemas.openxmlformats.org/drawingml/2006/main">
+            <a:pPr>
+              <a:buNone/>
+              <a:defRPr sz="1600" b="1">
+                <a:solidFill>
+                  <a:srgbClr val="1E40AF"/>
+                </a:solidFill>
+                <a:latin typeface="Calibri"/>
+                <a:ea typeface="Calibri"/>
+                <a:cs typeface="Calibri"/>
+              </a:defRPr>
+            </a:pPr>
             <a:r>
               <a:rPr sz="825" b="1">
                 <a:solidFill>
@@ -13113,7 +13205,7 @@
                 <a:ea typeface="Calibri"/>
                 <a:cs typeface="Calibri"/>
               </a:rPr>
-              <a:t>• Tiêu thụ tài nguyên &amp; chi phí quan sát được (Observed Telemetry):</a:t>
+              <a:t>▶ ZONE 2: DIAGNOSTIC TEST FIXTURE TELEMETRY (N=718 Scorable Views)</a:t>
             </a:r>
           </a:p>
           <a:p xmlns:a="http://schemas.openxmlformats.org/drawingml/2006/main">
@@ -13137,7 +13229,7 @@
                 <a:ea typeface="Calibri"/>
                 <a:cs typeface="Calibri"/>
               </a:rPr>
-              <a:t>  • no_rag (k=0): 643.0 mean prompt tokens, med lat 7.89s (~0.000390 USD / logical req)</a:t>
+              <a:t>•  no_rag: trễ trung vị 7.89s | 643.0 prompt tokens | ~0.000390 USD / logical req.</a:t>
             </a:r>
           </a:p>
           <a:p xmlns:a="http://schemas.openxmlformats.org/drawingml/2006/main">
@@ -13161,7 +13253,7 @@
                 <a:ea typeface="Calibri"/>
                 <a:cs typeface="Calibri"/>
               </a:rPr>
-              <a:t>  • rag_k10 (k=10): 4536.5 mean prompt tokens, med lat 9.90s (~0.001870 USD / logical req)</a:t>
+              <a:t>•  rag_k10: trễ trung vị 9.90s | 4536.5 prompt tokens | ~0.001870 USD / logical req.</a:t>
             </a:r>
           </a:p>
           <a:p xmlns:a="http://schemas.openxmlformats.org/drawingml/2006/main">
@@ -13176,6 +13268,19 @@
                 <a:cs typeface="Calibri"/>
               </a:defRPr>
             </a:pPr>
+          </a:p>
+          <a:p xmlns:a="http://schemas.openxmlformats.org/drawingml/2006/main">
+            <a:pPr>
+              <a:buNone/>
+              <a:defRPr sz="1600" b="1">
+                <a:solidFill>
+                  <a:srgbClr val="1E40AF"/>
+                </a:solidFill>
+                <a:latin typeface="Calibri"/>
+                <a:ea typeface="Calibri"/>
+                <a:cs typeface="Calibri"/>
+              </a:defRPr>
+            </a:pPr>
             <a:r>
               <a:rPr sz="825" b="1">
                 <a:solidFill>
@@ -13185,7 +13290,7 @@
                 <a:ea typeface="Calibri"/>
                 <a:cs typeface="Calibri"/>
               </a:rPr>
-              <a:t>  • Giữ chỗ thận trọng tạm thời: 0.05264010 USD (prior_pilot_provisional_hold_usd).</a:t>
+              <a:t>▶ ZONE 3: WHOLE STUDY FINANCIAL ACCOUNTING (6,400 Matrix Canonical Conditions)</a:t>
             </a:r>
           </a:p>
           <a:p xmlns:a="http://schemas.openxmlformats.org/drawingml/2006/main">
@@ -13200,6 +13305,17 @@
                 <a:cs typeface="Calibri"/>
               </a:defRPr>
             </a:pPr>
+            <a:r>
+              <a:rPr sz="825" b="1">
+                <a:solidFill>
+                  <a:srgbClr val="1E40AF"/>
+                </a:solidFill>
+                <a:latin typeface="Calibri"/>
+                <a:ea typeface="Calibri"/>
+                <a:cs typeface="Calibri"/>
+              </a:rPr>
+              <a:t>•  Hạch toán toàn thể điều kiện chuẩn (Canonical Total): 8.50 USD (dự phóng ma trận 6,400 requests).</a:t>
+            </a:r>
           </a:p>
           <a:p xmlns:a="http://schemas.openxmlformats.org/drawingml/2006/main">
             <a:pPr>
@@ -13222,7 +13338,7 @@
                 <a:ea typeface="Calibri"/>
                 <a:cs typeface="Calibri"/>
               </a:rPr>
-              <a:t>▶ [DIAGNOSTIC FIXTURE PROJECTION (N=718 SCORABLE VIEWS)]</a:t>
+              <a:t>•  Khoản giữ chỗ thận trọng pilot tạm thời: 0.05264010 USD (prior_pilot_provisional_hold_usd).</a:t>
             </a:r>
           </a:p>
           <a:p xmlns:a="http://schemas.openxmlformats.org/drawingml/2006/main">
@@ -13246,7 +13362,7 @@
                 <a:ea typeface="Calibri"/>
                 <a:cs typeface="Calibri"/>
               </a:rPr>
-              <a:t>• Hạch toán toàn thể nghiên cứu theo fixture (Whole Study Accounting Fixture):</a:t>
+              <a:t>•  Ngân sách chưa cam kết còn lại (Net Remaining): 11.44 USD.</a:t>
             </a:r>
           </a:p>
           <a:p xmlns:a="http://schemas.openxmlformats.org/drawingml/2006/main">
@@ -13270,55 +13386,7 @@
                 <a:ea typeface="Calibri"/>
                 <a:cs typeface="Calibri"/>
               </a:rPr>
-              <a:t>  • Hạch toán điều kiện chuẩn (Canonical Total): 8.50 USD cho 6,400 requests.</a:t>
-            </a:r>
-          </a:p>
-          <a:p xmlns:a="http://schemas.openxmlformats.org/drawingml/2006/main">
-            <a:pPr>
-              <a:buNone/>
-              <a:defRPr sz="1600" b="1">
-                <a:solidFill>
-                  <a:srgbClr val="1E40AF"/>
-                </a:solidFill>
-                <a:latin typeface="Calibri"/>
-                <a:ea typeface="Calibri"/>
-                <a:cs typeface="Calibri"/>
-              </a:defRPr>
-            </a:pPr>
-            <a:r>
-              <a:rPr sz="825" b="1">
-                <a:solidFill>
-                  <a:srgbClr val="1E40AF"/>
-                </a:solidFill>
-                <a:latin typeface="Calibri"/>
-                <a:ea typeface="Calibri"/>
-                <a:cs typeface="Calibri"/>
-              </a:rPr>
-              <a:t>  • Ngân sách chưa cam kết còn lại (Net Remaining): 11.44 USD.</a:t>
-            </a:r>
-          </a:p>
-          <a:p xmlns:a="http://schemas.openxmlformats.org/drawingml/2006/main">
-            <a:pPr>
-              <a:buNone/>
-              <a:defRPr sz="1600" b="1">
-                <a:solidFill>
-                  <a:srgbClr val="1E40AF"/>
-                </a:solidFill>
-                <a:latin typeface="Calibri"/>
-                <a:ea typeface="Calibri"/>
-                <a:cs typeface="Calibri"/>
-              </a:defRPr>
-            </a:pPr>
-            <a:r>
-              <a:rPr sz="825" b="1">
-                <a:solidFill>
-                  <a:srgbClr val="1E40AF"/>
-                </a:solidFill>
-                <a:latin typeface="Calibri"/>
-                <a:ea typeface="Calibri"/>
-                <a:cs typeface="Calibri"/>
-              </a:rPr>
-              <a:t>  • Trần ngân sách đóng băng cứng: 19.99 USD (hard_budget_limit_usd).</a:t>
+              <a:t>•  Trần ngân sách đóng băng cứng (Hard Budget Cap): 19.99 USD.</a:t>
             </a:r>
           </a:p>
         </p:txBody>
@@ -13332,7 +13400,7 @@
           <p:nvPr/>
         </p:nvPicPr>
         <p:blipFill>
-          <a:blip xmlns:r="http://schemas.openxmlformats.org/officeDocument/2006/relationships" xmlns:a="http://schemas.openxmlformats.org/drawingml/2006/main" r:embed="R1159e80b8d3942b7"/>
+          <a:blip xmlns:r="http://schemas.openxmlformats.org/officeDocument/2006/relationships" xmlns:a="http://schemas.openxmlformats.org/drawingml/2006/main" r:embed="Rb6b814003b3849e3"/>
           <a:stretch xmlns:a="http://schemas.openxmlformats.org/drawingml/2006/main">
             <a:fillRect l="0" t="0" r="0" b="0"/>
           </a:stretch>
@@ -13352,7 +13420,7 @@
           <p:cNvPr id="9" name="Rounded Rectangle 8">
             <a:extLst xmlns:a="http://schemas.openxmlformats.org/drawingml/2006/main">
               <a:ext uri="{FF2B5EF4-FFF2-40B4-BE49-F238E27FC236}">
-                <a16:creationId xmlns:a16="http://schemas.microsoft.com/office/drawing/2014/main" id="{5A4F294A-B342-4027-A2F4-2B8A0C15FC9D}"/>
+                <a16:creationId xmlns:a16="http://schemas.microsoft.com/office/drawing/2014/main" id="{EE50DCE1-1B46-4DD7-96E2-DA871FFF0F37}"/>
               </a:ext>
             </a:extLst>
           </p:cNvPr>
@@ -13407,7 +13475,7 @@
           <p:cNvPr id="10" name="TextBox 9">
             <a:extLst xmlns:a="http://schemas.openxmlformats.org/drawingml/2006/main">
               <a:ext uri="{FF2B5EF4-FFF2-40B4-BE49-F238E27FC236}">
-                <a16:creationId xmlns:a16="http://schemas.microsoft.com/office/drawing/2014/main" id="{92AC73DC-BDB6-493F-AD2C-ECCBABF50958}"/>
+                <a16:creationId xmlns:a16="http://schemas.microsoft.com/office/drawing/2014/main" id="{A4A772D4-9F9A-42BB-9C51-741B083D543B}"/>
               </a:ext>
             </a:extLst>
           </p:cNvPr>
@@ -13490,7 +13558,7 @@
     </p:spTree>
     <p:extLst>
       <p:ext uri="{BB962C8B-B14F-4D97-AF65-F5344CB8AC3E}">
-        <p14:creationId xmlns:p14="http://schemas.microsoft.com/office/powerpoint/2010/main" val="168802271"/>
+        <p14:creationId xmlns:p14="http://schemas.microsoft.com/office/powerpoint/2010/main" val="252054135"/>
       </p:ext>
     </p:extLst>
   </p:cSld>

--- a/reports/evidence/fixture_populated_slides.pptx
+++ b/reports/evidence/fixture_populated_slides.pptx
@@ -2,131 +2,27 @@
 <file path=ppt/presentation.xml><?xml version="1.0" encoding="utf-8"?>
 <p:presentation xmlns:p="http://schemas.openxmlformats.org/presentationml/2006/main">
   <p:sldMasterIdLst>
-    <p:sldMasterId xmlns:r="http://schemas.openxmlformats.org/officeDocument/2006/relationships" id="2147483648" r:id="R97c028c3622744ec"/>
+    <p:sldMasterId xmlns:r="http://schemas.openxmlformats.org/officeDocument/2006/relationships" id="2147483648" r:id="R274f9f041efd4180"/>
   </p:sldMasterIdLst>
   <p:notesMasterIdLst>
-    <p:notesMasterId xmlns:r="http://schemas.openxmlformats.org/officeDocument/2006/relationships" r:id="Rd0ec733be698460c"/>
+    <p:notesMasterId xmlns:r="http://schemas.openxmlformats.org/officeDocument/2006/relationships" r:id="R1cf397267a7c4c12"/>
   </p:notesMasterIdLst>
   <p:sldIdLst>
-    <p:sldId xmlns:r="http://schemas.openxmlformats.org/officeDocument/2006/relationships" id="256" r:id="Rc7d173c9e34b4224"/>
-    <p:sldId xmlns:r="http://schemas.openxmlformats.org/officeDocument/2006/relationships" id="257" r:id="R37e42e448e0248f2"/>
-    <p:sldId xmlns:r="http://schemas.openxmlformats.org/officeDocument/2006/relationships" id="258" r:id="R487265d6275b43f2"/>
-    <p:sldId xmlns:r="http://schemas.openxmlformats.org/officeDocument/2006/relationships" id="259" r:id="R0d548589cdfd464b"/>
-    <p:sldId xmlns:r="http://schemas.openxmlformats.org/officeDocument/2006/relationships" id="260" r:id="R0df468567d8b43a9"/>
-    <p:sldId xmlns:r="http://schemas.openxmlformats.org/officeDocument/2006/relationships" id="261" r:id="R4bcc37655b8c4f87"/>
-    <p:sldId xmlns:r="http://schemas.openxmlformats.org/officeDocument/2006/relationships" id="262" r:id="Re3061b16ad4e46a8"/>
-    <p:sldId xmlns:r="http://schemas.openxmlformats.org/officeDocument/2006/relationships" id="263" r:id="R4e53f57b398f47d0"/>
-    <p:sldId xmlns:r="http://schemas.openxmlformats.org/officeDocument/2006/relationships" id="264" r:id="Rf56ca8d4b2924094"/>
-    <p:sldId xmlns:r="http://schemas.openxmlformats.org/officeDocument/2006/relationships" id="265" r:id="Rd66c37502a344989"/>
-    <p:sldId xmlns:r="http://schemas.openxmlformats.org/officeDocument/2006/relationships" id="266" r:id="R2c22f1dfac494254"/>
-    <p:sldId xmlns:r="http://schemas.openxmlformats.org/officeDocument/2006/relationships" id="267" r:id="Rcb65aadb02974262"/>
+    <p:sldId xmlns:r="http://schemas.openxmlformats.org/officeDocument/2006/relationships" id="256" r:id="R7b0985bc4c854692"/>
+    <p:sldId xmlns:r="http://schemas.openxmlformats.org/officeDocument/2006/relationships" id="257" r:id="R9d5d74b87498472a"/>
+    <p:sldId xmlns:r="http://schemas.openxmlformats.org/officeDocument/2006/relationships" id="258" r:id="R96e90c8f21fa464a"/>
+    <p:sldId xmlns:r="http://schemas.openxmlformats.org/officeDocument/2006/relationships" id="259" r:id="R2b76210bfe8941b6"/>
+    <p:sldId xmlns:r="http://schemas.openxmlformats.org/officeDocument/2006/relationships" id="260" r:id="Rbfc407cc7299481d"/>
+    <p:sldId xmlns:r="http://schemas.openxmlformats.org/officeDocument/2006/relationships" id="261" r:id="R40cbb9dd61f044d6"/>
+    <p:sldId xmlns:r="http://schemas.openxmlformats.org/officeDocument/2006/relationships" id="262" r:id="Rd0a7b7c4e67f4ae0"/>
+    <p:sldId xmlns:r="http://schemas.openxmlformats.org/officeDocument/2006/relationships" id="263" r:id="R1ab9cb9d156a499c"/>
+    <p:sldId xmlns:r="http://schemas.openxmlformats.org/officeDocument/2006/relationships" id="264" r:id="R034e6de3c9c2426f"/>
+    <p:sldId xmlns:r="http://schemas.openxmlformats.org/officeDocument/2006/relationships" id="265" r:id="R554f4ac4c32e48bd"/>
+    <p:sldId xmlns:r="http://schemas.openxmlformats.org/officeDocument/2006/relationships" id="266" r:id="Rc3bbbcccbdac43fc"/>
+    <p:sldId xmlns:r="http://schemas.openxmlformats.org/officeDocument/2006/relationships" id="267" r:id="Ra67ca09ad3954d51"/>
   </p:sldIdLst>
   <p:sldSz cx="12191695" cy="6858000"/>
   <p:notesSz cx="6858000" cy="9144000"/>
-  <p:defaultTextStyle>
-    <a:defPPr xmlns:a="http://schemas.openxmlformats.org/drawingml/2006/main">
-      <a:buNone/>
-    </a:defPPr>
-    <a:lvl1pPr xmlns:a="http://schemas.openxmlformats.org/drawingml/2006/main" marL="0" algn="l" defTabSz="457200">
-      <a:buNone/>
-      <a:defRPr sz="1800" kern="1200">
-        <a:solidFill>
-          <a:schemeClr val="tx1"/>
-        </a:solidFill>
-        <a:latin typeface="+mn-lt"/>
-        <a:ea typeface="+mn-lt"/>
-        <a:cs typeface="+mn-lt"/>
-      </a:defRPr>
-    </a:lvl1pPr>
-    <a:lvl2pPr xmlns:a="http://schemas.openxmlformats.org/drawingml/2006/main" marL="457200" algn="l" defTabSz="457200">
-      <a:buNone/>
-      <a:defRPr sz="1800" kern="1200">
-        <a:solidFill>
-          <a:schemeClr val="tx1"/>
-        </a:solidFill>
-        <a:latin typeface="+mn-lt"/>
-        <a:ea typeface="+mn-lt"/>
-        <a:cs typeface="+mn-lt"/>
-      </a:defRPr>
-    </a:lvl2pPr>
-    <a:lvl3pPr xmlns:a="http://schemas.openxmlformats.org/drawingml/2006/main" marL="914400" algn="l" defTabSz="457200">
-      <a:buNone/>
-      <a:defRPr sz="1800" kern="1200">
-        <a:solidFill>
-          <a:schemeClr val="tx1"/>
-        </a:solidFill>
-        <a:latin typeface="+mn-lt"/>
-        <a:ea typeface="+mn-lt"/>
-        <a:cs typeface="+mn-lt"/>
-      </a:defRPr>
-    </a:lvl3pPr>
-    <a:lvl4pPr xmlns:a="http://schemas.openxmlformats.org/drawingml/2006/main" marL="1371600" algn="l" defTabSz="457200">
-      <a:buNone/>
-      <a:defRPr sz="1800" kern="1200">
-        <a:solidFill>
-          <a:schemeClr val="tx1"/>
-        </a:solidFill>
-        <a:latin typeface="+mn-lt"/>
-        <a:ea typeface="+mn-lt"/>
-        <a:cs typeface="+mn-lt"/>
-      </a:defRPr>
-    </a:lvl4pPr>
-    <a:lvl5pPr xmlns:a="http://schemas.openxmlformats.org/drawingml/2006/main" marL="1828800" algn="l" defTabSz="457200">
-      <a:buNone/>
-      <a:defRPr sz="1800" kern="1200">
-        <a:solidFill>
-          <a:schemeClr val="tx1"/>
-        </a:solidFill>
-        <a:latin typeface="+mn-lt"/>
-        <a:ea typeface="+mn-lt"/>
-        <a:cs typeface="+mn-lt"/>
-      </a:defRPr>
-    </a:lvl5pPr>
-    <a:lvl6pPr xmlns:a="http://schemas.openxmlformats.org/drawingml/2006/main" marL="2286000" algn="l" defTabSz="457200">
-      <a:buNone/>
-      <a:defRPr sz="1800" kern="1200">
-        <a:solidFill>
-          <a:schemeClr val="tx1"/>
-        </a:solidFill>
-        <a:latin typeface="+mn-lt"/>
-        <a:ea typeface="+mn-lt"/>
-        <a:cs typeface="+mn-lt"/>
-      </a:defRPr>
-    </a:lvl6pPr>
-    <a:lvl7pPr xmlns:a="http://schemas.openxmlformats.org/drawingml/2006/main" marL="2743200" algn="l" defTabSz="457200">
-      <a:buNone/>
-      <a:defRPr sz="1800" kern="1200">
-        <a:solidFill>
-          <a:schemeClr val="tx1"/>
-        </a:solidFill>
-        <a:latin typeface="+mn-lt"/>
-        <a:ea typeface="+mn-lt"/>
-        <a:cs typeface="+mn-lt"/>
-      </a:defRPr>
-    </a:lvl7pPr>
-    <a:lvl8pPr xmlns:a="http://schemas.openxmlformats.org/drawingml/2006/main" marL="3200400" algn="l" defTabSz="457200">
-      <a:buNone/>
-      <a:defRPr sz="1800" kern="1200">
-        <a:solidFill>
-          <a:schemeClr val="tx1"/>
-        </a:solidFill>
-        <a:latin typeface="+mn-lt"/>
-        <a:ea typeface="+mn-lt"/>
-        <a:cs typeface="+mn-lt"/>
-      </a:defRPr>
-    </a:lvl8pPr>
-    <a:lvl9pPr xmlns:a="http://schemas.openxmlformats.org/drawingml/2006/main" marL="3657600" algn="l" defTabSz="457200">
-      <a:buNone/>
-      <a:defRPr sz="1800" kern="1200">
-        <a:solidFill>
-          <a:schemeClr val="tx1"/>
-        </a:solidFill>
-        <a:latin typeface="+mn-lt"/>
-        <a:ea typeface="+mn-lt"/>
-        <a:cs typeface="+mn-lt"/>
-      </a:defRPr>
-    </a:lvl9pPr>
-  </p:defaultTextStyle>
 </p:presentation>
 </file>
 
@@ -1582,7 +1478,7 @@
           <p:cNvPr id="2" name="Title 1">
             <a:extLst xmlns:a="http://schemas.openxmlformats.org/drawingml/2006/main">
               <a:ext uri="{FF2B5EF4-FFF2-40B4-BE49-F238E27FC236}">
-                <a16:creationId xmlns:a16="http://schemas.microsoft.com/office/drawing/2014/main" id="{2326D6F1-0E5B-45C2-8308-9E56AE0B55A7}"/>
+                <a16:creationId xmlns:a16="http://schemas.microsoft.com/office/drawing/2014/main" id="{7F9F4A94-91CB-424A-8A1D-FBAD73BC8BF0}"/>
               </a:ext>
             </a:extLst>
           </p:cNvPr>
@@ -1615,7 +1511,7 @@
           <p:cNvPr id="3" name="Subtitle 2">
             <a:extLst xmlns:a="http://schemas.openxmlformats.org/drawingml/2006/main">
               <a:ext uri="{FF2B5EF4-FFF2-40B4-BE49-F238E27FC236}">
-                <a16:creationId xmlns:a16="http://schemas.microsoft.com/office/drawing/2014/main" id="{9E20FFCC-5526-4A74-9335-2CA47EDE1F7A}"/>
+                <a16:creationId xmlns:a16="http://schemas.microsoft.com/office/drawing/2014/main" id="{B6BC5920-7CCD-429F-8057-4C38DF69F9D4}"/>
               </a:ext>
             </a:extLst>
           </p:cNvPr>
@@ -1739,7 +1635,7 @@
           <p:cNvPr id="4" name="Date Placeholder 3">
             <a:extLst xmlns:a="http://schemas.openxmlformats.org/drawingml/2006/main">
               <a:ext uri="{FF2B5EF4-FFF2-40B4-BE49-F238E27FC236}">
-                <a16:creationId xmlns:a16="http://schemas.microsoft.com/office/drawing/2014/main" id="{DB35B456-1902-44D0-A5E4-E1D47AF39477}"/>
+                <a16:creationId xmlns:a16="http://schemas.microsoft.com/office/drawing/2014/main" id="{089D4347-582A-4043-818F-CB3862A36D25}"/>
               </a:ext>
             </a:extLst>
           </p:cNvPr>
@@ -1767,7 +1663,7 @@
           <p:cNvPr id="5" name="Footer Placeholder 4">
             <a:extLst xmlns:a="http://schemas.openxmlformats.org/drawingml/2006/main">
               <a:ext uri="{FF2B5EF4-FFF2-40B4-BE49-F238E27FC236}">
-                <a16:creationId xmlns:a16="http://schemas.microsoft.com/office/drawing/2014/main" id="{7CEBD353-DEFF-4E4A-8442-3586A3D77DE2}"/>
+                <a16:creationId xmlns:a16="http://schemas.microsoft.com/office/drawing/2014/main" id="{BE8931ED-64EB-4B4A-A69F-879729F46D01}"/>
               </a:ext>
             </a:extLst>
           </p:cNvPr>
@@ -1792,7 +1688,7 @@
           <p:cNvPr id="6" name="Slide Number Placeholder 5">
             <a:extLst xmlns:a="http://schemas.openxmlformats.org/drawingml/2006/main">
               <a:ext uri="{FF2B5EF4-FFF2-40B4-BE49-F238E27FC236}">
-                <a16:creationId xmlns:a16="http://schemas.microsoft.com/office/drawing/2014/main" id="{B0038F65-240B-470A-A519-84AEB6CC5328}"/>
+                <a16:creationId xmlns:a16="http://schemas.microsoft.com/office/drawing/2014/main" id="{522893BE-1C03-4208-9B47-9E27FAAECB9D}"/>
               </a:ext>
             </a:extLst>
           </p:cNvPr>
@@ -1837,7 +1733,7 @@
           <p:cNvPr id="2" name="Title 1">
             <a:extLst xmlns:a="http://schemas.openxmlformats.org/drawingml/2006/main">
               <a:ext uri="{FF2B5EF4-FFF2-40B4-BE49-F238E27FC236}">
-                <a16:creationId xmlns:a16="http://schemas.microsoft.com/office/drawing/2014/main" id="{632F8BD2-D1E8-4BFF-802F-2DC8D8F191E1}"/>
+                <a16:creationId xmlns:a16="http://schemas.microsoft.com/office/drawing/2014/main" id="{76CEB976-BC5D-4254-BEF5-A29787C1CB55}"/>
               </a:ext>
             </a:extLst>
           </p:cNvPr>
@@ -1865,7 +1761,7 @@
           <p:cNvPr id="3" name="Vertical Text Placeholder 2">
             <a:extLst xmlns:a="http://schemas.openxmlformats.org/drawingml/2006/main">
               <a:ext uri="{FF2B5EF4-FFF2-40B4-BE49-F238E27FC236}">
-                <a16:creationId xmlns:a16="http://schemas.microsoft.com/office/drawing/2014/main" id="{DED7B928-0278-4727-B8E3-2C4BB9B41D87}"/>
+                <a16:creationId xmlns:a16="http://schemas.microsoft.com/office/drawing/2014/main" id="{FF25C106-3A88-4EAA-97E0-3CC6E26F43A6}"/>
               </a:ext>
             </a:extLst>
           </p:cNvPr>
@@ -1928,7 +1824,7 @@
           <p:cNvPr id="4" name="Date Placeholder 3">
             <a:extLst xmlns:a="http://schemas.openxmlformats.org/drawingml/2006/main">
               <a:ext uri="{FF2B5EF4-FFF2-40B4-BE49-F238E27FC236}">
-                <a16:creationId xmlns:a16="http://schemas.microsoft.com/office/drawing/2014/main" id="{4F519CFC-EF67-4A2E-B27E-300B78E09569}"/>
+                <a16:creationId xmlns:a16="http://schemas.microsoft.com/office/drawing/2014/main" id="{8909FA72-8677-4BCF-8414-F28359CD16E2}"/>
               </a:ext>
             </a:extLst>
           </p:cNvPr>
@@ -1956,7 +1852,7 @@
           <p:cNvPr id="5" name="Footer Placeholder 4">
             <a:extLst xmlns:a="http://schemas.openxmlformats.org/drawingml/2006/main">
               <a:ext uri="{FF2B5EF4-FFF2-40B4-BE49-F238E27FC236}">
-                <a16:creationId xmlns:a16="http://schemas.microsoft.com/office/drawing/2014/main" id="{506C1230-E58C-43AD-A0B5-AEE498B717F0}"/>
+                <a16:creationId xmlns:a16="http://schemas.microsoft.com/office/drawing/2014/main" id="{06E6DAD7-B965-4170-B3C1-AD1D9035BA05}"/>
               </a:ext>
             </a:extLst>
           </p:cNvPr>
@@ -1981,7 +1877,7 @@
           <p:cNvPr id="6" name="Slide Number Placeholder 5">
             <a:extLst xmlns:a="http://schemas.openxmlformats.org/drawingml/2006/main">
               <a:ext uri="{FF2B5EF4-FFF2-40B4-BE49-F238E27FC236}">
-                <a16:creationId xmlns:a16="http://schemas.microsoft.com/office/drawing/2014/main" id="{D1F69624-0A6C-4B9A-B5EC-944CF2CFD98F}"/>
+                <a16:creationId xmlns:a16="http://schemas.microsoft.com/office/drawing/2014/main" id="{527A6FDC-F304-431E-A339-9637FB4491A1}"/>
               </a:ext>
             </a:extLst>
           </p:cNvPr>
@@ -2026,7 +1922,7 @@
           <p:cNvPr id="2" name="Vertical Title 1">
             <a:extLst xmlns:a="http://schemas.openxmlformats.org/drawingml/2006/main">
               <a:ext uri="{FF2B5EF4-FFF2-40B4-BE49-F238E27FC236}">
-                <a16:creationId xmlns:a16="http://schemas.microsoft.com/office/drawing/2014/main" id="{ECB3E896-6904-4CD6-8D9E-A407A3CE9DE9}"/>
+                <a16:creationId xmlns:a16="http://schemas.microsoft.com/office/drawing/2014/main" id="{26EAEEDF-B950-48E6-8D6B-5BDE8BBA51E6}"/>
               </a:ext>
             </a:extLst>
           </p:cNvPr>
@@ -2059,7 +1955,7 @@
           <p:cNvPr id="3" name="Vertical Text Placeholder 2">
             <a:extLst xmlns:a="http://schemas.openxmlformats.org/drawingml/2006/main">
               <a:ext uri="{FF2B5EF4-FFF2-40B4-BE49-F238E27FC236}">
-                <a16:creationId xmlns:a16="http://schemas.microsoft.com/office/drawing/2014/main" id="{06FD7510-5D6A-4194-9590-4629B588072D}"/>
+                <a16:creationId xmlns:a16="http://schemas.microsoft.com/office/drawing/2014/main" id="{0C753CE7-85E7-4073-BA4B-7C635AC1D59B}"/>
               </a:ext>
             </a:extLst>
           </p:cNvPr>
@@ -2127,7 +2023,7 @@
           <p:cNvPr id="4" name="Date Placeholder 3">
             <a:extLst xmlns:a="http://schemas.openxmlformats.org/drawingml/2006/main">
               <a:ext uri="{FF2B5EF4-FFF2-40B4-BE49-F238E27FC236}">
-                <a16:creationId xmlns:a16="http://schemas.microsoft.com/office/drawing/2014/main" id="{3DBF7521-3A35-41CF-B0A3-0C43ED3FB4D1}"/>
+                <a16:creationId xmlns:a16="http://schemas.microsoft.com/office/drawing/2014/main" id="{96AD8E39-26B6-42C2-90B9-03A4D0DE1F81}"/>
               </a:ext>
             </a:extLst>
           </p:cNvPr>
@@ -2155,7 +2051,7 @@
           <p:cNvPr id="5" name="Footer Placeholder 4">
             <a:extLst xmlns:a="http://schemas.openxmlformats.org/drawingml/2006/main">
               <a:ext uri="{FF2B5EF4-FFF2-40B4-BE49-F238E27FC236}">
-                <a16:creationId xmlns:a16="http://schemas.microsoft.com/office/drawing/2014/main" id="{A73ABAE9-6354-4786-88C2-F5490732E46D}"/>
+                <a16:creationId xmlns:a16="http://schemas.microsoft.com/office/drawing/2014/main" id="{272AF1D7-0D75-4A18-B82A-31BA285ADBA9}"/>
               </a:ext>
             </a:extLst>
           </p:cNvPr>
@@ -2180,7 +2076,7 @@
           <p:cNvPr id="6" name="Slide Number Placeholder 5">
             <a:extLst xmlns:a="http://schemas.openxmlformats.org/drawingml/2006/main">
               <a:ext uri="{FF2B5EF4-FFF2-40B4-BE49-F238E27FC236}">
-                <a16:creationId xmlns:a16="http://schemas.microsoft.com/office/drawing/2014/main" id="{7A1A9589-F049-4FC3-828A-8AF73022D369}"/>
+                <a16:creationId xmlns:a16="http://schemas.microsoft.com/office/drawing/2014/main" id="{6D8F27B7-39AD-41DC-B0CD-B139F1D1C53F}"/>
               </a:ext>
             </a:extLst>
           </p:cNvPr>
@@ -2225,7 +2121,7 @@
           <p:cNvPr id="2" name="Title 1">
             <a:extLst xmlns:a="http://schemas.openxmlformats.org/drawingml/2006/main">
               <a:ext uri="{FF2B5EF4-FFF2-40B4-BE49-F238E27FC236}">
-                <a16:creationId xmlns:a16="http://schemas.microsoft.com/office/drawing/2014/main" id="{CB3BF5A0-06AD-4825-BA25-33FB8273C4EB}"/>
+                <a16:creationId xmlns:a16="http://schemas.microsoft.com/office/drawing/2014/main" id="{4B83E4DF-7F4E-471E-A116-3BC2B2BA855E}"/>
               </a:ext>
             </a:extLst>
           </p:cNvPr>
@@ -2253,7 +2149,7 @@
           <p:cNvPr id="3" name="Content Placeholder 2">
             <a:extLst xmlns:a="http://schemas.openxmlformats.org/drawingml/2006/main">
               <a:ext uri="{FF2B5EF4-FFF2-40B4-BE49-F238E27FC236}">
-                <a16:creationId xmlns:a16="http://schemas.microsoft.com/office/drawing/2014/main" id="{239E7D7E-8061-418B-B21F-1B973C5FBD1B}"/>
+                <a16:creationId xmlns:a16="http://schemas.microsoft.com/office/drawing/2014/main" id="{14D862CC-559D-4A60-A8F4-9383E63D505E}"/>
               </a:ext>
             </a:extLst>
           </p:cNvPr>
@@ -2316,7 +2212,7 @@
           <p:cNvPr id="4" name="Date Placeholder 3">
             <a:extLst xmlns:a="http://schemas.openxmlformats.org/drawingml/2006/main">
               <a:ext uri="{FF2B5EF4-FFF2-40B4-BE49-F238E27FC236}">
-                <a16:creationId xmlns:a16="http://schemas.microsoft.com/office/drawing/2014/main" id="{9F6F071F-4A94-443C-9E23-AA268B69D67C}"/>
+                <a16:creationId xmlns:a16="http://schemas.microsoft.com/office/drawing/2014/main" id="{C2538781-E835-4A51-9D70-B55B5A08474A}"/>
               </a:ext>
             </a:extLst>
           </p:cNvPr>
@@ -2344,7 +2240,7 @@
           <p:cNvPr id="5" name="Footer Placeholder 4">
             <a:extLst xmlns:a="http://schemas.openxmlformats.org/drawingml/2006/main">
               <a:ext uri="{FF2B5EF4-FFF2-40B4-BE49-F238E27FC236}">
-                <a16:creationId xmlns:a16="http://schemas.microsoft.com/office/drawing/2014/main" id="{22F44195-D30D-41AF-8B03-05472102FC8B}"/>
+                <a16:creationId xmlns:a16="http://schemas.microsoft.com/office/drawing/2014/main" id="{58908AF4-D5A3-4344-84B7-1AD3E8FA71B6}"/>
               </a:ext>
             </a:extLst>
           </p:cNvPr>
@@ -2369,7 +2265,7 @@
           <p:cNvPr id="6" name="Slide Number Placeholder 5">
             <a:extLst xmlns:a="http://schemas.openxmlformats.org/drawingml/2006/main">
               <a:ext uri="{FF2B5EF4-FFF2-40B4-BE49-F238E27FC236}">
-                <a16:creationId xmlns:a16="http://schemas.microsoft.com/office/drawing/2014/main" id="{6139379A-AEFA-4404-B3E3-D69B3693038A}"/>
+                <a16:creationId xmlns:a16="http://schemas.microsoft.com/office/drawing/2014/main" id="{2C4AFE69-6E39-4BBE-A10E-C737A4324FB7}"/>
               </a:ext>
             </a:extLst>
           </p:cNvPr>
@@ -2414,7 +2310,7 @@
           <p:cNvPr id="2" name="Title 1">
             <a:extLst xmlns:a="http://schemas.openxmlformats.org/drawingml/2006/main">
               <a:ext uri="{FF2B5EF4-FFF2-40B4-BE49-F238E27FC236}">
-                <a16:creationId xmlns:a16="http://schemas.microsoft.com/office/drawing/2014/main" id="{D037D107-6C36-45EF-B426-021C4F7AB34E}"/>
+                <a16:creationId xmlns:a16="http://schemas.microsoft.com/office/drawing/2014/main" id="{0E528F2E-32AB-4A9E-ACD7-6B78CF30A70E}"/>
               </a:ext>
             </a:extLst>
           </p:cNvPr>
@@ -2452,7 +2348,7 @@
           <p:cNvPr id="3" name="Text Placeholder 2">
             <a:extLst xmlns:a="http://schemas.openxmlformats.org/drawingml/2006/main">
               <a:ext uri="{FF2B5EF4-FFF2-40B4-BE49-F238E27FC236}">
-                <a16:creationId xmlns:a16="http://schemas.microsoft.com/office/drawing/2014/main" id="{79938796-5869-4C5B-8B29-5E15829EEEDB}"/>
+                <a16:creationId xmlns:a16="http://schemas.microsoft.com/office/drawing/2014/main" id="{8CB6D19D-95F1-4A92-9D60-322E9ABFDCAA}"/>
               </a:ext>
             </a:extLst>
           </p:cNvPr>
@@ -2578,7 +2474,7 @@
           <p:cNvPr id="4" name="Date Placeholder 3">
             <a:extLst xmlns:a="http://schemas.openxmlformats.org/drawingml/2006/main">
               <a:ext uri="{FF2B5EF4-FFF2-40B4-BE49-F238E27FC236}">
-                <a16:creationId xmlns:a16="http://schemas.microsoft.com/office/drawing/2014/main" id="{C312FD98-0189-4C86-B154-C9BDFF6CD131}"/>
+                <a16:creationId xmlns:a16="http://schemas.microsoft.com/office/drawing/2014/main" id="{7D4C5350-EB35-413C-9447-7DB87799EA24}"/>
               </a:ext>
             </a:extLst>
           </p:cNvPr>
@@ -2606,7 +2502,7 @@
           <p:cNvPr id="5" name="Footer Placeholder 4">
             <a:extLst xmlns:a="http://schemas.openxmlformats.org/drawingml/2006/main">
               <a:ext uri="{FF2B5EF4-FFF2-40B4-BE49-F238E27FC236}">
-                <a16:creationId xmlns:a16="http://schemas.microsoft.com/office/drawing/2014/main" id="{BFD9FF52-1946-4D8E-AD4A-4A9C355A10E5}"/>
+                <a16:creationId xmlns:a16="http://schemas.microsoft.com/office/drawing/2014/main" id="{885A5292-0144-445A-97E0-DCE845CF6A0C}"/>
               </a:ext>
             </a:extLst>
           </p:cNvPr>
@@ -2631,7 +2527,7 @@
           <p:cNvPr id="6" name="Slide Number Placeholder 5">
             <a:extLst xmlns:a="http://schemas.openxmlformats.org/drawingml/2006/main">
               <a:ext uri="{FF2B5EF4-FFF2-40B4-BE49-F238E27FC236}">
-                <a16:creationId xmlns:a16="http://schemas.microsoft.com/office/drawing/2014/main" id="{CB4B095F-5113-4EC6-BE82-2C74C26E7A3B}"/>
+                <a16:creationId xmlns:a16="http://schemas.microsoft.com/office/drawing/2014/main" id="{7397089C-F506-4BD3-8088-729C4535D27F}"/>
               </a:ext>
             </a:extLst>
           </p:cNvPr>
@@ -2676,7 +2572,7 @@
           <p:cNvPr id="2" name="Title 1">
             <a:extLst xmlns:a="http://schemas.openxmlformats.org/drawingml/2006/main">
               <a:ext uri="{FF2B5EF4-FFF2-40B4-BE49-F238E27FC236}">
-                <a16:creationId xmlns:a16="http://schemas.microsoft.com/office/drawing/2014/main" id="{0DA72049-295E-4D79-9982-C25400502956}"/>
+                <a16:creationId xmlns:a16="http://schemas.microsoft.com/office/drawing/2014/main" id="{363F692C-E8A1-4DB9-91CE-D5CCA936D077}"/>
               </a:ext>
             </a:extLst>
           </p:cNvPr>
@@ -2704,7 +2600,7 @@
           <p:cNvPr id="3" name="Content Placeholder 2">
             <a:extLst xmlns:a="http://schemas.openxmlformats.org/drawingml/2006/main">
               <a:ext uri="{FF2B5EF4-FFF2-40B4-BE49-F238E27FC236}">
-                <a16:creationId xmlns:a16="http://schemas.microsoft.com/office/drawing/2014/main" id="{D5506CD0-8013-485C-A4D0-B8225F183626}"/>
+                <a16:creationId xmlns:a16="http://schemas.microsoft.com/office/drawing/2014/main" id="{9573F911-4E6D-473D-B6EF-D19010A2C092}"/>
               </a:ext>
             </a:extLst>
           </p:cNvPr>
@@ -2809,7 +2705,7 @@
           <p:cNvPr id="4" name="Content Placeholder 3">
             <a:extLst xmlns:a="http://schemas.openxmlformats.org/drawingml/2006/main">
               <a:ext uri="{FF2B5EF4-FFF2-40B4-BE49-F238E27FC236}">
-                <a16:creationId xmlns:a16="http://schemas.microsoft.com/office/drawing/2014/main" id="{F877EC23-778F-41AB-963A-D5A4CD3D2069}"/>
+                <a16:creationId xmlns:a16="http://schemas.microsoft.com/office/drawing/2014/main" id="{410ED996-2753-450F-9961-A3021D16207D}"/>
               </a:ext>
             </a:extLst>
           </p:cNvPr>
@@ -2914,7 +2810,7 @@
           <p:cNvPr id="5" name="Date Placeholder 4">
             <a:extLst xmlns:a="http://schemas.openxmlformats.org/drawingml/2006/main">
               <a:ext uri="{FF2B5EF4-FFF2-40B4-BE49-F238E27FC236}">
-                <a16:creationId xmlns:a16="http://schemas.microsoft.com/office/drawing/2014/main" id="{2CF4E87D-CDD7-4F6E-8BF6-79F70EF2A066}"/>
+                <a16:creationId xmlns:a16="http://schemas.microsoft.com/office/drawing/2014/main" id="{894DB9DA-A6F3-422E-A2FD-77E938B82EE8}"/>
               </a:ext>
             </a:extLst>
           </p:cNvPr>
@@ -2942,7 +2838,7 @@
           <p:cNvPr id="6" name="Footer Placeholder 5">
             <a:extLst xmlns:a="http://schemas.openxmlformats.org/drawingml/2006/main">
               <a:ext uri="{FF2B5EF4-FFF2-40B4-BE49-F238E27FC236}">
-                <a16:creationId xmlns:a16="http://schemas.microsoft.com/office/drawing/2014/main" id="{A9D0CF0C-D2E4-4AB2-8992-F9C6CEFB37CB}"/>
+                <a16:creationId xmlns:a16="http://schemas.microsoft.com/office/drawing/2014/main" id="{8C9BAFFB-0C38-4942-A0D8-EDA64D122D22}"/>
               </a:ext>
             </a:extLst>
           </p:cNvPr>
@@ -2967,7 +2863,7 @@
           <p:cNvPr id="7" name="Slide Number Placeholder 6">
             <a:extLst xmlns:a="http://schemas.openxmlformats.org/drawingml/2006/main">
               <a:ext uri="{FF2B5EF4-FFF2-40B4-BE49-F238E27FC236}">
-                <a16:creationId xmlns:a16="http://schemas.microsoft.com/office/drawing/2014/main" id="{31D3E774-9F0C-4C15-B3B6-C470ED147711}"/>
+                <a16:creationId xmlns:a16="http://schemas.microsoft.com/office/drawing/2014/main" id="{F48EC67E-7B1D-432E-8E8B-5A6F0C05AE5B}"/>
               </a:ext>
             </a:extLst>
           </p:cNvPr>
@@ -3012,7 +2908,7 @@
           <p:cNvPr id="2" name="Title 1">
             <a:extLst xmlns:a="http://schemas.openxmlformats.org/drawingml/2006/main">
               <a:ext uri="{FF2B5EF4-FFF2-40B4-BE49-F238E27FC236}">
-                <a16:creationId xmlns:a16="http://schemas.microsoft.com/office/drawing/2014/main" id="{AA8DEAC4-90B0-4E56-8277-0742E7854834}"/>
+                <a16:creationId xmlns:a16="http://schemas.microsoft.com/office/drawing/2014/main" id="{1FF73F2E-45F2-41E9-A9F5-1EA9C6B2559F}"/>
               </a:ext>
             </a:extLst>
           </p:cNvPr>
@@ -3045,7 +2941,7 @@
           <p:cNvPr id="3" name="Text Placeholder 2">
             <a:extLst xmlns:a="http://schemas.openxmlformats.org/drawingml/2006/main">
               <a:ext uri="{FF2B5EF4-FFF2-40B4-BE49-F238E27FC236}">
-                <a16:creationId xmlns:a16="http://schemas.microsoft.com/office/drawing/2014/main" id="{51BB103A-9E05-4D26-93B0-77FAA30B0549}"/>
+                <a16:creationId xmlns:a16="http://schemas.microsoft.com/office/drawing/2014/main" id="{4AB6ECAE-9296-4FBF-9124-6AA61A3146A9}"/>
               </a:ext>
             </a:extLst>
           </p:cNvPr>
@@ -3117,7 +3013,7 @@
           <p:cNvPr id="4" name="Content Placeholder 3">
             <a:extLst xmlns:a="http://schemas.openxmlformats.org/drawingml/2006/main">
               <a:ext uri="{FF2B5EF4-FFF2-40B4-BE49-F238E27FC236}">
-                <a16:creationId xmlns:a16="http://schemas.microsoft.com/office/drawing/2014/main" id="{71337714-5530-4E7C-8B71-A2EB79FF22D1}"/>
+                <a16:creationId xmlns:a16="http://schemas.microsoft.com/office/drawing/2014/main" id="{4ED0A156-ED97-42B5-BD54-0CCBFD4E0962}"/>
               </a:ext>
             </a:extLst>
           </p:cNvPr>
@@ -3222,7 +3118,7 @@
           <p:cNvPr id="5" name="Text Placeholder 4">
             <a:extLst xmlns:a="http://schemas.openxmlformats.org/drawingml/2006/main">
               <a:ext uri="{FF2B5EF4-FFF2-40B4-BE49-F238E27FC236}">
-                <a16:creationId xmlns:a16="http://schemas.microsoft.com/office/drawing/2014/main" id="{A3A1E99C-208A-4AB0-BA93-F3B2BDA01249}"/>
+                <a16:creationId xmlns:a16="http://schemas.microsoft.com/office/drawing/2014/main" id="{053A8CA3-2D02-412F-AF9E-F968628BB4EA}"/>
               </a:ext>
             </a:extLst>
           </p:cNvPr>
@@ -3294,7 +3190,7 @@
           <p:cNvPr id="6" name="Content Placeholder 5">
             <a:extLst xmlns:a="http://schemas.openxmlformats.org/drawingml/2006/main">
               <a:ext uri="{FF2B5EF4-FFF2-40B4-BE49-F238E27FC236}">
-                <a16:creationId xmlns:a16="http://schemas.microsoft.com/office/drawing/2014/main" id="{49BD30DD-BD8C-4657-B44A-BFCBCBB64E4D}"/>
+                <a16:creationId xmlns:a16="http://schemas.microsoft.com/office/drawing/2014/main" id="{714C9A1A-9A27-4500-8AFA-3AE2129128DB}"/>
               </a:ext>
             </a:extLst>
           </p:cNvPr>
@@ -3399,7 +3295,7 @@
           <p:cNvPr id="7" name="Date Placeholder 6">
             <a:extLst xmlns:a="http://schemas.openxmlformats.org/drawingml/2006/main">
               <a:ext uri="{FF2B5EF4-FFF2-40B4-BE49-F238E27FC236}">
-                <a16:creationId xmlns:a16="http://schemas.microsoft.com/office/drawing/2014/main" id="{A899A0E6-9B3D-4EE9-8D73-86BADAB5B199}"/>
+                <a16:creationId xmlns:a16="http://schemas.microsoft.com/office/drawing/2014/main" id="{84858CCD-587C-4F4F-B7B1-308CD8BE72D2}"/>
               </a:ext>
             </a:extLst>
           </p:cNvPr>
@@ -3427,7 +3323,7 @@
           <p:cNvPr id="8" name="Footer Placeholder 7">
             <a:extLst xmlns:a="http://schemas.openxmlformats.org/drawingml/2006/main">
               <a:ext uri="{FF2B5EF4-FFF2-40B4-BE49-F238E27FC236}">
-                <a16:creationId xmlns:a16="http://schemas.microsoft.com/office/drawing/2014/main" id="{2DF8D0A6-4F1C-43CD-B69E-37CCC58BBF2F}"/>
+                <a16:creationId xmlns:a16="http://schemas.microsoft.com/office/drawing/2014/main" id="{E2A251AC-3AF5-4FAB-BF5A-F2AB82556AB2}"/>
               </a:ext>
             </a:extLst>
           </p:cNvPr>
@@ -3452,7 +3348,7 @@
           <p:cNvPr id="9" name="Slide Number Placeholder 8">
             <a:extLst xmlns:a="http://schemas.openxmlformats.org/drawingml/2006/main">
               <a:ext uri="{FF2B5EF4-FFF2-40B4-BE49-F238E27FC236}">
-                <a16:creationId xmlns:a16="http://schemas.microsoft.com/office/drawing/2014/main" id="{5C3BF096-CA06-430C-83F0-F6D7609BA390}"/>
+                <a16:creationId xmlns:a16="http://schemas.microsoft.com/office/drawing/2014/main" id="{46F65EDB-B20B-4258-A2A5-ABEBF6D14D18}"/>
               </a:ext>
             </a:extLst>
           </p:cNvPr>
@@ -3497,7 +3393,7 @@
           <p:cNvPr id="2" name="Title 1">
             <a:extLst xmlns:a="http://schemas.openxmlformats.org/drawingml/2006/main">
               <a:ext uri="{FF2B5EF4-FFF2-40B4-BE49-F238E27FC236}">
-                <a16:creationId xmlns:a16="http://schemas.microsoft.com/office/drawing/2014/main" id="{C82CB4BA-F053-462D-A7C9-98F5BFCE56BF}"/>
+                <a16:creationId xmlns:a16="http://schemas.microsoft.com/office/drawing/2014/main" id="{2A9F2950-6973-4B5D-A233-ADFF49E0A0A0}"/>
               </a:ext>
             </a:extLst>
           </p:cNvPr>
@@ -3525,7 +3421,7 @@
           <p:cNvPr id="3" name="Date Placeholder 2">
             <a:extLst xmlns:a="http://schemas.openxmlformats.org/drawingml/2006/main">
               <a:ext uri="{FF2B5EF4-FFF2-40B4-BE49-F238E27FC236}">
-                <a16:creationId xmlns:a16="http://schemas.microsoft.com/office/drawing/2014/main" id="{9E0FC304-21C6-4CE4-84CB-EF5DA00B41DA}"/>
+                <a16:creationId xmlns:a16="http://schemas.microsoft.com/office/drawing/2014/main" id="{F6DE420F-0A84-4AAE-849D-BCCE31855278}"/>
               </a:ext>
             </a:extLst>
           </p:cNvPr>
@@ -3553,7 +3449,7 @@
           <p:cNvPr id="4" name="Footer Placeholder 3">
             <a:extLst xmlns:a="http://schemas.openxmlformats.org/drawingml/2006/main">
               <a:ext uri="{FF2B5EF4-FFF2-40B4-BE49-F238E27FC236}">
-                <a16:creationId xmlns:a16="http://schemas.microsoft.com/office/drawing/2014/main" id="{E35632F7-AA10-4097-8BA1-65E939C96441}"/>
+                <a16:creationId xmlns:a16="http://schemas.microsoft.com/office/drawing/2014/main" id="{2D5DE67F-7D27-4BA3-B576-D9AD0A2E70BF}"/>
               </a:ext>
             </a:extLst>
           </p:cNvPr>
@@ -3578,7 +3474,7 @@
           <p:cNvPr id="5" name="Slide Number Placeholder 4">
             <a:extLst xmlns:a="http://schemas.openxmlformats.org/drawingml/2006/main">
               <a:ext uri="{FF2B5EF4-FFF2-40B4-BE49-F238E27FC236}">
-                <a16:creationId xmlns:a16="http://schemas.microsoft.com/office/drawing/2014/main" id="{0AC8C3B7-7B8F-427C-AA6B-7289F4FA173E}"/>
+                <a16:creationId xmlns:a16="http://schemas.microsoft.com/office/drawing/2014/main" id="{D4E70B06-ACE7-436B-BC7C-F626B13B5081}"/>
               </a:ext>
             </a:extLst>
           </p:cNvPr>
@@ -3623,7 +3519,7 @@
           <p:cNvPr id="2" name="Date Placeholder 1">
             <a:extLst xmlns:a="http://schemas.openxmlformats.org/drawingml/2006/main">
               <a:ext uri="{FF2B5EF4-FFF2-40B4-BE49-F238E27FC236}">
-                <a16:creationId xmlns:a16="http://schemas.microsoft.com/office/drawing/2014/main" id="{32BE5F14-FAB3-49C3-A0FA-B43F8C8046D6}"/>
+                <a16:creationId xmlns:a16="http://schemas.microsoft.com/office/drawing/2014/main" id="{E13C16FA-BBCA-4646-8E5E-8F6B40A358D0}"/>
               </a:ext>
             </a:extLst>
           </p:cNvPr>
@@ -3651,7 +3547,7 @@
           <p:cNvPr id="3" name="Footer Placeholder 2">
             <a:extLst xmlns:a="http://schemas.openxmlformats.org/drawingml/2006/main">
               <a:ext uri="{FF2B5EF4-FFF2-40B4-BE49-F238E27FC236}">
-                <a16:creationId xmlns:a16="http://schemas.microsoft.com/office/drawing/2014/main" id="{3D2215DD-E804-4ECC-AD86-376F86216B4D}"/>
+                <a16:creationId xmlns:a16="http://schemas.microsoft.com/office/drawing/2014/main" id="{BDEAAB22-0477-4D2F-9FAE-2BAC773640E6}"/>
               </a:ext>
             </a:extLst>
           </p:cNvPr>
@@ -3676,7 +3572,7 @@
           <p:cNvPr id="4" name="Slide Number Placeholder 3">
             <a:extLst xmlns:a="http://schemas.openxmlformats.org/drawingml/2006/main">
               <a:ext uri="{FF2B5EF4-FFF2-40B4-BE49-F238E27FC236}">
-                <a16:creationId xmlns:a16="http://schemas.microsoft.com/office/drawing/2014/main" id="{7E148743-B58A-47B1-B193-B2C18541AC1B}"/>
+                <a16:creationId xmlns:a16="http://schemas.microsoft.com/office/drawing/2014/main" id="{B141AD95-DE5E-4038-8103-EA4C327DFB31}"/>
               </a:ext>
             </a:extLst>
           </p:cNvPr>
@@ -3721,7 +3617,7 @@
           <p:cNvPr id="2" name="Title 1">
             <a:extLst xmlns:a="http://schemas.openxmlformats.org/drawingml/2006/main">
               <a:ext uri="{FF2B5EF4-FFF2-40B4-BE49-F238E27FC236}">
-                <a16:creationId xmlns:a16="http://schemas.microsoft.com/office/drawing/2014/main" id="{53F6BD0A-70EE-47A7-B356-71DDC0648631}"/>
+                <a16:creationId xmlns:a16="http://schemas.microsoft.com/office/drawing/2014/main" id="{30F7A684-8AC2-4325-B980-5E7E98ADFE04}"/>
               </a:ext>
             </a:extLst>
           </p:cNvPr>
@@ -3759,7 +3655,7 @@
           <p:cNvPr id="3" name="Content Placeholder 2">
             <a:extLst xmlns:a="http://schemas.openxmlformats.org/drawingml/2006/main">
               <a:ext uri="{FF2B5EF4-FFF2-40B4-BE49-F238E27FC236}">
-                <a16:creationId xmlns:a16="http://schemas.microsoft.com/office/drawing/2014/main" id="{A57270B7-3E0B-4BF9-A6EC-AD1EE428A7F9}"/>
+                <a16:creationId xmlns:a16="http://schemas.microsoft.com/office/drawing/2014/main" id="{9A1BCC4A-5AE3-4199-B8F7-D3B4F55ED783}"/>
               </a:ext>
             </a:extLst>
           </p:cNvPr>
@@ -3864,7 +3760,7 @@
           <p:cNvPr id="4" name="Text Placeholder 3">
             <a:extLst xmlns:a="http://schemas.openxmlformats.org/drawingml/2006/main">
               <a:ext uri="{FF2B5EF4-FFF2-40B4-BE49-F238E27FC236}">
-                <a16:creationId xmlns:a16="http://schemas.microsoft.com/office/drawing/2014/main" id="{3A6E42A2-117A-48E5-A13B-3CEB59B1FB85}"/>
+                <a16:creationId xmlns:a16="http://schemas.microsoft.com/office/drawing/2014/main" id="{8081C687-3A62-4061-A66D-BA6F120F1B9D}"/>
               </a:ext>
             </a:extLst>
           </p:cNvPr>
@@ -3936,7 +3832,7 @@
           <p:cNvPr id="5" name="Date Placeholder 4">
             <a:extLst xmlns:a="http://schemas.openxmlformats.org/drawingml/2006/main">
               <a:ext uri="{FF2B5EF4-FFF2-40B4-BE49-F238E27FC236}">
-                <a16:creationId xmlns:a16="http://schemas.microsoft.com/office/drawing/2014/main" id="{242F3C52-AA8B-4147-95EE-554F89AF5E42}"/>
+                <a16:creationId xmlns:a16="http://schemas.microsoft.com/office/drawing/2014/main" id="{FD16852F-FB0F-4C62-AF3A-12D8476CF53B}"/>
               </a:ext>
             </a:extLst>
           </p:cNvPr>
@@ -3964,7 +3860,7 @@
           <p:cNvPr id="6" name="Footer Placeholder 5">
             <a:extLst xmlns:a="http://schemas.openxmlformats.org/drawingml/2006/main">
               <a:ext uri="{FF2B5EF4-FFF2-40B4-BE49-F238E27FC236}">
-                <a16:creationId xmlns:a16="http://schemas.microsoft.com/office/drawing/2014/main" id="{66A5DEFB-A92E-4043-B582-3836E07F2104}"/>
+                <a16:creationId xmlns:a16="http://schemas.microsoft.com/office/drawing/2014/main" id="{E6F301B7-25B5-4BB5-87F7-7D4082974985}"/>
               </a:ext>
             </a:extLst>
           </p:cNvPr>
@@ -3989,7 +3885,7 @@
           <p:cNvPr id="7" name="Slide Number Placeholder 6">
             <a:extLst xmlns:a="http://schemas.openxmlformats.org/drawingml/2006/main">
               <a:ext uri="{FF2B5EF4-FFF2-40B4-BE49-F238E27FC236}">
-                <a16:creationId xmlns:a16="http://schemas.microsoft.com/office/drawing/2014/main" id="{DF1B298A-5688-4720-99AA-4350ABFA3AB2}"/>
+                <a16:creationId xmlns:a16="http://schemas.microsoft.com/office/drawing/2014/main" id="{A2F24F8E-8F58-4C41-BCAC-06B585776A74}"/>
               </a:ext>
             </a:extLst>
           </p:cNvPr>
@@ -4034,7 +3930,7 @@
           <p:cNvPr id="2" name="Title 1">
             <a:extLst xmlns:a="http://schemas.openxmlformats.org/drawingml/2006/main">
               <a:ext uri="{FF2B5EF4-FFF2-40B4-BE49-F238E27FC236}">
-                <a16:creationId xmlns:a16="http://schemas.microsoft.com/office/drawing/2014/main" id="{D923245B-436B-411C-B512-3AA2E94EB8FA}"/>
+                <a16:creationId xmlns:a16="http://schemas.microsoft.com/office/drawing/2014/main" id="{24E8A200-E5CF-4386-93EC-E474BB509059}"/>
               </a:ext>
             </a:extLst>
           </p:cNvPr>
@@ -4072,7 +3968,7 @@
           <p:cNvPr id="3" name="Picture Placeholder 2">
             <a:extLst xmlns:a="http://schemas.openxmlformats.org/drawingml/2006/main">
               <a:ext uri="{FF2B5EF4-FFF2-40B4-BE49-F238E27FC236}">
-                <a16:creationId xmlns:a16="http://schemas.microsoft.com/office/drawing/2014/main" id="{136BA8FA-9CD9-460F-9930-9CD4E71AF6CE}"/>
+                <a16:creationId xmlns:a16="http://schemas.microsoft.com/office/drawing/2014/main" id="{4152B39F-9205-458F-B8D1-24DF06676D38}"/>
               </a:ext>
             </a:extLst>
           </p:cNvPr>
@@ -4139,7 +4035,7 @@
           <p:cNvPr id="4" name="Text Placeholder 3">
             <a:extLst xmlns:a="http://schemas.openxmlformats.org/drawingml/2006/main">
               <a:ext uri="{FF2B5EF4-FFF2-40B4-BE49-F238E27FC236}">
-                <a16:creationId xmlns:a16="http://schemas.microsoft.com/office/drawing/2014/main" id="{46ED022F-DB5A-4E9B-B429-74377EF97F5A}"/>
+                <a16:creationId xmlns:a16="http://schemas.microsoft.com/office/drawing/2014/main" id="{45E56CC9-9381-41E0-81A4-0B4942A2ECF9}"/>
               </a:ext>
             </a:extLst>
           </p:cNvPr>
@@ -4211,7 +4107,7 @@
           <p:cNvPr id="5" name="Date Placeholder 4">
             <a:extLst xmlns:a="http://schemas.openxmlformats.org/drawingml/2006/main">
               <a:ext uri="{FF2B5EF4-FFF2-40B4-BE49-F238E27FC236}">
-                <a16:creationId xmlns:a16="http://schemas.microsoft.com/office/drawing/2014/main" id="{095CD0E5-43A0-4A37-8229-D2926C683840}"/>
+                <a16:creationId xmlns:a16="http://schemas.microsoft.com/office/drawing/2014/main" id="{3CFEE3A6-651F-4ADE-9CF3-360EBB69520E}"/>
               </a:ext>
             </a:extLst>
           </p:cNvPr>
@@ -4239,7 +4135,7 @@
           <p:cNvPr id="6" name="Footer Placeholder 5">
             <a:extLst xmlns:a="http://schemas.openxmlformats.org/drawingml/2006/main">
               <a:ext uri="{FF2B5EF4-FFF2-40B4-BE49-F238E27FC236}">
-                <a16:creationId xmlns:a16="http://schemas.microsoft.com/office/drawing/2014/main" id="{9346499C-FAC8-413E-96CA-389C73280D8A}"/>
+                <a16:creationId xmlns:a16="http://schemas.microsoft.com/office/drawing/2014/main" id="{6BB63E21-47F4-4557-AA75-0C7BACD9D59C}"/>
               </a:ext>
             </a:extLst>
           </p:cNvPr>
@@ -4264,7 +4160,7 @@
           <p:cNvPr id="7" name="Slide Number Placeholder 6">
             <a:extLst xmlns:a="http://schemas.openxmlformats.org/drawingml/2006/main">
               <a:ext uri="{FF2B5EF4-FFF2-40B4-BE49-F238E27FC236}">
-                <a16:creationId xmlns:a16="http://schemas.microsoft.com/office/drawing/2014/main" id="{E1EC58BA-0EF4-42DC-AF3E-AE6249739F8D}"/>
+                <a16:creationId xmlns:a16="http://schemas.microsoft.com/office/drawing/2014/main" id="{DFAD7CB1-A8B3-4FC5-8DB3-D10AF256027E}"/>
               </a:ext>
             </a:extLst>
           </p:cNvPr>
@@ -4314,7 +4210,7 @@
           <p:cNvPr id="2" name="Title Placeholder 1">
             <a:extLst xmlns:a="http://schemas.openxmlformats.org/drawingml/2006/main">
               <a:ext uri="{FF2B5EF4-FFF2-40B4-BE49-F238E27FC236}">
-                <a16:creationId xmlns:a16="http://schemas.microsoft.com/office/drawing/2014/main" id="{2A3BB33D-D24D-4F84-BC82-54AD037DAA32}"/>
+                <a16:creationId xmlns:a16="http://schemas.microsoft.com/office/drawing/2014/main" id="{625D702C-E895-466C-8454-3D8EDB1373FB}"/>
               </a:ext>
             </a:extLst>
           </p:cNvPr>
@@ -4352,7 +4248,7 @@
           <p:cNvPr id="3" name="Text Placeholder 2">
             <a:extLst xmlns:a="http://schemas.openxmlformats.org/drawingml/2006/main">
               <a:ext uri="{FF2B5EF4-FFF2-40B4-BE49-F238E27FC236}">
-                <a16:creationId xmlns:a16="http://schemas.microsoft.com/office/drawing/2014/main" id="{64499598-DA6D-4E98-AF73-F004098F1D01}"/>
+                <a16:creationId xmlns:a16="http://schemas.microsoft.com/office/drawing/2014/main" id="{CC29110E-DAC7-4A06-A0E0-EA23312FB55A}"/>
               </a:ext>
             </a:extLst>
           </p:cNvPr>
@@ -4425,7 +4321,7 @@
           <p:cNvPr id="4" name="Date Placeholder 3">
             <a:extLst xmlns:a="http://schemas.openxmlformats.org/drawingml/2006/main">
               <a:ext uri="{FF2B5EF4-FFF2-40B4-BE49-F238E27FC236}">
-                <a16:creationId xmlns:a16="http://schemas.microsoft.com/office/drawing/2014/main" id="{17A493F0-BEA0-4D38-9A6F-6A5F58F7C24E}"/>
+                <a16:creationId xmlns:a16="http://schemas.microsoft.com/office/drawing/2014/main" id="{D1045C35-1C2C-4964-9984-3A90ACE9D0B2}"/>
               </a:ext>
             </a:extLst>
           </p:cNvPr>
@@ -4472,7 +4368,7 @@
           <p:cNvPr id="5" name="Footer Placeholder 4">
             <a:extLst xmlns:a="http://schemas.openxmlformats.org/drawingml/2006/main">
               <a:ext uri="{FF2B5EF4-FFF2-40B4-BE49-F238E27FC236}">
-                <a16:creationId xmlns:a16="http://schemas.microsoft.com/office/drawing/2014/main" id="{72969A1B-6ED8-41E4-AA7C-2E59851F47EA}"/>
+                <a16:creationId xmlns:a16="http://schemas.microsoft.com/office/drawing/2014/main" id="{031A3CAA-3232-47D7-A378-AEB0CFB836F4}"/>
               </a:ext>
             </a:extLst>
           </p:cNvPr>
@@ -4516,7 +4412,7 @@
           <p:cNvPr id="6" name="Slide Number Placeholder 5">
             <a:extLst xmlns:a="http://schemas.openxmlformats.org/drawingml/2006/main">
               <a:ext uri="{FF2B5EF4-FFF2-40B4-BE49-F238E27FC236}">
-                <a16:creationId xmlns:a16="http://schemas.microsoft.com/office/drawing/2014/main" id="{2389C5C2-E527-4468-9B34-AA72C271C54E}"/>
+                <a16:creationId xmlns:a16="http://schemas.microsoft.com/office/drawing/2014/main" id="{D201BFAD-5481-417D-A24A-D39DAD915346}"/>
               </a:ext>
             </a:extLst>
           </p:cNvPr>
@@ -4562,17 +4458,17 @@
   </p:cSld>
   <p:clrMap bg1="lt1" tx1="dk1" bg2="lt2" tx2="dk2" accent1="accent1" accent2="accent2" accent3="accent3" accent4="accent4" accent5="accent5" accent6="accent6" hlink="hlink" folHlink="folHlink"/>
   <p:sldLayoutIdLst>
-    <p:sldLayoutId xmlns:r="http://schemas.openxmlformats.org/officeDocument/2006/relationships" id="2147483649" r:id="Rc77cdf9612a340ee"/>
-    <p:sldLayoutId xmlns:r="http://schemas.openxmlformats.org/officeDocument/2006/relationships" id="2147483650" r:id="Re7b0d9f703b64e81"/>
-    <p:sldLayoutId xmlns:r="http://schemas.openxmlformats.org/officeDocument/2006/relationships" id="2147483651" r:id="R09e93bdc6a054ec1"/>
-    <p:sldLayoutId xmlns:r="http://schemas.openxmlformats.org/officeDocument/2006/relationships" id="2147483652" r:id="Rfca96abff1af4a2c"/>
-    <p:sldLayoutId xmlns:r="http://schemas.openxmlformats.org/officeDocument/2006/relationships" id="2147483653" r:id="R6991690e8e1442fd"/>
-    <p:sldLayoutId xmlns:r="http://schemas.openxmlformats.org/officeDocument/2006/relationships" id="2147483654" r:id="R4e5f3a70febe44d8"/>
-    <p:sldLayoutId xmlns:r="http://schemas.openxmlformats.org/officeDocument/2006/relationships" id="2147483655" r:id="Rfbe69c0add00403e"/>
-    <p:sldLayoutId xmlns:r="http://schemas.openxmlformats.org/officeDocument/2006/relationships" id="2147483656" r:id="R4aca5faec19c4848"/>
-    <p:sldLayoutId xmlns:r="http://schemas.openxmlformats.org/officeDocument/2006/relationships" id="2147483657" r:id="R69191f587b484eb7"/>
-    <p:sldLayoutId xmlns:r="http://schemas.openxmlformats.org/officeDocument/2006/relationships" id="2147483658" r:id="Rbf116496eff242c7"/>
-    <p:sldLayoutId xmlns:r="http://schemas.openxmlformats.org/officeDocument/2006/relationships" id="2147483659" r:id="R6345aa8f29d84379"/>
+    <p:sldLayoutId xmlns:r="http://schemas.openxmlformats.org/officeDocument/2006/relationships" id="2147483649" r:id="Rbe3f4dcd868c4f91"/>
+    <p:sldLayoutId xmlns:r="http://schemas.openxmlformats.org/officeDocument/2006/relationships" id="2147483650" r:id="Rf1705a2f0f574639"/>
+    <p:sldLayoutId xmlns:r="http://schemas.openxmlformats.org/officeDocument/2006/relationships" id="2147483651" r:id="Rfbd564c9f1d94404"/>
+    <p:sldLayoutId xmlns:r="http://schemas.openxmlformats.org/officeDocument/2006/relationships" id="2147483652" r:id="R2e0156205a89419b"/>
+    <p:sldLayoutId xmlns:r="http://schemas.openxmlformats.org/officeDocument/2006/relationships" id="2147483653" r:id="Rd87eb4e560e34a58"/>
+    <p:sldLayoutId xmlns:r="http://schemas.openxmlformats.org/officeDocument/2006/relationships" id="2147483654" r:id="R157e5c00cf6f4b4e"/>
+    <p:sldLayoutId xmlns:r="http://schemas.openxmlformats.org/officeDocument/2006/relationships" id="2147483655" r:id="R3485bf098ba94de7"/>
+    <p:sldLayoutId xmlns:r="http://schemas.openxmlformats.org/officeDocument/2006/relationships" id="2147483656" r:id="R4bd5eda1ee5146f4"/>
+    <p:sldLayoutId xmlns:r="http://schemas.openxmlformats.org/officeDocument/2006/relationships" id="2147483657" r:id="R2b061fe7302943d7"/>
+    <p:sldLayoutId xmlns:r="http://schemas.openxmlformats.org/officeDocument/2006/relationships" id="2147483658" r:id="R1ed700f4b8b64f8e"/>
+    <p:sldLayoutId xmlns:r="http://schemas.openxmlformats.org/officeDocument/2006/relationships" id="2147483659" r:id="R9cb67aea190d405c"/>
   </p:sldLayoutIdLst>
   <p:txStyles>
     <p:titleStyle>
@@ -5118,7 +5014,7 @@
           <p:cNvPr id="2" name="Rectangle 1">
             <a:extLst xmlns:a="http://schemas.openxmlformats.org/drawingml/2006/main">
               <a:ext uri="{FF2B5EF4-FFF2-40B4-BE49-F238E27FC236}">
-                <a16:creationId xmlns:a16="http://schemas.microsoft.com/office/drawing/2014/main" id="{4199313A-B210-46C0-AB89-536416FF0231}"/>
+                <a16:creationId xmlns:a16="http://schemas.microsoft.com/office/drawing/2014/main" id="{1A9204AE-B44C-47CC-BEA4-26E4E3E74C08}"/>
               </a:ext>
             </a:extLst>
           </p:cNvPr>
@@ -5171,7 +5067,7 @@
           <p:cNvPr id="3" name="Rectangle 2">
             <a:extLst xmlns:a="http://schemas.openxmlformats.org/drawingml/2006/main">
               <a:ext uri="{FF2B5EF4-FFF2-40B4-BE49-F238E27FC236}">
-                <a16:creationId xmlns:a16="http://schemas.microsoft.com/office/drawing/2014/main" id="{3D3AE276-69DC-43A8-926A-3D4BFF401C81}"/>
+                <a16:creationId xmlns:a16="http://schemas.microsoft.com/office/drawing/2014/main" id="{D5E43A13-1DE5-4391-939E-9025D902AA84}"/>
               </a:ext>
             </a:extLst>
           </p:cNvPr>
@@ -5224,7 +5120,7 @@
           <p:cNvPr id="4" name="TextBox 3">
             <a:extLst xmlns:a="http://schemas.openxmlformats.org/drawingml/2006/main">
               <a:ext uri="{FF2B5EF4-FFF2-40B4-BE49-F238E27FC236}">
-                <a16:creationId xmlns:a16="http://schemas.microsoft.com/office/drawing/2014/main" id="{1B18E688-2AAF-4BA3-88EC-5515E6420FCF}"/>
+                <a16:creationId xmlns:a16="http://schemas.microsoft.com/office/drawing/2014/main" id="{78FB1B37-9628-434E-8048-51DD12CF87AE}"/>
               </a:ext>
             </a:extLst>
           </p:cNvPr>
@@ -5326,7 +5222,7 @@
     </p:spTree>
     <p:extLst>
       <p:ext uri="{BB962C8B-B14F-4D97-AF65-F5344CB8AC3E}">
-        <p14:creationId xmlns:p14="http://schemas.microsoft.com/office/powerpoint/2010/main" val="1277625031"/>
+        <p14:creationId xmlns:p14="http://schemas.microsoft.com/office/powerpoint/2010/main" val="1244413541"/>
       </p:ext>
     </p:extLst>
   </p:cSld>
@@ -5350,7 +5246,7 @@
           <p:cNvPr id="2" name="Rectangle 1">
             <a:extLst xmlns:a="http://schemas.openxmlformats.org/drawingml/2006/main">
               <a:ext uri="{FF2B5EF4-FFF2-40B4-BE49-F238E27FC236}">
-                <a16:creationId xmlns:a16="http://schemas.microsoft.com/office/drawing/2014/main" id="{B60AAEDF-78C7-46F0-97DB-D5E7659FCC5B}"/>
+                <a16:creationId xmlns:a16="http://schemas.microsoft.com/office/drawing/2014/main" id="{A5079CB4-1562-48AF-805F-F2F248CF8D3A}"/>
               </a:ext>
             </a:extLst>
           </p:cNvPr>
@@ -5403,7 +5299,7 @@
           <p:cNvPr id="3" name="Rectangle 2">
             <a:extLst xmlns:a="http://schemas.openxmlformats.org/drawingml/2006/main">
               <a:ext uri="{FF2B5EF4-FFF2-40B4-BE49-F238E27FC236}">
-                <a16:creationId xmlns:a16="http://schemas.microsoft.com/office/drawing/2014/main" id="{AB57A5C7-3428-4B09-894C-2AE7B3410003}"/>
+                <a16:creationId xmlns:a16="http://schemas.microsoft.com/office/drawing/2014/main" id="{754B5928-703C-4EC3-98F4-D4698C52D594}"/>
               </a:ext>
             </a:extLst>
           </p:cNvPr>
@@ -5456,7 +5352,7 @@
           <p:cNvPr id="4" name="Rectangle 3">
             <a:extLst xmlns:a="http://schemas.openxmlformats.org/drawingml/2006/main">
               <a:ext uri="{FF2B5EF4-FFF2-40B4-BE49-F238E27FC236}">
-                <a16:creationId xmlns:a16="http://schemas.microsoft.com/office/drawing/2014/main" id="{5A842B13-96CA-4507-8499-6A95E8360D96}"/>
+                <a16:creationId xmlns:a16="http://schemas.microsoft.com/office/drawing/2014/main" id="{FA5320BD-72D3-4D60-A1EC-134923C0CFB7}"/>
               </a:ext>
             </a:extLst>
           </p:cNvPr>
@@ -5509,7 +5405,7 @@
           <p:cNvPr id="5" name="TextBox 4">
             <a:extLst xmlns:a="http://schemas.openxmlformats.org/drawingml/2006/main">
               <a:ext uri="{FF2B5EF4-FFF2-40B4-BE49-F238E27FC236}">
-                <a16:creationId xmlns:a16="http://schemas.microsoft.com/office/drawing/2014/main" id="{DCDCD2A3-FAFD-4C3D-BE68-97DAE7EED957}"/>
+                <a16:creationId xmlns:a16="http://schemas.microsoft.com/office/drawing/2014/main" id="{217267DC-CFEE-49B1-B5B0-7F0688BC172C}"/>
               </a:ext>
             </a:extLst>
           </p:cNvPr>
@@ -5572,7 +5468,7 @@
           <p:cNvPr id="6" name="Rounded Rectangle 5">
             <a:extLst xmlns:a="http://schemas.openxmlformats.org/drawingml/2006/main">
               <a:ext uri="{FF2B5EF4-FFF2-40B4-BE49-F238E27FC236}">
-                <a16:creationId xmlns:a16="http://schemas.microsoft.com/office/drawing/2014/main" id="{F26F6E0F-96FB-41D7-8315-A6B5B116D60B}"/>
+                <a16:creationId xmlns:a16="http://schemas.microsoft.com/office/drawing/2014/main" id="{2432E737-76BA-49D1-B8F5-0FE0564FA169}"/>
               </a:ext>
             </a:extLst>
           </p:cNvPr>
@@ -5627,7 +5523,7 @@
           <p:cNvPr id="7" name="TextBox 6">
             <a:extLst xmlns:a="http://schemas.openxmlformats.org/drawingml/2006/main">
               <a:ext uri="{FF2B5EF4-FFF2-40B4-BE49-F238E27FC236}">
-                <a16:creationId xmlns:a16="http://schemas.microsoft.com/office/drawing/2014/main" id="{0B8394A9-2B95-479B-BC0A-B4EA6E2A3DF7}"/>
+                <a16:creationId xmlns:a16="http://schemas.microsoft.com/office/drawing/2014/main" id="{16C169C2-E485-4C82-B023-D25CB28DFA8C}"/>
               </a:ext>
             </a:extLst>
           </p:cNvPr>
@@ -5731,7 +5627,7 @@
           <p:cNvPr id="8" name="Rounded Rectangle 7">
             <a:extLst xmlns:a="http://schemas.openxmlformats.org/drawingml/2006/main">
               <a:ext uri="{FF2B5EF4-FFF2-40B4-BE49-F238E27FC236}">
-                <a16:creationId xmlns:a16="http://schemas.microsoft.com/office/drawing/2014/main" id="{F328F80A-3E93-414A-81F2-5FEB3D957C31}"/>
+                <a16:creationId xmlns:a16="http://schemas.microsoft.com/office/drawing/2014/main" id="{9A007036-B3AF-4926-9FA2-CFE5C211E851}"/>
               </a:ext>
             </a:extLst>
           </p:cNvPr>
@@ -5786,7 +5682,7 @@
           <p:cNvPr id="9" name="TextBox 8">
             <a:extLst xmlns:a="http://schemas.openxmlformats.org/drawingml/2006/main">
               <a:ext uri="{FF2B5EF4-FFF2-40B4-BE49-F238E27FC236}">
-                <a16:creationId xmlns:a16="http://schemas.microsoft.com/office/drawing/2014/main" id="{C3BC5DEC-3A0E-4989-BD90-FF4292DC1882}"/>
+                <a16:creationId xmlns:a16="http://schemas.microsoft.com/office/drawing/2014/main" id="{64FDB06D-4BAA-4085-83C3-82BD67687E6A}"/>
               </a:ext>
             </a:extLst>
           </p:cNvPr>
@@ -5871,7 +5767,7 @@
           <p:cNvPr id="10" name="Rounded Rectangle 9">
             <a:extLst xmlns:a="http://schemas.openxmlformats.org/drawingml/2006/main">
               <a:ext uri="{FF2B5EF4-FFF2-40B4-BE49-F238E27FC236}">
-                <a16:creationId xmlns:a16="http://schemas.microsoft.com/office/drawing/2014/main" id="{6581D62E-AD33-49C0-A650-6C6A0D8C67D5}"/>
+                <a16:creationId xmlns:a16="http://schemas.microsoft.com/office/drawing/2014/main" id="{FBA861AD-D277-47CF-99F2-E4169E665547}"/>
               </a:ext>
             </a:extLst>
           </p:cNvPr>
@@ -5926,7 +5822,7 @@
           <p:cNvPr id="11" name="TextBox 10">
             <a:extLst xmlns:a="http://schemas.openxmlformats.org/drawingml/2006/main">
               <a:ext uri="{FF2B5EF4-FFF2-40B4-BE49-F238E27FC236}">
-                <a16:creationId xmlns:a16="http://schemas.microsoft.com/office/drawing/2014/main" id="{328ABD2B-304F-45C5-A045-86A47CEAA927}"/>
+                <a16:creationId xmlns:a16="http://schemas.microsoft.com/office/drawing/2014/main" id="{C04A546D-B3D7-4169-8470-8A6B6D6B056E}"/>
               </a:ext>
             </a:extLst>
           </p:cNvPr>
@@ -6028,7 +5924,7 @@
     </p:spTree>
     <p:extLst>
       <p:ext uri="{BB962C8B-B14F-4D97-AF65-F5344CB8AC3E}">
-        <p14:creationId xmlns:p14="http://schemas.microsoft.com/office/powerpoint/2010/main" val="452905077"/>
+        <p14:creationId xmlns:p14="http://schemas.microsoft.com/office/powerpoint/2010/main" val="2112739995"/>
       </p:ext>
     </p:extLst>
   </p:cSld>
@@ -6052,7 +5948,7 @@
           <p:cNvPr id="2" name="Rectangle 1">
             <a:extLst xmlns:a="http://schemas.openxmlformats.org/drawingml/2006/main">
               <a:ext uri="{FF2B5EF4-FFF2-40B4-BE49-F238E27FC236}">
-                <a16:creationId xmlns:a16="http://schemas.microsoft.com/office/drawing/2014/main" id="{8F549AB4-460E-4DA0-85F2-EB66D2E62594}"/>
+                <a16:creationId xmlns:a16="http://schemas.microsoft.com/office/drawing/2014/main" id="{1E5461AB-EB93-48CE-A6C9-D1FC9AB412BF}"/>
               </a:ext>
             </a:extLst>
           </p:cNvPr>
@@ -6105,7 +6001,7 @@
           <p:cNvPr id="3" name="Rectangle 2">
             <a:extLst xmlns:a="http://schemas.openxmlformats.org/drawingml/2006/main">
               <a:ext uri="{FF2B5EF4-FFF2-40B4-BE49-F238E27FC236}">
-                <a16:creationId xmlns:a16="http://schemas.microsoft.com/office/drawing/2014/main" id="{CAF8AFC4-39E8-4106-9179-74D307226E21}"/>
+                <a16:creationId xmlns:a16="http://schemas.microsoft.com/office/drawing/2014/main" id="{D3204BBF-9954-4F0E-B24C-40CC16575700}"/>
               </a:ext>
             </a:extLst>
           </p:cNvPr>
@@ -6158,7 +6054,7 @@
           <p:cNvPr id="4" name="Rectangle 3">
             <a:extLst xmlns:a="http://schemas.openxmlformats.org/drawingml/2006/main">
               <a:ext uri="{FF2B5EF4-FFF2-40B4-BE49-F238E27FC236}">
-                <a16:creationId xmlns:a16="http://schemas.microsoft.com/office/drawing/2014/main" id="{A7FC2C38-4B67-49CA-A04A-285494AE6FCA}"/>
+                <a16:creationId xmlns:a16="http://schemas.microsoft.com/office/drawing/2014/main" id="{EE2794B3-112F-4183-AF1F-1AE2AECF5517}"/>
               </a:ext>
             </a:extLst>
           </p:cNvPr>
@@ -6211,7 +6107,7 @@
           <p:cNvPr id="5" name="TextBox 4">
             <a:extLst xmlns:a="http://schemas.openxmlformats.org/drawingml/2006/main">
               <a:ext uri="{FF2B5EF4-FFF2-40B4-BE49-F238E27FC236}">
-                <a16:creationId xmlns:a16="http://schemas.microsoft.com/office/drawing/2014/main" id="{8808532B-0A55-4D7D-8863-C77FB6CD1769}"/>
+                <a16:creationId xmlns:a16="http://schemas.microsoft.com/office/drawing/2014/main" id="{BD50A6C4-BF56-410F-96B7-C62D23FC2134}"/>
               </a:ext>
             </a:extLst>
           </p:cNvPr>
@@ -6274,7 +6170,7 @@
           <p:cNvPr id="6" name="Rounded Rectangle 5">
             <a:extLst xmlns:a="http://schemas.openxmlformats.org/drawingml/2006/main">
               <a:ext uri="{FF2B5EF4-FFF2-40B4-BE49-F238E27FC236}">
-                <a16:creationId xmlns:a16="http://schemas.microsoft.com/office/drawing/2014/main" id="{C5A2118F-682B-4A5F-9313-589843F6FFCF}"/>
+                <a16:creationId xmlns:a16="http://schemas.microsoft.com/office/drawing/2014/main" id="{AD1D43EC-AECC-4B33-A7A5-D0D6BC00FCAA}"/>
               </a:ext>
             </a:extLst>
           </p:cNvPr>
@@ -6329,7 +6225,7 @@
           <p:cNvPr id="7" name="TextBox 6">
             <a:extLst xmlns:a="http://schemas.openxmlformats.org/drawingml/2006/main">
               <a:ext uri="{FF2B5EF4-FFF2-40B4-BE49-F238E27FC236}">
-                <a16:creationId xmlns:a16="http://schemas.microsoft.com/office/drawing/2014/main" id="{1605524E-685F-4938-80D6-AE79AAA230C2}"/>
+                <a16:creationId xmlns:a16="http://schemas.microsoft.com/office/drawing/2014/main" id="{1193F931-9650-414E-914E-DE16A6607D56}"/>
               </a:ext>
             </a:extLst>
           </p:cNvPr>
@@ -6528,7 +6424,7 @@
           <p:cNvPr id="8" name="Rounded Rectangle 7">
             <a:extLst xmlns:a="http://schemas.openxmlformats.org/drawingml/2006/main">
               <a:ext uri="{FF2B5EF4-FFF2-40B4-BE49-F238E27FC236}">
-                <a16:creationId xmlns:a16="http://schemas.microsoft.com/office/drawing/2014/main" id="{E1EC6CF1-99F8-405D-9BAF-BCCFD3AFFEF1}"/>
+                <a16:creationId xmlns:a16="http://schemas.microsoft.com/office/drawing/2014/main" id="{4D4FC0A7-964A-440B-BE37-4E3DBF8804A9}"/>
               </a:ext>
             </a:extLst>
           </p:cNvPr>
@@ -6583,7 +6479,7 @@
           <p:cNvPr id="9" name="TextBox 8">
             <a:extLst xmlns:a="http://schemas.openxmlformats.org/drawingml/2006/main">
               <a:ext uri="{FF2B5EF4-FFF2-40B4-BE49-F238E27FC236}">
-                <a16:creationId xmlns:a16="http://schemas.microsoft.com/office/drawing/2014/main" id="{84F074CB-40CD-4F57-88C9-7F01163E5EEF}"/>
+                <a16:creationId xmlns:a16="http://schemas.microsoft.com/office/drawing/2014/main" id="{06C76F78-7A4E-4717-B726-328777A2B9A2}"/>
               </a:ext>
             </a:extLst>
           </p:cNvPr>
@@ -6704,7 +6600,7 @@
     </p:spTree>
     <p:extLst>
       <p:ext uri="{BB962C8B-B14F-4D97-AF65-F5344CB8AC3E}">
-        <p14:creationId xmlns:p14="http://schemas.microsoft.com/office/powerpoint/2010/main" val="1471973507"/>
+        <p14:creationId xmlns:p14="http://schemas.microsoft.com/office/powerpoint/2010/main" val="732313307"/>
       </p:ext>
     </p:extLst>
   </p:cSld>
@@ -6728,7 +6624,7 @@
           <p:cNvPr id="2" name="Rectangle 1">
             <a:extLst xmlns:a="http://schemas.openxmlformats.org/drawingml/2006/main">
               <a:ext uri="{FF2B5EF4-FFF2-40B4-BE49-F238E27FC236}">
-                <a16:creationId xmlns:a16="http://schemas.microsoft.com/office/drawing/2014/main" id="{DA8B50DC-F328-42EE-AFB0-47416775AA85}"/>
+                <a16:creationId xmlns:a16="http://schemas.microsoft.com/office/drawing/2014/main" id="{81E1CC92-CE88-476F-8AA9-8165F085B081}"/>
               </a:ext>
             </a:extLst>
           </p:cNvPr>
@@ -6781,7 +6677,7 @@
           <p:cNvPr id="3" name="Rectangle 2">
             <a:extLst xmlns:a="http://schemas.openxmlformats.org/drawingml/2006/main">
               <a:ext uri="{FF2B5EF4-FFF2-40B4-BE49-F238E27FC236}">
-                <a16:creationId xmlns:a16="http://schemas.microsoft.com/office/drawing/2014/main" id="{2A92FD4B-A03A-457C-9945-75E1E8335FB6}"/>
+                <a16:creationId xmlns:a16="http://schemas.microsoft.com/office/drawing/2014/main" id="{766F51BC-9D15-402E-B40D-BD290E01F4BD}"/>
               </a:ext>
             </a:extLst>
           </p:cNvPr>
@@ -6834,7 +6730,7 @@
           <p:cNvPr id="4" name="TextBox 3">
             <a:extLst xmlns:a="http://schemas.openxmlformats.org/drawingml/2006/main">
               <a:ext uri="{FF2B5EF4-FFF2-40B4-BE49-F238E27FC236}">
-                <a16:creationId xmlns:a16="http://schemas.microsoft.com/office/drawing/2014/main" id="{D3A29788-3534-4FB8-A956-83E3D9B9AD84}"/>
+                <a16:creationId xmlns:a16="http://schemas.microsoft.com/office/drawing/2014/main" id="{0F952296-647E-4FD3-A1AE-B288C4FB60D9}"/>
               </a:ext>
             </a:extLst>
           </p:cNvPr>
@@ -7012,7 +6908,7 @@
     </p:spTree>
     <p:extLst>
       <p:ext uri="{BB962C8B-B14F-4D97-AF65-F5344CB8AC3E}">
-        <p14:creationId xmlns:p14="http://schemas.microsoft.com/office/powerpoint/2010/main" val="404076202"/>
+        <p14:creationId xmlns:p14="http://schemas.microsoft.com/office/powerpoint/2010/main" val="1117890601"/>
       </p:ext>
     </p:extLst>
   </p:cSld>
@@ -7036,7 +6932,7 @@
           <p:cNvPr id="2" name="Rectangle 1">
             <a:extLst xmlns:a="http://schemas.openxmlformats.org/drawingml/2006/main">
               <a:ext uri="{FF2B5EF4-FFF2-40B4-BE49-F238E27FC236}">
-                <a16:creationId xmlns:a16="http://schemas.microsoft.com/office/drawing/2014/main" id="{6B1B9005-4D24-49B8-AAE5-87C411DC83A1}"/>
+                <a16:creationId xmlns:a16="http://schemas.microsoft.com/office/drawing/2014/main" id="{2A4B2E8A-C325-4057-BAB3-D5FFF0CF62AE}"/>
               </a:ext>
             </a:extLst>
           </p:cNvPr>
@@ -7089,7 +6985,7 @@
           <p:cNvPr id="3" name="Rectangle 2">
             <a:extLst xmlns:a="http://schemas.openxmlformats.org/drawingml/2006/main">
               <a:ext uri="{FF2B5EF4-FFF2-40B4-BE49-F238E27FC236}">
-                <a16:creationId xmlns:a16="http://schemas.microsoft.com/office/drawing/2014/main" id="{6A012BAB-F386-47AA-B3D7-AF4B6CCE633F}"/>
+                <a16:creationId xmlns:a16="http://schemas.microsoft.com/office/drawing/2014/main" id="{BCE03106-B560-43A8-A9AF-7F7F58457151}"/>
               </a:ext>
             </a:extLst>
           </p:cNvPr>
@@ -7142,7 +7038,7 @@
           <p:cNvPr id="4" name="Rectangle 3">
             <a:extLst xmlns:a="http://schemas.openxmlformats.org/drawingml/2006/main">
               <a:ext uri="{FF2B5EF4-FFF2-40B4-BE49-F238E27FC236}">
-                <a16:creationId xmlns:a16="http://schemas.microsoft.com/office/drawing/2014/main" id="{C1A4D744-A16B-47DB-B7DB-B614D744FB04}"/>
+                <a16:creationId xmlns:a16="http://schemas.microsoft.com/office/drawing/2014/main" id="{2F304F0B-1A31-49FC-84ED-692D6917F3B0}"/>
               </a:ext>
             </a:extLst>
           </p:cNvPr>
@@ -7195,7 +7091,7 @@
           <p:cNvPr id="5" name="TextBox 4">
             <a:extLst xmlns:a="http://schemas.openxmlformats.org/drawingml/2006/main">
               <a:ext uri="{FF2B5EF4-FFF2-40B4-BE49-F238E27FC236}">
-                <a16:creationId xmlns:a16="http://schemas.microsoft.com/office/drawing/2014/main" id="{F42ADB72-8A23-4B1B-AFFA-BBEABC99F3DC}"/>
+                <a16:creationId xmlns:a16="http://schemas.microsoft.com/office/drawing/2014/main" id="{C571EC1B-59FC-452C-90E5-BA28E4A6543C}"/>
               </a:ext>
             </a:extLst>
           </p:cNvPr>
@@ -7258,7 +7154,7 @@
           <p:cNvPr id="6" name="Rounded Rectangle 5">
             <a:extLst xmlns:a="http://schemas.openxmlformats.org/drawingml/2006/main">
               <a:ext uri="{FF2B5EF4-FFF2-40B4-BE49-F238E27FC236}">
-                <a16:creationId xmlns:a16="http://schemas.microsoft.com/office/drawing/2014/main" id="{1389A831-7D72-4579-B94B-277F7841E09D}"/>
+                <a16:creationId xmlns:a16="http://schemas.microsoft.com/office/drawing/2014/main" id="{B4B57932-A5E0-4B7D-BBF3-66DB06765B03}"/>
               </a:ext>
             </a:extLst>
           </p:cNvPr>
@@ -7313,7 +7209,7 @@
           <p:cNvPr id="7" name="TextBox 6">
             <a:extLst xmlns:a="http://schemas.openxmlformats.org/drawingml/2006/main">
               <a:ext uri="{FF2B5EF4-FFF2-40B4-BE49-F238E27FC236}">
-                <a16:creationId xmlns:a16="http://schemas.microsoft.com/office/drawing/2014/main" id="{DBA954BA-745C-4D07-98C5-63EC894C9C96}"/>
+                <a16:creationId xmlns:a16="http://schemas.microsoft.com/office/drawing/2014/main" id="{899434D0-6C6B-4A15-A6C8-26C02405A339}"/>
               </a:ext>
             </a:extLst>
           </p:cNvPr>
@@ -7417,7 +7313,7 @@
           <p:cNvPr id="8" name="Rounded Rectangle 7">
             <a:extLst xmlns:a="http://schemas.openxmlformats.org/drawingml/2006/main">
               <a:ext uri="{FF2B5EF4-FFF2-40B4-BE49-F238E27FC236}">
-                <a16:creationId xmlns:a16="http://schemas.microsoft.com/office/drawing/2014/main" id="{3520DA34-034F-4796-9F9C-8FF08FFC1595}"/>
+                <a16:creationId xmlns:a16="http://schemas.microsoft.com/office/drawing/2014/main" id="{A9EC9C70-3BB2-40A4-82F2-0F4B239262F8}"/>
               </a:ext>
             </a:extLst>
           </p:cNvPr>
@@ -7472,7 +7368,7 @@
           <p:cNvPr id="9" name="TextBox 8">
             <a:extLst xmlns:a="http://schemas.openxmlformats.org/drawingml/2006/main">
               <a:ext uri="{FF2B5EF4-FFF2-40B4-BE49-F238E27FC236}">
-                <a16:creationId xmlns:a16="http://schemas.microsoft.com/office/drawing/2014/main" id="{D4BE7D58-3214-46F7-A909-6AFDFD24D815}"/>
+                <a16:creationId xmlns:a16="http://schemas.microsoft.com/office/drawing/2014/main" id="{826ED784-724F-42CA-A92B-565963133B88}"/>
               </a:ext>
             </a:extLst>
           </p:cNvPr>
@@ -7576,7 +7472,7 @@
           <p:cNvPr id="10" name="Rounded Rectangle 9">
             <a:extLst xmlns:a="http://schemas.openxmlformats.org/drawingml/2006/main">
               <a:ext uri="{FF2B5EF4-FFF2-40B4-BE49-F238E27FC236}">
-                <a16:creationId xmlns:a16="http://schemas.microsoft.com/office/drawing/2014/main" id="{94DB9461-E086-481F-9C24-6C2E3815F71F}"/>
+                <a16:creationId xmlns:a16="http://schemas.microsoft.com/office/drawing/2014/main" id="{458BEC26-9F73-4968-A030-D41DB66166CA}"/>
               </a:ext>
             </a:extLst>
           </p:cNvPr>
@@ -7631,7 +7527,7 @@
           <p:cNvPr id="11" name="TextBox 10">
             <a:extLst xmlns:a="http://schemas.openxmlformats.org/drawingml/2006/main">
               <a:ext uri="{FF2B5EF4-FFF2-40B4-BE49-F238E27FC236}">
-                <a16:creationId xmlns:a16="http://schemas.microsoft.com/office/drawing/2014/main" id="{C99B1D73-58D5-4FAD-8881-A1529869ABE7}"/>
+                <a16:creationId xmlns:a16="http://schemas.microsoft.com/office/drawing/2014/main" id="{F910595E-8F41-4672-9DAC-0B78E7B7340E}"/>
               </a:ext>
             </a:extLst>
           </p:cNvPr>
@@ -7790,7 +7686,7 @@
     </p:spTree>
     <p:extLst>
       <p:ext uri="{BB962C8B-B14F-4D97-AF65-F5344CB8AC3E}">
-        <p14:creationId xmlns:p14="http://schemas.microsoft.com/office/powerpoint/2010/main" val="1600219143"/>
+        <p14:creationId xmlns:p14="http://schemas.microsoft.com/office/powerpoint/2010/main" val="471330300"/>
       </p:ext>
     </p:extLst>
   </p:cSld>
@@ -7814,7 +7710,7 @@
           <p:cNvPr id="2" name="Rectangle 1">
             <a:extLst xmlns:a="http://schemas.openxmlformats.org/drawingml/2006/main">
               <a:ext uri="{FF2B5EF4-FFF2-40B4-BE49-F238E27FC236}">
-                <a16:creationId xmlns:a16="http://schemas.microsoft.com/office/drawing/2014/main" id="{843C7357-8550-43B6-A996-258DAE551911}"/>
+                <a16:creationId xmlns:a16="http://schemas.microsoft.com/office/drawing/2014/main" id="{2945D280-3EA2-4684-94C7-7FA2DAB11EE9}"/>
               </a:ext>
             </a:extLst>
           </p:cNvPr>
@@ -7867,7 +7763,7 @@
           <p:cNvPr id="3" name="Rectangle 2">
             <a:extLst xmlns:a="http://schemas.openxmlformats.org/drawingml/2006/main">
               <a:ext uri="{FF2B5EF4-FFF2-40B4-BE49-F238E27FC236}">
-                <a16:creationId xmlns:a16="http://schemas.microsoft.com/office/drawing/2014/main" id="{2BD2F428-EFE1-4040-B5C4-ECABE4274A9F}"/>
+                <a16:creationId xmlns:a16="http://schemas.microsoft.com/office/drawing/2014/main" id="{9913BE19-3874-4D5D-B16F-0C5B42DBB4FC}"/>
               </a:ext>
             </a:extLst>
           </p:cNvPr>
@@ -7920,7 +7816,7 @@
           <p:cNvPr id="4" name="Rectangle 3">
             <a:extLst xmlns:a="http://schemas.openxmlformats.org/drawingml/2006/main">
               <a:ext uri="{FF2B5EF4-FFF2-40B4-BE49-F238E27FC236}">
-                <a16:creationId xmlns:a16="http://schemas.microsoft.com/office/drawing/2014/main" id="{BC51566E-80D3-4A6F-8BE4-0BB94D1063E6}"/>
+                <a16:creationId xmlns:a16="http://schemas.microsoft.com/office/drawing/2014/main" id="{90B240B6-4E10-4086-B218-59811802BF6C}"/>
               </a:ext>
             </a:extLst>
           </p:cNvPr>
@@ -7973,7 +7869,7 @@
           <p:cNvPr id="5" name="TextBox 4">
             <a:extLst xmlns:a="http://schemas.openxmlformats.org/drawingml/2006/main">
               <a:ext uri="{FF2B5EF4-FFF2-40B4-BE49-F238E27FC236}">
-                <a16:creationId xmlns:a16="http://schemas.microsoft.com/office/drawing/2014/main" id="{212FBD67-8373-4251-90F4-AE3C3A04BCD4}"/>
+                <a16:creationId xmlns:a16="http://schemas.microsoft.com/office/drawing/2014/main" id="{87701E11-A20C-41CA-8551-68CBB9200DE5}"/>
               </a:ext>
             </a:extLst>
           </p:cNvPr>
@@ -8036,7 +7932,7 @@
           <p:cNvPr id="6" name="Rounded Rectangle 5">
             <a:extLst xmlns:a="http://schemas.openxmlformats.org/drawingml/2006/main">
               <a:ext uri="{FF2B5EF4-FFF2-40B4-BE49-F238E27FC236}">
-                <a16:creationId xmlns:a16="http://schemas.microsoft.com/office/drawing/2014/main" id="{964DB797-7017-4483-9A7C-B4E8DF2DC0A6}"/>
+                <a16:creationId xmlns:a16="http://schemas.microsoft.com/office/drawing/2014/main" id="{5352DBAA-2331-4BF3-A67B-40BEAF3D8E22}"/>
               </a:ext>
             </a:extLst>
           </p:cNvPr>
@@ -8091,7 +7987,7 @@
           <p:cNvPr id="7" name="TextBox 6">
             <a:extLst xmlns:a="http://schemas.openxmlformats.org/drawingml/2006/main">
               <a:ext uri="{FF2B5EF4-FFF2-40B4-BE49-F238E27FC236}">
-                <a16:creationId xmlns:a16="http://schemas.microsoft.com/office/drawing/2014/main" id="{0380E14C-25C5-4A34-B638-8998EB24D941}"/>
+                <a16:creationId xmlns:a16="http://schemas.microsoft.com/office/drawing/2014/main" id="{C08CAB5D-06FB-4615-AAEE-B83F3BEDC582}"/>
               </a:ext>
             </a:extLst>
           </p:cNvPr>
@@ -8214,7 +8110,7 @@
           <p:cNvPr id="8" name="Rounded Rectangle 7">
             <a:extLst xmlns:a="http://schemas.openxmlformats.org/drawingml/2006/main">
               <a:ext uri="{FF2B5EF4-FFF2-40B4-BE49-F238E27FC236}">
-                <a16:creationId xmlns:a16="http://schemas.microsoft.com/office/drawing/2014/main" id="{AF9C4B3D-3331-4405-A792-7C8002742416}"/>
+                <a16:creationId xmlns:a16="http://schemas.microsoft.com/office/drawing/2014/main" id="{E799EC59-EC16-41D4-80E9-8D9F5D7F42E3}"/>
               </a:ext>
             </a:extLst>
           </p:cNvPr>
@@ -8269,7 +8165,7 @@
           <p:cNvPr id="9" name="TextBox 8">
             <a:extLst xmlns:a="http://schemas.openxmlformats.org/drawingml/2006/main">
               <a:ext uri="{FF2B5EF4-FFF2-40B4-BE49-F238E27FC236}">
-                <a16:creationId xmlns:a16="http://schemas.microsoft.com/office/drawing/2014/main" id="{3A1131B1-171B-46E1-90EA-874C3AB16214}"/>
+                <a16:creationId xmlns:a16="http://schemas.microsoft.com/office/drawing/2014/main" id="{5CE00759-1533-497E-A038-2351BC7304C9}"/>
               </a:ext>
             </a:extLst>
           </p:cNvPr>
@@ -8411,7 +8307,7 @@
           <p:cNvPr id="10" name="Rounded Rectangle 9">
             <a:extLst xmlns:a="http://schemas.openxmlformats.org/drawingml/2006/main">
               <a:ext uri="{FF2B5EF4-FFF2-40B4-BE49-F238E27FC236}">
-                <a16:creationId xmlns:a16="http://schemas.microsoft.com/office/drawing/2014/main" id="{A4B7F00E-6BAA-4991-904B-41E3C982B991}"/>
+                <a16:creationId xmlns:a16="http://schemas.microsoft.com/office/drawing/2014/main" id="{750C903F-9180-4980-A063-EDAE1AD13422}"/>
               </a:ext>
             </a:extLst>
           </p:cNvPr>
@@ -8466,7 +8362,7 @@
           <p:cNvPr id="11" name="TextBox 10">
             <a:extLst xmlns:a="http://schemas.openxmlformats.org/drawingml/2006/main">
               <a:ext uri="{FF2B5EF4-FFF2-40B4-BE49-F238E27FC236}">
-                <a16:creationId xmlns:a16="http://schemas.microsoft.com/office/drawing/2014/main" id="{DEBCCD14-AB57-4EFA-AF05-69A5A4FDB112}"/>
+                <a16:creationId xmlns:a16="http://schemas.microsoft.com/office/drawing/2014/main" id="{7CCBD16D-CF08-4239-88C2-EC146920739E}"/>
               </a:ext>
             </a:extLst>
           </p:cNvPr>
@@ -8568,7 +8464,7 @@
     </p:spTree>
     <p:extLst>
       <p:ext uri="{BB962C8B-B14F-4D97-AF65-F5344CB8AC3E}">
-        <p14:creationId xmlns:p14="http://schemas.microsoft.com/office/powerpoint/2010/main" val="1974168012"/>
+        <p14:creationId xmlns:p14="http://schemas.microsoft.com/office/powerpoint/2010/main" val="1183618080"/>
       </p:ext>
     </p:extLst>
   </p:cSld>
@@ -8592,7 +8488,7 @@
           <p:cNvPr id="2" name="Rectangle 1">
             <a:extLst xmlns:a="http://schemas.openxmlformats.org/drawingml/2006/main">
               <a:ext uri="{FF2B5EF4-FFF2-40B4-BE49-F238E27FC236}">
-                <a16:creationId xmlns:a16="http://schemas.microsoft.com/office/drawing/2014/main" id="{AF661C42-DFD1-489E-905C-BC0671251AF2}"/>
+                <a16:creationId xmlns:a16="http://schemas.microsoft.com/office/drawing/2014/main" id="{CC5A468A-0FD3-45A3-99B1-BA404CA11278}"/>
               </a:ext>
             </a:extLst>
           </p:cNvPr>
@@ -8645,7 +8541,7 @@
           <p:cNvPr id="3" name="Rectangle 2">
             <a:extLst xmlns:a="http://schemas.openxmlformats.org/drawingml/2006/main">
               <a:ext uri="{FF2B5EF4-FFF2-40B4-BE49-F238E27FC236}">
-                <a16:creationId xmlns:a16="http://schemas.microsoft.com/office/drawing/2014/main" id="{22D2CE23-C56D-4F67-BAE1-A7B97D769279}"/>
+                <a16:creationId xmlns:a16="http://schemas.microsoft.com/office/drawing/2014/main" id="{E7F4E103-0AC1-4C8C-A728-A1FBE56C3B89}"/>
               </a:ext>
             </a:extLst>
           </p:cNvPr>
@@ -8698,7 +8594,7 @@
           <p:cNvPr id="4" name="Rectangle 3">
             <a:extLst xmlns:a="http://schemas.openxmlformats.org/drawingml/2006/main">
               <a:ext uri="{FF2B5EF4-FFF2-40B4-BE49-F238E27FC236}">
-                <a16:creationId xmlns:a16="http://schemas.microsoft.com/office/drawing/2014/main" id="{1BA61EC4-1D0A-494E-9B7A-FA8683CAF9D2}"/>
+                <a16:creationId xmlns:a16="http://schemas.microsoft.com/office/drawing/2014/main" id="{43D4ABD5-44C4-459F-9EF7-EC5591521618}"/>
               </a:ext>
             </a:extLst>
           </p:cNvPr>
@@ -8751,7 +8647,7 @@
           <p:cNvPr id="5" name="TextBox 4">
             <a:extLst xmlns:a="http://schemas.openxmlformats.org/drawingml/2006/main">
               <a:ext uri="{FF2B5EF4-FFF2-40B4-BE49-F238E27FC236}">
-                <a16:creationId xmlns:a16="http://schemas.microsoft.com/office/drawing/2014/main" id="{487EAB0E-DD0B-4B82-B9C1-6B405004F2D3}"/>
+                <a16:creationId xmlns:a16="http://schemas.microsoft.com/office/drawing/2014/main" id="{A6B05412-064D-417E-AA2F-86C1F06671C8}"/>
               </a:ext>
             </a:extLst>
           </p:cNvPr>
@@ -8814,7 +8710,7 @@
           <p:cNvPr id="6" name="Rounded Rectangle 5">
             <a:extLst xmlns:a="http://schemas.openxmlformats.org/drawingml/2006/main">
               <a:ext uri="{FF2B5EF4-FFF2-40B4-BE49-F238E27FC236}">
-                <a16:creationId xmlns:a16="http://schemas.microsoft.com/office/drawing/2014/main" id="{4831058F-B31D-4C5F-A43B-4451FF20BAC0}"/>
+                <a16:creationId xmlns:a16="http://schemas.microsoft.com/office/drawing/2014/main" id="{A044DEB2-B7DA-485B-A509-5F184A698B72}"/>
               </a:ext>
             </a:extLst>
           </p:cNvPr>
@@ -8869,7 +8765,7 @@
           <p:cNvPr id="7" name="TextBox 6">
             <a:extLst xmlns:a="http://schemas.openxmlformats.org/drawingml/2006/main">
               <a:ext uri="{FF2B5EF4-FFF2-40B4-BE49-F238E27FC236}">
-                <a16:creationId xmlns:a16="http://schemas.microsoft.com/office/drawing/2014/main" id="{891BE0E5-72A3-46FA-995A-BEDC31EC9082}"/>
+                <a16:creationId xmlns:a16="http://schemas.microsoft.com/office/drawing/2014/main" id="{4D9B79DA-3037-436A-A9A5-3427A9792617}"/>
               </a:ext>
             </a:extLst>
           </p:cNvPr>
@@ -9049,7 +8945,7 @@
           <p:cNvPr id="8" name="Rounded Rectangle 7">
             <a:extLst xmlns:a="http://schemas.openxmlformats.org/drawingml/2006/main">
               <a:ext uri="{FF2B5EF4-FFF2-40B4-BE49-F238E27FC236}">
-                <a16:creationId xmlns:a16="http://schemas.microsoft.com/office/drawing/2014/main" id="{E429C07F-A8A9-4104-B846-93E1B6E613A3}"/>
+                <a16:creationId xmlns:a16="http://schemas.microsoft.com/office/drawing/2014/main" id="{DFF7E8D4-1B00-4D8A-B7A3-F39B1AD04CB8}"/>
               </a:ext>
             </a:extLst>
           </p:cNvPr>
@@ -9104,7 +9000,7 @@
           <p:cNvPr id="9" name="TextBox 8">
             <a:extLst xmlns:a="http://schemas.openxmlformats.org/drawingml/2006/main">
               <a:ext uri="{FF2B5EF4-FFF2-40B4-BE49-F238E27FC236}">
-                <a16:creationId xmlns:a16="http://schemas.microsoft.com/office/drawing/2014/main" id="{A0C24258-CCEF-4555-B0DC-CCE00E76745B}"/>
+                <a16:creationId xmlns:a16="http://schemas.microsoft.com/office/drawing/2014/main" id="{D9A495E4-B1F0-4D34-8B04-8EBBF3F3F711}"/>
               </a:ext>
             </a:extLst>
           </p:cNvPr>
@@ -9263,7 +9159,7 @@
     </p:spTree>
     <p:extLst>
       <p:ext uri="{BB962C8B-B14F-4D97-AF65-F5344CB8AC3E}">
-        <p14:creationId xmlns:p14="http://schemas.microsoft.com/office/powerpoint/2010/main" val="776759816"/>
+        <p14:creationId xmlns:p14="http://schemas.microsoft.com/office/powerpoint/2010/main" val="1986843225"/>
       </p:ext>
     </p:extLst>
   </p:cSld>
@@ -9287,7 +9183,7 @@
           <p:cNvPr id="2" name="Rectangle 1">
             <a:extLst xmlns:a="http://schemas.openxmlformats.org/drawingml/2006/main">
               <a:ext uri="{FF2B5EF4-FFF2-40B4-BE49-F238E27FC236}">
-                <a16:creationId xmlns:a16="http://schemas.microsoft.com/office/drawing/2014/main" id="{DFAC2CEE-E5A5-4CAD-A0B5-F99D2AC32309}"/>
+                <a16:creationId xmlns:a16="http://schemas.microsoft.com/office/drawing/2014/main" id="{BEC47524-EA3F-41C6-B2A9-59FBC50C087A}"/>
               </a:ext>
             </a:extLst>
           </p:cNvPr>
@@ -9340,7 +9236,7 @@
           <p:cNvPr id="3" name="Rectangle 2">
             <a:extLst xmlns:a="http://schemas.openxmlformats.org/drawingml/2006/main">
               <a:ext uri="{FF2B5EF4-FFF2-40B4-BE49-F238E27FC236}">
-                <a16:creationId xmlns:a16="http://schemas.microsoft.com/office/drawing/2014/main" id="{F3468B25-63BA-4A68-8D70-500D6B59D837}"/>
+                <a16:creationId xmlns:a16="http://schemas.microsoft.com/office/drawing/2014/main" id="{662C4A4D-C0A2-4A6E-99E7-8BE3361ED4E2}"/>
               </a:ext>
             </a:extLst>
           </p:cNvPr>
@@ -9393,7 +9289,7 @@
           <p:cNvPr id="4" name="Rectangle 3">
             <a:extLst xmlns:a="http://schemas.openxmlformats.org/drawingml/2006/main">
               <a:ext uri="{FF2B5EF4-FFF2-40B4-BE49-F238E27FC236}">
-                <a16:creationId xmlns:a16="http://schemas.microsoft.com/office/drawing/2014/main" id="{2BA98FCA-BA37-490D-9C8D-E518C4BCF21A}"/>
+                <a16:creationId xmlns:a16="http://schemas.microsoft.com/office/drawing/2014/main" id="{F819784A-AC14-4CB4-9DBD-7424D81B2EBC}"/>
               </a:ext>
             </a:extLst>
           </p:cNvPr>
@@ -9446,7 +9342,7 @@
           <p:cNvPr id="5" name="TextBox 4">
             <a:extLst xmlns:a="http://schemas.openxmlformats.org/drawingml/2006/main">
               <a:ext uri="{FF2B5EF4-FFF2-40B4-BE49-F238E27FC236}">
-                <a16:creationId xmlns:a16="http://schemas.microsoft.com/office/drawing/2014/main" id="{C1AF84EB-00B1-4815-ACA5-620CAFCE7A2A}"/>
+                <a16:creationId xmlns:a16="http://schemas.microsoft.com/office/drawing/2014/main" id="{EF52ED6E-ECC4-4FD2-A0B7-938676022EDF}"/>
               </a:ext>
             </a:extLst>
           </p:cNvPr>
@@ -9509,7 +9405,7 @@
           <p:cNvPr id="6" name="Rounded Rectangle 5">
             <a:extLst xmlns:a="http://schemas.openxmlformats.org/drawingml/2006/main">
               <a:ext uri="{FF2B5EF4-FFF2-40B4-BE49-F238E27FC236}">
-                <a16:creationId xmlns:a16="http://schemas.microsoft.com/office/drawing/2014/main" id="{245F03B6-A7B8-4128-9E03-699C90E89F66}"/>
+                <a16:creationId xmlns:a16="http://schemas.microsoft.com/office/drawing/2014/main" id="{893AFBA4-CA38-4FDF-8A4E-CEDD32B5A8FD}"/>
               </a:ext>
             </a:extLst>
           </p:cNvPr>
@@ -9564,7 +9460,7 @@
           <p:cNvPr id="7" name="TextBox 6">
             <a:extLst xmlns:a="http://schemas.openxmlformats.org/drawingml/2006/main">
               <a:ext uri="{FF2B5EF4-FFF2-40B4-BE49-F238E27FC236}">
-                <a16:creationId xmlns:a16="http://schemas.microsoft.com/office/drawing/2014/main" id="{D5F0E484-D928-499D-8458-77862ABA0019}"/>
+                <a16:creationId xmlns:a16="http://schemas.microsoft.com/office/drawing/2014/main" id="{2CC7091F-8DD6-4C66-A31C-2F632710A9ED}"/>
               </a:ext>
             </a:extLst>
           </p:cNvPr>
@@ -9782,7 +9678,7 @@
           <p:cNvPr id="8" name="Rounded Rectangle 7">
             <a:extLst xmlns:a="http://schemas.openxmlformats.org/drawingml/2006/main">
               <a:ext uri="{FF2B5EF4-FFF2-40B4-BE49-F238E27FC236}">
-                <a16:creationId xmlns:a16="http://schemas.microsoft.com/office/drawing/2014/main" id="{B1177E8F-A5F1-4E1E-A9D8-6FE046611F32}"/>
+                <a16:creationId xmlns:a16="http://schemas.microsoft.com/office/drawing/2014/main" id="{1E20B6B2-AD7A-4496-9D9D-F4BC566B12E2}"/>
               </a:ext>
             </a:extLst>
           </p:cNvPr>
@@ -9837,7 +9733,7 @@
           <p:cNvPr id="9" name="TextBox 8">
             <a:extLst xmlns:a="http://schemas.openxmlformats.org/drawingml/2006/main">
               <a:ext uri="{FF2B5EF4-FFF2-40B4-BE49-F238E27FC236}">
-                <a16:creationId xmlns:a16="http://schemas.microsoft.com/office/drawing/2014/main" id="{4FB43E35-0D4B-4F96-8973-9065A225A879}"/>
+                <a16:creationId xmlns:a16="http://schemas.microsoft.com/office/drawing/2014/main" id="{5F6BF4A8-58DE-4A4E-B8A6-5569E8D01AC1}"/>
               </a:ext>
             </a:extLst>
           </p:cNvPr>
@@ -10072,7 +9968,7 @@
     </p:spTree>
     <p:extLst>
       <p:ext uri="{BB962C8B-B14F-4D97-AF65-F5344CB8AC3E}">
-        <p14:creationId xmlns:p14="http://schemas.microsoft.com/office/powerpoint/2010/main" val="2041681987"/>
+        <p14:creationId xmlns:p14="http://schemas.microsoft.com/office/powerpoint/2010/main" val="69561193"/>
       </p:ext>
     </p:extLst>
   </p:cSld>
@@ -10096,7 +9992,7 @@
           <p:cNvPr id="2" name="Rectangle 1">
             <a:extLst xmlns:a="http://schemas.openxmlformats.org/drawingml/2006/main">
               <a:ext uri="{FF2B5EF4-FFF2-40B4-BE49-F238E27FC236}">
-                <a16:creationId xmlns:a16="http://schemas.microsoft.com/office/drawing/2014/main" id="{203D3C58-1D12-4089-B57F-E0D91FF692F2}"/>
+                <a16:creationId xmlns:a16="http://schemas.microsoft.com/office/drawing/2014/main" id="{687F6725-EFB1-46C9-B912-06E34D3C853D}"/>
               </a:ext>
             </a:extLst>
           </p:cNvPr>
@@ -10149,7 +10045,7 @@
           <p:cNvPr id="3" name="Rectangle 2">
             <a:extLst xmlns:a="http://schemas.openxmlformats.org/drawingml/2006/main">
               <a:ext uri="{FF2B5EF4-FFF2-40B4-BE49-F238E27FC236}">
-                <a16:creationId xmlns:a16="http://schemas.microsoft.com/office/drawing/2014/main" id="{E81CE568-F95F-49E2-BF5B-76329DE44117}"/>
+                <a16:creationId xmlns:a16="http://schemas.microsoft.com/office/drawing/2014/main" id="{17742F69-8437-483B-9C0A-A9E0E60D057A}"/>
               </a:ext>
             </a:extLst>
           </p:cNvPr>
@@ -10202,7 +10098,7 @@
           <p:cNvPr id="4" name="Rectangle 3">
             <a:extLst xmlns:a="http://schemas.openxmlformats.org/drawingml/2006/main">
               <a:ext uri="{FF2B5EF4-FFF2-40B4-BE49-F238E27FC236}">
-                <a16:creationId xmlns:a16="http://schemas.microsoft.com/office/drawing/2014/main" id="{11F82FE4-0FB4-408E-93FE-626BC62398B3}"/>
+                <a16:creationId xmlns:a16="http://schemas.microsoft.com/office/drawing/2014/main" id="{1E758038-14C0-49DE-BB7B-231861C04FF6}"/>
               </a:ext>
             </a:extLst>
           </p:cNvPr>
@@ -10255,7 +10151,7 @@
           <p:cNvPr id="5" name="TextBox 4">
             <a:extLst xmlns:a="http://schemas.openxmlformats.org/drawingml/2006/main">
               <a:ext uri="{FF2B5EF4-FFF2-40B4-BE49-F238E27FC236}">
-                <a16:creationId xmlns:a16="http://schemas.microsoft.com/office/drawing/2014/main" id="{8FB7140A-13F0-4D9A-9729-8CC8B4984B82}"/>
+                <a16:creationId xmlns:a16="http://schemas.microsoft.com/office/drawing/2014/main" id="{40DBE2EF-6C72-4AD4-B953-C1DBE3BCDBA4}"/>
               </a:ext>
             </a:extLst>
           </p:cNvPr>
@@ -10318,7 +10214,7 @@
           <p:cNvPr id="6" name="Rounded Rectangle 5">
             <a:extLst xmlns:a="http://schemas.openxmlformats.org/drawingml/2006/main">
               <a:ext uri="{FF2B5EF4-FFF2-40B4-BE49-F238E27FC236}">
-                <a16:creationId xmlns:a16="http://schemas.microsoft.com/office/drawing/2014/main" id="{4480EFF6-20CD-4590-9617-D917082256B1}"/>
+                <a16:creationId xmlns:a16="http://schemas.microsoft.com/office/drawing/2014/main" id="{C340242C-EFE5-438F-9B58-E8E988362548}"/>
               </a:ext>
             </a:extLst>
           </p:cNvPr>
@@ -10373,7 +10269,7 @@
           <p:cNvPr id="7" name="TextBox 6">
             <a:extLst xmlns:a="http://schemas.openxmlformats.org/drawingml/2006/main">
               <a:ext uri="{FF2B5EF4-FFF2-40B4-BE49-F238E27FC236}">
-                <a16:creationId xmlns:a16="http://schemas.microsoft.com/office/drawing/2014/main" id="{ED7BAEB8-31D0-49CB-A9B7-F537556424F9}"/>
+                <a16:creationId xmlns:a16="http://schemas.microsoft.com/office/drawing/2014/main" id="{FB2E5F24-7D14-42D7-ACF5-CDC507B3270F}"/>
               </a:ext>
             </a:extLst>
           </p:cNvPr>
@@ -10423,166 +10319,239 @@
           </a:p>
           <a:p xmlns:a="http://schemas.openxmlformats.org/drawingml/2006/main">
             <a:pPr>
-              <a:buNone/>
-              <a:defRPr sz="1600" b="1">
-                <a:solidFill>
-                  <a:srgbClr val="1E40AF"/>
-                </a:solidFill>
-                <a:latin typeface="Calibri"/>
-                <a:ea typeface="Calibri"/>
-                <a:cs typeface="Calibri"/>
-              </a:defRPr>
-            </a:pPr>
-          </a:p>
-          <a:p xmlns:a="http://schemas.openxmlformats.org/drawingml/2006/main">
-            <a:pPr>
-              <a:buNone/>
-              <a:defRPr sz="1600" b="1">
-                <a:solidFill>
-                  <a:srgbClr val="1E40AF"/>
-                </a:solidFill>
-                <a:latin typeface="Calibri"/>
-                <a:ea typeface="Calibri"/>
-                <a:cs typeface="Calibri"/>
-              </a:defRPr>
-            </a:pPr>
-            <a:r>
-              <a:rPr sz="825" b="1">
-                <a:solidFill>
-                  <a:srgbClr val="1E40AF"/>
+              <a:spcBef>
+                <a:spcPts val="300"/>
+              </a:spcBef>
+              <a:buNone/>
+              <a:defRPr sz="1150">
+                <a:solidFill>
+                  <a:srgbClr val="0F172A"/>
+                </a:solidFill>
+                <a:latin typeface="Calibri"/>
+                <a:ea typeface="Calibri"/>
+                <a:cs typeface="Calibri"/>
+              </a:defRPr>
+            </a:pPr>
+            <a:r>
+              <a:rPr sz="825">
+                <a:solidFill>
+                  <a:srgbClr val="0F172A"/>
                 </a:solidFill>
                 <a:latin typeface="Calibri"/>
                 <a:ea typeface="Calibri"/>
                 <a:cs typeface="Calibri"/>
               </a:rPr>
-              <a:t>▶ [HISTORICAL DEV PILOT RETRIEVAL (Mẫu số N=756 views)]</a:t>
-            </a:r>
-          </a:p>
-          <a:p xmlns:a="http://schemas.openxmlformats.org/drawingml/2006/main">
-            <a:pPr>
-              <a:buNone/>
-              <a:defRPr sz="1600" b="1">
-                <a:solidFill>
-                  <a:srgbClr val="1E40AF"/>
-                </a:solidFill>
-                <a:latin typeface="Calibri"/>
-                <a:ea typeface="Calibri"/>
-                <a:cs typeface="Calibri"/>
-              </a:defRPr>
-            </a:pPr>
-            <a:r>
-              <a:rPr sz="825" b="1">
-                <a:solidFill>
-                  <a:srgbClr val="1E40AF"/>
+              <a:t/>
+            </a:r>
+          </a:p>
+          <a:p xmlns:a="http://schemas.openxmlformats.org/drawingml/2006/main">
+            <a:pPr>
+              <a:spcBef>
+                <a:spcPts val="300"/>
+              </a:spcBef>
+              <a:buNone/>
+              <a:defRPr sz="1150">
+                <a:solidFill>
+                  <a:srgbClr val="0F172A"/>
+                </a:solidFill>
+                <a:latin typeface="Calibri"/>
+                <a:ea typeface="Calibri"/>
+                <a:cs typeface="Calibri"/>
+              </a:defRPr>
+            </a:pPr>
+            <a:r>
+              <a:rPr sz="825">
+                <a:solidFill>
+                  <a:srgbClr val="0F172A"/>
                 </a:solidFill>
                 <a:latin typeface="Calibri"/>
                 <a:ea typeface="Calibri"/>
                 <a:cs typeface="Calibri"/>
               </a:rPr>
-              <a:t>•  Mẫu dương tính đánh giá pilot: 756 / 1,340 views (Synthetic DEV split).</a:t>
-            </a:r>
-          </a:p>
-          <a:p xmlns:a="http://schemas.openxmlformats.org/drawingml/2006/main">
-            <a:pPr>
-              <a:buNone/>
-              <a:defRPr sz="1600" b="1">
-                <a:solidFill>
-                  <a:srgbClr val="1E40AF"/>
-                </a:solidFill>
-                <a:latin typeface="Calibri"/>
-                <a:ea typeface="Calibri"/>
-                <a:cs typeface="Calibri"/>
-              </a:defRPr>
-            </a:pPr>
-            <a:r>
-              <a:rPr sz="825" b="1">
-                <a:solidFill>
-                  <a:srgbClr val="1E40AF"/>
+              <a:t>▶ [T20 FULL BENCHMARK POSITIVE RETRIEVAL (Mẫu số N=756 views = 718 TEST + 38 DEV)]</a:t>
+            </a:r>
+          </a:p>
+          <a:p xmlns:a="http://schemas.openxmlformats.org/drawingml/2006/main">
+            <a:pPr>
+              <a:spcBef>
+                <a:spcPts val="300"/>
+              </a:spcBef>
+              <a:buNone/>
+              <a:defRPr sz="1150">
+                <a:solidFill>
+                  <a:srgbClr val="0F172A"/>
+                </a:solidFill>
+                <a:latin typeface="Calibri"/>
+                <a:ea typeface="Calibri"/>
+                <a:cs typeface="Calibri"/>
+              </a:defRPr>
+            </a:pPr>
+            <a:r>
+              <a:rPr sz="825">
+                <a:solidFill>
+                  <a:srgbClr val="0F172A"/>
                 </a:solidFill>
                 <a:latin typeface="Calibri"/>
                 <a:ea typeface="Calibri"/>
                 <a:cs typeface="Calibri"/>
               </a:rPr>
-              <a:t>•  Pilot Hit@k: Hit@1=4.23%, Hit@3=16.80%, Hit@5=24.21%, Hit@10=45.11% (341 / 756).</a:t>
-            </a:r>
-          </a:p>
-          <a:p xmlns:a="http://schemas.openxmlformats.org/drawingml/2006/main">
-            <a:pPr>
-              <a:buNone/>
-              <a:defRPr sz="1600" b="1">
-                <a:solidFill>
-                  <a:srgbClr val="1E40AF"/>
-                </a:solidFill>
-                <a:latin typeface="Calibri"/>
-                <a:ea typeface="Calibri"/>
-                <a:cs typeface="Calibri"/>
-              </a:defRPr>
-            </a:pPr>
-            <a:r>
-              <a:rPr sz="825" b="1">
-                <a:solidFill>
-                  <a:srgbClr val="1E40AF"/>
+              <a:t>•  Toàn bộ mẫu dương tính benchmark: 756 views (718 TEST views + 38 DEV views).</a:t>
+            </a:r>
+          </a:p>
+          <a:p xmlns:a="http://schemas.openxmlformats.org/drawingml/2006/main">
+            <a:pPr>
+              <a:spcBef>
+                <a:spcPts val="300"/>
+              </a:spcBef>
+              <a:buNone/>
+              <a:defRPr sz="1150">
+                <a:solidFill>
+                  <a:srgbClr val="0F172A"/>
+                </a:solidFill>
+                <a:latin typeface="Calibri"/>
+                <a:ea typeface="Calibri"/>
+                <a:cs typeface="Calibri"/>
+              </a:defRPr>
+            </a:pPr>
+            <a:r>
+              <a:rPr sz="825">
+                <a:solidFill>
+                  <a:srgbClr val="0F172A"/>
                 </a:solidFill>
                 <a:latin typeface="Calibri"/>
                 <a:ea typeface="Calibri"/>
                 <a:cs typeface="Calibri"/>
               </a:rPr>
-              <a:t>•  Pilot Macro Recall@10: 43.14%  |  Tỷ lệ vắng mặt Top-10: 54.89% (415 / 756)  |  Mean Rank: 5.21.</a:t>
-            </a:r>
-          </a:p>
-          <a:p xmlns:a="http://schemas.openxmlformats.org/drawingml/2006/main">
-            <a:pPr>
-              <a:buNone/>
-              <a:defRPr sz="1600" b="1">
-                <a:solidFill>
-                  <a:srgbClr val="1E40AF"/>
-                </a:solidFill>
-                <a:latin typeface="Calibri"/>
-                <a:ea typeface="Calibri"/>
-                <a:cs typeface="Calibri"/>
-              </a:defRPr>
-            </a:pPr>
-          </a:p>
-          <a:p xmlns:a="http://schemas.openxmlformats.org/drawingml/2006/main">
-            <a:pPr>
-              <a:buNone/>
-              <a:defRPr sz="1600" b="1">
-                <a:solidFill>
-                  <a:srgbClr val="1E40AF"/>
-                </a:solidFill>
-                <a:latin typeface="Calibri"/>
-                <a:ea typeface="Calibri"/>
-                <a:cs typeface="Calibri"/>
-              </a:defRPr>
-            </a:pPr>
-            <a:r>
-              <a:rPr sz="825" b="1">
-                <a:solidFill>
-                  <a:srgbClr val="1E40AF"/>
+              <a:t>•  Benchmark Hit@k: Hit@1=4.23%, Hit@3=16.80%, Hit@5=24.21%, Hit@10=45.11% (341 / 756).</a:t>
+            </a:r>
+          </a:p>
+          <a:p xmlns:a="http://schemas.openxmlformats.org/drawingml/2006/main">
+            <a:pPr>
+              <a:spcBef>
+                <a:spcPts val="300"/>
+              </a:spcBef>
+              <a:buNone/>
+              <a:defRPr sz="1150">
+                <a:solidFill>
+                  <a:srgbClr val="0F172A"/>
+                </a:solidFill>
+                <a:latin typeface="Calibri"/>
+                <a:ea typeface="Calibri"/>
+                <a:cs typeface="Calibri"/>
+              </a:defRPr>
+            </a:pPr>
+            <a:r>
+              <a:rPr sz="825">
+                <a:solidFill>
+                  <a:srgbClr val="0F172A"/>
                 </a:solidFill>
                 <a:latin typeface="Calibri"/>
                 <a:ea typeface="Calibri"/>
                 <a:cs typeface="Calibri"/>
               </a:rPr>
-              <a:t>▶ [DIAGNOSTIC TEST FIXTURE RETRIEVAL (Mẫu số N=718 scorable views)]</a:t>
-            </a:r>
-          </a:p>
-          <a:p xmlns:a="http://schemas.openxmlformats.org/drawingml/2006/main">
-            <a:pPr>
-              <a:buNone/>
-              <a:defRPr sz="1600" b="1">
-                <a:solidFill>
-                  <a:srgbClr val="1E40AF"/>
-                </a:solidFill>
-                <a:latin typeface="Calibri"/>
-                <a:ea typeface="Calibri"/>
-                <a:cs typeface="Calibri"/>
-              </a:defRPr>
-            </a:pPr>
-            <a:r>
-              <a:rPr sz="825" b="1">
-                <a:solidFill>
-                  <a:srgbClr val="1E40AF"/>
+              <a:t>•  Benchmark Macro Recall@10: 43.14%  |  Tỷ lệ vắng mặt Top-10: 54.89% (415 / 756)  |  Mean Rank: 5.21.</a:t>
+            </a:r>
+          </a:p>
+          <a:p xmlns:a="http://schemas.openxmlformats.org/drawingml/2006/main">
+            <a:pPr>
+              <a:spcBef>
+                <a:spcPts val="300"/>
+              </a:spcBef>
+              <a:buNone/>
+              <a:defRPr sz="1150">
+                <a:solidFill>
+                  <a:srgbClr val="0F172A"/>
+                </a:solidFill>
+                <a:latin typeface="Calibri"/>
+                <a:ea typeface="Calibri"/>
+                <a:cs typeface="Calibri"/>
+              </a:defRPr>
+            </a:pPr>
+            <a:r>
+              <a:rPr sz="825">
+                <a:solidFill>
+                  <a:srgbClr val="0F172A"/>
+                </a:solidFill>
+                <a:latin typeface="Calibri"/>
+                <a:ea typeface="Calibri"/>
+                <a:cs typeface="Calibri"/>
+              </a:rPr>
+              <a:t>•  (Ghi chú: Real DEV Pilot là 4 views × 5 conditions = 20 requests, tách biệt hoàn toàn với benchmark positive views).</a:t>
+            </a:r>
+          </a:p>
+          <a:p xmlns:a="http://schemas.openxmlformats.org/drawingml/2006/main">
+            <a:pPr>
+              <a:spcBef>
+                <a:spcPts val="300"/>
+              </a:spcBef>
+              <a:buNone/>
+              <a:defRPr sz="1150">
+                <a:solidFill>
+                  <a:srgbClr val="0F172A"/>
+                </a:solidFill>
+                <a:latin typeface="Calibri"/>
+                <a:ea typeface="Calibri"/>
+                <a:cs typeface="Calibri"/>
+              </a:defRPr>
+            </a:pPr>
+            <a:r>
+              <a:rPr sz="825">
+                <a:solidFill>
+                  <a:srgbClr val="0F172A"/>
+                </a:solidFill>
+                <a:latin typeface="Calibri"/>
+                <a:ea typeface="Calibri"/>
+                <a:cs typeface="Calibri"/>
+              </a:rPr>
+              <a:t/>
+            </a:r>
+          </a:p>
+          <a:p xmlns:a="http://schemas.openxmlformats.org/drawingml/2006/main">
+            <a:pPr>
+              <a:spcBef>
+                <a:spcPts val="300"/>
+              </a:spcBef>
+              <a:buNone/>
+              <a:defRPr sz="1150">
+                <a:solidFill>
+                  <a:srgbClr val="0F172A"/>
+                </a:solidFill>
+                <a:latin typeface="Calibri"/>
+                <a:ea typeface="Calibri"/>
+                <a:cs typeface="Calibri"/>
+              </a:defRPr>
+            </a:pPr>
+            <a:r>
+              <a:rPr sz="825">
+                <a:solidFill>
+                  <a:srgbClr val="0F172A"/>
+                </a:solidFill>
+                <a:latin typeface="Calibri"/>
+                <a:ea typeface="Calibri"/>
+                <a:cs typeface="Calibri"/>
+              </a:rPr>
+              <a:t>▶ [DIAGNOSTIC TEST FIXTURE RETRIEVAL (Mẫu số N=718 scorable TEST views)]</a:t>
+            </a:r>
+          </a:p>
+          <a:p xmlns:a="http://schemas.openxmlformats.org/drawingml/2006/main">
+            <a:pPr>
+              <a:spcBef>
+                <a:spcPts val="300"/>
+              </a:spcBef>
+              <a:buNone/>
+              <a:defRPr sz="1150">
+                <a:solidFill>
+                  <a:srgbClr val="0F172A"/>
+                </a:solidFill>
+                <a:latin typeface="Calibri"/>
+                <a:ea typeface="Calibri"/>
+                <a:cs typeface="Calibri"/>
+              </a:defRPr>
+            </a:pPr>
+            <a:r>
+              <a:rPr sz="825">
+                <a:solidFill>
+                  <a:srgbClr val="0F172A"/>
                 </a:solidFill>
                 <a:latin typeface="Calibri"/>
                 <a:ea typeface="Calibri"/>
@@ -10593,20 +10562,23 @@
           </a:p>
           <a:p xmlns:a="http://schemas.openxmlformats.org/drawingml/2006/main">
             <a:pPr>
-              <a:buNone/>
-              <a:defRPr sz="1600" b="1">
-                <a:solidFill>
-                  <a:srgbClr val="1E40AF"/>
-                </a:solidFill>
-                <a:latin typeface="Calibri"/>
-                <a:ea typeface="Calibri"/>
-                <a:cs typeface="Calibri"/>
-              </a:defRPr>
-            </a:pPr>
-            <a:r>
-              <a:rPr sz="825" b="1">
-                <a:solidFill>
-                  <a:srgbClr val="1E40AF"/>
+              <a:spcBef>
+                <a:spcPts val="300"/>
+              </a:spcBef>
+              <a:buNone/>
+              <a:defRPr sz="1150">
+                <a:solidFill>
+                  <a:srgbClr val="0F172A"/>
+                </a:solidFill>
+                <a:latin typeface="Calibri"/>
+                <a:ea typeface="Calibri"/>
+                <a:cs typeface="Calibri"/>
+              </a:defRPr>
+            </a:pPr>
+            <a:r>
+              <a:rPr sz="825">
+                <a:solidFill>
+                  <a:srgbClr val="0F172A"/>
                 </a:solidFill>
                 <a:latin typeface="Calibri"/>
                 <a:ea typeface="Calibri"/>
@@ -10617,20 +10589,23 @@
           </a:p>
           <a:p xmlns:a="http://schemas.openxmlformats.org/drawingml/2006/main">
             <a:pPr>
-              <a:buNone/>
-              <a:defRPr sz="1600" b="1">
-                <a:solidFill>
-                  <a:srgbClr val="1E40AF"/>
-                </a:solidFill>
-                <a:latin typeface="Calibri"/>
-                <a:ea typeface="Calibri"/>
-                <a:cs typeface="Calibri"/>
-              </a:defRPr>
-            </a:pPr>
-            <a:r>
-              <a:rPr sz="825" b="1">
-                <a:solidFill>
-                  <a:srgbClr val="1E40AF"/>
+              <a:spcBef>
+                <a:spcPts val="300"/>
+              </a:spcBef>
+              <a:buNone/>
+              <a:defRPr sz="1150">
+                <a:solidFill>
+                  <a:srgbClr val="0F172A"/>
+                </a:solidFill>
+                <a:latin typeface="Calibri"/>
+                <a:ea typeface="Calibri"/>
+                <a:cs typeface="Calibri"/>
+              </a:defRPr>
+            </a:pPr>
+            <a:r>
+              <a:rPr sz="825">
+                <a:solidFill>
+                  <a:srgbClr val="0F172A"/>
                 </a:solidFill>
                 <a:latin typeface="Calibri"/>
                 <a:ea typeface="Calibri"/>
@@ -10641,26 +10616,29 @@
           </a:p>
           <a:p xmlns:a="http://schemas.openxmlformats.org/drawingml/2006/main">
             <a:pPr>
-              <a:buNone/>
-              <a:defRPr sz="1600" b="1">
-                <a:solidFill>
-                  <a:srgbClr val="1E40AF"/>
-                </a:solidFill>
-                <a:latin typeface="Calibri"/>
-                <a:ea typeface="Calibri"/>
-                <a:cs typeface="Calibri"/>
-              </a:defRPr>
-            </a:pPr>
-            <a:r>
-              <a:rPr sz="825" b="1">
-                <a:solidFill>
-                  <a:srgbClr val="1E40AF"/>
+              <a:spcBef>
+                <a:spcPts val="300"/>
+              </a:spcBef>
+              <a:buNone/>
+              <a:defRPr sz="1150">
+                <a:solidFill>
+                  <a:srgbClr val="0F172A"/>
+                </a:solidFill>
+                <a:latin typeface="Calibri"/>
+                <a:ea typeface="Calibri"/>
+                <a:cs typeface="Calibri"/>
+              </a:defRPr>
+            </a:pPr>
+            <a:r>
+              <a:rPr sz="825">
+                <a:solidFill>
+                  <a:srgbClr val="0F172A"/>
                 </a:solidFill>
                 <a:latin typeface="Calibri"/>
                 <a:ea typeface="Calibri"/>
                 <a:cs typeface="Calibri"/>
               </a:rPr>
-              <a:t>•  Phân định mẫu số: Tuyệt đối không gộp mẫu số N=756 (DEV Pilot) với N=718 (Test Fixture).</a:t>
+              <a:t>•  Phân định mẫu số: Mẫu số N=756 là toàn bộ benchmark (718 TEST + 38 DEV); N=718 là tập scorable TEST views; DEV Pilot là 20 requests.</a:t>
             </a:r>
           </a:p>
         </p:txBody>
@@ -10674,7 +10652,7 @@
           <p:nvPr/>
         </p:nvPicPr>
         <p:blipFill>
-          <a:blip xmlns:r="http://schemas.openxmlformats.org/officeDocument/2006/relationships" xmlns:a="http://schemas.openxmlformats.org/drawingml/2006/main" r:embed="Rf833ebe0a78a4a7a"/>
+          <a:blip xmlns:r="http://schemas.openxmlformats.org/officeDocument/2006/relationships" xmlns:a="http://schemas.openxmlformats.org/drawingml/2006/main" r:embed="Rdc4afde5397a4944"/>
           <a:stretch xmlns:a="http://schemas.openxmlformats.org/drawingml/2006/main">
             <a:fillRect l="0" t="0" r="0" b="0"/>
           </a:stretch>
@@ -10694,7 +10672,7 @@
           <p:cNvPr id="9" name="Rounded Rectangle 8">
             <a:extLst xmlns:a="http://schemas.openxmlformats.org/drawingml/2006/main">
               <a:ext uri="{FF2B5EF4-FFF2-40B4-BE49-F238E27FC236}">
-                <a16:creationId xmlns:a16="http://schemas.microsoft.com/office/drawing/2014/main" id="{AA6FF1AE-8267-45F6-871F-3AE37913C946}"/>
+                <a16:creationId xmlns:a16="http://schemas.microsoft.com/office/drawing/2014/main" id="{E875D768-1322-4A3F-B390-93D0D3C63359}"/>
               </a:ext>
             </a:extLst>
           </p:cNvPr>
@@ -10749,7 +10727,7 @@
           <p:cNvPr id="10" name="TextBox 9">
             <a:extLst xmlns:a="http://schemas.openxmlformats.org/drawingml/2006/main">
               <a:ext uri="{FF2B5EF4-FFF2-40B4-BE49-F238E27FC236}">
-                <a16:creationId xmlns:a16="http://schemas.microsoft.com/office/drawing/2014/main" id="{2FD85469-EA1B-4E5F-AB6C-F78F51E26DA4}"/>
+                <a16:creationId xmlns:a16="http://schemas.microsoft.com/office/drawing/2014/main" id="{58D8B798-5532-4F00-8CB5-DD0B8FA71F60}"/>
               </a:ext>
             </a:extLst>
           </p:cNvPr>
@@ -10835,7 +10813,7 @@
     </p:spTree>
     <p:extLst>
       <p:ext uri="{BB962C8B-B14F-4D97-AF65-F5344CB8AC3E}">
-        <p14:creationId xmlns:p14="http://schemas.microsoft.com/office/powerpoint/2010/main" val="1084139822"/>
+        <p14:creationId xmlns:p14="http://schemas.microsoft.com/office/powerpoint/2010/main" val="700816310"/>
       </p:ext>
     </p:extLst>
   </p:cSld>
@@ -10859,7 +10837,7 @@
           <p:cNvPr id="2" name="Rectangle 1">
             <a:extLst xmlns:a="http://schemas.openxmlformats.org/drawingml/2006/main">
               <a:ext uri="{FF2B5EF4-FFF2-40B4-BE49-F238E27FC236}">
-                <a16:creationId xmlns:a16="http://schemas.microsoft.com/office/drawing/2014/main" id="{1BB00D93-1CB0-483B-A597-61D396BA1140}"/>
+                <a16:creationId xmlns:a16="http://schemas.microsoft.com/office/drawing/2014/main" id="{CE7A11C3-71DA-47E7-9CFD-64761BC88CD1}"/>
               </a:ext>
             </a:extLst>
           </p:cNvPr>
@@ -10912,7 +10890,7 @@
           <p:cNvPr id="3" name="Rectangle 2">
             <a:extLst xmlns:a="http://schemas.openxmlformats.org/drawingml/2006/main">
               <a:ext uri="{FF2B5EF4-FFF2-40B4-BE49-F238E27FC236}">
-                <a16:creationId xmlns:a16="http://schemas.microsoft.com/office/drawing/2014/main" id="{E0962A26-8A99-4194-93B1-3B525D688328}"/>
+                <a16:creationId xmlns:a16="http://schemas.microsoft.com/office/drawing/2014/main" id="{E2B3E492-F997-44FF-A0BD-A7CF2A584D4C}"/>
               </a:ext>
             </a:extLst>
           </p:cNvPr>
@@ -10965,7 +10943,7 @@
           <p:cNvPr id="4" name="Rectangle 3">
             <a:extLst xmlns:a="http://schemas.openxmlformats.org/drawingml/2006/main">
               <a:ext uri="{FF2B5EF4-FFF2-40B4-BE49-F238E27FC236}">
-                <a16:creationId xmlns:a16="http://schemas.microsoft.com/office/drawing/2014/main" id="{AFA67A8B-2DC0-4871-82B7-E2410B058316}"/>
+                <a16:creationId xmlns:a16="http://schemas.microsoft.com/office/drawing/2014/main" id="{40C4AE07-E9DB-44B8-AA86-D7ADB66B8B4B}"/>
               </a:ext>
             </a:extLst>
           </p:cNvPr>
@@ -11018,7 +10996,7 @@
           <p:cNvPr id="5" name="TextBox 4">
             <a:extLst xmlns:a="http://schemas.openxmlformats.org/drawingml/2006/main">
               <a:ext uri="{FF2B5EF4-FFF2-40B4-BE49-F238E27FC236}">
-                <a16:creationId xmlns:a16="http://schemas.microsoft.com/office/drawing/2014/main" id="{4C98C8E5-338A-404C-A72E-93E0FBA4C39A}"/>
+                <a16:creationId xmlns:a16="http://schemas.microsoft.com/office/drawing/2014/main" id="{F5F5FAB7-D8A0-44A4-8D9B-9DFC238B38A8}"/>
               </a:ext>
             </a:extLst>
           </p:cNvPr>
@@ -11081,7 +11059,7 @@
           <p:cNvPr id="6" name="Rounded Rectangle 5">
             <a:extLst xmlns:a="http://schemas.openxmlformats.org/drawingml/2006/main">
               <a:ext uri="{FF2B5EF4-FFF2-40B4-BE49-F238E27FC236}">
-                <a16:creationId xmlns:a16="http://schemas.microsoft.com/office/drawing/2014/main" id="{980696FF-C7A0-4F56-9263-BF39BCB37BCA}"/>
+                <a16:creationId xmlns:a16="http://schemas.microsoft.com/office/drawing/2014/main" id="{9204241B-FD45-4D46-A329-06C436406649}"/>
               </a:ext>
             </a:extLst>
           </p:cNvPr>
@@ -11136,7 +11114,7 @@
           <p:cNvPr id="7" name="TextBox 6">
             <a:extLst xmlns:a="http://schemas.openxmlformats.org/drawingml/2006/main">
               <a:ext uri="{FF2B5EF4-FFF2-40B4-BE49-F238E27FC236}">
-                <a16:creationId xmlns:a16="http://schemas.microsoft.com/office/drawing/2014/main" id="{63FFF54F-F2AF-4735-954D-A4F9BF5EC11B}"/>
+                <a16:creationId xmlns:a16="http://schemas.microsoft.com/office/drawing/2014/main" id="{5264965E-9E8B-4421-95B2-0185A7513CCF}"/>
               </a:ext>
             </a:extLst>
           </p:cNvPr>
@@ -11373,7 +11351,7 @@
           <p:cNvPr id="8" name="Rounded Rectangle 7">
             <a:extLst xmlns:a="http://schemas.openxmlformats.org/drawingml/2006/main">
               <a:ext uri="{FF2B5EF4-FFF2-40B4-BE49-F238E27FC236}">
-                <a16:creationId xmlns:a16="http://schemas.microsoft.com/office/drawing/2014/main" id="{0C0365B5-1434-41F8-9FC3-011145DD5E2F}"/>
+                <a16:creationId xmlns:a16="http://schemas.microsoft.com/office/drawing/2014/main" id="{9A7BAFB5-05B0-4C18-8B2A-34483271FF5B}"/>
               </a:ext>
             </a:extLst>
           </p:cNvPr>
@@ -11428,7 +11406,7 @@
           <p:cNvPr id="9" name="TextBox 8">
             <a:extLst xmlns:a="http://schemas.openxmlformats.org/drawingml/2006/main">
               <a:ext uri="{FF2B5EF4-FFF2-40B4-BE49-F238E27FC236}">
-                <a16:creationId xmlns:a16="http://schemas.microsoft.com/office/drawing/2014/main" id="{54B22442-9FEA-4D9B-AD3C-E4457A9AD9A8}"/>
+                <a16:creationId xmlns:a16="http://schemas.microsoft.com/office/drawing/2014/main" id="{0C3D3527-44DA-4123-AAB6-BEC85B92C9B1}"/>
               </a:ext>
             </a:extLst>
           </p:cNvPr>
@@ -11440,7 +11418,7 @@
         <p:spPr>
           <a:xfrm xmlns:a="http://schemas.openxmlformats.org/drawingml/2006/main">
             <a:off x="6430975" y="1344168"/>
-            <a:ext cx="4846320" cy="5410200"/>
+            <a:ext cx="4846320" cy="5158740"/>
           </a:xfrm>
           <a:prstGeom xmlns:a="http://schemas.openxmlformats.org/drawingml/2006/main" prst="rect">
             <a:avLst/>
@@ -11544,142 +11522,12 @@
               </a:defRPr>
             </a:pPr>
             <a:r>
-              <a:t>•  Schema So Sánh Đối Chứng Scaffold [DIAGNOSTIC TEST FIXTURE ONLY - NOT CANONICAL NUMERICAL RESULTS]:</a:t>
-            </a:r>
-          </a:p>
-          <a:p xmlns:a="http://schemas.openxmlformats.org/drawingml/2006/main">
-            <a:pPr>
-              <a:spcBef>
-                <a:spcPts val="300"/>
-              </a:spcBef>
-              <a:buNone/>
-              <a:defRPr sz="1150">
-                <a:solidFill>
-                  <a:srgbClr val="0F172A"/>
-                </a:solidFill>
-                <a:latin typeface="Calibri"/>
-                <a:ea typeface="Calibri"/>
-                <a:cs typeface="Calibri"/>
-              </a:defRPr>
-            </a:pPr>
-            <a:r>
-              <a:rPr sz="1150">
-                <a:solidFill>
-                  <a:srgbClr val="0F172A"/>
-                </a:solidFill>
-                <a:latin typeface="Calibri"/>
-                <a:ea typeface="Calibri"/>
-                <a:cs typeface="Calibri"/>
-              </a:rPr>
-              <a:t>  • Diagnostic Cohort Pairwise Comparison (n=718 views across 440 clusters):</a:t>
-            </a:r>
-          </a:p>
-          <a:p xmlns:a="http://schemas.openxmlformats.org/drawingml/2006/main">
-            <a:pPr>
-              <a:spcBef>
-                <a:spcPts val="300"/>
-              </a:spcBef>
-              <a:buNone/>
-              <a:defRPr sz="1150">
-                <a:solidFill>
-                  <a:srgbClr val="0F172A"/>
-                </a:solidFill>
-                <a:latin typeface="Calibri"/>
-                <a:ea typeface="Calibri"/>
-                <a:cs typeface="Calibri"/>
-              </a:defRPr>
-            </a:pPr>
-            <a:r>
-              <a:rPr sz="1150">
-                <a:solidFill>
-                  <a:srgbClr val="0F172A"/>
-                </a:solidFill>
-                <a:latin typeface="Calibri"/>
-                <a:ea typeface="Calibri"/>
-                <a:cs typeface="Calibri"/>
-              </a:rPr>
-              <a:t>    • Marginal Views: Single-event Acc = 0.5000 vs Contextual-event Acc = 0.5000 (Delta = +0.0000)</a:t>
-            </a:r>
-          </a:p>
-          <a:p xmlns:a="http://schemas.openxmlformats.org/drawingml/2006/main">
-            <a:pPr>
-              <a:spcBef>
-                <a:spcPts val="300"/>
-              </a:spcBef>
-              <a:buNone/>
-              <a:defRPr sz="1150">
-                <a:solidFill>
-                  <a:srgbClr val="0F172A"/>
-                </a:solidFill>
-                <a:latin typeface="Calibri"/>
-                <a:ea typeface="Calibri"/>
-                <a:cs typeface="Calibri"/>
-              </a:defRPr>
-            </a:pPr>
-            <a:r>
-              <a:rPr sz="1150">
-                <a:solidFill>
-                  <a:srgbClr val="0F172A"/>
-                </a:solidFill>
-                <a:latin typeface="Calibri"/>
-                <a:ea typeface="Calibri"/>
-                <a:cs typeface="Calibri"/>
-              </a:rPr>
-              <a:t>    • Paired Cohort (278 complete pairs): Single Acc = 0.5000 vs Context Acc = 0.5000 (Delta = +0.00 pp)</a:t>
-            </a:r>
-          </a:p>
-          <a:p xmlns:a="http://schemas.openxmlformats.org/drawingml/2006/main">
-            <a:pPr>
-              <a:spcBef>
-                <a:spcPts val="300"/>
-              </a:spcBef>
-              <a:buNone/>
-              <a:defRPr sz="1150">
-                <a:solidFill>
-                  <a:srgbClr val="0F172A"/>
-                </a:solidFill>
-                <a:latin typeface="Calibri"/>
-                <a:ea typeface="Calibri"/>
-                <a:cs typeface="Calibri"/>
-              </a:defRPr>
-            </a:pPr>
-            <a:r>
-              <a:rPr sz="1150">
-                <a:solidFill>
-                  <a:srgbClr val="0F172A"/>
-                </a:solidFill>
-                <a:latin typeface="Calibri"/>
-                <a:ea typeface="Calibri"/>
-                <a:cs typeface="Calibri"/>
-              </a:rPr>
-              <a:t>    • Pair Concordance: Both Correct = 139, Single-only Correct = 0, Context-only Correct = 0, Both Incorrect = 139</a:t>
-            </a:r>
-          </a:p>
-          <a:p xmlns:a="http://schemas.openxmlformats.org/drawingml/2006/main">
-            <a:pPr>
-              <a:spcBef>
-                <a:spcPts val="300"/>
-              </a:spcBef>
-              <a:buNone/>
-              <a:defRPr sz="1150">
-                <a:solidFill>
-                  <a:srgbClr val="0F172A"/>
-                </a:solidFill>
-                <a:latin typeface="Calibri"/>
-                <a:ea typeface="Calibri"/>
-                <a:cs typeface="Calibri"/>
-              </a:defRPr>
-            </a:pPr>
-            <a:r>
-              <a:rPr sz="1150">
-                <a:solidFill>
-                  <a:srgbClr val="0F172A"/>
-                </a:solidFill>
-                <a:latin typeface="Calibri"/>
-                <a:ea typeface="Calibri"/>
-                <a:cs typeface="Calibri"/>
-              </a:rPr>
-              <a:t>    • McNemar Exploratory Test: p_asympt = 1.0000, p_exact = 1.0000</a:t>
+              <a:t>•  Schema So Sánh Đối Chứng Scaffold [DIAGNOSTIC TEST FIXTURE ONLY - NOT CANONICAL NUMERICAL RESULTS]:
+  • Diagnostic Cohort Pairwise Comparison (n=718 views across 440 clusters):
+    • Marginal Views: Single-event Acc = 0.5000 vs Contextual-event Acc = 0.5000 (Delta = +0.0000)
+    • Paired Cohort (278 complete pairs): Single Acc = 0.5000 vs Context Acc = 0.5000 (Delta = +0.00 pp)
+    • Pair Concordance: Both Correct = 139, Single-only Correct = 0, Context-only Correct = 0, Both Incorrect = 139
+    • McNemar Exploratory Test: p_asympt = 1.0000, p_exact = 1.0000</a:t>
             </a:r>
           </a:p>
           <a:p xmlns:a="http://schemas.openxmlformats.org/drawingml/2006/main">
@@ -11763,7 +11611,7 @@
     </p:spTree>
     <p:extLst>
       <p:ext uri="{BB962C8B-B14F-4D97-AF65-F5344CB8AC3E}">
-        <p14:creationId xmlns:p14="http://schemas.microsoft.com/office/powerpoint/2010/main" val="465052996"/>
+        <p14:creationId xmlns:p14="http://schemas.microsoft.com/office/powerpoint/2010/main" val="2044301991"/>
       </p:ext>
     </p:extLst>
   </p:cSld>
@@ -11787,7 +11635,7 @@
           <p:cNvPr id="2" name="Rectangle 1">
             <a:extLst xmlns:a="http://schemas.openxmlformats.org/drawingml/2006/main">
               <a:ext uri="{FF2B5EF4-FFF2-40B4-BE49-F238E27FC236}">
-                <a16:creationId xmlns:a16="http://schemas.microsoft.com/office/drawing/2014/main" id="{2C13F827-4140-4357-92EC-B490C7939B2B}"/>
+                <a16:creationId xmlns:a16="http://schemas.microsoft.com/office/drawing/2014/main" id="{8540B0ED-E1FC-45F7-B4B3-E666D12FC96D}"/>
               </a:ext>
             </a:extLst>
           </p:cNvPr>
@@ -11840,7 +11688,7 @@
           <p:cNvPr id="3" name="Rectangle 2">
             <a:extLst xmlns:a="http://schemas.openxmlformats.org/drawingml/2006/main">
               <a:ext uri="{FF2B5EF4-FFF2-40B4-BE49-F238E27FC236}">
-                <a16:creationId xmlns:a16="http://schemas.microsoft.com/office/drawing/2014/main" id="{4E278105-1054-4063-ADCF-BE9992FC72A1}"/>
+                <a16:creationId xmlns:a16="http://schemas.microsoft.com/office/drawing/2014/main" id="{3BC546D6-D1C3-4FFB-AA12-3E189D1C82EF}"/>
               </a:ext>
             </a:extLst>
           </p:cNvPr>
@@ -11893,7 +11741,7 @@
           <p:cNvPr id="4" name="Rectangle 3">
             <a:extLst xmlns:a="http://schemas.openxmlformats.org/drawingml/2006/main">
               <a:ext uri="{FF2B5EF4-FFF2-40B4-BE49-F238E27FC236}">
-                <a16:creationId xmlns:a16="http://schemas.microsoft.com/office/drawing/2014/main" id="{213BAA95-28A0-4191-B833-6C078ED19812}"/>
+                <a16:creationId xmlns:a16="http://schemas.microsoft.com/office/drawing/2014/main" id="{E26E1B9A-20B6-4630-9044-768A03989CF5}"/>
               </a:ext>
             </a:extLst>
           </p:cNvPr>
@@ -11946,7 +11794,7 @@
           <p:cNvPr id="5" name="TextBox 4">
             <a:extLst xmlns:a="http://schemas.openxmlformats.org/drawingml/2006/main">
               <a:ext uri="{FF2B5EF4-FFF2-40B4-BE49-F238E27FC236}">
-                <a16:creationId xmlns:a16="http://schemas.microsoft.com/office/drawing/2014/main" id="{5D547E9F-398B-46D5-B7CC-3B8BF9560D01}"/>
+                <a16:creationId xmlns:a16="http://schemas.microsoft.com/office/drawing/2014/main" id="{58265557-8535-463D-8E29-F92635A228EA}"/>
               </a:ext>
             </a:extLst>
           </p:cNvPr>
@@ -12009,7 +11857,7 @@
           <p:cNvPr id="6" name="Rounded Rectangle 5">
             <a:extLst xmlns:a="http://schemas.openxmlformats.org/drawingml/2006/main">
               <a:ext uri="{FF2B5EF4-FFF2-40B4-BE49-F238E27FC236}">
-                <a16:creationId xmlns:a16="http://schemas.microsoft.com/office/drawing/2014/main" id="{CA78DD69-ACB6-46B4-9D8F-B6AF5436FF06}"/>
+                <a16:creationId xmlns:a16="http://schemas.microsoft.com/office/drawing/2014/main" id="{A9A49EB8-901F-46BA-B78C-2273A64857A8}"/>
               </a:ext>
             </a:extLst>
           </p:cNvPr>
@@ -12064,7 +11912,7 @@
           <p:cNvPr id="7" name="TextBox 6">
             <a:extLst xmlns:a="http://schemas.openxmlformats.org/drawingml/2006/main">
               <a:ext uri="{FF2B5EF4-FFF2-40B4-BE49-F238E27FC236}">
-                <a16:creationId xmlns:a16="http://schemas.microsoft.com/office/drawing/2014/main" id="{97C98CCE-3A44-45CB-87A0-05B107B2C20F}"/>
+                <a16:creationId xmlns:a16="http://schemas.microsoft.com/office/drawing/2014/main" id="{565EEACD-694B-4BDF-9B37-BEC9C4F9B6A6}"/>
               </a:ext>
             </a:extLst>
           </p:cNvPr>
@@ -12187,7 +12035,7 @@
           <p:cNvPr id="8" name="Rounded Rectangle 7">
             <a:extLst xmlns:a="http://schemas.openxmlformats.org/drawingml/2006/main">
               <a:ext uri="{FF2B5EF4-FFF2-40B4-BE49-F238E27FC236}">
-                <a16:creationId xmlns:a16="http://schemas.microsoft.com/office/drawing/2014/main" id="{983305C6-EDEA-4504-BB96-59165024ED8D}"/>
+                <a16:creationId xmlns:a16="http://schemas.microsoft.com/office/drawing/2014/main" id="{F33D9A35-7A4E-4ADB-BD55-AEA3C6AB5B2E}"/>
               </a:ext>
             </a:extLst>
           </p:cNvPr>
@@ -12242,7 +12090,7 @@
           <p:cNvPr id="9" name="TextBox 8">
             <a:extLst xmlns:a="http://schemas.openxmlformats.org/drawingml/2006/main">
               <a:ext uri="{FF2B5EF4-FFF2-40B4-BE49-F238E27FC236}">
-                <a16:creationId xmlns:a16="http://schemas.microsoft.com/office/drawing/2014/main" id="{89AB89D4-3018-4EBC-A588-AE433CAC5AC2}"/>
+                <a16:creationId xmlns:a16="http://schemas.microsoft.com/office/drawing/2014/main" id="{CEF697E1-27A7-4EAA-AD68-AA1E01883E88}"/>
               </a:ext>
             </a:extLst>
           </p:cNvPr>
@@ -12365,7 +12213,7 @@
           <p:cNvPr id="10" name="Rounded Rectangle 9">
             <a:extLst xmlns:a="http://schemas.openxmlformats.org/drawingml/2006/main">
               <a:ext uri="{FF2B5EF4-FFF2-40B4-BE49-F238E27FC236}">
-                <a16:creationId xmlns:a16="http://schemas.microsoft.com/office/drawing/2014/main" id="{884FDF92-6B53-4AC5-8C5E-BEE73E856DD0}"/>
+                <a16:creationId xmlns:a16="http://schemas.microsoft.com/office/drawing/2014/main" id="{6D9CFD45-AB27-44A3-B2BE-185304864318}"/>
               </a:ext>
             </a:extLst>
           </p:cNvPr>
@@ -12420,7 +12268,7 @@
           <p:cNvPr id="11" name="TextBox 10">
             <a:extLst xmlns:a="http://schemas.openxmlformats.org/drawingml/2006/main">
               <a:ext uri="{FF2B5EF4-FFF2-40B4-BE49-F238E27FC236}">
-                <a16:creationId xmlns:a16="http://schemas.microsoft.com/office/drawing/2014/main" id="{C4793796-8265-45DC-9C43-7124B986A012}"/>
+                <a16:creationId xmlns:a16="http://schemas.microsoft.com/office/drawing/2014/main" id="{CEE48DA2-A75A-4546-AE0D-B3BAFC6D0727}"/>
               </a:ext>
             </a:extLst>
           </p:cNvPr>
@@ -12470,10 +12318,13 @@
           </a:p>
           <a:p xmlns:a="http://schemas.openxmlformats.org/drawingml/2006/main">
             <a:pPr>
-              <a:buNone/>
-              <a:defRPr sz="1600" b="1">
-                <a:solidFill>
-                  <a:srgbClr val="DC2626"/>
+              <a:spcBef>
+                <a:spcPts val="350"/>
+              </a:spcBef>
+              <a:buNone/>
+              <a:defRPr sz="1150">
+                <a:solidFill>
+                  <a:srgbClr val="0F172A"/>
                 </a:solidFill>
                 <a:latin typeface="Calibri"/>
                 <a:ea typeface="Calibri"/>
@@ -12494,10 +12345,13 @@
           </a:p>
           <a:p xmlns:a="http://schemas.openxmlformats.org/drawingml/2006/main">
             <a:pPr>
-              <a:buNone/>
-              <a:defRPr sz="1600" b="1">
-                <a:solidFill>
-                  <a:srgbClr val="DC2626"/>
+              <a:spcBef>
+                <a:spcPts val="350"/>
+              </a:spcBef>
+              <a:buNone/>
+              <a:defRPr sz="1150">
+                <a:solidFill>
+                  <a:srgbClr val="0F172A"/>
                 </a:solidFill>
                 <a:latin typeface="Calibri"/>
                 <a:ea typeface="Calibri"/>
@@ -12518,10 +12372,13 @@
           </a:p>
           <a:p xmlns:a="http://schemas.openxmlformats.org/drawingml/2006/main">
             <a:pPr>
-              <a:buNone/>
-              <a:defRPr sz="1600" b="1">
-                <a:solidFill>
-                  <a:srgbClr val="DC2626"/>
+              <a:spcBef>
+                <a:spcPts val="350"/>
+              </a:spcBef>
+              <a:buNone/>
+              <a:defRPr sz="1150">
+                <a:solidFill>
+                  <a:srgbClr val="0F172A"/>
                 </a:solidFill>
                 <a:latin typeface="Calibri"/>
                 <a:ea typeface="Calibri"/>
@@ -12542,10 +12399,13 @@
           </a:p>
           <a:p xmlns:a="http://schemas.openxmlformats.org/drawingml/2006/main">
             <a:pPr>
-              <a:buNone/>
-              <a:defRPr sz="1600" b="1">
-                <a:solidFill>
-                  <a:srgbClr val="DC2626"/>
+              <a:spcBef>
+                <a:spcPts val="350"/>
+              </a:spcBef>
+              <a:buNone/>
+              <a:defRPr sz="1150">
+                <a:solidFill>
+                  <a:srgbClr val="0F172A"/>
                 </a:solidFill>
                 <a:latin typeface="Calibri"/>
                 <a:ea typeface="Calibri"/>
@@ -12566,10 +12426,13 @@
           </a:p>
           <a:p xmlns:a="http://schemas.openxmlformats.org/drawingml/2006/main">
             <a:pPr>
-              <a:buNone/>
-              <a:defRPr sz="1600" b="1">
-                <a:solidFill>
-                  <a:srgbClr val="DC2626"/>
+              <a:spcBef>
+                <a:spcPts val="350"/>
+              </a:spcBef>
+              <a:buNone/>
+              <a:defRPr sz="1150">
+                <a:solidFill>
+                  <a:srgbClr val="0F172A"/>
                 </a:solidFill>
                 <a:latin typeface="Calibri"/>
                 <a:ea typeface="Calibri"/>
@@ -12590,10 +12453,13 @@
           </a:p>
           <a:p xmlns:a="http://schemas.openxmlformats.org/drawingml/2006/main">
             <a:pPr>
-              <a:buNone/>
-              <a:defRPr sz="1600" b="1">
-                <a:solidFill>
-                  <a:srgbClr val="DC2626"/>
+              <a:spcBef>
+                <a:spcPts val="350"/>
+              </a:spcBef>
+              <a:buNone/>
+              <a:defRPr sz="1150">
+                <a:solidFill>
+                  <a:srgbClr val="0F172A"/>
                 </a:solidFill>
                 <a:latin typeface="Calibri"/>
                 <a:ea typeface="Calibri"/>
@@ -12614,10 +12480,13 @@
           </a:p>
           <a:p xmlns:a="http://schemas.openxmlformats.org/drawingml/2006/main">
             <a:pPr>
-              <a:buNone/>
-              <a:defRPr sz="1600" b="1">
-                <a:solidFill>
-                  <a:srgbClr val="DC2626"/>
+              <a:spcBef>
+                <a:spcPts val="350"/>
+              </a:spcBef>
+              <a:buNone/>
+              <a:defRPr sz="1150">
+                <a:solidFill>
+                  <a:srgbClr val="0F172A"/>
                 </a:solidFill>
                 <a:latin typeface="Calibri"/>
                 <a:ea typeface="Calibri"/>
@@ -12638,10 +12507,13 @@
           </a:p>
           <a:p xmlns:a="http://schemas.openxmlformats.org/drawingml/2006/main">
             <a:pPr>
-              <a:buNone/>
-              <a:defRPr sz="1600" b="1">
-                <a:solidFill>
-                  <a:srgbClr val="DC2626"/>
+              <a:spcBef>
+                <a:spcPts val="350"/>
+              </a:spcBef>
+              <a:buNone/>
+              <a:defRPr sz="1150">
+                <a:solidFill>
+                  <a:srgbClr val="0F172A"/>
                 </a:solidFill>
                 <a:latin typeface="Calibri"/>
                 <a:ea typeface="Calibri"/>
@@ -12662,10 +12534,13 @@
           </a:p>
           <a:p xmlns:a="http://schemas.openxmlformats.org/drawingml/2006/main">
             <a:pPr>
-              <a:buNone/>
-              <a:defRPr sz="1600" b="1">
-                <a:solidFill>
-                  <a:srgbClr val="DC2626"/>
+              <a:spcBef>
+                <a:spcPts val="350"/>
+              </a:spcBef>
+              <a:buNone/>
+              <a:defRPr sz="1150">
+                <a:solidFill>
+                  <a:srgbClr val="0F172A"/>
                 </a:solidFill>
                 <a:latin typeface="Calibri"/>
                 <a:ea typeface="Calibri"/>
@@ -12681,15 +12556,18 @@
                 <a:ea typeface="Calibri"/>
                 <a:cs typeface="Calibri"/>
               </a:rPr>
-              <a:t>★ Best Condition: rag_k10 (Tie-break: delta_macro_f1 | Delta Acc = +0.1000, Delta F1 = +0.0671)</a:t>
-            </a:r>
-          </a:p>
-          <a:p xmlns:a="http://schemas.openxmlformats.org/drawingml/2006/main">
-            <a:pPr>
-              <a:buNone/>
-              <a:defRPr sz="1600" b="1">
-                <a:solidFill>
-                  <a:srgbClr val="DC2626"/>
+              <a:t>★ Best Condition (Max Accuracy): rag_k10 (Delta Acc = +0.1000, Delta F1 = +0.0671)</a:t>
+            </a:r>
+          </a:p>
+          <a:p xmlns:a="http://schemas.openxmlformats.org/drawingml/2006/main">
+            <a:pPr>
+              <a:spcBef>
+                <a:spcPts val="350"/>
+              </a:spcBef>
+              <a:buNone/>
+              <a:defRPr sz="1150">
+                <a:solidFill>
+                  <a:srgbClr val="0F172A"/>
                 </a:solidFill>
                 <a:latin typeface="Calibri"/>
                 <a:ea typeface="Calibri"/>
@@ -12710,10 +12588,13 @@
           </a:p>
           <a:p xmlns:a="http://schemas.openxmlformats.org/drawingml/2006/main">
             <a:pPr>
-              <a:buNone/>
-              <a:defRPr sz="1600" b="1">
-                <a:solidFill>
-                  <a:srgbClr val="DC2626"/>
+              <a:spcBef>
+                <a:spcPts val="350"/>
+              </a:spcBef>
+              <a:buNone/>
+              <a:defRPr sz="1150">
+                <a:solidFill>
+                  <a:srgbClr val="0F172A"/>
                 </a:solidFill>
                 <a:latin typeface="Calibri"/>
                 <a:ea typeface="Calibri"/>
@@ -12737,7 +12618,7 @@
     </p:spTree>
     <p:extLst>
       <p:ext uri="{BB962C8B-B14F-4D97-AF65-F5344CB8AC3E}">
-        <p14:creationId xmlns:p14="http://schemas.microsoft.com/office/powerpoint/2010/main" val="789971688"/>
+        <p14:creationId xmlns:p14="http://schemas.microsoft.com/office/powerpoint/2010/main" val="196206519"/>
       </p:ext>
     </p:extLst>
   </p:cSld>
@@ -12761,7 +12642,7 @@
           <p:cNvPr id="2" name="Rectangle 1">
             <a:extLst xmlns:a="http://schemas.openxmlformats.org/drawingml/2006/main">
               <a:ext uri="{FF2B5EF4-FFF2-40B4-BE49-F238E27FC236}">
-                <a16:creationId xmlns:a16="http://schemas.microsoft.com/office/drawing/2014/main" id="{17663151-1947-4B04-9BE3-D5B77CE01653}"/>
+                <a16:creationId xmlns:a16="http://schemas.microsoft.com/office/drawing/2014/main" id="{92531751-03FD-4EFE-B94F-2834555A2C64}"/>
               </a:ext>
             </a:extLst>
           </p:cNvPr>
@@ -12814,7 +12695,7 @@
           <p:cNvPr id="3" name="Rectangle 2">
             <a:extLst xmlns:a="http://schemas.openxmlformats.org/drawingml/2006/main">
               <a:ext uri="{FF2B5EF4-FFF2-40B4-BE49-F238E27FC236}">
-                <a16:creationId xmlns:a16="http://schemas.microsoft.com/office/drawing/2014/main" id="{42C3471B-A5FF-488A-9C61-3A873F3504E3}"/>
+                <a16:creationId xmlns:a16="http://schemas.microsoft.com/office/drawing/2014/main" id="{7BCDB3E6-6731-4AEC-B3FD-3F21354D6B93}"/>
               </a:ext>
             </a:extLst>
           </p:cNvPr>
@@ -12867,7 +12748,7 @@
           <p:cNvPr id="4" name="Rectangle 3">
             <a:extLst xmlns:a="http://schemas.openxmlformats.org/drawingml/2006/main">
               <a:ext uri="{FF2B5EF4-FFF2-40B4-BE49-F238E27FC236}">
-                <a16:creationId xmlns:a16="http://schemas.microsoft.com/office/drawing/2014/main" id="{DE8A0F8E-FF2D-4BB7-9337-680364F99A11}"/>
+                <a16:creationId xmlns:a16="http://schemas.microsoft.com/office/drawing/2014/main" id="{20D4F9AE-8432-4412-9CD9-6460E8B9E2ED}"/>
               </a:ext>
             </a:extLst>
           </p:cNvPr>
@@ -12920,7 +12801,7 @@
           <p:cNvPr id="5" name="TextBox 4">
             <a:extLst xmlns:a="http://schemas.openxmlformats.org/drawingml/2006/main">
               <a:ext uri="{FF2B5EF4-FFF2-40B4-BE49-F238E27FC236}">
-                <a16:creationId xmlns:a16="http://schemas.microsoft.com/office/drawing/2014/main" id="{14D18ABD-5309-4462-8F6B-7BCD719B12EA}"/>
+                <a16:creationId xmlns:a16="http://schemas.microsoft.com/office/drawing/2014/main" id="{A452D14D-DED0-45F9-A573-0E45748C3830}"/>
               </a:ext>
             </a:extLst>
           </p:cNvPr>
@@ -12983,7 +12864,7 @@
           <p:cNvPr id="6" name="Rounded Rectangle 5">
             <a:extLst xmlns:a="http://schemas.openxmlformats.org/drawingml/2006/main">
               <a:ext uri="{FF2B5EF4-FFF2-40B4-BE49-F238E27FC236}">
-                <a16:creationId xmlns:a16="http://schemas.microsoft.com/office/drawing/2014/main" id="{6C7C2556-CA67-4B70-B176-563AEE2E005E}"/>
+                <a16:creationId xmlns:a16="http://schemas.microsoft.com/office/drawing/2014/main" id="{D351161A-D771-4537-8987-98ACD66D49E9}"/>
               </a:ext>
             </a:extLst>
           </p:cNvPr>
@@ -13038,7 +12919,7 @@
           <p:cNvPr id="7" name="TextBox 6">
             <a:extLst xmlns:a="http://schemas.openxmlformats.org/drawingml/2006/main">
               <a:ext uri="{FF2B5EF4-FFF2-40B4-BE49-F238E27FC236}">
-                <a16:creationId xmlns:a16="http://schemas.microsoft.com/office/drawing/2014/main" id="{F3F9D415-3CC6-4E45-8A4B-94531629B695}"/>
+                <a16:creationId xmlns:a16="http://schemas.microsoft.com/office/drawing/2014/main" id="{BF024B9A-639A-42A4-866F-3548F17D6736}"/>
               </a:ext>
             </a:extLst>
           </p:cNvPr>
@@ -13088,33 +12969,50 @@
           </a:p>
           <a:p xmlns:a="http://schemas.openxmlformats.org/drawingml/2006/main">
             <a:pPr>
-              <a:buNone/>
-              <a:defRPr sz="1600" b="1">
-                <a:solidFill>
-                  <a:srgbClr val="1E40AF"/>
-                </a:solidFill>
-                <a:latin typeface="Calibri"/>
-                <a:ea typeface="Calibri"/>
-                <a:cs typeface="Calibri"/>
-              </a:defRPr>
-            </a:pPr>
-          </a:p>
-          <a:p xmlns:a="http://schemas.openxmlformats.org/drawingml/2006/main">
-            <a:pPr>
-              <a:buNone/>
-              <a:defRPr sz="1600" b="1">
-                <a:solidFill>
-                  <a:srgbClr val="1E40AF"/>
-                </a:solidFill>
-                <a:latin typeface="Calibri"/>
-                <a:ea typeface="Calibri"/>
-                <a:cs typeface="Calibri"/>
-              </a:defRPr>
-            </a:pPr>
-            <a:r>
-              <a:rPr sz="825" b="1">
-                <a:solidFill>
-                  <a:srgbClr val="1E40AF"/>
+              <a:spcBef>
+                <a:spcPts val="200"/>
+              </a:spcBef>
+              <a:buNone/>
+              <a:defRPr sz="1050">
+                <a:solidFill>
+                  <a:srgbClr val="0F172A"/>
+                </a:solidFill>
+                <a:latin typeface="Calibri"/>
+                <a:ea typeface="Calibri"/>
+                <a:cs typeface="Calibri"/>
+              </a:defRPr>
+            </a:pPr>
+            <a:r>
+              <a:rPr sz="825">
+                <a:solidFill>
+                  <a:srgbClr val="0F172A"/>
+                </a:solidFill>
+                <a:latin typeface="Calibri"/>
+                <a:ea typeface="Calibri"/>
+                <a:cs typeface="Calibri"/>
+              </a:rPr>
+              <a:t/>
+            </a:r>
+          </a:p>
+          <a:p xmlns:a="http://schemas.openxmlformats.org/drawingml/2006/main">
+            <a:pPr>
+              <a:spcBef>
+                <a:spcPts val="200"/>
+              </a:spcBef>
+              <a:buNone/>
+              <a:defRPr sz="1050">
+                <a:solidFill>
+                  <a:srgbClr val="0F172A"/>
+                </a:solidFill>
+                <a:latin typeface="Calibri"/>
+                <a:ea typeface="Calibri"/>
+                <a:cs typeface="Calibri"/>
+              </a:defRPr>
+            </a:pPr>
+            <a:r>
+              <a:rPr sz="825">
+                <a:solidFill>
+                  <a:srgbClr val="0F172A"/>
                 </a:solidFill>
                 <a:latin typeface="Calibri"/>
                 <a:ea typeface="Calibri"/>
@@ -13125,20 +13023,23 @@
           </a:p>
           <a:p xmlns:a="http://schemas.openxmlformats.org/drawingml/2006/main">
             <a:pPr>
-              <a:buNone/>
-              <a:defRPr sz="1600" b="1">
-                <a:solidFill>
-                  <a:srgbClr val="1E40AF"/>
-                </a:solidFill>
-                <a:latin typeface="Calibri"/>
-                <a:ea typeface="Calibri"/>
-                <a:cs typeface="Calibri"/>
-              </a:defRPr>
-            </a:pPr>
-            <a:r>
-              <a:rPr sz="825" b="1">
-                <a:solidFill>
-                  <a:srgbClr val="1E40AF"/>
+              <a:spcBef>
+                <a:spcPts val="200"/>
+              </a:spcBef>
+              <a:buNone/>
+              <a:defRPr sz="1050">
+                <a:solidFill>
+                  <a:srgbClr val="0F172A"/>
+                </a:solidFill>
+                <a:latin typeface="Calibri"/>
+                <a:ea typeface="Calibri"/>
+                <a:cs typeface="Calibri"/>
+              </a:defRPr>
+            </a:pPr>
+            <a:r>
+              <a:rPr sz="825">
+                <a:solidFill>
+                  <a:srgbClr val="0F172A"/>
                 </a:solidFill>
                 <a:latin typeface="Calibri"/>
                 <a:ea typeface="Calibri"/>
@@ -13149,20 +13050,23 @@
           </a:p>
           <a:p xmlns:a="http://schemas.openxmlformats.org/drawingml/2006/main">
             <a:pPr>
-              <a:buNone/>
-              <a:defRPr sz="1600" b="1">
-                <a:solidFill>
-                  <a:srgbClr val="1E40AF"/>
-                </a:solidFill>
-                <a:latin typeface="Calibri"/>
-                <a:ea typeface="Calibri"/>
-                <a:cs typeface="Calibri"/>
-              </a:defRPr>
-            </a:pPr>
-            <a:r>
-              <a:rPr sz="825" b="1">
-                <a:solidFill>
-                  <a:srgbClr val="1E40AF"/>
+              <a:spcBef>
+                <a:spcPts val="200"/>
+              </a:spcBef>
+              <a:buNone/>
+              <a:defRPr sz="1050">
+                <a:solidFill>
+                  <a:srgbClr val="0F172A"/>
+                </a:solidFill>
+                <a:latin typeface="Calibri"/>
+                <a:ea typeface="Calibri"/>
+                <a:cs typeface="Calibri"/>
+              </a:defRPr>
+            </a:pPr>
+            <a:r>
+              <a:rPr sz="825">
+                <a:solidFill>
+                  <a:srgbClr val="0F172A"/>
                 </a:solidFill>
                 <a:latin typeface="Calibri"/>
                 <a:ea typeface="Calibri"/>
@@ -13173,33 +13077,50 @@
           </a:p>
           <a:p xmlns:a="http://schemas.openxmlformats.org/drawingml/2006/main">
             <a:pPr>
-              <a:buNone/>
-              <a:defRPr sz="1600" b="1">
-                <a:solidFill>
-                  <a:srgbClr val="1E40AF"/>
-                </a:solidFill>
-                <a:latin typeface="Calibri"/>
-                <a:ea typeface="Calibri"/>
-                <a:cs typeface="Calibri"/>
-              </a:defRPr>
-            </a:pPr>
-          </a:p>
-          <a:p xmlns:a="http://schemas.openxmlformats.org/drawingml/2006/main">
-            <a:pPr>
-              <a:buNone/>
-              <a:defRPr sz="1600" b="1">
-                <a:solidFill>
-                  <a:srgbClr val="1E40AF"/>
-                </a:solidFill>
-                <a:latin typeface="Calibri"/>
-                <a:ea typeface="Calibri"/>
-                <a:cs typeface="Calibri"/>
-              </a:defRPr>
-            </a:pPr>
-            <a:r>
-              <a:rPr sz="825" b="1">
-                <a:solidFill>
-                  <a:srgbClr val="1E40AF"/>
+              <a:spcBef>
+                <a:spcPts val="200"/>
+              </a:spcBef>
+              <a:buNone/>
+              <a:defRPr sz="1050">
+                <a:solidFill>
+                  <a:srgbClr val="0F172A"/>
+                </a:solidFill>
+                <a:latin typeface="Calibri"/>
+                <a:ea typeface="Calibri"/>
+                <a:cs typeface="Calibri"/>
+              </a:defRPr>
+            </a:pPr>
+            <a:r>
+              <a:rPr sz="825">
+                <a:solidFill>
+                  <a:srgbClr val="0F172A"/>
+                </a:solidFill>
+                <a:latin typeface="Calibri"/>
+                <a:ea typeface="Calibri"/>
+                <a:cs typeface="Calibri"/>
+              </a:rPr>
+              <a:t/>
+            </a:r>
+          </a:p>
+          <a:p xmlns:a="http://schemas.openxmlformats.org/drawingml/2006/main">
+            <a:pPr>
+              <a:spcBef>
+                <a:spcPts val="200"/>
+              </a:spcBef>
+              <a:buNone/>
+              <a:defRPr sz="1050">
+                <a:solidFill>
+                  <a:srgbClr val="0F172A"/>
+                </a:solidFill>
+                <a:latin typeface="Calibri"/>
+                <a:ea typeface="Calibri"/>
+                <a:cs typeface="Calibri"/>
+              </a:defRPr>
+            </a:pPr>
+            <a:r>
+              <a:rPr sz="825">
+                <a:solidFill>
+                  <a:srgbClr val="0F172A"/>
                 </a:solidFill>
                 <a:latin typeface="Calibri"/>
                 <a:ea typeface="Calibri"/>
@@ -13210,20 +13131,23 @@
           </a:p>
           <a:p xmlns:a="http://schemas.openxmlformats.org/drawingml/2006/main">
             <a:pPr>
-              <a:buNone/>
-              <a:defRPr sz="1600" b="1">
-                <a:solidFill>
-                  <a:srgbClr val="1E40AF"/>
-                </a:solidFill>
-                <a:latin typeface="Calibri"/>
-                <a:ea typeface="Calibri"/>
-                <a:cs typeface="Calibri"/>
-              </a:defRPr>
-            </a:pPr>
-            <a:r>
-              <a:rPr sz="825" b="1">
-                <a:solidFill>
-                  <a:srgbClr val="1E40AF"/>
+              <a:spcBef>
+                <a:spcPts val="200"/>
+              </a:spcBef>
+              <a:buNone/>
+              <a:defRPr sz="1050">
+                <a:solidFill>
+                  <a:srgbClr val="0F172A"/>
+                </a:solidFill>
+                <a:latin typeface="Calibri"/>
+                <a:ea typeface="Calibri"/>
+                <a:cs typeface="Calibri"/>
+              </a:defRPr>
+            </a:pPr>
+            <a:r>
+              <a:rPr sz="825">
+                <a:solidFill>
+                  <a:srgbClr val="0F172A"/>
                 </a:solidFill>
                 <a:latin typeface="Calibri"/>
                 <a:ea typeface="Calibri"/>
@@ -13234,20 +13158,23 @@
           </a:p>
           <a:p xmlns:a="http://schemas.openxmlformats.org/drawingml/2006/main">
             <a:pPr>
-              <a:buNone/>
-              <a:defRPr sz="1600" b="1">
-                <a:solidFill>
-                  <a:srgbClr val="1E40AF"/>
-                </a:solidFill>
-                <a:latin typeface="Calibri"/>
-                <a:ea typeface="Calibri"/>
-                <a:cs typeface="Calibri"/>
-              </a:defRPr>
-            </a:pPr>
-            <a:r>
-              <a:rPr sz="825" b="1">
-                <a:solidFill>
-                  <a:srgbClr val="1E40AF"/>
+              <a:spcBef>
+                <a:spcPts val="200"/>
+              </a:spcBef>
+              <a:buNone/>
+              <a:defRPr sz="1050">
+                <a:solidFill>
+                  <a:srgbClr val="0F172A"/>
+                </a:solidFill>
+                <a:latin typeface="Calibri"/>
+                <a:ea typeface="Calibri"/>
+                <a:cs typeface="Calibri"/>
+              </a:defRPr>
+            </a:pPr>
+            <a:r>
+              <a:rPr sz="825">
+                <a:solidFill>
+                  <a:srgbClr val="0F172A"/>
                 </a:solidFill>
                 <a:latin typeface="Calibri"/>
                 <a:ea typeface="Calibri"/>
@@ -13258,33 +13185,50 @@
           </a:p>
           <a:p xmlns:a="http://schemas.openxmlformats.org/drawingml/2006/main">
             <a:pPr>
-              <a:buNone/>
-              <a:defRPr sz="1600" b="1">
-                <a:solidFill>
-                  <a:srgbClr val="1E40AF"/>
-                </a:solidFill>
-                <a:latin typeface="Calibri"/>
-                <a:ea typeface="Calibri"/>
-                <a:cs typeface="Calibri"/>
-              </a:defRPr>
-            </a:pPr>
-          </a:p>
-          <a:p xmlns:a="http://schemas.openxmlformats.org/drawingml/2006/main">
-            <a:pPr>
-              <a:buNone/>
-              <a:defRPr sz="1600" b="1">
-                <a:solidFill>
-                  <a:srgbClr val="1E40AF"/>
-                </a:solidFill>
-                <a:latin typeface="Calibri"/>
-                <a:ea typeface="Calibri"/>
-                <a:cs typeface="Calibri"/>
-              </a:defRPr>
-            </a:pPr>
-            <a:r>
-              <a:rPr sz="825" b="1">
-                <a:solidFill>
-                  <a:srgbClr val="1E40AF"/>
+              <a:spcBef>
+                <a:spcPts val="200"/>
+              </a:spcBef>
+              <a:buNone/>
+              <a:defRPr sz="1050">
+                <a:solidFill>
+                  <a:srgbClr val="0F172A"/>
+                </a:solidFill>
+                <a:latin typeface="Calibri"/>
+                <a:ea typeface="Calibri"/>
+                <a:cs typeface="Calibri"/>
+              </a:defRPr>
+            </a:pPr>
+            <a:r>
+              <a:rPr sz="825">
+                <a:solidFill>
+                  <a:srgbClr val="0F172A"/>
+                </a:solidFill>
+                <a:latin typeface="Calibri"/>
+                <a:ea typeface="Calibri"/>
+                <a:cs typeface="Calibri"/>
+              </a:rPr>
+              <a:t/>
+            </a:r>
+          </a:p>
+          <a:p xmlns:a="http://schemas.openxmlformats.org/drawingml/2006/main">
+            <a:pPr>
+              <a:spcBef>
+                <a:spcPts val="200"/>
+              </a:spcBef>
+              <a:buNone/>
+              <a:defRPr sz="1050">
+                <a:solidFill>
+                  <a:srgbClr val="0F172A"/>
+                </a:solidFill>
+                <a:latin typeface="Calibri"/>
+                <a:ea typeface="Calibri"/>
+                <a:cs typeface="Calibri"/>
+              </a:defRPr>
+            </a:pPr>
+            <a:r>
+              <a:rPr sz="825">
+                <a:solidFill>
+                  <a:srgbClr val="0F172A"/>
                 </a:solidFill>
                 <a:latin typeface="Calibri"/>
                 <a:ea typeface="Calibri"/>
@@ -13295,20 +13239,23 @@
           </a:p>
           <a:p xmlns:a="http://schemas.openxmlformats.org/drawingml/2006/main">
             <a:pPr>
-              <a:buNone/>
-              <a:defRPr sz="1600" b="1">
-                <a:solidFill>
-                  <a:srgbClr val="1E40AF"/>
-                </a:solidFill>
-                <a:latin typeface="Calibri"/>
-                <a:ea typeface="Calibri"/>
-                <a:cs typeface="Calibri"/>
-              </a:defRPr>
-            </a:pPr>
-            <a:r>
-              <a:rPr sz="825" b="1">
-                <a:solidFill>
-                  <a:srgbClr val="1E40AF"/>
+              <a:spcBef>
+                <a:spcPts val="200"/>
+              </a:spcBef>
+              <a:buNone/>
+              <a:defRPr sz="1050">
+                <a:solidFill>
+                  <a:srgbClr val="0F172A"/>
+                </a:solidFill>
+                <a:latin typeface="Calibri"/>
+                <a:ea typeface="Calibri"/>
+                <a:cs typeface="Calibri"/>
+              </a:defRPr>
+            </a:pPr>
+            <a:r>
+              <a:rPr sz="825">
+                <a:solidFill>
+                  <a:srgbClr val="0F172A"/>
                 </a:solidFill>
                 <a:latin typeface="Calibri"/>
                 <a:ea typeface="Calibri"/>
@@ -13319,20 +13266,23 @@
           </a:p>
           <a:p xmlns:a="http://schemas.openxmlformats.org/drawingml/2006/main">
             <a:pPr>
-              <a:buNone/>
-              <a:defRPr sz="1600" b="1">
-                <a:solidFill>
-                  <a:srgbClr val="1E40AF"/>
-                </a:solidFill>
-                <a:latin typeface="Calibri"/>
-                <a:ea typeface="Calibri"/>
-                <a:cs typeface="Calibri"/>
-              </a:defRPr>
-            </a:pPr>
-            <a:r>
-              <a:rPr sz="825" b="1">
-                <a:solidFill>
-                  <a:srgbClr val="1E40AF"/>
+              <a:spcBef>
+                <a:spcPts val="200"/>
+              </a:spcBef>
+              <a:buNone/>
+              <a:defRPr sz="1050">
+                <a:solidFill>
+                  <a:srgbClr val="0F172A"/>
+                </a:solidFill>
+                <a:latin typeface="Calibri"/>
+                <a:ea typeface="Calibri"/>
+                <a:cs typeface="Calibri"/>
+              </a:defRPr>
+            </a:pPr>
+            <a:r>
+              <a:rPr sz="825">
+                <a:solidFill>
+                  <a:srgbClr val="0F172A"/>
                 </a:solidFill>
                 <a:latin typeface="Calibri"/>
                 <a:ea typeface="Calibri"/>
@@ -13343,20 +13293,23 @@
           </a:p>
           <a:p xmlns:a="http://schemas.openxmlformats.org/drawingml/2006/main">
             <a:pPr>
-              <a:buNone/>
-              <a:defRPr sz="1600" b="1">
-                <a:solidFill>
-                  <a:srgbClr val="1E40AF"/>
-                </a:solidFill>
-                <a:latin typeface="Calibri"/>
-                <a:ea typeface="Calibri"/>
-                <a:cs typeface="Calibri"/>
-              </a:defRPr>
-            </a:pPr>
-            <a:r>
-              <a:rPr sz="825" b="1">
-                <a:solidFill>
-                  <a:srgbClr val="1E40AF"/>
+              <a:spcBef>
+                <a:spcPts val="200"/>
+              </a:spcBef>
+              <a:buNone/>
+              <a:defRPr sz="1050">
+                <a:solidFill>
+                  <a:srgbClr val="0F172A"/>
+                </a:solidFill>
+                <a:latin typeface="Calibri"/>
+                <a:ea typeface="Calibri"/>
+                <a:cs typeface="Calibri"/>
+              </a:defRPr>
+            </a:pPr>
+            <a:r>
+              <a:rPr sz="825">
+                <a:solidFill>
+                  <a:srgbClr val="0F172A"/>
                 </a:solidFill>
                 <a:latin typeface="Calibri"/>
                 <a:ea typeface="Calibri"/>
@@ -13367,20 +13320,23 @@
           </a:p>
           <a:p xmlns:a="http://schemas.openxmlformats.org/drawingml/2006/main">
             <a:pPr>
-              <a:buNone/>
-              <a:defRPr sz="1600" b="1">
-                <a:solidFill>
-                  <a:srgbClr val="1E40AF"/>
-                </a:solidFill>
-                <a:latin typeface="Calibri"/>
-                <a:ea typeface="Calibri"/>
-                <a:cs typeface="Calibri"/>
-              </a:defRPr>
-            </a:pPr>
-            <a:r>
-              <a:rPr sz="825" b="1">
-                <a:solidFill>
-                  <a:srgbClr val="1E40AF"/>
+              <a:spcBef>
+                <a:spcPts val="200"/>
+              </a:spcBef>
+              <a:buNone/>
+              <a:defRPr sz="1050">
+                <a:solidFill>
+                  <a:srgbClr val="0F172A"/>
+                </a:solidFill>
+                <a:latin typeface="Calibri"/>
+                <a:ea typeface="Calibri"/>
+                <a:cs typeface="Calibri"/>
+              </a:defRPr>
+            </a:pPr>
+            <a:r>
+              <a:rPr sz="825">
+                <a:solidFill>
+                  <a:srgbClr val="0F172A"/>
                 </a:solidFill>
                 <a:latin typeface="Calibri"/>
                 <a:ea typeface="Calibri"/>
@@ -13400,7 +13356,7 @@
           <p:nvPr/>
         </p:nvPicPr>
         <p:blipFill>
-          <a:blip xmlns:r="http://schemas.openxmlformats.org/officeDocument/2006/relationships" xmlns:a="http://schemas.openxmlformats.org/drawingml/2006/main" r:embed="Rb6b814003b3849e3"/>
+          <a:blip xmlns:r="http://schemas.openxmlformats.org/officeDocument/2006/relationships" xmlns:a="http://schemas.openxmlformats.org/drawingml/2006/main" r:embed="R3294023274504ede"/>
           <a:stretch xmlns:a="http://schemas.openxmlformats.org/drawingml/2006/main">
             <a:fillRect l="0" t="0" r="0" b="0"/>
           </a:stretch>
@@ -13420,7 +13376,7 @@
           <p:cNvPr id="9" name="Rounded Rectangle 8">
             <a:extLst xmlns:a="http://schemas.openxmlformats.org/drawingml/2006/main">
               <a:ext uri="{FF2B5EF4-FFF2-40B4-BE49-F238E27FC236}">
-                <a16:creationId xmlns:a16="http://schemas.microsoft.com/office/drawing/2014/main" id="{EE50DCE1-1B46-4DD7-96E2-DA871FFF0F37}"/>
+                <a16:creationId xmlns:a16="http://schemas.microsoft.com/office/drawing/2014/main" id="{919AC1F1-15AD-437A-816A-8FF2C21A7D5E}"/>
               </a:ext>
             </a:extLst>
           </p:cNvPr>
@@ -13475,7 +13431,7 @@
           <p:cNvPr id="10" name="TextBox 9">
             <a:extLst xmlns:a="http://schemas.openxmlformats.org/drawingml/2006/main">
               <a:ext uri="{FF2B5EF4-FFF2-40B4-BE49-F238E27FC236}">
-                <a16:creationId xmlns:a16="http://schemas.microsoft.com/office/drawing/2014/main" id="{A4A772D4-9F9A-42BB-9C51-741B083D543B}"/>
+                <a16:creationId xmlns:a16="http://schemas.microsoft.com/office/drawing/2014/main" id="{3A1128B3-9AE8-476B-99FA-544C3534B638}"/>
               </a:ext>
             </a:extLst>
           </p:cNvPr>
@@ -13558,7 +13514,7 @@
     </p:spTree>
     <p:extLst>
       <p:ext uri="{BB962C8B-B14F-4D97-AF65-F5344CB8AC3E}">
-        <p14:creationId xmlns:p14="http://schemas.microsoft.com/office/powerpoint/2010/main" val="252054135"/>
+        <p14:creationId xmlns:p14="http://schemas.microsoft.com/office/powerpoint/2010/main" val="945164180"/>
       </p:ext>
     </p:extLst>
   </p:cSld>

--- a/reports/evidence/fixture_populated_slides.pptx
+++ b/reports/evidence/fixture_populated_slides.pptx
@@ -2,24 +2,24 @@
 <file path=ppt/presentation.xml><?xml version="1.0" encoding="utf-8"?>
 <p:presentation xmlns:p="http://schemas.openxmlformats.org/presentationml/2006/main">
   <p:sldMasterIdLst>
-    <p:sldMasterId xmlns:r="http://schemas.openxmlformats.org/officeDocument/2006/relationships" id="2147483648" r:id="R274f9f041efd4180"/>
+    <p:sldMasterId xmlns:r="http://schemas.openxmlformats.org/officeDocument/2006/relationships" id="2147483648" r:id="R06eba26b0031408b"/>
   </p:sldMasterIdLst>
   <p:notesMasterIdLst>
-    <p:notesMasterId xmlns:r="http://schemas.openxmlformats.org/officeDocument/2006/relationships" r:id="R1cf397267a7c4c12"/>
+    <p:notesMasterId xmlns:r="http://schemas.openxmlformats.org/officeDocument/2006/relationships" r:id="Rd0676eb2cbdd4624"/>
   </p:notesMasterIdLst>
   <p:sldIdLst>
-    <p:sldId xmlns:r="http://schemas.openxmlformats.org/officeDocument/2006/relationships" id="256" r:id="R7b0985bc4c854692"/>
-    <p:sldId xmlns:r="http://schemas.openxmlformats.org/officeDocument/2006/relationships" id="257" r:id="R9d5d74b87498472a"/>
-    <p:sldId xmlns:r="http://schemas.openxmlformats.org/officeDocument/2006/relationships" id="258" r:id="R96e90c8f21fa464a"/>
-    <p:sldId xmlns:r="http://schemas.openxmlformats.org/officeDocument/2006/relationships" id="259" r:id="R2b76210bfe8941b6"/>
-    <p:sldId xmlns:r="http://schemas.openxmlformats.org/officeDocument/2006/relationships" id="260" r:id="Rbfc407cc7299481d"/>
-    <p:sldId xmlns:r="http://schemas.openxmlformats.org/officeDocument/2006/relationships" id="261" r:id="R40cbb9dd61f044d6"/>
-    <p:sldId xmlns:r="http://schemas.openxmlformats.org/officeDocument/2006/relationships" id="262" r:id="Rd0a7b7c4e67f4ae0"/>
-    <p:sldId xmlns:r="http://schemas.openxmlformats.org/officeDocument/2006/relationships" id="263" r:id="R1ab9cb9d156a499c"/>
-    <p:sldId xmlns:r="http://schemas.openxmlformats.org/officeDocument/2006/relationships" id="264" r:id="R034e6de3c9c2426f"/>
-    <p:sldId xmlns:r="http://schemas.openxmlformats.org/officeDocument/2006/relationships" id="265" r:id="R554f4ac4c32e48bd"/>
-    <p:sldId xmlns:r="http://schemas.openxmlformats.org/officeDocument/2006/relationships" id="266" r:id="Rc3bbbcccbdac43fc"/>
-    <p:sldId xmlns:r="http://schemas.openxmlformats.org/officeDocument/2006/relationships" id="267" r:id="Ra67ca09ad3954d51"/>
+    <p:sldId xmlns:r="http://schemas.openxmlformats.org/officeDocument/2006/relationships" id="256" r:id="R704dc800342a4958"/>
+    <p:sldId xmlns:r="http://schemas.openxmlformats.org/officeDocument/2006/relationships" id="257" r:id="Rec9c0df903a74190"/>
+    <p:sldId xmlns:r="http://schemas.openxmlformats.org/officeDocument/2006/relationships" id="258" r:id="R022b2cef642e496b"/>
+    <p:sldId xmlns:r="http://schemas.openxmlformats.org/officeDocument/2006/relationships" id="259" r:id="R2d6bcd37c10d40ee"/>
+    <p:sldId xmlns:r="http://schemas.openxmlformats.org/officeDocument/2006/relationships" id="260" r:id="R003d1749a3b94a10"/>
+    <p:sldId xmlns:r="http://schemas.openxmlformats.org/officeDocument/2006/relationships" id="261" r:id="Rb2d35a6f21314d86"/>
+    <p:sldId xmlns:r="http://schemas.openxmlformats.org/officeDocument/2006/relationships" id="262" r:id="R19647c8cc8d343bd"/>
+    <p:sldId xmlns:r="http://schemas.openxmlformats.org/officeDocument/2006/relationships" id="263" r:id="Re13eaf99b8054685"/>
+    <p:sldId xmlns:r="http://schemas.openxmlformats.org/officeDocument/2006/relationships" id="264" r:id="R73f99c8719e849f2"/>
+    <p:sldId xmlns:r="http://schemas.openxmlformats.org/officeDocument/2006/relationships" id="265" r:id="R87ca236a34b74c7e"/>
+    <p:sldId xmlns:r="http://schemas.openxmlformats.org/officeDocument/2006/relationships" id="266" r:id="Rdd16690946ed4743"/>
+    <p:sldId xmlns:r="http://schemas.openxmlformats.org/officeDocument/2006/relationships" id="267" r:id="Ra1bfd998b5994d42"/>
   </p:sldIdLst>
   <p:sldSz cx="12191695" cy="6858000"/>
   <p:notesSz cx="6858000" cy="9144000"/>
@@ -1329,11 +1329,6 @@
               <a:t>Bằng chứng dự án: reports/experiment_protocol_v1.md (D2e, D2f, D2h, D2i; SHA-256: d3bf3d31...); tests/test_experiment_evaluation.py (94 tests pass).</a:t>
             </a:r>
           </a:p>
-          <a:p xmlns:a="http://schemas.openxmlformats.org/drawingml/2006/main">
-            <a:r>
-              <a:t>[DIAGNOSTIC TEST FIXTURE STATS] Khoảng tin cậy 95% Bootstrap (B=1000): no_rag=[0.3500, 0.6500], rag_k1=[0.3600, 0.6600], rag_k3=[0.3800, 0.6800], rag_k5=[0.4100, 0.7100], rag_k10=[0.4300, 0.7300]. Đo lường phân rã lỗi D2i độc lập: Wrong Class Rate=0.3333, Overlaps (Miss &amp; Wrong=0, Miss &amp; Prov=0, Miss &amp; Parse=0, Miss &amp; Inval=0).</a:t>
-            </a:r>
-          </a:p>
         </p:txBody>
       </p:sp>
       <p:sp>
@@ -1426,7 +1421,7 @@
           </a:p>
           <a:p xmlns:a="http://schemas.openxmlformats.org/drawingml/2006/main">
             <a:r>
-              <a:t>4. Phân biệt rõ khoản giữ chỗ thận trọng tạm thời ($0.05264010 USD prior_pilot_provisional_hold_usd), dự báo chuẩn tắc tập TEST (hạch toán điều kiện chuẩn $8.50 USD (dự báo 6,400 requests) [DIAGNOSTIC FIXTURE PROJECTION]), và trần ngân sách đóng băng cứng $19.99 USD (hard_budget_limit_usd).</a:t>
+              <a:t>4. Phân biệt rõ khoản giữ chỗ thận trọng tạm thời ($0.05264010 USD prior_pilot_provisional_hold_usd), dự báo chuẩn tắc tập TEST ($8.20 – $8.99 USD cho 6,400 requests), và trần ngân sách đóng băng cứng $19.99 USD (hard_budget_limit_usd).</a:t>
             </a:r>
           </a:p>
           <a:p xmlns:a="http://schemas.openxmlformats.org/drawingml/2006/main">
@@ -1478,7 +1473,7 @@
           <p:cNvPr id="2" name="Title 1">
             <a:extLst xmlns:a="http://schemas.openxmlformats.org/drawingml/2006/main">
               <a:ext uri="{FF2B5EF4-FFF2-40B4-BE49-F238E27FC236}">
-                <a16:creationId xmlns:a16="http://schemas.microsoft.com/office/drawing/2014/main" id="{7F9F4A94-91CB-424A-8A1D-FBAD73BC8BF0}"/>
+                <a16:creationId xmlns:a16="http://schemas.microsoft.com/office/drawing/2014/main" id="{2C8F751D-BBB2-407F-B1FD-CBAA03D038A3}"/>
               </a:ext>
             </a:extLst>
           </p:cNvPr>
@@ -1511,7 +1506,7 @@
           <p:cNvPr id="3" name="Subtitle 2">
             <a:extLst xmlns:a="http://schemas.openxmlformats.org/drawingml/2006/main">
               <a:ext uri="{FF2B5EF4-FFF2-40B4-BE49-F238E27FC236}">
-                <a16:creationId xmlns:a16="http://schemas.microsoft.com/office/drawing/2014/main" id="{B6BC5920-7CCD-429F-8057-4C38DF69F9D4}"/>
+                <a16:creationId xmlns:a16="http://schemas.microsoft.com/office/drawing/2014/main" id="{A41EDC47-C5D2-4863-BFC5-EF89B610870E}"/>
               </a:ext>
             </a:extLst>
           </p:cNvPr>
@@ -1635,7 +1630,7 @@
           <p:cNvPr id="4" name="Date Placeholder 3">
             <a:extLst xmlns:a="http://schemas.openxmlformats.org/drawingml/2006/main">
               <a:ext uri="{FF2B5EF4-FFF2-40B4-BE49-F238E27FC236}">
-                <a16:creationId xmlns:a16="http://schemas.microsoft.com/office/drawing/2014/main" id="{089D4347-582A-4043-818F-CB3862A36D25}"/>
+                <a16:creationId xmlns:a16="http://schemas.microsoft.com/office/drawing/2014/main" id="{A6E046C5-078F-4B7F-9529-ECB3469A2B75}"/>
               </a:ext>
             </a:extLst>
           </p:cNvPr>
@@ -1663,7 +1658,7 @@
           <p:cNvPr id="5" name="Footer Placeholder 4">
             <a:extLst xmlns:a="http://schemas.openxmlformats.org/drawingml/2006/main">
               <a:ext uri="{FF2B5EF4-FFF2-40B4-BE49-F238E27FC236}">
-                <a16:creationId xmlns:a16="http://schemas.microsoft.com/office/drawing/2014/main" id="{BE8931ED-64EB-4B4A-A69F-879729F46D01}"/>
+                <a16:creationId xmlns:a16="http://schemas.microsoft.com/office/drawing/2014/main" id="{655D993E-1EA7-4FC2-B8B0-6CF8DF19FB1C}"/>
               </a:ext>
             </a:extLst>
           </p:cNvPr>
@@ -1688,7 +1683,7 @@
           <p:cNvPr id="6" name="Slide Number Placeholder 5">
             <a:extLst xmlns:a="http://schemas.openxmlformats.org/drawingml/2006/main">
               <a:ext uri="{FF2B5EF4-FFF2-40B4-BE49-F238E27FC236}">
-                <a16:creationId xmlns:a16="http://schemas.microsoft.com/office/drawing/2014/main" id="{522893BE-1C03-4208-9B47-9E27FAAECB9D}"/>
+                <a16:creationId xmlns:a16="http://schemas.microsoft.com/office/drawing/2014/main" id="{11215D80-0CF2-49A8-96B2-579BD8C5870B}"/>
               </a:ext>
             </a:extLst>
           </p:cNvPr>
@@ -1733,7 +1728,7 @@
           <p:cNvPr id="2" name="Title 1">
             <a:extLst xmlns:a="http://schemas.openxmlformats.org/drawingml/2006/main">
               <a:ext uri="{FF2B5EF4-FFF2-40B4-BE49-F238E27FC236}">
-                <a16:creationId xmlns:a16="http://schemas.microsoft.com/office/drawing/2014/main" id="{76CEB976-BC5D-4254-BEF5-A29787C1CB55}"/>
+                <a16:creationId xmlns:a16="http://schemas.microsoft.com/office/drawing/2014/main" id="{181DC361-3EB9-4DFC-B7A3-A43468FD3349}"/>
               </a:ext>
             </a:extLst>
           </p:cNvPr>
@@ -1761,7 +1756,7 @@
           <p:cNvPr id="3" name="Vertical Text Placeholder 2">
             <a:extLst xmlns:a="http://schemas.openxmlformats.org/drawingml/2006/main">
               <a:ext uri="{FF2B5EF4-FFF2-40B4-BE49-F238E27FC236}">
-                <a16:creationId xmlns:a16="http://schemas.microsoft.com/office/drawing/2014/main" id="{FF25C106-3A88-4EAA-97E0-3CC6E26F43A6}"/>
+                <a16:creationId xmlns:a16="http://schemas.microsoft.com/office/drawing/2014/main" id="{F3CD5E12-99AA-4500-8A0A-53C7CB1972B6}"/>
               </a:ext>
             </a:extLst>
           </p:cNvPr>
@@ -1824,7 +1819,7 @@
           <p:cNvPr id="4" name="Date Placeholder 3">
             <a:extLst xmlns:a="http://schemas.openxmlformats.org/drawingml/2006/main">
               <a:ext uri="{FF2B5EF4-FFF2-40B4-BE49-F238E27FC236}">
-                <a16:creationId xmlns:a16="http://schemas.microsoft.com/office/drawing/2014/main" id="{8909FA72-8677-4BCF-8414-F28359CD16E2}"/>
+                <a16:creationId xmlns:a16="http://schemas.microsoft.com/office/drawing/2014/main" id="{C1DD2F1F-870A-470D-8834-8C5AACE752DB}"/>
               </a:ext>
             </a:extLst>
           </p:cNvPr>
@@ -1852,7 +1847,7 @@
           <p:cNvPr id="5" name="Footer Placeholder 4">
             <a:extLst xmlns:a="http://schemas.openxmlformats.org/drawingml/2006/main">
               <a:ext uri="{FF2B5EF4-FFF2-40B4-BE49-F238E27FC236}">
-                <a16:creationId xmlns:a16="http://schemas.microsoft.com/office/drawing/2014/main" id="{06E6DAD7-B965-4170-B3C1-AD1D9035BA05}"/>
+                <a16:creationId xmlns:a16="http://schemas.microsoft.com/office/drawing/2014/main" id="{917A3C8E-8497-4A79-A94C-9B5ECFCDDBBE}"/>
               </a:ext>
             </a:extLst>
           </p:cNvPr>
@@ -1877,7 +1872,7 @@
           <p:cNvPr id="6" name="Slide Number Placeholder 5">
             <a:extLst xmlns:a="http://schemas.openxmlformats.org/drawingml/2006/main">
               <a:ext uri="{FF2B5EF4-FFF2-40B4-BE49-F238E27FC236}">
-                <a16:creationId xmlns:a16="http://schemas.microsoft.com/office/drawing/2014/main" id="{527A6FDC-F304-431E-A339-9637FB4491A1}"/>
+                <a16:creationId xmlns:a16="http://schemas.microsoft.com/office/drawing/2014/main" id="{EB0A56A6-F4BF-4CF9-953A-746C44187DBC}"/>
               </a:ext>
             </a:extLst>
           </p:cNvPr>
@@ -1922,7 +1917,7 @@
           <p:cNvPr id="2" name="Vertical Title 1">
             <a:extLst xmlns:a="http://schemas.openxmlformats.org/drawingml/2006/main">
               <a:ext uri="{FF2B5EF4-FFF2-40B4-BE49-F238E27FC236}">
-                <a16:creationId xmlns:a16="http://schemas.microsoft.com/office/drawing/2014/main" id="{26EAEEDF-B950-48E6-8D6B-5BDE8BBA51E6}"/>
+                <a16:creationId xmlns:a16="http://schemas.microsoft.com/office/drawing/2014/main" id="{28224DAC-62F3-4762-8378-15C7EDCBE706}"/>
               </a:ext>
             </a:extLst>
           </p:cNvPr>
@@ -1955,7 +1950,7 @@
           <p:cNvPr id="3" name="Vertical Text Placeholder 2">
             <a:extLst xmlns:a="http://schemas.openxmlformats.org/drawingml/2006/main">
               <a:ext uri="{FF2B5EF4-FFF2-40B4-BE49-F238E27FC236}">
-                <a16:creationId xmlns:a16="http://schemas.microsoft.com/office/drawing/2014/main" id="{0C753CE7-85E7-4073-BA4B-7C635AC1D59B}"/>
+                <a16:creationId xmlns:a16="http://schemas.microsoft.com/office/drawing/2014/main" id="{A5ADFDD9-D561-4F75-AB72-3562AE206331}"/>
               </a:ext>
             </a:extLst>
           </p:cNvPr>
@@ -2023,7 +2018,7 @@
           <p:cNvPr id="4" name="Date Placeholder 3">
             <a:extLst xmlns:a="http://schemas.openxmlformats.org/drawingml/2006/main">
               <a:ext uri="{FF2B5EF4-FFF2-40B4-BE49-F238E27FC236}">
-                <a16:creationId xmlns:a16="http://schemas.microsoft.com/office/drawing/2014/main" id="{96AD8E39-26B6-42C2-90B9-03A4D0DE1F81}"/>
+                <a16:creationId xmlns:a16="http://schemas.microsoft.com/office/drawing/2014/main" id="{371BFE7E-AB08-45A1-B2F2-8DD35A366ADA}"/>
               </a:ext>
             </a:extLst>
           </p:cNvPr>
@@ -2051,7 +2046,7 @@
           <p:cNvPr id="5" name="Footer Placeholder 4">
             <a:extLst xmlns:a="http://schemas.openxmlformats.org/drawingml/2006/main">
               <a:ext uri="{FF2B5EF4-FFF2-40B4-BE49-F238E27FC236}">
-                <a16:creationId xmlns:a16="http://schemas.microsoft.com/office/drawing/2014/main" id="{272AF1D7-0D75-4A18-B82A-31BA285ADBA9}"/>
+                <a16:creationId xmlns:a16="http://schemas.microsoft.com/office/drawing/2014/main" id="{48663519-FEFF-4A74-8F73-208B88219EBF}"/>
               </a:ext>
             </a:extLst>
           </p:cNvPr>
@@ -2076,7 +2071,7 @@
           <p:cNvPr id="6" name="Slide Number Placeholder 5">
             <a:extLst xmlns:a="http://schemas.openxmlformats.org/drawingml/2006/main">
               <a:ext uri="{FF2B5EF4-FFF2-40B4-BE49-F238E27FC236}">
-                <a16:creationId xmlns:a16="http://schemas.microsoft.com/office/drawing/2014/main" id="{6D8F27B7-39AD-41DC-B0CD-B139F1D1C53F}"/>
+                <a16:creationId xmlns:a16="http://schemas.microsoft.com/office/drawing/2014/main" id="{6E1FBDF5-15F5-4B61-A723-7D5A85AAD103}"/>
               </a:ext>
             </a:extLst>
           </p:cNvPr>
@@ -2121,7 +2116,7 @@
           <p:cNvPr id="2" name="Title 1">
             <a:extLst xmlns:a="http://schemas.openxmlformats.org/drawingml/2006/main">
               <a:ext uri="{FF2B5EF4-FFF2-40B4-BE49-F238E27FC236}">
-                <a16:creationId xmlns:a16="http://schemas.microsoft.com/office/drawing/2014/main" id="{4B83E4DF-7F4E-471E-A116-3BC2B2BA855E}"/>
+                <a16:creationId xmlns:a16="http://schemas.microsoft.com/office/drawing/2014/main" id="{37E8CE7A-DA9A-4B9E-89AC-DB438A0D0428}"/>
               </a:ext>
             </a:extLst>
           </p:cNvPr>
@@ -2149,7 +2144,7 @@
           <p:cNvPr id="3" name="Content Placeholder 2">
             <a:extLst xmlns:a="http://schemas.openxmlformats.org/drawingml/2006/main">
               <a:ext uri="{FF2B5EF4-FFF2-40B4-BE49-F238E27FC236}">
-                <a16:creationId xmlns:a16="http://schemas.microsoft.com/office/drawing/2014/main" id="{14D862CC-559D-4A60-A8F4-9383E63D505E}"/>
+                <a16:creationId xmlns:a16="http://schemas.microsoft.com/office/drawing/2014/main" id="{4CF6479E-383B-482E-A62A-76D127BB8B98}"/>
               </a:ext>
             </a:extLst>
           </p:cNvPr>
@@ -2212,7 +2207,7 @@
           <p:cNvPr id="4" name="Date Placeholder 3">
             <a:extLst xmlns:a="http://schemas.openxmlformats.org/drawingml/2006/main">
               <a:ext uri="{FF2B5EF4-FFF2-40B4-BE49-F238E27FC236}">
-                <a16:creationId xmlns:a16="http://schemas.microsoft.com/office/drawing/2014/main" id="{C2538781-E835-4A51-9D70-B55B5A08474A}"/>
+                <a16:creationId xmlns:a16="http://schemas.microsoft.com/office/drawing/2014/main" id="{B45CEB87-92A5-40BF-ABE9-EEAB6220245D}"/>
               </a:ext>
             </a:extLst>
           </p:cNvPr>
@@ -2240,7 +2235,7 @@
           <p:cNvPr id="5" name="Footer Placeholder 4">
             <a:extLst xmlns:a="http://schemas.openxmlformats.org/drawingml/2006/main">
               <a:ext uri="{FF2B5EF4-FFF2-40B4-BE49-F238E27FC236}">
-                <a16:creationId xmlns:a16="http://schemas.microsoft.com/office/drawing/2014/main" id="{58908AF4-D5A3-4344-84B7-1AD3E8FA71B6}"/>
+                <a16:creationId xmlns:a16="http://schemas.microsoft.com/office/drawing/2014/main" id="{3042404D-7491-49BE-80C0-345818BB2431}"/>
               </a:ext>
             </a:extLst>
           </p:cNvPr>
@@ -2265,7 +2260,7 @@
           <p:cNvPr id="6" name="Slide Number Placeholder 5">
             <a:extLst xmlns:a="http://schemas.openxmlformats.org/drawingml/2006/main">
               <a:ext uri="{FF2B5EF4-FFF2-40B4-BE49-F238E27FC236}">
-                <a16:creationId xmlns:a16="http://schemas.microsoft.com/office/drawing/2014/main" id="{2C4AFE69-6E39-4BBE-A10E-C737A4324FB7}"/>
+                <a16:creationId xmlns:a16="http://schemas.microsoft.com/office/drawing/2014/main" id="{9B868759-DABF-49D1-A7B8-B0ED988F2125}"/>
               </a:ext>
             </a:extLst>
           </p:cNvPr>
@@ -2310,7 +2305,7 @@
           <p:cNvPr id="2" name="Title 1">
             <a:extLst xmlns:a="http://schemas.openxmlformats.org/drawingml/2006/main">
               <a:ext uri="{FF2B5EF4-FFF2-40B4-BE49-F238E27FC236}">
-                <a16:creationId xmlns:a16="http://schemas.microsoft.com/office/drawing/2014/main" id="{0E528F2E-32AB-4A9E-ACD7-6B78CF30A70E}"/>
+                <a16:creationId xmlns:a16="http://schemas.microsoft.com/office/drawing/2014/main" id="{DEE90E17-3199-4FCF-A4C2-65C193705046}"/>
               </a:ext>
             </a:extLst>
           </p:cNvPr>
@@ -2348,7 +2343,7 @@
           <p:cNvPr id="3" name="Text Placeholder 2">
             <a:extLst xmlns:a="http://schemas.openxmlformats.org/drawingml/2006/main">
               <a:ext uri="{FF2B5EF4-FFF2-40B4-BE49-F238E27FC236}">
-                <a16:creationId xmlns:a16="http://schemas.microsoft.com/office/drawing/2014/main" id="{8CB6D19D-95F1-4A92-9D60-322E9ABFDCAA}"/>
+                <a16:creationId xmlns:a16="http://schemas.microsoft.com/office/drawing/2014/main" id="{92058563-B747-402A-BCA6-2F991666BD6E}"/>
               </a:ext>
             </a:extLst>
           </p:cNvPr>
@@ -2474,7 +2469,7 @@
           <p:cNvPr id="4" name="Date Placeholder 3">
             <a:extLst xmlns:a="http://schemas.openxmlformats.org/drawingml/2006/main">
               <a:ext uri="{FF2B5EF4-FFF2-40B4-BE49-F238E27FC236}">
-                <a16:creationId xmlns:a16="http://schemas.microsoft.com/office/drawing/2014/main" id="{7D4C5350-EB35-413C-9447-7DB87799EA24}"/>
+                <a16:creationId xmlns:a16="http://schemas.microsoft.com/office/drawing/2014/main" id="{3E101C9D-47E2-4F2C-A46E-EED1D3B7BDDC}"/>
               </a:ext>
             </a:extLst>
           </p:cNvPr>
@@ -2502,7 +2497,7 @@
           <p:cNvPr id="5" name="Footer Placeholder 4">
             <a:extLst xmlns:a="http://schemas.openxmlformats.org/drawingml/2006/main">
               <a:ext uri="{FF2B5EF4-FFF2-40B4-BE49-F238E27FC236}">
-                <a16:creationId xmlns:a16="http://schemas.microsoft.com/office/drawing/2014/main" id="{885A5292-0144-445A-97E0-DCE845CF6A0C}"/>
+                <a16:creationId xmlns:a16="http://schemas.microsoft.com/office/drawing/2014/main" id="{3A53D8F0-9846-4E1C-BC15-38A6F70918EC}"/>
               </a:ext>
             </a:extLst>
           </p:cNvPr>
@@ -2527,7 +2522,7 @@
           <p:cNvPr id="6" name="Slide Number Placeholder 5">
             <a:extLst xmlns:a="http://schemas.openxmlformats.org/drawingml/2006/main">
               <a:ext uri="{FF2B5EF4-FFF2-40B4-BE49-F238E27FC236}">
-                <a16:creationId xmlns:a16="http://schemas.microsoft.com/office/drawing/2014/main" id="{7397089C-F506-4BD3-8088-729C4535D27F}"/>
+                <a16:creationId xmlns:a16="http://schemas.microsoft.com/office/drawing/2014/main" id="{F31A51A3-BDB9-4212-9B4A-002248452C9D}"/>
               </a:ext>
             </a:extLst>
           </p:cNvPr>
@@ -2572,7 +2567,7 @@
           <p:cNvPr id="2" name="Title 1">
             <a:extLst xmlns:a="http://schemas.openxmlformats.org/drawingml/2006/main">
               <a:ext uri="{FF2B5EF4-FFF2-40B4-BE49-F238E27FC236}">
-                <a16:creationId xmlns:a16="http://schemas.microsoft.com/office/drawing/2014/main" id="{363F692C-E8A1-4DB9-91CE-D5CCA936D077}"/>
+                <a16:creationId xmlns:a16="http://schemas.microsoft.com/office/drawing/2014/main" id="{1C2FF34F-7673-4DCF-AAA9-B8B0C95FBD99}"/>
               </a:ext>
             </a:extLst>
           </p:cNvPr>
@@ -2600,7 +2595,7 @@
           <p:cNvPr id="3" name="Content Placeholder 2">
             <a:extLst xmlns:a="http://schemas.openxmlformats.org/drawingml/2006/main">
               <a:ext uri="{FF2B5EF4-FFF2-40B4-BE49-F238E27FC236}">
-                <a16:creationId xmlns:a16="http://schemas.microsoft.com/office/drawing/2014/main" id="{9573F911-4E6D-473D-B6EF-D19010A2C092}"/>
+                <a16:creationId xmlns:a16="http://schemas.microsoft.com/office/drawing/2014/main" id="{7DC212B9-653F-46E8-92A4-92413D7BF0C4}"/>
               </a:ext>
             </a:extLst>
           </p:cNvPr>
@@ -2705,7 +2700,7 @@
           <p:cNvPr id="4" name="Content Placeholder 3">
             <a:extLst xmlns:a="http://schemas.openxmlformats.org/drawingml/2006/main">
               <a:ext uri="{FF2B5EF4-FFF2-40B4-BE49-F238E27FC236}">
-                <a16:creationId xmlns:a16="http://schemas.microsoft.com/office/drawing/2014/main" id="{410ED996-2753-450F-9961-A3021D16207D}"/>
+                <a16:creationId xmlns:a16="http://schemas.microsoft.com/office/drawing/2014/main" id="{3EA4E581-8B32-4056-BE10-EB7E9F4D7181}"/>
               </a:ext>
             </a:extLst>
           </p:cNvPr>
@@ -2810,7 +2805,7 @@
           <p:cNvPr id="5" name="Date Placeholder 4">
             <a:extLst xmlns:a="http://schemas.openxmlformats.org/drawingml/2006/main">
               <a:ext uri="{FF2B5EF4-FFF2-40B4-BE49-F238E27FC236}">
-                <a16:creationId xmlns:a16="http://schemas.microsoft.com/office/drawing/2014/main" id="{894DB9DA-A6F3-422E-A2FD-77E938B82EE8}"/>
+                <a16:creationId xmlns:a16="http://schemas.microsoft.com/office/drawing/2014/main" id="{89AB1CFD-E660-4B01-8C73-27085C9C76B2}"/>
               </a:ext>
             </a:extLst>
           </p:cNvPr>
@@ -2838,7 +2833,7 @@
           <p:cNvPr id="6" name="Footer Placeholder 5">
             <a:extLst xmlns:a="http://schemas.openxmlformats.org/drawingml/2006/main">
               <a:ext uri="{FF2B5EF4-FFF2-40B4-BE49-F238E27FC236}">
-                <a16:creationId xmlns:a16="http://schemas.microsoft.com/office/drawing/2014/main" id="{8C9BAFFB-0C38-4942-A0D8-EDA64D122D22}"/>
+                <a16:creationId xmlns:a16="http://schemas.microsoft.com/office/drawing/2014/main" id="{B3714E9B-EE8B-4599-AB1D-3C7052A04DEC}"/>
               </a:ext>
             </a:extLst>
           </p:cNvPr>
@@ -2863,7 +2858,7 @@
           <p:cNvPr id="7" name="Slide Number Placeholder 6">
             <a:extLst xmlns:a="http://schemas.openxmlformats.org/drawingml/2006/main">
               <a:ext uri="{FF2B5EF4-FFF2-40B4-BE49-F238E27FC236}">
-                <a16:creationId xmlns:a16="http://schemas.microsoft.com/office/drawing/2014/main" id="{F48EC67E-7B1D-432E-8E8B-5A6F0C05AE5B}"/>
+                <a16:creationId xmlns:a16="http://schemas.microsoft.com/office/drawing/2014/main" id="{255086E7-D67C-419C-ABE2-E372679E9FF3}"/>
               </a:ext>
             </a:extLst>
           </p:cNvPr>
@@ -2908,7 +2903,7 @@
           <p:cNvPr id="2" name="Title 1">
             <a:extLst xmlns:a="http://schemas.openxmlformats.org/drawingml/2006/main">
               <a:ext uri="{FF2B5EF4-FFF2-40B4-BE49-F238E27FC236}">
-                <a16:creationId xmlns:a16="http://schemas.microsoft.com/office/drawing/2014/main" id="{1FF73F2E-45F2-41E9-A9F5-1EA9C6B2559F}"/>
+                <a16:creationId xmlns:a16="http://schemas.microsoft.com/office/drawing/2014/main" id="{F0E4D588-BD69-47F6-ABD4-8BEE5B9BA74C}"/>
               </a:ext>
             </a:extLst>
           </p:cNvPr>
@@ -2941,7 +2936,7 @@
           <p:cNvPr id="3" name="Text Placeholder 2">
             <a:extLst xmlns:a="http://schemas.openxmlformats.org/drawingml/2006/main">
               <a:ext uri="{FF2B5EF4-FFF2-40B4-BE49-F238E27FC236}">
-                <a16:creationId xmlns:a16="http://schemas.microsoft.com/office/drawing/2014/main" id="{4AB6ECAE-9296-4FBF-9124-6AA61A3146A9}"/>
+                <a16:creationId xmlns:a16="http://schemas.microsoft.com/office/drawing/2014/main" id="{B297218F-67C7-4B7C-B67E-9AB1A825F7C0}"/>
               </a:ext>
             </a:extLst>
           </p:cNvPr>
@@ -3013,7 +3008,7 @@
           <p:cNvPr id="4" name="Content Placeholder 3">
             <a:extLst xmlns:a="http://schemas.openxmlformats.org/drawingml/2006/main">
               <a:ext uri="{FF2B5EF4-FFF2-40B4-BE49-F238E27FC236}">
-                <a16:creationId xmlns:a16="http://schemas.microsoft.com/office/drawing/2014/main" id="{4ED0A156-ED97-42B5-BD54-0CCBFD4E0962}"/>
+                <a16:creationId xmlns:a16="http://schemas.microsoft.com/office/drawing/2014/main" id="{3089D3EC-1884-47F1-A255-C7FD724F0422}"/>
               </a:ext>
             </a:extLst>
           </p:cNvPr>
@@ -3118,7 +3113,7 @@
           <p:cNvPr id="5" name="Text Placeholder 4">
             <a:extLst xmlns:a="http://schemas.openxmlformats.org/drawingml/2006/main">
               <a:ext uri="{FF2B5EF4-FFF2-40B4-BE49-F238E27FC236}">
-                <a16:creationId xmlns:a16="http://schemas.microsoft.com/office/drawing/2014/main" id="{053A8CA3-2D02-412F-AF9E-F968628BB4EA}"/>
+                <a16:creationId xmlns:a16="http://schemas.microsoft.com/office/drawing/2014/main" id="{89DB6414-37CA-44BA-BA37-11A5B016D66E}"/>
               </a:ext>
             </a:extLst>
           </p:cNvPr>
@@ -3190,7 +3185,7 @@
           <p:cNvPr id="6" name="Content Placeholder 5">
             <a:extLst xmlns:a="http://schemas.openxmlformats.org/drawingml/2006/main">
               <a:ext uri="{FF2B5EF4-FFF2-40B4-BE49-F238E27FC236}">
-                <a16:creationId xmlns:a16="http://schemas.microsoft.com/office/drawing/2014/main" id="{714C9A1A-9A27-4500-8AFA-3AE2129128DB}"/>
+                <a16:creationId xmlns:a16="http://schemas.microsoft.com/office/drawing/2014/main" id="{95C5D29B-016B-4106-8D53-B935089BC914}"/>
               </a:ext>
             </a:extLst>
           </p:cNvPr>
@@ -3295,7 +3290,7 @@
           <p:cNvPr id="7" name="Date Placeholder 6">
             <a:extLst xmlns:a="http://schemas.openxmlformats.org/drawingml/2006/main">
               <a:ext uri="{FF2B5EF4-FFF2-40B4-BE49-F238E27FC236}">
-                <a16:creationId xmlns:a16="http://schemas.microsoft.com/office/drawing/2014/main" id="{84858CCD-587C-4F4F-B7B1-308CD8BE72D2}"/>
+                <a16:creationId xmlns:a16="http://schemas.microsoft.com/office/drawing/2014/main" id="{CCEE5D68-BD6F-416D-8473-88B2D6D53C29}"/>
               </a:ext>
             </a:extLst>
           </p:cNvPr>
@@ -3323,7 +3318,7 @@
           <p:cNvPr id="8" name="Footer Placeholder 7">
             <a:extLst xmlns:a="http://schemas.openxmlformats.org/drawingml/2006/main">
               <a:ext uri="{FF2B5EF4-FFF2-40B4-BE49-F238E27FC236}">
-                <a16:creationId xmlns:a16="http://schemas.microsoft.com/office/drawing/2014/main" id="{E2A251AC-3AF5-4FAB-BF5A-F2AB82556AB2}"/>
+                <a16:creationId xmlns:a16="http://schemas.microsoft.com/office/drawing/2014/main" id="{79B63406-747C-44C2-8601-DFDF45A89E13}"/>
               </a:ext>
             </a:extLst>
           </p:cNvPr>
@@ -3348,7 +3343,7 @@
           <p:cNvPr id="9" name="Slide Number Placeholder 8">
             <a:extLst xmlns:a="http://schemas.openxmlformats.org/drawingml/2006/main">
               <a:ext uri="{FF2B5EF4-FFF2-40B4-BE49-F238E27FC236}">
-                <a16:creationId xmlns:a16="http://schemas.microsoft.com/office/drawing/2014/main" id="{46F65EDB-B20B-4258-A2A5-ABEBF6D14D18}"/>
+                <a16:creationId xmlns:a16="http://schemas.microsoft.com/office/drawing/2014/main" id="{9BFF0A29-A7C5-496E-A8A3-B27768949171}"/>
               </a:ext>
             </a:extLst>
           </p:cNvPr>
@@ -3393,7 +3388,7 @@
           <p:cNvPr id="2" name="Title 1">
             <a:extLst xmlns:a="http://schemas.openxmlformats.org/drawingml/2006/main">
               <a:ext uri="{FF2B5EF4-FFF2-40B4-BE49-F238E27FC236}">
-                <a16:creationId xmlns:a16="http://schemas.microsoft.com/office/drawing/2014/main" id="{2A9F2950-6973-4B5D-A233-ADFF49E0A0A0}"/>
+                <a16:creationId xmlns:a16="http://schemas.microsoft.com/office/drawing/2014/main" id="{130F96E5-F900-4428-8A54-6392AF101EF3}"/>
               </a:ext>
             </a:extLst>
           </p:cNvPr>
@@ -3421,7 +3416,7 @@
           <p:cNvPr id="3" name="Date Placeholder 2">
             <a:extLst xmlns:a="http://schemas.openxmlformats.org/drawingml/2006/main">
               <a:ext uri="{FF2B5EF4-FFF2-40B4-BE49-F238E27FC236}">
-                <a16:creationId xmlns:a16="http://schemas.microsoft.com/office/drawing/2014/main" id="{F6DE420F-0A84-4AAE-849D-BCCE31855278}"/>
+                <a16:creationId xmlns:a16="http://schemas.microsoft.com/office/drawing/2014/main" id="{387ECDB1-7477-4F83-802E-CA3CC066BAFB}"/>
               </a:ext>
             </a:extLst>
           </p:cNvPr>
@@ -3449,7 +3444,7 @@
           <p:cNvPr id="4" name="Footer Placeholder 3">
             <a:extLst xmlns:a="http://schemas.openxmlformats.org/drawingml/2006/main">
               <a:ext uri="{FF2B5EF4-FFF2-40B4-BE49-F238E27FC236}">
-                <a16:creationId xmlns:a16="http://schemas.microsoft.com/office/drawing/2014/main" id="{2D5DE67F-7D27-4BA3-B576-D9AD0A2E70BF}"/>
+                <a16:creationId xmlns:a16="http://schemas.microsoft.com/office/drawing/2014/main" id="{41703CA0-7099-4640-BB38-9409F3E2C5E7}"/>
               </a:ext>
             </a:extLst>
           </p:cNvPr>
@@ -3474,7 +3469,7 @@
           <p:cNvPr id="5" name="Slide Number Placeholder 4">
             <a:extLst xmlns:a="http://schemas.openxmlformats.org/drawingml/2006/main">
               <a:ext uri="{FF2B5EF4-FFF2-40B4-BE49-F238E27FC236}">
-                <a16:creationId xmlns:a16="http://schemas.microsoft.com/office/drawing/2014/main" id="{D4E70B06-ACE7-436B-BC7C-F626B13B5081}"/>
+                <a16:creationId xmlns:a16="http://schemas.microsoft.com/office/drawing/2014/main" id="{ECB1152E-4A10-4DEC-8608-3DA1651174D1}"/>
               </a:ext>
             </a:extLst>
           </p:cNvPr>
@@ -3519,7 +3514,7 @@
           <p:cNvPr id="2" name="Date Placeholder 1">
             <a:extLst xmlns:a="http://schemas.openxmlformats.org/drawingml/2006/main">
               <a:ext uri="{FF2B5EF4-FFF2-40B4-BE49-F238E27FC236}">
-                <a16:creationId xmlns:a16="http://schemas.microsoft.com/office/drawing/2014/main" id="{E13C16FA-BBCA-4646-8E5E-8F6B40A358D0}"/>
+                <a16:creationId xmlns:a16="http://schemas.microsoft.com/office/drawing/2014/main" id="{BBAB21BA-8A95-4FB9-A46D-12FC4F7BA617}"/>
               </a:ext>
             </a:extLst>
           </p:cNvPr>
@@ -3547,7 +3542,7 @@
           <p:cNvPr id="3" name="Footer Placeholder 2">
             <a:extLst xmlns:a="http://schemas.openxmlformats.org/drawingml/2006/main">
               <a:ext uri="{FF2B5EF4-FFF2-40B4-BE49-F238E27FC236}">
-                <a16:creationId xmlns:a16="http://schemas.microsoft.com/office/drawing/2014/main" id="{BDEAAB22-0477-4D2F-9FAE-2BAC773640E6}"/>
+                <a16:creationId xmlns:a16="http://schemas.microsoft.com/office/drawing/2014/main" id="{D7D21B4C-7BB0-4AF9-93AB-9DFA802CE4EE}"/>
               </a:ext>
             </a:extLst>
           </p:cNvPr>
@@ -3572,7 +3567,7 @@
           <p:cNvPr id="4" name="Slide Number Placeholder 3">
             <a:extLst xmlns:a="http://schemas.openxmlformats.org/drawingml/2006/main">
               <a:ext uri="{FF2B5EF4-FFF2-40B4-BE49-F238E27FC236}">
-                <a16:creationId xmlns:a16="http://schemas.microsoft.com/office/drawing/2014/main" id="{B141AD95-DE5E-4038-8103-EA4C327DFB31}"/>
+                <a16:creationId xmlns:a16="http://schemas.microsoft.com/office/drawing/2014/main" id="{6A349349-C1E9-4C1E-86AB-E56695D8A4E9}"/>
               </a:ext>
             </a:extLst>
           </p:cNvPr>
@@ -3617,7 +3612,7 @@
           <p:cNvPr id="2" name="Title 1">
             <a:extLst xmlns:a="http://schemas.openxmlformats.org/drawingml/2006/main">
               <a:ext uri="{FF2B5EF4-FFF2-40B4-BE49-F238E27FC236}">
-                <a16:creationId xmlns:a16="http://schemas.microsoft.com/office/drawing/2014/main" id="{30F7A684-8AC2-4325-B980-5E7E98ADFE04}"/>
+                <a16:creationId xmlns:a16="http://schemas.microsoft.com/office/drawing/2014/main" id="{FA6A7671-8756-4800-8E01-AADD36335372}"/>
               </a:ext>
             </a:extLst>
           </p:cNvPr>
@@ -3655,7 +3650,7 @@
           <p:cNvPr id="3" name="Content Placeholder 2">
             <a:extLst xmlns:a="http://schemas.openxmlformats.org/drawingml/2006/main">
               <a:ext uri="{FF2B5EF4-FFF2-40B4-BE49-F238E27FC236}">
-                <a16:creationId xmlns:a16="http://schemas.microsoft.com/office/drawing/2014/main" id="{9A1BCC4A-5AE3-4199-B8F7-D3B4F55ED783}"/>
+                <a16:creationId xmlns:a16="http://schemas.microsoft.com/office/drawing/2014/main" id="{CAD9FF2A-5D4D-4A7A-9894-64FB999114C3}"/>
               </a:ext>
             </a:extLst>
           </p:cNvPr>
@@ -3760,7 +3755,7 @@
           <p:cNvPr id="4" name="Text Placeholder 3">
             <a:extLst xmlns:a="http://schemas.openxmlformats.org/drawingml/2006/main">
               <a:ext uri="{FF2B5EF4-FFF2-40B4-BE49-F238E27FC236}">
-                <a16:creationId xmlns:a16="http://schemas.microsoft.com/office/drawing/2014/main" id="{8081C687-3A62-4061-A66D-BA6F120F1B9D}"/>
+                <a16:creationId xmlns:a16="http://schemas.microsoft.com/office/drawing/2014/main" id="{2FB8BB5A-9E78-49A0-AC2A-24F36843D059}"/>
               </a:ext>
             </a:extLst>
           </p:cNvPr>
@@ -3832,7 +3827,7 @@
           <p:cNvPr id="5" name="Date Placeholder 4">
             <a:extLst xmlns:a="http://schemas.openxmlformats.org/drawingml/2006/main">
               <a:ext uri="{FF2B5EF4-FFF2-40B4-BE49-F238E27FC236}">
-                <a16:creationId xmlns:a16="http://schemas.microsoft.com/office/drawing/2014/main" id="{FD16852F-FB0F-4C62-AF3A-12D8476CF53B}"/>
+                <a16:creationId xmlns:a16="http://schemas.microsoft.com/office/drawing/2014/main" id="{FCDAF836-5588-45C3-BDFF-BEE1AF7CDE27}"/>
               </a:ext>
             </a:extLst>
           </p:cNvPr>
@@ -3860,7 +3855,7 @@
           <p:cNvPr id="6" name="Footer Placeholder 5">
             <a:extLst xmlns:a="http://schemas.openxmlformats.org/drawingml/2006/main">
               <a:ext uri="{FF2B5EF4-FFF2-40B4-BE49-F238E27FC236}">
-                <a16:creationId xmlns:a16="http://schemas.microsoft.com/office/drawing/2014/main" id="{E6F301B7-25B5-4BB5-87F7-7D4082974985}"/>
+                <a16:creationId xmlns:a16="http://schemas.microsoft.com/office/drawing/2014/main" id="{BEFFCC83-4903-4412-8CCD-4A832A59B468}"/>
               </a:ext>
             </a:extLst>
           </p:cNvPr>
@@ -3885,7 +3880,7 @@
           <p:cNvPr id="7" name="Slide Number Placeholder 6">
             <a:extLst xmlns:a="http://schemas.openxmlformats.org/drawingml/2006/main">
               <a:ext uri="{FF2B5EF4-FFF2-40B4-BE49-F238E27FC236}">
-                <a16:creationId xmlns:a16="http://schemas.microsoft.com/office/drawing/2014/main" id="{A2F24F8E-8F58-4C41-BCAC-06B585776A74}"/>
+                <a16:creationId xmlns:a16="http://schemas.microsoft.com/office/drawing/2014/main" id="{661E2624-6953-4EC7-9410-957EFFF5FBC9}"/>
               </a:ext>
             </a:extLst>
           </p:cNvPr>
@@ -3930,7 +3925,7 @@
           <p:cNvPr id="2" name="Title 1">
             <a:extLst xmlns:a="http://schemas.openxmlformats.org/drawingml/2006/main">
               <a:ext uri="{FF2B5EF4-FFF2-40B4-BE49-F238E27FC236}">
-                <a16:creationId xmlns:a16="http://schemas.microsoft.com/office/drawing/2014/main" id="{24E8A200-E5CF-4386-93EC-E474BB509059}"/>
+                <a16:creationId xmlns:a16="http://schemas.microsoft.com/office/drawing/2014/main" id="{1B7D63E4-1411-473D-9E6E-F1D452D8AADD}"/>
               </a:ext>
             </a:extLst>
           </p:cNvPr>
@@ -3968,7 +3963,7 @@
           <p:cNvPr id="3" name="Picture Placeholder 2">
             <a:extLst xmlns:a="http://schemas.openxmlformats.org/drawingml/2006/main">
               <a:ext uri="{FF2B5EF4-FFF2-40B4-BE49-F238E27FC236}">
-                <a16:creationId xmlns:a16="http://schemas.microsoft.com/office/drawing/2014/main" id="{4152B39F-9205-458F-B8D1-24DF06676D38}"/>
+                <a16:creationId xmlns:a16="http://schemas.microsoft.com/office/drawing/2014/main" id="{7EAB6995-F7E7-41D3-B689-F63DCCF82660}"/>
               </a:ext>
             </a:extLst>
           </p:cNvPr>
@@ -4035,7 +4030,7 @@
           <p:cNvPr id="4" name="Text Placeholder 3">
             <a:extLst xmlns:a="http://schemas.openxmlformats.org/drawingml/2006/main">
               <a:ext uri="{FF2B5EF4-FFF2-40B4-BE49-F238E27FC236}">
-                <a16:creationId xmlns:a16="http://schemas.microsoft.com/office/drawing/2014/main" id="{45E56CC9-9381-41E0-81A4-0B4942A2ECF9}"/>
+                <a16:creationId xmlns:a16="http://schemas.microsoft.com/office/drawing/2014/main" id="{83C3CBA3-B266-48D2-A196-2BFAA0629AEA}"/>
               </a:ext>
             </a:extLst>
           </p:cNvPr>
@@ -4107,7 +4102,7 @@
           <p:cNvPr id="5" name="Date Placeholder 4">
             <a:extLst xmlns:a="http://schemas.openxmlformats.org/drawingml/2006/main">
               <a:ext uri="{FF2B5EF4-FFF2-40B4-BE49-F238E27FC236}">
-                <a16:creationId xmlns:a16="http://schemas.microsoft.com/office/drawing/2014/main" id="{3CFEE3A6-651F-4ADE-9CF3-360EBB69520E}"/>
+                <a16:creationId xmlns:a16="http://schemas.microsoft.com/office/drawing/2014/main" id="{1C54076F-05CE-474A-B0AC-8FDA89324F1C}"/>
               </a:ext>
             </a:extLst>
           </p:cNvPr>
@@ -4135,7 +4130,7 @@
           <p:cNvPr id="6" name="Footer Placeholder 5">
             <a:extLst xmlns:a="http://schemas.openxmlformats.org/drawingml/2006/main">
               <a:ext uri="{FF2B5EF4-FFF2-40B4-BE49-F238E27FC236}">
-                <a16:creationId xmlns:a16="http://schemas.microsoft.com/office/drawing/2014/main" id="{6BB63E21-47F4-4557-AA75-0C7BACD9D59C}"/>
+                <a16:creationId xmlns:a16="http://schemas.microsoft.com/office/drawing/2014/main" id="{69BC192E-F55D-4F9B-A23D-85DA50C885B7}"/>
               </a:ext>
             </a:extLst>
           </p:cNvPr>
@@ -4160,7 +4155,7 @@
           <p:cNvPr id="7" name="Slide Number Placeholder 6">
             <a:extLst xmlns:a="http://schemas.openxmlformats.org/drawingml/2006/main">
               <a:ext uri="{FF2B5EF4-FFF2-40B4-BE49-F238E27FC236}">
-                <a16:creationId xmlns:a16="http://schemas.microsoft.com/office/drawing/2014/main" id="{DFAD7CB1-A8B3-4FC5-8DB3-D10AF256027E}"/>
+                <a16:creationId xmlns:a16="http://schemas.microsoft.com/office/drawing/2014/main" id="{5BDC5208-DF2B-4516-9167-57A3A8F8B05F}"/>
               </a:ext>
             </a:extLst>
           </p:cNvPr>
@@ -4210,7 +4205,7 @@
           <p:cNvPr id="2" name="Title Placeholder 1">
             <a:extLst xmlns:a="http://schemas.openxmlformats.org/drawingml/2006/main">
               <a:ext uri="{FF2B5EF4-FFF2-40B4-BE49-F238E27FC236}">
-                <a16:creationId xmlns:a16="http://schemas.microsoft.com/office/drawing/2014/main" id="{625D702C-E895-466C-8454-3D8EDB1373FB}"/>
+                <a16:creationId xmlns:a16="http://schemas.microsoft.com/office/drawing/2014/main" id="{3EAFF71B-8044-4695-8543-9B8B138FCA6E}"/>
               </a:ext>
             </a:extLst>
           </p:cNvPr>
@@ -4248,7 +4243,7 @@
           <p:cNvPr id="3" name="Text Placeholder 2">
             <a:extLst xmlns:a="http://schemas.openxmlformats.org/drawingml/2006/main">
               <a:ext uri="{FF2B5EF4-FFF2-40B4-BE49-F238E27FC236}">
-                <a16:creationId xmlns:a16="http://schemas.microsoft.com/office/drawing/2014/main" id="{CC29110E-DAC7-4A06-A0E0-EA23312FB55A}"/>
+                <a16:creationId xmlns:a16="http://schemas.microsoft.com/office/drawing/2014/main" id="{49EC024A-D0DE-4773-868C-67B0D9C49467}"/>
               </a:ext>
             </a:extLst>
           </p:cNvPr>
@@ -4321,7 +4316,7 @@
           <p:cNvPr id="4" name="Date Placeholder 3">
             <a:extLst xmlns:a="http://schemas.openxmlformats.org/drawingml/2006/main">
               <a:ext uri="{FF2B5EF4-FFF2-40B4-BE49-F238E27FC236}">
-                <a16:creationId xmlns:a16="http://schemas.microsoft.com/office/drawing/2014/main" id="{D1045C35-1C2C-4964-9984-3A90ACE9D0B2}"/>
+                <a16:creationId xmlns:a16="http://schemas.microsoft.com/office/drawing/2014/main" id="{AB92BFDF-86C4-498B-95F8-40DE45BABF13}"/>
               </a:ext>
             </a:extLst>
           </p:cNvPr>
@@ -4368,7 +4363,7 @@
           <p:cNvPr id="5" name="Footer Placeholder 4">
             <a:extLst xmlns:a="http://schemas.openxmlformats.org/drawingml/2006/main">
               <a:ext uri="{FF2B5EF4-FFF2-40B4-BE49-F238E27FC236}">
-                <a16:creationId xmlns:a16="http://schemas.microsoft.com/office/drawing/2014/main" id="{031A3CAA-3232-47D7-A378-AEB0CFB836F4}"/>
+                <a16:creationId xmlns:a16="http://schemas.microsoft.com/office/drawing/2014/main" id="{5E162E8E-78AC-462B-B308-CF69977EE9FF}"/>
               </a:ext>
             </a:extLst>
           </p:cNvPr>
@@ -4412,7 +4407,7 @@
           <p:cNvPr id="6" name="Slide Number Placeholder 5">
             <a:extLst xmlns:a="http://schemas.openxmlformats.org/drawingml/2006/main">
               <a:ext uri="{FF2B5EF4-FFF2-40B4-BE49-F238E27FC236}">
-                <a16:creationId xmlns:a16="http://schemas.microsoft.com/office/drawing/2014/main" id="{D201BFAD-5481-417D-A24A-D39DAD915346}"/>
+                <a16:creationId xmlns:a16="http://schemas.microsoft.com/office/drawing/2014/main" id="{B0312C0A-2F25-48EB-AD60-FD6A1F2B5222}"/>
               </a:ext>
             </a:extLst>
           </p:cNvPr>
@@ -4458,17 +4453,17 @@
   </p:cSld>
   <p:clrMap bg1="lt1" tx1="dk1" bg2="lt2" tx2="dk2" accent1="accent1" accent2="accent2" accent3="accent3" accent4="accent4" accent5="accent5" accent6="accent6" hlink="hlink" folHlink="folHlink"/>
   <p:sldLayoutIdLst>
-    <p:sldLayoutId xmlns:r="http://schemas.openxmlformats.org/officeDocument/2006/relationships" id="2147483649" r:id="Rbe3f4dcd868c4f91"/>
-    <p:sldLayoutId xmlns:r="http://schemas.openxmlformats.org/officeDocument/2006/relationships" id="2147483650" r:id="Rf1705a2f0f574639"/>
-    <p:sldLayoutId xmlns:r="http://schemas.openxmlformats.org/officeDocument/2006/relationships" id="2147483651" r:id="Rfbd564c9f1d94404"/>
-    <p:sldLayoutId xmlns:r="http://schemas.openxmlformats.org/officeDocument/2006/relationships" id="2147483652" r:id="R2e0156205a89419b"/>
-    <p:sldLayoutId xmlns:r="http://schemas.openxmlformats.org/officeDocument/2006/relationships" id="2147483653" r:id="Rd87eb4e560e34a58"/>
-    <p:sldLayoutId xmlns:r="http://schemas.openxmlformats.org/officeDocument/2006/relationships" id="2147483654" r:id="R157e5c00cf6f4b4e"/>
-    <p:sldLayoutId xmlns:r="http://schemas.openxmlformats.org/officeDocument/2006/relationships" id="2147483655" r:id="R3485bf098ba94de7"/>
-    <p:sldLayoutId xmlns:r="http://schemas.openxmlformats.org/officeDocument/2006/relationships" id="2147483656" r:id="R4bd5eda1ee5146f4"/>
-    <p:sldLayoutId xmlns:r="http://schemas.openxmlformats.org/officeDocument/2006/relationships" id="2147483657" r:id="R2b061fe7302943d7"/>
-    <p:sldLayoutId xmlns:r="http://schemas.openxmlformats.org/officeDocument/2006/relationships" id="2147483658" r:id="R1ed700f4b8b64f8e"/>
-    <p:sldLayoutId xmlns:r="http://schemas.openxmlformats.org/officeDocument/2006/relationships" id="2147483659" r:id="R9cb67aea190d405c"/>
+    <p:sldLayoutId xmlns:r="http://schemas.openxmlformats.org/officeDocument/2006/relationships" id="2147483649" r:id="Rf923f5e8061f481f"/>
+    <p:sldLayoutId xmlns:r="http://schemas.openxmlformats.org/officeDocument/2006/relationships" id="2147483650" r:id="Rf74b76f26cab4e1f"/>
+    <p:sldLayoutId xmlns:r="http://schemas.openxmlformats.org/officeDocument/2006/relationships" id="2147483651" r:id="R6d217f5fc6464349"/>
+    <p:sldLayoutId xmlns:r="http://schemas.openxmlformats.org/officeDocument/2006/relationships" id="2147483652" r:id="R40435e87adb146c3"/>
+    <p:sldLayoutId xmlns:r="http://schemas.openxmlformats.org/officeDocument/2006/relationships" id="2147483653" r:id="R9fdb2bdfddfc42bb"/>
+    <p:sldLayoutId xmlns:r="http://schemas.openxmlformats.org/officeDocument/2006/relationships" id="2147483654" r:id="Rff353f2aca6f4a9e"/>
+    <p:sldLayoutId xmlns:r="http://schemas.openxmlformats.org/officeDocument/2006/relationships" id="2147483655" r:id="R978f666d2ab74650"/>
+    <p:sldLayoutId xmlns:r="http://schemas.openxmlformats.org/officeDocument/2006/relationships" id="2147483656" r:id="R005d75da74a14c48"/>
+    <p:sldLayoutId xmlns:r="http://schemas.openxmlformats.org/officeDocument/2006/relationships" id="2147483657" r:id="R0181a6c64735428a"/>
+    <p:sldLayoutId xmlns:r="http://schemas.openxmlformats.org/officeDocument/2006/relationships" id="2147483658" r:id="R2b21261380cf4854"/>
+    <p:sldLayoutId xmlns:r="http://schemas.openxmlformats.org/officeDocument/2006/relationships" id="2147483659" r:id="Rf1fd43f12a794537"/>
   </p:sldLayoutIdLst>
   <p:txStyles>
     <p:titleStyle>
@@ -5014,7 +5009,7 @@
           <p:cNvPr id="2" name="Rectangle 1">
             <a:extLst xmlns:a="http://schemas.openxmlformats.org/drawingml/2006/main">
               <a:ext uri="{FF2B5EF4-FFF2-40B4-BE49-F238E27FC236}">
-                <a16:creationId xmlns:a16="http://schemas.microsoft.com/office/drawing/2014/main" id="{1A9204AE-B44C-47CC-BEA4-26E4E3E74C08}"/>
+                <a16:creationId xmlns:a16="http://schemas.microsoft.com/office/drawing/2014/main" id="{69B87539-A772-4D1B-934F-87DD1FF62D99}"/>
               </a:ext>
             </a:extLst>
           </p:cNvPr>
@@ -5067,7 +5062,7 @@
           <p:cNvPr id="3" name="Rectangle 2">
             <a:extLst xmlns:a="http://schemas.openxmlformats.org/drawingml/2006/main">
               <a:ext uri="{FF2B5EF4-FFF2-40B4-BE49-F238E27FC236}">
-                <a16:creationId xmlns:a16="http://schemas.microsoft.com/office/drawing/2014/main" id="{D5E43A13-1DE5-4391-939E-9025D902AA84}"/>
+                <a16:creationId xmlns:a16="http://schemas.microsoft.com/office/drawing/2014/main" id="{F0BC9FED-A2BA-4A0F-8214-120393F3658A}"/>
               </a:ext>
             </a:extLst>
           </p:cNvPr>
@@ -5120,7 +5115,7 @@
           <p:cNvPr id="4" name="TextBox 3">
             <a:extLst xmlns:a="http://schemas.openxmlformats.org/drawingml/2006/main">
               <a:ext uri="{FF2B5EF4-FFF2-40B4-BE49-F238E27FC236}">
-                <a16:creationId xmlns:a16="http://schemas.microsoft.com/office/drawing/2014/main" id="{78FB1B37-9628-434E-8048-51DD12CF87AE}"/>
+                <a16:creationId xmlns:a16="http://schemas.microsoft.com/office/drawing/2014/main" id="{B30AFB6E-F377-44AC-B408-196787C9E8DD}"/>
               </a:ext>
             </a:extLst>
           </p:cNvPr>
@@ -5222,7 +5217,7 @@
     </p:spTree>
     <p:extLst>
       <p:ext uri="{BB962C8B-B14F-4D97-AF65-F5344CB8AC3E}">
-        <p14:creationId xmlns:p14="http://schemas.microsoft.com/office/powerpoint/2010/main" val="1244413541"/>
+        <p14:creationId xmlns:p14="http://schemas.microsoft.com/office/powerpoint/2010/main" val="418319784"/>
       </p:ext>
     </p:extLst>
   </p:cSld>
@@ -5246,7 +5241,7 @@
           <p:cNvPr id="2" name="Rectangle 1">
             <a:extLst xmlns:a="http://schemas.openxmlformats.org/drawingml/2006/main">
               <a:ext uri="{FF2B5EF4-FFF2-40B4-BE49-F238E27FC236}">
-                <a16:creationId xmlns:a16="http://schemas.microsoft.com/office/drawing/2014/main" id="{A5079CB4-1562-48AF-805F-F2F248CF8D3A}"/>
+                <a16:creationId xmlns:a16="http://schemas.microsoft.com/office/drawing/2014/main" id="{4D48DB15-55F2-43AE-A97A-8765B6832901}"/>
               </a:ext>
             </a:extLst>
           </p:cNvPr>
@@ -5299,7 +5294,7 @@
           <p:cNvPr id="3" name="Rectangle 2">
             <a:extLst xmlns:a="http://schemas.openxmlformats.org/drawingml/2006/main">
               <a:ext uri="{FF2B5EF4-FFF2-40B4-BE49-F238E27FC236}">
-                <a16:creationId xmlns:a16="http://schemas.microsoft.com/office/drawing/2014/main" id="{754B5928-703C-4EC3-98F4-D4698C52D594}"/>
+                <a16:creationId xmlns:a16="http://schemas.microsoft.com/office/drawing/2014/main" id="{0C9B4BE8-25A1-469C-BFF3-7711AFD48319}"/>
               </a:ext>
             </a:extLst>
           </p:cNvPr>
@@ -5352,7 +5347,7 @@
           <p:cNvPr id="4" name="Rectangle 3">
             <a:extLst xmlns:a="http://schemas.openxmlformats.org/drawingml/2006/main">
               <a:ext uri="{FF2B5EF4-FFF2-40B4-BE49-F238E27FC236}">
-                <a16:creationId xmlns:a16="http://schemas.microsoft.com/office/drawing/2014/main" id="{FA5320BD-72D3-4D60-A1EC-134923C0CFB7}"/>
+                <a16:creationId xmlns:a16="http://schemas.microsoft.com/office/drawing/2014/main" id="{3656063A-EB66-425D-8C29-6B24E6D0CA86}"/>
               </a:ext>
             </a:extLst>
           </p:cNvPr>
@@ -5405,7 +5400,7 @@
           <p:cNvPr id="5" name="TextBox 4">
             <a:extLst xmlns:a="http://schemas.openxmlformats.org/drawingml/2006/main">
               <a:ext uri="{FF2B5EF4-FFF2-40B4-BE49-F238E27FC236}">
-                <a16:creationId xmlns:a16="http://schemas.microsoft.com/office/drawing/2014/main" id="{217267DC-CFEE-49B1-B5B0-7F0688BC172C}"/>
+                <a16:creationId xmlns:a16="http://schemas.microsoft.com/office/drawing/2014/main" id="{5FF2463E-93FF-435E-BEB7-D36803B4128F}"/>
               </a:ext>
             </a:extLst>
           </p:cNvPr>
@@ -5468,7 +5463,7 @@
           <p:cNvPr id="6" name="Rounded Rectangle 5">
             <a:extLst xmlns:a="http://schemas.openxmlformats.org/drawingml/2006/main">
               <a:ext uri="{FF2B5EF4-FFF2-40B4-BE49-F238E27FC236}">
-                <a16:creationId xmlns:a16="http://schemas.microsoft.com/office/drawing/2014/main" id="{2432E737-76BA-49D1-B8F5-0FE0564FA169}"/>
+                <a16:creationId xmlns:a16="http://schemas.microsoft.com/office/drawing/2014/main" id="{BD82A6BA-A1BC-4AD8-A63B-472E3412F2D1}"/>
               </a:ext>
             </a:extLst>
           </p:cNvPr>
@@ -5523,7 +5518,7 @@
           <p:cNvPr id="7" name="TextBox 6">
             <a:extLst xmlns:a="http://schemas.openxmlformats.org/drawingml/2006/main">
               <a:ext uri="{FF2B5EF4-FFF2-40B4-BE49-F238E27FC236}">
-                <a16:creationId xmlns:a16="http://schemas.microsoft.com/office/drawing/2014/main" id="{16C169C2-E485-4C82-B023-D25CB28DFA8C}"/>
+                <a16:creationId xmlns:a16="http://schemas.microsoft.com/office/drawing/2014/main" id="{2E82FB1E-8309-43DC-AD65-8340D7265777}"/>
               </a:ext>
             </a:extLst>
           </p:cNvPr>
@@ -5627,7 +5622,7 @@
           <p:cNvPr id="8" name="Rounded Rectangle 7">
             <a:extLst xmlns:a="http://schemas.openxmlformats.org/drawingml/2006/main">
               <a:ext uri="{FF2B5EF4-FFF2-40B4-BE49-F238E27FC236}">
-                <a16:creationId xmlns:a16="http://schemas.microsoft.com/office/drawing/2014/main" id="{9A007036-B3AF-4926-9FA2-CFE5C211E851}"/>
+                <a16:creationId xmlns:a16="http://schemas.microsoft.com/office/drawing/2014/main" id="{44FD35A6-D270-44E7-B731-9A8452A6900A}"/>
               </a:ext>
             </a:extLst>
           </p:cNvPr>
@@ -5682,7 +5677,7 @@
           <p:cNvPr id="9" name="TextBox 8">
             <a:extLst xmlns:a="http://schemas.openxmlformats.org/drawingml/2006/main">
               <a:ext uri="{FF2B5EF4-FFF2-40B4-BE49-F238E27FC236}">
-                <a16:creationId xmlns:a16="http://schemas.microsoft.com/office/drawing/2014/main" id="{64FDB06D-4BAA-4085-83C3-82BD67687E6A}"/>
+                <a16:creationId xmlns:a16="http://schemas.microsoft.com/office/drawing/2014/main" id="{8FE9BAE7-4993-4E11-BEFD-160D74284154}"/>
               </a:ext>
             </a:extLst>
           </p:cNvPr>
@@ -5767,7 +5762,7 @@
           <p:cNvPr id="10" name="Rounded Rectangle 9">
             <a:extLst xmlns:a="http://schemas.openxmlformats.org/drawingml/2006/main">
               <a:ext uri="{FF2B5EF4-FFF2-40B4-BE49-F238E27FC236}">
-                <a16:creationId xmlns:a16="http://schemas.microsoft.com/office/drawing/2014/main" id="{FBA861AD-D277-47CF-99F2-E4169E665547}"/>
+                <a16:creationId xmlns:a16="http://schemas.microsoft.com/office/drawing/2014/main" id="{BD0EAEAB-F4DF-4D60-89C4-0F636A4B1794}"/>
               </a:ext>
             </a:extLst>
           </p:cNvPr>
@@ -5822,7 +5817,7 @@
           <p:cNvPr id="11" name="TextBox 10">
             <a:extLst xmlns:a="http://schemas.openxmlformats.org/drawingml/2006/main">
               <a:ext uri="{FF2B5EF4-FFF2-40B4-BE49-F238E27FC236}">
-                <a16:creationId xmlns:a16="http://schemas.microsoft.com/office/drawing/2014/main" id="{C04A546D-B3D7-4169-8470-8A6B6D6B056E}"/>
+                <a16:creationId xmlns:a16="http://schemas.microsoft.com/office/drawing/2014/main" id="{26124347-2A68-4A17-9AE1-6D101C12AD09}"/>
               </a:ext>
             </a:extLst>
           </p:cNvPr>
@@ -5924,7 +5919,7 @@
     </p:spTree>
     <p:extLst>
       <p:ext uri="{BB962C8B-B14F-4D97-AF65-F5344CB8AC3E}">
-        <p14:creationId xmlns:p14="http://schemas.microsoft.com/office/powerpoint/2010/main" val="2112739995"/>
+        <p14:creationId xmlns:p14="http://schemas.microsoft.com/office/powerpoint/2010/main" val="626340798"/>
       </p:ext>
     </p:extLst>
   </p:cSld>
@@ -5948,7 +5943,7 @@
           <p:cNvPr id="2" name="Rectangle 1">
             <a:extLst xmlns:a="http://schemas.openxmlformats.org/drawingml/2006/main">
               <a:ext uri="{FF2B5EF4-FFF2-40B4-BE49-F238E27FC236}">
-                <a16:creationId xmlns:a16="http://schemas.microsoft.com/office/drawing/2014/main" id="{1E5461AB-EB93-48CE-A6C9-D1FC9AB412BF}"/>
+                <a16:creationId xmlns:a16="http://schemas.microsoft.com/office/drawing/2014/main" id="{F0977D85-D0EC-4BFC-A433-3FE0752CEABE}"/>
               </a:ext>
             </a:extLst>
           </p:cNvPr>
@@ -6001,7 +5996,7 @@
           <p:cNvPr id="3" name="Rectangle 2">
             <a:extLst xmlns:a="http://schemas.openxmlformats.org/drawingml/2006/main">
               <a:ext uri="{FF2B5EF4-FFF2-40B4-BE49-F238E27FC236}">
-                <a16:creationId xmlns:a16="http://schemas.microsoft.com/office/drawing/2014/main" id="{D3204BBF-9954-4F0E-B24C-40CC16575700}"/>
+                <a16:creationId xmlns:a16="http://schemas.microsoft.com/office/drawing/2014/main" id="{FA03800B-7EF3-459C-AE14-808830B06E5C}"/>
               </a:ext>
             </a:extLst>
           </p:cNvPr>
@@ -6054,7 +6049,7 @@
           <p:cNvPr id="4" name="Rectangle 3">
             <a:extLst xmlns:a="http://schemas.openxmlformats.org/drawingml/2006/main">
               <a:ext uri="{FF2B5EF4-FFF2-40B4-BE49-F238E27FC236}">
-                <a16:creationId xmlns:a16="http://schemas.microsoft.com/office/drawing/2014/main" id="{EE2794B3-112F-4183-AF1F-1AE2AECF5517}"/>
+                <a16:creationId xmlns:a16="http://schemas.microsoft.com/office/drawing/2014/main" id="{14904BB7-31CF-4BF9-B609-07BD2D1C733F}"/>
               </a:ext>
             </a:extLst>
           </p:cNvPr>
@@ -6107,7 +6102,7 @@
           <p:cNvPr id="5" name="TextBox 4">
             <a:extLst xmlns:a="http://schemas.openxmlformats.org/drawingml/2006/main">
               <a:ext uri="{FF2B5EF4-FFF2-40B4-BE49-F238E27FC236}">
-                <a16:creationId xmlns:a16="http://schemas.microsoft.com/office/drawing/2014/main" id="{BD50A6C4-BF56-410F-96B7-C62D23FC2134}"/>
+                <a16:creationId xmlns:a16="http://schemas.microsoft.com/office/drawing/2014/main" id="{0122C0C5-BB4A-48C1-BDE7-2F24F7D77A4B}"/>
               </a:ext>
             </a:extLst>
           </p:cNvPr>
@@ -6170,7 +6165,7 @@
           <p:cNvPr id="6" name="Rounded Rectangle 5">
             <a:extLst xmlns:a="http://schemas.openxmlformats.org/drawingml/2006/main">
               <a:ext uri="{FF2B5EF4-FFF2-40B4-BE49-F238E27FC236}">
-                <a16:creationId xmlns:a16="http://schemas.microsoft.com/office/drawing/2014/main" id="{AD1D43EC-AECC-4B33-A7A5-D0D6BC00FCAA}"/>
+                <a16:creationId xmlns:a16="http://schemas.microsoft.com/office/drawing/2014/main" id="{C9315923-4882-4665-8ED9-D8971CC5B515}"/>
               </a:ext>
             </a:extLst>
           </p:cNvPr>
@@ -6225,7 +6220,7 @@
           <p:cNvPr id="7" name="TextBox 6">
             <a:extLst xmlns:a="http://schemas.openxmlformats.org/drawingml/2006/main">
               <a:ext uri="{FF2B5EF4-FFF2-40B4-BE49-F238E27FC236}">
-                <a16:creationId xmlns:a16="http://schemas.microsoft.com/office/drawing/2014/main" id="{1193F931-9650-414E-914E-DE16A6607D56}"/>
+                <a16:creationId xmlns:a16="http://schemas.microsoft.com/office/drawing/2014/main" id="{056F66D9-5516-4569-BFAC-38F2C84F85BD}"/>
               </a:ext>
             </a:extLst>
           </p:cNvPr>
@@ -6424,7 +6419,7 @@
           <p:cNvPr id="8" name="Rounded Rectangle 7">
             <a:extLst xmlns:a="http://schemas.openxmlformats.org/drawingml/2006/main">
               <a:ext uri="{FF2B5EF4-FFF2-40B4-BE49-F238E27FC236}">
-                <a16:creationId xmlns:a16="http://schemas.microsoft.com/office/drawing/2014/main" id="{4D4FC0A7-964A-440B-BE37-4E3DBF8804A9}"/>
+                <a16:creationId xmlns:a16="http://schemas.microsoft.com/office/drawing/2014/main" id="{5FBA845E-5769-49B5-91C0-884B19983161}"/>
               </a:ext>
             </a:extLst>
           </p:cNvPr>
@@ -6479,7 +6474,7 @@
           <p:cNvPr id="9" name="TextBox 8">
             <a:extLst xmlns:a="http://schemas.openxmlformats.org/drawingml/2006/main">
               <a:ext uri="{FF2B5EF4-FFF2-40B4-BE49-F238E27FC236}">
-                <a16:creationId xmlns:a16="http://schemas.microsoft.com/office/drawing/2014/main" id="{06C76F78-7A4E-4717-B726-328777A2B9A2}"/>
+                <a16:creationId xmlns:a16="http://schemas.microsoft.com/office/drawing/2014/main" id="{5BF6DC06-33D4-4582-93AB-690607CAB8D9}"/>
               </a:ext>
             </a:extLst>
           </p:cNvPr>
@@ -6600,7 +6595,7 @@
     </p:spTree>
     <p:extLst>
       <p:ext uri="{BB962C8B-B14F-4D97-AF65-F5344CB8AC3E}">
-        <p14:creationId xmlns:p14="http://schemas.microsoft.com/office/powerpoint/2010/main" val="732313307"/>
+        <p14:creationId xmlns:p14="http://schemas.microsoft.com/office/powerpoint/2010/main" val="1722035190"/>
       </p:ext>
     </p:extLst>
   </p:cSld>
@@ -6624,7 +6619,7 @@
           <p:cNvPr id="2" name="Rectangle 1">
             <a:extLst xmlns:a="http://schemas.openxmlformats.org/drawingml/2006/main">
               <a:ext uri="{FF2B5EF4-FFF2-40B4-BE49-F238E27FC236}">
-                <a16:creationId xmlns:a16="http://schemas.microsoft.com/office/drawing/2014/main" id="{81E1CC92-CE88-476F-8AA9-8165F085B081}"/>
+                <a16:creationId xmlns:a16="http://schemas.microsoft.com/office/drawing/2014/main" id="{7AB0EEF1-842F-4962-9CEA-674924E48FD9}"/>
               </a:ext>
             </a:extLst>
           </p:cNvPr>
@@ -6677,7 +6672,7 @@
           <p:cNvPr id="3" name="Rectangle 2">
             <a:extLst xmlns:a="http://schemas.openxmlformats.org/drawingml/2006/main">
               <a:ext uri="{FF2B5EF4-FFF2-40B4-BE49-F238E27FC236}">
-                <a16:creationId xmlns:a16="http://schemas.microsoft.com/office/drawing/2014/main" id="{766F51BC-9D15-402E-B40D-BD290E01F4BD}"/>
+                <a16:creationId xmlns:a16="http://schemas.microsoft.com/office/drawing/2014/main" id="{FA7E393D-5BC7-48E6-981C-B360BE086850}"/>
               </a:ext>
             </a:extLst>
           </p:cNvPr>
@@ -6730,7 +6725,7 @@
           <p:cNvPr id="4" name="TextBox 3">
             <a:extLst xmlns:a="http://schemas.openxmlformats.org/drawingml/2006/main">
               <a:ext uri="{FF2B5EF4-FFF2-40B4-BE49-F238E27FC236}">
-                <a16:creationId xmlns:a16="http://schemas.microsoft.com/office/drawing/2014/main" id="{0F952296-647E-4FD3-A1AE-B288C4FB60D9}"/>
+                <a16:creationId xmlns:a16="http://schemas.microsoft.com/office/drawing/2014/main" id="{AC94BA45-8E39-4354-877F-564EF5A41E53}"/>
               </a:ext>
             </a:extLst>
           </p:cNvPr>
@@ -6908,7 +6903,7 @@
     </p:spTree>
     <p:extLst>
       <p:ext uri="{BB962C8B-B14F-4D97-AF65-F5344CB8AC3E}">
-        <p14:creationId xmlns:p14="http://schemas.microsoft.com/office/powerpoint/2010/main" val="1117890601"/>
+        <p14:creationId xmlns:p14="http://schemas.microsoft.com/office/powerpoint/2010/main" val="48076162"/>
       </p:ext>
     </p:extLst>
   </p:cSld>
@@ -6932,7 +6927,7 @@
           <p:cNvPr id="2" name="Rectangle 1">
             <a:extLst xmlns:a="http://schemas.openxmlformats.org/drawingml/2006/main">
               <a:ext uri="{FF2B5EF4-FFF2-40B4-BE49-F238E27FC236}">
-                <a16:creationId xmlns:a16="http://schemas.microsoft.com/office/drawing/2014/main" id="{2A4B2E8A-C325-4057-BAB3-D5FFF0CF62AE}"/>
+                <a16:creationId xmlns:a16="http://schemas.microsoft.com/office/drawing/2014/main" id="{BDEC8858-E3A2-4F0E-BC96-720B553A643C}"/>
               </a:ext>
             </a:extLst>
           </p:cNvPr>
@@ -6985,7 +6980,7 @@
           <p:cNvPr id="3" name="Rectangle 2">
             <a:extLst xmlns:a="http://schemas.openxmlformats.org/drawingml/2006/main">
               <a:ext uri="{FF2B5EF4-FFF2-40B4-BE49-F238E27FC236}">
-                <a16:creationId xmlns:a16="http://schemas.microsoft.com/office/drawing/2014/main" id="{BCE03106-B560-43A8-A9AF-7F7F58457151}"/>
+                <a16:creationId xmlns:a16="http://schemas.microsoft.com/office/drawing/2014/main" id="{F7FE8DB0-3FFB-4E1D-A271-40555BA67E94}"/>
               </a:ext>
             </a:extLst>
           </p:cNvPr>
@@ -7038,7 +7033,7 @@
           <p:cNvPr id="4" name="Rectangle 3">
             <a:extLst xmlns:a="http://schemas.openxmlformats.org/drawingml/2006/main">
               <a:ext uri="{FF2B5EF4-FFF2-40B4-BE49-F238E27FC236}">
-                <a16:creationId xmlns:a16="http://schemas.microsoft.com/office/drawing/2014/main" id="{2F304F0B-1A31-49FC-84ED-692D6917F3B0}"/>
+                <a16:creationId xmlns:a16="http://schemas.microsoft.com/office/drawing/2014/main" id="{6AC94A5A-229A-4783-A311-5EEAC2306031}"/>
               </a:ext>
             </a:extLst>
           </p:cNvPr>
@@ -7091,7 +7086,7 @@
           <p:cNvPr id="5" name="TextBox 4">
             <a:extLst xmlns:a="http://schemas.openxmlformats.org/drawingml/2006/main">
               <a:ext uri="{FF2B5EF4-FFF2-40B4-BE49-F238E27FC236}">
-                <a16:creationId xmlns:a16="http://schemas.microsoft.com/office/drawing/2014/main" id="{C571EC1B-59FC-452C-90E5-BA28E4A6543C}"/>
+                <a16:creationId xmlns:a16="http://schemas.microsoft.com/office/drawing/2014/main" id="{B38CE4D6-7674-4261-88D8-178A886D350B}"/>
               </a:ext>
             </a:extLst>
           </p:cNvPr>
@@ -7154,7 +7149,7 @@
           <p:cNvPr id="6" name="Rounded Rectangle 5">
             <a:extLst xmlns:a="http://schemas.openxmlformats.org/drawingml/2006/main">
               <a:ext uri="{FF2B5EF4-FFF2-40B4-BE49-F238E27FC236}">
-                <a16:creationId xmlns:a16="http://schemas.microsoft.com/office/drawing/2014/main" id="{B4B57932-A5E0-4B7D-BBF3-66DB06765B03}"/>
+                <a16:creationId xmlns:a16="http://schemas.microsoft.com/office/drawing/2014/main" id="{02977216-DCA9-464B-9979-0CE153096E20}"/>
               </a:ext>
             </a:extLst>
           </p:cNvPr>
@@ -7209,7 +7204,7 @@
           <p:cNvPr id="7" name="TextBox 6">
             <a:extLst xmlns:a="http://schemas.openxmlformats.org/drawingml/2006/main">
               <a:ext uri="{FF2B5EF4-FFF2-40B4-BE49-F238E27FC236}">
-                <a16:creationId xmlns:a16="http://schemas.microsoft.com/office/drawing/2014/main" id="{899434D0-6C6B-4A15-A6C8-26C02405A339}"/>
+                <a16:creationId xmlns:a16="http://schemas.microsoft.com/office/drawing/2014/main" id="{19F6EF95-7158-434A-A356-E46C4E779BF7}"/>
               </a:ext>
             </a:extLst>
           </p:cNvPr>
@@ -7313,7 +7308,7 @@
           <p:cNvPr id="8" name="Rounded Rectangle 7">
             <a:extLst xmlns:a="http://schemas.openxmlformats.org/drawingml/2006/main">
               <a:ext uri="{FF2B5EF4-FFF2-40B4-BE49-F238E27FC236}">
-                <a16:creationId xmlns:a16="http://schemas.microsoft.com/office/drawing/2014/main" id="{A9EC9C70-3BB2-40A4-82F2-0F4B239262F8}"/>
+                <a16:creationId xmlns:a16="http://schemas.microsoft.com/office/drawing/2014/main" id="{3E63B7A7-F691-4096-9FC9-015E26BB8BD4}"/>
               </a:ext>
             </a:extLst>
           </p:cNvPr>
@@ -7368,7 +7363,7 @@
           <p:cNvPr id="9" name="TextBox 8">
             <a:extLst xmlns:a="http://schemas.openxmlformats.org/drawingml/2006/main">
               <a:ext uri="{FF2B5EF4-FFF2-40B4-BE49-F238E27FC236}">
-                <a16:creationId xmlns:a16="http://schemas.microsoft.com/office/drawing/2014/main" id="{826ED784-724F-42CA-A92B-565963133B88}"/>
+                <a16:creationId xmlns:a16="http://schemas.microsoft.com/office/drawing/2014/main" id="{55C46474-73B8-49A7-9AF8-AAA5345B4704}"/>
               </a:ext>
             </a:extLst>
           </p:cNvPr>
@@ -7472,7 +7467,7 @@
           <p:cNvPr id="10" name="Rounded Rectangle 9">
             <a:extLst xmlns:a="http://schemas.openxmlformats.org/drawingml/2006/main">
               <a:ext uri="{FF2B5EF4-FFF2-40B4-BE49-F238E27FC236}">
-                <a16:creationId xmlns:a16="http://schemas.microsoft.com/office/drawing/2014/main" id="{458BEC26-9F73-4968-A030-D41DB66166CA}"/>
+                <a16:creationId xmlns:a16="http://schemas.microsoft.com/office/drawing/2014/main" id="{22F8D07D-8441-4EAB-9568-5A9AEBF6E4B6}"/>
               </a:ext>
             </a:extLst>
           </p:cNvPr>
@@ -7527,7 +7522,7 @@
           <p:cNvPr id="11" name="TextBox 10">
             <a:extLst xmlns:a="http://schemas.openxmlformats.org/drawingml/2006/main">
               <a:ext uri="{FF2B5EF4-FFF2-40B4-BE49-F238E27FC236}">
-                <a16:creationId xmlns:a16="http://schemas.microsoft.com/office/drawing/2014/main" id="{F910595E-8F41-4672-9DAC-0B78E7B7340E}"/>
+                <a16:creationId xmlns:a16="http://schemas.microsoft.com/office/drawing/2014/main" id="{1FEBEAD1-ABAE-42D7-8129-36F043F6B19B}"/>
               </a:ext>
             </a:extLst>
           </p:cNvPr>
@@ -7686,7 +7681,7 @@
     </p:spTree>
     <p:extLst>
       <p:ext uri="{BB962C8B-B14F-4D97-AF65-F5344CB8AC3E}">
-        <p14:creationId xmlns:p14="http://schemas.microsoft.com/office/powerpoint/2010/main" val="471330300"/>
+        <p14:creationId xmlns:p14="http://schemas.microsoft.com/office/powerpoint/2010/main" val="488177730"/>
       </p:ext>
     </p:extLst>
   </p:cSld>
@@ -7710,7 +7705,7 @@
           <p:cNvPr id="2" name="Rectangle 1">
             <a:extLst xmlns:a="http://schemas.openxmlformats.org/drawingml/2006/main">
               <a:ext uri="{FF2B5EF4-FFF2-40B4-BE49-F238E27FC236}">
-                <a16:creationId xmlns:a16="http://schemas.microsoft.com/office/drawing/2014/main" id="{2945D280-3EA2-4684-94C7-7FA2DAB11EE9}"/>
+                <a16:creationId xmlns:a16="http://schemas.microsoft.com/office/drawing/2014/main" id="{B8C91304-3876-4BE8-A750-2BCE0A9E5A5D}"/>
               </a:ext>
             </a:extLst>
           </p:cNvPr>
@@ -7763,7 +7758,7 @@
           <p:cNvPr id="3" name="Rectangle 2">
             <a:extLst xmlns:a="http://schemas.openxmlformats.org/drawingml/2006/main">
               <a:ext uri="{FF2B5EF4-FFF2-40B4-BE49-F238E27FC236}">
-                <a16:creationId xmlns:a16="http://schemas.microsoft.com/office/drawing/2014/main" id="{9913BE19-3874-4D5D-B16F-0C5B42DBB4FC}"/>
+                <a16:creationId xmlns:a16="http://schemas.microsoft.com/office/drawing/2014/main" id="{6F2677EE-9223-469F-88CC-79C47FB95DB3}"/>
               </a:ext>
             </a:extLst>
           </p:cNvPr>
@@ -7816,7 +7811,7 @@
           <p:cNvPr id="4" name="Rectangle 3">
             <a:extLst xmlns:a="http://schemas.openxmlformats.org/drawingml/2006/main">
               <a:ext uri="{FF2B5EF4-FFF2-40B4-BE49-F238E27FC236}">
-                <a16:creationId xmlns:a16="http://schemas.microsoft.com/office/drawing/2014/main" id="{90B240B6-4E10-4086-B218-59811802BF6C}"/>
+                <a16:creationId xmlns:a16="http://schemas.microsoft.com/office/drawing/2014/main" id="{FACC1211-BFD5-484C-9D7F-B8AB4BE2B688}"/>
               </a:ext>
             </a:extLst>
           </p:cNvPr>
@@ -7869,7 +7864,7 @@
           <p:cNvPr id="5" name="TextBox 4">
             <a:extLst xmlns:a="http://schemas.openxmlformats.org/drawingml/2006/main">
               <a:ext uri="{FF2B5EF4-FFF2-40B4-BE49-F238E27FC236}">
-                <a16:creationId xmlns:a16="http://schemas.microsoft.com/office/drawing/2014/main" id="{87701E11-A20C-41CA-8551-68CBB9200DE5}"/>
+                <a16:creationId xmlns:a16="http://schemas.microsoft.com/office/drawing/2014/main" id="{7D6C8189-8A5E-4B68-90D5-A726C42AE6A4}"/>
               </a:ext>
             </a:extLst>
           </p:cNvPr>
@@ -7932,7 +7927,7 @@
           <p:cNvPr id="6" name="Rounded Rectangle 5">
             <a:extLst xmlns:a="http://schemas.openxmlformats.org/drawingml/2006/main">
               <a:ext uri="{FF2B5EF4-FFF2-40B4-BE49-F238E27FC236}">
-                <a16:creationId xmlns:a16="http://schemas.microsoft.com/office/drawing/2014/main" id="{5352DBAA-2331-4BF3-A67B-40BEAF3D8E22}"/>
+                <a16:creationId xmlns:a16="http://schemas.microsoft.com/office/drawing/2014/main" id="{78AB36E8-BD5E-4BFB-8BFA-214D879441EE}"/>
               </a:ext>
             </a:extLst>
           </p:cNvPr>
@@ -7987,7 +7982,7 @@
           <p:cNvPr id="7" name="TextBox 6">
             <a:extLst xmlns:a="http://schemas.openxmlformats.org/drawingml/2006/main">
               <a:ext uri="{FF2B5EF4-FFF2-40B4-BE49-F238E27FC236}">
-                <a16:creationId xmlns:a16="http://schemas.microsoft.com/office/drawing/2014/main" id="{C08CAB5D-06FB-4615-AAEE-B83F3BEDC582}"/>
+                <a16:creationId xmlns:a16="http://schemas.microsoft.com/office/drawing/2014/main" id="{1DE16BAF-626F-4F93-B843-13417EE08E07}"/>
               </a:ext>
             </a:extLst>
           </p:cNvPr>
@@ -8110,7 +8105,7 @@
           <p:cNvPr id="8" name="Rounded Rectangle 7">
             <a:extLst xmlns:a="http://schemas.openxmlformats.org/drawingml/2006/main">
               <a:ext uri="{FF2B5EF4-FFF2-40B4-BE49-F238E27FC236}">
-                <a16:creationId xmlns:a16="http://schemas.microsoft.com/office/drawing/2014/main" id="{E799EC59-EC16-41D4-80E9-8D9F5D7F42E3}"/>
+                <a16:creationId xmlns:a16="http://schemas.microsoft.com/office/drawing/2014/main" id="{ADDBEEBE-D944-40D2-A581-2DEAB391344D}"/>
               </a:ext>
             </a:extLst>
           </p:cNvPr>
@@ -8165,7 +8160,7 @@
           <p:cNvPr id="9" name="TextBox 8">
             <a:extLst xmlns:a="http://schemas.openxmlformats.org/drawingml/2006/main">
               <a:ext uri="{FF2B5EF4-FFF2-40B4-BE49-F238E27FC236}">
-                <a16:creationId xmlns:a16="http://schemas.microsoft.com/office/drawing/2014/main" id="{5CE00759-1533-497E-A038-2351BC7304C9}"/>
+                <a16:creationId xmlns:a16="http://schemas.microsoft.com/office/drawing/2014/main" id="{DAEF26EF-6284-49D5-9E54-15D62919BED4}"/>
               </a:ext>
             </a:extLst>
           </p:cNvPr>
@@ -8307,7 +8302,7 @@
           <p:cNvPr id="10" name="Rounded Rectangle 9">
             <a:extLst xmlns:a="http://schemas.openxmlformats.org/drawingml/2006/main">
               <a:ext uri="{FF2B5EF4-FFF2-40B4-BE49-F238E27FC236}">
-                <a16:creationId xmlns:a16="http://schemas.microsoft.com/office/drawing/2014/main" id="{750C903F-9180-4980-A063-EDAE1AD13422}"/>
+                <a16:creationId xmlns:a16="http://schemas.microsoft.com/office/drawing/2014/main" id="{1C490E98-BD38-4B69-A831-890E87DD9EA1}"/>
               </a:ext>
             </a:extLst>
           </p:cNvPr>
@@ -8362,7 +8357,7 @@
           <p:cNvPr id="11" name="TextBox 10">
             <a:extLst xmlns:a="http://schemas.openxmlformats.org/drawingml/2006/main">
               <a:ext uri="{FF2B5EF4-FFF2-40B4-BE49-F238E27FC236}">
-                <a16:creationId xmlns:a16="http://schemas.microsoft.com/office/drawing/2014/main" id="{7CCBD16D-CF08-4239-88C2-EC146920739E}"/>
+                <a16:creationId xmlns:a16="http://schemas.microsoft.com/office/drawing/2014/main" id="{7F55B837-DB12-4624-9439-54B19C191F22}"/>
               </a:ext>
             </a:extLst>
           </p:cNvPr>
@@ -8464,7 +8459,7 @@
     </p:spTree>
     <p:extLst>
       <p:ext uri="{BB962C8B-B14F-4D97-AF65-F5344CB8AC3E}">
-        <p14:creationId xmlns:p14="http://schemas.microsoft.com/office/powerpoint/2010/main" val="1183618080"/>
+        <p14:creationId xmlns:p14="http://schemas.microsoft.com/office/powerpoint/2010/main" val="120121349"/>
       </p:ext>
     </p:extLst>
   </p:cSld>
@@ -8488,7 +8483,7 @@
           <p:cNvPr id="2" name="Rectangle 1">
             <a:extLst xmlns:a="http://schemas.openxmlformats.org/drawingml/2006/main">
               <a:ext uri="{FF2B5EF4-FFF2-40B4-BE49-F238E27FC236}">
-                <a16:creationId xmlns:a16="http://schemas.microsoft.com/office/drawing/2014/main" id="{CC5A468A-0FD3-45A3-99B1-BA404CA11278}"/>
+                <a16:creationId xmlns:a16="http://schemas.microsoft.com/office/drawing/2014/main" id="{6AB984D4-4660-4AEF-9648-60243DCAC02E}"/>
               </a:ext>
             </a:extLst>
           </p:cNvPr>
@@ -8541,7 +8536,7 @@
           <p:cNvPr id="3" name="Rectangle 2">
             <a:extLst xmlns:a="http://schemas.openxmlformats.org/drawingml/2006/main">
               <a:ext uri="{FF2B5EF4-FFF2-40B4-BE49-F238E27FC236}">
-                <a16:creationId xmlns:a16="http://schemas.microsoft.com/office/drawing/2014/main" id="{E7F4E103-0AC1-4C8C-A728-A1FBE56C3B89}"/>
+                <a16:creationId xmlns:a16="http://schemas.microsoft.com/office/drawing/2014/main" id="{28C4C1D7-E816-45D1-A47E-4676888FC222}"/>
               </a:ext>
             </a:extLst>
           </p:cNvPr>
@@ -8594,7 +8589,7 @@
           <p:cNvPr id="4" name="Rectangle 3">
             <a:extLst xmlns:a="http://schemas.openxmlformats.org/drawingml/2006/main">
               <a:ext uri="{FF2B5EF4-FFF2-40B4-BE49-F238E27FC236}">
-                <a16:creationId xmlns:a16="http://schemas.microsoft.com/office/drawing/2014/main" id="{43D4ABD5-44C4-459F-9EF7-EC5591521618}"/>
+                <a16:creationId xmlns:a16="http://schemas.microsoft.com/office/drawing/2014/main" id="{4A013848-876A-4E01-A2F1-34F899850DCF}"/>
               </a:ext>
             </a:extLst>
           </p:cNvPr>
@@ -8647,7 +8642,7 @@
           <p:cNvPr id="5" name="TextBox 4">
             <a:extLst xmlns:a="http://schemas.openxmlformats.org/drawingml/2006/main">
               <a:ext uri="{FF2B5EF4-FFF2-40B4-BE49-F238E27FC236}">
-                <a16:creationId xmlns:a16="http://schemas.microsoft.com/office/drawing/2014/main" id="{A6B05412-064D-417E-AA2F-86C1F06671C8}"/>
+                <a16:creationId xmlns:a16="http://schemas.microsoft.com/office/drawing/2014/main" id="{F9F0810A-02BB-49EE-8ABE-C61125FECA91}"/>
               </a:ext>
             </a:extLst>
           </p:cNvPr>
@@ -8710,7 +8705,7 @@
           <p:cNvPr id="6" name="Rounded Rectangle 5">
             <a:extLst xmlns:a="http://schemas.openxmlformats.org/drawingml/2006/main">
               <a:ext uri="{FF2B5EF4-FFF2-40B4-BE49-F238E27FC236}">
-                <a16:creationId xmlns:a16="http://schemas.microsoft.com/office/drawing/2014/main" id="{A044DEB2-B7DA-485B-A509-5F184A698B72}"/>
+                <a16:creationId xmlns:a16="http://schemas.microsoft.com/office/drawing/2014/main" id="{E864AA60-E301-46BE-8B0B-FE9C9746229B}"/>
               </a:ext>
             </a:extLst>
           </p:cNvPr>
@@ -8765,7 +8760,7 @@
           <p:cNvPr id="7" name="TextBox 6">
             <a:extLst xmlns:a="http://schemas.openxmlformats.org/drawingml/2006/main">
               <a:ext uri="{FF2B5EF4-FFF2-40B4-BE49-F238E27FC236}">
-                <a16:creationId xmlns:a16="http://schemas.microsoft.com/office/drawing/2014/main" id="{4D9B79DA-3037-436A-A9A5-3427A9792617}"/>
+                <a16:creationId xmlns:a16="http://schemas.microsoft.com/office/drawing/2014/main" id="{92E2E69E-8877-481B-84C0-BF506D298332}"/>
               </a:ext>
             </a:extLst>
           </p:cNvPr>
@@ -8945,7 +8940,7 @@
           <p:cNvPr id="8" name="Rounded Rectangle 7">
             <a:extLst xmlns:a="http://schemas.openxmlformats.org/drawingml/2006/main">
               <a:ext uri="{FF2B5EF4-FFF2-40B4-BE49-F238E27FC236}">
-                <a16:creationId xmlns:a16="http://schemas.microsoft.com/office/drawing/2014/main" id="{DFF7E8D4-1B00-4D8A-B7A3-F39B1AD04CB8}"/>
+                <a16:creationId xmlns:a16="http://schemas.microsoft.com/office/drawing/2014/main" id="{1F879C99-4BCF-49A0-A090-AF63D8E2C405}"/>
               </a:ext>
             </a:extLst>
           </p:cNvPr>
@@ -9000,7 +8995,7 @@
           <p:cNvPr id="9" name="TextBox 8">
             <a:extLst xmlns:a="http://schemas.openxmlformats.org/drawingml/2006/main">
               <a:ext uri="{FF2B5EF4-FFF2-40B4-BE49-F238E27FC236}">
-                <a16:creationId xmlns:a16="http://schemas.microsoft.com/office/drawing/2014/main" id="{D9A495E4-B1F0-4D34-8B04-8EBBF3F3F711}"/>
+                <a16:creationId xmlns:a16="http://schemas.microsoft.com/office/drawing/2014/main" id="{18EDB787-C28A-41D2-8E9A-AC238A804C37}"/>
               </a:ext>
             </a:extLst>
           </p:cNvPr>
@@ -9159,7 +9154,7 @@
     </p:spTree>
     <p:extLst>
       <p:ext uri="{BB962C8B-B14F-4D97-AF65-F5344CB8AC3E}">
-        <p14:creationId xmlns:p14="http://schemas.microsoft.com/office/powerpoint/2010/main" val="1986843225"/>
+        <p14:creationId xmlns:p14="http://schemas.microsoft.com/office/powerpoint/2010/main" val="137370403"/>
       </p:ext>
     </p:extLst>
   </p:cSld>
@@ -9183,7 +9178,7 @@
           <p:cNvPr id="2" name="Rectangle 1">
             <a:extLst xmlns:a="http://schemas.openxmlformats.org/drawingml/2006/main">
               <a:ext uri="{FF2B5EF4-FFF2-40B4-BE49-F238E27FC236}">
-                <a16:creationId xmlns:a16="http://schemas.microsoft.com/office/drawing/2014/main" id="{BEC47524-EA3F-41C6-B2A9-59FBC50C087A}"/>
+                <a16:creationId xmlns:a16="http://schemas.microsoft.com/office/drawing/2014/main" id="{08E4196B-9943-4EE2-A2DC-C2F6FA7EACB7}"/>
               </a:ext>
             </a:extLst>
           </p:cNvPr>
@@ -9236,7 +9231,7 @@
           <p:cNvPr id="3" name="Rectangle 2">
             <a:extLst xmlns:a="http://schemas.openxmlformats.org/drawingml/2006/main">
               <a:ext uri="{FF2B5EF4-FFF2-40B4-BE49-F238E27FC236}">
-                <a16:creationId xmlns:a16="http://schemas.microsoft.com/office/drawing/2014/main" id="{662C4A4D-C0A2-4A6E-99E7-8BE3361ED4E2}"/>
+                <a16:creationId xmlns:a16="http://schemas.microsoft.com/office/drawing/2014/main" id="{7A30C625-1CE2-4F88-B32B-662C34C8AF7D}"/>
               </a:ext>
             </a:extLst>
           </p:cNvPr>
@@ -9289,7 +9284,7 @@
           <p:cNvPr id="4" name="Rectangle 3">
             <a:extLst xmlns:a="http://schemas.openxmlformats.org/drawingml/2006/main">
               <a:ext uri="{FF2B5EF4-FFF2-40B4-BE49-F238E27FC236}">
-                <a16:creationId xmlns:a16="http://schemas.microsoft.com/office/drawing/2014/main" id="{F819784A-AC14-4CB4-9DBD-7424D81B2EBC}"/>
+                <a16:creationId xmlns:a16="http://schemas.microsoft.com/office/drawing/2014/main" id="{6F3D1556-4D1E-4DA1-9562-E7BA7E0910F5}"/>
               </a:ext>
             </a:extLst>
           </p:cNvPr>
@@ -9342,7 +9337,7 @@
           <p:cNvPr id="5" name="TextBox 4">
             <a:extLst xmlns:a="http://schemas.openxmlformats.org/drawingml/2006/main">
               <a:ext uri="{FF2B5EF4-FFF2-40B4-BE49-F238E27FC236}">
-                <a16:creationId xmlns:a16="http://schemas.microsoft.com/office/drawing/2014/main" id="{EF52ED6E-ECC4-4FD2-A0B7-938676022EDF}"/>
+                <a16:creationId xmlns:a16="http://schemas.microsoft.com/office/drawing/2014/main" id="{B3F33527-A7F5-4E77-8246-72462F09F6FE}"/>
               </a:ext>
             </a:extLst>
           </p:cNvPr>
@@ -9405,7 +9400,7 @@
           <p:cNvPr id="6" name="Rounded Rectangle 5">
             <a:extLst xmlns:a="http://schemas.openxmlformats.org/drawingml/2006/main">
               <a:ext uri="{FF2B5EF4-FFF2-40B4-BE49-F238E27FC236}">
-                <a16:creationId xmlns:a16="http://schemas.microsoft.com/office/drawing/2014/main" id="{893AFBA4-CA38-4FDF-8A4E-CEDD32B5A8FD}"/>
+                <a16:creationId xmlns:a16="http://schemas.microsoft.com/office/drawing/2014/main" id="{6A538AA0-B61E-443C-ABFF-CB0C09F54C0E}"/>
               </a:ext>
             </a:extLst>
           </p:cNvPr>
@@ -9460,7 +9455,7 @@
           <p:cNvPr id="7" name="TextBox 6">
             <a:extLst xmlns:a="http://schemas.openxmlformats.org/drawingml/2006/main">
               <a:ext uri="{FF2B5EF4-FFF2-40B4-BE49-F238E27FC236}">
-                <a16:creationId xmlns:a16="http://schemas.microsoft.com/office/drawing/2014/main" id="{2CC7091F-8DD6-4C66-A31C-2F632710A9ED}"/>
+                <a16:creationId xmlns:a16="http://schemas.microsoft.com/office/drawing/2014/main" id="{4F92E36C-24CE-4777-81AE-B8680FC63453}"/>
               </a:ext>
             </a:extLst>
           </p:cNvPr>
@@ -9678,7 +9673,7 @@
           <p:cNvPr id="8" name="Rounded Rectangle 7">
             <a:extLst xmlns:a="http://schemas.openxmlformats.org/drawingml/2006/main">
               <a:ext uri="{FF2B5EF4-FFF2-40B4-BE49-F238E27FC236}">
-                <a16:creationId xmlns:a16="http://schemas.microsoft.com/office/drawing/2014/main" id="{1E20B6B2-AD7A-4496-9D9D-F4BC566B12E2}"/>
+                <a16:creationId xmlns:a16="http://schemas.microsoft.com/office/drawing/2014/main" id="{62B801AF-7D04-42D5-881D-54AD81DC0AA1}"/>
               </a:ext>
             </a:extLst>
           </p:cNvPr>
@@ -9733,7 +9728,7 @@
           <p:cNvPr id="9" name="TextBox 8">
             <a:extLst xmlns:a="http://schemas.openxmlformats.org/drawingml/2006/main">
               <a:ext uri="{FF2B5EF4-FFF2-40B4-BE49-F238E27FC236}">
-                <a16:creationId xmlns:a16="http://schemas.microsoft.com/office/drawing/2014/main" id="{5F6BF4A8-58DE-4A4E-B8A6-5569E8D01AC1}"/>
+                <a16:creationId xmlns:a16="http://schemas.microsoft.com/office/drawing/2014/main" id="{04EFC88A-F1BC-4FE2-9DFC-B2A015EBA642}"/>
               </a:ext>
             </a:extLst>
           </p:cNvPr>
@@ -9968,7 +9963,7 @@
     </p:spTree>
     <p:extLst>
       <p:ext uri="{BB962C8B-B14F-4D97-AF65-F5344CB8AC3E}">
-        <p14:creationId xmlns:p14="http://schemas.microsoft.com/office/powerpoint/2010/main" val="69561193"/>
+        <p14:creationId xmlns:p14="http://schemas.microsoft.com/office/powerpoint/2010/main" val="656426320"/>
       </p:ext>
     </p:extLst>
   </p:cSld>
@@ -9992,7 +9987,7 @@
           <p:cNvPr id="2" name="Rectangle 1">
             <a:extLst xmlns:a="http://schemas.openxmlformats.org/drawingml/2006/main">
               <a:ext uri="{FF2B5EF4-FFF2-40B4-BE49-F238E27FC236}">
-                <a16:creationId xmlns:a16="http://schemas.microsoft.com/office/drawing/2014/main" id="{687F6725-EFB1-46C9-B912-06E34D3C853D}"/>
+                <a16:creationId xmlns:a16="http://schemas.microsoft.com/office/drawing/2014/main" id="{6322017C-305A-4F56-9595-A54708DEFD2E}"/>
               </a:ext>
             </a:extLst>
           </p:cNvPr>
@@ -10045,7 +10040,7 @@
           <p:cNvPr id="3" name="Rectangle 2">
             <a:extLst xmlns:a="http://schemas.openxmlformats.org/drawingml/2006/main">
               <a:ext uri="{FF2B5EF4-FFF2-40B4-BE49-F238E27FC236}">
-                <a16:creationId xmlns:a16="http://schemas.microsoft.com/office/drawing/2014/main" id="{17742F69-8437-483B-9C0A-A9E0E60D057A}"/>
+                <a16:creationId xmlns:a16="http://schemas.microsoft.com/office/drawing/2014/main" id="{54E4CFEB-4D1F-480D-AD73-772188BDD289}"/>
               </a:ext>
             </a:extLst>
           </p:cNvPr>
@@ -10098,7 +10093,7 @@
           <p:cNvPr id="4" name="Rectangle 3">
             <a:extLst xmlns:a="http://schemas.openxmlformats.org/drawingml/2006/main">
               <a:ext uri="{FF2B5EF4-FFF2-40B4-BE49-F238E27FC236}">
-                <a16:creationId xmlns:a16="http://schemas.microsoft.com/office/drawing/2014/main" id="{1E758038-14C0-49DE-BB7B-231861C04FF6}"/>
+                <a16:creationId xmlns:a16="http://schemas.microsoft.com/office/drawing/2014/main" id="{854E5EBB-22E3-40D2-8372-6E3BAB4E89F3}"/>
               </a:ext>
             </a:extLst>
           </p:cNvPr>
@@ -10151,7 +10146,7 @@
           <p:cNvPr id="5" name="TextBox 4">
             <a:extLst xmlns:a="http://schemas.openxmlformats.org/drawingml/2006/main">
               <a:ext uri="{FF2B5EF4-FFF2-40B4-BE49-F238E27FC236}">
-                <a16:creationId xmlns:a16="http://schemas.microsoft.com/office/drawing/2014/main" id="{40DBE2EF-6C72-4AD4-B953-C1DBE3BCDBA4}"/>
+                <a16:creationId xmlns:a16="http://schemas.microsoft.com/office/drawing/2014/main" id="{F86CD8D8-D06F-463E-B213-FD9ED83F7CBE}"/>
               </a:ext>
             </a:extLst>
           </p:cNvPr>
@@ -10214,7 +10209,7 @@
           <p:cNvPr id="6" name="Rounded Rectangle 5">
             <a:extLst xmlns:a="http://schemas.openxmlformats.org/drawingml/2006/main">
               <a:ext uri="{FF2B5EF4-FFF2-40B4-BE49-F238E27FC236}">
-                <a16:creationId xmlns:a16="http://schemas.microsoft.com/office/drawing/2014/main" id="{C340242C-EFE5-438F-9B58-E8E988362548}"/>
+                <a16:creationId xmlns:a16="http://schemas.microsoft.com/office/drawing/2014/main" id="{7941E52D-A58B-4D1D-A30E-06592AD277AA}"/>
               </a:ext>
             </a:extLst>
           </p:cNvPr>
@@ -10269,7 +10264,7 @@
           <p:cNvPr id="7" name="TextBox 6">
             <a:extLst xmlns:a="http://schemas.openxmlformats.org/drawingml/2006/main">
               <a:ext uri="{FF2B5EF4-FFF2-40B4-BE49-F238E27FC236}">
-                <a16:creationId xmlns:a16="http://schemas.microsoft.com/office/drawing/2014/main" id="{FB2E5F24-7D14-42D7-ACF5-CDC507B3270F}"/>
+                <a16:creationId xmlns:a16="http://schemas.microsoft.com/office/drawing/2014/main" id="{7C1EA024-712E-4017-82AB-B3CB214D9D29}"/>
               </a:ext>
             </a:extLst>
           </p:cNvPr>
@@ -10652,7 +10647,7 @@
           <p:nvPr/>
         </p:nvPicPr>
         <p:blipFill>
-          <a:blip xmlns:r="http://schemas.openxmlformats.org/officeDocument/2006/relationships" xmlns:a="http://schemas.openxmlformats.org/drawingml/2006/main" r:embed="Rdc4afde5397a4944"/>
+          <a:blip xmlns:r="http://schemas.openxmlformats.org/officeDocument/2006/relationships" xmlns:a="http://schemas.openxmlformats.org/drawingml/2006/main" r:embed="R217fd81bb07544fe"/>
           <a:stretch xmlns:a="http://schemas.openxmlformats.org/drawingml/2006/main">
             <a:fillRect l="0" t="0" r="0" b="0"/>
           </a:stretch>
@@ -10672,7 +10667,7 @@
           <p:cNvPr id="9" name="Rounded Rectangle 8">
             <a:extLst xmlns:a="http://schemas.openxmlformats.org/drawingml/2006/main">
               <a:ext uri="{FF2B5EF4-FFF2-40B4-BE49-F238E27FC236}">
-                <a16:creationId xmlns:a16="http://schemas.microsoft.com/office/drawing/2014/main" id="{E875D768-1322-4A3F-B390-93D0D3C63359}"/>
+                <a16:creationId xmlns:a16="http://schemas.microsoft.com/office/drawing/2014/main" id="{97D8C64F-7C54-40ED-B9E9-AFD49E4A9F14}"/>
               </a:ext>
             </a:extLst>
           </p:cNvPr>
@@ -10727,7 +10722,7 @@
           <p:cNvPr id="10" name="TextBox 9">
             <a:extLst xmlns:a="http://schemas.openxmlformats.org/drawingml/2006/main">
               <a:ext uri="{FF2B5EF4-FFF2-40B4-BE49-F238E27FC236}">
-                <a16:creationId xmlns:a16="http://schemas.microsoft.com/office/drawing/2014/main" id="{58D8B798-5532-4F00-8CB5-DD0B8FA71F60}"/>
+                <a16:creationId xmlns:a16="http://schemas.microsoft.com/office/drawing/2014/main" id="{B4C2B5A1-1E73-4836-B6C8-B1E23805CE34}"/>
               </a:ext>
             </a:extLst>
           </p:cNvPr>
@@ -10813,7 +10808,7 @@
     </p:spTree>
     <p:extLst>
       <p:ext uri="{BB962C8B-B14F-4D97-AF65-F5344CB8AC3E}">
-        <p14:creationId xmlns:p14="http://schemas.microsoft.com/office/powerpoint/2010/main" val="700816310"/>
+        <p14:creationId xmlns:p14="http://schemas.microsoft.com/office/powerpoint/2010/main" val="1909978044"/>
       </p:ext>
     </p:extLst>
   </p:cSld>
@@ -10837,7 +10832,7 @@
           <p:cNvPr id="2" name="Rectangle 1">
             <a:extLst xmlns:a="http://schemas.openxmlformats.org/drawingml/2006/main">
               <a:ext uri="{FF2B5EF4-FFF2-40B4-BE49-F238E27FC236}">
-                <a16:creationId xmlns:a16="http://schemas.microsoft.com/office/drawing/2014/main" id="{CE7A11C3-71DA-47E7-9CFD-64761BC88CD1}"/>
+                <a16:creationId xmlns:a16="http://schemas.microsoft.com/office/drawing/2014/main" id="{14ABA4FC-409E-4306-89C9-2ADD3BD74917}"/>
               </a:ext>
             </a:extLst>
           </p:cNvPr>
@@ -10890,7 +10885,7 @@
           <p:cNvPr id="3" name="Rectangle 2">
             <a:extLst xmlns:a="http://schemas.openxmlformats.org/drawingml/2006/main">
               <a:ext uri="{FF2B5EF4-FFF2-40B4-BE49-F238E27FC236}">
-                <a16:creationId xmlns:a16="http://schemas.microsoft.com/office/drawing/2014/main" id="{E2B3E492-F997-44FF-A0BD-A7CF2A584D4C}"/>
+                <a16:creationId xmlns:a16="http://schemas.microsoft.com/office/drawing/2014/main" id="{94798FD9-03D7-4AF6-8611-A7D33D457A14}"/>
               </a:ext>
             </a:extLst>
           </p:cNvPr>
@@ -10943,7 +10938,7 @@
           <p:cNvPr id="4" name="Rectangle 3">
             <a:extLst xmlns:a="http://schemas.openxmlformats.org/drawingml/2006/main">
               <a:ext uri="{FF2B5EF4-FFF2-40B4-BE49-F238E27FC236}">
-                <a16:creationId xmlns:a16="http://schemas.microsoft.com/office/drawing/2014/main" id="{40C4AE07-E9DB-44B8-AA86-D7ADB66B8B4B}"/>
+                <a16:creationId xmlns:a16="http://schemas.microsoft.com/office/drawing/2014/main" id="{B3124EE1-B196-40FD-9776-1424BA286206}"/>
               </a:ext>
             </a:extLst>
           </p:cNvPr>
@@ -10996,7 +10991,7 @@
           <p:cNvPr id="5" name="TextBox 4">
             <a:extLst xmlns:a="http://schemas.openxmlformats.org/drawingml/2006/main">
               <a:ext uri="{FF2B5EF4-FFF2-40B4-BE49-F238E27FC236}">
-                <a16:creationId xmlns:a16="http://schemas.microsoft.com/office/drawing/2014/main" id="{F5F5FAB7-D8A0-44A4-8D9B-9DFC238B38A8}"/>
+                <a16:creationId xmlns:a16="http://schemas.microsoft.com/office/drawing/2014/main" id="{9EBF54F2-A178-430A-B712-0CC2319FDB77}"/>
               </a:ext>
             </a:extLst>
           </p:cNvPr>
@@ -11059,7 +11054,7 @@
           <p:cNvPr id="6" name="Rounded Rectangle 5">
             <a:extLst xmlns:a="http://schemas.openxmlformats.org/drawingml/2006/main">
               <a:ext uri="{FF2B5EF4-FFF2-40B4-BE49-F238E27FC236}">
-                <a16:creationId xmlns:a16="http://schemas.microsoft.com/office/drawing/2014/main" id="{9204241B-FD45-4D46-A329-06C436406649}"/>
+                <a16:creationId xmlns:a16="http://schemas.microsoft.com/office/drawing/2014/main" id="{795829A9-F77C-43C5-ADE1-85B87E9275BA}"/>
               </a:ext>
             </a:extLst>
           </p:cNvPr>
@@ -11114,7 +11109,7 @@
           <p:cNvPr id="7" name="TextBox 6">
             <a:extLst xmlns:a="http://schemas.openxmlformats.org/drawingml/2006/main">
               <a:ext uri="{FF2B5EF4-FFF2-40B4-BE49-F238E27FC236}">
-                <a16:creationId xmlns:a16="http://schemas.microsoft.com/office/drawing/2014/main" id="{5264965E-9E8B-4421-95B2-0185A7513CCF}"/>
+                <a16:creationId xmlns:a16="http://schemas.microsoft.com/office/drawing/2014/main" id="{856EEE6D-5744-4F64-B9CF-B1DFDD626B1A}"/>
               </a:ext>
             </a:extLst>
           </p:cNvPr>
@@ -11351,7 +11346,7 @@
           <p:cNvPr id="8" name="Rounded Rectangle 7">
             <a:extLst xmlns:a="http://schemas.openxmlformats.org/drawingml/2006/main">
               <a:ext uri="{FF2B5EF4-FFF2-40B4-BE49-F238E27FC236}">
-                <a16:creationId xmlns:a16="http://schemas.microsoft.com/office/drawing/2014/main" id="{9A7BAFB5-05B0-4C18-8B2A-34483271FF5B}"/>
+                <a16:creationId xmlns:a16="http://schemas.microsoft.com/office/drawing/2014/main" id="{5E693F00-2792-4741-99A5-94B263CF7B57}"/>
               </a:ext>
             </a:extLst>
           </p:cNvPr>
@@ -11406,7 +11401,7 @@
           <p:cNvPr id="9" name="TextBox 8">
             <a:extLst xmlns:a="http://schemas.openxmlformats.org/drawingml/2006/main">
               <a:ext uri="{FF2B5EF4-FFF2-40B4-BE49-F238E27FC236}">
-                <a16:creationId xmlns:a16="http://schemas.microsoft.com/office/drawing/2014/main" id="{0C3D3527-44DA-4123-AAB6-BEC85B92C9B1}"/>
+                <a16:creationId xmlns:a16="http://schemas.microsoft.com/office/drawing/2014/main" id="{FA96DDAB-B504-4EAB-8E88-BEEDF8729B4D}"/>
               </a:ext>
             </a:extLst>
           </p:cNvPr>
@@ -11611,7 +11606,7 @@
     </p:spTree>
     <p:extLst>
       <p:ext uri="{BB962C8B-B14F-4D97-AF65-F5344CB8AC3E}">
-        <p14:creationId xmlns:p14="http://schemas.microsoft.com/office/powerpoint/2010/main" val="2044301991"/>
+        <p14:creationId xmlns:p14="http://schemas.microsoft.com/office/powerpoint/2010/main" val="997993178"/>
       </p:ext>
     </p:extLst>
   </p:cSld>
@@ -11635,7 +11630,7 @@
           <p:cNvPr id="2" name="Rectangle 1">
             <a:extLst xmlns:a="http://schemas.openxmlformats.org/drawingml/2006/main">
               <a:ext uri="{FF2B5EF4-FFF2-40B4-BE49-F238E27FC236}">
-                <a16:creationId xmlns:a16="http://schemas.microsoft.com/office/drawing/2014/main" id="{8540B0ED-E1FC-45F7-B4B3-E666D12FC96D}"/>
+                <a16:creationId xmlns:a16="http://schemas.microsoft.com/office/drawing/2014/main" id="{69F0A620-86C2-4084-AFC5-F97C14151DD2}"/>
               </a:ext>
             </a:extLst>
           </p:cNvPr>
@@ -11688,7 +11683,7 @@
           <p:cNvPr id="3" name="Rectangle 2">
             <a:extLst xmlns:a="http://schemas.openxmlformats.org/drawingml/2006/main">
               <a:ext uri="{FF2B5EF4-FFF2-40B4-BE49-F238E27FC236}">
-                <a16:creationId xmlns:a16="http://schemas.microsoft.com/office/drawing/2014/main" id="{3BC546D6-D1C3-4FFB-AA12-3E189D1C82EF}"/>
+                <a16:creationId xmlns:a16="http://schemas.microsoft.com/office/drawing/2014/main" id="{772A335E-6253-4EBF-A453-E2C63DD7F0D4}"/>
               </a:ext>
             </a:extLst>
           </p:cNvPr>
@@ -11741,7 +11736,7 @@
           <p:cNvPr id="4" name="Rectangle 3">
             <a:extLst xmlns:a="http://schemas.openxmlformats.org/drawingml/2006/main">
               <a:ext uri="{FF2B5EF4-FFF2-40B4-BE49-F238E27FC236}">
-                <a16:creationId xmlns:a16="http://schemas.microsoft.com/office/drawing/2014/main" id="{E26E1B9A-20B6-4630-9044-768A03989CF5}"/>
+                <a16:creationId xmlns:a16="http://schemas.microsoft.com/office/drawing/2014/main" id="{FF785CC3-2774-49C0-A222-7CB78F3EAE76}"/>
               </a:ext>
             </a:extLst>
           </p:cNvPr>
@@ -11794,7 +11789,7 @@
           <p:cNvPr id="5" name="TextBox 4">
             <a:extLst xmlns:a="http://schemas.openxmlformats.org/drawingml/2006/main">
               <a:ext uri="{FF2B5EF4-FFF2-40B4-BE49-F238E27FC236}">
-                <a16:creationId xmlns:a16="http://schemas.microsoft.com/office/drawing/2014/main" id="{58265557-8535-463D-8E29-F92635A228EA}"/>
+                <a16:creationId xmlns:a16="http://schemas.microsoft.com/office/drawing/2014/main" id="{E7B5E16E-53FF-4E18-9B7D-3130B26AE1B4}"/>
               </a:ext>
             </a:extLst>
           </p:cNvPr>
@@ -11857,7 +11852,7 @@
           <p:cNvPr id="6" name="Rounded Rectangle 5">
             <a:extLst xmlns:a="http://schemas.openxmlformats.org/drawingml/2006/main">
               <a:ext uri="{FF2B5EF4-FFF2-40B4-BE49-F238E27FC236}">
-                <a16:creationId xmlns:a16="http://schemas.microsoft.com/office/drawing/2014/main" id="{A9A49EB8-901F-46BA-B78C-2273A64857A8}"/>
+                <a16:creationId xmlns:a16="http://schemas.microsoft.com/office/drawing/2014/main" id="{B84C5DA0-7A88-420F-B6F8-6897826EFDD8}"/>
               </a:ext>
             </a:extLst>
           </p:cNvPr>
@@ -11912,7 +11907,7 @@
           <p:cNvPr id="7" name="TextBox 6">
             <a:extLst xmlns:a="http://schemas.openxmlformats.org/drawingml/2006/main">
               <a:ext uri="{FF2B5EF4-FFF2-40B4-BE49-F238E27FC236}">
-                <a16:creationId xmlns:a16="http://schemas.microsoft.com/office/drawing/2014/main" id="{565EEACD-694B-4BDF-9B37-BEC9C4F9B6A6}"/>
+                <a16:creationId xmlns:a16="http://schemas.microsoft.com/office/drawing/2014/main" id="{5414A0E2-3521-47CD-A514-123BE8D8300E}"/>
               </a:ext>
             </a:extLst>
           </p:cNvPr>
@@ -12035,7 +12030,7 @@
           <p:cNvPr id="8" name="Rounded Rectangle 7">
             <a:extLst xmlns:a="http://schemas.openxmlformats.org/drawingml/2006/main">
               <a:ext uri="{FF2B5EF4-FFF2-40B4-BE49-F238E27FC236}">
-                <a16:creationId xmlns:a16="http://schemas.microsoft.com/office/drawing/2014/main" id="{F33D9A35-7A4E-4ADB-BD55-AEA3C6AB5B2E}"/>
+                <a16:creationId xmlns:a16="http://schemas.microsoft.com/office/drawing/2014/main" id="{EDAC4894-8736-4779-9617-9A237715673F}"/>
               </a:ext>
             </a:extLst>
           </p:cNvPr>
@@ -12090,7 +12085,7 @@
           <p:cNvPr id="9" name="TextBox 8">
             <a:extLst xmlns:a="http://schemas.openxmlformats.org/drawingml/2006/main">
               <a:ext uri="{FF2B5EF4-FFF2-40B4-BE49-F238E27FC236}">
-                <a16:creationId xmlns:a16="http://schemas.microsoft.com/office/drawing/2014/main" id="{CEF697E1-27A7-4EAA-AD68-AA1E01883E88}"/>
+                <a16:creationId xmlns:a16="http://schemas.microsoft.com/office/drawing/2014/main" id="{B4DBC302-F590-46AD-92B9-842D13B19EF0}"/>
               </a:ext>
             </a:extLst>
           </p:cNvPr>
@@ -12213,7 +12208,7 @@
           <p:cNvPr id="10" name="Rounded Rectangle 9">
             <a:extLst xmlns:a="http://schemas.openxmlformats.org/drawingml/2006/main">
               <a:ext uri="{FF2B5EF4-FFF2-40B4-BE49-F238E27FC236}">
-                <a16:creationId xmlns:a16="http://schemas.microsoft.com/office/drawing/2014/main" id="{6D9CFD45-AB27-44A3-B2BE-185304864318}"/>
+                <a16:creationId xmlns:a16="http://schemas.microsoft.com/office/drawing/2014/main" id="{F3D87629-35C8-4B63-9312-71F774B807CC}"/>
               </a:ext>
             </a:extLst>
           </p:cNvPr>
@@ -12268,7 +12263,7 @@
           <p:cNvPr id="11" name="TextBox 10">
             <a:extLst xmlns:a="http://schemas.openxmlformats.org/drawingml/2006/main">
               <a:ext uri="{FF2B5EF4-FFF2-40B4-BE49-F238E27FC236}">
-                <a16:creationId xmlns:a16="http://schemas.microsoft.com/office/drawing/2014/main" id="{CEE48DA2-A75A-4546-AE0D-B3BAFC6D0727}"/>
+                <a16:creationId xmlns:a16="http://schemas.microsoft.com/office/drawing/2014/main" id="{9AD9E8C6-145A-41F7-B32E-44BE43E59C0A}"/>
               </a:ext>
             </a:extLst>
           </p:cNvPr>
@@ -12367,7 +12362,7 @@
                 <a:ea typeface="Calibri"/>
                 <a:cs typeface="Calibri"/>
               </a:rPr>
-              <a:t>Condition      Accuracy    Macro-F1    Delta vs No-RAG</a:t>
+              <a:t>Condition      Accuracy    Macro-F1 (474 lớp)    Delta vs No-RAG</a:t>
             </a:r>
           </a:p>
           <a:p xmlns:a="http://schemas.openxmlformats.org/drawingml/2006/main">
@@ -12394,7 +12389,7 @@
                 <a:ea typeface="Calibri"/>
                 <a:cs typeface="Calibri"/>
               </a:rPr>
-              <a:t>-------------------------------------------------------</a:t>
+              <a:t>-----------------------------------------------------------------</a:t>
             </a:r>
           </a:p>
           <a:p xmlns:a="http://schemas.openxmlformats.org/drawingml/2006/main">
@@ -12421,7 +12416,7 @@
                 <a:ea typeface="Calibri"/>
                 <a:cs typeface="Calibri"/>
               </a:rPr>
-              <a:t>no_rag         0.5000      0.0929      baseline</a:t>
+              <a:t>no_rag         0.5000      0.0929                baseline</a:t>
             </a:r>
           </a:p>
           <a:p xmlns:a="http://schemas.openxmlformats.org/drawingml/2006/main">
@@ -12448,7 +12443,7 @@
                 <a:ea typeface="Calibri"/>
                 <a:cs typeface="Calibri"/>
               </a:rPr>
-              <a:t>rag_k1         0.5200      0.1000      +0.0200 (+0.0071 F1)</a:t>
+              <a:t>rag_k1         0.5200      0.1000                +0.0200 (+0.0071 F1)</a:t>
             </a:r>
           </a:p>
           <a:p xmlns:a="http://schemas.openxmlformats.org/drawingml/2006/main">
@@ -12475,7 +12470,7 @@
                 <a:ea typeface="Calibri"/>
                 <a:cs typeface="Calibri"/>
               </a:rPr>
-              <a:t>rag_k3         0.5500      0.1200      +0.0500 (+0.0271 F1)</a:t>
+              <a:t>rag_k3         0.5500      0.1200                +0.0500 (+0.0271 F1)</a:t>
             </a:r>
           </a:p>
           <a:p xmlns:a="http://schemas.openxmlformats.org/drawingml/2006/main">
@@ -12502,7 +12497,7 @@
                 <a:ea typeface="Calibri"/>
                 <a:cs typeface="Calibri"/>
               </a:rPr>
-              <a:t>rag_k5         0.5800      0.1400      +0.0800 (+0.0471 F1)</a:t>
+              <a:t>rag_k5         0.5800      0.1400                +0.0800 (+0.0471 F1)</a:t>
             </a:r>
           </a:p>
           <a:p xmlns:a="http://schemas.openxmlformats.org/drawingml/2006/main">
@@ -12529,7 +12524,7 @@
                 <a:ea typeface="Calibri"/>
                 <a:cs typeface="Calibri"/>
               </a:rPr>
-              <a:t>rag_k10        0.6000      0.1600      +0.1000 (+0.0671 F1)</a:t>
+              <a:t>rag_k10        0.6000      0.1600                +0.1000 (+0.0671 F1)</a:t>
             </a:r>
           </a:p>
           <a:p xmlns:a="http://schemas.openxmlformats.org/drawingml/2006/main">
@@ -12618,7 +12613,7 @@
     </p:spTree>
     <p:extLst>
       <p:ext uri="{BB962C8B-B14F-4D97-AF65-F5344CB8AC3E}">
-        <p14:creationId xmlns:p14="http://schemas.microsoft.com/office/powerpoint/2010/main" val="196206519"/>
+        <p14:creationId xmlns:p14="http://schemas.microsoft.com/office/powerpoint/2010/main" val="1111915281"/>
       </p:ext>
     </p:extLst>
   </p:cSld>
@@ -12642,7 +12637,7 @@
           <p:cNvPr id="2" name="Rectangle 1">
             <a:extLst xmlns:a="http://schemas.openxmlformats.org/drawingml/2006/main">
               <a:ext uri="{FF2B5EF4-FFF2-40B4-BE49-F238E27FC236}">
-                <a16:creationId xmlns:a16="http://schemas.microsoft.com/office/drawing/2014/main" id="{92531751-03FD-4EFE-B94F-2834555A2C64}"/>
+                <a16:creationId xmlns:a16="http://schemas.microsoft.com/office/drawing/2014/main" id="{18F602CB-F031-4819-AE28-5441C23D0F7D}"/>
               </a:ext>
             </a:extLst>
           </p:cNvPr>
@@ -12695,7 +12690,7 @@
           <p:cNvPr id="3" name="Rectangle 2">
             <a:extLst xmlns:a="http://schemas.openxmlformats.org/drawingml/2006/main">
               <a:ext uri="{FF2B5EF4-FFF2-40B4-BE49-F238E27FC236}">
-                <a16:creationId xmlns:a16="http://schemas.microsoft.com/office/drawing/2014/main" id="{7BCDB3E6-6731-4AEC-B3FD-3F21354D6B93}"/>
+                <a16:creationId xmlns:a16="http://schemas.microsoft.com/office/drawing/2014/main" id="{73EDA1A5-C1B9-48EA-AF69-7E0F26FFA630}"/>
               </a:ext>
             </a:extLst>
           </p:cNvPr>
@@ -12748,7 +12743,7 @@
           <p:cNvPr id="4" name="Rectangle 3">
             <a:extLst xmlns:a="http://schemas.openxmlformats.org/drawingml/2006/main">
               <a:ext uri="{FF2B5EF4-FFF2-40B4-BE49-F238E27FC236}">
-                <a16:creationId xmlns:a16="http://schemas.microsoft.com/office/drawing/2014/main" id="{20D4F9AE-8432-4412-9CD9-6460E8B9E2ED}"/>
+                <a16:creationId xmlns:a16="http://schemas.microsoft.com/office/drawing/2014/main" id="{620725FD-78B2-4D16-9303-046F74F0CF44}"/>
               </a:ext>
             </a:extLst>
           </p:cNvPr>
@@ -12801,7 +12796,7 @@
           <p:cNvPr id="5" name="TextBox 4">
             <a:extLst xmlns:a="http://schemas.openxmlformats.org/drawingml/2006/main">
               <a:ext uri="{FF2B5EF4-FFF2-40B4-BE49-F238E27FC236}">
-                <a16:creationId xmlns:a16="http://schemas.microsoft.com/office/drawing/2014/main" id="{A452D14D-DED0-45F9-A573-0E45748C3830}"/>
+                <a16:creationId xmlns:a16="http://schemas.microsoft.com/office/drawing/2014/main" id="{89E998A8-7C90-48EC-96A2-E030D8B25078}"/>
               </a:ext>
             </a:extLst>
           </p:cNvPr>
@@ -12864,7 +12859,7 @@
           <p:cNvPr id="6" name="Rounded Rectangle 5">
             <a:extLst xmlns:a="http://schemas.openxmlformats.org/drawingml/2006/main">
               <a:ext uri="{FF2B5EF4-FFF2-40B4-BE49-F238E27FC236}">
-                <a16:creationId xmlns:a16="http://schemas.microsoft.com/office/drawing/2014/main" id="{D351161A-D771-4537-8987-98ACD66D49E9}"/>
+                <a16:creationId xmlns:a16="http://schemas.microsoft.com/office/drawing/2014/main" id="{8C6A5984-A1BB-44C9-9267-759D33B63E92}"/>
               </a:ext>
             </a:extLst>
           </p:cNvPr>
@@ -12919,7 +12914,7 @@
           <p:cNvPr id="7" name="TextBox 6">
             <a:extLst xmlns:a="http://schemas.openxmlformats.org/drawingml/2006/main">
               <a:ext uri="{FF2B5EF4-FFF2-40B4-BE49-F238E27FC236}">
-                <a16:creationId xmlns:a16="http://schemas.microsoft.com/office/drawing/2014/main" id="{BF024B9A-639A-42A4-866F-3548F17D6736}"/>
+                <a16:creationId xmlns:a16="http://schemas.microsoft.com/office/drawing/2014/main" id="{686C547B-E549-4D85-940E-E50C8003153F}"/>
               </a:ext>
             </a:extLst>
           </p:cNvPr>
@@ -12991,33 +12986,6 @@
                 <a:ea typeface="Calibri"/>
                 <a:cs typeface="Calibri"/>
               </a:rPr>
-              <a:t/>
-            </a:r>
-          </a:p>
-          <a:p xmlns:a="http://schemas.openxmlformats.org/drawingml/2006/main">
-            <a:pPr>
-              <a:spcBef>
-                <a:spcPts val="200"/>
-              </a:spcBef>
-              <a:buNone/>
-              <a:defRPr sz="1050">
-                <a:solidFill>
-                  <a:srgbClr val="0F172A"/>
-                </a:solidFill>
-                <a:latin typeface="Calibri"/>
-                <a:ea typeface="Calibri"/>
-                <a:cs typeface="Calibri"/>
-              </a:defRPr>
-            </a:pPr>
-            <a:r>
-              <a:rPr sz="825">
-                <a:solidFill>
-                  <a:srgbClr val="0F172A"/>
-                </a:solidFill>
-                <a:latin typeface="Calibri"/>
-                <a:ea typeface="Calibri"/>
-                <a:cs typeface="Calibri"/>
-              </a:rPr>
               <a:t>▶ ZONE 1: HISTORICAL DEV PILOT BASELINE (20 Requests Responses API)</a:t>
             </a:r>
           </a:p>
@@ -13099,7 +13067,7 @@
                 <a:ea typeface="Calibri"/>
                 <a:cs typeface="Calibri"/>
               </a:rPr>
-              <a:t/>
+              <a:t>▶ ZONE 2: DIAGNOSTIC TEST FIXTURE TELEMETRY (N=718 Scorable Views)</a:t>
             </a:r>
           </a:p>
           <a:p xmlns:a="http://schemas.openxmlformats.org/drawingml/2006/main">
@@ -13126,7 +13094,7 @@
                 <a:ea typeface="Calibri"/>
                 <a:cs typeface="Calibri"/>
               </a:rPr>
-              <a:t>▶ ZONE 2: DIAGNOSTIC TEST FIXTURE TELEMETRY (N=718 Scorable Views)</a:t>
+              <a:t>•  no_rag: trễ trung vị 7.89s (trung bình 2.90s) | 643.0 prompt tokens | ~0.000390 USD / logical req.</a:t>
             </a:r>
           </a:p>
           <a:p xmlns:a="http://schemas.openxmlformats.org/drawingml/2006/main">
@@ -13153,61 +13121,7 @@
                 <a:ea typeface="Calibri"/>
                 <a:cs typeface="Calibri"/>
               </a:rPr>
-              <a:t>•  no_rag: trễ trung vị 7.89s | 643.0 prompt tokens | ~0.000390 USD / logical req.</a:t>
-            </a:r>
-          </a:p>
-          <a:p xmlns:a="http://schemas.openxmlformats.org/drawingml/2006/main">
-            <a:pPr>
-              <a:spcBef>
-                <a:spcPts val="200"/>
-              </a:spcBef>
-              <a:buNone/>
-              <a:defRPr sz="1050">
-                <a:solidFill>
-                  <a:srgbClr val="0F172A"/>
-                </a:solidFill>
-                <a:latin typeface="Calibri"/>
-                <a:ea typeface="Calibri"/>
-                <a:cs typeface="Calibri"/>
-              </a:defRPr>
-            </a:pPr>
-            <a:r>
-              <a:rPr sz="825">
-                <a:solidFill>
-                  <a:srgbClr val="0F172A"/>
-                </a:solidFill>
-                <a:latin typeface="Calibri"/>
-                <a:ea typeface="Calibri"/>
-                <a:cs typeface="Calibri"/>
-              </a:rPr>
-              <a:t>•  rag_k10: trễ trung vị 9.90s | 4536.5 prompt tokens | ~0.001870 USD / logical req.</a:t>
-            </a:r>
-          </a:p>
-          <a:p xmlns:a="http://schemas.openxmlformats.org/drawingml/2006/main">
-            <a:pPr>
-              <a:spcBef>
-                <a:spcPts val="200"/>
-              </a:spcBef>
-              <a:buNone/>
-              <a:defRPr sz="1050">
-                <a:solidFill>
-                  <a:srgbClr val="0F172A"/>
-                </a:solidFill>
-                <a:latin typeface="Calibri"/>
-                <a:ea typeface="Calibri"/>
-                <a:cs typeface="Calibri"/>
-              </a:defRPr>
-            </a:pPr>
-            <a:r>
-              <a:rPr sz="825">
-                <a:solidFill>
-                  <a:srgbClr val="0F172A"/>
-                </a:solidFill>
-                <a:latin typeface="Calibri"/>
-                <a:ea typeface="Calibri"/>
-                <a:cs typeface="Calibri"/>
-              </a:rPr>
-              <a:t/>
+              <a:t>•  rag_k10: trễ trung vị 9.90s (trung bình 4.37s) | 4536.5 prompt tokens | ~0.001870 USD / logical req.</a:t>
             </a:r>
           </a:p>
           <a:p xmlns:a="http://schemas.openxmlformats.org/drawingml/2006/main">
@@ -13261,7 +13175,7 @@
                 <a:ea typeface="Calibri"/>
                 <a:cs typeface="Calibri"/>
               </a:rPr>
-              <a:t>•  Hạch toán toàn thể điều kiện chuẩn (Canonical Total): 8.50 USD (dự phóng ma trận 6,400 requests).</a:t>
+              <a:t>•  Hạch toán toàn thể điều kiện chuẩn (Canonical Total): 8.50 USD ($6.57575890 USD đã quyết toán).</a:t>
             </a:r>
           </a:p>
           <a:p xmlns:a="http://schemas.openxmlformats.org/drawingml/2006/main">
@@ -13315,7 +13229,34 @@
                 <a:ea typeface="Calibri"/>
                 <a:cs typeface="Calibri"/>
               </a:rPr>
-              <a:t>•  Ngân sách chưa cam kết còn lại (Net Remaining): 11.44 USD.</a:t>
+              <a:t>•  Tổng chi phí đã cam kết hạch toán: $6.63 USD ($6.62839900 USD total accounted spend).</a:t>
+            </a:r>
+          </a:p>
+          <a:p xmlns:a="http://schemas.openxmlformats.org/drawingml/2006/main">
+            <a:pPr>
+              <a:spcBef>
+                <a:spcPts val="200"/>
+              </a:spcBef>
+              <a:buNone/>
+              <a:defRPr sz="1050">
+                <a:solidFill>
+                  <a:srgbClr val="0F172A"/>
+                </a:solidFill>
+                <a:latin typeface="Calibri"/>
+                <a:ea typeface="Calibri"/>
+                <a:cs typeface="Calibri"/>
+              </a:defRPr>
+            </a:pPr>
+            <a:r>
+              <a:rPr sz="825">
+                <a:solidFill>
+                  <a:srgbClr val="0F172A"/>
+                </a:solidFill>
+                <a:latin typeface="Calibri"/>
+                <a:ea typeface="Calibri"/>
+                <a:cs typeface="Calibri"/>
+              </a:rPr>
+              <a:t>•  Ngân sách chưa cam kết còn lại (Net Remaining): 11.44 USD ($13.36160100 USD khả dụng).</a:t>
             </a:r>
           </a:p>
           <a:p xmlns:a="http://schemas.openxmlformats.org/drawingml/2006/main">
@@ -13356,7 +13297,7 @@
           <p:nvPr/>
         </p:nvPicPr>
         <p:blipFill>
-          <a:blip xmlns:r="http://schemas.openxmlformats.org/officeDocument/2006/relationships" xmlns:a="http://schemas.openxmlformats.org/drawingml/2006/main" r:embed="R3294023274504ede"/>
+          <a:blip xmlns:r="http://schemas.openxmlformats.org/officeDocument/2006/relationships" xmlns:a="http://schemas.openxmlformats.org/drawingml/2006/main" r:embed="R4c8c88d642e4400a"/>
           <a:stretch xmlns:a="http://schemas.openxmlformats.org/drawingml/2006/main">
             <a:fillRect l="0" t="0" r="0" b="0"/>
           </a:stretch>
@@ -13376,7 +13317,7 @@
           <p:cNvPr id="9" name="Rounded Rectangle 8">
             <a:extLst xmlns:a="http://schemas.openxmlformats.org/drawingml/2006/main">
               <a:ext uri="{FF2B5EF4-FFF2-40B4-BE49-F238E27FC236}">
-                <a16:creationId xmlns:a16="http://schemas.microsoft.com/office/drawing/2014/main" id="{919AC1F1-15AD-437A-816A-8FF2C21A7D5E}"/>
+                <a16:creationId xmlns:a16="http://schemas.microsoft.com/office/drawing/2014/main" id="{E1BFE4F3-AD8D-4191-9B75-D40A2541EFF4}"/>
               </a:ext>
             </a:extLst>
           </p:cNvPr>
@@ -13431,7 +13372,7 @@
           <p:cNvPr id="10" name="TextBox 9">
             <a:extLst xmlns:a="http://schemas.openxmlformats.org/drawingml/2006/main">
               <a:ext uri="{FF2B5EF4-FFF2-40B4-BE49-F238E27FC236}">
-                <a16:creationId xmlns:a16="http://schemas.microsoft.com/office/drawing/2014/main" id="{3A1128B3-9AE8-476B-99FA-544C3534B638}"/>
+                <a16:creationId xmlns:a16="http://schemas.microsoft.com/office/drawing/2014/main" id="{9733DE2B-7BCD-4C05-B427-50651CB6CCF8}"/>
               </a:ext>
             </a:extLst>
           </p:cNvPr>
@@ -13514,7 +13455,7 @@
     </p:spTree>
     <p:extLst>
       <p:ext uri="{BB962C8B-B14F-4D97-AF65-F5344CB8AC3E}">
-        <p14:creationId xmlns:p14="http://schemas.microsoft.com/office/powerpoint/2010/main" val="945164180"/>
+        <p14:creationId xmlns:p14="http://schemas.microsoft.com/office/powerpoint/2010/main" val="945939330"/>
       </p:ext>
     </p:extLst>
   </p:cSld>

--- a/reports/evidence/fixture_populated_slides.pptx
+++ b/reports/evidence/fixture_populated_slides.pptx
@@ -2,24 +2,24 @@
 <file path=ppt/presentation.xml><?xml version="1.0" encoding="utf-8"?>
 <p:presentation xmlns:p="http://schemas.openxmlformats.org/presentationml/2006/main">
   <p:sldMasterIdLst>
-    <p:sldMasterId xmlns:r="http://schemas.openxmlformats.org/officeDocument/2006/relationships" id="2147483648" r:id="R06eba26b0031408b"/>
+    <p:sldMasterId xmlns:r="http://schemas.openxmlformats.org/officeDocument/2006/relationships" id="2147483648" r:id="Rdd95dc7191174d01"/>
   </p:sldMasterIdLst>
   <p:notesMasterIdLst>
-    <p:notesMasterId xmlns:r="http://schemas.openxmlformats.org/officeDocument/2006/relationships" r:id="Rd0676eb2cbdd4624"/>
+    <p:notesMasterId xmlns:r="http://schemas.openxmlformats.org/officeDocument/2006/relationships" r:id="R5a1c45a77eed4a58"/>
   </p:notesMasterIdLst>
   <p:sldIdLst>
-    <p:sldId xmlns:r="http://schemas.openxmlformats.org/officeDocument/2006/relationships" id="256" r:id="R704dc800342a4958"/>
-    <p:sldId xmlns:r="http://schemas.openxmlformats.org/officeDocument/2006/relationships" id="257" r:id="Rec9c0df903a74190"/>
-    <p:sldId xmlns:r="http://schemas.openxmlformats.org/officeDocument/2006/relationships" id="258" r:id="R022b2cef642e496b"/>
-    <p:sldId xmlns:r="http://schemas.openxmlformats.org/officeDocument/2006/relationships" id="259" r:id="R2d6bcd37c10d40ee"/>
-    <p:sldId xmlns:r="http://schemas.openxmlformats.org/officeDocument/2006/relationships" id="260" r:id="R003d1749a3b94a10"/>
-    <p:sldId xmlns:r="http://schemas.openxmlformats.org/officeDocument/2006/relationships" id="261" r:id="Rb2d35a6f21314d86"/>
-    <p:sldId xmlns:r="http://schemas.openxmlformats.org/officeDocument/2006/relationships" id="262" r:id="R19647c8cc8d343bd"/>
-    <p:sldId xmlns:r="http://schemas.openxmlformats.org/officeDocument/2006/relationships" id="263" r:id="Re13eaf99b8054685"/>
-    <p:sldId xmlns:r="http://schemas.openxmlformats.org/officeDocument/2006/relationships" id="264" r:id="R73f99c8719e849f2"/>
-    <p:sldId xmlns:r="http://schemas.openxmlformats.org/officeDocument/2006/relationships" id="265" r:id="R87ca236a34b74c7e"/>
-    <p:sldId xmlns:r="http://schemas.openxmlformats.org/officeDocument/2006/relationships" id="266" r:id="Rdd16690946ed4743"/>
-    <p:sldId xmlns:r="http://schemas.openxmlformats.org/officeDocument/2006/relationships" id="267" r:id="Ra1bfd998b5994d42"/>
+    <p:sldId xmlns:r="http://schemas.openxmlformats.org/officeDocument/2006/relationships" id="256" r:id="R5383c821915e4eb8"/>
+    <p:sldId xmlns:r="http://schemas.openxmlformats.org/officeDocument/2006/relationships" id="257" r:id="R4e5bd8b8396e42d0"/>
+    <p:sldId xmlns:r="http://schemas.openxmlformats.org/officeDocument/2006/relationships" id="258" r:id="R8764f93c7c294f95"/>
+    <p:sldId xmlns:r="http://schemas.openxmlformats.org/officeDocument/2006/relationships" id="259" r:id="R5cc3db0f429048e5"/>
+    <p:sldId xmlns:r="http://schemas.openxmlformats.org/officeDocument/2006/relationships" id="260" r:id="R86eac21e4ecd4e0d"/>
+    <p:sldId xmlns:r="http://schemas.openxmlformats.org/officeDocument/2006/relationships" id="261" r:id="Rc2bacc070ce54099"/>
+    <p:sldId xmlns:r="http://schemas.openxmlformats.org/officeDocument/2006/relationships" id="262" r:id="Re67d261329534aa4"/>
+    <p:sldId xmlns:r="http://schemas.openxmlformats.org/officeDocument/2006/relationships" id="263" r:id="Rab5461ca5b8f47ea"/>
+    <p:sldId xmlns:r="http://schemas.openxmlformats.org/officeDocument/2006/relationships" id="264" r:id="R7b368c83b7fc4be9"/>
+    <p:sldId xmlns:r="http://schemas.openxmlformats.org/officeDocument/2006/relationships" id="265" r:id="R06eb641dd8054a70"/>
+    <p:sldId xmlns:r="http://schemas.openxmlformats.org/officeDocument/2006/relationships" id="266" r:id="R21b8d656587545f7"/>
+    <p:sldId xmlns:r="http://schemas.openxmlformats.org/officeDocument/2006/relationships" id="267" r:id="Rd304273cf0f84554"/>
   </p:sldIdLst>
   <p:sldSz cx="12191695" cy="6858000"/>
   <p:notesSz cx="6858000" cy="9144000"/>
@@ -1473,7 +1473,7 @@
           <p:cNvPr id="2" name="Title 1">
             <a:extLst xmlns:a="http://schemas.openxmlformats.org/drawingml/2006/main">
               <a:ext uri="{FF2B5EF4-FFF2-40B4-BE49-F238E27FC236}">
-                <a16:creationId xmlns:a16="http://schemas.microsoft.com/office/drawing/2014/main" id="{2C8F751D-BBB2-407F-B1FD-CBAA03D038A3}"/>
+                <a16:creationId xmlns:a16="http://schemas.microsoft.com/office/drawing/2014/main" id="{6D09D927-F6CC-4BAC-9C35-B874E18C513E}"/>
               </a:ext>
             </a:extLst>
           </p:cNvPr>
@@ -1506,7 +1506,7 @@
           <p:cNvPr id="3" name="Subtitle 2">
             <a:extLst xmlns:a="http://schemas.openxmlformats.org/drawingml/2006/main">
               <a:ext uri="{FF2B5EF4-FFF2-40B4-BE49-F238E27FC236}">
-                <a16:creationId xmlns:a16="http://schemas.microsoft.com/office/drawing/2014/main" id="{A41EDC47-C5D2-4863-BFC5-EF89B610870E}"/>
+                <a16:creationId xmlns:a16="http://schemas.microsoft.com/office/drawing/2014/main" id="{CFC2FE08-E5D5-4E8C-90AE-6EDD974A4ABB}"/>
               </a:ext>
             </a:extLst>
           </p:cNvPr>
@@ -1630,7 +1630,7 @@
           <p:cNvPr id="4" name="Date Placeholder 3">
             <a:extLst xmlns:a="http://schemas.openxmlformats.org/drawingml/2006/main">
               <a:ext uri="{FF2B5EF4-FFF2-40B4-BE49-F238E27FC236}">
-                <a16:creationId xmlns:a16="http://schemas.microsoft.com/office/drawing/2014/main" id="{A6E046C5-078F-4B7F-9529-ECB3469A2B75}"/>
+                <a16:creationId xmlns:a16="http://schemas.microsoft.com/office/drawing/2014/main" id="{71E6E9A4-EB64-4BFF-9A46-77FE6C57C8FB}"/>
               </a:ext>
             </a:extLst>
           </p:cNvPr>
@@ -1658,7 +1658,7 @@
           <p:cNvPr id="5" name="Footer Placeholder 4">
             <a:extLst xmlns:a="http://schemas.openxmlformats.org/drawingml/2006/main">
               <a:ext uri="{FF2B5EF4-FFF2-40B4-BE49-F238E27FC236}">
-                <a16:creationId xmlns:a16="http://schemas.microsoft.com/office/drawing/2014/main" id="{655D993E-1EA7-4FC2-B8B0-6CF8DF19FB1C}"/>
+                <a16:creationId xmlns:a16="http://schemas.microsoft.com/office/drawing/2014/main" id="{93FC53D0-AC80-40BA-93CE-39982E552B52}"/>
               </a:ext>
             </a:extLst>
           </p:cNvPr>
@@ -1683,7 +1683,7 @@
           <p:cNvPr id="6" name="Slide Number Placeholder 5">
             <a:extLst xmlns:a="http://schemas.openxmlformats.org/drawingml/2006/main">
               <a:ext uri="{FF2B5EF4-FFF2-40B4-BE49-F238E27FC236}">
-                <a16:creationId xmlns:a16="http://schemas.microsoft.com/office/drawing/2014/main" id="{11215D80-0CF2-49A8-96B2-579BD8C5870B}"/>
+                <a16:creationId xmlns:a16="http://schemas.microsoft.com/office/drawing/2014/main" id="{4726FCA9-8AD6-400A-8DFC-82D8A962D503}"/>
               </a:ext>
             </a:extLst>
           </p:cNvPr>
@@ -1728,7 +1728,7 @@
           <p:cNvPr id="2" name="Title 1">
             <a:extLst xmlns:a="http://schemas.openxmlformats.org/drawingml/2006/main">
               <a:ext uri="{FF2B5EF4-FFF2-40B4-BE49-F238E27FC236}">
-                <a16:creationId xmlns:a16="http://schemas.microsoft.com/office/drawing/2014/main" id="{181DC361-3EB9-4DFC-B7A3-A43468FD3349}"/>
+                <a16:creationId xmlns:a16="http://schemas.microsoft.com/office/drawing/2014/main" id="{27EAF28B-E2FB-4430-8248-05D0EE2F1FC5}"/>
               </a:ext>
             </a:extLst>
           </p:cNvPr>
@@ -1756,7 +1756,7 @@
           <p:cNvPr id="3" name="Vertical Text Placeholder 2">
             <a:extLst xmlns:a="http://schemas.openxmlformats.org/drawingml/2006/main">
               <a:ext uri="{FF2B5EF4-FFF2-40B4-BE49-F238E27FC236}">
-                <a16:creationId xmlns:a16="http://schemas.microsoft.com/office/drawing/2014/main" id="{F3CD5E12-99AA-4500-8A0A-53C7CB1972B6}"/>
+                <a16:creationId xmlns:a16="http://schemas.microsoft.com/office/drawing/2014/main" id="{A1C0B1BE-B7C7-4620-A449-3E65FE8DBEBF}"/>
               </a:ext>
             </a:extLst>
           </p:cNvPr>
@@ -1819,7 +1819,7 @@
           <p:cNvPr id="4" name="Date Placeholder 3">
             <a:extLst xmlns:a="http://schemas.openxmlformats.org/drawingml/2006/main">
               <a:ext uri="{FF2B5EF4-FFF2-40B4-BE49-F238E27FC236}">
-                <a16:creationId xmlns:a16="http://schemas.microsoft.com/office/drawing/2014/main" id="{C1DD2F1F-870A-470D-8834-8C5AACE752DB}"/>
+                <a16:creationId xmlns:a16="http://schemas.microsoft.com/office/drawing/2014/main" id="{073ABDA0-B94D-44FB-B514-06823C9F7932}"/>
               </a:ext>
             </a:extLst>
           </p:cNvPr>
@@ -1847,7 +1847,7 @@
           <p:cNvPr id="5" name="Footer Placeholder 4">
             <a:extLst xmlns:a="http://schemas.openxmlformats.org/drawingml/2006/main">
               <a:ext uri="{FF2B5EF4-FFF2-40B4-BE49-F238E27FC236}">
-                <a16:creationId xmlns:a16="http://schemas.microsoft.com/office/drawing/2014/main" id="{917A3C8E-8497-4A79-A94C-9B5ECFCDDBBE}"/>
+                <a16:creationId xmlns:a16="http://schemas.microsoft.com/office/drawing/2014/main" id="{678F8C91-2E93-4644-8E8D-1E9AE714A178}"/>
               </a:ext>
             </a:extLst>
           </p:cNvPr>
@@ -1872,7 +1872,7 @@
           <p:cNvPr id="6" name="Slide Number Placeholder 5">
             <a:extLst xmlns:a="http://schemas.openxmlformats.org/drawingml/2006/main">
               <a:ext uri="{FF2B5EF4-FFF2-40B4-BE49-F238E27FC236}">
-                <a16:creationId xmlns:a16="http://schemas.microsoft.com/office/drawing/2014/main" id="{EB0A56A6-F4BF-4CF9-953A-746C44187DBC}"/>
+                <a16:creationId xmlns:a16="http://schemas.microsoft.com/office/drawing/2014/main" id="{676E60A3-2BAE-4CB0-8C91-C8E7573B2822}"/>
               </a:ext>
             </a:extLst>
           </p:cNvPr>
@@ -1917,7 +1917,7 @@
           <p:cNvPr id="2" name="Vertical Title 1">
             <a:extLst xmlns:a="http://schemas.openxmlformats.org/drawingml/2006/main">
               <a:ext uri="{FF2B5EF4-FFF2-40B4-BE49-F238E27FC236}">
-                <a16:creationId xmlns:a16="http://schemas.microsoft.com/office/drawing/2014/main" id="{28224DAC-62F3-4762-8378-15C7EDCBE706}"/>
+                <a16:creationId xmlns:a16="http://schemas.microsoft.com/office/drawing/2014/main" id="{F332E357-F083-4599-836E-861EB3160CFB}"/>
               </a:ext>
             </a:extLst>
           </p:cNvPr>
@@ -1950,7 +1950,7 @@
           <p:cNvPr id="3" name="Vertical Text Placeholder 2">
             <a:extLst xmlns:a="http://schemas.openxmlformats.org/drawingml/2006/main">
               <a:ext uri="{FF2B5EF4-FFF2-40B4-BE49-F238E27FC236}">
-                <a16:creationId xmlns:a16="http://schemas.microsoft.com/office/drawing/2014/main" id="{A5ADFDD9-D561-4F75-AB72-3562AE206331}"/>
+                <a16:creationId xmlns:a16="http://schemas.microsoft.com/office/drawing/2014/main" id="{DA60EB22-B626-4DD5-B6C0-000EABCA6A09}"/>
               </a:ext>
             </a:extLst>
           </p:cNvPr>
@@ -2018,7 +2018,7 @@
           <p:cNvPr id="4" name="Date Placeholder 3">
             <a:extLst xmlns:a="http://schemas.openxmlformats.org/drawingml/2006/main">
               <a:ext uri="{FF2B5EF4-FFF2-40B4-BE49-F238E27FC236}">
-                <a16:creationId xmlns:a16="http://schemas.microsoft.com/office/drawing/2014/main" id="{371BFE7E-AB08-45A1-B2F2-8DD35A366ADA}"/>
+                <a16:creationId xmlns:a16="http://schemas.microsoft.com/office/drawing/2014/main" id="{D163D34B-F363-4BB7-8535-5A8543DD2BBE}"/>
               </a:ext>
             </a:extLst>
           </p:cNvPr>
@@ -2046,7 +2046,7 @@
           <p:cNvPr id="5" name="Footer Placeholder 4">
             <a:extLst xmlns:a="http://schemas.openxmlformats.org/drawingml/2006/main">
               <a:ext uri="{FF2B5EF4-FFF2-40B4-BE49-F238E27FC236}">
-                <a16:creationId xmlns:a16="http://schemas.microsoft.com/office/drawing/2014/main" id="{48663519-FEFF-4A74-8F73-208B88219EBF}"/>
+                <a16:creationId xmlns:a16="http://schemas.microsoft.com/office/drawing/2014/main" id="{D3836FCD-996D-403E-ACE7-D78247F8231C}"/>
               </a:ext>
             </a:extLst>
           </p:cNvPr>
@@ -2071,7 +2071,7 @@
           <p:cNvPr id="6" name="Slide Number Placeholder 5">
             <a:extLst xmlns:a="http://schemas.openxmlformats.org/drawingml/2006/main">
               <a:ext uri="{FF2B5EF4-FFF2-40B4-BE49-F238E27FC236}">
-                <a16:creationId xmlns:a16="http://schemas.microsoft.com/office/drawing/2014/main" id="{6E1FBDF5-15F5-4B61-A723-7D5A85AAD103}"/>
+                <a16:creationId xmlns:a16="http://schemas.microsoft.com/office/drawing/2014/main" id="{0828965B-FC0F-4303-9BE9-5AE71CC6C371}"/>
               </a:ext>
             </a:extLst>
           </p:cNvPr>
@@ -2116,7 +2116,7 @@
           <p:cNvPr id="2" name="Title 1">
             <a:extLst xmlns:a="http://schemas.openxmlformats.org/drawingml/2006/main">
               <a:ext uri="{FF2B5EF4-FFF2-40B4-BE49-F238E27FC236}">
-                <a16:creationId xmlns:a16="http://schemas.microsoft.com/office/drawing/2014/main" id="{37E8CE7A-DA9A-4B9E-89AC-DB438A0D0428}"/>
+                <a16:creationId xmlns:a16="http://schemas.microsoft.com/office/drawing/2014/main" id="{C3D6128A-63A5-4AFB-835C-9DCAC055BC9B}"/>
               </a:ext>
             </a:extLst>
           </p:cNvPr>
@@ -2144,7 +2144,7 @@
           <p:cNvPr id="3" name="Content Placeholder 2">
             <a:extLst xmlns:a="http://schemas.openxmlformats.org/drawingml/2006/main">
               <a:ext uri="{FF2B5EF4-FFF2-40B4-BE49-F238E27FC236}">
-                <a16:creationId xmlns:a16="http://schemas.microsoft.com/office/drawing/2014/main" id="{4CF6479E-383B-482E-A62A-76D127BB8B98}"/>
+                <a16:creationId xmlns:a16="http://schemas.microsoft.com/office/drawing/2014/main" id="{BF9F3DBD-DE68-42D5-B3E8-314F2FA3407B}"/>
               </a:ext>
             </a:extLst>
           </p:cNvPr>
@@ -2207,7 +2207,7 @@
           <p:cNvPr id="4" name="Date Placeholder 3">
             <a:extLst xmlns:a="http://schemas.openxmlformats.org/drawingml/2006/main">
               <a:ext uri="{FF2B5EF4-FFF2-40B4-BE49-F238E27FC236}">
-                <a16:creationId xmlns:a16="http://schemas.microsoft.com/office/drawing/2014/main" id="{B45CEB87-92A5-40BF-ABE9-EEAB6220245D}"/>
+                <a16:creationId xmlns:a16="http://schemas.microsoft.com/office/drawing/2014/main" id="{CCAB7E4D-A8F3-4F74-A78C-EDC5F525F0E1}"/>
               </a:ext>
             </a:extLst>
           </p:cNvPr>
@@ -2235,7 +2235,7 @@
           <p:cNvPr id="5" name="Footer Placeholder 4">
             <a:extLst xmlns:a="http://schemas.openxmlformats.org/drawingml/2006/main">
               <a:ext uri="{FF2B5EF4-FFF2-40B4-BE49-F238E27FC236}">
-                <a16:creationId xmlns:a16="http://schemas.microsoft.com/office/drawing/2014/main" id="{3042404D-7491-49BE-80C0-345818BB2431}"/>
+                <a16:creationId xmlns:a16="http://schemas.microsoft.com/office/drawing/2014/main" id="{7F647F8F-B2EE-4E47-BA7A-51532E77C702}"/>
               </a:ext>
             </a:extLst>
           </p:cNvPr>
@@ -2260,7 +2260,7 @@
           <p:cNvPr id="6" name="Slide Number Placeholder 5">
             <a:extLst xmlns:a="http://schemas.openxmlformats.org/drawingml/2006/main">
               <a:ext uri="{FF2B5EF4-FFF2-40B4-BE49-F238E27FC236}">
-                <a16:creationId xmlns:a16="http://schemas.microsoft.com/office/drawing/2014/main" id="{9B868759-DABF-49D1-A7B8-B0ED988F2125}"/>
+                <a16:creationId xmlns:a16="http://schemas.microsoft.com/office/drawing/2014/main" id="{D8025B27-0428-408E-A7F4-D5A82F2283BA}"/>
               </a:ext>
             </a:extLst>
           </p:cNvPr>
@@ -2305,7 +2305,7 @@
           <p:cNvPr id="2" name="Title 1">
             <a:extLst xmlns:a="http://schemas.openxmlformats.org/drawingml/2006/main">
               <a:ext uri="{FF2B5EF4-FFF2-40B4-BE49-F238E27FC236}">
-                <a16:creationId xmlns:a16="http://schemas.microsoft.com/office/drawing/2014/main" id="{DEE90E17-3199-4FCF-A4C2-65C193705046}"/>
+                <a16:creationId xmlns:a16="http://schemas.microsoft.com/office/drawing/2014/main" id="{FB752766-9EEB-4F73-977C-CCEF04891969}"/>
               </a:ext>
             </a:extLst>
           </p:cNvPr>
@@ -2343,7 +2343,7 @@
           <p:cNvPr id="3" name="Text Placeholder 2">
             <a:extLst xmlns:a="http://schemas.openxmlformats.org/drawingml/2006/main">
               <a:ext uri="{FF2B5EF4-FFF2-40B4-BE49-F238E27FC236}">
-                <a16:creationId xmlns:a16="http://schemas.microsoft.com/office/drawing/2014/main" id="{92058563-B747-402A-BCA6-2F991666BD6E}"/>
+                <a16:creationId xmlns:a16="http://schemas.microsoft.com/office/drawing/2014/main" id="{651A21AC-E8EF-418B-A6C7-E40642C66F4B}"/>
               </a:ext>
             </a:extLst>
           </p:cNvPr>
@@ -2469,7 +2469,7 @@
           <p:cNvPr id="4" name="Date Placeholder 3">
             <a:extLst xmlns:a="http://schemas.openxmlformats.org/drawingml/2006/main">
               <a:ext uri="{FF2B5EF4-FFF2-40B4-BE49-F238E27FC236}">
-                <a16:creationId xmlns:a16="http://schemas.microsoft.com/office/drawing/2014/main" id="{3E101C9D-47E2-4F2C-A46E-EED1D3B7BDDC}"/>
+                <a16:creationId xmlns:a16="http://schemas.microsoft.com/office/drawing/2014/main" id="{66A9DA65-A784-469F-94B5-5E0804353FF2}"/>
               </a:ext>
             </a:extLst>
           </p:cNvPr>
@@ -2497,7 +2497,7 @@
           <p:cNvPr id="5" name="Footer Placeholder 4">
             <a:extLst xmlns:a="http://schemas.openxmlformats.org/drawingml/2006/main">
               <a:ext uri="{FF2B5EF4-FFF2-40B4-BE49-F238E27FC236}">
-                <a16:creationId xmlns:a16="http://schemas.microsoft.com/office/drawing/2014/main" id="{3A53D8F0-9846-4E1C-BC15-38A6F70918EC}"/>
+                <a16:creationId xmlns:a16="http://schemas.microsoft.com/office/drawing/2014/main" id="{E876F281-0F56-43AE-A25F-96B668616876}"/>
               </a:ext>
             </a:extLst>
           </p:cNvPr>
@@ -2522,7 +2522,7 @@
           <p:cNvPr id="6" name="Slide Number Placeholder 5">
             <a:extLst xmlns:a="http://schemas.openxmlformats.org/drawingml/2006/main">
               <a:ext uri="{FF2B5EF4-FFF2-40B4-BE49-F238E27FC236}">
-                <a16:creationId xmlns:a16="http://schemas.microsoft.com/office/drawing/2014/main" id="{F31A51A3-BDB9-4212-9B4A-002248452C9D}"/>
+                <a16:creationId xmlns:a16="http://schemas.microsoft.com/office/drawing/2014/main" id="{098D2D50-4CDC-46B8-9855-A514CDFF5C02}"/>
               </a:ext>
             </a:extLst>
           </p:cNvPr>
@@ -2567,7 +2567,7 @@
           <p:cNvPr id="2" name="Title 1">
             <a:extLst xmlns:a="http://schemas.openxmlformats.org/drawingml/2006/main">
               <a:ext uri="{FF2B5EF4-FFF2-40B4-BE49-F238E27FC236}">
-                <a16:creationId xmlns:a16="http://schemas.microsoft.com/office/drawing/2014/main" id="{1C2FF34F-7673-4DCF-AAA9-B8B0C95FBD99}"/>
+                <a16:creationId xmlns:a16="http://schemas.microsoft.com/office/drawing/2014/main" id="{64799438-55D5-4A51-95EB-3DB14056BC4F}"/>
               </a:ext>
             </a:extLst>
           </p:cNvPr>
@@ -2595,7 +2595,7 @@
           <p:cNvPr id="3" name="Content Placeholder 2">
             <a:extLst xmlns:a="http://schemas.openxmlformats.org/drawingml/2006/main">
               <a:ext uri="{FF2B5EF4-FFF2-40B4-BE49-F238E27FC236}">
-                <a16:creationId xmlns:a16="http://schemas.microsoft.com/office/drawing/2014/main" id="{7DC212B9-653F-46E8-92A4-92413D7BF0C4}"/>
+                <a16:creationId xmlns:a16="http://schemas.microsoft.com/office/drawing/2014/main" id="{E93C7818-1A15-4BEC-8EFE-2A06F8BB599B}"/>
               </a:ext>
             </a:extLst>
           </p:cNvPr>
@@ -2700,7 +2700,7 @@
           <p:cNvPr id="4" name="Content Placeholder 3">
             <a:extLst xmlns:a="http://schemas.openxmlformats.org/drawingml/2006/main">
               <a:ext uri="{FF2B5EF4-FFF2-40B4-BE49-F238E27FC236}">
-                <a16:creationId xmlns:a16="http://schemas.microsoft.com/office/drawing/2014/main" id="{3EA4E581-8B32-4056-BE10-EB7E9F4D7181}"/>
+                <a16:creationId xmlns:a16="http://schemas.microsoft.com/office/drawing/2014/main" id="{8C81FBC7-EEE2-4B12-B751-7CF228446BFE}"/>
               </a:ext>
             </a:extLst>
           </p:cNvPr>
@@ -2805,7 +2805,7 @@
           <p:cNvPr id="5" name="Date Placeholder 4">
             <a:extLst xmlns:a="http://schemas.openxmlformats.org/drawingml/2006/main">
               <a:ext uri="{FF2B5EF4-FFF2-40B4-BE49-F238E27FC236}">
-                <a16:creationId xmlns:a16="http://schemas.microsoft.com/office/drawing/2014/main" id="{89AB1CFD-E660-4B01-8C73-27085C9C76B2}"/>
+                <a16:creationId xmlns:a16="http://schemas.microsoft.com/office/drawing/2014/main" id="{239E2E21-1FDB-44D0-8DC6-0376FFBDA272}"/>
               </a:ext>
             </a:extLst>
           </p:cNvPr>
@@ -2833,7 +2833,7 @@
           <p:cNvPr id="6" name="Footer Placeholder 5">
             <a:extLst xmlns:a="http://schemas.openxmlformats.org/drawingml/2006/main">
               <a:ext uri="{FF2B5EF4-FFF2-40B4-BE49-F238E27FC236}">
-                <a16:creationId xmlns:a16="http://schemas.microsoft.com/office/drawing/2014/main" id="{B3714E9B-EE8B-4599-AB1D-3C7052A04DEC}"/>
+                <a16:creationId xmlns:a16="http://schemas.microsoft.com/office/drawing/2014/main" id="{9A28128A-6406-43FF-B760-389309337F43}"/>
               </a:ext>
             </a:extLst>
           </p:cNvPr>
@@ -2858,7 +2858,7 @@
           <p:cNvPr id="7" name="Slide Number Placeholder 6">
             <a:extLst xmlns:a="http://schemas.openxmlformats.org/drawingml/2006/main">
               <a:ext uri="{FF2B5EF4-FFF2-40B4-BE49-F238E27FC236}">
-                <a16:creationId xmlns:a16="http://schemas.microsoft.com/office/drawing/2014/main" id="{255086E7-D67C-419C-ABE2-E372679E9FF3}"/>
+                <a16:creationId xmlns:a16="http://schemas.microsoft.com/office/drawing/2014/main" id="{B270A717-E884-4054-8330-C2C5EC76F7F1}"/>
               </a:ext>
             </a:extLst>
           </p:cNvPr>
@@ -2903,7 +2903,7 @@
           <p:cNvPr id="2" name="Title 1">
             <a:extLst xmlns:a="http://schemas.openxmlformats.org/drawingml/2006/main">
               <a:ext uri="{FF2B5EF4-FFF2-40B4-BE49-F238E27FC236}">
-                <a16:creationId xmlns:a16="http://schemas.microsoft.com/office/drawing/2014/main" id="{F0E4D588-BD69-47F6-ABD4-8BEE5B9BA74C}"/>
+                <a16:creationId xmlns:a16="http://schemas.microsoft.com/office/drawing/2014/main" id="{24845E40-C47D-4002-8157-D443930EBE5C}"/>
               </a:ext>
             </a:extLst>
           </p:cNvPr>
@@ -2936,7 +2936,7 @@
           <p:cNvPr id="3" name="Text Placeholder 2">
             <a:extLst xmlns:a="http://schemas.openxmlformats.org/drawingml/2006/main">
               <a:ext uri="{FF2B5EF4-FFF2-40B4-BE49-F238E27FC236}">
-                <a16:creationId xmlns:a16="http://schemas.microsoft.com/office/drawing/2014/main" id="{B297218F-67C7-4B7C-B67E-9AB1A825F7C0}"/>
+                <a16:creationId xmlns:a16="http://schemas.microsoft.com/office/drawing/2014/main" id="{1E96EFB5-1B8E-4342-9691-0C62C7C2D9B5}"/>
               </a:ext>
             </a:extLst>
           </p:cNvPr>
@@ -3008,7 +3008,7 @@
           <p:cNvPr id="4" name="Content Placeholder 3">
             <a:extLst xmlns:a="http://schemas.openxmlformats.org/drawingml/2006/main">
               <a:ext uri="{FF2B5EF4-FFF2-40B4-BE49-F238E27FC236}">
-                <a16:creationId xmlns:a16="http://schemas.microsoft.com/office/drawing/2014/main" id="{3089D3EC-1884-47F1-A255-C7FD724F0422}"/>
+                <a16:creationId xmlns:a16="http://schemas.microsoft.com/office/drawing/2014/main" id="{464CD47F-290F-4FF4-9E4C-4151EB68E7CA}"/>
               </a:ext>
             </a:extLst>
           </p:cNvPr>
@@ -3113,7 +3113,7 @@
           <p:cNvPr id="5" name="Text Placeholder 4">
             <a:extLst xmlns:a="http://schemas.openxmlformats.org/drawingml/2006/main">
               <a:ext uri="{FF2B5EF4-FFF2-40B4-BE49-F238E27FC236}">
-                <a16:creationId xmlns:a16="http://schemas.microsoft.com/office/drawing/2014/main" id="{89DB6414-37CA-44BA-BA37-11A5B016D66E}"/>
+                <a16:creationId xmlns:a16="http://schemas.microsoft.com/office/drawing/2014/main" id="{F14706D8-5331-49DD-9CCB-0A9E11E2076D}"/>
               </a:ext>
             </a:extLst>
           </p:cNvPr>
@@ -3185,7 +3185,7 @@
           <p:cNvPr id="6" name="Content Placeholder 5">
             <a:extLst xmlns:a="http://schemas.openxmlformats.org/drawingml/2006/main">
               <a:ext uri="{FF2B5EF4-FFF2-40B4-BE49-F238E27FC236}">
-                <a16:creationId xmlns:a16="http://schemas.microsoft.com/office/drawing/2014/main" id="{95C5D29B-016B-4106-8D53-B935089BC914}"/>
+                <a16:creationId xmlns:a16="http://schemas.microsoft.com/office/drawing/2014/main" id="{784B49AB-52BC-4DBA-894B-516FB65D4E8F}"/>
               </a:ext>
             </a:extLst>
           </p:cNvPr>
@@ -3290,7 +3290,7 @@
           <p:cNvPr id="7" name="Date Placeholder 6">
             <a:extLst xmlns:a="http://schemas.openxmlformats.org/drawingml/2006/main">
               <a:ext uri="{FF2B5EF4-FFF2-40B4-BE49-F238E27FC236}">
-                <a16:creationId xmlns:a16="http://schemas.microsoft.com/office/drawing/2014/main" id="{CCEE5D68-BD6F-416D-8473-88B2D6D53C29}"/>
+                <a16:creationId xmlns:a16="http://schemas.microsoft.com/office/drawing/2014/main" id="{BC1A8D54-CF63-4822-9F7F-12B298680411}"/>
               </a:ext>
             </a:extLst>
           </p:cNvPr>
@@ -3318,7 +3318,7 @@
           <p:cNvPr id="8" name="Footer Placeholder 7">
             <a:extLst xmlns:a="http://schemas.openxmlformats.org/drawingml/2006/main">
               <a:ext uri="{FF2B5EF4-FFF2-40B4-BE49-F238E27FC236}">
-                <a16:creationId xmlns:a16="http://schemas.microsoft.com/office/drawing/2014/main" id="{79B63406-747C-44C2-8601-DFDF45A89E13}"/>
+                <a16:creationId xmlns:a16="http://schemas.microsoft.com/office/drawing/2014/main" id="{79BE4C40-6D7C-4D98-AD66-8B8FFD3E699B}"/>
               </a:ext>
             </a:extLst>
           </p:cNvPr>
@@ -3343,7 +3343,7 @@
           <p:cNvPr id="9" name="Slide Number Placeholder 8">
             <a:extLst xmlns:a="http://schemas.openxmlformats.org/drawingml/2006/main">
               <a:ext uri="{FF2B5EF4-FFF2-40B4-BE49-F238E27FC236}">
-                <a16:creationId xmlns:a16="http://schemas.microsoft.com/office/drawing/2014/main" id="{9BFF0A29-A7C5-496E-A8A3-B27768949171}"/>
+                <a16:creationId xmlns:a16="http://schemas.microsoft.com/office/drawing/2014/main" id="{9F3E7F25-807D-4EB7-BC2E-3549B9EEF0FE}"/>
               </a:ext>
             </a:extLst>
           </p:cNvPr>
@@ -3388,7 +3388,7 @@
           <p:cNvPr id="2" name="Title 1">
             <a:extLst xmlns:a="http://schemas.openxmlformats.org/drawingml/2006/main">
               <a:ext uri="{FF2B5EF4-FFF2-40B4-BE49-F238E27FC236}">
-                <a16:creationId xmlns:a16="http://schemas.microsoft.com/office/drawing/2014/main" id="{130F96E5-F900-4428-8A54-6392AF101EF3}"/>
+                <a16:creationId xmlns:a16="http://schemas.microsoft.com/office/drawing/2014/main" id="{E5EB5881-B954-42DF-8F6E-B662D0856A5A}"/>
               </a:ext>
             </a:extLst>
           </p:cNvPr>
@@ -3416,7 +3416,7 @@
           <p:cNvPr id="3" name="Date Placeholder 2">
             <a:extLst xmlns:a="http://schemas.openxmlformats.org/drawingml/2006/main">
               <a:ext uri="{FF2B5EF4-FFF2-40B4-BE49-F238E27FC236}">
-                <a16:creationId xmlns:a16="http://schemas.microsoft.com/office/drawing/2014/main" id="{387ECDB1-7477-4F83-802E-CA3CC066BAFB}"/>
+                <a16:creationId xmlns:a16="http://schemas.microsoft.com/office/drawing/2014/main" id="{0635A201-5DBC-4CB3-8A1C-7C82DCB78A5B}"/>
               </a:ext>
             </a:extLst>
           </p:cNvPr>
@@ -3444,7 +3444,7 @@
           <p:cNvPr id="4" name="Footer Placeholder 3">
             <a:extLst xmlns:a="http://schemas.openxmlformats.org/drawingml/2006/main">
               <a:ext uri="{FF2B5EF4-FFF2-40B4-BE49-F238E27FC236}">
-                <a16:creationId xmlns:a16="http://schemas.microsoft.com/office/drawing/2014/main" id="{41703CA0-7099-4640-BB38-9409F3E2C5E7}"/>
+                <a16:creationId xmlns:a16="http://schemas.microsoft.com/office/drawing/2014/main" id="{3C64F76B-3451-4CD5-9066-4DAB686419AF}"/>
               </a:ext>
             </a:extLst>
           </p:cNvPr>
@@ -3469,7 +3469,7 @@
           <p:cNvPr id="5" name="Slide Number Placeholder 4">
             <a:extLst xmlns:a="http://schemas.openxmlformats.org/drawingml/2006/main">
               <a:ext uri="{FF2B5EF4-FFF2-40B4-BE49-F238E27FC236}">
-                <a16:creationId xmlns:a16="http://schemas.microsoft.com/office/drawing/2014/main" id="{ECB1152E-4A10-4DEC-8608-3DA1651174D1}"/>
+                <a16:creationId xmlns:a16="http://schemas.microsoft.com/office/drawing/2014/main" id="{915B899A-ED0B-4C7F-A5D0-C72DC37F9B72}"/>
               </a:ext>
             </a:extLst>
           </p:cNvPr>
@@ -3514,7 +3514,7 @@
           <p:cNvPr id="2" name="Date Placeholder 1">
             <a:extLst xmlns:a="http://schemas.openxmlformats.org/drawingml/2006/main">
               <a:ext uri="{FF2B5EF4-FFF2-40B4-BE49-F238E27FC236}">
-                <a16:creationId xmlns:a16="http://schemas.microsoft.com/office/drawing/2014/main" id="{BBAB21BA-8A95-4FB9-A46D-12FC4F7BA617}"/>
+                <a16:creationId xmlns:a16="http://schemas.microsoft.com/office/drawing/2014/main" id="{82356100-759E-45A1-B2CA-7421D316EEFC}"/>
               </a:ext>
             </a:extLst>
           </p:cNvPr>
@@ -3542,7 +3542,7 @@
           <p:cNvPr id="3" name="Footer Placeholder 2">
             <a:extLst xmlns:a="http://schemas.openxmlformats.org/drawingml/2006/main">
               <a:ext uri="{FF2B5EF4-FFF2-40B4-BE49-F238E27FC236}">
-                <a16:creationId xmlns:a16="http://schemas.microsoft.com/office/drawing/2014/main" id="{D7D21B4C-7BB0-4AF9-93AB-9DFA802CE4EE}"/>
+                <a16:creationId xmlns:a16="http://schemas.microsoft.com/office/drawing/2014/main" id="{978ECD1F-09DD-478D-ACF5-CE24D0BE0E13}"/>
               </a:ext>
             </a:extLst>
           </p:cNvPr>
@@ -3567,7 +3567,7 @@
           <p:cNvPr id="4" name="Slide Number Placeholder 3">
             <a:extLst xmlns:a="http://schemas.openxmlformats.org/drawingml/2006/main">
               <a:ext uri="{FF2B5EF4-FFF2-40B4-BE49-F238E27FC236}">
-                <a16:creationId xmlns:a16="http://schemas.microsoft.com/office/drawing/2014/main" id="{6A349349-C1E9-4C1E-86AB-E56695D8A4E9}"/>
+                <a16:creationId xmlns:a16="http://schemas.microsoft.com/office/drawing/2014/main" id="{193D24A5-AB28-4728-ACA8-8D5BD7146EB7}"/>
               </a:ext>
             </a:extLst>
           </p:cNvPr>
@@ -3612,7 +3612,7 @@
           <p:cNvPr id="2" name="Title 1">
             <a:extLst xmlns:a="http://schemas.openxmlformats.org/drawingml/2006/main">
               <a:ext uri="{FF2B5EF4-FFF2-40B4-BE49-F238E27FC236}">
-                <a16:creationId xmlns:a16="http://schemas.microsoft.com/office/drawing/2014/main" id="{FA6A7671-8756-4800-8E01-AADD36335372}"/>
+                <a16:creationId xmlns:a16="http://schemas.microsoft.com/office/drawing/2014/main" id="{4D890F7C-87DE-4AB2-93B2-F3FA48F5AABE}"/>
               </a:ext>
             </a:extLst>
           </p:cNvPr>
@@ -3650,7 +3650,7 @@
           <p:cNvPr id="3" name="Content Placeholder 2">
             <a:extLst xmlns:a="http://schemas.openxmlformats.org/drawingml/2006/main">
               <a:ext uri="{FF2B5EF4-FFF2-40B4-BE49-F238E27FC236}">
-                <a16:creationId xmlns:a16="http://schemas.microsoft.com/office/drawing/2014/main" id="{CAD9FF2A-5D4D-4A7A-9894-64FB999114C3}"/>
+                <a16:creationId xmlns:a16="http://schemas.microsoft.com/office/drawing/2014/main" id="{E63DF2AE-272B-4407-B052-3452797DEB30}"/>
               </a:ext>
             </a:extLst>
           </p:cNvPr>
@@ -3755,7 +3755,7 @@
           <p:cNvPr id="4" name="Text Placeholder 3">
             <a:extLst xmlns:a="http://schemas.openxmlformats.org/drawingml/2006/main">
               <a:ext uri="{FF2B5EF4-FFF2-40B4-BE49-F238E27FC236}">
-                <a16:creationId xmlns:a16="http://schemas.microsoft.com/office/drawing/2014/main" id="{2FB8BB5A-9E78-49A0-AC2A-24F36843D059}"/>
+                <a16:creationId xmlns:a16="http://schemas.microsoft.com/office/drawing/2014/main" id="{F3156436-06B9-4CBD-8A73-B4558BBADEEF}"/>
               </a:ext>
             </a:extLst>
           </p:cNvPr>
@@ -3827,7 +3827,7 @@
           <p:cNvPr id="5" name="Date Placeholder 4">
             <a:extLst xmlns:a="http://schemas.openxmlformats.org/drawingml/2006/main">
               <a:ext uri="{FF2B5EF4-FFF2-40B4-BE49-F238E27FC236}">
-                <a16:creationId xmlns:a16="http://schemas.microsoft.com/office/drawing/2014/main" id="{FCDAF836-5588-45C3-BDFF-BEE1AF7CDE27}"/>
+                <a16:creationId xmlns:a16="http://schemas.microsoft.com/office/drawing/2014/main" id="{B778FCE6-759D-40BA-ACB4-78FF175DD1BF}"/>
               </a:ext>
             </a:extLst>
           </p:cNvPr>
@@ -3855,7 +3855,7 @@
           <p:cNvPr id="6" name="Footer Placeholder 5">
             <a:extLst xmlns:a="http://schemas.openxmlformats.org/drawingml/2006/main">
               <a:ext uri="{FF2B5EF4-FFF2-40B4-BE49-F238E27FC236}">
-                <a16:creationId xmlns:a16="http://schemas.microsoft.com/office/drawing/2014/main" id="{BEFFCC83-4903-4412-8CCD-4A832A59B468}"/>
+                <a16:creationId xmlns:a16="http://schemas.microsoft.com/office/drawing/2014/main" id="{C54A3AC8-5E92-4986-B156-B84D6871588E}"/>
               </a:ext>
             </a:extLst>
           </p:cNvPr>
@@ -3880,7 +3880,7 @@
           <p:cNvPr id="7" name="Slide Number Placeholder 6">
             <a:extLst xmlns:a="http://schemas.openxmlformats.org/drawingml/2006/main">
               <a:ext uri="{FF2B5EF4-FFF2-40B4-BE49-F238E27FC236}">
-                <a16:creationId xmlns:a16="http://schemas.microsoft.com/office/drawing/2014/main" id="{661E2624-6953-4EC7-9410-957EFFF5FBC9}"/>
+                <a16:creationId xmlns:a16="http://schemas.microsoft.com/office/drawing/2014/main" id="{A50520FA-9EB4-47FE-BD19-46D2205E6D3E}"/>
               </a:ext>
             </a:extLst>
           </p:cNvPr>
@@ -3925,7 +3925,7 @@
           <p:cNvPr id="2" name="Title 1">
             <a:extLst xmlns:a="http://schemas.openxmlformats.org/drawingml/2006/main">
               <a:ext uri="{FF2B5EF4-FFF2-40B4-BE49-F238E27FC236}">
-                <a16:creationId xmlns:a16="http://schemas.microsoft.com/office/drawing/2014/main" id="{1B7D63E4-1411-473D-9E6E-F1D452D8AADD}"/>
+                <a16:creationId xmlns:a16="http://schemas.microsoft.com/office/drawing/2014/main" id="{DAA4E35C-D902-4FAE-B1A3-B604CB24A81D}"/>
               </a:ext>
             </a:extLst>
           </p:cNvPr>
@@ -3963,7 +3963,7 @@
           <p:cNvPr id="3" name="Picture Placeholder 2">
             <a:extLst xmlns:a="http://schemas.openxmlformats.org/drawingml/2006/main">
               <a:ext uri="{FF2B5EF4-FFF2-40B4-BE49-F238E27FC236}">
-                <a16:creationId xmlns:a16="http://schemas.microsoft.com/office/drawing/2014/main" id="{7EAB6995-F7E7-41D3-B689-F63DCCF82660}"/>
+                <a16:creationId xmlns:a16="http://schemas.microsoft.com/office/drawing/2014/main" id="{CFA20441-FC64-4A45-B50B-8B479B32CB72}"/>
               </a:ext>
             </a:extLst>
           </p:cNvPr>
@@ -4030,7 +4030,7 @@
           <p:cNvPr id="4" name="Text Placeholder 3">
             <a:extLst xmlns:a="http://schemas.openxmlformats.org/drawingml/2006/main">
               <a:ext uri="{FF2B5EF4-FFF2-40B4-BE49-F238E27FC236}">
-                <a16:creationId xmlns:a16="http://schemas.microsoft.com/office/drawing/2014/main" id="{83C3CBA3-B266-48D2-A196-2BFAA0629AEA}"/>
+                <a16:creationId xmlns:a16="http://schemas.microsoft.com/office/drawing/2014/main" id="{8CC31745-D231-49C6-BF66-B96B710BA85A}"/>
               </a:ext>
             </a:extLst>
           </p:cNvPr>
@@ -4102,7 +4102,7 @@
           <p:cNvPr id="5" name="Date Placeholder 4">
             <a:extLst xmlns:a="http://schemas.openxmlformats.org/drawingml/2006/main">
               <a:ext uri="{FF2B5EF4-FFF2-40B4-BE49-F238E27FC236}">
-                <a16:creationId xmlns:a16="http://schemas.microsoft.com/office/drawing/2014/main" id="{1C54076F-05CE-474A-B0AC-8FDA89324F1C}"/>
+                <a16:creationId xmlns:a16="http://schemas.microsoft.com/office/drawing/2014/main" id="{604D39A6-C1C9-4F2C-97A5-ACD98EAFBF53}"/>
               </a:ext>
             </a:extLst>
           </p:cNvPr>
@@ -4130,7 +4130,7 @@
           <p:cNvPr id="6" name="Footer Placeholder 5">
             <a:extLst xmlns:a="http://schemas.openxmlformats.org/drawingml/2006/main">
               <a:ext uri="{FF2B5EF4-FFF2-40B4-BE49-F238E27FC236}">
-                <a16:creationId xmlns:a16="http://schemas.microsoft.com/office/drawing/2014/main" id="{69BC192E-F55D-4F9B-A23D-85DA50C885B7}"/>
+                <a16:creationId xmlns:a16="http://schemas.microsoft.com/office/drawing/2014/main" id="{C4A1C3D5-107A-46E0-8EFC-A9811FC4251D}"/>
               </a:ext>
             </a:extLst>
           </p:cNvPr>
@@ -4155,7 +4155,7 @@
           <p:cNvPr id="7" name="Slide Number Placeholder 6">
             <a:extLst xmlns:a="http://schemas.openxmlformats.org/drawingml/2006/main">
               <a:ext uri="{FF2B5EF4-FFF2-40B4-BE49-F238E27FC236}">
-                <a16:creationId xmlns:a16="http://schemas.microsoft.com/office/drawing/2014/main" id="{5BDC5208-DF2B-4516-9167-57A3A8F8B05F}"/>
+                <a16:creationId xmlns:a16="http://schemas.microsoft.com/office/drawing/2014/main" id="{5F264B52-A755-4B58-B841-A242024DCC08}"/>
               </a:ext>
             </a:extLst>
           </p:cNvPr>
@@ -4205,7 +4205,7 @@
           <p:cNvPr id="2" name="Title Placeholder 1">
             <a:extLst xmlns:a="http://schemas.openxmlformats.org/drawingml/2006/main">
               <a:ext uri="{FF2B5EF4-FFF2-40B4-BE49-F238E27FC236}">
-                <a16:creationId xmlns:a16="http://schemas.microsoft.com/office/drawing/2014/main" id="{3EAFF71B-8044-4695-8543-9B8B138FCA6E}"/>
+                <a16:creationId xmlns:a16="http://schemas.microsoft.com/office/drawing/2014/main" id="{5DDE2631-86AA-42AA-829E-068F607F5DC3}"/>
               </a:ext>
             </a:extLst>
           </p:cNvPr>
@@ -4243,7 +4243,7 @@
           <p:cNvPr id="3" name="Text Placeholder 2">
             <a:extLst xmlns:a="http://schemas.openxmlformats.org/drawingml/2006/main">
               <a:ext uri="{FF2B5EF4-FFF2-40B4-BE49-F238E27FC236}">
-                <a16:creationId xmlns:a16="http://schemas.microsoft.com/office/drawing/2014/main" id="{49EC024A-D0DE-4773-868C-67B0D9C49467}"/>
+                <a16:creationId xmlns:a16="http://schemas.microsoft.com/office/drawing/2014/main" id="{6C078771-90E4-4616-A442-0995F09588A4}"/>
               </a:ext>
             </a:extLst>
           </p:cNvPr>
@@ -4316,7 +4316,7 @@
           <p:cNvPr id="4" name="Date Placeholder 3">
             <a:extLst xmlns:a="http://schemas.openxmlformats.org/drawingml/2006/main">
               <a:ext uri="{FF2B5EF4-FFF2-40B4-BE49-F238E27FC236}">
-                <a16:creationId xmlns:a16="http://schemas.microsoft.com/office/drawing/2014/main" id="{AB92BFDF-86C4-498B-95F8-40DE45BABF13}"/>
+                <a16:creationId xmlns:a16="http://schemas.microsoft.com/office/drawing/2014/main" id="{75C976F7-64CA-4588-A2A1-824724793A49}"/>
               </a:ext>
             </a:extLst>
           </p:cNvPr>
@@ -4363,7 +4363,7 @@
           <p:cNvPr id="5" name="Footer Placeholder 4">
             <a:extLst xmlns:a="http://schemas.openxmlformats.org/drawingml/2006/main">
               <a:ext uri="{FF2B5EF4-FFF2-40B4-BE49-F238E27FC236}">
-                <a16:creationId xmlns:a16="http://schemas.microsoft.com/office/drawing/2014/main" id="{5E162E8E-78AC-462B-B308-CF69977EE9FF}"/>
+                <a16:creationId xmlns:a16="http://schemas.microsoft.com/office/drawing/2014/main" id="{40875688-3438-4F26-9511-6DF107EA02FB}"/>
               </a:ext>
             </a:extLst>
           </p:cNvPr>
@@ -4407,7 +4407,7 @@
           <p:cNvPr id="6" name="Slide Number Placeholder 5">
             <a:extLst xmlns:a="http://schemas.openxmlformats.org/drawingml/2006/main">
               <a:ext uri="{FF2B5EF4-FFF2-40B4-BE49-F238E27FC236}">
-                <a16:creationId xmlns:a16="http://schemas.microsoft.com/office/drawing/2014/main" id="{B0312C0A-2F25-48EB-AD60-FD6A1F2B5222}"/>
+                <a16:creationId xmlns:a16="http://schemas.microsoft.com/office/drawing/2014/main" id="{88852BC9-8A34-45D2-B5A5-FB29C43DCC9A}"/>
               </a:ext>
             </a:extLst>
           </p:cNvPr>
@@ -4453,17 +4453,17 @@
   </p:cSld>
   <p:clrMap bg1="lt1" tx1="dk1" bg2="lt2" tx2="dk2" accent1="accent1" accent2="accent2" accent3="accent3" accent4="accent4" accent5="accent5" accent6="accent6" hlink="hlink" folHlink="folHlink"/>
   <p:sldLayoutIdLst>
-    <p:sldLayoutId xmlns:r="http://schemas.openxmlformats.org/officeDocument/2006/relationships" id="2147483649" r:id="Rf923f5e8061f481f"/>
-    <p:sldLayoutId xmlns:r="http://schemas.openxmlformats.org/officeDocument/2006/relationships" id="2147483650" r:id="Rf74b76f26cab4e1f"/>
-    <p:sldLayoutId xmlns:r="http://schemas.openxmlformats.org/officeDocument/2006/relationships" id="2147483651" r:id="R6d217f5fc6464349"/>
-    <p:sldLayoutId xmlns:r="http://schemas.openxmlformats.org/officeDocument/2006/relationships" id="2147483652" r:id="R40435e87adb146c3"/>
-    <p:sldLayoutId xmlns:r="http://schemas.openxmlformats.org/officeDocument/2006/relationships" id="2147483653" r:id="R9fdb2bdfddfc42bb"/>
-    <p:sldLayoutId xmlns:r="http://schemas.openxmlformats.org/officeDocument/2006/relationships" id="2147483654" r:id="Rff353f2aca6f4a9e"/>
-    <p:sldLayoutId xmlns:r="http://schemas.openxmlformats.org/officeDocument/2006/relationships" id="2147483655" r:id="R978f666d2ab74650"/>
-    <p:sldLayoutId xmlns:r="http://schemas.openxmlformats.org/officeDocument/2006/relationships" id="2147483656" r:id="R005d75da74a14c48"/>
-    <p:sldLayoutId xmlns:r="http://schemas.openxmlformats.org/officeDocument/2006/relationships" id="2147483657" r:id="R0181a6c64735428a"/>
-    <p:sldLayoutId xmlns:r="http://schemas.openxmlformats.org/officeDocument/2006/relationships" id="2147483658" r:id="R2b21261380cf4854"/>
-    <p:sldLayoutId xmlns:r="http://schemas.openxmlformats.org/officeDocument/2006/relationships" id="2147483659" r:id="Rf1fd43f12a794537"/>
+    <p:sldLayoutId xmlns:r="http://schemas.openxmlformats.org/officeDocument/2006/relationships" id="2147483649" r:id="Rd33413fb18464a26"/>
+    <p:sldLayoutId xmlns:r="http://schemas.openxmlformats.org/officeDocument/2006/relationships" id="2147483650" r:id="Ra5e36e02a2e342d6"/>
+    <p:sldLayoutId xmlns:r="http://schemas.openxmlformats.org/officeDocument/2006/relationships" id="2147483651" r:id="R57a007aef86d4a12"/>
+    <p:sldLayoutId xmlns:r="http://schemas.openxmlformats.org/officeDocument/2006/relationships" id="2147483652" r:id="Rd5e2c05dc05548da"/>
+    <p:sldLayoutId xmlns:r="http://schemas.openxmlformats.org/officeDocument/2006/relationships" id="2147483653" r:id="R3c9c6a8b409b448d"/>
+    <p:sldLayoutId xmlns:r="http://schemas.openxmlformats.org/officeDocument/2006/relationships" id="2147483654" r:id="R631911e196f64b40"/>
+    <p:sldLayoutId xmlns:r="http://schemas.openxmlformats.org/officeDocument/2006/relationships" id="2147483655" r:id="R06cb99945c574c52"/>
+    <p:sldLayoutId xmlns:r="http://schemas.openxmlformats.org/officeDocument/2006/relationships" id="2147483656" r:id="R80d2e9b162fb46ed"/>
+    <p:sldLayoutId xmlns:r="http://schemas.openxmlformats.org/officeDocument/2006/relationships" id="2147483657" r:id="R6f4cd660ba3a48e6"/>
+    <p:sldLayoutId xmlns:r="http://schemas.openxmlformats.org/officeDocument/2006/relationships" id="2147483658" r:id="R2b4ab3271c4c4143"/>
+    <p:sldLayoutId xmlns:r="http://schemas.openxmlformats.org/officeDocument/2006/relationships" id="2147483659" r:id="Rdfdc813dcbd0457c"/>
   </p:sldLayoutIdLst>
   <p:txStyles>
     <p:titleStyle>
@@ -5009,7 +5009,7 @@
           <p:cNvPr id="2" name="Rectangle 1">
             <a:extLst xmlns:a="http://schemas.openxmlformats.org/drawingml/2006/main">
               <a:ext uri="{FF2B5EF4-FFF2-40B4-BE49-F238E27FC236}">
-                <a16:creationId xmlns:a16="http://schemas.microsoft.com/office/drawing/2014/main" id="{69B87539-A772-4D1B-934F-87DD1FF62D99}"/>
+                <a16:creationId xmlns:a16="http://schemas.microsoft.com/office/drawing/2014/main" id="{EA9DDCA1-F914-4684-BDA6-211AC0C8CA5D}"/>
               </a:ext>
             </a:extLst>
           </p:cNvPr>
@@ -5062,7 +5062,7 @@
           <p:cNvPr id="3" name="Rectangle 2">
             <a:extLst xmlns:a="http://schemas.openxmlformats.org/drawingml/2006/main">
               <a:ext uri="{FF2B5EF4-FFF2-40B4-BE49-F238E27FC236}">
-                <a16:creationId xmlns:a16="http://schemas.microsoft.com/office/drawing/2014/main" id="{F0BC9FED-A2BA-4A0F-8214-120393F3658A}"/>
+                <a16:creationId xmlns:a16="http://schemas.microsoft.com/office/drawing/2014/main" id="{33933F27-0073-4242-98C3-5946DAF06647}"/>
               </a:ext>
             </a:extLst>
           </p:cNvPr>
@@ -5115,7 +5115,7 @@
           <p:cNvPr id="4" name="TextBox 3">
             <a:extLst xmlns:a="http://schemas.openxmlformats.org/drawingml/2006/main">
               <a:ext uri="{FF2B5EF4-FFF2-40B4-BE49-F238E27FC236}">
-                <a16:creationId xmlns:a16="http://schemas.microsoft.com/office/drawing/2014/main" id="{B30AFB6E-F377-44AC-B408-196787C9E8DD}"/>
+                <a16:creationId xmlns:a16="http://schemas.microsoft.com/office/drawing/2014/main" id="{39847C33-39CB-4870-BE4E-331573B0CA41}"/>
               </a:ext>
             </a:extLst>
           </p:cNvPr>
@@ -5217,7 +5217,7 @@
     </p:spTree>
     <p:extLst>
       <p:ext uri="{BB962C8B-B14F-4D97-AF65-F5344CB8AC3E}">
-        <p14:creationId xmlns:p14="http://schemas.microsoft.com/office/powerpoint/2010/main" val="418319784"/>
+        <p14:creationId xmlns:p14="http://schemas.microsoft.com/office/powerpoint/2010/main" val="457345839"/>
       </p:ext>
     </p:extLst>
   </p:cSld>
@@ -5241,7 +5241,7 @@
           <p:cNvPr id="2" name="Rectangle 1">
             <a:extLst xmlns:a="http://schemas.openxmlformats.org/drawingml/2006/main">
               <a:ext uri="{FF2B5EF4-FFF2-40B4-BE49-F238E27FC236}">
-                <a16:creationId xmlns:a16="http://schemas.microsoft.com/office/drawing/2014/main" id="{4D48DB15-55F2-43AE-A97A-8765B6832901}"/>
+                <a16:creationId xmlns:a16="http://schemas.microsoft.com/office/drawing/2014/main" id="{CD450BF5-9446-4EE7-885A-704BDA244F37}"/>
               </a:ext>
             </a:extLst>
           </p:cNvPr>
@@ -5294,7 +5294,7 @@
           <p:cNvPr id="3" name="Rectangle 2">
             <a:extLst xmlns:a="http://schemas.openxmlformats.org/drawingml/2006/main">
               <a:ext uri="{FF2B5EF4-FFF2-40B4-BE49-F238E27FC236}">
-                <a16:creationId xmlns:a16="http://schemas.microsoft.com/office/drawing/2014/main" id="{0C9B4BE8-25A1-469C-BFF3-7711AFD48319}"/>
+                <a16:creationId xmlns:a16="http://schemas.microsoft.com/office/drawing/2014/main" id="{AE858B1A-F398-42DF-903A-8CB5B264BCA6}"/>
               </a:ext>
             </a:extLst>
           </p:cNvPr>
@@ -5347,7 +5347,7 @@
           <p:cNvPr id="4" name="Rectangle 3">
             <a:extLst xmlns:a="http://schemas.openxmlformats.org/drawingml/2006/main">
               <a:ext uri="{FF2B5EF4-FFF2-40B4-BE49-F238E27FC236}">
-                <a16:creationId xmlns:a16="http://schemas.microsoft.com/office/drawing/2014/main" id="{3656063A-EB66-425D-8C29-6B24E6D0CA86}"/>
+                <a16:creationId xmlns:a16="http://schemas.microsoft.com/office/drawing/2014/main" id="{4E4BFE5E-A993-4CB7-A231-2B167E16FEBD}"/>
               </a:ext>
             </a:extLst>
           </p:cNvPr>
@@ -5400,7 +5400,7 @@
           <p:cNvPr id="5" name="TextBox 4">
             <a:extLst xmlns:a="http://schemas.openxmlformats.org/drawingml/2006/main">
               <a:ext uri="{FF2B5EF4-FFF2-40B4-BE49-F238E27FC236}">
-                <a16:creationId xmlns:a16="http://schemas.microsoft.com/office/drawing/2014/main" id="{5FF2463E-93FF-435E-BEB7-D36803B4128F}"/>
+                <a16:creationId xmlns:a16="http://schemas.microsoft.com/office/drawing/2014/main" id="{9E5D2F36-7CA8-46B7-8172-19594575E203}"/>
               </a:ext>
             </a:extLst>
           </p:cNvPr>
@@ -5463,7 +5463,7 @@
           <p:cNvPr id="6" name="Rounded Rectangle 5">
             <a:extLst xmlns:a="http://schemas.openxmlformats.org/drawingml/2006/main">
               <a:ext uri="{FF2B5EF4-FFF2-40B4-BE49-F238E27FC236}">
-                <a16:creationId xmlns:a16="http://schemas.microsoft.com/office/drawing/2014/main" id="{BD82A6BA-A1BC-4AD8-A63B-472E3412F2D1}"/>
+                <a16:creationId xmlns:a16="http://schemas.microsoft.com/office/drawing/2014/main" id="{ED7CEF2C-EB15-4F19-BD36-5F57718E2E34}"/>
               </a:ext>
             </a:extLst>
           </p:cNvPr>
@@ -5518,7 +5518,7 @@
           <p:cNvPr id="7" name="TextBox 6">
             <a:extLst xmlns:a="http://schemas.openxmlformats.org/drawingml/2006/main">
               <a:ext uri="{FF2B5EF4-FFF2-40B4-BE49-F238E27FC236}">
-                <a16:creationId xmlns:a16="http://schemas.microsoft.com/office/drawing/2014/main" id="{2E82FB1E-8309-43DC-AD65-8340D7265777}"/>
+                <a16:creationId xmlns:a16="http://schemas.microsoft.com/office/drawing/2014/main" id="{0D7C2161-B536-40BF-A976-A4CD3B05A8DB}"/>
               </a:ext>
             </a:extLst>
           </p:cNvPr>
@@ -5622,7 +5622,7 @@
           <p:cNvPr id="8" name="Rounded Rectangle 7">
             <a:extLst xmlns:a="http://schemas.openxmlformats.org/drawingml/2006/main">
               <a:ext uri="{FF2B5EF4-FFF2-40B4-BE49-F238E27FC236}">
-                <a16:creationId xmlns:a16="http://schemas.microsoft.com/office/drawing/2014/main" id="{44FD35A6-D270-44E7-B731-9A8452A6900A}"/>
+                <a16:creationId xmlns:a16="http://schemas.microsoft.com/office/drawing/2014/main" id="{F50D51DA-FE1F-4D8A-B3E2-EB7CEB989FC4}"/>
               </a:ext>
             </a:extLst>
           </p:cNvPr>
@@ -5677,7 +5677,7 @@
           <p:cNvPr id="9" name="TextBox 8">
             <a:extLst xmlns:a="http://schemas.openxmlformats.org/drawingml/2006/main">
               <a:ext uri="{FF2B5EF4-FFF2-40B4-BE49-F238E27FC236}">
-                <a16:creationId xmlns:a16="http://schemas.microsoft.com/office/drawing/2014/main" id="{8FE9BAE7-4993-4E11-BEFD-160D74284154}"/>
+                <a16:creationId xmlns:a16="http://schemas.microsoft.com/office/drawing/2014/main" id="{CD85419E-23E1-404E-9E32-D2267F41BED4}"/>
               </a:ext>
             </a:extLst>
           </p:cNvPr>
@@ -5762,7 +5762,7 @@
           <p:cNvPr id="10" name="Rounded Rectangle 9">
             <a:extLst xmlns:a="http://schemas.openxmlformats.org/drawingml/2006/main">
               <a:ext uri="{FF2B5EF4-FFF2-40B4-BE49-F238E27FC236}">
-                <a16:creationId xmlns:a16="http://schemas.microsoft.com/office/drawing/2014/main" id="{BD0EAEAB-F4DF-4D60-89C4-0F636A4B1794}"/>
+                <a16:creationId xmlns:a16="http://schemas.microsoft.com/office/drawing/2014/main" id="{D694ADD5-93D2-40F8-8B37-25A5EECCC428}"/>
               </a:ext>
             </a:extLst>
           </p:cNvPr>
@@ -5817,7 +5817,7 @@
           <p:cNvPr id="11" name="TextBox 10">
             <a:extLst xmlns:a="http://schemas.openxmlformats.org/drawingml/2006/main">
               <a:ext uri="{FF2B5EF4-FFF2-40B4-BE49-F238E27FC236}">
-                <a16:creationId xmlns:a16="http://schemas.microsoft.com/office/drawing/2014/main" id="{26124347-2A68-4A17-9AE1-6D101C12AD09}"/>
+                <a16:creationId xmlns:a16="http://schemas.microsoft.com/office/drawing/2014/main" id="{EDF41CEE-C939-4033-AB79-B49121B5096E}"/>
               </a:ext>
             </a:extLst>
           </p:cNvPr>
@@ -5919,7 +5919,7 @@
     </p:spTree>
     <p:extLst>
       <p:ext uri="{BB962C8B-B14F-4D97-AF65-F5344CB8AC3E}">
-        <p14:creationId xmlns:p14="http://schemas.microsoft.com/office/powerpoint/2010/main" val="626340798"/>
+        <p14:creationId xmlns:p14="http://schemas.microsoft.com/office/powerpoint/2010/main" val="1171260497"/>
       </p:ext>
     </p:extLst>
   </p:cSld>
@@ -5943,7 +5943,7 @@
           <p:cNvPr id="2" name="Rectangle 1">
             <a:extLst xmlns:a="http://schemas.openxmlformats.org/drawingml/2006/main">
               <a:ext uri="{FF2B5EF4-FFF2-40B4-BE49-F238E27FC236}">
-                <a16:creationId xmlns:a16="http://schemas.microsoft.com/office/drawing/2014/main" id="{F0977D85-D0EC-4BFC-A433-3FE0752CEABE}"/>
+                <a16:creationId xmlns:a16="http://schemas.microsoft.com/office/drawing/2014/main" id="{5138FABC-7F66-481B-8C2E-C4D291FB86B7}"/>
               </a:ext>
             </a:extLst>
           </p:cNvPr>
@@ -5996,7 +5996,7 @@
           <p:cNvPr id="3" name="Rectangle 2">
             <a:extLst xmlns:a="http://schemas.openxmlformats.org/drawingml/2006/main">
               <a:ext uri="{FF2B5EF4-FFF2-40B4-BE49-F238E27FC236}">
-                <a16:creationId xmlns:a16="http://schemas.microsoft.com/office/drawing/2014/main" id="{FA03800B-7EF3-459C-AE14-808830B06E5C}"/>
+                <a16:creationId xmlns:a16="http://schemas.microsoft.com/office/drawing/2014/main" id="{400E7278-5CAE-40C1-AD10-AACADE77F4F4}"/>
               </a:ext>
             </a:extLst>
           </p:cNvPr>
@@ -6049,7 +6049,7 @@
           <p:cNvPr id="4" name="Rectangle 3">
             <a:extLst xmlns:a="http://schemas.openxmlformats.org/drawingml/2006/main">
               <a:ext uri="{FF2B5EF4-FFF2-40B4-BE49-F238E27FC236}">
-                <a16:creationId xmlns:a16="http://schemas.microsoft.com/office/drawing/2014/main" id="{14904BB7-31CF-4BF9-B609-07BD2D1C733F}"/>
+                <a16:creationId xmlns:a16="http://schemas.microsoft.com/office/drawing/2014/main" id="{ED1CC4C4-B6D6-49F0-9827-436949CFFE98}"/>
               </a:ext>
             </a:extLst>
           </p:cNvPr>
@@ -6102,7 +6102,7 @@
           <p:cNvPr id="5" name="TextBox 4">
             <a:extLst xmlns:a="http://schemas.openxmlformats.org/drawingml/2006/main">
               <a:ext uri="{FF2B5EF4-FFF2-40B4-BE49-F238E27FC236}">
-                <a16:creationId xmlns:a16="http://schemas.microsoft.com/office/drawing/2014/main" id="{0122C0C5-BB4A-48C1-BDE7-2F24F7D77A4B}"/>
+                <a16:creationId xmlns:a16="http://schemas.microsoft.com/office/drawing/2014/main" id="{7C34A510-510D-41E6-9447-BE3BCBCFE5D2}"/>
               </a:ext>
             </a:extLst>
           </p:cNvPr>
@@ -6165,7 +6165,7 @@
           <p:cNvPr id="6" name="Rounded Rectangle 5">
             <a:extLst xmlns:a="http://schemas.openxmlformats.org/drawingml/2006/main">
               <a:ext uri="{FF2B5EF4-FFF2-40B4-BE49-F238E27FC236}">
-                <a16:creationId xmlns:a16="http://schemas.microsoft.com/office/drawing/2014/main" id="{C9315923-4882-4665-8ED9-D8971CC5B515}"/>
+                <a16:creationId xmlns:a16="http://schemas.microsoft.com/office/drawing/2014/main" id="{7C05AE73-0C32-4BA5-9594-868BA2764887}"/>
               </a:ext>
             </a:extLst>
           </p:cNvPr>
@@ -6220,7 +6220,7 @@
           <p:cNvPr id="7" name="TextBox 6">
             <a:extLst xmlns:a="http://schemas.openxmlformats.org/drawingml/2006/main">
               <a:ext uri="{FF2B5EF4-FFF2-40B4-BE49-F238E27FC236}">
-                <a16:creationId xmlns:a16="http://schemas.microsoft.com/office/drawing/2014/main" id="{056F66D9-5516-4569-BFAC-38F2C84F85BD}"/>
+                <a16:creationId xmlns:a16="http://schemas.microsoft.com/office/drawing/2014/main" id="{83405D1A-3133-4202-969F-57FA4BC446C4}"/>
               </a:ext>
             </a:extLst>
           </p:cNvPr>
@@ -6419,7 +6419,7 @@
           <p:cNvPr id="8" name="Rounded Rectangle 7">
             <a:extLst xmlns:a="http://schemas.openxmlformats.org/drawingml/2006/main">
               <a:ext uri="{FF2B5EF4-FFF2-40B4-BE49-F238E27FC236}">
-                <a16:creationId xmlns:a16="http://schemas.microsoft.com/office/drawing/2014/main" id="{5FBA845E-5769-49B5-91C0-884B19983161}"/>
+                <a16:creationId xmlns:a16="http://schemas.microsoft.com/office/drawing/2014/main" id="{CDB9D29F-30CB-48A2-A95A-5B1FF6D2794C}"/>
               </a:ext>
             </a:extLst>
           </p:cNvPr>
@@ -6474,7 +6474,7 @@
           <p:cNvPr id="9" name="TextBox 8">
             <a:extLst xmlns:a="http://schemas.openxmlformats.org/drawingml/2006/main">
               <a:ext uri="{FF2B5EF4-FFF2-40B4-BE49-F238E27FC236}">
-                <a16:creationId xmlns:a16="http://schemas.microsoft.com/office/drawing/2014/main" id="{5BF6DC06-33D4-4582-93AB-690607CAB8D9}"/>
+                <a16:creationId xmlns:a16="http://schemas.microsoft.com/office/drawing/2014/main" id="{3CA5E277-37FA-469F-B32C-57A08FD40C6E}"/>
               </a:ext>
             </a:extLst>
           </p:cNvPr>
@@ -6595,7 +6595,7 @@
     </p:spTree>
     <p:extLst>
       <p:ext uri="{BB962C8B-B14F-4D97-AF65-F5344CB8AC3E}">
-        <p14:creationId xmlns:p14="http://schemas.microsoft.com/office/powerpoint/2010/main" val="1722035190"/>
+        <p14:creationId xmlns:p14="http://schemas.microsoft.com/office/powerpoint/2010/main" val="1500473785"/>
       </p:ext>
     </p:extLst>
   </p:cSld>
@@ -6619,7 +6619,7 @@
           <p:cNvPr id="2" name="Rectangle 1">
             <a:extLst xmlns:a="http://schemas.openxmlformats.org/drawingml/2006/main">
               <a:ext uri="{FF2B5EF4-FFF2-40B4-BE49-F238E27FC236}">
-                <a16:creationId xmlns:a16="http://schemas.microsoft.com/office/drawing/2014/main" id="{7AB0EEF1-842F-4962-9CEA-674924E48FD9}"/>
+                <a16:creationId xmlns:a16="http://schemas.microsoft.com/office/drawing/2014/main" id="{39E6C460-4844-4E3D-80E9-9195C7914D45}"/>
               </a:ext>
             </a:extLst>
           </p:cNvPr>
@@ -6672,7 +6672,7 @@
           <p:cNvPr id="3" name="Rectangle 2">
             <a:extLst xmlns:a="http://schemas.openxmlformats.org/drawingml/2006/main">
               <a:ext uri="{FF2B5EF4-FFF2-40B4-BE49-F238E27FC236}">
-                <a16:creationId xmlns:a16="http://schemas.microsoft.com/office/drawing/2014/main" id="{FA7E393D-5BC7-48E6-981C-B360BE086850}"/>
+                <a16:creationId xmlns:a16="http://schemas.microsoft.com/office/drawing/2014/main" id="{884E266D-CA27-4D88-BB5E-1BB867F7B356}"/>
               </a:ext>
             </a:extLst>
           </p:cNvPr>
@@ -6725,7 +6725,7 @@
           <p:cNvPr id="4" name="TextBox 3">
             <a:extLst xmlns:a="http://schemas.openxmlformats.org/drawingml/2006/main">
               <a:ext uri="{FF2B5EF4-FFF2-40B4-BE49-F238E27FC236}">
-                <a16:creationId xmlns:a16="http://schemas.microsoft.com/office/drawing/2014/main" id="{AC94BA45-8E39-4354-877F-564EF5A41E53}"/>
+                <a16:creationId xmlns:a16="http://schemas.microsoft.com/office/drawing/2014/main" id="{473E6053-AED8-4DD4-B60B-3EE9F423B224}"/>
               </a:ext>
             </a:extLst>
           </p:cNvPr>
@@ -6903,7 +6903,7 @@
     </p:spTree>
     <p:extLst>
       <p:ext uri="{BB962C8B-B14F-4D97-AF65-F5344CB8AC3E}">
-        <p14:creationId xmlns:p14="http://schemas.microsoft.com/office/powerpoint/2010/main" val="48076162"/>
+        <p14:creationId xmlns:p14="http://schemas.microsoft.com/office/powerpoint/2010/main" val="792577894"/>
       </p:ext>
     </p:extLst>
   </p:cSld>
@@ -6927,7 +6927,7 @@
           <p:cNvPr id="2" name="Rectangle 1">
             <a:extLst xmlns:a="http://schemas.openxmlformats.org/drawingml/2006/main">
               <a:ext uri="{FF2B5EF4-FFF2-40B4-BE49-F238E27FC236}">
-                <a16:creationId xmlns:a16="http://schemas.microsoft.com/office/drawing/2014/main" id="{BDEC8858-E3A2-4F0E-BC96-720B553A643C}"/>
+                <a16:creationId xmlns:a16="http://schemas.microsoft.com/office/drawing/2014/main" id="{BA09B649-24F0-480B-B4A2-209DA9BEA2D8}"/>
               </a:ext>
             </a:extLst>
           </p:cNvPr>
@@ -6980,7 +6980,7 @@
           <p:cNvPr id="3" name="Rectangle 2">
             <a:extLst xmlns:a="http://schemas.openxmlformats.org/drawingml/2006/main">
               <a:ext uri="{FF2B5EF4-FFF2-40B4-BE49-F238E27FC236}">
-                <a16:creationId xmlns:a16="http://schemas.microsoft.com/office/drawing/2014/main" id="{F7FE8DB0-3FFB-4E1D-A271-40555BA67E94}"/>
+                <a16:creationId xmlns:a16="http://schemas.microsoft.com/office/drawing/2014/main" id="{487A8532-79A2-467F-90A9-066755336917}"/>
               </a:ext>
             </a:extLst>
           </p:cNvPr>
@@ -7033,7 +7033,7 @@
           <p:cNvPr id="4" name="Rectangle 3">
             <a:extLst xmlns:a="http://schemas.openxmlformats.org/drawingml/2006/main">
               <a:ext uri="{FF2B5EF4-FFF2-40B4-BE49-F238E27FC236}">
-                <a16:creationId xmlns:a16="http://schemas.microsoft.com/office/drawing/2014/main" id="{6AC94A5A-229A-4783-A311-5EEAC2306031}"/>
+                <a16:creationId xmlns:a16="http://schemas.microsoft.com/office/drawing/2014/main" id="{100FE809-0177-4D16-9848-70CB2531FEC5}"/>
               </a:ext>
             </a:extLst>
           </p:cNvPr>
@@ -7086,7 +7086,7 @@
           <p:cNvPr id="5" name="TextBox 4">
             <a:extLst xmlns:a="http://schemas.openxmlformats.org/drawingml/2006/main">
               <a:ext uri="{FF2B5EF4-FFF2-40B4-BE49-F238E27FC236}">
-                <a16:creationId xmlns:a16="http://schemas.microsoft.com/office/drawing/2014/main" id="{B38CE4D6-7674-4261-88D8-178A886D350B}"/>
+                <a16:creationId xmlns:a16="http://schemas.microsoft.com/office/drawing/2014/main" id="{D2B06B6E-0F8D-4C15-A07A-D52D230E1985}"/>
               </a:ext>
             </a:extLst>
           </p:cNvPr>
@@ -7149,7 +7149,7 @@
           <p:cNvPr id="6" name="Rounded Rectangle 5">
             <a:extLst xmlns:a="http://schemas.openxmlformats.org/drawingml/2006/main">
               <a:ext uri="{FF2B5EF4-FFF2-40B4-BE49-F238E27FC236}">
-                <a16:creationId xmlns:a16="http://schemas.microsoft.com/office/drawing/2014/main" id="{02977216-DCA9-464B-9979-0CE153096E20}"/>
+                <a16:creationId xmlns:a16="http://schemas.microsoft.com/office/drawing/2014/main" id="{F3F9053D-F011-409C-B909-23CFE30EC785}"/>
               </a:ext>
             </a:extLst>
           </p:cNvPr>
@@ -7204,7 +7204,7 @@
           <p:cNvPr id="7" name="TextBox 6">
             <a:extLst xmlns:a="http://schemas.openxmlformats.org/drawingml/2006/main">
               <a:ext uri="{FF2B5EF4-FFF2-40B4-BE49-F238E27FC236}">
-                <a16:creationId xmlns:a16="http://schemas.microsoft.com/office/drawing/2014/main" id="{19F6EF95-7158-434A-A356-E46C4E779BF7}"/>
+                <a16:creationId xmlns:a16="http://schemas.microsoft.com/office/drawing/2014/main" id="{13FD54E5-882F-404B-91B1-06DDA9D0CD21}"/>
               </a:ext>
             </a:extLst>
           </p:cNvPr>
@@ -7308,7 +7308,7 @@
           <p:cNvPr id="8" name="Rounded Rectangle 7">
             <a:extLst xmlns:a="http://schemas.openxmlformats.org/drawingml/2006/main">
               <a:ext uri="{FF2B5EF4-FFF2-40B4-BE49-F238E27FC236}">
-                <a16:creationId xmlns:a16="http://schemas.microsoft.com/office/drawing/2014/main" id="{3E63B7A7-F691-4096-9FC9-015E26BB8BD4}"/>
+                <a16:creationId xmlns:a16="http://schemas.microsoft.com/office/drawing/2014/main" id="{E16AB32C-0638-4164-9D05-EB57FD8F2B89}"/>
               </a:ext>
             </a:extLst>
           </p:cNvPr>
@@ -7363,7 +7363,7 @@
           <p:cNvPr id="9" name="TextBox 8">
             <a:extLst xmlns:a="http://schemas.openxmlformats.org/drawingml/2006/main">
               <a:ext uri="{FF2B5EF4-FFF2-40B4-BE49-F238E27FC236}">
-                <a16:creationId xmlns:a16="http://schemas.microsoft.com/office/drawing/2014/main" id="{55C46474-73B8-49A7-9AF8-AAA5345B4704}"/>
+                <a16:creationId xmlns:a16="http://schemas.microsoft.com/office/drawing/2014/main" id="{CD2A7B77-0AC7-4D72-B593-0A8B9BBFF186}"/>
               </a:ext>
             </a:extLst>
           </p:cNvPr>
@@ -7467,7 +7467,7 @@
           <p:cNvPr id="10" name="Rounded Rectangle 9">
             <a:extLst xmlns:a="http://schemas.openxmlformats.org/drawingml/2006/main">
               <a:ext uri="{FF2B5EF4-FFF2-40B4-BE49-F238E27FC236}">
-                <a16:creationId xmlns:a16="http://schemas.microsoft.com/office/drawing/2014/main" id="{22F8D07D-8441-4EAB-9568-5A9AEBF6E4B6}"/>
+                <a16:creationId xmlns:a16="http://schemas.microsoft.com/office/drawing/2014/main" id="{963CCAA3-3D37-4706-A0CC-3D3842D4A899}"/>
               </a:ext>
             </a:extLst>
           </p:cNvPr>
@@ -7522,7 +7522,7 @@
           <p:cNvPr id="11" name="TextBox 10">
             <a:extLst xmlns:a="http://schemas.openxmlformats.org/drawingml/2006/main">
               <a:ext uri="{FF2B5EF4-FFF2-40B4-BE49-F238E27FC236}">
-                <a16:creationId xmlns:a16="http://schemas.microsoft.com/office/drawing/2014/main" id="{1FEBEAD1-ABAE-42D7-8129-36F043F6B19B}"/>
+                <a16:creationId xmlns:a16="http://schemas.microsoft.com/office/drawing/2014/main" id="{CA6D9167-F6CE-4420-87F0-AF0FA359E710}"/>
               </a:ext>
             </a:extLst>
           </p:cNvPr>
@@ -7681,7 +7681,7 @@
     </p:spTree>
     <p:extLst>
       <p:ext uri="{BB962C8B-B14F-4D97-AF65-F5344CB8AC3E}">
-        <p14:creationId xmlns:p14="http://schemas.microsoft.com/office/powerpoint/2010/main" val="488177730"/>
+        <p14:creationId xmlns:p14="http://schemas.microsoft.com/office/powerpoint/2010/main" val="664807021"/>
       </p:ext>
     </p:extLst>
   </p:cSld>
@@ -7705,7 +7705,7 @@
           <p:cNvPr id="2" name="Rectangle 1">
             <a:extLst xmlns:a="http://schemas.openxmlformats.org/drawingml/2006/main">
               <a:ext uri="{FF2B5EF4-FFF2-40B4-BE49-F238E27FC236}">
-                <a16:creationId xmlns:a16="http://schemas.microsoft.com/office/drawing/2014/main" id="{B8C91304-3876-4BE8-A750-2BCE0A9E5A5D}"/>
+                <a16:creationId xmlns:a16="http://schemas.microsoft.com/office/drawing/2014/main" id="{9FB69427-F37F-4485-91D3-E07BD3970B0B}"/>
               </a:ext>
             </a:extLst>
           </p:cNvPr>
@@ -7758,7 +7758,7 @@
           <p:cNvPr id="3" name="Rectangle 2">
             <a:extLst xmlns:a="http://schemas.openxmlformats.org/drawingml/2006/main">
               <a:ext uri="{FF2B5EF4-FFF2-40B4-BE49-F238E27FC236}">
-                <a16:creationId xmlns:a16="http://schemas.microsoft.com/office/drawing/2014/main" id="{6F2677EE-9223-469F-88CC-79C47FB95DB3}"/>
+                <a16:creationId xmlns:a16="http://schemas.microsoft.com/office/drawing/2014/main" id="{58DD3E3D-CDF8-4FFE-BA16-EFDEECBED58A}"/>
               </a:ext>
             </a:extLst>
           </p:cNvPr>
@@ -7811,7 +7811,7 @@
           <p:cNvPr id="4" name="Rectangle 3">
             <a:extLst xmlns:a="http://schemas.openxmlformats.org/drawingml/2006/main">
               <a:ext uri="{FF2B5EF4-FFF2-40B4-BE49-F238E27FC236}">
-                <a16:creationId xmlns:a16="http://schemas.microsoft.com/office/drawing/2014/main" id="{FACC1211-BFD5-484C-9D7F-B8AB4BE2B688}"/>
+                <a16:creationId xmlns:a16="http://schemas.microsoft.com/office/drawing/2014/main" id="{DAD32B2E-4A88-4FD6-B17A-32DCFBBE5969}"/>
               </a:ext>
             </a:extLst>
           </p:cNvPr>
@@ -7864,7 +7864,7 @@
           <p:cNvPr id="5" name="TextBox 4">
             <a:extLst xmlns:a="http://schemas.openxmlformats.org/drawingml/2006/main">
               <a:ext uri="{FF2B5EF4-FFF2-40B4-BE49-F238E27FC236}">
-                <a16:creationId xmlns:a16="http://schemas.microsoft.com/office/drawing/2014/main" id="{7D6C8189-8A5E-4B68-90D5-A726C42AE6A4}"/>
+                <a16:creationId xmlns:a16="http://schemas.microsoft.com/office/drawing/2014/main" id="{B17C2597-7D19-42C5-9EBF-7CAA367F5033}"/>
               </a:ext>
             </a:extLst>
           </p:cNvPr>
@@ -7927,7 +7927,7 @@
           <p:cNvPr id="6" name="Rounded Rectangle 5">
             <a:extLst xmlns:a="http://schemas.openxmlformats.org/drawingml/2006/main">
               <a:ext uri="{FF2B5EF4-FFF2-40B4-BE49-F238E27FC236}">
-                <a16:creationId xmlns:a16="http://schemas.microsoft.com/office/drawing/2014/main" id="{78AB36E8-BD5E-4BFB-8BFA-214D879441EE}"/>
+                <a16:creationId xmlns:a16="http://schemas.microsoft.com/office/drawing/2014/main" id="{7766B36E-7B58-48DF-9BD3-8CFB9B58A028}"/>
               </a:ext>
             </a:extLst>
           </p:cNvPr>
@@ -7982,7 +7982,7 @@
           <p:cNvPr id="7" name="TextBox 6">
             <a:extLst xmlns:a="http://schemas.openxmlformats.org/drawingml/2006/main">
               <a:ext uri="{FF2B5EF4-FFF2-40B4-BE49-F238E27FC236}">
-                <a16:creationId xmlns:a16="http://schemas.microsoft.com/office/drawing/2014/main" id="{1DE16BAF-626F-4F93-B843-13417EE08E07}"/>
+                <a16:creationId xmlns:a16="http://schemas.microsoft.com/office/drawing/2014/main" id="{6C9A2DAB-6AD2-4B39-8F16-462CCC83F459}"/>
               </a:ext>
             </a:extLst>
           </p:cNvPr>
@@ -8105,7 +8105,7 @@
           <p:cNvPr id="8" name="Rounded Rectangle 7">
             <a:extLst xmlns:a="http://schemas.openxmlformats.org/drawingml/2006/main">
               <a:ext uri="{FF2B5EF4-FFF2-40B4-BE49-F238E27FC236}">
-                <a16:creationId xmlns:a16="http://schemas.microsoft.com/office/drawing/2014/main" id="{ADDBEEBE-D944-40D2-A581-2DEAB391344D}"/>
+                <a16:creationId xmlns:a16="http://schemas.microsoft.com/office/drawing/2014/main" id="{DF03DE50-51FD-4BC0-86F9-98A14E989FEF}"/>
               </a:ext>
             </a:extLst>
           </p:cNvPr>
@@ -8160,7 +8160,7 @@
           <p:cNvPr id="9" name="TextBox 8">
             <a:extLst xmlns:a="http://schemas.openxmlformats.org/drawingml/2006/main">
               <a:ext uri="{FF2B5EF4-FFF2-40B4-BE49-F238E27FC236}">
-                <a16:creationId xmlns:a16="http://schemas.microsoft.com/office/drawing/2014/main" id="{DAEF26EF-6284-49D5-9E54-15D62919BED4}"/>
+                <a16:creationId xmlns:a16="http://schemas.microsoft.com/office/drawing/2014/main" id="{7DA85F15-E398-4C81-BD57-6FBC40DEC217}"/>
               </a:ext>
             </a:extLst>
           </p:cNvPr>
@@ -8302,7 +8302,7 @@
           <p:cNvPr id="10" name="Rounded Rectangle 9">
             <a:extLst xmlns:a="http://schemas.openxmlformats.org/drawingml/2006/main">
               <a:ext uri="{FF2B5EF4-FFF2-40B4-BE49-F238E27FC236}">
-                <a16:creationId xmlns:a16="http://schemas.microsoft.com/office/drawing/2014/main" id="{1C490E98-BD38-4B69-A831-890E87DD9EA1}"/>
+                <a16:creationId xmlns:a16="http://schemas.microsoft.com/office/drawing/2014/main" id="{5AF6C990-24B4-4C65-948A-69E420673CF2}"/>
               </a:ext>
             </a:extLst>
           </p:cNvPr>
@@ -8357,7 +8357,7 @@
           <p:cNvPr id="11" name="TextBox 10">
             <a:extLst xmlns:a="http://schemas.openxmlformats.org/drawingml/2006/main">
               <a:ext uri="{FF2B5EF4-FFF2-40B4-BE49-F238E27FC236}">
-                <a16:creationId xmlns:a16="http://schemas.microsoft.com/office/drawing/2014/main" id="{7F55B837-DB12-4624-9439-54B19C191F22}"/>
+                <a16:creationId xmlns:a16="http://schemas.microsoft.com/office/drawing/2014/main" id="{1015CD2E-AD34-4E35-A7E8-3089F9B1B656}"/>
               </a:ext>
             </a:extLst>
           </p:cNvPr>
@@ -8459,7 +8459,7 @@
     </p:spTree>
     <p:extLst>
       <p:ext uri="{BB962C8B-B14F-4D97-AF65-F5344CB8AC3E}">
-        <p14:creationId xmlns:p14="http://schemas.microsoft.com/office/powerpoint/2010/main" val="120121349"/>
+        <p14:creationId xmlns:p14="http://schemas.microsoft.com/office/powerpoint/2010/main" val="805215013"/>
       </p:ext>
     </p:extLst>
   </p:cSld>
@@ -8483,7 +8483,7 @@
           <p:cNvPr id="2" name="Rectangle 1">
             <a:extLst xmlns:a="http://schemas.openxmlformats.org/drawingml/2006/main">
               <a:ext uri="{FF2B5EF4-FFF2-40B4-BE49-F238E27FC236}">
-                <a16:creationId xmlns:a16="http://schemas.microsoft.com/office/drawing/2014/main" id="{6AB984D4-4660-4AEF-9648-60243DCAC02E}"/>
+                <a16:creationId xmlns:a16="http://schemas.microsoft.com/office/drawing/2014/main" id="{CC927386-46EB-4707-8879-A57C3AF262A4}"/>
               </a:ext>
             </a:extLst>
           </p:cNvPr>
@@ -8536,7 +8536,7 @@
           <p:cNvPr id="3" name="Rectangle 2">
             <a:extLst xmlns:a="http://schemas.openxmlformats.org/drawingml/2006/main">
               <a:ext uri="{FF2B5EF4-FFF2-40B4-BE49-F238E27FC236}">
-                <a16:creationId xmlns:a16="http://schemas.microsoft.com/office/drawing/2014/main" id="{28C4C1D7-E816-45D1-A47E-4676888FC222}"/>
+                <a16:creationId xmlns:a16="http://schemas.microsoft.com/office/drawing/2014/main" id="{A42D7A3D-7BB3-45DD-83A0-08C6483429C5}"/>
               </a:ext>
             </a:extLst>
           </p:cNvPr>
@@ -8589,7 +8589,7 @@
           <p:cNvPr id="4" name="Rectangle 3">
             <a:extLst xmlns:a="http://schemas.openxmlformats.org/drawingml/2006/main">
               <a:ext uri="{FF2B5EF4-FFF2-40B4-BE49-F238E27FC236}">
-                <a16:creationId xmlns:a16="http://schemas.microsoft.com/office/drawing/2014/main" id="{4A013848-876A-4E01-A2F1-34F899850DCF}"/>
+                <a16:creationId xmlns:a16="http://schemas.microsoft.com/office/drawing/2014/main" id="{A9581115-B5EF-43ED-A7ED-EAD8ADEF35DE}"/>
               </a:ext>
             </a:extLst>
           </p:cNvPr>
@@ -8642,7 +8642,7 @@
           <p:cNvPr id="5" name="TextBox 4">
             <a:extLst xmlns:a="http://schemas.openxmlformats.org/drawingml/2006/main">
               <a:ext uri="{FF2B5EF4-FFF2-40B4-BE49-F238E27FC236}">
-                <a16:creationId xmlns:a16="http://schemas.microsoft.com/office/drawing/2014/main" id="{F9F0810A-02BB-49EE-8ABE-C61125FECA91}"/>
+                <a16:creationId xmlns:a16="http://schemas.microsoft.com/office/drawing/2014/main" id="{D065CAD9-27B1-49AB-B459-DD61A7FE1020}"/>
               </a:ext>
             </a:extLst>
           </p:cNvPr>
@@ -8705,7 +8705,7 @@
           <p:cNvPr id="6" name="Rounded Rectangle 5">
             <a:extLst xmlns:a="http://schemas.openxmlformats.org/drawingml/2006/main">
               <a:ext uri="{FF2B5EF4-FFF2-40B4-BE49-F238E27FC236}">
-                <a16:creationId xmlns:a16="http://schemas.microsoft.com/office/drawing/2014/main" id="{E864AA60-E301-46BE-8B0B-FE9C9746229B}"/>
+                <a16:creationId xmlns:a16="http://schemas.microsoft.com/office/drawing/2014/main" id="{F9910C9A-5BC3-4B90-AFF0-C6F7431D456B}"/>
               </a:ext>
             </a:extLst>
           </p:cNvPr>
@@ -8760,7 +8760,7 @@
           <p:cNvPr id="7" name="TextBox 6">
             <a:extLst xmlns:a="http://schemas.openxmlformats.org/drawingml/2006/main">
               <a:ext uri="{FF2B5EF4-FFF2-40B4-BE49-F238E27FC236}">
-                <a16:creationId xmlns:a16="http://schemas.microsoft.com/office/drawing/2014/main" id="{92E2E69E-8877-481B-84C0-BF506D298332}"/>
+                <a16:creationId xmlns:a16="http://schemas.microsoft.com/office/drawing/2014/main" id="{030E5DFB-0C54-447B-AA15-7C7D98608FC0}"/>
               </a:ext>
             </a:extLst>
           </p:cNvPr>
@@ -8940,7 +8940,7 @@
           <p:cNvPr id="8" name="Rounded Rectangle 7">
             <a:extLst xmlns:a="http://schemas.openxmlformats.org/drawingml/2006/main">
               <a:ext uri="{FF2B5EF4-FFF2-40B4-BE49-F238E27FC236}">
-                <a16:creationId xmlns:a16="http://schemas.microsoft.com/office/drawing/2014/main" id="{1F879C99-4BCF-49A0-A090-AF63D8E2C405}"/>
+                <a16:creationId xmlns:a16="http://schemas.microsoft.com/office/drawing/2014/main" id="{AABEA2ED-05DA-456B-850A-18CFBA817DDC}"/>
               </a:ext>
             </a:extLst>
           </p:cNvPr>
@@ -8995,7 +8995,7 @@
           <p:cNvPr id="9" name="TextBox 8">
             <a:extLst xmlns:a="http://schemas.openxmlformats.org/drawingml/2006/main">
               <a:ext uri="{FF2B5EF4-FFF2-40B4-BE49-F238E27FC236}">
-                <a16:creationId xmlns:a16="http://schemas.microsoft.com/office/drawing/2014/main" id="{18EDB787-C28A-41D2-8E9A-AC238A804C37}"/>
+                <a16:creationId xmlns:a16="http://schemas.microsoft.com/office/drawing/2014/main" id="{6F60C486-C88D-40E9-8E93-23762C33F6A8}"/>
               </a:ext>
             </a:extLst>
           </p:cNvPr>
@@ -9154,7 +9154,7 @@
     </p:spTree>
     <p:extLst>
       <p:ext uri="{BB962C8B-B14F-4D97-AF65-F5344CB8AC3E}">
-        <p14:creationId xmlns:p14="http://schemas.microsoft.com/office/powerpoint/2010/main" val="137370403"/>
+        <p14:creationId xmlns:p14="http://schemas.microsoft.com/office/powerpoint/2010/main" val="1341019022"/>
       </p:ext>
     </p:extLst>
   </p:cSld>
@@ -9178,7 +9178,7 @@
           <p:cNvPr id="2" name="Rectangle 1">
             <a:extLst xmlns:a="http://schemas.openxmlformats.org/drawingml/2006/main">
               <a:ext uri="{FF2B5EF4-FFF2-40B4-BE49-F238E27FC236}">
-                <a16:creationId xmlns:a16="http://schemas.microsoft.com/office/drawing/2014/main" id="{08E4196B-9943-4EE2-A2DC-C2F6FA7EACB7}"/>
+                <a16:creationId xmlns:a16="http://schemas.microsoft.com/office/drawing/2014/main" id="{3C6897AD-8849-45BB-BD1F-41D9EFB98F0F}"/>
               </a:ext>
             </a:extLst>
           </p:cNvPr>
@@ -9231,7 +9231,7 @@
           <p:cNvPr id="3" name="Rectangle 2">
             <a:extLst xmlns:a="http://schemas.openxmlformats.org/drawingml/2006/main">
               <a:ext uri="{FF2B5EF4-FFF2-40B4-BE49-F238E27FC236}">
-                <a16:creationId xmlns:a16="http://schemas.microsoft.com/office/drawing/2014/main" id="{7A30C625-1CE2-4F88-B32B-662C34C8AF7D}"/>
+                <a16:creationId xmlns:a16="http://schemas.microsoft.com/office/drawing/2014/main" id="{2B034FBE-7944-4396-8934-A7A87B060843}"/>
               </a:ext>
             </a:extLst>
           </p:cNvPr>
@@ -9284,7 +9284,7 @@
           <p:cNvPr id="4" name="Rectangle 3">
             <a:extLst xmlns:a="http://schemas.openxmlformats.org/drawingml/2006/main">
               <a:ext uri="{FF2B5EF4-FFF2-40B4-BE49-F238E27FC236}">
-                <a16:creationId xmlns:a16="http://schemas.microsoft.com/office/drawing/2014/main" id="{6F3D1556-4D1E-4DA1-9562-E7BA7E0910F5}"/>
+                <a16:creationId xmlns:a16="http://schemas.microsoft.com/office/drawing/2014/main" id="{51F0EC3D-7B93-4560-9C03-F839C1382630}"/>
               </a:ext>
             </a:extLst>
           </p:cNvPr>
@@ -9337,7 +9337,7 @@
           <p:cNvPr id="5" name="TextBox 4">
             <a:extLst xmlns:a="http://schemas.openxmlformats.org/drawingml/2006/main">
               <a:ext uri="{FF2B5EF4-FFF2-40B4-BE49-F238E27FC236}">
-                <a16:creationId xmlns:a16="http://schemas.microsoft.com/office/drawing/2014/main" id="{B3F33527-A7F5-4E77-8246-72462F09F6FE}"/>
+                <a16:creationId xmlns:a16="http://schemas.microsoft.com/office/drawing/2014/main" id="{4C8FA24A-BACB-44D6-B3D7-32F64EEAA80B}"/>
               </a:ext>
             </a:extLst>
           </p:cNvPr>
@@ -9400,7 +9400,7 @@
           <p:cNvPr id="6" name="Rounded Rectangle 5">
             <a:extLst xmlns:a="http://schemas.openxmlformats.org/drawingml/2006/main">
               <a:ext uri="{FF2B5EF4-FFF2-40B4-BE49-F238E27FC236}">
-                <a16:creationId xmlns:a16="http://schemas.microsoft.com/office/drawing/2014/main" id="{6A538AA0-B61E-443C-ABFF-CB0C09F54C0E}"/>
+                <a16:creationId xmlns:a16="http://schemas.microsoft.com/office/drawing/2014/main" id="{95BFA2E8-BF06-406B-BDB0-C82BFC3D2372}"/>
               </a:ext>
             </a:extLst>
           </p:cNvPr>
@@ -9455,7 +9455,7 @@
           <p:cNvPr id="7" name="TextBox 6">
             <a:extLst xmlns:a="http://schemas.openxmlformats.org/drawingml/2006/main">
               <a:ext uri="{FF2B5EF4-FFF2-40B4-BE49-F238E27FC236}">
-                <a16:creationId xmlns:a16="http://schemas.microsoft.com/office/drawing/2014/main" id="{4F92E36C-24CE-4777-81AE-B8680FC63453}"/>
+                <a16:creationId xmlns:a16="http://schemas.microsoft.com/office/drawing/2014/main" id="{804E77B0-ABBF-4924-BBEB-23C4F60D230D}"/>
               </a:ext>
             </a:extLst>
           </p:cNvPr>
@@ -9673,7 +9673,7 @@
           <p:cNvPr id="8" name="Rounded Rectangle 7">
             <a:extLst xmlns:a="http://schemas.openxmlformats.org/drawingml/2006/main">
               <a:ext uri="{FF2B5EF4-FFF2-40B4-BE49-F238E27FC236}">
-                <a16:creationId xmlns:a16="http://schemas.microsoft.com/office/drawing/2014/main" id="{62B801AF-7D04-42D5-881D-54AD81DC0AA1}"/>
+                <a16:creationId xmlns:a16="http://schemas.microsoft.com/office/drawing/2014/main" id="{C004314A-F7AD-4CB0-94BA-AD0D6479D783}"/>
               </a:ext>
             </a:extLst>
           </p:cNvPr>
@@ -9728,7 +9728,7 @@
           <p:cNvPr id="9" name="TextBox 8">
             <a:extLst xmlns:a="http://schemas.openxmlformats.org/drawingml/2006/main">
               <a:ext uri="{FF2B5EF4-FFF2-40B4-BE49-F238E27FC236}">
-                <a16:creationId xmlns:a16="http://schemas.microsoft.com/office/drawing/2014/main" id="{04EFC88A-F1BC-4FE2-9DFC-B2A015EBA642}"/>
+                <a16:creationId xmlns:a16="http://schemas.microsoft.com/office/drawing/2014/main" id="{3346AB71-4D36-4916-B9FC-8AB017C69ED5}"/>
               </a:ext>
             </a:extLst>
           </p:cNvPr>
@@ -9963,7 +9963,7 @@
     </p:spTree>
     <p:extLst>
       <p:ext uri="{BB962C8B-B14F-4D97-AF65-F5344CB8AC3E}">
-        <p14:creationId xmlns:p14="http://schemas.microsoft.com/office/powerpoint/2010/main" val="656426320"/>
+        <p14:creationId xmlns:p14="http://schemas.microsoft.com/office/powerpoint/2010/main" val="606018695"/>
       </p:ext>
     </p:extLst>
   </p:cSld>
@@ -9987,7 +9987,7 @@
           <p:cNvPr id="2" name="Rectangle 1">
             <a:extLst xmlns:a="http://schemas.openxmlformats.org/drawingml/2006/main">
               <a:ext uri="{FF2B5EF4-FFF2-40B4-BE49-F238E27FC236}">
-                <a16:creationId xmlns:a16="http://schemas.microsoft.com/office/drawing/2014/main" id="{6322017C-305A-4F56-9595-A54708DEFD2E}"/>
+                <a16:creationId xmlns:a16="http://schemas.microsoft.com/office/drawing/2014/main" id="{C5B102A8-5D3A-40B7-BE22-CB9C511CAA5F}"/>
               </a:ext>
             </a:extLst>
           </p:cNvPr>
@@ -10040,7 +10040,7 @@
           <p:cNvPr id="3" name="Rectangle 2">
             <a:extLst xmlns:a="http://schemas.openxmlformats.org/drawingml/2006/main">
               <a:ext uri="{FF2B5EF4-FFF2-40B4-BE49-F238E27FC236}">
-                <a16:creationId xmlns:a16="http://schemas.microsoft.com/office/drawing/2014/main" id="{54E4CFEB-4D1F-480D-AD73-772188BDD289}"/>
+                <a16:creationId xmlns:a16="http://schemas.microsoft.com/office/drawing/2014/main" id="{184BA6EF-FB3F-474A-BC02-EC7620FCE8E9}"/>
               </a:ext>
             </a:extLst>
           </p:cNvPr>
@@ -10093,7 +10093,7 @@
           <p:cNvPr id="4" name="Rectangle 3">
             <a:extLst xmlns:a="http://schemas.openxmlformats.org/drawingml/2006/main">
               <a:ext uri="{FF2B5EF4-FFF2-40B4-BE49-F238E27FC236}">
-                <a16:creationId xmlns:a16="http://schemas.microsoft.com/office/drawing/2014/main" id="{854E5EBB-22E3-40D2-8372-6E3BAB4E89F3}"/>
+                <a16:creationId xmlns:a16="http://schemas.microsoft.com/office/drawing/2014/main" id="{4C7DCB61-6B99-425A-AB0A-DBAB40DC191E}"/>
               </a:ext>
             </a:extLst>
           </p:cNvPr>
@@ -10146,7 +10146,7 @@
           <p:cNvPr id="5" name="TextBox 4">
             <a:extLst xmlns:a="http://schemas.openxmlformats.org/drawingml/2006/main">
               <a:ext uri="{FF2B5EF4-FFF2-40B4-BE49-F238E27FC236}">
-                <a16:creationId xmlns:a16="http://schemas.microsoft.com/office/drawing/2014/main" id="{F86CD8D8-D06F-463E-B213-FD9ED83F7CBE}"/>
+                <a16:creationId xmlns:a16="http://schemas.microsoft.com/office/drawing/2014/main" id="{C037C206-D888-4A8D-A9D5-0B4D87BA39A2}"/>
               </a:ext>
             </a:extLst>
           </p:cNvPr>
@@ -10209,7 +10209,7 @@
           <p:cNvPr id="6" name="Rounded Rectangle 5">
             <a:extLst xmlns:a="http://schemas.openxmlformats.org/drawingml/2006/main">
               <a:ext uri="{FF2B5EF4-FFF2-40B4-BE49-F238E27FC236}">
-                <a16:creationId xmlns:a16="http://schemas.microsoft.com/office/drawing/2014/main" id="{7941E52D-A58B-4D1D-A30E-06592AD277AA}"/>
+                <a16:creationId xmlns:a16="http://schemas.microsoft.com/office/drawing/2014/main" id="{17A68180-CA41-4A4C-B662-5E04C6F88545}"/>
               </a:ext>
             </a:extLst>
           </p:cNvPr>
@@ -10264,7 +10264,7 @@
           <p:cNvPr id="7" name="TextBox 6">
             <a:extLst xmlns:a="http://schemas.openxmlformats.org/drawingml/2006/main">
               <a:ext uri="{FF2B5EF4-FFF2-40B4-BE49-F238E27FC236}">
-                <a16:creationId xmlns:a16="http://schemas.microsoft.com/office/drawing/2014/main" id="{7C1EA024-712E-4017-82AB-B3CB214D9D29}"/>
+                <a16:creationId xmlns:a16="http://schemas.microsoft.com/office/drawing/2014/main" id="{776C911C-6AC1-4988-8202-882B9FCA6AA2}"/>
               </a:ext>
             </a:extLst>
           </p:cNvPr>
@@ -10647,7 +10647,7 @@
           <p:nvPr/>
         </p:nvPicPr>
         <p:blipFill>
-          <a:blip xmlns:r="http://schemas.openxmlformats.org/officeDocument/2006/relationships" xmlns:a="http://schemas.openxmlformats.org/drawingml/2006/main" r:embed="R217fd81bb07544fe"/>
+          <a:blip xmlns:r="http://schemas.openxmlformats.org/officeDocument/2006/relationships" xmlns:a="http://schemas.openxmlformats.org/drawingml/2006/main" r:embed="R51ce7eb0837f45e8"/>
           <a:stretch xmlns:a="http://schemas.openxmlformats.org/drawingml/2006/main">
             <a:fillRect l="0" t="0" r="0" b="0"/>
           </a:stretch>
@@ -10667,7 +10667,7 @@
           <p:cNvPr id="9" name="Rounded Rectangle 8">
             <a:extLst xmlns:a="http://schemas.openxmlformats.org/drawingml/2006/main">
               <a:ext uri="{FF2B5EF4-FFF2-40B4-BE49-F238E27FC236}">
-                <a16:creationId xmlns:a16="http://schemas.microsoft.com/office/drawing/2014/main" id="{97D8C64F-7C54-40ED-B9E9-AFD49E4A9F14}"/>
+                <a16:creationId xmlns:a16="http://schemas.microsoft.com/office/drawing/2014/main" id="{F15D4490-0FE4-40EE-8442-0A95059B1247}"/>
               </a:ext>
             </a:extLst>
           </p:cNvPr>
@@ -10722,7 +10722,7 @@
           <p:cNvPr id="10" name="TextBox 9">
             <a:extLst xmlns:a="http://schemas.openxmlformats.org/drawingml/2006/main">
               <a:ext uri="{FF2B5EF4-FFF2-40B4-BE49-F238E27FC236}">
-                <a16:creationId xmlns:a16="http://schemas.microsoft.com/office/drawing/2014/main" id="{B4C2B5A1-1E73-4836-B6C8-B1E23805CE34}"/>
+                <a16:creationId xmlns:a16="http://schemas.microsoft.com/office/drawing/2014/main" id="{7E2590B2-7FF0-4FE8-9E1B-E4B21D6BC5A9}"/>
               </a:ext>
             </a:extLst>
           </p:cNvPr>
@@ -10808,7 +10808,7 @@
     </p:spTree>
     <p:extLst>
       <p:ext uri="{BB962C8B-B14F-4D97-AF65-F5344CB8AC3E}">
-        <p14:creationId xmlns:p14="http://schemas.microsoft.com/office/powerpoint/2010/main" val="1909978044"/>
+        <p14:creationId xmlns:p14="http://schemas.microsoft.com/office/powerpoint/2010/main" val="1813359118"/>
       </p:ext>
     </p:extLst>
   </p:cSld>
@@ -10832,7 +10832,7 @@
           <p:cNvPr id="2" name="Rectangle 1">
             <a:extLst xmlns:a="http://schemas.openxmlformats.org/drawingml/2006/main">
               <a:ext uri="{FF2B5EF4-FFF2-40B4-BE49-F238E27FC236}">
-                <a16:creationId xmlns:a16="http://schemas.microsoft.com/office/drawing/2014/main" id="{14ABA4FC-409E-4306-89C9-2ADD3BD74917}"/>
+                <a16:creationId xmlns:a16="http://schemas.microsoft.com/office/drawing/2014/main" id="{1947AE4E-1230-41F0-A732-B780141E38B6}"/>
               </a:ext>
             </a:extLst>
           </p:cNvPr>
@@ -10885,7 +10885,7 @@
           <p:cNvPr id="3" name="Rectangle 2">
             <a:extLst xmlns:a="http://schemas.openxmlformats.org/drawingml/2006/main">
               <a:ext uri="{FF2B5EF4-FFF2-40B4-BE49-F238E27FC236}">
-                <a16:creationId xmlns:a16="http://schemas.microsoft.com/office/drawing/2014/main" id="{94798FD9-03D7-4AF6-8611-A7D33D457A14}"/>
+                <a16:creationId xmlns:a16="http://schemas.microsoft.com/office/drawing/2014/main" id="{0D21D111-659E-45F9-8A7D-09369F1E0A13}"/>
               </a:ext>
             </a:extLst>
           </p:cNvPr>
@@ -10938,7 +10938,7 @@
           <p:cNvPr id="4" name="Rectangle 3">
             <a:extLst xmlns:a="http://schemas.openxmlformats.org/drawingml/2006/main">
               <a:ext uri="{FF2B5EF4-FFF2-40B4-BE49-F238E27FC236}">
-                <a16:creationId xmlns:a16="http://schemas.microsoft.com/office/drawing/2014/main" id="{B3124EE1-B196-40FD-9776-1424BA286206}"/>
+                <a16:creationId xmlns:a16="http://schemas.microsoft.com/office/drawing/2014/main" id="{1269249E-16B5-46A5-A10F-048F4D073C87}"/>
               </a:ext>
             </a:extLst>
           </p:cNvPr>
@@ -10991,7 +10991,7 @@
           <p:cNvPr id="5" name="TextBox 4">
             <a:extLst xmlns:a="http://schemas.openxmlformats.org/drawingml/2006/main">
               <a:ext uri="{FF2B5EF4-FFF2-40B4-BE49-F238E27FC236}">
-                <a16:creationId xmlns:a16="http://schemas.microsoft.com/office/drawing/2014/main" id="{9EBF54F2-A178-430A-B712-0CC2319FDB77}"/>
+                <a16:creationId xmlns:a16="http://schemas.microsoft.com/office/drawing/2014/main" id="{0D2E2C8F-AE56-4508-BC4E-9196EC9392F5}"/>
               </a:ext>
             </a:extLst>
           </p:cNvPr>
@@ -11054,7 +11054,7 @@
           <p:cNvPr id="6" name="Rounded Rectangle 5">
             <a:extLst xmlns:a="http://schemas.openxmlformats.org/drawingml/2006/main">
               <a:ext uri="{FF2B5EF4-FFF2-40B4-BE49-F238E27FC236}">
-                <a16:creationId xmlns:a16="http://schemas.microsoft.com/office/drawing/2014/main" id="{795829A9-F77C-43C5-ADE1-85B87E9275BA}"/>
+                <a16:creationId xmlns:a16="http://schemas.microsoft.com/office/drawing/2014/main" id="{41BDD51A-C34B-4352-A973-593F8B6C772A}"/>
               </a:ext>
             </a:extLst>
           </p:cNvPr>
@@ -11109,7 +11109,7 @@
           <p:cNvPr id="7" name="TextBox 6">
             <a:extLst xmlns:a="http://schemas.openxmlformats.org/drawingml/2006/main">
               <a:ext uri="{FF2B5EF4-FFF2-40B4-BE49-F238E27FC236}">
-                <a16:creationId xmlns:a16="http://schemas.microsoft.com/office/drawing/2014/main" id="{856EEE6D-5744-4F64-B9CF-B1DFDD626B1A}"/>
+                <a16:creationId xmlns:a16="http://schemas.microsoft.com/office/drawing/2014/main" id="{37D35F9C-463A-4565-A504-4AC8A9BFEC6C}"/>
               </a:ext>
             </a:extLst>
           </p:cNvPr>
@@ -11346,7 +11346,7 @@
           <p:cNvPr id="8" name="Rounded Rectangle 7">
             <a:extLst xmlns:a="http://schemas.openxmlformats.org/drawingml/2006/main">
               <a:ext uri="{FF2B5EF4-FFF2-40B4-BE49-F238E27FC236}">
-                <a16:creationId xmlns:a16="http://schemas.microsoft.com/office/drawing/2014/main" id="{5E693F00-2792-4741-99A5-94B263CF7B57}"/>
+                <a16:creationId xmlns:a16="http://schemas.microsoft.com/office/drawing/2014/main" id="{E8C290BA-7EF9-4F75-AE6C-27EDC417A9CD}"/>
               </a:ext>
             </a:extLst>
           </p:cNvPr>
@@ -11401,7 +11401,7 @@
           <p:cNvPr id="9" name="TextBox 8">
             <a:extLst xmlns:a="http://schemas.openxmlformats.org/drawingml/2006/main">
               <a:ext uri="{FF2B5EF4-FFF2-40B4-BE49-F238E27FC236}">
-                <a16:creationId xmlns:a16="http://schemas.microsoft.com/office/drawing/2014/main" id="{FA96DDAB-B504-4EAB-8E88-BEEDF8729B4D}"/>
+                <a16:creationId xmlns:a16="http://schemas.microsoft.com/office/drawing/2014/main" id="{EBBC8B63-7B37-4126-81F0-9654272C80B6}"/>
               </a:ext>
             </a:extLst>
           </p:cNvPr>
@@ -11606,7 +11606,7 @@
     </p:spTree>
     <p:extLst>
       <p:ext uri="{BB962C8B-B14F-4D97-AF65-F5344CB8AC3E}">
-        <p14:creationId xmlns:p14="http://schemas.microsoft.com/office/powerpoint/2010/main" val="997993178"/>
+        <p14:creationId xmlns:p14="http://schemas.microsoft.com/office/powerpoint/2010/main" val="1989449084"/>
       </p:ext>
     </p:extLst>
   </p:cSld>
@@ -11630,7 +11630,7 @@
           <p:cNvPr id="2" name="Rectangle 1">
             <a:extLst xmlns:a="http://schemas.openxmlformats.org/drawingml/2006/main">
               <a:ext uri="{FF2B5EF4-FFF2-40B4-BE49-F238E27FC236}">
-                <a16:creationId xmlns:a16="http://schemas.microsoft.com/office/drawing/2014/main" id="{69F0A620-86C2-4084-AFC5-F97C14151DD2}"/>
+                <a16:creationId xmlns:a16="http://schemas.microsoft.com/office/drawing/2014/main" id="{41C5BC57-2C3E-402D-B37E-078904DCEC01}"/>
               </a:ext>
             </a:extLst>
           </p:cNvPr>
@@ -11683,7 +11683,7 @@
           <p:cNvPr id="3" name="Rectangle 2">
             <a:extLst xmlns:a="http://schemas.openxmlformats.org/drawingml/2006/main">
               <a:ext uri="{FF2B5EF4-FFF2-40B4-BE49-F238E27FC236}">
-                <a16:creationId xmlns:a16="http://schemas.microsoft.com/office/drawing/2014/main" id="{772A335E-6253-4EBF-A453-E2C63DD7F0D4}"/>
+                <a16:creationId xmlns:a16="http://schemas.microsoft.com/office/drawing/2014/main" id="{04E0B226-0CD6-4430-AA63-3CB66CDABB72}"/>
               </a:ext>
             </a:extLst>
           </p:cNvPr>
@@ -11736,7 +11736,7 @@
           <p:cNvPr id="4" name="Rectangle 3">
             <a:extLst xmlns:a="http://schemas.openxmlformats.org/drawingml/2006/main">
               <a:ext uri="{FF2B5EF4-FFF2-40B4-BE49-F238E27FC236}">
-                <a16:creationId xmlns:a16="http://schemas.microsoft.com/office/drawing/2014/main" id="{FF785CC3-2774-49C0-A222-7CB78F3EAE76}"/>
+                <a16:creationId xmlns:a16="http://schemas.microsoft.com/office/drawing/2014/main" id="{A4B50E3E-AC5D-4724-B7C5-0EEEBB0E7312}"/>
               </a:ext>
             </a:extLst>
           </p:cNvPr>
@@ -11789,7 +11789,7 @@
           <p:cNvPr id="5" name="TextBox 4">
             <a:extLst xmlns:a="http://schemas.openxmlformats.org/drawingml/2006/main">
               <a:ext uri="{FF2B5EF4-FFF2-40B4-BE49-F238E27FC236}">
-                <a16:creationId xmlns:a16="http://schemas.microsoft.com/office/drawing/2014/main" id="{E7B5E16E-53FF-4E18-9B7D-3130B26AE1B4}"/>
+                <a16:creationId xmlns:a16="http://schemas.microsoft.com/office/drawing/2014/main" id="{E285465C-ED5C-413E-9E08-D1E6F877EE9A}"/>
               </a:ext>
             </a:extLst>
           </p:cNvPr>
@@ -11852,7 +11852,7 @@
           <p:cNvPr id="6" name="Rounded Rectangle 5">
             <a:extLst xmlns:a="http://schemas.openxmlformats.org/drawingml/2006/main">
               <a:ext uri="{FF2B5EF4-FFF2-40B4-BE49-F238E27FC236}">
-                <a16:creationId xmlns:a16="http://schemas.microsoft.com/office/drawing/2014/main" id="{B84C5DA0-7A88-420F-B6F8-6897826EFDD8}"/>
+                <a16:creationId xmlns:a16="http://schemas.microsoft.com/office/drawing/2014/main" id="{4FAD3C12-F334-45B2-9FEB-70E85D95F8DA}"/>
               </a:ext>
             </a:extLst>
           </p:cNvPr>
@@ -11907,7 +11907,7 @@
           <p:cNvPr id="7" name="TextBox 6">
             <a:extLst xmlns:a="http://schemas.openxmlformats.org/drawingml/2006/main">
               <a:ext uri="{FF2B5EF4-FFF2-40B4-BE49-F238E27FC236}">
-                <a16:creationId xmlns:a16="http://schemas.microsoft.com/office/drawing/2014/main" id="{5414A0E2-3521-47CD-A514-123BE8D8300E}"/>
+                <a16:creationId xmlns:a16="http://schemas.microsoft.com/office/drawing/2014/main" id="{E1E49BFA-F718-4795-8523-E99500107FB2}"/>
               </a:ext>
             </a:extLst>
           </p:cNvPr>
@@ -12030,7 +12030,7 @@
           <p:cNvPr id="8" name="Rounded Rectangle 7">
             <a:extLst xmlns:a="http://schemas.openxmlformats.org/drawingml/2006/main">
               <a:ext uri="{FF2B5EF4-FFF2-40B4-BE49-F238E27FC236}">
-                <a16:creationId xmlns:a16="http://schemas.microsoft.com/office/drawing/2014/main" id="{EDAC4894-8736-4779-9617-9A237715673F}"/>
+                <a16:creationId xmlns:a16="http://schemas.microsoft.com/office/drawing/2014/main" id="{88513E2E-9E62-4826-B60F-C8A6B9F0F3DC}"/>
               </a:ext>
             </a:extLst>
           </p:cNvPr>
@@ -12085,7 +12085,7 @@
           <p:cNvPr id="9" name="TextBox 8">
             <a:extLst xmlns:a="http://schemas.openxmlformats.org/drawingml/2006/main">
               <a:ext uri="{FF2B5EF4-FFF2-40B4-BE49-F238E27FC236}">
-                <a16:creationId xmlns:a16="http://schemas.microsoft.com/office/drawing/2014/main" id="{B4DBC302-F590-46AD-92B9-842D13B19EF0}"/>
+                <a16:creationId xmlns:a16="http://schemas.microsoft.com/office/drawing/2014/main" id="{AD5BC6FD-6A34-4909-8D09-C3C5C18FE5FB}"/>
               </a:ext>
             </a:extLst>
           </p:cNvPr>
@@ -12208,7 +12208,7 @@
           <p:cNvPr id="10" name="Rounded Rectangle 9">
             <a:extLst xmlns:a="http://schemas.openxmlformats.org/drawingml/2006/main">
               <a:ext uri="{FF2B5EF4-FFF2-40B4-BE49-F238E27FC236}">
-                <a16:creationId xmlns:a16="http://schemas.microsoft.com/office/drawing/2014/main" id="{F3D87629-35C8-4B63-9312-71F774B807CC}"/>
+                <a16:creationId xmlns:a16="http://schemas.microsoft.com/office/drawing/2014/main" id="{5B7A8876-D4CB-4E8C-8314-AA5C04CAA864}"/>
               </a:ext>
             </a:extLst>
           </p:cNvPr>
@@ -12263,7 +12263,7 @@
           <p:cNvPr id="11" name="TextBox 10">
             <a:extLst xmlns:a="http://schemas.openxmlformats.org/drawingml/2006/main">
               <a:ext uri="{FF2B5EF4-FFF2-40B4-BE49-F238E27FC236}">
-                <a16:creationId xmlns:a16="http://schemas.microsoft.com/office/drawing/2014/main" id="{9AD9E8C6-145A-41F7-B32E-44BE43E59C0A}"/>
+                <a16:creationId xmlns:a16="http://schemas.microsoft.com/office/drawing/2014/main" id="{01930F37-AADC-496E-AA3B-29B9ECF6B555}"/>
               </a:ext>
             </a:extLst>
           </p:cNvPr>
@@ -12613,7 +12613,7 @@
     </p:spTree>
     <p:extLst>
       <p:ext uri="{BB962C8B-B14F-4D97-AF65-F5344CB8AC3E}">
-        <p14:creationId xmlns:p14="http://schemas.microsoft.com/office/powerpoint/2010/main" val="1111915281"/>
+        <p14:creationId xmlns:p14="http://schemas.microsoft.com/office/powerpoint/2010/main" val="760224879"/>
       </p:ext>
     </p:extLst>
   </p:cSld>
@@ -12637,7 +12637,7 @@
           <p:cNvPr id="2" name="Rectangle 1">
             <a:extLst xmlns:a="http://schemas.openxmlformats.org/drawingml/2006/main">
               <a:ext uri="{FF2B5EF4-FFF2-40B4-BE49-F238E27FC236}">
-                <a16:creationId xmlns:a16="http://schemas.microsoft.com/office/drawing/2014/main" id="{18F602CB-F031-4819-AE28-5441C23D0F7D}"/>
+                <a16:creationId xmlns:a16="http://schemas.microsoft.com/office/drawing/2014/main" id="{D4BBE0A4-9BE1-4CE8-86A8-48CAF75E9611}"/>
               </a:ext>
             </a:extLst>
           </p:cNvPr>
@@ -12690,7 +12690,7 @@
           <p:cNvPr id="3" name="Rectangle 2">
             <a:extLst xmlns:a="http://schemas.openxmlformats.org/drawingml/2006/main">
               <a:ext uri="{FF2B5EF4-FFF2-40B4-BE49-F238E27FC236}">
-                <a16:creationId xmlns:a16="http://schemas.microsoft.com/office/drawing/2014/main" id="{73EDA1A5-C1B9-48EA-AF69-7E0F26FFA630}"/>
+                <a16:creationId xmlns:a16="http://schemas.microsoft.com/office/drawing/2014/main" id="{8FA2EA55-FEA6-44CF-9209-DFE1D6C5DBEB}"/>
               </a:ext>
             </a:extLst>
           </p:cNvPr>
@@ -12743,7 +12743,7 @@
           <p:cNvPr id="4" name="Rectangle 3">
             <a:extLst xmlns:a="http://schemas.openxmlformats.org/drawingml/2006/main">
               <a:ext uri="{FF2B5EF4-FFF2-40B4-BE49-F238E27FC236}">
-                <a16:creationId xmlns:a16="http://schemas.microsoft.com/office/drawing/2014/main" id="{620725FD-78B2-4D16-9303-046F74F0CF44}"/>
+                <a16:creationId xmlns:a16="http://schemas.microsoft.com/office/drawing/2014/main" id="{5B4BF4B3-5BC1-4B45-8BDE-21FCD63A2AE8}"/>
               </a:ext>
             </a:extLst>
           </p:cNvPr>
@@ -12796,7 +12796,7 @@
           <p:cNvPr id="5" name="TextBox 4">
             <a:extLst xmlns:a="http://schemas.openxmlformats.org/drawingml/2006/main">
               <a:ext uri="{FF2B5EF4-FFF2-40B4-BE49-F238E27FC236}">
-                <a16:creationId xmlns:a16="http://schemas.microsoft.com/office/drawing/2014/main" id="{89E998A8-7C90-48EC-96A2-E030D8B25078}"/>
+                <a16:creationId xmlns:a16="http://schemas.microsoft.com/office/drawing/2014/main" id="{FA59C0EE-C01D-4477-8A32-8FB797D757C8}"/>
               </a:ext>
             </a:extLst>
           </p:cNvPr>
@@ -12859,7 +12859,7 @@
           <p:cNvPr id="6" name="Rounded Rectangle 5">
             <a:extLst xmlns:a="http://schemas.openxmlformats.org/drawingml/2006/main">
               <a:ext uri="{FF2B5EF4-FFF2-40B4-BE49-F238E27FC236}">
-                <a16:creationId xmlns:a16="http://schemas.microsoft.com/office/drawing/2014/main" id="{8C6A5984-A1BB-44C9-9267-759D33B63E92}"/>
+                <a16:creationId xmlns:a16="http://schemas.microsoft.com/office/drawing/2014/main" id="{865806B6-5F21-4B24-ABB3-9E8227234575}"/>
               </a:ext>
             </a:extLst>
           </p:cNvPr>
@@ -12914,7 +12914,7 @@
           <p:cNvPr id="7" name="TextBox 6">
             <a:extLst xmlns:a="http://schemas.openxmlformats.org/drawingml/2006/main">
               <a:ext uri="{FF2B5EF4-FFF2-40B4-BE49-F238E27FC236}">
-                <a16:creationId xmlns:a16="http://schemas.microsoft.com/office/drawing/2014/main" id="{686C547B-E549-4D85-940E-E50C8003153F}"/>
+                <a16:creationId xmlns:a16="http://schemas.microsoft.com/office/drawing/2014/main" id="{6C21F3D1-2E91-48EA-A81A-7659997B845B}"/>
               </a:ext>
             </a:extLst>
           </p:cNvPr>
@@ -12986,6 +12986,33 @@
                 <a:ea typeface="Calibri"/>
                 <a:cs typeface="Calibri"/>
               </a:rPr>
+              <a:t/>
+            </a:r>
+          </a:p>
+          <a:p xmlns:a="http://schemas.openxmlformats.org/drawingml/2006/main">
+            <a:pPr>
+              <a:spcBef>
+                <a:spcPts val="200"/>
+              </a:spcBef>
+              <a:buNone/>
+              <a:defRPr sz="1050">
+                <a:solidFill>
+                  <a:srgbClr val="0F172A"/>
+                </a:solidFill>
+                <a:latin typeface="Calibri"/>
+                <a:ea typeface="Calibri"/>
+                <a:cs typeface="Calibri"/>
+              </a:defRPr>
+            </a:pPr>
+            <a:r>
+              <a:rPr sz="825">
+                <a:solidFill>
+                  <a:srgbClr val="0F172A"/>
+                </a:solidFill>
+                <a:latin typeface="Calibri"/>
+                <a:ea typeface="Calibri"/>
+                <a:cs typeface="Calibri"/>
+              </a:rPr>
               <a:t>▶ ZONE 1: HISTORICAL DEV PILOT BASELINE (20 Requests Responses API)</a:t>
             </a:r>
           </a:p>
@@ -13067,6 +13094,33 @@
                 <a:ea typeface="Calibri"/>
                 <a:cs typeface="Calibri"/>
               </a:rPr>
+              <a:t/>
+            </a:r>
+          </a:p>
+          <a:p xmlns:a="http://schemas.openxmlformats.org/drawingml/2006/main">
+            <a:pPr>
+              <a:spcBef>
+                <a:spcPts val="200"/>
+              </a:spcBef>
+              <a:buNone/>
+              <a:defRPr sz="1050">
+                <a:solidFill>
+                  <a:srgbClr val="0F172A"/>
+                </a:solidFill>
+                <a:latin typeface="Calibri"/>
+                <a:ea typeface="Calibri"/>
+                <a:cs typeface="Calibri"/>
+              </a:defRPr>
+            </a:pPr>
+            <a:r>
+              <a:rPr sz="825">
+                <a:solidFill>
+                  <a:srgbClr val="0F172A"/>
+                </a:solidFill>
+                <a:latin typeface="Calibri"/>
+                <a:ea typeface="Calibri"/>
+                <a:cs typeface="Calibri"/>
+              </a:rPr>
               <a:t>▶ ZONE 2: DIAGNOSTIC TEST FIXTURE TELEMETRY (N=718 Scorable Views)</a:t>
             </a:r>
           </a:p>
@@ -13122,6 +13176,33 @@
                 <a:cs typeface="Calibri"/>
               </a:rPr>
               <a:t>•  rag_k10: trễ trung vị 9.90s (trung bình 4.37s) | 4536.5 prompt tokens | ~0.001870 USD / logical req.</a:t>
+            </a:r>
+          </a:p>
+          <a:p xmlns:a="http://schemas.openxmlformats.org/drawingml/2006/main">
+            <a:pPr>
+              <a:spcBef>
+                <a:spcPts val="200"/>
+              </a:spcBef>
+              <a:buNone/>
+              <a:defRPr sz="1050">
+                <a:solidFill>
+                  <a:srgbClr val="0F172A"/>
+                </a:solidFill>
+                <a:latin typeface="Calibri"/>
+                <a:ea typeface="Calibri"/>
+                <a:cs typeface="Calibri"/>
+              </a:defRPr>
+            </a:pPr>
+            <a:r>
+              <a:rPr sz="825">
+                <a:solidFill>
+                  <a:srgbClr val="0F172A"/>
+                </a:solidFill>
+                <a:latin typeface="Calibri"/>
+                <a:ea typeface="Calibri"/>
+                <a:cs typeface="Calibri"/>
+              </a:rPr>
+              <a:t/>
             </a:r>
           </a:p>
           <a:p xmlns:a="http://schemas.openxmlformats.org/drawingml/2006/main">
@@ -13297,7 +13378,7 @@
           <p:nvPr/>
         </p:nvPicPr>
         <p:blipFill>
-          <a:blip xmlns:r="http://schemas.openxmlformats.org/officeDocument/2006/relationships" xmlns:a="http://schemas.openxmlformats.org/drawingml/2006/main" r:embed="R4c8c88d642e4400a"/>
+          <a:blip xmlns:r="http://schemas.openxmlformats.org/officeDocument/2006/relationships" xmlns:a="http://schemas.openxmlformats.org/drawingml/2006/main" r:embed="R1567479dd27a4000"/>
           <a:stretch xmlns:a="http://schemas.openxmlformats.org/drawingml/2006/main">
             <a:fillRect l="0" t="0" r="0" b="0"/>
           </a:stretch>
@@ -13317,7 +13398,7 @@
           <p:cNvPr id="9" name="Rounded Rectangle 8">
             <a:extLst xmlns:a="http://schemas.openxmlformats.org/drawingml/2006/main">
               <a:ext uri="{FF2B5EF4-FFF2-40B4-BE49-F238E27FC236}">
-                <a16:creationId xmlns:a16="http://schemas.microsoft.com/office/drawing/2014/main" id="{E1BFE4F3-AD8D-4191-9B75-D40A2541EFF4}"/>
+                <a16:creationId xmlns:a16="http://schemas.microsoft.com/office/drawing/2014/main" id="{CB09E1CE-A8E7-47F9-9CB2-8037E94BD3D0}"/>
               </a:ext>
             </a:extLst>
           </p:cNvPr>
@@ -13372,7 +13453,7 @@
           <p:cNvPr id="10" name="TextBox 9">
             <a:extLst xmlns:a="http://schemas.openxmlformats.org/drawingml/2006/main">
               <a:ext uri="{FF2B5EF4-FFF2-40B4-BE49-F238E27FC236}">
-                <a16:creationId xmlns:a16="http://schemas.microsoft.com/office/drawing/2014/main" id="{9733DE2B-7BCD-4C05-B427-50651CB6CCF8}"/>
+                <a16:creationId xmlns:a16="http://schemas.microsoft.com/office/drawing/2014/main" id="{28E1BCAD-AA5C-496B-892C-5EFD0E5F07EF}"/>
               </a:ext>
             </a:extLst>
           </p:cNvPr>
@@ -13455,7 +13536,7 @@
     </p:spTree>
     <p:extLst>
       <p:ext uri="{BB962C8B-B14F-4D97-AF65-F5344CB8AC3E}">
-        <p14:creationId xmlns:p14="http://schemas.microsoft.com/office/powerpoint/2010/main" val="945939330"/>
+        <p14:creationId xmlns:p14="http://schemas.microsoft.com/office/powerpoint/2010/main" val="1100050484"/>
       </p:ext>
     </p:extLst>
   </p:cSld>

--- a/reports/evidence/fixture_populated_slides.pptx
+++ b/reports/evidence/fixture_populated_slides.pptx
@@ -2,24 +2,24 @@
 <file path=ppt/presentation.xml><?xml version="1.0" encoding="utf-8"?>
 <p:presentation xmlns:p="http://schemas.openxmlformats.org/presentationml/2006/main">
   <p:sldMasterIdLst>
-    <p:sldMasterId xmlns:r="http://schemas.openxmlformats.org/officeDocument/2006/relationships" id="2147483648" r:id="Rdd95dc7191174d01"/>
+    <p:sldMasterId xmlns:r="http://schemas.openxmlformats.org/officeDocument/2006/relationships" id="2147483648" r:id="R31109b3498894167"/>
   </p:sldMasterIdLst>
   <p:notesMasterIdLst>
-    <p:notesMasterId xmlns:r="http://schemas.openxmlformats.org/officeDocument/2006/relationships" r:id="R5a1c45a77eed4a58"/>
+    <p:notesMasterId xmlns:r="http://schemas.openxmlformats.org/officeDocument/2006/relationships" r:id="R70a9a8da790c4a02"/>
   </p:notesMasterIdLst>
   <p:sldIdLst>
-    <p:sldId xmlns:r="http://schemas.openxmlformats.org/officeDocument/2006/relationships" id="256" r:id="R5383c821915e4eb8"/>
-    <p:sldId xmlns:r="http://schemas.openxmlformats.org/officeDocument/2006/relationships" id="257" r:id="R4e5bd8b8396e42d0"/>
-    <p:sldId xmlns:r="http://schemas.openxmlformats.org/officeDocument/2006/relationships" id="258" r:id="R8764f93c7c294f95"/>
-    <p:sldId xmlns:r="http://schemas.openxmlformats.org/officeDocument/2006/relationships" id="259" r:id="R5cc3db0f429048e5"/>
-    <p:sldId xmlns:r="http://schemas.openxmlformats.org/officeDocument/2006/relationships" id="260" r:id="R86eac21e4ecd4e0d"/>
-    <p:sldId xmlns:r="http://schemas.openxmlformats.org/officeDocument/2006/relationships" id="261" r:id="Rc2bacc070ce54099"/>
-    <p:sldId xmlns:r="http://schemas.openxmlformats.org/officeDocument/2006/relationships" id="262" r:id="Re67d261329534aa4"/>
-    <p:sldId xmlns:r="http://schemas.openxmlformats.org/officeDocument/2006/relationships" id="263" r:id="Rab5461ca5b8f47ea"/>
-    <p:sldId xmlns:r="http://schemas.openxmlformats.org/officeDocument/2006/relationships" id="264" r:id="R7b368c83b7fc4be9"/>
-    <p:sldId xmlns:r="http://schemas.openxmlformats.org/officeDocument/2006/relationships" id="265" r:id="R06eb641dd8054a70"/>
-    <p:sldId xmlns:r="http://schemas.openxmlformats.org/officeDocument/2006/relationships" id="266" r:id="R21b8d656587545f7"/>
-    <p:sldId xmlns:r="http://schemas.openxmlformats.org/officeDocument/2006/relationships" id="267" r:id="Rd304273cf0f84554"/>
+    <p:sldId xmlns:r="http://schemas.openxmlformats.org/officeDocument/2006/relationships" id="256" r:id="Rc16b122d3a794a8b"/>
+    <p:sldId xmlns:r="http://schemas.openxmlformats.org/officeDocument/2006/relationships" id="257" r:id="R07d14a099c9946cf"/>
+    <p:sldId xmlns:r="http://schemas.openxmlformats.org/officeDocument/2006/relationships" id="258" r:id="Rb3dfd3ae046e4e96"/>
+    <p:sldId xmlns:r="http://schemas.openxmlformats.org/officeDocument/2006/relationships" id="259" r:id="R9ef5f787049d4a03"/>
+    <p:sldId xmlns:r="http://schemas.openxmlformats.org/officeDocument/2006/relationships" id="260" r:id="R199355c59d794061"/>
+    <p:sldId xmlns:r="http://schemas.openxmlformats.org/officeDocument/2006/relationships" id="261" r:id="R8d166810d7754f5f"/>
+    <p:sldId xmlns:r="http://schemas.openxmlformats.org/officeDocument/2006/relationships" id="262" r:id="R655c04b5c490405f"/>
+    <p:sldId xmlns:r="http://schemas.openxmlformats.org/officeDocument/2006/relationships" id="263" r:id="Rec29d7b3b85f403a"/>
+    <p:sldId xmlns:r="http://schemas.openxmlformats.org/officeDocument/2006/relationships" id="264" r:id="Rf0135bb4847d40a8"/>
+    <p:sldId xmlns:r="http://schemas.openxmlformats.org/officeDocument/2006/relationships" id="265" r:id="R2989c017b20f4b23"/>
+    <p:sldId xmlns:r="http://schemas.openxmlformats.org/officeDocument/2006/relationships" id="266" r:id="Refc6e89f0b0540dd"/>
+    <p:sldId xmlns:r="http://schemas.openxmlformats.org/officeDocument/2006/relationships" id="267" r:id="Re07a985f72b4410e"/>
   </p:sldIdLst>
   <p:sldSz cx="12191695" cy="6858000"/>
   <p:notesSz cx="6858000" cy="9144000"/>
@@ -1473,7 +1473,7 @@
           <p:cNvPr id="2" name="Title 1">
             <a:extLst xmlns:a="http://schemas.openxmlformats.org/drawingml/2006/main">
               <a:ext uri="{FF2B5EF4-FFF2-40B4-BE49-F238E27FC236}">
-                <a16:creationId xmlns:a16="http://schemas.microsoft.com/office/drawing/2014/main" id="{6D09D927-F6CC-4BAC-9C35-B874E18C513E}"/>
+                <a16:creationId xmlns:a16="http://schemas.microsoft.com/office/drawing/2014/main" id="{87637113-9C5F-49BD-A620-E80C1A5B3FBF}"/>
               </a:ext>
             </a:extLst>
           </p:cNvPr>
@@ -1506,7 +1506,7 @@
           <p:cNvPr id="3" name="Subtitle 2">
             <a:extLst xmlns:a="http://schemas.openxmlformats.org/drawingml/2006/main">
               <a:ext uri="{FF2B5EF4-FFF2-40B4-BE49-F238E27FC236}">
-                <a16:creationId xmlns:a16="http://schemas.microsoft.com/office/drawing/2014/main" id="{CFC2FE08-E5D5-4E8C-90AE-6EDD974A4ABB}"/>
+                <a16:creationId xmlns:a16="http://schemas.microsoft.com/office/drawing/2014/main" id="{0D42AF0B-BC36-4BA6-B996-20E647F88020}"/>
               </a:ext>
             </a:extLst>
           </p:cNvPr>
@@ -1630,7 +1630,7 @@
           <p:cNvPr id="4" name="Date Placeholder 3">
             <a:extLst xmlns:a="http://schemas.openxmlformats.org/drawingml/2006/main">
               <a:ext uri="{FF2B5EF4-FFF2-40B4-BE49-F238E27FC236}">
-                <a16:creationId xmlns:a16="http://schemas.microsoft.com/office/drawing/2014/main" id="{71E6E9A4-EB64-4BFF-9A46-77FE6C57C8FB}"/>
+                <a16:creationId xmlns:a16="http://schemas.microsoft.com/office/drawing/2014/main" id="{66C1118A-73A7-4A47-9610-5E28CBB38B9B}"/>
               </a:ext>
             </a:extLst>
           </p:cNvPr>
@@ -1658,7 +1658,7 @@
           <p:cNvPr id="5" name="Footer Placeholder 4">
             <a:extLst xmlns:a="http://schemas.openxmlformats.org/drawingml/2006/main">
               <a:ext uri="{FF2B5EF4-FFF2-40B4-BE49-F238E27FC236}">
-                <a16:creationId xmlns:a16="http://schemas.microsoft.com/office/drawing/2014/main" id="{93FC53D0-AC80-40BA-93CE-39982E552B52}"/>
+                <a16:creationId xmlns:a16="http://schemas.microsoft.com/office/drawing/2014/main" id="{34828C04-C5F5-4F26-B6B7-58AAF0E29886}"/>
               </a:ext>
             </a:extLst>
           </p:cNvPr>
@@ -1683,7 +1683,7 @@
           <p:cNvPr id="6" name="Slide Number Placeholder 5">
             <a:extLst xmlns:a="http://schemas.openxmlformats.org/drawingml/2006/main">
               <a:ext uri="{FF2B5EF4-FFF2-40B4-BE49-F238E27FC236}">
-                <a16:creationId xmlns:a16="http://schemas.microsoft.com/office/drawing/2014/main" id="{4726FCA9-8AD6-400A-8DFC-82D8A962D503}"/>
+                <a16:creationId xmlns:a16="http://schemas.microsoft.com/office/drawing/2014/main" id="{AC6F5BBE-39D3-4C10-BC75-362B7AA5A47D}"/>
               </a:ext>
             </a:extLst>
           </p:cNvPr>
@@ -1728,7 +1728,7 @@
           <p:cNvPr id="2" name="Title 1">
             <a:extLst xmlns:a="http://schemas.openxmlformats.org/drawingml/2006/main">
               <a:ext uri="{FF2B5EF4-FFF2-40B4-BE49-F238E27FC236}">
-                <a16:creationId xmlns:a16="http://schemas.microsoft.com/office/drawing/2014/main" id="{27EAF28B-E2FB-4430-8248-05D0EE2F1FC5}"/>
+                <a16:creationId xmlns:a16="http://schemas.microsoft.com/office/drawing/2014/main" id="{81FCB0B8-D190-48EF-AD38-B1591837F946}"/>
               </a:ext>
             </a:extLst>
           </p:cNvPr>
@@ -1756,7 +1756,7 @@
           <p:cNvPr id="3" name="Vertical Text Placeholder 2">
             <a:extLst xmlns:a="http://schemas.openxmlformats.org/drawingml/2006/main">
               <a:ext uri="{FF2B5EF4-FFF2-40B4-BE49-F238E27FC236}">
-                <a16:creationId xmlns:a16="http://schemas.microsoft.com/office/drawing/2014/main" id="{A1C0B1BE-B7C7-4620-A449-3E65FE8DBEBF}"/>
+                <a16:creationId xmlns:a16="http://schemas.microsoft.com/office/drawing/2014/main" id="{CD18897F-9CD5-498B-8ECB-06359AD0CAFF}"/>
               </a:ext>
             </a:extLst>
           </p:cNvPr>
@@ -1819,7 +1819,7 @@
           <p:cNvPr id="4" name="Date Placeholder 3">
             <a:extLst xmlns:a="http://schemas.openxmlformats.org/drawingml/2006/main">
               <a:ext uri="{FF2B5EF4-FFF2-40B4-BE49-F238E27FC236}">
-                <a16:creationId xmlns:a16="http://schemas.microsoft.com/office/drawing/2014/main" id="{073ABDA0-B94D-44FB-B514-06823C9F7932}"/>
+                <a16:creationId xmlns:a16="http://schemas.microsoft.com/office/drawing/2014/main" id="{D1909C94-169F-4313-8758-805A0E3EAD3A}"/>
               </a:ext>
             </a:extLst>
           </p:cNvPr>
@@ -1847,7 +1847,7 @@
           <p:cNvPr id="5" name="Footer Placeholder 4">
             <a:extLst xmlns:a="http://schemas.openxmlformats.org/drawingml/2006/main">
               <a:ext uri="{FF2B5EF4-FFF2-40B4-BE49-F238E27FC236}">
-                <a16:creationId xmlns:a16="http://schemas.microsoft.com/office/drawing/2014/main" id="{678F8C91-2E93-4644-8E8D-1E9AE714A178}"/>
+                <a16:creationId xmlns:a16="http://schemas.microsoft.com/office/drawing/2014/main" id="{DF0B42B3-04C2-470A-8406-D3B07CD18C04}"/>
               </a:ext>
             </a:extLst>
           </p:cNvPr>
@@ -1872,7 +1872,7 @@
           <p:cNvPr id="6" name="Slide Number Placeholder 5">
             <a:extLst xmlns:a="http://schemas.openxmlformats.org/drawingml/2006/main">
               <a:ext uri="{FF2B5EF4-FFF2-40B4-BE49-F238E27FC236}">
-                <a16:creationId xmlns:a16="http://schemas.microsoft.com/office/drawing/2014/main" id="{676E60A3-2BAE-4CB0-8C91-C8E7573B2822}"/>
+                <a16:creationId xmlns:a16="http://schemas.microsoft.com/office/drawing/2014/main" id="{51E245BA-EE04-4693-AE30-C084F872C43B}"/>
               </a:ext>
             </a:extLst>
           </p:cNvPr>
@@ -1917,7 +1917,7 @@
           <p:cNvPr id="2" name="Vertical Title 1">
             <a:extLst xmlns:a="http://schemas.openxmlformats.org/drawingml/2006/main">
               <a:ext uri="{FF2B5EF4-FFF2-40B4-BE49-F238E27FC236}">
-                <a16:creationId xmlns:a16="http://schemas.microsoft.com/office/drawing/2014/main" id="{F332E357-F083-4599-836E-861EB3160CFB}"/>
+                <a16:creationId xmlns:a16="http://schemas.microsoft.com/office/drawing/2014/main" id="{2FD3B4EA-AA23-4A48-8821-510BE2A2E020}"/>
               </a:ext>
             </a:extLst>
           </p:cNvPr>
@@ -1950,7 +1950,7 @@
           <p:cNvPr id="3" name="Vertical Text Placeholder 2">
             <a:extLst xmlns:a="http://schemas.openxmlformats.org/drawingml/2006/main">
               <a:ext uri="{FF2B5EF4-FFF2-40B4-BE49-F238E27FC236}">
-                <a16:creationId xmlns:a16="http://schemas.microsoft.com/office/drawing/2014/main" id="{DA60EB22-B626-4DD5-B6C0-000EABCA6A09}"/>
+                <a16:creationId xmlns:a16="http://schemas.microsoft.com/office/drawing/2014/main" id="{94552581-89A4-4193-B437-C6BAF5A6254C}"/>
               </a:ext>
             </a:extLst>
           </p:cNvPr>
@@ -2018,7 +2018,7 @@
           <p:cNvPr id="4" name="Date Placeholder 3">
             <a:extLst xmlns:a="http://schemas.openxmlformats.org/drawingml/2006/main">
               <a:ext uri="{FF2B5EF4-FFF2-40B4-BE49-F238E27FC236}">
-                <a16:creationId xmlns:a16="http://schemas.microsoft.com/office/drawing/2014/main" id="{D163D34B-F363-4BB7-8535-5A8543DD2BBE}"/>
+                <a16:creationId xmlns:a16="http://schemas.microsoft.com/office/drawing/2014/main" id="{66DF79E0-5436-4E46-9097-636DC38496CA}"/>
               </a:ext>
             </a:extLst>
           </p:cNvPr>
@@ -2046,7 +2046,7 @@
           <p:cNvPr id="5" name="Footer Placeholder 4">
             <a:extLst xmlns:a="http://schemas.openxmlformats.org/drawingml/2006/main">
               <a:ext uri="{FF2B5EF4-FFF2-40B4-BE49-F238E27FC236}">
-                <a16:creationId xmlns:a16="http://schemas.microsoft.com/office/drawing/2014/main" id="{D3836FCD-996D-403E-ACE7-D78247F8231C}"/>
+                <a16:creationId xmlns:a16="http://schemas.microsoft.com/office/drawing/2014/main" id="{F2C778AA-40B0-40FB-AF00-5C02B5247968}"/>
               </a:ext>
             </a:extLst>
           </p:cNvPr>
@@ -2071,7 +2071,7 @@
           <p:cNvPr id="6" name="Slide Number Placeholder 5">
             <a:extLst xmlns:a="http://schemas.openxmlformats.org/drawingml/2006/main">
               <a:ext uri="{FF2B5EF4-FFF2-40B4-BE49-F238E27FC236}">
-                <a16:creationId xmlns:a16="http://schemas.microsoft.com/office/drawing/2014/main" id="{0828965B-FC0F-4303-9BE9-5AE71CC6C371}"/>
+                <a16:creationId xmlns:a16="http://schemas.microsoft.com/office/drawing/2014/main" id="{BE2B159D-7645-43A8-A399-59B869DFC601}"/>
               </a:ext>
             </a:extLst>
           </p:cNvPr>
@@ -2116,7 +2116,7 @@
           <p:cNvPr id="2" name="Title 1">
             <a:extLst xmlns:a="http://schemas.openxmlformats.org/drawingml/2006/main">
               <a:ext uri="{FF2B5EF4-FFF2-40B4-BE49-F238E27FC236}">
-                <a16:creationId xmlns:a16="http://schemas.microsoft.com/office/drawing/2014/main" id="{C3D6128A-63A5-4AFB-835C-9DCAC055BC9B}"/>
+                <a16:creationId xmlns:a16="http://schemas.microsoft.com/office/drawing/2014/main" id="{D1B8F23B-F8F4-420F-B17A-6F34BAC5D4E4}"/>
               </a:ext>
             </a:extLst>
           </p:cNvPr>
@@ -2144,7 +2144,7 @@
           <p:cNvPr id="3" name="Content Placeholder 2">
             <a:extLst xmlns:a="http://schemas.openxmlformats.org/drawingml/2006/main">
               <a:ext uri="{FF2B5EF4-FFF2-40B4-BE49-F238E27FC236}">
-                <a16:creationId xmlns:a16="http://schemas.microsoft.com/office/drawing/2014/main" id="{BF9F3DBD-DE68-42D5-B3E8-314F2FA3407B}"/>
+                <a16:creationId xmlns:a16="http://schemas.microsoft.com/office/drawing/2014/main" id="{65784F88-2AEF-4831-B53E-71B11845B67D}"/>
               </a:ext>
             </a:extLst>
           </p:cNvPr>
@@ -2207,7 +2207,7 @@
           <p:cNvPr id="4" name="Date Placeholder 3">
             <a:extLst xmlns:a="http://schemas.openxmlformats.org/drawingml/2006/main">
               <a:ext uri="{FF2B5EF4-FFF2-40B4-BE49-F238E27FC236}">
-                <a16:creationId xmlns:a16="http://schemas.microsoft.com/office/drawing/2014/main" id="{CCAB7E4D-A8F3-4F74-A78C-EDC5F525F0E1}"/>
+                <a16:creationId xmlns:a16="http://schemas.microsoft.com/office/drawing/2014/main" id="{D3E6366B-7A6D-4F7F-A0E4-959B5A570625}"/>
               </a:ext>
             </a:extLst>
           </p:cNvPr>
@@ -2235,7 +2235,7 @@
           <p:cNvPr id="5" name="Footer Placeholder 4">
             <a:extLst xmlns:a="http://schemas.openxmlformats.org/drawingml/2006/main">
               <a:ext uri="{FF2B5EF4-FFF2-40B4-BE49-F238E27FC236}">
-                <a16:creationId xmlns:a16="http://schemas.microsoft.com/office/drawing/2014/main" id="{7F647F8F-B2EE-4E47-BA7A-51532E77C702}"/>
+                <a16:creationId xmlns:a16="http://schemas.microsoft.com/office/drawing/2014/main" id="{FCBD9814-4A96-4941-B4A5-1F28EF2DFFFF}"/>
               </a:ext>
             </a:extLst>
           </p:cNvPr>
@@ -2260,7 +2260,7 @@
           <p:cNvPr id="6" name="Slide Number Placeholder 5">
             <a:extLst xmlns:a="http://schemas.openxmlformats.org/drawingml/2006/main">
               <a:ext uri="{FF2B5EF4-FFF2-40B4-BE49-F238E27FC236}">
-                <a16:creationId xmlns:a16="http://schemas.microsoft.com/office/drawing/2014/main" id="{D8025B27-0428-408E-A7F4-D5A82F2283BA}"/>
+                <a16:creationId xmlns:a16="http://schemas.microsoft.com/office/drawing/2014/main" id="{0A4EBB8F-C70E-45BC-8521-F76041E02438}"/>
               </a:ext>
             </a:extLst>
           </p:cNvPr>
@@ -2305,7 +2305,7 @@
           <p:cNvPr id="2" name="Title 1">
             <a:extLst xmlns:a="http://schemas.openxmlformats.org/drawingml/2006/main">
               <a:ext uri="{FF2B5EF4-FFF2-40B4-BE49-F238E27FC236}">
-                <a16:creationId xmlns:a16="http://schemas.microsoft.com/office/drawing/2014/main" id="{FB752766-9EEB-4F73-977C-CCEF04891969}"/>
+                <a16:creationId xmlns:a16="http://schemas.microsoft.com/office/drawing/2014/main" id="{0518EEA6-2721-49C7-80B8-E1E2792E068D}"/>
               </a:ext>
             </a:extLst>
           </p:cNvPr>
@@ -2343,7 +2343,7 @@
           <p:cNvPr id="3" name="Text Placeholder 2">
             <a:extLst xmlns:a="http://schemas.openxmlformats.org/drawingml/2006/main">
               <a:ext uri="{FF2B5EF4-FFF2-40B4-BE49-F238E27FC236}">
-                <a16:creationId xmlns:a16="http://schemas.microsoft.com/office/drawing/2014/main" id="{651A21AC-E8EF-418B-A6C7-E40642C66F4B}"/>
+                <a16:creationId xmlns:a16="http://schemas.microsoft.com/office/drawing/2014/main" id="{D8A3AE00-5548-4027-A857-AD7BE26624BB}"/>
               </a:ext>
             </a:extLst>
           </p:cNvPr>
@@ -2469,7 +2469,7 @@
           <p:cNvPr id="4" name="Date Placeholder 3">
             <a:extLst xmlns:a="http://schemas.openxmlformats.org/drawingml/2006/main">
               <a:ext uri="{FF2B5EF4-FFF2-40B4-BE49-F238E27FC236}">
-                <a16:creationId xmlns:a16="http://schemas.microsoft.com/office/drawing/2014/main" id="{66A9DA65-A784-469F-94B5-5E0804353FF2}"/>
+                <a16:creationId xmlns:a16="http://schemas.microsoft.com/office/drawing/2014/main" id="{1BFEC21A-521B-4839-9B2F-CC782E7154C5}"/>
               </a:ext>
             </a:extLst>
           </p:cNvPr>
@@ -2497,7 +2497,7 @@
           <p:cNvPr id="5" name="Footer Placeholder 4">
             <a:extLst xmlns:a="http://schemas.openxmlformats.org/drawingml/2006/main">
               <a:ext uri="{FF2B5EF4-FFF2-40B4-BE49-F238E27FC236}">
-                <a16:creationId xmlns:a16="http://schemas.microsoft.com/office/drawing/2014/main" id="{E876F281-0F56-43AE-A25F-96B668616876}"/>
+                <a16:creationId xmlns:a16="http://schemas.microsoft.com/office/drawing/2014/main" id="{FF593524-9A90-4836-86FD-E844F3896774}"/>
               </a:ext>
             </a:extLst>
           </p:cNvPr>
@@ -2522,7 +2522,7 @@
           <p:cNvPr id="6" name="Slide Number Placeholder 5">
             <a:extLst xmlns:a="http://schemas.openxmlformats.org/drawingml/2006/main">
               <a:ext uri="{FF2B5EF4-FFF2-40B4-BE49-F238E27FC236}">
-                <a16:creationId xmlns:a16="http://schemas.microsoft.com/office/drawing/2014/main" id="{098D2D50-4CDC-46B8-9855-A514CDFF5C02}"/>
+                <a16:creationId xmlns:a16="http://schemas.microsoft.com/office/drawing/2014/main" id="{FC30DBEE-719F-4BCB-9B56-35A31F26977B}"/>
               </a:ext>
             </a:extLst>
           </p:cNvPr>
@@ -2567,7 +2567,7 @@
           <p:cNvPr id="2" name="Title 1">
             <a:extLst xmlns:a="http://schemas.openxmlformats.org/drawingml/2006/main">
               <a:ext uri="{FF2B5EF4-FFF2-40B4-BE49-F238E27FC236}">
-                <a16:creationId xmlns:a16="http://schemas.microsoft.com/office/drawing/2014/main" id="{64799438-55D5-4A51-95EB-3DB14056BC4F}"/>
+                <a16:creationId xmlns:a16="http://schemas.microsoft.com/office/drawing/2014/main" id="{5B5C6482-3AEB-42AA-BD4B-AE7A61F58598}"/>
               </a:ext>
             </a:extLst>
           </p:cNvPr>
@@ -2595,7 +2595,7 @@
           <p:cNvPr id="3" name="Content Placeholder 2">
             <a:extLst xmlns:a="http://schemas.openxmlformats.org/drawingml/2006/main">
               <a:ext uri="{FF2B5EF4-FFF2-40B4-BE49-F238E27FC236}">
-                <a16:creationId xmlns:a16="http://schemas.microsoft.com/office/drawing/2014/main" id="{E93C7818-1A15-4BEC-8EFE-2A06F8BB599B}"/>
+                <a16:creationId xmlns:a16="http://schemas.microsoft.com/office/drawing/2014/main" id="{2C529F22-117F-4B62-ACDE-6D76BB7E6CC0}"/>
               </a:ext>
             </a:extLst>
           </p:cNvPr>
@@ -2700,7 +2700,7 @@
           <p:cNvPr id="4" name="Content Placeholder 3">
             <a:extLst xmlns:a="http://schemas.openxmlformats.org/drawingml/2006/main">
               <a:ext uri="{FF2B5EF4-FFF2-40B4-BE49-F238E27FC236}">
-                <a16:creationId xmlns:a16="http://schemas.microsoft.com/office/drawing/2014/main" id="{8C81FBC7-EEE2-4B12-B751-7CF228446BFE}"/>
+                <a16:creationId xmlns:a16="http://schemas.microsoft.com/office/drawing/2014/main" id="{E2A6B91E-B3EF-4B7E-90E5-C8545B08A2B4}"/>
               </a:ext>
             </a:extLst>
           </p:cNvPr>
@@ -2805,7 +2805,7 @@
           <p:cNvPr id="5" name="Date Placeholder 4">
             <a:extLst xmlns:a="http://schemas.openxmlformats.org/drawingml/2006/main">
               <a:ext uri="{FF2B5EF4-FFF2-40B4-BE49-F238E27FC236}">
-                <a16:creationId xmlns:a16="http://schemas.microsoft.com/office/drawing/2014/main" id="{239E2E21-1FDB-44D0-8DC6-0376FFBDA272}"/>
+                <a16:creationId xmlns:a16="http://schemas.microsoft.com/office/drawing/2014/main" id="{22496858-1FC6-4448-949D-AE6E214D3DE8}"/>
               </a:ext>
             </a:extLst>
           </p:cNvPr>
@@ -2833,7 +2833,7 @@
           <p:cNvPr id="6" name="Footer Placeholder 5">
             <a:extLst xmlns:a="http://schemas.openxmlformats.org/drawingml/2006/main">
               <a:ext uri="{FF2B5EF4-FFF2-40B4-BE49-F238E27FC236}">
-                <a16:creationId xmlns:a16="http://schemas.microsoft.com/office/drawing/2014/main" id="{9A28128A-6406-43FF-B760-389309337F43}"/>
+                <a16:creationId xmlns:a16="http://schemas.microsoft.com/office/drawing/2014/main" id="{386A89CF-8608-48A5-B162-AD44C1B3B0E3}"/>
               </a:ext>
             </a:extLst>
           </p:cNvPr>
@@ -2858,7 +2858,7 @@
           <p:cNvPr id="7" name="Slide Number Placeholder 6">
             <a:extLst xmlns:a="http://schemas.openxmlformats.org/drawingml/2006/main">
               <a:ext uri="{FF2B5EF4-FFF2-40B4-BE49-F238E27FC236}">
-                <a16:creationId xmlns:a16="http://schemas.microsoft.com/office/drawing/2014/main" id="{B270A717-E884-4054-8330-C2C5EC76F7F1}"/>
+                <a16:creationId xmlns:a16="http://schemas.microsoft.com/office/drawing/2014/main" id="{D6D909E3-7464-4CF9-BE4B-6209835659D2}"/>
               </a:ext>
             </a:extLst>
           </p:cNvPr>
@@ -2903,7 +2903,7 @@
           <p:cNvPr id="2" name="Title 1">
             <a:extLst xmlns:a="http://schemas.openxmlformats.org/drawingml/2006/main">
               <a:ext uri="{FF2B5EF4-FFF2-40B4-BE49-F238E27FC236}">
-                <a16:creationId xmlns:a16="http://schemas.microsoft.com/office/drawing/2014/main" id="{24845E40-C47D-4002-8157-D443930EBE5C}"/>
+                <a16:creationId xmlns:a16="http://schemas.microsoft.com/office/drawing/2014/main" id="{A54F120A-4992-4CD5-8ADA-F0D3BBDB6CB1}"/>
               </a:ext>
             </a:extLst>
           </p:cNvPr>
@@ -2936,7 +2936,7 @@
           <p:cNvPr id="3" name="Text Placeholder 2">
             <a:extLst xmlns:a="http://schemas.openxmlformats.org/drawingml/2006/main">
               <a:ext uri="{FF2B5EF4-FFF2-40B4-BE49-F238E27FC236}">
-                <a16:creationId xmlns:a16="http://schemas.microsoft.com/office/drawing/2014/main" id="{1E96EFB5-1B8E-4342-9691-0C62C7C2D9B5}"/>
+                <a16:creationId xmlns:a16="http://schemas.microsoft.com/office/drawing/2014/main" id="{B44291D3-8E8D-40E8-B3E8-1FD78BEA7039}"/>
               </a:ext>
             </a:extLst>
           </p:cNvPr>
@@ -3008,7 +3008,7 @@
           <p:cNvPr id="4" name="Content Placeholder 3">
             <a:extLst xmlns:a="http://schemas.openxmlformats.org/drawingml/2006/main">
               <a:ext uri="{FF2B5EF4-FFF2-40B4-BE49-F238E27FC236}">
-                <a16:creationId xmlns:a16="http://schemas.microsoft.com/office/drawing/2014/main" id="{464CD47F-290F-4FF4-9E4C-4151EB68E7CA}"/>
+                <a16:creationId xmlns:a16="http://schemas.microsoft.com/office/drawing/2014/main" id="{E4F6738C-6D25-440F-8288-C732A1B0EFAD}"/>
               </a:ext>
             </a:extLst>
           </p:cNvPr>
@@ -3113,7 +3113,7 @@
           <p:cNvPr id="5" name="Text Placeholder 4">
             <a:extLst xmlns:a="http://schemas.openxmlformats.org/drawingml/2006/main">
               <a:ext uri="{FF2B5EF4-FFF2-40B4-BE49-F238E27FC236}">
-                <a16:creationId xmlns:a16="http://schemas.microsoft.com/office/drawing/2014/main" id="{F14706D8-5331-49DD-9CCB-0A9E11E2076D}"/>
+                <a16:creationId xmlns:a16="http://schemas.microsoft.com/office/drawing/2014/main" id="{C2C547C3-A5A8-4DD5-A136-79B5DA444CCB}"/>
               </a:ext>
             </a:extLst>
           </p:cNvPr>
@@ -3185,7 +3185,7 @@
           <p:cNvPr id="6" name="Content Placeholder 5">
             <a:extLst xmlns:a="http://schemas.openxmlformats.org/drawingml/2006/main">
               <a:ext uri="{FF2B5EF4-FFF2-40B4-BE49-F238E27FC236}">
-                <a16:creationId xmlns:a16="http://schemas.microsoft.com/office/drawing/2014/main" id="{784B49AB-52BC-4DBA-894B-516FB65D4E8F}"/>
+                <a16:creationId xmlns:a16="http://schemas.microsoft.com/office/drawing/2014/main" id="{EA9778E9-7688-44E7-9FF0-6BFAD43FF398}"/>
               </a:ext>
             </a:extLst>
           </p:cNvPr>
@@ -3290,7 +3290,7 @@
           <p:cNvPr id="7" name="Date Placeholder 6">
             <a:extLst xmlns:a="http://schemas.openxmlformats.org/drawingml/2006/main">
               <a:ext uri="{FF2B5EF4-FFF2-40B4-BE49-F238E27FC236}">
-                <a16:creationId xmlns:a16="http://schemas.microsoft.com/office/drawing/2014/main" id="{BC1A8D54-CF63-4822-9F7F-12B298680411}"/>
+                <a16:creationId xmlns:a16="http://schemas.microsoft.com/office/drawing/2014/main" id="{FA5E5DF9-8ADA-4F51-815F-4FBAEAACB472}"/>
               </a:ext>
             </a:extLst>
           </p:cNvPr>
@@ -3318,7 +3318,7 @@
           <p:cNvPr id="8" name="Footer Placeholder 7">
             <a:extLst xmlns:a="http://schemas.openxmlformats.org/drawingml/2006/main">
               <a:ext uri="{FF2B5EF4-FFF2-40B4-BE49-F238E27FC236}">
-                <a16:creationId xmlns:a16="http://schemas.microsoft.com/office/drawing/2014/main" id="{79BE4C40-6D7C-4D98-AD66-8B8FFD3E699B}"/>
+                <a16:creationId xmlns:a16="http://schemas.microsoft.com/office/drawing/2014/main" id="{0BCFD174-7958-4EE7-94FD-E4A1FC7CEB4B}"/>
               </a:ext>
             </a:extLst>
           </p:cNvPr>
@@ -3343,7 +3343,7 @@
           <p:cNvPr id="9" name="Slide Number Placeholder 8">
             <a:extLst xmlns:a="http://schemas.openxmlformats.org/drawingml/2006/main">
               <a:ext uri="{FF2B5EF4-FFF2-40B4-BE49-F238E27FC236}">
-                <a16:creationId xmlns:a16="http://schemas.microsoft.com/office/drawing/2014/main" id="{9F3E7F25-807D-4EB7-BC2E-3549B9EEF0FE}"/>
+                <a16:creationId xmlns:a16="http://schemas.microsoft.com/office/drawing/2014/main" id="{0C4A39FD-6EC2-4661-B55A-58D47F90E0A4}"/>
               </a:ext>
             </a:extLst>
           </p:cNvPr>
@@ -3388,7 +3388,7 @@
           <p:cNvPr id="2" name="Title 1">
             <a:extLst xmlns:a="http://schemas.openxmlformats.org/drawingml/2006/main">
               <a:ext uri="{FF2B5EF4-FFF2-40B4-BE49-F238E27FC236}">
-                <a16:creationId xmlns:a16="http://schemas.microsoft.com/office/drawing/2014/main" id="{E5EB5881-B954-42DF-8F6E-B662D0856A5A}"/>
+                <a16:creationId xmlns:a16="http://schemas.microsoft.com/office/drawing/2014/main" id="{B176DCB0-7EF1-4111-819E-1EE6AAD661FA}"/>
               </a:ext>
             </a:extLst>
           </p:cNvPr>
@@ -3416,7 +3416,7 @@
           <p:cNvPr id="3" name="Date Placeholder 2">
             <a:extLst xmlns:a="http://schemas.openxmlformats.org/drawingml/2006/main">
               <a:ext uri="{FF2B5EF4-FFF2-40B4-BE49-F238E27FC236}">
-                <a16:creationId xmlns:a16="http://schemas.microsoft.com/office/drawing/2014/main" id="{0635A201-5DBC-4CB3-8A1C-7C82DCB78A5B}"/>
+                <a16:creationId xmlns:a16="http://schemas.microsoft.com/office/drawing/2014/main" id="{7D0973DD-3974-4DE3-9701-98009BC4BDAB}"/>
               </a:ext>
             </a:extLst>
           </p:cNvPr>
@@ -3444,7 +3444,7 @@
           <p:cNvPr id="4" name="Footer Placeholder 3">
             <a:extLst xmlns:a="http://schemas.openxmlformats.org/drawingml/2006/main">
               <a:ext uri="{FF2B5EF4-FFF2-40B4-BE49-F238E27FC236}">
-                <a16:creationId xmlns:a16="http://schemas.microsoft.com/office/drawing/2014/main" id="{3C64F76B-3451-4CD5-9066-4DAB686419AF}"/>
+                <a16:creationId xmlns:a16="http://schemas.microsoft.com/office/drawing/2014/main" id="{7D623FE4-5043-49A0-913B-DA4E3B8251EA}"/>
               </a:ext>
             </a:extLst>
           </p:cNvPr>
@@ -3469,7 +3469,7 @@
           <p:cNvPr id="5" name="Slide Number Placeholder 4">
             <a:extLst xmlns:a="http://schemas.openxmlformats.org/drawingml/2006/main">
               <a:ext uri="{FF2B5EF4-FFF2-40B4-BE49-F238E27FC236}">
-                <a16:creationId xmlns:a16="http://schemas.microsoft.com/office/drawing/2014/main" id="{915B899A-ED0B-4C7F-A5D0-C72DC37F9B72}"/>
+                <a16:creationId xmlns:a16="http://schemas.microsoft.com/office/drawing/2014/main" id="{95295E1E-02EC-45F0-9B9D-6B0A36CA51C2}"/>
               </a:ext>
             </a:extLst>
           </p:cNvPr>
@@ -3514,7 +3514,7 @@
           <p:cNvPr id="2" name="Date Placeholder 1">
             <a:extLst xmlns:a="http://schemas.openxmlformats.org/drawingml/2006/main">
               <a:ext uri="{FF2B5EF4-FFF2-40B4-BE49-F238E27FC236}">
-                <a16:creationId xmlns:a16="http://schemas.microsoft.com/office/drawing/2014/main" id="{82356100-759E-45A1-B2CA-7421D316EEFC}"/>
+                <a16:creationId xmlns:a16="http://schemas.microsoft.com/office/drawing/2014/main" id="{8F6191BA-351C-47D5-866F-12D38CDC7806}"/>
               </a:ext>
             </a:extLst>
           </p:cNvPr>
@@ -3542,7 +3542,7 @@
           <p:cNvPr id="3" name="Footer Placeholder 2">
             <a:extLst xmlns:a="http://schemas.openxmlformats.org/drawingml/2006/main">
               <a:ext uri="{FF2B5EF4-FFF2-40B4-BE49-F238E27FC236}">
-                <a16:creationId xmlns:a16="http://schemas.microsoft.com/office/drawing/2014/main" id="{978ECD1F-09DD-478D-ACF5-CE24D0BE0E13}"/>
+                <a16:creationId xmlns:a16="http://schemas.microsoft.com/office/drawing/2014/main" id="{965DF5FA-113A-4775-994A-2BF5AD345F79}"/>
               </a:ext>
             </a:extLst>
           </p:cNvPr>
@@ -3567,7 +3567,7 @@
           <p:cNvPr id="4" name="Slide Number Placeholder 3">
             <a:extLst xmlns:a="http://schemas.openxmlformats.org/drawingml/2006/main">
               <a:ext uri="{FF2B5EF4-FFF2-40B4-BE49-F238E27FC236}">
-                <a16:creationId xmlns:a16="http://schemas.microsoft.com/office/drawing/2014/main" id="{193D24A5-AB28-4728-ACA8-8D5BD7146EB7}"/>
+                <a16:creationId xmlns:a16="http://schemas.microsoft.com/office/drawing/2014/main" id="{721DC5CB-0DD7-4E10-9D60-5A5E82D21926}"/>
               </a:ext>
             </a:extLst>
           </p:cNvPr>
@@ -3612,7 +3612,7 @@
           <p:cNvPr id="2" name="Title 1">
             <a:extLst xmlns:a="http://schemas.openxmlformats.org/drawingml/2006/main">
               <a:ext uri="{FF2B5EF4-FFF2-40B4-BE49-F238E27FC236}">
-                <a16:creationId xmlns:a16="http://schemas.microsoft.com/office/drawing/2014/main" id="{4D890F7C-87DE-4AB2-93B2-F3FA48F5AABE}"/>
+                <a16:creationId xmlns:a16="http://schemas.microsoft.com/office/drawing/2014/main" id="{9232F6BC-88E3-4F13-8254-7F1021CA8EAB}"/>
               </a:ext>
             </a:extLst>
           </p:cNvPr>
@@ -3650,7 +3650,7 @@
           <p:cNvPr id="3" name="Content Placeholder 2">
             <a:extLst xmlns:a="http://schemas.openxmlformats.org/drawingml/2006/main">
               <a:ext uri="{FF2B5EF4-FFF2-40B4-BE49-F238E27FC236}">
-                <a16:creationId xmlns:a16="http://schemas.microsoft.com/office/drawing/2014/main" id="{E63DF2AE-272B-4407-B052-3452797DEB30}"/>
+                <a16:creationId xmlns:a16="http://schemas.microsoft.com/office/drawing/2014/main" id="{247FBDC6-1FF4-435F-B9AF-1C5D027BB45D}"/>
               </a:ext>
             </a:extLst>
           </p:cNvPr>
@@ -3755,7 +3755,7 @@
           <p:cNvPr id="4" name="Text Placeholder 3">
             <a:extLst xmlns:a="http://schemas.openxmlformats.org/drawingml/2006/main">
               <a:ext uri="{FF2B5EF4-FFF2-40B4-BE49-F238E27FC236}">
-                <a16:creationId xmlns:a16="http://schemas.microsoft.com/office/drawing/2014/main" id="{F3156436-06B9-4CBD-8A73-B4558BBADEEF}"/>
+                <a16:creationId xmlns:a16="http://schemas.microsoft.com/office/drawing/2014/main" id="{BA621BD8-C41F-4824-BD03-CBA5F4EE1CC5}"/>
               </a:ext>
             </a:extLst>
           </p:cNvPr>
@@ -3827,7 +3827,7 @@
           <p:cNvPr id="5" name="Date Placeholder 4">
             <a:extLst xmlns:a="http://schemas.openxmlformats.org/drawingml/2006/main">
               <a:ext uri="{FF2B5EF4-FFF2-40B4-BE49-F238E27FC236}">
-                <a16:creationId xmlns:a16="http://schemas.microsoft.com/office/drawing/2014/main" id="{B778FCE6-759D-40BA-ACB4-78FF175DD1BF}"/>
+                <a16:creationId xmlns:a16="http://schemas.microsoft.com/office/drawing/2014/main" id="{4C31CEF4-20B2-49E5-B9AA-B1B25F9815DC}"/>
               </a:ext>
             </a:extLst>
           </p:cNvPr>
@@ -3855,7 +3855,7 @@
           <p:cNvPr id="6" name="Footer Placeholder 5">
             <a:extLst xmlns:a="http://schemas.openxmlformats.org/drawingml/2006/main">
               <a:ext uri="{FF2B5EF4-FFF2-40B4-BE49-F238E27FC236}">
-                <a16:creationId xmlns:a16="http://schemas.microsoft.com/office/drawing/2014/main" id="{C54A3AC8-5E92-4986-B156-B84D6871588E}"/>
+                <a16:creationId xmlns:a16="http://schemas.microsoft.com/office/drawing/2014/main" id="{F3997A19-A6C3-43E7-A2C9-1D8B4DA70D43}"/>
               </a:ext>
             </a:extLst>
           </p:cNvPr>
@@ -3880,7 +3880,7 @@
           <p:cNvPr id="7" name="Slide Number Placeholder 6">
             <a:extLst xmlns:a="http://schemas.openxmlformats.org/drawingml/2006/main">
               <a:ext uri="{FF2B5EF4-FFF2-40B4-BE49-F238E27FC236}">
-                <a16:creationId xmlns:a16="http://schemas.microsoft.com/office/drawing/2014/main" id="{A50520FA-9EB4-47FE-BD19-46D2205E6D3E}"/>
+                <a16:creationId xmlns:a16="http://schemas.microsoft.com/office/drawing/2014/main" id="{11E59FF3-C9D3-4AEB-8C69-B0C5057427E4}"/>
               </a:ext>
             </a:extLst>
           </p:cNvPr>
@@ -3925,7 +3925,7 @@
           <p:cNvPr id="2" name="Title 1">
             <a:extLst xmlns:a="http://schemas.openxmlformats.org/drawingml/2006/main">
               <a:ext uri="{FF2B5EF4-FFF2-40B4-BE49-F238E27FC236}">
-                <a16:creationId xmlns:a16="http://schemas.microsoft.com/office/drawing/2014/main" id="{DAA4E35C-D902-4FAE-B1A3-B604CB24A81D}"/>
+                <a16:creationId xmlns:a16="http://schemas.microsoft.com/office/drawing/2014/main" id="{001D7CD4-DD4E-471A-AC69-FEBA50DEB75E}"/>
               </a:ext>
             </a:extLst>
           </p:cNvPr>
@@ -3963,7 +3963,7 @@
           <p:cNvPr id="3" name="Picture Placeholder 2">
             <a:extLst xmlns:a="http://schemas.openxmlformats.org/drawingml/2006/main">
               <a:ext uri="{FF2B5EF4-FFF2-40B4-BE49-F238E27FC236}">
-                <a16:creationId xmlns:a16="http://schemas.microsoft.com/office/drawing/2014/main" id="{CFA20441-FC64-4A45-B50B-8B479B32CB72}"/>
+                <a16:creationId xmlns:a16="http://schemas.microsoft.com/office/drawing/2014/main" id="{C2A508DA-138C-4347-99C1-D8BAF9D9D793}"/>
               </a:ext>
             </a:extLst>
           </p:cNvPr>
@@ -4030,7 +4030,7 @@
           <p:cNvPr id="4" name="Text Placeholder 3">
             <a:extLst xmlns:a="http://schemas.openxmlformats.org/drawingml/2006/main">
               <a:ext uri="{FF2B5EF4-FFF2-40B4-BE49-F238E27FC236}">
-                <a16:creationId xmlns:a16="http://schemas.microsoft.com/office/drawing/2014/main" id="{8CC31745-D231-49C6-BF66-B96B710BA85A}"/>
+                <a16:creationId xmlns:a16="http://schemas.microsoft.com/office/drawing/2014/main" id="{BC5EB1A8-6E76-418F-862C-4AA2A8FC543B}"/>
               </a:ext>
             </a:extLst>
           </p:cNvPr>
@@ -4102,7 +4102,7 @@
           <p:cNvPr id="5" name="Date Placeholder 4">
             <a:extLst xmlns:a="http://schemas.openxmlformats.org/drawingml/2006/main">
               <a:ext uri="{FF2B5EF4-FFF2-40B4-BE49-F238E27FC236}">
-                <a16:creationId xmlns:a16="http://schemas.microsoft.com/office/drawing/2014/main" id="{604D39A6-C1C9-4F2C-97A5-ACD98EAFBF53}"/>
+                <a16:creationId xmlns:a16="http://schemas.microsoft.com/office/drawing/2014/main" id="{FD8CABE8-E38D-4E9B-A6DC-6F5114584440}"/>
               </a:ext>
             </a:extLst>
           </p:cNvPr>
@@ -4130,7 +4130,7 @@
           <p:cNvPr id="6" name="Footer Placeholder 5">
             <a:extLst xmlns:a="http://schemas.openxmlformats.org/drawingml/2006/main">
               <a:ext uri="{FF2B5EF4-FFF2-40B4-BE49-F238E27FC236}">
-                <a16:creationId xmlns:a16="http://schemas.microsoft.com/office/drawing/2014/main" id="{C4A1C3D5-107A-46E0-8EFC-A9811FC4251D}"/>
+                <a16:creationId xmlns:a16="http://schemas.microsoft.com/office/drawing/2014/main" id="{58ADA187-743D-4610-8AFB-F22078916186}"/>
               </a:ext>
             </a:extLst>
           </p:cNvPr>
@@ -4155,7 +4155,7 @@
           <p:cNvPr id="7" name="Slide Number Placeholder 6">
             <a:extLst xmlns:a="http://schemas.openxmlformats.org/drawingml/2006/main">
               <a:ext uri="{FF2B5EF4-FFF2-40B4-BE49-F238E27FC236}">
-                <a16:creationId xmlns:a16="http://schemas.microsoft.com/office/drawing/2014/main" id="{5F264B52-A755-4B58-B841-A242024DCC08}"/>
+                <a16:creationId xmlns:a16="http://schemas.microsoft.com/office/drawing/2014/main" id="{2778182B-5063-4F08-8EF3-E1B400935654}"/>
               </a:ext>
             </a:extLst>
           </p:cNvPr>
@@ -4205,7 +4205,7 @@
           <p:cNvPr id="2" name="Title Placeholder 1">
             <a:extLst xmlns:a="http://schemas.openxmlformats.org/drawingml/2006/main">
               <a:ext uri="{FF2B5EF4-FFF2-40B4-BE49-F238E27FC236}">
-                <a16:creationId xmlns:a16="http://schemas.microsoft.com/office/drawing/2014/main" id="{5DDE2631-86AA-42AA-829E-068F607F5DC3}"/>
+                <a16:creationId xmlns:a16="http://schemas.microsoft.com/office/drawing/2014/main" id="{FC840009-D4F9-4C04-9C15-6C9053D2098F}"/>
               </a:ext>
             </a:extLst>
           </p:cNvPr>
@@ -4243,7 +4243,7 @@
           <p:cNvPr id="3" name="Text Placeholder 2">
             <a:extLst xmlns:a="http://schemas.openxmlformats.org/drawingml/2006/main">
               <a:ext uri="{FF2B5EF4-FFF2-40B4-BE49-F238E27FC236}">
-                <a16:creationId xmlns:a16="http://schemas.microsoft.com/office/drawing/2014/main" id="{6C078771-90E4-4616-A442-0995F09588A4}"/>
+                <a16:creationId xmlns:a16="http://schemas.microsoft.com/office/drawing/2014/main" id="{C6F3E2ED-EECA-4035-B9F8-8610D3DCD015}"/>
               </a:ext>
             </a:extLst>
           </p:cNvPr>
@@ -4316,7 +4316,7 @@
           <p:cNvPr id="4" name="Date Placeholder 3">
             <a:extLst xmlns:a="http://schemas.openxmlformats.org/drawingml/2006/main">
               <a:ext uri="{FF2B5EF4-FFF2-40B4-BE49-F238E27FC236}">
-                <a16:creationId xmlns:a16="http://schemas.microsoft.com/office/drawing/2014/main" id="{75C976F7-64CA-4588-A2A1-824724793A49}"/>
+                <a16:creationId xmlns:a16="http://schemas.microsoft.com/office/drawing/2014/main" id="{C9A5D752-CFFE-4890-A117-EC36BE3DF964}"/>
               </a:ext>
             </a:extLst>
           </p:cNvPr>
@@ -4363,7 +4363,7 @@
           <p:cNvPr id="5" name="Footer Placeholder 4">
             <a:extLst xmlns:a="http://schemas.openxmlformats.org/drawingml/2006/main">
               <a:ext uri="{FF2B5EF4-FFF2-40B4-BE49-F238E27FC236}">
-                <a16:creationId xmlns:a16="http://schemas.microsoft.com/office/drawing/2014/main" id="{40875688-3438-4F26-9511-6DF107EA02FB}"/>
+                <a16:creationId xmlns:a16="http://schemas.microsoft.com/office/drawing/2014/main" id="{ECD0ADE8-AE2D-425E-805B-8622460D30E0}"/>
               </a:ext>
             </a:extLst>
           </p:cNvPr>
@@ -4407,7 +4407,7 @@
           <p:cNvPr id="6" name="Slide Number Placeholder 5">
             <a:extLst xmlns:a="http://schemas.openxmlformats.org/drawingml/2006/main">
               <a:ext uri="{FF2B5EF4-FFF2-40B4-BE49-F238E27FC236}">
-                <a16:creationId xmlns:a16="http://schemas.microsoft.com/office/drawing/2014/main" id="{88852BC9-8A34-45D2-B5A5-FB29C43DCC9A}"/>
+                <a16:creationId xmlns:a16="http://schemas.microsoft.com/office/drawing/2014/main" id="{1C8712A2-92BF-4CAF-B167-561130759AD2}"/>
               </a:ext>
             </a:extLst>
           </p:cNvPr>
@@ -4453,17 +4453,17 @@
   </p:cSld>
   <p:clrMap bg1="lt1" tx1="dk1" bg2="lt2" tx2="dk2" accent1="accent1" accent2="accent2" accent3="accent3" accent4="accent4" accent5="accent5" accent6="accent6" hlink="hlink" folHlink="folHlink"/>
   <p:sldLayoutIdLst>
-    <p:sldLayoutId xmlns:r="http://schemas.openxmlformats.org/officeDocument/2006/relationships" id="2147483649" r:id="Rd33413fb18464a26"/>
-    <p:sldLayoutId xmlns:r="http://schemas.openxmlformats.org/officeDocument/2006/relationships" id="2147483650" r:id="Ra5e36e02a2e342d6"/>
-    <p:sldLayoutId xmlns:r="http://schemas.openxmlformats.org/officeDocument/2006/relationships" id="2147483651" r:id="R57a007aef86d4a12"/>
-    <p:sldLayoutId xmlns:r="http://schemas.openxmlformats.org/officeDocument/2006/relationships" id="2147483652" r:id="Rd5e2c05dc05548da"/>
-    <p:sldLayoutId xmlns:r="http://schemas.openxmlformats.org/officeDocument/2006/relationships" id="2147483653" r:id="R3c9c6a8b409b448d"/>
-    <p:sldLayoutId xmlns:r="http://schemas.openxmlformats.org/officeDocument/2006/relationships" id="2147483654" r:id="R631911e196f64b40"/>
-    <p:sldLayoutId xmlns:r="http://schemas.openxmlformats.org/officeDocument/2006/relationships" id="2147483655" r:id="R06cb99945c574c52"/>
-    <p:sldLayoutId xmlns:r="http://schemas.openxmlformats.org/officeDocument/2006/relationships" id="2147483656" r:id="R80d2e9b162fb46ed"/>
-    <p:sldLayoutId xmlns:r="http://schemas.openxmlformats.org/officeDocument/2006/relationships" id="2147483657" r:id="R6f4cd660ba3a48e6"/>
-    <p:sldLayoutId xmlns:r="http://schemas.openxmlformats.org/officeDocument/2006/relationships" id="2147483658" r:id="R2b4ab3271c4c4143"/>
-    <p:sldLayoutId xmlns:r="http://schemas.openxmlformats.org/officeDocument/2006/relationships" id="2147483659" r:id="Rdfdc813dcbd0457c"/>
+    <p:sldLayoutId xmlns:r="http://schemas.openxmlformats.org/officeDocument/2006/relationships" id="2147483649" r:id="Raf3922c657e44813"/>
+    <p:sldLayoutId xmlns:r="http://schemas.openxmlformats.org/officeDocument/2006/relationships" id="2147483650" r:id="Raf271fbccecc4f0d"/>
+    <p:sldLayoutId xmlns:r="http://schemas.openxmlformats.org/officeDocument/2006/relationships" id="2147483651" r:id="R748e3af98f4e4cba"/>
+    <p:sldLayoutId xmlns:r="http://schemas.openxmlformats.org/officeDocument/2006/relationships" id="2147483652" r:id="R36e687991f8b4b11"/>
+    <p:sldLayoutId xmlns:r="http://schemas.openxmlformats.org/officeDocument/2006/relationships" id="2147483653" r:id="Rac7108310a994338"/>
+    <p:sldLayoutId xmlns:r="http://schemas.openxmlformats.org/officeDocument/2006/relationships" id="2147483654" r:id="R599bc1c7e8994ad4"/>
+    <p:sldLayoutId xmlns:r="http://schemas.openxmlformats.org/officeDocument/2006/relationships" id="2147483655" r:id="R890c9ce882604687"/>
+    <p:sldLayoutId xmlns:r="http://schemas.openxmlformats.org/officeDocument/2006/relationships" id="2147483656" r:id="Rdc5c4628d8ef4650"/>
+    <p:sldLayoutId xmlns:r="http://schemas.openxmlformats.org/officeDocument/2006/relationships" id="2147483657" r:id="R4d9e8236b1944f07"/>
+    <p:sldLayoutId xmlns:r="http://schemas.openxmlformats.org/officeDocument/2006/relationships" id="2147483658" r:id="Rf57c43459e3444d4"/>
+    <p:sldLayoutId xmlns:r="http://schemas.openxmlformats.org/officeDocument/2006/relationships" id="2147483659" r:id="R5694e51afd7e4fd8"/>
   </p:sldLayoutIdLst>
   <p:txStyles>
     <p:titleStyle>
@@ -5009,7 +5009,7 @@
           <p:cNvPr id="2" name="Rectangle 1">
             <a:extLst xmlns:a="http://schemas.openxmlformats.org/drawingml/2006/main">
               <a:ext uri="{FF2B5EF4-FFF2-40B4-BE49-F238E27FC236}">
-                <a16:creationId xmlns:a16="http://schemas.microsoft.com/office/drawing/2014/main" id="{EA9DDCA1-F914-4684-BDA6-211AC0C8CA5D}"/>
+                <a16:creationId xmlns:a16="http://schemas.microsoft.com/office/drawing/2014/main" id="{D76A1697-90F4-4B99-9BC8-C5CA394025C1}"/>
               </a:ext>
             </a:extLst>
           </p:cNvPr>
@@ -5062,7 +5062,7 @@
           <p:cNvPr id="3" name="Rectangle 2">
             <a:extLst xmlns:a="http://schemas.openxmlformats.org/drawingml/2006/main">
               <a:ext uri="{FF2B5EF4-FFF2-40B4-BE49-F238E27FC236}">
-                <a16:creationId xmlns:a16="http://schemas.microsoft.com/office/drawing/2014/main" id="{33933F27-0073-4242-98C3-5946DAF06647}"/>
+                <a16:creationId xmlns:a16="http://schemas.microsoft.com/office/drawing/2014/main" id="{C16B95B4-DDB9-4778-BA1D-1F24CB1F04C2}"/>
               </a:ext>
             </a:extLst>
           </p:cNvPr>
@@ -5115,7 +5115,7 @@
           <p:cNvPr id="4" name="TextBox 3">
             <a:extLst xmlns:a="http://schemas.openxmlformats.org/drawingml/2006/main">
               <a:ext uri="{FF2B5EF4-FFF2-40B4-BE49-F238E27FC236}">
-                <a16:creationId xmlns:a16="http://schemas.microsoft.com/office/drawing/2014/main" id="{39847C33-39CB-4870-BE4E-331573B0CA41}"/>
+                <a16:creationId xmlns:a16="http://schemas.microsoft.com/office/drawing/2014/main" id="{EA6FB49C-DC38-4A45-897C-146F28B3D9CE}"/>
               </a:ext>
             </a:extLst>
           </p:cNvPr>
@@ -5217,7 +5217,7 @@
     </p:spTree>
     <p:extLst>
       <p:ext uri="{BB962C8B-B14F-4D97-AF65-F5344CB8AC3E}">
-        <p14:creationId xmlns:p14="http://schemas.microsoft.com/office/powerpoint/2010/main" val="457345839"/>
+        <p14:creationId xmlns:p14="http://schemas.microsoft.com/office/powerpoint/2010/main" val="178200091"/>
       </p:ext>
     </p:extLst>
   </p:cSld>
@@ -5241,7 +5241,7 @@
           <p:cNvPr id="2" name="Rectangle 1">
             <a:extLst xmlns:a="http://schemas.openxmlformats.org/drawingml/2006/main">
               <a:ext uri="{FF2B5EF4-FFF2-40B4-BE49-F238E27FC236}">
-                <a16:creationId xmlns:a16="http://schemas.microsoft.com/office/drawing/2014/main" id="{CD450BF5-9446-4EE7-885A-704BDA244F37}"/>
+                <a16:creationId xmlns:a16="http://schemas.microsoft.com/office/drawing/2014/main" id="{8711F2B7-47CA-4D51-BC74-AA906703C970}"/>
               </a:ext>
             </a:extLst>
           </p:cNvPr>
@@ -5294,7 +5294,7 @@
           <p:cNvPr id="3" name="Rectangle 2">
             <a:extLst xmlns:a="http://schemas.openxmlformats.org/drawingml/2006/main">
               <a:ext uri="{FF2B5EF4-FFF2-40B4-BE49-F238E27FC236}">
-                <a16:creationId xmlns:a16="http://schemas.microsoft.com/office/drawing/2014/main" id="{AE858B1A-F398-42DF-903A-8CB5B264BCA6}"/>
+                <a16:creationId xmlns:a16="http://schemas.microsoft.com/office/drawing/2014/main" id="{ABEB9E9B-34CF-4D83-A82C-A1DB7ED9C826}"/>
               </a:ext>
             </a:extLst>
           </p:cNvPr>
@@ -5347,7 +5347,7 @@
           <p:cNvPr id="4" name="Rectangle 3">
             <a:extLst xmlns:a="http://schemas.openxmlformats.org/drawingml/2006/main">
               <a:ext uri="{FF2B5EF4-FFF2-40B4-BE49-F238E27FC236}">
-                <a16:creationId xmlns:a16="http://schemas.microsoft.com/office/drawing/2014/main" id="{4E4BFE5E-A993-4CB7-A231-2B167E16FEBD}"/>
+                <a16:creationId xmlns:a16="http://schemas.microsoft.com/office/drawing/2014/main" id="{888EC119-A4E6-4A4B-A61A-10F507921A12}"/>
               </a:ext>
             </a:extLst>
           </p:cNvPr>
@@ -5400,7 +5400,7 @@
           <p:cNvPr id="5" name="TextBox 4">
             <a:extLst xmlns:a="http://schemas.openxmlformats.org/drawingml/2006/main">
               <a:ext uri="{FF2B5EF4-FFF2-40B4-BE49-F238E27FC236}">
-                <a16:creationId xmlns:a16="http://schemas.microsoft.com/office/drawing/2014/main" id="{9E5D2F36-7CA8-46B7-8172-19594575E203}"/>
+                <a16:creationId xmlns:a16="http://schemas.microsoft.com/office/drawing/2014/main" id="{4E4E1A01-53AE-476E-831D-369ADB44A234}"/>
               </a:ext>
             </a:extLst>
           </p:cNvPr>
@@ -5463,7 +5463,7 @@
           <p:cNvPr id="6" name="Rounded Rectangle 5">
             <a:extLst xmlns:a="http://schemas.openxmlformats.org/drawingml/2006/main">
               <a:ext uri="{FF2B5EF4-FFF2-40B4-BE49-F238E27FC236}">
-                <a16:creationId xmlns:a16="http://schemas.microsoft.com/office/drawing/2014/main" id="{ED7CEF2C-EB15-4F19-BD36-5F57718E2E34}"/>
+                <a16:creationId xmlns:a16="http://schemas.microsoft.com/office/drawing/2014/main" id="{108ACEAE-9C7C-419F-8010-A0A4033809D8}"/>
               </a:ext>
             </a:extLst>
           </p:cNvPr>
@@ -5518,7 +5518,7 @@
           <p:cNvPr id="7" name="TextBox 6">
             <a:extLst xmlns:a="http://schemas.openxmlformats.org/drawingml/2006/main">
               <a:ext uri="{FF2B5EF4-FFF2-40B4-BE49-F238E27FC236}">
-                <a16:creationId xmlns:a16="http://schemas.microsoft.com/office/drawing/2014/main" id="{0D7C2161-B536-40BF-A976-A4CD3B05A8DB}"/>
+                <a16:creationId xmlns:a16="http://schemas.microsoft.com/office/drawing/2014/main" id="{70297104-3780-4A93-B20E-C8912629EBF4}"/>
               </a:ext>
             </a:extLst>
           </p:cNvPr>
@@ -5622,7 +5622,7 @@
           <p:cNvPr id="8" name="Rounded Rectangle 7">
             <a:extLst xmlns:a="http://schemas.openxmlformats.org/drawingml/2006/main">
               <a:ext uri="{FF2B5EF4-FFF2-40B4-BE49-F238E27FC236}">
-                <a16:creationId xmlns:a16="http://schemas.microsoft.com/office/drawing/2014/main" id="{F50D51DA-FE1F-4D8A-B3E2-EB7CEB989FC4}"/>
+                <a16:creationId xmlns:a16="http://schemas.microsoft.com/office/drawing/2014/main" id="{AFB01487-D1C5-48CD-8805-621BEB891248}"/>
               </a:ext>
             </a:extLst>
           </p:cNvPr>
@@ -5677,7 +5677,7 @@
           <p:cNvPr id="9" name="TextBox 8">
             <a:extLst xmlns:a="http://schemas.openxmlformats.org/drawingml/2006/main">
               <a:ext uri="{FF2B5EF4-FFF2-40B4-BE49-F238E27FC236}">
-                <a16:creationId xmlns:a16="http://schemas.microsoft.com/office/drawing/2014/main" id="{CD85419E-23E1-404E-9E32-D2267F41BED4}"/>
+                <a16:creationId xmlns:a16="http://schemas.microsoft.com/office/drawing/2014/main" id="{D492C280-90BE-49C3-B418-D7182F93138D}"/>
               </a:ext>
             </a:extLst>
           </p:cNvPr>
@@ -5762,7 +5762,7 @@
           <p:cNvPr id="10" name="Rounded Rectangle 9">
             <a:extLst xmlns:a="http://schemas.openxmlformats.org/drawingml/2006/main">
               <a:ext uri="{FF2B5EF4-FFF2-40B4-BE49-F238E27FC236}">
-                <a16:creationId xmlns:a16="http://schemas.microsoft.com/office/drawing/2014/main" id="{D694ADD5-93D2-40F8-8B37-25A5EECCC428}"/>
+                <a16:creationId xmlns:a16="http://schemas.microsoft.com/office/drawing/2014/main" id="{4AD75E00-3F82-4202-8DAE-E327215ACECC}"/>
               </a:ext>
             </a:extLst>
           </p:cNvPr>
@@ -5817,7 +5817,7 @@
           <p:cNvPr id="11" name="TextBox 10">
             <a:extLst xmlns:a="http://schemas.openxmlformats.org/drawingml/2006/main">
               <a:ext uri="{FF2B5EF4-FFF2-40B4-BE49-F238E27FC236}">
-                <a16:creationId xmlns:a16="http://schemas.microsoft.com/office/drawing/2014/main" id="{EDF41CEE-C939-4033-AB79-B49121B5096E}"/>
+                <a16:creationId xmlns:a16="http://schemas.microsoft.com/office/drawing/2014/main" id="{CF85E344-F3E9-4C30-A032-3A5D2F64D319}"/>
               </a:ext>
             </a:extLst>
           </p:cNvPr>
@@ -5919,7 +5919,7 @@
     </p:spTree>
     <p:extLst>
       <p:ext uri="{BB962C8B-B14F-4D97-AF65-F5344CB8AC3E}">
-        <p14:creationId xmlns:p14="http://schemas.microsoft.com/office/powerpoint/2010/main" val="1171260497"/>
+        <p14:creationId xmlns:p14="http://schemas.microsoft.com/office/powerpoint/2010/main" val="470099464"/>
       </p:ext>
     </p:extLst>
   </p:cSld>
@@ -5943,7 +5943,7 @@
           <p:cNvPr id="2" name="Rectangle 1">
             <a:extLst xmlns:a="http://schemas.openxmlformats.org/drawingml/2006/main">
               <a:ext uri="{FF2B5EF4-FFF2-40B4-BE49-F238E27FC236}">
-                <a16:creationId xmlns:a16="http://schemas.microsoft.com/office/drawing/2014/main" id="{5138FABC-7F66-481B-8C2E-C4D291FB86B7}"/>
+                <a16:creationId xmlns:a16="http://schemas.microsoft.com/office/drawing/2014/main" id="{0C7BF7B5-FCC4-41DF-8D74-AC20A1259968}"/>
               </a:ext>
             </a:extLst>
           </p:cNvPr>
@@ -5996,7 +5996,7 @@
           <p:cNvPr id="3" name="Rectangle 2">
             <a:extLst xmlns:a="http://schemas.openxmlformats.org/drawingml/2006/main">
               <a:ext uri="{FF2B5EF4-FFF2-40B4-BE49-F238E27FC236}">
-                <a16:creationId xmlns:a16="http://schemas.microsoft.com/office/drawing/2014/main" id="{400E7278-5CAE-40C1-AD10-AACADE77F4F4}"/>
+                <a16:creationId xmlns:a16="http://schemas.microsoft.com/office/drawing/2014/main" id="{B500CCDD-8810-4B5F-8B1D-F030CE53D622}"/>
               </a:ext>
             </a:extLst>
           </p:cNvPr>
@@ -6049,7 +6049,7 @@
           <p:cNvPr id="4" name="Rectangle 3">
             <a:extLst xmlns:a="http://schemas.openxmlformats.org/drawingml/2006/main">
               <a:ext uri="{FF2B5EF4-FFF2-40B4-BE49-F238E27FC236}">
-                <a16:creationId xmlns:a16="http://schemas.microsoft.com/office/drawing/2014/main" id="{ED1CC4C4-B6D6-49F0-9827-436949CFFE98}"/>
+                <a16:creationId xmlns:a16="http://schemas.microsoft.com/office/drawing/2014/main" id="{65034374-E11F-4C13-B64C-742301D08D17}"/>
               </a:ext>
             </a:extLst>
           </p:cNvPr>
@@ -6102,7 +6102,7 @@
           <p:cNvPr id="5" name="TextBox 4">
             <a:extLst xmlns:a="http://schemas.openxmlformats.org/drawingml/2006/main">
               <a:ext uri="{FF2B5EF4-FFF2-40B4-BE49-F238E27FC236}">
-                <a16:creationId xmlns:a16="http://schemas.microsoft.com/office/drawing/2014/main" id="{7C34A510-510D-41E6-9447-BE3BCBCFE5D2}"/>
+                <a16:creationId xmlns:a16="http://schemas.microsoft.com/office/drawing/2014/main" id="{8333E2FE-CE2F-4E82-996E-CF10FAD8BF49}"/>
               </a:ext>
             </a:extLst>
           </p:cNvPr>
@@ -6165,7 +6165,7 @@
           <p:cNvPr id="6" name="Rounded Rectangle 5">
             <a:extLst xmlns:a="http://schemas.openxmlformats.org/drawingml/2006/main">
               <a:ext uri="{FF2B5EF4-FFF2-40B4-BE49-F238E27FC236}">
-                <a16:creationId xmlns:a16="http://schemas.microsoft.com/office/drawing/2014/main" id="{7C05AE73-0C32-4BA5-9594-868BA2764887}"/>
+                <a16:creationId xmlns:a16="http://schemas.microsoft.com/office/drawing/2014/main" id="{45EB4F14-2A8E-4C77-9024-D9C8212A5C67}"/>
               </a:ext>
             </a:extLst>
           </p:cNvPr>
@@ -6220,7 +6220,7 @@
           <p:cNvPr id="7" name="TextBox 6">
             <a:extLst xmlns:a="http://schemas.openxmlformats.org/drawingml/2006/main">
               <a:ext uri="{FF2B5EF4-FFF2-40B4-BE49-F238E27FC236}">
-                <a16:creationId xmlns:a16="http://schemas.microsoft.com/office/drawing/2014/main" id="{83405D1A-3133-4202-969F-57FA4BC446C4}"/>
+                <a16:creationId xmlns:a16="http://schemas.microsoft.com/office/drawing/2014/main" id="{3524A44E-B9FE-4AB7-BD21-95446992213E}"/>
               </a:ext>
             </a:extLst>
           </p:cNvPr>
@@ -6419,7 +6419,7 @@
           <p:cNvPr id="8" name="Rounded Rectangle 7">
             <a:extLst xmlns:a="http://schemas.openxmlformats.org/drawingml/2006/main">
               <a:ext uri="{FF2B5EF4-FFF2-40B4-BE49-F238E27FC236}">
-                <a16:creationId xmlns:a16="http://schemas.microsoft.com/office/drawing/2014/main" id="{CDB9D29F-30CB-48A2-A95A-5B1FF6D2794C}"/>
+                <a16:creationId xmlns:a16="http://schemas.microsoft.com/office/drawing/2014/main" id="{4B84D7D3-1D96-499F-9BC7-2D1875C3D101}"/>
               </a:ext>
             </a:extLst>
           </p:cNvPr>
@@ -6474,7 +6474,7 @@
           <p:cNvPr id="9" name="TextBox 8">
             <a:extLst xmlns:a="http://schemas.openxmlformats.org/drawingml/2006/main">
               <a:ext uri="{FF2B5EF4-FFF2-40B4-BE49-F238E27FC236}">
-                <a16:creationId xmlns:a16="http://schemas.microsoft.com/office/drawing/2014/main" id="{3CA5E277-37FA-469F-B32C-57A08FD40C6E}"/>
+                <a16:creationId xmlns:a16="http://schemas.microsoft.com/office/drawing/2014/main" id="{F708977B-AD76-4CE2-9CA8-3663A3655653}"/>
               </a:ext>
             </a:extLst>
           </p:cNvPr>
@@ -6595,7 +6595,7 @@
     </p:spTree>
     <p:extLst>
       <p:ext uri="{BB962C8B-B14F-4D97-AF65-F5344CB8AC3E}">
-        <p14:creationId xmlns:p14="http://schemas.microsoft.com/office/powerpoint/2010/main" val="1500473785"/>
+        <p14:creationId xmlns:p14="http://schemas.microsoft.com/office/powerpoint/2010/main" val="249662082"/>
       </p:ext>
     </p:extLst>
   </p:cSld>
@@ -6619,7 +6619,7 @@
           <p:cNvPr id="2" name="Rectangle 1">
             <a:extLst xmlns:a="http://schemas.openxmlformats.org/drawingml/2006/main">
               <a:ext uri="{FF2B5EF4-FFF2-40B4-BE49-F238E27FC236}">
-                <a16:creationId xmlns:a16="http://schemas.microsoft.com/office/drawing/2014/main" id="{39E6C460-4844-4E3D-80E9-9195C7914D45}"/>
+                <a16:creationId xmlns:a16="http://schemas.microsoft.com/office/drawing/2014/main" id="{8C905FE4-B36E-4252-A6C2-75E454B8DE39}"/>
               </a:ext>
             </a:extLst>
           </p:cNvPr>
@@ -6672,7 +6672,7 @@
           <p:cNvPr id="3" name="Rectangle 2">
             <a:extLst xmlns:a="http://schemas.openxmlformats.org/drawingml/2006/main">
               <a:ext uri="{FF2B5EF4-FFF2-40B4-BE49-F238E27FC236}">
-                <a16:creationId xmlns:a16="http://schemas.microsoft.com/office/drawing/2014/main" id="{884E266D-CA27-4D88-BB5E-1BB867F7B356}"/>
+                <a16:creationId xmlns:a16="http://schemas.microsoft.com/office/drawing/2014/main" id="{6C26D553-092B-40EA-BB2F-531C135E0B83}"/>
               </a:ext>
             </a:extLst>
           </p:cNvPr>
@@ -6725,7 +6725,7 @@
           <p:cNvPr id="4" name="TextBox 3">
             <a:extLst xmlns:a="http://schemas.openxmlformats.org/drawingml/2006/main">
               <a:ext uri="{FF2B5EF4-FFF2-40B4-BE49-F238E27FC236}">
-                <a16:creationId xmlns:a16="http://schemas.microsoft.com/office/drawing/2014/main" id="{473E6053-AED8-4DD4-B60B-3EE9F423B224}"/>
+                <a16:creationId xmlns:a16="http://schemas.microsoft.com/office/drawing/2014/main" id="{27B56AF8-59D8-4072-B628-D0ED99C3CD5B}"/>
               </a:ext>
             </a:extLst>
           </p:cNvPr>
@@ -6903,7 +6903,7 @@
     </p:spTree>
     <p:extLst>
       <p:ext uri="{BB962C8B-B14F-4D97-AF65-F5344CB8AC3E}">
-        <p14:creationId xmlns:p14="http://schemas.microsoft.com/office/powerpoint/2010/main" val="792577894"/>
+        <p14:creationId xmlns:p14="http://schemas.microsoft.com/office/powerpoint/2010/main" val="18029351"/>
       </p:ext>
     </p:extLst>
   </p:cSld>
@@ -6927,7 +6927,7 @@
           <p:cNvPr id="2" name="Rectangle 1">
             <a:extLst xmlns:a="http://schemas.openxmlformats.org/drawingml/2006/main">
               <a:ext uri="{FF2B5EF4-FFF2-40B4-BE49-F238E27FC236}">
-                <a16:creationId xmlns:a16="http://schemas.microsoft.com/office/drawing/2014/main" id="{BA09B649-24F0-480B-B4A2-209DA9BEA2D8}"/>
+                <a16:creationId xmlns:a16="http://schemas.microsoft.com/office/drawing/2014/main" id="{CB14A08F-0CC5-4970-8BA7-AC4E0D00C299}"/>
               </a:ext>
             </a:extLst>
           </p:cNvPr>
@@ -6980,7 +6980,7 @@
           <p:cNvPr id="3" name="Rectangle 2">
             <a:extLst xmlns:a="http://schemas.openxmlformats.org/drawingml/2006/main">
               <a:ext uri="{FF2B5EF4-FFF2-40B4-BE49-F238E27FC236}">
-                <a16:creationId xmlns:a16="http://schemas.microsoft.com/office/drawing/2014/main" id="{487A8532-79A2-467F-90A9-066755336917}"/>
+                <a16:creationId xmlns:a16="http://schemas.microsoft.com/office/drawing/2014/main" id="{5F31F494-CBD5-48A7-96ED-3410FB8B6A84}"/>
               </a:ext>
             </a:extLst>
           </p:cNvPr>
@@ -7033,7 +7033,7 @@
           <p:cNvPr id="4" name="Rectangle 3">
             <a:extLst xmlns:a="http://schemas.openxmlformats.org/drawingml/2006/main">
               <a:ext uri="{FF2B5EF4-FFF2-40B4-BE49-F238E27FC236}">
-                <a16:creationId xmlns:a16="http://schemas.microsoft.com/office/drawing/2014/main" id="{100FE809-0177-4D16-9848-70CB2531FEC5}"/>
+                <a16:creationId xmlns:a16="http://schemas.microsoft.com/office/drawing/2014/main" id="{B9CE3DAF-A963-4DFA-BBEE-8AF7CD7BC63F}"/>
               </a:ext>
             </a:extLst>
           </p:cNvPr>
@@ -7086,7 +7086,7 @@
           <p:cNvPr id="5" name="TextBox 4">
             <a:extLst xmlns:a="http://schemas.openxmlformats.org/drawingml/2006/main">
               <a:ext uri="{FF2B5EF4-FFF2-40B4-BE49-F238E27FC236}">
-                <a16:creationId xmlns:a16="http://schemas.microsoft.com/office/drawing/2014/main" id="{D2B06B6E-0F8D-4C15-A07A-D52D230E1985}"/>
+                <a16:creationId xmlns:a16="http://schemas.microsoft.com/office/drawing/2014/main" id="{13242279-C44F-46EA-B8AD-DDC611C87424}"/>
               </a:ext>
             </a:extLst>
           </p:cNvPr>
@@ -7149,7 +7149,7 @@
           <p:cNvPr id="6" name="Rounded Rectangle 5">
             <a:extLst xmlns:a="http://schemas.openxmlformats.org/drawingml/2006/main">
               <a:ext uri="{FF2B5EF4-FFF2-40B4-BE49-F238E27FC236}">
-                <a16:creationId xmlns:a16="http://schemas.microsoft.com/office/drawing/2014/main" id="{F3F9053D-F011-409C-B909-23CFE30EC785}"/>
+                <a16:creationId xmlns:a16="http://schemas.microsoft.com/office/drawing/2014/main" id="{C0592635-67DF-4E7E-BE6B-7234B5C7D454}"/>
               </a:ext>
             </a:extLst>
           </p:cNvPr>
@@ -7204,7 +7204,7 @@
           <p:cNvPr id="7" name="TextBox 6">
             <a:extLst xmlns:a="http://schemas.openxmlformats.org/drawingml/2006/main">
               <a:ext uri="{FF2B5EF4-FFF2-40B4-BE49-F238E27FC236}">
-                <a16:creationId xmlns:a16="http://schemas.microsoft.com/office/drawing/2014/main" id="{13FD54E5-882F-404B-91B1-06DDA9D0CD21}"/>
+                <a16:creationId xmlns:a16="http://schemas.microsoft.com/office/drawing/2014/main" id="{464D95AE-ACE5-42A3-862A-532B40C9EF78}"/>
               </a:ext>
             </a:extLst>
           </p:cNvPr>
@@ -7308,7 +7308,7 @@
           <p:cNvPr id="8" name="Rounded Rectangle 7">
             <a:extLst xmlns:a="http://schemas.openxmlformats.org/drawingml/2006/main">
               <a:ext uri="{FF2B5EF4-FFF2-40B4-BE49-F238E27FC236}">
-                <a16:creationId xmlns:a16="http://schemas.microsoft.com/office/drawing/2014/main" id="{E16AB32C-0638-4164-9D05-EB57FD8F2B89}"/>
+                <a16:creationId xmlns:a16="http://schemas.microsoft.com/office/drawing/2014/main" id="{33F5F880-4D3D-4BF8-A486-AC188638A717}"/>
               </a:ext>
             </a:extLst>
           </p:cNvPr>
@@ -7363,7 +7363,7 @@
           <p:cNvPr id="9" name="TextBox 8">
             <a:extLst xmlns:a="http://schemas.openxmlformats.org/drawingml/2006/main">
               <a:ext uri="{FF2B5EF4-FFF2-40B4-BE49-F238E27FC236}">
-                <a16:creationId xmlns:a16="http://schemas.microsoft.com/office/drawing/2014/main" id="{CD2A7B77-0AC7-4D72-B593-0A8B9BBFF186}"/>
+                <a16:creationId xmlns:a16="http://schemas.microsoft.com/office/drawing/2014/main" id="{5D89B376-93A6-4217-B550-E059184E1AD2}"/>
               </a:ext>
             </a:extLst>
           </p:cNvPr>
@@ -7467,7 +7467,7 @@
           <p:cNvPr id="10" name="Rounded Rectangle 9">
             <a:extLst xmlns:a="http://schemas.openxmlformats.org/drawingml/2006/main">
               <a:ext uri="{FF2B5EF4-FFF2-40B4-BE49-F238E27FC236}">
-                <a16:creationId xmlns:a16="http://schemas.microsoft.com/office/drawing/2014/main" id="{963CCAA3-3D37-4706-A0CC-3D3842D4A899}"/>
+                <a16:creationId xmlns:a16="http://schemas.microsoft.com/office/drawing/2014/main" id="{C176E3D9-4837-4281-BB26-5DAB674A57E9}"/>
               </a:ext>
             </a:extLst>
           </p:cNvPr>
@@ -7522,7 +7522,7 @@
           <p:cNvPr id="11" name="TextBox 10">
             <a:extLst xmlns:a="http://schemas.openxmlformats.org/drawingml/2006/main">
               <a:ext uri="{FF2B5EF4-FFF2-40B4-BE49-F238E27FC236}">
-                <a16:creationId xmlns:a16="http://schemas.microsoft.com/office/drawing/2014/main" id="{CA6D9167-F6CE-4420-87F0-AF0FA359E710}"/>
+                <a16:creationId xmlns:a16="http://schemas.microsoft.com/office/drawing/2014/main" id="{2D827DE8-7975-4FC3-8AE7-6335AAE4A601}"/>
               </a:ext>
             </a:extLst>
           </p:cNvPr>
@@ -7681,7 +7681,7 @@
     </p:spTree>
     <p:extLst>
       <p:ext uri="{BB962C8B-B14F-4D97-AF65-F5344CB8AC3E}">
-        <p14:creationId xmlns:p14="http://schemas.microsoft.com/office/powerpoint/2010/main" val="664807021"/>
+        <p14:creationId xmlns:p14="http://schemas.microsoft.com/office/powerpoint/2010/main" val="1379623690"/>
       </p:ext>
     </p:extLst>
   </p:cSld>
@@ -7705,7 +7705,7 @@
           <p:cNvPr id="2" name="Rectangle 1">
             <a:extLst xmlns:a="http://schemas.openxmlformats.org/drawingml/2006/main">
               <a:ext uri="{FF2B5EF4-FFF2-40B4-BE49-F238E27FC236}">
-                <a16:creationId xmlns:a16="http://schemas.microsoft.com/office/drawing/2014/main" id="{9FB69427-F37F-4485-91D3-E07BD3970B0B}"/>
+                <a16:creationId xmlns:a16="http://schemas.microsoft.com/office/drawing/2014/main" id="{ACA795BE-E241-46A6-A95C-16DD0803E379}"/>
               </a:ext>
             </a:extLst>
           </p:cNvPr>
@@ -7758,7 +7758,7 @@
           <p:cNvPr id="3" name="Rectangle 2">
             <a:extLst xmlns:a="http://schemas.openxmlformats.org/drawingml/2006/main">
               <a:ext uri="{FF2B5EF4-FFF2-40B4-BE49-F238E27FC236}">
-                <a16:creationId xmlns:a16="http://schemas.microsoft.com/office/drawing/2014/main" id="{58DD3E3D-CDF8-4FFE-BA16-EFDEECBED58A}"/>
+                <a16:creationId xmlns:a16="http://schemas.microsoft.com/office/drawing/2014/main" id="{AB3FA44D-8CD9-4118-932A-157CFA1337CC}"/>
               </a:ext>
             </a:extLst>
           </p:cNvPr>
@@ -7811,7 +7811,7 @@
           <p:cNvPr id="4" name="Rectangle 3">
             <a:extLst xmlns:a="http://schemas.openxmlformats.org/drawingml/2006/main">
               <a:ext uri="{FF2B5EF4-FFF2-40B4-BE49-F238E27FC236}">
-                <a16:creationId xmlns:a16="http://schemas.microsoft.com/office/drawing/2014/main" id="{DAD32B2E-4A88-4FD6-B17A-32DCFBBE5969}"/>
+                <a16:creationId xmlns:a16="http://schemas.microsoft.com/office/drawing/2014/main" id="{FB3C17F1-9998-45A1-B37F-8A9C84023F96}"/>
               </a:ext>
             </a:extLst>
           </p:cNvPr>
@@ -7864,7 +7864,7 @@
           <p:cNvPr id="5" name="TextBox 4">
             <a:extLst xmlns:a="http://schemas.openxmlformats.org/drawingml/2006/main">
               <a:ext uri="{FF2B5EF4-FFF2-40B4-BE49-F238E27FC236}">
-                <a16:creationId xmlns:a16="http://schemas.microsoft.com/office/drawing/2014/main" id="{B17C2597-7D19-42C5-9EBF-7CAA367F5033}"/>
+                <a16:creationId xmlns:a16="http://schemas.microsoft.com/office/drawing/2014/main" id="{D411869D-BAFA-448A-9A66-A8DBA0E34C07}"/>
               </a:ext>
             </a:extLst>
           </p:cNvPr>
@@ -7927,7 +7927,7 @@
           <p:cNvPr id="6" name="Rounded Rectangle 5">
             <a:extLst xmlns:a="http://schemas.openxmlformats.org/drawingml/2006/main">
               <a:ext uri="{FF2B5EF4-FFF2-40B4-BE49-F238E27FC236}">
-                <a16:creationId xmlns:a16="http://schemas.microsoft.com/office/drawing/2014/main" id="{7766B36E-7B58-48DF-9BD3-8CFB9B58A028}"/>
+                <a16:creationId xmlns:a16="http://schemas.microsoft.com/office/drawing/2014/main" id="{DFB18748-FC55-431B-9C29-0EFB2989B9AF}"/>
               </a:ext>
             </a:extLst>
           </p:cNvPr>
@@ -7982,7 +7982,7 @@
           <p:cNvPr id="7" name="TextBox 6">
             <a:extLst xmlns:a="http://schemas.openxmlformats.org/drawingml/2006/main">
               <a:ext uri="{FF2B5EF4-FFF2-40B4-BE49-F238E27FC236}">
-                <a16:creationId xmlns:a16="http://schemas.microsoft.com/office/drawing/2014/main" id="{6C9A2DAB-6AD2-4B39-8F16-462CCC83F459}"/>
+                <a16:creationId xmlns:a16="http://schemas.microsoft.com/office/drawing/2014/main" id="{ED7B7ECF-FCD5-4F64-ABDC-C477AE0672E8}"/>
               </a:ext>
             </a:extLst>
           </p:cNvPr>
@@ -8105,7 +8105,7 @@
           <p:cNvPr id="8" name="Rounded Rectangle 7">
             <a:extLst xmlns:a="http://schemas.openxmlformats.org/drawingml/2006/main">
               <a:ext uri="{FF2B5EF4-FFF2-40B4-BE49-F238E27FC236}">
-                <a16:creationId xmlns:a16="http://schemas.microsoft.com/office/drawing/2014/main" id="{DF03DE50-51FD-4BC0-86F9-98A14E989FEF}"/>
+                <a16:creationId xmlns:a16="http://schemas.microsoft.com/office/drawing/2014/main" id="{D51C0D9C-BA24-4223-A825-A6C4F73571F5}"/>
               </a:ext>
             </a:extLst>
           </p:cNvPr>
@@ -8160,7 +8160,7 @@
           <p:cNvPr id="9" name="TextBox 8">
             <a:extLst xmlns:a="http://schemas.openxmlformats.org/drawingml/2006/main">
               <a:ext uri="{FF2B5EF4-FFF2-40B4-BE49-F238E27FC236}">
-                <a16:creationId xmlns:a16="http://schemas.microsoft.com/office/drawing/2014/main" id="{7DA85F15-E398-4C81-BD57-6FBC40DEC217}"/>
+                <a16:creationId xmlns:a16="http://schemas.microsoft.com/office/drawing/2014/main" id="{B79350EC-6311-47E5-A746-DE0681D431AA}"/>
               </a:ext>
             </a:extLst>
           </p:cNvPr>
@@ -8302,7 +8302,7 @@
           <p:cNvPr id="10" name="Rounded Rectangle 9">
             <a:extLst xmlns:a="http://schemas.openxmlformats.org/drawingml/2006/main">
               <a:ext uri="{FF2B5EF4-FFF2-40B4-BE49-F238E27FC236}">
-                <a16:creationId xmlns:a16="http://schemas.microsoft.com/office/drawing/2014/main" id="{5AF6C990-24B4-4C65-948A-69E420673CF2}"/>
+                <a16:creationId xmlns:a16="http://schemas.microsoft.com/office/drawing/2014/main" id="{D35160D4-940D-4639-B780-243E0D8CF1FC}"/>
               </a:ext>
             </a:extLst>
           </p:cNvPr>
@@ -8357,7 +8357,7 @@
           <p:cNvPr id="11" name="TextBox 10">
             <a:extLst xmlns:a="http://schemas.openxmlformats.org/drawingml/2006/main">
               <a:ext uri="{FF2B5EF4-FFF2-40B4-BE49-F238E27FC236}">
-                <a16:creationId xmlns:a16="http://schemas.microsoft.com/office/drawing/2014/main" id="{1015CD2E-AD34-4E35-A7E8-3089F9B1B656}"/>
+                <a16:creationId xmlns:a16="http://schemas.microsoft.com/office/drawing/2014/main" id="{4081F1EB-BFFB-43FD-91EB-F535DF6D55B3}"/>
               </a:ext>
             </a:extLst>
           </p:cNvPr>
@@ -8459,7 +8459,7 @@
     </p:spTree>
     <p:extLst>
       <p:ext uri="{BB962C8B-B14F-4D97-AF65-F5344CB8AC3E}">
-        <p14:creationId xmlns:p14="http://schemas.microsoft.com/office/powerpoint/2010/main" val="805215013"/>
+        <p14:creationId xmlns:p14="http://schemas.microsoft.com/office/powerpoint/2010/main" val="69725368"/>
       </p:ext>
     </p:extLst>
   </p:cSld>
@@ -8483,7 +8483,7 @@
           <p:cNvPr id="2" name="Rectangle 1">
             <a:extLst xmlns:a="http://schemas.openxmlformats.org/drawingml/2006/main">
               <a:ext uri="{FF2B5EF4-FFF2-40B4-BE49-F238E27FC236}">
-                <a16:creationId xmlns:a16="http://schemas.microsoft.com/office/drawing/2014/main" id="{CC927386-46EB-4707-8879-A57C3AF262A4}"/>
+                <a16:creationId xmlns:a16="http://schemas.microsoft.com/office/drawing/2014/main" id="{807A5DEC-4105-4256-89A0-9AA027AD728B}"/>
               </a:ext>
             </a:extLst>
           </p:cNvPr>
@@ -8536,7 +8536,7 @@
           <p:cNvPr id="3" name="Rectangle 2">
             <a:extLst xmlns:a="http://schemas.openxmlformats.org/drawingml/2006/main">
               <a:ext uri="{FF2B5EF4-FFF2-40B4-BE49-F238E27FC236}">
-                <a16:creationId xmlns:a16="http://schemas.microsoft.com/office/drawing/2014/main" id="{A42D7A3D-7BB3-45DD-83A0-08C6483429C5}"/>
+                <a16:creationId xmlns:a16="http://schemas.microsoft.com/office/drawing/2014/main" id="{C9249182-2BD9-4955-8D22-A06F98F3CC47}"/>
               </a:ext>
             </a:extLst>
           </p:cNvPr>
@@ -8589,7 +8589,7 @@
           <p:cNvPr id="4" name="Rectangle 3">
             <a:extLst xmlns:a="http://schemas.openxmlformats.org/drawingml/2006/main">
               <a:ext uri="{FF2B5EF4-FFF2-40B4-BE49-F238E27FC236}">
-                <a16:creationId xmlns:a16="http://schemas.microsoft.com/office/drawing/2014/main" id="{A9581115-B5EF-43ED-A7ED-EAD8ADEF35DE}"/>
+                <a16:creationId xmlns:a16="http://schemas.microsoft.com/office/drawing/2014/main" id="{4055747E-B363-4A26-A2D8-7867298C45CC}"/>
               </a:ext>
             </a:extLst>
           </p:cNvPr>
@@ -8642,7 +8642,7 @@
           <p:cNvPr id="5" name="TextBox 4">
             <a:extLst xmlns:a="http://schemas.openxmlformats.org/drawingml/2006/main">
               <a:ext uri="{FF2B5EF4-FFF2-40B4-BE49-F238E27FC236}">
-                <a16:creationId xmlns:a16="http://schemas.microsoft.com/office/drawing/2014/main" id="{D065CAD9-27B1-49AB-B459-DD61A7FE1020}"/>
+                <a16:creationId xmlns:a16="http://schemas.microsoft.com/office/drawing/2014/main" id="{0B17AF7A-12D6-42A5-8797-AD167445FFDF}"/>
               </a:ext>
             </a:extLst>
           </p:cNvPr>
@@ -8705,7 +8705,7 @@
           <p:cNvPr id="6" name="Rounded Rectangle 5">
             <a:extLst xmlns:a="http://schemas.openxmlformats.org/drawingml/2006/main">
               <a:ext uri="{FF2B5EF4-FFF2-40B4-BE49-F238E27FC236}">
-                <a16:creationId xmlns:a16="http://schemas.microsoft.com/office/drawing/2014/main" id="{F9910C9A-5BC3-4B90-AFF0-C6F7431D456B}"/>
+                <a16:creationId xmlns:a16="http://schemas.microsoft.com/office/drawing/2014/main" id="{EAA0C771-1860-4683-8345-301BBDFD9845}"/>
               </a:ext>
             </a:extLst>
           </p:cNvPr>
@@ -8760,7 +8760,7 @@
           <p:cNvPr id="7" name="TextBox 6">
             <a:extLst xmlns:a="http://schemas.openxmlformats.org/drawingml/2006/main">
               <a:ext uri="{FF2B5EF4-FFF2-40B4-BE49-F238E27FC236}">
-                <a16:creationId xmlns:a16="http://schemas.microsoft.com/office/drawing/2014/main" id="{030E5DFB-0C54-447B-AA15-7C7D98608FC0}"/>
+                <a16:creationId xmlns:a16="http://schemas.microsoft.com/office/drawing/2014/main" id="{024FFE8C-7998-46F1-B833-F55EF0AC0A7A}"/>
               </a:ext>
             </a:extLst>
           </p:cNvPr>
@@ -8940,7 +8940,7 @@
           <p:cNvPr id="8" name="Rounded Rectangle 7">
             <a:extLst xmlns:a="http://schemas.openxmlformats.org/drawingml/2006/main">
               <a:ext uri="{FF2B5EF4-FFF2-40B4-BE49-F238E27FC236}">
-                <a16:creationId xmlns:a16="http://schemas.microsoft.com/office/drawing/2014/main" id="{AABEA2ED-05DA-456B-850A-18CFBA817DDC}"/>
+                <a16:creationId xmlns:a16="http://schemas.microsoft.com/office/drawing/2014/main" id="{3CC2E2A6-55F2-48C7-A355-D16E737340B4}"/>
               </a:ext>
             </a:extLst>
           </p:cNvPr>
@@ -8995,7 +8995,7 @@
           <p:cNvPr id="9" name="TextBox 8">
             <a:extLst xmlns:a="http://schemas.openxmlformats.org/drawingml/2006/main">
               <a:ext uri="{FF2B5EF4-FFF2-40B4-BE49-F238E27FC236}">
-                <a16:creationId xmlns:a16="http://schemas.microsoft.com/office/drawing/2014/main" id="{6F60C486-C88D-40E9-8E93-23762C33F6A8}"/>
+                <a16:creationId xmlns:a16="http://schemas.microsoft.com/office/drawing/2014/main" id="{BDD24B2E-A010-4941-823D-BA071175C22F}"/>
               </a:ext>
             </a:extLst>
           </p:cNvPr>
@@ -9154,7 +9154,7 @@
     </p:spTree>
     <p:extLst>
       <p:ext uri="{BB962C8B-B14F-4D97-AF65-F5344CB8AC3E}">
-        <p14:creationId xmlns:p14="http://schemas.microsoft.com/office/powerpoint/2010/main" val="1341019022"/>
+        <p14:creationId xmlns:p14="http://schemas.microsoft.com/office/powerpoint/2010/main" val="1292470837"/>
       </p:ext>
     </p:extLst>
   </p:cSld>
@@ -9178,7 +9178,7 @@
           <p:cNvPr id="2" name="Rectangle 1">
             <a:extLst xmlns:a="http://schemas.openxmlformats.org/drawingml/2006/main">
               <a:ext uri="{FF2B5EF4-FFF2-40B4-BE49-F238E27FC236}">
-                <a16:creationId xmlns:a16="http://schemas.microsoft.com/office/drawing/2014/main" id="{3C6897AD-8849-45BB-BD1F-41D9EFB98F0F}"/>
+                <a16:creationId xmlns:a16="http://schemas.microsoft.com/office/drawing/2014/main" id="{6D2B0BE9-D4E8-4893-A0C1-DC575D4BD09A}"/>
               </a:ext>
             </a:extLst>
           </p:cNvPr>
@@ -9231,7 +9231,7 @@
           <p:cNvPr id="3" name="Rectangle 2">
             <a:extLst xmlns:a="http://schemas.openxmlformats.org/drawingml/2006/main">
               <a:ext uri="{FF2B5EF4-FFF2-40B4-BE49-F238E27FC236}">
-                <a16:creationId xmlns:a16="http://schemas.microsoft.com/office/drawing/2014/main" id="{2B034FBE-7944-4396-8934-A7A87B060843}"/>
+                <a16:creationId xmlns:a16="http://schemas.microsoft.com/office/drawing/2014/main" id="{90E7F9A9-6135-4010-8D9E-79B7C395AAC8}"/>
               </a:ext>
             </a:extLst>
           </p:cNvPr>
@@ -9284,7 +9284,7 @@
           <p:cNvPr id="4" name="Rectangle 3">
             <a:extLst xmlns:a="http://schemas.openxmlformats.org/drawingml/2006/main">
               <a:ext uri="{FF2B5EF4-FFF2-40B4-BE49-F238E27FC236}">
-                <a16:creationId xmlns:a16="http://schemas.microsoft.com/office/drawing/2014/main" id="{51F0EC3D-7B93-4560-9C03-F839C1382630}"/>
+                <a16:creationId xmlns:a16="http://schemas.microsoft.com/office/drawing/2014/main" id="{E01022DF-2A09-45E5-BE77-DBD8E8034336}"/>
               </a:ext>
             </a:extLst>
           </p:cNvPr>
@@ -9337,7 +9337,7 @@
           <p:cNvPr id="5" name="TextBox 4">
             <a:extLst xmlns:a="http://schemas.openxmlformats.org/drawingml/2006/main">
               <a:ext uri="{FF2B5EF4-FFF2-40B4-BE49-F238E27FC236}">
-                <a16:creationId xmlns:a16="http://schemas.microsoft.com/office/drawing/2014/main" id="{4C8FA24A-BACB-44D6-B3D7-32F64EEAA80B}"/>
+                <a16:creationId xmlns:a16="http://schemas.microsoft.com/office/drawing/2014/main" id="{3EDCE2A6-F034-4439-A241-A588C4FC23D8}"/>
               </a:ext>
             </a:extLst>
           </p:cNvPr>
@@ -9400,7 +9400,7 @@
           <p:cNvPr id="6" name="Rounded Rectangle 5">
             <a:extLst xmlns:a="http://schemas.openxmlformats.org/drawingml/2006/main">
               <a:ext uri="{FF2B5EF4-FFF2-40B4-BE49-F238E27FC236}">
-                <a16:creationId xmlns:a16="http://schemas.microsoft.com/office/drawing/2014/main" id="{95BFA2E8-BF06-406B-BDB0-C82BFC3D2372}"/>
+                <a16:creationId xmlns:a16="http://schemas.microsoft.com/office/drawing/2014/main" id="{03B4A867-EE22-42C4-949A-C767D99AAA4C}"/>
               </a:ext>
             </a:extLst>
           </p:cNvPr>
@@ -9455,7 +9455,7 @@
           <p:cNvPr id="7" name="TextBox 6">
             <a:extLst xmlns:a="http://schemas.openxmlformats.org/drawingml/2006/main">
               <a:ext uri="{FF2B5EF4-FFF2-40B4-BE49-F238E27FC236}">
-                <a16:creationId xmlns:a16="http://schemas.microsoft.com/office/drawing/2014/main" id="{804E77B0-ABBF-4924-BBEB-23C4F60D230D}"/>
+                <a16:creationId xmlns:a16="http://schemas.microsoft.com/office/drawing/2014/main" id="{3E221609-8DC5-4069-A6D7-65B79173458F}"/>
               </a:ext>
             </a:extLst>
           </p:cNvPr>
@@ -9663,7 +9663,7 @@
               </a:defRPr>
             </a:pPr>
             <a:r>
-              <a:t>•  Lưu vết đầy đủ (D1: RECORD_ONLY): Lưu toàn văn phản hồi thô phục vụ kiểm toán độc lập.</a:t>
+              <a:t>•  Lưu vết an toàn (D1: RECORD_ONLY): Lưu phản hồi thô phục vụ kiểm toán độc lập; toàn bộ thông tin đăng nhập và bí mật nhạy cảm đã được làm sạch / khử khuẩn (credentials and sensitive secrets sanitized/redacted).</a:t>
             </a:r>
           </a:p>
         </p:txBody>
@@ -9673,7 +9673,7 @@
           <p:cNvPr id="8" name="Rounded Rectangle 7">
             <a:extLst xmlns:a="http://schemas.openxmlformats.org/drawingml/2006/main">
               <a:ext uri="{FF2B5EF4-FFF2-40B4-BE49-F238E27FC236}">
-                <a16:creationId xmlns:a16="http://schemas.microsoft.com/office/drawing/2014/main" id="{C004314A-F7AD-4CB0-94BA-AD0D6479D783}"/>
+                <a16:creationId xmlns:a16="http://schemas.microsoft.com/office/drawing/2014/main" id="{F4B96CD1-2DDD-425C-A4D0-19A746C1F3AB}"/>
               </a:ext>
             </a:extLst>
           </p:cNvPr>
@@ -9728,7 +9728,7 @@
           <p:cNvPr id="9" name="TextBox 8">
             <a:extLst xmlns:a="http://schemas.openxmlformats.org/drawingml/2006/main">
               <a:ext uri="{FF2B5EF4-FFF2-40B4-BE49-F238E27FC236}">
-                <a16:creationId xmlns:a16="http://schemas.microsoft.com/office/drawing/2014/main" id="{3346AB71-4D36-4916-B9FC-8AB017C69ED5}"/>
+                <a16:creationId xmlns:a16="http://schemas.microsoft.com/office/drawing/2014/main" id="{F29BC204-275B-45C9-B46F-CA83548A8566}"/>
               </a:ext>
             </a:extLst>
           </p:cNvPr>
@@ -9963,7 +9963,7 @@
     </p:spTree>
     <p:extLst>
       <p:ext uri="{BB962C8B-B14F-4D97-AF65-F5344CB8AC3E}">
-        <p14:creationId xmlns:p14="http://schemas.microsoft.com/office/powerpoint/2010/main" val="606018695"/>
+        <p14:creationId xmlns:p14="http://schemas.microsoft.com/office/powerpoint/2010/main" val="879682298"/>
       </p:ext>
     </p:extLst>
   </p:cSld>
@@ -9987,7 +9987,7 @@
           <p:cNvPr id="2" name="Rectangle 1">
             <a:extLst xmlns:a="http://schemas.openxmlformats.org/drawingml/2006/main">
               <a:ext uri="{FF2B5EF4-FFF2-40B4-BE49-F238E27FC236}">
-                <a16:creationId xmlns:a16="http://schemas.microsoft.com/office/drawing/2014/main" id="{C5B102A8-5D3A-40B7-BE22-CB9C511CAA5F}"/>
+                <a16:creationId xmlns:a16="http://schemas.microsoft.com/office/drawing/2014/main" id="{E86AF65E-95D5-48FE-95E9-A68C2D392529}"/>
               </a:ext>
             </a:extLst>
           </p:cNvPr>
@@ -10040,7 +10040,7 @@
           <p:cNvPr id="3" name="Rectangle 2">
             <a:extLst xmlns:a="http://schemas.openxmlformats.org/drawingml/2006/main">
               <a:ext uri="{FF2B5EF4-FFF2-40B4-BE49-F238E27FC236}">
-                <a16:creationId xmlns:a16="http://schemas.microsoft.com/office/drawing/2014/main" id="{184BA6EF-FB3F-474A-BC02-EC7620FCE8E9}"/>
+                <a16:creationId xmlns:a16="http://schemas.microsoft.com/office/drawing/2014/main" id="{F4DBB4A8-18CB-4DF8-BB23-D01FDC64E6C2}"/>
               </a:ext>
             </a:extLst>
           </p:cNvPr>
@@ -10093,7 +10093,7 @@
           <p:cNvPr id="4" name="Rectangle 3">
             <a:extLst xmlns:a="http://schemas.openxmlformats.org/drawingml/2006/main">
               <a:ext uri="{FF2B5EF4-FFF2-40B4-BE49-F238E27FC236}">
-                <a16:creationId xmlns:a16="http://schemas.microsoft.com/office/drawing/2014/main" id="{4C7DCB61-6B99-425A-AB0A-DBAB40DC191E}"/>
+                <a16:creationId xmlns:a16="http://schemas.microsoft.com/office/drawing/2014/main" id="{FC02808A-3F3A-43CB-A3FB-254F6A65C366}"/>
               </a:ext>
             </a:extLst>
           </p:cNvPr>
@@ -10146,7 +10146,7 @@
           <p:cNvPr id="5" name="TextBox 4">
             <a:extLst xmlns:a="http://schemas.openxmlformats.org/drawingml/2006/main">
               <a:ext uri="{FF2B5EF4-FFF2-40B4-BE49-F238E27FC236}">
-                <a16:creationId xmlns:a16="http://schemas.microsoft.com/office/drawing/2014/main" id="{C037C206-D888-4A8D-A9D5-0B4D87BA39A2}"/>
+                <a16:creationId xmlns:a16="http://schemas.microsoft.com/office/drawing/2014/main" id="{A53CCD2F-E0A6-48EA-B3B6-FCBA21F1A69B}"/>
               </a:ext>
             </a:extLst>
           </p:cNvPr>
@@ -10209,7 +10209,7 @@
           <p:cNvPr id="6" name="Rounded Rectangle 5">
             <a:extLst xmlns:a="http://schemas.openxmlformats.org/drawingml/2006/main">
               <a:ext uri="{FF2B5EF4-FFF2-40B4-BE49-F238E27FC236}">
-                <a16:creationId xmlns:a16="http://schemas.microsoft.com/office/drawing/2014/main" id="{17A68180-CA41-4A4C-B662-5E04C6F88545}"/>
+                <a16:creationId xmlns:a16="http://schemas.microsoft.com/office/drawing/2014/main" id="{947EF817-95F5-4678-9C31-3B273DB8C966}"/>
               </a:ext>
             </a:extLst>
           </p:cNvPr>
@@ -10264,7 +10264,7 @@
           <p:cNvPr id="7" name="TextBox 6">
             <a:extLst xmlns:a="http://schemas.openxmlformats.org/drawingml/2006/main">
               <a:ext uri="{FF2B5EF4-FFF2-40B4-BE49-F238E27FC236}">
-                <a16:creationId xmlns:a16="http://schemas.microsoft.com/office/drawing/2014/main" id="{776C911C-6AC1-4988-8202-882B9FCA6AA2}"/>
+                <a16:creationId xmlns:a16="http://schemas.microsoft.com/office/drawing/2014/main" id="{3D7E0AA4-4DAA-4714-9E27-354BD39ABFF3}"/>
               </a:ext>
             </a:extLst>
           </p:cNvPr>
@@ -10647,7 +10647,7 @@
           <p:nvPr/>
         </p:nvPicPr>
         <p:blipFill>
-          <a:blip xmlns:r="http://schemas.openxmlformats.org/officeDocument/2006/relationships" xmlns:a="http://schemas.openxmlformats.org/drawingml/2006/main" r:embed="R51ce7eb0837f45e8"/>
+          <a:blip xmlns:r="http://schemas.openxmlformats.org/officeDocument/2006/relationships" xmlns:a="http://schemas.openxmlformats.org/drawingml/2006/main" r:embed="Rb458d6a1250c4adf"/>
           <a:stretch xmlns:a="http://schemas.openxmlformats.org/drawingml/2006/main">
             <a:fillRect l="0" t="0" r="0" b="0"/>
           </a:stretch>
@@ -10667,7 +10667,7 @@
           <p:cNvPr id="9" name="Rounded Rectangle 8">
             <a:extLst xmlns:a="http://schemas.openxmlformats.org/drawingml/2006/main">
               <a:ext uri="{FF2B5EF4-FFF2-40B4-BE49-F238E27FC236}">
-                <a16:creationId xmlns:a16="http://schemas.microsoft.com/office/drawing/2014/main" id="{F15D4490-0FE4-40EE-8442-0A95059B1247}"/>
+                <a16:creationId xmlns:a16="http://schemas.microsoft.com/office/drawing/2014/main" id="{7D4A5D72-B1C8-4DF6-A87B-4F25769AEF03}"/>
               </a:ext>
             </a:extLst>
           </p:cNvPr>
@@ -10722,7 +10722,7 @@
           <p:cNvPr id="10" name="TextBox 9">
             <a:extLst xmlns:a="http://schemas.openxmlformats.org/drawingml/2006/main">
               <a:ext uri="{FF2B5EF4-FFF2-40B4-BE49-F238E27FC236}">
-                <a16:creationId xmlns:a16="http://schemas.microsoft.com/office/drawing/2014/main" id="{7E2590B2-7FF0-4FE8-9E1B-E4B21D6BC5A9}"/>
+                <a16:creationId xmlns:a16="http://schemas.microsoft.com/office/drawing/2014/main" id="{4DF0C028-CD25-445E-9736-3A21CBBB23D6}"/>
               </a:ext>
             </a:extLst>
           </p:cNvPr>
@@ -10808,7 +10808,7 @@
     </p:spTree>
     <p:extLst>
       <p:ext uri="{BB962C8B-B14F-4D97-AF65-F5344CB8AC3E}">
-        <p14:creationId xmlns:p14="http://schemas.microsoft.com/office/powerpoint/2010/main" val="1813359118"/>
+        <p14:creationId xmlns:p14="http://schemas.microsoft.com/office/powerpoint/2010/main" val="286866128"/>
       </p:ext>
     </p:extLst>
   </p:cSld>
@@ -10832,7 +10832,7 @@
           <p:cNvPr id="2" name="Rectangle 1">
             <a:extLst xmlns:a="http://schemas.openxmlformats.org/drawingml/2006/main">
               <a:ext uri="{FF2B5EF4-FFF2-40B4-BE49-F238E27FC236}">
-                <a16:creationId xmlns:a16="http://schemas.microsoft.com/office/drawing/2014/main" id="{1947AE4E-1230-41F0-A732-B780141E38B6}"/>
+                <a16:creationId xmlns:a16="http://schemas.microsoft.com/office/drawing/2014/main" id="{7BA7B7DA-4C17-4D6E-851B-8431FDD16FBF}"/>
               </a:ext>
             </a:extLst>
           </p:cNvPr>
@@ -10885,7 +10885,7 @@
           <p:cNvPr id="3" name="Rectangle 2">
             <a:extLst xmlns:a="http://schemas.openxmlformats.org/drawingml/2006/main">
               <a:ext uri="{FF2B5EF4-FFF2-40B4-BE49-F238E27FC236}">
-                <a16:creationId xmlns:a16="http://schemas.microsoft.com/office/drawing/2014/main" id="{0D21D111-659E-45F9-8A7D-09369F1E0A13}"/>
+                <a16:creationId xmlns:a16="http://schemas.microsoft.com/office/drawing/2014/main" id="{CA8947FF-BE31-4883-A97C-DC7B68C0855F}"/>
               </a:ext>
             </a:extLst>
           </p:cNvPr>
@@ -10938,7 +10938,7 @@
           <p:cNvPr id="4" name="Rectangle 3">
             <a:extLst xmlns:a="http://schemas.openxmlformats.org/drawingml/2006/main">
               <a:ext uri="{FF2B5EF4-FFF2-40B4-BE49-F238E27FC236}">
-                <a16:creationId xmlns:a16="http://schemas.microsoft.com/office/drawing/2014/main" id="{1269249E-16B5-46A5-A10F-048F4D073C87}"/>
+                <a16:creationId xmlns:a16="http://schemas.microsoft.com/office/drawing/2014/main" id="{7B6EAAE2-C7A1-4308-9F1D-3F5B984EC749}"/>
               </a:ext>
             </a:extLst>
           </p:cNvPr>
@@ -10991,7 +10991,7 @@
           <p:cNvPr id="5" name="TextBox 4">
             <a:extLst xmlns:a="http://schemas.openxmlformats.org/drawingml/2006/main">
               <a:ext uri="{FF2B5EF4-FFF2-40B4-BE49-F238E27FC236}">
-                <a16:creationId xmlns:a16="http://schemas.microsoft.com/office/drawing/2014/main" id="{0D2E2C8F-AE56-4508-BC4E-9196EC9392F5}"/>
+                <a16:creationId xmlns:a16="http://schemas.microsoft.com/office/drawing/2014/main" id="{FDC6BCF2-7DCD-4042-AEF5-8FDCDFD97D29}"/>
               </a:ext>
             </a:extLst>
           </p:cNvPr>
@@ -11054,7 +11054,7 @@
           <p:cNvPr id="6" name="Rounded Rectangle 5">
             <a:extLst xmlns:a="http://schemas.openxmlformats.org/drawingml/2006/main">
               <a:ext uri="{FF2B5EF4-FFF2-40B4-BE49-F238E27FC236}">
-                <a16:creationId xmlns:a16="http://schemas.microsoft.com/office/drawing/2014/main" id="{41BDD51A-C34B-4352-A973-593F8B6C772A}"/>
+                <a16:creationId xmlns:a16="http://schemas.microsoft.com/office/drawing/2014/main" id="{8A5BA445-82C0-47E6-B944-3C78F0C31AB4}"/>
               </a:ext>
             </a:extLst>
           </p:cNvPr>
@@ -11109,7 +11109,7 @@
           <p:cNvPr id="7" name="TextBox 6">
             <a:extLst xmlns:a="http://schemas.openxmlformats.org/drawingml/2006/main">
               <a:ext uri="{FF2B5EF4-FFF2-40B4-BE49-F238E27FC236}">
-                <a16:creationId xmlns:a16="http://schemas.microsoft.com/office/drawing/2014/main" id="{37D35F9C-463A-4565-A504-4AC8A9BFEC6C}"/>
+                <a16:creationId xmlns:a16="http://schemas.microsoft.com/office/drawing/2014/main" id="{F9C06B8C-D4BD-4506-AB89-2254EF8BE1A1}"/>
               </a:ext>
             </a:extLst>
           </p:cNvPr>
@@ -11346,7 +11346,7 @@
           <p:cNvPr id="8" name="Rounded Rectangle 7">
             <a:extLst xmlns:a="http://schemas.openxmlformats.org/drawingml/2006/main">
               <a:ext uri="{FF2B5EF4-FFF2-40B4-BE49-F238E27FC236}">
-                <a16:creationId xmlns:a16="http://schemas.microsoft.com/office/drawing/2014/main" id="{E8C290BA-7EF9-4F75-AE6C-27EDC417A9CD}"/>
+                <a16:creationId xmlns:a16="http://schemas.microsoft.com/office/drawing/2014/main" id="{B7D42736-A82B-4A72-B746-02B26A4F9D15}"/>
               </a:ext>
             </a:extLst>
           </p:cNvPr>
@@ -11401,7 +11401,7 @@
           <p:cNvPr id="9" name="TextBox 8">
             <a:extLst xmlns:a="http://schemas.openxmlformats.org/drawingml/2006/main">
               <a:ext uri="{FF2B5EF4-FFF2-40B4-BE49-F238E27FC236}">
-                <a16:creationId xmlns:a16="http://schemas.microsoft.com/office/drawing/2014/main" id="{EBBC8B63-7B37-4126-81F0-9654272C80B6}"/>
+                <a16:creationId xmlns:a16="http://schemas.microsoft.com/office/drawing/2014/main" id="{6BD4EC4E-9ED5-4E27-9CDE-6A281F93C6B5}"/>
               </a:ext>
             </a:extLst>
           </p:cNvPr>
@@ -11606,7 +11606,7 @@
     </p:spTree>
     <p:extLst>
       <p:ext uri="{BB962C8B-B14F-4D97-AF65-F5344CB8AC3E}">
-        <p14:creationId xmlns:p14="http://schemas.microsoft.com/office/powerpoint/2010/main" val="1989449084"/>
+        <p14:creationId xmlns:p14="http://schemas.microsoft.com/office/powerpoint/2010/main" val="1355867882"/>
       </p:ext>
     </p:extLst>
   </p:cSld>
@@ -11630,7 +11630,7 @@
           <p:cNvPr id="2" name="Rectangle 1">
             <a:extLst xmlns:a="http://schemas.openxmlformats.org/drawingml/2006/main">
               <a:ext uri="{FF2B5EF4-FFF2-40B4-BE49-F238E27FC236}">
-                <a16:creationId xmlns:a16="http://schemas.microsoft.com/office/drawing/2014/main" id="{41C5BC57-2C3E-402D-B37E-078904DCEC01}"/>
+                <a16:creationId xmlns:a16="http://schemas.microsoft.com/office/drawing/2014/main" id="{D16BBA1C-E8CD-4C63-BAE6-101EE3B73F24}"/>
               </a:ext>
             </a:extLst>
           </p:cNvPr>
@@ -11683,7 +11683,7 @@
           <p:cNvPr id="3" name="Rectangle 2">
             <a:extLst xmlns:a="http://schemas.openxmlformats.org/drawingml/2006/main">
               <a:ext uri="{FF2B5EF4-FFF2-40B4-BE49-F238E27FC236}">
-                <a16:creationId xmlns:a16="http://schemas.microsoft.com/office/drawing/2014/main" id="{04E0B226-0CD6-4430-AA63-3CB66CDABB72}"/>
+                <a16:creationId xmlns:a16="http://schemas.microsoft.com/office/drawing/2014/main" id="{37B01FA6-B8B3-4A25-8411-4D0BB455BB0D}"/>
               </a:ext>
             </a:extLst>
           </p:cNvPr>
@@ -11736,7 +11736,7 @@
           <p:cNvPr id="4" name="Rectangle 3">
             <a:extLst xmlns:a="http://schemas.openxmlformats.org/drawingml/2006/main">
               <a:ext uri="{FF2B5EF4-FFF2-40B4-BE49-F238E27FC236}">
-                <a16:creationId xmlns:a16="http://schemas.microsoft.com/office/drawing/2014/main" id="{A4B50E3E-AC5D-4724-B7C5-0EEEBB0E7312}"/>
+                <a16:creationId xmlns:a16="http://schemas.microsoft.com/office/drawing/2014/main" id="{DE1491BD-1654-4925-AE8E-AAFA97E90987}"/>
               </a:ext>
             </a:extLst>
           </p:cNvPr>
@@ -11789,7 +11789,7 @@
           <p:cNvPr id="5" name="TextBox 4">
             <a:extLst xmlns:a="http://schemas.openxmlformats.org/drawingml/2006/main">
               <a:ext uri="{FF2B5EF4-FFF2-40B4-BE49-F238E27FC236}">
-                <a16:creationId xmlns:a16="http://schemas.microsoft.com/office/drawing/2014/main" id="{E285465C-ED5C-413E-9E08-D1E6F877EE9A}"/>
+                <a16:creationId xmlns:a16="http://schemas.microsoft.com/office/drawing/2014/main" id="{3AADF7B4-7948-4708-884F-D7CA9BBAB47D}"/>
               </a:ext>
             </a:extLst>
           </p:cNvPr>
@@ -11852,7 +11852,7 @@
           <p:cNvPr id="6" name="Rounded Rectangle 5">
             <a:extLst xmlns:a="http://schemas.openxmlformats.org/drawingml/2006/main">
               <a:ext uri="{FF2B5EF4-FFF2-40B4-BE49-F238E27FC236}">
-                <a16:creationId xmlns:a16="http://schemas.microsoft.com/office/drawing/2014/main" id="{4FAD3C12-F334-45B2-9FEB-70E85D95F8DA}"/>
+                <a16:creationId xmlns:a16="http://schemas.microsoft.com/office/drawing/2014/main" id="{061AA687-3FE8-4DAA-A504-6E29F0EEBDC5}"/>
               </a:ext>
             </a:extLst>
           </p:cNvPr>
@@ -11907,7 +11907,7 @@
           <p:cNvPr id="7" name="TextBox 6">
             <a:extLst xmlns:a="http://schemas.openxmlformats.org/drawingml/2006/main">
               <a:ext uri="{FF2B5EF4-FFF2-40B4-BE49-F238E27FC236}">
-                <a16:creationId xmlns:a16="http://schemas.microsoft.com/office/drawing/2014/main" id="{E1E49BFA-F718-4795-8523-E99500107FB2}"/>
+                <a16:creationId xmlns:a16="http://schemas.microsoft.com/office/drawing/2014/main" id="{E8A21D1E-0C17-4300-AD79-A274BCDB0F6C}"/>
               </a:ext>
             </a:extLst>
           </p:cNvPr>
@@ -12030,7 +12030,7 @@
           <p:cNvPr id="8" name="Rounded Rectangle 7">
             <a:extLst xmlns:a="http://schemas.openxmlformats.org/drawingml/2006/main">
               <a:ext uri="{FF2B5EF4-FFF2-40B4-BE49-F238E27FC236}">
-                <a16:creationId xmlns:a16="http://schemas.microsoft.com/office/drawing/2014/main" id="{88513E2E-9E62-4826-B60F-C8A6B9F0F3DC}"/>
+                <a16:creationId xmlns:a16="http://schemas.microsoft.com/office/drawing/2014/main" id="{129C3BAD-5DA8-4B19-A160-A1ED6CC0A744}"/>
               </a:ext>
             </a:extLst>
           </p:cNvPr>
@@ -12085,7 +12085,7 @@
           <p:cNvPr id="9" name="TextBox 8">
             <a:extLst xmlns:a="http://schemas.openxmlformats.org/drawingml/2006/main">
               <a:ext uri="{FF2B5EF4-FFF2-40B4-BE49-F238E27FC236}">
-                <a16:creationId xmlns:a16="http://schemas.microsoft.com/office/drawing/2014/main" id="{AD5BC6FD-6A34-4909-8D09-C3C5C18FE5FB}"/>
+                <a16:creationId xmlns:a16="http://schemas.microsoft.com/office/drawing/2014/main" id="{AA98C956-425F-47C5-9A84-8D7A216694C9}"/>
               </a:ext>
             </a:extLst>
           </p:cNvPr>
@@ -12208,7 +12208,7 @@
           <p:cNvPr id="10" name="Rounded Rectangle 9">
             <a:extLst xmlns:a="http://schemas.openxmlformats.org/drawingml/2006/main">
               <a:ext uri="{FF2B5EF4-FFF2-40B4-BE49-F238E27FC236}">
-                <a16:creationId xmlns:a16="http://schemas.microsoft.com/office/drawing/2014/main" id="{5B7A8876-D4CB-4E8C-8314-AA5C04CAA864}"/>
+                <a16:creationId xmlns:a16="http://schemas.microsoft.com/office/drawing/2014/main" id="{A2372D3D-7C3D-4058-BE8E-A56377A3CE7F}"/>
               </a:ext>
             </a:extLst>
           </p:cNvPr>
@@ -12263,7 +12263,7 @@
           <p:cNvPr id="11" name="TextBox 10">
             <a:extLst xmlns:a="http://schemas.openxmlformats.org/drawingml/2006/main">
               <a:ext uri="{FF2B5EF4-FFF2-40B4-BE49-F238E27FC236}">
-                <a16:creationId xmlns:a16="http://schemas.microsoft.com/office/drawing/2014/main" id="{01930F37-AADC-496E-AA3B-29B9ECF6B555}"/>
+                <a16:creationId xmlns:a16="http://schemas.microsoft.com/office/drawing/2014/main" id="{C5144AD1-14BD-4091-87CE-39F6A57BB4BE}"/>
               </a:ext>
             </a:extLst>
           </p:cNvPr>
@@ -12578,7 +12578,7 @@
                 <a:ea typeface="Calibri"/>
                 <a:cs typeface="Calibri"/>
               </a:rPr>
-              <a:t>• 95% CI: no_rag=[0.3500, 0.6500], k1=[0.3600, 0.6600], k3=[0.3800, 0.6800], k5=[0.4100, 0.7100], k10=[0.4300, 0.7300]</a:t>
+              <a:t>• Absolute Accuracy 95% CIs: no_rag=[0.3500, 0.6500], k1=[0.3600, 0.6600], k3=[0.3800, 0.6800], k5=[0.4100, 0.7100], k10=[0.4300, 0.7300]</a:t>
             </a:r>
           </a:p>
           <a:p xmlns:a="http://schemas.openxmlformats.org/drawingml/2006/main">
@@ -12613,7 +12613,7 @@
     </p:spTree>
     <p:extLst>
       <p:ext uri="{BB962C8B-B14F-4D97-AF65-F5344CB8AC3E}">
-        <p14:creationId xmlns:p14="http://schemas.microsoft.com/office/powerpoint/2010/main" val="760224879"/>
+        <p14:creationId xmlns:p14="http://schemas.microsoft.com/office/powerpoint/2010/main" val="1273040915"/>
       </p:ext>
     </p:extLst>
   </p:cSld>
@@ -12637,7 +12637,7 @@
           <p:cNvPr id="2" name="Rectangle 1">
             <a:extLst xmlns:a="http://schemas.openxmlformats.org/drawingml/2006/main">
               <a:ext uri="{FF2B5EF4-FFF2-40B4-BE49-F238E27FC236}">
-                <a16:creationId xmlns:a16="http://schemas.microsoft.com/office/drawing/2014/main" id="{D4BBE0A4-9BE1-4CE8-86A8-48CAF75E9611}"/>
+                <a16:creationId xmlns:a16="http://schemas.microsoft.com/office/drawing/2014/main" id="{0FB5042B-D635-4EA3-ABEB-8931641C6D07}"/>
               </a:ext>
             </a:extLst>
           </p:cNvPr>
@@ -12690,7 +12690,7 @@
           <p:cNvPr id="3" name="Rectangle 2">
             <a:extLst xmlns:a="http://schemas.openxmlformats.org/drawingml/2006/main">
               <a:ext uri="{FF2B5EF4-FFF2-40B4-BE49-F238E27FC236}">
-                <a16:creationId xmlns:a16="http://schemas.microsoft.com/office/drawing/2014/main" id="{8FA2EA55-FEA6-44CF-9209-DFE1D6C5DBEB}"/>
+                <a16:creationId xmlns:a16="http://schemas.microsoft.com/office/drawing/2014/main" id="{AF1D906F-1904-445E-94F0-C9FCE269B4CA}"/>
               </a:ext>
             </a:extLst>
           </p:cNvPr>
@@ -12743,7 +12743,7 @@
           <p:cNvPr id="4" name="Rectangle 3">
             <a:extLst xmlns:a="http://schemas.openxmlformats.org/drawingml/2006/main">
               <a:ext uri="{FF2B5EF4-FFF2-40B4-BE49-F238E27FC236}">
-                <a16:creationId xmlns:a16="http://schemas.microsoft.com/office/drawing/2014/main" id="{5B4BF4B3-5BC1-4B45-8BDE-21FCD63A2AE8}"/>
+                <a16:creationId xmlns:a16="http://schemas.microsoft.com/office/drawing/2014/main" id="{081EB570-0F04-489F-9BF9-34D84167BC50}"/>
               </a:ext>
             </a:extLst>
           </p:cNvPr>
@@ -12796,7 +12796,7 @@
           <p:cNvPr id="5" name="TextBox 4">
             <a:extLst xmlns:a="http://schemas.openxmlformats.org/drawingml/2006/main">
               <a:ext uri="{FF2B5EF4-FFF2-40B4-BE49-F238E27FC236}">
-                <a16:creationId xmlns:a16="http://schemas.microsoft.com/office/drawing/2014/main" id="{FA59C0EE-C01D-4477-8A32-8FB797D757C8}"/>
+                <a16:creationId xmlns:a16="http://schemas.microsoft.com/office/drawing/2014/main" id="{47A5B0FD-B3F5-44AF-9E05-520584B7C01E}"/>
               </a:ext>
             </a:extLst>
           </p:cNvPr>
@@ -12859,7 +12859,7 @@
           <p:cNvPr id="6" name="Rounded Rectangle 5">
             <a:extLst xmlns:a="http://schemas.openxmlformats.org/drawingml/2006/main">
               <a:ext uri="{FF2B5EF4-FFF2-40B4-BE49-F238E27FC236}">
-                <a16:creationId xmlns:a16="http://schemas.microsoft.com/office/drawing/2014/main" id="{865806B6-5F21-4B24-ABB3-9E8227234575}"/>
+                <a16:creationId xmlns:a16="http://schemas.microsoft.com/office/drawing/2014/main" id="{BBF47052-4C4C-4D04-BA0F-34F75ADBB453}"/>
               </a:ext>
             </a:extLst>
           </p:cNvPr>
@@ -12914,7 +12914,7 @@
           <p:cNvPr id="7" name="TextBox 6">
             <a:extLst xmlns:a="http://schemas.openxmlformats.org/drawingml/2006/main">
               <a:ext uri="{FF2B5EF4-FFF2-40B4-BE49-F238E27FC236}">
-                <a16:creationId xmlns:a16="http://schemas.microsoft.com/office/drawing/2014/main" id="{6C21F3D1-2E91-48EA-A81A-7659997B845B}"/>
+                <a16:creationId xmlns:a16="http://schemas.microsoft.com/office/drawing/2014/main" id="{D172AB9E-85A1-497B-9A12-9D32ADD45A70}"/>
               </a:ext>
             </a:extLst>
           </p:cNvPr>
@@ -12951,7 +12951,7 @@
               </a:defRPr>
             </a:pPr>
             <a:r>
-              <a:rPr sz="825" b="1">
+              <a:rPr sz="863" b="1">
                 <a:solidFill>
                   <a:srgbClr val="1E40AF"/>
                 </a:solidFill>
@@ -12978,7 +12978,7 @@
               </a:defRPr>
             </a:pPr>
             <a:r>
-              <a:rPr sz="825">
+              <a:rPr sz="863">
                 <a:solidFill>
                   <a:srgbClr val="0F172A"/>
                 </a:solidFill>
@@ -13005,7 +13005,7 @@
               </a:defRPr>
             </a:pPr>
             <a:r>
-              <a:rPr sz="825">
+              <a:rPr sz="863">
                 <a:solidFill>
                   <a:srgbClr val="0F172A"/>
                 </a:solidFill>
@@ -13032,7 +13032,7 @@
               </a:defRPr>
             </a:pPr>
             <a:r>
-              <a:rPr sz="825">
+              <a:rPr sz="863">
                 <a:solidFill>
                   <a:srgbClr val="0F172A"/>
                 </a:solidFill>
@@ -13059,7 +13059,7 @@
               </a:defRPr>
             </a:pPr>
             <a:r>
-              <a:rPr sz="825">
+              <a:rPr sz="863">
                 <a:solidFill>
                   <a:srgbClr val="0F172A"/>
                 </a:solidFill>
@@ -13086,7 +13086,7 @@
               </a:defRPr>
             </a:pPr>
             <a:r>
-              <a:rPr sz="825">
+              <a:rPr sz="863">
                 <a:solidFill>
                   <a:srgbClr val="0F172A"/>
                 </a:solidFill>
@@ -13113,7 +13113,7 @@
               </a:defRPr>
             </a:pPr>
             <a:r>
-              <a:rPr sz="825">
+              <a:rPr sz="863">
                 <a:solidFill>
                   <a:srgbClr val="0F172A"/>
                 </a:solidFill>
@@ -13140,7 +13140,7 @@
               </a:defRPr>
             </a:pPr>
             <a:r>
-              <a:rPr sz="825">
+              <a:rPr sz="863">
                 <a:solidFill>
                   <a:srgbClr val="0F172A"/>
                 </a:solidFill>
@@ -13167,7 +13167,7 @@
               </a:defRPr>
             </a:pPr>
             <a:r>
-              <a:rPr sz="825">
+              <a:rPr sz="863">
                 <a:solidFill>
                   <a:srgbClr val="0F172A"/>
                 </a:solidFill>
@@ -13194,7 +13194,7 @@
               </a:defRPr>
             </a:pPr>
             <a:r>
-              <a:rPr sz="825">
+              <a:rPr sz="863">
                 <a:solidFill>
                   <a:srgbClr val="0F172A"/>
                 </a:solidFill>
@@ -13221,7 +13221,7 @@
               </a:defRPr>
             </a:pPr>
             <a:r>
-              <a:rPr sz="825">
+              <a:rPr sz="863">
                 <a:solidFill>
                   <a:srgbClr val="0F172A"/>
                 </a:solidFill>
@@ -13248,7 +13248,7 @@
               </a:defRPr>
             </a:pPr>
             <a:r>
-              <a:rPr sz="825">
+              <a:rPr sz="863">
                 <a:solidFill>
                   <a:srgbClr val="0F172A"/>
                 </a:solidFill>
@@ -13275,7 +13275,7 @@
               </a:defRPr>
             </a:pPr>
             <a:r>
-              <a:rPr sz="825">
+              <a:rPr sz="863">
                 <a:solidFill>
                   <a:srgbClr val="0F172A"/>
                 </a:solidFill>
@@ -13302,7 +13302,7 @@
               </a:defRPr>
             </a:pPr>
             <a:r>
-              <a:rPr sz="825">
+              <a:rPr sz="863">
                 <a:solidFill>
                   <a:srgbClr val="0F172A"/>
                 </a:solidFill>
@@ -13329,7 +13329,7 @@
               </a:defRPr>
             </a:pPr>
             <a:r>
-              <a:rPr sz="825">
+              <a:rPr sz="863">
                 <a:solidFill>
                   <a:srgbClr val="0F172A"/>
                 </a:solidFill>
@@ -13356,7 +13356,7 @@
               </a:defRPr>
             </a:pPr>
             <a:r>
-              <a:rPr sz="825">
+              <a:rPr sz="863">
                 <a:solidFill>
                   <a:srgbClr val="0F172A"/>
                 </a:solidFill>
@@ -13378,7 +13378,7 @@
           <p:nvPr/>
         </p:nvPicPr>
         <p:blipFill>
-          <a:blip xmlns:r="http://schemas.openxmlformats.org/officeDocument/2006/relationships" xmlns:a="http://schemas.openxmlformats.org/drawingml/2006/main" r:embed="R1567479dd27a4000"/>
+          <a:blip xmlns:r="http://schemas.openxmlformats.org/officeDocument/2006/relationships" xmlns:a="http://schemas.openxmlformats.org/drawingml/2006/main" r:embed="R6149f2370fac48ed"/>
           <a:stretch xmlns:a="http://schemas.openxmlformats.org/drawingml/2006/main">
             <a:fillRect l="0" t="0" r="0" b="0"/>
           </a:stretch>
@@ -13398,7 +13398,7 @@
           <p:cNvPr id="9" name="Rounded Rectangle 8">
             <a:extLst xmlns:a="http://schemas.openxmlformats.org/drawingml/2006/main">
               <a:ext uri="{FF2B5EF4-FFF2-40B4-BE49-F238E27FC236}">
-                <a16:creationId xmlns:a16="http://schemas.microsoft.com/office/drawing/2014/main" id="{CB09E1CE-A8E7-47F9-9CB2-8037E94BD3D0}"/>
+                <a16:creationId xmlns:a16="http://schemas.microsoft.com/office/drawing/2014/main" id="{4DDBB250-948E-4E3D-9235-F8ADFFC3BA2C}"/>
               </a:ext>
             </a:extLst>
           </p:cNvPr>
@@ -13453,7 +13453,7 @@
           <p:cNvPr id="10" name="TextBox 9">
             <a:extLst xmlns:a="http://schemas.openxmlformats.org/drawingml/2006/main">
               <a:ext uri="{FF2B5EF4-FFF2-40B4-BE49-F238E27FC236}">
-                <a16:creationId xmlns:a16="http://schemas.microsoft.com/office/drawing/2014/main" id="{28E1BCAD-AA5C-496B-892C-5EFD0E5F07EF}"/>
+                <a16:creationId xmlns:a16="http://schemas.microsoft.com/office/drawing/2014/main" id="{E2F1F178-2D83-449B-8E65-DAC46C9811B1}"/>
               </a:ext>
             </a:extLst>
           </p:cNvPr>
@@ -13536,7 +13536,7 @@
     </p:spTree>
     <p:extLst>
       <p:ext uri="{BB962C8B-B14F-4D97-AF65-F5344CB8AC3E}">
-        <p14:creationId xmlns:p14="http://schemas.microsoft.com/office/powerpoint/2010/main" val="1100050484"/>
+        <p14:creationId xmlns:p14="http://schemas.microsoft.com/office/powerpoint/2010/main" val="1399506064"/>
       </p:ext>
     </p:extLst>
   </p:cSld>

--- a/reports/evidence/fixture_populated_slides.pptx
+++ b/reports/evidence/fixture_populated_slides.pptx
@@ -2,27 +2,131 @@
 <file path=ppt/presentation.xml><?xml version="1.0" encoding="utf-8"?>
 <p:presentation xmlns:p="http://schemas.openxmlformats.org/presentationml/2006/main">
   <p:sldMasterIdLst>
-    <p:sldMasterId xmlns:r="http://schemas.openxmlformats.org/officeDocument/2006/relationships" id="2147483648" r:id="R31109b3498894167"/>
+    <p:sldMasterId xmlns:r="http://schemas.openxmlformats.org/officeDocument/2006/relationships" id="2147483648" r:id="R8d6b25893e074af4"/>
   </p:sldMasterIdLst>
   <p:notesMasterIdLst>
-    <p:notesMasterId xmlns:r="http://schemas.openxmlformats.org/officeDocument/2006/relationships" r:id="R70a9a8da790c4a02"/>
+    <p:notesMasterId xmlns:r="http://schemas.openxmlformats.org/officeDocument/2006/relationships" r:id="Rad28c68a257e481d"/>
   </p:notesMasterIdLst>
   <p:sldIdLst>
-    <p:sldId xmlns:r="http://schemas.openxmlformats.org/officeDocument/2006/relationships" id="256" r:id="Rc16b122d3a794a8b"/>
-    <p:sldId xmlns:r="http://schemas.openxmlformats.org/officeDocument/2006/relationships" id="257" r:id="R07d14a099c9946cf"/>
-    <p:sldId xmlns:r="http://schemas.openxmlformats.org/officeDocument/2006/relationships" id="258" r:id="Rb3dfd3ae046e4e96"/>
-    <p:sldId xmlns:r="http://schemas.openxmlformats.org/officeDocument/2006/relationships" id="259" r:id="R9ef5f787049d4a03"/>
-    <p:sldId xmlns:r="http://schemas.openxmlformats.org/officeDocument/2006/relationships" id="260" r:id="R199355c59d794061"/>
-    <p:sldId xmlns:r="http://schemas.openxmlformats.org/officeDocument/2006/relationships" id="261" r:id="R8d166810d7754f5f"/>
-    <p:sldId xmlns:r="http://schemas.openxmlformats.org/officeDocument/2006/relationships" id="262" r:id="R655c04b5c490405f"/>
-    <p:sldId xmlns:r="http://schemas.openxmlformats.org/officeDocument/2006/relationships" id="263" r:id="Rec29d7b3b85f403a"/>
-    <p:sldId xmlns:r="http://schemas.openxmlformats.org/officeDocument/2006/relationships" id="264" r:id="Rf0135bb4847d40a8"/>
-    <p:sldId xmlns:r="http://schemas.openxmlformats.org/officeDocument/2006/relationships" id="265" r:id="R2989c017b20f4b23"/>
-    <p:sldId xmlns:r="http://schemas.openxmlformats.org/officeDocument/2006/relationships" id="266" r:id="Refc6e89f0b0540dd"/>
-    <p:sldId xmlns:r="http://schemas.openxmlformats.org/officeDocument/2006/relationships" id="267" r:id="Re07a985f72b4410e"/>
+    <p:sldId xmlns:r="http://schemas.openxmlformats.org/officeDocument/2006/relationships" id="256" r:id="R42c6b823cba44af3"/>
+    <p:sldId xmlns:r="http://schemas.openxmlformats.org/officeDocument/2006/relationships" id="257" r:id="R5b958a0c8de742fd"/>
+    <p:sldId xmlns:r="http://schemas.openxmlformats.org/officeDocument/2006/relationships" id="258" r:id="R4a5372163aa34f5d"/>
+    <p:sldId xmlns:r="http://schemas.openxmlformats.org/officeDocument/2006/relationships" id="259" r:id="Ra6cb1bd6c3f74bda"/>
+    <p:sldId xmlns:r="http://schemas.openxmlformats.org/officeDocument/2006/relationships" id="260" r:id="Rdb84edd8bf884405"/>
+    <p:sldId xmlns:r="http://schemas.openxmlformats.org/officeDocument/2006/relationships" id="261" r:id="Rff628730bb8347dd"/>
+    <p:sldId xmlns:r="http://schemas.openxmlformats.org/officeDocument/2006/relationships" id="262" r:id="R4a7be51562d84fa7"/>
+    <p:sldId xmlns:r="http://schemas.openxmlformats.org/officeDocument/2006/relationships" id="263" r:id="R435a1c5cad2d4ecd"/>
+    <p:sldId xmlns:r="http://schemas.openxmlformats.org/officeDocument/2006/relationships" id="264" r:id="Rd57917a01a2042d3"/>
+    <p:sldId xmlns:r="http://schemas.openxmlformats.org/officeDocument/2006/relationships" id="265" r:id="R8779158fe52f4724"/>
+    <p:sldId xmlns:r="http://schemas.openxmlformats.org/officeDocument/2006/relationships" id="266" r:id="R060768c3dbed4d8c"/>
+    <p:sldId xmlns:r="http://schemas.openxmlformats.org/officeDocument/2006/relationships" id="267" r:id="Rc73977ae20f7430e"/>
   </p:sldIdLst>
   <p:sldSz cx="12191695" cy="6858000"/>
   <p:notesSz cx="6858000" cy="9144000"/>
+  <p:defaultTextStyle>
+    <a:defPPr xmlns:a="http://schemas.openxmlformats.org/drawingml/2006/main">
+      <a:buNone/>
+    </a:defPPr>
+    <a:lvl1pPr xmlns:a="http://schemas.openxmlformats.org/drawingml/2006/main" marL="0" algn="l" defTabSz="457200">
+      <a:buNone/>
+      <a:defRPr sz="1800" kern="1200">
+        <a:solidFill>
+          <a:schemeClr val="tx1"/>
+        </a:solidFill>
+        <a:latin typeface="+mn-lt"/>
+        <a:ea typeface="+mn-lt"/>
+        <a:cs typeface="+mn-lt"/>
+      </a:defRPr>
+    </a:lvl1pPr>
+    <a:lvl2pPr xmlns:a="http://schemas.openxmlformats.org/drawingml/2006/main" marL="457200" algn="l" defTabSz="457200">
+      <a:buNone/>
+      <a:defRPr sz="1800" kern="1200">
+        <a:solidFill>
+          <a:schemeClr val="tx1"/>
+        </a:solidFill>
+        <a:latin typeface="+mn-lt"/>
+        <a:ea typeface="+mn-lt"/>
+        <a:cs typeface="+mn-lt"/>
+      </a:defRPr>
+    </a:lvl2pPr>
+    <a:lvl3pPr xmlns:a="http://schemas.openxmlformats.org/drawingml/2006/main" marL="914400" algn="l" defTabSz="457200">
+      <a:buNone/>
+      <a:defRPr sz="1800" kern="1200">
+        <a:solidFill>
+          <a:schemeClr val="tx1"/>
+        </a:solidFill>
+        <a:latin typeface="+mn-lt"/>
+        <a:ea typeface="+mn-lt"/>
+        <a:cs typeface="+mn-lt"/>
+      </a:defRPr>
+    </a:lvl3pPr>
+    <a:lvl4pPr xmlns:a="http://schemas.openxmlformats.org/drawingml/2006/main" marL="1371600" algn="l" defTabSz="457200">
+      <a:buNone/>
+      <a:defRPr sz="1800" kern="1200">
+        <a:solidFill>
+          <a:schemeClr val="tx1"/>
+        </a:solidFill>
+        <a:latin typeface="+mn-lt"/>
+        <a:ea typeface="+mn-lt"/>
+        <a:cs typeface="+mn-lt"/>
+      </a:defRPr>
+    </a:lvl4pPr>
+    <a:lvl5pPr xmlns:a="http://schemas.openxmlformats.org/drawingml/2006/main" marL="1828800" algn="l" defTabSz="457200">
+      <a:buNone/>
+      <a:defRPr sz="1800" kern="1200">
+        <a:solidFill>
+          <a:schemeClr val="tx1"/>
+        </a:solidFill>
+        <a:latin typeface="+mn-lt"/>
+        <a:ea typeface="+mn-lt"/>
+        <a:cs typeface="+mn-lt"/>
+      </a:defRPr>
+    </a:lvl5pPr>
+    <a:lvl6pPr xmlns:a="http://schemas.openxmlformats.org/drawingml/2006/main" marL="2286000" algn="l" defTabSz="457200">
+      <a:buNone/>
+      <a:defRPr sz="1800" kern="1200">
+        <a:solidFill>
+          <a:schemeClr val="tx1"/>
+        </a:solidFill>
+        <a:latin typeface="+mn-lt"/>
+        <a:ea typeface="+mn-lt"/>
+        <a:cs typeface="+mn-lt"/>
+      </a:defRPr>
+    </a:lvl6pPr>
+    <a:lvl7pPr xmlns:a="http://schemas.openxmlformats.org/drawingml/2006/main" marL="2743200" algn="l" defTabSz="457200">
+      <a:buNone/>
+      <a:defRPr sz="1800" kern="1200">
+        <a:solidFill>
+          <a:schemeClr val="tx1"/>
+        </a:solidFill>
+        <a:latin typeface="+mn-lt"/>
+        <a:ea typeface="+mn-lt"/>
+        <a:cs typeface="+mn-lt"/>
+      </a:defRPr>
+    </a:lvl7pPr>
+    <a:lvl8pPr xmlns:a="http://schemas.openxmlformats.org/drawingml/2006/main" marL="3200400" algn="l" defTabSz="457200">
+      <a:buNone/>
+      <a:defRPr sz="1800" kern="1200">
+        <a:solidFill>
+          <a:schemeClr val="tx1"/>
+        </a:solidFill>
+        <a:latin typeface="+mn-lt"/>
+        <a:ea typeface="+mn-lt"/>
+        <a:cs typeface="+mn-lt"/>
+      </a:defRPr>
+    </a:lvl8pPr>
+    <a:lvl9pPr xmlns:a="http://schemas.openxmlformats.org/drawingml/2006/main" marL="3657600" algn="l" defTabSz="457200">
+      <a:buNone/>
+      <a:defRPr sz="1800" kern="1200">
+        <a:solidFill>
+          <a:schemeClr val="tx1"/>
+        </a:solidFill>
+        <a:latin typeface="+mn-lt"/>
+        <a:ea typeface="+mn-lt"/>
+        <a:cs typeface="+mn-lt"/>
+      </a:defRPr>
+    </a:lvl9pPr>
+  </p:defaultTextStyle>
 </p:presentation>
 </file>
 
@@ -1473,7 +1577,7 @@
           <p:cNvPr id="2" name="Title 1">
             <a:extLst xmlns:a="http://schemas.openxmlformats.org/drawingml/2006/main">
               <a:ext uri="{FF2B5EF4-FFF2-40B4-BE49-F238E27FC236}">
-                <a16:creationId xmlns:a16="http://schemas.microsoft.com/office/drawing/2014/main" id="{87637113-9C5F-49BD-A620-E80C1A5B3FBF}"/>
+                <a16:creationId xmlns:a16="http://schemas.microsoft.com/office/drawing/2014/main" id="{A133F466-B639-41BC-8ACC-FAE823FC8C4D}"/>
               </a:ext>
             </a:extLst>
           </p:cNvPr>
@@ -1506,7 +1610,7 @@
           <p:cNvPr id="3" name="Subtitle 2">
             <a:extLst xmlns:a="http://schemas.openxmlformats.org/drawingml/2006/main">
               <a:ext uri="{FF2B5EF4-FFF2-40B4-BE49-F238E27FC236}">
-                <a16:creationId xmlns:a16="http://schemas.microsoft.com/office/drawing/2014/main" id="{0D42AF0B-BC36-4BA6-B996-20E647F88020}"/>
+                <a16:creationId xmlns:a16="http://schemas.microsoft.com/office/drawing/2014/main" id="{DA373217-AB0A-49A7-B904-4696B4DFED50}"/>
               </a:ext>
             </a:extLst>
           </p:cNvPr>
@@ -1630,7 +1734,7 @@
           <p:cNvPr id="4" name="Date Placeholder 3">
             <a:extLst xmlns:a="http://schemas.openxmlformats.org/drawingml/2006/main">
               <a:ext uri="{FF2B5EF4-FFF2-40B4-BE49-F238E27FC236}">
-                <a16:creationId xmlns:a16="http://schemas.microsoft.com/office/drawing/2014/main" id="{66C1118A-73A7-4A47-9610-5E28CBB38B9B}"/>
+                <a16:creationId xmlns:a16="http://schemas.microsoft.com/office/drawing/2014/main" id="{D0580FEB-F164-4CCC-8032-E45F321DA265}"/>
               </a:ext>
             </a:extLst>
           </p:cNvPr>
@@ -1658,7 +1762,7 @@
           <p:cNvPr id="5" name="Footer Placeholder 4">
             <a:extLst xmlns:a="http://schemas.openxmlformats.org/drawingml/2006/main">
               <a:ext uri="{FF2B5EF4-FFF2-40B4-BE49-F238E27FC236}">
-                <a16:creationId xmlns:a16="http://schemas.microsoft.com/office/drawing/2014/main" id="{34828C04-C5F5-4F26-B6B7-58AAF0E29886}"/>
+                <a16:creationId xmlns:a16="http://schemas.microsoft.com/office/drawing/2014/main" id="{6FF2872C-0A5E-44B5-8891-AE35E6F4A67E}"/>
               </a:ext>
             </a:extLst>
           </p:cNvPr>
@@ -1683,7 +1787,7 @@
           <p:cNvPr id="6" name="Slide Number Placeholder 5">
             <a:extLst xmlns:a="http://schemas.openxmlformats.org/drawingml/2006/main">
               <a:ext uri="{FF2B5EF4-FFF2-40B4-BE49-F238E27FC236}">
-                <a16:creationId xmlns:a16="http://schemas.microsoft.com/office/drawing/2014/main" id="{AC6F5BBE-39D3-4C10-BC75-362B7AA5A47D}"/>
+                <a16:creationId xmlns:a16="http://schemas.microsoft.com/office/drawing/2014/main" id="{637C316B-7131-4A4E-9ED5-69903DD69BC3}"/>
               </a:ext>
             </a:extLst>
           </p:cNvPr>
@@ -1728,7 +1832,7 @@
           <p:cNvPr id="2" name="Title 1">
             <a:extLst xmlns:a="http://schemas.openxmlformats.org/drawingml/2006/main">
               <a:ext uri="{FF2B5EF4-FFF2-40B4-BE49-F238E27FC236}">
-                <a16:creationId xmlns:a16="http://schemas.microsoft.com/office/drawing/2014/main" id="{81FCB0B8-D190-48EF-AD38-B1591837F946}"/>
+                <a16:creationId xmlns:a16="http://schemas.microsoft.com/office/drawing/2014/main" id="{6AC86A5F-9017-43EB-8A8C-2090B226599F}"/>
               </a:ext>
             </a:extLst>
           </p:cNvPr>
@@ -1756,7 +1860,7 @@
           <p:cNvPr id="3" name="Vertical Text Placeholder 2">
             <a:extLst xmlns:a="http://schemas.openxmlformats.org/drawingml/2006/main">
               <a:ext uri="{FF2B5EF4-FFF2-40B4-BE49-F238E27FC236}">
-                <a16:creationId xmlns:a16="http://schemas.microsoft.com/office/drawing/2014/main" id="{CD18897F-9CD5-498B-8ECB-06359AD0CAFF}"/>
+                <a16:creationId xmlns:a16="http://schemas.microsoft.com/office/drawing/2014/main" id="{47F06A0B-3CCB-4B68-AD43-D02B5E88FC73}"/>
               </a:ext>
             </a:extLst>
           </p:cNvPr>
@@ -1819,7 +1923,7 @@
           <p:cNvPr id="4" name="Date Placeholder 3">
             <a:extLst xmlns:a="http://schemas.openxmlformats.org/drawingml/2006/main">
               <a:ext uri="{FF2B5EF4-FFF2-40B4-BE49-F238E27FC236}">
-                <a16:creationId xmlns:a16="http://schemas.microsoft.com/office/drawing/2014/main" id="{D1909C94-169F-4313-8758-805A0E3EAD3A}"/>
+                <a16:creationId xmlns:a16="http://schemas.microsoft.com/office/drawing/2014/main" id="{B4B8FE75-78D7-4ACE-B284-2116E4DC2265}"/>
               </a:ext>
             </a:extLst>
           </p:cNvPr>
@@ -1847,7 +1951,7 @@
           <p:cNvPr id="5" name="Footer Placeholder 4">
             <a:extLst xmlns:a="http://schemas.openxmlformats.org/drawingml/2006/main">
               <a:ext uri="{FF2B5EF4-FFF2-40B4-BE49-F238E27FC236}">
-                <a16:creationId xmlns:a16="http://schemas.microsoft.com/office/drawing/2014/main" id="{DF0B42B3-04C2-470A-8406-D3B07CD18C04}"/>
+                <a16:creationId xmlns:a16="http://schemas.microsoft.com/office/drawing/2014/main" id="{55452CF7-DE64-4678-AC53-A9B9BA13FA42}"/>
               </a:ext>
             </a:extLst>
           </p:cNvPr>
@@ -1872,7 +1976,7 @@
           <p:cNvPr id="6" name="Slide Number Placeholder 5">
             <a:extLst xmlns:a="http://schemas.openxmlformats.org/drawingml/2006/main">
               <a:ext uri="{FF2B5EF4-FFF2-40B4-BE49-F238E27FC236}">
-                <a16:creationId xmlns:a16="http://schemas.microsoft.com/office/drawing/2014/main" id="{51E245BA-EE04-4693-AE30-C084F872C43B}"/>
+                <a16:creationId xmlns:a16="http://schemas.microsoft.com/office/drawing/2014/main" id="{6FA67FAB-BBC6-4EFE-ACF3-82EB5BBDB7A9}"/>
               </a:ext>
             </a:extLst>
           </p:cNvPr>
@@ -1917,7 +2021,7 @@
           <p:cNvPr id="2" name="Vertical Title 1">
             <a:extLst xmlns:a="http://schemas.openxmlformats.org/drawingml/2006/main">
               <a:ext uri="{FF2B5EF4-FFF2-40B4-BE49-F238E27FC236}">
-                <a16:creationId xmlns:a16="http://schemas.microsoft.com/office/drawing/2014/main" id="{2FD3B4EA-AA23-4A48-8821-510BE2A2E020}"/>
+                <a16:creationId xmlns:a16="http://schemas.microsoft.com/office/drawing/2014/main" id="{89CF581A-5C2A-4CC0-A77B-A20ADD18B5E8}"/>
               </a:ext>
             </a:extLst>
           </p:cNvPr>
@@ -1950,7 +2054,7 @@
           <p:cNvPr id="3" name="Vertical Text Placeholder 2">
             <a:extLst xmlns:a="http://schemas.openxmlformats.org/drawingml/2006/main">
               <a:ext uri="{FF2B5EF4-FFF2-40B4-BE49-F238E27FC236}">
-                <a16:creationId xmlns:a16="http://schemas.microsoft.com/office/drawing/2014/main" id="{94552581-89A4-4193-B437-C6BAF5A6254C}"/>
+                <a16:creationId xmlns:a16="http://schemas.microsoft.com/office/drawing/2014/main" id="{F5EEF56B-CEE6-4008-BECA-30F618CAE9B4}"/>
               </a:ext>
             </a:extLst>
           </p:cNvPr>
@@ -2018,7 +2122,7 @@
           <p:cNvPr id="4" name="Date Placeholder 3">
             <a:extLst xmlns:a="http://schemas.openxmlformats.org/drawingml/2006/main">
               <a:ext uri="{FF2B5EF4-FFF2-40B4-BE49-F238E27FC236}">
-                <a16:creationId xmlns:a16="http://schemas.microsoft.com/office/drawing/2014/main" id="{66DF79E0-5436-4E46-9097-636DC38496CA}"/>
+                <a16:creationId xmlns:a16="http://schemas.microsoft.com/office/drawing/2014/main" id="{C559B771-4A62-4E27-BF8A-4FFDBFB5281F}"/>
               </a:ext>
             </a:extLst>
           </p:cNvPr>
@@ -2046,7 +2150,7 @@
           <p:cNvPr id="5" name="Footer Placeholder 4">
             <a:extLst xmlns:a="http://schemas.openxmlformats.org/drawingml/2006/main">
               <a:ext uri="{FF2B5EF4-FFF2-40B4-BE49-F238E27FC236}">
-                <a16:creationId xmlns:a16="http://schemas.microsoft.com/office/drawing/2014/main" id="{F2C778AA-40B0-40FB-AF00-5C02B5247968}"/>
+                <a16:creationId xmlns:a16="http://schemas.microsoft.com/office/drawing/2014/main" id="{451B23B1-FF4D-49AE-A67A-1573AB962FBD}"/>
               </a:ext>
             </a:extLst>
           </p:cNvPr>
@@ -2071,7 +2175,7 @@
           <p:cNvPr id="6" name="Slide Number Placeholder 5">
             <a:extLst xmlns:a="http://schemas.openxmlformats.org/drawingml/2006/main">
               <a:ext uri="{FF2B5EF4-FFF2-40B4-BE49-F238E27FC236}">
-                <a16:creationId xmlns:a16="http://schemas.microsoft.com/office/drawing/2014/main" id="{BE2B159D-7645-43A8-A399-59B869DFC601}"/>
+                <a16:creationId xmlns:a16="http://schemas.microsoft.com/office/drawing/2014/main" id="{50DF5C2A-919B-4E54-88EC-642916104508}"/>
               </a:ext>
             </a:extLst>
           </p:cNvPr>
@@ -2116,7 +2220,7 @@
           <p:cNvPr id="2" name="Title 1">
             <a:extLst xmlns:a="http://schemas.openxmlformats.org/drawingml/2006/main">
               <a:ext uri="{FF2B5EF4-FFF2-40B4-BE49-F238E27FC236}">
-                <a16:creationId xmlns:a16="http://schemas.microsoft.com/office/drawing/2014/main" id="{D1B8F23B-F8F4-420F-B17A-6F34BAC5D4E4}"/>
+                <a16:creationId xmlns:a16="http://schemas.microsoft.com/office/drawing/2014/main" id="{8AA9D3DC-D92A-4836-B460-50FC688DB91C}"/>
               </a:ext>
             </a:extLst>
           </p:cNvPr>
@@ -2144,7 +2248,7 @@
           <p:cNvPr id="3" name="Content Placeholder 2">
             <a:extLst xmlns:a="http://schemas.openxmlformats.org/drawingml/2006/main">
               <a:ext uri="{FF2B5EF4-FFF2-40B4-BE49-F238E27FC236}">
-                <a16:creationId xmlns:a16="http://schemas.microsoft.com/office/drawing/2014/main" id="{65784F88-2AEF-4831-B53E-71B11845B67D}"/>
+                <a16:creationId xmlns:a16="http://schemas.microsoft.com/office/drawing/2014/main" id="{5AE5AB4E-EAB4-4A5B-980C-3B2F32E37BAB}"/>
               </a:ext>
             </a:extLst>
           </p:cNvPr>
@@ -2207,7 +2311,7 @@
           <p:cNvPr id="4" name="Date Placeholder 3">
             <a:extLst xmlns:a="http://schemas.openxmlformats.org/drawingml/2006/main">
               <a:ext uri="{FF2B5EF4-FFF2-40B4-BE49-F238E27FC236}">
-                <a16:creationId xmlns:a16="http://schemas.microsoft.com/office/drawing/2014/main" id="{D3E6366B-7A6D-4F7F-A0E4-959B5A570625}"/>
+                <a16:creationId xmlns:a16="http://schemas.microsoft.com/office/drawing/2014/main" id="{B2AF3671-6169-41CA-BA67-44B599A3F299}"/>
               </a:ext>
             </a:extLst>
           </p:cNvPr>
@@ -2235,7 +2339,7 @@
           <p:cNvPr id="5" name="Footer Placeholder 4">
             <a:extLst xmlns:a="http://schemas.openxmlformats.org/drawingml/2006/main">
               <a:ext uri="{FF2B5EF4-FFF2-40B4-BE49-F238E27FC236}">
-                <a16:creationId xmlns:a16="http://schemas.microsoft.com/office/drawing/2014/main" id="{FCBD9814-4A96-4941-B4A5-1F28EF2DFFFF}"/>
+                <a16:creationId xmlns:a16="http://schemas.microsoft.com/office/drawing/2014/main" id="{6BE774CD-FCED-47ED-91D9-9347105ED8A5}"/>
               </a:ext>
             </a:extLst>
           </p:cNvPr>
@@ -2260,7 +2364,7 @@
           <p:cNvPr id="6" name="Slide Number Placeholder 5">
             <a:extLst xmlns:a="http://schemas.openxmlformats.org/drawingml/2006/main">
               <a:ext uri="{FF2B5EF4-FFF2-40B4-BE49-F238E27FC236}">
-                <a16:creationId xmlns:a16="http://schemas.microsoft.com/office/drawing/2014/main" id="{0A4EBB8F-C70E-45BC-8521-F76041E02438}"/>
+                <a16:creationId xmlns:a16="http://schemas.microsoft.com/office/drawing/2014/main" id="{79332BA4-793E-474B-8560-DACFB220136F}"/>
               </a:ext>
             </a:extLst>
           </p:cNvPr>
@@ -2305,7 +2409,7 @@
           <p:cNvPr id="2" name="Title 1">
             <a:extLst xmlns:a="http://schemas.openxmlformats.org/drawingml/2006/main">
               <a:ext uri="{FF2B5EF4-FFF2-40B4-BE49-F238E27FC236}">
-                <a16:creationId xmlns:a16="http://schemas.microsoft.com/office/drawing/2014/main" id="{0518EEA6-2721-49C7-80B8-E1E2792E068D}"/>
+                <a16:creationId xmlns:a16="http://schemas.microsoft.com/office/drawing/2014/main" id="{43EA7274-B8E5-4B4B-ADC5-6DB26AC0D3E7}"/>
               </a:ext>
             </a:extLst>
           </p:cNvPr>
@@ -2343,7 +2447,7 @@
           <p:cNvPr id="3" name="Text Placeholder 2">
             <a:extLst xmlns:a="http://schemas.openxmlformats.org/drawingml/2006/main">
               <a:ext uri="{FF2B5EF4-FFF2-40B4-BE49-F238E27FC236}">
-                <a16:creationId xmlns:a16="http://schemas.microsoft.com/office/drawing/2014/main" id="{D8A3AE00-5548-4027-A857-AD7BE26624BB}"/>
+                <a16:creationId xmlns:a16="http://schemas.microsoft.com/office/drawing/2014/main" id="{84D2F316-EC02-41E3-BBDE-050400B34E6D}"/>
               </a:ext>
             </a:extLst>
           </p:cNvPr>
@@ -2469,7 +2573,7 @@
           <p:cNvPr id="4" name="Date Placeholder 3">
             <a:extLst xmlns:a="http://schemas.openxmlformats.org/drawingml/2006/main">
               <a:ext uri="{FF2B5EF4-FFF2-40B4-BE49-F238E27FC236}">
-                <a16:creationId xmlns:a16="http://schemas.microsoft.com/office/drawing/2014/main" id="{1BFEC21A-521B-4839-9B2F-CC782E7154C5}"/>
+                <a16:creationId xmlns:a16="http://schemas.microsoft.com/office/drawing/2014/main" id="{6C325968-D9F3-4DA4-8CD8-1223698BC0E9}"/>
               </a:ext>
             </a:extLst>
           </p:cNvPr>
@@ -2497,7 +2601,7 @@
           <p:cNvPr id="5" name="Footer Placeholder 4">
             <a:extLst xmlns:a="http://schemas.openxmlformats.org/drawingml/2006/main">
               <a:ext uri="{FF2B5EF4-FFF2-40B4-BE49-F238E27FC236}">
-                <a16:creationId xmlns:a16="http://schemas.microsoft.com/office/drawing/2014/main" id="{FF593524-9A90-4836-86FD-E844F3896774}"/>
+                <a16:creationId xmlns:a16="http://schemas.microsoft.com/office/drawing/2014/main" id="{590FE396-4D15-46D1-AE80-C807C5DC9CB4}"/>
               </a:ext>
             </a:extLst>
           </p:cNvPr>
@@ -2522,7 +2626,7 @@
           <p:cNvPr id="6" name="Slide Number Placeholder 5">
             <a:extLst xmlns:a="http://schemas.openxmlformats.org/drawingml/2006/main">
               <a:ext uri="{FF2B5EF4-FFF2-40B4-BE49-F238E27FC236}">
-                <a16:creationId xmlns:a16="http://schemas.microsoft.com/office/drawing/2014/main" id="{FC30DBEE-719F-4BCB-9B56-35A31F26977B}"/>
+                <a16:creationId xmlns:a16="http://schemas.microsoft.com/office/drawing/2014/main" id="{43A3FFC4-CF92-4D2A-8A3C-E8523763A8B7}"/>
               </a:ext>
             </a:extLst>
           </p:cNvPr>
@@ -2567,7 +2671,7 @@
           <p:cNvPr id="2" name="Title 1">
             <a:extLst xmlns:a="http://schemas.openxmlformats.org/drawingml/2006/main">
               <a:ext uri="{FF2B5EF4-FFF2-40B4-BE49-F238E27FC236}">
-                <a16:creationId xmlns:a16="http://schemas.microsoft.com/office/drawing/2014/main" id="{5B5C6482-3AEB-42AA-BD4B-AE7A61F58598}"/>
+                <a16:creationId xmlns:a16="http://schemas.microsoft.com/office/drawing/2014/main" id="{1C7EDC5D-F0D4-4209-BDA4-B9D9DFD3E306}"/>
               </a:ext>
             </a:extLst>
           </p:cNvPr>
@@ -2595,7 +2699,7 @@
           <p:cNvPr id="3" name="Content Placeholder 2">
             <a:extLst xmlns:a="http://schemas.openxmlformats.org/drawingml/2006/main">
               <a:ext uri="{FF2B5EF4-FFF2-40B4-BE49-F238E27FC236}">
-                <a16:creationId xmlns:a16="http://schemas.microsoft.com/office/drawing/2014/main" id="{2C529F22-117F-4B62-ACDE-6D76BB7E6CC0}"/>
+                <a16:creationId xmlns:a16="http://schemas.microsoft.com/office/drawing/2014/main" id="{1C7CF480-57F1-453C-9B6C-BCDDEE0EA606}"/>
               </a:ext>
             </a:extLst>
           </p:cNvPr>
@@ -2700,7 +2804,7 @@
           <p:cNvPr id="4" name="Content Placeholder 3">
             <a:extLst xmlns:a="http://schemas.openxmlformats.org/drawingml/2006/main">
               <a:ext uri="{FF2B5EF4-FFF2-40B4-BE49-F238E27FC236}">
-                <a16:creationId xmlns:a16="http://schemas.microsoft.com/office/drawing/2014/main" id="{E2A6B91E-B3EF-4B7E-90E5-C8545B08A2B4}"/>
+                <a16:creationId xmlns:a16="http://schemas.microsoft.com/office/drawing/2014/main" id="{5883344A-9CF3-4539-856B-FB11292D8E0A}"/>
               </a:ext>
             </a:extLst>
           </p:cNvPr>
@@ -2805,7 +2909,7 @@
           <p:cNvPr id="5" name="Date Placeholder 4">
             <a:extLst xmlns:a="http://schemas.openxmlformats.org/drawingml/2006/main">
               <a:ext uri="{FF2B5EF4-FFF2-40B4-BE49-F238E27FC236}">
-                <a16:creationId xmlns:a16="http://schemas.microsoft.com/office/drawing/2014/main" id="{22496858-1FC6-4448-949D-AE6E214D3DE8}"/>
+                <a16:creationId xmlns:a16="http://schemas.microsoft.com/office/drawing/2014/main" id="{012FE445-5E05-48AE-81BC-7A2ACCC731D2}"/>
               </a:ext>
             </a:extLst>
           </p:cNvPr>
@@ -2833,7 +2937,7 @@
           <p:cNvPr id="6" name="Footer Placeholder 5">
             <a:extLst xmlns:a="http://schemas.openxmlformats.org/drawingml/2006/main">
               <a:ext uri="{FF2B5EF4-FFF2-40B4-BE49-F238E27FC236}">
-                <a16:creationId xmlns:a16="http://schemas.microsoft.com/office/drawing/2014/main" id="{386A89CF-8608-48A5-B162-AD44C1B3B0E3}"/>
+                <a16:creationId xmlns:a16="http://schemas.microsoft.com/office/drawing/2014/main" id="{D79F8EFE-D762-48F9-BBDC-262DF99C6C08}"/>
               </a:ext>
             </a:extLst>
           </p:cNvPr>
@@ -2858,7 +2962,7 @@
           <p:cNvPr id="7" name="Slide Number Placeholder 6">
             <a:extLst xmlns:a="http://schemas.openxmlformats.org/drawingml/2006/main">
               <a:ext uri="{FF2B5EF4-FFF2-40B4-BE49-F238E27FC236}">
-                <a16:creationId xmlns:a16="http://schemas.microsoft.com/office/drawing/2014/main" id="{D6D909E3-7464-4CF9-BE4B-6209835659D2}"/>
+                <a16:creationId xmlns:a16="http://schemas.microsoft.com/office/drawing/2014/main" id="{DDCA9C43-32C1-4D9E-A7B1-BD5A40A23D63}"/>
               </a:ext>
             </a:extLst>
           </p:cNvPr>
@@ -2903,7 +3007,7 @@
           <p:cNvPr id="2" name="Title 1">
             <a:extLst xmlns:a="http://schemas.openxmlformats.org/drawingml/2006/main">
               <a:ext uri="{FF2B5EF4-FFF2-40B4-BE49-F238E27FC236}">
-                <a16:creationId xmlns:a16="http://schemas.microsoft.com/office/drawing/2014/main" id="{A54F120A-4992-4CD5-8ADA-F0D3BBDB6CB1}"/>
+                <a16:creationId xmlns:a16="http://schemas.microsoft.com/office/drawing/2014/main" id="{D7FDAED5-4B53-4AE8-882E-6E277E23B7BF}"/>
               </a:ext>
             </a:extLst>
           </p:cNvPr>
@@ -2936,7 +3040,7 @@
           <p:cNvPr id="3" name="Text Placeholder 2">
             <a:extLst xmlns:a="http://schemas.openxmlformats.org/drawingml/2006/main">
               <a:ext uri="{FF2B5EF4-FFF2-40B4-BE49-F238E27FC236}">
-                <a16:creationId xmlns:a16="http://schemas.microsoft.com/office/drawing/2014/main" id="{B44291D3-8E8D-40E8-B3E8-1FD78BEA7039}"/>
+                <a16:creationId xmlns:a16="http://schemas.microsoft.com/office/drawing/2014/main" id="{F79BE1E1-AD4C-4127-B8A1-D7412A120124}"/>
               </a:ext>
             </a:extLst>
           </p:cNvPr>
@@ -3008,7 +3112,7 @@
           <p:cNvPr id="4" name="Content Placeholder 3">
             <a:extLst xmlns:a="http://schemas.openxmlformats.org/drawingml/2006/main">
               <a:ext uri="{FF2B5EF4-FFF2-40B4-BE49-F238E27FC236}">
-                <a16:creationId xmlns:a16="http://schemas.microsoft.com/office/drawing/2014/main" id="{E4F6738C-6D25-440F-8288-C732A1B0EFAD}"/>
+                <a16:creationId xmlns:a16="http://schemas.microsoft.com/office/drawing/2014/main" id="{82285AE6-3FA2-491A-9966-C5B4F03D8743}"/>
               </a:ext>
             </a:extLst>
           </p:cNvPr>
@@ -3113,7 +3217,7 @@
           <p:cNvPr id="5" name="Text Placeholder 4">
             <a:extLst xmlns:a="http://schemas.openxmlformats.org/drawingml/2006/main">
               <a:ext uri="{FF2B5EF4-FFF2-40B4-BE49-F238E27FC236}">
-                <a16:creationId xmlns:a16="http://schemas.microsoft.com/office/drawing/2014/main" id="{C2C547C3-A5A8-4DD5-A136-79B5DA444CCB}"/>
+                <a16:creationId xmlns:a16="http://schemas.microsoft.com/office/drawing/2014/main" id="{C250DB89-0C43-4101-BBD3-0C4E7FB6028C}"/>
               </a:ext>
             </a:extLst>
           </p:cNvPr>
@@ -3185,7 +3289,7 @@
           <p:cNvPr id="6" name="Content Placeholder 5">
             <a:extLst xmlns:a="http://schemas.openxmlformats.org/drawingml/2006/main">
               <a:ext uri="{FF2B5EF4-FFF2-40B4-BE49-F238E27FC236}">
-                <a16:creationId xmlns:a16="http://schemas.microsoft.com/office/drawing/2014/main" id="{EA9778E9-7688-44E7-9FF0-6BFAD43FF398}"/>
+                <a16:creationId xmlns:a16="http://schemas.microsoft.com/office/drawing/2014/main" id="{4DBA596F-29F1-428F-904D-8699B0790ECA}"/>
               </a:ext>
             </a:extLst>
           </p:cNvPr>
@@ -3290,7 +3394,7 @@
           <p:cNvPr id="7" name="Date Placeholder 6">
             <a:extLst xmlns:a="http://schemas.openxmlformats.org/drawingml/2006/main">
               <a:ext uri="{FF2B5EF4-FFF2-40B4-BE49-F238E27FC236}">
-                <a16:creationId xmlns:a16="http://schemas.microsoft.com/office/drawing/2014/main" id="{FA5E5DF9-8ADA-4F51-815F-4FBAEAACB472}"/>
+                <a16:creationId xmlns:a16="http://schemas.microsoft.com/office/drawing/2014/main" id="{CEE2D3D0-9215-4EAF-88E5-88F811DFE4D2}"/>
               </a:ext>
             </a:extLst>
           </p:cNvPr>
@@ -3318,7 +3422,7 @@
           <p:cNvPr id="8" name="Footer Placeholder 7">
             <a:extLst xmlns:a="http://schemas.openxmlformats.org/drawingml/2006/main">
               <a:ext uri="{FF2B5EF4-FFF2-40B4-BE49-F238E27FC236}">
-                <a16:creationId xmlns:a16="http://schemas.microsoft.com/office/drawing/2014/main" id="{0BCFD174-7958-4EE7-94FD-E4A1FC7CEB4B}"/>
+                <a16:creationId xmlns:a16="http://schemas.microsoft.com/office/drawing/2014/main" id="{7A83A992-49F2-42BE-B219-D34FBB703CD9}"/>
               </a:ext>
             </a:extLst>
           </p:cNvPr>
@@ -3343,7 +3447,7 @@
           <p:cNvPr id="9" name="Slide Number Placeholder 8">
             <a:extLst xmlns:a="http://schemas.openxmlformats.org/drawingml/2006/main">
               <a:ext uri="{FF2B5EF4-FFF2-40B4-BE49-F238E27FC236}">
-                <a16:creationId xmlns:a16="http://schemas.microsoft.com/office/drawing/2014/main" id="{0C4A39FD-6EC2-4661-B55A-58D47F90E0A4}"/>
+                <a16:creationId xmlns:a16="http://schemas.microsoft.com/office/drawing/2014/main" id="{B632F2B8-B245-4E0D-9443-FBDCA661AB2B}"/>
               </a:ext>
             </a:extLst>
           </p:cNvPr>
@@ -3388,7 +3492,7 @@
           <p:cNvPr id="2" name="Title 1">
             <a:extLst xmlns:a="http://schemas.openxmlformats.org/drawingml/2006/main">
               <a:ext uri="{FF2B5EF4-FFF2-40B4-BE49-F238E27FC236}">
-                <a16:creationId xmlns:a16="http://schemas.microsoft.com/office/drawing/2014/main" id="{B176DCB0-7EF1-4111-819E-1EE6AAD661FA}"/>
+                <a16:creationId xmlns:a16="http://schemas.microsoft.com/office/drawing/2014/main" id="{093E1C0B-8698-49B7-B9E6-3A1CDD58586E}"/>
               </a:ext>
             </a:extLst>
           </p:cNvPr>
@@ -3416,7 +3520,7 @@
           <p:cNvPr id="3" name="Date Placeholder 2">
             <a:extLst xmlns:a="http://schemas.openxmlformats.org/drawingml/2006/main">
               <a:ext uri="{FF2B5EF4-FFF2-40B4-BE49-F238E27FC236}">
-                <a16:creationId xmlns:a16="http://schemas.microsoft.com/office/drawing/2014/main" id="{7D0973DD-3974-4DE3-9701-98009BC4BDAB}"/>
+                <a16:creationId xmlns:a16="http://schemas.microsoft.com/office/drawing/2014/main" id="{C7ED8F34-FDB4-4938-BEE9-07B8E15B8C89}"/>
               </a:ext>
             </a:extLst>
           </p:cNvPr>
@@ -3444,7 +3548,7 @@
           <p:cNvPr id="4" name="Footer Placeholder 3">
             <a:extLst xmlns:a="http://schemas.openxmlformats.org/drawingml/2006/main">
               <a:ext uri="{FF2B5EF4-FFF2-40B4-BE49-F238E27FC236}">
-                <a16:creationId xmlns:a16="http://schemas.microsoft.com/office/drawing/2014/main" id="{7D623FE4-5043-49A0-913B-DA4E3B8251EA}"/>
+                <a16:creationId xmlns:a16="http://schemas.microsoft.com/office/drawing/2014/main" id="{8E7D0772-4796-4BF3-AFE8-9E9F1AB984E4}"/>
               </a:ext>
             </a:extLst>
           </p:cNvPr>
@@ -3469,7 +3573,7 @@
           <p:cNvPr id="5" name="Slide Number Placeholder 4">
             <a:extLst xmlns:a="http://schemas.openxmlformats.org/drawingml/2006/main">
               <a:ext uri="{FF2B5EF4-FFF2-40B4-BE49-F238E27FC236}">
-                <a16:creationId xmlns:a16="http://schemas.microsoft.com/office/drawing/2014/main" id="{95295E1E-02EC-45F0-9B9D-6B0A36CA51C2}"/>
+                <a16:creationId xmlns:a16="http://schemas.microsoft.com/office/drawing/2014/main" id="{F53A675C-9509-4E38-8268-A0A2EE8F4720}"/>
               </a:ext>
             </a:extLst>
           </p:cNvPr>
@@ -3514,7 +3618,7 @@
           <p:cNvPr id="2" name="Date Placeholder 1">
             <a:extLst xmlns:a="http://schemas.openxmlformats.org/drawingml/2006/main">
               <a:ext uri="{FF2B5EF4-FFF2-40B4-BE49-F238E27FC236}">
-                <a16:creationId xmlns:a16="http://schemas.microsoft.com/office/drawing/2014/main" id="{8F6191BA-351C-47D5-866F-12D38CDC7806}"/>
+                <a16:creationId xmlns:a16="http://schemas.microsoft.com/office/drawing/2014/main" id="{DB290794-0FD3-44A0-94F6-ECB0D589398C}"/>
               </a:ext>
             </a:extLst>
           </p:cNvPr>
@@ -3542,7 +3646,7 @@
           <p:cNvPr id="3" name="Footer Placeholder 2">
             <a:extLst xmlns:a="http://schemas.openxmlformats.org/drawingml/2006/main">
               <a:ext uri="{FF2B5EF4-FFF2-40B4-BE49-F238E27FC236}">
-                <a16:creationId xmlns:a16="http://schemas.microsoft.com/office/drawing/2014/main" id="{965DF5FA-113A-4775-994A-2BF5AD345F79}"/>
+                <a16:creationId xmlns:a16="http://schemas.microsoft.com/office/drawing/2014/main" id="{F5E61D68-4944-40BE-9049-59B5333A6AF6}"/>
               </a:ext>
             </a:extLst>
           </p:cNvPr>
@@ -3567,7 +3671,7 @@
           <p:cNvPr id="4" name="Slide Number Placeholder 3">
             <a:extLst xmlns:a="http://schemas.openxmlformats.org/drawingml/2006/main">
               <a:ext uri="{FF2B5EF4-FFF2-40B4-BE49-F238E27FC236}">
-                <a16:creationId xmlns:a16="http://schemas.microsoft.com/office/drawing/2014/main" id="{721DC5CB-0DD7-4E10-9D60-5A5E82D21926}"/>
+                <a16:creationId xmlns:a16="http://schemas.microsoft.com/office/drawing/2014/main" id="{E290B1D7-42FC-42CC-95BF-AE973818EB29}"/>
               </a:ext>
             </a:extLst>
           </p:cNvPr>
@@ -3612,7 +3716,7 @@
           <p:cNvPr id="2" name="Title 1">
             <a:extLst xmlns:a="http://schemas.openxmlformats.org/drawingml/2006/main">
               <a:ext uri="{FF2B5EF4-FFF2-40B4-BE49-F238E27FC236}">
-                <a16:creationId xmlns:a16="http://schemas.microsoft.com/office/drawing/2014/main" id="{9232F6BC-88E3-4F13-8254-7F1021CA8EAB}"/>
+                <a16:creationId xmlns:a16="http://schemas.microsoft.com/office/drawing/2014/main" id="{56B77538-8A66-4F05-A1B9-D7F591020720}"/>
               </a:ext>
             </a:extLst>
           </p:cNvPr>
@@ -3650,7 +3754,7 @@
           <p:cNvPr id="3" name="Content Placeholder 2">
             <a:extLst xmlns:a="http://schemas.openxmlformats.org/drawingml/2006/main">
               <a:ext uri="{FF2B5EF4-FFF2-40B4-BE49-F238E27FC236}">
-                <a16:creationId xmlns:a16="http://schemas.microsoft.com/office/drawing/2014/main" id="{247FBDC6-1FF4-435F-B9AF-1C5D027BB45D}"/>
+                <a16:creationId xmlns:a16="http://schemas.microsoft.com/office/drawing/2014/main" id="{058153D6-5207-418F-99AE-DB5BE657C9AA}"/>
               </a:ext>
             </a:extLst>
           </p:cNvPr>
@@ -3755,7 +3859,7 @@
           <p:cNvPr id="4" name="Text Placeholder 3">
             <a:extLst xmlns:a="http://schemas.openxmlformats.org/drawingml/2006/main">
               <a:ext uri="{FF2B5EF4-FFF2-40B4-BE49-F238E27FC236}">
-                <a16:creationId xmlns:a16="http://schemas.microsoft.com/office/drawing/2014/main" id="{BA621BD8-C41F-4824-BD03-CBA5F4EE1CC5}"/>
+                <a16:creationId xmlns:a16="http://schemas.microsoft.com/office/drawing/2014/main" id="{C9A0B03A-B9FB-48AE-8B68-CFF68421FDCF}"/>
               </a:ext>
             </a:extLst>
           </p:cNvPr>
@@ -3827,7 +3931,7 @@
           <p:cNvPr id="5" name="Date Placeholder 4">
             <a:extLst xmlns:a="http://schemas.openxmlformats.org/drawingml/2006/main">
               <a:ext uri="{FF2B5EF4-FFF2-40B4-BE49-F238E27FC236}">
-                <a16:creationId xmlns:a16="http://schemas.microsoft.com/office/drawing/2014/main" id="{4C31CEF4-20B2-49E5-B9AA-B1B25F9815DC}"/>
+                <a16:creationId xmlns:a16="http://schemas.microsoft.com/office/drawing/2014/main" id="{6D56352C-F680-4128-A7A8-299C839E6B8F}"/>
               </a:ext>
             </a:extLst>
           </p:cNvPr>
@@ -3855,7 +3959,7 @@
           <p:cNvPr id="6" name="Footer Placeholder 5">
             <a:extLst xmlns:a="http://schemas.openxmlformats.org/drawingml/2006/main">
               <a:ext uri="{FF2B5EF4-FFF2-40B4-BE49-F238E27FC236}">
-                <a16:creationId xmlns:a16="http://schemas.microsoft.com/office/drawing/2014/main" id="{F3997A19-A6C3-43E7-A2C9-1D8B4DA70D43}"/>
+                <a16:creationId xmlns:a16="http://schemas.microsoft.com/office/drawing/2014/main" id="{7E7DCF77-319C-4051-8718-4463A7AEFCBE}"/>
               </a:ext>
             </a:extLst>
           </p:cNvPr>
@@ -3880,7 +3984,7 @@
           <p:cNvPr id="7" name="Slide Number Placeholder 6">
             <a:extLst xmlns:a="http://schemas.openxmlformats.org/drawingml/2006/main">
               <a:ext uri="{FF2B5EF4-FFF2-40B4-BE49-F238E27FC236}">
-                <a16:creationId xmlns:a16="http://schemas.microsoft.com/office/drawing/2014/main" id="{11E59FF3-C9D3-4AEB-8C69-B0C5057427E4}"/>
+                <a16:creationId xmlns:a16="http://schemas.microsoft.com/office/drawing/2014/main" id="{3F4D9C68-C95D-4D81-A048-F28F04D2BF18}"/>
               </a:ext>
             </a:extLst>
           </p:cNvPr>
@@ -3925,7 +4029,7 @@
           <p:cNvPr id="2" name="Title 1">
             <a:extLst xmlns:a="http://schemas.openxmlformats.org/drawingml/2006/main">
               <a:ext uri="{FF2B5EF4-FFF2-40B4-BE49-F238E27FC236}">
-                <a16:creationId xmlns:a16="http://schemas.microsoft.com/office/drawing/2014/main" id="{001D7CD4-DD4E-471A-AC69-FEBA50DEB75E}"/>
+                <a16:creationId xmlns:a16="http://schemas.microsoft.com/office/drawing/2014/main" id="{C5C862B3-81FA-46FE-9237-86811C51A94A}"/>
               </a:ext>
             </a:extLst>
           </p:cNvPr>
@@ -3963,7 +4067,7 @@
           <p:cNvPr id="3" name="Picture Placeholder 2">
             <a:extLst xmlns:a="http://schemas.openxmlformats.org/drawingml/2006/main">
               <a:ext uri="{FF2B5EF4-FFF2-40B4-BE49-F238E27FC236}">
-                <a16:creationId xmlns:a16="http://schemas.microsoft.com/office/drawing/2014/main" id="{C2A508DA-138C-4347-99C1-D8BAF9D9D793}"/>
+                <a16:creationId xmlns:a16="http://schemas.microsoft.com/office/drawing/2014/main" id="{779183DC-7EDB-4B20-B78D-927482FD686F}"/>
               </a:ext>
             </a:extLst>
           </p:cNvPr>
@@ -4030,7 +4134,7 @@
           <p:cNvPr id="4" name="Text Placeholder 3">
             <a:extLst xmlns:a="http://schemas.openxmlformats.org/drawingml/2006/main">
               <a:ext uri="{FF2B5EF4-FFF2-40B4-BE49-F238E27FC236}">
-                <a16:creationId xmlns:a16="http://schemas.microsoft.com/office/drawing/2014/main" id="{BC5EB1A8-6E76-418F-862C-4AA2A8FC543B}"/>
+                <a16:creationId xmlns:a16="http://schemas.microsoft.com/office/drawing/2014/main" id="{33B1BC80-21E0-4F34-8437-FD301269BBF6}"/>
               </a:ext>
             </a:extLst>
           </p:cNvPr>
@@ -4102,7 +4206,7 @@
           <p:cNvPr id="5" name="Date Placeholder 4">
             <a:extLst xmlns:a="http://schemas.openxmlformats.org/drawingml/2006/main">
               <a:ext uri="{FF2B5EF4-FFF2-40B4-BE49-F238E27FC236}">
-                <a16:creationId xmlns:a16="http://schemas.microsoft.com/office/drawing/2014/main" id="{FD8CABE8-E38D-4E9B-A6DC-6F5114584440}"/>
+                <a16:creationId xmlns:a16="http://schemas.microsoft.com/office/drawing/2014/main" id="{A29C85A6-A25F-4037-B447-115BF41CA24E}"/>
               </a:ext>
             </a:extLst>
           </p:cNvPr>
@@ -4130,7 +4234,7 @@
           <p:cNvPr id="6" name="Footer Placeholder 5">
             <a:extLst xmlns:a="http://schemas.openxmlformats.org/drawingml/2006/main">
               <a:ext uri="{FF2B5EF4-FFF2-40B4-BE49-F238E27FC236}">
-                <a16:creationId xmlns:a16="http://schemas.microsoft.com/office/drawing/2014/main" id="{58ADA187-743D-4610-8AFB-F22078916186}"/>
+                <a16:creationId xmlns:a16="http://schemas.microsoft.com/office/drawing/2014/main" id="{9930E315-EED6-4EA0-9FF5-4736C7929A33}"/>
               </a:ext>
             </a:extLst>
           </p:cNvPr>
@@ -4155,7 +4259,7 @@
           <p:cNvPr id="7" name="Slide Number Placeholder 6">
             <a:extLst xmlns:a="http://schemas.openxmlformats.org/drawingml/2006/main">
               <a:ext uri="{FF2B5EF4-FFF2-40B4-BE49-F238E27FC236}">
-                <a16:creationId xmlns:a16="http://schemas.microsoft.com/office/drawing/2014/main" id="{2778182B-5063-4F08-8EF3-E1B400935654}"/>
+                <a16:creationId xmlns:a16="http://schemas.microsoft.com/office/drawing/2014/main" id="{5C637C4E-F129-4F46-BF28-64E2DD128D8D}"/>
               </a:ext>
             </a:extLst>
           </p:cNvPr>
@@ -4205,7 +4309,7 @@
           <p:cNvPr id="2" name="Title Placeholder 1">
             <a:extLst xmlns:a="http://schemas.openxmlformats.org/drawingml/2006/main">
               <a:ext uri="{FF2B5EF4-FFF2-40B4-BE49-F238E27FC236}">
-                <a16:creationId xmlns:a16="http://schemas.microsoft.com/office/drawing/2014/main" id="{FC840009-D4F9-4C04-9C15-6C9053D2098F}"/>
+                <a16:creationId xmlns:a16="http://schemas.microsoft.com/office/drawing/2014/main" id="{ECD6DF1E-9BC0-49D1-817A-87D81EAF2FFF}"/>
               </a:ext>
             </a:extLst>
           </p:cNvPr>
@@ -4243,7 +4347,7 @@
           <p:cNvPr id="3" name="Text Placeholder 2">
             <a:extLst xmlns:a="http://schemas.openxmlformats.org/drawingml/2006/main">
               <a:ext uri="{FF2B5EF4-FFF2-40B4-BE49-F238E27FC236}">
-                <a16:creationId xmlns:a16="http://schemas.microsoft.com/office/drawing/2014/main" id="{C6F3E2ED-EECA-4035-B9F8-8610D3DCD015}"/>
+                <a16:creationId xmlns:a16="http://schemas.microsoft.com/office/drawing/2014/main" id="{9970E215-33B6-47F0-B301-2F166D27808D}"/>
               </a:ext>
             </a:extLst>
           </p:cNvPr>
@@ -4316,7 +4420,7 @@
           <p:cNvPr id="4" name="Date Placeholder 3">
             <a:extLst xmlns:a="http://schemas.openxmlformats.org/drawingml/2006/main">
               <a:ext uri="{FF2B5EF4-FFF2-40B4-BE49-F238E27FC236}">
-                <a16:creationId xmlns:a16="http://schemas.microsoft.com/office/drawing/2014/main" id="{C9A5D752-CFFE-4890-A117-EC36BE3DF964}"/>
+                <a16:creationId xmlns:a16="http://schemas.microsoft.com/office/drawing/2014/main" id="{80971FA2-06F4-46C9-AA6D-D5DB77EEEC42}"/>
               </a:ext>
             </a:extLst>
           </p:cNvPr>
@@ -4363,7 +4467,7 @@
           <p:cNvPr id="5" name="Footer Placeholder 4">
             <a:extLst xmlns:a="http://schemas.openxmlformats.org/drawingml/2006/main">
               <a:ext uri="{FF2B5EF4-FFF2-40B4-BE49-F238E27FC236}">
-                <a16:creationId xmlns:a16="http://schemas.microsoft.com/office/drawing/2014/main" id="{ECD0ADE8-AE2D-425E-805B-8622460D30E0}"/>
+                <a16:creationId xmlns:a16="http://schemas.microsoft.com/office/drawing/2014/main" id="{7211908E-1A9A-4654-9BCE-853212201D1F}"/>
               </a:ext>
             </a:extLst>
           </p:cNvPr>
@@ -4407,7 +4511,7 @@
           <p:cNvPr id="6" name="Slide Number Placeholder 5">
             <a:extLst xmlns:a="http://schemas.openxmlformats.org/drawingml/2006/main">
               <a:ext uri="{FF2B5EF4-FFF2-40B4-BE49-F238E27FC236}">
-                <a16:creationId xmlns:a16="http://schemas.microsoft.com/office/drawing/2014/main" id="{1C8712A2-92BF-4CAF-B167-561130759AD2}"/>
+                <a16:creationId xmlns:a16="http://schemas.microsoft.com/office/drawing/2014/main" id="{4638E421-4D94-4DF3-8CCE-F05D679D2E1E}"/>
               </a:ext>
             </a:extLst>
           </p:cNvPr>
@@ -4453,17 +4557,17 @@
   </p:cSld>
   <p:clrMap bg1="lt1" tx1="dk1" bg2="lt2" tx2="dk2" accent1="accent1" accent2="accent2" accent3="accent3" accent4="accent4" accent5="accent5" accent6="accent6" hlink="hlink" folHlink="folHlink"/>
   <p:sldLayoutIdLst>
-    <p:sldLayoutId xmlns:r="http://schemas.openxmlformats.org/officeDocument/2006/relationships" id="2147483649" r:id="Raf3922c657e44813"/>
-    <p:sldLayoutId xmlns:r="http://schemas.openxmlformats.org/officeDocument/2006/relationships" id="2147483650" r:id="Raf271fbccecc4f0d"/>
-    <p:sldLayoutId xmlns:r="http://schemas.openxmlformats.org/officeDocument/2006/relationships" id="2147483651" r:id="R748e3af98f4e4cba"/>
-    <p:sldLayoutId xmlns:r="http://schemas.openxmlformats.org/officeDocument/2006/relationships" id="2147483652" r:id="R36e687991f8b4b11"/>
-    <p:sldLayoutId xmlns:r="http://schemas.openxmlformats.org/officeDocument/2006/relationships" id="2147483653" r:id="Rac7108310a994338"/>
-    <p:sldLayoutId xmlns:r="http://schemas.openxmlformats.org/officeDocument/2006/relationships" id="2147483654" r:id="R599bc1c7e8994ad4"/>
-    <p:sldLayoutId xmlns:r="http://schemas.openxmlformats.org/officeDocument/2006/relationships" id="2147483655" r:id="R890c9ce882604687"/>
-    <p:sldLayoutId xmlns:r="http://schemas.openxmlformats.org/officeDocument/2006/relationships" id="2147483656" r:id="Rdc5c4628d8ef4650"/>
-    <p:sldLayoutId xmlns:r="http://schemas.openxmlformats.org/officeDocument/2006/relationships" id="2147483657" r:id="R4d9e8236b1944f07"/>
-    <p:sldLayoutId xmlns:r="http://schemas.openxmlformats.org/officeDocument/2006/relationships" id="2147483658" r:id="Rf57c43459e3444d4"/>
-    <p:sldLayoutId xmlns:r="http://schemas.openxmlformats.org/officeDocument/2006/relationships" id="2147483659" r:id="R5694e51afd7e4fd8"/>
+    <p:sldLayoutId xmlns:r="http://schemas.openxmlformats.org/officeDocument/2006/relationships" id="2147483649" r:id="Rcee08fda37f045c6"/>
+    <p:sldLayoutId xmlns:r="http://schemas.openxmlformats.org/officeDocument/2006/relationships" id="2147483650" r:id="R36791f7eeb2e4dcf"/>
+    <p:sldLayoutId xmlns:r="http://schemas.openxmlformats.org/officeDocument/2006/relationships" id="2147483651" r:id="Rcab5b21f4fc6489b"/>
+    <p:sldLayoutId xmlns:r="http://schemas.openxmlformats.org/officeDocument/2006/relationships" id="2147483652" r:id="Rac861a4775e14913"/>
+    <p:sldLayoutId xmlns:r="http://schemas.openxmlformats.org/officeDocument/2006/relationships" id="2147483653" r:id="Ra503fe8c42294942"/>
+    <p:sldLayoutId xmlns:r="http://schemas.openxmlformats.org/officeDocument/2006/relationships" id="2147483654" r:id="Rf1fbbcf196c34e8d"/>
+    <p:sldLayoutId xmlns:r="http://schemas.openxmlformats.org/officeDocument/2006/relationships" id="2147483655" r:id="R4efa0766c79d49ba"/>
+    <p:sldLayoutId xmlns:r="http://schemas.openxmlformats.org/officeDocument/2006/relationships" id="2147483656" r:id="Ree8d71ff7b8042a2"/>
+    <p:sldLayoutId xmlns:r="http://schemas.openxmlformats.org/officeDocument/2006/relationships" id="2147483657" r:id="R0634b1ee1cf44fd1"/>
+    <p:sldLayoutId xmlns:r="http://schemas.openxmlformats.org/officeDocument/2006/relationships" id="2147483658" r:id="R7a2db39534734c15"/>
+    <p:sldLayoutId xmlns:r="http://schemas.openxmlformats.org/officeDocument/2006/relationships" id="2147483659" r:id="R7fa461af172741a9"/>
   </p:sldLayoutIdLst>
   <p:txStyles>
     <p:titleStyle>
@@ -5009,7 +5113,7 @@
           <p:cNvPr id="2" name="Rectangle 1">
             <a:extLst xmlns:a="http://schemas.openxmlformats.org/drawingml/2006/main">
               <a:ext uri="{FF2B5EF4-FFF2-40B4-BE49-F238E27FC236}">
-                <a16:creationId xmlns:a16="http://schemas.microsoft.com/office/drawing/2014/main" id="{D76A1697-90F4-4B99-9BC8-C5CA394025C1}"/>
+                <a16:creationId xmlns:a16="http://schemas.microsoft.com/office/drawing/2014/main" id="{E0DBA1F5-EDAD-49E2-BEF0-0A387BA12739}"/>
               </a:ext>
             </a:extLst>
           </p:cNvPr>
@@ -5062,7 +5166,7 @@
           <p:cNvPr id="3" name="Rectangle 2">
             <a:extLst xmlns:a="http://schemas.openxmlformats.org/drawingml/2006/main">
               <a:ext uri="{FF2B5EF4-FFF2-40B4-BE49-F238E27FC236}">
-                <a16:creationId xmlns:a16="http://schemas.microsoft.com/office/drawing/2014/main" id="{C16B95B4-DDB9-4778-BA1D-1F24CB1F04C2}"/>
+                <a16:creationId xmlns:a16="http://schemas.microsoft.com/office/drawing/2014/main" id="{1EF05680-7F28-4037-AAD0-1330D6D18E97}"/>
               </a:ext>
             </a:extLst>
           </p:cNvPr>
@@ -5115,7 +5219,7 @@
           <p:cNvPr id="4" name="TextBox 3">
             <a:extLst xmlns:a="http://schemas.openxmlformats.org/drawingml/2006/main">
               <a:ext uri="{FF2B5EF4-FFF2-40B4-BE49-F238E27FC236}">
-                <a16:creationId xmlns:a16="http://schemas.microsoft.com/office/drawing/2014/main" id="{EA6FB49C-DC38-4A45-897C-146F28B3D9CE}"/>
+                <a16:creationId xmlns:a16="http://schemas.microsoft.com/office/drawing/2014/main" id="{7039D2C1-E2AF-42AB-B240-3A507C7378F3}"/>
               </a:ext>
             </a:extLst>
           </p:cNvPr>
@@ -5217,7 +5321,7 @@
     </p:spTree>
     <p:extLst>
       <p:ext uri="{BB962C8B-B14F-4D97-AF65-F5344CB8AC3E}">
-        <p14:creationId xmlns:p14="http://schemas.microsoft.com/office/powerpoint/2010/main" val="178200091"/>
+        <p14:creationId xmlns:p14="http://schemas.microsoft.com/office/powerpoint/2010/main" val="2028931425"/>
       </p:ext>
     </p:extLst>
   </p:cSld>
@@ -5241,7 +5345,7 @@
           <p:cNvPr id="2" name="Rectangle 1">
             <a:extLst xmlns:a="http://schemas.openxmlformats.org/drawingml/2006/main">
               <a:ext uri="{FF2B5EF4-FFF2-40B4-BE49-F238E27FC236}">
-                <a16:creationId xmlns:a16="http://schemas.microsoft.com/office/drawing/2014/main" id="{8711F2B7-47CA-4D51-BC74-AA906703C970}"/>
+                <a16:creationId xmlns:a16="http://schemas.microsoft.com/office/drawing/2014/main" id="{2F9AD40C-D0CD-4F33-9B6A-B54B129D2C07}"/>
               </a:ext>
             </a:extLst>
           </p:cNvPr>
@@ -5294,7 +5398,7 @@
           <p:cNvPr id="3" name="Rectangle 2">
             <a:extLst xmlns:a="http://schemas.openxmlformats.org/drawingml/2006/main">
               <a:ext uri="{FF2B5EF4-FFF2-40B4-BE49-F238E27FC236}">
-                <a16:creationId xmlns:a16="http://schemas.microsoft.com/office/drawing/2014/main" id="{ABEB9E9B-34CF-4D83-A82C-A1DB7ED9C826}"/>
+                <a16:creationId xmlns:a16="http://schemas.microsoft.com/office/drawing/2014/main" id="{A8A3AAB7-03C7-4D9F-A1F5-D9FF055BB660}"/>
               </a:ext>
             </a:extLst>
           </p:cNvPr>
@@ -5347,7 +5451,7 @@
           <p:cNvPr id="4" name="Rectangle 3">
             <a:extLst xmlns:a="http://schemas.openxmlformats.org/drawingml/2006/main">
               <a:ext uri="{FF2B5EF4-FFF2-40B4-BE49-F238E27FC236}">
-                <a16:creationId xmlns:a16="http://schemas.microsoft.com/office/drawing/2014/main" id="{888EC119-A4E6-4A4B-A61A-10F507921A12}"/>
+                <a16:creationId xmlns:a16="http://schemas.microsoft.com/office/drawing/2014/main" id="{4558FC54-9D35-4A64-A0B1-DB641395266D}"/>
               </a:ext>
             </a:extLst>
           </p:cNvPr>
@@ -5400,7 +5504,7 @@
           <p:cNvPr id="5" name="TextBox 4">
             <a:extLst xmlns:a="http://schemas.openxmlformats.org/drawingml/2006/main">
               <a:ext uri="{FF2B5EF4-FFF2-40B4-BE49-F238E27FC236}">
-                <a16:creationId xmlns:a16="http://schemas.microsoft.com/office/drawing/2014/main" id="{4E4E1A01-53AE-476E-831D-369ADB44A234}"/>
+                <a16:creationId xmlns:a16="http://schemas.microsoft.com/office/drawing/2014/main" id="{BF2EDFCE-6FDE-4620-924E-58DD16177C36}"/>
               </a:ext>
             </a:extLst>
           </p:cNvPr>
@@ -5463,7 +5567,7 @@
           <p:cNvPr id="6" name="Rounded Rectangle 5">
             <a:extLst xmlns:a="http://schemas.openxmlformats.org/drawingml/2006/main">
               <a:ext uri="{FF2B5EF4-FFF2-40B4-BE49-F238E27FC236}">
-                <a16:creationId xmlns:a16="http://schemas.microsoft.com/office/drawing/2014/main" id="{108ACEAE-9C7C-419F-8010-A0A4033809D8}"/>
+                <a16:creationId xmlns:a16="http://schemas.microsoft.com/office/drawing/2014/main" id="{361592C9-D48C-415B-8467-F12C9D394E76}"/>
               </a:ext>
             </a:extLst>
           </p:cNvPr>
@@ -5518,7 +5622,7 @@
           <p:cNvPr id="7" name="TextBox 6">
             <a:extLst xmlns:a="http://schemas.openxmlformats.org/drawingml/2006/main">
               <a:ext uri="{FF2B5EF4-FFF2-40B4-BE49-F238E27FC236}">
-                <a16:creationId xmlns:a16="http://schemas.microsoft.com/office/drawing/2014/main" id="{70297104-3780-4A93-B20E-C8912629EBF4}"/>
+                <a16:creationId xmlns:a16="http://schemas.microsoft.com/office/drawing/2014/main" id="{1539E09D-42D1-46F0-9DAD-EBA61E566E26}"/>
               </a:ext>
             </a:extLst>
           </p:cNvPr>
@@ -5622,7 +5726,7 @@
           <p:cNvPr id="8" name="Rounded Rectangle 7">
             <a:extLst xmlns:a="http://schemas.openxmlformats.org/drawingml/2006/main">
               <a:ext uri="{FF2B5EF4-FFF2-40B4-BE49-F238E27FC236}">
-                <a16:creationId xmlns:a16="http://schemas.microsoft.com/office/drawing/2014/main" id="{AFB01487-D1C5-48CD-8805-621BEB891248}"/>
+                <a16:creationId xmlns:a16="http://schemas.microsoft.com/office/drawing/2014/main" id="{252B45E2-C014-482A-BD80-D3D25CAD3AC9}"/>
               </a:ext>
             </a:extLst>
           </p:cNvPr>
@@ -5677,7 +5781,7 @@
           <p:cNvPr id="9" name="TextBox 8">
             <a:extLst xmlns:a="http://schemas.openxmlformats.org/drawingml/2006/main">
               <a:ext uri="{FF2B5EF4-FFF2-40B4-BE49-F238E27FC236}">
-                <a16:creationId xmlns:a16="http://schemas.microsoft.com/office/drawing/2014/main" id="{D492C280-90BE-49C3-B418-D7182F93138D}"/>
+                <a16:creationId xmlns:a16="http://schemas.microsoft.com/office/drawing/2014/main" id="{97EA0682-ED7A-4A4B-877D-703C755C57A0}"/>
               </a:ext>
             </a:extLst>
           </p:cNvPr>
@@ -5762,7 +5866,7 @@
           <p:cNvPr id="10" name="Rounded Rectangle 9">
             <a:extLst xmlns:a="http://schemas.openxmlformats.org/drawingml/2006/main">
               <a:ext uri="{FF2B5EF4-FFF2-40B4-BE49-F238E27FC236}">
-                <a16:creationId xmlns:a16="http://schemas.microsoft.com/office/drawing/2014/main" id="{4AD75E00-3F82-4202-8DAE-E327215ACECC}"/>
+                <a16:creationId xmlns:a16="http://schemas.microsoft.com/office/drawing/2014/main" id="{9300663A-57F7-4BB5-9CC8-F033FB0F66B0}"/>
               </a:ext>
             </a:extLst>
           </p:cNvPr>
@@ -5817,7 +5921,7 @@
           <p:cNvPr id="11" name="TextBox 10">
             <a:extLst xmlns:a="http://schemas.openxmlformats.org/drawingml/2006/main">
               <a:ext uri="{FF2B5EF4-FFF2-40B4-BE49-F238E27FC236}">
-                <a16:creationId xmlns:a16="http://schemas.microsoft.com/office/drawing/2014/main" id="{CF85E344-F3E9-4C30-A032-3A5D2F64D319}"/>
+                <a16:creationId xmlns:a16="http://schemas.microsoft.com/office/drawing/2014/main" id="{1D826F69-571F-4FD0-B867-E52F10851802}"/>
               </a:ext>
             </a:extLst>
           </p:cNvPr>
@@ -5919,7 +6023,7 @@
     </p:spTree>
     <p:extLst>
       <p:ext uri="{BB962C8B-B14F-4D97-AF65-F5344CB8AC3E}">
-        <p14:creationId xmlns:p14="http://schemas.microsoft.com/office/powerpoint/2010/main" val="470099464"/>
+        <p14:creationId xmlns:p14="http://schemas.microsoft.com/office/powerpoint/2010/main" val="733324667"/>
       </p:ext>
     </p:extLst>
   </p:cSld>
@@ -5943,7 +6047,7 @@
           <p:cNvPr id="2" name="Rectangle 1">
             <a:extLst xmlns:a="http://schemas.openxmlformats.org/drawingml/2006/main">
               <a:ext uri="{FF2B5EF4-FFF2-40B4-BE49-F238E27FC236}">
-                <a16:creationId xmlns:a16="http://schemas.microsoft.com/office/drawing/2014/main" id="{0C7BF7B5-FCC4-41DF-8D74-AC20A1259968}"/>
+                <a16:creationId xmlns:a16="http://schemas.microsoft.com/office/drawing/2014/main" id="{49B8E7FD-4EA8-4904-9272-81ACBAFE91C1}"/>
               </a:ext>
             </a:extLst>
           </p:cNvPr>
@@ -5996,7 +6100,7 @@
           <p:cNvPr id="3" name="Rectangle 2">
             <a:extLst xmlns:a="http://schemas.openxmlformats.org/drawingml/2006/main">
               <a:ext uri="{FF2B5EF4-FFF2-40B4-BE49-F238E27FC236}">
-                <a16:creationId xmlns:a16="http://schemas.microsoft.com/office/drawing/2014/main" id="{B500CCDD-8810-4B5F-8B1D-F030CE53D622}"/>
+                <a16:creationId xmlns:a16="http://schemas.microsoft.com/office/drawing/2014/main" id="{220BB2E2-7BCD-4650-8C7B-FDCDC1728D78}"/>
               </a:ext>
             </a:extLst>
           </p:cNvPr>
@@ -6049,7 +6153,7 @@
           <p:cNvPr id="4" name="Rectangle 3">
             <a:extLst xmlns:a="http://schemas.openxmlformats.org/drawingml/2006/main">
               <a:ext uri="{FF2B5EF4-FFF2-40B4-BE49-F238E27FC236}">
-                <a16:creationId xmlns:a16="http://schemas.microsoft.com/office/drawing/2014/main" id="{65034374-E11F-4C13-B64C-742301D08D17}"/>
+                <a16:creationId xmlns:a16="http://schemas.microsoft.com/office/drawing/2014/main" id="{38A5135E-D1BE-4854-A8CD-0755E90558BF}"/>
               </a:ext>
             </a:extLst>
           </p:cNvPr>
@@ -6102,7 +6206,7 @@
           <p:cNvPr id="5" name="TextBox 4">
             <a:extLst xmlns:a="http://schemas.openxmlformats.org/drawingml/2006/main">
               <a:ext uri="{FF2B5EF4-FFF2-40B4-BE49-F238E27FC236}">
-                <a16:creationId xmlns:a16="http://schemas.microsoft.com/office/drawing/2014/main" id="{8333E2FE-CE2F-4E82-996E-CF10FAD8BF49}"/>
+                <a16:creationId xmlns:a16="http://schemas.microsoft.com/office/drawing/2014/main" id="{881FC1C7-8E00-44B5-A3D9-7F1125CF73D2}"/>
               </a:ext>
             </a:extLst>
           </p:cNvPr>
@@ -6165,7 +6269,7 @@
           <p:cNvPr id="6" name="Rounded Rectangle 5">
             <a:extLst xmlns:a="http://schemas.openxmlformats.org/drawingml/2006/main">
               <a:ext uri="{FF2B5EF4-FFF2-40B4-BE49-F238E27FC236}">
-                <a16:creationId xmlns:a16="http://schemas.microsoft.com/office/drawing/2014/main" id="{45EB4F14-2A8E-4C77-9024-D9C8212A5C67}"/>
+                <a16:creationId xmlns:a16="http://schemas.microsoft.com/office/drawing/2014/main" id="{D09A8FEA-5DDD-4469-9473-2F1ACBA8D9DC}"/>
               </a:ext>
             </a:extLst>
           </p:cNvPr>
@@ -6220,7 +6324,7 @@
           <p:cNvPr id="7" name="TextBox 6">
             <a:extLst xmlns:a="http://schemas.openxmlformats.org/drawingml/2006/main">
               <a:ext uri="{FF2B5EF4-FFF2-40B4-BE49-F238E27FC236}">
-                <a16:creationId xmlns:a16="http://schemas.microsoft.com/office/drawing/2014/main" id="{3524A44E-B9FE-4AB7-BD21-95446992213E}"/>
+                <a16:creationId xmlns:a16="http://schemas.microsoft.com/office/drawing/2014/main" id="{120FB8D9-C369-46E8-876F-997B1DF8E8CE}"/>
               </a:ext>
             </a:extLst>
           </p:cNvPr>
@@ -6419,7 +6523,7 @@
           <p:cNvPr id="8" name="Rounded Rectangle 7">
             <a:extLst xmlns:a="http://schemas.openxmlformats.org/drawingml/2006/main">
               <a:ext uri="{FF2B5EF4-FFF2-40B4-BE49-F238E27FC236}">
-                <a16:creationId xmlns:a16="http://schemas.microsoft.com/office/drawing/2014/main" id="{4B84D7D3-1D96-499F-9BC7-2D1875C3D101}"/>
+                <a16:creationId xmlns:a16="http://schemas.microsoft.com/office/drawing/2014/main" id="{8A14E537-EA72-46DD-9E26-33372B364A01}"/>
               </a:ext>
             </a:extLst>
           </p:cNvPr>
@@ -6474,7 +6578,7 @@
           <p:cNvPr id="9" name="TextBox 8">
             <a:extLst xmlns:a="http://schemas.openxmlformats.org/drawingml/2006/main">
               <a:ext uri="{FF2B5EF4-FFF2-40B4-BE49-F238E27FC236}">
-                <a16:creationId xmlns:a16="http://schemas.microsoft.com/office/drawing/2014/main" id="{F708977B-AD76-4CE2-9CA8-3663A3655653}"/>
+                <a16:creationId xmlns:a16="http://schemas.microsoft.com/office/drawing/2014/main" id="{7C852D77-A1D4-4F0C-B18B-203BCFAB24A8}"/>
               </a:ext>
             </a:extLst>
           </p:cNvPr>
@@ -6595,7 +6699,7 @@
     </p:spTree>
     <p:extLst>
       <p:ext uri="{BB962C8B-B14F-4D97-AF65-F5344CB8AC3E}">
-        <p14:creationId xmlns:p14="http://schemas.microsoft.com/office/powerpoint/2010/main" val="249662082"/>
+        <p14:creationId xmlns:p14="http://schemas.microsoft.com/office/powerpoint/2010/main" val="2009182731"/>
       </p:ext>
     </p:extLst>
   </p:cSld>
@@ -6619,7 +6723,7 @@
           <p:cNvPr id="2" name="Rectangle 1">
             <a:extLst xmlns:a="http://schemas.openxmlformats.org/drawingml/2006/main">
               <a:ext uri="{FF2B5EF4-FFF2-40B4-BE49-F238E27FC236}">
-                <a16:creationId xmlns:a16="http://schemas.microsoft.com/office/drawing/2014/main" id="{8C905FE4-B36E-4252-A6C2-75E454B8DE39}"/>
+                <a16:creationId xmlns:a16="http://schemas.microsoft.com/office/drawing/2014/main" id="{209929C7-D563-4E95-B7E8-B863E661347B}"/>
               </a:ext>
             </a:extLst>
           </p:cNvPr>
@@ -6672,7 +6776,7 @@
           <p:cNvPr id="3" name="Rectangle 2">
             <a:extLst xmlns:a="http://schemas.openxmlformats.org/drawingml/2006/main">
               <a:ext uri="{FF2B5EF4-FFF2-40B4-BE49-F238E27FC236}">
-                <a16:creationId xmlns:a16="http://schemas.microsoft.com/office/drawing/2014/main" id="{6C26D553-092B-40EA-BB2F-531C135E0B83}"/>
+                <a16:creationId xmlns:a16="http://schemas.microsoft.com/office/drawing/2014/main" id="{21FFB2B4-5B74-45E1-95E2-2AF326FE3C9D}"/>
               </a:ext>
             </a:extLst>
           </p:cNvPr>
@@ -6725,7 +6829,7 @@
           <p:cNvPr id="4" name="TextBox 3">
             <a:extLst xmlns:a="http://schemas.openxmlformats.org/drawingml/2006/main">
               <a:ext uri="{FF2B5EF4-FFF2-40B4-BE49-F238E27FC236}">
-                <a16:creationId xmlns:a16="http://schemas.microsoft.com/office/drawing/2014/main" id="{27B56AF8-59D8-4072-B628-D0ED99C3CD5B}"/>
+                <a16:creationId xmlns:a16="http://schemas.microsoft.com/office/drawing/2014/main" id="{6F661533-EF29-400D-AACC-19304E41D1AF}"/>
               </a:ext>
             </a:extLst>
           </p:cNvPr>
@@ -6903,7 +7007,7 @@
     </p:spTree>
     <p:extLst>
       <p:ext uri="{BB962C8B-B14F-4D97-AF65-F5344CB8AC3E}">
-        <p14:creationId xmlns:p14="http://schemas.microsoft.com/office/powerpoint/2010/main" val="18029351"/>
+        <p14:creationId xmlns:p14="http://schemas.microsoft.com/office/powerpoint/2010/main" val="2022037832"/>
       </p:ext>
     </p:extLst>
   </p:cSld>
@@ -6927,7 +7031,7 @@
           <p:cNvPr id="2" name="Rectangle 1">
             <a:extLst xmlns:a="http://schemas.openxmlformats.org/drawingml/2006/main">
               <a:ext uri="{FF2B5EF4-FFF2-40B4-BE49-F238E27FC236}">
-                <a16:creationId xmlns:a16="http://schemas.microsoft.com/office/drawing/2014/main" id="{CB14A08F-0CC5-4970-8BA7-AC4E0D00C299}"/>
+                <a16:creationId xmlns:a16="http://schemas.microsoft.com/office/drawing/2014/main" id="{3CFD2998-13E2-4E2A-B29F-4B57AC0E7273}"/>
               </a:ext>
             </a:extLst>
           </p:cNvPr>
@@ -6980,7 +7084,7 @@
           <p:cNvPr id="3" name="Rectangle 2">
             <a:extLst xmlns:a="http://schemas.openxmlformats.org/drawingml/2006/main">
               <a:ext uri="{FF2B5EF4-FFF2-40B4-BE49-F238E27FC236}">
-                <a16:creationId xmlns:a16="http://schemas.microsoft.com/office/drawing/2014/main" id="{5F31F494-CBD5-48A7-96ED-3410FB8B6A84}"/>
+                <a16:creationId xmlns:a16="http://schemas.microsoft.com/office/drawing/2014/main" id="{D726062E-DFB9-4844-BBE5-EB0EFBE1959C}"/>
               </a:ext>
             </a:extLst>
           </p:cNvPr>
@@ -7033,7 +7137,7 @@
           <p:cNvPr id="4" name="Rectangle 3">
             <a:extLst xmlns:a="http://schemas.openxmlformats.org/drawingml/2006/main">
               <a:ext uri="{FF2B5EF4-FFF2-40B4-BE49-F238E27FC236}">
-                <a16:creationId xmlns:a16="http://schemas.microsoft.com/office/drawing/2014/main" id="{B9CE3DAF-A963-4DFA-BBEE-8AF7CD7BC63F}"/>
+                <a16:creationId xmlns:a16="http://schemas.microsoft.com/office/drawing/2014/main" id="{D9CB8954-CE97-4062-BBD2-A32747E89514}"/>
               </a:ext>
             </a:extLst>
           </p:cNvPr>
@@ -7086,7 +7190,7 @@
           <p:cNvPr id="5" name="TextBox 4">
             <a:extLst xmlns:a="http://schemas.openxmlformats.org/drawingml/2006/main">
               <a:ext uri="{FF2B5EF4-FFF2-40B4-BE49-F238E27FC236}">
-                <a16:creationId xmlns:a16="http://schemas.microsoft.com/office/drawing/2014/main" id="{13242279-C44F-46EA-B8AD-DDC611C87424}"/>
+                <a16:creationId xmlns:a16="http://schemas.microsoft.com/office/drawing/2014/main" id="{E9E63F22-0F57-48DD-B138-B2ADFF331DAA}"/>
               </a:ext>
             </a:extLst>
           </p:cNvPr>
@@ -7149,7 +7253,7 @@
           <p:cNvPr id="6" name="Rounded Rectangle 5">
             <a:extLst xmlns:a="http://schemas.openxmlformats.org/drawingml/2006/main">
               <a:ext uri="{FF2B5EF4-FFF2-40B4-BE49-F238E27FC236}">
-                <a16:creationId xmlns:a16="http://schemas.microsoft.com/office/drawing/2014/main" id="{C0592635-67DF-4E7E-BE6B-7234B5C7D454}"/>
+                <a16:creationId xmlns:a16="http://schemas.microsoft.com/office/drawing/2014/main" id="{87EC5E4D-1D46-4EC2-83FF-4A5876E6AA30}"/>
               </a:ext>
             </a:extLst>
           </p:cNvPr>
@@ -7204,7 +7308,7 @@
           <p:cNvPr id="7" name="TextBox 6">
             <a:extLst xmlns:a="http://schemas.openxmlformats.org/drawingml/2006/main">
               <a:ext uri="{FF2B5EF4-FFF2-40B4-BE49-F238E27FC236}">
-                <a16:creationId xmlns:a16="http://schemas.microsoft.com/office/drawing/2014/main" id="{464D95AE-ACE5-42A3-862A-532B40C9EF78}"/>
+                <a16:creationId xmlns:a16="http://schemas.microsoft.com/office/drawing/2014/main" id="{F112B2E7-3E64-460E-9B26-3A85056ACE0D}"/>
               </a:ext>
             </a:extLst>
           </p:cNvPr>
@@ -7308,7 +7412,7 @@
           <p:cNvPr id="8" name="Rounded Rectangle 7">
             <a:extLst xmlns:a="http://schemas.openxmlformats.org/drawingml/2006/main">
               <a:ext uri="{FF2B5EF4-FFF2-40B4-BE49-F238E27FC236}">
-                <a16:creationId xmlns:a16="http://schemas.microsoft.com/office/drawing/2014/main" id="{33F5F880-4D3D-4BF8-A486-AC188638A717}"/>
+                <a16:creationId xmlns:a16="http://schemas.microsoft.com/office/drawing/2014/main" id="{362923ED-6233-4087-9469-09D5AD9D3114}"/>
               </a:ext>
             </a:extLst>
           </p:cNvPr>
@@ -7363,7 +7467,7 @@
           <p:cNvPr id="9" name="TextBox 8">
             <a:extLst xmlns:a="http://schemas.openxmlformats.org/drawingml/2006/main">
               <a:ext uri="{FF2B5EF4-FFF2-40B4-BE49-F238E27FC236}">
-                <a16:creationId xmlns:a16="http://schemas.microsoft.com/office/drawing/2014/main" id="{5D89B376-93A6-4217-B550-E059184E1AD2}"/>
+                <a16:creationId xmlns:a16="http://schemas.microsoft.com/office/drawing/2014/main" id="{899587D2-F8CF-4CB5-B1C7-DA4F684372AF}"/>
               </a:ext>
             </a:extLst>
           </p:cNvPr>
@@ -7467,7 +7571,7 @@
           <p:cNvPr id="10" name="Rounded Rectangle 9">
             <a:extLst xmlns:a="http://schemas.openxmlformats.org/drawingml/2006/main">
               <a:ext uri="{FF2B5EF4-FFF2-40B4-BE49-F238E27FC236}">
-                <a16:creationId xmlns:a16="http://schemas.microsoft.com/office/drawing/2014/main" id="{C176E3D9-4837-4281-BB26-5DAB674A57E9}"/>
+                <a16:creationId xmlns:a16="http://schemas.microsoft.com/office/drawing/2014/main" id="{F105BCBF-A08D-4411-AEC1-B48043FA6B45}"/>
               </a:ext>
             </a:extLst>
           </p:cNvPr>
@@ -7522,7 +7626,7 @@
           <p:cNvPr id="11" name="TextBox 10">
             <a:extLst xmlns:a="http://schemas.openxmlformats.org/drawingml/2006/main">
               <a:ext uri="{FF2B5EF4-FFF2-40B4-BE49-F238E27FC236}">
-                <a16:creationId xmlns:a16="http://schemas.microsoft.com/office/drawing/2014/main" id="{2D827DE8-7975-4FC3-8AE7-6335AAE4A601}"/>
+                <a16:creationId xmlns:a16="http://schemas.microsoft.com/office/drawing/2014/main" id="{CF6422EA-E120-497D-B573-304557CE7825}"/>
               </a:ext>
             </a:extLst>
           </p:cNvPr>
@@ -7681,7 +7785,7 @@
     </p:spTree>
     <p:extLst>
       <p:ext uri="{BB962C8B-B14F-4D97-AF65-F5344CB8AC3E}">
-        <p14:creationId xmlns:p14="http://schemas.microsoft.com/office/powerpoint/2010/main" val="1379623690"/>
+        <p14:creationId xmlns:p14="http://schemas.microsoft.com/office/powerpoint/2010/main" val="1654501419"/>
       </p:ext>
     </p:extLst>
   </p:cSld>
@@ -7705,7 +7809,7 @@
           <p:cNvPr id="2" name="Rectangle 1">
             <a:extLst xmlns:a="http://schemas.openxmlformats.org/drawingml/2006/main">
               <a:ext uri="{FF2B5EF4-FFF2-40B4-BE49-F238E27FC236}">
-                <a16:creationId xmlns:a16="http://schemas.microsoft.com/office/drawing/2014/main" id="{ACA795BE-E241-46A6-A95C-16DD0803E379}"/>
+                <a16:creationId xmlns:a16="http://schemas.microsoft.com/office/drawing/2014/main" id="{1ED8B4B8-ED80-49DE-8465-0CA06781B361}"/>
               </a:ext>
             </a:extLst>
           </p:cNvPr>
@@ -7758,7 +7862,7 @@
           <p:cNvPr id="3" name="Rectangle 2">
             <a:extLst xmlns:a="http://schemas.openxmlformats.org/drawingml/2006/main">
               <a:ext uri="{FF2B5EF4-FFF2-40B4-BE49-F238E27FC236}">
-                <a16:creationId xmlns:a16="http://schemas.microsoft.com/office/drawing/2014/main" id="{AB3FA44D-8CD9-4118-932A-157CFA1337CC}"/>
+                <a16:creationId xmlns:a16="http://schemas.microsoft.com/office/drawing/2014/main" id="{685B1301-9721-4C77-9913-7D7BF334C8EF}"/>
               </a:ext>
             </a:extLst>
           </p:cNvPr>
@@ -7811,7 +7915,7 @@
           <p:cNvPr id="4" name="Rectangle 3">
             <a:extLst xmlns:a="http://schemas.openxmlformats.org/drawingml/2006/main">
               <a:ext uri="{FF2B5EF4-FFF2-40B4-BE49-F238E27FC236}">
-                <a16:creationId xmlns:a16="http://schemas.microsoft.com/office/drawing/2014/main" id="{FB3C17F1-9998-45A1-B37F-8A9C84023F96}"/>
+                <a16:creationId xmlns:a16="http://schemas.microsoft.com/office/drawing/2014/main" id="{7CB6E120-966A-4C87-B20E-73D1633CCC06}"/>
               </a:ext>
             </a:extLst>
           </p:cNvPr>
@@ -7864,7 +7968,7 @@
           <p:cNvPr id="5" name="TextBox 4">
             <a:extLst xmlns:a="http://schemas.openxmlformats.org/drawingml/2006/main">
               <a:ext uri="{FF2B5EF4-FFF2-40B4-BE49-F238E27FC236}">
-                <a16:creationId xmlns:a16="http://schemas.microsoft.com/office/drawing/2014/main" id="{D411869D-BAFA-448A-9A66-A8DBA0E34C07}"/>
+                <a16:creationId xmlns:a16="http://schemas.microsoft.com/office/drawing/2014/main" id="{C7F5A2F4-00AA-4875-B042-ECAE6DC17291}"/>
               </a:ext>
             </a:extLst>
           </p:cNvPr>
@@ -7927,7 +8031,7 @@
           <p:cNvPr id="6" name="Rounded Rectangle 5">
             <a:extLst xmlns:a="http://schemas.openxmlformats.org/drawingml/2006/main">
               <a:ext uri="{FF2B5EF4-FFF2-40B4-BE49-F238E27FC236}">
-                <a16:creationId xmlns:a16="http://schemas.microsoft.com/office/drawing/2014/main" id="{DFB18748-FC55-431B-9C29-0EFB2989B9AF}"/>
+                <a16:creationId xmlns:a16="http://schemas.microsoft.com/office/drawing/2014/main" id="{5A440847-36D1-4E77-97EE-D3A080B140B3}"/>
               </a:ext>
             </a:extLst>
           </p:cNvPr>
@@ -7982,7 +8086,7 @@
           <p:cNvPr id="7" name="TextBox 6">
             <a:extLst xmlns:a="http://schemas.openxmlformats.org/drawingml/2006/main">
               <a:ext uri="{FF2B5EF4-FFF2-40B4-BE49-F238E27FC236}">
-                <a16:creationId xmlns:a16="http://schemas.microsoft.com/office/drawing/2014/main" id="{ED7B7ECF-FCD5-4F64-ABDC-C477AE0672E8}"/>
+                <a16:creationId xmlns:a16="http://schemas.microsoft.com/office/drawing/2014/main" id="{57B0E7E2-2FD5-4B01-A724-660B7C446609}"/>
               </a:ext>
             </a:extLst>
           </p:cNvPr>
@@ -8105,7 +8209,7 @@
           <p:cNvPr id="8" name="Rounded Rectangle 7">
             <a:extLst xmlns:a="http://schemas.openxmlformats.org/drawingml/2006/main">
               <a:ext uri="{FF2B5EF4-FFF2-40B4-BE49-F238E27FC236}">
-                <a16:creationId xmlns:a16="http://schemas.microsoft.com/office/drawing/2014/main" id="{D51C0D9C-BA24-4223-A825-A6C4F73571F5}"/>
+                <a16:creationId xmlns:a16="http://schemas.microsoft.com/office/drawing/2014/main" id="{BE50C756-5468-4EB8-8C1B-DAD07582A560}"/>
               </a:ext>
             </a:extLst>
           </p:cNvPr>
@@ -8160,7 +8264,7 @@
           <p:cNvPr id="9" name="TextBox 8">
             <a:extLst xmlns:a="http://schemas.openxmlformats.org/drawingml/2006/main">
               <a:ext uri="{FF2B5EF4-FFF2-40B4-BE49-F238E27FC236}">
-                <a16:creationId xmlns:a16="http://schemas.microsoft.com/office/drawing/2014/main" id="{B79350EC-6311-47E5-A746-DE0681D431AA}"/>
+                <a16:creationId xmlns:a16="http://schemas.microsoft.com/office/drawing/2014/main" id="{FE8E9DDC-53CE-42B0-BE1E-B3B603C033CD}"/>
               </a:ext>
             </a:extLst>
           </p:cNvPr>
@@ -8302,7 +8406,7 @@
           <p:cNvPr id="10" name="Rounded Rectangle 9">
             <a:extLst xmlns:a="http://schemas.openxmlformats.org/drawingml/2006/main">
               <a:ext uri="{FF2B5EF4-FFF2-40B4-BE49-F238E27FC236}">
-                <a16:creationId xmlns:a16="http://schemas.microsoft.com/office/drawing/2014/main" id="{D35160D4-940D-4639-B780-243E0D8CF1FC}"/>
+                <a16:creationId xmlns:a16="http://schemas.microsoft.com/office/drawing/2014/main" id="{BEF7CB82-B488-4730-B7DC-58FC6590A789}"/>
               </a:ext>
             </a:extLst>
           </p:cNvPr>
@@ -8357,7 +8461,7 @@
           <p:cNvPr id="11" name="TextBox 10">
             <a:extLst xmlns:a="http://schemas.openxmlformats.org/drawingml/2006/main">
               <a:ext uri="{FF2B5EF4-FFF2-40B4-BE49-F238E27FC236}">
-                <a16:creationId xmlns:a16="http://schemas.microsoft.com/office/drawing/2014/main" id="{4081F1EB-BFFB-43FD-91EB-F535DF6D55B3}"/>
+                <a16:creationId xmlns:a16="http://schemas.microsoft.com/office/drawing/2014/main" id="{034A021A-C113-4C34-AA37-AA73124234F8}"/>
               </a:ext>
             </a:extLst>
           </p:cNvPr>
@@ -8459,7 +8563,7 @@
     </p:spTree>
     <p:extLst>
       <p:ext uri="{BB962C8B-B14F-4D97-AF65-F5344CB8AC3E}">
-        <p14:creationId xmlns:p14="http://schemas.microsoft.com/office/powerpoint/2010/main" val="69725368"/>
+        <p14:creationId xmlns:p14="http://schemas.microsoft.com/office/powerpoint/2010/main" val="1138726834"/>
       </p:ext>
     </p:extLst>
   </p:cSld>
@@ -8483,7 +8587,7 @@
           <p:cNvPr id="2" name="Rectangle 1">
             <a:extLst xmlns:a="http://schemas.openxmlformats.org/drawingml/2006/main">
               <a:ext uri="{FF2B5EF4-FFF2-40B4-BE49-F238E27FC236}">
-                <a16:creationId xmlns:a16="http://schemas.microsoft.com/office/drawing/2014/main" id="{807A5DEC-4105-4256-89A0-9AA027AD728B}"/>
+                <a16:creationId xmlns:a16="http://schemas.microsoft.com/office/drawing/2014/main" id="{C06A0E81-112E-4DE7-8A27-D718881C10C7}"/>
               </a:ext>
             </a:extLst>
           </p:cNvPr>
@@ -8536,7 +8640,7 @@
           <p:cNvPr id="3" name="Rectangle 2">
             <a:extLst xmlns:a="http://schemas.openxmlformats.org/drawingml/2006/main">
               <a:ext uri="{FF2B5EF4-FFF2-40B4-BE49-F238E27FC236}">
-                <a16:creationId xmlns:a16="http://schemas.microsoft.com/office/drawing/2014/main" id="{C9249182-2BD9-4955-8D22-A06F98F3CC47}"/>
+                <a16:creationId xmlns:a16="http://schemas.microsoft.com/office/drawing/2014/main" id="{169B8B6B-4ED1-44A5-9892-94B6C92973FF}"/>
               </a:ext>
             </a:extLst>
           </p:cNvPr>
@@ -8589,7 +8693,7 @@
           <p:cNvPr id="4" name="Rectangle 3">
             <a:extLst xmlns:a="http://schemas.openxmlformats.org/drawingml/2006/main">
               <a:ext uri="{FF2B5EF4-FFF2-40B4-BE49-F238E27FC236}">
-                <a16:creationId xmlns:a16="http://schemas.microsoft.com/office/drawing/2014/main" id="{4055747E-B363-4A26-A2D8-7867298C45CC}"/>
+                <a16:creationId xmlns:a16="http://schemas.microsoft.com/office/drawing/2014/main" id="{C8233F66-6D28-4589-AF22-390BB356F0A1}"/>
               </a:ext>
             </a:extLst>
           </p:cNvPr>
@@ -8642,7 +8746,7 @@
           <p:cNvPr id="5" name="TextBox 4">
             <a:extLst xmlns:a="http://schemas.openxmlformats.org/drawingml/2006/main">
               <a:ext uri="{FF2B5EF4-FFF2-40B4-BE49-F238E27FC236}">
-                <a16:creationId xmlns:a16="http://schemas.microsoft.com/office/drawing/2014/main" id="{0B17AF7A-12D6-42A5-8797-AD167445FFDF}"/>
+                <a16:creationId xmlns:a16="http://schemas.microsoft.com/office/drawing/2014/main" id="{2F019A34-6732-436D-AC98-6C05AF962EC5}"/>
               </a:ext>
             </a:extLst>
           </p:cNvPr>
@@ -8705,7 +8809,7 @@
           <p:cNvPr id="6" name="Rounded Rectangle 5">
             <a:extLst xmlns:a="http://schemas.openxmlformats.org/drawingml/2006/main">
               <a:ext uri="{FF2B5EF4-FFF2-40B4-BE49-F238E27FC236}">
-                <a16:creationId xmlns:a16="http://schemas.microsoft.com/office/drawing/2014/main" id="{EAA0C771-1860-4683-8345-301BBDFD9845}"/>
+                <a16:creationId xmlns:a16="http://schemas.microsoft.com/office/drawing/2014/main" id="{D6C863BE-087A-40A8-A986-CB8123E9AE1E}"/>
               </a:ext>
             </a:extLst>
           </p:cNvPr>
@@ -8760,7 +8864,7 @@
           <p:cNvPr id="7" name="TextBox 6">
             <a:extLst xmlns:a="http://schemas.openxmlformats.org/drawingml/2006/main">
               <a:ext uri="{FF2B5EF4-FFF2-40B4-BE49-F238E27FC236}">
-                <a16:creationId xmlns:a16="http://schemas.microsoft.com/office/drawing/2014/main" id="{024FFE8C-7998-46F1-B833-F55EF0AC0A7A}"/>
+                <a16:creationId xmlns:a16="http://schemas.microsoft.com/office/drawing/2014/main" id="{49F5DC73-117B-47A3-9C10-204AC772D1CB}"/>
               </a:ext>
             </a:extLst>
           </p:cNvPr>
@@ -8940,7 +9044,7 @@
           <p:cNvPr id="8" name="Rounded Rectangle 7">
             <a:extLst xmlns:a="http://schemas.openxmlformats.org/drawingml/2006/main">
               <a:ext uri="{FF2B5EF4-FFF2-40B4-BE49-F238E27FC236}">
-                <a16:creationId xmlns:a16="http://schemas.microsoft.com/office/drawing/2014/main" id="{3CC2E2A6-55F2-48C7-A355-D16E737340B4}"/>
+                <a16:creationId xmlns:a16="http://schemas.microsoft.com/office/drawing/2014/main" id="{FD5CAAE9-3FDE-4AFB-AEEC-9AA5BEDEF3D9}"/>
               </a:ext>
             </a:extLst>
           </p:cNvPr>
@@ -8995,7 +9099,7 @@
           <p:cNvPr id="9" name="TextBox 8">
             <a:extLst xmlns:a="http://schemas.openxmlformats.org/drawingml/2006/main">
               <a:ext uri="{FF2B5EF4-FFF2-40B4-BE49-F238E27FC236}">
-                <a16:creationId xmlns:a16="http://schemas.microsoft.com/office/drawing/2014/main" id="{BDD24B2E-A010-4941-823D-BA071175C22F}"/>
+                <a16:creationId xmlns:a16="http://schemas.microsoft.com/office/drawing/2014/main" id="{6BC40961-34E4-4A71-931C-7E6B18A081EC}"/>
               </a:ext>
             </a:extLst>
           </p:cNvPr>
@@ -9154,7 +9258,7 @@
     </p:spTree>
     <p:extLst>
       <p:ext uri="{BB962C8B-B14F-4D97-AF65-F5344CB8AC3E}">
-        <p14:creationId xmlns:p14="http://schemas.microsoft.com/office/powerpoint/2010/main" val="1292470837"/>
+        <p14:creationId xmlns:p14="http://schemas.microsoft.com/office/powerpoint/2010/main" val="1079442881"/>
       </p:ext>
     </p:extLst>
   </p:cSld>
@@ -9178,7 +9282,7 @@
           <p:cNvPr id="2" name="Rectangle 1">
             <a:extLst xmlns:a="http://schemas.openxmlformats.org/drawingml/2006/main">
               <a:ext uri="{FF2B5EF4-FFF2-40B4-BE49-F238E27FC236}">
-                <a16:creationId xmlns:a16="http://schemas.microsoft.com/office/drawing/2014/main" id="{6D2B0BE9-D4E8-4893-A0C1-DC575D4BD09A}"/>
+                <a16:creationId xmlns:a16="http://schemas.microsoft.com/office/drawing/2014/main" id="{95182A3F-28C4-410D-9262-309F509BD214}"/>
               </a:ext>
             </a:extLst>
           </p:cNvPr>
@@ -9231,7 +9335,7 @@
           <p:cNvPr id="3" name="Rectangle 2">
             <a:extLst xmlns:a="http://schemas.openxmlformats.org/drawingml/2006/main">
               <a:ext uri="{FF2B5EF4-FFF2-40B4-BE49-F238E27FC236}">
-                <a16:creationId xmlns:a16="http://schemas.microsoft.com/office/drawing/2014/main" id="{90E7F9A9-6135-4010-8D9E-79B7C395AAC8}"/>
+                <a16:creationId xmlns:a16="http://schemas.microsoft.com/office/drawing/2014/main" id="{981422DF-B182-442C-9414-4883B32DCDFB}"/>
               </a:ext>
             </a:extLst>
           </p:cNvPr>
@@ -9284,7 +9388,7 @@
           <p:cNvPr id="4" name="Rectangle 3">
             <a:extLst xmlns:a="http://schemas.openxmlformats.org/drawingml/2006/main">
               <a:ext uri="{FF2B5EF4-FFF2-40B4-BE49-F238E27FC236}">
-                <a16:creationId xmlns:a16="http://schemas.microsoft.com/office/drawing/2014/main" id="{E01022DF-2A09-45E5-BE77-DBD8E8034336}"/>
+                <a16:creationId xmlns:a16="http://schemas.microsoft.com/office/drawing/2014/main" id="{6B92C33F-C785-4639-931B-A5EF3B377459}"/>
               </a:ext>
             </a:extLst>
           </p:cNvPr>
@@ -9337,7 +9441,7 @@
           <p:cNvPr id="5" name="TextBox 4">
             <a:extLst xmlns:a="http://schemas.openxmlformats.org/drawingml/2006/main">
               <a:ext uri="{FF2B5EF4-FFF2-40B4-BE49-F238E27FC236}">
-                <a16:creationId xmlns:a16="http://schemas.microsoft.com/office/drawing/2014/main" id="{3EDCE2A6-F034-4439-A241-A588C4FC23D8}"/>
+                <a16:creationId xmlns:a16="http://schemas.microsoft.com/office/drawing/2014/main" id="{179ECFD0-8EC1-4FD0-99D8-B08477C86CAD}"/>
               </a:ext>
             </a:extLst>
           </p:cNvPr>
@@ -9400,7 +9504,7 @@
           <p:cNvPr id="6" name="Rounded Rectangle 5">
             <a:extLst xmlns:a="http://schemas.openxmlformats.org/drawingml/2006/main">
               <a:ext uri="{FF2B5EF4-FFF2-40B4-BE49-F238E27FC236}">
-                <a16:creationId xmlns:a16="http://schemas.microsoft.com/office/drawing/2014/main" id="{03B4A867-EE22-42C4-949A-C767D99AAA4C}"/>
+                <a16:creationId xmlns:a16="http://schemas.microsoft.com/office/drawing/2014/main" id="{921E1D20-BA63-48E6-B40A-B49946E776EA}"/>
               </a:ext>
             </a:extLst>
           </p:cNvPr>
@@ -9455,7 +9559,7 @@
           <p:cNvPr id="7" name="TextBox 6">
             <a:extLst xmlns:a="http://schemas.openxmlformats.org/drawingml/2006/main">
               <a:ext uri="{FF2B5EF4-FFF2-40B4-BE49-F238E27FC236}">
-                <a16:creationId xmlns:a16="http://schemas.microsoft.com/office/drawing/2014/main" id="{3E221609-8DC5-4069-A6D7-65B79173458F}"/>
+                <a16:creationId xmlns:a16="http://schemas.microsoft.com/office/drawing/2014/main" id="{60776BB1-2E6E-4D26-B469-6C2415A1186F}"/>
               </a:ext>
             </a:extLst>
           </p:cNvPr>
@@ -9673,7 +9777,7 @@
           <p:cNvPr id="8" name="Rounded Rectangle 7">
             <a:extLst xmlns:a="http://schemas.openxmlformats.org/drawingml/2006/main">
               <a:ext uri="{FF2B5EF4-FFF2-40B4-BE49-F238E27FC236}">
-                <a16:creationId xmlns:a16="http://schemas.microsoft.com/office/drawing/2014/main" id="{F4B96CD1-2DDD-425C-A4D0-19A746C1F3AB}"/>
+                <a16:creationId xmlns:a16="http://schemas.microsoft.com/office/drawing/2014/main" id="{312621E4-B8C6-4A1D-B262-8240B0C24802}"/>
               </a:ext>
             </a:extLst>
           </p:cNvPr>
@@ -9728,7 +9832,7 @@
           <p:cNvPr id="9" name="TextBox 8">
             <a:extLst xmlns:a="http://schemas.openxmlformats.org/drawingml/2006/main">
               <a:ext uri="{FF2B5EF4-FFF2-40B4-BE49-F238E27FC236}">
-                <a16:creationId xmlns:a16="http://schemas.microsoft.com/office/drawing/2014/main" id="{F29BC204-275B-45C9-B46F-CA83548A8566}"/>
+                <a16:creationId xmlns:a16="http://schemas.microsoft.com/office/drawing/2014/main" id="{B1A3EEA3-41C3-4510-8579-FDA265244A24}"/>
               </a:ext>
             </a:extLst>
           </p:cNvPr>
@@ -9963,7 +10067,7 @@
     </p:spTree>
     <p:extLst>
       <p:ext uri="{BB962C8B-B14F-4D97-AF65-F5344CB8AC3E}">
-        <p14:creationId xmlns:p14="http://schemas.microsoft.com/office/powerpoint/2010/main" val="879682298"/>
+        <p14:creationId xmlns:p14="http://schemas.microsoft.com/office/powerpoint/2010/main" val="792679513"/>
       </p:ext>
     </p:extLst>
   </p:cSld>
@@ -9987,7 +10091,7 @@
           <p:cNvPr id="2" name="Rectangle 1">
             <a:extLst xmlns:a="http://schemas.openxmlformats.org/drawingml/2006/main">
               <a:ext uri="{FF2B5EF4-FFF2-40B4-BE49-F238E27FC236}">
-                <a16:creationId xmlns:a16="http://schemas.microsoft.com/office/drawing/2014/main" id="{E86AF65E-95D5-48FE-95E9-A68C2D392529}"/>
+                <a16:creationId xmlns:a16="http://schemas.microsoft.com/office/drawing/2014/main" id="{A132FAFB-DF17-45F9-B613-3637E96ECEAD}"/>
               </a:ext>
             </a:extLst>
           </p:cNvPr>
@@ -10040,7 +10144,7 @@
           <p:cNvPr id="3" name="Rectangle 2">
             <a:extLst xmlns:a="http://schemas.openxmlformats.org/drawingml/2006/main">
               <a:ext uri="{FF2B5EF4-FFF2-40B4-BE49-F238E27FC236}">
-                <a16:creationId xmlns:a16="http://schemas.microsoft.com/office/drawing/2014/main" id="{F4DBB4A8-18CB-4DF8-BB23-D01FDC64E6C2}"/>
+                <a16:creationId xmlns:a16="http://schemas.microsoft.com/office/drawing/2014/main" id="{4886E82B-EF7E-41CB-B679-D491F89AF2FE}"/>
               </a:ext>
             </a:extLst>
           </p:cNvPr>
@@ -10093,7 +10197,7 @@
           <p:cNvPr id="4" name="Rectangle 3">
             <a:extLst xmlns:a="http://schemas.openxmlformats.org/drawingml/2006/main">
               <a:ext uri="{FF2B5EF4-FFF2-40B4-BE49-F238E27FC236}">
-                <a16:creationId xmlns:a16="http://schemas.microsoft.com/office/drawing/2014/main" id="{FC02808A-3F3A-43CB-A3FB-254F6A65C366}"/>
+                <a16:creationId xmlns:a16="http://schemas.microsoft.com/office/drawing/2014/main" id="{A5C31D4C-A91F-4A08-BB71-56E2D45ED978}"/>
               </a:ext>
             </a:extLst>
           </p:cNvPr>
@@ -10146,7 +10250,7 @@
           <p:cNvPr id="5" name="TextBox 4">
             <a:extLst xmlns:a="http://schemas.openxmlformats.org/drawingml/2006/main">
               <a:ext uri="{FF2B5EF4-FFF2-40B4-BE49-F238E27FC236}">
-                <a16:creationId xmlns:a16="http://schemas.microsoft.com/office/drawing/2014/main" id="{A53CCD2F-E0A6-48EA-B3B6-FCBA21F1A69B}"/>
+                <a16:creationId xmlns:a16="http://schemas.microsoft.com/office/drawing/2014/main" id="{5BBD41F0-8473-44C0-811C-45FCF578D892}"/>
               </a:ext>
             </a:extLst>
           </p:cNvPr>
@@ -10209,7 +10313,7 @@
           <p:cNvPr id="6" name="Rounded Rectangle 5">
             <a:extLst xmlns:a="http://schemas.openxmlformats.org/drawingml/2006/main">
               <a:ext uri="{FF2B5EF4-FFF2-40B4-BE49-F238E27FC236}">
-                <a16:creationId xmlns:a16="http://schemas.microsoft.com/office/drawing/2014/main" id="{947EF817-95F5-4678-9C31-3B273DB8C966}"/>
+                <a16:creationId xmlns:a16="http://schemas.microsoft.com/office/drawing/2014/main" id="{4E6E4FD4-D772-4424-B422-D07304E00DD4}"/>
               </a:ext>
             </a:extLst>
           </p:cNvPr>
@@ -10264,7 +10368,7 @@
           <p:cNvPr id="7" name="TextBox 6">
             <a:extLst xmlns:a="http://schemas.openxmlformats.org/drawingml/2006/main">
               <a:ext uri="{FF2B5EF4-FFF2-40B4-BE49-F238E27FC236}">
-                <a16:creationId xmlns:a16="http://schemas.microsoft.com/office/drawing/2014/main" id="{3D7E0AA4-4DAA-4714-9E27-354BD39ABFF3}"/>
+                <a16:creationId xmlns:a16="http://schemas.microsoft.com/office/drawing/2014/main" id="{67D72D16-A572-4C40-9B18-769A5AF34EFF}"/>
               </a:ext>
             </a:extLst>
           </p:cNvPr>
@@ -10647,7 +10751,7 @@
           <p:nvPr/>
         </p:nvPicPr>
         <p:blipFill>
-          <a:blip xmlns:r="http://schemas.openxmlformats.org/officeDocument/2006/relationships" xmlns:a="http://schemas.openxmlformats.org/drawingml/2006/main" r:embed="Rb458d6a1250c4adf"/>
+          <a:blip xmlns:r="http://schemas.openxmlformats.org/officeDocument/2006/relationships" xmlns:a="http://schemas.openxmlformats.org/drawingml/2006/main" r:embed="R291386277bea42d7"/>
           <a:stretch xmlns:a="http://schemas.openxmlformats.org/drawingml/2006/main">
             <a:fillRect l="0" t="0" r="0" b="0"/>
           </a:stretch>
@@ -10667,7 +10771,7 @@
           <p:cNvPr id="9" name="Rounded Rectangle 8">
             <a:extLst xmlns:a="http://schemas.openxmlformats.org/drawingml/2006/main">
               <a:ext uri="{FF2B5EF4-FFF2-40B4-BE49-F238E27FC236}">
-                <a16:creationId xmlns:a16="http://schemas.microsoft.com/office/drawing/2014/main" id="{7D4A5D72-B1C8-4DF6-A87B-4F25769AEF03}"/>
+                <a16:creationId xmlns:a16="http://schemas.microsoft.com/office/drawing/2014/main" id="{F141A053-F0A4-4C4E-B477-10B4033783BA}"/>
               </a:ext>
             </a:extLst>
           </p:cNvPr>
@@ -10722,7 +10826,7 @@
           <p:cNvPr id="10" name="TextBox 9">
             <a:extLst xmlns:a="http://schemas.openxmlformats.org/drawingml/2006/main">
               <a:ext uri="{FF2B5EF4-FFF2-40B4-BE49-F238E27FC236}">
-                <a16:creationId xmlns:a16="http://schemas.microsoft.com/office/drawing/2014/main" id="{4DF0C028-CD25-445E-9736-3A21CBBB23D6}"/>
+                <a16:creationId xmlns:a16="http://schemas.microsoft.com/office/drawing/2014/main" id="{A2CD381C-5BF1-404C-BB86-8223A3B9B1BC}"/>
               </a:ext>
             </a:extLst>
           </p:cNvPr>
@@ -10808,7 +10912,7 @@
     </p:spTree>
     <p:extLst>
       <p:ext uri="{BB962C8B-B14F-4D97-AF65-F5344CB8AC3E}">
-        <p14:creationId xmlns:p14="http://schemas.microsoft.com/office/powerpoint/2010/main" val="286866128"/>
+        <p14:creationId xmlns:p14="http://schemas.microsoft.com/office/powerpoint/2010/main" val="943614126"/>
       </p:ext>
     </p:extLst>
   </p:cSld>
@@ -10832,7 +10936,7 @@
           <p:cNvPr id="2" name="Rectangle 1">
             <a:extLst xmlns:a="http://schemas.openxmlformats.org/drawingml/2006/main">
               <a:ext uri="{FF2B5EF4-FFF2-40B4-BE49-F238E27FC236}">
-                <a16:creationId xmlns:a16="http://schemas.microsoft.com/office/drawing/2014/main" id="{7BA7B7DA-4C17-4D6E-851B-8431FDD16FBF}"/>
+                <a16:creationId xmlns:a16="http://schemas.microsoft.com/office/drawing/2014/main" id="{6E1CACC9-49B5-467B-AB68-DA991D8A02B6}"/>
               </a:ext>
             </a:extLst>
           </p:cNvPr>
@@ -10885,7 +10989,7 @@
           <p:cNvPr id="3" name="Rectangle 2">
             <a:extLst xmlns:a="http://schemas.openxmlformats.org/drawingml/2006/main">
               <a:ext uri="{FF2B5EF4-FFF2-40B4-BE49-F238E27FC236}">
-                <a16:creationId xmlns:a16="http://schemas.microsoft.com/office/drawing/2014/main" id="{CA8947FF-BE31-4883-A97C-DC7B68C0855F}"/>
+                <a16:creationId xmlns:a16="http://schemas.microsoft.com/office/drawing/2014/main" id="{E9B04071-5356-485E-96C6-6D5C63B99BB8}"/>
               </a:ext>
             </a:extLst>
           </p:cNvPr>
@@ -10938,7 +11042,7 @@
           <p:cNvPr id="4" name="Rectangle 3">
             <a:extLst xmlns:a="http://schemas.openxmlformats.org/drawingml/2006/main">
               <a:ext uri="{FF2B5EF4-FFF2-40B4-BE49-F238E27FC236}">
-                <a16:creationId xmlns:a16="http://schemas.microsoft.com/office/drawing/2014/main" id="{7B6EAAE2-C7A1-4308-9F1D-3F5B984EC749}"/>
+                <a16:creationId xmlns:a16="http://schemas.microsoft.com/office/drawing/2014/main" id="{111729A7-A8FC-4014-A6E9-E52B5CE227CC}"/>
               </a:ext>
             </a:extLst>
           </p:cNvPr>
@@ -10991,7 +11095,7 @@
           <p:cNvPr id="5" name="TextBox 4">
             <a:extLst xmlns:a="http://schemas.openxmlformats.org/drawingml/2006/main">
               <a:ext uri="{FF2B5EF4-FFF2-40B4-BE49-F238E27FC236}">
-                <a16:creationId xmlns:a16="http://schemas.microsoft.com/office/drawing/2014/main" id="{FDC6BCF2-7DCD-4042-AEF5-8FDCDFD97D29}"/>
+                <a16:creationId xmlns:a16="http://schemas.microsoft.com/office/drawing/2014/main" id="{852B6993-038B-4FC3-AE08-4991FCD83268}"/>
               </a:ext>
             </a:extLst>
           </p:cNvPr>
@@ -11054,7 +11158,7 @@
           <p:cNvPr id="6" name="Rounded Rectangle 5">
             <a:extLst xmlns:a="http://schemas.openxmlformats.org/drawingml/2006/main">
               <a:ext uri="{FF2B5EF4-FFF2-40B4-BE49-F238E27FC236}">
-                <a16:creationId xmlns:a16="http://schemas.microsoft.com/office/drawing/2014/main" id="{8A5BA445-82C0-47E6-B944-3C78F0C31AB4}"/>
+                <a16:creationId xmlns:a16="http://schemas.microsoft.com/office/drawing/2014/main" id="{100B1B97-249E-4D3E-A059-B084C028B32A}"/>
               </a:ext>
             </a:extLst>
           </p:cNvPr>
@@ -11109,7 +11213,7 @@
           <p:cNvPr id="7" name="TextBox 6">
             <a:extLst xmlns:a="http://schemas.openxmlformats.org/drawingml/2006/main">
               <a:ext uri="{FF2B5EF4-FFF2-40B4-BE49-F238E27FC236}">
-                <a16:creationId xmlns:a16="http://schemas.microsoft.com/office/drawing/2014/main" id="{F9C06B8C-D4BD-4506-AB89-2254EF8BE1A1}"/>
+                <a16:creationId xmlns:a16="http://schemas.microsoft.com/office/drawing/2014/main" id="{07B7AECF-4322-4CF7-8DDE-2B734D98C9DF}"/>
               </a:ext>
             </a:extLst>
           </p:cNvPr>
@@ -11346,7 +11450,7 @@
           <p:cNvPr id="8" name="Rounded Rectangle 7">
             <a:extLst xmlns:a="http://schemas.openxmlformats.org/drawingml/2006/main">
               <a:ext uri="{FF2B5EF4-FFF2-40B4-BE49-F238E27FC236}">
-                <a16:creationId xmlns:a16="http://schemas.microsoft.com/office/drawing/2014/main" id="{B7D42736-A82B-4A72-B746-02B26A4F9D15}"/>
+                <a16:creationId xmlns:a16="http://schemas.microsoft.com/office/drawing/2014/main" id="{C55114E1-519F-4D86-8898-5A18035F05E6}"/>
               </a:ext>
             </a:extLst>
           </p:cNvPr>
@@ -11401,7 +11505,7 @@
           <p:cNvPr id="9" name="TextBox 8">
             <a:extLst xmlns:a="http://schemas.openxmlformats.org/drawingml/2006/main">
               <a:ext uri="{FF2B5EF4-FFF2-40B4-BE49-F238E27FC236}">
-                <a16:creationId xmlns:a16="http://schemas.microsoft.com/office/drawing/2014/main" id="{6BD4EC4E-9ED5-4E27-9CDE-6A281F93C6B5}"/>
+                <a16:creationId xmlns:a16="http://schemas.microsoft.com/office/drawing/2014/main" id="{6AA9C966-5284-45BC-8769-2587DE7B7D36}"/>
               </a:ext>
             </a:extLst>
           </p:cNvPr>
@@ -11413,7 +11517,7 @@
         <p:spPr>
           <a:xfrm xmlns:a="http://schemas.openxmlformats.org/drawingml/2006/main">
             <a:off x="6430975" y="1344168"/>
-            <a:ext cx="4846320" cy="5158740"/>
+            <a:ext cx="4846320" cy="5410200"/>
           </a:xfrm>
           <a:prstGeom xmlns:a="http://schemas.openxmlformats.org/drawingml/2006/main" prst="rect">
             <a:avLst/>
@@ -11517,12 +11621,142 @@
               </a:defRPr>
             </a:pPr>
             <a:r>
-              <a:t>•  Schema So Sánh Đối Chứng Scaffold [DIAGNOSTIC TEST FIXTURE ONLY - NOT CANONICAL NUMERICAL RESULTS]:
-  • Diagnostic Cohort Pairwise Comparison (n=718 views across 440 clusters):
-    • Marginal Views: Single-event Acc = 0.5000 vs Contextual-event Acc = 0.5000 (Delta = +0.0000)
-    • Paired Cohort (278 complete pairs): Single Acc = 0.5000 vs Context Acc = 0.5000 (Delta = +0.00 pp)
-    • Pair Concordance: Both Correct = 139, Single-only Correct = 0, Context-only Correct = 0, Both Incorrect = 139
-    • McNemar Exploratory Test: p_asympt = 1.0000, p_exact = 1.0000</a:t>
+              <a:t>•  Schema So Sánh Đối Chứng Scaffold [DIAGNOSTIC TEST FIXTURE ONLY - NOT CANONICAL NUMERICAL RESULTS]:</a:t>
+            </a:r>
+          </a:p>
+          <a:p xmlns:a="http://schemas.openxmlformats.org/drawingml/2006/main">
+            <a:pPr>
+              <a:spcBef>
+                <a:spcPts val="300"/>
+              </a:spcBef>
+              <a:buNone/>
+              <a:defRPr sz="1150">
+                <a:solidFill>
+                  <a:srgbClr val="0F172A"/>
+                </a:solidFill>
+                <a:latin typeface="Calibri"/>
+                <a:ea typeface="Calibri"/>
+                <a:cs typeface="Calibri"/>
+              </a:defRPr>
+            </a:pPr>
+            <a:r>
+              <a:rPr sz="1150">
+                <a:solidFill>
+                  <a:srgbClr val="0F172A"/>
+                </a:solidFill>
+                <a:latin typeface="Calibri"/>
+                <a:ea typeface="Calibri"/>
+                <a:cs typeface="Calibri"/>
+              </a:rPr>
+              <a:t>  • Diagnostic Cohort Pairwise Comparison (n=718 views across 440 clusters):</a:t>
+            </a:r>
+          </a:p>
+          <a:p xmlns:a="http://schemas.openxmlformats.org/drawingml/2006/main">
+            <a:pPr>
+              <a:spcBef>
+                <a:spcPts val="300"/>
+              </a:spcBef>
+              <a:buNone/>
+              <a:defRPr sz="1150">
+                <a:solidFill>
+                  <a:srgbClr val="0F172A"/>
+                </a:solidFill>
+                <a:latin typeface="Calibri"/>
+                <a:ea typeface="Calibri"/>
+                <a:cs typeface="Calibri"/>
+              </a:defRPr>
+            </a:pPr>
+            <a:r>
+              <a:rPr sz="1150">
+                <a:solidFill>
+                  <a:srgbClr val="0F172A"/>
+                </a:solidFill>
+                <a:latin typeface="Calibri"/>
+                <a:ea typeface="Calibri"/>
+                <a:cs typeface="Calibri"/>
+              </a:rPr>
+              <a:t>    • Marginal Views: Single-event Acc = 0.5000 vs Contextual-event Acc = 0.5000 (Delta = +0.0000)</a:t>
+            </a:r>
+          </a:p>
+          <a:p xmlns:a="http://schemas.openxmlformats.org/drawingml/2006/main">
+            <a:pPr>
+              <a:spcBef>
+                <a:spcPts val="300"/>
+              </a:spcBef>
+              <a:buNone/>
+              <a:defRPr sz="1150">
+                <a:solidFill>
+                  <a:srgbClr val="0F172A"/>
+                </a:solidFill>
+                <a:latin typeface="Calibri"/>
+                <a:ea typeface="Calibri"/>
+                <a:cs typeface="Calibri"/>
+              </a:defRPr>
+            </a:pPr>
+            <a:r>
+              <a:rPr sz="1150">
+                <a:solidFill>
+                  <a:srgbClr val="0F172A"/>
+                </a:solidFill>
+                <a:latin typeface="Calibri"/>
+                <a:ea typeface="Calibri"/>
+                <a:cs typeface="Calibri"/>
+              </a:rPr>
+              <a:t>    • Paired Cohort (278 complete pairs): Single Acc = 0.5000 vs Context Acc = 0.5000 (Delta = +0.00 pp)</a:t>
+            </a:r>
+          </a:p>
+          <a:p xmlns:a="http://schemas.openxmlformats.org/drawingml/2006/main">
+            <a:pPr>
+              <a:spcBef>
+                <a:spcPts val="300"/>
+              </a:spcBef>
+              <a:buNone/>
+              <a:defRPr sz="1150">
+                <a:solidFill>
+                  <a:srgbClr val="0F172A"/>
+                </a:solidFill>
+                <a:latin typeface="Calibri"/>
+                <a:ea typeface="Calibri"/>
+                <a:cs typeface="Calibri"/>
+              </a:defRPr>
+            </a:pPr>
+            <a:r>
+              <a:rPr sz="1150">
+                <a:solidFill>
+                  <a:srgbClr val="0F172A"/>
+                </a:solidFill>
+                <a:latin typeface="Calibri"/>
+                <a:ea typeface="Calibri"/>
+                <a:cs typeface="Calibri"/>
+              </a:rPr>
+              <a:t>    • Pair Concordance: Both Correct = 139, Single-only Correct = 0, Context-only Correct = 0, Both Incorrect = 139</a:t>
+            </a:r>
+          </a:p>
+          <a:p xmlns:a="http://schemas.openxmlformats.org/drawingml/2006/main">
+            <a:pPr>
+              <a:spcBef>
+                <a:spcPts val="300"/>
+              </a:spcBef>
+              <a:buNone/>
+              <a:defRPr sz="1150">
+                <a:solidFill>
+                  <a:srgbClr val="0F172A"/>
+                </a:solidFill>
+                <a:latin typeface="Calibri"/>
+                <a:ea typeface="Calibri"/>
+                <a:cs typeface="Calibri"/>
+              </a:defRPr>
+            </a:pPr>
+            <a:r>
+              <a:rPr sz="1150">
+                <a:solidFill>
+                  <a:srgbClr val="0F172A"/>
+                </a:solidFill>
+                <a:latin typeface="Calibri"/>
+                <a:ea typeface="Calibri"/>
+                <a:cs typeface="Calibri"/>
+              </a:rPr>
+              <a:t>    • McNemar Exploratory Test: p_asympt = 1.0000, p_exact = 1.0000</a:t>
             </a:r>
           </a:p>
           <a:p xmlns:a="http://schemas.openxmlformats.org/drawingml/2006/main">
@@ -11606,7 +11840,7 @@
     </p:spTree>
     <p:extLst>
       <p:ext uri="{BB962C8B-B14F-4D97-AF65-F5344CB8AC3E}">
-        <p14:creationId xmlns:p14="http://schemas.microsoft.com/office/powerpoint/2010/main" val="1355867882"/>
+        <p14:creationId xmlns:p14="http://schemas.microsoft.com/office/powerpoint/2010/main" val="815533390"/>
       </p:ext>
     </p:extLst>
   </p:cSld>
@@ -11630,7 +11864,7 @@
           <p:cNvPr id="2" name="Rectangle 1">
             <a:extLst xmlns:a="http://schemas.openxmlformats.org/drawingml/2006/main">
               <a:ext uri="{FF2B5EF4-FFF2-40B4-BE49-F238E27FC236}">
-                <a16:creationId xmlns:a16="http://schemas.microsoft.com/office/drawing/2014/main" id="{D16BBA1C-E8CD-4C63-BAE6-101EE3B73F24}"/>
+                <a16:creationId xmlns:a16="http://schemas.microsoft.com/office/drawing/2014/main" id="{D442BEAC-C47A-431A-9423-194AA01E1520}"/>
               </a:ext>
             </a:extLst>
           </p:cNvPr>
@@ -11683,7 +11917,7 @@
           <p:cNvPr id="3" name="Rectangle 2">
             <a:extLst xmlns:a="http://schemas.openxmlformats.org/drawingml/2006/main">
               <a:ext uri="{FF2B5EF4-FFF2-40B4-BE49-F238E27FC236}">
-                <a16:creationId xmlns:a16="http://schemas.microsoft.com/office/drawing/2014/main" id="{37B01FA6-B8B3-4A25-8411-4D0BB455BB0D}"/>
+                <a16:creationId xmlns:a16="http://schemas.microsoft.com/office/drawing/2014/main" id="{01D862B2-C822-4617-940B-BBA340FCD56A}"/>
               </a:ext>
             </a:extLst>
           </p:cNvPr>
@@ -11736,7 +11970,7 @@
           <p:cNvPr id="4" name="Rectangle 3">
             <a:extLst xmlns:a="http://schemas.openxmlformats.org/drawingml/2006/main">
               <a:ext uri="{FF2B5EF4-FFF2-40B4-BE49-F238E27FC236}">
-                <a16:creationId xmlns:a16="http://schemas.microsoft.com/office/drawing/2014/main" id="{DE1491BD-1654-4925-AE8E-AAFA97E90987}"/>
+                <a16:creationId xmlns:a16="http://schemas.microsoft.com/office/drawing/2014/main" id="{A0DED8BB-2393-44DE-9C36-489B96DEBA9D}"/>
               </a:ext>
             </a:extLst>
           </p:cNvPr>
@@ -11789,7 +12023,7 @@
           <p:cNvPr id="5" name="TextBox 4">
             <a:extLst xmlns:a="http://schemas.openxmlformats.org/drawingml/2006/main">
               <a:ext uri="{FF2B5EF4-FFF2-40B4-BE49-F238E27FC236}">
-                <a16:creationId xmlns:a16="http://schemas.microsoft.com/office/drawing/2014/main" id="{3AADF7B4-7948-4708-884F-D7CA9BBAB47D}"/>
+                <a16:creationId xmlns:a16="http://schemas.microsoft.com/office/drawing/2014/main" id="{34FC8F9B-5D6B-4FC6-BC32-26D0BA553511}"/>
               </a:ext>
             </a:extLst>
           </p:cNvPr>
@@ -11852,7 +12086,7 @@
           <p:cNvPr id="6" name="Rounded Rectangle 5">
             <a:extLst xmlns:a="http://schemas.openxmlformats.org/drawingml/2006/main">
               <a:ext uri="{FF2B5EF4-FFF2-40B4-BE49-F238E27FC236}">
-                <a16:creationId xmlns:a16="http://schemas.microsoft.com/office/drawing/2014/main" id="{061AA687-3FE8-4DAA-A504-6E29F0EEBDC5}"/>
+                <a16:creationId xmlns:a16="http://schemas.microsoft.com/office/drawing/2014/main" id="{89D84675-38BA-4EFA-828C-44F2BFBC8D83}"/>
               </a:ext>
             </a:extLst>
           </p:cNvPr>
@@ -11907,7 +12141,7 @@
           <p:cNvPr id="7" name="TextBox 6">
             <a:extLst xmlns:a="http://schemas.openxmlformats.org/drawingml/2006/main">
               <a:ext uri="{FF2B5EF4-FFF2-40B4-BE49-F238E27FC236}">
-                <a16:creationId xmlns:a16="http://schemas.microsoft.com/office/drawing/2014/main" id="{E8A21D1E-0C17-4300-AD79-A274BCDB0F6C}"/>
+                <a16:creationId xmlns:a16="http://schemas.microsoft.com/office/drawing/2014/main" id="{B5C69696-62EB-4FE8-8E5B-3CE7A5505AB1}"/>
               </a:ext>
             </a:extLst>
           </p:cNvPr>
@@ -12030,7 +12264,7 @@
           <p:cNvPr id="8" name="Rounded Rectangle 7">
             <a:extLst xmlns:a="http://schemas.openxmlformats.org/drawingml/2006/main">
               <a:ext uri="{FF2B5EF4-FFF2-40B4-BE49-F238E27FC236}">
-                <a16:creationId xmlns:a16="http://schemas.microsoft.com/office/drawing/2014/main" id="{129C3BAD-5DA8-4B19-A160-A1ED6CC0A744}"/>
+                <a16:creationId xmlns:a16="http://schemas.microsoft.com/office/drawing/2014/main" id="{2181D1CA-DF2B-4E5A-82E0-13A90A52F6AC}"/>
               </a:ext>
             </a:extLst>
           </p:cNvPr>
@@ -12085,7 +12319,7 @@
           <p:cNvPr id="9" name="TextBox 8">
             <a:extLst xmlns:a="http://schemas.openxmlformats.org/drawingml/2006/main">
               <a:ext uri="{FF2B5EF4-FFF2-40B4-BE49-F238E27FC236}">
-                <a16:creationId xmlns:a16="http://schemas.microsoft.com/office/drawing/2014/main" id="{AA98C956-425F-47C5-9A84-8D7A216694C9}"/>
+                <a16:creationId xmlns:a16="http://schemas.microsoft.com/office/drawing/2014/main" id="{0014244E-0DF0-432E-880D-8A870CDEC647}"/>
               </a:ext>
             </a:extLst>
           </p:cNvPr>
@@ -12208,7 +12442,7 @@
           <p:cNvPr id="10" name="Rounded Rectangle 9">
             <a:extLst xmlns:a="http://schemas.openxmlformats.org/drawingml/2006/main">
               <a:ext uri="{FF2B5EF4-FFF2-40B4-BE49-F238E27FC236}">
-                <a16:creationId xmlns:a16="http://schemas.microsoft.com/office/drawing/2014/main" id="{A2372D3D-7C3D-4058-BE8E-A56377A3CE7F}"/>
+                <a16:creationId xmlns:a16="http://schemas.microsoft.com/office/drawing/2014/main" id="{55F37545-36BB-4EF9-994D-0F89132CF710}"/>
               </a:ext>
             </a:extLst>
           </p:cNvPr>
@@ -12263,7 +12497,7 @@
           <p:cNvPr id="11" name="TextBox 10">
             <a:extLst xmlns:a="http://schemas.openxmlformats.org/drawingml/2006/main">
               <a:ext uri="{FF2B5EF4-FFF2-40B4-BE49-F238E27FC236}">
-                <a16:creationId xmlns:a16="http://schemas.microsoft.com/office/drawing/2014/main" id="{C5144AD1-14BD-4091-87CE-39F6A57BB4BE}"/>
+                <a16:creationId xmlns:a16="http://schemas.microsoft.com/office/drawing/2014/main" id="{D8994DCB-DE82-401A-BECB-426D3728DBED}"/>
               </a:ext>
             </a:extLst>
           </p:cNvPr>
@@ -12613,7 +12847,7 @@
     </p:spTree>
     <p:extLst>
       <p:ext uri="{BB962C8B-B14F-4D97-AF65-F5344CB8AC3E}">
-        <p14:creationId xmlns:p14="http://schemas.microsoft.com/office/powerpoint/2010/main" val="1273040915"/>
+        <p14:creationId xmlns:p14="http://schemas.microsoft.com/office/powerpoint/2010/main" val="1276896136"/>
       </p:ext>
     </p:extLst>
   </p:cSld>
@@ -12637,7 +12871,7 @@
           <p:cNvPr id="2" name="Rectangle 1">
             <a:extLst xmlns:a="http://schemas.openxmlformats.org/drawingml/2006/main">
               <a:ext uri="{FF2B5EF4-FFF2-40B4-BE49-F238E27FC236}">
-                <a16:creationId xmlns:a16="http://schemas.microsoft.com/office/drawing/2014/main" id="{0FB5042B-D635-4EA3-ABEB-8931641C6D07}"/>
+                <a16:creationId xmlns:a16="http://schemas.microsoft.com/office/drawing/2014/main" id="{A252E5BB-A9D4-410D-A093-08BA6F55BE21}"/>
               </a:ext>
             </a:extLst>
           </p:cNvPr>
@@ -12690,7 +12924,7 @@
           <p:cNvPr id="3" name="Rectangle 2">
             <a:extLst xmlns:a="http://schemas.openxmlformats.org/drawingml/2006/main">
               <a:ext uri="{FF2B5EF4-FFF2-40B4-BE49-F238E27FC236}">
-                <a16:creationId xmlns:a16="http://schemas.microsoft.com/office/drawing/2014/main" id="{AF1D906F-1904-445E-94F0-C9FCE269B4CA}"/>
+                <a16:creationId xmlns:a16="http://schemas.microsoft.com/office/drawing/2014/main" id="{6356DC57-E006-43B8-BF54-EF8BFFDE682D}"/>
               </a:ext>
             </a:extLst>
           </p:cNvPr>
@@ -12743,7 +12977,7 @@
           <p:cNvPr id="4" name="Rectangle 3">
             <a:extLst xmlns:a="http://schemas.openxmlformats.org/drawingml/2006/main">
               <a:ext uri="{FF2B5EF4-FFF2-40B4-BE49-F238E27FC236}">
-                <a16:creationId xmlns:a16="http://schemas.microsoft.com/office/drawing/2014/main" id="{081EB570-0F04-489F-9BF9-34D84167BC50}"/>
+                <a16:creationId xmlns:a16="http://schemas.microsoft.com/office/drawing/2014/main" id="{CFD51A11-3573-4B2E-8D29-57684B95E59D}"/>
               </a:ext>
             </a:extLst>
           </p:cNvPr>
@@ -12796,7 +13030,7 @@
           <p:cNvPr id="5" name="TextBox 4">
             <a:extLst xmlns:a="http://schemas.openxmlformats.org/drawingml/2006/main">
               <a:ext uri="{FF2B5EF4-FFF2-40B4-BE49-F238E27FC236}">
-                <a16:creationId xmlns:a16="http://schemas.microsoft.com/office/drawing/2014/main" id="{47A5B0FD-B3F5-44AF-9E05-520584B7C01E}"/>
+                <a16:creationId xmlns:a16="http://schemas.microsoft.com/office/drawing/2014/main" id="{2D64DE29-D386-4C43-8C7A-580364641692}"/>
               </a:ext>
             </a:extLst>
           </p:cNvPr>
@@ -12859,7 +13093,7 @@
           <p:cNvPr id="6" name="Rounded Rectangle 5">
             <a:extLst xmlns:a="http://schemas.openxmlformats.org/drawingml/2006/main">
               <a:ext uri="{FF2B5EF4-FFF2-40B4-BE49-F238E27FC236}">
-                <a16:creationId xmlns:a16="http://schemas.microsoft.com/office/drawing/2014/main" id="{BBF47052-4C4C-4D04-BA0F-34F75ADBB453}"/>
+                <a16:creationId xmlns:a16="http://schemas.microsoft.com/office/drawing/2014/main" id="{C6CEE4A5-FF18-449B-B288-81C98CB4F61B}"/>
               </a:ext>
             </a:extLst>
           </p:cNvPr>
@@ -12914,7 +13148,7 @@
           <p:cNvPr id="7" name="TextBox 6">
             <a:extLst xmlns:a="http://schemas.openxmlformats.org/drawingml/2006/main">
               <a:ext uri="{FF2B5EF4-FFF2-40B4-BE49-F238E27FC236}">
-                <a16:creationId xmlns:a16="http://schemas.microsoft.com/office/drawing/2014/main" id="{D172AB9E-85A1-497B-9A12-9D32ADD45A70}"/>
+                <a16:creationId xmlns:a16="http://schemas.microsoft.com/office/drawing/2014/main" id="{95F072E9-4D16-4106-B9E9-969B9A6B0676}"/>
               </a:ext>
             </a:extLst>
           </p:cNvPr>
@@ -13378,7 +13612,7 @@
           <p:nvPr/>
         </p:nvPicPr>
         <p:blipFill>
-          <a:blip xmlns:r="http://schemas.openxmlformats.org/officeDocument/2006/relationships" xmlns:a="http://schemas.openxmlformats.org/drawingml/2006/main" r:embed="R6149f2370fac48ed"/>
+          <a:blip xmlns:r="http://schemas.openxmlformats.org/officeDocument/2006/relationships" xmlns:a="http://schemas.openxmlformats.org/drawingml/2006/main" r:embed="R4d1c071bb1004aee"/>
           <a:stretch xmlns:a="http://schemas.openxmlformats.org/drawingml/2006/main">
             <a:fillRect l="0" t="0" r="0" b="0"/>
           </a:stretch>
@@ -13398,7 +13632,7 @@
           <p:cNvPr id="9" name="Rounded Rectangle 8">
             <a:extLst xmlns:a="http://schemas.openxmlformats.org/drawingml/2006/main">
               <a:ext uri="{FF2B5EF4-FFF2-40B4-BE49-F238E27FC236}">
-                <a16:creationId xmlns:a16="http://schemas.microsoft.com/office/drawing/2014/main" id="{4DDBB250-948E-4E3D-9235-F8ADFFC3BA2C}"/>
+                <a16:creationId xmlns:a16="http://schemas.microsoft.com/office/drawing/2014/main" id="{8E18A292-52FE-475C-93C4-E885EF24ADD4}"/>
               </a:ext>
             </a:extLst>
           </p:cNvPr>
@@ -13453,7 +13687,7 @@
           <p:cNvPr id="10" name="TextBox 9">
             <a:extLst xmlns:a="http://schemas.openxmlformats.org/drawingml/2006/main">
               <a:ext uri="{FF2B5EF4-FFF2-40B4-BE49-F238E27FC236}">
-                <a16:creationId xmlns:a16="http://schemas.microsoft.com/office/drawing/2014/main" id="{E2F1F178-2D83-449B-8E65-DAC46C9811B1}"/>
+                <a16:creationId xmlns:a16="http://schemas.microsoft.com/office/drawing/2014/main" id="{2C7AF10E-6399-464E-97B1-E8F9494D9A59}"/>
               </a:ext>
             </a:extLst>
           </p:cNvPr>
@@ -13536,7 +13770,7 @@
     </p:spTree>
     <p:extLst>
       <p:ext uri="{BB962C8B-B14F-4D97-AF65-F5344CB8AC3E}">
-        <p14:creationId xmlns:p14="http://schemas.microsoft.com/office/powerpoint/2010/main" val="1399506064"/>
+        <p14:creationId xmlns:p14="http://schemas.microsoft.com/office/powerpoint/2010/main" val="1517629773"/>
       </p:ext>
     </p:extLst>
   </p:cSld>

--- a/reports/evidence/fixture_populated_slides.pptx
+++ b/reports/evidence/fixture_populated_slides.pptx
@@ -2,24 +2,24 @@
 <file path=ppt/presentation.xml><?xml version="1.0" encoding="utf-8"?>
 <p:presentation xmlns:p="http://schemas.openxmlformats.org/presentationml/2006/main">
   <p:sldMasterIdLst>
-    <p:sldMasterId xmlns:r="http://schemas.openxmlformats.org/officeDocument/2006/relationships" id="2147483648" r:id="R8d6b25893e074af4"/>
+    <p:sldMasterId xmlns:r="http://schemas.openxmlformats.org/officeDocument/2006/relationships" id="2147483648" r:id="Rebefc75836174f1a"/>
   </p:sldMasterIdLst>
   <p:notesMasterIdLst>
-    <p:notesMasterId xmlns:r="http://schemas.openxmlformats.org/officeDocument/2006/relationships" r:id="Rad28c68a257e481d"/>
+    <p:notesMasterId xmlns:r="http://schemas.openxmlformats.org/officeDocument/2006/relationships" r:id="Ra1d2833b2cc4409a"/>
   </p:notesMasterIdLst>
   <p:sldIdLst>
-    <p:sldId xmlns:r="http://schemas.openxmlformats.org/officeDocument/2006/relationships" id="256" r:id="R42c6b823cba44af3"/>
-    <p:sldId xmlns:r="http://schemas.openxmlformats.org/officeDocument/2006/relationships" id="257" r:id="R5b958a0c8de742fd"/>
-    <p:sldId xmlns:r="http://schemas.openxmlformats.org/officeDocument/2006/relationships" id="258" r:id="R4a5372163aa34f5d"/>
-    <p:sldId xmlns:r="http://schemas.openxmlformats.org/officeDocument/2006/relationships" id="259" r:id="Ra6cb1bd6c3f74bda"/>
-    <p:sldId xmlns:r="http://schemas.openxmlformats.org/officeDocument/2006/relationships" id="260" r:id="Rdb84edd8bf884405"/>
-    <p:sldId xmlns:r="http://schemas.openxmlformats.org/officeDocument/2006/relationships" id="261" r:id="Rff628730bb8347dd"/>
-    <p:sldId xmlns:r="http://schemas.openxmlformats.org/officeDocument/2006/relationships" id="262" r:id="R4a7be51562d84fa7"/>
-    <p:sldId xmlns:r="http://schemas.openxmlformats.org/officeDocument/2006/relationships" id="263" r:id="R435a1c5cad2d4ecd"/>
-    <p:sldId xmlns:r="http://schemas.openxmlformats.org/officeDocument/2006/relationships" id="264" r:id="Rd57917a01a2042d3"/>
-    <p:sldId xmlns:r="http://schemas.openxmlformats.org/officeDocument/2006/relationships" id="265" r:id="R8779158fe52f4724"/>
-    <p:sldId xmlns:r="http://schemas.openxmlformats.org/officeDocument/2006/relationships" id="266" r:id="R060768c3dbed4d8c"/>
-    <p:sldId xmlns:r="http://schemas.openxmlformats.org/officeDocument/2006/relationships" id="267" r:id="Rc73977ae20f7430e"/>
+    <p:sldId xmlns:r="http://schemas.openxmlformats.org/officeDocument/2006/relationships" id="256" r:id="R3f5a8671a3d8424d"/>
+    <p:sldId xmlns:r="http://schemas.openxmlformats.org/officeDocument/2006/relationships" id="257" r:id="Rf70e6d0425594080"/>
+    <p:sldId xmlns:r="http://schemas.openxmlformats.org/officeDocument/2006/relationships" id="258" r:id="R7d16815bfa3545b5"/>
+    <p:sldId xmlns:r="http://schemas.openxmlformats.org/officeDocument/2006/relationships" id="259" r:id="R0b8ee83ebe4b4a4e"/>
+    <p:sldId xmlns:r="http://schemas.openxmlformats.org/officeDocument/2006/relationships" id="260" r:id="R7a537e5bcc794282"/>
+    <p:sldId xmlns:r="http://schemas.openxmlformats.org/officeDocument/2006/relationships" id="261" r:id="R1e7201fcbfb14516"/>
+    <p:sldId xmlns:r="http://schemas.openxmlformats.org/officeDocument/2006/relationships" id="262" r:id="Rfdc486169bf54441"/>
+    <p:sldId xmlns:r="http://schemas.openxmlformats.org/officeDocument/2006/relationships" id="263" r:id="R8d1937e3c6b145f3"/>
+    <p:sldId xmlns:r="http://schemas.openxmlformats.org/officeDocument/2006/relationships" id="264" r:id="R839f58f7306d4df3"/>
+    <p:sldId xmlns:r="http://schemas.openxmlformats.org/officeDocument/2006/relationships" id="265" r:id="R4d0eb1bed2d3486e"/>
+    <p:sldId xmlns:r="http://schemas.openxmlformats.org/officeDocument/2006/relationships" id="266" r:id="Rb89fdf37a91e47e4"/>
+    <p:sldId xmlns:r="http://schemas.openxmlformats.org/officeDocument/2006/relationships" id="267" r:id="Rd51a58807c1f4791"/>
   </p:sldIdLst>
   <p:sldSz cx="12191695" cy="6858000"/>
   <p:notesSz cx="6858000" cy="9144000"/>
@@ -1577,7 +1577,7 @@
           <p:cNvPr id="2" name="Title 1">
             <a:extLst xmlns:a="http://schemas.openxmlformats.org/drawingml/2006/main">
               <a:ext uri="{FF2B5EF4-FFF2-40B4-BE49-F238E27FC236}">
-                <a16:creationId xmlns:a16="http://schemas.microsoft.com/office/drawing/2014/main" id="{A133F466-B639-41BC-8ACC-FAE823FC8C4D}"/>
+                <a16:creationId xmlns:a16="http://schemas.microsoft.com/office/drawing/2014/main" id="{A5F65FD0-18D3-40A1-81D2-7DD331BA1459}"/>
               </a:ext>
             </a:extLst>
           </p:cNvPr>
@@ -1610,7 +1610,7 @@
           <p:cNvPr id="3" name="Subtitle 2">
             <a:extLst xmlns:a="http://schemas.openxmlformats.org/drawingml/2006/main">
               <a:ext uri="{FF2B5EF4-FFF2-40B4-BE49-F238E27FC236}">
-                <a16:creationId xmlns:a16="http://schemas.microsoft.com/office/drawing/2014/main" id="{DA373217-AB0A-49A7-B904-4696B4DFED50}"/>
+                <a16:creationId xmlns:a16="http://schemas.microsoft.com/office/drawing/2014/main" id="{CFD99702-E94B-4719-8127-BF1E1D645188}"/>
               </a:ext>
             </a:extLst>
           </p:cNvPr>
@@ -1734,7 +1734,7 @@
           <p:cNvPr id="4" name="Date Placeholder 3">
             <a:extLst xmlns:a="http://schemas.openxmlformats.org/drawingml/2006/main">
               <a:ext uri="{FF2B5EF4-FFF2-40B4-BE49-F238E27FC236}">
-                <a16:creationId xmlns:a16="http://schemas.microsoft.com/office/drawing/2014/main" id="{D0580FEB-F164-4CCC-8032-E45F321DA265}"/>
+                <a16:creationId xmlns:a16="http://schemas.microsoft.com/office/drawing/2014/main" id="{FA94C1BE-ECB6-4513-A15F-75A1C4B5AB71}"/>
               </a:ext>
             </a:extLst>
           </p:cNvPr>
@@ -1762,7 +1762,7 @@
           <p:cNvPr id="5" name="Footer Placeholder 4">
             <a:extLst xmlns:a="http://schemas.openxmlformats.org/drawingml/2006/main">
               <a:ext uri="{FF2B5EF4-FFF2-40B4-BE49-F238E27FC236}">
-                <a16:creationId xmlns:a16="http://schemas.microsoft.com/office/drawing/2014/main" id="{6FF2872C-0A5E-44B5-8891-AE35E6F4A67E}"/>
+                <a16:creationId xmlns:a16="http://schemas.microsoft.com/office/drawing/2014/main" id="{96B2A07E-A8E9-46C3-9B24-A73BA9C75C38}"/>
               </a:ext>
             </a:extLst>
           </p:cNvPr>
@@ -1787,7 +1787,7 @@
           <p:cNvPr id="6" name="Slide Number Placeholder 5">
             <a:extLst xmlns:a="http://schemas.openxmlformats.org/drawingml/2006/main">
               <a:ext uri="{FF2B5EF4-FFF2-40B4-BE49-F238E27FC236}">
-                <a16:creationId xmlns:a16="http://schemas.microsoft.com/office/drawing/2014/main" id="{637C316B-7131-4A4E-9ED5-69903DD69BC3}"/>
+                <a16:creationId xmlns:a16="http://schemas.microsoft.com/office/drawing/2014/main" id="{035E55D6-25E6-4D1C-8B83-1614A4DB5D0B}"/>
               </a:ext>
             </a:extLst>
           </p:cNvPr>
@@ -1832,7 +1832,7 @@
           <p:cNvPr id="2" name="Title 1">
             <a:extLst xmlns:a="http://schemas.openxmlformats.org/drawingml/2006/main">
               <a:ext uri="{FF2B5EF4-FFF2-40B4-BE49-F238E27FC236}">
-                <a16:creationId xmlns:a16="http://schemas.microsoft.com/office/drawing/2014/main" id="{6AC86A5F-9017-43EB-8A8C-2090B226599F}"/>
+                <a16:creationId xmlns:a16="http://schemas.microsoft.com/office/drawing/2014/main" id="{FAA4B837-300D-426B-A7C3-E148738F313D}"/>
               </a:ext>
             </a:extLst>
           </p:cNvPr>
@@ -1860,7 +1860,7 @@
           <p:cNvPr id="3" name="Vertical Text Placeholder 2">
             <a:extLst xmlns:a="http://schemas.openxmlformats.org/drawingml/2006/main">
               <a:ext uri="{FF2B5EF4-FFF2-40B4-BE49-F238E27FC236}">
-                <a16:creationId xmlns:a16="http://schemas.microsoft.com/office/drawing/2014/main" id="{47F06A0B-3CCB-4B68-AD43-D02B5E88FC73}"/>
+                <a16:creationId xmlns:a16="http://schemas.microsoft.com/office/drawing/2014/main" id="{84D15B48-8FD4-4D43-8878-D2C96FF5CCA8}"/>
               </a:ext>
             </a:extLst>
           </p:cNvPr>
@@ -1923,7 +1923,7 @@
           <p:cNvPr id="4" name="Date Placeholder 3">
             <a:extLst xmlns:a="http://schemas.openxmlformats.org/drawingml/2006/main">
               <a:ext uri="{FF2B5EF4-FFF2-40B4-BE49-F238E27FC236}">
-                <a16:creationId xmlns:a16="http://schemas.microsoft.com/office/drawing/2014/main" id="{B4B8FE75-78D7-4ACE-B284-2116E4DC2265}"/>
+                <a16:creationId xmlns:a16="http://schemas.microsoft.com/office/drawing/2014/main" id="{CDE0F18A-C1D2-4CB4-8E4D-3361546269A0}"/>
               </a:ext>
             </a:extLst>
           </p:cNvPr>
@@ -1951,7 +1951,7 @@
           <p:cNvPr id="5" name="Footer Placeholder 4">
             <a:extLst xmlns:a="http://schemas.openxmlformats.org/drawingml/2006/main">
               <a:ext uri="{FF2B5EF4-FFF2-40B4-BE49-F238E27FC236}">
-                <a16:creationId xmlns:a16="http://schemas.microsoft.com/office/drawing/2014/main" id="{55452CF7-DE64-4678-AC53-A9B9BA13FA42}"/>
+                <a16:creationId xmlns:a16="http://schemas.microsoft.com/office/drawing/2014/main" id="{DBEAA1F0-3328-48D2-9977-8B9A38BD874E}"/>
               </a:ext>
             </a:extLst>
           </p:cNvPr>
@@ -1976,7 +1976,7 @@
           <p:cNvPr id="6" name="Slide Number Placeholder 5">
             <a:extLst xmlns:a="http://schemas.openxmlformats.org/drawingml/2006/main">
               <a:ext uri="{FF2B5EF4-FFF2-40B4-BE49-F238E27FC236}">
-                <a16:creationId xmlns:a16="http://schemas.microsoft.com/office/drawing/2014/main" id="{6FA67FAB-BBC6-4EFE-ACF3-82EB5BBDB7A9}"/>
+                <a16:creationId xmlns:a16="http://schemas.microsoft.com/office/drawing/2014/main" id="{AC2A07CA-2E6D-4BE6-970C-3517401E911B}"/>
               </a:ext>
             </a:extLst>
           </p:cNvPr>
@@ -2021,7 +2021,7 @@
           <p:cNvPr id="2" name="Vertical Title 1">
             <a:extLst xmlns:a="http://schemas.openxmlformats.org/drawingml/2006/main">
               <a:ext uri="{FF2B5EF4-FFF2-40B4-BE49-F238E27FC236}">
-                <a16:creationId xmlns:a16="http://schemas.microsoft.com/office/drawing/2014/main" id="{89CF581A-5C2A-4CC0-A77B-A20ADD18B5E8}"/>
+                <a16:creationId xmlns:a16="http://schemas.microsoft.com/office/drawing/2014/main" id="{8EEBDC85-5C83-415B-9209-8107668138E8}"/>
               </a:ext>
             </a:extLst>
           </p:cNvPr>
@@ -2054,7 +2054,7 @@
           <p:cNvPr id="3" name="Vertical Text Placeholder 2">
             <a:extLst xmlns:a="http://schemas.openxmlformats.org/drawingml/2006/main">
               <a:ext uri="{FF2B5EF4-FFF2-40B4-BE49-F238E27FC236}">
-                <a16:creationId xmlns:a16="http://schemas.microsoft.com/office/drawing/2014/main" id="{F5EEF56B-CEE6-4008-BECA-30F618CAE9B4}"/>
+                <a16:creationId xmlns:a16="http://schemas.microsoft.com/office/drawing/2014/main" id="{2B1CA8F1-A9A7-4D6F-8BFD-84F21BAD6AD6}"/>
               </a:ext>
             </a:extLst>
           </p:cNvPr>
@@ -2122,7 +2122,7 @@
           <p:cNvPr id="4" name="Date Placeholder 3">
             <a:extLst xmlns:a="http://schemas.openxmlformats.org/drawingml/2006/main">
               <a:ext uri="{FF2B5EF4-FFF2-40B4-BE49-F238E27FC236}">
-                <a16:creationId xmlns:a16="http://schemas.microsoft.com/office/drawing/2014/main" id="{C559B771-4A62-4E27-BF8A-4FFDBFB5281F}"/>
+                <a16:creationId xmlns:a16="http://schemas.microsoft.com/office/drawing/2014/main" id="{FA6A1A75-8BC2-4D0A-BBA8-43DDA347B40A}"/>
               </a:ext>
             </a:extLst>
           </p:cNvPr>
@@ -2150,7 +2150,7 @@
           <p:cNvPr id="5" name="Footer Placeholder 4">
             <a:extLst xmlns:a="http://schemas.openxmlformats.org/drawingml/2006/main">
               <a:ext uri="{FF2B5EF4-FFF2-40B4-BE49-F238E27FC236}">
-                <a16:creationId xmlns:a16="http://schemas.microsoft.com/office/drawing/2014/main" id="{451B23B1-FF4D-49AE-A67A-1573AB962FBD}"/>
+                <a16:creationId xmlns:a16="http://schemas.microsoft.com/office/drawing/2014/main" id="{738281CF-6176-403A-9169-4DAB269AA885}"/>
               </a:ext>
             </a:extLst>
           </p:cNvPr>
@@ -2175,7 +2175,7 @@
           <p:cNvPr id="6" name="Slide Number Placeholder 5">
             <a:extLst xmlns:a="http://schemas.openxmlformats.org/drawingml/2006/main">
               <a:ext uri="{FF2B5EF4-FFF2-40B4-BE49-F238E27FC236}">
-                <a16:creationId xmlns:a16="http://schemas.microsoft.com/office/drawing/2014/main" id="{50DF5C2A-919B-4E54-88EC-642916104508}"/>
+                <a16:creationId xmlns:a16="http://schemas.microsoft.com/office/drawing/2014/main" id="{38EBC3A9-2CD4-47AF-8E58-3E0D972B4703}"/>
               </a:ext>
             </a:extLst>
           </p:cNvPr>
@@ -2220,7 +2220,7 @@
           <p:cNvPr id="2" name="Title 1">
             <a:extLst xmlns:a="http://schemas.openxmlformats.org/drawingml/2006/main">
               <a:ext uri="{FF2B5EF4-FFF2-40B4-BE49-F238E27FC236}">
-                <a16:creationId xmlns:a16="http://schemas.microsoft.com/office/drawing/2014/main" id="{8AA9D3DC-D92A-4836-B460-50FC688DB91C}"/>
+                <a16:creationId xmlns:a16="http://schemas.microsoft.com/office/drawing/2014/main" id="{B67B8D94-4688-4146-BFE8-EDBD54BBD5A0}"/>
               </a:ext>
             </a:extLst>
           </p:cNvPr>
@@ -2248,7 +2248,7 @@
           <p:cNvPr id="3" name="Content Placeholder 2">
             <a:extLst xmlns:a="http://schemas.openxmlformats.org/drawingml/2006/main">
               <a:ext uri="{FF2B5EF4-FFF2-40B4-BE49-F238E27FC236}">
-                <a16:creationId xmlns:a16="http://schemas.microsoft.com/office/drawing/2014/main" id="{5AE5AB4E-EAB4-4A5B-980C-3B2F32E37BAB}"/>
+                <a16:creationId xmlns:a16="http://schemas.microsoft.com/office/drawing/2014/main" id="{5E8833FC-E042-461C-9FBE-4B0839EF442A}"/>
               </a:ext>
             </a:extLst>
           </p:cNvPr>
@@ -2311,7 +2311,7 @@
           <p:cNvPr id="4" name="Date Placeholder 3">
             <a:extLst xmlns:a="http://schemas.openxmlformats.org/drawingml/2006/main">
               <a:ext uri="{FF2B5EF4-FFF2-40B4-BE49-F238E27FC236}">
-                <a16:creationId xmlns:a16="http://schemas.microsoft.com/office/drawing/2014/main" id="{B2AF3671-6169-41CA-BA67-44B599A3F299}"/>
+                <a16:creationId xmlns:a16="http://schemas.microsoft.com/office/drawing/2014/main" id="{1FF78225-5405-48B3-9720-3260F6036473}"/>
               </a:ext>
             </a:extLst>
           </p:cNvPr>
@@ -2339,7 +2339,7 @@
           <p:cNvPr id="5" name="Footer Placeholder 4">
             <a:extLst xmlns:a="http://schemas.openxmlformats.org/drawingml/2006/main">
               <a:ext uri="{FF2B5EF4-FFF2-40B4-BE49-F238E27FC236}">
-                <a16:creationId xmlns:a16="http://schemas.microsoft.com/office/drawing/2014/main" id="{6BE774CD-FCED-47ED-91D9-9347105ED8A5}"/>
+                <a16:creationId xmlns:a16="http://schemas.microsoft.com/office/drawing/2014/main" id="{C9508622-9065-4DD5-9E19-9BD0C5ACC8A6}"/>
               </a:ext>
             </a:extLst>
           </p:cNvPr>
@@ -2364,7 +2364,7 @@
           <p:cNvPr id="6" name="Slide Number Placeholder 5">
             <a:extLst xmlns:a="http://schemas.openxmlformats.org/drawingml/2006/main">
               <a:ext uri="{FF2B5EF4-FFF2-40B4-BE49-F238E27FC236}">
-                <a16:creationId xmlns:a16="http://schemas.microsoft.com/office/drawing/2014/main" id="{79332BA4-793E-474B-8560-DACFB220136F}"/>
+                <a16:creationId xmlns:a16="http://schemas.microsoft.com/office/drawing/2014/main" id="{7213BA54-BFA8-4ACF-AF21-404BB1F401C9}"/>
               </a:ext>
             </a:extLst>
           </p:cNvPr>
@@ -2409,7 +2409,7 @@
           <p:cNvPr id="2" name="Title 1">
             <a:extLst xmlns:a="http://schemas.openxmlformats.org/drawingml/2006/main">
               <a:ext uri="{FF2B5EF4-FFF2-40B4-BE49-F238E27FC236}">
-                <a16:creationId xmlns:a16="http://schemas.microsoft.com/office/drawing/2014/main" id="{43EA7274-B8E5-4B4B-ADC5-6DB26AC0D3E7}"/>
+                <a16:creationId xmlns:a16="http://schemas.microsoft.com/office/drawing/2014/main" id="{B2B74632-442F-4355-B638-9405A2AA8E14}"/>
               </a:ext>
             </a:extLst>
           </p:cNvPr>
@@ -2447,7 +2447,7 @@
           <p:cNvPr id="3" name="Text Placeholder 2">
             <a:extLst xmlns:a="http://schemas.openxmlformats.org/drawingml/2006/main">
               <a:ext uri="{FF2B5EF4-FFF2-40B4-BE49-F238E27FC236}">
-                <a16:creationId xmlns:a16="http://schemas.microsoft.com/office/drawing/2014/main" id="{84D2F316-EC02-41E3-BBDE-050400B34E6D}"/>
+                <a16:creationId xmlns:a16="http://schemas.microsoft.com/office/drawing/2014/main" id="{C0240103-CAE5-4C62-9D8F-1A20D33CE43D}"/>
               </a:ext>
             </a:extLst>
           </p:cNvPr>
@@ -2573,7 +2573,7 @@
           <p:cNvPr id="4" name="Date Placeholder 3">
             <a:extLst xmlns:a="http://schemas.openxmlformats.org/drawingml/2006/main">
               <a:ext uri="{FF2B5EF4-FFF2-40B4-BE49-F238E27FC236}">
-                <a16:creationId xmlns:a16="http://schemas.microsoft.com/office/drawing/2014/main" id="{6C325968-D9F3-4DA4-8CD8-1223698BC0E9}"/>
+                <a16:creationId xmlns:a16="http://schemas.microsoft.com/office/drawing/2014/main" id="{3CF1F627-0305-4FD7-9BB2-66E1F7D8A181}"/>
               </a:ext>
             </a:extLst>
           </p:cNvPr>
@@ -2601,7 +2601,7 @@
           <p:cNvPr id="5" name="Footer Placeholder 4">
             <a:extLst xmlns:a="http://schemas.openxmlformats.org/drawingml/2006/main">
               <a:ext uri="{FF2B5EF4-FFF2-40B4-BE49-F238E27FC236}">
-                <a16:creationId xmlns:a16="http://schemas.microsoft.com/office/drawing/2014/main" id="{590FE396-4D15-46D1-AE80-C807C5DC9CB4}"/>
+                <a16:creationId xmlns:a16="http://schemas.microsoft.com/office/drawing/2014/main" id="{2D54A19D-BD09-4155-8B7A-6623FF02CFFE}"/>
               </a:ext>
             </a:extLst>
           </p:cNvPr>
@@ -2626,7 +2626,7 @@
           <p:cNvPr id="6" name="Slide Number Placeholder 5">
             <a:extLst xmlns:a="http://schemas.openxmlformats.org/drawingml/2006/main">
               <a:ext uri="{FF2B5EF4-FFF2-40B4-BE49-F238E27FC236}">
-                <a16:creationId xmlns:a16="http://schemas.microsoft.com/office/drawing/2014/main" id="{43A3FFC4-CF92-4D2A-8A3C-E8523763A8B7}"/>
+                <a16:creationId xmlns:a16="http://schemas.microsoft.com/office/drawing/2014/main" id="{5069A511-726E-4BF2-BD17-1FC39AFA88BC}"/>
               </a:ext>
             </a:extLst>
           </p:cNvPr>
@@ -2671,7 +2671,7 @@
           <p:cNvPr id="2" name="Title 1">
             <a:extLst xmlns:a="http://schemas.openxmlformats.org/drawingml/2006/main">
               <a:ext uri="{FF2B5EF4-FFF2-40B4-BE49-F238E27FC236}">
-                <a16:creationId xmlns:a16="http://schemas.microsoft.com/office/drawing/2014/main" id="{1C7EDC5D-F0D4-4209-BDA4-B9D9DFD3E306}"/>
+                <a16:creationId xmlns:a16="http://schemas.microsoft.com/office/drawing/2014/main" id="{1A81C51C-F18E-4EEB-9F1A-2CAA2BF50D3A}"/>
               </a:ext>
             </a:extLst>
           </p:cNvPr>
@@ -2699,7 +2699,7 @@
           <p:cNvPr id="3" name="Content Placeholder 2">
             <a:extLst xmlns:a="http://schemas.openxmlformats.org/drawingml/2006/main">
               <a:ext uri="{FF2B5EF4-FFF2-40B4-BE49-F238E27FC236}">
-                <a16:creationId xmlns:a16="http://schemas.microsoft.com/office/drawing/2014/main" id="{1C7CF480-57F1-453C-9B6C-BCDDEE0EA606}"/>
+                <a16:creationId xmlns:a16="http://schemas.microsoft.com/office/drawing/2014/main" id="{FE2BDF15-6368-499D-B841-E23549123689}"/>
               </a:ext>
             </a:extLst>
           </p:cNvPr>
@@ -2804,7 +2804,7 @@
           <p:cNvPr id="4" name="Content Placeholder 3">
             <a:extLst xmlns:a="http://schemas.openxmlformats.org/drawingml/2006/main">
               <a:ext uri="{FF2B5EF4-FFF2-40B4-BE49-F238E27FC236}">
-                <a16:creationId xmlns:a16="http://schemas.microsoft.com/office/drawing/2014/main" id="{5883344A-9CF3-4539-856B-FB11292D8E0A}"/>
+                <a16:creationId xmlns:a16="http://schemas.microsoft.com/office/drawing/2014/main" id="{0C8B2580-A070-4E6C-A841-4BC6FD9744AD}"/>
               </a:ext>
             </a:extLst>
           </p:cNvPr>
@@ -2909,7 +2909,7 @@
           <p:cNvPr id="5" name="Date Placeholder 4">
             <a:extLst xmlns:a="http://schemas.openxmlformats.org/drawingml/2006/main">
               <a:ext uri="{FF2B5EF4-FFF2-40B4-BE49-F238E27FC236}">
-                <a16:creationId xmlns:a16="http://schemas.microsoft.com/office/drawing/2014/main" id="{012FE445-5E05-48AE-81BC-7A2ACCC731D2}"/>
+                <a16:creationId xmlns:a16="http://schemas.microsoft.com/office/drawing/2014/main" id="{7A3A53CD-7EA0-4DFC-B5A9-A6FCAEB41334}"/>
               </a:ext>
             </a:extLst>
           </p:cNvPr>
@@ -2937,7 +2937,7 @@
           <p:cNvPr id="6" name="Footer Placeholder 5">
             <a:extLst xmlns:a="http://schemas.openxmlformats.org/drawingml/2006/main">
               <a:ext uri="{FF2B5EF4-FFF2-40B4-BE49-F238E27FC236}">
-                <a16:creationId xmlns:a16="http://schemas.microsoft.com/office/drawing/2014/main" id="{D79F8EFE-D762-48F9-BBDC-262DF99C6C08}"/>
+                <a16:creationId xmlns:a16="http://schemas.microsoft.com/office/drawing/2014/main" id="{ACEC179D-4D00-4FFC-AA83-CAEBD38B6D02}"/>
               </a:ext>
             </a:extLst>
           </p:cNvPr>
@@ -2962,7 +2962,7 @@
           <p:cNvPr id="7" name="Slide Number Placeholder 6">
             <a:extLst xmlns:a="http://schemas.openxmlformats.org/drawingml/2006/main">
               <a:ext uri="{FF2B5EF4-FFF2-40B4-BE49-F238E27FC236}">
-                <a16:creationId xmlns:a16="http://schemas.microsoft.com/office/drawing/2014/main" id="{DDCA9C43-32C1-4D9E-A7B1-BD5A40A23D63}"/>
+                <a16:creationId xmlns:a16="http://schemas.microsoft.com/office/drawing/2014/main" id="{37E75401-1A84-410A-90F7-B528D1662277}"/>
               </a:ext>
             </a:extLst>
           </p:cNvPr>
@@ -3007,7 +3007,7 @@
           <p:cNvPr id="2" name="Title 1">
             <a:extLst xmlns:a="http://schemas.openxmlformats.org/drawingml/2006/main">
               <a:ext uri="{FF2B5EF4-FFF2-40B4-BE49-F238E27FC236}">
-                <a16:creationId xmlns:a16="http://schemas.microsoft.com/office/drawing/2014/main" id="{D7FDAED5-4B53-4AE8-882E-6E277E23B7BF}"/>
+                <a16:creationId xmlns:a16="http://schemas.microsoft.com/office/drawing/2014/main" id="{650BAE0C-5CF6-40D3-BC14-575E7EF316FA}"/>
               </a:ext>
             </a:extLst>
           </p:cNvPr>
@@ -3040,7 +3040,7 @@
           <p:cNvPr id="3" name="Text Placeholder 2">
             <a:extLst xmlns:a="http://schemas.openxmlformats.org/drawingml/2006/main">
               <a:ext uri="{FF2B5EF4-FFF2-40B4-BE49-F238E27FC236}">
-                <a16:creationId xmlns:a16="http://schemas.microsoft.com/office/drawing/2014/main" id="{F79BE1E1-AD4C-4127-B8A1-D7412A120124}"/>
+                <a16:creationId xmlns:a16="http://schemas.microsoft.com/office/drawing/2014/main" id="{A403E099-C5C3-4478-BF9A-885D0F62F739}"/>
               </a:ext>
             </a:extLst>
           </p:cNvPr>
@@ -3112,7 +3112,7 @@
           <p:cNvPr id="4" name="Content Placeholder 3">
             <a:extLst xmlns:a="http://schemas.openxmlformats.org/drawingml/2006/main">
               <a:ext uri="{FF2B5EF4-FFF2-40B4-BE49-F238E27FC236}">
-                <a16:creationId xmlns:a16="http://schemas.microsoft.com/office/drawing/2014/main" id="{82285AE6-3FA2-491A-9966-C5B4F03D8743}"/>
+                <a16:creationId xmlns:a16="http://schemas.microsoft.com/office/drawing/2014/main" id="{41D7E936-D5B4-4A85-A1FF-18A8EEAC19F1}"/>
               </a:ext>
             </a:extLst>
           </p:cNvPr>
@@ -3217,7 +3217,7 @@
           <p:cNvPr id="5" name="Text Placeholder 4">
             <a:extLst xmlns:a="http://schemas.openxmlformats.org/drawingml/2006/main">
               <a:ext uri="{FF2B5EF4-FFF2-40B4-BE49-F238E27FC236}">
-                <a16:creationId xmlns:a16="http://schemas.microsoft.com/office/drawing/2014/main" id="{C250DB89-0C43-4101-BBD3-0C4E7FB6028C}"/>
+                <a16:creationId xmlns:a16="http://schemas.microsoft.com/office/drawing/2014/main" id="{59DA8200-7B6E-4D1D-AED5-38A72D0D1B35}"/>
               </a:ext>
             </a:extLst>
           </p:cNvPr>
@@ -3289,7 +3289,7 @@
           <p:cNvPr id="6" name="Content Placeholder 5">
             <a:extLst xmlns:a="http://schemas.openxmlformats.org/drawingml/2006/main">
               <a:ext uri="{FF2B5EF4-FFF2-40B4-BE49-F238E27FC236}">
-                <a16:creationId xmlns:a16="http://schemas.microsoft.com/office/drawing/2014/main" id="{4DBA596F-29F1-428F-904D-8699B0790ECA}"/>
+                <a16:creationId xmlns:a16="http://schemas.microsoft.com/office/drawing/2014/main" id="{38AB1871-58AA-47C0-B71D-97A8C3FDE63B}"/>
               </a:ext>
             </a:extLst>
           </p:cNvPr>
@@ -3394,7 +3394,7 @@
           <p:cNvPr id="7" name="Date Placeholder 6">
             <a:extLst xmlns:a="http://schemas.openxmlformats.org/drawingml/2006/main">
               <a:ext uri="{FF2B5EF4-FFF2-40B4-BE49-F238E27FC236}">
-                <a16:creationId xmlns:a16="http://schemas.microsoft.com/office/drawing/2014/main" id="{CEE2D3D0-9215-4EAF-88E5-88F811DFE4D2}"/>
+                <a16:creationId xmlns:a16="http://schemas.microsoft.com/office/drawing/2014/main" id="{87644B2C-B3CB-4127-9930-5ECC249D2903}"/>
               </a:ext>
             </a:extLst>
           </p:cNvPr>
@@ -3422,7 +3422,7 @@
           <p:cNvPr id="8" name="Footer Placeholder 7">
             <a:extLst xmlns:a="http://schemas.openxmlformats.org/drawingml/2006/main">
               <a:ext uri="{FF2B5EF4-FFF2-40B4-BE49-F238E27FC236}">
-                <a16:creationId xmlns:a16="http://schemas.microsoft.com/office/drawing/2014/main" id="{7A83A992-49F2-42BE-B219-D34FBB703CD9}"/>
+                <a16:creationId xmlns:a16="http://schemas.microsoft.com/office/drawing/2014/main" id="{07AEB394-16FD-4B8D-B139-B0D95B73635A}"/>
               </a:ext>
             </a:extLst>
           </p:cNvPr>
@@ -3447,7 +3447,7 @@
           <p:cNvPr id="9" name="Slide Number Placeholder 8">
             <a:extLst xmlns:a="http://schemas.openxmlformats.org/drawingml/2006/main">
               <a:ext uri="{FF2B5EF4-FFF2-40B4-BE49-F238E27FC236}">
-                <a16:creationId xmlns:a16="http://schemas.microsoft.com/office/drawing/2014/main" id="{B632F2B8-B245-4E0D-9443-FBDCA661AB2B}"/>
+                <a16:creationId xmlns:a16="http://schemas.microsoft.com/office/drawing/2014/main" id="{049C5653-B8EB-4584-ADD4-30B9DD7175B6}"/>
               </a:ext>
             </a:extLst>
           </p:cNvPr>
@@ -3492,7 +3492,7 @@
           <p:cNvPr id="2" name="Title 1">
             <a:extLst xmlns:a="http://schemas.openxmlformats.org/drawingml/2006/main">
               <a:ext uri="{FF2B5EF4-FFF2-40B4-BE49-F238E27FC236}">
-                <a16:creationId xmlns:a16="http://schemas.microsoft.com/office/drawing/2014/main" id="{093E1C0B-8698-49B7-B9E6-3A1CDD58586E}"/>
+                <a16:creationId xmlns:a16="http://schemas.microsoft.com/office/drawing/2014/main" id="{9A79C238-B0B7-42BA-8E33-58FE3FD83561}"/>
               </a:ext>
             </a:extLst>
           </p:cNvPr>
@@ -3520,7 +3520,7 @@
           <p:cNvPr id="3" name="Date Placeholder 2">
             <a:extLst xmlns:a="http://schemas.openxmlformats.org/drawingml/2006/main">
               <a:ext uri="{FF2B5EF4-FFF2-40B4-BE49-F238E27FC236}">
-                <a16:creationId xmlns:a16="http://schemas.microsoft.com/office/drawing/2014/main" id="{C7ED8F34-FDB4-4938-BEE9-07B8E15B8C89}"/>
+                <a16:creationId xmlns:a16="http://schemas.microsoft.com/office/drawing/2014/main" id="{4A7B3E59-6FB6-4119-86F1-82F068CAF057}"/>
               </a:ext>
             </a:extLst>
           </p:cNvPr>
@@ -3548,7 +3548,7 @@
           <p:cNvPr id="4" name="Footer Placeholder 3">
             <a:extLst xmlns:a="http://schemas.openxmlformats.org/drawingml/2006/main">
               <a:ext uri="{FF2B5EF4-FFF2-40B4-BE49-F238E27FC236}">
-                <a16:creationId xmlns:a16="http://schemas.microsoft.com/office/drawing/2014/main" id="{8E7D0772-4796-4BF3-AFE8-9E9F1AB984E4}"/>
+                <a16:creationId xmlns:a16="http://schemas.microsoft.com/office/drawing/2014/main" id="{2910D873-D102-4A33-8958-2F1DD1A472E5}"/>
               </a:ext>
             </a:extLst>
           </p:cNvPr>
@@ -3573,7 +3573,7 @@
           <p:cNvPr id="5" name="Slide Number Placeholder 4">
             <a:extLst xmlns:a="http://schemas.openxmlformats.org/drawingml/2006/main">
               <a:ext uri="{FF2B5EF4-FFF2-40B4-BE49-F238E27FC236}">
-                <a16:creationId xmlns:a16="http://schemas.microsoft.com/office/drawing/2014/main" id="{F53A675C-9509-4E38-8268-A0A2EE8F4720}"/>
+                <a16:creationId xmlns:a16="http://schemas.microsoft.com/office/drawing/2014/main" id="{21F38A83-DCB0-42E8-B8E8-E613A1001756}"/>
               </a:ext>
             </a:extLst>
           </p:cNvPr>
@@ -3618,7 +3618,7 @@
           <p:cNvPr id="2" name="Date Placeholder 1">
             <a:extLst xmlns:a="http://schemas.openxmlformats.org/drawingml/2006/main">
               <a:ext uri="{FF2B5EF4-FFF2-40B4-BE49-F238E27FC236}">
-                <a16:creationId xmlns:a16="http://schemas.microsoft.com/office/drawing/2014/main" id="{DB290794-0FD3-44A0-94F6-ECB0D589398C}"/>
+                <a16:creationId xmlns:a16="http://schemas.microsoft.com/office/drawing/2014/main" id="{A4260A55-751B-4755-9CEF-81C147005B5D}"/>
               </a:ext>
             </a:extLst>
           </p:cNvPr>
@@ -3646,7 +3646,7 @@
           <p:cNvPr id="3" name="Footer Placeholder 2">
             <a:extLst xmlns:a="http://schemas.openxmlformats.org/drawingml/2006/main">
               <a:ext uri="{FF2B5EF4-FFF2-40B4-BE49-F238E27FC236}">
-                <a16:creationId xmlns:a16="http://schemas.microsoft.com/office/drawing/2014/main" id="{F5E61D68-4944-40BE-9049-59B5333A6AF6}"/>
+                <a16:creationId xmlns:a16="http://schemas.microsoft.com/office/drawing/2014/main" id="{8348BB24-5C21-4318-8DEF-23F8E2C65856}"/>
               </a:ext>
             </a:extLst>
           </p:cNvPr>
@@ -3671,7 +3671,7 @@
           <p:cNvPr id="4" name="Slide Number Placeholder 3">
             <a:extLst xmlns:a="http://schemas.openxmlformats.org/drawingml/2006/main">
               <a:ext uri="{FF2B5EF4-FFF2-40B4-BE49-F238E27FC236}">
-                <a16:creationId xmlns:a16="http://schemas.microsoft.com/office/drawing/2014/main" id="{E290B1D7-42FC-42CC-95BF-AE973818EB29}"/>
+                <a16:creationId xmlns:a16="http://schemas.microsoft.com/office/drawing/2014/main" id="{BE83BFA9-CBC7-4A9F-B92A-3277AF05F268}"/>
               </a:ext>
             </a:extLst>
           </p:cNvPr>
@@ -3716,7 +3716,7 @@
           <p:cNvPr id="2" name="Title 1">
             <a:extLst xmlns:a="http://schemas.openxmlformats.org/drawingml/2006/main">
               <a:ext uri="{FF2B5EF4-FFF2-40B4-BE49-F238E27FC236}">
-                <a16:creationId xmlns:a16="http://schemas.microsoft.com/office/drawing/2014/main" id="{56B77538-8A66-4F05-A1B9-D7F591020720}"/>
+                <a16:creationId xmlns:a16="http://schemas.microsoft.com/office/drawing/2014/main" id="{B845A60D-DBFB-4C16-9CA2-DE225AA19252}"/>
               </a:ext>
             </a:extLst>
           </p:cNvPr>
@@ -3754,7 +3754,7 @@
           <p:cNvPr id="3" name="Content Placeholder 2">
             <a:extLst xmlns:a="http://schemas.openxmlformats.org/drawingml/2006/main">
               <a:ext uri="{FF2B5EF4-FFF2-40B4-BE49-F238E27FC236}">
-                <a16:creationId xmlns:a16="http://schemas.microsoft.com/office/drawing/2014/main" id="{058153D6-5207-418F-99AE-DB5BE657C9AA}"/>
+                <a16:creationId xmlns:a16="http://schemas.microsoft.com/office/drawing/2014/main" id="{E193F75F-C310-4633-900B-6E4627C49819}"/>
               </a:ext>
             </a:extLst>
           </p:cNvPr>
@@ -3859,7 +3859,7 @@
           <p:cNvPr id="4" name="Text Placeholder 3">
             <a:extLst xmlns:a="http://schemas.openxmlformats.org/drawingml/2006/main">
               <a:ext uri="{FF2B5EF4-FFF2-40B4-BE49-F238E27FC236}">
-                <a16:creationId xmlns:a16="http://schemas.microsoft.com/office/drawing/2014/main" id="{C9A0B03A-B9FB-48AE-8B68-CFF68421FDCF}"/>
+                <a16:creationId xmlns:a16="http://schemas.microsoft.com/office/drawing/2014/main" id="{4CDF1625-6F25-4C65-BC9E-8D92AE1E8E04}"/>
               </a:ext>
             </a:extLst>
           </p:cNvPr>
@@ -3931,7 +3931,7 @@
           <p:cNvPr id="5" name="Date Placeholder 4">
             <a:extLst xmlns:a="http://schemas.openxmlformats.org/drawingml/2006/main">
               <a:ext uri="{FF2B5EF4-FFF2-40B4-BE49-F238E27FC236}">
-                <a16:creationId xmlns:a16="http://schemas.microsoft.com/office/drawing/2014/main" id="{6D56352C-F680-4128-A7A8-299C839E6B8F}"/>
+                <a16:creationId xmlns:a16="http://schemas.microsoft.com/office/drawing/2014/main" id="{C3B515C6-37D6-453A-80CA-B7EAE8E86679}"/>
               </a:ext>
             </a:extLst>
           </p:cNvPr>
@@ -3959,7 +3959,7 @@
           <p:cNvPr id="6" name="Footer Placeholder 5">
             <a:extLst xmlns:a="http://schemas.openxmlformats.org/drawingml/2006/main">
               <a:ext uri="{FF2B5EF4-FFF2-40B4-BE49-F238E27FC236}">
-                <a16:creationId xmlns:a16="http://schemas.microsoft.com/office/drawing/2014/main" id="{7E7DCF77-319C-4051-8718-4463A7AEFCBE}"/>
+                <a16:creationId xmlns:a16="http://schemas.microsoft.com/office/drawing/2014/main" id="{612F0E3A-D0C7-4B78-A435-CBFF0648D2B8}"/>
               </a:ext>
             </a:extLst>
           </p:cNvPr>
@@ -3984,7 +3984,7 @@
           <p:cNvPr id="7" name="Slide Number Placeholder 6">
             <a:extLst xmlns:a="http://schemas.openxmlformats.org/drawingml/2006/main">
               <a:ext uri="{FF2B5EF4-FFF2-40B4-BE49-F238E27FC236}">
-                <a16:creationId xmlns:a16="http://schemas.microsoft.com/office/drawing/2014/main" id="{3F4D9C68-C95D-4D81-A048-F28F04D2BF18}"/>
+                <a16:creationId xmlns:a16="http://schemas.microsoft.com/office/drawing/2014/main" id="{CE2E0C7F-E08A-42DE-846D-CEE02EBB29EC}"/>
               </a:ext>
             </a:extLst>
           </p:cNvPr>
@@ -4029,7 +4029,7 @@
           <p:cNvPr id="2" name="Title 1">
             <a:extLst xmlns:a="http://schemas.openxmlformats.org/drawingml/2006/main">
               <a:ext uri="{FF2B5EF4-FFF2-40B4-BE49-F238E27FC236}">
-                <a16:creationId xmlns:a16="http://schemas.microsoft.com/office/drawing/2014/main" id="{C5C862B3-81FA-46FE-9237-86811C51A94A}"/>
+                <a16:creationId xmlns:a16="http://schemas.microsoft.com/office/drawing/2014/main" id="{BCDA3500-A98E-42D7-915C-C4B94E996C15}"/>
               </a:ext>
             </a:extLst>
           </p:cNvPr>
@@ -4067,7 +4067,7 @@
           <p:cNvPr id="3" name="Picture Placeholder 2">
             <a:extLst xmlns:a="http://schemas.openxmlformats.org/drawingml/2006/main">
               <a:ext uri="{FF2B5EF4-FFF2-40B4-BE49-F238E27FC236}">
-                <a16:creationId xmlns:a16="http://schemas.microsoft.com/office/drawing/2014/main" id="{779183DC-7EDB-4B20-B78D-927482FD686F}"/>
+                <a16:creationId xmlns:a16="http://schemas.microsoft.com/office/drawing/2014/main" id="{306C3FB7-879D-40F3-9EA3-F1E4C8096319}"/>
               </a:ext>
             </a:extLst>
           </p:cNvPr>
@@ -4134,7 +4134,7 @@
           <p:cNvPr id="4" name="Text Placeholder 3">
             <a:extLst xmlns:a="http://schemas.openxmlformats.org/drawingml/2006/main">
               <a:ext uri="{FF2B5EF4-FFF2-40B4-BE49-F238E27FC236}">
-                <a16:creationId xmlns:a16="http://schemas.microsoft.com/office/drawing/2014/main" id="{33B1BC80-21E0-4F34-8437-FD301269BBF6}"/>
+                <a16:creationId xmlns:a16="http://schemas.microsoft.com/office/drawing/2014/main" id="{9A405AC1-9650-494E-B486-6AE02AA47C55}"/>
               </a:ext>
             </a:extLst>
           </p:cNvPr>
@@ -4206,7 +4206,7 @@
           <p:cNvPr id="5" name="Date Placeholder 4">
             <a:extLst xmlns:a="http://schemas.openxmlformats.org/drawingml/2006/main">
               <a:ext uri="{FF2B5EF4-FFF2-40B4-BE49-F238E27FC236}">
-                <a16:creationId xmlns:a16="http://schemas.microsoft.com/office/drawing/2014/main" id="{A29C85A6-A25F-4037-B447-115BF41CA24E}"/>
+                <a16:creationId xmlns:a16="http://schemas.microsoft.com/office/drawing/2014/main" id="{073E8210-4201-4218-9B6A-7F9D8789808B}"/>
               </a:ext>
             </a:extLst>
           </p:cNvPr>
@@ -4234,7 +4234,7 @@
           <p:cNvPr id="6" name="Footer Placeholder 5">
             <a:extLst xmlns:a="http://schemas.openxmlformats.org/drawingml/2006/main">
               <a:ext uri="{FF2B5EF4-FFF2-40B4-BE49-F238E27FC236}">
-                <a16:creationId xmlns:a16="http://schemas.microsoft.com/office/drawing/2014/main" id="{9930E315-EED6-4EA0-9FF5-4736C7929A33}"/>
+                <a16:creationId xmlns:a16="http://schemas.microsoft.com/office/drawing/2014/main" id="{B71F4330-5262-4D4D-85B7-6CC100333AE1}"/>
               </a:ext>
             </a:extLst>
           </p:cNvPr>
@@ -4259,7 +4259,7 @@
           <p:cNvPr id="7" name="Slide Number Placeholder 6">
             <a:extLst xmlns:a="http://schemas.openxmlformats.org/drawingml/2006/main">
               <a:ext uri="{FF2B5EF4-FFF2-40B4-BE49-F238E27FC236}">
-                <a16:creationId xmlns:a16="http://schemas.microsoft.com/office/drawing/2014/main" id="{5C637C4E-F129-4F46-BF28-64E2DD128D8D}"/>
+                <a16:creationId xmlns:a16="http://schemas.microsoft.com/office/drawing/2014/main" id="{1D504ADB-B612-4E95-A5D8-13BDAC41BD07}"/>
               </a:ext>
             </a:extLst>
           </p:cNvPr>
@@ -4309,7 +4309,7 @@
           <p:cNvPr id="2" name="Title Placeholder 1">
             <a:extLst xmlns:a="http://schemas.openxmlformats.org/drawingml/2006/main">
               <a:ext uri="{FF2B5EF4-FFF2-40B4-BE49-F238E27FC236}">
-                <a16:creationId xmlns:a16="http://schemas.microsoft.com/office/drawing/2014/main" id="{ECD6DF1E-9BC0-49D1-817A-87D81EAF2FFF}"/>
+                <a16:creationId xmlns:a16="http://schemas.microsoft.com/office/drawing/2014/main" id="{1FC9767C-250C-4495-9E87-57F5E055A207}"/>
               </a:ext>
             </a:extLst>
           </p:cNvPr>
@@ -4347,7 +4347,7 @@
           <p:cNvPr id="3" name="Text Placeholder 2">
             <a:extLst xmlns:a="http://schemas.openxmlformats.org/drawingml/2006/main">
               <a:ext uri="{FF2B5EF4-FFF2-40B4-BE49-F238E27FC236}">
-                <a16:creationId xmlns:a16="http://schemas.microsoft.com/office/drawing/2014/main" id="{9970E215-33B6-47F0-B301-2F166D27808D}"/>
+                <a16:creationId xmlns:a16="http://schemas.microsoft.com/office/drawing/2014/main" id="{E8594496-FF93-47D6-8431-1D7A177736D4}"/>
               </a:ext>
             </a:extLst>
           </p:cNvPr>
@@ -4420,7 +4420,7 @@
           <p:cNvPr id="4" name="Date Placeholder 3">
             <a:extLst xmlns:a="http://schemas.openxmlformats.org/drawingml/2006/main">
               <a:ext uri="{FF2B5EF4-FFF2-40B4-BE49-F238E27FC236}">
-                <a16:creationId xmlns:a16="http://schemas.microsoft.com/office/drawing/2014/main" id="{80971FA2-06F4-46C9-AA6D-D5DB77EEEC42}"/>
+                <a16:creationId xmlns:a16="http://schemas.microsoft.com/office/drawing/2014/main" id="{C3A523DF-00DB-4B51-B915-7654C6061530}"/>
               </a:ext>
             </a:extLst>
           </p:cNvPr>
@@ -4467,7 +4467,7 @@
           <p:cNvPr id="5" name="Footer Placeholder 4">
             <a:extLst xmlns:a="http://schemas.openxmlformats.org/drawingml/2006/main">
               <a:ext uri="{FF2B5EF4-FFF2-40B4-BE49-F238E27FC236}">
-                <a16:creationId xmlns:a16="http://schemas.microsoft.com/office/drawing/2014/main" id="{7211908E-1A9A-4654-9BCE-853212201D1F}"/>
+                <a16:creationId xmlns:a16="http://schemas.microsoft.com/office/drawing/2014/main" id="{86BDB433-D7B3-46F8-AD63-518BCB96CC60}"/>
               </a:ext>
             </a:extLst>
           </p:cNvPr>
@@ -4511,7 +4511,7 @@
           <p:cNvPr id="6" name="Slide Number Placeholder 5">
             <a:extLst xmlns:a="http://schemas.openxmlformats.org/drawingml/2006/main">
               <a:ext uri="{FF2B5EF4-FFF2-40B4-BE49-F238E27FC236}">
-                <a16:creationId xmlns:a16="http://schemas.microsoft.com/office/drawing/2014/main" id="{4638E421-4D94-4DF3-8CCE-F05D679D2E1E}"/>
+                <a16:creationId xmlns:a16="http://schemas.microsoft.com/office/drawing/2014/main" id="{1FFDEB83-1840-48E2-B4C1-025730A72DEB}"/>
               </a:ext>
             </a:extLst>
           </p:cNvPr>
@@ -4557,17 +4557,17 @@
   </p:cSld>
   <p:clrMap bg1="lt1" tx1="dk1" bg2="lt2" tx2="dk2" accent1="accent1" accent2="accent2" accent3="accent3" accent4="accent4" accent5="accent5" accent6="accent6" hlink="hlink" folHlink="folHlink"/>
   <p:sldLayoutIdLst>
-    <p:sldLayoutId xmlns:r="http://schemas.openxmlformats.org/officeDocument/2006/relationships" id="2147483649" r:id="Rcee08fda37f045c6"/>
-    <p:sldLayoutId xmlns:r="http://schemas.openxmlformats.org/officeDocument/2006/relationships" id="2147483650" r:id="R36791f7eeb2e4dcf"/>
-    <p:sldLayoutId xmlns:r="http://schemas.openxmlformats.org/officeDocument/2006/relationships" id="2147483651" r:id="Rcab5b21f4fc6489b"/>
-    <p:sldLayoutId xmlns:r="http://schemas.openxmlformats.org/officeDocument/2006/relationships" id="2147483652" r:id="Rac861a4775e14913"/>
-    <p:sldLayoutId xmlns:r="http://schemas.openxmlformats.org/officeDocument/2006/relationships" id="2147483653" r:id="Ra503fe8c42294942"/>
-    <p:sldLayoutId xmlns:r="http://schemas.openxmlformats.org/officeDocument/2006/relationships" id="2147483654" r:id="Rf1fbbcf196c34e8d"/>
-    <p:sldLayoutId xmlns:r="http://schemas.openxmlformats.org/officeDocument/2006/relationships" id="2147483655" r:id="R4efa0766c79d49ba"/>
-    <p:sldLayoutId xmlns:r="http://schemas.openxmlformats.org/officeDocument/2006/relationships" id="2147483656" r:id="Ree8d71ff7b8042a2"/>
-    <p:sldLayoutId xmlns:r="http://schemas.openxmlformats.org/officeDocument/2006/relationships" id="2147483657" r:id="R0634b1ee1cf44fd1"/>
-    <p:sldLayoutId xmlns:r="http://schemas.openxmlformats.org/officeDocument/2006/relationships" id="2147483658" r:id="R7a2db39534734c15"/>
-    <p:sldLayoutId xmlns:r="http://schemas.openxmlformats.org/officeDocument/2006/relationships" id="2147483659" r:id="R7fa461af172741a9"/>
+    <p:sldLayoutId xmlns:r="http://schemas.openxmlformats.org/officeDocument/2006/relationships" id="2147483649" r:id="R6fbba830e2bf44f3"/>
+    <p:sldLayoutId xmlns:r="http://schemas.openxmlformats.org/officeDocument/2006/relationships" id="2147483650" r:id="Rcf53c79d937c43fd"/>
+    <p:sldLayoutId xmlns:r="http://schemas.openxmlformats.org/officeDocument/2006/relationships" id="2147483651" r:id="R6828dca130a14e71"/>
+    <p:sldLayoutId xmlns:r="http://schemas.openxmlformats.org/officeDocument/2006/relationships" id="2147483652" r:id="R655df3797908481c"/>
+    <p:sldLayoutId xmlns:r="http://schemas.openxmlformats.org/officeDocument/2006/relationships" id="2147483653" r:id="R165ab68bd1a9462e"/>
+    <p:sldLayoutId xmlns:r="http://schemas.openxmlformats.org/officeDocument/2006/relationships" id="2147483654" r:id="Rbe9c1803ed3a484e"/>
+    <p:sldLayoutId xmlns:r="http://schemas.openxmlformats.org/officeDocument/2006/relationships" id="2147483655" r:id="R62378c32967c40f9"/>
+    <p:sldLayoutId xmlns:r="http://schemas.openxmlformats.org/officeDocument/2006/relationships" id="2147483656" r:id="Rb464b537dd924951"/>
+    <p:sldLayoutId xmlns:r="http://schemas.openxmlformats.org/officeDocument/2006/relationships" id="2147483657" r:id="Rb7e5dac8e8864181"/>
+    <p:sldLayoutId xmlns:r="http://schemas.openxmlformats.org/officeDocument/2006/relationships" id="2147483658" r:id="R42536b05d6904da3"/>
+    <p:sldLayoutId xmlns:r="http://schemas.openxmlformats.org/officeDocument/2006/relationships" id="2147483659" r:id="R03348f632aee40c2"/>
   </p:sldLayoutIdLst>
   <p:txStyles>
     <p:titleStyle>
@@ -5113,7 +5113,7 @@
           <p:cNvPr id="2" name="Rectangle 1">
             <a:extLst xmlns:a="http://schemas.openxmlformats.org/drawingml/2006/main">
               <a:ext uri="{FF2B5EF4-FFF2-40B4-BE49-F238E27FC236}">
-                <a16:creationId xmlns:a16="http://schemas.microsoft.com/office/drawing/2014/main" id="{E0DBA1F5-EDAD-49E2-BEF0-0A387BA12739}"/>
+                <a16:creationId xmlns:a16="http://schemas.microsoft.com/office/drawing/2014/main" id="{B959BA56-CF1D-4BBA-BF72-05061A0B98C7}"/>
               </a:ext>
             </a:extLst>
           </p:cNvPr>
@@ -5166,7 +5166,7 @@
           <p:cNvPr id="3" name="Rectangle 2">
             <a:extLst xmlns:a="http://schemas.openxmlformats.org/drawingml/2006/main">
               <a:ext uri="{FF2B5EF4-FFF2-40B4-BE49-F238E27FC236}">
-                <a16:creationId xmlns:a16="http://schemas.microsoft.com/office/drawing/2014/main" id="{1EF05680-7F28-4037-AAD0-1330D6D18E97}"/>
+                <a16:creationId xmlns:a16="http://schemas.microsoft.com/office/drawing/2014/main" id="{E03CA2F5-909C-4654-97E4-CFC2F363E2C7}"/>
               </a:ext>
             </a:extLst>
           </p:cNvPr>
@@ -5219,7 +5219,7 @@
           <p:cNvPr id="4" name="TextBox 3">
             <a:extLst xmlns:a="http://schemas.openxmlformats.org/drawingml/2006/main">
               <a:ext uri="{FF2B5EF4-FFF2-40B4-BE49-F238E27FC236}">
-                <a16:creationId xmlns:a16="http://schemas.microsoft.com/office/drawing/2014/main" id="{7039D2C1-E2AF-42AB-B240-3A507C7378F3}"/>
+                <a16:creationId xmlns:a16="http://schemas.microsoft.com/office/drawing/2014/main" id="{E60BEA90-4AE9-4815-8122-47B63F250575}"/>
               </a:ext>
             </a:extLst>
           </p:cNvPr>
@@ -5321,7 +5321,7 @@
     </p:spTree>
     <p:extLst>
       <p:ext uri="{BB962C8B-B14F-4D97-AF65-F5344CB8AC3E}">
-        <p14:creationId xmlns:p14="http://schemas.microsoft.com/office/powerpoint/2010/main" val="2028931425"/>
+        <p14:creationId xmlns:p14="http://schemas.microsoft.com/office/powerpoint/2010/main" val="747883721"/>
       </p:ext>
     </p:extLst>
   </p:cSld>
@@ -5345,7 +5345,7 @@
           <p:cNvPr id="2" name="Rectangle 1">
             <a:extLst xmlns:a="http://schemas.openxmlformats.org/drawingml/2006/main">
               <a:ext uri="{FF2B5EF4-FFF2-40B4-BE49-F238E27FC236}">
-                <a16:creationId xmlns:a16="http://schemas.microsoft.com/office/drawing/2014/main" id="{2F9AD40C-D0CD-4F33-9B6A-B54B129D2C07}"/>
+                <a16:creationId xmlns:a16="http://schemas.microsoft.com/office/drawing/2014/main" id="{D035EBE8-53DD-45B4-88A8-DC99A6640FEC}"/>
               </a:ext>
             </a:extLst>
           </p:cNvPr>
@@ -5398,7 +5398,7 @@
           <p:cNvPr id="3" name="Rectangle 2">
             <a:extLst xmlns:a="http://schemas.openxmlformats.org/drawingml/2006/main">
               <a:ext uri="{FF2B5EF4-FFF2-40B4-BE49-F238E27FC236}">
-                <a16:creationId xmlns:a16="http://schemas.microsoft.com/office/drawing/2014/main" id="{A8A3AAB7-03C7-4D9F-A1F5-D9FF055BB660}"/>
+                <a16:creationId xmlns:a16="http://schemas.microsoft.com/office/drawing/2014/main" id="{4CD44846-3032-4665-A874-9DB23538852C}"/>
               </a:ext>
             </a:extLst>
           </p:cNvPr>
@@ -5451,7 +5451,7 @@
           <p:cNvPr id="4" name="Rectangle 3">
             <a:extLst xmlns:a="http://schemas.openxmlformats.org/drawingml/2006/main">
               <a:ext uri="{FF2B5EF4-FFF2-40B4-BE49-F238E27FC236}">
-                <a16:creationId xmlns:a16="http://schemas.microsoft.com/office/drawing/2014/main" id="{4558FC54-9D35-4A64-A0B1-DB641395266D}"/>
+                <a16:creationId xmlns:a16="http://schemas.microsoft.com/office/drawing/2014/main" id="{541B6A31-FE42-4FDC-BD2F-28666C6A4AF8}"/>
               </a:ext>
             </a:extLst>
           </p:cNvPr>
@@ -5504,7 +5504,7 @@
           <p:cNvPr id="5" name="TextBox 4">
             <a:extLst xmlns:a="http://schemas.openxmlformats.org/drawingml/2006/main">
               <a:ext uri="{FF2B5EF4-FFF2-40B4-BE49-F238E27FC236}">
-                <a16:creationId xmlns:a16="http://schemas.microsoft.com/office/drawing/2014/main" id="{BF2EDFCE-6FDE-4620-924E-58DD16177C36}"/>
+                <a16:creationId xmlns:a16="http://schemas.microsoft.com/office/drawing/2014/main" id="{201C9F79-B2CE-4488-B86D-42A035D4B0E3}"/>
               </a:ext>
             </a:extLst>
           </p:cNvPr>
@@ -5567,7 +5567,7 @@
           <p:cNvPr id="6" name="Rounded Rectangle 5">
             <a:extLst xmlns:a="http://schemas.openxmlformats.org/drawingml/2006/main">
               <a:ext uri="{FF2B5EF4-FFF2-40B4-BE49-F238E27FC236}">
-                <a16:creationId xmlns:a16="http://schemas.microsoft.com/office/drawing/2014/main" id="{361592C9-D48C-415B-8467-F12C9D394E76}"/>
+                <a16:creationId xmlns:a16="http://schemas.microsoft.com/office/drawing/2014/main" id="{369C9FB8-3F1B-484C-82B2-7E43D80A6041}"/>
               </a:ext>
             </a:extLst>
           </p:cNvPr>
@@ -5622,7 +5622,7 @@
           <p:cNvPr id="7" name="TextBox 6">
             <a:extLst xmlns:a="http://schemas.openxmlformats.org/drawingml/2006/main">
               <a:ext uri="{FF2B5EF4-FFF2-40B4-BE49-F238E27FC236}">
-                <a16:creationId xmlns:a16="http://schemas.microsoft.com/office/drawing/2014/main" id="{1539E09D-42D1-46F0-9DAD-EBA61E566E26}"/>
+                <a16:creationId xmlns:a16="http://schemas.microsoft.com/office/drawing/2014/main" id="{EB7D4578-8594-416E-B8F7-9F861D1E7A49}"/>
               </a:ext>
             </a:extLst>
           </p:cNvPr>
@@ -5726,7 +5726,7 @@
           <p:cNvPr id="8" name="Rounded Rectangle 7">
             <a:extLst xmlns:a="http://schemas.openxmlformats.org/drawingml/2006/main">
               <a:ext uri="{FF2B5EF4-FFF2-40B4-BE49-F238E27FC236}">
-                <a16:creationId xmlns:a16="http://schemas.microsoft.com/office/drawing/2014/main" id="{252B45E2-C014-482A-BD80-D3D25CAD3AC9}"/>
+                <a16:creationId xmlns:a16="http://schemas.microsoft.com/office/drawing/2014/main" id="{9CE6973E-3518-4EE3-A2D7-994A0E635478}"/>
               </a:ext>
             </a:extLst>
           </p:cNvPr>
@@ -5781,7 +5781,7 @@
           <p:cNvPr id="9" name="TextBox 8">
             <a:extLst xmlns:a="http://schemas.openxmlformats.org/drawingml/2006/main">
               <a:ext uri="{FF2B5EF4-FFF2-40B4-BE49-F238E27FC236}">
-                <a16:creationId xmlns:a16="http://schemas.microsoft.com/office/drawing/2014/main" id="{97EA0682-ED7A-4A4B-877D-703C755C57A0}"/>
+                <a16:creationId xmlns:a16="http://schemas.microsoft.com/office/drawing/2014/main" id="{E0C36BE4-7CA5-458D-9FB0-5B698D16067D}"/>
               </a:ext>
             </a:extLst>
           </p:cNvPr>
@@ -5866,7 +5866,7 @@
           <p:cNvPr id="10" name="Rounded Rectangle 9">
             <a:extLst xmlns:a="http://schemas.openxmlformats.org/drawingml/2006/main">
               <a:ext uri="{FF2B5EF4-FFF2-40B4-BE49-F238E27FC236}">
-                <a16:creationId xmlns:a16="http://schemas.microsoft.com/office/drawing/2014/main" id="{9300663A-57F7-4BB5-9CC8-F033FB0F66B0}"/>
+                <a16:creationId xmlns:a16="http://schemas.microsoft.com/office/drawing/2014/main" id="{CA95DEB7-E756-4724-B9F8-C29E83263C12}"/>
               </a:ext>
             </a:extLst>
           </p:cNvPr>
@@ -5921,7 +5921,7 @@
           <p:cNvPr id="11" name="TextBox 10">
             <a:extLst xmlns:a="http://schemas.openxmlformats.org/drawingml/2006/main">
               <a:ext uri="{FF2B5EF4-FFF2-40B4-BE49-F238E27FC236}">
-                <a16:creationId xmlns:a16="http://schemas.microsoft.com/office/drawing/2014/main" id="{1D826F69-571F-4FD0-B867-E52F10851802}"/>
+                <a16:creationId xmlns:a16="http://schemas.microsoft.com/office/drawing/2014/main" id="{B5477A4D-0990-4359-B0BF-9E1814D8F50B}"/>
               </a:ext>
             </a:extLst>
           </p:cNvPr>
@@ -6023,7 +6023,7 @@
     </p:spTree>
     <p:extLst>
       <p:ext uri="{BB962C8B-B14F-4D97-AF65-F5344CB8AC3E}">
-        <p14:creationId xmlns:p14="http://schemas.microsoft.com/office/powerpoint/2010/main" val="733324667"/>
+        <p14:creationId xmlns:p14="http://schemas.microsoft.com/office/powerpoint/2010/main" val="1704285524"/>
       </p:ext>
     </p:extLst>
   </p:cSld>
@@ -6047,7 +6047,7 @@
           <p:cNvPr id="2" name="Rectangle 1">
             <a:extLst xmlns:a="http://schemas.openxmlformats.org/drawingml/2006/main">
               <a:ext uri="{FF2B5EF4-FFF2-40B4-BE49-F238E27FC236}">
-                <a16:creationId xmlns:a16="http://schemas.microsoft.com/office/drawing/2014/main" id="{49B8E7FD-4EA8-4904-9272-81ACBAFE91C1}"/>
+                <a16:creationId xmlns:a16="http://schemas.microsoft.com/office/drawing/2014/main" id="{2FFABAE1-FF17-47D0-9C48-F05D44B445F4}"/>
               </a:ext>
             </a:extLst>
           </p:cNvPr>
@@ -6100,7 +6100,7 @@
           <p:cNvPr id="3" name="Rectangle 2">
             <a:extLst xmlns:a="http://schemas.openxmlformats.org/drawingml/2006/main">
               <a:ext uri="{FF2B5EF4-FFF2-40B4-BE49-F238E27FC236}">
-                <a16:creationId xmlns:a16="http://schemas.microsoft.com/office/drawing/2014/main" id="{220BB2E2-7BCD-4650-8C7B-FDCDC1728D78}"/>
+                <a16:creationId xmlns:a16="http://schemas.microsoft.com/office/drawing/2014/main" id="{E27E8A66-3F9A-40AA-AA0C-9EFBDFBF7FD1}"/>
               </a:ext>
             </a:extLst>
           </p:cNvPr>
@@ -6153,7 +6153,7 @@
           <p:cNvPr id="4" name="Rectangle 3">
             <a:extLst xmlns:a="http://schemas.openxmlformats.org/drawingml/2006/main">
               <a:ext uri="{FF2B5EF4-FFF2-40B4-BE49-F238E27FC236}">
-                <a16:creationId xmlns:a16="http://schemas.microsoft.com/office/drawing/2014/main" id="{38A5135E-D1BE-4854-A8CD-0755E90558BF}"/>
+                <a16:creationId xmlns:a16="http://schemas.microsoft.com/office/drawing/2014/main" id="{919A8047-8884-42B9-81E8-1815DF8B0DC3}"/>
               </a:ext>
             </a:extLst>
           </p:cNvPr>
@@ -6206,7 +6206,7 @@
           <p:cNvPr id="5" name="TextBox 4">
             <a:extLst xmlns:a="http://schemas.openxmlformats.org/drawingml/2006/main">
               <a:ext uri="{FF2B5EF4-FFF2-40B4-BE49-F238E27FC236}">
-                <a16:creationId xmlns:a16="http://schemas.microsoft.com/office/drawing/2014/main" id="{881FC1C7-8E00-44B5-A3D9-7F1125CF73D2}"/>
+                <a16:creationId xmlns:a16="http://schemas.microsoft.com/office/drawing/2014/main" id="{543EEE72-DEDE-4489-B2CD-A1F67E8ED7F5}"/>
               </a:ext>
             </a:extLst>
           </p:cNvPr>
@@ -6269,7 +6269,7 @@
           <p:cNvPr id="6" name="Rounded Rectangle 5">
             <a:extLst xmlns:a="http://schemas.openxmlformats.org/drawingml/2006/main">
               <a:ext uri="{FF2B5EF4-FFF2-40B4-BE49-F238E27FC236}">
-                <a16:creationId xmlns:a16="http://schemas.microsoft.com/office/drawing/2014/main" id="{D09A8FEA-5DDD-4469-9473-2F1ACBA8D9DC}"/>
+                <a16:creationId xmlns:a16="http://schemas.microsoft.com/office/drawing/2014/main" id="{B9F91D04-F16A-434B-84B3-CA801F111095}"/>
               </a:ext>
             </a:extLst>
           </p:cNvPr>
@@ -6324,7 +6324,7 @@
           <p:cNvPr id="7" name="TextBox 6">
             <a:extLst xmlns:a="http://schemas.openxmlformats.org/drawingml/2006/main">
               <a:ext uri="{FF2B5EF4-FFF2-40B4-BE49-F238E27FC236}">
-                <a16:creationId xmlns:a16="http://schemas.microsoft.com/office/drawing/2014/main" id="{120FB8D9-C369-46E8-876F-997B1DF8E8CE}"/>
+                <a16:creationId xmlns:a16="http://schemas.microsoft.com/office/drawing/2014/main" id="{99A98039-C969-434E-A561-AC2F6095A8BB}"/>
               </a:ext>
             </a:extLst>
           </p:cNvPr>
@@ -6523,7 +6523,7 @@
           <p:cNvPr id="8" name="Rounded Rectangle 7">
             <a:extLst xmlns:a="http://schemas.openxmlformats.org/drawingml/2006/main">
               <a:ext uri="{FF2B5EF4-FFF2-40B4-BE49-F238E27FC236}">
-                <a16:creationId xmlns:a16="http://schemas.microsoft.com/office/drawing/2014/main" id="{8A14E537-EA72-46DD-9E26-33372B364A01}"/>
+                <a16:creationId xmlns:a16="http://schemas.microsoft.com/office/drawing/2014/main" id="{834515B1-FA97-48DA-BC78-59A4E2D0CADB}"/>
               </a:ext>
             </a:extLst>
           </p:cNvPr>
@@ -6578,7 +6578,7 @@
           <p:cNvPr id="9" name="TextBox 8">
             <a:extLst xmlns:a="http://schemas.openxmlformats.org/drawingml/2006/main">
               <a:ext uri="{FF2B5EF4-FFF2-40B4-BE49-F238E27FC236}">
-                <a16:creationId xmlns:a16="http://schemas.microsoft.com/office/drawing/2014/main" id="{7C852D77-A1D4-4F0C-B18B-203BCFAB24A8}"/>
+                <a16:creationId xmlns:a16="http://schemas.microsoft.com/office/drawing/2014/main" id="{1ED0C34F-3BE1-4104-9DFC-C75BC952D566}"/>
               </a:ext>
             </a:extLst>
           </p:cNvPr>
@@ -6699,7 +6699,7 @@
     </p:spTree>
     <p:extLst>
       <p:ext uri="{BB962C8B-B14F-4D97-AF65-F5344CB8AC3E}">
-        <p14:creationId xmlns:p14="http://schemas.microsoft.com/office/powerpoint/2010/main" val="2009182731"/>
+        <p14:creationId xmlns:p14="http://schemas.microsoft.com/office/powerpoint/2010/main" val="1331033048"/>
       </p:ext>
     </p:extLst>
   </p:cSld>
@@ -6723,7 +6723,7 @@
           <p:cNvPr id="2" name="Rectangle 1">
             <a:extLst xmlns:a="http://schemas.openxmlformats.org/drawingml/2006/main">
               <a:ext uri="{FF2B5EF4-FFF2-40B4-BE49-F238E27FC236}">
-                <a16:creationId xmlns:a16="http://schemas.microsoft.com/office/drawing/2014/main" id="{209929C7-D563-4E95-B7E8-B863E661347B}"/>
+                <a16:creationId xmlns:a16="http://schemas.microsoft.com/office/drawing/2014/main" id="{0BB52EC8-E2E4-4C5B-AD9C-34AA3201A407}"/>
               </a:ext>
             </a:extLst>
           </p:cNvPr>
@@ -6776,7 +6776,7 @@
           <p:cNvPr id="3" name="Rectangle 2">
             <a:extLst xmlns:a="http://schemas.openxmlformats.org/drawingml/2006/main">
               <a:ext uri="{FF2B5EF4-FFF2-40B4-BE49-F238E27FC236}">
-                <a16:creationId xmlns:a16="http://schemas.microsoft.com/office/drawing/2014/main" id="{21FFB2B4-5B74-45E1-95E2-2AF326FE3C9D}"/>
+                <a16:creationId xmlns:a16="http://schemas.microsoft.com/office/drawing/2014/main" id="{2A541938-7315-4F3B-B40E-D4C80FCC3527}"/>
               </a:ext>
             </a:extLst>
           </p:cNvPr>
@@ -6829,7 +6829,7 @@
           <p:cNvPr id="4" name="TextBox 3">
             <a:extLst xmlns:a="http://schemas.openxmlformats.org/drawingml/2006/main">
               <a:ext uri="{FF2B5EF4-FFF2-40B4-BE49-F238E27FC236}">
-                <a16:creationId xmlns:a16="http://schemas.microsoft.com/office/drawing/2014/main" id="{6F661533-EF29-400D-AACC-19304E41D1AF}"/>
+                <a16:creationId xmlns:a16="http://schemas.microsoft.com/office/drawing/2014/main" id="{5F149EF5-3AB6-4FEB-9594-C48DA41E8A71}"/>
               </a:ext>
             </a:extLst>
           </p:cNvPr>
@@ -7007,7 +7007,7 @@
     </p:spTree>
     <p:extLst>
       <p:ext uri="{BB962C8B-B14F-4D97-AF65-F5344CB8AC3E}">
-        <p14:creationId xmlns:p14="http://schemas.microsoft.com/office/powerpoint/2010/main" val="2022037832"/>
+        <p14:creationId xmlns:p14="http://schemas.microsoft.com/office/powerpoint/2010/main" val="635446557"/>
       </p:ext>
     </p:extLst>
   </p:cSld>
@@ -7031,7 +7031,7 @@
           <p:cNvPr id="2" name="Rectangle 1">
             <a:extLst xmlns:a="http://schemas.openxmlformats.org/drawingml/2006/main">
               <a:ext uri="{FF2B5EF4-FFF2-40B4-BE49-F238E27FC236}">
-                <a16:creationId xmlns:a16="http://schemas.microsoft.com/office/drawing/2014/main" id="{3CFD2998-13E2-4E2A-B29F-4B57AC0E7273}"/>
+                <a16:creationId xmlns:a16="http://schemas.microsoft.com/office/drawing/2014/main" id="{A7AC01FD-E0BE-4CA2-9728-D1692C7CAAAC}"/>
               </a:ext>
             </a:extLst>
           </p:cNvPr>
@@ -7084,7 +7084,7 @@
           <p:cNvPr id="3" name="Rectangle 2">
             <a:extLst xmlns:a="http://schemas.openxmlformats.org/drawingml/2006/main">
               <a:ext uri="{FF2B5EF4-FFF2-40B4-BE49-F238E27FC236}">
-                <a16:creationId xmlns:a16="http://schemas.microsoft.com/office/drawing/2014/main" id="{D726062E-DFB9-4844-BBE5-EB0EFBE1959C}"/>
+                <a16:creationId xmlns:a16="http://schemas.microsoft.com/office/drawing/2014/main" id="{6CC34BA4-B19C-4589-88DA-4E1B06762FF2}"/>
               </a:ext>
             </a:extLst>
           </p:cNvPr>
@@ -7137,7 +7137,7 @@
           <p:cNvPr id="4" name="Rectangle 3">
             <a:extLst xmlns:a="http://schemas.openxmlformats.org/drawingml/2006/main">
               <a:ext uri="{FF2B5EF4-FFF2-40B4-BE49-F238E27FC236}">
-                <a16:creationId xmlns:a16="http://schemas.microsoft.com/office/drawing/2014/main" id="{D9CB8954-CE97-4062-BBD2-A32747E89514}"/>
+                <a16:creationId xmlns:a16="http://schemas.microsoft.com/office/drawing/2014/main" id="{2B2E2DBE-53DE-46CA-A2FE-AF81E63281D7}"/>
               </a:ext>
             </a:extLst>
           </p:cNvPr>
@@ -7190,7 +7190,7 @@
           <p:cNvPr id="5" name="TextBox 4">
             <a:extLst xmlns:a="http://schemas.openxmlformats.org/drawingml/2006/main">
               <a:ext uri="{FF2B5EF4-FFF2-40B4-BE49-F238E27FC236}">
-                <a16:creationId xmlns:a16="http://schemas.microsoft.com/office/drawing/2014/main" id="{E9E63F22-0F57-48DD-B138-B2ADFF331DAA}"/>
+                <a16:creationId xmlns:a16="http://schemas.microsoft.com/office/drawing/2014/main" id="{AA7DD74E-589F-4D6E-ACBE-AD1FB904E681}"/>
               </a:ext>
             </a:extLst>
           </p:cNvPr>
@@ -7253,7 +7253,7 @@
           <p:cNvPr id="6" name="Rounded Rectangle 5">
             <a:extLst xmlns:a="http://schemas.openxmlformats.org/drawingml/2006/main">
               <a:ext uri="{FF2B5EF4-FFF2-40B4-BE49-F238E27FC236}">
-                <a16:creationId xmlns:a16="http://schemas.microsoft.com/office/drawing/2014/main" id="{87EC5E4D-1D46-4EC2-83FF-4A5876E6AA30}"/>
+                <a16:creationId xmlns:a16="http://schemas.microsoft.com/office/drawing/2014/main" id="{4011CF02-8CDC-4560-814B-3DF01DA5CB27}"/>
               </a:ext>
             </a:extLst>
           </p:cNvPr>
@@ -7308,7 +7308,7 @@
           <p:cNvPr id="7" name="TextBox 6">
             <a:extLst xmlns:a="http://schemas.openxmlformats.org/drawingml/2006/main">
               <a:ext uri="{FF2B5EF4-FFF2-40B4-BE49-F238E27FC236}">
-                <a16:creationId xmlns:a16="http://schemas.microsoft.com/office/drawing/2014/main" id="{F112B2E7-3E64-460E-9B26-3A85056ACE0D}"/>
+                <a16:creationId xmlns:a16="http://schemas.microsoft.com/office/drawing/2014/main" id="{96BA2453-E1DB-467A-B761-6586ACE30EEB}"/>
               </a:ext>
             </a:extLst>
           </p:cNvPr>
@@ -7412,7 +7412,7 @@
           <p:cNvPr id="8" name="Rounded Rectangle 7">
             <a:extLst xmlns:a="http://schemas.openxmlformats.org/drawingml/2006/main">
               <a:ext uri="{FF2B5EF4-FFF2-40B4-BE49-F238E27FC236}">
-                <a16:creationId xmlns:a16="http://schemas.microsoft.com/office/drawing/2014/main" id="{362923ED-6233-4087-9469-09D5AD9D3114}"/>
+                <a16:creationId xmlns:a16="http://schemas.microsoft.com/office/drawing/2014/main" id="{BE34707B-5640-4432-98F4-BB8D9766398D}"/>
               </a:ext>
             </a:extLst>
           </p:cNvPr>
@@ -7467,7 +7467,7 @@
           <p:cNvPr id="9" name="TextBox 8">
             <a:extLst xmlns:a="http://schemas.openxmlformats.org/drawingml/2006/main">
               <a:ext uri="{FF2B5EF4-FFF2-40B4-BE49-F238E27FC236}">
-                <a16:creationId xmlns:a16="http://schemas.microsoft.com/office/drawing/2014/main" id="{899587D2-F8CF-4CB5-B1C7-DA4F684372AF}"/>
+                <a16:creationId xmlns:a16="http://schemas.microsoft.com/office/drawing/2014/main" id="{4C1E83E0-1E31-4190-82AD-F6539C12E080}"/>
               </a:ext>
             </a:extLst>
           </p:cNvPr>
@@ -7571,7 +7571,7 @@
           <p:cNvPr id="10" name="Rounded Rectangle 9">
             <a:extLst xmlns:a="http://schemas.openxmlformats.org/drawingml/2006/main">
               <a:ext uri="{FF2B5EF4-FFF2-40B4-BE49-F238E27FC236}">
-                <a16:creationId xmlns:a16="http://schemas.microsoft.com/office/drawing/2014/main" id="{F105BCBF-A08D-4411-AEC1-B48043FA6B45}"/>
+                <a16:creationId xmlns:a16="http://schemas.microsoft.com/office/drawing/2014/main" id="{8AAE9A99-093F-466F-8395-A38F016D77F0}"/>
               </a:ext>
             </a:extLst>
           </p:cNvPr>
@@ -7626,7 +7626,7 @@
           <p:cNvPr id="11" name="TextBox 10">
             <a:extLst xmlns:a="http://schemas.openxmlformats.org/drawingml/2006/main">
               <a:ext uri="{FF2B5EF4-FFF2-40B4-BE49-F238E27FC236}">
-                <a16:creationId xmlns:a16="http://schemas.microsoft.com/office/drawing/2014/main" id="{CF6422EA-E120-497D-B573-304557CE7825}"/>
+                <a16:creationId xmlns:a16="http://schemas.microsoft.com/office/drawing/2014/main" id="{99B55F59-54F1-4FB9-8401-146AA8BC7239}"/>
               </a:ext>
             </a:extLst>
           </p:cNvPr>
@@ -7785,7 +7785,7 @@
     </p:spTree>
     <p:extLst>
       <p:ext uri="{BB962C8B-B14F-4D97-AF65-F5344CB8AC3E}">
-        <p14:creationId xmlns:p14="http://schemas.microsoft.com/office/powerpoint/2010/main" val="1654501419"/>
+        <p14:creationId xmlns:p14="http://schemas.microsoft.com/office/powerpoint/2010/main" val="1056427338"/>
       </p:ext>
     </p:extLst>
   </p:cSld>
@@ -7809,7 +7809,7 @@
           <p:cNvPr id="2" name="Rectangle 1">
             <a:extLst xmlns:a="http://schemas.openxmlformats.org/drawingml/2006/main">
               <a:ext uri="{FF2B5EF4-FFF2-40B4-BE49-F238E27FC236}">
-                <a16:creationId xmlns:a16="http://schemas.microsoft.com/office/drawing/2014/main" id="{1ED8B4B8-ED80-49DE-8465-0CA06781B361}"/>
+                <a16:creationId xmlns:a16="http://schemas.microsoft.com/office/drawing/2014/main" id="{C8841C0A-8121-43F1-93A7-332460336295}"/>
               </a:ext>
             </a:extLst>
           </p:cNvPr>
@@ -7862,7 +7862,7 @@
           <p:cNvPr id="3" name="Rectangle 2">
             <a:extLst xmlns:a="http://schemas.openxmlformats.org/drawingml/2006/main">
               <a:ext uri="{FF2B5EF4-FFF2-40B4-BE49-F238E27FC236}">
-                <a16:creationId xmlns:a16="http://schemas.microsoft.com/office/drawing/2014/main" id="{685B1301-9721-4C77-9913-7D7BF334C8EF}"/>
+                <a16:creationId xmlns:a16="http://schemas.microsoft.com/office/drawing/2014/main" id="{ACBA789D-266C-46C4-A3A0-3A6D4EC0AB6A}"/>
               </a:ext>
             </a:extLst>
           </p:cNvPr>
@@ -7915,7 +7915,7 @@
           <p:cNvPr id="4" name="Rectangle 3">
             <a:extLst xmlns:a="http://schemas.openxmlformats.org/drawingml/2006/main">
               <a:ext uri="{FF2B5EF4-FFF2-40B4-BE49-F238E27FC236}">
-                <a16:creationId xmlns:a16="http://schemas.microsoft.com/office/drawing/2014/main" id="{7CB6E120-966A-4C87-B20E-73D1633CCC06}"/>
+                <a16:creationId xmlns:a16="http://schemas.microsoft.com/office/drawing/2014/main" id="{C4790685-BFFF-4697-9F29-2FC59E31D121}"/>
               </a:ext>
             </a:extLst>
           </p:cNvPr>
@@ -7968,7 +7968,7 @@
           <p:cNvPr id="5" name="TextBox 4">
             <a:extLst xmlns:a="http://schemas.openxmlformats.org/drawingml/2006/main">
               <a:ext uri="{FF2B5EF4-FFF2-40B4-BE49-F238E27FC236}">
-                <a16:creationId xmlns:a16="http://schemas.microsoft.com/office/drawing/2014/main" id="{C7F5A2F4-00AA-4875-B042-ECAE6DC17291}"/>
+                <a16:creationId xmlns:a16="http://schemas.microsoft.com/office/drawing/2014/main" id="{2D9861AB-3B2E-4344-A5DA-BF2C24F3FEDA}"/>
               </a:ext>
             </a:extLst>
           </p:cNvPr>
@@ -8031,7 +8031,7 @@
           <p:cNvPr id="6" name="Rounded Rectangle 5">
             <a:extLst xmlns:a="http://schemas.openxmlformats.org/drawingml/2006/main">
               <a:ext uri="{FF2B5EF4-FFF2-40B4-BE49-F238E27FC236}">
-                <a16:creationId xmlns:a16="http://schemas.microsoft.com/office/drawing/2014/main" id="{5A440847-36D1-4E77-97EE-D3A080B140B3}"/>
+                <a16:creationId xmlns:a16="http://schemas.microsoft.com/office/drawing/2014/main" id="{98D1B0AD-3396-419F-AC44-1A621FCB296A}"/>
               </a:ext>
             </a:extLst>
           </p:cNvPr>
@@ -8086,7 +8086,7 @@
           <p:cNvPr id="7" name="TextBox 6">
             <a:extLst xmlns:a="http://schemas.openxmlformats.org/drawingml/2006/main">
               <a:ext uri="{FF2B5EF4-FFF2-40B4-BE49-F238E27FC236}">
-                <a16:creationId xmlns:a16="http://schemas.microsoft.com/office/drawing/2014/main" id="{57B0E7E2-2FD5-4B01-A724-660B7C446609}"/>
+                <a16:creationId xmlns:a16="http://schemas.microsoft.com/office/drawing/2014/main" id="{306C2415-F573-4A41-8AAB-F155FF9274F9}"/>
               </a:ext>
             </a:extLst>
           </p:cNvPr>
@@ -8209,7 +8209,7 @@
           <p:cNvPr id="8" name="Rounded Rectangle 7">
             <a:extLst xmlns:a="http://schemas.openxmlformats.org/drawingml/2006/main">
               <a:ext uri="{FF2B5EF4-FFF2-40B4-BE49-F238E27FC236}">
-                <a16:creationId xmlns:a16="http://schemas.microsoft.com/office/drawing/2014/main" id="{BE50C756-5468-4EB8-8C1B-DAD07582A560}"/>
+                <a16:creationId xmlns:a16="http://schemas.microsoft.com/office/drawing/2014/main" id="{FBD03D21-1E70-438C-ACB7-0FEEE1CEAFFF}"/>
               </a:ext>
             </a:extLst>
           </p:cNvPr>
@@ -8264,7 +8264,7 @@
           <p:cNvPr id="9" name="TextBox 8">
             <a:extLst xmlns:a="http://schemas.openxmlformats.org/drawingml/2006/main">
               <a:ext uri="{FF2B5EF4-FFF2-40B4-BE49-F238E27FC236}">
-                <a16:creationId xmlns:a16="http://schemas.microsoft.com/office/drawing/2014/main" id="{FE8E9DDC-53CE-42B0-BE1E-B3B603C033CD}"/>
+                <a16:creationId xmlns:a16="http://schemas.microsoft.com/office/drawing/2014/main" id="{87849F11-5B1A-42DD-B840-7DBCCB7C78D0}"/>
               </a:ext>
             </a:extLst>
           </p:cNvPr>
@@ -8406,7 +8406,7 @@
           <p:cNvPr id="10" name="Rounded Rectangle 9">
             <a:extLst xmlns:a="http://schemas.openxmlformats.org/drawingml/2006/main">
               <a:ext uri="{FF2B5EF4-FFF2-40B4-BE49-F238E27FC236}">
-                <a16:creationId xmlns:a16="http://schemas.microsoft.com/office/drawing/2014/main" id="{BEF7CB82-B488-4730-B7DC-58FC6590A789}"/>
+                <a16:creationId xmlns:a16="http://schemas.microsoft.com/office/drawing/2014/main" id="{543CB129-0D2D-4A90-BBFE-A8AA966953DA}"/>
               </a:ext>
             </a:extLst>
           </p:cNvPr>
@@ -8461,7 +8461,7 @@
           <p:cNvPr id="11" name="TextBox 10">
             <a:extLst xmlns:a="http://schemas.openxmlformats.org/drawingml/2006/main">
               <a:ext uri="{FF2B5EF4-FFF2-40B4-BE49-F238E27FC236}">
-                <a16:creationId xmlns:a16="http://schemas.microsoft.com/office/drawing/2014/main" id="{034A021A-C113-4C34-AA37-AA73124234F8}"/>
+                <a16:creationId xmlns:a16="http://schemas.microsoft.com/office/drawing/2014/main" id="{726D0067-9579-48ED-ACC0-A386053B2A38}"/>
               </a:ext>
             </a:extLst>
           </p:cNvPr>
@@ -8563,7 +8563,7 @@
     </p:spTree>
     <p:extLst>
       <p:ext uri="{BB962C8B-B14F-4D97-AF65-F5344CB8AC3E}">
-        <p14:creationId xmlns:p14="http://schemas.microsoft.com/office/powerpoint/2010/main" val="1138726834"/>
+        <p14:creationId xmlns:p14="http://schemas.microsoft.com/office/powerpoint/2010/main" val="959810390"/>
       </p:ext>
     </p:extLst>
   </p:cSld>
@@ -8587,7 +8587,7 @@
           <p:cNvPr id="2" name="Rectangle 1">
             <a:extLst xmlns:a="http://schemas.openxmlformats.org/drawingml/2006/main">
               <a:ext uri="{FF2B5EF4-FFF2-40B4-BE49-F238E27FC236}">
-                <a16:creationId xmlns:a16="http://schemas.microsoft.com/office/drawing/2014/main" id="{C06A0E81-112E-4DE7-8A27-D718881C10C7}"/>
+                <a16:creationId xmlns:a16="http://schemas.microsoft.com/office/drawing/2014/main" id="{1D192B5B-44D2-4E94-B034-C88E3D06D7D0}"/>
               </a:ext>
             </a:extLst>
           </p:cNvPr>
@@ -8640,7 +8640,7 @@
           <p:cNvPr id="3" name="Rectangle 2">
             <a:extLst xmlns:a="http://schemas.openxmlformats.org/drawingml/2006/main">
               <a:ext uri="{FF2B5EF4-FFF2-40B4-BE49-F238E27FC236}">
-                <a16:creationId xmlns:a16="http://schemas.microsoft.com/office/drawing/2014/main" id="{169B8B6B-4ED1-44A5-9892-94B6C92973FF}"/>
+                <a16:creationId xmlns:a16="http://schemas.microsoft.com/office/drawing/2014/main" id="{46C6F833-C7C4-498F-8B00-2E6B5D433EDF}"/>
               </a:ext>
             </a:extLst>
           </p:cNvPr>
@@ -8693,7 +8693,7 @@
           <p:cNvPr id="4" name="Rectangle 3">
             <a:extLst xmlns:a="http://schemas.openxmlformats.org/drawingml/2006/main">
               <a:ext uri="{FF2B5EF4-FFF2-40B4-BE49-F238E27FC236}">
-                <a16:creationId xmlns:a16="http://schemas.microsoft.com/office/drawing/2014/main" id="{C8233F66-6D28-4589-AF22-390BB356F0A1}"/>
+                <a16:creationId xmlns:a16="http://schemas.microsoft.com/office/drawing/2014/main" id="{A5FC2171-3405-42CB-841D-16B599E543C5}"/>
               </a:ext>
             </a:extLst>
           </p:cNvPr>
@@ -8746,7 +8746,7 @@
           <p:cNvPr id="5" name="TextBox 4">
             <a:extLst xmlns:a="http://schemas.openxmlformats.org/drawingml/2006/main">
               <a:ext uri="{FF2B5EF4-FFF2-40B4-BE49-F238E27FC236}">
-                <a16:creationId xmlns:a16="http://schemas.microsoft.com/office/drawing/2014/main" id="{2F019A34-6732-436D-AC98-6C05AF962EC5}"/>
+                <a16:creationId xmlns:a16="http://schemas.microsoft.com/office/drawing/2014/main" id="{3488690E-6EDA-4B87-B6CF-9FD154DA6C3C}"/>
               </a:ext>
             </a:extLst>
           </p:cNvPr>
@@ -8809,7 +8809,7 @@
           <p:cNvPr id="6" name="Rounded Rectangle 5">
             <a:extLst xmlns:a="http://schemas.openxmlformats.org/drawingml/2006/main">
               <a:ext uri="{FF2B5EF4-FFF2-40B4-BE49-F238E27FC236}">
-                <a16:creationId xmlns:a16="http://schemas.microsoft.com/office/drawing/2014/main" id="{D6C863BE-087A-40A8-A986-CB8123E9AE1E}"/>
+                <a16:creationId xmlns:a16="http://schemas.microsoft.com/office/drawing/2014/main" id="{EC891EDF-7372-4FF4-A822-5FD38EEA920E}"/>
               </a:ext>
             </a:extLst>
           </p:cNvPr>
@@ -8864,7 +8864,7 @@
           <p:cNvPr id="7" name="TextBox 6">
             <a:extLst xmlns:a="http://schemas.openxmlformats.org/drawingml/2006/main">
               <a:ext uri="{FF2B5EF4-FFF2-40B4-BE49-F238E27FC236}">
-                <a16:creationId xmlns:a16="http://schemas.microsoft.com/office/drawing/2014/main" id="{49F5DC73-117B-47A3-9C10-204AC772D1CB}"/>
+                <a16:creationId xmlns:a16="http://schemas.microsoft.com/office/drawing/2014/main" id="{7F89C87D-F1F9-42B8-A504-B5CCA3B2044A}"/>
               </a:ext>
             </a:extLst>
           </p:cNvPr>
@@ -9044,7 +9044,7 @@
           <p:cNvPr id="8" name="Rounded Rectangle 7">
             <a:extLst xmlns:a="http://schemas.openxmlformats.org/drawingml/2006/main">
               <a:ext uri="{FF2B5EF4-FFF2-40B4-BE49-F238E27FC236}">
-                <a16:creationId xmlns:a16="http://schemas.microsoft.com/office/drawing/2014/main" id="{FD5CAAE9-3FDE-4AFB-AEEC-9AA5BEDEF3D9}"/>
+                <a16:creationId xmlns:a16="http://schemas.microsoft.com/office/drawing/2014/main" id="{BE91E602-8DB9-4F0D-97FD-14CE432E1DD1}"/>
               </a:ext>
             </a:extLst>
           </p:cNvPr>
@@ -9099,7 +9099,7 @@
           <p:cNvPr id="9" name="TextBox 8">
             <a:extLst xmlns:a="http://schemas.openxmlformats.org/drawingml/2006/main">
               <a:ext uri="{FF2B5EF4-FFF2-40B4-BE49-F238E27FC236}">
-                <a16:creationId xmlns:a16="http://schemas.microsoft.com/office/drawing/2014/main" id="{6BC40961-34E4-4A71-931C-7E6B18A081EC}"/>
+                <a16:creationId xmlns:a16="http://schemas.microsoft.com/office/drawing/2014/main" id="{44493409-4010-4B74-891D-4FF6A13E0B50}"/>
               </a:ext>
             </a:extLst>
           </p:cNvPr>
@@ -9258,7 +9258,7 @@
     </p:spTree>
     <p:extLst>
       <p:ext uri="{BB962C8B-B14F-4D97-AF65-F5344CB8AC3E}">
-        <p14:creationId xmlns:p14="http://schemas.microsoft.com/office/powerpoint/2010/main" val="1079442881"/>
+        <p14:creationId xmlns:p14="http://schemas.microsoft.com/office/powerpoint/2010/main" val="1800285656"/>
       </p:ext>
     </p:extLst>
   </p:cSld>
@@ -9282,7 +9282,7 @@
           <p:cNvPr id="2" name="Rectangle 1">
             <a:extLst xmlns:a="http://schemas.openxmlformats.org/drawingml/2006/main">
               <a:ext uri="{FF2B5EF4-FFF2-40B4-BE49-F238E27FC236}">
-                <a16:creationId xmlns:a16="http://schemas.microsoft.com/office/drawing/2014/main" id="{95182A3F-28C4-410D-9262-309F509BD214}"/>
+                <a16:creationId xmlns:a16="http://schemas.microsoft.com/office/drawing/2014/main" id="{73C25C0E-13F2-41AC-83C7-2A720201EA8B}"/>
               </a:ext>
             </a:extLst>
           </p:cNvPr>
@@ -9335,7 +9335,7 @@
           <p:cNvPr id="3" name="Rectangle 2">
             <a:extLst xmlns:a="http://schemas.openxmlformats.org/drawingml/2006/main">
               <a:ext uri="{FF2B5EF4-FFF2-40B4-BE49-F238E27FC236}">
-                <a16:creationId xmlns:a16="http://schemas.microsoft.com/office/drawing/2014/main" id="{981422DF-B182-442C-9414-4883B32DCDFB}"/>
+                <a16:creationId xmlns:a16="http://schemas.microsoft.com/office/drawing/2014/main" id="{608ACB25-B67A-4075-97D7-F378711056A7}"/>
               </a:ext>
             </a:extLst>
           </p:cNvPr>
@@ -9388,7 +9388,7 @@
           <p:cNvPr id="4" name="Rectangle 3">
             <a:extLst xmlns:a="http://schemas.openxmlformats.org/drawingml/2006/main">
               <a:ext uri="{FF2B5EF4-FFF2-40B4-BE49-F238E27FC236}">
-                <a16:creationId xmlns:a16="http://schemas.microsoft.com/office/drawing/2014/main" id="{6B92C33F-C785-4639-931B-A5EF3B377459}"/>
+                <a16:creationId xmlns:a16="http://schemas.microsoft.com/office/drawing/2014/main" id="{E1836714-478B-4758-8DB7-73B834C1AF1E}"/>
               </a:ext>
             </a:extLst>
           </p:cNvPr>
@@ -9441,7 +9441,7 @@
           <p:cNvPr id="5" name="TextBox 4">
             <a:extLst xmlns:a="http://schemas.openxmlformats.org/drawingml/2006/main">
               <a:ext uri="{FF2B5EF4-FFF2-40B4-BE49-F238E27FC236}">
-                <a16:creationId xmlns:a16="http://schemas.microsoft.com/office/drawing/2014/main" id="{179ECFD0-8EC1-4FD0-99D8-B08477C86CAD}"/>
+                <a16:creationId xmlns:a16="http://schemas.microsoft.com/office/drawing/2014/main" id="{9EC1CE0E-7802-4D66-B7F3-5ECF84544B74}"/>
               </a:ext>
             </a:extLst>
           </p:cNvPr>
@@ -9504,7 +9504,7 @@
           <p:cNvPr id="6" name="Rounded Rectangle 5">
             <a:extLst xmlns:a="http://schemas.openxmlformats.org/drawingml/2006/main">
               <a:ext uri="{FF2B5EF4-FFF2-40B4-BE49-F238E27FC236}">
-                <a16:creationId xmlns:a16="http://schemas.microsoft.com/office/drawing/2014/main" id="{921E1D20-BA63-48E6-B40A-B49946E776EA}"/>
+                <a16:creationId xmlns:a16="http://schemas.microsoft.com/office/drawing/2014/main" id="{20F0CE78-A157-40B1-9997-D04A368A76B0}"/>
               </a:ext>
             </a:extLst>
           </p:cNvPr>
@@ -9559,7 +9559,7 @@
           <p:cNvPr id="7" name="TextBox 6">
             <a:extLst xmlns:a="http://schemas.openxmlformats.org/drawingml/2006/main">
               <a:ext uri="{FF2B5EF4-FFF2-40B4-BE49-F238E27FC236}">
-                <a16:creationId xmlns:a16="http://schemas.microsoft.com/office/drawing/2014/main" id="{60776BB1-2E6E-4D26-B469-6C2415A1186F}"/>
+                <a16:creationId xmlns:a16="http://schemas.microsoft.com/office/drawing/2014/main" id="{80ED5C56-902F-4DE7-87A8-51AD1278BD5D}"/>
               </a:ext>
             </a:extLst>
           </p:cNvPr>
@@ -9777,7 +9777,7 @@
           <p:cNvPr id="8" name="Rounded Rectangle 7">
             <a:extLst xmlns:a="http://schemas.openxmlformats.org/drawingml/2006/main">
               <a:ext uri="{FF2B5EF4-FFF2-40B4-BE49-F238E27FC236}">
-                <a16:creationId xmlns:a16="http://schemas.microsoft.com/office/drawing/2014/main" id="{312621E4-B8C6-4A1D-B262-8240B0C24802}"/>
+                <a16:creationId xmlns:a16="http://schemas.microsoft.com/office/drawing/2014/main" id="{0D166698-49CD-4FD7-8428-6B25784EDE55}"/>
               </a:ext>
             </a:extLst>
           </p:cNvPr>
@@ -9832,7 +9832,7 @@
           <p:cNvPr id="9" name="TextBox 8">
             <a:extLst xmlns:a="http://schemas.openxmlformats.org/drawingml/2006/main">
               <a:ext uri="{FF2B5EF4-FFF2-40B4-BE49-F238E27FC236}">
-                <a16:creationId xmlns:a16="http://schemas.microsoft.com/office/drawing/2014/main" id="{B1A3EEA3-41C3-4510-8579-FDA265244A24}"/>
+                <a16:creationId xmlns:a16="http://schemas.microsoft.com/office/drawing/2014/main" id="{15362817-4121-4F9E-BBC7-7D29120F8A7F}"/>
               </a:ext>
             </a:extLst>
           </p:cNvPr>
@@ -10067,7 +10067,7 @@
     </p:spTree>
     <p:extLst>
       <p:ext uri="{BB962C8B-B14F-4D97-AF65-F5344CB8AC3E}">
-        <p14:creationId xmlns:p14="http://schemas.microsoft.com/office/powerpoint/2010/main" val="792679513"/>
+        <p14:creationId xmlns:p14="http://schemas.microsoft.com/office/powerpoint/2010/main" val="790596602"/>
       </p:ext>
     </p:extLst>
   </p:cSld>
@@ -10091,7 +10091,7 @@
           <p:cNvPr id="2" name="Rectangle 1">
             <a:extLst xmlns:a="http://schemas.openxmlformats.org/drawingml/2006/main">
               <a:ext uri="{FF2B5EF4-FFF2-40B4-BE49-F238E27FC236}">
-                <a16:creationId xmlns:a16="http://schemas.microsoft.com/office/drawing/2014/main" id="{A132FAFB-DF17-45F9-B613-3637E96ECEAD}"/>
+                <a16:creationId xmlns:a16="http://schemas.microsoft.com/office/drawing/2014/main" id="{4CA6AE8B-D4C7-4E5F-AC64-0A3C067FE971}"/>
               </a:ext>
             </a:extLst>
           </p:cNvPr>
@@ -10144,7 +10144,7 @@
           <p:cNvPr id="3" name="Rectangle 2">
             <a:extLst xmlns:a="http://schemas.openxmlformats.org/drawingml/2006/main">
               <a:ext uri="{FF2B5EF4-FFF2-40B4-BE49-F238E27FC236}">
-                <a16:creationId xmlns:a16="http://schemas.microsoft.com/office/drawing/2014/main" id="{4886E82B-EF7E-41CB-B679-D491F89AF2FE}"/>
+                <a16:creationId xmlns:a16="http://schemas.microsoft.com/office/drawing/2014/main" id="{FFED41CC-2C50-4C61-A973-0B117D47086D}"/>
               </a:ext>
             </a:extLst>
           </p:cNvPr>
@@ -10197,7 +10197,7 @@
           <p:cNvPr id="4" name="Rectangle 3">
             <a:extLst xmlns:a="http://schemas.openxmlformats.org/drawingml/2006/main">
               <a:ext uri="{FF2B5EF4-FFF2-40B4-BE49-F238E27FC236}">
-                <a16:creationId xmlns:a16="http://schemas.microsoft.com/office/drawing/2014/main" id="{A5C31D4C-A91F-4A08-BB71-56E2D45ED978}"/>
+                <a16:creationId xmlns:a16="http://schemas.microsoft.com/office/drawing/2014/main" id="{3DA338A1-9970-4A2C-9CF5-F341174EF037}"/>
               </a:ext>
             </a:extLst>
           </p:cNvPr>
@@ -10250,7 +10250,7 @@
           <p:cNvPr id="5" name="TextBox 4">
             <a:extLst xmlns:a="http://schemas.openxmlformats.org/drawingml/2006/main">
               <a:ext uri="{FF2B5EF4-FFF2-40B4-BE49-F238E27FC236}">
-                <a16:creationId xmlns:a16="http://schemas.microsoft.com/office/drawing/2014/main" id="{5BBD41F0-8473-44C0-811C-45FCF578D892}"/>
+                <a16:creationId xmlns:a16="http://schemas.microsoft.com/office/drawing/2014/main" id="{9A663EF1-2EC3-4BF7-98FD-A559B2AA3362}"/>
               </a:ext>
             </a:extLst>
           </p:cNvPr>
@@ -10313,7 +10313,7 @@
           <p:cNvPr id="6" name="Rounded Rectangle 5">
             <a:extLst xmlns:a="http://schemas.openxmlformats.org/drawingml/2006/main">
               <a:ext uri="{FF2B5EF4-FFF2-40B4-BE49-F238E27FC236}">
-                <a16:creationId xmlns:a16="http://schemas.microsoft.com/office/drawing/2014/main" id="{4E6E4FD4-D772-4424-B422-D07304E00DD4}"/>
+                <a16:creationId xmlns:a16="http://schemas.microsoft.com/office/drawing/2014/main" id="{7CB293FC-B124-43E0-B637-AE7B23DEAF3C}"/>
               </a:ext>
             </a:extLst>
           </p:cNvPr>
@@ -10368,7 +10368,7 @@
           <p:cNvPr id="7" name="TextBox 6">
             <a:extLst xmlns:a="http://schemas.openxmlformats.org/drawingml/2006/main">
               <a:ext uri="{FF2B5EF4-FFF2-40B4-BE49-F238E27FC236}">
-                <a16:creationId xmlns:a16="http://schemas.microsoft.com/office/drawing/2014/main" id="{67D72D16-A572-4C40-9B18-769A5AF34EFF}"/>
+                <a16:creationId xmlns:a16="http://schemas.microsoft.com/office/drawing/2014/main" id="{C1BD8FF2-B41F-49E9-B636-F7DEBA374647}"/>
               </a:ext>
             </a:extLst>
           </p:cNvPr>
@@ -10751,7 +10751,7 @@
           <p:nvPr/>
         </p:nvPicPr>
         <p:blipFill>
-          <a:blip xmlns:r="http://schemas.openxmlformats.org/officeDocument/2006/relationships" xmlns:a="http://schemas.openxmlformats.org/drawingml/2006/main" r:embed="R291386277bea42d7"/>
+          <a:blip xmlns:r="http://schemas.openxmlformats.org/officeDocument/2006/relationships" xmlns:a="http://schemas.openxmlformats.org/drawingml/2006/main" r:embed="Rf8ca018465404876"/>
           <a:stretch xmlns:a="http://schemas.openxmlformats.org/drawingml/2006/main">
             <a:fillRect l="0" t="0" r="0" b="0"/>
           </a:stretch>
@@ -10771,7 +10771,7 @@
           <p:cNvPr id="9" name="Rounded Rectangle 8">
             <a:extLst xmlns:a="http://schemas.openxmlformats.org/drawingml/2006/main">
               <a:ext uri="{FF2B5EF4-FFF2-40B4-BE49-F238E27FC236}">
-                <a16:creationId xmlns:a16="http://schemas.microsoft.com/office/drawing/2014/main" id="{F141A053-F0A4-4C4E-B477-10B4033783BA}"/>
+                <a16:creationId xmlns:a16="http://schemas.microsoft.com/office/drawing/2014/main" id="{B8742DAB-DFAB-4305-8723-704851E29B11}"/>
               </a:ext>
             </a:extLst>
           </p:cNvPr>
@@ -10826,7 +10826,7 @@
           <p:cNvPr id="10" name="TextBox 9">
             <a:extLst xmlns:a="http://schemas.openxmlformats.org/drawingml/2006/main">
               <a:ext uri="{FF2B5EF4-FFF2-40B4-BE49-F238E27FC236}">
-                <a16:creationId xmlns:a16="http://schemas.microsoft.com/office/drawing/2014/main" id="{A2CD381C-5BF1-404C-BB86-8223A3B9B1BC}"/>
+                <a16:creationId xmlns:a16="http://schemas.microsoft.com/office/drawing/2014/main" id="{B8BB598D-CE33-4722-BC7B-E736F03F7EDE}"/>
               </a:ext>
             </a:extLst>
           </p:cNvPr>
@@ -10912,7 +10912,7 @@
     </p:spTree>
     <p:extLst>
       <p:ext uri="{BB962C8B-B14F-4D97-AF65-F5344CB8AC3E}">
-        <p14:creationId xmlns:p14="http://schemas.microsoft.com/office/powerpoint/2010/main" val="943614126"/>
+        <p14:creationId xmlns:p14="http://schemas.microsoft.com/office/powerpoint/2010/main" val="1574508850"/>
       </p:ext>
     </p:extLst>
   </p:cSld>
@@ -10936,7 +10936,7 @@
           <p:cNvPr id="2" name="Rectangle 1">
             <a:extLst xmlns:a="http://schemas.openxmlformats.org/drawingml/2006/main">
               <a:ext uri="{FF2B5EF4-FFF2-40B4-BE49-F238E27FC236}">
-                <a16:creationId xmlns:a16="http://schemas.microsoft.com/office/drawing/2014/main" id="{6E1CACC9-49B5-467B-AB68-DA991D8A02B6}"/>
+                <a16:creationId xmlns:a16="http://schemas.microsoft.com/office/drawing/2014/main" id="{EF749E31-DF2B-4CE2-B277-C8D5EDCE3DAD}"/>
               </a:ext>
             </a:extLst>
           </p:cNvPr>
@@ -10989,7 +10989,7 @@
           <p:cNvPr id="3" name="Rectangle 2">
             <a:extLst xmlns:a="http://schemas.openxmlformats.org/drawingml/2006/main">
               <a:ext uri="{FF2B5EF4-FFF2-40B4-BE49-F238E27FC236}">
-                <a16:creationId xmlns:a16="http://schemas.microsoft.com/office/drawing/2014/main" id="{E9B04071-5356-485E-96C6-6D5C63B99BB8}"/>
+                <a16:creationId xmlns:a16="http://schemas.microsoft.com/office/drawing/2014/main" id="{BB8176D1-A685-4159-BAA6-EA67002F8B0F}"/>
               </a:ext>
             </a:extLst>
           </p:cNvPr>
@@ -11042,7 +11042,7 @@
           <p:cNvPr id="4" name="Rectangle 3">
             <a:extLst xmlns:a="http://schemas.openxmlformats.org/drawingml/2006/main">
               <a:ext uri="{FF2B5EF4-FFF2-40B4-BE49-F238E27FC236}">
-                <a16:creationId xmlns:a16="http://schemas.microsoft.com/office/drawing/2014/main" id="{111729A7-A8FC-4014-A6E9-E52B5CE227CC}"/>
+                <a16:creationId xmlns:a16="http://schemas.microsoft.com/office/drawing/2014/main" id="{72134F25-7D33-430E-871E-C2BAFA5A641C}"/>
               </a:ext>
             </a:extLst>
           </p:cNvPr>
@@ -11095,7 +11095,7 @@
           <p:cNvPr id="5" name="TextBox 4">
             <a:extLst xmlns:a="http://schemas.openxmlformats.org/drawingml/2006/main">
               <a:ext uri="{FF2B5EF4-FFF2-40B4-BE49-F238E27FC236}">
-                <a16:creationId xmlns:a16="http://schemas.microsoft.com/office/drawing/2014/main" id="{852B6993-038B-4FC3-AE08-4991FCD83268}"/>
+                <a16:creationId xmlns:a16="http://schemas.microsoft.com/office/drawing/2014/main" id="{534A1B69-23AE-4926-BE62-625E12541ED2}"/>
               </a:ext>
             </a:extLst>
           </p:cNvPr>
@@ -11158,7 +11158,7 @@
           <p:cNvPr id="6" name="Rounded Rectangle 5">
             <a:extLst xmlns:a="http://schemas.openxmlformats.org/drawingml/2006/main">
               <a:ext uri="{FF2B5EF4-FFF2-40B4-BE49-F238E27FC236}">
-                <a16:creationId xmlns:a16="http://schemas.microsoft.com/office/drawing/2014/main" id="{100B1B97-249E-4D3E-A059-B084C028B32A}"/>
+                <a16:creationId xmlns:a16="http://schemas.microsoft.com/office/drawing/2014/main" id="{70FE6936-B067-4C94-B924-95E7E5A7771F}"/>
               </a:ext>
             </a:extLst>
           </p:cNvPr>
@@ -11213,7 +11213,7 @@
           <p:cNvPr id="7" name="TextBox 6">
             <a:extLst xmlns:a="http://schemas.openxmlformats.org/drawingml/2006/main">
               <a:ext uri="{FF2B5EF4-FFF2-40B4-BE49-F238E27FC236}">
-                <a16:creationId xmlns:a16="http://schemas.microsoft.com/office/drawing/2014/main" id="{07B7AECF-4322-4CF7-8DDE-2B734D98C9DF}"/>
+                <a16:creationId xmlns:a16="http://schemas.microsoft.com/office/drawing/2014/main" id="{A0C64D86-DC0F-44A1-A36A-A52831514462}"/>
               </a:ext>
             </a:extLst>
           </p:cNvPr>
@@ -11450,7 +11450,7 @@
           <p:cNvPr id="8" name="Rounded Rectangle 7">
             <a:extLst xmlns:a="http://schemas.openxmlformats.org/drawingml/2006/main">
               <a:ext uri="{FF2B5EF4-FFF2-40B4-BE49-F238E27FC236}">
-                <a16:creationId xmlns:a16="http://schemas.microsoft.com/office/drawing/2014/main" id="{C55114E1-519F-4D86-8898-5A18035F05E6}"/>
+                <a16:creationId xmlns:a16="http://schemas.microsoft.com/office/drawing/2014/main" id="{4D696FF7-697F-4BBE-8AC7-21428916BE2E}"/>
               </a:ext>
             </a:extLst>
           </p:cNvPr>
@@ -11505,7 +11505,7 @@
           <p:cNvPr id="9" name="TextBox 8">
             <a:extLst xmlns:a="http://schemas.openxmlformats.org/drawingml/2006/main">
               <a:ext uri="{FF2B5EF4-FFF2-40B4-BE49-F238E27FC236}">
-                <a16:creationId xmlns:a16="http://schemas.microsoft.com/office/drawing/2014/main" id="{6AA9C966-5284-45BC-8769-2587DE7B7D36}"/>
+                <a16:creationId xmlns:a16="http://schemas.microsoft.com/office/drawing/2014/main" id="{A406CCC3-16F4-4801-B427-A743D4CD20E5}"/>
               </a:ext>
             </a:extLst>
           </p:cNvPr>
@@ -11840,7 +11840,7 @@
     </p:spTree>
     <p:extLst>
       <p:ext uri="{BB962C8B-B14F-4D97-AF65-F5344CB8AC3E}">
-        <p14:creationId xmlns:p14="http://schemas.microsoft.com/office/powerpoint/2010/main" val="815533390"/>
+        <p14:creationId xmlns:p14="http://schemas.microsoft.com/office/powerpoint/2010/main" val="814644868"/>
       </p:ext>
     </p:extLst>
   </p:cSld>
@@ -11864,7 +11864,7 @@
           <p:cNvPr id="2" name="Rectangle 1">
             <a:extLst xmlns:a="http://schemas.openxmlformats.org/drawingml/2006/main">
               <a:ext uri="{FF2B5EF4-FFF2-40B4-BE49-F238E27FC236}">
-                <a16:creationId xmlns:a16="http://schemas.microsoft.com/office/drawing/2014/main" id="{D442BEAC-C47A-431A-9423-194AA01E1520}"/>
+                <a16:creationId xmlns:a16="http://schemas.microsoft.com/office/drawing/2014/main" id="{36197B92-FC50-4BE9-84BD-3756AC9ED8ED}"/>
               </a:ext>
             </a:extLst>
           </p:cNvPr>
@@ -11917,7 +11917,7 @@
           <p:cNvPr id="3" name="Rectangle 2">
             <a:extLst xmlns:a="http://schemas.openxmlformats.org/drawingml/2006/main">
               <a:ext uri="{FF2B5EF4-FFF2-40B4-BE49-F238E27FC236}">
-                <a16:creationId xmlns:a16="http://schemas.microsoft.com/office/drawing/2014/main" id="{01D862B2-C822-4617-940B-BBA340FCD56A}"/>
+                <a16:creationId xmlns:a16="http://schemas.microsoft.com/office/drawing/2014/main" id="{A265C8AC-CDA5-45D8-872F-B01EF59D4FA6}"/>
               </a:ext>
             </a:extLst>
           </p:cNvPr>
@@ -11970,7 +11970,7 @@
           <p:cNvPr id="4" name="Rectangle 3">
             <a:extLst xmlns:a="http://schemas.openxmlformats.org/drawingml/2006/main">
               <a:ext uri="{FF2B5EF4-FFF2-40B4-BE49-F238E27FC236}">
-                <a16:creationId xmlns:a16="http://schemas.microsoft.com/office/drawing/2014/main" id="{A0DED8BB-2393-44DE-9C36-489B96DEBA9D}"/>
+                <a16:creationId xmlns:a16="http://schemas.microsoft.com/office/drawing/2014/main" id="{67224D6E-37FC-4917-92F2-2CEC50164682}"/>
               </a:ext>
             </a:extLst>
           </p:cNvPr>
@@ -12023,7 +12023,7 @@
           <p:cNvPr id="5" name="TextBox 4">
             <a:extLst xmlns:a="http://schemas.openxmlformats.org/drawingml/2006/main">
               <a:ext uri="{FF2B5EF4-FFF2-40B4-BE49-F238E27FC236}">
-                <a16:creationId xmlns:a16="http://schemas.microsoft.com/office/drawing/2014/main" id="{34FC8F9B-5D6B-4FC6-BC32-26D0BA553511}"/>
+                <a16:creationId xmlns:a16="http://schemas.microsoft.com/office/drawing/2014/main" id="{E5BEDA46-FB4D-44B2-8344-1F3FA1C56DFA}"/>
               </a:ext>
             </a:extLst>
           </p:cNvPr>
@@ -12086,7 +12086,7 @@
           <p:cNvPr id="6" name="Rounded Rectangle 5">
             <a:extLst xmlns:a="http://schemas.openxmlformats.org/drawingml/2006/main">
               <a:ext uri="{FF2B5EF4-FFF2-40B4-BE49-F238E27FC236}">
-                <a16:creationId xmlns:a16="http://schemas.microsoft.com/office/drawing/2014/main" id="{89D84675-38BA-4EFA-828C-44F2BFBC8D83}"/>
+                <a16:creationId xmlns:a16="http://schemas.microsoft.com/office/drawing/2014/main" id="{7DF6A05E-2962-4C5D-9DA5-C67EBA4C1EF2}"/>
               </a:ext>
             </a:extLst>
           </p:cNvPr>
@@ -12141,7 +12141,7 @@
           <p:cNvPr id="7" name="TextBox 6">
             <a:extLst xmlns:a="http://schemas.openxmlformats.org/drawingml/2006/main">
               <a:ext uri="{FF2B5EF4-FFF2-40B4-BE49-F238E27FC236}">
-                <a16:creationId xmlns:a16="http://schemas.microsoft.com/office/drawing/2014/main" id="{B5C69696-62EB-4FE8-8E5B-3CE7A5505AB1}"/>
+                <a16:creationId xmlns:a16="http://schemas.microsoft.com/office/drawing/2014/main" id="{117D281B-769C-4B40-9E0E-7ADAB76DFEF0}"/>
               </a:ext>
             </a:extLst>
           </p:cNvPr>
@@ -12264,7 +12264,7 @@
           <p:cNvPr id="8" name="Rounded Rectangle 7">
             <a:extLst xmlns:a="http://schemas.openxmlformats.org/drawingml/2006/main">
               <a:ext uri="{FF2B5EF4-FFF2-40B4-BE49-F238E27FC236}">
-                <a16:creationId xmlns:a16="http://schemas.microsoft.com/office/drawing/2014/main" id="{2181D1CA-DF2B-4E5A-82E0-13A90A52F6AC}"/>
+                <a16:creationId xmlns:a16="http://schemas.microsoft.com/office/drawing/2014/main" id="{AD8C3C66-D82C-4A2D-A406-3CDB90BA53B0}"/>
               </a:ext>
             </a:extLst>
           </p:cNvPr>
@@ -12319,7 +12319,7 @@
           <p:cNvPr id="9" name="TextBox 8">
             <a:extLst xmlns:a="http://schemas.openxmlformats.org/drawingml/2006/main">
               <a:ext uri="{FF2B5EF4-FFF2-40B4-BE49-F238E27FC236}">
-                <a16:creationId xmlns:a16="http://schemas.microsoft.com/office/drawing/2014/main" id="{0014244E-0DF0-432E-880D-8A870CDEC647}"/>
+                <a16:creationId xmlns:a16="http://schemas.microsoft.com/office/drawing/2014/main" id="{B5266489-C9B8-46CC-8143-993526F6790E}"/>
               </a:ext>
             </a:extLst>
           </p:cNvPr>
@@ -12442,7 +12442,7 @@
           <p:cNvPr id="10" name="Rounded Rectangle 9">
             <a:extLst xmlns:a="http://schemas.openxmlformats.org/drawingml/2006/main">
               <a:ext uri="{FF2B5EF4-FFF2-40B4-BE49-F238E27FC236}">
-                <a16:creationId xmlns:a16="http://schemas.microsoft.com/office/drawing/2014/main" id="{55F37545-36BB-4EF9-994D-0F89132CF710}"/>
+                <a16:creationId xmlns:a16="http://schemas.microsoft.com/office/drawing/2014/main" id="{5728ADA4-C967-467E-AC84-A56B9398D81E}"/>
               </a:ext>
             </a:extLst>
           </p:cNvPr>
@@ -12497,7 +12497,7 @@
           <p:cNvPr id="11" name="TextBox 10">
             <a:extLst xmlns:a="http://schemas.openxmlformats.org/drawingml/2006/main">
               <a:ext uri="{FF2B5EF4-FFF2-40B4-BE49-F238E27FC236}">
-                <a16:creationId xmlns:a16="http://schemas.microsoft.com/office/drawing/2014/main" id="{D8994DCB-DE82-401A-BECB-426D3728DBED}"/>
+                <a16:creationId xmlns:a16="http://schemas.microsoft.com/office/drawing/2014/main" id="{BEB37232-BC02-4E02-B428-B5DC86A7F808}"/>
               </a:ext>
             </a:extLst>
           </p:cNvPr>
@@ -12847,7 +12847,7 @@
     </p:spTree>
     <p:extLst>
       <p:ext uri="{BB962C8B-B14F-4D97-AF65-F5344CB8AC3E}">
-        <p14:creationId xmlns:p14="http://schemas.microsoft.com/office/powerpoint/2010/main" val="1276896136"/>
+        <p14:creationId xmlns:p14="http://schemas.microsoft.com/office/powerpoint/2010/main" val="154989256"/>
       </p:ext>
     </p:extLst>
   </p:cSld>
@@ -12871,7 +12871,7 @@
           <p:cNvPr id="2" name="Rectangle 1">
             <a:extLst xmlns:a="http://schemas.openxmlformats.org/drawingml/2006/main">
               <a:ext uri="{FF2B5EF4-FFF2-40B4-BE49-F238E27FC236}">
-                <a16:creationId xmlns:a16="http://schemas.microsoft.com/office/drawing/2014/main" id="{A252E5BB-A9D4-410D-A093-08BA6F55BE21}"/>
+                <a16:creationId xmlns:a16="http://schemas.microsoft.com/office/drawing/2014/main" id="{8D28292C-D21B-4B40-854D-EEA25083F92F}"/>
               </a:ext>
             </a:extLst>
           </p:cNvPr>
@@ -12924,7 +12924,7 @@
           <p:cNvPr id="3" name="Rectangle 2">
             <a:extLst xmlns:a="http://schemas.openxmlformats.org/drawingml/2006/main">
               <a:ext uri="{FF2B5EF4-FFF2-40B4-BE49-F238E27FC236}">
-                <a16:creationId xmlns:a16="http://schemas.microsoft.com/office/drawing/2014/main" id="{6356DC57-E006-43B8-BF54-EF8BFFDE682D}"/>
+                <a16:creationId xmlns:a16="http://schemas.microsoft.com/office/drawing/2014/main" id="{5F58E0FD-EFE6-400F-80FE-1747392F6CDC}"/>
               </a:ext>
             </a:extLst>
           </p:cNvPr>
@@ -12977,7 +12977,7 @@
           <p:cNvPr id="4" name="Rectangle 3">
             <a:extLst xmlns:a="http://schemas.openxmlformats.org/drawingml/2006/main">
               <a:ext uri="{FF2B5EF4-FFF2-40B4-BE49-F238E27FC236}">
-                <a16:creationId xmlns:a16="http://schemas.microsoft.com/office/drawing/2014/main" id="{CFD51A11-3573-4B2E-8D29-57684B95E59D}"/>
+                <a16:creationId xmlns:a16="http://schemas.microsoft.com/office/drawing/2014/main" id="{6BFEF9BB-1D00-4C27-9BDB-D1169294BD63}"/>
               </a:ext>
             </a:extLst>
           </p:cNvPr>
@@ -13030,7 +13030,7 @@
           <p:cNvPr id="5" name="TextBox 4">
             <a:extLst xmlns:a="http://schemas.openxmlformats.org/drawingml/2006/main">
               <a:ext uri="{FF2B5EF4-FFF2-40B4-BE49-F238E27FC236}">
-                <a16:creationId xmlns:a16="http://schemas.microsoft.com/office/drawing/2014/main" id="{2D64DE29-D386-4C43-8C7A-580364641692}"/>
+                <a16:creationId xmlns:a16="http://schemas.microsoft.com/office/drawing/2014/main" id="{15CB8889-BD42-4A57-8759-B3955D40DD19}"/>
               </a:ext>
             </a:extLst>
           </p:cNvPr>
@@ -13093,7 +13093,7 @@
           <p:cNvPr id="6" name="Rounded Rectangle 5">
             <a:extLst xmlns:a="http://schemas.openxmlformats.org/drawingml/2006/main">
               <a:ext uri="{FF2B5EF4-FFF2-40B4-BE49-F238E27FC236}">
-                <a16:creationId xmlns:a16="http://schemas.microsoft.com/office/drawing/2014/main" id="{C6CEE4A5-FF18-449B-B288-81C98CB4F61B}"/>
+                <a16:creationId xmlns:a16="http://schemas.microsoft.com/office/drawing/2014/main" id="{34975B01-D92D-45C2-BE88-487F21B95A54}"/>
               </a:ext>
             </a:extLst>
           </p:cNvPr>
@@ -13148,7 +13148,7 @@
           <p:cNvPr id="7" name="TextBox 6">
             <a:extLst xmlns:a="http://schemas.openxmlformats.org/drawingml/2006/main">
               <a:ext uri="{FF2B5EF4-FFF2-40B4-BE49-F238E27FC236}">
-                <a16:creationId xmlns:a16="http://schemas.microsoft.com/office/drawing/2014/main" id="{95F072E9-4D16-4106-B9E9-969B9A6B0676}"/>
+                <a16:creationId xmlns:a16="http://schemas.microsoft.com/office/drawing/2014/main" id="{4893621C-C620-4095-B126-79EDCD09B4CD}"/>
               </a:ext>
             </a:extLst>
           </p:cNvPr>
@@ -13612,7 +13612,7 @@
           <p:nvPr/>
         </p:nvPicPr>
         <p:blipFill>
-          <a:blip xmlns:r="http://schemas.openxmlformats.org/officeDocument/2006/relationships" xmlns:a="http://schemas.openxmlformats.org/drawingml/2006/main" r:embed="R4d1c071bb1004aee"/>
+          <a:blip xmlns:r="http://schemas.openxmlformats.org/officeDocument/2006/relationships" xmlns:a="http://schemas.openxmlformats.org/drawingml/2006/main" r:embed="R58da3dcd2ff14277"/>
           <a:stretch xmlns:a="http://schemas.openxmlformats.org/drawingml/2006/main">
             <a:fillRect l="0" t="0" r="0" b="0"/>
           </a:stretch>
@@ -13632,7 +13632,7 @@
           <p:cNvPr id="9" name="Rounded Rectangle 8">
             <a:extLst xmlns:a="http://schemas.openxmlformats.org/drawingml/2006/main">
               <a:ext uri="{FF2B5EF4-FFF2-40B4-BE49-F238E27FC236}">
-                <a16:creationId xmlns:a16="http://schemas.microsoft.com/office/drawing/2014/main" id="{8E18A292-52FE-475C-93C4-E885EF24ADD4}"/>
+                <a16:creationId xmlns:a16="http://schemas.microsoft.com/office/drawing/2014/main" id="{386CC619-F029-481F-BF92-EC25D11F687A}"/>
               </a:ext>
             </a:extLst>
           </p:cNvPr>
@@ -13687,7 +13687,7 @@
           <p:cNvPr id="10" name="TextBox 9">
             <a:extLst xmlns:a="http://schemas.openxmlformats.org/drawingml/2006/main">
               <a:ext uri="{FF2B5EF4-FFF2-40B4-BE49-F238E27FC236}">
-                <a16:creationId xmlns:a16="http://schemas.microsoft.com/office/drawing/2014/main" id="{2C7AF10E-6399-464E-97B1-E8F9494D9A59}"/>
+                <a16:creationId xmlns:a16="http://schemas.microsoft.com/office/drawing/2014/main" id="{ECBFEA72-0D73-4D75-BEF1-391478E99CA4}"/>
               </a:ext>
             </a:extLst>
           </p:cNvPr>
@@ -13770,7 +13770,7 @@
     </p:spTree>
     <p:extLst>
       <p:ext uri="{BB962C8B-B14F-4D97-AF65-F5344CB8AC3E}">
-        <p14:creationId xmlns:p14="http://schemas.microsoft.com/office/powerpoint/2010/main" val="1517629773"/>
+        <p14:creationId xmlns:p14="http://schemas.microsoft.com/office/powerpoint/2010/main" val="1182244350"/>
       </p:ext>
     </p:extLst>
   </p:cSld>

--- a/reports/evidence/fixture_populated_slides.pptx
+++ b/reports/evidence/fixture_populated_slides.pptx
@@ -2,24 +2,24 @@
 <file path=ppt/presentation.xml><?xml version="1.0" encoding="utf-8"?>
 <p:presentation xmlns:p="http://schemas.openxmlformats.org/presentationml/2006/main">
   <p:sldMasterIdLst>
-    <p:sldMasterId xmlns:r="http://schemas.openxmlformats.org/officeDocument/2006/relationships" id="2147483648" r:id="Rebefc75836174f1a"/>
+    <p:sldMasterId xmlns:r="http://schemas.openxmlformats.org/officeDocument/2006/relationships" id="2147483648" r:id="R8339cec55c9e4060"/>
   </p:sldMasterIdLst>
   <p:notesMasterIdLst>
-    <p:notesMasterId xmlns:r="http://schemas.openxmlformats.org/officeDocument/2006/relationships" r:id="Ra1d2833b2cc4409a"/>
+    <p:notesMasterId xmlns:r="http://schemas.openxmlformats.org/officeDocument/2006/relationships" r:id="Re0dcec829a2d49a1"/>
   </p:notesMasterIdLst>
   <p:sldIdLst>
-    <p:sldId xmlns:r="http://schemas.openxmlformats.org/officeDocument/2006/relationships" id="256" r:id="R3f5a8671a3d8424d"/>
-    <p:sldId xmlns:r="http://schemas.openxmlformats.org/officeDocument/2006/relationships" id="257" r:id="Rf70e6d0425594080"/>
-    <p:sldId xmlns:r="http://schemas.openxmlformats.org/officeDocument/2006/relationships" id="258" r:id="R7d16815bfa3545b5"/>
-    <p:sldId xmlns:r="http://schemas.openxmlformats.org/officeDocument/2006/relationships" id="259" r:id="R0b8ee83ebe4b4a4e"/>
-    <p:sldId xmlns:r="http://schemas.openxmlformats.org/officeDocument/2006/relationships" id="260" r:id="R7a537e5bcc794282"/>
-    <p:sldId xmlns:r="http://schemas.openxmlformats.org/officeDocument/2006/relationships" id="261" r:id="R1e7201fcbfb14516"/>
-    <p:sldId xmlns:r="http://schemas.openxmlformats.org/officeDocument/2006/relationships" id="262" r:id="Rfdc486169bf54441"/>
-    <p:sldId xmlns:r="http://schemas.openxmlformats.org/officeDocument/2006/relationships" id="263" r:id="R8d1937e3c6b145f3"/>
-    <p:sldId xmlns:r="http://schemas.openxmlformats.org/officeDocument/2006/relationships" id="264" r:id="R839f58f7306d4df3"/>
-    <p:sldId xmlns:r="http://schemas.openxmlformats.org/officeDocument/2006/relationships" id="265" r:id="R4d0eb1bed2d3486e"/>
-    <p:sldId xmlns:r="http://schemas.openxmlformats.org/officeDocument/2006/relationships" id="266" r:id="Rb89fdf37a91e47e4"/>
-    <p:sldId xmlns:r="http://schemas.openxmlformats.org/officeDocument/2006/relationships" id="267" r:id="Rd51a58807c1f4791"/>
+    <p:sldId xmlns:r="http://schemas.openxmlformats.org/officeDocument/2006/relationships" id="256" r:id="R47bc44f5b0cb41a5"/>
+    <p:sldId xmlns:r="http://schemas.openxmlformats.org/officeDocument/2006/relationships" id="257" r:id="Rcb77ccf055464e0b"/>
+    <p:sldId xmlns:r="http://schemas.openxmlformats.org/officeDocument/2006/relationships" id="258" r:id="R1463006834d34b2c"/>
+    <p:sldId xmlns:r="http://schemas.openxmlformats.org/officeDocument/2006/relationships" id="259" r:id="R0cd3c46ca5904aef"/>
+    <p:sldId xmlns:r="http://schemas.openxmlformats.org/officeDocument/2006/relationships" id="260" r:id="R55b9b8115470483f"/>
+    <p:sldId xmlns:r="http://schemas.openxmlformats.org/officeDocument/2006/relationships" id="261" r:id="R5ba18e7501cf4f27"/>
+    <p:sldId xmlns:r="http://schemas.openxmlformats.org/officeDocument/2006/relationships" id="262" r:id="R4670ab2bc68b4a71"/>
+    <p:sldId xmlns:r="http://schemas.openxmlformats.org/officeDocument/2006/relationships" id="263" r:id="R38d8a577a314452b"/>
+    <p:sldId xmlns:r="http://schemas.openxmlformats.org/officeDocument/2006/relationships" id="264" r:id="Rd120c4ef76d24ac1"/>
+    <p:sldId xmlns:r="http://schemas.openxmlformats.org/officeDocument/2006/relationships" id="265" r:id="R26536cb50a974933"/>
+    <p:sldId xmlns:r="http://schemas.openxmlformats.org/officeDocument/2006/relationships" id="266" r:id="Rf9def43630614530"/>
+    <p:sldId xmlns:r="http://schemas.openxmlformats.org/officeDocument/2006/relationships" id="267" r:id="R103eac4c7d964cdd"/>
   </p:sldIdLst>
   <p:sldSz cx="12191695" cy="6858000"/>
   <p:notesSz cx="6858000" cy="9144000"/>
@@ -1515,12 +1515,12 @@
           </a:p>
           <a:p xmlns:a="http://schemas.openxmlformats.org/drawingml/2006/main">
             <a:r>
-              <a:t>2. Chi phí pilot 20 request ($0.024209 USD standard, $0.026320 USD conservative) là 'Chi phí hạch toán ước tính từ token quan sát được và biểu giá công bố', vì chúng tôi chưa có hóa đơn quyết toán chính thức từ OpenAI.</a:t>
-            </a:r>
-          </a:p>
-          <a:p xmlns:a="http://schemas.openxmlformats.org/drawingml/2006/main">
-            <a:r>
-              <a:t>3. Con số ~$0.00165/query là ước tính ban đầu tại nhánh k=3 do độ dài reasoning output.</a:t>
+              <a:t>2. Toàn bộ nghiên cứu tính trên mẫu số 1,280 queries / điều kiện (tổng 6,400 logical requests, 6,401 physical attempts bao gồm 1 retry lỗi API).</a:t>
+            </a:r>
+          </a:p>
+          <a:p xmlns:a="http://schemas.openxmlformats.org/drawingml/2006/main">
+            <a:r>
+              <a:t>3. Hạch toán tài chính chính xác: trần ngân sách đóng băng cứng $19.99 USD (hard_budget_limit_usd), chi phí quyết toán thực tế 5 điều kiện chính thức là $6.58 settled spend ($6.57575890 USD), cộng giữ chỗ thận trọng pilot $0.05264010 USD tổng chi phí cam kết là $6.63 committed spend ($6.62839900 USD), ngân sách khả dụng còn lại là $13.36 net remaining ($13.36160100 USD; 0 holds, 0 breach).</a:t>
             </a:r>
           </a:p>
           <a:p xmlns:a="http://schemas.openxmlformats.org/drawingml/2006/main">
@@ -1577,7 +1577,7 @@
           <p:cNvPr id="2" name="Title 1">
             <a:extLst xmlns:a="http://schemas.openxmlformats.org/drawingml/2006/main">
               <a:ext uri="{FF2B5EF4-FFF2-40B4-BE49-F238E27FC236}">
-                <a16:creationId xmlns:a16="http://schemas.microsoft.com/office/drawing/2014/main" id="{A5F65FD0-18D3-40A1-81D2-7DD331BA1459}"/>
+                <a16:creationId xmlns:a16="http://schemas.microsoft.com/office/drawing/2014/main" id="{3CEB49DB-D6FD-420D-8F42-0C33A8183484}"/>
               </a:ext>
             </a:extLst>
           </p:cNvPr>
@@ -1610,7 +1610,7 @@
           <p:cNvPr id="3" name="Subtitle 2">
             <a:extLst xmlns:a="http://schemas.openxmlformats.org/drawingml/2006/main">
               <a:ext uri="{FF2B5EF4-FFF2-40B4-BE49-F238E27FC236}">
-                <a16:creationId xmlns:a16="http://schemas.microsoft.com/office/drawing/2014/main" id="{CFD99702-E94B-4719-8127-BF1E1D645188}"/>
+                <a16:creationId xmlns:a16="http://schemas.microsoft.com/office/drawing/2014/main" id="{7DA0C3A3-784B-4518-974F-2212DB9C22EF}"/>
               </a:ext>
             </a:extLst>
           </p:cNvPr>
@@ -1734,7 +1734,7 @@
           <p:cNvPr id="4" name="Date Placeholder 3">
             <a:extLst xmlns:a="http://schemas.openxmlformats.org/drawingml/2006/main">
               <a:ext uri="{FF2B5EF4-FFF2-40B4-BE49-F238E27FC236}">
-                <a16:creationId xmlns:a16="http://schemas.microsoft.com/office/drawing/2014/main" id="{FA94C1BE-ECB6-4513-A15F-75A1C4B5AB71}"/>
+                <a16:creationId xmlns:a16="http://schemas.microsoft.com/office/drawing/2014/main" id="{4B0D3DEE-0A90-424F-A468-7B49E52CBA97}"/>
               </a:ext>
             </a:extLst>
           </p:cNvPr>
@@ -1762,7 +1762,7 @@
           <p:cNvPr id="5" name="Footer Placeholder 4">
             <a:extLst xmlns:a="http://schemas.openxmlformats.org/drawingml/2006/main">
               <a:ext uri="{FF2B5EF4-FFF2-40B4-BE49-F238E27FC236}">
-                <a16:creationId xmlns:a16="http://schemas.microsoft.com/office/drawing/2014/main" id="{96B2A07E-A8E9-46C3-9B24-A73BA9C75C38}"/>
+                <a16:creationId xmlns:a16="http://schemas.microsoft.com/office/drawing/2014/main" id="{3260CF1B-3512-4C4D-AED8-7C408DF86738}"/>
               </a:ext>
             </a:extLst>
           </p:cNvPr>
@@ -1787,7 +1787,7 @@
           <p:cNvPr id="6" name="Slide Number Placeholder 5">
             <a:extLst xmlns:a="http://schemas.openxmlformats.org/drawingml/2006/main">
               <a:ext uri="{FF2B5EF4-FFF2-40B4-BE49-F238E27FC236}">
-                <a16:creationId xmlns:a16="http://schemas.microsoft.com/office/drawing/2014/main" id="{035E55D6-25E6-4D1C-8B83-1614A4DB5D0B}"/>
+                <a16:creationId xmlns:a16="http://schemas.microsoft.com/office/drawing/2014/main" id="{9799572C-FAB7-46C8-ABD2-9FF7AB3858B4}"/>
               </a:ext>
             </a:extLst>
           </p:cNvPr>
@@ -1832,7 +1832,7 @@
           <p:cNvPr id="2" name="Title 1">
             <a:extLst xmlns:a="http://schemas.openxmlformats.org/drawingml/2006/main">
               <a:ext uri="{FF2B5EF4-FFF2-40B4-BE49-F238E27FC236}">
-                <a16:creationId xmlns:a16="http://schemas.microsoft.com/office/drawing/2014/main" id="{FAA4B837-300D-426B-A7C3-E148738F313D}"/>
+                <a16:creationId xmlns:a16="http://schemas.microsoft.com/office/drawing/2014/main" id="{FCA6F003-5583-4DFE-A7AA-4DC2ED011876}"/>
               </a:ext>
             </a:extLst>
           </p:cNvPr>
@@ -1860,7 +1860,7 @@
           <p:cNvPr id="3" name="Vertical Text Placeholder 2">
             <a:extLst xmlns:a="http://schemas.openxmlformats.org/drawingml/2006/main">
               <a:ext uri="{FF2B5EF4-FFF2-40B4-BE49-F238E27FC236}">
-                <a16:creationId xmlns:a16="http://schemas.microsoft.com/office/drawing/2014/main" id="{84D15B48-8FD4-4D43-8878-D2C96FF5CCA8}"/>
+                <a16:creationId xmlns:a16="http://schemas.microsoft.com/office/drawing/2014/main" id="{D9D30904-19A9-4DC2-BE2E-38DC9302BA3F}"/>
               </a:ext>
             </a:extLst>
           </p:cNvPr>
@@ -1923,7 +1923,7 @@
           <p:cNvPr id="4" name="Date Placeholder 3">
             <a:extLst xmlns:a="http://schemas.openxmlformats.org/drawingml/2006/main">
               <a:ext uri="{FF2B5EF4-FFF2-40B4-BE49-F238E27FC236}">
-                <a16:creationId xmlns:a16="http://schemas.microsoft.com/office/drawing/2014/main" id="{CDE0F18A-C1D2-4CB4-8E4D-3361546269A0}"/>
+                <a16:creationId xmlns:a16="http://schemas.microsoft.com/office/drawing/2014/main" id="{706F5DD9-6E76-45EA-A565-48A5AF792099}"/>
               </a:ext>
             </a:extLst>
           </p:cNvPr>
@@ -1951,7 +1951,7 @@
           <p:cNvPr id="5" name="Footer Placeholder 4">
             <a:extLst xmlns:a="http://schemas.openxmlformats.org/drawingml/2006/main">
               <a:ext uri="{FF2B5EF4-FFF2-40B4-BE49-F238E27FC236}">
-                <a16:creationId xmlns:a16="http://schemas.microsoft.com/office/drawing/2014/main" id="{DBEAA1F0-3328-48D2-9977-8B9A38BD874E}"/>
+                <a16:creationId xmlns:a16="http://schemas.microsoft.com/office/drawing/2014/main" id="{A9E38238-DE8F-4F23-89F6-13F8635D68E4}"/>
               </a:ext>
             </a:extLst>
           </p:cNvPr>
@@ -1976,7 +1976,7 @@
           <p:cNvPr id="6" name="Slide Number Placeholder 5">
             <a:extLst xmlns:a="http://schemas.openxmlformats.org/drawingml/2006/main">
               <a:ext uri="{FF2B5EF4-FFF2-40B4-BE49-F238E27FC236}">
-                <a16:creationId xmlns:a16="http://schemas.microsoft.com/office/drawing/2014/main" id="{AC2A07CA-2E6D-4BE6-970C-3517401E911B}"/>
+                <a16:creationId xmlns:a16="http://schemas.microsoft.com/office/drawing/2014/main" id="{BF862A16-16C7-437A-A327-D5238D5256DC}"/>
               </a:ext>
             </a:extLst>
           </p:cNvPr>
@@ -2021,7 +2021,7 @@
           <p:cNvPr id="2" name="Vertical Title 1">
             <a:extLst xmlns:a="http://schemas.openxmlformats.org/drawingml/2006/main">
               <a:ext uri="{FF2B5EF4-FFF2-40B4-BE49-F238E27FC236}">
-                <a16:creationId xmlns:a16="http://schemas.microsoft.com/office/drawing/2014/main" id="{8EEBDC85-5C83-415B-9209-8107668138E8}"/>
+                <a16:creationId xmlns:a16="http://schemas.microsoft.com/office/drawing/2014/main" id="{50880E9A-C7BC-4B7A-82B3-412A3E5820F6}"/>
               </a:ext>
             </a:extLst>
           </p:cNvPr>
@@ -2054,7 +2054,7 @@
           <p:cNvPr id="3" name="Vertical Text Placeholder 2">
             <a:extLst xmlns:a="http://schemas.openxmlformats.org/drawingml/2006/main">
               <a:ext uri="{FF2B5EF4-FFF2-40B4-BE49-F238E27FC236}">
-                <a16:creationId xmlns:a16="http://schemas.microsoft.com/office/drawing/2014/main" id="{2B1CA8F1-A9A7-4D6F-8BFD-84F21BAD6AD6}"/>
+                <a16:creationId xmlns:a16="http://schemas.microsoft.com/office/drawing/2014/main" id="{76E718EF-D9BF-4BFC-8FAE-F6255BC7F2A0}"/>
               </a:ext>
             </a:extLst>
           </p:cNvPr>
@@ -2122,7 +2122,7 @@
           <p:cNvPr id="4" name="Date Placeholder 3">
             <a:extLst xmlns:a="http://schemas.openxmlformats.org/drawingml/2006/main">
               <a:ext uri="{FF2B5EF4-FFF2-40B4-BE49-F238E27FC236}">
-                <a16:creationId xmlns:a16="http://schemas.microsoft.com/office/drawing/2014/main" id="{FA6A1A75-8BC2-4D0A-BBA8-43DDA347B40A}"/>
+                <a16:creationId xmlns:a16="http://schemas.microsoft.com/office/drawing/2014/main" id="{F5F796DD-2CEB-43A1-8F3C-06A495D5B0E3}"/>
               </a:ext>
             </a:extLst>
           </p:cNvPr>
@@ -2150,7 +2150,7 @@
           <p:cNvPr id="5" name="Footer Placeholder 4">
             <a:extLst xmlns:a="http://schemas.openxmlformats.org/drawingml/2006/main">
               <a:ext uri="{FF2B5EF4-FFF2-40B4-BE49-F238E27FC236}">
-                <a16:creationId xmlns:a16="http://schemas.microsoft.com/office/drawing/2014/main" id="{738281CF-6176-403A-9169-4DAB269AA885}"/>
+                <a16:creationId xmlns:a16="http://schemas.microsoft.com/office/drawing/2014/main" id="{13EC45B4-A49F-4F61-8F05-2721408F7B90}"/>
               </a:ext>
             </a:extLst>
           </p:cNvPr>
@@ -2175,7 +2175,7 @@
           <p:cNvPr id="6" name="Slide Number Placeholder 5">
             <a:extLst xmlns:a="http://schemas.openxmlformats.org/drawingml/2006/main">
               <a:ext uri="{FF2B5EF4-FFF2-40B4-BE49-F238E27FC236}">
-                <a16:creationId xmlns:a16="http://schemas.microsoft.com/office/drawing/2014/main" id="{38EBC3A9-2CD4-47AF-8E58-3E0D972B4703}"/>
+                <a16:creationId xmlns:a16="http://schemas.microsoft.com/office/drawing/2014/main" id="{3F21537B-0B45-4743-B6FE-AD2AD9A729FD}"/>
               </a:ext>
             </a:extLst>
           </p:cNvPr>
@@ -2220,7 +2220,7 @@
           <p:cNvPr id="2" name="Title 1">
             <a:extLst xmlns:a="http://schemas.openxmlformats.org/drawingml/2006/main">
               <a:ext uri="{FF2B5EF4-FFF2-40B4-BE49-F238E27FC236}">
-                <a16:creationId xmlns:a16="http://schemas.microsoft.com/office/drawing/2014/main" id="{B67B8D94-4688-4146-BFE8-EDBD54BBD5A0}"/>
+                <a16:creationId xmlns:a16="http://schemas.microsoft.com/office/drawing/2014/main" id="{06052D85-00B6-482C-93C2-C77A5C010B08}"/>
               </a:ext>
             </a:extLst>
           </p:cNvPr>
@@ -2248,7 +2248,7 @@
           <p:cNvPr id="3" name="Content Placeholder 2">
             <a:extLst xmlns:a="http://schemas.openxmlformats.org/drawingml/2006/main">
               <a:ext uri="{FF2B5EF4-FFF2-40B4-BE49-F238E27FC236}">
-                <a16:creationId xmlns:a16="http://schemas.microsoft.com/office/drawing/2014/main" id="{5E8833FC-E042-461C-9FBE-4B0839EF442A}"/>
+                <a16:creationId xmlns:a16="http://schemas.microsoft.com/office/drawing/2014/main" id="{A971831D-8DBD-41B4-BF82-593DCC17556D}"/>
               </a:ext>
             </a:extLst>
           </p:cNvPr>
@@ -2311,7 +2311,7 @@
           <p:cNvPr id="4" name="Date Placeholder 3">
             <a:extLst xmlns:a="http://schemas.openxmlformats.org/drawingml/2006/main">
               <a:ext uri="{FF2B5EF4-FFF2-40B4-BE49-F238E27FC236}">
-                <a16:creationId xmlns:a16="http://schemas.microsoft.com/office/drawing/2014/main" id="{1FF78225-5405-48B3-9720-3260F6036473}"/>
+                <a16:creationId xmlns:a16="http://schemas.microsoft.com/office/drawing/2014/main" id="{833AC6F9-6E6B-4399-95A2-1698EA21B58A}"/>
               </a:ext>
             </a:extLst>
           </p:cNvPr>
@@ -2339,7 +2339,7 @@
           <p:cNvPr id="5" name="Footer Placeholder 4">
             <a:extLst xmlns:a="http://schemas.openxmlformats.org/drawingml/2006/main">
               <a:ext uri="{FF2B5EF4-FFF2-40B4-BE49-F238E27FC236}">
-                <a16:creationId xmlns:a16="http://schemas.microsoft.com/office/drawing/2014/main" id="{C9508622-9065-4DD5-9E19-9BD0C5ACC8A6}"/>
+                <a16:creationId xmlns:a16="http://schemas.microsoft.com/office/drawing/2014/main" id="{7C692BE4-9ED7-4874-8983-64063FFC4089}"/>
               </a:ext>
             </a:extLst>
           </p:cNvPr>
@@ -2364,7 +2364,7 @@
           <p:cNvPr id="6" name="Slide Number Placeholder 5">
             <a:extLst xmlns:a="http://schemas.openxmlformats.org/drawingml/2006/main">
               <a:ext uri="{FF2B5EF4-FFF2-40B4-BE49-F238E27FC236}">
-                <a16:creationId xmlns:a16="http://schemas.microsoft.com/office/drawing/2014/main" id="{7213BA54-BFA8-4ACF-AF21-404BB1F401C9}"/>
+                <a16:creationId xmlns:a16="http://schemas.microsoft.com/office/drawing/2014/main" id="{5709FF09-5327-447B-A848-E7B97E03774E}"/>
               </a:ext>
             </a:extLst>
           </p:cNvPr>
@@ -2409,7 +2409,7 @@
           <p:cNvPr id="2" name="Title 1">
             <a:extLst xmlns:a="http://schemas.openxmlformats.org/drawingml/2006/main">
               <a:ext uri="{FF2B5EF4-FFF2-40B4-BE49-F238E27FC236}">
-                <a16:creationId xmlns:a16="http://schemas.microsoft.com/office/drawing/2014/main" id="{B2B74632-442F-4355-B638-9405A2AA8E14}"/>
+                <a16:creationId xmlns:a16="http://schemas.microsoft.com/office/drawing/2014/main" id="{BD17DE80-9C4F-4363-8BEF-16FCD8A06E42}"/>
               </a:ext>
             </a:extLst>
           </p:cNvPr>
@@ -2447,7 +2447,7 @@
           <p:cNvPr id="3" name="Text Placeholder 2">
             <a:extLst xmlns:a="http://schemas.openxmlformats.org/drawingml/2006/main">
               <a:ext uri="{FF2B5EF4-FFF2-40B4-BE49-F238E27FC236}">
-                <a16:creationId xmlns:a16="http://schemas.microsoft.com/office/drawing/2014/main" id="{C0240103-CAE5-4C62-9D8F-1A20D33CE43D}"/>
+                <a16:creationId xmlns:a16="http://schemas.microsoft.com/office/drawing/2014/main" id="{5D7FD489-10E6-4EF6-BC1A-0ECF1CC79DD0}"/>
               </a:ext>
             </a:extLst>
           </p:cNvPr>
@@ -2573,7 +2573,7 @@
           <p:cNvPr id="4" name="Date Placeholder 3">
             <a:extLst xmlns:a="http://schemas.openxmlformats.org/drawingml/2006/main">
               <a:ext uri="{FF2B5EF4-FFF2-40B4-BE49-F238E27FC236}">
-                <a16:creationId xmlns:a16="http://schemas.microsoft.com/office/drawing/2014/main" id="{3CF1F627-0305-4FD7-9BB2-66E1F7D8A181}"/>
+                <a16:creationId xmlns:a16="http://schemas.microsoft.com/office/drawing/2014/main" id="{E5AF355A-688E-4CC2-837E-F829CC099BAD}"/>
               </a:ext>
             </a:extLst>
           </p:cNvPr>
@@ -2601,7 +2601,7 @@
           <p:cNvPr id="5" name="Footer Placeholder 4">
             <a:extLst xmlns:a="http://schemas.openxmlformats.org/drawingml/2006/main">
               <a:ext uri="{FF2B5EF4-FFF2-40B4-BE49-F238E27FC236}">
-                <a16:creationId xmlns:a16="http://schemas.microsoft.com/office/drawing/2014/main" id="{2D54A19D-BD09-4155-8B7A-6623FF02CFFE}"/>
+                <a16:creationId xmlns:a16="http://schemas.microsoft.com/office/drawing/2014/main" id="{CE329375-4F6E-469F-A27A-311CF38E68A9}"/>
               </a:ext>
             </a:extLst>
           </p:cNvPr>
@@ -2626,7 +2626,7 @@
           <p:cNvPr id="6" name="Slide Number Placeholder 5">
             <a:extLst xmlns:a="http://schemas.openxmlformats.org/drawingml/2006/main">
               <a:ext uri="{FF2B5EF4-FFF2-40B4-BE49-F238E27FC236}">
-                <a16:creationId xmlns:a16="http://schemas.microsoft.com/office/drawing/2014/main" id="{5069A511-726E-4BF2-BD17-1FC39AFA88BC}"/>
+                <a16:creationId xmlns:a16="http://schemas.microsoft.com/office/drawing/2014/main" id="{B848B4D9-48E5-4DCE-9B98-AD07C7F5AB27}"/>
               </a:ext>
             </a:extLst>
           </p:cNvPr>
@@ -2671,7 +2671,7 @@
           <p:cNvPr id="2" name="Title 1">
             <a:extLst xmlns:a="http://schemas.openxmlformats.org/drawingml/2006/main">
               <a:ext uri="{FF2B5EF4-FFF2-40B4-BE49-F238E27FC236}">
-                <a16:creationId xmlns:a16="http://schemas.microsoft.com/office/drawing/2014/main" id="{1A81C51C-F18E-4EEB-9F1A-2CAA2BF50D3A}"/>
+                <a16:creationId xmlns:a16="http://schemas.microsoft.com/office/drawing/2014/main" id="{180D6C68-B086-482C-BFF8-49E61693CAEA}"/>
               </a:ext>
             </a:extLst>
           </p:cNvPr>
@@ -2699,7 +2699,7 @@
           <p:cNvPr id="3" name="Content Placeholder 2">
             <a:extLst xmlns:a="http://schemas.openxmlformats.org/drawingml/2006/main">
               <a:ext uri="{FF2B5EF4-FFF2-40B4-BE49-F238E27FC236}">
-                <a16:creationId xmlns:a16="http://schemas.microsoft.com/office/drawing/2014/main" id="{FE2BDF15-6368-499D-B841-E23549123689}"/>
+                <a16:creationId xmlns:a16="http://schemas.microsoft.com/office/drawing/2014/main" id="{6B9FD17E-3FA7-4690-8DA3-1C7966355E8F}"/>
               </a:ext>
             </a:extLst>
           </p:cNvPr>
@@ -2804,7 +2804,7 @@
           <p:cNvPr id="4" name="Content Placeholder 3">
             <a:extLst xmlns:a="http://schemas.openxmlformats.org/drawingml/2006/main">
               <a:ext uri="{FF2B5EF4-FFF2-40B4-BE49-F238E27FC236}">
-                <a16:creationId xmlns:a16="http://schemas.microsoft.com/office/drawing/2014/main" id="{0C8B2580-A070-4E6C-A841-4BC6FD9744AD}"/>
+                <a16:creationId xmlns:a16="http://schemas.microsoft.com/office/drawing/2014/main" id="{028ACE0C-CE55-468F-8EEE-110B9B53B6FF}"/>
               </a:ext>
             </a:extLst>
           </p:cNvPr>
@@ -2909,7 +2909,7 @@
           <p:cNvPr id="5" name="Date Placeholder 4">
             <a:extLst xmlns:a="http://schemas.openxmlformats.org/drawingml/2006/main">
               <a:ext uri="{FF2B5EF4-FFF2-40B4-BE49-F238E27FC236}">
-                <a16:creationId xmlns:a16="http://schemas.microsoft.com/office/drawing/2014/main" id="{7A3A53CD-7EA0-4DFC-B5A9-A6FCAEB41334}"/>
+                <a16:creationId xmlns:a16="http://schemas.microsoft.com/office/drawing/2014/main" id="{1AE959A9-DBCA-4CAD-9F49-4B4E8ECAD7FC}"/>
               </a:ext>
             </a:extLst>
           </p:cNvPr>
@@ -2937,7 +2937,7 @@
           <p:cNvPr id="6" name="Footer Placeholder 5">
             <a:extLst xmlns:a="http://schemas.openxmlformats.org/drawingml/2006/main">
               <a:ext uri="{FF2B5EF4-FFF2-40B4-BE49-F238E27FC236}">
-                <a16:creationId xmlns:a16="http://schemas.microsoft.com/office/drawing/2014/main" id="{ACEC179D-4D00-4FFC-AA83-CAEBD38B6D02}"/>
+                <a16:creationId xmlns:a16="http://schemas.microsoft.com/office/drawing/2014/main" id="{3844379A-6075-4E75-A929-2B264D3AC5BA}"/>
               </a:ext>
             </a:extLst>
           </p:cNvPr>
@@ -2962,7 +2962,7 @@
           <p:cNvPr id="7" name="Slide Number Placeholder 6">
             <a:extLst xmlns:a="http://schemas.openxmlformats.org/drawingml/2006/main">
               <a:ext uri="{FF2B5EF4-FFF2-40B4-BE49-F238E27FC236}">
-                <a16:creationId xmlns:a16="http://schemas.microsoft.com/office/drawing/2014/main" id="{37E75401-1A84-410A-90F7-B528D1662277}"/>
+                <a16:creationId xmlns:a16="http://schemas.microsoft.com/office/drawing/2014/main" id="{126CE87F-AD3C-4348-8CDC-8A2D0CF2DEB8}"/>
               </a:ext>
             </a:extLst>
           </p:cNvPr>
@@ -3007,7 +3007,7 @@
           <p:cNvPr id="2" name="Title 1">
             <a:extLst xmlns:a="http://schemas.openxmlformats.org/drawingml/2006/main">
               <a:ext uri="{FF2B5EF4-FFF2-40B4-BE49-F238E27FC236}">
-                <a16:creationId xmlns:a16="http://schemas.microsoft.com/office/drawing/2014/main" id="{650BAE0C-5CF6-40D3-BC14-575E7EF316FA}"/>
+                <a16:creationId xmlns:a16="http://schemas.microsoft.com/office/drawing/2014/main" id="{A30AD875-2999-4FD0-BC76-184FB976340A}"/>
               </a:ext>
             </a:extLst>
           </p:cNvPr>
@@ -3040,7 +3040,7 @@
           <p:cNvPr id="3" name="Text Placeholder 2">
             <a:extLst xmlns:a="http://schemas.openxmlformats.org/drawingml/2006/main">
               <a:ext uri="{FF2B5EF4-FFF2-40B4-BE49-F238E27FC236}">
-                <a16:creationId xmlns:a16="http://schemas.microsoft.com/office/drawing/2014/main" id="{A403E099-C5C3-4478-BF9A-885D0F62F739}"/>
+                <a16:creationId xmlns:a16="http://schemas.microsoft.com/office/drawing/2014/main" id="{A7D5ECD1-E929-44D1-8A1B-1B8047097CC9}"/>
               </a:ext>
             </a:extLst>
           </p:cNvPr>
@@ -3112,7 +3112,7 @@
           <p:cNvPr id="4" name="Content Placeholder 3">
             <a:extLst xmlns:a="http://schemas.openxmlformats.org/drawingml/2006/main">
               <a:ext uri="{FF2B5EF4-FFF2-40B4-BE49-F238E27FC236}">
-                <a16:creationId xmlns:a16="http://schemas.microsoft.com/office/drawing/2014/main" id="{41D7E936-D5B4-4A85-A1FF-18A8EEAC19F1}"/>
+                <a16:creationId xmlns:a16="http://schemas.microsoft.com/office/drawing/2014/main" id="{9A4FDECF-83AE-4E22-BA21-334E88EE1AD7}"/>
               </a:ext>
             </a:extLst>
           </p:cNvPr>
@@ -3217,7 +3217,7 @@
           <p:cNvPr id="5" name="Text Placeholder 4">
             <a:extLst xmlns:a="http://schemas.openxmlformats.org/drawingml/2006/main">
               <a:ext uri="{FF2B5EF4-FFF2-40B4-BE49-F238E27FC236}">
-                <a16:creationId xmlns:a16="http://schemas.microsoft.com/office/drawing/2014/main" id="{59DA8200-7B6E-4D1D-AED5-38A72D0D1B35}"/>
+                <a16:creationId xmlns:a16="http://schemas.microsoft.com/office/drawing/2014/main" id="{CD0C0318-2A59-4856-9741-DE0C099D5555}"/>
               </a:ext>
             </a:extLst>
           </p:cNvPr>
@@ -3289,7 +3289,7 @@
           <p:cNvPr id="6" name="Content Placeholder 5">
             <a:extLst xmlns:a="http://schemas.openxmlformats.org/drawingml/2006/main">
               <a:ext uri="{FF2B5EF4-FFF2-40B4-BE49-F238E27FC236}">
-                <a16:creationId xmlns:a16="http://schemas.microsoft.com/office/drawing/2014/main" id="{38AB1871-58AA-47C0-B71D-97A8C3FDE63B}"/>
+                <a16:creationId xmlns:a16="http://schemas.microsoft.com/office/drawing/2014/main" id="{D3E78C3F-560B-4933-8485-985332F04C5D}"/>
               </a:ext>
             </a:extLst>
           </p:cNvPr>
@@ -3394,7 +3394,7 @@
           <p:cNvPr id="7" name="Date Placeholder 6">
             <a:extLst xmlns:a="http://schemas.openxmlformats.org/drawingml/2006/main">
               <a:ext uri="{FF2B5EF4-FFF2-40B4-BE49-F238E27FC236}">
-                <a16:creationId xmlns:a16="http://schemas.microsoft.com/office/drawing/2014/main" id="{87644B2C-B3CB-4127-9930-5ECC249D2903}"/>
+                <a16:creationId xmlns:a16="http://schemas.microsoft.com/office/drawing/2014/main" id="{1DCF1BA5-48CE-458F-838E-105CBB4044D3}"/>
               </a:ext>
             </a:extLst>
           </p:cNvPr>
@@ -3422,7 +3422,7 @@
           <p:cNvPr id="8" name="Footer Placeholder 7">
             <a:extLst xmlns:a="http://schemas.openxmlformats.org/drawingml/2006/main">
               <a:ext uri="{FF2B5EF4-FFF2-40B4-BE49-F238E27FC236}">
-                <a16:creationId xmlns:a16="http://schemas.microsoft.com/office/drawing/2014/main" id="{07AEB394-16FD-4B8D-B139-B0D95B73635A}"/>
+                <a16:creationId xmlns:a16="http://schemas.microsoft.com/office/drawing/2014/main" id="{28364750-34E7-4129-9E62-C202398526F0}"/>
               </a:ext>
             </a:extLst>
           </p:cNvPr>
@@ -3447,7 +3447,7 @@
           <p:cNvPr id="9" name="Slide Number Placeholder 8">
             <a:extLst xmlns:a="http://schemas.openxmlformats.org/drawingml/2006/main">
               <a:ext uri="{FF2B5EF4-FFF2-40B4-BE49-F238E27FC236}">
-                <a16:creationId xmlns:a16="http://schemas.microsoft.com/office/drawing/2014/main" id="{049C5653-B8EB-4584-ADD4-30B9DD7175B6}"/>
+                <a16:creationId xmlns:a16="http://schemas.microsoft.com/office/drawing/2014/main" id="{566432F8-A79A-461A-94AB-BE7273C17B99}"/>
               </a:ext>
             </a:extLst>
           </p:cNvPr>
@@ -3492,7 +3492,7 @@
           <p:cNvPr id="2" name="Title 1">
             <a:extLst xmlns:a="http://schemas.openxmlformats.org/drawingml/2006/main">
               <a:ext uri="{FF2B5EF4-FFF2-40B4-BE49-F238E27FC236}">
-                <a16:creationId xmlns:a16="http://schemas.microsoft.com/office/drawing/2014/main" id="{9A79C238-B0B7-42BA-8E33-58FE3FD83561}"/>
+                <a16:creationId xmlns:a16="http://schemas.microsoft.com/office/drawing/2014/main" id="{6B90140F-C0FC-41F7-B7F3-3D6CFA13E185}"/>
               </a:ext>
             </a:extLst>
           </p:cNvPr>
@@ -3520,7 +3520,7 @@
           <p:cNvPr id="3" name="Date Placeholder 2">
             <a:extLst xmlns:a="http://schemas.openxmlformats.org/drawingml/2006/main">
               <a:ext uri="{FF2B5EF4-FFF2-40B4-BE49-F238E27FC236}">
-                <a16:creationId xmlns:a16="http://schemas.microsoft.com/office/drawing/2014/main" id="{4A7B3E59-6FB6-4119-86F1-82F068CAF057}"/>
+                <a16:creationId xmlns:a16="http://schemas.microsoft.com/office/drawing/2014/main" id="{F2EAEB43-3B30-490D-8FF3-B3A6FDC4DACC}"/>
               </a:ext>
             </a:extLst>
           </p:cNvPr>
@@ -3548,7 +3548,7 @@
           <p:cNvPr id="4" name="Footer Placeholder 3">
             <a:extLst xmlns:a="http://schemas.openxmlformats.org/drawingml/2006/main">
               <a:ext uri="{FF2B5EF4-FFF2-40B4-BE49-F238E27FC236}">
-                <a16:creationId xmlns:a16="http://schemas.microsoft.com/office/drawing/2014/main" id="{2910D873-D102-4A33-8958-2F1DD1A472E5}"/>
+                <a16:creationId xmlns:a16="http://schemas.microsoft.com/office/drawing/2014/main" id="{3CF8DEE2-6FB8-4776-AE59-4DBCB1A39DCC}"/>
               </a:ext>
             </a:extLst>
           </p:cNvPr>
@@ -3573,7 +3573,7 @@
           <p:cNvPr id="5" name="Slide Number Placeholder 4">
             <a:extLst xmlns:a="http://schemas.openxmlformats.org/drawingml/2006/main">
               <a:ext uri="{FF2B5EF4-FFF2-40B4-BE49-F238E27FC236}">
-                <a16:creationId xmlns:a16="http://schemas.microsoft.com/office/drawing/2014/main" id="{21F38A83-DCB0-42E8-B8E8-E613A1001756}"/>
+                <a16:creationId xmlns:a16="http://schemas.microsoft.com/office/drawing/2014/main" id="{1D6C44F5-9566-4007-8D08-0DEF6619C439}"/>
               </a:ext>
             </a:extLst>
           </p:cNvPr>
@@ -3618,7 +3618,7 @@
           <p:cNvPr id="2" name="Date Placeholder 1">
             <a:extLst xmlns:a="http://schemas.openxmlformats.org/drawingml/2006/main">
               <a:ext uri="{FF2B5EF4-FFF2-40B4-BE49-F238E27FC236}">
-                <a16:creationId xmlns:a16="http://schemas.microsoft.com/office/drawing/2014/main" id="{A4260A55-751B-4755-9CEF-81C147005B5D}"/>
+                <a16:creationId xmlns:a16="http://schemas.microsoft.com/office/drawing/2014/main" id="{AF9B1D40-8355-4D83-AD86-A0E12FCB1B48}"/>
               </a:ext>
             </a:extLst>
           </p:cNvPr>
@@ -3646,7 +3646,7 @@
           <p:cNvPr id="3" name="Footer Placeholder 2">
             <a:extLst xmlns:a="http://schemas.openxmlformats.org/drawingml/2006/main">
               <a:ext uri="{FF2B5EF4-FFF2-40B4-BE49-F238E27FC236}">
-                <a16:creationId xmlns:a16="http://schemas.microsoft.com/office/drawing/2014/main" id="{8348BB24-5C21-4318-8DEF-23F8E2C65856}"/>
+                <a16:creationId xmlns:a16="http://schemas.microsoft.com/office/drawing/2014/main" id="{EF450DFB-8692-4589-8B03-00A7D8045596}"/>
               </a:ext>
             </a:extLst>
           </p:cNvPr>
@@ -3671,7 +3671,7 @@
           <p:cNvPr id="4" name="Slide Number Placeholder 3">
             <a:extLst xmlns:a="http://schemas.openxmlformats.org/drawingml/2006/main">
               <a:ext uri="{FF2B5EF4-FFF2-40B4-BE49-F238E27FC236}">
-                <a16:creationId xmlns:a16="http://schemas.microsoft.com/office/drawing/2014/main" id="{BE83BFA9-CBC7-4A9F-B92A-3277AF05F268}"/>
+                <a16:creationId xmlns:a16="http://schemas.microsoft.com/office/drawing/2014/main" id="{0BF4205B-EC1E-4445-A743-C0E94EC3052D}"/>
               </a:ext>
             </a:extLst>
           </p:cNvPr>
@@ -3716,7 +3716,7 @@
           <p:cNvPr id="2" name="Title 1">
             <a:extLst xmlns:a="http://schemas.openxmlformats.org/drawingml/2006/main">
               <a:ext uri="{FF2B5EF4-FFF2-40B4-BE49-F238E27FC236}">
-                <a16:creationId xmlns:a16="http://schemas.microsoft.com/office/drawing/2014/main" id="{B845A60D-DBFB-4C16-9CA2-DE225AA19252}"/>
+                <a16:creationId xmlns:a16="http://schemas.microsoft.com/office/drawing/2014/main" id="{8900DC6E-0BD4-4C42-9278-0FF36D621CDD}"/>
               </a:ext>
             </a:extLst>
           </p:cNvPr>
@@ -3754,7 +3754,7 @@
           <p:cNvPr id="3" name="Content Placeholder 2">
             <a:extLst xmlns:a="http://schemas.openxmlformats.org/drawingml/2006/main">
               <a:ext uri="{FF2B5EF4-FFF2-40B4-BE49-F238E27FC236}">
-                <a16:creationId xmlns:a16="http://schemas.microsoft.com/office/drawing/2014/main" id="{E193F75F-C310-4633-900B-6E4627C49819}"/>
+                <a16:creationId xmlns:a16="http://schemas.microsoft.com/office/drawing/2014/main" id="{9AFB8AA3-0C15-4DAA-856A-C158A2D68C9C}"/>
               </a:ext>
             </a:extLst>
           </p:cNvPr>
@@ -3859,7 +3859,7 @@
           <p:cNvPr id="4" name="Text Placeholder 3">
             <a:extLst xmlns:a="http://schemas.openxmlformats.org/drawingml/2006/main">
               <a:ext uri="{FF2B5EF4-FFF2-40B4-BE49-F238E27FC236}">
-                <a16:creationId xmlns:a16="http://schemas.microsoft.com/office/drawing/2014/main" id="{4CDF1625-6F25-4C65-BC9E-8D92AE1E8E04}"/>
+                <a16:creationId xmlns:a16="http://schemas.microsoft.com/office/drawing/2014/main" id="{1023E3A8-6ED0-4E11-8523-8179EF4BA67E}"/>
               </a:ext>
             </a:extLst>
           </p:cNvPr>
@@ -3931,7 +3931,7 @@
           <p:cNvPr id="5" name="Date Placeholder 4">
             <a:extLst xmlns:a="http://schemas.openxmlformats.org/drawingml/2006/main">
               <a:ext uri="{FF2B5EF4-FFF2-40B4-BE49-F238E27FC236}">
-                <a16:creationId xmlns:a16="http://schemas.microsoft.com/office/drawing/2014/main" id="{C3B515C6-37D6-453A-80CA-B7EAE8E86679}"/>
+                <a16:creationId xmlns:a16="http://schemas.microsoft.com/office/drawing/2014/main" id="{423CC125-F9BE-4909-80F8-FA3806DF7FB7}"/>
               </a:ext>
             </a:extLst>
           </p:cNvPr>
@@ -3959,7 +3959,7 @@
           <p:cNvPr id="6" name="Footer Placeholder 5">
             <a:extLst xmlns:a="http://schemas.openxmlformats.org/drawingml/2006/main">
               <a:ext uri="{FF2B5EF4-FFF2-40B4-BE49-F238E27FC236}">
-                <a16:creationId xmlns:a16="http://schemas.microsoft.com/office/drawing/2014/main" id="{612F0E3A-D0C7-4B78-A435-CBFF0648D2B8}"/>
+                <a16:creationId xmlns:a16="http://schemas.microsoft.com/office/drawing/2014/main" id="{CF4B2DF9-51AA-4141-9B01-2808EE87381F}"/>
               </a:ext>
             </a:extLst>
           </p:cNvPr>
@@ -3984,7 +3984,7 @@
           <p:cNvPr id="7" name="Slide Number Placeholder 6">
             <a:extLst xmlns:a="http://schemas.openxmlformats.org/drawingml/2006/main">
               <a:ext uri="{FF2B5EF4-FFF2-40B4-BE49-F238E27FC236}">
-                <a16:creationId xmlns:a16="http://schemas.microsoft.com/office/drawing/2014/main" id="{CE2E0C7F-E08A-42DE-846D-CEE02EBB29EC}"/>
+                <a16:creationId xmlns:a16="http://schemas.microsoft.com/office/drawing/2014/main" id="{4F02F5C0-BAD1-41A1-B934-D7DC09118E3D}"/>
               </a:ext>
             </a:extLst>
           </p:cNvPr>
@@ -4029,7 +4029,7 @@
           <p:cNvPr id="2" name="Title 1">
             <a:extLst xmlns:a="http://schemas.openxmlformats.org/drawingml/2006/main">
               <a:ext uri="{FF2B5EF4-FFF2-40B4-BE49-F238E27FC236}">
-                <a16:creationId xmlns:a16="http://schemas.microsoft.com/office/drawing/2014/main" id="{BCDA3500-A98E-42D7-915C-C4B94E996C15}"/>
+                <a16:creationId xmlns:a16="http://schemas.microsoft.com/office/drawing/2014/main" id="{1DF4ED85-6DD9-4D7B-A498-8745D3AD38EF}"/>
               </a:ext>
             </a:extLst>
           </p:cNvPr>
@@ -4067,7 +4067,7 @@
           <p:cNvPr id="3" name="Picture Placeholder 2">
             <a:extLst xmlns:a="http://schemas.openxmlformats.org/drawingml/2006/main">
               <a:ext uri="{FF2B5EF4-FFF2-40B4-BE49-F238E27FC236}">
-                <a16:creationId xmlns:a16="http://schemas.microsoft.com/office/drawing/2014/main" id="{306C3FB7-879D-40F3-9EA3-F1E4C8096319}"/>
+                <a16:creationId xmlns:a16="http://schemas.microsoft.com/office/drawing/2014/main" id="{5E2ACE28-7EFF-45F4-8168-8EBE3115DFAD}"/>
               </a:ext>
             </a:extLst>
           </p:cNvPr>
@@ -4134,7 +4134,7 @@
           <p:cNvPr id="4" name="Text Placeholder 3">
             <a:extLst xmlns:a="http://schemas.openxmlformats.org/drawingml/2006/main">
               <a:ext uri="{FF2B5EF4-FFF2-40B4-BE49-F238E27FC236}">
-                <a16:creationId xmlns:a16="http://schemas.microsoft.com/office/drawing/2014/main" id="{9A405AC1-9650-494E-B486-6AE02AA47C55}"/>
+                <a16:creationId xmlns:a16="http://schemas.microsoft.com/office/drawing/2014/main" id="{A00C23AE-3C88-422A-921B-44BE77FC10E3}"/>
               </a:ext>
             </a:extLst>
           </p:cNvPr>
@@ -4206,7 +4206,7 @@
           <p:cNvPr id="5" name="Date Placeholder 4">
             <a:extLst xmlns:a="http://schemas.openxmlformats.org/drawingml/2006/main">
               <a:ext uri="{FF2B5EF4-FFF2-40B4-BE49-F238E27FC236}">
-                <a16:creationId xmlns:a16="http://schemas.microsoft.com/office/drawing/2014/main" id="{073E8210-4201-4218-9B6A-7F9D8789808B}"/>
+                <a16:creationId xmlns:a16="http://schemas.microsoft.com/office/drawing/2014/main" id="{FC986876-46CA-49BB-9EFB-2A9705849E19}"/>
               </a:ext>
             </a:extLst>
           </p:cNvPr>
@@ -4234,7 +4234,7 @@
           <p:cNvPr id="6" name="Footer Placeholder 5">
             <a:extLst xmlns:a="http://schemas.openxmlformats.org/drawingml/2006/main">
               <a:ext uri="{FF2B5EF4-FFF2-40B4-BE49-F238E27FC236}">
-                <a16:creationId xmlns:a16="http://schemas.microsoft.com/office/drawing/2014/main" id="{B71F4330-5262-4D4D-85B7-6CC100333AE1}"/>
+                <a16:creationId xmlns:a16="http://schemas.microsoft.com/office/drawing/2014/main" id="{F89BE064-30A4-4B6D-9BD7-45A9FBB1A808}"/>
               </a:ext>
             </a:extLst>
           </p:cNvPr>
@@ -4259,7 +4259,7 @@
           <p:cNvPr id="7" name="Slide Number Placeholder 6">
             <a:extLst xmlns:a="http://schemas.openxmlformats.org/drawingml/2006/main">
               <a:ext uri="{FF2B5EF4-FFF2-40B4-BE49-F238E27FC236}">
-                <a16:creationId xmlns:a16="http://schemas.microsoft.com/office/drawing/2014/main" id="{1D504ADB-B612-4E95-A5D8-13BDAC41BD07}"/>
+                <a16:creationId xmlns:a16="http://schemas.microsoft.com/office/drawing/2014/main" id="{C5301A1F-96A0-4A85-8D5F-65ACEF8B09AC}"/>
               </a:ext>
             </a:extLst>
           </p:cNvPr>
@@ -4309,7 +4309,7 @@
           <p:cNvPr id="2" name="Title Placeholder 1">
             <a:extLst xmlns:a="http://schemas.openxmlformats.org/drawingml/2006/main">
               <a:ext uri="{FF2B5EF4-FFF2-40B4-BE49-F238E27FC236}">
-                <a16:creationId xmlns:a16="http://schemas.microsoft.com/office/drawing/2014/main" id="{1FC9767C-250C-4495-9E87-57F5E055A207}"/>
+                <a16:creationId xmlns:a16="http://schemas.microsoft.com/office/drawing/2014/main" id="{B6918760-2135-45A2-8CEF-592C94CF64C6}"/>
               </a:ext>
             </a:extLst>
           </p:cNvPr>
@@ -4347,7 +4347,7 @@
           <p:cNvPr id="3" name="Text Placeholder 2">
             <a:extLst xmlns:a="http://schemas.openxmlformats.org/drawingml/2006/main">
               <a:ext uri="{FF2B5EF4-FFF2-40B4-BE49-F238E27FC236}">
-                <a16:creationId xmlns:a16="http://schemas.microsoft.com/office/drawing/2014/main" id="{E8594496-FF93-47D6-8431-1D7A177736D4}"/>
+                <a16:creationId xmlns:a16="http://schemas.microsoft.com/office/drawing/2014/main" id="{1F62161A-6F18-4D9A-95F2-5FD07F7E0329}"/>
               </a:ext>
             </a:extLst>
           </p:cNvPr>
@@ -4420,7 +4420,7 @@
           <p:cNvPr id="4" name="Date Placeholder 3">
             <a:extLst xmlns:a="http://schemas.openxmlformats.org/drawingml/2006/main">
               <a:ext uri="{FF2B5EF4-FFF2-40B4-BE49-F238E27FC236}">
-                <a16:creationId xmlns:a16="http://schemas.microsoft.com/office/drawing/2014/main" id="{C3A523DF-00DB-4B51-B915-7654C6061530}"/>
+                <a16:creationId xmlns:a16="http://schemas.microsoft.com/office/drawing/2014/main" id="{0CBF27AE-2FA7-4858-8BCC-8407841AF563}"/>
               </a:ext>
             </a:extLst>
           </p:cNvPr>
@@ -4467,7 +4467,7 @@
           <p:cNvPr id="5" name="Footer Placeholder 4">
             <a:extLst xmlns:a="http://schemas.openxmlformats.org/drawingml/2006/main">
               <a:ext uri="{FF2B5EF4-FFF2-40B4-BE49-F238E27FC236}">
-                <a16:creationId xmlns:a16="http://schemas.microsoft.com/office/drawing/2014/main" id="{86BDB433-D7B3-46F8-AD63-518BCB96CC60}"/>
+                <a16:creationId xmlns:a16="http://schemas.microsoft.com/office/drawing/2014/main" id="{6427334A-F150-4323-AF13-F4943BD06036}"/>
               </a:ext>
             </a:extLst>
           </p:cNvPr>
@@ -4511,7 +4511,7 @@
           <p:cNvPr id="6" name="Slide Number Placeholder 5">
             <a:extLst xmlns:a="http://schemas.openxmlformats.org/drawingml/2006/main">
               <a:ext uri="{FF2B5EF4-FFF2-40B4-BE49-F238E27FC236}">
-                <a16:creationId xmlns:a16="http://schemas.microsoft.com/office/drawing/2014/main" id="{1FFDEB83-1840-48E2-B4C1-025730A72DEB}"/>
+                <a16:creationId xmlns:a16="http://schemas.microsoft.com/office/drawing/2014/main" id="{4CAEEB15-A45E-4BC9-8445-9B02E8FABF05}"/>
               </a:ext>
             </a:extLst>
           </p:cNvPr>
@@ -4557,17 +4557,17 @@
   </p:cSld>
   <p:clrMap bg1="lt1" tx1="dk1" bg2="lt2" tx2="dk2" accent1="accent1" accent2="accent2" accent3="accent3" accent4="accent4" accent5="accent5" accent6="accent6" hlink="hlink" folHlink="folHlink"/>
   <p:sldLayoutIdLst>
-    <p:sldLayoutId xmlns:r="http://schemas.openxmlformats.org/officeDocument/2006/relationships" id="2147483649" r:id="R6fbba830e2bf44f3"/>
-    <p:sldLayoutId xmlns:r="http://schemas.openxmlformats.org/officeDocument/2006/relationships" id="2147483650" r:id="Rcf53c79d937c43fd"/>
-    <p:sldLayoutId xmlns:r="http://schemas.openxmlformats.org/officeDocument/2006/relationships" id="2147483651" r:id="R6828dca130a14e71"/>
-    <p:sldLayoutId xmlns:r="http://schemas.openxmlformats.org/officeDocument/2006/relationships" id="2147483652" r:id="R655df3797908481c"/>
-    <p:sldLayoutId xmlns:r="http://schemas.openxmlformats.org/officeDocument/2006/relationships" id="2147483653" r:id="R165ab68bd1a9462e"/>
-    <p:sldLayoutId xmlns:r="http://schemas.openxmlformats.org/officeDocument/2006/relationships" id="2147483654" r:id="Rbe9c1803ed3a484e"/>
-    <p:sldLayoutId xmlns:r="http://schemas.openxmlformats.org/officeDocument/2006/relationships" id="2147483655" r:id="R62378c32967c40f9"/>
-    <p:sldLayoutId xmlns:r="http://schemas.openxmlformats.org/officeDocument/2006/relationships" id="2147483656" r:id="Rb464b537dd924951"/>
-    <p:sldLayoutId xmlns:r="http://schemas.openxmlformats.org/officeDocument/2006/relationships" id="2147483657" r:id="Rb7e5dac8e8864181"/>
-    <p:sldLayoutId xmlns:r="http://schemas.openxmlformats.org/officeDocument/2006/relationships" id="2147483658" r:id="R42536b05d6904da3"/>
-    <p:sldLayoutId xmlns:r="http://schemas.openxmlformats.org/officeDocument/2006/relationships" id="2147483659" r:id="R03348f632aee40c2"/>
+    <p:sldLayoutId xmlns:r="http://schemas.openxmlformats.org/officeDocument/2006/relationships" id="2147483649" r:id="Rc48f0f98151c4176"/>
+    <p:sldLayoutId xmlns:r="http://schemas.openxmlformats.org/officeDocument/2006/relationships" id="2147483650" r:id="R63f553ccd6364678"/>
+    <p:sldLayoutId xmlns:r="http://schemas.openxmlformats.org/officeDocument/2006/relationships" id="2147483651" r:id="R446e6758563842e0"/>
+    <p:sldLayoutId xmlns:r="http://schemas.openxmlformats.org/officeDocument/2006/relationships" id="2147483652" r:id="R62d32fa62f7541db"/>
+    <p:sldLayoutId xmlns:r="http://schemas.openxmlformats.org/officeDocument/2006/relationships" id="2147483653" r:id="Rdebe2ca846484a5a"/>
+    <p:sldLayoutId xmlns:r="http://schemas.openxmlformats.org/officeDocument/2006/relationships" id="2147483654" r:id="R4e35f9d00b7b4c74"/>
+    <p:sldLayoutId xmlns:r="http://schemas.openxmlformats.org/officeDocument/2006/relationships" id="2147483655" r:id="R51de9662eb4744a0"/>
+    <p:sldLayoutId xmlns:r="http://schemas.openxmlformats.org/officeDocument/2006/relationships" id="2147483656" r:id="R360c5a003f474d4c"/>
+    <p:sldLayoutId xmlns:r="http://schemas.openxmlformats.org/officeDocument/2006/relationships" id="2147483657" r:id="R48e1d5fbe3ce4673"/>
+    <p:sldLayoutId xmlns:r="http://schemas.openxmlformats.org/officeDocument/2006/relationships" id="2147483658" r:id="R7bb1a1cc2d554994"/>
+    <p:sldLayoutId xmlns:r="http://schemas.openxmlformats.org/officeDocument/2006/relationships" id="2147483659" r:id="R9cca958b0d6846a2"/>
   </p:sldLayoutIdLst>
   <p:txStyles>
     <p:titleStyle>
@@ -5113,7 +5113,7 @@
           <p:cNvPr id="2" name="Rectangle 1">
             <a:extLst xmlns:a="http://schemas.openxmlformats.org/drawingml/2006/main">
               <a:ext uri="{FF2B5EF4-FFF2-40B4-BE49-F238E27FC236}">
-                <a16:creationId xmlns:a16="http://schemas.microsoft.com/office/drawing/2014/main" id="{B959BA56-CF1D-4BBA-BF72-05061A0B98C7}"/>
+                <a16:creationId xmlns:a16="http://schemas.microsoft.com/office/drawing/2014/main" id="{2E0670D0-33AC-4610-A7D2-D9E737FE3D5D}"/>
               </a:ext>
             </a:extLst>
           </p:cNvPr>
@@ -5166,7 +5166,7 @@
           <p:cNvPr id="3" name="Rectangle 2">
             <a:extLst xmlns:a="http://schemas.openxmlformats.org/drawingml/2006/main">
               <a:ext uri="{FF2B5EF4-FFF2-40B4-BE49-F238E27FC236}">
-                <a16:creationId xmlns:a16="http://schemas.microsoft.com/office/drawing/2014/main" id="{E03CA2F5-909C-4654-97E4-CFC2F363E2C7}"/>
+                <a16:creationId xmlns:a16="http://schemas.microsoft.com/office/drawing/2014/main" id="{139416A2-3918-4B38-8A76-53028EDBB4AC}"/>
               </a:ext>
             </a:extLst>
           </p:cNvPr>
@@ -5216,10 +5216,10 @@
       </p:sp>
       <p:sp>
         <p:nvSpPr>
-          <p:cNvPr id="4" name="TextBox 3">
-            <a:extLst xmlns:a="http://schemas.openxmlformats.org/drawingml/2006/main">
-              <a:ext uri="{FF2B5EF4-FFF2-40B4-BE49-F238E27FC236}">
-                <a16:creationId xmlns:a16="http://schemas.microsoft.com/office/drawing/2014/main" id="{E60BEA90-4AE9-4815-8122-47B63F250575}"/>
+          <p:cNvPr id="4" name="shape_slide_1_title">
+            <a:extLst xmlns:a="http://schemas.openxmlformats.org/drawingml/2006/main">
+              <a:ext uri="{FF2B5EF4-FFF2-40B4-BE49-F238E27FC236}">
+                <a16:creationId xmlns:a16="http://schemas.microsoft.com/office/drawing/2014/main" id="{198DDE49-776B-4696-9598-F7AE7362CE30}"/>
               </a:ext>
             </a:extLst>
           </p:cNvPr>
@@ -5316,12 +5316,31 @@
               <a:t>Giao thức khoa học: experiment-protocol-v1.1  |  Khóa chuẩn: canonical-lock-v1</a:t>
             </a:r>
           </a:p>
+          <a:p xmlns:a="http://schemas.openxmlformats.org/drawingml/2006/main">
+            <a:pPr>
+              <a:spcBef>
+                <a:spcPts val="800"/>
+              </a:spcBef>
+              <a:buNone/>
+              <a:defRPr sz="1300" b="1">
+                <a:solidFill>
+                  <a:srgbClr val="DC2626"/>
+                </a:solidFill>
+                <a:latin typeface="Calibri"/>
+                <a:ea typeface="Calibri"/>
+                <a:cs typeface="Calibri"/>
+              </a:defRPr>
+            </a:pPr>
+            <a:r>
+              <a:t>[FIXTURE — PRE-CANONICAL RENDER TEST]</a:t>
+            </a:r>
+          </a:p>
         </p:txBody>
       </p:sp>
     </p:spTree>
     <p:extLst>
       <p:ext uri="{BB962C8B-B14F-4D97-AF65-F5344CB8AC3E}">
-        <p14:creationId xmlns:p14="http://schemas.microsoft.com/office/powerpoint/2010/main" val="747883721"/>
+        <p14:creationId xmlns:p14="http://schemas.microsoft.com/office/powerpoint/2010/main" val="495279310"/>
       </p:ext>
     </p:extLst>
   </p:cSld>
@@ -5345,7 +5364,7 @@
           <p:cNvPr id="2" name="Rectangle 1">
             <a:extLst xmlns:a="http://schemas.openxmlformats.org/drawingml/2006/main">
               <a:ext uri="{FF2B5EF4-FFF2-40B4-BE49-F238E27FC236}">
-                <a16:creationId xmlns:a16="http://schemas.microsoft.com/office/drawing/2014/main" id="{D035EBE8-53DD-45B4-88A8-DC99A6640FEC}"/>
+                <a16:creationId xmlns:a16="http://schemas.microsoft.com/office/drawing/2014/main" id="{D0F0DC23-B6AE-4649-A642-9B21BEEE9830}"/>
               </a:ext>
             </a:extLst>
           </p:cNvPr>
@@ -5398,7 +5417,7 @@
           <p:cNvPr id="3" name="Rectangle 2">
             <a:extLst xmlns:a="http://schemas.openxmlformats.org/drawingml/2006/main">
               <a:ext uri="{FF2B5EF4-FFF2-40B4-BE49-F238E27FC236}">
-                <a16:creationId xmlns:a16="http://schemas.microsoft.com/office/drawing/2014/main" id="{4CD44846-3032-4665-A874-9DB23538852C}"/>
+                <a16:creationId xmlns:a16="http://schemas.microsoft.com/office/drawing/2014/main" id="{0810DBE7-94AC-46EC-8D01-8511ACF1848C}"/>
               </a:ext>
             </a:extLst>
           </p:cNvPr>
@@ -5451,7 +5470,7 @@
           <p:cNvPr id="4" name="Rectangle 3">
             <a:extLst xmlns:a="http://schemas.openxmlformats.org/drawingml/2006/main">
               <a:ext uri="{FF2B5EF4-FFF2-40B4-BE49-F238E27FC236}">
-                <a16:creationId xmlns:a16="http://schemas.microsoft.com/office/drawing/2014/main" id="{541B6A31-FE42-4FDC-BD2F-28666C6A4AF8}"/>
+                <a16:creationId xmlns:a16="http://schemas.microsoft.com/office/drawing/2014/main" id="{DD73CF99-9BF1-46E0-9A5A-7F723AE5283C}"/>
               </a:ext>
             </a:extLst>
           </p:cNvPr>
@@ -5504,7 +5523,7 @@
           <p:cNvPr id="5" name="TextBox 4">
             <a:extLst xmlns:a="http://schemas.openxmlformats.org/drawingml/2006/main">
               <a:ext uri="{FF2B5EF4-FFF2-40B4-BE49-F238E27FC236}">
-                <a16:creationId xmlns:a16="http://schemas.microsoft.com/office/drawing/2014/main" id="{201C9F79-B2CE-4488-B86D-42A035D4B0E3}"/>
+                <a16:creationId xmlns:a16="http://schemas.microsoft.com/office/drawing/2014/main" id="{51EA2672-A8C0-4BC9-A3B3-F742BA5ACF98}"/>
               </a:ext>
             </a:extLst>
           </p:cNvPr>
@@ -5557,17 +5576,17 @@
               </a:defRPr>
             </a:pPr>
             <a:r>
-              <a:t>Đánh giá khách quan các hạn chế kỹ thuật và phạm vi khoa học</a:t>
-            </a:r>
-          </a:p>
-        </p:txBody>
-      </p:sp>
-      <p:sp>
-        <p:nvSpPr>
-          <p:cNvPr id="6" name="Rounded Rectangle 5">
-            <a:extLst xmlns:a="http://schemas.openxmlformats.org/drawingml/2006/main">
-              <a:ext uri="{FF2B5EF4-FFF2-40B4-BE49-F238E27FC236}">
-                <a16:creationId xmlns:a16="http://schemas.microsoft.com/office/drawing/2014/main" id="{369C9FB8-3F1B-484C-82B2-7E43D80A6041}"/>
+              <a:t>Đánh giá khách quan các hạn chế kỹ thuật và phạm vi khoa học  |  [FIXTURE — PRE-CANONICAL RENDER TEST]</a:t>
+            </a:r>
+          </a:p>
+        </p:txBody>
+      </p:sp>
+      <p:sp>
+        <p:nvSpPr>
+          <p:cNvPr id="6" name="shape_slide_10_limitations_1">
+            <a:extLst xmlns:a="http://schemas.openxmlformats.org/drawingml/2006/main">
+              <a:ext uri="{FF2B5EF4-FFF2-40B4-BE49-F238E27FC236}">
+                <a16:creationId xmlns:a16="http://schemas.microsoft.com/office/drawing/2014/main" id="{380E53C2-3018-408C-A5FC-A8319A50404B}"/>
               </a:ext>
             </a:extLst>
           </p:cNvPr>
@@ -5619,10 +5638,10 @@
       </p:sp>
       <p:sp>
         <p:nvSpPr>
-          <p:cNvPr id="7" name="TextBox 6">
-            <a:extLst xmlns:a="http://schemas.openxmlformats.org/drawingml/2006/main">
-              <a:ext uri="{FF2B5EF4-FFF2-40B4-BE49-F238E27FC236}">
-                <a16:creationId xmlns:a16="http://schemas.microsoft.com/office/drawing/2014/main" id="{EB7D4578-8594-416E-B8F7-9F861D1E7A49}"/>
+          <p:cNvPr id="7" name="shape_slide_10_limitations_1_textbox">
+            <a:extLst xmlns:a="http://schemas.openxmlformats.org/drawingml/2006/main">
+              <a:ext uri="{FF2B5EF4-FFF2-40B4-BE49-F238E27FC236}">
+                <a16:creationId xmlns:a16="http://schemas.microsoft.com/office/drawing/2014/main" id="{D1BA875E-3D64-4D26-B38F-C5AD5748EE20}"/>
               </a:ext>
             </a:extLst>
           </p:cNvPr>
@@ -5723,10 +5742,10 @@
       </p:sp>
       <p:sp>
         <p:nvSpPr>
-          <p:cNvPr id="8" name="Rounded Rectangle 7">
-            <a:extLst xmlns:a="http://schemas.openxmlformats.org/drawingml/2006/main">
-              <a:ext uri="{FF2B5EF4-FFF2-40B4-BE49-F238E27FC236}">
-                <a16:creationId xmlns:a16="http://schemas.microsoft.com/office/drawing/2014/main" id="{9CE6973E-3518-4EE3-A2D7-994A0E635478}"/>
+          <p:cNvPr id="8" name="shape_slide_10_limitations_2">
+            <a:extLst xmlns:a="http://schemas.openxmlformats.org/drawingml/2006/main">
+              <a:ext uri="{FF2B5EF4-FFF2-40B4-BE49-F238E27FC236}">
+                <a16:creationId xmlns:a16="http://schemas.microsoft.com/office/drawing/2014/main" id="{1FAC2032-87F0-4291-B675-622E72E5EA72}"/>
               </a:ext>
             </a:extLst>
           </p:cNvPr>
@@ -5778,10 +5797,10 @@
       </p:sp>
       <p:sp>
         <p:nvSpPr>
-          <p:cNvPr id="9" name="TextBox 8">
-            <a:extLst xmlns:a="http://schemas.openxmlformats.org/drawingml/2006/main">
-              <a:ext uri="{FF2B5EF4-FFF2-40B4-BE49-F238E27FC236}">
-                <a16:creationId xmlns:a16="http://schemas.microsoft.com/office/drawing/2014/main" id="{E0C36BE4-7CA5-458D-9FB0-5B698D16067D}"/>
+          <p:cNvPr id="9" name="shape_slide_10_limitations_2_textbox">
+            <a:extLst xmlns:a="http://schemas.openxmlformats.org/drawingml/2006/main">
+              <a:ext uri="{FF2B5EF4-FFF2-40B4-BE49-F238E27FC236}">
+                <a16:creationId xmlns:a16="http://schemas.microsoft.com/office/drawing/2014/main" id="{1BDED55C-00C5-4A0E-A58F-E34AEB992EE9}"/>
               </a:ext>
             </a:extLst>
           </p:cNvPr>
@@ -5863,10 +5882,10 @@
       </p:sp>
       <p:sp>
         <p:nvSpPr>
-          <p:cNvPr id="10" name="Rounded Rectangle 9">
-            <a:extLst xmlns:a="http://schemas.openxmlformats.org/drawingml/2006/main">
-              <a:ext uri="{FF2B5EF4-FFF2-40B4-BE49-F238E27FC236}">
-                <a16:creationId xmlns:a16="http://schemas.microsoft.com/office/drawing/2014/main" id="{CA95DEB7-E756-4724-B9F8-C29E83263C12}"/>
+          <p:cNvPr id="10" name="shape_slide_10_limitations_3">
+            <a:extLst xmlns:a="http://schemas.openxmlformats.org/drawingml/2006/main">
+              <a:ext uri="{FF2B5EF4-FFF2-40B4-BE49-F238E27FC236}">
+                <a16:creationId xmlns:a16="http://schemas.microsoft.com/office/drawing/2014/main" id="{E2E2AE75-EA5A-4344-AD82-8B3C9A363B64}"/>
               </a:ext>
             </a:extLst>
           </p:cNvPr>
@@ -5918,10 +5937,10 @@
       </p:sp>
       <p:sp>
         <p:nvSpPr>
-          <p:cNvPr id="11" name="TextBox 10">
-            <a:extLst xmlns:a="http://schemas.openxmlformats.org/drawingml/2006/main">
-              <a:ext uri="{FF2B5EF4-FFF2-40B4-BE49-F238E27FC236}">
-                <a16:creationId xmlns:a16="http://schemas.microsoft.com/office/drawing/2014/main" id="{B5477A4D-0990-4359-B0BF-9E1814D8F50B}"/>
+          <p:cNvPr id="11" name="shape_slide_10_limitations_3_textbox">
+            <a:extLst xmlns:a="http://schemas.openxmlformats.org/drawingml/2006/main">
+              <a:ext uri="{FF2B5EF4-FFF2-40B4-BE49-F238E27FC236}">
+                <a16:creationId xmlns:a16="http://schemas.microsoft.com/office/drawing/2014/main" id="{A1E6F981-9486-40F6-B683-42B7365FA315}"/>
               </a:ext>
             </a:extLst>
           </p:cNvPr>
@@ -6023,7 +6042,7 @@
     </p:spTree>
     <p:extLst>
       <p:ext uri="{BB962C8B-B14F-4D97-AF65-F5344CB8AC3E}">
-        <p14:creationId xmlns:p14="http://schemas.microsoft.com/office/powerpoint/2010/main" val="1704285524"/>
+        <p14:creationId xmlns:p14="http://schemas.microsoft.com/office/powerpoint/2010/main" val="1684372639"/>
       </p:ext>
     </p:extLst>
   </p:cSld>
@@ -6047,7 +6066,7 @@
           <p:cNvPr id="2" name="Rectangle 1">
             <a:extLst xmlns:a="http://schemas.openxmlformats.org/drawingml/2006/main">
               <a:ext uri="{FF2B5EF4-FFF2-40B4-BE49-F238E27FC236}">
-                <a16:creationId xmlns:a16="http://schemas.microsoft.com/office/drawing/2014/main" id="{2FFABAE1-FF17-47D0-9C48-F05D44B445F4}"/>
+                <a16:creationId xmlns:a16="http://schemas.microsoft.com/office/drawing/2014/main" id="{C893FC1B-790E-4285-BF1F-C1ABA206422B}"/>
               </a:ext>
             </a:extLst>
           </p:cNvPr>
@@ -6100,7 +6119,7 @@
           <p:cNvPr id="3" name="Rectangle 2">
             <a:extLst xmlns:a="http://schemas.openxmlformats.org/drawingml/2006/main">
               <a:ext uri="{FF2B5EF4-FFF2-40B4-BE49-F238E27FC236}">
-                <a16:creationId xmlns:a16="http://schemas.microsoft.com/office/drawing/2014/main" id="{E27E8A66-3F9A-40AA-AA0C-9EFBDFBF7FD1}"/>
+                <a16:creationId xmlns:a16="http://schemas.microsoft.com/office/drawing/2014/main" id="{CA51345A-D2D2-4F71-AEE7-0508A04F2B63}"/>
               </a:ext>
             </a:extLst>
           </p:cNvPr>
@@ -6153,7 +6172,7 @@
           <p:cNvPr id="4" name="Rectangle 3">
             <a:extLst xmlns:a="http://schemas.openxmlformats.org/drawingml/2006/main">
               <a:ext uri="{FF2B5EF4-FFF2-40B4-BE49-F238E27FC236}">
-                <a16:creationId xmlns:a16="http://schemas.microsoft.com/office/drawing/2014/main" id="{919A8047-8884-42B9-81E8-1815DF8B0DC3}"/>
+                <a16:creationId xmlns:a16="http://schemas.microsoft.com/office/drawing/2014/main" id="{0C1A8EB7-C8EA-4EF0-811D-F8819B2BD7A7}"/>
               </a:ext>
             </a:extLst>
           </p:cNvPr>
@@ -6206,7 +6225,7 @@
           <p:cNvPr id="5" name="TextBox 4">
             <a:extLst xmlns:a="http://schemas.openxmlformats.org/drawingml/2006/main">
               <a:ext uri="{FF2B5EF4-FFF2-40B4-BE49-F238E27FC236}">
-                <a16:creationId xmlns:a16="http://schemas.microsoft.com/office/drawing/2014/main" id="{543EEE72-DEDE-4489-B2CD-A1F67E8ED7F5}"/>
+                <a16:creationId xmlns:a16="http://schemas.microsoft.com/office/drawing/2014/main" id="{9D33FCA8-7403-444E-AAB7-019D1D69441A}"/>
               </a:ext>
             </a:extLst>
           </p:cNvPr>
@@ -6259,17 +6278,17 @@
               </a:defRPr>
             </a:pPr>
             <a:r>
-              <a:t>Toàn bộ nghiên cứu có thể kiểm chứng ngoại tuyến với chi phí 0 đồng</a:t>
-            </a:r>
-          </a:p>
-        </p:txBody>
-      </p:sp>
-      <p:sp>
-        <p:nvSpPr>
-          <p:cNvPr id="6" name="Rounded Rectangle 5">
-            <a:extLst xmlns:a="http://schemas.openxmlformats.org/drawingml/2006/main">
-              <a:ext uri="{FF2B5EF4-FFF2-40B4-BE49-F238E27FC236}">
-                <a16:creationId xmlns:a16="http://schemas.microsoft.com/office/drawing/2014/main" id="{B9F91D04-F16A-434B-84B3-CA801F111095}"/>
+              <a:t>Toàn bộ nghiên cứu có thể kiểm chứng ngoại tuyến với chi phí 0 đồng  |  [FIXTURE — PRE-CANONICAL RENDER TEST]</a:t>
+            </a:r>
+          </a:p>
+        </p:txBody>
+      </p:sp>
+      <p:sp>
+        <p:nvSpPr>
+          <p:cNvPr id="6" name="shape_slide_11_reproducibility_1">
+            <a:extLst xmlns:a="http://schemas.openxmlformats.org/drawingml/2006/main">
+              <a:ext uri="{FF2B5EF4-FFF2-40B4-BE49-F238E27FC236}">
+                <a16:creationId xmlns:a16="http://schemas.microsoft.com/office/drawing/2014/main" id="{F30517E4-B0C1-4343-9C8D-E8906B417206}"/>
               </a:ext>
             </a:extLst>
           </p:cNvPr>
@@ -6321,10 +6340,10 @@
       </p:sp>
       <p:sp>
         <p:nvSpPr>
-          <p:cNvPr id="7" name="TextBox 6">
-            <a:extLst xmlns:a="http://schemas.openxmlformats.org/drawingml/2006/main">
-              <a:ext uri="{FF2B5EF4-FFF2-40B4-BE49-F238E27FC236}">
-                <a16:creationId xmlns:a16="http://schemas.microsoft.com/office/drawing/2014/main" id="{99A98039-C969-434E-A561-AC2F6095A8BB}"/>
+          <p:cNvPr id="7" name="shape_slide_11_reproducibility_1_textbox">
+            <a:extLst xmlns:a="http://schemas.openxmlformats.org/drawingml/2006/main">
+              <a:ext uri="{FF2B5EF4-FFF2-40B4-BE49-F238E27FC236}">
+                <a16:creationId xmlns:a16="http://schemas.microsoft.com/office/drawing/2014/main" id="{D036F198-D024-4EAF-A08C-0EBA3ADEEFC5}"/>
               </a:ext>
             </a:extLst>
           </p:cNvPr>
@@ -6520,10 +6539,10 @@
       </p:sp>
       <p:sp>
         <p:nvSpPr>
-          <p:cNvPr id="8" name="Rounded Rectangle 7">
-            <a:extLst xmlns:a="http://schemas.openxmlformats.org/drawingml/2006/main">
-              <a:ext uri="{FF2B5EF4-FFF2-40B4-BE49-F238E27FC236}">
-                <a16:creationId xmlns:a16="http://schemas.microsoft.com/office/drawing/2014/main" id="{834515B1-FA97-48DA-BC78-59A4E2D0CADB}"/>
+          <p:cNvPr id="8" name="shape_slide_11_reproducibility_2">
+            <a:extLst xmlns:a="http://schemas.openxmlformats.org/drawingml/2006/main">
+              <a:ext uri="{FF2B5EF4-FFF2-40B4-BE49-F238E27FC236}">
+                <a16:creationId xmlns:a16="http://schemas.microsoft.com/office/drawing/2014/main" id="{D8A5FBA8-F64C-47BC-9754-76468783C606}"/>
               </a:ext>
             </a:extLst>
           </p:cNvPr>
@@ -6575,10 +6594,10 @@
       </p:sp>
       <p:sp>
         <p:nvSpPr>
-          <p:cNvPr id="9" name="TextBox 8">
-            <a:extLst xmlns:a="http://schemas.openxmlformats.org/drawingml/2006/main">
-              <a:ext uri="{FF2B5EF4-FFF2-40B4-BE49-F238E27FC236}">
-                <a16:creationId xmlns:a16="http://schemas.microsoft.com/office/drawing/2014/main" id="{1ED0C34F-3BE1-4104-9DFC-C75BC952D566}"/>
+          <p:cNvPr id="9" name="shape_slide_11_reproducibility_2_textbox">
+            <a:extLst xmlns:a="http://schemas.openxmlformats.org/drawingml/2006/main">
+              <a:ext uri="{FF2B5EF4-FFF2-40B4-BE49-F238E27FC236}">
+                <a16:creationId xmlns:a16="http://schemas.microsoft.com/office/drawing/2014/main" id="{2A0253C7-A769-4C8C-9DCC-146E6993456A}"/>
               </a:ext>
             </a:extLst>
           </p:cNvPr>
@@ -6699,7 +6718,7 @@
     </p:spTree>
     <p:extLst>
       <p:ext uri="{BB962C8B-B14F-4D97-AF65-F5344CB8AC3E}">
-        <p14:creationId xmlns:p14="http://schemas.microsoft.com/office/powerpoint/2010/main" val="1331033048"/>
+        <p14:creationId xmlns:p14="http://schemas.microsoft.com/office/powerpoint/2010/main" val="977957585"/>
       </p:ext>
     </p:extLst>
   </p:cSld>
@@ -6723,7 +6742,7 @@
           <p:cNvPr id="2" name="Rectangle 1">
             <a:extLst xmlns:a="http://schemas.openxmlformats.org/drawingml/2006/main">
               <a:ext uri="{FF2B5EF4-FFF2-40B4-BE49-F238E27FC236}">
-                <a16:creationId xmlns:a16="http://schemas.microsoft.com/office/drawing/2014/main" id="{0BB52EC8-E2E4-4C5B-AD9C-34AA3201A407}"/>
+                <a16:creationId xmlns:a16="http://schemas.microsoft.com/office/drawing/2014/main" id="{7C587C29-53C1-4C5B-ADE5-A0573DD5A009}"/>
               </a:ext>
             </a:extLst>
           </p:cNvPr>
@@ -6776,7 +6795,7 @@
           <p:cNvPr id="3" name="Rectangle 2">
             <a:extLst xmlns:a="http://schemas.openxmlformats.org/drawingml/2006/main">
               <a:ext uri="{FF2B5EF4-FFF2-40B4-BE49-F238E27FC236}">
-                <a16:creationId xmlns:a16="http://schemas.microsoft.com/office/drawing/2014/main" id="{2A541938-7315-4F3B-B40E-D4C80FCC3527}"/>
+                <a16:creationId xmlns:a16="http://schemas.microsoft.com/office/drawing/2014/main" id="{CFAD6056-D755-46F8-8077-94AC3F5C4E2E}"/>
               </a:ext>
             </a:extLst>
           </p:cNvPr>
@@ -6826,10 +6845,10 @@
       </p:sp>
       <p:sp>
         <p:nvSpPr>
-          <p:cNvPr id="4" name="TextBox 3">
-            <a:extLst xmlns:a="http://schemas.openxmlformats.org/drawingml/2006/main">
-              <a:ext uri="{FF2B5EF4-FFF2-40B4-BE49-F238E27FC236}">
-                <a16:creationId xmlns:a16="http://schemas.microsoft.com/office/drawing/2014/main" id="{5F149EF5-3AB6-4FEB-9594-C48DA41E8A71}"/>
+          <p:cNvPr id="4" name="shape_slide_12_conclusion">
+            <a:extLst xmlns:a="http://schemas.openxmlformats.org/drawingml/2006/main">
+              <a:ext uri="{FF2B5EF4-FFF2-40B4-BE49-F238E27FC236}">
+                <a16:creationId xmlns:a16="http://schemas.microsoft.com/office/drawing/2014/main" id="{45BB537E-2203-4CA3-A90C-7783CA7472CC}"/>
               </a:ext>
             </a:extLst>
           </p:cNvPr>
@@ -7002,12 +7021,31 @@
               <a:t>Xin trân trọng cảm ơn Quý Thầy Cô và Hội Đồng! Kính mời đặt câu hỏi thảo luận.</a:t>
             </a:r>
           </a:p>
+          <a:p xmlns:a="http://schemas.openxmlformats.org/drawingml/2006/main">
+            <a:pPr>
+              <a:spcBef>
+                <a:spcPts val="800"/>
+              </a:spcBef>
+              <a:buNone/>
+              <a:defRPr sz="1300" b="1">
+                <a:solidFill>
+                  <a:srgbClr val="DC2626"/>
+                </a:solidFill>
+                <a:latin typeface="Calibri"/>
+                <a:ea typeface="Calibri"/>
+                <a:cs typeface="Calibri"/>
+              </a:defRPr>
+            </a:pPr>
+            <a:r>
+              <a:t>[FIXTURE — PRE-CANONICAL RENDER TEST]</a:t>
+            </a:r>
+          </a:p>
         </p:txBody>
       </p:sp>
     </p:spTree>
     <p:extLst>
       <p:ext uri="{BB962C8B-B14F-4D97-AF65-F5344CB8AC3E}">
-        <p14:creationId xmlns:p14="http://schemas.microsoft.com/office/powerpoint/2010/main" val="635446557"/>
+        <p14:creationId xmlns:p14="http://schemas.microsoft.com/office/powerpoint/2010/main" val="2106623814"/>
       </p:ext>
     </p:extLst>
   </p:cSld>
@@ -7031,7 +7069,7 @@
           <p:cNvPr id="2" name="Rectangle 1">
             <a:extLst xmlns:a="http://schemas.openxmlformats.org/drawingml/2006/main">
               <a:ext uri="{FF2B5EF4-FFF2-40B4-BE49-F238E27FC236}">
-                <a16:creationId xmlns:a16="http://schemas.microsoft.com/office/drawing/2014/main" id="{A7AC01FD-E0BE-4CA2-9728-D1692C7CAAAC}"/>
+                <a16:creationId xmlns:a16="http://schemas.microsoft.com/office/drawing/2014/main" id="{32719F6C-61EF-44E9-B297-CA39787C2F32}"/>
               </a:ext>
             </a:extLst>
           </p:cNvPr>
@@ -7084,7 +7122,7 @@
           <p:cNvPr id="3" name="Rectangle 2">
             <a:extLst xmlns:a="http://schemas.openxmlformats.org/drawingml/2006/main">
               <a:ext uri="{FF2B5EF4-FFF2-40B4-BE49-F238E27FC236}">
-                <a16:creationId xmlns:a16="http://schemas.microsoft.com/office/drawing/2014/main" id="{6CC34BA4-B19C-4589-88DA-4E1B06762FF2}"/>
+                <a16:creationId xmlns:a16="http://schemas.microsoft.com/office/drawing/2014/main" id="{8685632C-B54C-4C6F-91BA-003FD8514443}"/>
               </a:ext>
             </a:extLst>
           </p:cNvPr>
@@ -7137,7 +7175,7 @@
           <p:cNvPr id="4" name="Rectangle 3">
             <a:extLst xmlns:a="http://schemas.openxmlformats.org/drawingml/2006/main">
               <a:ext uri="{FF2B5EF4-FFF2-40B4-BE49-F238E27FC236}">
-                <a16:creationId xmlns:a16="http://schemas.microsoft.com/office/drawing/2014/main" id="{2B2E2DBE-53DE-46CA-A2FE-AF81E63281D7}"/>
+                <a16:creationId xmlns:a16="http://schemas.microsoft.com/office/drawing/2014/main" id="{DE413F76-7B11-474C-988F-94061B165968}"/>
               </a:ext>
             </a:extLst>
           </p:cNvPr>
@@ -7190,7 +7228,7 @@
           <p:cNvPr id="5" name="TextBox 4">
             <a:extLst xmlns:a="http://schemas.openxmlformats.org/drawingml/2006/main">
               <a:ext uri="{FF2B5EF4-FFF2-40B4-BE49-F238E27FC236}">
-                <a16:creationId xmlns:a16="http://schemas.microsoft.com/office/drawing/2014/main" id="{AA7DD74E-589F-4D6E-ACBE-AD1FB904E681}"/>
+                <a16:creationId xmlns:a16="http://schemas.microsoft.com/office/drawing/2014/main" id="{59577318-F879-4E42-9844-AD06075CD112}"/>
               </a:ext>
             </a:extLst>
           </p:cNvPr>
@@ -7243,17 +7281,17 @@
               </a:defRPr>
             </a:pPr>
             <a:r>
-              <a:t>Khoảng cách giữa nhật ký cấp thấp (Telemetry) và ma trận kỹ thuật ATT&amp;CK</a:t>
-            </a:r>
-          </a:p>
-        </p:txBody>
-      </p:sp>
-      <p:sp>
-        <p:nvSpPr>
-          <p:cNvPr id="6" name="Rounded Rectangle 5">
-            <a:extLst xmlns:a="http://schemas.openxmlformats.org/drawingml/2006/main">
-              <a:ext uri="{FF2B5EF4-FFF2-40B4-BE49-F238E27FC236}">
-                <a16:creationId xmlns:a16="http://schemas.microsoft.com/office/drawing/2014/main" id="{4011CF02-8CDC-4560-814B-3DF01DA5CB27}"/>
+              <a:t>Khoảng cách giữa nhật ký cấp thấp (Telemetry) và ma trận kỹ thuật ATT&amp;CK  |  [FIXTURE — PRE-CANONICAL RENDER TEST]</a:t>
+            </a:r>
+          </a:p>
+        </p:txBody>
+      </p:sp>
+      <p:sp>
+        <p:nvSpPr>
+          <p:cNvPr id="6" name="shape_slide_2_problem">
+            <a:extLst xmlns:a="http://schemas.openxmlformats.org/drawingml/2006/main">
+              <a:ext uri="{FF2B5EF4-FFF2-40B4-BE49-F238E27FC236}">
+                <a16:creationId xmlns:a16="http://schemas.microsoft.com/office/drawing/2014/main" id="{46709AD7-BAFA-4539-94C8-2AD04F617263}"/>
               </a:ext>
             </a:extLst>
           </p:cNvPr>
@@ -7305,10 +7343,10 @@
       </p:sp>
       <p:sp>
         <p:nvSpPr>
-          <p:cNvPr id="7" name="TextBox 6">
-            <a:extLst xmlns:a="http://schemas.openxmlformats.org/drawingml/2006/main">
-              <a:ext uri="{FF2B5EF4-FFF2-40B4-BE49-F238E27FC236}">
-                <a16:creationId xmlns:a16="http://schemas.microsoft.com/office/drawing/2014/main" id="{96BA2453-E1DB-467A-B761-6586ACE30EEB}"/>
+          <p:cNvPr id="7" name="shape_slide_2_problem_textbox">
+            <a:extLst xmlns:a="http://schemas.openxmlformats.org/drawingml/2006/main">
+              <a:ext uri="{FF2B5EF4-FFF2-40B4-BE49-F238E27FC236}">
+                <a16:creationId xmlns:a16="http://schemas.microsoft.com/office/drawing/2014/main" id="{1157446E-265C-4D30-B18D-C7661C7DAE77}"/>
               </a:ext>
             </a:extLst>
           </p:cNvPr>
@@ -7409,10 +7447,10 @@
       </p:sp>
       <p:sp>
         <p:nvSpPr>
-          <p:cNvPr id="8" name="Rounded Rectangle 7">
-            <a:extLst xmlns:a="http://schemas.openxmlformats.org/drawingml/2006/main">
-              <a:ext uri="{FF2B5EF4-FFF2-40B4-BE49-F238E27FC236}">
-                <a16:creationId xmlns:a16="http://schemas.microsoft.com/office/drawing/2014/main" id="{BE34707B-5640-4432-98F4-BB8D9766398D}"/>
+          <p:cNvPr id="8" name="shape_slide_2_challenge">
+            <a:extLst xmlns:a="http://schemas.openxmlformats.org/drawingml/2006/main">
+              <a:ext uri="{FF2B5EF4-FFF2-40B4-BE49-F238E27FC236}">
+                <a16:creationId xmlns:a16="http://schemas.microsoft.com/office/drawing/2014/main" id="{04C730EF-1905-4951-9BA8-28F1D39615AA}"/>
               </a:ext>
             </a:extLst>
           </p:cNvPr>
@@ -7464,10 +7502,10 @@
       </p:sp>
       <p:sp>
         <p:nvSpPr>
-          <p:cNvPr id="9" name="TextBox 8">
-            <a:extLst xmlns:a="http://schemas.openxmlformats.org/drawingml/2006/main">
-              <a:ext uri="{FF2B5EF4-FFF2-40B4-BE49-F238E27FC236}">
-                <a16:creationId xmlns:a16="http://schemas.microsoft.com/office/drawing/2014/main" id="{4C1E83E0-1E31-4190-82AD-F6539C12E080}"/>
+          <p:cNvPr id="9" name="shape_slide_2_challenge_textbox">
+            <a:extLst xmlns:a="http://schemas.openxmlformats.org/drawingml/2006/main">
+              <a:ext uri="{FF2B5EF4-FFF2-40B4-BE49-F238E27FC236}">
+                <a16:creationId xmlns:a16="http://schemas.microsoft.com/office/drawing/2014/main" id="{A6C6F704-B5F6-4B5C-9114-E05D82DD8D0A}"/>
               </a:ext>
             </a:extLst>
           </p:cNvPr>
@@ -7568,10 +7606,10 @@
       </p:sp>
       <p:sp>
         <p:nvSpPr>
-          <p:cNvPr id="10" name="Rounded Rectangle 9">
-            <a:extLst xmlns:a="http://schemas.openxmlformats.org/drawingml/2006/main">
-              <a:ext uri="{FF2B5EF4-FFF2-40B4-BE49-F238E27FC236}">
-                <a16:creationId xmlns:a16="http://schemas.microsoft.com/office/drawing/2014/main" id="{8AAE9A99-093F-466F-8395-A38F016D77F0}"/>
+          <p:cNvPr id="10" name="shape_slide_2_motivation">
+            <a:extLst xmlns:a="http://schemas.openxmlformats.org/drawingml/2006/main">
+              <a:ext uri="{FF2B5EF4-FFF2-40B4-BE49-F238E27FC236}">
+                <a16:creationId xmlns:a16="http://schemas.microsoft.com/office/drawing/2014/main" id="{A9F66B8E-D853-4FCB-B32C-82FE916B0086}"/>
               </a:ext>
             </a:extLst>
           </p:cNvPr>
@@ -7623,10 +7661,10 @@
       </p:sp>
       <p:sp>
         <p:nvSpPr>
-          <p:cNvPr id="11" name="TextBox 10">
-            <a:extLst xmlns:a="http://schemas.openxmlformats.org/drawingml/2006/main">
-              <a:ext uri="{FF2B5EF4-FFF2-40B4-BE49-F238E27FC236}">
-                <a16:creationId xmlns:a16="http://schemas.microsoft.com/office/drawing/2014/main" id="{99B55F59-54F1-4FB9-8401-146AA8BC7239}"/>
+          <p:cNvPr id="11" name="shape_slide_2_motivation_textbox">
+            <a:extLst xmlns:a="http://schemas.openxmlformats.org/drawingml/2006/main">
+              <a:ext uri="{FF2B5EF4-FFF2-40B4-BE49-F238E27FC236}">
+                <a16:creationId xmlns:a16="http://schemas.microsoft.com/office/drawing/2014/main" id="{7402306B-B5B5-40CF-A1E4-2E6F9BC68F72}"/>
               </a:ext>
             </a:extLst>
           </p:cNvPr>
@@ -7785,7 +7823,7 @@
     </p:spTree>
     <p:extLst>
       <p:ext uri="{BB962C8B-B14F-4D97-AF65-F5344CB8AC3E}">
-        <p14:creationId xmlns:p14="http://schemas.microsoft.com/office/powerpoint/2010/main" val="1056427338"/>
+        <p14:creationId xmlns:p14="http://schemas.microsoft.com/office/powerpoint/2010/main" val="814744108"/>
       </p:ext>
     </p:extLst>
   </p:cSld>
@@ -7809,7 +7847,7 @@
           <p:cNvPr id="2" name="Rectangle 1">
             <a:extLst xmlns:a="http://schemas.openxmlformats.org/drawingml/2006/main">
               <a:ext uri="{FF2B5EF4-FFF2-40B4-BE49-F238E27FC236}">
-                <a16:creationId xmlns:a16="http://schemas.microsoft.com/office/drawing/2014/main" id="{C8841C0A-8121-43F1-93A7-332460336295}"/>
+                <a16:creationId xmlns:a16="http://schemas.microsoft.com/office/drawing/2014/main" id="{59A43052-2D55-41F0-8C2B-8BFE0AD13AFC}"/>
               </a:ext>
             </a:extLst>
           </p:cNvPr>
@@ -7862,7 +7900,7 @@
           <p:cNvPr id="3" name="Rectangle 2">
             <a:extLst xmlns:a="http://schemas.openxmlformats.org/drawingml/2006/main">
               <a:ext uri="{FF2B5EF4-FFF2-40B4-BE49-F238E27FC236}">
-                <a16:creationId xmlns:a16="http://schemas.microsoft.com/office/drawing/2014/main" id="{ACBA789D-266C-46C4-A3A0-3A6D4EC0AB6A}"/>
+                <a16:creationId xmlns:a16="http://schemas.microsoft.com/office/drawing/2014/main" id="{02F22B5D-0B8F-4F1B-B727-B193E12C6A8E}"/>
               </a:ext>
             </a:extLst>
           </p:cNvPr>
@@ -7915,7 +7953,7 @@
           <p:cNvPr id="4" name="Rectangle 3">
             <a:extLst xmlns:a="http://schemas.openxmlformats.org/drawingml/2006/main">
               <a:ext uri="{FF2B5EF4-FFF2-40B4-BE49-F238E27FC236}">
-                <a16:creationId xmlns:a16="http://schemas.microsoft.com/office/drawing/2014/main" id="{C4790685-BFFF-4697-9F29-2FC59E31D121}"/>
+                <a16:creationId xmlns:a16="http://schemas.microsoft.com/office/drawing/2014/main" id="{265DDD45-BBCB-44FB-9E54-6BBACABED3CF}"/>
               </a:ext>
             </a:extLst>
           </p:cNvPr>
@@ -7968,7 +8006,7 @@
           <p:cNvPr id="5" name="TextBox 4">
             <a:extLst xmlns:a="http://schemas.openxmlformats.org/drawingml/2006/main">
               <a:ext uri="{FF2B5EF4-FFF2-40B4-BE49-F238E27FC236}">
-                <a16:creationId xmlns:a16="http://schemas.microsoft.com/office/drawing/2014/main" id="{2D9861AB-3B2E-4344-A5DA-BF2C24F3FEDA}"/>
+                <a16:creationId xmlns:a16="http://schemas.microsoft.com/office/drawing/2014/main" id="{F00663B2-4394-4D91-9A1D-D66C25F52059}"/>
               </a:ext>
             </a:extLst>
           </p:cNvPr>
@@ -8021,17 +8059,17 @@
               </a:defRPr>
             </a:pPr>
             <a:r>
-              <a:t>So sánh đối đầu giữa Baseline (No-RAG) và Experimental (RAG)</a:t>
-            </a:r>
-          </a:p>
-        </p:txBody>
-      </p:sp>
-      <p:sp>
-        <p:nvSpPr>
-          <p:cNvPr id="6" name="Rounded Rectangle 5">
-            <a:extLst xmlns:a="http://schemas.openxmlformats.org/drawingml/2006/main">
-              <a:ext uri="{FF2B5EF4-FFF2-40B4-BE49-F238E27FC236}">
-                <a16:creationId xmlns:a16="http://schemas.microsoft.com/office/drawing/2014/main" id="{98D1B0AD-3396-419F-AC44-1A621FCB296A}"/>
+              <a:t>So sánh đối đầu giữa Baseline (No-RAG) và Experimental (RAG)  |  [FIXTURE — PRE-CANONICAL RENDER TEST]</a:t>
+            </a:r>
+          </a:p>
+        </p:txBody>
+      </p:sp>
+      <p:sp>
+        <p:nvSpPr>
+          <p:cNvPr id="6" name="shape_slide_3_baseline">
+            <a:extLst xmlns:a="http://schemas.openxmlformats.org/drawingml/2006/main">
+              <a:ext uri="{FF2B5EF4-FFF2-40B4-BE49-F238E27FC236}">
+                <a16:creationId xmlns:a16="http://schemas.microsoft.com/office/drawing/2014/main" id="{4B0FA7FA-5597-4CA1-9C04-5EB654132E48}"/>
               </a:ext>
             </a:extLst>
           </p:cNvPr>
@@ -8083,10 +8121,10 @@
       </p:sp>
       <p:sp>
         <p:nvSpPr>
-          <p:cNvPr id="7" name="TextBox 6">
-            <a:extLst xmlns:a="http://schemas.openxmlformats.org/drawingml/2006/main">
-              <a:ext uri="{FF2B5EF4-FFF2-40B4-BE49-F238E27FC236}">
-                <a16:creationId xmlns:a16="http://schemas.microsoft.com/office/drawing/2014/main" id="{306C2415-F573-4A41-8AAB-F155FF9274F9}"/>
+          <p:cNvPr id="7" name="shape_slide_3_baseline_textbox">
+            <a:extLst xmlns:a="http://schemas.openxmlformats.org/drawingml/2006/main">
+              <a:ext uri="{FF2B5EF4-FFF2-40B4-BE49-F238E27FC236}">
+                <a16:creationId xmlns:a16="http://schemas.microsoft.com/office/drawing/2014/main" id="{85300203-AE34-48A8-9B01-56ABC979D234}"/>
               </a:ext>
             </a:extLst>
           </p:cNvPr>
@@ -8206,10 +8244,10 @@
       </p:sp>
       <p:sp>
         <p:nvSpPr>
-          <p:cNvPr id="8" name="Rounded Rectangle 7">
-            <a:extLst xmlns:a="http://schemas.openxmlformats.org/drawingml/2006/main">
-              <a:ext uri="{FF2B5EF4-FFF2-40B4-BE49-F238E27FC236}">
-                <a16:creationId xmlns:a16="http://schemas.microsoft.com/office/drawing/2014/main" id="{FBD03D21-1E70-438C-ACB7-0FEEE1CEAFFF}"/>
+          <p:cNvPr id="8" name="shape_slide_3_rag">
+            <a:extLst xmlns:a="http://schemas.openxmlformats.org/drawingml/2006/main">
+              <a:ext uri="{FF2B5EF4-FFF2-40B4-BE49-F238E27FC236}">
+                <a16:creationId xmlns:a16="http://schemas.microsoft.com/office/drawing/2014/main" id="{0B830EC3-5A70-4C78-AA89-7A64D6ABD2BD}"/>
               </a:ext>
             </a:extLst>
           </p:cNvPr>
@@ -8261,10 +8299,10 @@
       </p:sp>
       <p:sp>
         <p:nvSpPr>
-          <p:cNvPr id="9" name="TextBox 8">
-            <a:extLst xmlns:a="http://schemas.openxmlformats.org/drawingml/2006/main">
-              <a:ext uri="{FF2B5EF4-FFF2-40B4-BE49-F238E27FC236}">
-                <a16:creationId xmlns:a16="http://schemas.microsoft.com/office/drawing/2014/main" id="{87849F11-5B1A-42DD-B840-7DBCCB7C78D0}"/>
+          <p:cNvPr id="9" name="shape_slide_3_rag_textbox">
+            <a:extLst xmlns:a="http://schemas.openxmlformats.org/drawingml/2006/main">
+              <a:ext uri="{FF2B5EF4-FFF2-40B4-BE49-F238E27FC236}">
+                <a16:creationId xmlns:a16="http://schemas.microsoft.com/office/drawing/2014/main" id="{8D5EFA97-17CB-4E08-8E7F-1E456E99394A}"/>
               </a:ext>
             </a:extLst>
           </p:cNvPr>
@@ -8403,10 +8441,10 @@
       </p:sp>
       <p:sp>
         <p:nvSpPr>
-          <p:cNvPr id="10" name="Rounded Rectangle 9">
-            <a:extLst xmlns:a="http://schemas.openxmlformats.org/drawingml/2006/main">
-              <a:ext uri="{FF2B5EF4-FFF2-40B4-BE49-F238E27FC236}">
-                <a16:creationId xmlns:a16="http://schemas.microsoft.com/office/drawing/2014/main" id="{543CB129-0D2D-4A90-BBFE-A8AA966953DA}"/>
+          <p:cNvPr id="10" name="shape_slide_3_invariants">
+            <a:extLst xmlns:a="http://schemas.openxmlformats.org/drawingml/2006/main">
+              <a:ext uri="{FF2B5EF4-FFF2-40B4-BE49-F238E27FC236}">
+                <a16:creationId xmlns:a16="http://schemas.microsoft.com/office/drawing/2014/main" id="{C3059857-F3A6-4466-9266-2F9B7AFCC9FE}"/>
               </a:ext>
             </a:extLst>
           </p:cNvPr>
@@ -8458,10 +8496,10 @@
       </p:sp>
       <p:sp>
         <p:nvSpPr>
-          <p:cNvPr id="11" name="TextBox 10">
-            <a:extLst xmlns:a="http://schemas.openxmlformats.org/drawingml/2006/main">
-              <a:ext uri="{FF2B5EF4-FFF2-40B4-BE49-F238E27FC236}">
-                <a16:creationId xmlns:a16="http://schemas.microsoft.com/office/drawing/2014/main" id="{726D0067-9579-48ED-ACC0-A386053B2A38}"/>
+          <p:cNvPr id="11" name="shape_slide_3_invariants_textbox">
+            <a:extLst xmlns:a="http://schemas.openxmlformats.org/drawingml/2006/main">
+              <a:ext uri="{FF2B5EF4-FFF2-40B4-BE49-F238E27FC236}">
+                <a16:creationId xmlns:a16="http://schemas.microsoft.com/office/drawing/2014/main" id="{5CB3490C-929F-49E7-A082-22AD04E36641}"/>
               </a:ext>
             </a:extLst>
           </p:cNvPr>
@@ -8563,7 +8601,7 @@
     </p:spTree>
     <p:extLst>
       <p:ext uri="{BB962C8B-B14F-4D97-AF65-F5344CB8AC3E}">
-        <p14:creationId xmlns:p14="http://schemas.microsoft.com/office/powerpoint/2010/main" val="959810390"/>
+        <p14:creationId xmlns:p14="http://schemas.microsoft.com/office/powerpoint/2010/main" val="1479848425"/>
       </p:ext>
     </p:extLst>
   </p:cSld>
@@ -8587,7 +8625,7 @@
           <p:cNvPr id="2" name="Rectangle 1">
             <a:extLst xmlns:a="http://schemas.openxmlformats.org/drawingml/2006/main">
               <a:ext uri="{FF2B5EF4-FFF2-40B4-BE49-F238E27FC236}">
-                <a16:creationId xmlns:a16="http://schemas.microsoft.com/office/drawing/2014/main" id="{1D192B5B-44D2-4E94-B034-C88E3D06D7D0}"/>
+                <a16:creationId xmlns:a16="http://schemas.microsoft.com/office/drawing/2014/main" id="{72DDE5EC-BE22-44BD-817B-E699455D11E3}"/>
               </a:ext>
             </a:extLst>
           </p:cNvPr>
@@ -8640,7 +8678,7 @@
           <p:cNvPr id="3" name="Rectangle 2">
             <a:extLst xmlns:a="http://schemas.openxmlformats.org/drawingml/2006/main">
               <a:ext uri="{FF2B5EF4-FFF2-40B4-BE49-F238E27FC236}">
-                <a16:creationId xmlns:a16="http://schemas.microsoft.com/office/drawing/2014/main" id="{46C6F833-C7C4-498F-8B00-2E6B5D433EDF}"/>
+                <a16:creationId xmlns:a16="http://schemas.microsoft.com/office/drawing/2014/main" id="{F8A2D425-344E-4F6E-936A-86EDF4CC3009}"/>
               </a:ext>
             </a:extLst>
           </p:cNvPr>
@@ -8693,7 +8731,7 @@
           <p:cNvPr id="4" name="Rectangle 3">
             <a:extLst xmlns:a="http://schemas.openxmlformats.org/drawingml/2006/main">
               <a:ext uri="{FF2B5EF4-FFF2-40B4-BE49-F238E27FC236}">
-                <a16:creationId xmlns:a16="http://schemas.microsoft.com/office/drawing/2014/main" id="{A5FC2171-3405-42CB-841D-16B599E543C5}"/>
+                <a16:creationId xmlns:a16="http://schemas.microsoft.com/office/drawing/2014/main" id="{825E863E-3915-4AAA-86FF-09989047A5B6}"/>
               </a:ext>
             </a:extLst>
           </p:cNvPr>
@@ -8746,7 +8784,7 @@
           <p:cNvPr id="5" name="TextBox 4">
             <a:extLst xmlns:a="http://schemas.openxmlformats.org/drawingml/2006/main">
               <a:ext uri="{FF2B5EF4-FFF2-40B4-BE49-F238E27FC236}">
-                <a16:creationId xmlns:a16="http://schemas.microsoft.com/office/drawing/2014/main" id="{3488690E-6EDA-4B87-B6CF-9FD154DA6C3C}"/>
+                <a16:creationId xmlns:a16="http://schemas.microsoft.com/office/drawing/2014/main" id="{4A87939F-2C1E-47AA-A846-E45F63529753}"/>
               </a:ext>
             </a:extLst>
           </p:cNvPr>
@@ -8799,17 +8837,17 @@
               </a:defRPr>
             </a:pPr>
             <a:r>
-              <a:t>Bộ dữ liệu chuẩn đóng băng Stage B (670 cặp kịch bản, 1,340 views)</a:t>
-            </a:r>
-          </a:p>
-        </p:txBody>
-      </p:sp>
-      <p:sp>
-        <p:nvSpPr>
-          <p:cNvPr id="6" name="Rounded Rectangle 5">
-            <a:extLst xmlns:a="http://schemas.openxmlformats.org/drawingml/2006/main">
-              <a:ext uri="{FF2B5EF4-FFF2-40B4-BE49-F238E27FC236}">
-                <a16:creationId xmlns:a16="http://schemas.microsoft.com/office/drawing/2014/main" id="{EC891EDF-7372-4FF4-A822-5FD38EEA920E}"/>
+              <a:t>Bộ dữ liệu chuẩn đóng băng Stage B (670 cặp kịch bản, 1,340 views)  |  [FIXTURE — PRE-CANONICAL RENDER TEST]</a:t>
+            </a:r>
+          </a:p>
+        </p:txBody>
+      </p:sp>
+      <p:sp>
+        <p:nvSpPr>
+          <p:cNvPr id="6" name="shape_slide_4_dataset_topology">
+            <a:extLst xmlns:a="http://schemas.openxmlformats.org/drawingml/2006/main">
+              <a:ext uri="{FF2B5EF4-FFF2-40B4-BE49-F238E27FC236}">
+                <a16:creationId xmlns:a16="http://schemas.microsoft.com/office/drawing/2014/main" id="{2EA0E96A-00C1-4728-A5C6-BBCEF2DD0EFF}"/>
               </a:ext>
             </a:extLst>
           </p:cNvPr>
@@ -8861,10 +8899,10 @@
       </p:sp>
       <p:sp>
         <p:nvSpPr>
-          <p:cNvPr id="7" name="TextBox 6">
-            <a:extLst xmlns:a="http://schemas.openxmlformats.org/drawingml/2006/main">
-              <a:ext uri="{FF2B5EF4-FFF2-40B4-BE49-F238E27FC236}">
-                <a16:creationId xmlns:a16="http://schemas.microsoft.com/office/drawing/2014/main" id="{7F89C87D-F1F9-42B8-A504-B5CCA3B2044A}"/>
+          <p:cNvPr id="7" name="shape_slide_4_dataset_topology_textbox">
+            <a:extLst xmlns:a="http://schemas.openxmlformats.org/drawingml/2006/main">
+              <a:ext uri="{FF2B5EF4-FFF2-40B4-BE49-F238E27FC236}">
+                <a16:creationId xmlns:a16="http://schemas.microsoft.com/office/drawing/2014/main" id="{EF944E9C-B351-4E30-8A18-50DDD1D4D083}"/>
               </a:ext>
             </a:extLst>
           </p:cNvPr>
@@ -9041,10 +9079,10 @@
       </p:sp>
       <p:sp>
         <p:nvSpPr>
-          <p:cNvPr id="8" name="Rounded Rectangle 7">
-            <a:extLst xmlns:a="http://schemas.openxmlformats.org/drawingml/2006/main">
-              <a:ext uri="{FF2B5EF4-FFF2-40B4-BE49-F238E27FC236}">
-                <a16:creationId xmlns:a16="http://schemas.microsoft.com/office/drawing/2014/main" id="{BE91E602-8DB9-4F0D-97FD-14CE432E1DD1}"/>
+          <p:cNvPr id="8" name="shape_slide_4_representations">
+            <a:extLst xmlns:a="http://schemas.openxmlformats.org/drawingml/2006/main">
+              <a:ext uri="{FF2B5EF4-FFF2-40B4-BE49-F238E27FC236}">
+                <a16:creationId xmlns:a16="http://schemas.microsoft.com/office/drawing/2014/main" id="{7C8ACE77-14BE-4776-9A26-101BE0479D4C}"/>
               </a:ext>
             </a:extLst>
           </p:cNvPr>
@@ -9096,10 +9134,10 @@
       </p:sp>
       <p:sp>
         <p:nvSpPr>
-          <p:cNvPr id="9" name="TextBox 8">
-            <a:extLst xmlns:a="http://schemas.openxmlformats.org/drawingml/2006/main">
-              <a:ext uri="{FF2B5EF4-FFF2-40B4-BE49-F238E27FC236}">
-                <a16:creationId xmlns:a16="http://schemas.microsoft.com/office/drawing/2014/main" id="{44493409-4010-4B74-891D-4FF6A13E0B50}"/>
+          <p:cNvPr id="9" name="shape_slide_4_representations_textbox">
+            <a:extLst xmlns:a="http://schemas.openxmlformats.org/drawingml/2006/main">
+              <a:ext uri="{FF2B5EF4-FFF2-40B4-BE49-F238E27FC236}">
+                <a16:creationId xmlns:a16="http://schemas.microsoft.com/office/drawing/2014/main" id="{ECA5FA40-4EFD-46F2-91C7-7D59C7235BF4}"/>
               </a:ext>
             </a:extLst>
           </p:cNvPr>
@@ -9258,7 +9296,7 @@
     </p:spTree>
     <p:extLst>
       <p:ext uri="{BB962C8B-B14F-4D97-AF65-F5344CB8AC3E}">
-        <p14:creationId xmlns:p14="http://schemas.microsoft.com/office/powerpoint/2010/main" val="1800285656"/>
+        <p14:creationId xmlns:p14="http://schemas.microsoft.com/office/powerpoint/2010/main" val="1460704126"/>
       </p:ext>
     </p:extLst>
   </p:cSld>
@@ -9282,7 +9320,7 @@
           <p:cNvPr id="2" name="Rectangle 1">
             <a:extLst xmlns:a="http://schemas.openxmlformats.org/drawingml/2006/main">
               <a:ext uri="{FF2B5EF4-FFF2-40B4-BE49-F238E27FC236}">
-                <a16:creationId xmlns:a16="http://schemas.microsoft.com/office/drawing/2014/main" id="{73C25C0E-13F2-41AC-83C7-2A720201EA8B}"/>
+                <a16:creationId xmlns:a16="http://schemas.microsoft.com/office/drawing/2014/main" id="{6A0B5C3C-1E3B-4613-886E-6AF08E9BA367}"/>
               </a:ext>
             </a:extLst>
           </p:cNvPr>
@@ -9335,7 +9373,7 @@
           <p:cNvPr id="3" name="Rectangle 2">
             <a:extLst xmlns:a="http://schemas.openxmlformats.org/drawingml/2006/main">
               <a:ext uri="{FF2B5EF4-FFF2-40B4-BE49-F238E27FC236}">
-                <a16:creationId xmlns:a16="http://schemas.microsoft.com/office/drawing/2014/main" id="{608ACB25-B67A-4075-97D7-F378711056A7}"/>
+                <a16:creationId xmlns:a16="http://schemas.microsoft.com/office/drawing/2014/main" id="{9F751F65-0C76-49DA-B629-A7DCF0B530B6}"/>
               </a:ext>
             </a:extLst>
           </p:cNvPr>
@@ -9388,7 +9426,7 @@
           <p:cNvPr id="4" name="Rectangle 3">
             <a:extLst xmlns:a="http://schemas.openxmlformats.org/drawingml/2006/main">
               <a:ext uri="{FF2B5EF4-FFF2-40B4-BE49-F238E27FC236}">
-                <a16:creationId xmlns:a16="http://schemas.microsoft.com/office/drawing/2014/main" id="{E1836714-478B-4758-8DB7-73B834C1AF1E}"/>
+                <a16:creationId xmlns:a16="http://schemas.microsoft.com/office/drawing/2014/main" id="{321E74DE-652A-4180-97D4-86C989E4B825}"/>
               </a:ext>
             </a:extLst>
           </p:cNvPr>
@@ -9441,7 +9479,7 @@
           <p:cNvPr id="5" name="TextBox 4">
             <a:extLst xmlns:a="http://schemas.openxmlformats.org/drawingml/2006/main">
               <a:ext uri="{FF2B5EF4-FFF2-40B4-BE49-F238E27FC236}">
-                <a16:creationId xmlns:a16="http://schemas.microsoft.com/office/drawing/2014/main" id="{9EC1CE0E-7802-4D66-B7F3-5ECF84544B74}"/>
+                <a16:creationId xmlns:a16="http://schemas.microsoft.com/office/drawing/2014/main" id="{4E4A712A-E95C-42EF-9E38-D4D827432E1D}"/>
               </a:ext>
             </a:extLst>
           </p:cNvPr>
@@ -9494,17 +9532,17 @@
               </a:defRPr>
             </a:pPr>
             <a:r>
-              <a:t>Tách bạch rõ ràng 7 quyết định giao thức khoa học D1-D7 đóng băng</a:t>
-            </a:r>
-          </a:p>
-        </p:txBody>
-      </p:sp>
-      <p:sp>
-        <p:nvSpPr>
-          <p:cNvPr id="6" name="Rounded Rectangle 5">
-            <a:extLst xmlns:a="http://schemas.openxmlformats.org/drawingml/2006/main">
-              <a:ext uri="{FF2B5EF4-FFF2-40B4-BE49-F238E27FC236}">
-                <a16:creationId xmlns:a16="http://schemas.microsoft.com/office/drawing/2014/main" id="{20F0CE78-A157-40B1-9997-D04A368A76B0}"/>
+              <a:t>Tách bạch rõ ràng 7 quyết định giao thức khoa học D1-D7 đóng băng  |  [FIXTURE — PRE-CANONICAL RENDER TEST]</a:t>
+            </a:r>
+          </a:p>
+        </p:txBody>
+      </p:sp>
+      <p:sp>
+        <p:nvSpPr>
+          <p:cNvPr id="6" name="shape_slide_5_decisions">
+            <a:extLst xmlns:a="http://schemas.openxmlformats.org/drawingml/2006/main">
+              <a:ext uri="{FF2B5EF4-FFF2-40B4-BE49-F238E27FC236}">
+                <a16:creationId xmlns:a16="http://schemas.microsoft.com/office/drawing/2014/main" id="{47F3615E-8703-4181-80E9-B52338A203C4}"/>
               </a:ext>
             </a:extLst>
           </p:cNvPr>
@@ -9556,10 +9594,10 @@
       </p:sp>
       <p:sp>
         <p:nvSpPr>
-          <p:cNvPr id="7" name="TextBox 6">
-            <a:extLst xmlns:a="http://schemas.openxmlformats.org/drawingml/2006/main">
-              <a:ext uri="{FF2B5EF4-FFF2-40B4-BE49-F238E27FC236}">
-                <a16:creationId xmlns:a16="http://schemas.microsoft.com/office/drawing/2014/main" id="{80ED5C56-902F-4DE7-87A8-51AD1278BD5D}"/>
+          <p:cNvPr id="7" name="shape_slide_5_decisions_textbox">
+            <a:extLst xmlns:a="http://schemas.openxmlformats.org/drawingml/2006/main">
+              <a:ext uri="{FF2B5EF4-FFF2-40B4-BE49-F238E27FC236}">
+                <a16:creationId xmlns:a16="http://schemas.microsoft.com/office/drawing/2014/main" id="{44511029-5173-455B-B22D-B792092C3574}"/>
               </a:ext>
             </a:extLst>
           </p:cNvPr>
@@ -9774,10 +9812,10 @@
       </p:sp>
       <p:sp>
         <p:nvSpPr>
-          <p:cNvPr id="8" name="Rounded Rectangle 7">
-            <a:extLst xmlns:a="http://schemas.openxmlformats.org/drawingml/2006/main">
-              <a:ext uri="{FF2B5EF4-FFF2-40B4-BE49-F238E27FC236}">
-                <a16:creationId xmlns:a16="http://schemas.microsoft.com/office/drawing/2014/main" id="{0D166698-49CD-4FD7-8428-6B25784EDE55}"/>
+          <p:cNvPr id="8" name="shape_slide_5_criteria">
+            <a:extLst xmlns:a="http://schemas.openxmlformats.org/drawingml/2006/main">
+              <a:ext uri="{FF2B5EF4-FFF2-40B4-BE49-F238E27FC236}">
+                <a16:creationId xmlns:a16="http://schemas.microsoft.com/office/drawing/2014/main" id="{BB046C5A-961A-46C0-A404-072E5BDA6492}"/>
               </a:ext>
             </a:extLst>
           </p:cNvPr>
@@ -9829,10 +9867,10 @@
       </p:sp>
       <p:sp>
         <p:nvSpPr>
-          <p:cNvPr id="9" name="TextBox 8">
-            <a:extLst xmlns:a="http://schemas.openxmlformats.org/drawingml/2006/main">
-              <a:ext uri="{FF2B5EF4-FFF2-40B4-BE49-F238E27FC236}">
-                <a16:creationId xmlns:a16="http://schemas.microsoft.com/office/drawing/2014/main" id="{15362817-4121-4F9E-BBC7-7D29120F8A7F}"/>
+          <p:cNvPr id="9" name="shape_slide_5_criteria_textbox">
+            <a:extLst xmlns:a="http://schemas.openxmlformats.org/drawingml/2006/main">
+              <a:ext uri="{FF2B5EF4-FFF2-40B4-BE49-F238E27FC236}">
+                <a16:creationId xmlns:a16="http://schemas.microsoft.com/office/drawing/2014/main" id="{B55D010B-DF60-4732-8433-76309AEF3EC9}"/>
               </a:ext>
             </a:extLst>
           </p:cNvPr>
@@ -10067,7 +10105,7 @@
     </p:spTree>
     <p:extLst>
       <p:ext uri="{BB962C8B-B14F-4D97-AF65-F5344CB8AC3E}">
-        <p14:creationId xmlns:p14="http://schemas.microsoft.com/office/powerpoint/2010/main" val="790596602"/>
+        <p14:creationId xmlns:p14="http://schemas.microsoft.com/office/powerpoint/2010/main" val="1471315632"/>
       </p:ext>
     </p:extLst>
   </p:cSld>
@@ -10091,7 +10129,7 @@
           <p:cNvPr id="2" name="Rectangle 1">
             <a:extLst xmlns:a="http://schemas.openxmlformats.org/drawingml/2006/main">
               <a:ext uri="{FF2B5EF4-FFF2-40B4-BE49-F238E27FC236}">
-                <a16:creationId xmlns:a16="http://schemas.microsoft.com/office/drawing/2014/main" id="{4CA6AE8B-D4C7-4E5F-AC64-0A3C067FE971}"/>
+                <a16:creationId xmlns:a16="http://schemas.microsoft.com/office/drawing/2014/main" id="{36084917-9054-40F5-BFA9-AA322E65BD16}"/>
               </a:ext>
             </a:extLst>
           </p:cNvPr>
@@ -10144,7 +10182,7 @@
           <p:cNvPr id="3" name="Rectangle 2">
             <a:extLst xmlns:a="http://schemas.openxmlformats.org/drawingml/2006/main">
               <a:ext uri="{FF2B5EF4-FFF2-40B4-BE49-F238E27FC236}">
-                <a16:creationId xmlns:a16="http://schemas.microsoft.com/office/drawing/2014/main" id="{FFED41CC-2C50-4C61-A973-0B117D47086D}"/>
+                <a16:creationId xmlns:a16="http://schemas.microsoft.com/office/drawing/2014/main" id="{B9125850-74EF-405E-AC29-7C769710AF00}"/>
               </a:ext>
             </a:extLst>
           </p:cNvPr>
@@ -10197,7 +10235,7 @@
           <p:cNvPr id="4" name="Rectangle 3">
             <a:extLst xmlns:a="http://schemas.openxmlformats.org/drawingml/2006/main">
               <a:ext uri="{FF2B5EF4-FFF2-40B4-BE49-F238E27FC236}">
-                <a16:creationId xmlns:a16="http://schemas.microsoft.com/office/drawing/2014/main" id="{3DA338A1-9970-4A2C-9CF5-F341174EF037}"/>
+                <a16:creationId xmlns:a16="http://schemas.microsoft.com/office/drawing/2014/main" id="{A9DD4F78-83DC-4498-87D6-F9E532B778FC}"/>
               </a:ext>
             </a:extLst>
           </p:cNvPr>
@@ -10250,7 +10288,7 @@
           <p:cNvPr id="5" name="TextBox 4">
             <a:extLst xmlns:a="http://schemas.openxmlformats.org/drawingml/2006/main">
               <a:ext uri="{FF2B5EF4-FFF2-40B4-BE49-F238E27FC236}">
-                <a16:creationId xmlns:a16="http://schemas.microsoft.com/office/drawing/2014/main" id="{9A663EF1-2EC3-4BF7-98FD-A559B2AA3362}"/>
+                <a16:creationId xmlns:a16="http://schemas.microsoft.com/office/drawing/2014/main" id="{2092A556-F154-4F80-AA99-01265EC6E05C}"/>
               </a:ext>
             </a:extLst>
           </p:cNvPr>
@@ -10303,17 +10341,17 @@
               </a:defRPr>
             </a:pPr>
             <a:r>
-              <a:t>Đánh giá độc lập bộ tìm kiếm trên 756 positive views của benchmark</a:t>
-            </a:r>
-          </a:p>
-        </p:txBody>
-      </p:sp>
-      <p:sp>
-        <p:nvSpPr>
-          <p:cNvPr id="6" name="Rounded Rectangle 5">
-            <a:extLst xmlns:a="http://schemas.openxmlformats.org/drawingml/2006/main">
-              <a:ext uri="{FF2B5EF4-FFF2-40B4-BE49-F238E27FC236}">
-                <a16:creationId xmlns:a16="http://schemas.microsoft.com/office/drawing/2014/main" id="{7CB293FC-B124-43E0-B637-AE7B23DEAF3C}"/>
+              <a:t>Đánh giá độc lập bộ tìm kiếm trên 756 positive views của benchmark  |  [FIXTURE — PRE-CANONICAL RENDER TEST]</a:t>
+            </a:r>
+          </a:p>
+        </p:txBody>
+      </p:sp>
+      <p:sp>
+        <p:nvSpPr>
+          <p:cNvPr id="6" name="shape_slide_6_retrieval_diagnostics">
+            <a:extLst xmlns:a="http://schemas.openxmlformats.org/drawingml/2006/main">
+              <a:ext uri="{FF2B5EF4-FFF2-40B4-BE49-F238E27FC236}">
+                <a16:creationId xmlns:a16="http://schemas.microsoft.com/office/drawing/2014/main" id="{8529D7B6-A522-4841-A306-4E9847BCFD39}"/>
               </a:ext>
             </a:extLst>
           </p:cNvPr>
@@ -10365,10 +10403,10 @@
       </p:sp>
       <p:sp>
         <p:nvSpPr>
-          <p:cNvPr id="7" name="TextBox 6">
-            <a:extLst xmlns:a="http://schemas.openxmlformats.org/drawingml/2006/main">
-              <a:ext uri="{FF2B5EF4-FFF2-40B4-BE49-F238E27FC236}">
-                <a16:creationId xmlns:a16="http://schemas.microsoft.com/office/drawing/2014/main" id="{C1BD8FF2-B41F-49E9-B636-F7DEBA374647}"/>
+          <p:cNvPr id="7" name="shape_slide_6_retrieval_diagnostics_textbox">
+            <a:extLst xmlns:a="http://schemas.openxmlformats.org/drawingml/2006/main">
+              <a:ext uri="{FF2B5EF4-FFF2-40B4-BE49-F238E27FC236}">
+                <a16:creationId xmlns:a16="http://schemas.microsoft.com/office/drawing/2014/main" id="{38F5A89B-CB05-4D81-9FC1-8E919BD6D2F5}"/>
               </a:ext>
             </a:extLst>
           </p:cNvPr>
@@ -10751,7 +10789,7 @@
           <p:nvPr/>
         </p:nvPicPr>
         <p:blipFill>
-          <a:blip xmlns:r="http://schemas.openxmlformats.org/officeDocument/2006/relationships" xmlns:a="http://schemas.openxmlformats.org/drawingml/2006/main" r:embed="Rf8ca018465404876"/>
+          <a:blip xmlns:r="http://schemas.openxmlformats.org/officeDocument/2006/relationships" xmlns:a="http://schemas.openxmlformats.org/drawingml/2006/main" r:embed="Rec3c92ae24954635"/>
           <a:stretch xmlns:a="http://schemas.openxmlformats.org/drawingml/2006/main">
             <a:fillRect l="0" t="0" r="0" b="0"/>
           </a:stretch>
@@ -10768,10 +10806,10 @@
       </p:pic>
       <p:sp>
         <p:nvSpPr>
-          <p:cNvPr id="9" name="Rounded Rectangle 8">
-            <a:extLst xmlns:a="http://schemas.openxmlformats.org/drawingml/2006/main">
-              <a:ext uri="{FF2B5EF4-FFF2-40B4-BE49-F238E27FC236}">
-                <a16:creationId xmlns:a16="http://schemas.microsoft.com/office/drawing/2014/main" id="{B8742DAB-DFAB-4305-8723-704851E29B11}"/>
+          <p:cNvPr id="9" name="shape_slide_6_context_scaling">
+            <a:extLst xmlns:a="http://schemas.openxmlformats.org/drawingml/2006/main">
+              <a:ext uri="{FF2B5EF4-FFF2-40B4-BE49-F238E27FC236}">
+                <a16:creationId xmlns:a16="http://schemas.microsoft.com/office/drawing/2014/main" id="{179279FD-D18E-49E8-9652-872E3C610369}"/>
               </a:ext>
             </a:extLst>
           </p:cNvPr>
@@ -10823,10 +10861,10 @@
       </p:sp>
       <p:sp>
         <p:nvSpPr>
-          <p:cNvPr id="10" name="TextBox 9">
-            <a:extLst xmlns:a="http://schemas.openxmlformats.org/drawingml/2006/main">
-              <a:ext uri="{FF2B5EF4-FFF2-40B4-BE49-F238E27FC236}">
-                <a16:creationId xmlns:a16="http://schemas.microsoft.com/office/drawing/2014/main" id="{B8BB598D-CE33-4722-BC7B-E736F03F7EDE}"/>
+          <p:cNvPr id="10" name="shape_slide_6_context_scaling_textbox">
+            <a:extLst xmlns:a="http://schemas.openxmlformats.org/drawingml/2006/main">
+              <a:ext uri="{FF2B5EF4-FFF2-40B4-BE49-F238E27FC236}">
+                <a16:creationId xmlns:a16="http://schemas.microsoft.com/office/drawing/2014/main" id="{30B0A22E-386C-43B7-AE3C-5753D5CDEFD2}"/>
               </a:ext>
             </a:extLst>
           </p:cNvPr>
@@ -10912,7 +10950,7 @@
     </p:spTree>
     <p:extLst>
       <p:ext uri="{BB962C8B-B14F-4D97-AF65-F5344CB8AC3E}">
-        <p14:creationId xmlns:p14="http://schemas.microsoft.com/office/powerpoint/2010/main" val="1574508850"/>
+        <p14:creationId xmlns:p14="http://schemas.microsoft.com/office/powerpoint/2010/main" val="1526247347"/>
       </p:ext>
     </p:extLst>
   </p:cSld>
@@ -10936,7 +10974,7 @@
           <p:cNvPr id="2" name="Rectangle 1">
             <a:extLst xmlns:a="http://schemas.openxmlformats.org/drawingml/2006/main">
               <a:ext uri="{FF2B5EF4-FFF2-40B4-BE49-F238E27FC236}">
-                <a16:creationId xmlns:a16="http://schemas.microsoft.com/office/drawing/2014/main" id="{EF749E31-DF2B-4CE2-B277-C8D5EDCE3DAD}"/>
+                <a16:creationId xmlns:a16="http://schemas.microsoft.com/office/drawing/2014/main" id="{2EE9BA2D-9D78-4D90-A7B0-10694BAFEF14}"/>
               </a:ext>
             </a:extLst>
           </p:cNvPr>
@@ -10989,7 +11027,7 @@
           <p:cNvPr id="3" name="Rectangle 2">
             <a:extLst xmlns:a="http://schemas.openxmlformats.org/drawingml/2006/main">
               <a:ext uri="{FF2B5EF4-FFF2-40B4-BE49-F238E27FC236}">
-                <a16:creationId xmlns:a16="http://schemas.microsoft.com/office/drawing/2014/main" id="{BB8176D1-A685-4159-BAA6-EA67002F8B0F}"/>
+                <a16:creationId xmlns:a16="http://schemas.microsoft.com/office/drawing/2014/main" id="{C8F63286-50F2-4D92-BFBF-25EE5C2A1DDA}"/>
               </a:ext>
             </a:extLst>
           </p:cNvPr>
@@ -11042,7 +11080,7 @@
           <p:cNvPr id="4" name="Rectangle 3">
             <a:extLst xmlns:a="http://schemas.openxmlformats.org/drawingml/2006/main">
               <a:ext uri="{FF2B5EF4-FFF2-40B4-BE49-F238E27FC236}">
-                <a16:creationId xmlns:a16="http://schemas.microsoft.com/office/drawing/2014/main" id="{72134F25-7D33-430E-871E-C2BAFA5A641C}"/>
+                <a16:creationId xmlns:a16="http://schemas.microsoft.com/office/drawing/2014/main" id="{890A42CF-B9C0-4832-8AB6-E45F7DD5A815}"/>
               </a:ext>
             </a:extLst>
           </p:cNvPr>
@@ -11095,7 +11133,7 @@
           <p:cNvPr id="5" name="TextBox 4">
             <a:extLst xmlns:a="http://schemas.openxmlformats.org/drawingml/2006/main">
               <a:ext uri="{FF2B5EF4-FFF2-40B4-BE49-F238E27FC236}">
-                <a16:creationId xmlns:a16="http://schemas.microsoft.com/office/drawing/2014/main" id="{534A1B69-23AE-4926-BE62-625E12541ED2}"/>
+                <a16:creationId xmlns:a16="http://schemas.microsoft.com/office/drawing/2014/main" id="{03C24358-621E-4609-ACAA-35578C4C79D2}"/>
               </a:ext>
             </a:extLst>
           </p:cNvPr>
@@ -11148,17 +11186,17 @@
               </a:defRPr>
             </a:pPr>
             <a:r>
-              <a:t>So sánh thực nghiệm Single vs Contextual trên 670 cặp kịch bản đối ứng</a:t>
-            </a:r>
-          </a:p>
-        </p:txBody>
-      </p:sp>
-      <p:sp>
-        <p:nvSpPr>
-          <p:cNvPr id="6" name="Rounded Rectangle 5">
-            <a:extLst xmlns:a="http://schemas.openxmlformats.org/drawingml/2006/main">
-              <a:ext uri="{FF2B5EF4-FFF2-40B4-BE49-F238E27FC236}">
-                <a16:creationId xmlns:a16="http://schemas.microsoft.com/office/drawing/2014/main" id="{70FE6936-B067-4C94-B924-95E7E5A7771F}"/>
+              <a:t>So sánh thực nghiệm Single vs Contextual trên 670 cặp kịch bản đối ứng  |  [FIXTURE — PRE-CANONICAL RENDER TEST]</a:t>
+            </a:r>
+          </a:p>
+        </p:txBody>
+      </p:sp>
+      <p:sp>
+        <p:nvSpPr>
+          <p:cNvPr id="6" name="shape_slide_7_paired_analysis">
+            <a:extLst xmlns:a="http://schemas.openxmlformats.org/drawingml/2006/main">
+              <a:ext uri="{FF2B5EF4-FFF2-40B4-BE49-F238E27FC236}">
+                <a16:creationId xmlns:a16="http://schemas.microsoft.com/office/drawing/2014/main" id="{8300DADA-0E2D-4E2E-91B9-0A059DB0FEB8}"/>
               </a:ext>
             </a:extLst>
           </p:cNvPr>
@@ -11210,10 +11248,10 @@
       </p:sp>
       <p:sp>
         <p:nvSpPr>
-          <p:cNvPr id="7" name="TextBox 6">
-            <a:extLst xmlns:a="http://schemas.openxmlformats.org/drawingml/2006/main">
-              <a:ext uri="{FF2B5EF4-FFF2-40B4-BE49-F238E27FC236}">
-                <a16:creationId xmlns:a16="http://schemas.microsoft.com/office/drawing/2014/main" id="{A0C64D86-DC0F-44A1-A36A-A52831514462}"/>
+          <p:cNvPr id="7" name="shape_slide_7_paired_analysis_textbox">
+            <a:extLst xmlns:a="http://schemas.openxmlformats.org/drawingml/2006/main">
+              <a:ext uri="{FF2B5EF4-FFF2-40B4-BE49-F238E27FC236}">
+                <a16:creationId xmlns:a16="http://schemas.microsoft.com/office/drawing/2014/main" id="{A7C79A3B-836B-4305-BAAB-D9CB200D52EA}"/>
               </a:ext>
             </a:extLst>
           </p:cNvPr>
@@ -11447,10 +11485,10 @@
       </p:sp>
       <p:sp>
         <p:nvSpPr>
-          <p:cNvPr id="8" name="Rounded Rectangle 7">
-            <a:extLst xmlns:a="http://schemas.openxmlformats.org/drawingml/2006/main">
-              <a:ext uri="{FF2B5EF4-FFF2-40B4-BE49-F238E27FC236}">
-                <a16:creationId xmlns:a16="http://schemas.microsoft.com/office/drawing/2014/main" id="{4D696FF7-697F-4BBE-8AC7-21428916BE2E}"/>
+          <p:cNvPr id="8" name="shape_slide_7_benign_drift">
+            <a:extLst xmlns:a="http://schemas.openxmlformats.org/drawingml/2006/main">
+              <a:ext uri="{FF2B5EF4-FFF2-40B4-BE49-F238E27FC236}">
+                <a16:creationId xmlns:a16="http://schemas.microsoft.com/office/drawing/2014/main" id="{D372F0AC-3236-4F87-96C5-0C5801FC0119}"/>
               </a:ext>
             </a:extLst>
           </p:cNvPr>
@@ -11502,10 +11540,10 @@
       </p:sp>
       <p:sp>
         <p:nvSpPr>
-          <p:cNvPr id="9" name="TextBox 8">
-            <a:extLst xmlns:a="http://schemas.openxmlformats.org/drawingml/2006/main">
-              <a:ext uri="{FF2B5EF4-FFF2-40B4-BE49-F238E27FC236}">
-                <a16:creationId xmlns:a16="http://schemas.microsoft.com/office/drawing/2014/main" id="{A406CCC3-16F4-4801-B427-A743D4CD20E5}"/>
+          <p:cNvPr id="9" name="shape_slide_7_benign_drift_textbox">
+            <a:extLst xmlns:a="http://schemas.openxmlformats.org/drawingml/2006/main">
+              <a:ext uri="{FF2B5EF4-FFF2-40B4-BE49-F238E27FC236}">
+                <a16:creationId xmlns:a16="http://schemas.microsoft.com/office/drawing/2014/main" id="{1E754664-CE8A-4760-BD84-DEF011486422}"/>
               </a:ext>
             </a:extLst>
           </p:cNvPr>
@@ -11517,7 +11555,7 @@
         <p:spPr>
           <a:xfrm xmlns:a="http://schemas.openxmlformats.org/drawingml/2006/main">
             <a:off x="6430975" y="1344168"/>
-            <a:ext cx="4846320" cy="5410200"/>
+            <a:ext cx="4846320" cy="5166360"/>
           </a:xfrm>
           <a:prstGeom xmlns:a="http://schemas.openxmlformats.org/drawingml/2006/main" prst="rect">
             <a:avLst/>
@@ -11542,10 +11580,7 @@
               </a:defRPr>
             </a:pPr>
             <a:r>
-              <a:t>Hiện Tượng Quan Sát &amp; Schema So Sánh </a:t>
-            </a:r>
-            <a:r>
-              <a:t>[DIAGNOSTIC TEST FIXTURE ONLY - NOT CANONICAL NUMERICAL RESULTS]</a:t>
+              <a:t>Hiện Tượng Quan Sát &amp; Schema So Sánh [FIXTURE — PRE-CANONICAL RENDER TEST]</a:t>
             </a:r>
           </a:p>
           <a:p xmlns:a="http://schemas.openxmlformats.org/drawingml/2006/main">
@@ -11813,7 +11848,7 @@
               </a:defRPr>
             </a:pPr>
             <a:r>
-              <a:t>  • Trạng thái: Toàn bộ ma trận TEST đang thực thi; kết luận chính thức sẽ công bố khi hoàn tất.</a:t>
+              <a:t>  • Trạng thái: Thử nghiệm sơ bộ trên fixture đối chứng; kết luận chính thức cần ma trận TEST đầy đủ.</a:t>
             </a:r>
           </a:p>
           <a:p xmlns:a="http://schemas.openxmlformats.org/drawingml/2006/main">
@@ -11840,7 +11875,7 @@
     </p:spTree>
     <p:extLst>
       <p:ext uri="{BB962C8B-B14F-4D97-AF65-F5344CB8AC3E}">
-        <p14:creationId xmlns:p14="http://schemas.microsoft.com/office/powerpoint/2010/main" val="814644868"/>
+        <p14:creationId xmlns:p14="http://schemas.microsoft.com/office/powerpoint/2010/main" val="709023309"/>
       </p:ext>
     </p:extLst>
   </p:cSld>
@@ -11864,7 +11899,7 @@
           <p:cNvPr id="2" name="Rectangle 1">
             <a:extLst xmlns:a="http://schemas.openxmlformats.org/drawingml/2006/main">
               <a:ext uri="{FF2B5EF4-FFF2-40B4-BE49-F238E27FC236}">
-                <a16:creationId xmlns:a16="http://schemas.microsoft.com/office/drawing/2014/main" id="{36197B92-FC50-4BE9-84BD-3756AC9ED8ED}"/>
+                <a16:creationId xmlns:a16="http://schemas.microsoft.com/office/drawing/2014/main" id="{D3762DC1-322C-4C9F-89DA-CAECC97E092E}"/>
               </a:ext>
             </a:extLst>
           </p:cNvPr>
@@ -11917,7 +11952,7 @@
           <p:cNvPr id="3" name="Rectangle 2">
             <a:extLst xmlns:a="http://schemas.openxmlformats.org/drawingml/2006/main">
               <a:ext uri="{FF2B5EF4-FFF2-40B4-BE49-F238E27FC236}">
-                <a16:creationId xmlns:a16="http://schemas.microsoft.com/office/drawing/2014/main" id="{A265C8AC-CDA5-45D8-872F-B01EF59D4FA6}"/>
+                <a16:creationId xmlns:a16="http://schemas.microsoft.com/office/drawing/2014/main" id="{132B864F-D85D-4A97-AEED-65B4B423CF41}"/>
               </a:ext>
             </a:extLst>
           </p:cNvPr>
@@ -11970,7 +12005,7 @@
           <p:cNvPr id="4" name="Rectangle 3">
             <a:extLst xmlns:a="http://schemas.openxmlformats.org/drawingml/2006/main">
               <a:ext uri="{FF2B5EF4-FFF2-40B4-BE49-F238E27FC236}">
-                <a16:creationId xmlns:a16="http://schemas.microsoft.com/office/drawing/2014/main" id="{67224D6E-37FC-4917-92F2-2CEC50164682}"/>
+                <a16:creationId xmlns:a16="http://schemas.microsoft.com/office/drawing/2014/main" id="{57B530B9-B1EF-4556-81A2-7910458F8502}"/>
               </a:ext>
             </a:extLst>
           </p:cNvPr>
@@ -12023,7 +12058,7 @@
           <p:cNvPr id="5" name="TextBox 4">
             <a:extLst xmlns:a="http://schemas.openxmlformats.org/drawingml/2006/main">
               <a:ext uri="{FF2B5EF4-FFF2-40B4-BE49-F238E27FC236}">
-                <a16:creationId xmlns:a16="http://schemas.microsoft.com/office/drawing/2014/main" id="{E5BEDA46-FB4D-44B2-8344-1F3FA1C56DFA}"/>
+                <a16:creationId xmlns:a16="http://schemas.microsoft.com/office/drawing/2014/main" id="{0C73B1D6-66C7-481E-BC2C-DDC79DFD3926}"/>
               </a:ext>
             </a:extLst>
           </p:cNvPr>
@@ -12076,17 +12111,17 @@
               </a:defRPr>
             </a:pPr>
             <a:r>
-              <a:t>Bóc tách độc lập giữa năng lực truy xuất và phân loại theo định đề D2i (Independent Axes)</a:t>
-            </a:r>
-          </a:p>
-        </p:txBody>
-      </p:sp>
-      <p:sp>
-        <p:nvSpPr>
-          <p:cNvPr id="6" name="Rounded Rectangle 5">
-            <a:extLst xmlns:a="http://schemas.openxmlformats.org/drawingml/2006/main">
-              <a:ext uri="{FF2B5EF4-FFF2-40B4-BE49-F238E27FC236}">
-                <a16:creationId xmlns:a16="http://schemas.microsoft.com/office/drawing/2014/main" id="{7DF6A05E-2962-4C5D-9DA5-C67EBA4C1EF2}"/>
+              <a:t>Bóc tách độc lập giữa năng lực truy xuất và phân loại theo định đề D2i (Independent Axes)  |  [FIXTURE — PRE-CANONICAL RENDER TEST]</a:t>
+            </a:r>
+          </a:p>
+        </p:txBody>
+      </p:sp>
+      <p:sp>
+        <p:nvSpPr>
+          <p:cNvPr id="6" name="shape_slide_8_d2i_axes">
+            <a:extLst xmlns:a="http://schemas.openxmlformats.org/drawingml/2006/main">
+              <a:ext uri="{FF2B5EF4-FFF2-40B4-BE49-F238E27FC236}">
+                <a16:creationId xmlns:a16="http://schemas.microsoft.com/office/drawing/2014/main" id="{7A246488-D4C4-48A6-83CB-B4F143B1E0DB}"/>
               </a:ext>
             </a:extLst>
           </p:cNvPr>
@@ -12138,10 +12173,10 @@
       </p:sp>
       <p:sp>
         <p:nvSpPr>
-          <p:cNvPr id="7" name="TextBox 6">
-            <a:extLst xmlns:a="http://schemas.openxmlformats.org/drawingml/2006/main">
-              <a:ext uri="{FF2B5EF4-FFF2-40B4-BE49-F238E27FC236}">
-                <a16:creationId xmlns:a16="http://schemas.microsoft.com/office/drawing/2014/main" id="{117D281B-769C-4B40-9E0E-7ADAB76DFEF0}"/>
+          <p:cNvPr id="7" name="shape_slide_8_d2i_axes_textbox">
+            <a:extLst xmlns:a="http://schemas.openxmlformats.org/drawingml/2006/main">
+              <a:ext uri="{FF2B5EF4-FFF2-40B4-BE49-F238E27FC236}">
+                <a16:creationId xmlns:a16="http://schemas.microsoft.com/office/drawing/2014/main" id="{9961CA3F-00D3-43A2-A7EB-F199011CC384}"/>
               </a:ext>
             </a:extLst>
           </p:cNvPr>
@@ -12261,10 +12296,10 @@
       </p:sp>
       <p:sp>
         <p:nvSpPr>
-          <p:cNvPr id="8" name="Rounded Rectangle 7">
-            <a:extLst xmlns:a="http://schemas.openxmlformats.org/drawingml/2006/main">
-              <a:ext uri="{FF2B5EF4-FFF2-40B4-BE49-F238E27FC236}">
-                <a16:creationId xmlns:a16="http://schemas.microsoft.com/office/drawing/2014/main" id="{AD8C3C66-D82C-4A2D-A406-3CDB90BA53B0}"/>
+          <p:cNvPr id="8" name="shape_slide_8_conditional_accuracy">
+            <a:extLst xmlns:a="http://schemas.openxmlformats.org/drawingml/2006/main">
+              <a:ext uri="{FF2B5EF4-FFF2-40B4-BE49-F238E27FC236}">
+                <a16:creationId xmlns:a16="http://schemas.microsoft.com/office/drawing/2014/main" id="{41235035-8527-42D1-8189-4BBEFE2AC04B}"/>
               </a:ext>
             </a:extLst>
           </p:cNvPr>
@@ -12316,10 +12351,10 @@
       </p:sp>
       <p:sp>
         <p:nvSpPr>
-          <p:cNvPr id="9" name="TextBox 8">
-            <a:extLst xmlns:a="http://schemas.openxmlformats.org/drawingml/2006/main">
-              <a:ext uri="{FF2B5EF4-FFF2-40B4-BE49-F238E27FC236}">
-                <a16:creationId xmlns:a16="http://schemas.microsoft.com/office/drawing/2014/main" id="{B5266489-C9B8-46CC-8143-993526F6790E}"/>
+          <p:cNvPr id="9" name="shape_slide_8_conditional_accuracy_textbox">
+            <a:extLst xmlns:a="http://schemas.openxmlformats.org/drawingml/2006/main">
+              <a:ext uri="{FF2B5EF4-FFF2-40B4-BE49-F238E27FC236}">
+                <a16:creationId xmlns:a16="http://schemas.microsoft.com/office/drawing/2014/main" id="{20AC1815-85A3-41E5-853F-7C6026F864A6}"/>
               </a:ext>
             </a:extLst>
           </p:cNvPr>
@@ -12356,16 +12391,35 @@
               </a:defRPr>
             </a:pPr>
             <a:r>
-              <a:t>Các Thước Đo Có Điều Kiện (Conditional Metrics)</a:t>
-            </a:r>
-          </a:p>
-          <a:p xmlns:a="http://schemas.openxmlformats.org/drawingml/2006/main">
-            <a:pPr>
-              <a:spcBef>
-                <a:spcPts val="350"/>
-              </a:spcBef>
-              <a:buNone/>
-              <a:defRPr sz="1150">
+              <a:t>Các Thước Đo Có Điều Kiện &amp; Hiệu Năng RQ1</a:t>
+            </a:r>
+          </a:p>
+          <a:p xmlns:a="http://schemas.openxmlformats.org/drawingml/2006/main">
+            <a:pPr>
+              <a:spcBef>
+                <a:spcPts val="220"/>
+              </a:spcBef>
+              <a:buNone/>
+              <a:defRPr sz="1050">
+                <a:solidFill>
+                  <a:srgbClr val="0F172A"/>
+                </a:solidFill>
+                <a:latin typeface="Calibri"/>
+                <a:ea typeface="Calibri"/>
+                <a:cs typeface="Calibri"/>
+              </a:defRPr>
+            </a:pPr>
+            <a:r>
+              <a:t>•  Mẫu số đánh giá chuẩn: N=718 scorable views (trên 440 distinct clusters).</a:t>
+            </a:r>
+          </a:p>
+          <a:p xmlns:a="http://schemas.openxmlformats.org/drawingml/2006/main">
+            <a:pPr>
+              <a:spcBef>
+                <a:spcPts val="220"/>
+              </a:spcBef>
+              <a:buNone/>
+              <a:defRPr sz="1050">
                 <a:solidFill>
                   <a:srgbClr val="0F172A"/>
                 </a:solidFill>
@@ -12381,10 +12435,10 @@
           <a:p xmlns:a="http://schemas.openxmlformats.org/drawingml/2006/main">
             <a:pPr>
               <a:spcBef>
-                <a:spcPts val="350"/>
-              </a:spcBef>
-              <a:buNone/>
-              <a:defRPr sz="1150">
+                <a:spcPts val="220"/>
+              </a:spcBef>
+              <a:buNone/>
+              <a:defRPr sz="1050">
                 <a:solidFill>
                   <a:srgbClr val="0F172A"/>
                 </a:solidFill>
@@ -12400,29 +12454,10 @@
           <a:p xmlns:a="http://schemas.openxmlformats.org/drawingml/2006/main">
             <a:pPr>
               <a:spcBef>
-                <a:spcPts val="350"/>
-              </a:spcBef>
-              <a:buNone/>
-              <a:defRPr sz="1150">
-                <a:solidFill>
-                  <a:srgbClr val="0F172A"/>
-                </a:solidFill>
-                <a:latin typeface="Calibri"/>
-                <a:ea typeface="Calibri"/>
-                <a:cs typeface="Calibri"/>
-              </a:defRPr>
-            </a:pPr>
-            <a:r>
-              <a:t>•  Macro-F1 &amp; Exact Match: Tính trên không gian kỹ thuật chuẩn Frozen Benchmark Universe (D2d = 474).</a:t>
-            </a:r>
-          </a:p>
-          <a:p xmlns:a="http://schemas.openxmlformats.org/drawingml/2006/main">
-            <a:pPr>
-              <a:spcBef>
-                <a:spcPts val="350"/>
-              </a:spcBef>
-              <a:buNone/>
-              <a:defRPr sz="1150">
+                <a:spcPts val="220"/>
+              </a:spcBef>
+              <a:buNone/>
+              <a:defRPr sz="1050">
                 <a:solidFill>
                   <a:srgbClr val="0F172A"/>
                 </a:solidFill>
@@ -12435,14 +12470,52 @@
               <a:t>•  Fail-Closed Invariant: Provider Fail = 0.0000, Parse Fail = 0.0000, Invalid ID = 0.1667 (tính vào mẫu số).</a:t>
             </a:r>
           </a:p>
-        </p:txBody>
-      </p:sp>
-      <p:sp>
-        <p:nvSpPr>
-          <p:cNvPr id="10" name="Rounded Rectangle 9">
-            <a:extLst xmlns:a="http://schemas.openxmlformats.org/drawingml/2006/main">
-              <a:ext uri="{FF2B5EF4-FFF2-40B4-BE49-F238E27FC236}">
-                <a16:creationId xmlns:a16="http://schemas.microsoft.com/office/drawing/2014/main" id="{5728ADA4-C967-467E-AC84-A56B9398D81E}"/>
+          <a:p xmlns:a="http://schemas.openxmlformats.org/drawingml/2006/main">
+            <a:pPr>
+              <a:spcBef>
+                <a:spcPts val="220"/>
+              </a:spcBef>
+              <a:buNone/>
+              <a:defRPr sz="1050">
+                <a:solidFill>
+                  <a:srgbClr val="0F172A"/>
+                </a:solidFill>
+                <a:latin typeface="Calibri"/>
+                <a:ea typeface="Calibri"/>
+                <a:cs typeface="Calibri"/>
+              </a:defRPr>
+            </a:pPr>
+            <a:r>
+              <a:t>•  So sánh đối chứng RAG k=10 vs No-RAG: Chênh lệch cặp 95% CI [-2.355, +5.300] pp (chứa 0), McNemar p = 0.4223 &gt; 0.05.</a:t>
+            </a:r>
+          </a:p>
+          <a:p xmlns:a="http://schemas.openxmlformats.org/drawingml/2006/main">
+            <a:pPr>
+              <a:spcBef>
+                <a:spcPts val="220"/>
+              </a:spcBef>
+              <a:buNone/>
+              <a:defRPr sz="1050">
+                <a:solidFill>
+                  <a:srgbClr val="0F172A"/>
+                </a:solidFill>
+                <a:latin typeface="Calibri"/>
+                <a:ea typeface="Calibri"/>
+                <a:cs typeface="Calibri"/>
+              </a:defRPr>
+            </a:pPr>
+            <a:r>
+              <a:t>•  Diễn giải học thuật: RAG k=10 đạt độ chính xác quan sát được cao nhất trong thử nghiệm kèm độ bất định (không kết luận vượt trội thống kê).</a:t>
+            </a:r>
+          </a:p>
+        </p:txBody>
+      </p:sp>
+      <p:sp>
+        <p:nvSpPr>
+          <p:cNvPr id="10" name="shape_slide_8_rq1_attribution">
+            <a:extLst xmlns:a="http://schemas.openxmlformats.org/drawingml/2006/main">
+              <a:ext uri="{FF2B5EF4-FFF2-40B4-BE49-F238E27FC236}">
+                <a16:creationId xmlns:a16="http://schemas.microsoft.com/office/drawing/2014/main" id="{EE5AE9CC-2EBB-4331-B075-5B552EBE105D}"/>
               </a:ext>
             </a:extLst>
           </p:cNvPr>
@@ -12494,10 +12567,10 @@
       </p:sp>
       <p:sp>
         <p:nvSpPr>
-          <p:cNvPr id="11" name="TextBox 10">
-            <a:extLst xmlns:a="http://schemas.openxmlformats.org/drawingml/2006/main">
-              <a:ext uri="{FF2B5EF4-FFF2-40B4-BE49-F238E27FC236}">
-                <a16:creationId xmlns:a16="http://schemas.microsoft.com/office/drawing/2014/main" id="{BEB37232-BC02-4E02-B428-B5DC86A7F808}"/>
+          <p:cNvPr id="11" name="shape_slide_8_rq1_attribution_textbox">
+            <a:extLst xmlns:a="http://schemas.openxmlformats.org/drawingml/2006/main">
+              <a:ext uri="{FF2B5EF4-FFF2-40B4-BE49-F238E27FC236}">
+                <a16:creationId xmlns:a16="http://schemas.microsoft.com/office/drawing/2014/main" id="{36E13140-6386-44B8-8ED5-F1FA0CD8F75E}"/>
               </a:ext>
             </a:extLst>
           </p:cNvPr>
@@ -12847,7 +12920,7 @@
     </p:spTree>
     <p:extLst>
       <p:ext uri="{BB962C8B-B14F-4D97-AF65-F5344CB8AC3E}">
-        <p14:creationId xmlns:p14="http://schemas.microsoft.com/office/powerpoint/2010/main" val="154989256"/>
+        <p14:creationId xmlns:p14="http://schemas.microsoft.com/office/powerpoint/2010/main" val="55997415"/>
       </p:ext>
     </p:extLst>
   </p:cSld>
@@ -12871,7 +12944,7 @@
           <p:cNvPr id="2" name="Rectangle 1">
             <a:extLst xmlns:a="http://schemas.openxmlformats.org/drawingml/2006/main">
               <a:ext uri="{FF2B5EF4-FFF2-40B4-BE49-F238E27FC236}">
-                <a16:creationId xmlns:a16="http://schemas.microsoft.com/office/drawing/2014/main" id="{8D28292C-D21B-4B40-854D-EEA25083F92F}"/>
+                <a16:creationId xmlns:a16="http://schemas.microsoft.com/office/drawing/2014/main" id="{E64B0120-9722-4313-9BFA-31A6E7BAF92C}"/>
               </a:ext>
             </a:extLst>
           </p:cNvPr>
@@ -12924,7 +12997,7 @@
           <p:cNvPr id="3" name="Rectangle 2">
             <a:extLst xmlns:a="http://schemas.openxmlformats.org/drawingml/2006/main">
               <a:ext uri="{FF2B5EF4-FFF2-40B4-BE49-F238E27FC236}">
-                <a16:creationId xmlns:a16="http://schemas.microsoft.com/office/drawing/2014/main" id="{5F58E0FD-EFE6-400F-80FE-1747392F6CDC}"/>
+                <a16:creationId xmlns:a16="http://schemas.microsoft.com/office/drawing/2014/main" id="{8EA7C4FA-737F-4987-9AE6-E368A59E5B6B}"/>
               </a:ext>
             </a:extLst>
           </p:cNvPr>
@@ -12977,7 +13050,7 @@
           <p:cNvPr id="4" name="Rectangle 3">
             <a:extLst xmlns:a="http://schemas.openxmlformats.org/drawingml/2006/main">
               <a:ext uri="{FF2B5EF4-FFF2-40B4-BE49-F238E27FC236}">
-                <a16:creationId xmlns:a16="http://schemas.microsoft.com/office/drawing/2014/main" id="{6BFEF9BB-1D00-4C27-9BDB-D1169294BD63}"/>
+                <a16:creationId xmlns:a16="http://schemas.microsoft.com/office/drawing/2014/main" id="{D8AC9B0C-4A9A-42B4-ACDC-F691CCBE262C}"/>
               </a:ext>
             </a:extLst>
           </p:cNvPr>
@@ -13030,7 +13103,7 @@
           <p:cNvPr id="5" name="TextBox 4">
             <a:extLst xmlns:a="http://schemas.openxmlformats.org/drawingml/2006/main">
               <a:ext uri="{FF2B5EF4-FFF2-40B4-BE49-F238E27FC236}">
-                <a16:creationId xmlns:a16="http://schemas.microsoft.com/office/drawing/2014/main" id="{15CB8889-BD42-4A57-8759-B3955D40DD19}"/>
+                <a16:creationId xmlns:a16="http://schemas.microsoft.com/office/drawing/2014/main" id="{73C3EB56-51DA-4FCB-AF53-2EF1E8567231}"/>
               </a:ext>
             </a:extLst>
           </p:cNvPr>
@@ -13085,15 +13158,18 @@
             <a:r>
               <a:t>Dữ liệu DEV pilot (synthetic split) đối chiếu Dự phóng Hạch toán Fixture [DIAGNOSTIC TEST FIXTURE ONLY]</a:t>
             </a:r>
-          </a:p>
-        </p:txBody>
-      </p:sp>
-      <p:sp>
-        <p:nvSpPr>
-          <p:cNvPr id="6" name="Rounded Rectangle 5">
-            <a:extLst xmlns:a="http://schemas.openxmlformats.org/drawingml/2006/main">
-              <a:ext uri="{FF2B5EF4-FFF2-40B4-BE49-F238E27FC236}">
-                <a16:creationId xmlns:a16="http://schemas.microsoft.com/office/drawing/2014/main" id="{34975B01-D92D-45C2-BE88-487F21B95A54}"/>
+            <a:r>
+              <a:t>  |  [FIXTURE — PRE-CANONICAL RENDER TEST]</a:t>
+            </a:r>
+          </a:p>
+        </p:txBody>
+      </p:sp>
+      <p:sp>
+        <p:nvSpPr>
+          <p:cNvPr id="6" name="shape_slide_9_rq3_resources">
+            <a:extLst xmlns:a="http://schemas.openxmlformats.org/drawingml/2006/main">
+              <a:ext uri="{FF2B5EF4-FFF2-40B4-BE49-F238E27FC236}">
+                <a16:creationId xmlns:a16="http://schemas.microsoft.com/office/drawing/2014/main" id="{9190559F-9B91-4F70-A806-09DCBEEA2F18}"/>
               </a:ext>
             </a:extLst>
           </p:cNvPr>
@@ -13145,10 +13221,10 @@
       </p:sp>
       <p:sp>
         <p:nvSpPr>
-          <p:cNvPr id="7" name="TextBox 6">
-            <a:extLst xmlns:a="http://schemas.openxmlformats.org/drawingml/2006/main">
-              <a:ext uri="{FF2B5EF4-FFF2-40B4-BE49-F238E27FC236}">
-                <a16:creationId xmlns:a16="http://schemas.microsoft.com/office/drawing/2014/main" id="{4893621C-C620-4095-B126-79EDCD09B4CD}"/>
+          <p:cNvPr id="7" name="shape_slide_9_rq3_resources_textbox">
+            <a:extLst xmlns:a="http://schemas.openxmlformats.org/drawingml/2006/main">
+              <a:ext uri="{FF2B5EF4-FFF2-40B4-BE49-F238E27FC236}">
+                <a16:creationId xmlns:a16="http://schemas.microsoft.com/office/drawing/2014/main" id="{31349263-7A64-4A4B-BE38-7F686D319D3C}"/>
               </a:ext>
             </a:extLst>
           </p:cNvPr>
@@ -13612,7 +13688,7 @@
           <p:nvPr/>
         </p:nvPicPr>
         <p:blipFill>
-          <a:blip xmlns:r="http://schemas.openxmlformats.org/officeDocument/2006/relationships" xmlns:a="http://schemas.openxmlformats.org/drawingml/2006/main" r:embed="R58da3dcd2ff14277"/>
+          <a:blip xmlns:r="http://schemas.openxmlformats.org/officeDocument/2006/relationships" xmlns:a="http://schemas.openxmlformats.org/drawingml/2006/main" r:embed="Rd9545648b0dd45c6"/>
           <a:stretch xmlns:a="http://schemas.openxmlformats.org/drawingml/2006/main">
             <a:fillRect l="0" t="0" r="0" b="0"/>
           </a:stretch>
@@ -13629,10 +13705,10 @@
       </p:pic>
       <p:sp>
         <p:nvSpPr>
-          <p:cNvPr id="9" name="Rounded Rectangle 8">
-            <a:extLst xmlns:a="http://schemas.openxmlformats.org/drawingml/2006/main">
-              <a:ext uri="{FF2B5EF4-FFF2-40B4-BE49-F238E27FC236}">
-                <a16:creationId xmlns:a16="http://schemas.microsoft.com/office/drawing/2014/main" id="{386CC619-F029-481F-BF92-EC25D11F687A}"/>
+          <p:cNvPr id="9" name="shape_slide_9_accounting">
+            <a:extLst xmlns:a="http://schemas.openxmlformats.org/drawingml/2006/main">
+              <a:ext uri="{FF2B5EF4-FFF2-40B4-BE49-F238E27FC236}">
+                <a16:creationId xmlns:a16="http://schemas.microsoft.com/office/drawing/2014/main" id="{22CA8ED1-0C0A-4CF8-96F7-E233CEB8839B}"/>
               </a:ext>
             </a:extLst>
           </p:cNvPr>
@@ -13684,10 +13760,10 @@
       </p:sp>
       <p:sp>
         <p:nvSpPr>
-          <p:cNvPr id="10" name="TextBox 9">
-            <a:extLst xmlns:a="http://schemas.openxmlformats.org/drawingml/2006/main">
-              <a:ext uri="{FF2B5EF4-FFF2-40B4-BE49-F238E27FC236}">
-                <a16:creationId xmlns:a16="http://schemas.microsoft.com/office/drawing/2014/main" id="{ECBFEA72-0D73-4D75-BEF1-391478E99CA4}"/>
+          <p:cNvPr id="10" name="shape_slide_9_accounting_textbox">
+            <a:extLst xmlns:a="http://schemas.openxmlformats.org/drawingml/2006/main">
+              <a:ext uri="{FF2B5EF4-FFF2-40B4-BE49-F238E27FC236}">
+                <a16:creationId xmlns:a16="http://schemas.microsoft.com/office/drawing/2014/main" id="{32E03843-121C-4C35-87EB-DCFBA127491B}"/>
               </a:ext>
             </a:extLst>
           </p:cNvPr>
@@ -13770,7 +13846,7 @@
     </p:spTree>
     <p:extLst>
       <p:ext uri="{BB962C8B-B14F-4D97-AF65-F5344CB8AC3E}">
-        <p14:creationId xmlns:p14="http://schemas.microsoft.com/office/powerpoint/2010/main" val="1182244350"/>
+        <p14:creationId xmlns:p14="http://schemas.microsoft.com/office/powerpoint/2010/main" val="925787196"/>
       </p:ext>
     </p:extLst>
   </p:cSld>

--- a/reports/evidence/fixture_populated_slides.pptx
+++ b/reports/evidence/fixture_populated_slides.pptx
@@ -2,24 +2,24 @@
 <file path=ppt/presentation.xml><?xml version="1.0" encoding="utf-8"?>
 <p:presentation xmlns:p="http://schemas.openxmlformats.org/presentationml/2006/main">
   <p:sldMasterIdLst>
-    <p:sldMasterId xmlns:r="http://schemas.openxmlformats.org/officeDocument/2006/relationships" id="2147483648" r:id="R8339cec55c9e4060"/>
+    <p:sldMasterId xmlns:r="http://schemas.openxmlformats.org/officeDocument/2006/relationships" id="2147483648" r:id="Ra93427ade3a4409d"/>
   </p:sldMasterIdLst>
   <p:notesMasterIdLst>
-    <p:notesMasterId xmlns:r="http://schemas.openxmlformats.org/officeDocument/2006/relationships" r:id="Re0dcec829a2d49a1"/>
+    <p:notesMasterId xmlns:r="http://schemas.openxmlformats.org/officeDocument/2006/relationships" r:id="Rdf4b9a52ff69436a"/>
   </p:notesMasterIdLst>
   <p:sldIdLst>
-    <p:sldId xmlns:r="http://schemas.openxmlformats.org/officeDocument/2006/relationships" id="256" r:id="R47bc44f5b0cb41a5"/>
-    <p:sldId xmlns:r="http://schemas.openxmlformats.org/officeDocument/2006/relationships" id="257" r:id="Rcb77ccf055464e0b"/>
-    <p:sldId xmlns:r="http://schemas.openxmlformats.org/officeDocument/2006/relationships" id="258" r:id="R1463006834d34b2c"/>
-    <p:sldId xmlns:r="http://schemas.openxmlformats.org/officeDocument/2006/relationships" id="259" r:id="R0cd3c46ca5904aef"/>
-    <p:sldId xmlns:r="http://schemas.openxmlformats.org/officeDocument/2006/relationships" id="260" r:id="R55b9b8115470483f"/>
-    <p:sldId xmlns:r="http://schemas.openxmlformats.org/officeDocument/2006/relationships" id="261" r:id="R5ba18e7501cf4f27"/>
-    <p:sldId xmlns:r="http://schemas.openxmlformats.org/officeDocument/2006/relationships" id="262" r:id="R4670ab2bc68b4a71"/>
-    <p:sldId xmlns:r="http://schemas.openxmlformats.org/officeDocument/2006/relationships" id="263" r:id="R38d8a577a314452b"/>
-    <p:sldId xmlns:r="http://schemas.openxmlformats.org/officeDocument/2006/relationships" id="264" r:id="Rd120c4ef76d24ac1"/>
-    <p:sldId xmlns:r="http://schemas.openxmlformats.org/officeDocument/2006/relationships" id="265" r:id="R26536cb50a974933"/>
-    <p:sldId xmlns:r="http://schemas.openxmlformats.org/officeDocument/2006/relationships" id="266" r:id="Rf9def43630614530"/>
-    <p:sldId xmlns:r="http://schemas.openxmlformats.org/officeDocument/2006/relationships" id="267" r:id="R103eac4c7d964cdd"/>
+    <p:sldId xmlns:r="http://schemas.openxmlformats.org/officeDocument/2006/relationships" id="256" r:id="Ree784d9e57a54be9"/>
+    <p:sldId xmlns:r="http://schemas.openxmlformats.org/officeDocument/2006/relationships" id="257" r:id="Rc81fa0a00f2f46b3"/>
+    <p:sldId xmlns:r="http://schemas.openxmlformats.org/officeDocument/2006/relationships" id="258" r:id="R971471eb80d745e4"/>
+    <p:sldId xmlns:r="http://schemas.openxmlformats.org/officeDocument/2006/relationships" id="259" r:id="R1f6b6bbb2e454a2d"/>
+    <p:sldId xmlns:r="http://schemas.openxmlformats.org/officeDocument/2006/relationships" id="260" r:id="Rb404c3a1cb964cd1"/>
+    <p:sldId xmlns:r="http://schemas.openxmlformats.org/officeDocument/2006/relationships" id="261" r:id="R8d430bf8f94c4dc3"/>
+    <p:sldId xmlns:r="http://schemas.openxmlformats.org/officeDocument/2006/relationships" id="262" r:id="Rb49e3e1ee09a420f"/>
+    <p:sldId xmlns:r="http://schemas.openxmlformats.org/officeDocument/2006/relationships" id="263" r:id="Rccbe736d2d0e409f"/>
+    <p:sldId xmlns:r="http://schemas.openxmlformats.org/officeDocument/2006/relationships" id="264" r:id="R7f8616a4c3b44817"/>
+    <p:sldId xmlns:r="http://schemas.openxmlformats.org/officeDocument/2006/relationships" id="265" r:id="Rad04a72cdd834a8c"/>
+    <p:sldId xmlns:r="http://schemas.openxmlformats.org/officeDocument/2006/relationships" id="266" r:id="Rbc4bc02abd6b48e9"/>
+    <p:sldId xmlns:r="http://schemas.openxmlformats.org/officeDocument/2006/relationships" id="267" r:id="Rf43d7dc305904138"/>
   </p:sldIdLst>
   <p:sldSz cx="12191695" cy="6858000"/>
   <p:notesSz cx="6858000" cy="9144000"/>
@@ -595,7 +595,7 @@
           </a:p>
           <a:p xmlns:a="http://schemas.openxmlformats.org/drawingml/2006/main">
             <a:r>
-              <a:t>Bằng chứng dự án: config/canonical_experiment_lock_v1.json (SHA-256: 961ba9b3e9e1b459a6694a5c8c76424d36c89d65bd4d88b14d0b0de7e4c017ac); reports/experiment_protocol_v1.md (SHA-256: d3bf3d31ad307100ac437a7daecc470bf12de9ada49f19de3d77592d5a21974c); scripts/reproduce_study.py.</a:t>
+              <a:t>Bằng chứng dự án: config/canonical_experiment_lock_v1.json (SHA-256: 961ba9b3e9e1b459a6694a5c8c76424d36c89d65bd4d88b14d0b0de7e4c017ac); reports/experiment_protocol_v1.md (SHA-256: d3bf3d31ad307100ac437a7daecc470bf12de9ada49f19de3d77592d5a21974c); artifacts/results/canonical_metric_bundle_v2.json (SHA-256: 442b5933858caafc9da3c06ee9398637213ed30d7a7db80195c0babb1195ef34); scripts/reproduce_study.py.</a:t>
             </a:r>
           </a:p>
         </p:txBody>
@@ -670,7 +670,7 @@
           </a:p>
           <a:p xmlns:a="http://schemas.openxmlformats.org/drawingml/2006/main">
             <a:r>
-              <a:t>Nghiên cứu công khai các giới hạn khoa học: Dữ liệu hiện tại nằm trong phạm vi kịch bản có cấu trúc synthetic-paired-v1; bộ nhúng dense đơn tầng chưa kết nối được từ vựng kỹ thuật hệ thống (Event ID số); và mô hình đánh giá là gpt-5.6-luna. Để đảm bảo an toàn, mọi quy trình kiểm thử tái lập phải thực thi qua runner offline scripts/run_offline_tests.py nhằm đánh chặn các kết nối mạng ngẫu nhiên ở tầng socket Python.</a:t>
+              <a:t>Nghiên cứu công khai các giới hạn khoa học: Dữ liệu hiện tại nằm trong phạm vi kịch bản có cấu trúc synthetic-paired-v1; bộ nhúng dense đơn tầng chưa kết nối được từ vựng kỹ thuật hệ thống (Event ID số); và mô hình đánh giá là gpt-5.6-luna. Khoảng tin cậy delta chứa 0, kiểm định McNemar p = 0.4219 / 0.422 &gt; 0.05. Để đảm bảo an toàn, mọi quy trình kiểm thử tái lập phải thực thi qua runner offline scripts/run_offline_tests.py nhằm đánh chặn các kết nối mạng ngẫu nhiên ở tầng socket Python.</a:t>
             </a:r>
           </a:p>
           <a:p xmlns:a="http://schemas.openxmlformats.org/drawingml/2006/main">
@@ -755,7 +755,7 @@
           </a:p>
           <a:p xmlns:a="http://schemas.openxmlformats.org/drawingml/2006/main">
             <a:r>
-              <a:t>Bằng chứng dự án: config/canonical_experiment_lock_v1.json (SHA-256: 961ba9b3...); scripts/reproduce_study.py; scripts/run_offline_tests.py; tests/test_smoke_cases.py.</a:t>
+              <a:t>Bằng chứng dự án: config/canonical_experiment_lock_v1.json (SHA-256: 961ba9b3...); artifacts/results/canonical_metric_bundle_v2.json; scripts/reproduce_study.py; scripts/run_offline_tests.py; tests/test_smoke_cases.py.</a:t>
             </a:r>
           </a:p>
         </p:txBody>
@@ -830,7 +830,7 @@
           </a:p>
           <a:p xmlns:a="http://schemas.openxmlformats.org/drawingml/2006/main">
             <a:r>
-              <a:t>Tóm lại, RAG2ATT&amp;CK đo lường thực nghiệm đối chứng vai trò của RAG trong bài toán ánh xạ log Windows sang ATT&amp;CK techniques. Các phát hiện hiện tại phản ánh phạm vi đo lường thực nghiệm và các giả thuyết đang chờ hoàn tất ma trận TEST. Chúng tôi nhấn mạnh tính trung thực khoa học: phân rã lỗi D2i theo các trục đo lường độc lập không giả định độc lập xác suất ngẫu nhiên, và quy trình tái lập sử dụng runner can thiệp socket tầng ứng dụng.</a:t>
+              <a:t>Tóm lại, RAG2ATT&amp;CK đo lường thực nghiệm đối chứng vai trò của RAG trong bài toán ánh xạ log Windows sang ATT&amp;CK techniques: No-RAG đạt 77.99% (560/718), RAG k=10 đạt 79.53% (571/718, Delta = +1.532 pp, McNemar p = 0.4219 / 0.422 &gt; 0.05). Ghi nhận 0 terminal provider failures trên 3,590 scorable records. Chúng tôi nhấn mạnh tính trung thực khoa học: phân rã lỗi D2i theo các trục đo lường độc lập không giả định độc lập xác suất ngẫu nhiên, và quy trình tái lập sử dụng runner can thiệp socket tầng ứng dụng.</a:t>
             </a:r>
           </a:p>
           <a:p xmlns:a="http://schemas.openxmlformats.org/drawingml/2006/main">
@@ -840,7 +840,7 @@
           </a:p>
           <a:p xmlns:a="http://schemas.openxmlformats.org/drawingml/2006/main">
             <a:r>
-              <a:t>Bằng chứng dự án: PR #26 (https://github.com/habachcp6/RAG2ATTCK/pull/26); docs/sanitized_evidence_manifest.json; reports/evidence/reproducibility_package_manifest.md.</a:t>
+              <a:t>Bằng chứng dự án: PR #26 (https://github.com/habachcp6/RAG2ATTCK/pull/26); docs/sanitized_evidence_manifest.json; artifacts/results/canonical_metric_bundle_v2.json; reports/evidence/reproducibility_package_manifest.md.</a:t>
             </a:r>
           </a:p>
         </p:txBody>
@@ -1265,7 +1265,7 @@
           </a:p>
           <a:p xmlns:a="http://schemas.openxmlformats.org/drawingml/2006/main">
             <a:r>
-              <a:t>Chẩn đoán độc lập khâu tìm kiếm (RQ2) trên 756 positive views cho thấy Hit@10 chỉ đạt 45.11%, nghĩa là trong 54.89% trường hợp, kỹ thuật đúng hoàn toàn vắng bóng trong Top-10 gửi cho LLM. Điển hình là kỹ thuật T1136.001 với 0/99 lần trúng Top-10 do khoảng cách ngữ nghĩa giữa Event ID 4720 và STIX description. Chúng tôi đặt ra giả thuyết Context Scaling &amp; Dilution (k=1,3,5,10): tăng k cải thiện độ phủ nhưng tăng nguy cơ nhiễu distractor; giả thuyết này đang được kiểm chứng thực nghiệm đối chứng end-to-end.</a:t>
+              <a:t>Chẩn đoán độc lập khâu tìm kiếm (RQ2) trên tập scorable N=718 cho thấy Hit@10 đạt 44.71% (321/718), nghĩa là trong 55.29% trường hợp (397/718), kỹ thuật đúng hoàn toàn vắng bóng trong Top-10 gửi cho LLM. Điển hình là kỹ thuật T1136.001 với 0/95 lần trúng Top-10 do khoảng cách ngữ nghĩa giữa Event ID 4720 và STIX description. Chúng tôi ghi nhận giả thuyết Context Scaling &amp; Dilution (k=1,3,5,10): tăng k cải thiện độ phủ nhưng tăng nguy cơ nhiễu distractor; giả thuyết này đã được kiểm chứng thực nghiệm đối chứng end-to-end trên ma trận TEST.</a:t>
             </a:r>
           </a:p>
           <a:p xmlns:a="http://schemas.openxmlformats.org/drawingml/2006/main">
@@ -1345,7 +1345,7 @@
           </a:p>
           <a:p xmlns:a="http://schemas.openxmlformats.org/drawingml/2006/main">
             <a:r>
-              <a:t>So sánh đối ứng trên 296 cặp anchor chuẩn chỉ ra rằng biểu diễn Single-event đạt thứ hạng tìm kiếm tốt hơn Contextual-event (65 cặp vs 23 cặp), và hơn 70% có thứ hạng tương đương (phần lớn do cả hai cùng trượt Top-10). Điều này cho thấy việc đưa thêm log nền gây hiện tượng benign drift. Chúng tôi thiết lập schema so sánh đối chứng scaffold giữa Zero-Shot No-RAG, Zero-Shot RAG và các prompt scaffold, hiện đang được gắn nhãn [DIAGNOSTIC TEST FIXTURE ONLY - NOT CANONICAL NUMERICAL RESULTS]; kết quả đối chứng trên diagnostic cohort (n=718 views across 440 clusters) ghi nhận quan sát mô tả độc lập.</a:t>
+              <a:t>So sánh đối ứng trên 296 cặp anchor chuẩn chỉ ra rằng biểu diễn Single-event đạt thứ hạng tìm kiếm tốt hơn Contextual-event (65 cặp vs 23 cặp), và hơn 70% có thứ hạng tương đương (phần lớn do cả hai cùng trượt Top-10). Điều này cho thấy việc đưa thêm log nền gây hiện tượng benign drift. Chúng tôi thiết lập schema so sánh đối chứng scaffold giữa Zero-Shot No-RAG, Zero-Shot RAG và các prompt scaffold. Ở điều kiện RAG k=10 trên 278 cặp đầy đủ nhãn GT, cả Single và Contextual view đều đạt 83.81% (paired delta = 0.0 pp, McNemar p = 1.0), nghiêm cấm suy diễn quan hệ nhân quả thuần túy khi hình thức biểu diễn thay đổi.</a:t>
             </a:r>
           </a:p>
           <a:p xmlns:a="http://schemas.openxmlformats.org/drawingml/2006/main">
@@ -1425,12 +1425,27 @@
           </a:p>
           <a:p xmlns:a="http://schemas.openxmlformats.org/drawingml/2006/main">
             <a:r>
-              <a:t>Khung đánh giá RQ1 &amp; RQ2 được xây dựng trên định đề D2i (Independent Measurement Axes). Chúng tôi bác bỏ hoàn toàn công thức cộng xác suất rời rạc sai lầm, bởi retrieval failure và downstream generation failure không hề xung khắc nhau mà có phần giao thoa rõ ràng; chúng tôi cũng không giả định độc lập xác suất ngẫu nhiên. Các chỉ số có điều kiện P(Correct | GT in Top-k) và P(Correct | GT NOT in Top-k) cho phép định lượng xem LLM có bị đánh lừa bởi distractor hay có thể gán đúng khi thiếu ngữ cảnh truy xuất (không giả định năng lực tự sửa sai nội tại). Toàn bộ ma trận chính thức 6,400 bản ghi đang chạy; tính đúng đắn toán học của Evaluator đã được chứng minh qua 5 test fixtures.</a:t>
-            </a:r>
-          </a:p>
-          <a:p xmlns:a="http://schemas.openxmlformats.org/drawingml/2006/main">
-            <a:r>
-              <a:t>Bằng chứng dự án: reports/experiment_protocol_v1.md (D2e, D2f, D2h, D2i; SHA-256: d3bf3d31...); tests/test_experiment_evaluation.py (94 tests pass).</a:t>
+              <a:t>Khung đánh giá RQ1 &amp; RQ2 được xây dựng trên định đề D2i (Independent Measurement Axes). Chúng tôi bác bỏ hoàn toàn công thức cộng xác suất rời rạc sai lầm, bởi retrieval failure và downstream generation failure không hề xung khắc nhau mà có phần giao thoa rõ ràng; chúng tôi cũng không giả định độc lập xác suất ngẫu nhiên.</a:t>
+            </a:r>
+          </a:p>
+          <a:p xmlns:a="http://schemas.openxmlformats.org/drawingml/2006/main">
+            <a:r>
+              <a:t>Bảng đối chứng RQ1 ghi nhận RAG k=10 đạt độ chính xác quan sát được cao nhất là 79.53% (571/718) so với No-RAG 77.99% (560/718), tức Delta = +1.532 pp (+1.96% relative gain; 95% CI [-2.355, +5.300] pp chứa 0; kiểm định McNemar chính xác p = 0.4219 / hiển thị 0.422 &gt; 0.05). Do đó, nghiên cứu khẳng định đây là độ chính xác quan sát được cao nhất trong thử nghiệm kèm độ bất định, tuyệt đối không tuyên bố chiến thắng có ý nghĩa thống kê hay lợi ích vượt trội trong production.</a:t>
+            </a:r>
+          </a:p>
+          <a:p xmlns:a="http://schemas.openxmlformats.org/drawingml/2006/main">
+            <a:r>
+              <a:t>Ranh giới lỗi phân định độc lập: 1 physical retry thành công sau sự cố mạng API_FAILURE; ghi nhận 0 terminal provider failure trên toàn bộ 3,590 scorable records (13 incomplete records ghi nhận trên toàn campaign 6,400 requests đều thuộc nhóm unmapped/ambiguous).</a:t>
+            </a:r>
+          </a:p>
+          <a:p xmlns:a="http://schemas.openxmlformats.org/drawingml/2006/main">
+            <a:r>
+              <a:t>Về các thước đo có điều kiện tại k=10: P(Correct | GT in Top-k) = 91.28% (293/321), trong khi P(Correct | GT NOT in Top-k) = 70.03% (278/397); tỷ lệ này không cho phép suy diễn mô hình tự sửa sai nội tại.</a:t>
+            </a:r>
+          </a:p>
+          <a:p xmlns:a="http://schemas.openxmlformats.org/drawingml/2006/main">
+            <a:r>
+              <a:t>Bằng chứng dự án: reports/experiment_protocol_v1.md (D2e, D2f, D2h, D2i; SHA-256: d3bf3d31ad307100ac437a7daecc470bf12de9ada49f19de3d77592d5a21974c); artifacts/results/canonical_metric_bundle_v2.json; tests/test_experiment_evaluation.py.</a:t>
             </a:r>
           </a:p>
         </p:txBody>
@@ -1505,32 +1520,32 @@
           </a:p>
           <a:p xmlns:a="http://schemas.openxmlformats.org/drawingml/2006/main">
             <a:r>
-              <a:t>Trong phân tích RQ3, chúng tôi làm rõ các khái niệm chi phí và dữ liệu:</a:t>
-            </a:r>
-          </a:p>
-          <a:p xmlns:a="http://schemas.openxmlformats.org/drawingml/2006/main">
-            <a:r>
-              <a:t>1. Dữ liệu DEV là dữ liệu tổng hợp (synthetic-paired-v1 DEV split, 4 views x 5 nhánh). Việc gửi request lên OpenAI không biến log tổng hợp thành dữ liệu thực địa in-the-wild.</a:t>
-            </a:r>
-          </a:p>
-          <a:p xmlns:a="http://schemas.openxmlformats.org/drawingml/2006/main">
-            <a:r>
-              <a:t>2. Toàn bộ nghiên cứu tính trên mẫu số 1,280 queries / điều kiện (tổng 6,400 logical requests, 6,401 physical attempts bao gồm 1 retry lỗi API).</a:t>
-            </a:r>
-          </a:p>
-          <a:p xmlns:a="http://schemas.openxmlformats.org/drawingml/2006/main">
-            <a:r>
-              <a:t>3. Hạch toán tài chính chính xác: trần ngân sách đóng băng cứng $19.99 USD (hard_budget_limit_usd), chi phí quyết toán thực tế 5 điều kiện chính thức là $6.58 settled spend ($6.57575890 USD), cộng giữ chỗ thận trọng pilot $0.05264010 USD tổng chi phí cam kết là $6.63 committed spend ($6.62839900 USD), ngân sách khả dụng còn lại là $13.36 net remaining ($13.36160100 USD; 0 holds, 0 breach).</a:t>
-            </a:r>
-          </a:p>
-          <a:p xmlns:a="http://schemas.openxmlformats.org/drawingml/2006/main">
-            <a:r>
-              <a:t>4. Phân biệt rõ khoản giữ chỗ thận trọng tạm thời ($0.05264010 USD prior_pilot_provisional_hold_usd), dự báo chuẩn tắc tập TEST ($8.20 – $8.99 USD cho 6,400 requests), và trần ngân sách đóng băng cứng $19.99 USD (hard_budget_limit_usd).</a:t>
-            </a:r>
-          </a:p>
-          <a:p xmlns:a="http://schemas.openxmlformats.org/drawingml/2006/main">
-            <a:r>
-              <a:t>Bằng chứng dự án: config/experiment_config.json (hard_budget_limit_usd: 19.99); reports/evidence/dev_cost_pilot_20261001/summary.json (SHA-256: f8dfe994...); tests/test_monetary_guard.py.</a:t>
+              <a:t>Trong phân tích RQ3, chúng tôi làm rõ các khái niệm chi phí, dữ liệu và kiểm soát ngân sách:</a:t>
+            </a:r>
+          </a:p>
+          <a:p xmlns:a="http://schemas.openxmlformats.org/drawingml/2006/main">
+            <a:r>
+              <a:t>1. Dữ liệu DEV là dữ liệu tổng hợp (synthetic-paired-v1 DEV split). Việc gửi request lên OpenAI không biến log tổng hợp thành dữ liệu thực địa in-the-wild.</a:t>
+            </a:r>
+          </a:p>
+          <a:p xmlns:a="http://schemas.openxmlformats.org/drawingml/2006/main">
+            <a:r>
+              <a:t>2. Toàn bộ nghiên cứu tính trên mẫu số N=1,280 queries / điều kiện (tổng 6,400 logical requests, 6,401 physical attempts bao gồm 1 physical retry thành công do lỗi mạng API_FAILURE với 1,540 cached tokens; ghi nhận 0 terminal provider failure trên 3,590 scorable records).</a:t>
+            </a:r>
+          </a:p>
+          <a:p xmlns:a="http://schemas.openxmlformats.org/drawingml/2006/main">
+            <a:r>
+              <a:t>3. Hạch toán tài chính chính xác: trần ngân sách đóng băng cứng $19.99 USD (hard_budget_limit_usd = $19.99000000). Chi phí quyết toán thực tế 5 điều kiện chính thức là $6.58 settled spend ($6.57575890 USD).</a:t>
+            </a:r>
+          </a:p>
+          <a:p xmlns:a="http://schemas.openxmlformats.org/drawingml/2006/main">
+            <a:r>
+              <a:t>4. Phân biệt rạch ròi: Khoản giữ chỗ thận trọng pilot $0.05264010 USD (prior_pilot_provisional_hold_usd) được phân tách minh bạch khỏi chi phí quyết toán thực tế $6.57575890 USD. Tổng chi phí cam kết là $6.63 committed spend ($6.62839900 USD), ngân sách khả dụng còn lại là $13.36 net remaining ($13.36160100 USD; 0 active holds, 0 breach).</a:t>
+            </a:r>
+          </a:p>
+          <a:p xmlns:a="http://schemas.openxmlformats.org/drawingml/2006/main">
+            <a:r>
+              <a:t>Bằng chứng dự án: config/experiment_config.json (hard_budget_limit_usd: 19.99); artifacts/results/canonical_metric_bundle_v2.json; tests/test_monetary_guard.py.</a:t>
             </a:r>
           </a:p>
         </p:txBody>
@@ -1577,7 +1592,7 @@
           <p:cNvPr id="2" name="Title 1">
             <a:extLst xmlns:a="http://schemas.openxmlformats.org/drawingml/2006/main">
               <a:ext uri="{FF2B5EF4-FFF2-40B4-BE49-F238E27FC236}">
-                <a16:creationId xmlns:a16="http://schemas.microsoft.com/office/drawing/2014/main" id="{3CEB49DB-D6FD-420D-8F42-0C33A8183484}"/>
+                <a16:creationId xmlns:a16="http://schemas.microsoft.com/office/drawing/2014/main" id="{D66AD3A6-C2FE-4237-AA6A-5D1C659E5AA6}"/>
               </a:ext>
             </a:extLst>
           </p:cNvPr>
@@ -1610,7 +1625,7 @@
           <p:cNvPr id="3" name="Subtitle 2">
             <a:extLst xmlns:a="http://schemas.openxmlformats.org/drawingml/2006/main">
               <a:ext uri="{FF2B5EF4-FFF2-40B4-BE49-F238E27FC236}">
-                <a16:creationId xmlns:a16="http://schemas.microsoft.com/office/drawing/2014/main" id="{7DA0C3A3-784B-4518-974F-2212DB9C22EF}"/>
+                <a16:creationId xmlns:a16="http://schemas.microsoft.com/office/drawing/2014/main" id="{56A41D51-E448-4B9D-BD7E-791737D4799A}"/>
               </a:ext>
             </a:extLst>
           </p:cNvPr>
@@ -1734,7 +1749,7 @@
           <p:cNvPr id="4" name="Date Placeholder 3">
             <a:extLst xmlns:a="http://schemas.openxmlformats.org/drawingml/2006/main">
               <a:ext uri="{FF2B5EF4-FFF2-40B4-BE49-F238E27FC236}">
-                <a16:creationId xmlns:a16="http://schemas.microsoft.com/office/drawing/2014/main" id="{4B0D3DEE-0A90-424F-A468-7B49E52CBA97}"/>
+                <a16:creationId xmlns:a16="http://schemas.microsoft.com/office/drawing/2014/main" id="{93AD6A40-E0A7-4F08-AAA7-13A3B5BE3F09}"/>
               </a:ext>
             </a:extLst>
           </p:cNvPr>
@@ -1762,7 +1777,7 @@
           <p:cNvPr id="5" name="Footer Placeholder 4">
             <a:extLst xmlns:a="http://schemas.openxmlformats.org/drawingml/2006/main">
               <a:ext uri="{FF2B5EF4-FFF2-40B4-BE49-F238E27FC236}">
-                <a16:creationId xmlns:a16="http://schemas.microsoft.com/office/drawing/2014/main" id="{3260CF1B-3512-4C4D-AED8-7C408DF86738}"/>
+                <a16:creationId xmlns:a16="http://schemas.microsoft.com/office/drawing/2014/main" id="{555CD510-427D-4031-A3E9-459CEFC2E8EE}"/>
               </a:ext>
             </a:extLst>
           </p:cNvPr>
@@ -1787,7 +1802,7 @@
           <p:cNvPr id="6" name="Slide Number Placeholder 5">
             <a:extLst xmlns:a="http://schemas.openxmlformats.org/drawingml/2006/main">
               <a:ext uri="{FF2B5EF4-FFF2-40B4-BE49-F238E27FC236}">
-                <a16:creationId xmlns:a16="http://schemas.microsoft.com/office/drawing/2014/main" id="{9799572C-FAB7-46C8-ABD2-9FF7AB3858B4}"/>
+                <a16:creationId xmlns:a16="http://schemas.microsoft.com/office/drawing/2014/main" id="{4D7718A8-B591-4F91-9D37-799AB4D8D65D}"/>
               </a:ext>
             </a:extLst>
           </p:cNvPr>
@@ -1832,7 +1847,7 @@
           <p:cNvPr id="2" name="Title 1">
             <a:extLst xmlns:a="http://schemas.openxmlformats.org/drawingml/2006/main">
               <a:ext uri="{FF2B5EF4-FFF2-40B4-BE49-F238E27FC236}">
-                <a16:creationId xmlns:a16="http://schemas.microsoft.com/office/drawing/2014/main" id="{FCA6F003-5583-4DFE-A7AA-4DC2ED011876}"/>
+                <a16:creationId xmlns:a16="http://schemas.microsoft.com/office/drawing/2014/main" id="{859CD4AD-D2CA-4B12-8ADD-9555B95AD11D}"/>
               </a:ext>
             </a:extLst>
           </p:cNvPr>
@@ -1860,7 +1875,7 @@
           <p:cNvPr id="3" name="Vertical Text Placeholder 2">
             <a:extLst xmlns:a="http://schemas.openxmlformats.org/drawingml/2006/main">
               <a:ext uri="{FF2B5EF4-FFF2-40B4-BE49-F238E27FC236}">
-                <a16:creationId xmlns:a16="http://schemas.microsoft.com/office/drawing/2014/main" id="{D9D30904-19A9-4DC2-BE2E-38DC9302BA3F}"/>
+                <a16:creationId xmlns:a16="http://schemas.microsoft.com/office/drawing/2014/main" id="{6FAEB06F-1EA0-4139-8329-316C271C38DF}"/>
               </a:ext>
             </a:extLst>
           </p:cNvPr>
@@ -1923,7 +1938,7 @@
           <p:cNvPr id="4" name="Date Placeholder 3">
             <a:extLst xmlns:a="http://schemas.openxmlformats.org/drawingml/2006/main">
               <a:ext uri="{FF2B5EF4-FFF2-40B4-BE49-F238E27FC236}">
-                <a16:creationId xmlns:a16="http://schemas.microsoft.com/office/drawing/2014/main" id="{706F5DD9-6E76-45EA-A565-48A5AF792099}"/>
+                <a16:creationId xmlns:a16="http://schemas.microsoft.com/office/drawing/2014/main" id="{24CE66CA-F7B5-4A8D-B123-6A9B2CD6530A}"/>
               </a:ext>
             </a:extLst>
           </p:cNvPr>
@@ -1951,7 +1966,7 @@
           <p:cNvPr id="5" name="Footer Placeholder 4">
             <a:extLst xmlns:a="http://schemas.openxmlformats.org/drawingml/2006/main">
               <a:ext uri="{FF2B5EF4-FFF2-40B4-BE49-F238E27FC236}">
-                <a16:creationId xmlns:a16="http://schemas.microsoft.com/office/drawing/2014/main" id="{A9E38238-DE8F-4F23-89F6-13F8635D68E4}"/>
+                <a16:creationId xmlns:a16="http://schemas.microsoft.com/office/drawing/2014/main" id="{9B994293-7906-4CD5-8759-ED8802BB3FBD}"/>
               </a:ext>
             </a:extLst>
           </p:cNvPr>
@@ -1976,7 +1991,7 @@
           <p:cNvPr id="6" name="Slide Number Placeholder 5">
             <a:extLst xmlns:a="http://schemas.openxmlformats.org/drawingml/2006/main">
               <a:ext uri="{FF2B5EF4-FFF2-40B4-BE49-F238E27FC236}">
-                <a16:creationId xmlns:a16="http://schemas.microsoft.com/office/drawing/2014/main" id="{BF862A16-16C7-437A-A327-D5238D5256DC}"/>
+                <a16:creationId xmlns:a16="http://schemas.microsoft.com/office/drawing/2014/main" id="{AF5E64CC-9370-457D-82EF-BEA750495640}"/>
               </a:ext>
             </a:extLst>
           </p:cNvPr>
@@ -2021,7 +2036,7 @@
           <p:cNvPr id="2" name="Vertical Title 1">
             <a:extLst xmlns:a="http://schemas.openxmlformats.org/drawingml/2006/main">
               <a:ext uri="{FF2B5EF4-FFF2-40B4-BE49-F238E27FC236}">
-                <a16:creationId xmlns:a16="http://schemas.microsoft.com/office/drawing/2014/main" id="{50880E9A-C7BC-4B7A-82B3-412A3E5820F6}"/>
+                <a16:creationId xmlns:a16="http://schemas.microsoft.com/office/drawing/2014/main" id="{047B670C-802B-4BE6-A18D-FD192ACB412C}"/>
               </a:ext>
             </a:extLst>
           </p:cNvPr>
@@ -2054,7 +2069,7 @@
           <p:cNvPr id="3" name="Vertical Text Placeholder 2">
             <a:extLst xmlns:a="http://schemas.openxmlformats.org/drawingml/2006/main">
               <a:ext uri="{FF2B5EF4-FFF2-40B4-BE49-F238E27FC236}">
-                <a16:creationId xmlns:a16="http://schemas.microsoft.com/office/drawing/2014/main" id="{76E718EF-D9BF-4BFC-8FAE-F6255BC7F2A0}"/>
+                <a16:creationId xmlns:a16="http://schemas.microsoft.com/office/drawing/2014/main" id="{8BFA5B23-7AD6-44FE-8999-022B60CFD88F}"/>
               </a:ext>
             </a:extLst>
           </p:cNvPr>
@@ -2122,7 +2137,7 @@
           <p:cNvPr id="4" name="Date Placeholder 3">
             <a:extLst xmlns:a="http://schemas.openxmlformats.org/drawingml/2006/main">
               <a:ext uri="{FF2B5EF4-FFF2-40B4-BE49-F238E27FC236}">
-                <a16:creationId xmlns:a16="http://schemas.microsoft.com/office/drawing/2014/main" id="{F5F796DD-2CEB-43A1-8F3C-06A495D5B0E3}"/>
+                <a16:creationId xmlns:a16="http://schemas.microsoft.com/office/drawing/2014/main" id="{77959591-E412-4A76-AF2F-A1C939E8FB73}"/>
               </a:ext>
             </a:extLst>
           </p:cNvPr>
@@ -2150,7 +2165,7 @@
           <p:cNvPr id="5" name="Footer Placeholder 4">
             <a:extLst xmlns:a="http://schemas.openxmlformats.org/drawingml/2006/main">
               <a:ext uri="{FF2B5EF4-FFF2-40B4-BE49-F238E27FC236}">
-                <a16:creationId xmlns:a16="http://schemas.microsoft.com/office/drawing/2014/main" id="{13EC45B4-A49F-4F61-8F05-2721408F7B90}"/>
+                <a16:creationId xmlns:a16="http://schemas.microsoft.com/office/drawing/2014/main" id="{5F28D573-E24D-4EAA-B3AD-7C19AB3BC7BD}"/>
               </a:ext>
             </a:extLst>
           </p:cNvPr>
@@ -2175,7 +2190,7 @@
           <p:cNvPr id="6" name="Slide Number Placeholder 5">
             <a:extLst xmlns:a="http://schemas.openxmlformats.org/drawingml/2006/main">
               <a:ext uri="{FF2B5EF4-FFF2-40B4-BE49-F238E27FC236}">
-                <a16:creationId xmlns:a16="http://schemas.microsoft.com/office/drawing/2014/main" id="{3F21537B-0B45-4743-B6FE-AD2AD9A729FD}"/>
+                <a16:creationId xmlns:a16="http://schemas.microsoft.com/office/drawing/2014/main" id="{64F1BD6D-7637-4B21-A793-63219F7BEBFA}"/>
               </a:ext>
             </a:extLst>
           </p:cNvPr>
@@ -2220,7 +2235,7 @@
           <p:cNvPr id="2" name="Title 1">
             <a:extLst xmlns:a="http://schemas.openxmlformats.org/drawingml/2006/main">
               <a:ext uri="{FF2B5EF4-FFF2-40B4-BE49-F238E27FC236}">
-                <a16:creationId xmlns:a16="http://schemas.microsoft.com/office/drawing/2014/main" id="{06052D85-00B6-482C-93C2-C77A5C010B08}"/>
+                <a16:creationId xmlns:a16="http://schemas.microsoft.com/office/drawing/2014/main" id="{75EFD027-FB12-473F-9721-F23AB01B2513}"/>
               </a:ext>
             </a:extLst>
           </p:cNvPr>
@@ -2248,7 +2263,7 @@
           <p:cNvPr id="3" name="Content Placeholder 2">
             <a:extLst xmlns:a="http://schemas.openxmlformats.org/drawingml/2006/main">
               <a:ext uri="{FF2B5EF4-FFF2-40B4-BE49-F238E27FC236}">
-                <a16:creationId xmlns:a16="http://schemas.microsoft.com/office/drawing/2014/main" id="{A971831D-8DBD-41B4-BF82-593DCC17556D}"/>
+                <a16:creationId xmlns:a16="http://schemas.microsoft.com/office/drawing/2014/main" id="{26719805-CFA7-4634-93C7-F705A7513545}"/>
               </a:ext>
             </a:extLst>
           </p:cNvPr>
@@ -2311,7 +2326,7 @@
           <p:cNvPr id="4" name="Date Placeholder 3">
             <a:extLst xmlns:a="http://schemas.openxmlformats.org/drawingml/2006/main">
               <a:ext uri="{FF2B5EF4-FFF2-40B4-BE49-F238E27FC236}">
-                <a16:creationId xmlns:a16="http://schemas.microsoft.com/office/drawing/2014/main" id="{833AC6F9-6E6B-4399-95A2-1698EA21B58A}"/>
+                <a16:creationId xmlns:a16="http://schemas.microsoft.com/office/drawing/2014/main" id="{3638E448-B36D-4654-B360-833DD199A9B1}"/>
               </a:ext>
             </a:extLst>
           </p:cNvPr>
@@ -2339,7 +2354,7 @@
           <p:cNvPr id="5" name="Footer Placeholder 4">
             <a:extLst xmlns:a="http://schemas.openxmlformats.org/drawingml/2006/main">
               <a:ext uri="{FF2B5EF4-FFF2-40B4-BE49-F238E27FC236}">
-                <a16:creationId xmlns:a16="http://schemas.microsoft.com/office/drawing/2014/main" id="{7C692BE4-9ED7-4874-8983-64063FFC4089}"/>
+                <a16:creationId xmlns:a16="http://schemas.microsoft.com/office/drawing/2014/main" id="{1BAB1665-5633-4B54-BCD2-5DF9F48C9767}"/>
               </a:ext>
             </a:extLst>
           </p:cNvPr>
@@ -2364,7 +2379,7 @@
           <p:cNvPr id="6" name="Slide Number Placeholder 5">
             <a:extLst xmlns:a="http://schemas.openxmlformats.org/drawingml/2006/main">
               <a:ext uri="{FF2B5EF4-FFF2-40B4-BE49-F238E27FC236}">
-                <a16:creationId xmlns:a16="http://schemas.microsoft.com/office/drawing/2014/main" id="{5709FF09-5327-447B-A848-E7B97E03774E}"/>
+                <a16:creationId xmlns:a16="http://schemas.microsoft.com/office/drawing/2014/main" id="{DEF8E4EC-D327-48DC-A7AA-4A5FF0AE564D}"/>
               </a:ext>
             </a:extLst>
           </p:cNvPr>
@@ -2409,7 +2424,7 @@
           <p:cNvPr id="2" name="Title 1">
             <a:extLst xmlns:a="http://schemas.openxmlformats.org/drawingml/2006/main">
               <a:ext uri="{FF2B5EF4-FFF2-40B4-BE49-F238E27FC236}">
-                <a16:creationId xmlns:a16="http://schemas.microsoft.com/office/drawing/2014/main" id="{BD17DE80-9C4F-4363-8BEF-16FCD8A06E42}"/>
+                <a16:creationId xmlns:a16="http://schemas.microsoft.com/office/drawing/2014/main" id="{CB5A2718-D2A9-41C2-BAED-95856C316393}"/>
               </a:ext>
             </a:extLst>
           </p:cNvPr>
@@ -2447,7 +2462,7 @@
           <p:cNvPr id="3" name="Text Placeholder 2">
             <a:extLst xmlns:a="http://schemas.openxmlformats.org/drawingml/2006/main">
               <a:ext uri="{FF2B5EF4-FFF2-40B4-BE49-F238E27FC236}">
-                <a16:creationId xmlns:a16="http://schemas.microsoft.com/office/drawing/2014/main" id="{5D7FD489-10E6-4EF6-BC1A-0ECF1CC79DD0}"/>
+                <a16:creationId xmlns:a16="http://schemas.microsoft.com/office/drawing/2014/main" id="{4A0981AA-0BE8-4BB7-AB94-A439FF69CA64}"/>
               </a:ext>
             </a:extLst>
           </p:cNvPr>
@@ -2573,7 +2588,7 @@
           <p:cNvPr id="4" name="Date Placeholder 3">
             <a:extLst xmlns:a="http://schemas.openxmlformats.org/drawingml/2006/main">
               <a:ext uri="{FF2B5EF4-FFF2-40B4-BE49-F238E27FC236}">
-                <a16:creationId xmlns:a16="http://schemas.microsoft.com/office/drawing/2014/main" id="{E5AF355A-688E-4CC2-837E-F829CC099BAD}"/>
+                <a16:creationId xmlns:a16="http://schemas.microsoft.com/office/drawing/2014/main" id="{73B25840-6818-4F45-B03E-E2C76124CBEF}"/>
               </a:ext>
             </a:extLst>
           </p:cNvPr>
@@ -2601,7 +2616,7 @@
           <p:cNvPr id="5" name="Footer Placeholder 4">
             <a:extLst xmlns:a="http://schemas.openxmlformats.org/drawingml/2006/main">
               <a:ext uri="{FF2B5EF4-FFF2-40B4-BE49-F238E27FC236}">
-                <a16:creationId xmlns:a16="http://schemas.microsoft.com/office/drawing/2014/main" id="{CE329375-4F6E-469F-A27A-311CF38E68A9}"/>
+                <a16:creationId xmlns:a16="http://schemas.microsoft.com/office/drawing/2014/main" id="{3BEA3C52-E683-49A4-A81E-7C5176A1E292}"/>
               </a:ext>
             </a:extLst>
           </p:cNvPr>
@@ -2626,7 +2641,7 @@
           <p:cNvPr id="6" name="Slide Number Placeholder 5">
             <a:extLst xmlns:a="http://schemas.openxmlformats.org/drawingml/2006/main">
               <a:ext uri="{FF2B5EF4-FFF2-40B4-BE49-F238E27FC236}">
-                <a16:creationId xmlns:a16="http://schemas.microsoft.com/office/drawing/2014/main" id="{B848B4D9-48E5-4DCE-9B98-AD07C7F5AB27}"/>
+                <a16:creationId xmlns:a16="http://schemas.microsoft.com/office/drawing/2014/main" id="{DA3CD706-6CEA-44A8-9FE1-60B577AFBB2C}"/>
               </a:ext>
             </a:extLst>
           </p:cNvPr>
@@ -2671,7 +2686,7 @@
           <p:cNvPr id="2" name="Title 1">
             <a:extLst xmlns:a="http://schemas.openxmlformats.org/drawingml/2006/main">
               <a:ext uri="{FF2B5EF4-FFF2-40B4-BE49-F238E27FC236}">
-                <a16:creationId xmlns:a16="http://schemas.microsoft.com/office/drawing/2014/main" id="{180D6C68-B086-482C-BFF8-49E61693CAEA}"/>
+                <a16:creationId xmlns:a16="http://schemas.microsoft.com/office/drawing/2014/main" id="{4FA86D74-7202-48B4-B55B-E0E850574310}"/>
               </a:ext>
             </a:extLst>
           </p:cNvPr>
@@ -2699,7 +2714,7 @@
           <p:cNvPr id="3" name="Content Placeholder 2">
             <a:extLst xmlns:a="http://schemas.openxmlformats.org/drawingml/2006/main">
               <a:ext uri="{FF2B5EF4-FFF2-40B4-BE49-F238E27FC236}">
-                <a16:creationId xmlns:a16="http://schemas.microsoft.com/office/drawing/2014/main" id="{6B9FD17E-3FA7-4690-8DA3-1C7966355E8F}"/>
+                <a16:creationId xmlns:a16="http://schemas.microsoft.com/office/drawing/2014/main" id="{7E5A7EA0-3B7B-4BA5-9F4C-9BC126CD99E5}"/>
               </a:ext>
             </a:extLst>
           </p:cNvPr>
@@ -2804,7 +2819,7 @@
           <p:cNvPr id="4" name="Content Placeholder 3">
             <a:extLst xmlns:a="http://schemas.openxmlformats.org/drawingml/2006/main">
               <a:ext uri="{FF2B5EF4-FFF2-40B4-BE49-F238E27FC236}">
-                <a16:creationId xmlns:a16="http://schemas.microsoft.com/office/drawing/2014/main" id="{028ACE0C-CE55-468F-8EEE-110B9B53B6FF}"/>
+                <a16:creationId xmlns:a16="http://schemas.microsoft.com/office/drawing/2014/main" id="{06A70A8A-C29E-49A7-BDC8-2A74D967B4A2}"/>
               </a:ext>
             </a:extLst>
           </p:cNvPr>
@@ -2909,7 +2924,7 @@
           <p:cNvPr id="5" name="Date Placeholder 4">
             <a:extLst xmlns:a="http://schemas.openxmlformats.org/drawingml/2006/main">
               <a:ext uri="{FF2B5EF4-FFF2-40B4-BE49-F238E27FC236}">
-                <a16:creationId xmlns:a16="http://schemas.microsoft.com/office/drawing/2014/main" id="{1AE959A9-DBCA-4CAD-9F49-4B4E8ECAD7FC}"/>
+                <a16:creationId xmlns:a16="http://schemas.microsoft.com/office/drawing/2014/main" id="{53601ECA-C591-4BA0-AC4C-61DE5FA5EBA6}"/>
               </a:ext>
             </a:extLst>
           </p:cNvPr>
@@ -2937,7 +2952,7 @@
           <p:cNvPr id="6" name="Footer Placeholder 5">
             <a:extLst xmlns:a="http://schemas.openxmlformats.org/drawingml/2006/main">
               <a:ext uri="{FF2B5EF4-FFF2-40B4-BE49-F238E27FC236}">
-                <a16:creationId xmlns:a16="http://schemas.microsoft.com/office/drawing/2014/main" id="{3844379A-6075-4E75-A929-2B264D3AC5BA}"/>
+                <a16:creationId xmlns:a16="http://schemas.microsoft.com/office/drawing/2014/main" id="{70B1A62F-160C-4F98-86D9-E15128320E01}"/>
               </a:ext>
             </a:extLst>
           </p:cNvPr>
@@ -2962,7 +2977,7 @@
           <p:cNvPr id="7" name="Slide Number Placeholder 6">
             <a:extLst xmlns:a="http://schemas.openxmlformats.org/drawingml/2006/main">
               <a:ext uri="{FF2B5EF4-FFF2-40B4-BE49-F238E27FC236}">
-                <a16:creationId xmlns:a16="http://schemas.microsoft.com/office/drawing/2014/main" id="{126CE87F-AD3C-4348-8CDC-8A2D0CF2DEB8}"/>
+                <a16:creationId xmlns:a16="http://schemas.microsoft.com/office/drawing/2014/main" id="{3C4CCAA2-E8E1-43A4-9390-4EDCF8E44BE0}"/>
               </a:ext>
             </a:extLst>
           </p:cNvPr>
@@ -3007,7 +3022,7 @@
           <p:cNvPr id="2" name="Title 1">
             <a:extLst xmlns:a="http://schemas.openxmlformats.org/drawingml/2006/main">
               <a:ext uri="{FF2B5EF4-FFF2-40B4-BE49-F238E27FC236}">
-                <a16:creationId xmlns:a16="http://schemas.microsoft.com/office/drawing/2014/main" id="{A30AD875-2999-4FD0-BC76-184FB976340A}"/>
+                <a16:creationId xmlns:a16="http://schemas.microsoft.com/office/drawing/2014/main" id="{85F65726-6C58-4FB3-BA65-2EF4FECB1278}"/>
               </a:ext>
             </a:extLst>
           </p:cNvPr>
@@ -3040,7 +3055,7 @@
           <p:cNvPr id="3" name="Text Placeholder 2">
             <a:extLst xmlns:a="http://schemas.openxmlformats.org/drawingml/2006/main">
               <a:ext uri="{FF2B5EF4-FFF2-40B4-BE49-F238E27FC236}">
-                <a16:creationId xmlns:a16="http://schemas.microsoft.com/office/drawing/2014/main" id="{A7D5ECD1-E929-44D1-8A1B-1B8047097CC9}"/>
+                <a16:creationId xmlns:a16="http://schemas.microsoft.com/office/drawing/2014/main" id="{1E98E12E-B82B-44E2-AB39-8C7F1A2665F5}"/>
               </a:ext>
             </a:extLst>
           </p:cNvPr>
@@ -3112,7 +3127,7 @@
           <p:cNvPr id="4" name="Content Placeholder 3">
             <a:extLst xmlns:a="http://schemas.openxmlformats.org/drawingml/2006/main">
               <a:ext uri="{FF2B5EF4-FFF2-40B4-BE49-F238E27FC236}">
-                <a16:creationId xmlns:a16="http://schemas.microsoft.com/office/drawing/2014/main" id="{9A4FDECF-83AE-4E22-BA21-334E88EE1AD7}"/>
+                <a16:creationId xmlns:a16="http://schemas.microsoft.com/office/drawing/2014/main" id="{50D6CF61-17FF-4CEA-8406-2A4AFBE663B7}"/>
               </a:ext>
             </a:extLst>
           </p:cNvPr>
@@ -3217,7 +3232,7 @@
           <p:cNvPr id="5" name="Text Placeholder 4">
             <a:extLst xmlns:a="http://schemas.openxmlformats.org/drawingml/2006/main">
               <a:ext uri="{FF2B5EF4-FFF2-40B4-BE49-F238E27FC236}">
-                <a16:creationId xmlns:a16="http://schemas.microsoft.com/office/drawing/2014/main" id="{CD0C0318-2A59-4856-9741-DE0C099D5555}"/>
+                <a16:creationId xmlns:a16="http://schemas.microsoft.com/office/drawing/2014/main" id="{A972D146-675A-4405-917B-19EA65E73BE5}"/>
               </a:ext>
             </a:extLst>
           </p:cNvPr>
@@ -3289,7 +3304,7 @@
           <p:cNvPr id="6" name="Content Placeholder 5">
             <a:extLst xmlns:a="http://schemas.openxmlformats.org/drawingml/2006/main">
               <a:ext uri="{FF2B5EF4-FFF2-40B4-BE49-F238E27FC236}">
-                <a16:creationId xmlns:a16="http://schemas.microsoft.com/office/drawing/2014/main" id="{D3E78C3F-560B-4933-8485-985332F04C5D}"/>
+                <a16:creationId xmlns:a16="http://schemas.microsoft.com/office/drawing/2014/main" id="{FB305520-C2F7-431E-A8F1-04B3C6BD498E}"/>
               </a:ext>
             </a:extLst>
           </p:cNvPr>
@@ -3394,7 +3409,7 @@
           <p:cNvPr id="7" name="Date Placeholder 6">
             <a:extLst xmlns:a="http://schemas.openxmlformats.org/drawingml/2006/main">
               <a:ext uri="{FF2B5EF4-FFF2-40B4-BE49-F238E27FC236}">
-                <a16:creationId xmlns:a16="http://schemas.microsoft.com/office/drawing/2014/main" id="{1DCF1BA5-48CE-458F-838E-105CBB4044D3}"/>
+                <a16:creationId xmlns:a16="http://schemas.microsoft.com/office/drawing/2014/main" id="{D037B7AA-CC6C-41C9-91FD-056E6D0A1BC7}"/>
               </a:ext>
             </a:extLst>
           </p:cNvPr>
@@ -3422,7 +3437,7 @@
           <p:cNvPr id="8" name="Footer Placeholder 7">
             <a:extLst xmlns:a="http://schemas.openxmlformats.org/drawingml/2006/main">
               <a:ext uri="{FF2B5EF4-FFF2-40B4-BE49-F238E27FC236}">
-                <a16:creationId xmlns:a16="http://schemas.microsoft.com/office/drawing/2014/main" id="{28364750-34E7-4129-9E62-C202398526F0}"/>
+                <a16:creationId xmlns:a16="http://schemas.microsoft.com/office/drawing/2014/main" id="{3C13BCA0-1604-491D-8AB5-2525B362EF70}"/>
               </a:ext>
             </a:extLst>
           </p:cNvPr>
@@ -3447,7 +3462,7 @@
           <p:cNvPr id="9" name="Slide Number Placeholder 8">
             <a:extLst xmlns:a="http://schemas.openxmlformats.org/drawingml/2006/main">
               <a:ext uri="{FF2B5EF4-FFF2-40B4-BE49-F238E27FC236}">
-                <a16:creationId xmlns:a16="http://schemas.microsoft.com/office/drawing/2014/main" id="{566432F8-A79A-461A-94AB-BE7273C17B99}"/>
+                <a16:creationId xmlns:a16="http://schemas.microsoft.com/office/drawing/2014/main" id="{345D7A69-3440-4CBB-9D84-822D9E9EC29D}"/>
               </a:ext>
             </a:extLst>
           </p:cNvPr>
@@ -3492,7 +3507,7 @@
           <p:cNvPr id="2" name="Title 1">
             <a:extLst xmlns:a="http://schemas.openxmlformats.org/drawingml/2006/main">
               <a:ext uri="{FF2B5EF4-FFF2-40B4-BE49-F238E27FC236}">
-                <a16:creationId xmlns:a16="http://schemas.microsoft.com/office/drawing/2014/main" id="{6B90140F-C0FC-41F7-B7F3-3D6CFA13E185}"/>
+                <a16:creationId xmlns:a16="http://schemas.microsoft.com/office/drawing/2014/main" id="{21AAA2A7-67BE-445F-B132-29CF129F1C5B}"/>
               </a:ext>
             </a:extLst>
           </p:cNvPr>
@@ -3520,7 +3535,7 @@
           <p:cNvPr id="3" name="Date Placeholder 2">
             <a:extLst xmlns:a="http://schemas.openxmlformats.org/drawingml/2006/main">
               <a:ext uri="{FF2B5EF4-FFF2-40B4-BE49-F238E27FC236}">
-                <a16:creationId xmlns:a16="http://schemas.microsoft.com/office/drawing/2014/main" id="{F2EAEB43-3B30-490D-8FF3-B3A6FDC4DACC}"/>
+                <a16:creationId xmlns:a16="http://schemas.microsoft.com/office/drawing/2014/main" id="{B713F640-45AE-4811-9AA6-6CF94616D134}"/>
               </a:ext>
             </a:extLst>
           </p:cNvPr>
@@ -3548,7 +3563,7 @@
           <p:cNvPr id="4" name="Footer Placeholder 3">
             <a:extLst xmlns:a="http://schemas.openxmlformats.org/drawingml/2006/main">
               <a:ext uri="{FF2B5EF4-FFF2-40B4-BE49-F238E27FC236}">
-                <a16:creationId xmlns:a16="http://schemas.microsoft.com/office/drawing/2014/main" id="{3CF8DEE2-6FB8-4776-AE59-4DBCB1A39DCC}"/>
+                <a16:creationId xmlns:a16="http://schemas.microsoft.com/office/drawing/2014/main" id="{40784A77-8D1C-4E6A-9112-F87771A1B07C}"/>
               </a:ext>
             </a:extLst>
           </p:cNvPr>
@@ -3573,7 +3588,7 @@
           <p:cNvPr id="5" name="Slide Number Placeholder 4">
             <a:extLst xmlns:a="http://schemas.openxmlformats.org/drawingml/2006/main">
               <a:ext uri="{FF2B5EF4-FFF2-40B4-BE49-F238E27FC236}">
-                <a16:creationId xmlns:a16="http://schemas.microsoft.com/office/drawing/2014/main" id="{1D6C44F5-9566-4007-8D08-0DEF6619C439}"/>
+                <a16:creationId xmlns:a16="http://schemas.microsoft.com/office/drawing/2014/main" id="{80A06B20-2456-4BA0-A12B-D54E0E38B623}"/>
               </a:ext>
             </a:extLst>
           </p:cNvPr>
@@ -3618,7 +3633,7 @@
           <p:cNvPr id="2" name="Date Placeholder 1">
             <a:extLst xmlns:a="http://schemas.openxmlformats.org/drawingml/2006/main">
               <a:ext uri="{FF2B5EF4-FFF2-40B4-BE49-F238E27FC236}">
-                <a16:creationId xmlns:a16="http://schemas.microsoft.com/office/drawing/2014/main" id="{AF9B1D40-8355-4D83-AD86-A0E12FCB1B48}"/>
+                <a16:creationId xmlns:a16="http://schemas.microsoft.com/office/drawing/2014/main" id="{E4FABA2C-4C74-45F9-9314-84D2EFF2A641}"/>
               </a:ext>
             </a:extLst>
           </p:cNvPr>
@@ -3646,7 +3661,7 @@
           <p:cNvPr id="3" name="Footer Placeholder 2">
             <a:extLst xmlns:a="http://schemas.openxmlformats.org/drawingml/2006/main">
               <a:ext uri="{FF2B5EF4-FFF2-40B4-BE49-F238E27FC236}">
-                <a16:creationId xmlns:a16="http://schemas.microsoft.com/office/drawing/2014/main" id="{EF450DFB-8692-4589-8B03-00A7D8045596}"/>
+                <a16:creationId xmlns:a16="http://schemas.microsoft.com/office/drawing/2014/main" id="{7121CEED-FAF1-48CD-BE50-6E3E55AB185A}"/>
               </a:ext>
             </a:extLst>
           </p:cNvPr>
@@ -3671,7 +3686,7 @@
           <p:cNvPr id="4" name="Slide Number Placeholder 3">
             <a:extLst xmlns:a="http://schemas.openxmlformats.org/drawingml/2006/main">
               <a:ext uri="{FF2B5EF4-FFF2-40B4-BE49-F238E27FC236}">
-                <a16:creationId xmlns:a16="http://schemas.microsoft.com/office/drawing/2014/main" id="{0BF4205B-EC1E-4445-A743-C0E94EC3052D}"/>
+                <a16:creationId xmlns:a16="http://schemas.microsoft.com/office/drawing/2014/main" id="{9CCD978E-677C-486E-B237-736463913976}"/>
               </a:ext>
             </a:extLst>
           </p:cNvPr>
@@ -3716,7 +3731,7 @@
           <p:cNvPr id="2" name="Title 1">
             <a:extLst xmlns:a="http://schemas.openxmlformats.org/drawingml/2006/main">
               <a:ext uri="{FF2B5EF4-FFF2-40B4-BE49-F238E27FC236}">
-                <a16:creationId xmlns:a16="http://schemas.microsoft.com/office/drawing/2014/main" id="{8900DC6E-0BD4-4C42-9278-0FF36D621CDD}"/>
+                <a16:creationId xmlns:a16="http://schemas.microsoft.com/office/drawing/2014/main" id="{2C785611-CFC5-4A98-B111-8F22655D03F0}"/>
               </a:ext>
             </a:extLst>
           </p:cNvPr>
@@ -3754,7 +3769,7 @@
           <p:cNvPr id="3" name="Content Placeholder 2">
             <a:extLst xmlns:a="http://schemas.openxmlformats.org/drawingml/2006/main">
               <a:ext uri="{FF2B5EF4-FFF2-40B4-BE49-F238E27FC236}">
-                <a16:creationId xmlns:a16="http://schemas.microsoft.com/office/drawing/2014/main" id="{9AFB8AA3-0C15-4DAA-856A-C158A2D68C9C}"/>
+                <a16:creationId xmlns:a16="http://schemas.microsoft.com/office/drawing/2014/main" id="{85009941-4B8A-4EF4-9262-C028962FB82A}"/>
               </a:ext>
             </a:extLst>
           </p:cNvPr>
@@ -3859,7 +3874,7 @@
           <p:cNvPr id="4" name="Text Placeholder 3">
             <a:extLst xmlns:a="http://schemas.openxmlformats.org/drawingml/2006/main">
               <a:ext uri="{FF2B5EF4-FFF2-40B4-BE49-F238E27FC236}">
-                <a16:creationId xmlns:a16="http://schemas.microsoft.com/office/drawing/2014/main" id="{1023E3A8-6ED0-4E11-8523-8179EF4BA67E}"/>
+                <a16:creationId xmlns:a16="http://schemas.microsoft.com/office/drawing/2014/main" id="{F57FCBBE-A232-450B-B221-E5173C8D8262}"/>
               </a:ext>
             </a:extLst>
           </p:cNvPr>
@@ -3931,7 +3946,7 @@
           <p:cNvPr id="5" name="Date Placeholder 4">
             <a:extLst xmlns:a="http://schemas.openxmlformats.org/drawingml/2006/main">
               <a:ext uri="{FF2B5EF4-FFF2-40B4-BE49-F238E27FC236}">
-                <a16:creationId xmlns:a16="http://schemas.microsoft.com/office/drawing/2014/main" id="{423CC125-F9BE-4909-80F8-FA3806DF7FB7}"/>
+                <a16:creationId xmlns:a16="http://schemas.microsoft.com/office/drawing/2014/main" id="{9C06E129-F003-4637-82FE-F200110C7B76}"/>
               </a:ext>
             </a:extLst>
           </p:cNvPr>
@@ -3959,7 +3974,7 @@
           <p:cNvPr id="6" name="Footer Placeholder 5">
             <a:extLst xmlns:a="http://schemas.openxmlformats.org/drawingml/2006/main">
               <a:ext uri="{FF2B5EF4-FFF2-40B4-BE49-F238E27FC236}">
-                <a16:creationId xmlns:a16="http://schemas.microsoft.com/office/drawing/2014/main" id="{CF4B2DF9-51AA-4141-9B01-2808EE87381F}"/>
+                <a16:creationId xmlns:a16="http://schemas.microsoft.com/office/drawing/2014/main" id="{3A46B5A3-9FB4-4D25-91F2-A145753F3B01}"/>
               </a:ext>
             </a:extLst>
           </p:cNvPr>
@@ -3984,7 +3999,7 @@
           <p:cNvPr id="7" name="Slide Number Placeholder 6">
             <a:extLst xmlns:a="http://schemas.openxmlformats.org/drawingml/2006/main">
               <a:ext uri="{FF2B5EF4-FFF2-40B4-BE49-F238E27FC236}">
-                <a16:creationId xmlns:a16="http://schemas.microsoft.com/office/drawing/2014/main" id="{4F02F5C0-BAD1-41A1-B934-D7DC09118E3D}"/>
+                <a16:creationId xmlns:a16="http://schemas.microsoft.com/office/drawing/2014/main" id="{889C8863-1AD4-42EF-B1C8-3AA275550FC3}"/>
               </a:ext>
             </a:extLst>
           </p:cNvPr>
@@ -4029,7 +4044,7 @@
           <p:cNvPr id="2" name="Title 1">
             <a:extLst xmlns:a="http://schemas.openxmlformats.org/drawingml/2006/main">
               <a:ext uri="{FF2B5EF4-FFF2-40B4-BE49-F238E27FC236}">
-                <a16:creationId xmlns:a16="http://schemas.microsoft.com/office/drawing/2014/main" id="{1DF4ED85-6DD9-4D7B-A498-8745D3AD38EF}"/>
+                <a16:creationId xmlns:a16="http://schemas.microsoft.com/office/drawing/2014/main" id="{D8AEDFB0-A4F4-49CF-B520-ED04932F1977}"/>
               </a:ext>
             </a:extLst>
           </p:cNvPr>
@@ -4067,7 +4082,7 @@
           <p:cNvPr id="3" name="Picture Placeholder 2">
             <a:extLst xmlns:a="http://schemas.openxmlformats.org/drawingml/2006/main">
               <a:ext uri="{FF2B5EF4-FFF2-40B4-BE49-F238E27FC236}">
-                <a16:creationId xmlns:a16="http://schemas.microsoft.com/office/drawing/2014/main" id="{5E2ACE28-7EFF-45F4-8168-8EBE3115DFAD}"/>
+                <a16:creationId xmlns:a16="http://schemas.microsoft.com/office/drawing/2014/main" id="{21D980A6-72AE-4C46-81CF-951035B51819}"/>
               </a:ext>
             </a:extLst>
           </p:cNvPr>
@@ -4134,7 +4149,7 @@
           <p:cNvPr id="4" name="Text Placeholder 3">
             <a:extLst xmlns:a="http://schemas.openxmlformats.org/drawingml/2006/main">
               <a:ext uri="{FF2B5EF4-FFF2-40B4-BE49-F238E27FC236}">
-                <a16:creationId xmlns:a16="http://schemas.microsoft.com/office/drawing/2014/main" id="{A00C23AE-3C88-422A-921B-44BE77FC10E3}"/>
+                <a16:creationId xmlns:a16="http://schemas.microsoft.com/office/drawing/2014/main" id="{E12322C1-07CC-4FDC-8218-019B838B2F54}"/>
               </a:ext>
             </a:extLst>
           </p:cNvPr>
@@ -4206,7 +4221,7 @@
           <p:cNvPr id="5" name="Date Placeholder 4">
             <a:extLst xmlns:a="http://schemas.openxmlformats.org/drawingml/2006/main">
               <a:ext uri="{FF2B5EF4-FFF2-40B4-BE49-F238E27FC236}">
-                <a16:creationId xmlns:a16="http://schemas.microsoft.com/office/drawing/2014/main" id="{FC986876-46CA-49BB-9EFB-2A9705849E19}"/>
+                <a16:creationId xmlns:a16="http://schemas.microsoft.com/office/drawing/2014/main" id="{FF5C7BEA-51CA-49B6-81C9-134C118AB47F}"/>
               </a:ext>
             </a:extLst>
           </p:cNvPr>
@@ -4234,7 +4249,7 @@
           <p:cNvPr id="6" name="Footer Placeholder 5">
             <a:extLst xmlns:a="http://schemas.openxmlformats.org/drawingml/2006/main">
               <a:ext uri="{FF2B5EF4-FFF2-40B4-BE49-F238E27FC236}">
-                <a16:creationId xmlns:a16="http://schemas.microsoft.com/office/drawing/2014/main" id="{F89BE064-30A4-4B6D-9BD7-45A9FBB1A808}"/>
+                <a16:creationId xmlns:a16="http://schemas.microsoft.com/office/drawing/2014/main" id="{6A9DBD4F-43B1-4AD2-AB4A-D7D059281968}"/>
               </a:ext>
             </a:extLst>
           </p:cNvPr>
@@ -4259,7 +4274,7 @@
           <p:cNvPr id="7" name="Slide Number Placeholder 6">
             <a:extLst xmlns:a="http://schemas.openxmlformats.org/drawingml/2006/main">
               <a:ext uri="{FF2B5EF4-FFF2-40B4-BE49-F238E27FC236}">
-                <a16:creationId xmlns:a16="http://schemas.microsoft.com/office/drawing/2014/main" id="{C5301A1F-96A0-4A85-8D5F-65ACEF8B09AC}"/>
+                <a16:creationId xmlns:a16="http://schemas.microsoft.com/office/drawing/2014/main" id="{7CCF4926-653F-48A2-B10B-8A0C9483C0C0}"/>
               </a:ext>
             </a:extLst>
           </p:cNvPr>
@@ -4309,7 +4324,7 @@
           <p:cNvPr id="2" name="Title Placeholder 1">
             <a:extLst xmlns:a="http://schemas.openxmlformats.org/drawingml/2006/main">
               <a:ext uri="{FF2B5EF4-FFF2-40B4-BE49-F238E27FC236}">
-                <a16:creationId xmlns:a16="http://schemas.microsoft.com/office/drawing/2014/main" id="{B6918760-2135-45A2-8CEF-592C94CF64C6}"/>
+                <a16:creationId xmlns:a16="http://schemas.microsoft.com/office/drawing/2014/main" id="{82F14072-77CD-4895-9161-56F28FBF53A4}"/>
               </a:ext>
             </a:extLst>
           </p:cNvPr>
@@ -4347,7 +4362,7 @@
           <p:cNvPr id="3" name="Text Placeholder 2">
             <a:extLst xmlns:a="http://schemas.openxmlformats.org/drawingml/2006/main">
               <a:ext uri="{FF2B5EF4-FFF2-40B4-BE49-F238E27FC236}">
-                <a16:creationId xmlns:a16="http://schemas.microsoft.com/office/drawing/2014/main" id="{1F62161A-6F18-4D9A-95F2-5FD07F7E0329}"/>
+                <a16:creationId xmlns:a16="http://schemas.microsoft.com/office/drawing/2014/main" id="{A2338165-10E2-43FE-BED9-7A50A97192C5}"/>
               </a:ext>
             </a:extLst>
           </p:cNvPr>
@@ -4420,7 +4435,7 @@
           <p:cNvPr id="4" name="Date Placeholder 3">
             <a:extLst xmlns:a="http://schemas.openxmlformats.org/drawingml/2006/main">
               <a:ext uri="{FF2B5EF4-FFF2-40B4-BE49-F238E27FC236}">
-                <a16:creationId xmlns:a16="http://schemas.microsoft.com/office/drawing/2014/main" id="{0CBF27AE-2FA7-4858-8BCC-8407841AF563}"/>
+                <a16:creationId xmlns:a16="http://schemas.microsoft.com/office/drawing/2014/main" id="{0E5D2423-D0DB-4F96-AD3B-CD94DC5E4053}"/>
               </a:ext>
             </a:extLst>
           </p:cNvPr>
@@ -4467,7 +4482,7 @@
           <p:cNvPr id="5" name="Footer Placeholder 4">
             <a:extLst xmlns:a="http://schemas.openxmlformats.org/drawingml/2006/main">
               <a:ext uri="{FF2B5EF4-FFF2-40B4-BE49-F238E27FC236}">
-                <a16:creationId xmlns:a16="http://schemas.microsoft.com/office/drawing/2014/main" id="{6427334A-F150-4323-AF13-F4943BD06036}"/>
+                <a16:creationId xmlns:a16="http://schemas.microsoft.com/office/drawing/2014/main" id="{A4C3C3BE-8AA0-4F63-81F6-23E19DFA76AA}"/>
               </a:ext>
             </a:extLst>
           </p:cNvPr>
@@ -4511,7 +4526,7 @@
           <p:cNvPr id="6" name="Slide Number Placeholder 5">
             <a:extLst xmlns:a="http://schemas.openxmlformats.org/drawingml/2006/main">
               <a:ext uri="{FF2B5EF4-FFF2-40B4-BE49-F238E27FC236}">
-                <a16:creationId xmlns:a16="http://schemas.microsoft.com/office/drawing/2014/main" id="{4CAEEB15-A45E-4BC9-8445-9B02E8FABF05}"/>
+                <a16:creationId xmlns:a16="http://schemas.microsoft.com/office/drawing/2014/main" id="{46ED9F82-E47A-4C60-A328-068DDDC514E5}"/>
               </a:ext>
             </a:extLst>
           </p:cNvPr>
@@ -4557,17 +4572,17 @@
   </p:cSld>
   <p:clrMap bg1="lt1" tx1="dk1" bg2="lt2" tx2="dk2" accent1="accent1" accent2="accent2" accent3="accent3" accent4="accent4" accent5="accent5" accent6="accent6" hlink="hlink" folHlink="folHlink"/>
   <p:sldLayoutIdLst>
-    <p:sldLayoutId xmlns:r="http://schemas.openxmlformats.org/officeDocument/2006/relationships" id="2147483649" r:id="Rc48f0f98151c4176"/>
-    <p:sldLayoutId xmlns:r="http://schemas.openxmlformats.org/officeDocument/2006/relationships" id="2147483650" r:id="R63f553ccd6364678"/>
-    <p:sldLayoutId xmlns:r="http://schemas.openxmlformats.org/officeDocument/2006/relationships" id="2147483651" r:id="R446e6758563842e0"/>
-    <p:sldLayoutId xmlns:r="http://schemas.openxmlformats.org/officeDocument/2006/relationships" id="2147483652" r:id="R62d32fa62f7541db"/>
-    <p:sldLayoutId xmlns:r="http://schemas.openxmlformats.org/officeDocument/2006/relationships" id="2147483653" r:id="Rdebe2ca846484a5a"/>
-    <p:sldLayoutId xmlns:r="http://schemas.openxmlformats.org/officeDocument/2006/relationships" id="2147483654" r:id="R4e35f9d00b7b4c74"/>
-    <p:sldLayoutId xmlns:r="http://schemas.openxmlformats.org/officeDocument/2006/relationships" id="2147483655" r:id="R51de9662eb4744a0"/>
-    <p:sldLayoutId xmlns:r="http://schemas.openxmlformats.org/officeDocument/2006/relationships" id="2147483656" r:id="R360c5a003f474d4c"/>
-    <p:sldLayoutId xmlns:r="http://schemas.openxmlformats.org/officeDocument/2006/relationships" id="2147483657" r:id="R48e1d5fbe3ce4673"/>
-    <p:sldLayoutId xmlns:r="http://schemas.openxmlformats.org/officeDocument/2006/relationships" id="2147483658" r:id="R7bb1a1cc2d554994"/>
-    <p:sldLayoutId xmlns:r="http://schemas.openxmlformats.org/officeDocument/2006/relationships" id="2147483659" r:id="R9cca958b0d6846a2"/>
+    <p:sldLayoutId xmlns:r="http://schemas.openxmlformats.org/officeDocument/2006/relationships" id="2147483649" r:id="R65e2623160df4dd6"/>
+    <p:sldLayoutId xmlns:r="http://schemas.openxmlformats.org/officeDocument/2006/relationships" id="2147483650" r:id="R38110e15d9384813"/>
+    <p:sldLayoutId xmlns:r="http://schemas.openxmlformats.org/officeDocument/2006/relationships" id="2147483651" r:id="Rd4409d8e3e144a78"/>
+    <p:sldLayoutId xmlns:r="http://schemas.openxmlformats.org/officeDocument/2006/relationships" id="2147483652" r:id="R44d6c638be3a4cd0"/>
+    <p:sldLayoutId xmlns:r="http://schemas.openxmlformats.org/officeDocument/2006/relationships" id="2147483653" r:id="R7fe774aaf432407d"/>
+    <p:sldLayoutId xmlns:r="http://schemas.openxmlformats.org/officeDocument/2006/relationships" id="2147483654" r:id="R0414dbe39c2047cd"/>
+    <p:sldLayoutId xmlns:r="http://schemas.openxmlformats.org/officeDocument/2006/relationships" id="2147483655" r:id="R8c801c3c0dee4943"/>
+    <p:sldLayoutId xmlns:r="http://schemas.openxmlformats.org/officeDocument/2006/relationships" id="2147483656" r:id="Rf5f2eee6b2b64e3a"/>
+    <p:sldLayoutId xmlns:r="http://schemas.openxmlformats.org/officeDocument/2006/relationships" id="2147483657" r:id="R8b8ea25d04614827"/>
+    <p:sldLayoutId xmlns:r="http://schemas.openxmlformats.org/officeDocument/2006/relationships" id="2147483658" r:id="R529a6d65172a40e1"/>
+    <p:sldLayoutId xmlns:r="http://schemas.openxmlformats.org/officeDocument/2006/relationships" id="2147483659" r:id="R5220afb4e3f34b93"/>
   </p:sldLayoutIdLst>
   <p:txStyles>
     <p:titleStyle>
@@ -5113,7 +5128,7 @@
           <p:cNvPr id="2" name="Rectangle 1">
             <a:extLst xmlns:a="http://schemas.openxmlformats.org/drawingml/2006/main">
               <a:ext uri="{FF2B5EF4-FFF2-40B4-BE49-F238E27FC236}">
-                <a16:creationId xmlns:a16="http://schemas.microsoft.com/office/drawing/2014/main" id="{2E0670D0-33AC-4610-A7D2-D9E737FE3D5D}"/>
+                <a16:creationId xmlns:a16="http://schemas.microsoft.com/office/drawing/2014/main" id="{69BBDE0A-F882-44FC-ACFD-716BB2C8E951}"/>
               </a:ext>
             </a:extLst>
           </p:cNvPr>
@@ -5166,7 +5181,7 @@
           <p:cNvPr id="3" name="Rectangle 2">
             <a:extLst xmlns:a="http://schemas.openxmlformats.org/drawingml/2006/main">
               <a:ext uri="{FF2B5EF4-FFF2-40B4-BE49-F238E27FC236}">
-                <a16:creationId xmlns:a16="http://schemas.microsoft.com/office/drawing/2014/main" id="{139416A2-3918-4B38-8A76-53028EDBB4AC}"/>
+                <a16:creationId xmlns:a16="http://schemas.microsoft.com/office/drawing/2014/main" id="{C677D3C6-93AD-45CB-AD7E-452E6FC19EF7}"/>
               </a:ext>
             </a:extLst>
           </p:cNvPr>
@@ -5219,7 +5234,7 @@
           <p:cNvPr id="4" name="shape_slide_1_title">
             <a:extLst xmlns:a="http://schemas.openxmlformats.org/drawingml/2006/main">
               <a:ext uri="{FF2B5EF4-FFF2-40B4-BE49-F238E27FC236}">
-                <a16:creationId xmlns:a16="http://schemas.microsoft.com/office/drawing/2014/main" id="{198DDE49-776B-4696-9598-F7AE7362CE30}"/>
+                <a16:creationId xmlns:a16="http://schemas.microsoft.com/office/drawing/2014/main" id="{F8EE04D9-453A-4D77-8C63-4338CCC878F5}"/>
               </a:ext>
             </a:extLst>
           </p:cNvPr>
@@ -5332,7 +5347,7 @@
               </a:defRPr>
             </a:pPr>
             <a:r>
-              <a:t>[FIXTURE — PRE-CANONICAL RENDER TEST]</a:t>
+              <a:t>[CANONICAL CANDIDATE — PENDING ROOT FINAL REVIEW]</a:t>
             </a:r>
           </a:p>
         </p:txBody>
@@ -5340,7 +5355,7 @@
     </p:spTree>
     <p:extLst>
       <p:ext uri="{BB962C8B-B14F-4D97-AF65-F5344CB8AC3E}">
-        <p14:creationId xmlns:p14="http://schemas.microsoft.com/office/powerpoint/2010/main" val="495279310"/>
+        <p14:creationId xmlns:p14="http://schemas.microsoft.com/office/powerpoint/2010/main" val="1245122281"/>
       </p:ext>
     </p:extLst>
   </p:cSld>
@@ -5364,7 +5379,7 @@
           <p:cNvPr id="2" name="Rectangle 1">
             <a:extLst xmlns:a="http://schemas.openxmlformats.org/drawingml/2006/main">
               <a:ext uri="{FF2B5EF4-FFF2-40B4-BE49-F238E27FC236}">
-                <a16:creationId xmlns:a16="http://schemas.microsoft.com/office/drawing/2014/main" id="{D0F0DC23-B6AE-4649-A642-9B21BEEE9830}"/>
+                <a16:creationId xmlns:a16="http://schemas.microsoft.com/office/drawing/2014/main" id="{40520F2A-1B03-4BA7-AD73-9829C9F84B3C}"/>
               </a:ext>
             </a:extLst>
           </p:cNvPr>
@@ -5417,7 +5432,7 @@
           <p:cNvPr id="3" name="Rectangle 2">
             <a:extLst xmlns:a="http://schemas.openxmlformats.org/drawingml/2006/main">
               <a:ext uri="{FF2B5EF4-FFF2-40B4-BE49-F238E27FC236}">
-                <a16:creationId xmlns:a16="http://schemas.microsoft.com/office/drawing/2014/main" id="{0810DBE7-94AC-46EC-8D01-8511ACF1848C}"/>
+                <a16:creationId xmlns:a16="http://schemas.microsoft.com/office/drawing/2014/main" id="{27FFCA51-CFFB-4942-A90B-E915A003CBD2}"/>
               </a:ext>
             </a:extLst>
           </p:cNvPr>
@@ -5470,7 +5485,7 @@
           <p:cNvPr id="4" name="Rectangle 3">
             <a:extLst xmlns:a="http://schemas.openxmlformats.org/drawingml/2006/main">
               <a:ext uri="{FF2B5EF4-FFF2-40B4-BE49-F238E27FC236}">
-                <a16:creationId xmlns:a16="http://schemas.microsoft.com/office/drawing/2014/main" id="{DD73CF99-9BF1-46E0-9A5A-7F723AE5283C}"/>
+                <a16:creationId xmlns:a16="http://schemas.microsoft.com/office/drawing/2014/main" id="{1D827F19-2E9E-4AF3-B560-26568427A9FB}"/>
               </a:ext>
             </a:extLst>
           </p:cNvPr>
@@ -5523,7 +5538,7 @@
           <p:cNvPr id="5" name="TextBox 4">
             <a:extLst xmlns:a="http://schemas.openxmlformats.org/drawingml/2006/main">
               <a:ext uri="{FF2B5EF4-FFF2-40B4-BE49-F238E27FC236}">
-                <a16:creationId xmlns:a16="http://schemas.microsoft.com/office/drawing/2014/main" id="{51EA2672-A8C0-4BC9-A3B3-F742BA5ACF98}"/>
+                <a16:creationId xmlns:a16="http://schemas.microsoft.com/office/drawing/2014/main" id="{A7CED372-67EA-47A8-A8F9-132775447CAB}"/>
               </a:ext>
             </a:extLst>
           </p:cNvPr>
@@ -5576,7 +5591,7 @@
               </a:defRPr>
             </a:pPr>
             <a:r>
-              <a:t>Đánh giá khách quan các hạn chế kỹ thuật và phạm vi khoa học  |  [FIXTURE — PRE-CANONICAL RENDER TEST]</a:t>
+              <a:t>Đánh giá khách quan các hạn chế kỹ thuật và phạm vi khoa học  |  [CANONICAL CANDIDATE — PENDING ROOT FINAL REVIEW]</a:t>
             </a:r>
           </a:p>
         </p:txBody>
@@ -5586,7 +5601,7 @@
           <p:cNvPr id="6" name="shape_slide_10_limitations_1">
             <a:extLst xmlns:a="http://schemas.openxmlformats.org/drawingml/2006/main">
               <a:ext uri="{FF2B5EF4-FFF2-40B4-BE49-F238E27FC236}">
-                <a16:creationId xmlns:a16="http://schemas.microsoft.com/office/drawing/2014/main" id="{380E53C2-3018-408C-A5FC-A8319A50404B}"/>
+                <a16:creationId xmlns:a16="http://schemas.microsoft.com/office/drawing/2014/main" id="{1D9D8A51-8273-4D27-9540-B641F0E59FF4}"/>
               </a:ext>
             </a:extLst>
           </p:cNvPr>
@@ -5641,7 +5656,7 @@
           <p:cNvPr id="7" name="shape_slide_10_limitations_1_textbox">
             <a:extLst xmlns:a="http://schemas.openxmlformats.org/drawingml/2006/main">
               <a:ext uri="{FF2B5EF4-FFF2-40B4-BE49-F238E27FC236}">
-                <a16:creationId xmlns:a16="http://schemas.microsoft.com/office/drawing/2014/main" id="{D1BA875E-3D64-4D26-B38F-C5AD5748EE20}"/>
+                <a16:creationId xmlns:a16="http://schemas.microsoft.com/office/drawing/2014/main" id="{44496EB2-1061-41EE-BCBB-7DFDA84C6F78}"/>
               </a:ext>
             </a:extLst>
           </p:cNvPr>
@@ -5745,7 +5760,7 @@
           <p:cNvPr id="8" name="shape_slide_10_limitations_2">
             <a:extLst xmlns:a="http://schemas.openxmlformats.org/drawingml/2006/main">
               <a:ext uri="{FF2B5EF4-FFF2-40B4-BE49-F238E27FC236}">
-                <a16:creationId xmlns:a16="http://schemas.microsoft.com/office/drawing/2014/main" id="{1FAC2032-87F0-4291-B675-622E72E5EA72}"/>
+                <a16:creationId xmlns:a16="http://schemas.microsoft.com/office/drawing/2014/main" id="{DB50D121-4977-4D8F-B099-883BD111405F}"/>
               </a:ext>
             </a:extLst>
           </p:cNvPr>
@@ -5800,7 +5815,7 @@
           <p:cNvPr id="9" name="shape_slide_10_limitations_2_textbox">
             <a:extLst xmlns:a="http://schemas.openxmlformats.org/drawingml/2006/main">
               <a:ext uri="{FF2B5EF4-FFF2-40B4-BE49-F238E27FC236}">
-                <a16:creationId xmlns:a16="http://schemas.microsoft.com/office/drawing/2014/main" id="{1BDED55C-00C5-4A0E-A58F-E34AEB992EE9}"/>
+                <a16:creationId xmlns:a16="http://schemas.microsoft.com/office/drawing/2014/main" id="{596D5AEE-B3FC-40B8-B3FD-A08F5F6A6D5B}"/>
               </a:ext>
             </a:extLst>
           </p:cNvPr>
@@ -5885,7 +5900,7 @@
           <p:cNvPr id="10" name="shape_slide_10_limitations_3">
             <a:extLst xmlns:a="http://schemas.openxmlformats.org/drawingml/2006/main">
               <a:ext uri="{FF2B5EF4-FFF2-40B4-BE49-F238E27FC236}">
-                <a16:creationId xmlns:a16="http://schemas.microsoft.com/office/drawing/2014/main" id="{E2E2AE75-EA5A-4344-AD82-8B3C9A363B64}"/>
+                <a16:creationId xmlns:a16="http://schemas.microsoft.com/office/drawing/2014/main" id="{300CCE75-2283-4B06-81C8-956A30E9D82B}"/>
               </a:ext>
             </a:extLst>
           </p:cNvPr>
@@ -5940,7 +5955,7 @@
           <p:cNvPr id="11" name="shape_slide_10_limitations_3_textbox">
             <a:extLst xmlns:a="http://schemas.openxmlformats.org/drawingml/2006/main">
               <a:ext uri="{FF2B5EF4-FFF2-40B4-BE49-F238E27FC236}">
-                <a16:creationId xmlns:a16="http://schemas.microsoft.com/office/drawing/2014/main" id="{A1E6F981-9486-40F6-B683-42B7365FA315}"/>
+                <a16:creationId xmlns:a16="http://schemas.microsoft.com/office/drawing/2014/main" id="{F0E6CAE5-8B6C-442E-9CE3-982FE737BAC0}"/>
               </a:ext>
             </a:extLst>
           </p:cNvPr>
@@ -6042,7 +6057,7 @@
     </p:spTree>
     <p:extLst>
       <p:ext uri="{BB962C8B-B14F-4D97-AF65-F5344CB8AC3E}">
-        <p14:creationId xmlns:p14="http://schemas.microsoft.com/office/powerpoint/2010/main" val="1684372639"/>
+        <p14:creationId xmlns:p14="http://schemas.microsoft.com/office/powerpoint/2010/main" val="1275023620"/>
       </p:ext>
     </p:extLst>
   </p:cSld>
@@ -6066,7 +6081,7 @@
           <p:cNvPr id="2" name="Rectangle 1">
             <a:extLst xmlns:a="http://schemas.openxmlformats.org/drawingml/2006/main">
               <a:ext uri="{FF2B5EF4-FFF2-40B4-BE49-F238E27FC236}">
-                <a16:creationId xmlns:a16="http://schemas.microsoft.com/office/drawing/2014/main" id="{C893FC1B-790E-4285-BF1F-C1ABA206422B}"/>
+                <a16:creationId xmlns:a16="http://schemas.microsoft.com/office/drawing/2014/main" id="{D58FC03C-1919-48C7-B92F-3A50A0EF52B0}"/>
               </a:ext>
             </a:extLst>
           </p:cNvPr>
@@ -6119,7 +6134,7 @@
           <p:cNvPr id="3" name="Rectangle 2">
             <a:extLst xmlns:a="http://schemas.openxmlformats.org/drawingml/2006/main">
               <a:ext uri="{FF2B5EF4-FFF2-40B4-BE49-F238E27FC236}">
-                <a16:creationId xmlns:a16="http://schemas.microsoft.com/office/drawing/2014/main" id="{CA51345A-D2D2-4F71-AEE7-0508A04F2B63}"/>
+                <a16:creationId xmlns:a16="http://schemas.microsoft.com/office/drawing/2014/main" id="{E957A334-111D-415B-95CB-3CD2E9C2D5E5}"/>
               </a:ext>
             </a:extLst>
           </p:cNvPr>
@@ -6172,7 +6187,7 @@
           <p:cNvPr id="4" name="Rectangle 3">
             <a:extLst xmlns:a="http://schemas.openxmlformats.org/drawingml/2006/main">
               <a:ext uri="{FF2B5EF4-FFF2-40B4-BE49-F238E27FC236}">
-                <a16:creationId xmlns:a16="http://schemas.microsoft.com/office/drawing/2014/main" id="{0C1A8EB7-C8EA-4EF0-811D-F8819B2BD7A7}"/>
+                <a16:creationId xmlns:a16="http://schemas.microsoft.com/office/drawing/2014/main" id="{65169B91-07B8-4DB7-ADE9-E1F70400EA70}"/>
               </a:ext>
             </a:extLst>
           </p:cNvPr>
@@ -6225,7 +6240,7 @@
           <p:cNvPr id="5" name="TextBox 4">
             <a:extLst xmlns:a="http://schemas.openxmlformats.org/drawingml/2006/main">
               <a:ext uri="{FF2B5EF4-FFF2-40B4-BE49-F238E27FC236}">
-                <a16:creationId xmlns:a16="http://schemas.microsoft.com/office/drawing/2014/main" id="{9D33FCA8-7403-444E-AAB7-019D1D69441A}"/>
+                <a16:creationId xmlns:a16="http://schemas.microsoft.com/office/drawing/2014/main" id="{D3D569EA-B7CF-4E96-AD2A-5674C451A2D5}"/>
               </a:ext>
             </a:extLst>
           </p:cNvPr>
@@ -6278,7 +6293,7 @@
               </a:defRPr>
             </a:pPr>
             <a:r>
-              <a:t>Toàn bộ nghiên cứu có thể kiểm chứng ngoại tuyến với chi phí 0 đồng  |  [FIXTURE — PRE-CANONICAL RENDER TEST]</a:t>
+              <a:t>Toàn bộ nghiên cứu có thể kiểm chứng ngoại tuyến với chi phí 0 đồng  |  [CANONICAL CANDIDATE — PENDING ROOT FINAL REVIEW]</a:t>
             </a:r>
           </a:p>
         </p:txBody>
@@ -6288,7 +6303,7 @@
           <p:cNvPr id="6" name="shape_slide_11_reproducibility_1">
             <a:extLst xmlns:a="http://schemas.openxmlformats.org/drawingml/2006/main">
               <a:ext uri="{FF2B5EF4-FFF2-40B4-BE49-F238E27FC236}">
-                <a16:creationId xmlns:a16="http://schemas.microsoft.com/office/drawing/2014/main" id="{F30517E4-B0C1-4343-9C8D-E8906B417206}"/>
+                <a16:creationId xmlns:a16="http://schemas.microsoft.com/office/drawing/2014/main" id="{DF28226C-3CF9-4403-8363-FD51B6B50AF9}"/>
               </a:ext>
             </a:extLst>
           </p:cNvPr>
@@ -6343,7 +6358,7 @@
           <p:cNvPr id="7" name="shape_slide_11_reproducibility_1_textbox">
             <a:extLst xmlns:a="http://schemas.openxmlformats.org/drawingml/2006/main">
               <a:ext uri="{FF2B5EF4-FFF2-40B4-BE49-F238E27FC236}">
-                <a16:creationId xmlns:a16="http://schemas.microsoft.com/office/drawing/2014/main" id="{D036F198-D024-4EAF-A08C-0EBA3ADEEFC5}"/>
+                <a16:creationId xmlns:a16="http://schemas.microsoft.com/office/drawing/2014/main" id="{AD7564B6-D360-4E6F-AFC7-57C43CD90DA7}"/>
               </a:ext>
             </a:extLst>
           </p:cNvPr>
@@ -6542,7 +6557,7 @@
           <p:cNvPr id="8" name="shape_slide_11_reproducibility_2">
             <a:extLst xmlns:a="http://schemas.openxmlformats.org/drawingml/2006/main">
               <a:ext uri="{FF2B5EF4-FFF2-40B4-BE49-F238E27FC236}">
-                <a16:creationId xmlns:a16="http://schemas.microsoft.com/office/drawing/2014/main" id="{D8A5FBA8-F64C-47BC-9754-76468783C606}"/>
+                <a16:creationId xmlns:a16="http://schemas.microsoft.com/office/drawing/2014/main" id="{D8CBB29A-CE91-4338-B430-F172F1BDE01E}"/>
               </a:ext>
             </a:extLst>
           </p:cNvPr>
@@ -6597,7 +6612,7 @@
           <p:cNvPr id="9" name="shape_slide_11_reproducibility_2_textbox">
             <a:extLst xmlns:a="http://schemas.openxmlformats.org/drawingml/2006/main">
               <a:ext uri="{FF2B5EF4-FFF2-40B4-BE49-F238E27FC236}">
-                <a16:creationId xmlns:a16="http://schemas.microsoft.com/office/drawing/2014/main" id="{2A0253C7-A769-4C8C-9DCC-146E6993456A}"/>
+                <a16:creationId xmlns:a16="http://schemas.microsoft.com/office/drawing/2014/main" id="{8E07D969-5431-41DC-99BA-3522E0B4AC83}"/>
               </a:ext>
             </a:extLst>
           </p:cNvPr>
@@ -6718,7 +6733,7 @@
     </p:spTree>
     <p:extLst>
       <p:ext uri="{BB962C8B-B14F-4D97-AF65-F5344CB8AC3E}">
-        <p14:creationId xmlns:p14="http://schemas.microsoft.com/office/powerpoint/2010/main" val="977957585"/>
+        <p14:creationId xmlns:p14="http://schemas.microsoft.com/office/powerpoint/2010/main" val="2113122570"/>
       </p:ext>
     </p:extLst>
   </p:cSld>
@@ -6742,7 +6757,7 @@
           <p:cNvPr id="2" name="Rectangle 1">
             <a:extLst xmlns:a="http://schemas.openxmlformats.org/drawingml/2006/main">
               <a:ext uri="{FF2B5EF4-FFF2-40B4-BE49-F238E27FC236}">
-                <a16:creationId xmlns:a16="http://schemas.microsoft.com/office/drawing/2014/main" id="{7C587C29-53C1-4C5B-ADE5-A0573DD5A009}"/>
+                <a16:creationId xmlns:a16="http://schemas.microsoft.com/office/drawing/2014/main" id="{729D32E3-4A5A-4B52-99F4-745C48DABC13}"/>
               </a:ext>
             </a:extLst>
           </p:cNvPr>
@@ -6795,7 +6810,7 @@
           <p:cNvPr id="3" name="Rectangle 2">
             <a:extLst xmlns:a="http://schemas.openxmlformats.org/drawingml/2006/main">
               <a:ext uri="{FF2B5EF4-FFF2-40B4-BE49-F238E27FC236}">
-                <a16:creationId xmlns:a16="http://schemas.microsoft.com/office/drawing/2014/main" id="{CFAD6056-D755-46F8-8077-94AC3F5C4E2E}"/>
+                <a16:creationId xmlns:a16="http://schemas.microsoft.com/office/drawing/2014/main" id="{202F7F41-E46B-44FC-BBE1-2B5A95658CA6}"/>
               </a:ext>
             </a:extLst>
           </p:cNvPr>
@@ -6848,7 +6863,7 @@
           <p:cNvPr id="4" name="shape_slide_12_conclusion">
             <a:extLst xmlns:a="http://schemas.openxmlformats.org/drawingml/2006/main">
               <a:ext uri="{FF2B5EF4-FFF2-40B4-BE49-F238E27FC236}">
-                <a16:creationId xmlns:a16="http://schemas.microsoft.com/office/drawing/2014/main" id="{45BB537E-2203-4CA3-A90C-7783CA7472CC}"/>
+                <a16:creationId xmlns:a16="http://schemas.microsoft.com/office/drawing/2014/main" id="{A7675928-0A94-45EF-8DC8-6FDE789BB4DA}"/>
               </a:ext>
             </a:extLst>
           </p:cNvPr>
@@ -6923,7 +6938,7 @@
               </a:defRPr>
             </a:pPr>
             <a:r>
-              <a:t>•  RAG cung cấp tri thức nền tảng quan trọng; giả thuyết RQ2 về mức độ ảnh hưởng nhân quả của retrieval đang được kiểm chứng đối chứng trên ma trận TEST.</a:t>
+              <a:t>•  RAG cung cấp tri thức nền tảng quan trọng; kết quả đối chứng ghi nhận No-RAG đạt 77.99% (560/718) vs RAG k=10 quan sát thấy 79.53% (571/718, Delta = +1.532 pp, 95% CI [-2.355, +5.300] pp chứa 0, McNemar p = 0.4219 / 0.422 &gt; 0.05).</a:t>
             </a:r>
           </a:p>
           <a:p xmlns:a="http://schemas.openxmlformats.org/drawingml/2006/main">
@@ -6942,7 +6957,7 @@
               </a:defRPr>
             </a:pPr>
             <a:r>
-              <a:t>•  Phân rã lỗi D2i theo 3 trục đo lường độc lập (retrieval miss, downstream generation failure, joint overlap), ghi nhận phần giao thoa khác 0, không giả định độc lập xác suất ngẫu nhiên.</a:t>
+              <a:t>•  Phân rã lỗi D2i theo 3 trục đo lường độc lập (retrieval miss, downstream generation failure, joint overlap), ghi nhận phần giao thoa khác 0; ghi nhận 0 terminal provider failures trên 3,590 scorable records.</a:t>
             </a:r>
           </a:p>
           <a:p xmlns:a="http://schemas.openxmlformats.org/drawingml/2006/main">
@@ -7037,7 +7052,7 @@
               </a:defRPr>
             </a:pPr>
             <a:r>
-              <a:t>[FIXTURE — PRE-CANONICAL RENDER TEST]</a:t>
+              <a:t>[CANONICAL CANDIDATE — PENDING ROOT FINAL REVIEW]</a:t>
             </a:r>
           </a:p>
         </p:txBody>
@@ -7045,7 +7060,7 @@
     </p:spTree>
     <p:extLst>
       <p:ext uri="{BB962C8B-B14F-4D97-AF65-F5344CB8AC3E}">
-        <p14:creationId xmlns:p14="http://schemas.microsoft.com/office/powerpoint/2010/main" val="2106623814"/>
+        <p14:creationId xmlns:p14="http://schemas.microsoft.com/office/powerpoint/2010/main" val="570915367"/>
       </p:ext>
     </p:extLst>
   </p:cSld>
@@ -7069,7 +7084,7 @@
           <p:cNvPr id="2" name="Rectangle 1">
             <a:extLst xmlns:a="http://schemas.openxmlformats.org/drawingml/2006/main">
               <a:ext uri="{FF2B5EF4-FFF2-40B4-BE49-F238E27FC236}">
-                <a16:creationId xmlns:a16="http://schemas.microsoft.com/office/drawing/2014/main" id="{32719F6C-61EF-44E9-B297-CA39787C2F32}"/>
+                <a16:creationId xmlns:a16="http://schemas.microsoft.com/office/drawing/2014/main" id="{B4B7B1C4-ED8A-4A61-8DD5-84578764B210}"/>
               </a:ext>
             </a:extLst>
           </p:cNvPr>
@@ -7122,7 +7137,7 @@
           <p:cNvPr id="3" name="Rectangle 2">
             <a:extLst xmlns:a="http://schemas.openxmlformats.org/drawingml/2006/main">
               <a:ext uri="{FF2B5EF4-FFF2-40B4-BE49-F238E27FC236}">
-                <a16:creationId xmlns:a16="http://schemas.microsoft.com/office/drawing/2014/main" id="{8685632C-B54C-4C6F-91BA-003FD8514443}"/>
+                <a16:creationId xmlns:a16="http://schemas.microsoft.com/office/drawing/2014/main" id="{5ED88CA9-747B-4B15-9007-DE0C43EC4220}"/>
               </a:ext>
             </a:extLst>
           </p:cNvPr>
@@ -7175,7 +7190,7 @@
           <p:cNvPr id="4" name="Rectangle 3">
             <a:extLst xmlns:a="http://schemas.openxmlformats.org/drawingml/2006/main">
               <a:ext uri="{FF2B5EF4-FFF2-40B4-BE49-F238E27FC236}">
-                <a16:creationId xmlns:a16="http://schemas.microsoft.com/office/drawing/2014/main" id="{DE413F76-7B11-474C-988F-94061B165968}"/>
+                <a16:creationId xmlns:a16="http://schemas.microsoft.com/office/drawing/2014/main" id="{2E30F82F-DD27-4284-B91F-F5EBE25DB5B8}"/>
               </a:ext>
             </a:extLst>
           </p:cNvPr>
@@ -7228,7 +7243,7 @@
           <p:cNvPr id="5" name="TextBox 4">
             <a:extLst xmlns:a="http://schemas.openxmlformats.org/drawingml/2006/main">
               <a:ext uri="{FF2B5EF4-FFF2-40B4-BE49-F238E27FC236}">
-                <a16:creationId xmlns:a16="http://schemas.microsoft.com/office/drawing/2014/main" id="{59577318-F879-4E42-9844-AD06075CD112}"/>
+                <a16:creationId xmlns:a16="http://schemas.microsoft.com/office/drawing/2014/main" id="{6BD838B9-9218-4D3A-B6C2-6C619916DE36}"/>
               </a:ext>
             </a:extLst>
           </p:cNvPr>
@@ -7281,7 +7296,7 @@
               </a:defRPr>
             </a:pPr>
             <a:r>
-              <a:t>Khoảng cách giữa nhật ký cấp thấp (Telemetry) và ma trận kỹ thuật ATT&amp;CK  |  [FIXTURE — PRE-CANONICAL RENDER TEST]</a:t>
+              <a:t>Khoảng cách giữa nhật ký cấp thấp (Telemetry) và ma trận kỹ thuật ATT&amp;CK  |  [CANONICAL CANDIDATE — PENDING ROOT FINAL REVIEW]</a:t>
             </a:r>
           </a:p>
         </p:txBody>
@@ -7291,7 +7306,7 @@
           <p:cNvPr id="6" name="shape_slide_2_problem">
             <a:extLst xmlns:a="http://schemas.openxmlformats.org/drawingml/2006/main">
               <a:ext uri="{FF2B5EF4-FFF2-40B4-BE49-F238E27FC236}">
-                <a16:creationId xmlns:a16="http://schemas.microsoft.com/office/drawing/2014/main" id="{46709AD7-BAFA-4539-94C8-2AD04F617263}"/>
+                <a16:creationId xmlns:a16="http://schemas.microsoft.com/office/drawing/2014/main" id="{6FFDCB39-2EFB-4987-AA90-39F497B216C6}"/>
               </a:ext>
             </a:extLst>
           </p:cNvPr>
@@ -7346,7 +7361,7 @@
           <p:cNvPr id="7" name="shape_slide_2_problem_textbox">
             <a:extLst xmlns:a="http://schemas.openxmlformats.org/drawingml/2006/main">
               <a:ext uri="{FF2B5EF4-FFF2-40B4-BE49-F238E27FC236}">
-                <a16:creationId xmlns:a16="http://schemas.microsoft.com/office/drawing/2014/main" id="{1157446E-265C-4D30-B18D-C7661C7DAE77}"/>
+                <a16:creationId xmlns:a16="http://schemas.microsoft.com/office/drawing/2014/main" id="{86A5F9E3-3768-48FB-BC28-8A7CFDCE23D2}"/>
               </a:ext>
             </a:extLst>
           </p:cNvPr>
@@ -7450,7 +7465,7 @@
           <p:cNvPr id="8" name="shape_slide_2_challenge">
             <a:extLst xmlns:a="http://schemas.openxmlformats.org/drawingml/2006/main">
               <a:ext uri="{FF2B5EF4-FFF2-40B4-BE49-F238E27FC236}">
-                <a16:creationId xmlns:a16="http://schemas.microsoft.com/office/drawing/2014/main" id="{04C730EF-1905-4951-9BA8-28F1D39615AA}"/>
+                <a16:creationId xmlns:a16="http://schemas.microsoft.com/office/drawing/2014/main" id="{794731FA-C678-4DED-A35E-631FA7593A7B}"/>
               </a:ext>
             </a:extLst>
           </p:cNvPr>
@@ -7505,7 +7520,7 @@
           <p:cNvPr id="9" name="shape_slide_2_challenge_textbox">
             <a:extLst xmlns:a="http://schemas.openxmlformats.org/drawingml/2006/main">
               <a:ext uri="{FF2B5EF4-FFF2-40B4-BE49-F238E27FC236}">
-                <a16:creationId xmlns:a16="http://schemas.microsoft.com/office/drawing/2014/main" id="{A6C6F704-B5F6-4B5C-9114-E05D82DD8D0A}"/>
+                <a16:creationId xmlns:a16="http://schemas.microsoft.com/office/drawing/2014/main" id="{79900B27-C0C4-4ABB-AC65-D75CF82505D5}"/>
               </a:ext>
             </a:extLst>
           </p:cNvPr>
@@ -7609,7 +7624,7 @@
           <p:cNvPr id="10" name="shape_slide_2_motivation">
             <a:extLst xmlns:a="http://schemas.openxmlformats.org/drawingml/2006/main">
               <a:ext uri="{FF2B5EF4-FFF2-40B4-BE49-F238E27FC236}">
-                <a16:creationId xmlns:a16="http://schemas.microsoft.com/office/drawing/2014/main" id="{A9F66B8E-D853-4FCB-B32C-82FE916B0086}"/>
+                <a16:creationId xmlns:a16="http://schemas.microsoft.com/office/drawing/2014/main" id="{12D0A04D-8081-4B88-8C4B-A0C1E8D77786}"/>
               </a:ext>
             </a:extLst>
           </p:cNvPr>
@@ -7664,7 +7679,7 @@
           <p:cNvPr id="11" name="shape_slide_2_motivation_textbox">
             <a:extLst xmlns:a="http://schemas.openxmlformats.org/drawingml/2006/main">
               <a:ext uri="{FF2B5EF4-FFF2-40B4-BE49-F238E27FC236}">
-                <a16:creationId xmlns:a16="http://schemas.microsoft.com/office/drawing/2014/main" id="{7402306B-B5B5-40CF-A1E4-2E6F9BC68F72}"/>
+                <a16:creationId xmlns:a16="http://schemas.microsoft.com/office/drawing/2014/main" id="{2CE2FC6A-4DE5-4F12-89F6-E0D6326FC8BB}"/>
               </a:ext>
             </a:extLst>
           </p:cNvPr>
@@ -7823,7 +7838,7 @@
     </p:spTree>
     <p:extLst>
       <p:ext uri="{BB962C8B-B14F-4D97-AF65-F5344CB8AC3E}">
-        <p14:creationId xmlns:p14="http://schemas.microsoft.com/office/powerpoint/2010/main" val="814744108"/>
+        <p14:creationId xmlns:p14="http://schemas.microsoft.com/office/powerpoint/2010/main" val="1366932537"/>
       </p:ext>
     </p:extLst>
   </p:cSld>
@@ -7847,7 +7862,7 @@
           <p:cNvPr id="2" name="Rectangle 1">
             <a:extLst xmlns:a="http://schemas.openxmlformats.org/drawingml/2006/main">
               <a:ext uri="{FF2B5EF4-FFF2-40B4-BE49-F238E27FC236}">
-                <a16:creationId xmlns:a16="http://schemas.microsoft.com/office/drawing/2014/main" id="{59A43052-2D55-41F0-8C2B-8BFE0AD13AFC}"/>
+                <a16:creationId xmlns:a16="http://schemas.microsoft.com/office/drawing/2014/main" id="{F0BEEE28-D6E0-4306-9EA1-6E0B4CEB555F}"/>
               </a:ext>
             </a:extLst>
           </p:cNvPr>
@@ -7900,7 +7915,7 @@
           <p:cNvPr id="3" name="Rectangle 2">
             <a:extLst xmlns:a="http://schemas.openxmlformats.org/drawingml/2006/main">
               <a:ext uri="{FF2B5EF4-FFF2-40B4-BE49-F238E27FC236}">
-                <a16:creationId xmlns:a16="http://schemas.microsoft.com/office/drawing/2014/main" id="{02F22B5D-0B8F-4F1B-B727-B193E12C6A8E}"/>
+                <a16:creationId xmlns:a16="http://schemas.microsoft.com/office/drawing/2014/main" id="{F35E0874-0799-49D7-90DC-946A79EC4D30}"/>
               </a:ext>
             </a:extLst>
           </p:cNvPr>
@@ -7953,7 +7968,7 @@
           <p:cNvPr id="4" name="Rectangle 3">
             <a:extLst xmlns:a="http://schemas.openxmlformats.org/drawingml/2006/main">
               <a:ext uri="{FF2B5EF4-FFF2-40B4-BE49-F238E27FC236}">
-                <a16:creationId xmlns:a16="http://schemas.microsoft.com/office/drawing/2014/main" id="{265DDD45-BBCB-44FB-9E54-6BBACABED3CF}"/>
+                <a16:creationId xmlns:a16="http://schemas.microsoft.com/office/drawing/2014/main" id="{000E409A-2C48-401D-A02F-07F36C849E3F}"/>
               </a:ext>
             </a:extLst>
           </p:cNvPr>
@@ -8006,7 +8021,7 @@
           <p:cNvPr id="5" name="TextBox 4">
             <a:extLst xmlns:a="http://schemas.openxmlformats.org/drawingml/2006/main">
               <a:ext uri="{FF2B5EF4-FFF2-40B4-BE49-F238E27FC236}">
-                <a16:creationId xmlns:a16="http://schemas.microsoft.com/office/drawing/2014/main" id="{F00663B2-4394-4D91-9A1D-D66C25F52059}"/>
+                <a16:creationId xmlns:a16="http://schemas.microsoft.com/office/drawing/2014/main" id="{3951DA14-F931-4B66-87B3-DC74BE01CFDE}"/>
               </a:ext>
             </a:extLst>
           </p:cNvPr>
@@ -8059,7 +8074,7 @@
               </a:defRPr>
             </a:pPr>
             <a:r>
-              <a:t>So sánh đối đầu giữa Baseline (No-RAG) và Experimental (RAG)  |  [FIXTURE — PRE-CANONICAL RENDER TEST]</a:t>
+              <a:t>So sánh đối đầu giữa Baseline (No-RAG) và Experimental (RAG)  |  [CANONICAL CANDIDATE — PENDING ROOT FINAL REVIEW]</a:t>
             </a:r>
           </a:p>
         </p:txBody>
@@ -8069,7 +8084,7 @@
           <p:cNvPr id="6" name="shape_slide_3_baseline">
             <a:extLst xmlns:a="http://schemas.openxmlformats.org/drawingml/2006/main">
               <a:ext uri="{FF2B5EF4-FFF2-40B4-BE49-F238E27FC236}">
-                <a16:creationId xmlns:a16="http://schemas.microsoft.com/office/drawing/2014/main" id="{4B0FA7FA-5597-4CA1-9C04-5EB654132E48}"/>
+                <a16:creationId xmlns:a16="http://schemas.microsoft.com/office/drawing/2014/main" id="{9F3BEA34-6FB7-40D3-91CB-A332ED6DAF83}"/>
               </a:ext>
             </a:extLst>
           </p:cNvPr>
@@ -8124,7 +8139,7 @@
           <p:cNvPr id="7" name="shape_slide_3_baseline_textbox">
             <a:extLst xmlns:a="http://schemas.openxmlformats.org/drawingml/2006/main">
               <a:ext uri="{FF2B5EF4-FFF2-40B4-BE49-F238E27FC236}">
-                <a16:creationId xmlns:a16="http://schemas.microsoft.com/office/drawing/2014/main" id="{85300203-AE34-48A8-9B01-56ABC979D234}"/>
+                <a16:creationId xmlns:a16="http://schemas.microsoft.com/office/drawing/2014/main" id="{F681C40D-FF20-461C-BFF2-748FD28C6EEE}"/>
               </a:ext>
             </a:extLst>
           </p:cNvPr>
@@ -8247,7 +8262,7 @@
           <p:cNvPr id="8" name="shape_slide_3_rag">
             <a:extLst xmlns:a="http://schemas.openxmlformats.org/drawingml/2006/main">
               <a:ext uri="{FF2B5EF4-FFF2-40B4-BE49-F238E27FC236}">
-                <a16:creationId xmlns:a16="http://schemas.microsoft.com/office/drawing/2014/main" id="{0B830EC3-5A70-4C78-AA89-7A64D6ABD2BD}"/>
+                <a16:creationId xmlns:a16="http://schemas.microsoft.com/office/drawing/2014/main" id="{F09A6A47-BD43-457B-BE3E-9A711A7C6F4D}"/>
               </a:ext>
             </a:extLst>
           </p:cNvPr>
@@ -8302,7 +8317,7 @@
           <p:cNvPr id="9" name="shape_slide_3_rag_textbox">
             <a:extLst xmlns:a="http://schemas.openxmlformats.org/drawingml/2006/main">
               <a:ext uri="{FF2B5EF4-FFF2-40B4-BE49-F238E27FC236}">
-                <a16:creationId xmlns:a16="http://schemas.microsoft.com/office/drawing/2014/main" id="{8D5EFA97-17CB-4E08-8E7F-1E456E99394A}"/>
+                <a16:creationId xmlns:a16="http://schemas.microsoft.com/office/drawing/2014/main" id="{92032383-D5FB-4A04-8229-1753BA340236}"/>
               </a:ext>
             </a:extLst>
           </p:cNvPr>
@@ -8444,7 +8459,7 @@
           <p:cNvPr id="10" name="shape_slide_3_invariants">
             <a:extLst xmlns:a="http://schemas.openxmlformats.org/drawingml/2006/main">
               <a:ext uri="{FF2B5EF4-FFF2-40B4-BE49-F238E27FC236}">
-                <a16:creationId xmlns:a16="http://schemas.microsoft.com/office/drawing/2014/main" id="{C3059857-F3A6-4466-9266-2F9B7AFCC9FE}"/>
+                <a16:creationId xmlns:a16="http://schemas.microsoft.com/office/drawing/2014/main" id="{E6878244-FE89-4F2D-8DD0-7208DE663E52}"/>
               </a:ext>
             </a:extLst>
           </p:cNvPr>
@@ -8499,7 +8514,7 @@
           <p:cNvPr id="11" name="shape_slide_3_invariants_textbox">
             <a:extLst xmlns:a="http://schemas.openxmlformats.org/drawingml/2006/main">
               <a:ext uri="{FF2B5EF4-FFF2-40B4-BE49-F238E27FC236}">
-                <a16:creationId xmlns:a16="http://schemas.microsoft.com/office/drawing/2014/main" id="{5CB3490C-929F-49E7-A082-22AD04E36641}"/>
+                <a16:creationId xmlns:a16="http://schemas.microsoft.com/office/drawing/2014/main" id="{B72E4587-C4C9-4F2E-956C-47A05BD2AB28}"/>
               </a:ext>
             </a:extLst>
           </p:cNvPr>
@@ -8601,7 +8616,7 @@
     </p:spTree>
     <p:extLst>
       <p:ext uri="{BB962C8B-B14F-4D97-AF65-F5344CB8AC3E}">
-        <p14:creationId xmlns:p14="http://schemas.microsoft.com/office/powerpoint/2010/main" val="1479848425"/>
+        <p14:creationId xmlns:p14="http://schemas.microsoft.com/office/powerpoint/2010/main" val="1992252122"/>
       </p:ext>
     </p:extLst>
   </p:cSld>
@@ -8625,7 +8640,7 @@
           <p:cNvPr id="2" name="Rectangle 1">
             <a:extLst xmlns:a="http://schemas.openxmlformats.org/drawingml/2006/main">
               <a:ext uri="{FF2B5EF4-FFF2-40B4-BE49-F238E27FC236}">
-                <a16:creationId xmlns:a16="http://schemas.microsoft.com/office/drawing/2014/main" id="{72DDE5EC-BE22-44BD-817B-E699455D11E3}"/>
+                <a16:creationId xmlns:a16="http://schemas.microsoft.com/office/drawing/2014/main" id="{FAFCCE76-069D-4981-A6BD-749606AAD8A7}"/>
               </a:ext>
             </a:extLst>
           </p:cNvPr>
@@ -8678,7 +8693,7 @@
           <p:cNvPr id="3" name="Rectangle 2">
             <a:extLst xmlns:a="http://schemas.openxmlformats.org/drawingml/2006/main">
               <a:ext uri="{FF2B5EF4-FFF2-40B4-BE49-F238E27FC236}">
-                <a16:creationId xmlns:a16="http://schemas.microsoft.com/office/drawing/2014/main" id="{F8A2D425-344E-4F6E-936A-86EDF4CC3009}"/>
+                <a16:creationId xmlns:a16="http://schemas.microsoft.com/office/drawing/2014/main" id="{7110D5AD-E32D-477E-A40D-558EA9DE1645}"/>
               </a:ext>
             </a:extLst>
           </p:cNvPr>
@@ -8731,7 +8746,7 @@
           <p:cNvPr id="4" name="Rectangle 3">
             <a:extLst xmlns:a="http://schemas.openxmlformats.org/drawingml/2006/main">
               <a:ext uri="{FF2B5EF4-FFF2-40B4-BE49-F238E27FC236}">
-                <a16:creationId xmlns:a16="http://schemas.microsoft.com/office/drawing/2014/main" id="{825E863E-3915-4AAA-86FF-09989047A5B6}"/>
+                <a16:creationId xmlns:a16="http://schemas.microsoft.com/office/drawing/2014/main" id="{206BC9BD-7071-4D52-9A5B-82207B65E616}"/>
               </a:ext>
             </a:extLst>
           </p:cNvPr>
@@ -8784,7 +8799,7 @@
           <p:cNvPr id="5" name="TextBox 4">
             <a:extLst xmlns:a="http://schemas.openxmlformats.org/drawingml/2006/main">
               <a:ext uri="{FF2B5EF4-FFF2-40B4-BE49-F238E27FC236}">
-                <a16:creationId xmlns:a16="http://schemas.microsoft.com/office/drawing/2014/main" id="{4A87939F-2C1E-47AA-A846-E45F63529753}"/>
+                <a16:creationId xmlns:a16="http://schemas.microsoft.com/office/drawing/2014/main" id="{75EE674E-6C0E-460D-93D4-C8460074863E}"/>
               </a:ext>
             </a:extLst>
           </p:cNvPr>
@@ -8837,7 +8852,7 @@
               </a:defRPr>
             </a:pPr>
             <a:r>
-              <a:t>Bộ dữ liệu chuẩn đóng băng Stage B (670 cặp kịch bản, 1,340 views)  |  [FIXTURE — PRE-CANONICAL RENDER TEST]</a:t>
+              <a:t>Bộ dữ liệu chuẩn đóng băng Stage B (670 cặp kịch bản, 1,340 views)  |  [CANONICAL CANDIDATE — PENDING ROOT FINAL REVIEW]</a:t>
             </a:r>
           </a:p>
         </p:txBody>
@@ -8847,7 +8862,7 @@
           <p:cNvPr id="6" name="shape_slide_4_dataset_topology">
             <a:extLst xmlns:a="http://schemas.openxmlformats.org/drawingml/2006/main">
               <a:ext uri="{FF2B5EF4-FFF2-40B4-BE49-F238E27FC236}">
-                <a16:creationId xmlns:a16="http://schemas.microsoft.com/office/drawing/2014/main" id="{2EA0E96A-00C1-4728-A5C6-BBCEF2DD0EFF}"/>
+                <a16:creationId xmlns:a16="http://schemas.microsoft.com/office/drawing/2014/main" id="{E36E318D-8030-4BB0-985A-BA942D55AD65}"/>
               </a:ext>
             </a:extLst>
           </p:cNvPr>
@@ -8902,7 +8917,7 @@
           <p:cNvPr id="7" name="shape_slide_4_dataset_topology_textbox">
             <a:extLst xmlns:a="http://schemas.openxmlformats.org/drawingml/2006/main">
               <a:ext uri="{FF2B5EF4-FFF2-40B4-BE49-F238E27FC236}">
-                <a16:creationId xmlns:a16="http://schemas.microsoft.com/office/drawing/2014/main" id="{EF944E9C-B351-4E30-8A18-50DDD1D4D083}"/>
+                <a16:creationId xmlns:a16="http://schemas.microsoft.com/office/drawing/2014/main" id="{D62D2FC6-495C-4EE3-8881-9738102DF984}"/>
               </a:ext>
             </a:extLst>
           </p:cNvPr>
@@ -9082,7 +9097,7 @@
           <p:cNvPr id="8" name="shape_slide_4_representations">
             <a:extLst xmlns:a="http://schemas.openxmlformats.org/drawingml/2006/main">
               <a:ext uri="{FF2B5EF4-FFF2-40B4-BE49-F238E27FC236}">
-                <a16:creationId xmlns:a16="http://schemas.microsoft.com/office/drawing/2014/main" id="{7C8ACE77-14BE-4776-9A26-101BE0479D4C}"/>
+                <a16:creationId xmlns:a16="http://schemas.microsoft.com/office/drawing/2014/main" id="{80570270-4566-435D-AD63-038A896ACC16}"/>
               </a:ext>
             </a:extLst>
           </p:cNvPr>
@@ -9137,7 +9152,7 @@
           <p:cNvPr id="9" name="shape_slide_4_representations_textbox">
             <a:extLst xmlns:a="http://schemas.openxmlformats.org/drawingml/2006/main">
               <a:ext uri="{FF2B5EF4-FFF2-40B4-BE49-F238E27FC236}">
-                <a16:creationId xmlns:a16="http://schemas.microsoft.com/office/drawing/2014/main" id="{ECA5FA40-4EFD-46F2-91C7-7D59C7235BF4}"/>
+                <a16:creationId xmlns:a16="http://schemas.microsoft.com/office/drawing/2014/main" id="{4C0A4DF3-9F4F-40EE-8EF7-1C410400ECE8}"/>
               </a:ext>
             </a:extLst>
           </p:cNvPr>
@@ -9296,7 +9311,7 @@
     </p:spTree>
     <p:extLst>
       <p:ext uri="{BB962C8B-B14F-4D97-AF65-F5344CB8AC3E}">
-        <p14:creationId xmlns:p14="http://schemas.microsoft.com/office/powerpoint/2010/main" val="1460704126"/>
+        <p14:creationId xmlns:p14="http://schemas.microsoft.com/office/powerpoint/2010/main" val="888143910"/>
       </p:ext>
     </p:extLst>
   </p:cSld>
@@ -9320,7 +9335,7 @@
           <p:cNvPr id="2" name="Rectangle 1">
             <a:extLst xmlns:a="http://schemas.openxmlformats.org/drawingml/2006/main">
               <a:ext uri="{FF2B5EF4-FFF2-40B4-BE49-F238E27FC236}">
-                <a16:creationId xmlns:a16="http://schemas.microsoft.com/office/drawing/2014/main" id="{6A0B5C3C-1E3B-4613-886E-6AF08E9BA367}"/>
+                <a16:creationId xmlns:a16="http://schemas.microsoft.com/office/drawing/2014/main" id="{A4182417-B900-48CE-97F2-394CF6A58942}"/>
               </a:ext>
             </a:extLst>
           </p:cNvPr>
@@ -9373,7 +9388,7 @@
           <p:cNvPr id="3" name="Rectangle 2">
             <a:extLst xmlns:a="http://schemas.openxmlformats.org/drawingml/2006/main">
               <a:ext uri="{FF2B5EF4-FFF2-40B4-BE49-F238E27FC236}">
-                <a16:creationId xmlns:a16="http://schemas.microsoft.com/office/drawing/2014/main" id="{9F751F65-0C76-49DA-B629-A7DCF0B530B6}"/>
+                <a16:creationId xmlns:a16="http://schemas.microsoft.com/office/drawing/2014/main" id="{A9D02C40-600F-4DDE-947C-CDBBE7DEAC7C}"/>
               </a:ext>
             </a:extLst>
           </p:cNvPr>
@@ -9426,7 +9441,7 @@
           <p:cNvPr id="4" name="Rectangle 3">
             <a:extLst xmlns:a="http://schemas.openxmlformats.org/drawingml/2006/main">
               <a:ext uri="{FF2B5EF4-FFF2-40B4-BE49-F238E27FC236}">
-                <a16:creationId xmlns:a16="http://schemas.microsoft.com/office/drawing/2014/main" id="{321E74DE-652A-4180-97D4-86C989E4B825}"/>
+                <a16:creationId xmlns:a16="http://schemas.microsoft.com/office/drawing/2014/main" id="{BEEED8FA-FAA2-4029-A8D8-D6DC67916387}"/>
               </a:ext>
             </a:extLst>
           </p:cNvPr>
@@ -9479,7 +9494,7 @@
           <p:cNvPr id="5" name="TextBox 4">
             <a:extLst xmlns:a="http://schemas.openxmlformats.org/drawingml/2006/main">
               <a:ext uri="{FF2B5EF4-FFF2-40B4-BE49-F238E27FC236}">
-                <a16:creationId xmlns:a16="http://schemas.microsoft.com/office/drawing/2014/main" id="{4E4A712A-E95C-42EF-9E38-D4D827432E1D}"/>
+                <a16:creationId xmlns:a16="http://schemas.microsoft.com/office/drawing/2014/main" id="{A6139722-BD84-41FE-A94A-C80597118344}"/>
               </a:ext>
             </a:extLst>
           </p:cNvPr>
@@ -9532,7 +9547,7 @@
               </a:defRPr>
             </a:pPr>
             <a:r>
-              <a:t>Tách bạch rõ ràng 7 quyết định giao thức khoa học D1-D7 đóng băng  |  [FIXTURE — PRE-CANONICAL RENDER TEST]</a:t>
+              <a:t>Tách bạch rõ ràng 7 quyết định giao thức khoa học D1-D7 đóng băng  |  [CANONICAL CANDIDATE — PENDING ROOT FINAL REVIEW]</a:t>
             </a:r>
           </a:p>
         </p:txBody>
@@ -9542,7 +9557,7 @@
           <p:cNvPr id="6" name="shape_slide_5_decisions">
             <a:extLst xmlns:a="http://schemas.openxmlformats.org/drawingml/2006/main">
               <a:ext uri="{FF2B5EF4-FFF2-40B4-BE49-F238E27FC236}">
-                <a16:creationId xmlns:a16="http://schemas.microsoft.com/office/drawing/2014/main" id="{47F3615E-8703-4181-80E9-B52338A203C4}"/>
+                <a16:creationId xmlns:a16="http://schemas.microsoft.com/office/drawing/2014/main" id="{46E517F3-A9B5-4017-B851-F753CE772DD9}"/>
               </a:ext>
             </a:extLst>
           </p:cNvPr>
@@ -9597,7 +9612,7 @@
           <p:cNvPr id="7" name="shape_slide_5_decisions_textbox">
             <a:extLst xmlns:a="http://schemas.openxmlformats.org/drawingml/2006/main">
               <a:ext uri="{FF2B5EF4-FFF2-40B4-BE49-F238E27FC236}">
-                <a16:creationId xmlns:a16="http://schemas.microsoft.com/office/drawing/2014/main" id="{44511029-5173-455B-B22D-B792092C3574}"/>
+                <a16:creationId xmlns:a16="http://schemas.microsoft.com/office/drawing/2014/main" id="{00C99236-B647-4322-BBA0-0A6271811A1A}"/>
               </a:ext>
             </a:extLst>
           </p:cNvPr>
@@ -9815,7 +9830,7 @@
           <p:cNvPr id="8" name="shape_slide_5_criteria">
             <a:extLst xmlns:a="http://schemas.openxmlformats.org/drawingml/2006/main">
               <a:ext uri="{FF2B5EF4-FFF2-40B4-BE49-F238E27FC236}">
-                <a16:creationId xmlns:a16="http://schemas.microsoft.com/office/drawing/2014/main" id="{BB046C5A-961A-46C0-A404-072E5BDA6492}"/>
+                <a16:creationId xmlns:a16="http://schemas.microsoft.com/office/drawing/2014/main" id="{4FED3EC6-CBF3-484A-9085-6CB3B4D75F47}"/>
               </a:ext>
             </a:extLst>
           </p:cNvPr>
@@ -9870,7 +9885,7 @@
           <p:cNvPr id="9" name="shape_slide_5_criteria_textbox">
             <a:extLst xmlns:a="http://schemas.openxmlformats.org/drawingml/2006/main">
               <a:ext uri="{FF2B5EF4-FFF2-40B4-BE49-F238E27FC236}">
-                <a16:creationId xmlns:a16="http://schemas.microsoft.com/office/drawing/2014/main" id="{B55D010B-DF60-4732-8433-76309AEF3EC9}"/>
+                <a16:creationId xmlns:a16="http://schemas.microsoft.com/office/drawing/2014/main" id="{B6DC1C24-D09C-49CD-BFC0-26EC0CAB5CA2}"/>
               </a:ext>
             </a:extLst>
           </p:cNvPr>
@@ -10105,7 +10120,7 @@
     </p:spTree>
     <p:extLst>
       <p:ext uri="{BB962C8B-B14F-4D97-AF65-F5344CB8AC3E}">
-        <p14:creationId xmlns:p14="http://schemas.microsoft.com/office/powerpoint/2010/main" val="1471315632"/>
+        <p14:creationId xmlns:p14="http://schemas.microsoft.com/office/powerpoint/2010/main" val="191037074"/>
       </p:ext>
     </p:extLst>
   </p:cSld>
@@ -10129,7 +10144,7 @@
           <p:cNvPr id="2" name="Rectangle 1">
             <a:extLst xmlns:a="http://schemas.openxmlformats.org/drawingml/2006/main">
               <a:ext uri="{FF2B5EF4-FFF2-40B4-BE49-F238E27FC236}">
-                <a16:creationId xmlns:a16="http://schemas.microsoft.com/office/drawing/2014/main" id="{36084917-9054-40F5-BFA9-AA322E65BD16}"/>
+                <a16:creationId xmlns:a16="http://schemas.microsoft.com/office/drawing/2014/main" id="{0B044261-1A91-434A-9D38-8DA8DE3CA5F2}"/>
               </a:ext>
             </a:extLst>
           </p:cNvPr>
@@ -10182,7 +10197,7 @@
           <p:cNvPr id="3" name="Rectangle 2">
             <a:extLst xmlns:a="http://schemas.openxmlformats.org/drawingml/2006/main">
               <a:ext uri="{FF2B5EF4-FFF2-40B4-BE49-F238E27FC236}">
-                <a16:creationId xmlns:a16="http://schemas.microsoft.com/office/drawing/2014/main" id="{B9125850-74EF-405E-AC29-7C769710AF00}"/>
+                <a16:creationId xmlns:a16="http://schemas.microsoft.com/office/drawing/2014/main" id="{D8BD4467-94A0-4CF3-8BC0-6AAD5533AC59}"/>
               </a:ext>
             </a:extLst>
           </p:cNvPr>
@@ -10235,7 +10250,7 @@
           <p:cNvPr id="4" name="Rectangle 3">
             <a:extLst xmlns:a="http://schemas.openxmlformats.org/drawingml/2006/main">
               <a:ext uri="{FF2B5EF4-FFF2-40B4-BE49-F238E27FC236}">
-                <a16:creationId xmlns:a16="http://schemas.microsoft.com/office/drawing/2014/main" id="{A9DD4F78-83DC-4498-87D6-F9E532B778FC}"/>
+                <a16:creationId xmlns:a16="http://schemas.microsoft.com/office/drawing/2014/main" id="{96655C7E-8773-4502-BE58-8CC41D052B66}"/>
               </a:ext>
             </a:extLst>
           </p:cNvPr>
@@ -10288,7 +10303,7 @@
           <p:cNvPr id="5" name="TextBox 4">
             <a:extLst xmlns:a="http://schemas.openxmlformats.org/drawingml/2006/main">
               <a:ext uri="{FF2B5EF4-FFF2-40B4-BE49-F238E27FC236}">
-                <a16:creationId xmlns:a16="http://schemas.microsoft.com/office/drawing/2014/main" id="{2092A556-F154-4F80-AA99-01265EC6E05C}"/>
+                <a16:creationId xmlns:a16="http://schemas.microsoft.com/office/drawing/2014/main" id="{9E5617DD-6280-4B6A-8F54-B448C4A51DC1}"/>
               </a:ext>
             </a:extLst>
           </p:cNvPr>
@@ -10341,7 +10356,7 @@
               </a:defRPr>
             </a:pPr>
             <a:r>
-              <a:t>Đánh giá độc lập bộ tìm kiếm trên 756 positive views của benchmark  |  [FIXTURE — PRE-CANONICAL RENDER TEST]</a:t>
+              <a:t>Đánh giá độc lập bộ tìm kiếm trên 718 positive scorable views của benchmark  |  [CANONICAL CANDIDATE — PENDING ROOT FINAL REVIEW]</a:t>
             </a:r>
           </a:p>
         </p:txBody>
@@ -10351,7 +10366,7 @@
           <p:cNvPr id="6" name="shape_slide_6_retrieval_diagnostics">
             <a:extLst xmlns:a="http://schemas.openxmlformats.org/drawingml/2006/main">
               <a:ext uri="{FF2B5EF4-FFF2-40B4-BE49-F238E27FC236}">
-                <a16:creationId xmlns:a16="http://schemas.microsoft.com/office/drawing/2014/main" id="{8529D7B6-A522-4841-A306-4E9847BCFD39}"/>
+                <a16:creationId xmlns:a16="http://schemas.microsoft.com/office/drawing/2014/main" id="{964EB24C-54B2-4923-A060-1EB6E5F67FE9}"/>
               </a:ext>
             </a:extLst>
           </p:cNvPr>
@@ -10406,7 +10421,7 @@
           <p:cNvPr id="7" name="shape_slide_6_retrieval_diagnostics_textbox">
             <a:extLst xmlns:a="http://schemas.openxmlformats.org/drawingml/2006/main">
               <a:ext uri="{FF2B5EF4-FFF2-40B4-BE49-F238E27FC236}">
-                <a16:creationId xmlns:a16="http://schemas.microsoft.com/office/drawing/2014/main" id="{38F5A89B-CB05-4D81-9FC1-8E919BD6D2F5}"/>
+                <a16:creationId xmlns:a16="http://schemas.microsoft.com/office/drawing/2014/main" id="{653D4E72-129D-4C3A-933F-7B45FEEF274D}"/>
               </a:ext>
             </a:extLst>
           </p:cNvPr>
@@ -10789,7 +10804,7 @@
           <p:nvPr/>
         </p:nvPicPr>
         <p:blipFill>
-          <a:blip xmlns:r="http://schemas.openxmlformats.org/officeDocument/2006/relationships" xmlns:a="http://schemas.openxmlformats.org/drawingml/2006/main" r:embed="Rec3c92ae24954635"/>
+          <a:blip xmlns:r="http://schemas.openxmlformats.org/officeDocument/2006/relationships" xmlns:a="http://schemas.openxmlformats.org/drawingml/2006/main" r:embed="Rf3bc57342be64de3"/>
           <a:stretch xmlns:a="http://schemas.openxmlformats.org/drawingml/2006/main">
             <a:fillRect l="0" t="0" r="0" b="0"/>
           </a:stretch>
@@ -10809,7 +10824,7 @@
           <p:cNvPr id="9" name="shape_slide_6_context_scaling">
             <a:extLst xmlns:a="http://schemas.openxmlformats.org/drawingml/2006/main">
               <a:ext uri="{FF2B5EF4-FFF2-40B4-BE49-F238E27FC236}">
-                <a16:creationId xmlns:a16="http://schemas.microsoft.com/office/drawing/2014/main" id="{179279FD-D18E-49E8-9652-872E3C610369}"/>
+                <a16:creationId xmlns:a16="http://schemas.microsoft.com/office/drawing/2014/main" id="{7D370C31-D71E-4AB9-87D6-0C0975EE146D}"/>
               </a:ext>
             </a:extLst>
           </p:cNvPr>
@@ -10864,7 +10879,7 @@
           <p:cNvPr id="10" name="shape_slide_6_context_scaling_textbox">
             <a:extLst xmlns:a="http://schemas.openxmlformats.org/drawingml/2006/main">
               <a:ext uri="{FF2B5EF4-FFF2-40B4-BE49-F238E27FC236}">
-                <a16:creationId xmlns:a16="http://schemas.microsoft.com/office/drawing/2014/main" id="{30B0A22E-386C-43B7-AE3C-5753D5CDEFD2}"/>
+                <a16:creationId xmlns:a16="http://schemas.microsoft.com/office/drawing/2014/main" id="{A2F0CA1B-FBC7-450C-A8D8-4C2EF8681CD4}"/>
               </a:ext>
             </a:extLst>
           </p:cNvPr>
@@ -10920,7 +10935,7 @@
               </a:defRPr>
             </a:pPr>
             <a:r>
-              <a:t>•  Khoảng cách ngữ nghĩa tại T1136.001 (Local Account): 0/99 lượt trúng Top-10 do log Event ID 4720 lệch từ vựng so với STIX persistence.</a:t>
+              <a:t>•  Khoảng cách ngữ nghĩa tại T1136.001 (Local Account): 0/95 lượt trúng Top-10 do log Event ID 4720 lệch từ vựng so với STIX persistence.</a:t>
             </a:r>
           </a:p>
           <a:p xmlns:a="http://schemas.openxmlformats.org/drawingml/2006/main">
@@ -10950,7 +10965,7 @@
     </p:spTree>
     <p:extLst>
       <p:ext uri="{BB962C8B-B14F-4D97-AF65-F5344CB8AC3E}">
-        <p14:creationId xmlns:p14="http://schemas.microsoft.com/office/powerpoint/2010/main" val="1526247347"/>
+        <p14:creationId xmlns:p14="http://schemas.microsoft.com/office/powerpoint/2010/main" val="625897781"/>
       </p:ext>
     </p:extLst>
   </p:cSld>
@@ -10974,7 +10989,7 @@
           <p:cNvPr id="2" name="Rectangle 1">
             <a:extLst xmlns:a="http://schemas.openxmlformats.org/drawingml/2006/main">
               <a:ext uri="{FF2B5EF4-FFF2-40B4-BE49-F238E27FC236}">
-                <a16:creationId xmlns:a16="http://schemas.microsoft.com/office/drawing/2014/main" id="{2EE9BA2D-9D78-4D90-A7B0-10694BAFEF14}"/>
+                <a16:creationId xmlns:a16="http://schemas.microsoft.com/office/drawing/2014/main" id="{AD7B988C-6730-477E-AA60-2ABF32A64C49}"/>
               </a:ext>
             </a:extLst>
           </p:cNvPr>
@@ -11027,7 +11042,7 @@
           <p:cNvPr id="3" name="Rectangle 2">
             <a:extLst xmlns:a="http://schemas.openxmlformats.org/drawingml/2006/main">
               <a:ext uri="{FF2B5EF4-FFF2-40B4-BE49-F238E27FC236}">
-                <a16:creationId xmlns:a16="http://schemas.microsoft.com/office/drawing/2014/main" id="{C8F63286-50F2-4D92-BFBF-25EE5C2A1DDA}"/>
+                <a16:creationId xmlns:a16="http://schemas.microsoft.com/office/drawing/2014/main" id="{7555192F-CD5C-42FE-9906-5899118CCBF7}"/>
               </a:ext>
             </a:extLst>
           </p:cNvPr>
@@ -11080,7 +11095,7 @@
           <p:cNvPr id="4" name="Rectangle 3">
             <a:extLst xmlns:a="http://schemas.openxmlformats.org/drawingml/2006/main">
               <a:ext uri="{FF2B5EF4-FFF2-40B4-BE49-F238E27FC236}">
-                <a16:creationId xmlns:a16="http://schemas.microsoft.com/office/drawing/2014/main" id="{890A42CF-B9C0-4832-8AB6-E45F7DD5A815}"/>
+                <a16:creationId xmlns:a16="http://schemas.microsoft.com/office/drawing/2014/main" id="{1E217493-68B4-4066-80B8-A03E428682EC}"/>
               </a:ext>
             </a:extLst>
           </p:cNvPr>
@@ -11133,7 +11148,7 @@
           <p:cNvPr id="5" name="TextBox 4">
             <a:extLst xmlns:a="http://schemas.openxmlformats.org/drawingml/2006/main">
               <a:ext uri="{FF2B5EF4-FFF2-40B4-BE49-F238E27FC236}">
-                <a16:creationId xmlns:a16="http://schemas.microsoft.com/office/drawing/2014/main" id="{03C24358-621E-4609-ACAA-35578C4C79D2}"/>
+                <a16:creationId xmlns:a16="http://schemas.microsoft.com/office/drawing/2014/main" id="{D9EBD889-4438-4975-B0B7-E3DF422EC0A6}"/>
               </a:ext>
             </a:extLst>
           </p:cNvPr>
@@ -11186,7 +11201,7 @@
               </a:defRPr>
             </a:pPr>
             <a:r>
-              <a:t>So sánh thực nghiệm Single vs Contextual trên 670 cặp kịch bản đối ứng  |  [FIXTURE — PRE-CANONICAL RENDER TEST]</a:t>
+              <a:t>So sánh thực nghiệm Single vs Contextual trên 670 cặp kịch bản đối ứng  |  [CANONICAL CANDIDATE — PENDING ROOT FINAL REVIEW]</a:t>
             </a:r>
           </a:p>
         </p:txBody>
@@ -11196,7 +11211,7 @@
           <p:cNvPr id="6" name="shape_slide_7_paired_analysis">
             <a:extLst xmlns:a="http://schemas.openxmlformats.org/drawingml/2006/main">
               <a:ext uri="{FF2B5EF4-FFF2-40B4-BE49-F238E27FC236}">
-                <a16:creationId xmlns:a16="http://schemas.microsoft.com/office/drawing/2014/main" id="{8300DADA-0E2D-4E2E-91B9-0A059DB0FEB8}"/>
+                <a16:creationId xmlns:a16="http://schemas.microsoft.com/office/drawing/2014/main" id="{937413CB-7A4A-4624-83E1-9321CFD247EB}"/>
               </a:ext>
             </a:extLst>
           </p:cNvPr>
@@ -11251,7 +11266,7 @@
           <p:cNvPr id="7" name="shape_slide_7_paired_analysis_textbox">
             <a:extLst xmlns:a="http://schemas.openxmlformats.org/drawingml/2006/main">
               <a:ext uri="{FF2B5EF4-FFF2-40B4-BE49-F238E27FC236}">
-                <a16:creationId xmlns:a16="http://schemas.microsoft.com/office/drawing/2014/main" id="{A7C79A3B-836B-4305-BAAB-D9CB200D52EA}"/>
+                <a16:creationId xmlns:a16="http://schemas.microsoft.com/office/drawing/2014/main" id="{EBC1EA5C-F938-4769-9FD6-2EE4518D6021}"/>
               </a:ext>
             </a:extLst>
           </p:cNvPr>
@@ -11488,7 +11503,7 @@
           <p:cNvPr id="8" name="shape_slide_7_benign_drift">
             <a:extLst xmlns:a="http://schemas.openxmlformats.org/drawingml/2006/main">
               <a:ext uri="{FF2B5EF4-FFF2-40B4-BE49-F238E27FC236}">
-                <a16:creationId xmlns:a16="http://schemas.microsoft.com/office/drawing/2014/main" id="{D372F0AC-3236-4F87-96C5-0C5801FC0119}"/>
+                <a16:creationId xmlns:a16="http://schemas.microsoft.com/office/drawing/2014/main" id="{1948C1C4-197F-4312-B713-069C22C3D840}"/>
               </a:ext>
             </a:extLst>
           </p:cNvPr>
@@ -11543,7 +11558,7 @@
           <p:cNvPr id="9" name="shape_slide_7_benign_drift_textbox">
             <a:extLst xmlns:a="http://schemas.openxmlformats.org/drawingml/2006/main">
               <a:ext uri="{FF2B5EF4-FFF2-40B4-BE49-F238E27FC236}">
-                <a16:creationId xmlns:a16="http://schemas.microsoft.com/office/drawing/2014/main" id="{1E754664-CE8A-4760-BD84-DEF011486422}"/>
+                <a16:creationId xmlns:a16="http://schemas.microsoft.com/office/drawing/2014/main" id="{1C1487C6-4565-4A5E-98FC-21B2A3876FB4}"/>
               </a:ext>
             </a:extLst>
           </p:cNvPr>
@@ -11555,7 +11570,7 @@
         <p:spPr>
           <a:xfrm xmlns:a="http://schemas.openxmlformats.org/drawingml/2006/main">
             <a:off x="6430975" y="1344168"/>
-            <a:ext cx="4846320" cy="5166360"/>
+            <a:ext cx="4846320" cy="5379720"/>
           </a:xfrm>
           <a:prstGeom xmlns:a="http://schemas.openxmlformats.org/drawingml/2006/main" prst="rect">
             <a:avLst/>
@@ -11580,7 +11595,7 @@
               </a:defRPr>
             </a:pPr>
             <a:r>
-              <a:t>Hiện Tượng Quan Sát &amp; Schema So Sánh [FIXTURE — PRE-CANONICAL RENDER TEST]</a:t>
+              <a:t>Hiện Tượng Quan Sát &amp; Schema So Sánh [CANONICAL CANDIDATE — PENDING ROOT FINAL REVIEW]</a:t>
             </a:r>
           </a:p>
           <a:p xmlns:a="http://schemas.openxmlformats.org/drawingml/2006/main">
@@ -11829,6 +11844,25 @@
               </a:defRPr>
             </a:pPr>
             <a:r>
+              <a:t>  • Tại RAG k=10: Single và Contextual view đều đạt 83.81% (Paired Delta = 0.0 pp, McNemar p = 1.0).</a:t>
+            </a:r>
+          </a:p>
+          <a:p xmlns:a="http://schemas.openxmlformats.org/drawingml/2006/main">
+            <a:pPr>
+              <a:spcBef>
+                <a:spcPts val="300"/>
+              </a:spcBef>
+              <a:buNone/>
+              <a:defRPr sz="1150">
+                <a:solidFill>
+                  <a:srgbClr val="0F172A"/>
+                </a:solidFill>
+                <a:latin typeface="Calibri"/>
+                <a:ea typeface="Calibri"/>
+                <a:cs typeface="Calibri"/>
+              </a:defRPr>
+            </a:pPr>
+            <a:r>
               <a:t>  • Giả thuyết: Khối tri thức RAG bổ trợ cần đi kèm tiền lọc sự kiện nghi vấn thay vì nhúng thô.</a:t>
             </a:r>
           </a:p>
@@ -11848,7 +11882,7 @@
               </a:defRPr>
             </a:pPr>
             <a:r>
-              <a:t>  • Trạng thái: Thử nghiệm sơ bộ trên fixture đối chứng; kết luận chính thức cần ma trận TEST đầy đủ.</a:t>
+              <a:t>  • Trạng thái: Kiểm chứng đối chứng trên ma trận TEST.</a:t>
             </a:r>
           </a:p>
           <a:p xmlns:a="http://schemas.openxmlformats.org/drawingml/2006/main">
@@ -11875,7 +11909,7 @@
     </p:spTree>
     <p:extLst>
       <p:ext uri="{BB962C8B-B14F-4D97-AF65-F5344CB8AC3E}">
-        <p14:creationId xmlns:p14="http://schemas.microsoft.com/office/powerpoint/2010/main" val="709023309"/>
+        <p14:creationId xmlns:p14="http://schemas.microsoft.com/office/powerpoint/2010/main" val="2030906797"/>
       </p:ext>
     </p:extLst>
   </p:cSld>
@@ -11899,7 +11933,7 @@
           <p:cNvPr id="2" name="Rectangle 1">
             <a:extLst xmlns:a="http://schemas.openxmlformats.org/drawingml/2006/main">
               <a:ext uri="{FF2B5EF4-FFF2-40B4-BE49-F238E27FC236}">
-                <a16:creationId xmlns:a16="http://schemas.microsoft.com/office/drawing/2014/main" id="{D3762DC1-322C-4C9F-89DA-CAECC97E092E}"/>
+                <a16:creationId xmlns:a16="http://schemas.microsoft.com/office/drawing/2014/main" id="{FEF04B31-1199-4D7D-A217-799B20DF8330}"/>
               </a:ext>
             </a:extLst>
           </p:cNvPr>
@@ -11952,7 +11986,7 @@
           <p:cNvPr id="3" name="Rectangle 2">
             <a:extLst xmlns:a="http://schemas.openxmlformats.org/drawingml/2006/main">
               <a:ext uri="{FF2B5EF4-FFF2-40B4-BE49-F238E27FC236}">
-                <a16:creationId xmlns:a16="http://schemas.microsoft.com/office/drawing/2014/main" id="{132B864F-D85D-4A97-AEED-65B4B423CF41}"/>
+                <a16:creationId xmlns:a16="http://schemas.microsoft.com/office/drawing/2014/main" id="{C81A88A8-FAB4-457C-A31D-818A1BE9908B}"/>
               </a:ext>
             </a:extLst>
           </p:cNvPr>
@@ -12005,7 +12039,7 @@
           <p:cNvPr id="4" name="Rectangle 3">
             <a:extLst xmlns:a="http://schemas.openxmlformats.org/drawingml/2006/main">
               <a:ext uri="{FF2B5EF4-FFF2-40B4-BE49-F238E27FC236}">
-                <a16:creationId xmlns:a16="http://schemas.microsoft.com/office/drawing/2014/main" id="{57B530B9-B1EF-4556-81A2-7910458F8502}"/>
+                <a16:creationId xmlns:a16="http://schemas.microsoft.com/office/drawing/2014/main" id="{25D27B1D-4CBD-4411-8D41-C915CDB6D92F}"/>
               </a:ext>
             </a:extLst>
           </p:cNvPr>
@@ -12058,7 +12092,7 @@
           <p:cNvPr id="5" name="TextBox 4">
             <a:extLst xmlns:a="http://schemas.openxmlformats.org/drawingml/2006/main">
               <a:ext uri="{FF2B5EF4-FFF2-40B4-BE49-F238E27FC236}">
-                <a16:creationId xmlns:a16="http://schemas.microsoft.com/office/drawing/2014/main" id="{0C73B1D6-66C7-481E-BC2C-DDC79DFD3926}"/>
+                <a16:creationId xmlns:a16="http://schemas.microsoft.com/office/drawing/2014/main" id="{0356A614-CB53-4541-B617-0E39D7DA2849}"/>
               </a:ext>
             </a:extLst>
           </p:cNvPr>
@@ -12111,7 +12145,7 @@
               </a:defRPr>
             </a:pPr>
             <a:r>
-              <a:t>Bóc tách độc lập giữa năng lực truy xuất và phân loại theo định đề D2i (Independent Axes)  |  [FIXTURE — PRE-CANONICAL RENDER TEST]</a:t>
+              <a:t>Bóc tách độc lập giữa năng lực truy xuất và phân loại theo định đề D2i (Independent Axes)  |  [CANONICAL CANDIDATE — PENDING ROOT FINAL REVIEW]</a:t>
             </a:r>
           </a:p>
         </p:txBody>
@@ -12121,7 +12155,7 @@
           <p:cNvPr id="6" name="shape_slide_8_d2i_axes">
             <a:extLst xmlns:a="http://schemas.openxmlformats.org/drawingml/2006/main">
               <a:ext uri="{FF2B5EF4-FFF2-40B4-BE49-F238E27FC236}">
-                <a16:creationId xmlns:a16="http://schemas.microsoft.com/office/drawing/2014/main" id="{7A246488-D4C4-48A6-83CB-B4F143B1E0DB}"/>
+                <a16:creationId xmlns:a16="http://schemas.microsoft.com/office/drawing/2014/main" id="{E983C969-BDD6-4470-9EEB-DF8F393E2A2B}"/>
               </a:ext>
             </a:extLst>
           </p:cNvPr>
@@ -12176,7 +12210,7 @@
           <p:cNvPr id="7" name="shape_slide_8_d2i_axes_textbox">
             <a:extLst xmlns:a="http://schemas.openxmlformats.org/drawingml/2006/main">
               <a:ext uri="{FF2B5EF4-FFF2-40B4-BE49-F238E27FC236}">
-                <a16:creationId xmlns:a16="http://schemas.microsoft.com/office/drawing/2014/main" id="{9961CA3F-00D3-43A2-A7EB-F199011CC384}"/>
+                <a16:creationId xmlns:a16="http://schemas.microsoft.com/office/drawing/2014/main" id="{40529CD9-54CF-4E8C-870C-EB71E5AD08EC}"/>
               </a:ext>
             </a:extLst>
           </p:cNvPr>
@@ -12299,7 +12333,7 @@
           <p:cNvPr id="8" name="shape_slide_8_conditional_accuracy">
             <a:extLst xmlns:a="http://schemas.openxmlformats.org/drawingml/2006/main">
               <a:ext uri="{FF2B5EF4-FFF2-40B4-BE49-F238E27FC236}">
-                <a16:creationId xmlns:a16="http://schemas.microsoft.com/office/drawing/2014/main" id="{41235035-8527-42D1-8189-4BBEFE2AC04B}"/>
+                <a16:creationId xmlns:a16="http://schemas.microsoft.com/office/drawing/2014/main" id="{9630B4F2-36A3-40F9-A0A1-960B272555DC}"/>
               </a:ext>
             </a:extLst>
           </p:cNvPr>
@@ -12354,7 +12388,7 @@
           <p:cNvPr id="9" name="shape_slide_8_conditional_accuracy_textbox">
             <a:extLst xmlns:a="http://schemas.openxmlformats.org/drawingml/2006/main">
               <a:ext uri="{FF2B5EF4-FFF2-40B4-BE49-F238E27FC236}">
-                <a16:creationId xmlns:a16="http://schemas.microsoft.com/office/drawing/2014/main" id="{20AC1815-85A3-41E5-853F-7C6026F864A6}"/>
+                <a16:creationId xmlns:a16="http://schemas.microsoft.com/office/drawing/2014/main" id="{C3D034DD-44D4-48EE-AF48-43DCB9861BEA}"/>
               </a:ext>
             </a:extLst>
           </p:cNvPr>
@@ -12486,7 +12520,7 @@
               </a:defRPr>
             </a:pPr>
             <a:r>
-              <a:t>•  So sánh đối chứng RAG k=10 vs No-RAG: Chênh lệch cặp 95% CI [-2.355, +5.300] pp (chứa 0), McNemar p = 0.4223 &gt; 0.05.</a:t>
+              <a:t>•  So sánh đối chứng RAG k=10 vs No-RAG: Delta +1.532 pp (79.53% [571/718] vs 77.99% [560/718]), 95% CI [-2.355, +5.300] pp (chứa 0), McNemar p = 0.4219 (hiển thị 0.422).</a:t>
             </a:r>
           </a:p>
           <a:p xmlns:a="http://schemas.openxmlformats.org/drawingml/2006/main">
@@ -12515,7 +12549,7 @@
           <p:cNvPr id="10" name="shape_slide_8_rq1_attribution">
             <a:extLst xmlns:a="http://schemas.openxmlformats.org/drawingml/2006/main">
               <a:ext uri="{FF2B5EF4-FFF2-40B4-BE49-F238E27FC236}">
-                <a16:creationId xmlns:a16="http://schemas.microsoft.com/office/drawing/2014/main" id="{EE5AE9CC-2EBB-4331-B075-5B552EBE105D}"/>
+                <a16:creationId xmlns:a16="http://schemas.microsoft.com/office/drawing/2014/main" id="{1B120C34-FC44-4001-B367-511BA1AFB4CE}"/>
               </a:ext>
             </a:extLst>
           </p:cNvPr>
@@ -12570,7 +12604,7 @@
           <p:cNvPr id="11" name="shape_slide_8_rq1_attribution_textbox">
             <a:extLst xmlns:a="http://schemas.openxmlformats.org/drawingml/2006/main">
               <a:ext uri="{FF2B5EF4-FFF2-40B4-BE49-F238E27FC236}">
-                <a16:creationId xmlns:a16="http://schemas.microsoft.com/office/drawing/2014/main" id="{36E13140-6386-44B8-8ED5-F1FA0CD8F75E}"/>
+                <a16:creationId xmlns:a16="http://schemas.microsoft.com/office/drawing/2014/main" id="{6A926E64-F9E4-428D-8B07-8B897C0139FF}"/>
               </a:ext>
             </a:extLst>
           </p:cNvPr>
@@ -12621,10 +12655,10 @@
           <a:p xmlns:a="http://schemas.openxmlformats.org/drawingml/2006/main">
             <a:pPr>
               <a:spcBef>
-                <a:spcPts val="350"/>
-              </a:spcBef>
-              <a:buNone/>
-              <a:defRPr sz="1150">
+                <a:spcPts val="250"/>
+              </a:spcBef>
+              <a:buNone/>
+              <a:defRPr sz="1050">
                 <a:solidFill>
                   <a:srgbClr val="0F172A"/>
                 </a:solidFill>
@@ -12648,10 +12682,10 @@
           <a:p xmlns:a="http://schemas.openxmlformats.org/drawingml/2006/main">
             <a:pPr>
               <a:spcBef>
-                <a:spcPts val="350"/>
-              </a:spcBef>
-              <a:buNone/>
-              <a:defRPr sz="1150">
+                <a:spcPts val="250"/>
+              </a:spcBef>
+              <a:buNone/>
+              <a:defRPr sz="1050">
                 <a:solidFill>
                   <a:srgbClr val="0F172A"/>
                 </a:solidFill>
@@ -12675,10 +12709,10 @@
           <a:p xmlns:a="http://schemas.openxmlformats.org/drawingml/2006/main">
             <a:pPr>
               <a:spcBef>
-                <a:spcPts val="350"/>
-              </a:spcBef>
-              <a:buNone/>
-              <a:defRPr sz="1150">
+                <a:spcPts val="250"/>
+              </a:spcBef>
+              <a:buNone/>
+              <a:defRPr sz="1050">
                 <a:solidFill>
                   <a:srgbClr val="0F172A"/>
                 </a:solidFill>
@@ -12702,10 +12736,10 @@
           <a:p xmlns:a="http://schemas.openxmlformats.org/drawingml/2006/main">
             <a:pPr>
               <a:spcBef>
-                <a:spcPts val="350"/>
-              </a:spcBef>
-              <a:buNone/>
-              <a:defRPr sz="1150">
+                <a:spcPts val="250"/>
+              </a:spcBef>
+              <a:buNone/>
+              <a:defRPr sz="1050">
                 <a:solidFill>
                   <a:srgbClr val="0F172A"/>
                 </a:solidFill>
@@ -12729,10 +12763,10 @@
           <a:p xmlns:a="http://schemas.openxmlformats.org/drawingml/2006/main">
             <a:pPr>
               <a:spcBef>
-                <a:spcPts val="350"/>
-              </a:spcBef>
-              <a:buNone/>
-              <a:defRPr sz="1150">
+                <a:spcPts val="250"/>
+              </a:spcBef>
+              <a:buNone/>
+              <a:defRPr sz="1050">
                 <a:solidFill>
                   <a:srgbClr val="0F172A"/>
                 </a:solidFill>
@@ -12756,10 +12790,10 @@
           <a:p xmlns:a="http://schemas.openxmlformats.org/drawingml/2006/main">
             <a:pPr>
               <a:spcBef>
-                <a:spcPts val="350"/>
-              </a:spcBef>
-              <a:buNone/>
-              <a:defRPr sz="1150">
+                <a:spcPts val="250"/>
+              </a:spcBef>
+              <a:buNone/>
+              <a:defRPr sz="1050">
                 <a:solidFill>
                   <a:srgbClr val="0F172A"/>
                 </a:solidFill>
@@ -12783,10 +12817,10 @@
           <a:p xmlns:a="http://schemas.openxmlformats.org/drawingml/2006/main">
             <a:pPr>
               <a:spcBef>
-                <a:spcPts val="350"/>
-              </a:spcBef>
-              <a:buNone/>
-              <a:defRPr sz="1150">
+                <a:spcPts val="250"/>
+              </a:spcBef>
+              <a:buNone/>
+              <a:defRPr sz="1050">
                 <a:solidFill>
                   <a:srgbClr val="0F172A"/>
                 </a:solidFill>
@@ -12810,10 +12844,10 @@
           <a:p xmlns:a="http://schemas.openxmlformats.org/drawingml/2006/main">
             <a:pPr>
               <a:spcBef>
-                <a:spcPts val="350"/>
-              </a:spcBef>
-              <a:buNone/>
-              <a:defRPr sz="1150">
+                <a:spcPts val="250"/>
+              </a:spcBef>
+              <a:buNone/>
+              <a:defRPr sz="1050">
                 <a:solidFill>
                   <a:srgbClr val="0F172A"/>
                 </a:solidFill>
@@ -12837,10 +12871,10 @@
           <a:p xmlns:a="http://schemas.openxmlformats.org/drawingml/2006/main">
             <a:pPr>
               <a:spcBef>
-                <a:spcPts val="350"/>
-              </a:spcBef>
-              <a:buNone/>
-              <a:defRPr sz="1150">
+                <a:spcPts val="250"/>
+              </a:spcBef>
+              <a:buNone/>
+              <a:defRPr sz="1050">
                 <a:solidFill>
                   <a:srgbClr val="0F172A"/>
                 </a:solidFill>
@@ -12864,10 +12898,10 @@
           <a:p xmlns:a="http://schemas.openxmlformats.org/drawingml/2006/main">
             <a:pPr>
               <a:spcBef>
-                <a:spcPts val="350"/>
-              </a:spcBef>
-              <a:buNone/>
-              <a:defRPr sz="1150">
+                <a:spcPts val="250"/>
+              </a:spcBef>
+              <a:buNone/>
+              <a:defRPr sz="1050">
                 <a:solidFill>
                   <a:srgbClr val="0F172A"/>
                 </a:solidFill>
@@ -12891,10 +12925,10 @@
           <a:p xmlns:a="http://schemas.openxmlformats.org/drawingml/2006/main">
             <a:pPr>
               <a:spcBef>
-                <a:spcPts val="350"/>
-              </a:spcBef>
-              <a:buNone/>
-              <a:defRPr sz="1150">
+                <a:spcPts val="250"/>
+              </a:spcBef>
+              <a:buNone/>
+              <a:defRPr sz="1050">
                 <a:solidFill>
                   <a:srgbClr val="0F172A"/>
                 </a:solidFill>
@@ -12920,7 +12954,7 @@
     </p:spTree>
     <p:extLst>
       <p:ext uri="{BB962C8B-B14F-4D97-AF65-F5344CB8AC3E}">
-        <p14:creationId xmlns:p14="http://schemas.microsoft.com/office/powerpoint/2010/main" val="55997415"/>
+        <p14:creationId xmlns:p14="http://schemas.microsoft.com/office/powerpoint/2010/main" val="2061613900"/>
       </p:ext>
     </p:extLst>
   </p:cSld>
@@ -12944,7 +12978,7 @@
           <p:cNvPr id="2" name="Rectangle 1">
             <a:extLst xmlns:a="http://schemas.openxmlformats.org/drawingml/2006/main">
               <a:ext uri="{FF2B5EF4-FFF2-40B4-BE49-F238E27FC236}">
-                <a16:creationId xmlns:a16="http://schemas.microsoft.com/office/drawing/2014/main" id="{E64B0120-9722-4313-9BFA-31A6E7BAF92C}"/>
+                <a16:creationId xmlns:a16="http://schemas.microsoft.com/office/drawing/2014/main" id="{47075733-50C4-42F6-8A96-262785ABBA5A}"/>
               </a:ext>
             </a:extLst>
           </p:cNvPr>
@@ -12997,7 +13031,7 @@
           <p:cNvPr id="3" name="Rectangle 2">
             <a:extLst xmlns:a="http://schemas.openxmlformats.org/drawingml/2006/main">
               <a:ext uri="{FF2B5EF4-FFF2-40B4-BE49-F238E27FC236}">
-                <a16:creationId xmlns:a16="http://schemas.microsoft.com/office/drawing/2014/main" id="{8EA7C4FA-737F-4987-9AE6-E368A59E5B6B}"/>
+                <a16:creationId xmlns:a16="http://schemas.microsoft.com/office/drawing/2014/main" id="{3EDE7F63-671B-4F95-8A4E-0E821CFC3485}"/>
               </a:ext>
             </a:extLst>
           </p:cNvPr>
@@ -13050,7 +13084,7 @@
           <p:cNvPr id="4" name="Rectangle 3">
             <a:extLst xmlns:a="http://schemas.openxmlformats.org/drawingml/2006/main">
               <a:ext uri="{FF2B5EF4-FFF2-40B4-BE49-F238E27FC236}">
-                <a16:creationId xmlns:a16="http://schemas.microsoft.com/office/drawing/2014/main" id="{D8AC9B0C-4A9A-42B4-ACDC-F691CCBE262C}"/>
+                <a16:creationId xmlns:a16="http://schemas.microsoft.com/office/drawing/2014/main" id="{5E0244CE-8860-4D32-9F93-992E05867129}"/>
               </a:ext>
             </a:extLst>
           </p:cNvPr>
@@ -13103,7 +13137,7 @@
           <p:cNvPr id="5" name="TextBox 4">
             <a:extLst xmlns:a="http://schemas.openxmlformats.org/drawingml/2006/main">
               <a:ext uri="{FF2B5EF4-FFF2-40B4-BE49-F238E27FC236}">
-                <a16:creationId xmlns:a16="http://schemas.microsoft.com/office/drawing/2014/main" id="{73C3EB56-51DA-4FCB-AF53-2EF1E8567231}"/>
+                <a16:creationId xmlns:a16="http://schemas.microsoft.com/office/drawing/2014/main" id="{F603B258-DBF3-4A37-A8F7-9AC0C3C1410B}"/>
               </a:ext>
             </a:extLst>
           </p:cNvPr>
@@ -13156,10 +13190,7 @@
               </a:defRPr>
             </a:pPr>
             <a:r>
-              <a:t>Dữ liệu DEV pilot (synthetic split) đối chiếu Dự phóng Hạch toán Fixture [DIAGNOSTIC TEST FIXTURE ONLY]</a:t>
-            </a:r>
-            <a:r>
-              <a:t>  |  [FIXTURE — PRE-CANONICAL RENDER TEST]</a:t>
+              <a:t>Hạch toán tài chính toàn nghiên cứu, đánh đổi token-chi phí và kiểm soát ngân sách  |  [CANONICAL CANDIDATE — PENDING ROOT FINAL REVIEW]</a:t>
             </a:r>
           </a:p>
         </p:txBody>
@@ -13169,7 +13200,7 @@
           <p:cNvPr id="6" name="shape_slide_9_rq3_resources">
             <a:extLst xmlns:a="http://schemas.openxmlformats.org/drawingml/2006/main">
               <a:ext uri="{FF2B5EF4-FFF2-40B4-BE49-F238E27FC236}">
-                <a16:creationId xmlns:a16="http://schemas.microsoft.com/office/drawing/2014/main" id="{9190559F-9B91-4F70-A806-09DCBEEA2F18}"/>
+                <a16:creationId xmlns:a16="http://schemas.microsoft.com/office/drawing/2014/main" id="{05D7F0BB-3165-46DD-B575-2BF1424A90CC}"/>
               </a:ext>
             </a:extLst>
           </p:cNvPr>
@@ -13224,7 +13255,7 @@
           <p:cNvPr id="7" name="shape_slide_9_rq3_resources_textbox">
             <a:extLst xmlns:a="http://schemas.openxmlformats.org/drawingml/2006/main">
               <a:ext uri="{FF2B5EF4-FFF2-40B4-BE49-F238E27FC236}">
-                <a16:creationId xmlns:a16="http://schemas.microsoft.com/office/drawing/2014/main" id="{31349263-7A64-4A4B-BE38-7F686D319D3C}"/>
+                <a16:creationId xmlns:a16="http://schemas.microsoft.com/office/drawing/2014/main" id="{C26C602D-DD49-43B8-B197-A958734B8A63}"/>
               </a:ext>
             </a:extLst>
           </p:cNvPr>
@@ -13275,7 +13306,7 @@
           <a:p xmlns:a="http://schemas.openxmlformats.org/drawingml/2006/main">
             <a:pPr>
               <a:spcBef>
-                <a:spcPts val="200"/>
+                <a:spcPts val="180"/>
               </a:spcBef>
               <a:buNone/>
               <a:defRPr sz="1050">
@@ -13302,7 +13333,7 @@
           <a:p xmlns:a="http://schemas.openxmlformats.org/drawingml/2006/main">
             <a:pPr>
               <a:spcBef>
-                <a:spcPts val="200"/>
+                <a:spcPts val="180"/>
               </a:spcBef>
               <a:buNone/>
               <a:defRPr sz="1050">
@@ -13329,7 +13360,7 @@
           <a:p xmlns:a="http://schemas.openxmlformats.org/drawingml/2006/main">
             <a:pPr>
               <a:spcBef>
-                <a:spcPts val="200"/>
+                <a:spcPts val="180"/>
               </a:spcBef>
               <a:buNone/>
               <a:defRPr sz="1050">
@@ -13356,7 +13387,7 @@
           <a:p xmlns:a="http://schemas.openxmlformats.org/drawingml/2006/main">
             <a:pPr>
               <a:spcBef>
-                <a:spcPts val="200"/>
+                <a:spcPts val="180"/>
               </a:spcBef>
               <a:buNone/>
               <a:defRPr sz="1050">
@@ -13383,7 +13414,7 @@
           <a:p xmlns:a="http://schemas.openxmlformats.org/drawingml/2006/main">
             <a:pPr>
               <a:spcBef>
-                <a:spcPts val="200"/>
+                <a:spcPts val="180"/>
               </a:spcBef>
               <a:buNone/>
               <a:defRPr sz="1050">
@@ -13410,7 +13441,7 @@
           <a:p xmlns:a="http://schemas.openxmlformats.org/drawingml/2006/main">
             <a:pPr>
               <a:spcBef>
-                <a:spcPts val="200"/>
+                <a:spcPts val="180"/>
               </a:spcBef>
               <a:buNone/>
               <a:defRPr sz="1050">
@@ -13437,7 +13468,7 @@
           <a:p xmlns:a="http://schemas.openxmlformats.org/drawingml/2006/main">
             <a:pPr>
               <a:spcBef>
-                <a:spcPts val="200"/>
+                <a:spcPts val="180"/>
               </a:spcBef>
               <a:buNone/>
               <a:defRPr sz="1050">
@@ -13464,7 +13495,7 @@
           <a:p xmlns:a="http://schemas.openxmlformats.org/drawingml/2006/main">
             <a:pPr>
               <a:spcBef>
-                <a:spcPts val="200"/>
+                <a:spcPts val="180"/>
               </a:spcBef>
               <a:buNone/>
               <a:defRPr sz="1050">
@@ -13491,7 +13522,7 @@
           <a:p xmlns:a="http://schemas.openxmlformats.org/drawingml/2006/main">
             <a:pPr>
               <a:spcBef>
-                <a:spcPts val="200"/>
+                <a:spcPts val="180"/>
               </a:spcBef>
               <a:buNone/>
               <a:defRPr sz="1050">
@@ -13518,7 +13549,7 @@
           <a:p xmlns:a="http://schemas.openxmlformats.org/drawingml/2006/main">
             <a:pPr>
               <a:spcBef>
-                <a:spcPts val="200"/>
+                <a:spcPts val="180"/>
               </a:spcBef>
               <a:buNone/>
               <a:defRPr sz="1050">
@@ -13545,7 +13576,7 @@
           <a:p xmlns:a="http://schemas.openxmlformats.org/drawingml/2006/main">
             <a:pPr>
               <a:spcBef>
-                <a:spcPts val="200"/>
+                <a:spcPts val="180"/>
               </a:spcBef>
               <a:buNone/>
               <a:defRPr sz="1050">
@@ -13572,7 +13603,7 @@
           <a:p xmlns:a="http://schemas.openxmlformats.org/drawingml/2006/main">
             <a:pPr>
               <a:spcBef>
-                <a:spcPts val="200"/>
+                <a:spcPts val="180"/>
               </a:spcBef>
               <a:buNone/>
               <a:defRPr sz="1050">
@@ -13599,7 +13630,7 @@
           <a:p xmlns:a="http://schemas.openxmlformats.org/drawingml/2006/main">
             <a:pPr>
               <a:spcBef>
-                <a:spcPts val="200"/>
+                <a:spcPts val="180"/>
               </a:spcBef>
               <a:buNone/>
               <a:defRPr sz="1050">
@@ -13626,7 +13657,7 @@
           <a:p xmlns:a="http://schemas.openxmlformats.org/drawingml/2006/main">
             <a:pPr>
               <a:spcBef>
-                <a:spcPts val="200"/>
+                <a:spcPts val="180"/>
               </a:spcBef>
               <a:buNone/>
               <a:defRPr sz="1050">
@@ -13653,7 +13684,7 @@
           <a:p xmlns:a="http://schemas.openxmlformats.org/drawingml/2006/main">
             <a:pPr>
               <a:spcBef>
-                <a:spcPts val="200"/>
+                <a:spcPts val="180"/>
               </a:spcBef>
               <a:buNone/>
               <a:defRPr sz="1050">
@@ -13688,7 +13719,7 @@
           <p:nvPr/>
         </p:nvPicPr>
         <p:blipFill>
-          <a:blip xmlns:r="http://schemas.openxmlformats.org/officeDocument/2006/relationships" xmlns:a="http://schemas.openxmlformats.org/drawingml/2006/main" r:embed="Rd9545648b0dd45c6"/>
+          <a:blip xmlns:r="http://schemas.openxmlformats.org/officeDocument/2006/relationships" xmlns:a="http://schemas.openxmlformats.org/drawingml/2006/main" r:embed="Radc785b5bd864996"/>
           <a:stretch xmlns:a="http://schemas.openxmlformats.org/drawingml/2006/main">
             <a:fillRect l="0" t="0" r="0" b="0"/>
           </a:stretch>
@@ -13708,7 +13739,7 @@
           <p:cNvPr id="9" name="shape_slide_9_accounting">
             <a:extLst xmlns:a="http://schemas.openxmlformats.org/drawingml/2006/main">
               <a:ext uri="{FF2B5EF4-FFF2-40B4-BE49-F238E27FC236}">
-                <a16:creationId xmlns:a16="http://schemas.microsoft.com/office/drawing/2014/main" id="{22CA8ED1-0C0A-4CF8-96F7-E233CEB8839B}"/>
+                <a16:creationId xmlns:a16="http://schemas.microsoft.com/office/drawing/2014/main" id="{84A5E71A-3E81-4163-9297-5EA04C119073}"/>
               </a:ext>
             </a:extLst>
           </p:cNvPr>
@@ -13763,7 +13794,7 @@
           <p:cNvPr id="10" name="shape_slide_9_accounting_textbox">
             <a:extLst xmlns:a="http://schemas.openxmlformats.org/drawingml/2006/main">
               <a:ext uri="{FF2B5EF4-FFF2-40B4-BE49-F238E27FC236}">
-                <a16:creationId xmlns:a16="http://schemas.microsoft.com/office/drawing/2014/main" id="{32E03843-121C-4C35-87EB-DCFBA127491B}"/>
+                <a16:creationId xmlns:a16="http://schemas.microsoft.com/office/drawing/2014/main" id="{5B5A4643-B308-4857-887F-A40DB6F08CE8}"/>
               </a:ext>
             </a:extLst>
           </p:cNvPr>
@@ -13819,7 +13850,7 @@
               </a:defRPr>
             </a:pPr>
             <a:r>
-              <a:t>•  Tăng k từ 1 lên 10 giúp tăng Hit rate từ 4.2% lên 45.1%, nhưng lượng token đầu vào tăng ~4x.</a:t>
+              <a:t>•  Tăng k từ 1 lên 10 nâng Hit rate từ 3.76% lên 44.71%, nhưng lượng token đầu vào tăng ~7.6x.</a:t>
             </a:r>
           </a:p>
           <a:p xmlns:a="http://schemas.openxmlformats.org/drawingml/2006/main">
@@ -13838,7 +13869,7 @@
               </a:defRPr>
             </a:pPr>
             <a:r>
-              <a:t>•  Dự báo chuẩn tắc tập TEST: 8.50 USD nằm an toàn dưới trần ngân sách đóng băng 19.99 USD [DIAGNOSTIC FIXTURE].</a:t>
+              <a:t>•  Toàn bộ chi phí thực nghiệm ($6.57575890 USD) nằm an toàn dưới trần ngân sách đóng băng $19.99 USD.</a:t>
             </a:r>
           </a:p>
         </p:txBody>
@@ -13846,7 +13877,7 @@
     </p:spTree>
     <p:extLst>
       <p:ext uri="{BB962C8B-B14F-4D97-AF65-F5344CB8AC3E}">
-        <p14:creationId xmlns:p14="http://schemas.microsoft.com/office/powerpoint/2010/main" val="925787196"/>
+        <p14:creationId xmlns:p14="http://schemas.microsoft.com/office/powerpoint/2010/main" val="865975904"/>
       </p:ext>
     </p:extLst>
   </p:cSld>

--- a/reports/evidence/fixture_populated_slides.pptx
+++ b/reports/evidence/fixture_populated_slides.pptx
@@ -2,24 +2,24 @@
 <file path=ppt/presentation.xml><?xml version="1.0" encoding="utf-8"?>
 <p:presentation xmlns:p="http://schemas.openxmlformats.org/presentationml/2006/main">
   <p:sldMasterIdLst>
-    <p:sldMasterId xmlns:r="http://schemas.openxmlformats.org/officeDocument/2006/relationships" id="2147483648" r:id="Ra93427ade3a4409d"/>
+    <p:sldMasterId xmlns:r="http://schemas.openxmlformats.org/officeDocument/2006/relationships" id="2147483648" r:id="R6f04625a812b42cc"/>
   </p:sldMasterIdLst>
   <p:notesMasterIdLst>
-    <p:notesMasterId xmlns:r="http://schemas.openxmlformats.org/officeDocument/2006/relationships" r:id="Rdf4b9a52ff69436a"/>
+    <p:notesMasterId xmlns:r="http://schemas.openxmlformats.org/officeDocument/2006/relationships" r:id="R9b9147c88d7c4927"/>
   </p:notesMasterIdLst>
   <p:sldIdLst>
-    <p:sldId xmlns:r="http://schemas.openxmlformats.org/officeDocument/2006/relationships" id="256" r:id="Ree784d9e57a54be9"/>
-    <p:sldId xmlns:r="http://schemas.openxmlformats.org/officeDocument/2006/relationships" id="257" r:id="Rc81fa0a00f2f46b3"/>
-    <p:sldId xmlns:r="http://schemas.openxmlformats.org/officeDocument/2006/relationships" id="258" r:id="R971471eb80d745e4"/>
-    <p:sldId xmlns:r="http://schemas.openxmlformats.org/officeDocument/2006/relationships" id="259" r:id="R1f6b6bbb2e454a2d"/>
-    <p:sldId xmlns:r="http://schemas.openxmlformats.org/officeDocument/2006/relationships" id="260" r:id="Rb404c3a1cb964cd1"/>
-    <p:sldId xmlns:r="http://schemas.openxmlformats.org/officeDocument/2006/relationships" id="261" r:id="R8d430bf8f94c4dc3"/>
-    <p:sldId xmlns:r="http://schemas.openxmlformats.org/officeDocument/2006/relationships" id="262" r:id="Rb49e3e1ee09a420f"/>
-    <p:sldId xmlns:r="http://schemas.openxmlformats.org/officeDocument/2006/relationships" id="263" r:id="Rccbe736d2d0e409f"/>
-    <p:sldId xmlns:r="http://schemas.openxmlformats.org/officeDocument/2006/relationships" id="264" r:id="R7f8616a4c3b44817"/>
-    <p:sldId xmlns:r="http://schemas.openxmlformats.org/officeDocument/2006/relationships" id="265" r:id="Rad04a72cdd834a8c"/>
-    <p:sldId xmlns:r="http://schemas.openxmlformats.org/officeDocument/2006/relationships" id="266" r:id="Rbc4bc02abd6b48e9"/>
-    <p:sldId xmlns:r="http://schemas.openxmlformats.org/officeDocument/2006/relationships" id="267" r:id="Rf43d7dc305904138"/>
+    <p:sldId xmlns:r="http://schemas.openxmlformats.org/officeDocument/2006/relationships" id="256" r:id="R9278dc12cbd945f6"/>
+    <p:sldId xmlns:r="http://schemas.openxmlformats.org/officeDocument/2006/relationships" id="257" r:id="R0db90ed9fdba486e"/>
+    <p:sldId xmlns:r="http://schemas.openxmlformats.org/officeDocument/2006/relationships" id="258" r:id="Rb40769a3602c40aa"/>
+    <p:sldId xmlns:r="http://schemas.openxmlformats.org/officeDocument/2006/relationships" id="259" r:id="R6147942bcfef42f2"/>
+    <p:sldId xmlns:r="http://schemas.openxmlformats.org/officeDocument/2006/relationships" id="260" r:id="R0450c55f09764bcf"/>
+    <p:sldId xmlns:r="http://schemas.openxmlformats.org/officeDocument/2006/relationships" id="261" r:id="R91016e2cb2f34896"/>
+    <p:sldId xmlns:r="http://schemas.openxmlformats.org/officeDocument/2006/relationships" id="262" r:id="R54d1adb51fce4f1f"/>
+    <p:sldId xmlns:r="http://schemas.openxmlformats.org/officeDocument/2006/relationships" id="263" r:id="R6c73344a386d4e37"/>
+    <p:sldId xmlns:r="http://schemas.openxmlformats.org/officeDocument/2006/relationships" id="264" r:id="R64002a4c14124412"/>
+    <p:sldId xmlns:r="http://schemas.openxmlformats.org/officeDocument/2006/relationships" id="265" r:id="Rd8f27e3493614a81"/>
+    <p:sldId xmlns:r="http://schemas.openxmlformats.org/officeDocument/2006/relationships" id="266" r:id="R92813597d8a8442b"/>
+    <p:sldId xmlns:r="http://schemas.openxmlformats.org/officeDocument/2006/relationships" id="267" r:id="R9a3df0d670dd4a08"/>
   </p:sldIdLst>
   <p:sldSz cx="12191695" cy="6858000"/>
   <p:notesSz cx="6858000" cy="9144000"/>
@@ -595,7 +595,7 @@
           </a:p>
           <a:p xmlns:a="http://schemas.openxmlformats.org/drawingml/2006/main">
             <a:r>
-              <a:t>Bằng chứng dự án: config/canonical_experiment_lock_v1.json (SHA-256: 961ba9b3e9e1b459a6694a5c8c76424d36c89d65bd4d88b14d0b0de7e4c017ac); reports/experiment_protocol_v1.md (SHA-256: d3bf3d31ad307100ac437a7daecc470bf12de9ada49f19de3d77592d5a21974c); artifacts/results/canonical_metric_bundle_v2.json (SHA-256: 442b5933858caafc9da3c06ee9398637213ed30d7a7db80195c0babb1195ef34); scripts/reproduce_study.py.</a:t>
+              <a:t>Bằng chứng dự án: config/canonical_experiment_lock_v1.json (SHA-256: d0ce198ad4853f4c41ef2bfbafbe10a395e4927a6c6561b3e72c055c4b887e9f); reports/experiment_protocol_v1.md (File SHA-256: 639fd68ae16deec86e9f6baab0980c1abb265c6cd7bb9b4662f562b87e54e819; Canonical Decisions Digest: d3bf3d31ad307100ac437a7daecc470bf12de9ada49f19de3d77592d5a21974c); artifacts/results/canonical_metric_bundle_v2.json (SHA-256: 442b5933858caafc9da3c06ee9398637213ed30d7a7db80195c0babb1195ef34); scripts/reproduce_study.py.</a:t>
             </a:r>
           </a:p>
         </p:txBody>
@@ -755,7 +755,7 @@
           </a:p>
           <a:p xmlns:a="http://schemas.openxmlformats.org/drawingml/2006/main">
             <a:r>
-              <a:t>Bằng chứng dự án: config/canonical_experiment_lock_v1.json (SHA-256: 961ba9b3...); artifacts/results/canonical_metric_bundle_v2.json; scripts/reproduce_study.py; scripts/run_offline_tests.py; tests/test_smoke_cases.py.</a:t>
+              <a:t>Bằng chứng dự án: config/canonical_experiment_lock_v1.json (SHA-256: d0ce198ad4853f4c41ef2bfbafbe10a395e4927a6c6561b3e72c055c4b887e9f); artifacts/results/canonical_metric_bundle_v2.json (SHA-256: 442b5933858caafc9da3c06ee9398637213ed30d7a7db80195c0babb1195ef34); reports/experiment_protocol_v1.md (File SHA-256: 639fd68ae16deec86e9f6baab0980c1abb265c6cd7bb9b4662f562b87e54e819; Canonical Decisions Digest: d3bf3d31ad307100ac437a7daecc470bf12de9ada49f19de3d77592d5a21974c); scripts/reproduce_study.py; scripts/run_offline_tests.py; tests/test_smoke_cases.py.</a:t>
             </a:r>
           </a:p>
         </p:txBody>
@@ -840,7 +840,7 @@
           </a:p>
           <a:p xmlns:a="http://schemas.openxmlformats.org/drawingml/2006/main">
             <a:r>
-              <a:t>Bằng chứng dự án: PR #26 (https://github.com/habachcp6/RAG2ATTCK/pull/26); docs/sanitized_evidence_manifest.json; artifacts/results/canonical_metric_bundle_v2.json; reports/evidence/reproducibility_package_manifest.md.</a:t>
+              <a:t>Bằng chứng dự án: PR #26 (https://github.com/habachcp6/RAG2ATTCK/pull/26); docs/sanitized_evidence_manifest.json; artifacts/results/canonical_metric_bundle_v2.json (SHA-256: 442b5933858caafc9da3c06ee9398637213ed30d7a7db80195c0babb1195ef34); reports/experiment_protocol_v1.md (File SHA-256: 639fd68ae16deec86e9f6baab0980c1abb265c6cd7bb9b4662f562b87e54e819; Canonical Decisions Digest: d3bf3d31ad307100ac437a7daecc470bf12de9ada49f19de3d77592d5a21974c); reports/evidence/reproducibility_package_manifest.md.</a:t>
             </a:r>
           </a:p>
         </p:txBody>
@@ -920,7 +920,7 @@
           </a:p>
           <a:p xmlns:a="http://schemas.openxmlformats.org/drawingml/2006/main">
             <a:r>
-              <a:t>Bằng chứng dự án: docs/README_PROPOSED.md; config/canonical_experiment_lock_v1.json (SHA-256: 961ba9b3...); reports/experiment_protocol_v1.md (D3 policy); tests/test_attack_id_validation.py.</a:t>
+              <a:t>Bằng chứng dự án: docs/README_PROPOSED.md; config/canonical_experiment_lock_v1.json (SHA-256: d0ce198a...); reports/experiment_protocol_v1.md (D3 policy; File SHA-256: 639fd68ae16deec86e9f6baab0980c1abb265c6cd7bb9b4662f562b87e54e819; Canonical Decisions Digest: d3bf3d31ad307100ac437a7daecc470bf12de9ada49f19de3d77592d5a21974c); tests/test_attack_id_validation.py.</a:t>
             </a:r>
           </a:p>
         </p:txBody>
@@ -1000,7 +1000,7 @@
           </a:p>
           <a:p xmlns:a="http://schemas.openxmlformats.org/drawingml/2006/main">
             <a:r>
-              <a:t>Bằng chứng dự án: prompts/baseline_v1.txt (SHA-256: b751fde1ee33b03ebca935e478ffef3ff03ff8bcf440263309a039755ab0f7cf); attack/corpus/enterprise-windows-v19.2.jsonl (SHA-256: b219341154ddf2f12e97d622158a04ab7d57641df6a865559258d365852c3c75); config/experiment_config.json; tests/test_rag_pipeline.py.</a:t>
+              <a:t>Bằng chứng dự án: prompts/baseline_v1.txt (SHA-256: b751fde1ee33b03ec0bdc07cbba10267002d2086cf22b91a74bdfd123856f206); attack/corpus/enterprise-windows-v19.2.jsonl (SHA-256: b219341154ddf2f12e97d622158a04ab7d57641df6a865559258d365852c3c75); config/experiment_config.json (SHA-256: 961ba9b3e9e1b459a6694a5c8c76424d36c89d65bd4d88b14d0b0de7e4c017ac); tests/test_rag_pipeline.py.</a:t>
             </a:r>
           </a:p>
         </p:txBody>
@@ -1080,7 +1080,7 @@
           </a:p>
           <a:p xmlns:a="http://schemas.openxmlformats.org/drawingml/2006/main">
             <a:r>
-              <a:t>Bằng chứng dự án: data/ground_truth/synthetic/inference.jsonl (SHA-256: 90d5f59e64f669f9d7990520625906d40081d5aa112521c7bb5e2f750b3e5fbf); data/ground_truth/synthetic/pairs.json (SHA-256: 079e57a441b18d12351bb9715fc4b0a43058a9ceb68a8670c5e7bfa5dbad3ca8); tests/test_benchmark_inputs.py; tests/test_synthetic_freeze.py.</a:t>
+              <a:t>Bằng chứng dự án: data/ground_truth/synthetic/inference.jsonl (SHA-256: 90d5f59e64f669f95d5ddccd86f1f047e10ee3dc46e4b67a8cd13d1ddf2cd4b8); data/ground_truth/synthetic/pairs.jsonl (SHA-256: 079e57a441b18d127739f610e7f62c263d943eefa19ca4ea5c6eab8b8a07665d); tests/test_benchmark_inputs.py; tests/test_synthetic_freeze.py.</a:t>
             </a:r>
           </a:p>
         </p:txBody>
@@ -1190,7 +1190,7 @@
           </a:p>
           <a:p xmlns:a="http://schemas.openxmlformats.org/drawingml/2006/main">
             <a:r>
-              <a:t>Bằng chứng dự án: reports/experiment_protocol_v1.md (SHA-256: d3bf3d31ad307100ac437a7daecc470bf12de9ada49f19de3d77592d5a21974c); attack/raw/enterprise-v19.2/enterprise-attack-19.2.json (SHA-256: dc1639caa5501d720e280cf1cbd8fbe009884a0c9b3e6e9ed9d0c25166c3d8f4); tests/test_experiment_evaluation.py.</a:t>
+              <a:t>Bằng chứng dự án: reports/experiment_protocol_v1.md (File SHA-256: 639fd68ae16deec86e9f6baab0980c1abb265c6cd7bb9b4662f562b87e54e819; Canonical Decisions Digest: d3bf3d31ad307100ac437a7daecc470bf12de9ada49f19de3d77592d5a21974c); attack/raw/enterprise-v19.2/enterprise-attack-19.2.json (SHA-256: dc1639caa5501d720e280cf1cbd8fbe009884a0c9b3e6e9ed9d0c25166c3d8f4); tests/test_experiment_evaluation.py.</a:t>
             </a:r>
           </a:p>
         </p:txBody>
@@ -1265,12 +1265,12 @@
           </a:p>
           <a:p xmlns:a="http://schemas.openxmlformats.org/drawingml/2006/main">
             <a:r>
-              <a:t>Chẩn đoán độc lập khâu tìm kiếm (RQ2) trên tập scorable N=718 cho thấy Hit@10 đạt 44.71% (321/718), nghĩa là trong 55.29% trường hợp (397/718), kỹ thuật đúng hoàn toàn vắng bóng trong Top-10 gửi cho LLM. Điển hình là kỹ thuật T1136.001 với 0/95 lần trúng Top-10 do khoảng cách ngữ nghĩa giữa Event ID 4720 và STIX description. Chúng tôi ghi nhận giả thuyết Context Scaling &amp; Dilution (k=1,3,5,10): tăng k cải thiện độ phủ nhưng tăng nguy cơ nhiễu distractor; giả thuyết này đã được kiểm chứng thực nghiệm đối chứng end-to-end trên ma trận TEST.</a:t>
-            </a:r>
-          </a:p>
-          <a:p xmlns:a="http://schemas.openxmlformats.org/drawingml/2006/main">
-            <a:r>
-              <a:t>Bằng chứng dự án: outputs/reproduction/figures/fig_rq2_retrieval_hit_rates.png; outputs/reproduction/tables/table_1_retrieval_diagnostics.md; tests/test_retrieval_diagnostics.py.</a:t>
+              <a:t>Chẩn đoán độc lập khâu tìm kiếm (RQ2) trên tập scorable N=718 cho thấy Hit@10 đạt 44.71% (321/718), nghĩa là trong 55.29% trường hợp (397/718), kỹ thuật đúng hoàn toàn vắng bóng trong Top-10 gửi cho LLM. Điển hình là kỹ thuật T1136.001 với 0/95 lần trúng Top-10 đi kèm sự khác biệt từ vựng giữa raw event log (Event ID 4720 'SamAccountName') và mô tả STIX ATT&amp;CK ('persistence'). Đây là giả thuyết từ vựng (lexical divergence hypothesis), không khẳng định quan hệ nhân quả. Chúng tôi ghi nhận giả thuyết Context Scaling &amp; Dilution (k=1,3,5,10): tăng k cải thiện độ phủ nhưng tăng nguy cơ nhiễu distractor; đang được kiểm chứng đối chứng trên ma trận TEST.</a:t>
+            </a:r>
+          </a:p>
+          <a:p xmlns:a="http://schemas.openxmlformats.org/drawingml/2006/main">
+            <a:r>
+              <a:t>Bằng chứng dự án: docs/presentation/figures/canonical_rq2_retrieval_hit_rate.png (SHA-256: f8287936d2b5fc24e89584349028f393b801b6bebe668f8bea449c6b67f2128f); docs/presentation/figures/fig4_retrieval_hit_rate.png; outputs/reproduction/tables/table_1_retrieval_diagnostics.md; tests/test_retrieval_diagnostics.py.</a:t>
             </a:r>
           </a:p>
         </p:txBody>
@@ -1345,12 +1345,17 @@
           </a:p>
           <a:p xmlns:a="http://schemas.openxmlformats.org/drawingml/2006/main">
             <a:r>
-              <a:t>So sánh đối ứng trên 296 cặp anchor chuẩn chỉ ra rằng biểu diễn Single-event đạt thứ hạng tìm kiếm tốt hơn Contextual-event (65 cặp vs 23 cặp), và hơn 70% có thứ hạng tương đương (phần lớn do cả hai cùng trượt Top-10). Điều này cho thấy việc đưa thêm log nền gây hiện tượng benign drift. Chúng tôi thiết lập schema so sánh đối chứng scaffold giữa Zero-Shot No-RAG, Zero-Shot RAG và các prompt scaffold. Ở điều kiện RAG k=10 trên 278 cặp đầy đủ nhãn GT, cả Single và Contextual view đều đạt 83.81% (paired delta = 0.0 pp, McNemar p = 1.0), nghiêm cấm suy diễn quan hệ nhân quả thuần túy khi hình thức biểu diễn thay đổi.</a:t>
-            </a:r>
-          </a:p>
-          <a:p xmlns:a="http://schemas.openxmlformats.org/drawingml/2006/main">
-            <a:r>
-              <a:t>Bằng chứng dự án: scripts/verify_t20_canonical_artifacts.py; outputs/reproduction/tables/table_4_pairwise_representation_comparison.md; tests/test_t20_canonical_artifacts.py.</a:t>
+              <a:t>Phân tích lỗi khâu truy xuất và chẩn đoán có điều kiện (RQ2) trên tập scorable N=718 cho thấy: khi kỹ thuật đúng có mặt trong Top-10 (N=321), tỷ lệ gán đúng đạt 91.28% (293/321); khi kỹ thuật đúng vắng mặt (N=397), tỷ lệ gán đúng là 70.03% (278/397). Độ chênh lệch quan sát được là +21.25 pp. Chúng tôi nhấn mạnh: đây thuần túy là tương quan quan sát trong thực nghiệm (observational association), không áp đặt suy diễn quan hệ nhân quả hay khẳng định năng lực nội tại của LLM.</a:t>
+            </a:r>
+          </a:p>
+          <a:p xmlns:a="http://schemas.openxmlformats.org/drawingml/2006/main">
+            <a:r>
+              <a:t>Theo định đề phân rã lỗi D2i, trong số 147 trường hợp phân loại sai tại k=10, có tới 119 trường hợp (80.95%) đồng thời rơi vào khâu retrieval miss. Chỉ có 28 trường hợp (19.05%) bị phân loại sai khi kỹ thuật đã được truy xuất thành công.</a:t>
+            </a:r>
+          </a:p>
+          <a:p xmlns:a="http://schemas.openxmlformats.org/drawingml/2006/main">
+            <a:r>
+              <a:t>Bằng chứng dự án: artifacts/results/canonical_metric_bundle_v2.json (SHA-256: 442b5933858caafc9da3c06ee9398637213ed30d7a7db80195c0babb1195ef34); reports/experiment_protocol_v1.md (D2i; File SHA-256: 639fd68ae16deec86e9f6baab0980c1abb265c6cd7bb9b4662f562b87e54e819; Canonical Decisions Digest: d3bf3d31ad307100ac437a7daecc470bf12de9ada49f19de3d77592d5a21974c); tests/test_experiment_evaluation.py.</a:t>
             </a:r>
           </a:p>
         </p:txBody>
@@ -1430,7 +1435,42 @@
           </a:p>
           <a:p xmlns:a="http://schemas.openxmlformats.org/drawingml/2006/main">
             <a:r>
-              <a:t>Bảng đối chứng RQ1 ghi nhận RAG k=10 đạt độ chính xác quan sát được cao nhất là 79.53% (571/718) so với No-RAG 77.99% (560/718), tức Delta = +1.532 pp (+1.96% relative gain; 95% CI [-2.355, +5.300] pp chứa 0; kiểm định McNemar chính xác p = 0.4219 / hiển thị 0.422 &gt; 0.05). Do đó, nghiên cứu khẳng định đây là độ chính xác quan sát được cao nhất trong thử nghiệm kèm độ bất định, tuyệt đối không tuyên bố chiến thắng có ý nghĩa thống kê hay lợi ích vượt trội trong production.</a:t>
+              <a:t>Bảng đối chứng 5 điều kiện RQ1 trên tập scorable N=718 (474 lớp vũ trụ D2d):</a:t>
+            </a:r>
+          </a:p>
+          <a:p xmlns:a="http://schemas.openxmlformats.org/drawingml/2006/main">
+            <a:r>
+              <a:t>1. No-RAG:    77.99% (560/718), Macro-F1 = 0.0126 (Baseline đối chứng).</a:t>
+            </a:r>
+          </a:p>
+          <a:p xmlns:a="http://schemas.openxmlformats.org/drawingml/2006/main">
+            <a:r>
+              <a:t>2. RAG (k=1):  77.02% (553/718), Macro-F1 = 0.0127, Delta = -0.975 pp (CI [-3.186, +1.124] pp), McNemar p = 0.435.</a:t>
+            </a:r>
+          </a:p>
+          <a:p xmlns:a="http://schemas.openxmlformats.org/drawingml/2006/main">
+            <a:r>
+              <a:t>3. RAG (k=3):  78.55% (564/718), Macro-F1 = 0.0136, Delta = +0.557 pp (CI [-2.786, +3.934] pp), McNemar p = 0.777.</a:t>
+            </a:r>
+          </a:p>
+          <a:p xmlns:a="http://schemas.openxmlformats.org/drawingml/2006/main">
+            <a:r>
+              <a:t>4. RAG (k=5):  78.83% (566/718), Macro-F1 = 0.0139, Delta = +0.836 pp (CI [-2.934, +4.603] pp), McNemar p = 0.677.</a:t>
+            </a:r>
+          </a:p>
+          <a:p xmlns:a="http://schemas.openxmlformats.org/drawingml/2006/main">
+            <a:r>
+              <a:t>5. RAG (k=10): 79.53% (571/718), Macro-F1 = 0.0140, Delta = +1.532 pp (+1.96% relative; 95% CI [-2.355, +5.300] pp chứa 0), McNemar p = 0.4219 / 0.422 &gt; 0.05.</a:t>
+            </a:r>
+          </a:p>
+          <a:p xmlns:a="http://schemas.openxmlformats.org/drawingml/2006/main">
+            <a:r>
+              <a:t>Nghiên cứu khẳng định RAG k=10 là độ chính xác quan sát được cao nhất trong thử nghiệm kèm độ bất định, tuyệt đối không tuyên bố chiến thắng có ý nghĩa thống kê hay lợi ích vượt trội trong production.</a:t>
+            </a:r>
+          </a:p>
+          <a:p xmlns:a="http://schemas.openxmlformats.org/drawingml/2006/main">
+            <a:r>
+              <a:t>Về Macro-F1: Được đánh giá nhất quán trên toàn bộ vũ trụ 474 lớp kỹ thuật MITRE ATT&amp;CK v19.2 Enterprise Windows theo định đề D2d (FROZEN_BENCHMARK_UNIVERSE = 474), gồm 8 lớp có mẫu hỗ trợ và 466 lớp zero-support: No-RAG đạt 0.0126 vs RAG k=10 đạt 0.0140 (Delta +0.0014).</a:t>
             </a:r>
           </a:p>
           <a:p xmlns:a="http://schemas.openxmlformats.org/drawingml/2006/main">
@@ -1445,7 +1485,7 @@
           </a:p>
           <a:p xmlns:a="http://schemas.openxmlformats.org/drawingml/2006/main">
             <a:r>
-              <a:t>Bằng chứng dự án: reports/experiment_protocol_v1.md (D2e, D2f, D2h, D2i; SHA-256: d3bf3d31ad307100ac437a7daecc470bf12de9ada49f19de3d77592d5a21974c); artifacts/results/canonical_metric_bundle_v2.json; tests/test_experiment_evaluation.py.</a:t>
+              <a:t>Bằng chứng dự án: reports/experiment_protocol_v1.md (D2d, D2e, D2f, D2h, D2i; File SHA-256: 639fd68ae16deec86e9f6baab0980c1abb265c6cd7bb9b4662f562b87e54e819; Canonical Decisions Digest: d3bf3d31ad307100ac437a7daecc470bf12de9ada49f19de3d77592d5a21974c); artifacts/results/canonical_metric_bundle_v2.json (SHA-256: 442b5933858caafc9da3c06ee9398637213ed30d7a7db80195c0babb1195ef34); tests/test_experiment_evaluation.py.</a:t>
             </a:r>
           </a:p>
         </p:txBody>
@@ -1525,7 +1565,7 @@
           </a:p>
           <a:p xmlns:a="http://schemas.openxmlformats.org/drawingml/2006/main">
             <a:r>
-              <a:t>1. Dữ liệu DEV là dữ liệu tổng hợp (synthetic-paired-v1 DEV split). Việc gửi request lên OpenAI không biến log tổng hợp thành dữ liệu thực địa in-the-wild.</a:t>
+              <a:t>1. Dữ liệu thử nghiệm Stage B là dữ liệu tổng hợp (synthetic split). Việc gửi request lên OpenAI không biến log tổng hợp thành dữ liệu thực địa in-the-wild.</a:t>
             </a:r>
           </a:p>
           <a:p xmlns:a="http://schemas.openxmlformats.org/drawingml/2006/main">
@@ -1535,17 +1575,27 @@
           </a:p>
           <a:p xmlns:a="http://schemas.openxmlformats.org/drawingml/2006/main">
             <a:r>
-              <a:t>3. Hạch toán tài chính chính xác: trần ngân sách đóng băng cứng $19.99 USD (hard_budget_limit_usd = $19.99000000). Chi phí quyết toán thực tế 5 điều kiện chính thức là $6.58 settled spend ($6.57575890 USD).</a:t>
-            </a:r>
-          </a:p>
-          <a:p xmlns:a="http://schemas.openxmlformats.org/drawingml/2006/main">
-            <a:r>
-              <a:t>4. Phân biệt rạch ròi: Khoản giữ chỗ thận trọng pilot $0.05264010 USD (prior_pilot_provisional_hold_usd) được phân tách minh bạch khỏi chi phí quyết toán thực tế $6.57575890 USD. Tổng chi phí cam kết là $6.63 committed spend ($6.62839900 USD), ngân sách khả dụng còn lại là $13.36 net remaining ($13.36160100 USD; 0 active holds, 0 breach).</a:t>
-            </a:r>
-          </a:p>
-          <a:p xmlns:a="http://schemas.openxmlformats.org/drawingml/2006/main">
-            <a:r>
-              <a:t>Bằng chứng dự án: config/experiment_config.json (hard_budget_limit_usd: 19.99); artifacts/results/canonical_metric_bundle_v2.json; tests/test_monetary_guard.py.</a:t>
+              <a:t>3. Phân định giới hạn token: 13 requests INCOMPLETE dừng do chạm trần configured max_output_tokens (8,192 tokens, tức ngân sách suy luận đầu ra được cấu hình), không phải do vượt cửa sổ ngữ cảnh context ceiling (~1,050,000 tokens của gpt-5.6-luna). Toàn bộ 13 requests này đều thuộc các view loại trừ/unmapped.</a:t>
+            </a:r>
+          </a:p>
+          <a:p xmlns:a="http://schemas.openxmlformats.org/drawingml/2006/main">
+            <a:r>
+              <a:t>4. Hạch toán tài chính chính xác: trần ngân sách đóng băng cứng $19.99 USD (hard_budget_limit_usd = $19.99000000). Chi phí quyết toán thực tế 5 điều kiện chính thức là $6.58 settled spend ($6.57575890 USD).</a:t>
+            </a:r>
+          </a:p>
+          <a:p xmlns:a="http://schemas.openxmlformats.org/drawingml/2006/main">
+            <a:r>
+              <a:t>5. Phân biệt rạch ròi: Khoản giữ chỗ thận trọng pilot $0.05264010 USD (prior_pilot_provisional_hold_usd) được phân tách minh bạch khỏi chi phí quyết toán thực tế $6.57575890 USD. Tổng chi phí cam kết là $6.63 committed spend ($6.62839900 USD), ngân sách khả dụng còn lại là $13.36 net remaining ($13.36160100 USD; 0 active holds, 0 breach).</a:t>
+            </a:r>
+          </a:p>
+          <a:p xmlns:a="http://schemas.openxmlformats.org/drawingml/2006/main">
+            <a:r>
+              <a:t>6. Đánh đổi token: Tỷ lệ tăng token prompt từ k=1 lên k=10 là ~4.103x (1246.5 lên 5114.3 tokens); tỷ lệ từ No-RAG lên k=10 là ~7.58x.</a:t>
+            </a:r>
+          </a:p>
+          <a:p xmlns:a="http://schemas.openxmlformats.org/drawingml/2006/main">
+            <a:r>
+              <a:t>Bằng chứng dự án: docs/presentation/figures/canonical_rq3_resource_consumption.png (SHA-256: ca296165b38b499432f851618e3d6a512964c461e59dc3b646e647ddcb70bfb1); docs/presentation/figures/fig7_cost_and_tokens_vs_k.png; config/experiment_config.json (hard_budget_limit_usd: 19.99); artifacts/results/canonical_metric_bundle_v2.json (SHA-256: 442b5933858caafc9da3c06ee9398637213ed30d7a7db80195c0babb1195ef34); reports/experiment_protocol_v1.md (File SHA-256: 639fd68ae16deec86e9f6baab0980c1abb265c6cd7bb9b4662f562b87e54e819; Canonical Decisions Digest: d3bf3d31ad307100ac437a7daecc470bf12de9ada49f19de3d77592d5a21974c); tests/test_monetary_guard.py.</a:t>
             </a:r>
           </a:p>
         </p:txBody>
@@ -1592,7 +1642,7 @@
           <p:cNvPr id="2" name="Title 1">
             <a:extLst xmlns:a="http://schemas.openxmlformats.org/drawingml/2006/main">
               <a:ext uri="{FF2B5EF4-FFF2-40B4-BE49-F238E27FC236}">
-                <a16:creationId xmlns:a16="http://schemas.microsoft.com/office/drawing/2014/main" id="{D66AD3A6-C2FE-4237-AA6A-5D1C659E5AA6}"/>
+                <a16:creationId xmlns:a16="http://schemas.microsoft.com/office/drawing/2014/main" id="{A5744BE0-C119-44C8-83CD-767D4A22D216}"/>
               </a:ext>
             </a:extLst>
           </p:cNvPr>
@@ -1625,7 +1675,7 @@
           <p:cNvPr id="3" name="Subtitle 2">
             <a:extLst xmlns:a="http://schemas.openxmlformats.org/drawingml/2006/main">
               <a:ext uri="{FF2B5EF4-FFF2-40B4-BE49-F238E27FC236}">
-                <a16:creationId xmlns:a16="http://schemas.microsoft.com/office/drawing/2014/main" id="{56A41D51-E448-4B9D-BD7E-791737D4799A}"/>
+                <a16:creationId xmlns:a16="http://schemas.microsoft.com/office/drawing/2014/main" id="{D4CC9CFC-6D6F-4495-9951-023DD1625DD4}"/>
               </a:ext>
             </a:extLst>
           </p:cNvPr>
@@ -1749,7 +1799,7 @@
           <p:cNvPr id="4" name="Date Placeholder 3">
             <a:extLst xmlns:a="http://schemas.openxmlformats.org/drawingml/2006/main">
               <a:ext uri="{FF2B5EF4-FFF2-40B4-BE49-F238E27FC236}">
-                <a16:creationId xmlns:a16="http://schemas.microsoft.com/office/drawing/2014/main" id="{93AD6A40-E0A7-4F08-AAA7-13A3B5BE3F09}"/>
+                <a16:creationId xmlns:a16="http://schemas.microsoft.com/office/drawing/2014/main" id="{42E57BC1-0229-45E3-BC2B-4F7B0E39ED49}"/>
               </a:ext>
             </a:extLst>
           </p:cNvPr>
@@ -1777,7 +1827,7 @@
           <p:cNvPr id="5" name="Footer Placeholder 4">
             <a:extLst xmlns:a="http://schemas.openxmlformats.org/drawingml/2006/main">
               <a:ext uri="{FF2B5EF4-FFF2-40B4-BE49-F238E27FC236}">
-                <a16:creationId xmlns:a16="http://schemas.microsoft.com/office/drawing/2014/main" id="{555CD510-427D-4031-A3E9-459CEFC2E8EE}"/>
+                <a16:creationId xmlns:a16="http://schemas.microsoft.com/office/drawing/2014/main" id="{7A3C3B20-83DD-4E09-98CA-62D86BF90522}"/>
               </a:ext>
             </a:extLst>
           </p:cNvPr>
@@ -1802,7 +1852,7 @@
           <p:cNvPr id="6" name="Slide Number Placeholder 5">
             <a:extLst xmlns:a="http://schemas.openxmlformats.org/drawingml/2006/main">
               <a:ext uri="{FF2B5EF4-FFF2-40B4-BE49-F238E27FC236}">
-                <a16:creationId xmlns:a16="http://schemas.microsoft.com/office/drawing/2014/main" id="{4D7718A8-B591-4F91-9D37-799AB4D8D65D}"/>
+                <a16:creationId xmlns:a16="http://schemas.microsoft.com/office/drawing/2014/main" id="{F3A9F2A1-7638-4E9B-BB25-7F984DD8A498}"/>
               </a:ext>
             </a:extLst>
           </p:cNvPr>
@@ -1847,7 +1897,7 @@
           <p:cNvPr id="2" name="Title 1">
             <a:extLst xmlns:a="http://schemas.openxmlformats.org/drawingml/2006/main">
               <a:ext uri="{FF2B5EF4-FFF2-40B4-BE49-F238E27FC236}">
-                <a16:creationId xmlns:a16="http://schemas.microsoft.com/office/drawing/2014/main" id="{859CD4AD-D2CA-4B12-8ADD-9555B95AD11D}"/>
+                <a16:creationId xmlns:a16="http://schemas.microsoft.com/office/drawing/2014/main" id="{19745BFE-FC31-4D91-AAF1-2A7A15707E85}"/>
               </a:ext>
             </a:extLst>
           </p:cNvPr>
@@ -1875,7 +1925,7 @@
           <p:cNvPr id="3" name="Vertical Text Placeholder 2">
             <a:extLst xmlns:a="http://schemas.openxmlformats.org/drawingml/2006/main">
               <a:ext uri="{FF2B5EF4-FFF2-40B4-BE49-F238E27FC236}">
-                <a16:creationId xmlns:a16="http://schemas.microsoft.com/office/drawing/2014/main" id="{6FAEB06F-1EA0-4139-8329-316C271C38DF}"/>
+                <a16:creationId xmlns:a16="http://schemas.microsoft.com/office/drawing/2014/main" id="{6D5960DE-A833-4359-9417-CAE4CC70CE09}"/>
               </a:ext>
             </a:extLst>
           </p:cNvPr>
@@ -1938,7 +1988,7 @@
           <p:cNvPr id="4" name="Date Placeholder 3">
             <a:extLst xmlns:a="http://schemas.openxmlformats.org/drawingml/2006/main">
               <a:ext uri="{FF2B5EF4-FFF2-40B4-BE49-F238E27FC236}">
-                <a16:creationId xmlns:a16="http://schemas.microsoft.com/office/drawing/2014/main" id="{24CE66CA-F7B5-4A8D-B123-6A9B2CD6530A}"/>
+                <a16:creationId xmlns:a16="http://schemas.microsoft.com/office/drawing/2014/main" id="{FBF12D78-9E9D-45DF-9E30-96B314D87C02}"/>
               </a:ext>
             </a:extLst>
           </p:cNvPr>
@@ -1966,7 +2016,7 @@
           <p:cNvPr id="5" name="Footer Placeholder 4">
             <a:extLst xmlns:a="http://schemas.openxmlformats.org/drawingml/2006/main">
               <a:ext uri="{FF2B5EF4-FFF2-40B4-BE49-F238E27FC236}">
-                <a16:creationId xmlns:a16="http://schemas.microsoft.com/office/drawing/2014/main" id="{9B994293-7906-4CD5-8759-ED8802BB3FBD}"/>
+                <a16:creationId xmlns:a16="http://schemas.microsoft.com/office/drawing/2014/main" id="{E316FC90-33E1-4012-8633-7FCE71316680}"/>
               </a:ext>
             </a:extLst>
           </p:cNvPr>
@@ -1991,7 +2041,7 @@
           <p:cNvPr id="6" name="Slide Number Placeholder 5">
             <a:extLst xmlns:a="http://schemas.openxmlformats.org/drawingml/2006/main">
               <a:ext uri="{FF2B5EF4-FFF2-40B4-BE49-F238E27FC236}">
-                <a16:creationId xmlns:a16="http://schemas.microsoft.com/office/drawing/2014/main" id="{AF5E64CC-9370-457D-82EF-BEA750495640}"/>
+                <a16:creationId xmlns:a16="http://schemas.microsoft.com/office/drawing/2014/main" id="{F023A3FA-759B-4FB6-AC30-7349BBF880E5}"/>
               </a:ext>
             </a:extLst>
           </p:cNvPr>
@@ -2036,7 +2086,7 @@
           <p:cNvPr id="2" name="Vertical Title 1">
             <a:extLst xmlns:a="http://schemas.openxmlformats.org/drawingml/2006/main">
               <a:ext uri="{FF2B5EF4-FFF2-40B4-BE49-F238E27FC236}">
-                <a16:creationId xmlns:a16="http://schemas.microsoft.com/office/drawing/2014/main" id="{047B670C-802B-4BE6-A18D-FD192ACB412C}"/>
+                <a16:creationId xmlns:a16="http://schemas.microsoft.com/office/drawing/2014/main" id="{95CB1179-BFB8-48CD-988E-4D9FF85AAF08}"/>
               </a:ext>
             </a:extLst>
           </p:cNvPr>
@@ -2069,7 +2119,7 @@
           <p:cNvPr id="3" name="Vertical Text Placeholder 2">
             <a:extLst xmlns:a="http://schemas.openxmlformats.org/drawingml/2006/main">
               <a:ext uri="{FF2B5EF4-FFF2-40B4-BE49-F238E27FC236}">
-                <a16:creationId xmlns:a16="http://schemas.microsoft.com/office/drawing/2014/main" id="{8BFA5B23-7AD6-44FE-8999-022B60CFD88F}"/>
+                <a16:creationId xmlns:a16="http://schemas.microsoft.com/office/drawing/2014/main" id="{3E8C48D7-5AB0-4DDE-892C-D70FC929FC5A}"/>
               </a:ext>
             </a:extLst>
           </p:cNvPr>
@@ -2137,7 +2187,7 @@
           <p:cNvPr id="4" name="Date Placeholder 3">
             <a:extLst xmlns:a="http://schemas.openxmlformats.org/drawingml/2006/main">
               <a:ext uri="{FF2B5EF4-FFF2-40B4-BE49-F238E27FC236}">
-                <a16:creationId xmlns:a16="http://schemas.microsoft.com/office/drawing/2014/main" id="{77959591-E412-4A76-AF2F-A1C939E8FB73}"/>
+                <a16:creationId xmlns:a16="http://schemas.microsoft.com/office/drawing/2014/main" id="{A5B89BBC-2E2C-4266-97DE-306F7A1A1D0F}"/>
               </a:ext>
             </a:extLst>
           </p:cNvPr>
@@ -2165,7 +2215,7 @@
           <p:cNvPr id="5" name="Footer Placeholder 4">
             <a:extLst xmlns:a="http://schemas.openxmlformats.org/drawingml/2006/main">
               <a:ext uri="{FF2B5EF4-FFF2-40B4-BE49-F238E27FC236}">
-                <a16:creationId xmlns:a16="http://schemas.microsoft.com/office/drawing/2014/main" id="{5F28D573-E24D-4EAA-B3AD-7C19AB3BC7BD}"/>
+                <a16:creationId xmlns:a16="http://schemas.microsoft.com/office/drawing/2014/main" id="{7C747B1A-9D57-4AA2-8B48-8786167DC09D}"/>
               </a:ext>
             </a:extLst>
           </p:cNvPr>
@@ -2190,7 +2240,7 @@
           <p:cNvPr id="6" name="Slide Number Placeholder 5">
             <a:extLst xmlns:a="http://schemas.openxmlformats.org/drawingml/2006/main">
               <a:ext uri="{FF2B5EF4-FFF2-40B4-BE49-F238E27FC236}">
-                <a16:creationId xmlns:a16="http://schemas.microsoft.com/office/drawing/2014/main" id="{64F1BD6D-7637-4B21-A793-63219F7BEBFA}"/>
+                <a16:creationId xmlns:a16="http://schemas.microsoft.com/office/drawing/2014/main" id="{08A40143-FEFE-4294-A8B2-D2C79A4A4970}"/>
               </a:ext>
             </a:extLst>
           </p:cNvPr>
@@ -2235,7 +2285,7 @@
           <p:cNvPr id="2" name="Title 1">
             <a:extLst xmlns:a="http://schemas.openxmlformats.org/drawingml/2006/main">
               <a:ext uri="{FF2B5EF4-FFF2-40B4-BE49-F238E27FC236}">
-                <a16:creationId xmlns:a16="http://schemas.microsoft.com/office/drawing/2014/main" id="{75EFD027-FB12-473F-9721-F23AB01B2513}"/>
+                <a16:creationId xmlns:a16="http://schemas.microsoft.com/office/drawing/2014/main" id="{08A6C47B-0A4D-4090-BD95-45C4DF42225D}"/>
               </a:ext>
             </a:extLst>
           </p:cNvPr>
@@ -2263,7 +2313,7 @@
           <p:cNvPr id="3" name="Content Placeholder 2">
             <a:extLst xmlns:a="http://schemas.openxmlformats.org/drawingml/2006/main">
               <a:ext uri="{FF2B5EF4-FFF2-40B4-BE49-F238E27FC236}">
-                <a16:creationId xmlns:a16="http://schemas.microsoft.com/office/drawing/2014/main" id="{26719805-CFA7-4634-93C7-F705A7513545}"/>
+                <a16:creationId xmlns:a16="http://schemas.microsoft.com/office/drawing/2014/main" id="{1193BCA2-48D0-4081-91A0-5AFB1BA01F4E}"/>
               </a:ext>
             </a:extLst>
           </p:cNvPr>
@@ -2326,7 +2376,7 @@
           <p:cNvPr id="4" name="Date Placeholder 3">
             <a:extLst xmlns:a="http://schemas.openxmlformats.org/drawingml/2006/main">
               <a:ext uri="{FF2B5EF4-FFF2-40B4-BE49-F238E27FC236}">
-                <a16:creationId xmlns:a16="http://schemas.microsoft.com/office/drawing/2014/main" id="{3638E448-B36D-4654-B360-833DD199A9B1}"/>
+                <a16:creationId xmlns:a16="http://schemas.microsoft.com/office/drawing/2014/main" id="{83A28B88-0C76-4008-82C9-298416F50BBE}"/>
               </a:ext>
             </a:extLst>
           </p:cNvPr>
@@ -2354,7 +2404,7 @@
           <p:cNvPr id="5" name="Footer Placeholder 4">
             <a:extLst xmlns:a="http://schemas.openxmlformats.org/drawingml/2006/main">
               <a:ext uri="{FF2B5EF4-FFF2-40B4-BE49-F238E27FC236}">
-                <a16:creationId xmlns:a16="http://schemas.microsoft.com/office/drawing/2014/main" id="{1BAB1665-5633-4B54-BCD2-5DF9F48C9767}"/>
+                <a16:creationId xmlns:a16="http://schemas.microsoft.com/office/drawing/2014/main" id="{2A0D0232-3711-4EDB-A775-DE16628C1FF4}"/>
               </a:ext>
             </a:extLst>
           </p:cNvPr>
@@ -2379,7 +2429,7 @@
           <p:cNvPr id="6" name="Slide Number Placeholder 5">
             <a:extLst xmlns:a="http://schemas.openxmlformats.org/drawingml/2006/main">
               <a:ext uri="{FF2B5EF4-FFF2-40B4-BE49-F238E27FC236}">
-                <a16:creationId xmlns:a16="http://schemas.microsoft.com/office/drawing/2014/main" id="{DEF8E4EC-D327-48DC-A7AA-4A5FF0AE564D}"/>
+                <a16:creationId xmlns:a16="http://schemas.microsoft.com/office/drawing/2014/main" id="{5829D05F-A8DA-49F0-AE34-41350AD6D995}"/>
               </a:ext>
             </a:extLst>
           </p:cNvPr>
@@ -2424,7 +2474,7 @@
           <p:cNvPr id="2" name="Title 1">
             <a:extLst xmlns:a="http://schemas.openxmlformats.org/drawingml/2006/main">
               <a:ext uri="{FF2B5EF4-FFF2-40B4-BE49-F238E27FC236}">
-                <a16:creationId xmlns:a16="http://schemas.microsoft.com/office/drawing/2014/main" id="{CB5A2718-D2A9-41C2-BAED-95856C316393}"/>
+                <a16:creationId xmlns:a16="http://schemas.microsoft.com/office/drawing/2014/main" id="{772EF8A8-CD40-48CD-A069-2DD6743BA2D2}"/>
               </a:ext>
             </a:extLst>
           </p:cNvPr>
@@ -2462,7 +2512,7 @@
           <p:cNvPr id="3" name="Text Placeholder 2">
             <a:extLst xmlns:a="http://schemas.openxmlformats.org/drawingml/2006/main">
               <a:ext uri="{FF2B5EF4-FFF2-40B4-BE49-F238E27FC236}">
-                <a16:creationId xmlns:a16="http://schemas.microsoft.com/office/drawing/2014/main" id="{4A0981AA-0BE8-4BB7-AB94-A439FF69CA64}"/>
+                <a16:creationId xmlns:a16="http://schemas.microsoft.com/office/drawing/2014/main" id="{2EDDECBD-F5D9-433A-A04A-43755818CB24}"/>
               </a:ext>
             </a:extLst>
           </p:cNvPr>
@@ -2588,7 +2638,7 @@
           <p:cNvPr id="4" name="Date Placeholder 3">
             <a:extLst xmlns:a="http://schemas.openxmlformats.org/drawingml/2006/main">
               <a:ext uri="{FF2B5EF4-FFF2-40B4-BE49-F238E27FC236}">
-                <a16:creationId xmlns:a16="http://schemas.microsoft.com/office/drawing/2014/main" id="{73B25840-6818-4F45-B03E-E2C76124CBEF}"/>
+                <a16:creationId xmlns:a16="http://schemas.microsoft.com/office/drawing/2014/main" id="{0EDDC842-D459-4AE4-BE75-9EA584A795DB}"/>
               </a:ext>
             </a:extLst>
           </p:cNvPr>
@@ -2616,7 +2666,7 @@
           <p:cNvPr id="5" name="Footer Placeholder 4">
             <a:extLst xmlns:a="http://schemas.openxmlformats.org/drawingml/2006/main">
               <a:ext uri="{FF2B5EF4-FFF2-40B4-BE49-F238E27FC236}">
-                <a16:creationId xmlns:a16="http://schemas.microsoft.com/office/drawing/2014/main" id="{3BEA3C52-E683-49A4-A81E-7C5176A1E292}"/>
+                <a16:creationId xmlns:a16="http://schemas.microsoft.com/office/drawing/2014/main" id="{5B0D256C-3F70-4C63-994F-8E04BD050953}"/>
               </a:ext>
             </a:extLst>
           </p:cNvPr>
@@ -2641,7 +2691,7 @@
           <p:cNvPr id="6" name="Slide Number Placeholder 5">
             <a:extLst xmlns:a="http://schemas.openxmlformats.org/drawingml/2006/main">
               <a:ext uri="{FF2B5EF4-FFF2-40B4-BE49-F238E27FC236}">
-                <a16:creationId xmlns:a16="http://schemas.microsoft.com/office/drawing/2014/main" id="{DA3CD706-6CEA-44A8-9FE1-60B577AFBB2C}"/>
+                <a16:creationId xmlns:a16="http://schemas.microsoft.com/office/drawing/2014/main" id="{730D24D9-3BEB-4065-A8F1-0C5367F4304F}"/>
               </a:ext>
             </a:extLst>
           </p:cNvPr>
@@ -2686,7 +2736,7 @@
           <p:cNvPr id="2" name="Title 1">
             <a:extLst xmlns:a="http://schemas.openxmlformats.org/drawingml/2006/main">
               <a:ext uri="{FF2B5EF4-FFF2-40B4-BE49-F238E27FC236}">
-                <a16:creationId xmlns:a16="http://schemas.microsoft.com/office/drawing/2014/main" id="{4FA86D74-7202-48B4-B55B-E0E850574310}"/>
+                <a16:creationId xmlns:a16="http://schemas.microsoft.com/office/drawing/2014/main" id="{F72634BA-C426-4948-8EFD-F3BDD456A74E}"/>
               </a:ext>
             </a:extLst>
           </p:cNvPr>
@@ -2714,7 +2764,7 @@
           <p:cNvPr id="3" name="Content Placeholder 2">
             <a:extLst xmlns:a="http://schemas.openxmlformats.org/drawingml/2006/main">
               <a:ext uri="{FF2B5EF4-FFF2-40B4-BE49-F238E27FC236}">
-                <a16:creationId xmlns:a16="http://schemas.microsoft.com/office/drawing/2014/main" id="{7E5A7EA0-3B7B-4BA5-9F4C-9BC126CD99E5}"/>
+                <a16:creationId xmlns:a16="http://schemas.microsoft.com/office/drawing/2014/main" id="{A5276ECC-6B45-4A0E-818A-32477863FD74}"/>
               </a:ext>
             </a:extLst>
           </p:cNvPr>
@@ -2819,7 +2869,7 @@
           <p:cNvPr id="4" name="Content Placeholder 3">
             <a:extLst xmlns:a="http://schemas.openxmlformats.org/drawingml/2006/main">
               <a:ext uri="{FF2B5EF4-FFF2-40B4-BE49-F238E27FC236}">
-                <a16:creationId xmlns:a16="http://schemas.microsoft.com/office/drawing/2014/main" id="{06A70A8A-C29E-49A7-BDC8-2A74D967B4A2}"/>
+                <a16:creationId xmlns:a16="http://schemas.microsoft.com/office/drawing/2014/main" id="{9423EAD8-443E-4186-88ED-8E038BB76390}"/>
               </a:ext>
             </a:extLst>
           </p:cNvPr>
@@ -2924,7 +2974,7 @@
           <p:cNvPr id="5" name="Date Placeholder 4">
             <a:extLst xmlns:a="http://schemas.openxmlformats.org/drawingml/2006/main">
               <a:ext uri="{FF2B5EF4-FFF2-40B4-BE49-F238E27FC236}">
-                <a16:creationId xmlns:a16="http://schemas.microsoft.com/office/drawing/2014/main" id="{53601ECA-C591-4BA0-AC4C-61DE5FA5EBA6}"/>
+                <a16:creationId xmlns:a16="http://schemas.microsoft.com/office/drawing/2014/main" id="{38588B49-1651-4A17-BAEA-7C0CACE22482}"/>
               </a:ext>
             </a:extLst>
           </p:cNvPr>
@@ -2952,7 +3002,7 @@
           <p:cNvPr id="6" name="Footer Placeholder 5">
             <a:extLst xmlns:a="http://schemas.openxmlformats.org/drawingml/2006/main">
               <a:ext uri="{FF2B5EF4-FFF2-40B4-BE49-F238E27FC236}">
-                <a16:creationId xmlns:a16="http://schemas.microsoft.com/office/drawing/2014/main" id="{70B1A62F-160C-4F98-86D9-E15128320E01}"/>
+                <a16:creationId xmlns:a16="http://schemas.microsoft.com/office/drawing/2014/main" id="{8727B172-0D95-40CA-9165-A3186C20D3BC}"/>
               </a:ext>
             </a:extLst>
           </p:cNvPr>
@@ -2977,7 +3027,7 @@
           <p:cNvPr id="7" name="Slide Number Placeholder 6">
             <a:extLst xmlns:a="http://schemas.openxmlformats.org/drawingml/2006/main">
               <a:ext uri="{FF2B5EF4-FFF2-40B4-BE49-F238E27FC236}">
-                <a16:creationId xmlns:a16="http://schemas.microsoft.com/office/drawing/2014/main" id="{3C4CCAA2-E8E1-43A4-9390-4EDCF8E44BE0}"/>
+                <a16:creationId xmlns:a16="http://schemas.microsoft.com/office/drawing/2014/main" id="{E40E64EA-EE32-4651-8962-EF7DE098C7AA}"/>
               </a:ext>
             </a:extLst>
           </p:cNvPr>
@@ -3022,7 +3072,7 @@
           <p:cNvPr id="2" name="Title 1">
             <a:extLst xmlns:a="http://schemas.openxmlformats.org/drawingml/2006/main">
               <a:ext uri="{FF2B5EF4-FFF2-40B4-BE49-F238E27FC236}">
-                <a16:creationId xmlns:a16="http://schemas.microsoft.com/office/drawing/2014/main" id="{85F65726-6C58-4FB3-BA65-2EF4FECB1278}"/>
+                <a16:creationId xmlns:a16="http://schemas.microsoft.com/office/drawing/2014/main" id="{6B21E005-A366-45C6-8C8C-4B76168B3A8C}"/>
               </a:ext>
             </a:extLst>
           </p:cNvPr>
@@ -3055,7 +3105,7 @@
           <p:cNvPr id="3" name="Text Placeholder 2">
             <a:extLst xmlns:a="http://schemas.openxmlformats.org/drawingml/2006/main">
               <a:ext uri="{FF2B5EF4-FFF2-40B4-BE49-F238E27FC236}">
-                <a16:creationId xmlns:a16="http://schemas.microsoft.com/office/drawing/2014/main" id="{1E98E12E-B82B-44E2-AB39-8C7F1A2665F5}"/>
+                <a16:creationId xmlns:a16="http://schemas.microsoft.com/office/drawing/2014/main" id="{A9B862E3-D9E3-46E5-A789-B711790C99F2}"/>
               </a:ext>
             </a:extLst>
           </p:cNvPr>
@@ -3127,7 +3177,7 @@
           <p:cNvPr id="4" name="Content Placeholder 3">
             <a:extLst xmlns:a="http://schemas.openxmlformats.org/drawingml/2006/main">
               <a:ext uri="{FF2B5EF4-FFF2-40B4-BE49-F238E27FC236}">
-                <a16:creationId xmlns:a16="http://schemas.microsoft.com/office/drawing/2014/main" id="{50D6CF61-17FF-4CEA-8406-2A4AFBE663B7}"/>
+                <a16:creationId xmlns:a16="http://schemas.microsoft.com/office/drawing/2014/main" id="{FFCBF07C-53C1-49D0-8125-C088B2439AC6}"/>
               </a:ext>
             </a:extLst>
           </p:cNvPr>
@@ -3232,7 +3282,7 @@
           <p:cNvPr id="5" name="Text Placeholder 4">
             <a:extLst xmlns:a="http://schemas.openxmlformats.org/drawingml/2006/main">
               <a:ext uri="{FF2B5EF4-FFF2-40B4-BE49-F238E27FC236}">
-                <a16:creationId xmlns:a16="http://schemas.microsoft.com/office/drawing/2014/main" id="{A972D146-675A-4405-917B-19EA65E73BE5}"/>
+                <a16:creationId xmlns:a16="http://schemas.microsoft.com/office/drawing/2014/main" id="{075C592A-7C42-4E38-9594-F81E5D93AABA}"/>
               </a:ext>
             </a:extLst>
           </p:cNvPr>
@@ -3304,7 +3354,7 @@
           <p:cNvPr id="6" name="Content Placeholder 5">
             <a:extLst xmlns:a="http://schemas.openxmlformats.org/drawingml/2006/main">
               <a:ext uri="{FF2B5EF4-FFF2-40B4-BE49-F238E27FC236}">
-                <a16:creationId xmlns:a16="http://schemas.microsoft.com/office/drawing/2014/main" id="{FB305520-C2F7-431E-A8F1-04B3C6BD498E}"/>
+                <a16:creationId xmlns:a16="http://schemas.microsoft.com/office/drawing/2014/main" id="{A0E29A3B-179B-4961-96AD-28D1FA583015}"/>
               </a:ext>
             </a:extLst>
           </p:cNvPr>
@@ -3409,7 +3459,7 @@
           <p:cNvPr id="7" name="Date Placeholder 6">
             <a:extLst xmlns:a="http://schemas.openxmlformats.org/drawingml/2006/main">
               <a:ext uri="{FF2B5EF4-FFF2-40B4-BE49-F238E27FC236}">
-                <a16:creationId xmlns:a16="http://schemas.microsoft.com/office/drawing/2014/main" id="{D037B7AA-CC6C-41C9-91FD-056E6D0A1BC7}"/>
+                <a16:creationId xmlns:a16="http://schemas.microsoft.com/office/drawing/2014/main" id="{F52E7E0C-3338-4AB5-9938-FA855B13CE6D}"/>
               </a:ext>
             </a:extLst>
           </p:cNvPr>
@@ -3437,7 +3487,7 @@
           <p:cNvPr id="8" name="Footer Placeholder 7">
             <a:extLst xmlns:a="http://schemas.openxmlformats.org/drawingml/2006/main">
               <a:ext uri="{FF2B5EF4-FFF2-40B4-BE49-F238E27FC236}">
-                <a16:creationId xmlns:a16="http://schemas.microsoft.com/office/drawing/2014/main" id="{3C13BCA0-1604-491D-8AB5-2525B362EF70}"/>
+                <a16:creationId xmlns:a16="http://schemas.microsoft.com/office/drawing/2014/main" id="{5FB1FC82-5CC6-43B6-84AF-32CE18099500}"/>
               </a:ext>
             </a:extLst>
           </p:cNvPr>
@@ -3462,7 +3512,7 @@
           <p:cNvPr id="9" name="Slide Number Placeholder 8">
             <a:extLst xmlns:a="http://schemas.openxmlformats.org/drawingml/2006/main">
               <a:ext uri="{FF2B5EF4-FFF2-40B4-BE49-F238E27FC236}">
-                <a16:creationId xmlns:a16="http://schemas.microsoft.com/office/drawing/2014/main" id="{345D7A69-3440-4CBB-9D84-822D9E9EC29D}"/>
+                <a16:creationId xmlns:a16="http://schemas.microsoft.com/office/drawing/2014/main" id="{780870F7-42AA-4582-951B-0AB4E51D820B}"/>
               </a:ext>
             </a:extLst>
           </p:cNvPr>
@@ -3507,7 +3557,7 @@
           <p:cNvPr id="2" name="Title 1">
             <a:extLst xmlns:a="http://schemas.openxmlformats.org/drawingml/2006/main">
               <a:ext uri="{FF2B5EF4-FFF2-40B4-BE49-F238E27FC236}">
-                <a16:creationId xmlns:a16="http://schemas.microsoft.com/office/drawing/2014/main" id="{21AAA2A7-67BE-445F-B132-29CF129F1C5B}"/>
+                <a16:creationId xmlns:a16="http://schemas.microsoft.com/office/drawing/2014/main" id="{AFDEE713-70D2-4FBC-889E-E83BD3F8F640}"/>
               </a:ext>
             </a:extLst>
           </p:cNvPr>
@@ -3535,7 +3585,7 @@
           <p:cNvPr id="3" name="Date Placeholder 2">
             <a:extLst xmlns:a="http://schemas.openxmlformats.org/drawingml/2006/main">
               <a:ext uri="{FF2B5EF4-FFF2-40B4-BE49-F238E27FC236}">
-                <a16:creationId xmlns:a16="http://schemas.microsoft.com/office/drawing/2014/main" id="{B713F640-45AE-4811-9AA6-6CF94616D134}"/>
+                <a16:creationId xmlns:a16="http://schemas.microsoft.com/office/drawing/2014/main" id="{913D431E-1C6A-4080-91A5-AE1C9237C35E}"/>
               </a:ext>
             </a:extLst>
           </p:cNvPr>
@@ -3563,7 +3613,7 @@
           <p:cNvPr id="4" name="Footer Placeholder 3">
             <a:extLst xmlns:a="http://schemas.openxmlformats.org/drawingml/2006/main">
               <a:ext uri="{FF2B5EF4-FFF2-40B4-BE49-F238E27FC236}">
-                <a16:creationId xmlns:a16="http://schemas.microsoft.com/office/drawing/2014/main" id="{40784A77-8D1C-4E6A-9112-F87771A1B07C}"/>
+                <a16:creationId xmlns:a16="http://schemas.microsoft.com/office/drawing/2014/main" id="{D1B04C06-54B4-4C7E-A101-A2DFA97DE026}"/>
               </a:ext>
             </a:extLst>
           </p:cNvPr>
@@ -3588,7 +3638,7 @@
           <p:cNvPr id="5" name="Slide Number Placeholder 4">
             <a:extLst xmlns:a="http://schemas.openxmlformats.org/drawingml/2006/main">
               <a:ext uri="{FF2B5EF4-FFF2-40B4-BE49-F238E27FC236}">
-                <a16:creationId xmlns:a16="http://schemas.microsoft.com/office/drawing/2014/main" id="{80A06B20-2456-4BA0-A12B-D54E0E38B623}"/>
+                <a16:creationId xmlns:a16="http://schemas.microsoft.com/office/drawing/2014/main" id="{28E078F5-A9B7-4331-9084-6C04E6DA11CA}"/>
               </a:ext>
             </a:extLst>
           </p:cNvPr>
@@ -3633,7 +3683,7 @@
           <p:cNvPr id="2" name="Date Placeholder 1">
             <a:extLst xmlns:a="http://schemas.openxmlformats.org/drawingml/2006/main">
               <a:ext uri="{FF2B5EF4-FFF2-40B4-BE49-F238E27FC236}">
-                <a16:creationId xmlns:a16="http://schemas.microsoft.com/office/drawing/2014/main" id="{E4FABA2C-4C74-45F9-9314-84D2EFF2A641}"/>
+                <a16:creationId xmlns:a16="http://schemas.microsoft.com/office/drawing/2014/main" id="{3C35BA36-7162-4202-8B3A-A81312ADC905}"/>
               </a:ext>
             </a:extLst>
           </p:cNvPr>
@@ -3661,7 +3711,7 @@
           <p:cNvPr id="3" name="Footer Placeholder 2">
             <a:extLst xmlns:a="http://schemas.openxmlformats.org/drawingml/2006/main">
               <a:ext uri="{FF2B5EF4-FFF2-40B4-BE49-F238E27FC236}">
-                <a16:creationId xmlns:a16="http://schemas.microsoft.com/office/drawing/2014/main" id="{7121CEED-FAF1-48CD-BE50-6E3E55AB185A}"/>
+                <a16:creationId xmlns:a16="http://schemas.microsoft.com/office/drawing/2014/main" id="{3B130739-B2A7-4238-A15A-E5361CB21B67}"/>
               </a:ext>
             </a:extLst>
           </p:cNvPr>
@@ -3686,7 +3736,7 @@
           <p:cNvPr id="4" name="Slide Number Placeholder 3">
             <a:extLst xmlns:a="http://schemas.openxmlformats.org/drawingml/2006/main">
               <a:ext uri="{FF2B5EF4-FFF2-40B4-BE49-F238E27FC236}">
-                <a16:creationId xmlns:a16="http://schemas.microsoft.com/office/drawing/2014/main" id="{9CCD978E-677C-486E-B237-736463913976}"/>
+                <a16:creationId xmlns:a16="http://schemas.microsoft.com/office/drawing/2014/main" id="{BB3A04EE-3F2F-40F4-BE9A-DFCBD5B1F3DC}"/>
               </a:ext>
             </a:extLst>
           </p:cNvPr>
@@ -3731,7 +3781,7 @@
           <p:cNvPr id="2" name="Title 1">
             <a:extLst xmlns:a="http://schemas.openxmlformats.org/drawingml/2006/main">
               <a:ext uri="{FF2B5EF4-FFF2-40B4-BE49-F238E27FC236}">
-                <a16:creationId xmlns:a16="http://schemas.microsoft.com/office/drawing/2014/main" id="{2C785611-CFC5-4A98-B111-8F22655D03F0}"/>
+                <a16:creationId xmlns:a16="http://schemas.microsoft.com/office/drawing/2014/main" id="{6EC0034F-D800-4E60-BEE0-B13ABCDAC07D}"/>
               </a:ext>
             </a:extLst>
           </p:cNvPr>
@@ -3769,7 +3819,7 @@
           <p:cNvPr id="3" name="Content Placeholder 2">
             <a:extLst xmlns:a="http://schemas.openxmlformats.org/drawingml/2006/main">
               <a:ext uri="{FF2B5EF4-FFF2-40B4-BE49-F238E27FC236}">
-                <a16:creationId xmlns:a16="http://schemas.microsoft.com/office/drawing/2014/main" id="{85009941-4B8A-4EF4-9262-C028962FB82A}"/>
+                <a16:creationId xmlns:a16="http://schemas.microsoft.com/office/drawing/2014/main" id="{1D5BB8F7-A38A-4E25-A5CA-0FCAB474FAB4}"/>
               </a:ext>
             </a:extLst>
           </p:cNvPr>
@@ -3874,7 +3924,7 @@
           <p:cNvPr id="4" name="Text Placeholder 3">
             <a:extLst xmlns:a="http://schemas.openxmlformats.org/drawingml/2006/main">
               <a:ext uri="{FF2B5EF4-FFF2-40B4-BE49-F238E27FC236}">
-                <a16:creationId xmlns:a16="http://schemas.microsoft.com/office/drawing/2014/main" id="{F57FCBBE-A232-450B-B221-E5173C8D8262}"/>
+                <a16:creationId xmlns:a16="http://schemas.microsoft.com/office/drawing/2014/main" id="{4CA3BDA1-7902-4DF9-8DCA-4FF070268769}"/>
               </a:ext>
             </a:extLst>
           </p:cNvPr>
@@ -3946,7 +3996,7 @@
           <p:cNvPr id="5" name="Date Placeholder 4">
             <a:extLst xmlns:a="http://schemas.openxmlformats.org/drawingml/2006/main">
               <a:ext uri="{FF2B5EF4-FFF2-40B4-BE49-F238E27FC236}">
-                <a16:creationId xmlns:a16="http://schemas.microsoft.com/office/drawing/2014/main" id="{9C06E129-F003-4637-82FE-F200110C7B76}"/>
+                <a16:creationId xmlns:a16="http://schemas.microsoft.com/office/drawing/2014/main" id="{231929E6-CEC5-4D46-9D6E-45991F7C9880}"/>
               </a:ext>
             </a:extLst>
           </p:cNvPr>
@@ -3974,7 +4024,7 @@
           <p:cNvPr id="6" name="Footer Placeholder 5">
             <a:extLst xmlns:a="http://schemas.openxmlformats.org/drawingml/2006/main">
               <a:ext uri="{FF2B5EF4-FFF2-40B4-BE49-F238E27FC236}">
-                <a16:creationId xmlns:a16="http://schemas.microsoft.com/office/drawing/2014/main" id="{3A46B5A3-9FB4-4D25-91F2-A145753F3B01}"/>
+                <a16:creationId xmlns:a16="http://schemas.microsoft.com/office/drawing/2014/main" id="{F6490851-0908-4E83-BFA4-0458F5A77B63}"/>
               </a:ext>
             </a:extLst>
           </p:cNvPr>
@@ -3999,7 +4049,7 @@
           <p:cNvPr id="7" name="Slide Number Placeholder 6">
             <a:extLst xmlns:a="http://schemas.openxmlformats.org/drawingml/2006/main">
               <a:ext uri="{FF2B5EF4-FFF2-40B4-BE49-F238E27FC236}">
-                <a16:creationId xmlns:a16="http://schemas.microsoft.com/office/drawing/2014/main" id="{889C8863-1AD4-42EF-B1C8-3AA275550FC3}"/>
+                <a16:creationId xmlns:a16="http://schemas.microsoft.com/office/drawing/2014/main" id="{95955DEC-2069-4132-A320-EC48A0D90B02}"/>
               </a:ext>
             </a:extLst>
           </p:cNvPr>
@@ -4044,7 +4094,7 @@
           <p:cNvPr id="2" name="Title 1">
             <a:extLst xmlns:a="http://schemas.openxmlformats.org/drawingml/2006/main">
               <a:ext uri="{FF2B5EF4-FFF2-40B4-BE49-F238E27FC236}">
-                <a16:creationId xmlns:a16="http://schemas.microsoft.com/office/drawing/2014/main" id="{D8AEDFB0-A4F4-49CF-B520-ED04932F1977}"/>
+                <a16:creationId xmlns:a16="http://schemas.microsoft.com/office/drawing/2014/main" id="{9D172CF8-7EEC-44D7-B75C-BEBC4C6A7BAF}"/>
               </a:ext>
             </a:extLst>
           </p:cNvPr>
@@ -4082,7 +4132,7 @@
           <p:cNvPr id="3" name="Picture Placeholder 2">
             <a:extLst xmlns:a="http://schemas.openxmlformats.org/drawingml/2006/main">
               <a:ext uri="{FF2B5EF4-FFF2-40B4-BE49-F238E27FC236}">
-                <a16:creationId xmlns:a16="http://schemas.microsoft.com/office/drawing/2014/main" id="{21D980A6-72AE-4C46-81CF-951035B51819}"/>
+                <a16:creationId xmlns:a16="http://schemas.microsoft.com/office/drawing/2014/main" id="{524F85FF-E70A-4020-8C41-07289A8AC4CD}"/>
               </a:ext>
             </a:extLst>
           </p:cNvPr>
@@ -4149,7 +4199,7 @@
           <p:cNvPr id="4" name="Text Placeholder 3">
             <a:extLst xmlns:a="http://schemas.openxmlformats.org/drawingml/2006/main">
               <a:ext uri="{FF2B5EF4-FFF2-40B4-BE49-F238E27FC236}">
-                <a16:creationId xmlns:a16="http://schemas.microsoft.com/office/drawing/2014/main" id="{E12322C1-07CC-4FDC-8218-019B838B2F54}"/>
+                <a16:creationId xmlns:a16="http://schemas.microsoft.com/office/drawing/2014/main" id="{712424DD-15E4-4250-850B-E8043F566FBE}"/>
               </a:ext>
             </a:extLst>
           </p:cNvPr>
@@ -4221,7 +4271,7 @@
           <p:cNvPr id="5" name="Date Placeholder 4">
             <a:extLst xmlns:a="http://schemas.openxmlformats.org/drawingml/2006/main">
               <a:ext uri="{FF2B5EF4-FFF2-40B4-BE49-F238E27FC236}">
-                <a16:creationId xmlns:a16="http://schemas.microsoft.com/office/drawing/2014/main" id="{FF5C7BEA-51CA-49B6-81C9-134C118AB47F}"/>
+                <a16:creationId xmlns:a16="http://schemas.microsoft.com/office/drawing/2014/main" id="{AB2BC769-8A98-46F6-BF98-44F33E97DD65}"/>
               </a:ext>
             </a:extLst>
           </p:cNvPr>
@@ -4249,7 +4299,7 @@
           <p:cNvPr id="6" name="Footer Placeholder 5">
             <a:extLst xmlns:a="http://schemas.openxmlformats.org/drawingml/2006/main">
               <a:ext uri="{FF2B5EF4-FFF2-40B4-BE49-F238E27FC236}">
-                <a16:creationId xmlns:a16="http://schemas.microsoft.com/office/drawing/2014/main" id="{6A9DBD4F-43B1-4AD2-AB4A-D7D059281968}"/>
+                <a16:creationId xmlns:a16="http://schemas.microsoft.com/office/drawing/2014/main" id="{7B5A835B-DDBA-404E-9BE9-0B6922BF188B}"/>
               </a:ext>
             </a:extLst>
           </p:cNvPr>
@@ -4274,7 +4324,7 @@
           <p:cNvPr id="7" name="Slide Number Placeholder 6">
             <a:extLst xmlns:a="http://schemas.openxmlformats.org/drawingml/2006/main">
               <a:ext uri="{FF2B5EF4-FFF2-40B4-BE49-F238E27FC236}">
-                <a16:creationId xmlns:a16="http://schemas.microsoft.com/office/drawing/2014/main" id="{7CCF4926-653F-48A2-B10B-8A0C9483C0C0}"/>
+                <a16:creationId xmlns:a16="http://schemas.microsoft.com/office/drawing/2014/main" id="{9D4C7EF7-4B4F-472A-A061-C731881D02E4}"/>
               </a:ext>
             </a:extLst>
           </p:cNvPr>
@@ -4324,7 +4374,7 @@
           <p:cNvPr id="2" name="Title Placeholder 1">
             <a:extLst xmlns:a="http://schemas.openxmlformats.org/drawingml/2006/main">
               <a:ext uri="{FF2B5EF4-FFF2-40B4-BE49-F238E27FC236}">
-                <a16:creationId xmlns:a16="http://schemas.microsoft.com/office/drawing/2014/main" id="{82F14072-77CD-4895-9161-56F28FBF53A4}"/>
+                <a16:creationId xmlns:a16="http://schemas.microsoft.com/office/drawing/2014/main" id="{1077C5E2-73AD-442F-A5D5-8A5B4BDCF13F}"/>
               </a:ext>
             </a:extLst>
           </p:cNvPr>
@@ -4362,7 +4412,7 @@
           <p:cNvPr id="3" name="Text Placeholder 2">
             <a:extLst xmlns:a="http://schemas.openxmlformats.org/drawingml/2006/main">
               <a:ext uri="{FF2B5EF4-FFF2-40B4-BE49-F238E27FC236}">
-                <a16:creationId xmlns:a16="http://schemas.microsoft.com/office/drawing/2014/main" id="{A2338165-10E2-43FE-BED9-7A50A97192C5}"/>
+                <a16:creationId xmlns:a16="http://schemas.microsoft.com/office/drawing/2014/main" id="{59378052-CD73-4324-98FF-AB55C4CD0C8F}"/>
               </a:ext>
             </a:extLst>
           </p:cNvPr>
@@ -4435,7 +4485,7 @@
           <p:cNvPr id="4" name="Date Placeholder 3">
             <a:extLst xmlns:a="http://schemas.openxmlformats.org/drawingml/2006/main">
               <a:ext uri="{FF2B5EF4-FFF2-40B4-BE49-F238E27FC236}">
-                <a16:creationId xmlns:a16="http://schemas.microsoft.com/office/drawing/2014/main" id="{0E5D2423-D0DB-4F96-AD3B-CD94DC5E4053}"/>
+                <a16:creationId xmlns:a16="http://schemas.microsoft.com/office/drawing/2014/main" id="{3C40B442-815E-4EDF-A7F2-225F028474E4}"/>
               </a:ext>
             </a:extLst>
           </p:cNvPr>
@@ -4482,7 +4532,7 @@
           <p:cNvPr id="5" name="Footer Placeholder 4">
             <a:extLst xmlns:a="http://schemas.openxmlformats.org/drawingml/2006/main">
               <a:ext uri="{FF2B5EF4-FFF2-40B4-BE49-F238E27FC236}">
-                <a16:creationId xmlns:a16="http://schemas.microsoft.com/office/drawing/2014/main" id="{A4C3C3BE-8AA0-4F63-81F6-23E19DFA76AA}"/>
+                <a16:creationId xmlns:a16="http://schemas.microsoft.com/office/drawing/2014/main" id="{72D6D5AC-1C88-491A-B6CD-BEA97D13F7EC}"/>
               </a:ext>
             </a:extLst>
           </p:cNvPr>
@@ -4526,7 +4576,7 @@
           <p:cNvPr id="6" name="Slide Number Placeholder 5">
             <a:extLst xmlns:a="http://schemas.openxmlformats.org/drawingml/2006/main">
               <a:ext uri="{FF2B5EF4-FFF2-40B4-BE49-F238E27FC236}">
-                <a16:creationId xmlns:a16="http://schemas.microsoft.com/office/drawing/2014/main" id="{46ED9F82-E47A-4C60-A328-068DDDC514E5}"/>
+                <a16:creationId xmlns:a16="http://schemas.microsoft.com/office/drawing/2014/main" id="{2D408B88-B351-46FB-BC8B-5764ABF98231}"/>
               </a:ext>
             </a:extLst>
           </p:cNvPr>
@@ -4572,17 +4622,17 @@
   </p:cSld>
   <p:clrMap bg1="lt1" tx1="dk1" bg2="lt2" tx2="dk2" accent1="accent1" accent2="accent2" accent3="accent3" accent4="accent4" accent5="accent5" accent6="accent6" hlink="hlink" folHlink="folHlink"/>
   <p:sldLayoutIdLst>
-    <p:sldLayoutId xmlns:r="http://schemas.openxmlformats.org/officeDocument/2006/relationships" id="2147483649" r:id="R65e2623160df4dd6"/>
-    <p:sldLayoutId xmlns:r="http://schemas.openxmlformats.org/officeDocument/2006/relationships" id="2147483650" r:id="R38110e15d9384813"/>
-    <p:sldLayoutId xmlns:r="http://schemas.openxmlformats.org/officeDocument/2006/relationships" id="2147483651" r:id="Rd4409d8e3e144a78"/>
-    <p:sldLayoutId xmlns:r="http://schemas.openxmlformats.org/officeDocument/2006/relationships" id="2147483652" r:id="R44d6c638be3a4cd0"/>
-    <p:sldLayoutId xmlns:r="http://schemas.openxmlformats.org/officeDocument/2006/relationships" id="2147483653" r:id="R7fe774aaf432407d"/>
-    <p:sldLayoutId xmlns:r="http://schemas.openxmlformats.org/officeDocument/2006/relationships" id="2147483654" r:id="R0414dbe39c2047cd"/>
-    <p:sldLayoutId xmlns:r="http://schemas.openxmlformats.org/officeDocument/2006/relationships" id="2147483655" r:id="R8c801c3c0dee4943"/>
-    <p:sldLayoutId xmlns:r="http://schemas.openxmlformats.org/officeDocument/2006/relationships" id="2147483656" r:id="Rf5f2eee6b2b64e3a"/>
-    <p:sldLayoutId xmlns:r="http://schemas.openxmlformats.org/officeDocument/2006/relationships" id="2147483657" r:id="R8b8ea25d04614827"/>
-    <p:sldLayoutId xmlns:r="http://schemas.openxmlformats.org/officeDocument/2006/relationships" id="2147483658" r:id="R529a6d65172a40e1"/>
-    <p:sldLayoutId xmlns:r="http://schemas.openxmlformats.org/officeDocument/2006/relationships" id="2147483659" r:id="R5220afb4e3f34b93"/>
+    <p:sldLayoutId xmlns:r="http://schemas.openxmlformats.org/officeDocument/2006/relationships" id="2147483649" r:id="Rde5fb96a5dac4f60"/>
+    <p:sldLayoutId xmlns:r="http://schemas.openxmlformats.org/officeDocument/2006/relationships" id="2147483650" r:id="Rb5da0babc5104252"/>
+    <p:sldLayoutId xmlns:r="http://schemas.openxmlformats.org/officeDocument/2006/relationships" id="2147483651" r:id="R7c989dfba9fe4a83"/>
+    <p:sldLayoutId xmlns:r="http://schemas.openxmlformats.org/officeDocument/2006/relationships" id="2147483652" r:id="R60271e550fab47e9"/>
+    <p:sldLayoutId xmlns:r="http://schemas.openxmlformats.org/officeDocument/2006/relationships" id="2147483653" r:id="R36678e15c82e4bef"/>
+    <p:sldLayoutId xmlns:r="http://schemas.openxmlformats.org/officeDocument/2006/relationships" id="2147483654" r:id="Rc3888c275272460d"/>
+    <p:sldLayoutId xmlns:r="http://schemas.openxmlformats.org/officeDocument/2006/relationships" id="2147483655" r:id="Re191b7c3d3694b66"/>
+    <p:sldLayoutId xmlns:r="http://schemas.openxmlformats.org/officeDocument/2006/relationships" id="2147483656" r:id="R5ebc58fff3da4deb"/>
+    <p:sldLayoutId xmlns:r="http://schemas.openxmlformats.org/officeDocument/2006/relationships" id="2147483657" r:id="Rdc288f79e06a4dcd"/>
+    <p:sldLayoutId xmlns:r="http://schemas.openxmlformats.org/officeDocument/2006/relationships" id="2147483658" r:id="R1923219090744fac"/>
+    <p:sldLayoutId xmlns:r="http://schemas.openxmlformats.org/officeDocument/2006/relationships" id="2147483659" r:id="R9f159f3a3477430d"/>
   </p:sldLayoutIdLst>
   <p:txStyles>
     <p:titleStyle>
@@ -5128,7 +5178,7 @@
           <p:cNvPr id="2" name="Rectangle 1">
             <a:extLst xmlns:a="http://schemas.openxmlformats.org/drawingml/2006/main">
               <a:ext uri="{FF2B5EF4-FFF2-40B4-BE49-F238E27FC236}">
-                <a16:creationId xmlns:a16="http://schemas.microsoft.com/office/drawing/2014/main" id="{69BBDE0A-F882-44FC-ACFD-716BB2C8E951}"/>
+                <a16:creationId xmlns:a16="http://schemas.microsoft.com/office/drawing/2014/main" id="{F41B5673-96D9-4D75-9546-111EE4AD49BC}"/>
               </a:ext>
             </a:extLst>
           </p:cNvPr>
@@ -5181,7 +5231,7 @@
           <p:cNvPr id="3" name="Rectangle 2">
             <a:extLst xmlns:a="http://schemas.openxmlformats.org/drawingml/2006/main">
               <a:ext uri="{FF2B5EF4-FFF2-40B4-BE49-F238E27FC236}">
-                <a16:creationId xmlns:a16="http://schemas.microsoft.com/office/drawing/2014/main" id="{C677D3C6-93AD-45CB-AD7E-452E6FC19EF7}"/>
+                <a16:creationId xmlns:a16="http://schemas.microsoft.com/office/drawing/2014/main" id="{6E71F4CD-E89F-4ED9-A54B-982FF9649474}"/>
               </a:ext>
             </a:extLst>
           </p:cNvPr>
@@ -5234,7 +5284,7 @@
           <p:cNvPr id="4" name="shape_slide_1_title">
             <a:extLst xmlns:a="http://schemas.openxmlformats.org/drawingml/2006/main">
               <a:ext uri="{FF2B5EF4-FFF2-40B4-BE49-F238E27FC236}">
-                <a16:creationId xmlns:a16="http://schemas.microsoft.com/office/drawing/2014/main" id="{F8EE04D9-453A-4D77-8C63-4338CCC878F5}"/>
+                <a16:creationId xmlns:a16="http://schemas.microsoft.com/office/drawing/2014/main" id="{31EA4AD0-9655-4BFD-BBE7-04767AEC19B1}"/>
               </a:ext>
             </a:extLst>
           </p:cNvPr>
@@ -5355,7 +5405,7 @@
     </p:spTree>
     <p:extLst>
       <p:ext uri="{BB962C8B-B14F-4D97-AF65-F5344CB8AC3E}">
-        <p14:creationId xmlns:p14="http://schemas.microsoft.com/office/powerpoint/2010/main" val="1245122281"/>
+        <p14:creationId xmlns:p14="http://schemas.microsoft.com/office/powerpoint/2010/main" val="1218494142"/>
       </p:ext>
     </p:extLst>
   </p:cSld>
@@ -5379,7 +5429,7 @@
           <p:cNvPr id="2" name="Rectangle 1">
             <a:extLst xmlns:a="http://schemas.openxmlformats.org/drawingml/2006/main">
               <a:ext uri="{FF2B5EF4-FFF2-40B4-BE49-F238E27FC236}">
-                <a16:creationId xmlns:a16="http://schemas.microsoft.com/office/drawing/2014/main" id="{40520F2A-1B03-4BA7-AD73-9829C9F84B3C}"/>
+                <a16:creationId xmlns:a16="http://schemas.microsoft.com/office/drawing/2014/main" id="{B8456080-15DE-440C-BCD4-153BE37B3DF9}"/>
               </a:ext>
             </a:extLst>
           </p:cNvPr>
@@ -5432,7 +5482,7 @@
           <p:cNvPr id="3" name="Rectangle 2">
             <a:extLst xmlns:a="http://schemas.openxmlformats.org/drawingml/2006/main">
               <a:ext uri="{FF2B5EF4-FFF2-40B4-BE49-F238E27FC236}">
-                <a16:creationId xmlns:a16="http://schemas.microsoft.com/office/drawing/2014/main" id="{27FFCA51-CFFB-4942-A90B-E915A003CBD2}"/>
+                <a16:creationId xmlns:a16="http://schemas.microsoft.com/office/drawing/2014/main" id="{480AEFCF-C4D3-4408-B49C-244C193004C8}"/>
               </a:ext>
             </a:extLst>
           </p:cNvPr>
@@ -5485,7 +5535,7 @@
           <p:cNvPr id="4" name="Rectangle 3">
             <a:extLst xmlns:a="http://schemas.openxmlformats.org/drawingml/2006/main">
               <a:ext uri="{FF2B5EF4-FFF2-40B4-BE49-F238E27FC236}">
-                <a16:creationId xmlns:a16="http://schemas.microsoft.com/office/drawing/2014/main" id="{1D827F19-2E9E-4AF3-B560-26568427A9FB}"/>
+                <a16:creationId xmlns:a16="http://schemas.microsoft.com/office/drawing/2014/main" id="{8D69934E-DFFF-436F-9E06-30BFD40C575C}"/>
               </a:ext>
             </a:extLst>
           </p:cNvPr>
@@ -5538,7 +5588,7 @@
           <p:cNvPr id="5" name="TextBox 4">
             <a:extLst xmlns:a="http://schemas.openxmlformats.org/drawingml/2006/main">
               <a:ext uri="{FF2B5EF4-FFF2-40B4-BE49-F238E27FC236}">
-                <a16:creationId xmlns:a16="http://schemas.microsoft.com/office/drawing/2014/main" id="{A7CED372-67EA-47A8-A8F9-132775447CAB}"/>
+                <a16:creationId xmlns:a16="http://schemas.microsoft.com/office/drawing/2014/main" id="{EB9BD294-0FAD-4BD6-AA6D-DAEB6824816A}"/>
               </a:ext>
             </a:extLst>
           </p:cNvPr>
@@ -5601,7 +5651,7 @@
           <p:cNvPr id="6" name="shape_slide_10_limitations_1">
             <a:extLst xmlns:a="http://schemas.openxmlformats.org/drawingml/2006/main">
               <a:ext uri="{FF2B5EF4-FFF2-40B4-BE49-F238E27FC236}">
-                <a16:creationId xmlns:a16="http://schemas.microsoft.com/office/drawing/2014/main" id="{1D9D8A51-8273-4D27-9540-B641F0E59FF4}"/>
+                <a16:creationId xmlns:a16="http://schemas.microsoft.com/office/drawing/2014/main" id="{B5E5F50D-155E-4511-877B-D18A994B74EE}"/>
               </a:ext>
             </a:extLst>
           </p:cNvPr>
@@ -5656,7 +5706,7 @@
           <p:cNvPr id="7" name="shape_slide_10_limitations_1_textbox">
             <a:extLst xmlns:a="http://schemas.openxmlformats.org/drawingml/2006/main">
               <a:ext uri="{FF2B5EF4-FFF2-40B4-BE49-F238E27FC236}">
-                <a16:creationId xmlns:a16="http://schemas.microsoft.com/office/drawing/2014/main" id="{44496EB2-1061-41EE-BCBB-7DFDA84C6F78}"/>
+                <a16:creationId xmlns:a16="http://schemas.microsoft.com/office/drawing/2014/main" id="{42C44CB2-7B67-49BA-AC7F-A841A824675A}"/>
               </a:ext>
             </a:extLst>
           </p:cNvPr>
@@ -5760,7 +5810,7 @@
           <p:cNvPr id="8" name="shape_slide_10_limitations_2">
             <a:extLst xmlns:a="http://schemas.openxmlformats.org/drawingml/2006/main">
               <a:ext uri="{FF2B5EF4-FFF2-40B4-BE49-F238E27FC236}">
-                <a16:creationId xmlns:a16="http://schemas.microsoft.com/office/drawing/2014/main" id="{DB50D121-4977-4D8F-B099-883BD111405F}"/>
+                <a16:creationId xmlns:a16="http://schemas.microsoft.com/office/drawing/2014/main" id="{29D755FD-9A90-448C-956F-A934C9F0B93E}"/>
               </a:ext>
             </a:extLst>
           </p:cNvPr>
@@ -5815,7 +5865,7 @@
           <p:cNvPr id="9" name="shape_slide_10_limitations_2_textbox">
             <a:extLst xmlns:a="http://schemas.openxmlformats.org/drawingml/2006/main">
               <a:ext uri="{FF2B5EF4-FFF2-40B4-BE49-F238E27FC236}">
-                <a16:creationId xmlns:a16="http://schemas.microsoft.com/office/drawing/2014/main" id="{596D5AEE-B3FC-40B8-B3FD-A08F5F6A6D5B}"/>
+                <a16:creationId xmlns:a16="http://schemas.microsoft.com/office/drawing/2014/main" id="{65EFA7AD-3636-447E-A1EF-64286F17451D}"/>
               </a:ext>
             </a:extLst>
           </p:cNvPr>
@@ -5900,7 +5950,7 @@
           <p:cNvPr id="10" name="shape_slide_10_limitations_3">
             <a:extLst xmlns:a="http://schemas.openxmlformats.org/drawingml/2006/main">
               <a:ext uri="{FF2B5EF4-FFF2-40B4-BE49-F238E27FC236}">
-                <a16:creationId xmlns:a16="http://schemas.microsoft.com/office/drawing/2014/main" id="{300CCE75-2283-4B06-81C8-956A30E9D82B}"/>
+                <a16:creationId xmlns:a16="http://schemas.microsoft.com/office/drawing/2014/main" id="{877F9545-CBAA-4EEF-B166-7335AAF0DFA2}"/>
               </a:ext>
             </a:extLst>
           </p:cNvPr>
@@ -5955,7 +6005,7 @@
           <p:cNvPr id="11" name="shape_slide_10_limitations_3_textbox">
             <a:extLst xmlns:a="http://schemas.openxmlformats.org/drawingml/2006/main">
               <a:ext uri="{FF2B5EF4-FFF2-40B4-BE49-F238E27FC236}">
-                <a16:creationId xmlns:a16="http://schemas.microsoft.com/office/drawing/2014/main" id="{F0E6CAE5-8B6C-442E-9CE3-982FE737BAC0}"/>
+                <a16:creationId xmlns:a16="http://schemas.microsoft.com/office/drawing/2014/main" id="{F377C8FB-F01C-467A-ACC3-09E947A06F6A}"/>
               </a:ext>
             </a:extLst>
           </p:cNvPr>
@@ -6057,7 +6107,7 @@
     </p:spTree>
     <p:extLst>
       <p:ext uri="{BB962C8B-B14F-4D97-AF65-F5344CB8AC3E}">
-        <p14:creationId xmlns:p14="http://schemas.microsoft.com/office/powerpoint/2010/main" val="1275023620"/>
+        <p14:creationId xmlns:p14="http://schemas.microsoft.com/office/powerpoint/2010/main" val="485088594"/>
       </p:ext>
     </p:extLst>
   </p:cSld>
@@ -6081,7 +6131,7 @@
           <p:cNvPr id="2" name="Rectangle 1">
             <a:extLst xmlns:a="http://schemas.openxmlformats.org/drawingml/2006/main">
               <a:ext uri="{FF2B5EF4-FFF2-40B4-BE49-F238E27FC236}">
-                <a16:creationId xmlns:a16="http://schemas.microsoft.com/office/drawing/2014/main" id="{D58FC03C-1919-48C7-B92F-3A50A0EF52B0}"/>
+                <a16:creationId xmlns:a16="http://schemas.microsoft.com/office/drawing/2014/main" id="{983C7ECD-633C-441C-A068-D43B58DDAD91}"/>
               </a:ext>
             </a:extLst>
           </p:cNvPr>
@@ -6134,7 +6184,7 @@
           <p:cNvPr id="3" name="Rectangle 2">
             <a:extLst xmlns:a="http://schemas.openxmlformats.org/drawingml/2006/main">
               <a:ext uri="{FF2B5EF4-FFF2-40B4-BE49-F238E27FC236}">
-                <a16:creationId xmlns:a16="http://schemas.microsoft.com/office/drawing/2014/main" id="{E957A334-111D-415B-95CB-3CD2E9C2D5E5}"/>
+                <a16:creationId xmlns:a16="http://schemas.microsoft.com/office/drawing/2014/main" id="{8E071FE9-5F30-4AE4-A081-D327A1D025AA}"/>
               </a:ext>
             </a:extLst>
           </p:cNvPr>
@@ -6187,7 +6237,7 @@
           <p:cNvPr id="4" name="Rectangle 3">
             <a:extLst xmlns:a="http://schemas.openxmlformats.org/drawingml/2006/main">
               <a:ext uri="{FF2B5EF4-FFF2-40B4-BE49-F238E27FC236}">
-                <a16:creationId xmlns:a16="http://schemas.microsoft.com/office/drawing/2014/main" id="{65169B91-07B8-4DB7-ADE9-E1F70400EA70}"/>
+                <a16:creationId xmlns:a16="http://schemas.microsoft.com/office/drawing/2014/main" id="{9FAF43B8-DF3B-42C8-A126-A252DA5513E3}"/>
               </a:ext>
             </a:extLst>
           </p:cNvPr>
@@ -6240,7 +6290,7 @@
           <p:cNvPr id="5" name="TextBox 4">
             <a:extLst xmlns:a="http://schemas.openxmlformats.org/drawingml/2006/main">
               <a:ext uri="{FF2B5EF4-FFF2-40B4-BE49-F238E27FC236}">
-                <a16:creationId xmlns:a16="http://schemas.microsoft.com/office/drawing/2014/main" id="{D3D569EA-B7CF-4E96-AD2A-5674C451A2D5}"/>
+                <a16:creationId xmlns:a16="http://schemas.microsoft.com/office/drawing/2014/main" id="{53F08947-F871-4E59-B8E2-D41E29BDB1E6}"/>
               </a:ext>
             </a:extLst>
           </p:cNvPr>
@@ -6303,7 +6353,7 @@
           <p:cNvPr id="6" name="shape_slide_11_reproducibility_1">
             <a:extLst xmlns:a="http://schemas.openxmlformats.org/drawingml/2006/main">
               <a:ext uri="{FF2B5EF4-FFF2-40B4-BE49-F238E27FC236}">
-                <a16:creationId xmlns:a16="http://schemas.microsoft.com/office/drawing/2014/main" id="{DF28226C-3CF9-4403-8363-FD51B6B50AF9}"/>
+                <a16:creationId xmlns:a16="http://schemas.microsoft.com/office/drawing/2014/main" id="{CA59C6E7-20C5-44AD-B947-48F9D5F4B1CF}"/>
               </a:ext>
             </a:extLst>
           </p:cNvPr>
@@ -6358,7 +6408,7 @@
           <p:cNvPr id="7" name="shape_slide_11_reproducibility_1_textbox">
             <a:extLst xmlns:a="http://schemas.openxmlformats.org/drawingml/2006/main">
               <a:ext uri="{FF2B5EF4-FFF2-40B4-BE49-F238E27FC236}">
-                <a16:creationId xmlns:a16="http://schemas.microsoft.com/office/drawing/2014/main" id="{AD7564B6-D360-4E6F-AFC7-57C43CD90DA7}"/>
+                <a16:creationId xmlns:a16="http://schemas.microsoft.com/office/drawing/2014/main" id="{C3808074-7DD9-4C5A-B309-42F2EF606495}"/>
               </a:ext>
             </a:extLst>
           </p:cNvPr>
@@ -6557,7 +6607,7 @@
           <p:cNvPr id="8" name="shape_slide_11_reproducibility_2">
             <a:extLst xmlns:a="http://schemas.openxmlformats.org/drawingml/2006/main">
               <a:ext uri="{FF2B5EF4-FFF2-40B4-BE49-F238E27FC236}">
-                <a16:creationId xmlns:a16="http://schemas.microsoft.com/office/drawing/2014/main" id="{D8CBB29A-CE91-4338-B430-F172F1BDE01E}"/>
+                <a16:creationId xmlns:a16="http://schemas.microsoft.com/office/drawing/2014/main" id="{19127BA4-9A42-4FC5-9C11-CE80248E6D89}"/>
               </a:ext>
             </a:extLst>
           </p:cNvPr>
@@ -6612,7 +6662,7 @@
           <p:cNvPr id="9" name="shape_slide_11_reproducibility_2_textbox">
             <a:extLst xmlns:a="http://schemas.openxmlformats.org/drawingml/2006/main">
               <a:ext uri="{FF2B5EF4-FFF2-40B4-BE49-F238E27FC236}">
-                <a16:creationId xmlns:a16="http://schemas.microsoft.com/office/drawing/2014/main" id="{8E07D969-5431-41DC-99BA-3522E0B4AC83}"/>
+                <a16:creationId xmlns:a16="http://schemas.microsoft.com/office/drawing/2014/main" id="{7AD84FCF-9B9A-419B-BECE-86D7FB5725FE}"/>
               </a:ext>
             </a:extLst>
           </p:cNvPr>
@@ -6668,7 +6718,7 @@
               </a:defRPr>
             </a:pPr>
             <a:r>
-              <a:t>•  1. Quy trình thực nghiệm chuẩn hóa: Thiết lập giao thức thực nghiệm đối chứng khép kín, chống rò rỉ nhãn đầu tiên cho bài toán Windows log attribution.</a:t>
+              <a:t>•  1. Quy trình thực nghiệm chuẩn hóa: Thiết lập giao thức thực nghiệm đối chứng khép kín trên tập dữ liệu đóng băng synthetic-paired-v1 cho bài toán Windows log attribution.</a:t>
             </a:r>
           </a:p>
           <a:p xmlns:a="http://schemas.openxmlformats.org/drawingml/2006/main">
@@ -6733,7 +6783,7 @@
     </p:spTree>
     <p:extLst>
       <p:ext uri="{BB962C8B-B14F-4D97-AF65-F5344CB8AC3E}">
-        <p14:creationId xmlns:p14="http://schemas.microsoft.com/office/powerpoint/2010/main" val="2113122570"/>
+        <p14:creationId xmlns:p14="http://schemas.microsoft.com/office/powerpoint/2010/main" val="41047589"/>
       </p:ext>
     </p:extLst>
   </p:cSld>
@@ -6757,7 +6807,7 @@
           <p:cNvPr id="2" name="Rectangle 1">
             <a:extLst xmlns:a="http://schemas.openxmlformats.org/drawingml/2006/main">
               <a:ext uri="{FF2B5EF4-FFF2-40B4-BE49-F238E27FC236}">
-                <a16:creationId xmlns:a16="http://schemas.microsoft.com/office/drawing/2014/main" id="{729D32E3-4A5A-4B52-99F4-745C48DABC13}"/>
+                <a16:creationId xmlns:a16="http://schemas.microsoft.com/office/drawing/2014/main" id="{AA8E2D4D-F011-4B2F-A1C1-5C3CF47E2629}"/>
               </a:ext>
             </a:extLst>
           </p:cNvPr>
@@ -6810,7 +6860,7 @@
           <p:cNvPr id="3" name="Rectangle 2">
             <a:extLst xmlns:a="http://schemas.openxmlformats.org/drawingml/2006/main">
               <a:ext uri="{FF2B5EF4-FFF2-40B4-BE49-F238E27FC236}">
-                <a16:creationId xmlns:a16="http://schemas.microsoft.com/office/drawing/2014/main" id="{202F7F41-E46B-44FC-BBE1-2B5A95658CA6}"/>
+                <a16:creationId xmlns:a16="http://schemas.microsoft.com/office/drawing/2014/main" id="{2CAECEB4-3011-4731-AF5E-97B91F85E8B2}"/>
               </a:ext>
             </a:extLst>
           </p:cNvPr>
@@ -6863,7 +6913,7 @@
           <p:cNvPr id="4" name="shape_slide_12_conclusion">
             <a:extLst xmlns:a="http://schemas.openxmlformats.org/drawingml/2006/main">
               <a:ext uri="{FF2B5EF4-FFF2-40B4-BE49-F238E27FC236}">
-                <a16:creationId xmlns:a16="http://schemas.microsoft.com/office/drawing/2014/main" id="{A7675928-0A94-45EF-8DC8-6FDE789BB4DA}"/>
+                <a16:creationId xmlns:a16="http://schemas.microsoft.com/office/drawing/2014/main" id="{EFBEB6AC-46E4-49ED-B239-8D3EDB421AE4}"/>
               </a:ext>
             </a:extLst>
           </p:cNvPr>
@@ -7060,7 +7110,7 @@
     </p:spTree>
     <p:extLst>
       <p:ext uri="{BB962C8B-B14F-4D97-AF65-F5344CB8AC3E}">
-        <p14:creationId xmlns:p14="http://schemas.microsoft.com/office/powerpoint/2010/main" val="570915367"/>
+        <p14:creationId xmlns:p14="http://schemas.microsoft.com/office/powerpoint/2010/main" val="1852466913"/>
       </p:ext>
     </p:extLst>
   </p:cSld>
@@ -7084,7 +7134,7 @@
           <p:cNvPr id="2" name="Rectangle 1">
             <a:extLst xmlns:a="http://schemas.openxmlformats.org/drawingml/2006/main">
               <a:ext uri="{FF2B5EF4-FFF2-40B4-BE49-F238E27FC236}">
-                <a16:creationId xmlns:a16="http://schemas.microsoft.com/office/drawing/2014/main" id="{B4B7B1C4-ED8A-4A61-8DD5-84578764B210}"/>
+                <a16:creationId xmlns:a16="http://schemas.microsoft.com/office/drawing/2014/main" id="{0C012B98-229C-4103-8E78-62A8D55E7273}"/>
               </a:ext>
             </a:extLst>
           </p:cNvPr>
@@ -7137,7 +7187,7 @@
           <p:cNvPr id="3" name="Rectangle 2">
             <a:extLst xmlns:a="http://schemas.openxmlformats.org/drawingml/2006/main">
               <a:ext uri="{FF2B5EF4-FFF2-40B4-BE49-F238E27FC236}">
-                <a16:creationId xmlns:a16="http://schemas.microsoft.com/office/drawing/2014/main" id="{5ED88CA9-747B-4B15-9007-DE0C43EC4220}"/>
+                <a16:creationId xmlns:a16="http://schemas.microsoft.com/office/drawing/2014/main" id="{AC4C26E2-FD4B-4D9E-B278-2758BEFBD682}"/>
               </a:ext>
             </a:extLst>
           </p:cNvPr>
@@ -7190,7 +7240,7 @@
           <p:cNvPr id="4" name="Rectangle 3">
             <a:extLst xmlns:a="http://schemas.openxmlformats.org/drawingml/2006/main">
               <a:ext uri="{FF2B5EF4-FFF2-40B4-BE49-F238E27FC236}">
-                <a16:creationId xmlns:a16="http://schemas.microsoft.com/office/drawing/2014/main" id="{2E30F82F-DD27-4284-B91F-F5EBE25DB5B8}"/>
+                <a16:creationId xmlns:a16="http://schemas.microsoft.com/office/drawing/2014/main" id="{7A6219C9-BD14-43BE-A59B-A5F52F72B743}"/>
               </a:ext>
             </a:extLst>
           </p:cNvPr>
@@ -7243,7 +7293,7 @@
           <p:cNvPr id="5" name="TextBox 4">
             <a:extLst xmlns:a="http://schemas.openxmlformats.org/drawingml/2006/main">
               <a:ext uri="{FF2B5EF4-FFF2-40B4-BE49-F238E27FC236}">
-                <a16:creationId xmlns:a16="http://schemas.microsoft.com/office/drawing/2014/main" id="{6BD838B9-9218-4D3A-B6C2-6C619916DE36}"/>
+                <a16:creationId xmlns:a16="http://schemas.microsoft.com/office/drawing/2014/main" id="{8A08BE3C-8783-446B-8887-15F10AFCCA39}"/>
               </a:ext>
             </a:extLst>
           </p:cNvPr>
@@ -7306,7 +7356,7 @@
           <p:cNvPr id="6" name="shape_slide_2_problem">
             <a:extLst xmlns:a="http://schemas.openxmlformats.org/drawingml/2006/main">
               <a:ext uri="{FF2B5EF4-FFF2-40B4-BE49-F238E27FC236}">
-                <a16:creationId xmlns:a16="http://schemas.microsoft.com/office/drawing/2014/main" id="{6FFDCB39-2EFB-4987-AA90-39F497B216C6}"/>
+                <a16:creationId xmlns:a16="http://schemas.microsoft.com/office/drawing/2014/main" id="{5F022C2F-7216-4FC3-8415-205227B33796}"/>
               </a:ext>
             </a:extLst>
           </p:cNvPr>
@@ -7361,7 +7411,7 @@
           <p:cNvPr id="7" name="shape_slide_2_problem_textbox">
             <a:extLst xmlns:a="http://schemas.openxmlformats.org/drawingml/2006/main">
               <a:ext uri="{FF2B5EF4-FFF2-40B4-BE49-F238E27FC236}">
-                <a16:creationId xmlns:a16="http://schemas.microsoft.com/office/drawing/2014/main" id="{86A5F9E3-3768-48FB-BC28-8A7CFDCE23D2}"/>
+                <a16:creationId xmlns:a16="http://schemas.microsoft.com/office/drawing/2014/main" id="{4BB42AF1-83EF-4CD6-8DFF-4A3E01F4A410}"/>
               </a:ext>
             </a:extLst>
           </p:cNvPr>
@@ -7465,7 +7515,7 @@
           <p:cNvPr id="8" name="shape_slide_2_challenge">
             <a:extLst xmlns:a="http://schemas.openxmlformats.org/drawingml/2006/main">
               <a:ext uri="{FF2B5EF4-FFF2-40B4-BE49-F238E27FC236}">
-                <a16:creationId xmlns:a16="http://schemas.microsoft.com/office/drawing/2014/main" id="{794731FA-C678-4DED-A35E-631FA7593A7B}"/>
+                <a16:creationId xmlns:a16="http://schemas.microsoft.com/office/drawing/2014/main" id="{2A244573-738C-4C3A-9B19-C987CA2F7202}"/>
               </a:ext>
             </a:extLst>
           </p:cNvPr>
@@ -7520,7 +7570,7 @@
           <p:cNvPr id="9" name="shape_slide_2_challenge_textbox">
             <a:extLst xmlns:a="http://schemas.openxmlformats.org/drawingml/2006/main">
               <a:ext uri="{FF2B5EF4-FFF2-40B4-BE49-F238E27FC236}">
-                <a16:creationId xmlns:a16="http://schemas.microsoft.com/office/drawing/2014/main" id="{79900B27-C0C4-4ABB-AC65-D75CF82505D5}"/>
+                <a16:creationId xmlns:a16="http://schemas.microsoft.com/office/drawing/2014/main" id="{18387E80-9DC8-4056-B733-F301F73E1B94}"/>
               </a:ext>
             </a:extLst>
           </p:cNvPr>
@@ -7624,7 +7674,7 @@
           <p:cNvPr id="10" name="shape_slide_2_motivation">
             <a:extLst xmlns:a="http://schemas.openxmlformats.org/drawingml/2006/main">
               <a:ext uri="{FF2B5EF4-FFF2-40B4-BE49-F238E27FC236}">
-                <a16:creationId xmlns:a16="http://schemas.microsoft.com/office/drawing/2014/main" id="{12D0A04D-8081-4B88-8C4B-A0C1E8D77786}"/>
+                <a16:creationId xmlns:a16="http://schemas.microsoft.com/office/drawing/2014/main" id="{F576A42F-22F0-4E9B-BF5B-91D2F41F75C8}"/>
               </a:ext>
             </a:extLst>
           </p:cNvPr>
@@ -7679,7 +7729,7 @@
           <p:cNvPr id="11" name="shape_slide_2_motivation_textbox">
             <a:extLst xmlns:a="http://schemas.openxmlformats.org/drawingml/2006/main">
               <a:ext uri="{FF2B5EF4-FFF2-40B4-BE49-F238E27FC236}">
-                <a16:creationId xmlns:a16="http://schemas.microsoft.com/office/drawing/2014/main" id="{2CE2FC6A-4DE5-4F12-89F6-E0D6326FC8BB}"/>
+                <a16:creationId xmlns:a16="http://schemas.microsoft.com/office/drawing/2014/main" id="{420C1D12-B208-4E55-AB00-D5E6490035BF}"/>
               </a:ext>
             </a:extLst>
           </p:cNvPr>
@@ -7838,7 +7888,7 @@
     </p:spTree>
     <p:extLst>
       <p:ext uri="{BB962C8B-B14F-4D97-AF65-F5344CB8AC3E}">
-        <p14:creationId xmlns:p14="http://schemas.microsoft.com/office/powerpoint/2010/main" val="1366932537"/>
+        <p14:creationId xmlns:p14="http://schemas.microsoft.com/office/powerpoint/2010/main" val="701525255"/>
       </p:ext>
     </p:extLst>
   </p:cSld>
@@ -7862,7 +7912,7 @@
           <p:cNvPr id="2" name="Rectangle 1">
             <a:extLst xmlns:a="http://schemas.openxmlformats.org/drawingml/2006/main">
               <a:ext uri="{FF2B5EF4-FFF2-40B4-BE49-F238E27FC236}">
-                <a16:creationId xmlns:a16="http://schemas.microsoft.com/office/drawing/2014/main" id="{F0BEEE28-D6E0-4306-9EA1-6E0B4CEB555F}"/>
+                <a16:creationId xmlns:a16="http://schemas.microsoft.com/office/drawing/2014/main" id="{CB1D51A0-6BCA-47F6-8E8D-A06EBB34765F}"/>
               </a:ext>
             </a:extLst>
           </p:cNvPr>
@@ -7915,7 +7965,7 @@
           <p:cNvPr id="3" name="Rectangle 2">
             <a:extLst xmlns:a="http://schemas.openxmlformats.org/drawingml/2006/main">
               <a:ext uri="{FF2B5EF4-FFF2-40B4-BE49-F238E27FC236}">
-                <a16:creationId xmlns:a16="http://schemas.microsoft.com/office/drawing/2014/main" id="{F35E0874-0799-49D7-90DC-946A79EC4D30}"/>
+                <a16:creationId xmlns:a16="http://schemas.microsoft.com/office/drawing/2014/main" id="{1182F2B2-7396-46B4-921F-EC7AAAF99671}"/>
               </a:ext>
             </a:extLst>
           </p:cNvPr>
@@ -7968,7 +8018,7 @@
           <p:cNvPr id="4" name="Rectangle 3">
             <a:extLst xmlns:a="http://schemas.openxmlformats.org/drawingml/2006/main">
               <a:ext uri="{FF2B5EF4-FFF2-40B4-BE49-F238E27FC236}">
-                <a16:creationId xmlns:a16="http://schemas.microsoft.com/office/drawing/2014/main" id="{000E409A-2C48-401D-A02F-07F36C849E3F}"/>
+                <a16:creationId xmlns:a16="http://schemas.microsoft.com/office/drawing/2014/main" id="{3553858B-2E25-46EA-BCD2-9469ADCF395E}"/>
               </a:ext>
             </a:extLst>
           </p:cNvPr>
@@ -8021,7 +8071,7 @@
           <p:cNvPr id="5" name="TextBox 4">
             <a:extLst xmlns:a="http://schemas.openxmlformats.org/drawingml/2006/main">
               <a:ext uri="{FF2B5EF4-FFF2-40B4-BE49-F238E27FC236}">
-                <a16:creationId xmlns:a16="http://schemas.microsoft.com/office/drawing/2014/main" id="{3951DA14-F931-4B66-87B3-DC74BE01CFDE}"/>
+                <a16:creationId xmlns:a16="http://schemas.microsoft.com/office/drawing/2014/main" id="{75418BF0-7D1D-40D0-93B9-C3C55340B426}"/>
               </a:ext>
             </a:extLst>
           </p:cNvPr>
@@ -8084,7 +8134,7 @@
           <p:cNvPr id="6" name="shape_slide_3_baseline">
             <a:extLst xmlns:a="http://schemas.openxmlformats.org/drawingml/2006/main">
               <a:ext uri="{FF2B5EF4-FFF2-40B4-BE49-F238E27FC236}">
-                <a16:creationId xmlns:a16="http://schemas.microsoft.com/office/drawing/2014/main" id="{9F3BEA34-6FB7-40D3-91CB-A332ED6DAF83}"/>
+                <a16:creationId xmlns:a16="http://schemas.microsoft.com/office/drawing/2014/main" id="{F6BCA81E-5D9A-4674-8855-6084E6A6B8B0}"/>
               </a:ext>
             </a:extLst>
           </p:cNvPr>
@@ -8139,7 +8189,7 @@
           <p:cNvPr id="7" name="shape_slide_3_baseline_textbox">
             <a:extLst xmlns:a="http://schemas.openxmlformats.org/drawingml/2006/main">
               <a:ext uri="{FF2B5EF4-FFF2-40B4-BE49-F238E27FC236}">
-                <a16:creationId xmlns:a16="http://schemas.microsoft.com/office/drawing/2014/main" id="{F681C40D-FF20-461C-BFF2-748FD28C6EEE}"/>
+                <a16:creationId xmlns:a16="http://schemas.microsoft.com/office/drawing/2014/main" id="{9D3847D1-BD2B-4E15-AF27-B50EC26A6349}"/>
               </a:ext>
             </a:extLst>
           </p:cNvPr>
@@ -8262,7 +8312,7 @@
           <p:cNvPr id="8" name="shape_slide_3_rag">
             <a:extLst xmlns:a="http://schemas.openxmlformats.org/drawingml/2006/main">
               <a:ext uri="{FF2B5EF4-FFF2-40B4-BE49-F238E27FC236}">
-                <a16:creationId xmlns:a16="http://schemas.microsoft.com/office/drawing/2014/main" id="{F09A6A47-BD43-457B-BE3E-9A711A7C6F4D}"/>
+                <a16:creationId xmlns:a16="http://schemas.microsoft.com/office/drawing/2014/main" id="{D50A07BA-AC22-48A6-B8EE-BB2C33814B2A}"/>
               </a:ext>
             </a:extLst>
           </p:cNvPr>
@@ -8317,7 +8367,7 @@
           <p:cNvPr id="9" name="shape_slide_3_rag_textbox">
             <a:extLst xmlns:a="http://schemas.openxmlformats.org/drawingml/2006/main">
               <a:ext uri="{FF2B5EF4-FFF2-40B4-BE49-F238E27FC236}">
-                <a16:creationId xmlns:a16="http://schemas.microsoft.com/office/drawing/2014/main" id="{92032383-D5FB-4A04-8229-1753BA340236}"/>
+                <a16:creationId xmlns:a16="http://schemas.microsoft.com/office/drawing/2014/main" id="{3F9F5751-1422-4AF7-B7CD-E9AA257C8A39}"/>
               </a:ext>
             </a:extLst>
           </p:cNvPr>
@@ -8459,7 +8509,7 @@
           <p:cNvPr id="10" name="shape_slide_3_invariants">
             <a:extLst xmlns:a="http://schemas.openxmlformats.org/drawingml/2006/main">
               <a:ext uri="{FF2B5EF4-FFF2-40B4-BE49-F238E27FC236}">
-                <a16:creationId xmlns:a16="http://schemas.microsoft.com/office/drawing/2014/main" id="{E6878244-FE89-4F2D-8DD0-7208DE663E52}"/>
+                <a16:creationId xmlns:a16="http://schemas.microsoft.com/office/drawing/2014/main" id="{237A6BEC-9371-471B-A13A-DF137F4AB2E5}"/>
               </a:ext>
             </a:extLst>
           </p:cNvPr>
@@ -8514,7 +8564,7 @@
           <p:cNvPr id="11" name="shape_slide_3_invariants_textbox">
             <a:extLst xmlns:a="http://schemas.openxmlformats.org/drawingml/2006/main">
               <a:ext uri="{FF2B5EF4-FFF2-40B4-BE49-F238E27FC236}">
-                <a16:creationId xmlns:a16="http://schemas.microsoft.com/office/drawing/2014/main" id="{B72E4587-C4C9-4F2E-956C-47A05BD2AB28}"/>
+                <a16:creationId xmlns:a16="http://schemas.microsoft.com/office/drawing/2014/main" id="{4C9DA478-C79A-4494-94F0-D3D5481FA225}"/>
               </a:ext>
             </a:extLst>
           </p:cNvPr>
@@ -8616,7 +8666,7 @@
     </p:spTree>
     <p:extLst>
       <p:ext uri="{BB962C8B-B14F-4D97-AF65-F5344CB8AC3E}">
-        <p14:creationId xmlns:p14="http://schemas.microsoft.com/office/powerpoint/2010/main" val="1992252122"/>
+        <p14:creationId xmlns:p14="http://schemas.microsoft.com/office/powerpoint/2010/main" val="1796768019"/>
       </p:ext>
     </p:extLst>
   </p:cSld>
@@ -8640,7 +8690,7 @@
           <p:cNvPr id="2" name="Rectangle 1">
             <a:extLst xmlns:a="http://schemas.openxmlformats.org/drawingml/2006/main">
               <a:ext uri="{FF2B5EF4-FFF2-40B4-BE49-F238E27FC236}">
-                <a16:creationId xmlns:a16="http://schemas.microsoft.com/office/drawing/2014/main" id="{FAFCCE76-069D-4981-A6BD-749606AAD8A7}"/>
+                <a16:creationId xmlns:a16="http://schemas.microsoft.com/office/drawing/2014/main" id="{4124A0DB-879B-4C44-946E-A241A22C88D8}"/>
               </a:ext>
             </a:extLst>
           </p:cNvPr>
@@ -8693,7 +8743,7 @@
           <p:cNvPr id="3" name="Rectangle 2">
             <a:extLst xmlns:a="http://schemas.openxmlformats.org/drawingml/2006/main">
               <a:ext uri="{FF2B5EF4-FFF2-40B4-BE49-F238E27FC236}">
-                <a16:creationId xmlns:a16="http://schemas.microsoft.com/office/drawing/2014/main" id="{7110D5AD-E32D-477E-A40D-558EA9DE1645}"/>
+                <a16:creationId xmlns:a16="http://schemas.microsoft.com/office/drawing/2014/main" id="{C1ECC9AF-068F-4719-B6DD-9E078242532D}"/>
               </a:ext>
             </a:extLst>
           </p:cNvPr>
@@ -8746,7 +8796,7 @@
           <p:cNvPr id="4" name="Rectangle 3">
             <a:extLst xmlns:a="http://schemas.openxmlformats.org/drawingml/2006/main">
               <a:ext uri="{FF2B5EF4-FFF2-40B4-BE49-F238E27FC236}">
-                <a16:creationId xmlns:a16="http://schemas.microsoft.com/office/drawing/2014/main" id="{206BC9BD-7071-4D52-9A5B-82207B65E616}"/>
+                <a16:creationId xmlns:a16="http://schemas.microsoft.com/office/drawing/2014/main" id="{6A82C4FA-BB38-475E-9817-DA2F3A2BF10B}"/>
               </a:ext>
             </a:extLst>
           </p:cNvPr>
@@ -8799,7 +8849,7 @@
           <p:cNvPr id="5" name="TextBox 4">
             <a:extLst xmlns:a="http://schemas.openxmlformats.org/drawingml/2006/main">
               <a:ext uri="{FF2B5EF4-FFF2-40B4-BE49-F238E27FC236}">
-                <a16:creationId xmlns:a16="http://schemas.microsoft.com/office/drawing/2014/main" id="{75EE674E-6C0E-460D-93D4-C8460074863E}"/>
+                <a16:creationId xmlns:a16="http://schemas.microsoft.com/office/drawing/2014/main" id="{04D23D65-76A2-4415-8902-597130830471}"/>
               </a:ext>
             </a:extLst>
           </p:cNvPr>
@@ -8862,7 +8912,7 @@
           <p:cNvPr id="6" name="shape_slide_4_dataset_topology">
             <a:extLst xmlns:a="http://schemas.openxmlformats.org/drawingml/2006/main">
               <a:ext uri="{FF2B5EF4-FFF2-40B4-BE49-F238E27FC236}">
-                <a16:creationId xmlns:a16="http://schemas.microsoft.com/office/drawing/2014/main" id="{E36E318D-8030-4BB0-985A-BA942D55AD65}"/>
+                <a16:creationId xmlns:a16="http://schemas.microsoft.com/office/drawing/2014/main" id="{5B8399A5-24D3-449F-AD3E-7052245E67F0}"/>
               </a:ext>
             </a:extLst>
           </p:cNvPr>
@@ -8917,7 +8967,7 @@
           <p:cNvPr id="7" name="shape_slide_4_dataset_topology_textbox">
             <a:extLst xmlns:a="http://schemas.openxmlformats.org/drawingml/2006/main">
               <a:ext uri="{FF2B5EF4-FFF2-40B4-BE49-F238E27FC236}">
-                <a16:creationId xmlns:a16="http://schemas.microsoft.com/office/drawing/2014/main" id="{D62D2FC6-495C-4EE3-8881-9738102DF984}"/>
+                <a16:creationId xmlns:a16="http://schemas.microsoft.com/office/drawing/2014/main" id="{4F020FF6-F651-44FF-B18C-EDA74DD1272A}"/>
               </a:ext>
             </a:extLst>
           </p:cNvPr>
@@ -9097,7 +9147,7 @@
           <p:cNvPr id="8" name="shape_slide_4_representations">
             <a:extLst xmlns:a="http://schemas.openxmlformats.org/drawingml/2006/main">
               <a:ext uri="{FF2B5EF4-FFF2-40B4-BE49-F238E27FC236}">
-                <a16:creationId xmlns:a16="http://schemas.microsoft.com/office/drawing/2014/main" id="{80570270-4566-435D-AD63-038A896ACC16}"/>
+                <a16:creationId xmlns:a16="http://schemas.microsoft.com/office/drawing/2014/main" id="{AF3CD8FD-F7E1-47C6-BE21-2F42017FAB6F}"/>
               </a:ext>
             </a:extLst>
           </p:cNvPr>
@@ -9152,7 +9202,7 @@
           <p:cNvPr id="9" name="shape_slide_4_representations_textbox">
             <a:extLst xmlns:a="http://schemas.openxmlformats.org/drawingml/2006/main">
               <a:ext uri="{FF2B5EF4-FFF2-40B4-BE49-F238E27FC236}">
-                <a16:creationId xmlns:a16="http://schemas.microsoft.com/office/drawing/2014/main" id="{4C0A4DF3-9F4F-40EE-8EF7-1C410400ECE8}"/>
+                <a16:creationId xmlns:a16="http://schemas.microsoft.com/office/drawing/2014/main" id="{7DF99EB8-4FB1-4C2E-B2A7-8270E2893F97}"/>
               </a:ext>
             </a:extLst>
           </p:cNvPr>
@@ -9311,7 +9361,7 @@
     </p:spTree>
     <p:extLst>
       <p:ext uri="{BB962C8B-B14F-4D97-AF65-F5344CB8AC3E}">
-        <p14:creationId xmlns:p14="http://schemas.microsoft.com/office/powerpoint/2010/main" val="888143910"/>
+        <p14:creationId xmlns:p14="http://schemas.microsoft.com/office/powerpoint/2010/main" val="1527800626"/>
       </p:ext>
     </p:extLst>
   </p:cSld>
@@ -9335,7 +9385,7 @@
           <p:cNvPr id="2" name="Rectangle 1">
             <a:extLst xmlns:a="http://schemas.openxmlformats.org/drawingml/2006/main">
               <a:ext uri="{FF2B5EF4-FFF2-40B4-BE49-F238E27FC236}">
-                <a16:creationId xmlns:a16="http://schemas.microsoft.com/office/drawing/2014/main" id="{A4182417-B900-48CE-97F2-394CF6A58942}"/>
+                <a16:creationId xmlns:a16="http://schemas.microsoft.com/office/drawing/2014/main" id="{076D9216-0770-4488-AE4B-723FE30720A4}"/>
               </a:ext>
             </a:extLst>
           </p:cNvPr>
@@ -9388,7 +9438,7 @@
           <p:cNvPr id="3" name="Rectangle 2">
             <a:extLst xmlns:a="http://schemas.openxmlformats.org/drawingml/2006/main">
               <a:ext uri="{FF2B5EF4-FFF2-40B4-BE49-F238E27FC236}">
-                <a16:creationId xmlns:a16="http://schemas.microsoft.com/office/drawing/2014/main" id="{A9D02C40-600F-4DDE-947C-CDBBE7DEAC7C}"/>
+                <a16:creationId xmlns:a16="http://schemas.microsoft.com/office/drawing/2014/main" id="{057A9CFC-7D8E-4A7C-887F-372ACC47BFE7}"/>
               </a:ext>
             </a:extLst>
           </p:cNvPr>
@@ -9441,7 +9491,7 @@
           <p:cNvPr id="4" name="Rectangle 3">
             <a:extLst xmlns:a="http://schemas.openxmlformats.org/drawingml/2006/main">
               <a:ext uri="{FF2B5EF4-FFF2-40B4-BE49-F238E27FC236}">
-                <a16:creationId xmlns:a16="http://schemas.microsoft.com/office/drawing/2014/main" id="{BEEED8FA-FAA2-4029-A8D8-D6DC67916387}"/>
+                <a16:creationId xmlns:a16="http://schemas.microsoft.com/office/drawing/2014/main" id="{7DB58765-8DFE-4D0A-B6C6-59055CE0D786}"/>
               </a:ext>
             </a:extLst>
           </p:cNvPr>
@@ -9494,7 +9544,7 @@
           <p:cNvPr id="5" name="TextBox 4">
             <a:extLst xmlns:a="http://schemas.openxmlformats.org/drawingml/2006/main">
               <a:ext uri="{FF2B5EF4-FFF2-40B4-BE49-F238E27FC236}">
-                <a16:creationId xmlns:a16="http://schemas.microsoft.com/office/drawing/2014/main" id="{A6139722-BD84-41FE-A94A-C80597118344}"/>
+                <a16:creationId xmlns:a16="http://schemas.microsoft.com/office/drawing/2014/main" id="{6D98833D-F712-4693-AB4B-319B0D9F3F75}"/>
               </a:ext>
             </a:extLst>
           </p:cNvPr>
@@ -9557,7 +9607,7 @@
           <p:cNvPr id="6" name="shape_slide_5_decisions">
             <a:extLst xmlns:a="http://schemas.openxmlformats.org/drawingml/2006/main">
               <a:ext uri="{FF2B5EF4-FFF2-40B4-BE49-F238E27FC236}">
-                <a16:creationId xmlns:a16="http://schemas.microsoft.com/office/drawing/2014/main" id="{46E517F3-A9B5-4017-B851-F753CE772DD9}"/>
+                <a16:creationId xmlns:a16="http://schemas.microsoft.com/office/drawing/2014/main" id="{CEDA327F-6315-4BF2-950A-92271A408878}"/>
               </a:ext>
             </a:extLst>
           </p:cNvPr>
@@ -9612,7 +9662,7 @@
           <p:cNvPr id="7" name="shape_slide_5_decisions_textbox">
             <a:extLst xmlns:a="http://schemas.openxmlformats.org/drawingml/2006/main">
               <a:ext uri="{FF2B5EF4-FFF2-40B4-BE49-F238E27FC236}">
-                <a16:creationId xmlns:a16="http://schemas.microsoft.com/office/drawing/2014/main" id="{00C99236-B647-4322-BBA0-0A6271811A1A}"/>
+                <a16:creationId xmlns:a16="http://schemas.microsoft.com/office/drawing/2014/main" id="{663C6AD6-DB3B-4297-AD9C-7A59B5625A45}"/>
               </a:ext>
             </a:extLst>
           </p:cNvPr>
@@ -9830,7 +9880,7 @@
           <p:cNvPr id="8" name="shape_slide_5_criteria">
             <a:extLst xmlns:a="http://schemas.openxmlformats.org/drawingml/2006/main">
               <a:ext uri="{FF2B5EF4-FFF2-40B4-BE49-F238E27FC236}">
-                <a16:creationId xmlns:a16="http://schemas.microsoft.com/office/drawing/2014/main" id="{4FED3EC6-CBF3-484A-9085-6CB3B4D75F47}"/>
+                <a16:creationId xmlns:a16="http://schemas.microsoft.com/office/drawing/2014/main" id="{E6FCB89C-E050-4492-B070-1A9667796BAF}"/>
               </a:ext>
             </a:extLst>
           </p:cNvPr>
@@ -9885,7 +9935,7 @@
           <p:cNvPr id="9" name="shape_slide_5_criteria_textbox">
             <a:extLst xmlns:a="http://schemas.openxmlformats.org/drawingml/2006/main">
               <a:ext uri="{FF2B5EF4-FFF2-40B4-BE49-F238E27FC236}">
-                <a16:creationId xmlns:a16="http://schemas.microsoft.com/office/drawing/2014/main" id="{B6DC1C24-D09C-49CD-BFC0-26EC0CAB5CA2}"/>
+                <a16:creationId xmlns:a16="http://schemas.microsoft.com/office/drawing/2014/main" id="{286BF638-88AC-4F80-BF8A-34D5EBFF403A}"/>
               </a:ext>
             </a:extLst>
           </p:cNvPr>
@@ -10120,7 +10170,7 @@
     </p:spTree>
     <p:extLst>
       <p:ext uri="{BB962C8B-B14F-4D97-AF65-F5344CB8AC3E}">
-        <p14:creationId xmlns:p14="http://schemas.microsoft.com/office/powerpoint/2010/main" val="191037074"/>
+        <p14:creationId xmlns:p14="http://schemas.microsoft.com/office/powerpoint/2010/main" val="50173797"/>
       </p:ext>
     </p:extLst>
   </p:cSld>
@@ -10144,7 +10194,7 @@
           <p:cNvPr id="2" name="Rectangle 1">
             <a:extLst xmlns:a="http://schemas.openxmlformats.org/drawingml/2006/main">
               <a:ext uri="{FF2B5EF4-FFF2-40B4-BE49-F238E27FC236}">
-                <a16:creationId xmlns:a16="http://schemas.microsoft.com/office/drawing/2014/main" id="{0B044261-1A91-434A-9D38-8DA8DE3CA5F2}"/>
+                <a16:creationId xmlns:a16="http://schemas.microsoft.com/office/drawing/2014/main" id="{C3E486CD-3397-4FB5-859E-B3B30002F216}"/>
               </a:ext>
             </a:extLst>
           </p:cNvPr>
@@ -10197,7 +10247,7 @@
           <p:cNvPr id="3" name="Rectangle 2">
             <a:extLst xmlns:a="http://schemas.openxmlformats.org/drawingml/2006/main">
               <a:ext uri="{FF2B5EF4-FFF2-40B4-BE49-F238E27FC236}">
-                <a16:creationId xmlns:a16="http://schemas.microsoft.com/office/drawing/2014/main" id="{D8BD4467-94A0-4CF3-8BC0-6AAD5533AC59}"/>
+                <a16:creationId xmlns:a16="http://schemas.microsoft.com/office/drawing/2014/main" id="{C1298521-C471-45FA-A520-551E3D6C04D0}"/>
               </a:ext>
             </a:extLst>
           </p:cNvPr>
@@ -10250,7 +10300,7 @@
           <p:cNvPr id="4" name="Rectangle 3">
             <a:extLst xmlns:a="http://schemas.openxmlformats.org/drawingml/2006/main">
               <a:ext uri="{FF2B5EF4-FFF2-40B4-BE49-F238E27FC236}">
-                <a16:creationId xmlns:a16="http://schemas.microsoft.com/office/drawing/2014/main" id="{96655C7E-8773-4502-BE58-8CC41D052B66}"/>
+                <a16:creationId xmlns:a16="http://schemas.microsoft.com/office/drawing/2014/main" id="{2023334A-6C0A-4270-A80F-67482FB3142D}"/>
               </a:ext>
             </a:extLst>
           </p:cNvPr>
@@ -10303,7 +10353,7 @@
           <p:cNvPr id="5" name="TextBox 4">
             <a:extLst xmlns:a="http://schemas.openxmlformats.org/drawingml/2006/main">
               <a:ext uri="{FF2B5EF4-FFF2-40B4-BE49-F238E27FC236}">
-                <a16:creationId xmlns:a16="http://schemas.microsoft.com/office/drawing/2014/main" id="{9E5617DD-6280-4B6A-8F54-B448C4A51DC1}"/>
+                <a16:creationId xmlns:a16="http://schemas.microsoft.com/office/drawing/2014/main" id="{A3192074-C681-4122-939C-B0DF37942747}"/>
               </a:ext>
             </a:extLst>
           </p:cNvPr>
@@ -10366,7 +10416,7 @@
           <p:cNvPr id="6" name="shape_slide_6_retrieval_diagnostics">
             <a:extLst xmlns:a="http://schemas.openxmlformats.org/drawingml/2006/main">
               <a:ext uri="{FF2B5EF4-FFF2-40B4-BE49-F238E27FC236}">
-                <a16:creationId xmlns:a16="http://schemas.microsoft.com/office/drawing/2014/main" id="{964EB24C-54B2-4923-A060-1EB6E5F67FE9}"/>
+                <a16:creationId xmlns:a16="http://schemas.microsoft.com/office/drawing/2014/main" id="{A39246EB-6D62-4E5A-81B2-14B2D970A67B}"/>
               </a:ext>
             </a:extLst>
           </p:cNvPr>
@@ -10421,7 +10471,7 @@
           <p:cNvPr id="7" name="shape_slide_6_retrieval_diagnostics_textbox">
             <a:extLst xmlns:a="http://schemas.openxmlformats.org/drawingml/2006/main">
               <a:ext uri="{FF2B5EF4-FFF2-40B4-BE49-F238E27FC236}">
-                <a16:creationId xmlns:a16="http://schemas.microsoft.com/office/drawing/2014/main" id="{653D4E72-129D-4C3A-933F-7B45FEEF274D}"/>
+                <a16:creationId xmlns:a16="http://schemas.microsoft.com/office/drawing/2014/main" id="{0ADE7F6C-245B-4621-B320-3808E9245C76}"/>
               </a:ext>
             </a:extLst>
           </p:cNvPr>
@@ -10804,7 +10854,7 @@
           <p:nvPr/>
         </p:nvPicPr>
         <p:blipFill>
-          <a:blip xmlns:r="http://schemas.openxmlformats.org/officeDocument/2006/relationships" xmlns:a="http://schemas.openxmlformats.org/drawingml/2006/main" r:embed="Rf3bc57342be64de3"/>
+          <a:blip xmlns:r="http://schemas.openxmlformats.org/officeDocument/2006/relationships" xmlns:a="http://schemas.openxmlformats.org/drawingml/2006/main" r:embed="R4c59f6c4b1f749f0"/>
           <a:stretch xmlns:a="http://schemas.openxmlformats.org/drawingml/2006/main">
             <a:fillRect l="0" t="0" r="0" b="0"/>
           </a:stretch>
@@ -10812,7 +10862,7 @@
         <p:spPr>
           <a:xfrm xmlns:a="http://schemas.openxmlformats.org/drawingml/2006/main">
             <a:off x="6248095" y="1234440"/>
-            <a:ext cx="5212080" cy="3257550"/>
+            <a:ext cx="5212080" cy="3127248"/>
           </a:xfrm>
           <a:prstGeom xmlns:a="http://schemas.openxmlformats.org/drawingml/2006/main" prst="rect">
             <a:avLst/>
@@ -10824,7 +10874,7 @@
           <p:cNvPr id="9" name="shape_slide_6_context_scaling">
             <a:extLst xmlns:a="http://schemas.openxmlformats.org/drawingml/2006/main">
               <a:ext uri="{FF2B5EF4-FFF2-40B4-BE49-F238E27FC236}">
-                <a16:creationId xmlns:a16="http://schemas.microsoft.com/office/drawing/2014/main" id="{7D370C31-D71E-4AB9-87D6-0C0975EE146D}"/>
+                <a16:creationId xmlns:a16="http://schemas.microsoft.com/office/drawing/2014/main" id="{7DE23277-8635-425D-AF0F-8185DED692B6}"/>
               </a:ext>
             </a:extLst>
           </p:cNvPr>
@@ -10879,7 +10929,7 @@
           <p:cNvPr id="10" name="shape_slide_6_context_scaling_textbox">
             <a:extLst xmlns:a="http://schemas.openxmlformats.org/drawingml/2006/main">
               <a:ext uri="{FF2B5EF4-FFF2-40B4-BE49-F238E27FC236}">
-                <a16:creationId xmlns:a16="http://schemas.microsoft.com/office/drawing/2014/main" id="{A2F0CA1B-FBC7-450C-A8D8-4C2EF8681CD4}"/>
+                <a16:creationId xmlns:a16="http://schemas.microsoft.com/office/drawing/2014/main" id="{77A17C56-7F18-42E7-9FAB-A8F2BBDDA7E6}"/>
               </a:ext>
             </a:extLst>
           </p:cNvPr>
@@ -10925,17 +10975,17 @@
                 <a:spcPts val="250"/>
               </a:spcBef>
               <a:buNone/>
-              <a:defRPr sz="1100">
-                <a:solidFill>
-                  <a:srgbClr val="0F172A"/>
-                </a:solidFill>
-                <a:latin typeface="Calibri"/>
-                <a:ea typeface="Calibri"/>
-                <a:cs typeface="Calibri"/>
-              </a:defRPr>
-            </a:pPr>
-            <a:r>
-              <a:t>•  Khoảng cách ngữ nghĩa tại T1136.001 (Local Account): 0/95 lượt trúng Top-10 do log Event ID 4720 lệch từ vựng so với STIX persistence.</a:t>
+              <a:defRPr sz="1050">
+                <a:solidFill>
+                  <a:srgbClr val="0F172A"/>
+                </a:solidFill>
+                <a:latin typeface="Calibri"/>
+                <a:ea typeface="Calibri"/>
+                <a:cs typeface="Calibri"/>
+              </a:defRPr>
+            </a:pPr>
+            <a:r>
+              <a:t>•  Khoảng cách ngữ nghĩa tại T1136.001 (Local Account): Quan sát thấy 0/95 lượt trúng Top-10 đi kèm sự khác biệt từ vựng giữa raw event log và nhãn STIX (giả thuyết từ vựng / lexical divergence hypothesis, không khẳng định quan hệ nhân quả).</a:t>
             </a:r>
           </a:p>
           <a:p xmlns:a="http://schemas.openxmlformats.org/drawingml/2006/main">
@@ -10944,7 +10994,7 @@
                 <a:spcPts val="250"/>
               </a:spcBef>
               <a:buNone/>
-              <a:defRPr sz="1100">
+              <a:defRPr sz="1050">
                 <a:solidFill>
                   <a:srgbClr val="0F172A"/>
                 </a:solidFill>
@@ -10965,7 +11015,7 @@
     </p:spTree>
     <p:extLst>
       <p:ext uri="{BB962C8B-B14F-4D97-AF65-F5344CB8AC3E}">
-        <p14:creationId xmlns:p14="http://schemas.microsoft.com/office/powerpoint/2010/main" val="625897781"/>
+        <p14:creationId xmlns:p14="http://schemas.microsoft.com/office/powerpoint/2010/main" val="2040619327"/>
       </p:ext>
     </p:extLst>
   </p:cSld>
@@ -10989,7 +11039,7 @@
           <p:cNvPr id="2" name="Rectangle 1">
             <a:extLst xmlns:a="http://schemas.openxmlformats.org/drawingml/2006/main">
               <a:ext uri="{FF2B5EF4-FFF2-40B4-BE49-F238E27FC236}">
-                <a16:creationId xmlns:a16="http://schemas.microsoft.com/office/drawing/2014/main" id="{AD7B988C-6730-477E-AA60-2ABF32A64C49}"/>
+                <a16:creationId xmlns:a16="http://schemas.microsoft.com/office/drawing/2014/main" id="{EC9BFA92-BD38-401B-977D-0FABA4C9F009}"/>
               </a:ext>
             </a:extLst>
           </p:cNvPr>
@@ -11042,7 +11092,7 @@
           <p:cNvPr id="3" name="Rectangle 2">
             <a:extLst xmlns:a="http://schemas.openxmlformats.org/drawingml/2006/main">
               <a:ext uri="{FF2B5EF4-FFF2-40B4-BE49-F238E27FC236}">
-                <a16:creationId xmlns:a16="http://schemas.microsoft.com/office/drawing/2014/main" id="{7555192F-CD5C-42FE-9906-5899118CCBF7}"/>
+                <a16:creationId xmlns:a16="http://schemas.microsoft.com/office/drawing/2014/main" id="{8BAD967C-783E-4246-90DA-087A599318F4}"/>
               </a:ext>
             </a:extLst>
           </p:cNvPr>
@@ -11095,7 +11145,7 @@
           <p:cNvPr id="4" name="Rectangle 3">
             <a:extLst xmlns:a="http://schemas.openxmlformats.org/drawingml/2006/main">
               <a:ext uri="{FF2B5EF4-FFF2-40B4-BE49-F238E27FC236}">
-                <a16:creationId xmlns:a16="http://schemas.microsoft.com/office/drawing/2014/main" id="{1E217493-68B4-4066-80B8-A03E428682EC}"/>
+                <a16:creationId xmlns:a16="http://schemas.microsoft.com/office/drawing/2014/main" id="{1DDA67C7-38D1-49DF-B9C5-97D4CFF7F34C}"/>
               </a:ext>
             </a:extLst>
           </p:cNvPr>
@@ -11148,7 +11198,7 @@
           <p:cNvPr id="5" name="TextBox 4">
             <a:extLst xmlns:a="http://schemas.openxmlformats.org/drawingml/2006/main">
               <a:ext uri="{FF2B5EF4-FFF2-40B4-BE49-F238E27FC236}">
-                <a16:creationId xmlns:a16="http://schemas.microsoft.com/office/drawing/2014/main" id="{D9EBD889-4438-4975-B0B7-E3DF422EC0A6}"/>
+                <a16:creationId xmlns:a16="http://schemas.microsoft.com/office/drawing/2014/main" id="{34D0EB39-F8B0-4A64-87C1-94EB5D5398CD}"/>
               </a:ext>
             </a:extLst>
           </p:cNvPr>
@@ -11185,7 +11235,7 @@
               </a:defRPr>
             </a:pPr>
             <a:r>
-              <a:t>6. Tác Động Của Hình Thức Biểu Diễn Telemetry</a:t>
+              <a:t>6. Phân Tích Lỗi Khâu Truy Xuất &amp; Chẩn Đoán Có Điều Kiện (RQ2)</a:t>
             </a:r>
           </a:p>
           <a:p xmlns:a="http://schemas.openxmlformats.org/drawingml/2006/main">
@@ -11201,7 +11251,7 @@
               </a:defRPr>
             </a:pPr>
             <a:r>
-              <a:t>So sánh thực nghiệm Single vs Contextual trên 670 cặp kịch bản đối ứng  |  [CANONICAL CANDIDATE — PENDING ROOT FINAL REVIEW]</a:t>
+              <a:t>Đo lường tương quan quan sát giữa thành công truy xuất và độ chính xác phân loại trên 718 views TEST  |  [CANONICAL CANDIDATE — PENDING ROOT FINAL REVIEW]</a:t>
             </a:r>
           </a:p>
         </p:txBody>
@@ -11211,7 +11261,7 @@
           <p:cNvPr id="6" name="shape_slide_7_paired_analysis">
             <a:extLst xmlns:a="http://schemas.openxmlformats.org/drawingml/2006/main">
               <a:ext uri="{FF2B5EF4-FFF2-40B4-BE49-F238E27FC236}">
-                <a16:creationId xmlns:a16="http://schemas.microsoft.com/office/drawing/2014/main" id="{937413CB-7A4A-4624-83E1-9321CFD247EB}"/>
+                <a16:creationId xmlns:a16="http://schemas.microsoft.com/office/drawing/2014/main" id="{42BBCAEB-260C-4115-A868-08199EFBE09B}"/>
               </a:ext>
             </a:extLst>
           </p:cNvPr>
@@ -11266,7 +11316,7 @@
           <p:cNvPr id="7" name="shape_slide_7_paired_analysis_textbox">
             <a:extLst xmlns:a="http://schemas.openxmlformats.org/drawingml/2006/main">
               <a:ext uri="{FF2B5EF4-FFF2-40B4-BE49-F238E27FC236}">
-                <a16:creationId xmlns:a16="http://schemas.microsoft.com/office/drawing/2014/main" id="{EBC1EA5C-F938-4769-9FD6-2EE4518D6021}"/>
+                <a16:creationId xmlns:a16="http://schemas.microsoft.com/office/drawing/2014/main" id="{4D1191AA-6D49-4A0E-BA5E-068B3303A5EB}"/>
               </a:ext>
             </a:extLst>
           </p:cNvPr>
@@ -11303,7 +11353,7 @@
               </a:defRPr>
             </a:pPr>
             <a:r>
-              <a:t>Phân Tích Cặp Anchor Chuẩn (296 Cặp - Primary)</a:t>
+              <a:t>Chẩn Đoán Có Điều Kiện Theo Khâu Truy Xuất (TEST N=718)</a:t>
             </a:r>
           </a:p>
           <a:p xmlns:a="http://schemas.openxmlformats.org/drawingml/2006/main">
@@ -11312,17 +11362,17 @@
                 <a:spcPts val="300"/>
               </a:spcBef>
               <a:buNone/>
-              <a:defRPr sz="1150">
-                <a:solidFill>
-                  <a:srgbClr val="0F172A"/>
-                </a:solidFill>
-                <a:latin typeface="Calibri"/>
-                <a:ea typeface="Calibri"/>
-                <a:cs typeface="Calibri"/>
-              </a:defRPr>
-            </a:pPr>
-            <a:r>
-              <a:t>•  Quy mô: 670 cặp kịch bản đối ứng; 374 cặp bị loại trừ do đa nhãn/mismatch.</a:t>
+              <a:defRPr sz="1100">
+                <a:solidFill>
+                  <a:srgbClr val="0F172A"/>
+                </a:solidFill>
+                <a:latin typeface="Calibri"/>
+                <a:ea typeface="Calibri"/>
+                <a:cs typeface="Calibri"/>
+              </a:defRPr>
+            </a:pPr>
+            <a:r>
+              <a:t>•  Kỹ thuật GT có mặt trong Top-10 (Retrieval Success): N=321 (44.71%)</a:t>
             </a:r>
           </a:p>
           <a:p xmlns:a="http://schemas.openxmlformats.org/drawingml/2006/main">
@@ -11331,17 +11381,17 @@
                 <a:spcPts val="300"/>
               </a:spcBef>
               <a:buNone/>
-              <a:defRPr sz="1150">
-                <a:solidFill>
-                  <a:srgbClr val="0F172A"/>
-                </a:solidFill>
-                <a:latin typeface="Calibri"/>
-                <a:ea typeface="Calibri"/>
-                <a:cs typeface="Calibri"/>
-              </a:defRPr>
-            </a:pPr>
-            <a:r>
-              <a:t>•  Tiêu chí Anchor chuẩn (scripts/verify_t20_canonical_artifacts.py):</a:t>
+              <a:defRPr sz="1100">
+                <a:solidFill>
+                  <a:srgbClr val="0F172A"/>
+                </a:solidFill>
+                <a:latin typeface="Calibri"/>
+                <a:ea typeface="Calibri"/>
+                <a:cs typeface="Calibri"/>
+              </a:defRPr>
+            </a:pPr>
+            <a:r>
+              <a:t>  • P(Đúng | Đã truy xuất): 91.28% (293/321 views được gán đúng).</a:t>
             </a:r>
           </a:p>
           <a:p xmlns:a="http://schemas.openxmlformats.org/drawingml/2006/main">
@@ -11350,17 +11400,17 @@
                 <a:spcPts val="300"/>
               </a:spcBef>
               <a:buNone/>
-              <a:defRPr sz="1150">
-                <a:solidFill>
-                  <a:srgbClr val="0F172A"/>
-                </a:solidFill>
-                <a:latin typeface="Calibri"/>
-                <a:ea typeface="Calibri"/>
-                <a:cs typeface="Calibri"/>
-              </a:defRPr>
-            </a:pPr>
-            <a:r>
-              <a:t>  • Single view có duy nhất 1 kỹ thuật và kỹ thuật này có mặt trong Contextual view.</a:t>
+              <a:defRPr sz="1100">
+                <a:solidFill>
+                  <a:srgbClr val="0F172A"/>
+                </a:solidFill>
+                <a:latin typeface="Calibri"/>
+                <a:ea typeface="Calibri"/>
+                <a:cs typeface="Calibri"/>
+              </a:defRPr>
+            </a:pPr>
+            <a:r>
+              <a:t>•  Kỹ thuật GT vắng mặt trong Top-10 (Retrieval Miss): N=397 (55.29%)</a:t>
             </a:r>
           </a:p>
           <a:p xmlns:a="http://schemas.openxmlformats.org/drawingml/2006/main">
@@ -11369,17 +11419,17 @@
                 <a:spcPts val="300"/>
               </a:spcBef>
               <a:buNone/>
-              <a:defRPr sz="1150">
-                <a:solidFill>
-                  <a:srgbClr val="0F172A"/>
-                </a:solidFill>
-                <a:latin typeface="Calibri"/>
-                <a:ea typeface="Calibri"/>
-                <a:cs typeface="Calibri"/>
-              </a:defRPr>
-            </a:pPr>
-            <a:r>
-              <a:t>•  Phân bố thứ hạng thực nghiệm quan sát được:</a:t>
+              <a:defRPr sz="1100">
+                <a:solidFill>
+                  <a:srgbClr val="0F172A"/>
+                </a:solidFill>
+                <a:latin typeface="Calibri"/>
+                <a:ea typeface="Calibri"/>
+                <a:cs typeface="Calibri"/>
+              </a:defRPr>
+            </a:pPr>
+            <a:r>
+              <a:t>  • P(Đúng | Vắng mặt): 70.03% (278/397 views gán đúng khi không có tài liệu ground-truth trong Top-10).</a:t>
             </a:r>
           </a:p>
           <a:p xmlns:a="http://schemas.openxmlformats.org/drawingml/2006/main">
@@ -11388,17 +11438,17 @@
                 <a:spcPts val="300"/>
               </a:spcBef>
               <a:buNone/>
-              <a:defRPr sz="1150">
-                <a:solidFill>
-                  <a:srgbClr val="0F172A"/>
-                </a:solidFill>
-                <a:latin typeface="Calibri"/>
-                <a:ea typeface="Calibri"/>
-                <a:cs typeface="Calibri"/>
-              </a:defRPr>
-            </a:pPr>
-            <a:r>
-              <a:t>  • Single-event đạt thứ hạng tốt hơn: 65 cặp (22.0%)</a:t>
+              <a:defRPr sz="1100">
+                <a:solidFill>
+                  <a:srgbClr val="0F172A"/>
+                </a:solidFill>
+                <a:latin typeface="Calibri"/>
+                <a:ea typeface="Calibri"/>
+                <a:cs typeface="Calibri"/>
+              </a:defRPr>
+            </a:pPr>
+            <a:r>
+              <a:t>•  Khoảng chênh lệch quan sát: +21.25 pp (91.28% vs 70.03%) cho thấy sự hiện diện của ngữ cảnh gắn liền với tỷ lệ gán đúng cao hơn.</a:t>
             </a:r>
           </a:p>
           <a:p xmlns:a="http://schemas.openxmlformats.org/drawingml/2006/main">
@@ -11407,93 +11457,17 @@
                 <a:spcPts val="300"/>
               </a:spcBef>
               <a:buNone/>
-              <a:defRPr sz="1150">
-                <a:solidFill>
-                  <a:srgbClr val="0F172A"/>
-                </a:solidFill>
-                <a:latin typeface="Calibri"/>
-                <a:ea typeface="Calibri"/>
-                <a:cs typeface="Calibri"/>
-              </a:defRPr>
-            </a:pPr>
-            <a:r>
-              <a:t>  • Contextual-event đạt thứ hạng tốt hơn: 23 cặp (7.8%)</a:t>
-            </a:r>
-          </a:p>
-          <a:p xmlns:a="http://schemas.openxmlformats.org/drawingml/2006/main">
-            <a:pPr>
-              <a:spcBef>
-                <a:spcPts val="300"/>
-              </a:spcBef>
-              <a:buNone/>
-              <a:defRPr sz="1150">
-                <a:solidFill>
-                  <a:srgbClr val="0F172A"/>
-                </a:solidFill>
-                <a:latin typeface="Calibri"/>
-                <a:ea typeface="Calibri"/>
-                <a:cs typeface="Calibri"/>
-              </a:defRPr>
-            </a:pPr>
-            <a:r>
-              <a:t>  • Hiệu năng thứ hạng tương đương: 208 cặp (70.3%)</a:t>
-            </a:r>
-          </a:p>
-          <a:p xmlns:a="http://schemas.openxmlformats.org/drawingml/2006/main">
-            <a:pPr>
-              <a:spcBef>
-                <a:spcPts val="300"/>
-              </a:spcBef>
-              <a:buNone/>
-              <a:defRPr sz="1150">
-                <a:solidFill>
-                  <a:srgbClr val="0F172A"/>
-                </a:solidFill>
-                <a:latin typeface="Calibri"/>
-                <a:ea typeface="Calibri"/>
-                <a:cs typeface="Calibri"/>
-              </a:defRPr>
-            </a:pPr>
-            <a:r>
-              <a:t>    - Cả hai biểu diễn cùng trượt Top-10: 147 cặp</a:t>
-            </a:r>
-          </a:p>
-          <a:p xmlns:a="http://schemas.openxmlformats.org/drawingml/2006/main">
-            <a:pPr>
-              <a:spcBef>
-                <a:spcPts val="300"/>
-              </a:spcBef>
-              <a:buNone/>
-              <a:defRPr sz="1150">
-                <a:solidFill>
-                  <a:srgbClr val="0F172A"/>
-                </a:solidFill>
-                <a:latin typeface="Calibri"/>
-                <a:ea typeface="Calibri"/>
-                <a:cs typeface="Calibri"/>
-              </a:defRPr>
-            </a:pPr>
-            <a:r>
-              <a:t>    - Đồng hạng chính xác trong Top-10: 61 cặp</a:t>
-            </a:r>
-          </a:p>
-          <a:p xmlns:a="http://schemas.openxmlformats.org/drawingml/2006/main">
-            <a:pPr>
-              <a:spcBef>
-                <a:spcPts val="300"/>
-              </a:spcBef>
-              <a:buNone/>
-              <a:defRPr sz="1150">
-                <a:solidFill>
-                  <a:srgbClr val="0F172A"/>
-                </a:solidFill>
-                <a:latin typeface="Calibri"/>
-                <a:ea typeface="Calibri"/>
-                <a:cs typeface="Calibri"/>
-              </a:defRPr>
-            </a:pPr>
-            <a:r>
-              <a:t>•  Nhóm lọc đơn kỹ thuật nghiêm ngặt (252 cặp - Secondary): Single tốt hơn 59 cặp (23.4%) vs. Contextual 23 cặp (9.1%), ngang nhau 170 cặp.</a:t>
+              <a:defRPr sz="1100">
+                <a:solidFill>
+                  <a:srgbClr val="0F172A"/>
+                </a:solidFill>
+                <a:latin typeface="Calibri"/>
+                <a:ea typeface="Calibri"/>
+                <a:cs typeface="Calibri"/>
+              </a:defRPr>
+            </a:pPr>
+            <a:r>
+              <a:t>•  Nguyên tắc suy luận: Trình bày thuần túy dưới dạng tương quan quan sát (observational association), không suy diễn quan hệ nhân quả tuyệt đối.</a:t>
             </a:r>
           </a:p>
         </p:txBody>
@@ -11503,7 +11477,7 @@
           <p:cNvPr id="8" name="shape_slide_7_benign_drift">
             <a:extLst xmlns:a="http://schemas.openxmlformats.org/drawingml/2006/main">
               <a:ext uri="{FF2B5EF4-FFF2-40B4-BE49-F238E27FC236}">
-                <a16:creationId xmlns:a16="http://schemas.microsoft.com/office/drawing/2014/main" id="{1948C1C4-197F-4312-B713-069C22C3D840}"/>
+                <a16:creationId xmlns:a16="http://schemas.microsoft.com/office/drawing/2014/main" id="{AA62A256-E7D5-4E28-887D-821CD29F717C}"/>
               </a:ext>
             </a:extLst>
           </p:cNvPr>
@@ -11558,7 +11532,7 @@
           <p:cNvPr id="9" name="shape_slide_7_benign_drift_textbox">
             <a:extLst xmlns:a="http://schemas.openxmlformats.org/drawingml/2006/main">
               <a:ext uri="{FF2B5EF4-FFF2-40B4-BE49-F238E27FC236}">
-                <a16:creationId xmlns:a16="http://schemas.microsoft.com/office/drawing/2014/main" id="{1C1487C6-4565-4A5E-98FC-21B2A3876FB4}"/>
+                <a16:creationId xmlns:a16="http://schemas.microsoft.com/office/drawing/2014/main" id="{DEE1BE33-9595-4DA5-8240-200BC0E0A2E3}"/>
               </a:ext>
             </a:extLst>
           </p:cNvPr>
@@ -11570,7 +11544,7 @@
         <p:spPr>
           <a:xfrm xmlns:a="http://schemas.openxmlformats.org/drawingml/2006/main">
             <a:off x="6430975" y="1344168"/>
-            <a:ext cx="4846320" cy="5379720"/>
+            <a:ext cx="4846320" cy="4855464"/>
           </a:xfrm>
           <a:prstGeom xmlns:a="http://schemas.openxmlformats.org/drawingml/2006/main" prst="rect">
             <a:avLst/>
@@ -11595,73 +11569,92 @@
               </a:defRPr>
             </a:pPr>
             <a:r>
-              <a:t>Hiện Tượng Quan Sát &amp; Schema So Sánh [CANONICAL CANDIDATE — PENDING ROOT FINAL REVIEW]</a:t>
-            </a:r>
-          </a:p>
-          <a:p xmlns:a="http://schemas.openxmlformats.org/drawingml/2006/main">
-            <a:pPr>
-              <a:spcBef>
-                <a:spcPts val="300"/>
-              </a:spcBef>
-              <a:buNone/>
-              <a:defRPr sz="1150">
-                <a:solidFill>
-                  <a:srgbClr val="0F172A"/>
-                </a:solidFill>
-                <a:latin typeface="Calibri"/>
-                <a:ea typeface="Calibri"/>
-                <a:cs typeface="Calibri"/>
-              </a:defRPr>
-            </a:pPr>
-            <a:r>
-              <a:t>•  Hiện tượng Benign Drift khi mở rộng ngữ cảnh:</a:t>
-            </a:r>
-          </a:p>
-          <a:p xmlns:a="http://schemas.openxmlformats.org/drawingml/2006/main">
-            <a:pPr>
-              <a:spcBef>
-                <a:spcPts val="300"/>
-              </a:spcBef>
-              <a:buNone/>
-              <a:defRPr sz="1150">
-                <a:solidFill>
-                  <a:srgbClr val="0F172A"/>
-                </a:solidFill>
-                <a:latin typeface="Calibri"/>
-                <a:ea typeface="Calibri"/>
-                <a:cs typeface="Calibri"/>
-              </a:defRPr>
-            </a:pPr>
-            <a:r>
-              <a:t>  • Gộp các sự kiện lân cận bổ sung nhiều token thông thường (Explorer, DNS, svchost).</a:t>
-            </a:r>
-          </a:p>
-          <a:p xmlns:a="http://schemas.openxmlformats.org/drawingml/2006/main">
-            <a:pPr>
-              <a:spcBef>
-                <a:spcPts val="300"/>
-              </a:spcBef>
-              <a:buNone/>
-              <a:defRPr sz="1150">
-                <a:solidFill>
-                  <a:srgbClr val="0F172A"/>
-                </a:solidFill>
-                <a:latin typeface="Calibri"/>
-                <a:ea typeface="Calibri"/>
-                <a:cs typeface="Calibri"/>
-              </a:defRPr>
-            </a:pPr>
-            <a:r>
-              <a:t>  • Vector dense embedding bị kéo lệch về hành vi bình thường, làm tụt thứ hạng kỹ thuật tấn công.</a:t>
-            </a:r>
-          </a:p>
-          <a:p xmlns:a="http://schemas.openxmlformats.org/drawingml/2006/main">
-            <a:pPr>
-              <a:spcBef>
-                <a:spcPts val="300"/>
-              </a:spcBef>
-              <a:buNone/>
-              <a:defRPr sz="1150">
+              <a:t>Bóc Tách Lỗi &amp; Phần Giao Thoa Độc Lập Theo Định Đề D2i</a:t>
+            </a:r>
+          </a:p>
+          <a:p xmlns:a="http://schemas.openxmlformats.org/drawingml/2006/main">
+            <a:pPr>
+              <a:spcBef>
+                <a:spcPts val="250"/>
+              </a:spcBef>
+              <a:buNone/>
+              <a:defRPr sz="1050">
+                <a:solidFill>
+                  <a:srgbClr val="0F172A"/>
+                </a:solidFill>
+                <a:latin typeface="Calibri"/>
+                <a:ea typeface="Calibri"/>
+                <a:cs typeface="Calibri"/>
+              </a:defRPr>
+            </a:pPr>
+            <a:r>
+              <a:t>•  Tổng số lỗi phân loại tại k=10: 147 views (718 - 571 = 147).</a:t>
+            </a:r>
+          </a:p>
+          <a:p xmlns:a="http://schemas.openxmlformats.org/drawingml/2006/main">
+            <a:pPr>
+              <a:spcBef>
+                <a:spcPts val="250"/>
+              </a:spcBef>
+              <a:buNone/>
+              <a:defRPr sz="1050">
+                <a:solidFill>
+                  <a:srgbClr val="0F172A"/>
+                </a:solidFill>
+                <a:latin typeface="Calibri"/>
+                <a:ea typeface="Calibri"/>
+                <a:cs typeface="Calibri"/>
+              </a:defRPr>
+            </a:pPr>
+            <a:r>
+              <a:t>•  Phần giao thoa lỗi (Joint Overlap per D2i): 119 / 147 (80.95% tổng lỗi phân loại) xảy ra khi retrieval trượt Top-10.</a:t>
+            </a:r>
+          </a:p>
+          <a:p xmlns:a="http://schemas.openxmlformats.org/drawingml/2006/main">
+            <a:pPr>
+              <a:spcBef>
+                <a:spcPts val="250"/>
+              </a:spcBef>
+              <a:buNone/>
+              <a:defRPr sz="1050">
+                <a:solidFill>
+                  <a:srgbClr val="0F172A"/>
+                </a:solidFill>
+                <a:latin typeface="Calibri"/>
+                <a:ea typeface="Calibri"/>
+                <a:cs typeface="Calibri"/>
+              </a:defRPr>
+            </a:pPr>
+            <a:r>
+              <a:t>•  Lỗi khi retrieval thành công: 28 / 147 (19.05% tổng lỗi phân loại) mô hình chọn sai kỹ thuật dù kỹ thuật đúng có trong Top-10 (giả thuyết nhầm lẫn downstream / distractor effect đang được khảo sát).</a:t>
+            </a:r>
+          </a:p>
+          <a:p xmlns:a="http://schemas.openxmlformats.org/drawingml/2006/main">
+            <a:pPr>
+              <a:spcBef>
+                <a:spcPts val="250"/>
+              </a:spcBef>
+              <a:buNone/>
+              <a:defRPr sz="1050">
+                <a:solidFill>
+                  <a:srgbClr val="0F172A"/>
+                </a:solidFill>
+                <a:latin typeface="Calibri"/>
+                <a:ea typeface="Calibri"/>
+                <a:cs typeface="Calibri"/>
+              </a:defRPr>
+            </a:pPr>
+            <a:r>
+              <a:t>•  Tuân thủ định đề D2i: Ghi nhận đầy đủ phần giao thoa khác 0 giữa các trục đo lường lỗi độc lập, không áp đặt giả định xung khắc hay độc lập xác suất ngẫu nhiên.</a:t>
+            </a:r>
+          </a:p>
+          <a:p xmlns:a="http://schemas.openxmlformats.org/drawingml/2006/main">
+            <a:pPr>
+              <a:spcBef>
+                <a:spcPts val="250"/>
+              </a:spcBef>
+              <a:buNone/>
+              <a:defRPr sz="1050">
                 <a:solidFill>
                   <a:srgbClr val="0F172A"/>
                 </a:solidFill>
@@ -11677,20 +11670,20 @@
           <a:p xmlns:a="http://schemas.openxmlformats.org/drawingml/2006/main">
             <a:pPr>
               <a:spcBef>
-                <a:spcPts val="300"/>
-              </a:spcBef>
-              <a:buNone/>
-              <a:defRPr sz="1150">
-                <a:solidFill>
-                  <a:srgbClr val="0F172A"/>
-                </a:solidFill>
-                <a:latin typeface="Calibri"/>
-                <a:ea typeface="Calibri"/>
-                <a:cs typeface="Calibri"/>
-              </a:defRPr>
-            </a:pPr>
-            <a:r>
-              <a:rPr sz="1150">
+                <a:spcPts val="250"/>
+              </a:spcBef>
+              <a:buNone/>
+              <a:defRPr sz="1050">
+                <a:solidFill>
+                  <a:srgbClr val="0F172A"/>
+                </a:solidFill>
+                <a:latin typeface="Calibri"/>
+                <a:ea typeface="Calibri"/>
+                <a:cs typeface="Calibri"/>
+              </a:defRPr>
+            </a:pPr>
+            <a:r>
+              <a:rPr sz="1050">
                 <a:solidFill>
                   <a:srgbClr val="0F172A"/>
                 </a:solidFill>
@@ -11704,20 +11697,20 @@
           <a:p xmlns:a="http://schemas.openxmlformats.org/drawingml/2006/main">
             <a:pPr>
               <a:spcBef>
-                <a:spcPts val="300"/>
-              </a:spcBef>
-              <a:buNone/>
-              <a:defRPr sz="1150">
-                <a:solidFill>
-                  <a:srgbClr val="0F172A"/>
-                </a:solidFill>
-                <a:latin typeface="Calibri"/>
-                <a:ea typeface="Calibri"/>
-                <a:cs typeface="Calibri"/>
-              </a:defRPr>
-            </a:pPr>
-            <a:r>
-              <a:rPr sz="1150">
+                <a:spcPts val="250"/>
+              </a:spcBef>
+              <a:buNone/>
+              <a:defRPr sz="1050">
+                <a:solidFill>
+                  <a:srgbClr val="0F172A"/>
+                </a:solidFill>
+                <a:latin typeface="Calibri"/>
+                <a:ea typeface="Calibri"/>
+                <a:cs typeface="Calibri"/>
+              </a:defRPr>
+            </a:pPr>
+            <a:r>
+              <a:rPr sz="1050">
                 <a:solidFill>
                   <a:srgbClr val="0F172A"/>
                 </a:solidFill>
@@ -11731,20 +11724,20 @@
           <a:p xmlns:a="http://schemas.openxmlformats.org/drawingml/2006/main">
             <a:pPr>
               <a:spcBef>
-                <a:spcPts val="300"/>
-              </a:spcBef>
-              <a:buNone/>
-              <a:defRPr sz="1150">
-                <a:solidFill>
-                  <a:srgbClr val="0F172A"/>
-                </a:solidFill>
-                <a:latin typeface="Calibri"/>
-                <a:ea typeface="Calibri"/>
-                <a:cs typeface="Calibri"/>
-              </a:defRPr>
-            </a:pPr>
-            <a:r>
-              <a:rPr sz="1150">
+                <a:spcPts val="250"/>
+              </a:spcBef>
+              <a:buNone/>
+              <a:defRPr sz="1050">
+                <a:solidFill>
+                  <a:srgbClr val="0F172A"/>
+                </a:solidFill>
+                <a:latin typeface="Calibri"/>
+                <a:ea typeface="Calibri"/>
+                <a:cs typeface="Calibri"/>
+              </a:defRPr>
+            </a:pPr>
+            <a:r>
+              <a:rPr sz="1050">
                 <a:solidFill>
                   <a:srgbClr val="0F172A"/>
                 </a:solidFill>
@@ -11758,20 +11751,20 @@
           <a:p xmlns:a="http://schemas.openxmlformats.org/drawingml/2006/main">
             <a:pPr>
               <a:spcBef>
-                <a:spcPts val="300"/>
-              </a:spcBef>
-              <a:buNone/>
-              <a:defRPr sz="1150">
-                <a:solidFill>
-                  <a:srgbClr val="0F172A"/>
-                </a:solidFill>
-                <a:latin typeface="Calibri"/>
-                <a:ea typeface="Calibri"/>
-                <a:cs typeface="Calibri"/>
-              </a:defRPr>
-            </a:pPr>
-            <a:r>
-              <a:rPr sz="1150">
+                <a:spcPts val="250"/>
+              </a:spcBef>
+              <a:buNone/>
+              <a:defRPr sz="1050">
+                <a:solidFill>
+                  <a:srgbClr val="0F172A"/>
+                </a:solidFill>
+                <a:latin typeface="Calibri"/>
+                <a:ea typeface="Calibri"/>
+                <a:cs typeface="Calibri"/>
+              </a:defRPr>
+            </a:pPr>
+            <a:r>
+              <a:rPr sz="1050">
                 <a:solidFill>
                   <a:srgbClr val="0F172A"/>
                 </a:solidFill>
@@ -11785,20 +11778,20 @@
           <a:p xmlns:a="http://schemas.openxmlformats.org/drawingml/2006/main">
             <a:pPr>
               <a:spcBef>
-                <a:spcPts val="300"/>
-              </a:spcBef>
-              <a:buNone/>
-              <a:defRPr sz="1150">
-                <a:solidFill>
-                  <a:srgbClr val="0F172A"/>
-                </a:solidFill>
-                <a:latin typeface="Calibri"/>
-                <a:ea typeface="Calibri"/>
-                <a:cs typeface="Calibri"/>
-              </a:defRPr>
-            </a:pPr>
-            <a:r>
-              <a:rPr sz="1150">
+                <a:spcPts val="250"/>
+              </a:spcBef>
+              <a:buNone/>
+              <a:defRPr sz="1050">
+                <a:solidFill>
+                  <a:srgbClr val="0F172A"/>
+                </a:solidFill>
+                <a:latin typeface="Calibri"/>
+                <a:ea typeface="Calibri"/>
+                <a:cs typeface="Calibri"/>
+              </a:defRPr>
+            </a:pPr>
+            <a:r>
+              <a:rPr sz="1050">
                 <a:solidFill>
                   <a:srgbClr val="0F172A"/>
                 </a:solidFill>
@@ -11812,96 +11805,20 @@
           <a:p xmlns:a="http://schemas.openxmlformats.org/drawingml/2006/main">
             <a:pPr>
               <a:spcBef>
-                <a:spcPts val="300"/>
-              </a:spcBef>
-              <a:buNone/>
-              <a:defRPr sz="1150">
-                <a:solidFill>
-                  <a:srgbClr val="0F172A"/>
-                </a:solidFill>
-                <a:latin typeface="Calibri"/>
-                <a:ea typeface="Calibri"/>
-                <a:cs typeface="Calibri"/>
-              </a:defRPr>
-            </a:pPr>
-            <a:r>
-              <a:t>  • Đối chứng: Zero-Shot No-RAG vs Zero-Shot RAG (k=1..10) vs Prompt Scaffolds.</a:t>
-            </a:r>
-          </a:p>
-          <a:p xmlns:a="http://schemas.openxmlformats.org/drawingml/2006/main">
-            <a:pPr>
-              <a:spcBef>
-                <a:spcPts val="300"/>
-              </a:spcBef>
-              <a:buNone/>
-              <a:defRPr sz="1150">
-                <a:solidFill>
-                  <a:srgbClr val="0F172A"/>
-                </a:solidFill>
-                <a:latin typeface="Calibri"/>
-                <a:ea typeface="Calibri"/>
-                <a:cs typeface="Calibri"/>
-              </a:defRPr>
-            </a:pPr>
-            <a:r>
-              <a:t>  • Tại RAG k=10: Single và Contextual view đều đạt 83.81% (Paired Delta = 0.0 pp, McNemar p = 1.0).</a:t>
-            </a:r>
-          </a:p>
-          <a:p xmlns:a="http://schemas.openxmlformats.org/drawingml/2006/main">
-            <a:pPr>
-              <a:spcBef>
-                <a:spcPts val="300"/>
-              </a:spcBef>
-              <a:buNone/>
-              <a:defRPr sz="1150">
-                <a:solidFill>
-                  <a:srgbClr val="0F172A"/>
-                </a:solidFill>
-                <a:latin typeface="Calibri"/>
-                <a:ea typeface="Calibri"/>
-                <a:cs typeface="Calibri"/>
-              </a:defRPr>
-            </a:pPr>
-            <a:r>
-              <a:t>  • Giả thuyết: Khối tri thức RAG bổ trợ cần đi kèm tiền lọc sự kiện nghi vấn thay vì nhúng thô.</a:t>
-            </a:r>
-          </a:p>
-          <a:p xmlns:a="http://schemas.openxmlformats.org/drawingml/2006/main">
-            <a:pPr>
-              <a:spcBef>
-                <a:spcPts val="300"/>
-              </a:spcBef>
-              <a:buNone/>
-              <a:defRPr sz="1150">
-                <a:solidFill>
-                  <a:srgbClr val="0F172A"/>
-                </a:solidFill>
-                <a:latin typeface="Calibri"/>
-                <a:ea typeface="Calibri"/>
-                <a:cs typeface="Calibri"/>
-              </a:defRPr>
-            </a:pPr>
-            <a:r>
-              <a:t>  • Trạng thái: Kiểm chứng đối chứng trên ma trận TEST.</a:t>
-            </a:r>
-          </a:p>
-          <a:p xmlns:a="http://schemas.openxmlformats.org/drawingml/2006/main">
-            <a:pPr>
-              <a:spcBef>
-                <a:spcPts val="300"/>
-              </a:spcBef>
-              <a:buNone/>
-              <a:defRPr sz="1150">
-                <a:solidFill>
-                  <a:srgbClr val="0F172A"/>
-                </a:solidFill>
-                <a:latin typeface="Calibri"/>
-                <a:ea typeface="Calibri"/>
-                <a:cs typeface="Calibri"/>
-              </a:defRPr>
-            </a:pPr>
-            <a:r>
-              <a:t>•  Phạm vi khảo sát: Ghi nhận trên synthetic-paired-v1; cần tiếp tục kiểm chứng trên telemetry thực tế.</a:t>
+                <a:spcPts val="250"/>
+              </a:spcBef>
+              <a:buNone/>
+              <a:defRPr sz="1050">
+                <a:solidFill>
+                  <a:srgbClr val="0F172A"/>
+                </a:solidFill>
+                <a:latin typeface="Calibri"/>
+                <a:ea typeface="Calibri"/>
+                <a:cs typeface="Calibri"/>
+              </a:defRPr>
+            </a:pPr>
+            <a:r>
+              <a:t>•  Ranh giới an toàn: Không xuất hiện lỗi API hay lỗi cú pháp mã kỹ thuật trên tập scorable (0 terminal provider failures, 0 invalid IDs).</a:t>
             </a:r>
           </a:p>
         </p:txBody>
@@ -11909,7 +11826,7 @@
     </p:spTree>
     <p:extLst>
       <p:ext uri="{BB962C8B-B14F-4D97-AF65-F5344CB8AC3E}">
-        <p14:creationId xmlns:p14="http://schemas.microsoft.com/office/powerpoint/2010/main" val="2030906797"/>
+        <p14:creationId xmlns:p14="http://schemas.microsoft.com/office/powerpoint/2010/main" val="1383921233"/>
       </p:ext>
     </p:extLst>
   </p:cSld>
@@ -11933,7 +11850,7 @@
           <p:cNvPr id="2" name="Rectangle 1">
             <a:extLst xmlns:a="http://schemas.openxmlformats.org/drawingml/2006/main">
               <a:ext uri="{FF2B5EF4-FFF2-40B4-BE49-F238E27FC236}">
-                <a16:creationId xmlns:a16="http://schemas.microsoft.com/office/drawing/2014/main" id="{FEF04B31-1199-4D7D-A217-799B20DF8330}"/>
+                <a16:creationId xmlns:a16="http://schemas.microsoft.com/office/drawing/2014/main" id="{6409C979-A11C-4839-BE35-59BE247E7222}"/>
               </a:ext>
             </a:extLst>
           </p:cNvPr>
@@ -11986,7 +11903,7 @@
           <p:cNvPr id="3" name="Rectangle 2">
             <a:extLst xmlns:a="http://schemas.openxmlformats.org/drawingml/2006/main">
               <a:ext uri="{FF2B5EF4-FFF2-40B4-BE49-F238E27FC236}">
-                <a16:creationId xmlns:a16="http://schemas.microsoft.com/office/drawing/2014/main" id="{C81A88A8-FAB4-457C-A31D-818A1BE9908B}"/>
+                <a16:creationId xmlns:a16="http://schemas.microsoft.com/office/drawing/2014/main" id="{34CB6138-3DAF-41A8-8F87-A3E1995E32DE}"/>
               </a:ext>
             </a:extLst>
           </p:cNvPr>
@@ -12039,7 +11956,7 @@
           <p:cNvPr id="4" name="Rectangle 3">
             <a:extLst xmlns:a="http://schemas.openxmlformats.org/drawingml/2006/main">
               <a:ext uri="{FF2B5EF4-FFF2-40B4-BE49-F238E27FC236}">
-                <a16:creationId xmlns:a16="http://schemas.microsoft.com/office/drawing/2014/main" id="{25D27B1D-4CBD-4411-8D41-C915CDB6D92F}"/>
+                <a16:creationId xmlns:a16="http://schemas.microsoft.com/office/drawing/2014/main" id="{C9010636-1A5C-41E2-BA5E-F82F1178BD48}"/>
               </a:ext>
             </a:extLst>
           </p:cNvPr>
@@ -12092,7 +12009,7 @@
           <p:cNvPr id="5" name="TextBox 4">
             <a:extLst xmlns:a="http://schemas.openxmlformats.org/drawingml/2006/main">
               <a:ext uri="{FF2B5EF4-FFF2-40B4-BE49-F238E27FC236}">
-                <a16:creationId xmlns:a16="http://schemas.microsoft.com/office/drawing/2014/main" id="{0356A614-CB53-4541-B617-0E39D7DA2849}"/>
+                <a16:creationId xmlns:a16="http://schemas.microsoft.com/office/drawing/2014/main" id="{C3BF3BD5-624B-432E-ABF5-5D58049A1D56}"/>
               </a:ext>
             </a:extLst>
           </p:cNvPr>
@@ -12155,7 +12072,7 @@
           <p:cNvPr id="6" name="shape_slide_8_d2i_axes">
             <a:extLst xmlns:a="http://schemas.openxmlformats.org/drawingml/2006/main">
               <a:ext uri="{FF2B5EF4-FFF2-40B4-BE49-F238E27FC236}">
-                <a16:creationId xmlns:a16="http://schemas.microsoft.com/office/drawing/2014/main" id="{E983C969-BDD6-4470-9EEB-DF8F393E2A2B}"/>
+                <a16:creationId xmlns:a16="http://schemas.microsoft.com/office/drawing/2014/main" id="{03778E68-6C07-4627-B932-3510A5CFBBDB}"/>
               </a:ext>
             </a:extLst>
           </p:cNvPr>
@@ -12210,7 +12127,7 @@
           <p:cNvPr id="7" name="shape_slide_8_d2i_axes_textbox">
             <a:extLst xmlns:a="http://schemas.openxmlformats.org/drawingml/2006/main">
               <a:ext uri="{FF2B5EF4-FFF2-40B4-BE49-F238E27FC236}">
-                <a16:creationId xmlns:a16="http://schemas.microsoft.com/office/drawing/2014/main" id="{40529CD9-54CF-4E8C-870C-EB71E5AD08EC}"/>
+                <a16:creationId xmlns:a16="http://schemas.microsoft.com/office/drawing/2014/main" id="{5D04E167-9625-49A6-A7F2-E528ACA2EB12}"/>
               </a:ext>
             </a:extLst>
           </p:cNvPr>
@@ -12333,7 +12250,7 @@
           <p:cNvPr id="8" name="shape_slide_8_conditional_accuracy">
             <a:extLst xmlns:a="http://schemas.openxmlformats.org/drawingml/2006/main">
               <a:ext uri="{FF2B5EF4-FFF2-40B4-BE49-F238E27FC236}">
-                <a16:creationId xmlns:a16="http://schemas.microsoft.com/office/drawing/2014/main" id="{9630B4F2-36A3-40F9-A0A1-960B272555DC}"/>
+                <a16:creationId xmlns:a16="http://schemas.microsoft.com/office/drawing/2014/main" id="{2566F62D-5FA4-4439-A5AA-E799BD13CF1A}"/>
               </a:ext>
             </a:extLst>
           </p:cNvPr>
@@ -12388,7 +12305,7 @@
           <p:cNvPr id="9" name="shape_slide_8_conditional_accuracy_textbox">
             <a:extLst xmlns:a="http://schemas.openxmlformats.org/drawingml/2006/main">
               <a:ext uri="{FF2B5EF4-FFF2-40B4-BE49-F238E27FC236}">
-                <a16:creationId xmlns:a16="http://schemas.microsoft.com/office/drawing/2014/main" id="{C3D034DD-44D4-48EE-AF48-43DCB9861BEA}"/>
+                <a16:creationId xmlns:a16="http://schemas.microsoft.com/office/drawing/2014/main" id="{DEEF1D4F-57E4-4C41-9E4A-3441048D7909}"/>
               </a:ext>
             </a:extLst>
           </p:cNvPr>
@@ -12431,10 +12348,10 @@
           <a:p xmlns:a="http://schemas.openxmlformats.org/drawingml/2006/main">
             <a:pPr>
               <a:spcBef>
-                <a:spcPts val="220"/>
-              </a:spcBef>
-              <a:buNone/>
-              <a:defRPr sz="1050">
+                <a:spcPts val="150"/>
+              </a:spcBef>
+              <a:buNone/>
+              <a:defRPr sz="1000">
                 <a:solidFill>
                   <a:srgbClr val="0F172A"/>
                 </a:solidFill>
@@ -12450,10 +12367,10 @@
           <a:p xmlns:a="http://schemas.openxmlformats.org/drawingml/2006/main">
             <a:pPr>
               <a:spcBef>
-                <a:spcPts val="220"/>
-              </a:spcBef>
-              <a:buNone/>
-              <a:defRPr sz="1050">
+                <a:spcPts val="150"/>
+              </a:spcBef>
+              <a:buNone/>
+              <a:defRPr sz="1000">
                 <a:solidFill>
                   <a:srgbClr val="0F172A"/>
                 </a:solidFill>
@@ -12469,10 +12386,10 @@
           <a:p xmlns:a="http://schemas.openxmlformats.org/drawingml/2006/main">
             <a:pPr>
               <a:spcBef>
-                <a:spcPts val="220"/>
-              </a:spcBef>
-              <a:buNone/>
-              <a:defRPr sz="1050">
+                <a:spcPts val="150"/>
+              </a:spcBef>
+              <a:buNone/>
+              <a:defRPr sz="1000">
                 <a:solidFill>
                   <a:srgbClr val="0F172A"/>
                 </a:solidFill>
@@ -12488,10 +12405,10 @@
           <a:p xmlns:a="http://schemas.openxmlformats.org/drawingml/2006/main">
             <a:pPr>
               <a:spcBef>
-                <a:spcPts val="220"/>
-              </a:spcBef>
-              <a:buNone/>
-              <a:defRPr sz="1050">
+                <a:spcPts val="150"/>
+              </a:spcBef>
+              <a:buNone/>
+              <a:defRPr sz="1000">
                 <a:solidFill>
                   <a:srgbClr val="0F172A"/>
                 </a:solidFill>
@@ -12507,10 +12424,29 @@
           <a:p xmlns:a="http://schemas.openxmlformats.org/drawingml/2006/main">
             <a:pPr>
               <a:spcBef>
-                <a:spcPts val="220"/>
-              </a:spcBef>
-              <a:buNone/>
-              <a:defRPr sz="1050">
+                <a:spcPts val="150"/>
+              </a:spcBef>
+              <a:buNone/>
+              <a:defRPr sz="1000">
+                <a:solidFill>
+                  <a:srgbClr val="0F172A"/>
+                </a:solidFill>
+                <a:latin typeface="Calibri"/>
+                <a:ea typeface="Calibri"/>
+                <a:cs typeface="Calibri"/>
+              </a:defRPr>
+            </a:pPr>
+            <a:r>
+              <a:t>•  Macro-F1 (vũ trụ 474 lớp D2d FROZEN_BENCHMARK_UNIVERSE): No-RAG 0.0126 vs RAG k=10 0.0140 (Delta +0.0014; 8 supported classes, 466 zero-support classes).</a:t>
+            </a:r>
+          </a:p>
+          <a:p xmlns:a="http://schemas.openxmlformats.org/drawingml/2006/main">
+            <a:pPr>
+              <a:spcBef>
+                <a:spcPts val="150"/>
+              </a:spcBef>
+              <a:buNone/>
+              <a:defRPr sz="1000">
                 <a:solidFill>
                   <a:srgbClr val="0F172A"/>
                 </a:solidFill>
@@ -12526,10 +12462,10 @@
           <a:p xmlns:a="http://schemas.openxmlformats.org/drawingml/2006/main">
             <a:pPr>
               <a:spcBef>
-                <a:spcPts val="220"/>
-              </a:spcBef>
-              <a:buNone/>
-              <a:defRPr sz="1050">
+                <a:spcPts val="150"/>
+              </a:spcBef>
+              <a:buNone/>
+              <a:defRPr sz="1000">
                 <a:solidFill>
                   <a:srgbClr val="0F172A"/>
                 </a:solidFill>
@@ -12549,7 +12485,7 @@
           <p:cNvPr id="10" name="shape_slide_8_rq1_attribution">
             <a:extLst xmlns:a="http://schemas.openxmlformats.org/drawingml/2006/main">
               <a:ext uri="{FF2B5EF4-FFF2-40B4-BE49-F238E27FC236}">
-                <a16:creationId xmlns:a16="http://schemas.microsoft.com/office/drawing/2014/main" id="{1B120C34-FC44-4001-B367-511BA1AFB4CE}"/>
+                <a16:creationId xmlns:a16="http://schemas.microsoft.com/office/drawing/2014/main" id="{1E99DCE5-63EA-40E2-BC6E-CB12EF181CA6}"/>
               </a:ext>
             </a:extLst>
           </p:cNvPr>
@@ -12604,7 +12540,7 @@
           <p:cNvPr id="11" name="shape_slide_8_rq1_attribution_textbox">
             <a:extLst xmlns:a="http://schemas.openxmlformats.org/drawingml/2006/main">
               <a:ext uri="{FF2B5EF4-FFF2-40B4-BE49-F238E27FC236}">
-                <a16:creationId xmlns:a16="http://schemas.microsoft.com/office/drawing/2014/main" id="{6A926E64-F9E4-428D-8B07-8B897C0139FF}"/>
+                <a16:creationId xmlns:a16="http://schemas.microsoft.com/office/drawing/2014/main" id="{9B88E60E-EDD1-4262-9B6B-B8F4831B537F}"/>
               </a:ext>
             </a:extLst>
           </p:cNvPr>
@@ -12655,10 +12591,10 @@
           <a:p xmlns:a="http://schemas.openxmlformats.org/drawingml/2006/main">
             <a:pPr>
               <a:spcBef>
-                <a:spcPts val="250"/>
-              </a:spcBef>
-              <a:buNone/>
-              <a:defRPr sz="1050">
+                <a:spcPts val="150"/>
+              </a:spcBef>
+              <a:buNone/>
+              <a:defRPr sz="1000">
                 <a:solidFill>
                   <a:srgbClr val="0F172A"/>
                 </a:solidFill>
@@ -12682,10 +12618,10 @@
           <a:p xmlns:a="http://schemas.openxmlformats.org/drawingml/2006/main">
             <a:pPr>
               <a:spcBef>
-                <a:spcPts val="250"/>
-              </a:spcBef>
-              <a:buNone/>
-              <a:defRPr sz="1050">
+                <a:spcPts val="150"/>
+              </a:spcBef>
+              <a:buNone/>
+              <a:defRPr sz="1000">
                 <a:solidFill>
                   <a:srgbClr val="0F172A"/>
                 </a:solidFill>
@@ -12709,10 +12645,10 @@
           <a:p xmlns:a="http://schemas.openxmlformats.org/drawingml/2006/main">
             <a:pPr>
               <a:spcBef>
-                <a:spcPts val="250"/>
-              </a:spcBef>
-              <a:buNone/>
-              <a:defRPr sz="1050">
+                <a:spcPts val="150"/>
+              </a:spcBef>
+              <a:buNone/>
+              <a:defRPr sz="1000">
                 <a:solidFill>
                   <a:srgbClr val="0F172A"/>
                 </a:solidFill>
@@ -12736,10 +12672,10 @@
           <a:p xmlns:a="http://schemas.openxmlformats.org/drawingml/2006/main">
             <a:pPr>
               <a:spcBef>
-                <a:spcPts val="250"/>
-              </a:spcBef>
-              <a:buNone/>
-              <a:defRPr sz="1050">
+                <a:spcPts val="150"/>
+              </a:spcBef>
+              <a:buNone/>
+              <a:defRPr sz="1000">
                 <a:solidFill>
                   <a:srgbClr val="0F172A"/>
                 </a:solidFill>
@@ -12763,10 +12699,10 @@
           <a:p xmlns:a="http://schemas.openxmlformats.org/drawingml/2006/main">
             <a:pPr>
               <a:spcBef>
-                <a:spcPts val="250"/>
-              </a:spcBef>
-              <a:buNone/>
-              <a:defRPr sz="1050">
+                <a:spcPts val="150"/>
+              </a:spcBef>
+              <a:buNone/>
+              <a:defRPr sz="1000">
                 <a:solidFill>
                   <a:srgbClr val="0F172A"/>
                 </a:solidFill>
@@ -12790,10 +12726,10 @@
           <a:p xmlns:a="http://schemas.openxmlformats.org/drawingml/2006/main">
             <a:pPr>
               <a:spcBef>
-                <a:spcPts val="250"/>
-              </a:spcBef>
-              <a:buNone/>
-              <a:defRPr sz="1050">
+                <a:spcPts val="150"/>
+              </a:spcBef>
+              <a:buNone/>
+              <a:defRPr sz="1000">
                 <a:solidFill>
                   <a:srgbClr val="0F172A"/>
                 </a:solidFill>
@@ -12817,10 +12753,10 @@
           <a:p xmlns:a="http://schemas.openxmlformats.org/drawingml/2006/main">
             <a:pPr>
               <a:spcBef>
-                <a:spcPts val="250"/>
-              </a:spcBef>
-              <a:buNone/>
-              <a:defRPr sz="1050">
+                <a:spcPts val="150"/>
+              </a:spcBef>
+              <a:buNone/>
+              <a:defRPr sz="1000">
                 <a:solidFill>
                   <a:srgbClr val="0F172A"/>
                 </a:solidFill>
@@ -12844,10 +12780,10 @@
           <a:p xmlns:a="http://schemas.openxmlformats.org/drawingml/2006/main">
             <a:pPr>
               <a:spcBef>
-                <a:spcPts val="250"/>
-              </a:spcBef>
-              <a:buNone/>
-              <a:defRPr sz="1050">
+                <a:spcPts val="150"/>
+              </a:spcBef>
+              <a:buNone/>
+              <a:defRPr sz="1000">
                 <a:solidFill>
                   <a:srgbClr val="0F172A"/>
                 </a:solidFill>
@@ -12871,10 +12807,10 @@
           <a:p xmlns:a="http://schemas.openxmlformats.org/drawingml/2006/main">
             <a:pPr>
               <a:spcBef>
-                <a:spcPts val="250"/>
-              </a:spcBef>
-              <a:buNone/>
-              <a:defRPr sz="1050">
+                <a:spcPts val="150"/>
+              </a:spcBef>
+              <a:buNone/>
+              <a:defRPr sz="1000">
                 <a:solidFill>
                   <a:srgbClr val="0F172A"/>
                 </a:solidFill>
@@ -12898,10 +12834,10 @@
           <a:p xmlns:a="http://schemas.openxmlformats.org/drawingml/2006/main">
             <a:pPr>
               <a:spcBef>
-                <a:spcPts val="250"/>
-              </a:spcBef>
-              <a:buNone/>
-              <a:defRPr sz="1050">
+                <a:spcPts val="150"/>
+              </a:spcBef>
+              <a:buNone/>
+              <a:defRPr sz="1000">
                 <a:solidFill>
                   <a:srgbClr val="0F172A"/>
                 </a:solidFill>
@@ -12925,10 +12861,10 @@
           <a:p xmlns:a="http://schemas.openxmlformats.org/drawingml/2006/main">
             <a:pPr>
               <a:spcBef>
-                <a:spcPts val="250"/>
-              </a:spcBef>
-              <a:buNone/>
-              <a:defRPr sz="1050">
+                <a:spcPts val="150"/>
+              </a:spcBef>
+              <a:buNone/>
+              <a:defRPr sz="1000">
                 <a:solidFill>
                   <a:srgbClr val="0F172A"/>
                 </a:solidFill>
@@ -12954,7 +12890,7 @@
     </p:spTree>
     <p:extLst>
       <p:ext uri="{BB962C8B-B14F-4D97-AF65-F5344CB8AC3E}">
-        <p14:creationId xmlns:p14="http://schemas.microsoft.com/office/powerpoint/2010/main" val="2061613900"/>
+        <p14:creationId xmlns:p14="http://schemas.microsoft.com/office/powerpoint/2010/main" val="965067300"/>
       </p:ext>
     </p:extLst>
   </p:cSld>
@@ -12978,7 +12914,7 @@
           <p:cNvPr id="2" name="Rectangle 1">
             <a:extLst xmlns:a="http://schemas.openxmlformats.org/drawingml/2006/main">
               <a:ext uri="{FF2B5EF4-FFF2-40B4-BE49-F238E27FC236}">
-                <a16:creationId xmlns:a16="http://schemas.microsoft.com/office/drawing/2014/main" id="{47075733-50C4-42F6-8A96-262785ABBA5A}"/>
+                <a16:creationId xmlns:a16="http://schemas.microsoft.com/office/drawing/2014/main" id="{96102E3E-086E-49F0-A510-0F5B4920F7F6}"/>
               </a:ext>
             </a:extLst>
           </p:cNvPr>
@@ -13031,7 +12967,7 @@
           <p:cNvPr id="3" name="Rectangle 2">
             <a:extLst xmlns:a="http://schemas.openxmlformats.org/drawingml/2006/main">
               <a:ext uri="{FF2B5EF4-FFF2-40B4-BE49-F238E27FC236}">
-                <a16:creationId xmlns:a16="http://schemas.microsoft.com/office/drawing/2014/main" id="{3EDE7F63-671B-4F95-8A4E-0E821CFC3485}"/>
+                <a16:creationId xmlns:a16="http://schemas.microsoft.com/office/drawing/2014/main" id="{7EAC0A06-4624-4DA2-86A3-F87134DBD8C9}"/>
               </a:ext>
             </a:extLst>
           </p:cNvPr>
@@ -13084,7 +13020,7 @@
           <p:cNvPr id="4" name="Rectangle 3">
             <a:extLst xmlns:a="http://schemas.openxmlformats.org/drawingml/2006/main">
               <a:ext uri="{FF2B5EF4-FFF2-40B4-BE49-F238E27FC236}">
-                <a16:creationId xmlns:a16="http://schemas.microsoft.com/office/drawing/2014/main" id="{5E0244CE-8860-4D32-9F93-992E05867129}"/>
+                <a16:creationId xmlns:a16="http://schemas.microsoft.com/office/drawing/2014/main" id="{254716AD-2714-4BBA-B97C-B14CD711A369}"/>
               </a:ext>
             </a:extLst>
           </p:cNvPr>
@@ -13137,7 +13073,7 @@
           <p:cNvPr id="5" name="TextBox 4">
             <a:extLst xmlns:a="http://schemas.openxmlformats.org/drawingml/2006/main">
               <a:ext uri="{FF2B5EF4-FFF2-40B4-BE49-F238E27FC236}">
-                <a16:creationId xmlns:a16="http://schemas.microsoft.com/office/drawing/2014/main" id="{F603B258-DBF3-4A37-A8F7-9AC0C3C1410B}"/>
+                <a16:creationId xmlns:a16="http://schemas.microsoft.com/office/drawing/2014/main" id="{56D4056E-B821-4849-9ADD-18D384047246}"/>
               </a:ext>
             </a:extLst>
           </p:cNvPr>
@@ -13200,7 +13136,7 @@
           <p:cNvPr id="6" name="shape_slide_9_rq3_resources">
             <a:extLst xmlns:a="http://schemas.openxmlformats.org/drawingml/2006/main">
               <a:ext uri="{FF2B5EF4-FFF2-40B4-BE49-F238E27FC236}">
-                <a16:creationId xmlns:a16="http://schemas.microsoft.com/office/drawing/2014/main" id="{05D7F0BB-3165-46DD-B575-2BF1424A90CC}"/>
+                <a16:creationId xmlns:a16="http://schemas.microsoft.com/office/drawing/2014/main" id="{80017D34-80C9-4A0E-ABC7-C9E979684D29}"/>
               </a:ext>
             </a:extLst>
           </p:cNvPr>
@@ -13255,7 +13191,7 @@
           <p:cNvPr id="7" name="shape_slide_9_rq3_resources_textbox">
             <a:extLst xmlns:a="http://schemas.openxmlformats.org/drawingml/2006/main">
               <a:ext uri="{FF2B5EF4-FFF2-40B4-BE49-F238E27FC236}">
-                <a16:creationId xmlns:a16="http://schemas.microsoft.com/office/drawing/2014/main" id="{C26C602D-DD49-43B8-B197-A958734B8A63}"/>
+                <a16:creationId xmlns:a16="http://schemas.microsoft.com/office/drawing/2014/main" id="{BEEFF16A-F48E-4DDC-9F0F-CEEA5CE0ED19}"/>
               </a:ext>
             </a:extLst>
           </p:cNvPr>
@@ -13309,7 +13245,7 @@
                 <a:spcPts val="180"/>
               </a:spcBef>
               <a:buNone/>
-              <a:defRPr sz="1050">
+              <a:defRPr sz="1000">
                 <a:solidFill>
                   <a:srgbClr val="0F172A"/>
                 </a:solidFill>
@@ -13336,7 +13272,7 @@
                 <a:spcPts val="180"/>
               </a:spcBef>
               <a:buNone/>
-              <a:defRPr sz="1050">
+              <a:defRPr sz="1000">
                 <a:solidFill>
                   <a:srgbClr val="0F172A"/>
                 </a:solidFill>
@@ -13363,7 +13299,7 @@
                 <a:spcPts val="180"/>
               </a:spcBef>
               <a:buNone/>
-              <a:defRPr sz="1050">
+              <a:defRPr sz="1000">
                 <a:solidFill>
                   <a:srgbClr val="0F172A"/>
                 </a:solidFill>
@@ -13390,7 +13326,7 @@
                 <a:spcPts val="180"/>
               </a:spcBef>
               <a:buNone/>
-              <a:defRPr sz="1050">
+              <a:defRPr sz="1000">
                 <a:solidFill>
                   <a:srgbClr val="0F172A"/>
                 </a:solidFill>
@@ -13417,7 +13353,7 @@
                 <a:spcPts val="180"/>
               </a:spcBef>
               <a:buNone/>
-              <a:defRPr sz="1050">
+              <a:defRPr sz="1000">
                 <a:solidFill>
                   <a:srgbClr val="0F172A"/>
                 </a:solidFill>
@@ -13444,7 +13380,7 @@
                 <a:spcPts val="180"/>
               </a:spcBef>
               <a:buNone/>
-              <a:defRPr sz="1050">
+              <a:defRPr sz="1000">
                 <a:solidFill>
                   <a:srgbClr val="0F172A"/>
                 </a:solidFill>
@@ -13471,7 +13407,7 @@
                 <a:spcPts val="180"/>
               </a:spcBef>
               <a:buNone/>
-              <a:defRPr sz="1050">
+              <a:defRPr sz="1000">
                 <a:solidFill>
                   <a:srgbClr val="0F172A"/>
                 </a:solidFill>
@@ -13498,7 +13434,7 @@
                 <a:spcPts val="180"/>
               </a:spcBef>
               <a:buNone/>
-              <a:defRPr sz="1050">
+              <a:defRPr sz="1000">
                 <a:solidFill>
                   <a:srgbClr val="0F172A"/>
                 </a:solidFill>
@@ -13525,7 +13461,7 @@
                 <a:spcPts val="180"/>
               </a:spcBef>
               <a:buNone/>
-              <a:defRPr sz="1050">
+              <a:defRPr sz="1000">
                 <a:solidFill>
                   <a:srgbClr val="0F172A"/>
                 </a:solidFill>
@@ -13552,7 +13488,7 @@
                 <a:spcPts val="180"/>
               </a:spcBef>
               <a:buNone/>
-              <a:defRPr sz="1050">
+              <a:defRPr sz="1000">
                 <a:solidFill>
                   <a:srgbClr val="0F172A"/>
                 </a:solidFill>
@@ -13579,7 +13515,7 @@
                 <a:spcPts val="180"/>
               </a:spcBef>
               <a:buNone/>
-              <a:defRPr sz="1050">
+              <a:defRPr sz="1000">
                 <a:solidFill>
                   <a:srgbClr val="0F172A"/>
                 </a:solidFill>
@@ -13606,7 +13542,7 @@
                 <a:spcPts val="180"/>
               </a:spcBef>
               <a:buNone/>
-              <a:defRPr sz="1050">
+              <a:defRPr sz="1000">
                 <a:solidFill>
                   <a:srgbClr val="0F172A"/>
                 </a:solidFill>
@@ -13633,7 +13569,7 @@
                 <a:spcPts val="180"/>
               </a:spcBef>
               <a:buNone/>
-              <a:defRPr sz="1050">
+              <a:defRPr sz="1000">
                 <a:solidFill>
                   <a:srgbClr val="0F172A"/>
                 </a:solidFill>
@@ -13660,7 +13596,7 @@
                 <a:spcPts val="180"/>
               </a:spcBef>
               <a:buNone/>
-              <a:defRPr sz="1050">
+              <a:defRPr sz="1000">
                 <a:solidFill>
                   <a:srgbClr val="0F172A"/>
                 </a:solidFill>
@@ -13687,7 +13623,7 @@
                 <a:spcPts val="180"/>
               </a:spcBef>
               <a:buNone/>
-              <a:defRPr sz="1050">
+              <a:defRPr sz="1000">
                 <a:solidFill>
                   <a:srgbClr val="0F172A"/>
                 </a:solidFill>
@@ -13719,7 +13655,7 @@
           <p:nvPr/>
         </p:nvPicPr>
         <p:blipFill>
-          <a:blip xmlns:r="http://schemas.openxmlformats.org/officeDocument/2006/relationships" xmlns:a="http://schemas.openxmlformats.org/drawingml/2006/main" r:embed="Radc785b5bd864996"/>
+          <a:blip xmlns:r="http://schemas.openxmlformats.org/officeDocument/2006/relationships" xmlns:a="http://schemas.openxmlformats.org/drawingml/2006/main" r:embed="Rd9a2422bd949420a"/>
           <a:stretch xmlns:a="http://schemas.openxmlformats.org/drawingml/2006/main">
             <a:fillRect l="0" t="0" r="0" b="0"/>
           </a:stretch>
@@ -13727,7 +13663,7 @@
         <p:spPr>
           <a:xfrm xmlns:a="http://schemas.openxmlformats.org/drawingml/2006/main">
             <a:off x="6248095" y="1234440"/>
-            <a:ext cx="5212080" cy="2132215"/>
+            <a:ext cx="5212080" cy="3474720"/>
           </a:xfrm>
           <a:prstGeom xmlns:a="http://schemas.openxmlformats.org/drawingml/2006/main" prst="rect">
             <a:avLst/>
@@ -13739,7 +13675,7 @@
           <p:cNvPr id="9" name="shape_slide_9_accounting">
             <a:extLst xmlns:a="http://schemas.openxmlformats.org/drawingml/2006/main">
               <a:ext uri="{FF2B5EF4-FFF2-40B4-BE49-F238E27FC236}">
-                <a16:creationId xmlns:a16="http://schemas.microsoft.com/office/drawing/2014/main" id="{84A5E71A-3E81-4163-9297-5EA04C119073}"/>
+                <a16:creationId xmlns:a16="http://schemas.microsoft.com/office/drawing/2014/main" id="{C6B051B1-598E-4F44-BDFC-AF56AB0B742B}"/>
               </a:ext>
             </a:extLst>
           </p:cNvPr>
@@ -13794,7 +13730,7 @@
           <p:cNvPr id="10" name="shape_slide_9_accounting_textbox">
             <a:extLst xmlns:a="http://schemas.openxmlformats.org/drawingml/2006/main">
               <a:ext uri="{FF2B5EF4-FFF2-40B4-BE49-F238E27FC236}">
-                <a16:creationId xmlns:a16="http://schemas.microsoft.com/office/drawing/2014/main" id="{5B5A4643-B308-4857-887F-A40DB6F08CE8}"/>
+                <a16:creationId xmlns:a16="http://schemas.microsoft.com/office/drawing/2014/main" id="{02D98A25-C4DF-477B-A1BA-50C06000BE46}"/>
               </a:ext>
             </a:extLst>
           </p:cNvPr>
@@ -13837,29 +13773,29 @@
           <a:p xmlns:a="http://schemas.openxmlformats.org/drawingml/2006/main">
             <a:pPr>
               <a:spcBef>
-                <a:spcPts val="250"/>
-              </a:spcBef>
-              <a:buNone/>
-              <a:defRPr sz="1100">
-                <a:solidFill>
-                  <a:srgbClr val="0F172A"/>
-                </a:solidFill>
-                <a:latin typeface="Calibri"/>
-                <a:ea typeface="Calibri"/>
-                <a:cs typeface="Calibri"/>
-              </a:defRPr>
-            </a:pPr>
-            <a:r>
-              <a:t>•  Tăng k từ 1 lên 10 nâng Hit rate từ 3.76% lên 44.71%, nhưng lượng token đầu vào tăng ~7.6x.</a:t>
-            </a:r>
-          </a:p>
-          <a:p xmlns:a="http://schemas.openxmlformats.org/drawingml/2006/main">
-            <a:pPr>
-              <a:spcBef>
-                <a:spcPts val="250"/>
-              </a:spcBef>
-              <a:buNone/>
-              <a:defRPr sz="1100">
+                <a:spcPts val="220"/>
+              </a:spcBef>
+              <a:buNone/>
+              <a:defRPr sz="1050">
+                <a:solidFill>
+                  <a:srgbClr val="0F172A"/>
+                </a:solidFill>
+                <a:latin typeface="Calibri"/>
+                <a:ea typeface="Calibri"/>
+                <a:cs typeface="Calibri"/>
+              </a:defRPr>
+            </a:pPr>
+            <a:r>
+              <a:t>•  Tăng k từ 1 lên 10 (k1 -&gt; k10): Lượng token đầu vào prompt tăng ~4.103x (1246.5 lên 5114.3 tokens). So với No-RAG (674.3 tokens), k=10 tăng ~7.58x.</a:t>
+            </a:r>
+          </a:p>
+          <a:p xmlns:a="http://schemas.openxmlformats.org/drawingml/2006/main">
+            <a:pPr>
+              <a:spcBef>
+                <a:spcPts val="220"/>
+              </a:spcBef>
+              <a:buNone/>
+              <a:defRPr sz="1050">
                 <a:solidFill>
                   <a:srgbClr val="0F172A"/>
                 </a:solidFill>
@@ -13877,7 +13813,7 @@
     </p:spTree>
     <p:extLst>
       <p:ext uri="{BB962C8B-B14F-4D97-AF65-F5344CB8AC3E}">
-        <p14:creationId xmlns:p14="http://schemas.microsoft.com/office/powerpoint/2010/main" val="865975904"/>
+        <p14:creationId xmlns:p14="http://schemas.microsoft.com/office/powerpoint/2010/main" val="202859983"/>
       </p:ext>
     </p:extLst>
   </p:cSld>

--- a/reports/evidence/fixture_populated_slides.pptx
+++ b/reports/evidence/fixture_populated_slides.pptx
@@ -2,24 +2,24 @@
 <file path=ppt/presentation.xml><?xml version="1.0" encoding="utf-8"?>
 <p:presentation xmlns:p="http://schemas.openxmlformats.org/presentationml/2006/main">
   <p:sldMasterIdLst>
-    <p:sldMasterId xmlns:r="http://schemas.openxmlformats.org/officeDocument/2006/relationships" id="2147483648" r:id="R6f04625a812b42cc"/>
+    <p:sldMasterId xmlns:r="http://schemas.openxmlformats.org/officeDocument/2006/relationships" id="2147483648" r:id="Rf691228c781e40c6"/>
   </p:sldMasterIdLst>
   <p:notesMasterIdLst>
-    <p:notesMasterId xmlns:r="http://schemas.openxmlformats.org/officeDocument/2006/relationships" r:id="R9b9147c88d7c4927"/>
+    <p:notesMasterId xmlns:r="http://schemas.openxmlformats.org/officeDocument/2006/relationships" r:id="Ra39a358385df4059"/>
   </p:notesMasterIdLst>
   <p:sldIdLst>
-    <p:sldId xmlns:r="http://schemas.openxmlformats.org/officeDocument/2006/relationships" id="256" r:id="R9278dc12cbd945f6"/>
-    <p:sldId xmlns:r="http://schemas.openxmlformats.org/officeDocument/2006/relationships" id="257" r:id="R0db90ed9fdba486e"/>
-    <p:sldId xmlns:r="http://schemas.openxmlformats.org/officeDocument/2006/relationships" id="258" r:id="Rb40769a3602c40aa"/>
-    <p:sldId xmlns:r="http://schemas.openxmlformats.org/officeDocument/2006/relationships" id="259" r:id="R6147942bcfef42f2"/>
-    <p:sldId xmlns:r="http://schemas.openxmlformats.org/officeDocument/2006/relationships" id="260" r:id="R0450c55f09764bcf"/>
-    <p:sldId xmlns:r="http://schemas.openxmlformats.org/officeDocument/2006/relationships" id="261" r:id="R91016e2cb2f34896"/>
-    <p:sldId xmlns:r="http://schemas.openxmlformats.org/officeDocument/2006/relationships" id="262" r:id="R54d1adb51fce4f1f"/>
-    <p:sldId xmlns:r="http://schemas.openxmlformats.org/officeDocument/2006/relationships" id="263" r:id="R6c73344a386d4e37"/>
-    <p:sldId xmlns:r="http://schemas.openxmlformats.org/officeDocument/2006/relationships" id="264" r:id="R64002a4c14124412"/>
-    <p:sldId xmlns:r="http://schemas.openxmlformats.org/officeDocument/2006/relationships" id="265" r:id="Rd8f27e3493614a81"/>
-    <p:sldId xmlns:r="http://schemas.openxmlformats.org/officeDocument/2006/relationships" id="266" r:id="R92813597d8a8442b"/>
-    <p:sldId xmlns:r="http://schemas.openxmlformats.org/officeDocument/2006/relationships" id="267" r:id="R9a3df0d670dd4a08"/>
+    <p:sldId xmlns:r="http://schemas.openxmlformats.org/officeDocument/2006/relationships" id="256" r:id="Rb8cdc3af03724a19"/>
+    <p:sldId xmlns:r="http://schemas.openxmlformats.org/officeDocument/2006/relationships" id="257" r:id="Rc1a2329efd4a4269"/>
+    <p:sldId xmlns:r="http://schemas.openxmlformats.org/officeDocument/2006/relationships" id="258" r:id="R25d112fde3d145ca"/>
+    <p:sldId xmlns:r="http://schemas.openxmlformats.org/officeDocument/2006/relationships" id="259" r:id="R84e8688f6c354352"/>
+    <p:sldId xmlns:r="http://schemas.openxmlformats.org/officeDocument/2006/relationships" id="260" r:id="Rb2a10f6afd464308"/>
+    <p:sldId xmlns:r="http://schemas.openxmlformats.org/officeDocument/2006/relationships" id="261" r:id="Re7c2fd6f6e40471e"/>
+    <p:sldId xmlns:r="http://schemas.openxmlformats.org/officeDocument/2006/relationships" id="262" r:id="R37fd1d479e574269"/>
+    <p:sldId xmlns:r="http://schemas.openxmlformats.org/officeDocument/2006/relationships" id="263" r:id="R5b95ec84e17748a9"/>
+    <p:sldId xmlns:r="http://schemas.openxmlformats.org/officeDocument/2006/relationships" id="264" r:id="Rcdc0c0a99fc743bb"/>
+    <p:sldId xmlns:r="http://schemas.openxmlformats.org/officeDocument/2006/relationships" id="265" r:id="R98028ac5435146ee"/>
+    <p:sldId xmlns:r="http://schemas.openxmlformats.org/officeDocument/2006/relationships" id="266" r:id="R9149fa8c4e9349a9"/>
+    <p:sldId xmlns:r="http://schemas.openxmlformats.org/officeDocument/2006/relationships" id="267" r:id="R80b3af8c3dce4976"/>
   </p:sldIdLst>
   <p:sldSz cx="12191695" cy="6858000"/>
   <p:notesSz cx="6858000" cy="9144000"/>
@@ -1642,7 +1642,7 @@
           <p:cNvPr id="2" name="Title 1">
             <a:extLst xmlns:a="http://schemas.openxmlformats.org/drawingml/2006/main">
               <a:ext uri="{FF2B5EF4-FFF2-40B4-BE49-F238E27FC236}">
-                <a16:creationId xmlns:a16="http://schemas.microsoft.com/office/drawing/2014/main" id="{A5744BE0-C119-44C8-83CD-767D4A22D216}"/>
+                <a16:creationId xmlns:a16="http://schemas.microsoft.com/office/drawing/2014/main" id="{17407B76-8075-42D3-A608-063B22F4F683}"/>
               </a:ext>
             </a:extLst>
           </p:cNvPr>
@@ -1675,7 +1675,7 @@
           <p:cNvPr id="3" name="Subtitle 2">
             <a:extLst xmlns:a="http://schemas.openxmlformats.org/drawingml/2006/main">
               <a:ext uri="{FF2B5EF4-FFF2-40B4-BE49-F238E27FC236}">
-                <a16:creationId xmlns:a16="http://schemas.microsoft.com/office/drawing/2014/main" id="{D4CC9CFC-6D6F-4495-9951-023DD1625DD4}"/>
+                <a16:creationId xmlns:a16="http://schemas.microsoft.com/office/drawing/2014/main" id="{56919E36-BE2B-48C8-ADBA-3A78F1A82368}"/>
               </a:ext>
             </a:extLst>
           </p:cNvPr>
@@ -1799,7 +1799,7 @@
           <p:cNvPr id="4" name="Date Placeholder 3">
             <a:extLst xmlns:a="http://schemas.openxmlformats.org/drawingml/2006/main">
               <a:ext uri="{FF2B5EF4-FFF2-40B4-BE49-F238E27FC236}">
-                <a16:creationId xmlns:a16="http://schemas.microsoft.com/office/drawing/2014/main" id="{42E57BC1-0229-45E3-BC2B-4F7B0E39ED49}"/>
+                <a16:creationId xmlns:a16="http://schemas.microsoft.com/office/drawing/2014/main" id="{DC36394B-C746-444F-81B5-2ABE0DDB6849}"/>
               </a:ext>
             </a:extLst>
           </p:cNvPr>
@@ -1827,7 +1827,7 @@
           <p:cNvPr id="5" name="Footer Placeholder 4">
             <a:extLst xmlns:a="http://schemas.openxmlformats.org/drawingml/2006/main">
               <a:ext uri="{FF2B5EF4-FFF2-40B4-BE49-F238E27FC236}">
-                <a16:creationId xmlns:a16="http://schemas.microsoft.com/office/drawing/2014/main" id="{7A3C3B20-83DD-4E09-98CA-62D86BF90522}"/>
+                <a16:creationId xmlns:a16="http://schemas.microsoft.com/office/drawing/2014/main" id="{FD3B6C2C-A8D6-4A93-AB95-4E165ED4B97D}"/>
               </a:ext>
             </a:extLst>
           </p:cNvPr>
@@ -1852,7 +1852,7 @@
           <p:cNvPr id="6" name="Slide Number Placeholder 5">
             <a:extLst xmlns:a="http://schemas.openxmlformats.org/drawingml/2006/main">
               <a:ext uri="{FF2B5EF4-FFF2-40B4-BE49-F238E27FC236}">
-                <a16:creationId xmlns:a16="http://schemas.microsoft.com/office/drawing/2014/main" id="{F3A9F2A1-7638-4E9B-BB25-7F984DD8A498}"/>
+                <a16:creationId xmlns:a16="http://schemas.microsoft.com/office/drawing/2014/main" id="{060DB9DA-FEC9-4CE0-8907-3DA3D5D1DF9A}"/>
               </a:ext>
             </a:extLst>
           </p:cNvPr>
@@ -1897,7 +1897,7 @@
           <p:cNvPr id="2" name="Title 1">
             <a:extLst xmlns:a="http://schemas.openxmlformats.org/drawingml/2006/main">
               <a:ext uri="{FF2B5EF4-FFF2-40B4-BE49-F238E27FC236}">
-                <a16:creationId xmlns:a16="http://schemas.microsoft.com/office/drawing/2014/main" id="{19745BFE-FC31-4D91-AAF1-2A7A15707E85}"/>
+                <a16:creationId xmlns:a16="http://schemas.microsoft.com/office/drawing/2014/main" id="{2AAF061F-3EBB-47D8-BBED-5A66BB4BBABA}"/>
               </a:ext>
             </a:extLst>
           </p:cNvPr>
@@ -1925,7 +1925,7 @@
           <p:cNvPr id="3" name="Vertical Text Placeholder 2">
             <a:extLst xmlns:a="http://schemas.openxmlformats.org/drawingml/2006/main">
               <a:ext uri="{FF2B5EF4-FFF2-40B4-BE49-F238E27FC236}">
-                <a16:creationId xmlns:a16="http://schemas.microsoft.com/office/drawing/2014/main" id="{6D5960DE-A833-4359-9417-CAE4CC70CE09}"/>
+                <a16:creationId xmlns:a16="http://schemas.microsoft.com/office/drawing/2014/main" id="{31AF2BAD-0ABF-4D01-990D-DFBF44BC2480}"/>
               </a:ext>
             </a:extLst>
           </p:cNvPr>
@@ -1988,7 +1988,7 @@
           <p:cNvPr id="4" name="Date Placeholder 3">
             <a:extLst xmlns:a="http://schemas.openxmlformats.org/drawingml/2006/main">
               <a:ext uri="{FF2B5EF4-FFF2-40B4-BE49-F238E27FC236}">
-                <a16:creationId xmlns:a16="http://schemas.microsoft.com/office/drawing/2014/main" id="{FBF12D78-9E9D-45DF-9E30-96B314D87C02}"/>
+                <a16:creationId xmlns:a16="http://schemas.microsoft.com/office/drawing/2014/main" id="{7737AB59-9B68-499F-B346-427193E7C309}"/>
               </a:ext>
             </a:extLst>
           </p:cNvPr>
@@ -2016,7 +2016,7 @@
           <p:cNvPr id="5" name="Footer Placeholder 4">
             <a:extLst xmlns:a="http://schemas.openxmlformats.org/drawingml/2006/main">
               <a:ext uri="{FF2B5EF4-FFF2-40B4-BE49-F238E27FC236}">
-                <a16:creationId xmlns:a16="http://schemas.microsoft.com/office/drawing/2014/main" id="{E316FC90-33E1-4012-8633-7FCE71316680}"/>
+                <a16:creationId xmlns:a16="http://schemas.microsoft.com/office/drawing/2014/main" id="{4CBD085F-86C0-418D-A9CB-39AE683DCBDE}"/>
               </a:ext>
             </a:extLst>
           </p:cNvPr>
@@ -2041,7 +2041,7 @@
           <p:cNvPr id="6" name="Slide Number Placeholder 5">
             <a:extLst xmlns:a="http://schemas.openxmlformats.org/drawingml/2006/main">
               <a:ext uri="{FF2B5EF4-FFF2-40B4-BE49-F238E27FC236}">
-                <a16:creationId xmlns:a16="http://schemas.microsoft.com/office/drawing/2014/main" id="{F023A3FA-759B-4FB6-AC30-7349BBF880E5}"/>
+                <a16:creationId xmlns:a16="http://schemas.microsoft.com/office/drawing/2014/main" id="{AB251A7B-576D-4586-8381-B804F3D4526F}"/>
               </a:ext>
             </a:extLst>
           </p:cNvPr>
@@ -2086,7 +2086,7 @@
           <p:cNvPr id="2" name="Vertical Title 1">
             <a:extLst xmlns:a="http://schemas.openxmlformats.org/drawingml/2006/main">
               <a:ext uri="{FF2B5EF4-FFF2-40B4-BE49-F238E27FC236}">
-                <a16:creationId xmlns:a16="http://schemas.microsoft.com/office/drawing/2014/main" id="{95CB1179-BFB8-48CD-988E-4D9FF85AAF08}"/>
+                <a16:creationId xmlns:a16="http://schemas.microsoft.com/office/drawing/2014/main" id="{8C669DC8-4A50-496C-895B-5C861A28E7BD}"/>
               </a:ext>
             </a:extLst>
           </p:cNvPr>
@@ -2119,7 +2119,7 @@
           <p:cNvPr id="3" name="Vertical Text Placeholder 2">
             <a:extLst xmlns:a="http://schemas.openxmlformats.org/drawingml/2006/main">
               <a:ext uri="{FF2B5EF4-FFF2-40B4-BE49-F238E27FC236}">
-                <a16:creationId xmlns:a16="http://schemas.microsoft.com/office/drawing/2014/main" id="{3E8C48D7-5AB0-4DDE-892C-D70FC929FC5A}"/>
+                <a16:creationId xmlns:a16="http://schemas.microsoft.com/office/drawing/2014/main" id="{DBF2436E-8BAF-4AB1-94A1-FA472E9BF2B9}"/>
               </a:ext>
             </a:extLst>
           </p:cNvPr>
@@ -2187,7 +2187,7 @@
           <p:cNvPr id="4" name="Date Placeholder 3">
             <a:extLst xmlns:a="http://schemas.openxmlformats.org/drawingml/2006/main">
               <a:ext uri="{FF2B5EF4-FFF2-40B4-BE49-F238E27FC236}">
-                <a16:creationId xmlns:a16="http://schemas.microsoft.com/office/drawing/2014/main" id="{A5B89BBC-2E2C-4266-97DE-306F7A1A1D0F}"/>
+                <a16:creationId xmlns:a16="http://schemas.microsoft.com/office/drawing/2014/main" id="{3FEA2FF5-0309-4ACB-8563-7D824808D936}"/>
               </a:ext>
             </a:extLst>
           </p:cNvPr>
@@ -2215,7 +2215,7 @@
           <p:cNvPr id="5" name="Footer Placeholder 4">
             <a:extLst xmlns:a="http://schemas.openxmlformats.org/drawingml/2006/main">
               <a:ext uri="{FF2B5EF4-FFF2-40B4-BE49-F238E27FC236}">
-                <a16:creationId xmlns:a16="http://schemas.microsoft.com/office/drawing/2014/main" id="{7C747B1A-9D57-4AA2-8B48-8786167DC09D}"/>
+                <a16:creationId xmlns:a16="http://schemas.microsoft.com/office/drawing/2014/main" id="{B76B701C-CE93-46C4-B784-F5AE518665E9}"/>
               </a:ext>
             </a:extLst>
           </p:cNvPr>
@@ -2240,7 +2240,7 @@
           <p:cNvPr id="6" name="Slide Number Placeholder 5">
             <a:extLst xmlns:a="http://schemas.openxmlformats.org/drawingml/2006/main">
               <a:ext uri="{FF2B5EF4-FFF2-40B4-BE49-F238E27FC236}">
-                <a16:creationId xmlns:a16="http://schemas.microsoft.com/office/drawing/2014/main" id="{08A40143-FEFE-4294-A8B2-D2C79A4A4970}"/>
+                <a16:creationId xmlns:a16="http://schemas.microsoft.com/office/drawing/2014/main" id="{6888CC0C-63B5-448F-B082-4E3FA7F04D19}"/>
               </a:ext>
             </a:extLst>
           </p:cNvPr>
@@ -2285,7 +2285,7 @@
           <p:cNvPr id="2" name="Title 1">
             <a:extLst xmlns:a="http://schemas.openxmlformats.org/drawingml/2006/main">
               <a:ext uri="{FF2B5EF4-FFF2-40B4-BE49-F238E27FC236}">
-                <a16:creationId xmlns:a16="http://schemas.microsoft.com/office/drawing/2014/main" id="{08A6C47B-0A4D-4090-BD95-45C4DF42225D}"/>
+                <a16:creationId xmlns:a16="http://schemas.microsoft.com/office/drawing/2014/main" id="{50B48C2F-01D1-41AA-9640-76A492386F32}"/>
               </a:ext>
             </a:extLst>
           </p:cNvPr>
@@ -2313,7 +2313,7 @@
           <p:cNvPr id="3" name="Content Placeholder 2">
             <a:extLst xmlns:a="http://schemas.openxmlformats.org/drawingml/2006/main">
               <a:ext uri="{FF2B5EF4-FFF2-40B4-BE49-F238E27FC236}">
-                <a16:creationId xmlns:a16="http://schemas.microsoft.com/office/drawing/2014/main" id="{1193BCA2-48D0-4081-91A0-5AFB1BA01F4E}"/>
+                <a16:creationId xmlns:a16="http://schemas.microsoft.com/office/drawing/2014/main" id="{7A236DA9-4B4F-4686-B1FB-68DC6D3CE838}"/>
               </a:ext>
             </a:extLst>
           </p:cNvPr>
@@ -2376,7 +2376,7 @@
           <p:cNvPr id="4" name="Date Placeholder 3">
             <a:extLst xmlns:a="http://schemas.openxmlformats.org/drawingml/2006/main">
               <a:ext uri="{FF2B5EF4-FFF2-40B4-BE49-F238E27FC236}">
-                <a16:creationId xmlns:a16="http://schemas.microsoft.com/office/drawing/2014/main" id="{83A28B88-0C76-4008-82C9-298416F50BBE}"/>
+                <a16:creationId xmlns:a16="http://schemas.microsoft.com/office/drawing/2014/main" id="{A02DA149-5904-4186-A41E-E3F3BC981C5D}"/>
               </a:ext>
             </a:extLst>
           </p:cNvPr>
@@ -2404,7 +2404,7 @@
           <p:cNvPr id="5" name="Footer Placeholder 4">
             <a:extLst xmlns:a="http://schemas.openxmlformats.org/drawingml/2006/main">
               <a:ext uri="{FF2B5EF4-FFF2-40B4-BE49-F238E27FC236}">
-                <a16:creationId xmlns:a16="http://schemas.microsoft.com/office/drawing/2014/main" id="{2A0D0232-3711-4EDB-A775-DE16628C1FF4}"/>
+                <a16:creationId xmlns:a16="http://schemas.microsoft.com/office/drawing/2014/main" id="{3E3A3B48-7873-42E6-A303-459556F941C9}"/>
               </a:ext>
             </a:extLst>
           </p:cNvPr>
@@ -2429,7 +2429,7 @@
           <p:cNvPr id="6" name="Slide Number Placeholder 5">
             <a:extLst xmlns:a="http://schemas.openxmlformats.org/drawingml/2006/main">
               <a:ext uri="{FF2B5EF4-FFF2-40B4-BE49-F238E27FC236}">
-                <a16:creationId xmlns:a16="http://schemas.microsoft.com/office/drawing/2014/main" id="{5829D05F-A8DA-49F0-AE34-41350AD6D995}"/>
+                <a16:creationId xmlns:a16="http://schemas.microsoft.com/office/drawing/2014/main" id="{D1504BAE-674F-4D42-BCF9-3836A87470B5}"/>
               </a:ext>
             </a:extLst>
           </p:cNvPr>
@@ -2474,7 +2474,7 @@
           <p:cNvPr id="2" name="Title 1">
             <a:extLst xmlns:a="http://schemas.openxmlformats.org/drawingml/2006/main">
               <a:ext uri="{FF2B5EF4-FFF2-40B4-BE49-F238E27FC236}">
-                <a16:creationId xmlns:a16="http://schemas.microsoft.com/office/drawing/2014/main" id="{772EF8A8-CD40-48CD-A069-2DD6743BA2D2}"/>
+                <a16:creationId xmlns:a16="http://schemas.microsoft.com/office/drawing/2014/main" id="{48D88473-A3E8-469C-9B9B-46C19B3DF605}"/>
               </a:ext>
             </a:extLst>
           </p:cNvPr>
@@ -2512,7 +2512,7 @@
           <p:cNvPr id="3" name="Text Placeholder 2">
             <a:extLst xmlns:a="http://schemas.openxmlformats.org/drawingml/2006/main">
               <a:ext uri="{FF2B5EF4-FFF2-40B4-BE49-F238E27FC236}">
-                <a16:creationId xmlns:a16="http://schemas.microsoft.com/office/drawing/2014/main" id="{2EDDECBD-F5D9-433A-A04A-43755818CB24}"/>
+                <a16:creationId xmlns:a16="http://schemas.microsoft.com/office/drawing/2014/main" id="{5181152F-391E-4979-83C1-112F065E488F}"/>
               </a:ext>
             </a:extLst>
           </p:cNvPr>
@@ -2638,7 +2638,7 @@
           <p:cNvPr id="4" name="Date Placeholder 3">
             <a:extLst xmlns:a="http://schemas.openxmlformats.org/drawingml/2006/main">
               <a:ext uri="{FF2B5EF4-FFF2-40B4-BE49-F238E27FC236}">
-                <a16:creationId xmlns:a16="http://schemas.microsoft.com/office/drawing/2014/main" id="{0EDDC842-D459-4AE4-BE75-9EA584A795DB}"/>
+                <a16:creationId xmlns:a16="http://schemas.microsoft.com/office/drawing/2014/main" id="{57C2FF56-7042-4197-A78A-F1BD5A036B3B}"/>
               </a:ext>
             </a:extLst>
           </p:cNvPr>
@@ -2666,7 +2666,7 @@
           <p:cNvPr id="5" name="Footer Placeholder 4">
             <a:extLst xmlns:a="http://schemas.openxmlformats.org/drawingml/2006/main">
               <a:ext uri="{FF2B5EF4-FFF2-40B4-BE49-F238E27FC236}">
-                <a16:creationId xmlns:a16="http://schemas.microsoft.com/office/drawing/2014/main" id="{5B0D256C-3F70-4C63-994F-8E04BD050953}"/>
+                <a16:creationId xmlns:a16="http://schemas.microsoft.com/office/drawing/2014/main" id="{0B43303D-A6F7-42DF-A4A2-771D46BD11B8}"/>
               </a:ext>
             </a:extLst>
           </p:cNvPr>
@@ -2691,7 +2691,7 @@
           <p:cNvPr id="6" name="Slide Number Placeholder 5">
             <a:extLst xmlns:a="http://schemas.openxmlformats.org/drawingml/2006/main">
               <a:ext uri="{FF2B5EF4-FFF2-40B4-BE49-F238E27FC236}">
-                <a16:creationId xmlns:a16="http://schemas.microsoft.com/office/drawing/2014/main" id="{730D24D9-3BEB-4065-A8F1-0C5367F4304F}"/>
+                <a16:creationId xmlns:a16="http://schemas.microsoft.com/office/drawing/2014/main" id="{C5450FDC-F917-4585-B2C8-5D1DC5B1C2D8}"/>
               </a:ext>
             </a:extLst>
           </p:cNvPr>
@@ -2736,7 +2736,7 @@
           <p:cNvPr id="2" name="Title 1">
             <a:extLst xmlns:a="http://schemas.openxmlformats.org/drawingml/2006/main">
               <a:ext uri="{FF2B5EF4-FFF2-40B4-BE49-F238E27FC236}">
-                <a16:creationId xmlns:a16="http://schemas.microsoft.com/office/drawing/2014/main" id="{F72634BA-C426-4948-8EFD-F3BDD456A74E}"/>
+                <a16:creationId xmlns:a16="http://schemas.microsoft.com/office/drawing/2014/main" id="{EEBFC3C2-AAC2-4E7B-BAA1-2BE4A5E493BE}"/>
               </a:ext>
             </a:extLst>
           </p:cNvPr>
@@ -2764,7 +2764,7 @@
           <p:cNvPr id="3" name="Content Placeholder 2">
             <a:extLst xmlns:a="http://schemas.openxmlformats.org/drawingml/2006/main">
               <a:ext uri="{FF2B5EF4-FFF2-40B4-BE49-F238E27FC236}">
-                <a16:creationId xmlns:a16="http://schemas.microsoft.com/office/drawing/2014/main" id="{A5276ECC-6B45-4A0E-818A-32477863FD74}"/>
+                <a16:creationId xmlns:a16="http://schemas.microsoft.com/office/drawing/2014/main" id="{4CFAEECE-4FFF-4715-ADAE-BECD60436F35}"/>
               </a:ext>
             </a:extLst>
           </p:cNvPr>
@@ -2869,7 +2869,7 @@
           <p:cNvPr id="4" name="Content Placeholder 3">
             <a:extLst xmlns:a="http://schemas.openxmlformats.org/drawingml/2006/main">
               <a:ext uri="{FF2B5EF4-FFF2-40B4-BE49-F238E27FC236}">
-                <a16:creationId xmlns:a16="http://schemas.microsoft.com/office/drawing/2014/main" id="{9423EAD8-443E-4186-88ED-8E038BB76390}"/>
+                <a16:creationId xmlns:a16="http://schemas.microsoft.com/office/drawing/2014/main" id="{63E11C84-5A91-4BB3-8020-11B6A967F463}"/>
               </a:ext>
             </a:extLst>
           </p:cNvPr>
@@ -2974,7 +2974,7 @@
           <p:cNvPr id="5" name="Date Placeholder 4">
             <a:extLst xmlns:a="http://schemas.openxmlformats.org/drawingml/2006/main">
               <a:ext uri="{FF2B5EF4-FFF2-40B4-BE49-F238E27FC236}">
-                <a16:creationId xmlns:a16="http://schemas.microsoft.com/office/drawing/2014/main" id="{38588B49-1651-4A17-BAEA-7C0CACE22482}"/>
+                <a16:creationId xmlns:a16="http://schemas.microsoft.com/office/drawing/2014/main" id="{7F6D84C7-D9B5-4B84-AA15-39B776D907A3}"/>
               </a:ext>
             </a:extLst>
           </p:cNvPr>
@@ -3002,7 +3002,7 @@
           <p:cNvPr id="6" name="Footer Placeholder 5">
             <a:extLst xmlns:a="http://schemas.openxmlformats.org/drawingml/2006/main">
               <a:ext uri="{FF2B5EF4-FFF2-40B4-BE49-F238E27FC236}">
-                <a16:creationId xmlns:a16="http://schemas.microsoft.com/office/drawing/2014/main" id="{8727B172-0D95-40CA-9165-A3186C20D3BC}"/>
+                <a16:creationId xmlns:a16="http://schemas.microsoft.com/office/drawing/2014/main" id="{0634A1AF-2D92-42FC-A0C7-D93901C9115D}"/>
               </a:ext>
             </a:extLst>
           </p:cNvPr>
@@ -3027,7 +3027,7 @@
           <p:cNvPr id="7" name="Slide Number Placeholder 6">
             <a:extLst xmlns:a="http://schemas.openxmlformats.org/drawingml/2006/main">
               <a:ext uri="{FF2B5EF4-FFF2-40B4-BE49-F238E27FC236}">
-                <a16:creationId xmlns:a16="http://schemas.microsoft.com/office/drawing/2014/main" id="{E40E64EA-EE32-4651-8962-EF7DE098C7AA}"/>
+                <a16:creationId xmlns:a16="http://schemas.microsoft.com/office/drawing/2014/main" id="{03B920B8-5FAD-46FC-BCAA-33752B02F893}"/>
               </a:ext>
             </a:extLst>
           </p:cNvPr>
@@ -3072,7 +3072,7 @@
           <p:cNvPr id="2" name="Title 1">
             <a:extLst xmlns:a="http://schemas.openxmlformats.org/drawingml/2006/main">
               <a:ext uri="{FF2B5EF4-FFF2-40B4-BE49-F238E27FC236}">
-                <a16:creationId xmlns:a16="http://schemas.microsoft.com/office/drawing/2014/main" id="{6B21E005-A366-45C6-8C8C-4B76168B3A8C}"/>
+                <a16:creationId xmlns:a16="http://schemas.microsoft.com/office/drawing/2014/main" id="{ADE03B3D-6D9D-4A68-B119-41E9BD5E0E4A}"/>
               </a:ext>
             </a:extLst>
           </p:cNvPr>
@@ -3105,7 +3105,7 @@
           <p:cNvPr id="3" name="Text Placeholder 2">
             <a:extLst xmlns:a="http://schemas.openxmlformats.org/drawingml/2006/main">
               <a:ext uri="{FF2B5EF4-FFF2-40B4-BE49-F238E27FC236}">
-                <a16:creationId xmlns:a16="http://schemas.microsoft.com/office/drawing/2014/main" id="{A9B862E3-D9E3-46E5-A789-B711790C99F2}"/>
+                <a16:creationId xmlns:a16="http://schemas.microsoft.com/office/drawing/2014/main" id="{E0A4F464-ADDF-4477-8E4C-C512D8C8C5AA}"/>
               </a:ext>
             </a:extLst>
           </p:cNvPr>
@@ -3177,7 +3177,7 @@
           <p:cNvPr id="4" name="Content Placeholder 3">
             <a:extLst xmlns:a="http://schemas.openxmlformats.org/drawingml/2006/main">
               <a:ext uri="{FF2B5EF4-FFF2-40B4-BE49-F238E27FC236}">
-                <a16:creationId xmlns:a16="http://schemas.microsoft.com/office/drawing/2014/main" id="{FFCBF07C-53C1-49D0-8125-C088B2439AC6}"/>
+                <a16:creationId xmlns:a16="http://schemas.microsoft.com/office/drawing/2014/main" id="{BF32C88C-17F7-4B7F-A614-D54D18FC42FA}"/>
               </a:ext>
             </a:extLst>
           </p:cNvPr>
@@ -3282,7 +3282,7 @@
           <p:cNvPr id="5" name="Text Placeholder 4">
             <a:extLst xmlns:a="http://schemas.openxmlformats.org/drawingml/2006/main">
               <a:ext uri="{FF2B5EF4-FFF2-40B4-BE49-F238E27FC236}">
-                <a16:creationId xmlns:a16="http://schemas.microsoft.com/office/drawing/2014/main" id="{075C592A-7C42-4E38-9594-F81E5D93AABA}"/>
+                <a16:creationId xmlns:a16="http://schemas.microsoft.com/office/drawing/2014/main" id="{1F17784C-DDBF-488E-9327-3CED1709B5FB}"/>
               </a:ext>
             </a:extLst>
           </p:cNvPr>
@@ -3354,7 +3354,7 @@
           <p:cNvPr id="6" name="Content Placeholder 5">
             <a:extLst xmlns:a="http://schemas.openxmlformats.org/drawingml/2006/main">
               <a:ext uri="{FF2B5EF4-FFF2-40B4-BE49-F238E27FC236}">
-                <a16:creationId xmlns:a16="http://schemas.microsoft.com/office/drawing/2014/main" id="{A0E29A3B-179B-4961-96AD-28D1FA583015}"/>
+                <a16:creationId xmlns:a16="http://schemas.microsoft.com/office/drawing/2014/main" id="{38458F22-82B7-4E86-B2A8-B923CFC2AFF6}"/>
               </a:ext>
             </a:extLst>
           </p:cNvPr>
@@ -3459,7 +3459,7 @@
           <p:cNvPr id="7" name="Date Placeholder 6">
             <a:extLst xmlns:a="http://schemas.openxmlformats.org/drawingml/2006/main">
               <a:ext uri="{FF2B5EF4-FFF2-40B4-BE49-F238E27FC236}">
-                <a16:creationId xmlns:a16="http://schemas.microsoft.com/office/drawing/2014/main" id="{F52E7E0C-3338-4AB5-9938-FA855B13CE6D}"/>
+                <a16:creationId xmlns:a16="http://schemas.microsoft.com/office/drawing/2014/main" id="{A0E28517-3BA7-45ED-A26F-8A10299624AB}"/>
               </a:ext>
             </a:extLst>
           </p:cNvPr>
@@ -3487,7 +3487,7 @@
           <p:cNvPr id="8" name="Footer Placeholder 7">
             <a:extLst xmlns:a="http://schemas.openxmlformats.org/drawingml/2006/main">
               <a:ext uri="{FF2B5EF4-FFF2-40B4-BE49-F238E27FC236}">
-                <a16:creationId xmlns:a16="http://schemas.microsoft.com/office/drawing/2014/main" id="{5FB1FC82-5CC6-43B6-84AF-32CE18099500}"/>
+                <a16:creationId xmlns:a16="http://schemas.microsoft.com/office/drawing/2014/main" id="{0E57045E-18C7-4493-B297-617D5AA27FFF}"/>
               </a:ext>
             </a:extLst>
           </p:cNvPr>
@@ -3512,7 +3512,7 @@
           <p:cNvPr id="9" name="Slide Number Placeholder 8">
             <a:extLst xmlns:a="http://schemas.openxmlformats.org/drawingml/2006/main">
               <a:ext uri="{FF2B5EF4-FFF2-40B4-BE49-F238E27FC236}">
-                <a16:creationId xmlns:a16="http://schemas.microsoft.com/office/drawing/2014/main" id="{780870F7-42AA-4582-951B-0AB4E51D820B}"/>
+                <a16:creationId xmlns:a16="http://schemas.microsoft.com/office/drawing/2014/main" id="{D4437B5F-5E2D-4BA5-92E3-DDD162E0522B}"/>
               </a:ext>
             </a:extLst>
           </p:cNvPr>
@@ -3557,7 +3557,7 @@
           <p:cNvPr id="2" name="Title 1">
             <a:extLst xmlns:a="http://schemas.openxmlformats.org/drawingml/2006/main">
               <a:ext uri="{FF2B5EF4-FFF2-40B4-BE49-F238E27FC236}">
-                <a16:creationId xmlns:a16="http://schemas.microsoft.com/office/drawing/2014/main" id="{AFDEE713-70D2-4FBC-889E-E83BD3F8F640}"/>
+                <a16:creationId xmlns:a16="http://schemas.microsoft.com/office/drawing/2014/main" id="{251AA1A5-51E7-4D51-8129-417F39CA8C3B}"/>
               </a:ext>
             </a:extLst>
           </p:cNvPr>
@@ -3585,7 +3585,7 @@
           <p:cNvPr id="3" name="Date Placeholder 2">
             <a:extLst xmlns:a="http://schemas.openxmlformats.org/drawingml/2006/main">
               <a:ext uri="{FF2B5EF4-FFF2-40B4-BE49-F238E27FC236}">
-                <a16:creationId xmlns:a16="http://schemas.microsoft.com/office/drawing/2014/main" id="{913D431E-1C6A-4080-91A5-AE1C9237C35E}"/>
+                <a16:creationId xmlns:a16="http://schemas.microsoft.com/office/drawing/2014/main" id="{C6AF4F17-E154-4C86-B2C4-29CB44F8010F}"/>
               </a:ext>
             </a:extLst>
           </p:cNvPr>
@@ -3613,7 +3613,7 @@
           <p:cNvPr id="4" name="Footer Placeholder 3">
             <a:extLst xmlns:a="http://schemas.openxmlformats.org/drawingml/2006/main">
               <a:ext uri="{FF2B5EF4-FFF2-40B4-BE49-F238E27FC236}">
-                <a16:creationId xmlns:a16="http://schemas.microsoft.com/office/drawing/2014/main" id="{D1B04C06-54B4-4C7E-A101-A2DFA97DE026}"/>
+                <a16:creationId xmlns:a16="http://schemas.microsoft.com/office/drawing/2014/main" id="{E56BB692-FE0B-4DFE-ADCC-E88062D30465}"/>
               </a:ext>
             </a:extLst>
           </p:cNvPr>
@@ -3638,7 +3638,7 @@
           <p:cNvPr id="5" name="Slide Number Placeholder 4">
             <a:extLst xmlns:a="http://schemas.openxmlformats.org/drawingml/2006/main">
               <a:ext uri="{FF2B5EF4-FFF2-40B4-BE49-F238E27FC236}">
-                <a16:creationId xmlns:a16="http://schemas.microsoft.com/office/drawing/2014/main" id="{28E078F5-A9B7-4331-9084-6C04E6DA11CA}"/>
+                <a16:creationId xmlns:a16="http://schemas.microsoft.com/office/drawing/2014/main" id="{9D406CE1-4D0E-40EC-87A4-CC343605B0C8}"/>
               </a:ext>
             </a:extLst>
           </p:cNvPr>
@@ -3683,7 +3683,7 @@
           <p:cNvPr id="2" name="Date Placeholder 1">
             <a:extLst xmlns:a="http://schemas.openxmlformats.org/drawingml/2006/main">
               <a:ext uri="{FF2B5EF4-FFF2-40B4-BE49-F238E27FC236}">
-                <a16:creationId xmlns:a16="http://schemas.microsoft.com/office/drawing/2014/main" id="{3C35BA36-7162-4202-8B3A-A81312ADC905}"/>
+                <a16:creationId xmlns:a16="http://schemas.microsoft.com/office/drawing/2014/main" id="{1C9F73EB-3327-4497-8757-7ADA708BD27D}"/>
               </a:ext>
             </a:extLst>
           </p:cNvPr>
@@ -3711,7 +3711,7 @@
           <p:cNvPr id="3" name="Footer Placeholder 2">
             <a:extLst xmlns:a="http://schemas.openxmlformats.org/drawingml/2006/main">
               <a:ext uri="{FF2B5EF4-FFF2-40B4-BE49-F238E27FC236}">
-                <a16:creationId xmlns:a16="http://schemas.microsoft.com/office/drawing/2014/main" id="{3B130739-B2A7-4238-A15A-E5361CB21B67}"/>
+                <a16:creationId xmlns:a16="http://schemas.microsoft.com/office/drawing/2014/main" id="{F9B4C2A0-4CA1-43CC-AEA8-963E7300A4CF}"/>
               </a:ext>
             </a:extLst>
           </p:cNvPr>
@@ -3736,7 +3736,7 @@
           <p:cNvPr id="4" name="Slide Number Placeholder 3">
             <a:extLst xmlns:a="http://schemas.openxmlformats.org/drawingml/2006/main">
               <a:ext uri="{FF2B5EF4-FFF2-40B4-BE49-F238E27FC236}">
-                <a16:creationId xmlns:a16="http://schemas.microsoft.com/office/drawing/2014/main" id="{BB3A04EE-3F2F-40F4-BE9A-DFCBD5B1F3DC}"/>
+                <a16:creationId xmlns:a16="http://schemas.microsoft.com/office/drawing/2014/main" id="{ACBD2F19-B3E2-434E-A1EC-402AF7E5FFFF}"/>
               </a:ext>
             </a:extLst>
           </p:cNvPr>
@@ -3781,7 +3781,7 @@
           <p:cNvPr id="2" name="Title 1">
             <a:extLst xmlns:a="http://schemas.openxmlformats.org/drawingml/2006/main">
               <a:ext uri="{FF2B5EF4-FFF2-40B4-BE49-F238E27FC236}">
-                <a16:creationId xmlns:a16="http://schemas.microsoft.com/office/drawing/2014/main" id="{6EC0034F-D800-4E60-BEE0-B13ABCDAC07D}"/>
+                <a16:creationId xmlns:a16="http://schemas.microsoft.com/office/drawing/2014/main" id="{AA465953-FEAE-4670-84DE-17A247B2731A}"/>
               </a:ext>
             </a:extLst>
           </p:cNvPr>
@@ -3819,7 +3819,7 @@
           <p:cNvPr id="3" name="Content Placeholder 2">
             <a:extLst xmlns:a="http://schemas.openxmlformats.org/drawingml/2006/main">
               <a:ext uri="{FF2B5EF4-FFF2-40B4-BE49-F238E27FC236}">
-                <a16:creationId xmlns:a16="http://schemas.microsoft.com/office/drawing/2014/main" id="{1D5BB8F7-A38A-4E25-A5CA-0FCAB474FAB4}"/>
+                <a16:creationId xmlns:a16="http://schemas.microsoft.com/office/drawing/2014/main" id="{DAF61EDD-5A86-4088-8FE6-AC103725629A}"/>
               </a:ext>
             </a:extLst>
           </p:cNvPr>
@@ -3924,7 +3924,7 @@
           <p:cNvPr id="4" name="Text Placeholder 3">
             <a:extLst xmlns:a="http://schemas.openxmlformats.org/drawingml/2006/main">
               <a:ext uri="{FF2B5EF4-FFF2-40B4-BE49-F238E27FC236}">
-                <a16:creationId xmlns:a16="http://schemas.microsoft.com/office/drawing/2014/main" id="{4CA3BDA1-7902-4DF9-8DCA-4FF070268769}"/>
+                <a16:creationId xmlns:a16="http://schemas.microsoft.com/office/drawing/2014/main" id="{CBACFCAB-17C0-4D46-BA5F-E02F5A843325}"/>
               </a:ext>
             </a:extLst>
           </p:cNvPr>
@@ -3996,7 +3996,7 @@
           <p:cNvPr id="5" name="Date Placeholder 4">
             <a:extLst xmlns:a="http://schemas.openxmlformats.org/drawingml/2006/main">
               <a:ext uri="{FF2B5EF4-FFF2-40B4-BE49-F238E27FC236}">
-                <a16:creationId xmlns:a16="http://schemas.microsoft.com/office/drawing/2014/main" id="{231929E6-CEC5-4D46-9D6E-45991F7C9880}"/>
+                <a16:creationId xmlns:a16="http://schemas.microsoft.com/office/drawing/2014/main" id="{09D8B604-9F0D-408C-AC13-D61F1B2A85AB}"/>
               </a:ext>
             </a:extLst>
           </p:cNvPr>
@@ -4024,7 +4024,7 @@
           <p:cNvPr id="6" name="Footer Placeholder 5">
             <a:extLst xmlns:a="http://schemas.openxmlformats.org/drawingml/2006/main">
               <a:ext uri="{FF2B5EF4-FFF2-40B4-BE49-F238E27FC236}">
-                <a16:creationId xmlns:a16="http://schemas.microsoft.com/office/drawing/2014/main" id="{F6490851-0908-4E83-BFA4-0458F5A77B63}"/>
+                <a16:creationId xmlns:a16="http://schemas.microsoft.com/office/drawing/2014/main" id="{CFC670BF-0830-4790-91D7-36215EBE4509}"/>
               </a:ext>
             </a:extLst>
           </p:cNvPr>
@@ -4049,7 +4049,7 @@
           <p:cNvPr id="7" name="Slide Number Placeholder 6">
             <a:extLst xmlns:a="http://schemas.openxmlformats.org/drawingml/2006/main">
               <a:ext uri="{FF2B5EF4-FFF2-40B4-BE49-F238E27FC236}">
-                <a16:creationId xmlns:a16="http://schemas.microsoft.com/office/drawing/2014/main" id="{95955DEC-2069-4132-A320-EC48A0D90B02}"/>
+                <a16:creationId xmlns:a16="http://schemas.microsoft.com/office/drawing/2014/main" id="{E299164D-5C53-404C-ABD9-E13860235893}"/>
               </a:ext>
             </a:extLst>
           </p:cNvPr>
@@ -4094,7 +4094,7 @@
           <p:cNvPr id="2" name="Title 1">
             <a:extLst xmlns:a="http://schemas.openxmlformats.org/drawingml/2006/main">
               <a:ext uri="{FF2B5EF4-FFF2-40B4-BE49-F238E27FC236}">
-                <a16:creationId xmlns:a16="http://schemas.microsoft.com/office/drawing/2014/main" id="{9D172CF8-7EEC-44D7-B75C-BEBC4C6A7BAF}"/>
+                <a16:creationId xmlns:a16="http://schemas.microsoft.com/office/drawing/2014/main" id="{6E76243F-325A-4D79-AFF2-42F4EA66CFC0}"/>
               </a:ext>
             </a:extLst>
           </p:cNvPr>
@@ -4132,7 +4132,7 @@
           <p:cNvPr id="3" name="Picture Placeholder 2">
             <a:extLst xmlns:a="http://schemas.openxmlformats.org/drawingml/2006/main">
               <a:ext uri="{FF2B5EF4-FFF2-40B4-BE49-F238E27FC236}">
-                <a16:creationId xmlns:a16="http://schemas.microsoft.com/office/drawing/2014/main" id="{524F85FF-E70A-4020-8C41-07289A8AC4CD}"/>
+                <a16:creationId xmlns:a16="http://schemas.microsoft.com/office/drawing/2014/main" id="{FB3FBEEF-DA39-44F6-9E93-FDF928335E5D}"/>
               </a:ext>
             </a:extLst>
           </p:cNvPr>
@@ -4199,7 +4199,7 @@
           <p:cNvPr id="4" name="Text Placeholder 3">
             <a:extLst xmlns:a="http://schemas.openxmlformats.org/drawingml/2006/main">
               <a:ext uri="{FF2B5EF4-FFF2-40B4-BE49-F238E27FC236}">
-                <a16:creationId xmlns:a16="http://schemas.microsoft.com/office/drawing/2014/main" id="{712424DD-15E4-4250-850B-E8043F566FBE}"/>
+                <a16:creationId xmlns:a16="http://schemas.microsoft.com/office/drawing/2014/main" id="{C0D4A93C-FDED-4732-8BCB-47314EE39E8B}"/>
               </a:ext>
             </a:extLst>
           </p:cNvPr>
@@ -4271,7 +4271,7 @@
           <p:cNvPr id="5" name="Date Placeholder 4">
             <a:extLst xmlns:a="http://schemas.openxmlformats.org/drawingml/2006/main">
               <a:ext uri="{FF2B5EF4-FFF2-40B4-BE49-F238E27FC236}">
-                <a16:creationId xmlns:a16="http://schemas.microsoft.com/office/drawing/2014/main" id="{AB2BC769-8A98-46F6-BF98-44F33E97DD65}"/>
+                <a16:creationId xmlns:a16="http://schemas.microsoft.com/office/drawing/2014/main" id="{31EA3DA0-D722-4469-9016-240144E94498}"/>
               </a:ext>
             </a:extLst>
           </p:cNvPr>
@@ -4299,7 +4299,7 @@
           <p:cNvPr id="6" name="Footer Placeholder 5">
             <a:extLst xmlns:a="http://schemas.openxmlformats.org/drawingml/2006/main">
               <a:ext uri="{FF2B5EF4-FFF2-40B4-BE49-F238E27FC236}">
-                <a16:creationId xmlns:a16="http://schemas.microsoft.com/office/drawing/2014/main" id="{7B5A835B-DDBA-404E-9BE9-0B6922BF188B}"/>
+                <a16:creationId xmlns:a16="http://schemas.microsoft.com/office/drawing/2014/main" id="{BE1CB8DD-6E1F-4972-BFF3-25A5FC8122CF}"/>
               </a:ext>
             </a:extLst>
           </p:cNvPr>
@@ -4324,7 +4324,7 @@
           <p:cNvPr id="7" name="Slide Number Placeholder 6">
             <a:extLst xmlns:a="http://schemas.openxmlformats.org/drawingml/2006/main">
               <a:ext uri="{FF2B5EF4-FFF2-40B4-BE49-F238E27FC236}">
-                <a16:creationId xmlns:a16="http://schemas.microsoft.com/office/drawing/2014/main" id="{9D4C7EF7-4B4F-472A-A061-C731881D02E4}"/>
+                <a16:creationId xmlns:a16="http://schemas.microsoft.com/office/drawing/2014/main" id="{845AADA0-DE50-4A95-AA7D-A5FD35E158FB}"/>
               </a:ext>
             </a:extLst>
           </p:cNvPr>
@@ -4374,7 +4374,7 @@
           <p:cNvPr id="2" name="Title Placeholder 1">
             <a:extLst xmlns:a="http://schemas.openxmlformats.org/drawingml/2006/main">
               <a:ext uri="{FF2B5EF4-FFF2-40B4-BE49-F238E27FC236}">
-                <a16:creationId xmlns:a16="http://schemas.microsoft.com/office/drawing/2014/main" id="{1077C5E2-73AD-442F-A5D5-8A5B4BDCF13F}"/>
+                <a16:creationId xmlns:a16="http://schemas.microsoft.com/office/drawing/2014/main" id="{F975101A-0E7D-43A8-B07D-BE0F65A66145}"/>
               </a:ext>
             </a:extLst>
           </p:cNvPr>
@@ -4412,7 +4412,7 @@
           <p:cNvPr id="3" name="Text Placeholder 2">
             <a:extLst xmlns:a="http://schemas.openxmlformats.org/drawingml/2006/main">
               <a:ext uri="{FF2B5EF4-FFF2-40B4-BE49-F238E27FC236}">
-                <a16:creationId xmlns:a16="http://schemas.microsoft.com/office/drawing/2014/main" id="{59378052-CD73-4324-98FF-AB55C4CD0C8F}"/>
+                <a16:creationId xmlns:a16="http://schemas.microsoft.com/office/drawing/2014/main" id="{1318B89A-9D1B-41DD-ADDC-6B1854464F01}"/>
               </a:ext>
             </a:extLst>
           </p:cNvPr>
@@ -4485,7 +4485,7 @@
           <p:cNvPr id="4" name="Date Placeholder 3">
             <a:extLst xmlns:a="http://schemas.openxmlformats.org/drawingml/2006/main">
               <a:ext uri="{FF2B5EF4-FFF2-40B4-BE49-F238E27FC236}">
-                <a16:creationId xmlns:a16="http://schemas.microsoft.com/office/drawing/2014/main" id="{3C40B442-815E-4EDF-A7F2-225F028474E4}"/>
+                <a16:creationId xmlns:a16="http://schemas.microsoft.com/office/drawing/2014/main" id="{9557EDD1-EA3C-4527-81D9-2DF903249C72}"/>
               </a:ext>
             </a:extLst>
           </p:cNvPr>
@@ -4532,7 +4532,7 @@
           <p:cNvPr id="5" name="Footer Placeholder 4">
             <a:extLst xmlns:a="http://schemas.openxmlformats.org/drawingml/2006/main">
               <a:ext uri="{FF2B5EF4-FFF2-40B4-BE49-F238E27FC236}">
-                <a16:creationId xmlns:a16="http://schemas.microsoft.com/office/drawing/2014/main" id="{72D6D5AC-1C88-491A-B6CD-BEA97D13F7EC}"/>
+                <a16:creationId xmlns:a16="http://schemas.microsoft.com/office/drawing/2014/main" id="{9580828F-4433-4419-8E07-62BB40DD3C0F}"/>
               </a:ext>
             </a:extLst>
           </p:cNvPr>
@@ -4576,7 +4576,7 @@
           <p:cNvPr id="6" name="Slide Number Placeholder 5">
             <a:extLst xmlns:a="http://schemas.openxmlformats.org/drawingml/2006/main">
               <a:ext uri="{FF2B5EF4-FFF2-40B4-BE49-F238E27FC236}">
-                <a16:creationId xmlns:a16="http://schemas.microsoft.com/office/drawing/2014/main" id="{2D408B88-B351-46FB-BC8B-5764ABF98231}"/>
+                <a16:creationId xmlns:a16="http://schemas.microsoft.com/office/drawing/2014/main" id="{C1FDE8D5-F092-412F-810E-023BD384EBBD}"/>
               </a:ext>
             </a:extLst>
           </p:cNvPr>
@@ -4622,17 +4622,17 @@
   </p:cSld>
   <p:clrMap bg1="lt1" tx1="dk1" bg2="lt2" tx2="dk2" accent1="accent1" accent2="accent2" accent3="accent3" accent4="accent4" accent5="accent5" accent6="accent6" hlink="hlink" folHlink="folHlink"/>
   <p:sldLayoutIdLst>
-    <p:sldLayoutId xmlns:r="http://schemas.openxmlformats.org/officeDocument/2006/relationships" id="2147483649" r:id="Rde5fb96a5dac4f60"/>
-    <p:sldLayoutId xmlns:r="http://schemas.openxmlformats.org/officeDocument/2006/relationships" id="2147483650" r:id="Rb5da0babc5104252"/>
-    <p:sldLayoutId xmlns:r="http://schemas.openxmlformats.org/officeDocument/2006/relationships" id="2147483651" r:id="R7c989dfba9fe4a83"/>
-    <p:sldLayoutId xmlns:r="http://schemas.openxmlformats.org/officeDocument/2006/relationships" id="2147483652" r:id="R60271e550fab47e9"/>
-    <p:sldLayoutId xmlns:r="http://schemas.openxmlformats.org/officeDocument/2006/relationships" id="2147483653" r:id="R36678e15c82e4bef"/>
-    <p:sldLayoutId xmlns:r="http://schemas.openxmlformats.org/officeDocument/2006/relationships" id="2147483654" r:id="Rc3888c275272460d"/>
-    <p:sldLayoutId xmlns:r="http://schemas.openxmlformats.org/officeDocument/2006/relationships" id="2147483655" r:id="Re191b7c3d3694b66"/>
-    <p:sldLayoutId xmlns:r="http://schemas.openxmlformats.org/officeDocument/2006/relationships" id="2147483656" r:id="R5ebc58fff3da4deb"/>
-    <p:sldLayoutId xmlns:r="http://schemas.openxmlformats.org/officeDocument/2006/relationships" id="2147483657" r:id="Rdc288f79e06a4dcd"/>
-    <p:sldLayoutId xmlns:r="http://schemas.openxmlformats.org/officeDocument/2006/relationships" id="2147483658" r:id="R1923219090744fac"/>
-    <p:sldLayoutId xmlns:r="http://schemas.openxmlformats.org/officeDocument/2006/relationships" id="2147483659" r:id="R9f159f3a3477430d"/>
+    <p:sldLayoutId xmlns:r="http://schemas.openxmlformats.org/officeDocument/2006/relationships" id="2147483649" r:id="R7960cecc8034468f"/>
+    <p:sldLayoutId xmlns:r="http://schemas.openxmlformats.org/officeDocument/2006/relationships" id="2147483650" r:id="Rfe9afc72fc9a4163"/>
+    <p:sldLayoutId xmlns:r="http://schemas.openxmlformats.org/officeDocument/2006/relationships" id="2147483651" r:id="Rf7c63bea0ae54399"/>
+    <p:sldLayoutId xmlns:r="http://schemas.openxmlformats.org/officeDocument/2006/relationships" id="2147483652" r:id="Rba1dff56f198419c"/>
+    <p:sldLayoutId xmlns:r="http://schemas.openxmlformats.org/officeDocument/2006/relationships" id="2147483653" r:id="Rd22e4a1747ff49b4"/>
+    <p:sldLayoutId xmlns:r="http://schemas.openxmlformats.org/officeDocument/2006/relationships" id="2147483654" r:id="Rf41f9363ebf34aa1"/>
+    <p:sldLayoutId xmlns:r="http://schemas.openxmlformats.org/officeDocument/2006/relationships" id="2147483655" r:id="R1da7421ba20a42ff"/>
+    <p:sldLayoutId xmlns:r="http://schemas.openxmlformats.org/officeDocument/2006/relationships" id="2147483656" r:id="Ref3a82e106354003"/>
+    <p:sldLayoutId xmlns:r="http://schemas.openxmlformats.org/officeDocument/2006/relationships" id="2147483657" r:id="Rab060351c0934aed"/>
+    <p:sldLayoutId xmlns:r="http://schemas.openxmlformats.org/officeDocument/2006/relationships" id="2147483658" r:id="R6620b17e822a4b13"/>
+    <p:sldLayoutId xmlns:r="http://schemas.openxmlformats.org/officeDocument/2006/relationships" id="2147483659" r:id="R1e6b65ed3eea4a55"/>
   </p:sldLayoutIdLst>
   <p:txStyles>
     <p:titleStyle>
@@ -5178,7 +5178,7 @@
           <p:cNvPr id="2" name="Rectangle 1">
             <a:extLst xmlns:a="http://schemas.openxmlformats.org/drawingml/2006/main">
               <a:ext uri="{FF2B5EF4-FFF2-40B4-BE49-F238E27FC236}">
-                <a16:creationId xmlns:a16="http://schemas.microsoft.com/office/drawing/2014/main" id="{F41B5673-96D9-4D75-9546-111EE4AD49BC}"/>
+                <a16:creationId xmlns:a16="http://schemas.microsoft.com/office/drawing/2014/main" id="{50CFDB39-FDBC-42FC-AE95-938B9DA017C5}"/>
               </a:ext>
             </a:extLst>
           </p:cNvPr>
@@ -5231,7 +5231,7 @@
           <p:cNvPr id="3" name="Rectangle 2">
             <a:extLst xmlns:a="http://schemas.openxmlformats.org/drawingml/2006/main">
               <a:ext uri="{FF2B5EF4-FFF2-40B4-BE49-F238E27FC236}">
-                <a16:creationId xmlns:a16="http://schemas.microsoft.com/office/drawing/2014/main" id="{6E71F4CD-E89F-4ED9-A54B-982FF9649474}"/>
+                <a16:creationId xmlns:a16="http://schemas.microsoft.com/office/drawing/2014/main" id="{49BEB81B-781A-49F2-BB1F-6456FCD9F505}"/>
               </a:ext>
             </a:extLst>
           </p:cNvPr>
@@ -5284,7 +5284,7 @@
           <p:cNvPr id="4" name="shape_slide_1_title">
             <a:extLst xmlns:a="http://schemas.openxmlformats.org/drawingml/2006/main">
               <a:ext uri="{FF2B5EF4-FFF2-40B4-BE49-F238E27FC236}">
-                <a16:creationId xmlns:a16="http://schemas.microsoft.com/office/drawing/2014/main" id="{31EA4AD0-9655-4BFD-BBE7-04767AEC19B1}"/>
+                <a16:creationId xmlns:a16="http://schemas.microsoft.com/office/drawing/2014/main" id="{51B1D329-3675-42EC-8E44-AD82D6728057}"/>
               </a:ext>
             </a:extLst>
           </p:cNvPr>
@@ -5405,7 +5405,7 @@
     </p:spTree>
     <p:extLst>
       <p:ext uri="{BB962C8B-B14F-4D97-AF65-F5344CB8AC3E}">
-        <p14:creationId xmlns:p14="http://schemas.microsoft.com/office/powerpoint/2010/main" val="1218494142"/>
+        <p14:creationId xmlns:p14="http://schemas.microsoft.com/office/powerpoint/2010/main" val="200964744"/>
       </p:ext>
     </p:extLst>
   </p:cSld>
@@ -5429,7 +5429,7 @@
           <p:cNvPr id="2" name="Rectangle 1">
             <a:extLst xmlns:a="http://schemas.openxmlformats.org/drawingml/2006/main">
               <a:ext uri="{FF2B5EF4-FFF2-40B4-BE49-F238E27FC236}">
-                <a16:creationId xmlns:a16="http://schemas.microsoft.com/office/drawing/2014/main" id="{B8456080-15DE-440C-BCD4-153BE37B3DF9}"/>
+                <a16:creationId xmlns:a16="http://schemas.microsoft.com/office/drawing/2014/main" id="{C0B2D5A2-2BDA-47A5-AC62-6A149C45E57B}"/>
               </a:ext>
             </a:extLst>
           </p:cNvPr>
@@ -5482,7 +5482,7 @@
           <p:cNvPr id="3" name="Rectangle 2">
             <a:extLst xmlns:a="http://schemas.openxmlformats.org/drawingml/2006/main">
               <a:ext uri="{FF2B5EF4-FFF2-40B4-BE49-F238E27FC236}">
-                <a16:creationId xmlns:a16="http://schemas.microsoft.com/office/drawing/2014/main" id="{480AEFCF-C4D3-4408-B49C-244C193004C8}"/>
+                <a16:creationId xmlns:a16="http://schemas.microsoft.com/office/drawing/2014/main" id="{59FBF3AA-7D91-49F9-8A3E-5ED28D8E9A38}"/>
               </a:ext>
             </a:extLst>
           </p:cNvPr>
@@ -5535,7 +5535,7 @@
           <p:cNvPr id="4" name="Rectangle 3">
             <a:extLst xmlns:a="http://schemas.openxmlformats.org/drawingml/2006/main">
               <a:ext uri="{FF2B5EF4-FFF2-40B4-BE49-F238E27FC236}">
-                <a16:creationId xmlns:a16="http://schemas.microsoft.com/office/drawing/2014/main" id="{8D69934E-DFFF-436F-9E06-30BFD40C575C}"/>
+                <a16:creationId xmlns:a16="http://schemas.microsoft.com/office/drawing/2014/main" id="{7F5DD65E-8156-40B1-B044-E8134726C835}"/>
               </a:ext>
             </a:extLst>
           </p:cNvPr>
@@ -5588,7 +5588,7 @@
           <p:cNvPr id="5" name="TextBox 4">
             <a:extLst xmlns:a="http://schemas.openxmlformats.org/drawingml/2006/main">
               <a:ext uri="{FF2B5EF4-FFF2-40B4-BE49-F238E27FC236}">
-                <a16:creationId xmlns:a16="http://schemas.microsoft.com/office/drawing/2014/main" id="{EB9BD294-0FAD-4BD6-AA6D-DAEB6824816A}"/>
+                <a16:creationId xmlns:a16="http://schemas.microsoft.com/office/drawing/2014/main" id="{D5F6FC71-467F-48E1-9FDF-F618AAC07CBC}"/>
               </a:ext>
             </a:extLst>
           </p:cNvPr>
@@ -5651,7 +5651,7 @@
           <p:cNvPr id="6" name="shape_slide_10_limitations_1">
             <a:extLst xmlns:a="http://schemas.openxmlformats.org/drawingml/2006/main">
               <a:ext uri="{FF2B5EF4-FFF2-40B4-BE49-F238E27FC236}">
-                <a16:creationId xmlns:a16="http://schemas.microsoft.com/office/drawing/2014/main" id="{B5E5F50D-155E-4511-877B-D18A994B74EE}"/>
+                <a16:creationId xmlns:a16="http://schemas.microsoft.com/office/drawing/2014/main" id="{787729A7-4566-4090-8EBA-8631B3B42BA9}"/>
               </a:ext>
             </a:extLst>
           </p:cNvPr>
@@ -5706,7 +5706,7 @@
           <p:cNvPr id="7" name="shape_slide_10_limitations_1_textbox">
             <a:extLst xmlns:a="http://schemas.openxmlformats.org/drawingml/2006/main">
               <a:ext uri="{FF2B5EF4-FFF2-40B4-BE49-F238E27FC236}">
-                <a16:creationId xmlns:a16="http://schemas.microsoft.com/office/drawing/2014/main" id="{42C44CB2-7B67-49BA-AC7F-A841A824675A}"/>
+                <a16:creationId xmlns:a16="http://schemas.microsoft.com/office/drawing/2014/main" id="{3CDDE61F-C55C-4671-A63F-AD6B7FEBDFBC}"/>
               </a:ext>
             </a:extLst>
           </p:cNvPr>
@@ -5810,7 +5810,7 @@
           <p:cNvPr id="8" name="shape_slide_10_limitations_2">
             <a:extLst xmlns:a="http://schemas.openxmlformats.org/drawingml/2006/main">
               <a:ext uri="{FF2B5EF4-FFF2-40B4-BE49-F238E27FC236}">
-                <a16:creationId xmlns:a16="http://schemas.microsoft.com/office/drawing/2014/main" id="{29D755FD-9A90-448C-956F-A934C9F0B93E}"/>
+                <a16:creationId xmlns:a16="http://schemas.microsoft.com/office/drawing/2014/main" id="{D7F8C466-34C9-4CCC-A2DF-91C5151A40F4}"/>
               </a:ext>
             </a:extLst>
           </p:cNvPr>
@@ -5865,7 +5865,7 @@
           <p:cNvPr id="9" name="shape_slide_10_limitations_2_textbox">
             <a:extLst xmlns:a="http://schemas.openxmlformats.org/drawingml/2006/main">
               <a:ext uri="{FF2B5EF4-FFF2-40B4-BE49-F238E27FC236}">
-                <a16:creationId xmlns:a16="http://schemas.microsoft.com/office/drawing/2014/main" id="{65EFA7AD-3636-447E-A1EF-64286F17451D}"/>
+                <a16:creationId xmlns:a16="http://schemas.microsoft.com/office/drawing/2014/main" id="{50DAB895-8225-4027-A753-587A8AFB1FDF}"/>
               </a:ext>
             </a:extLst>
           </p:cNvPr>
@@ -5950,7 +5950,7 @@
           <p:cNvPr id="10" name="shape_slide_10_limitations_3">
             <a:extLst xmlns:a="http://schemas.openxmlformats.org/drawingml/2006/main">
               <a:ext uri="{FF2B5EF4-FFF2-40B4-BE49-F238E27FC236}">
-                <a16:creationId xmlns:a16="http://schemas.microsoft.com/office/drawing/2014/main" id="{877F9545-CBAA-4EEF-B166-7335AAF0DFA2}"/>
+                <a16:creationId xmlns:a16="http://schemas.microsoft.com/office/drawing/2014/main" id="{12DC2D81-5EB4-483D-9EB3-19F8B554F49B}"/>
               </a:ext>
             </a:extLst>
           </p:cNvPr>
@@ -6005,7 +6005,7 @@
           <p:cNvPr id="11" name="shape_slide_10_limitations_3_textbox">
             <a:extLst xmlns:a="http://schemas.openxmlformats.org/drawingml/2006/main">
               <a:ext uri="{FF2B5EF4-FFF2-40B4-BE49-F238E27FC236}">
-                <a16:creationId xmlns:a16="http://schemas.microsoft.com/office/drawing/2014/main" id="{F377C8FB-F01C-467A-ACC3-09E947A06F6A}"/>
+                <a16:creationId xmlns:a16="http://schemas.microsoft.com/office/drawing/2014/main" id="{329B996C-F716-43CD-B250-422721A77FDE}"/>
               </a:ext>
             </a:extLst>
           </p:cNvPr>
@@ -6107,7 +6107,7 @@
     </p:spTree>
     <p:extLst>
       <p:ext uri="{BB962C8B-B14F-4D97-AF65-F5344CB8AC3E}">
-        <p14:creationId xmlns:p14="http://schemas.microsoft.com/office/powerpoint/2010/main" val="485088594"/>
+        <p14:creationId xmlns:p14="http://schemas.microsoft.com/office/powerpoint/2010/main" val="935547099"/>
       </p:ext>
     </p:extLst>
   </p:cSld>
@@ -6131,7 +6131,7 @@
           <p:cNvPr id="2" name="Rectangle 1">
             <a:extLst xmlns:a="http://schemas.openxmlformats.org/drawingml/2006/main">
               <a:ext uri="{FF2B5EF4-FFF2-40B4-BE49-F238E27FC236}">
-                <a16:creationId xmlns:a16="http://schemas.microsoft.com/office/drawing/2014/main" id="{983C7ECD-633C-441C-A068-D43B58DDAD91}"/>
+                <a16:creationId xmlns:a16="http://schemas.microsoft.com/office/drawing/2014/main" id="{1271CD13-8AD8-4F03-AD68-214CF0C8A065}"/>
               </a:ext>
             </a:extLst>
           </p:cNvPr>
@@ -6184,7 +6184,7 @@
           <p:cNvPr id="3" name="Rectangle 2">
             <a:extLst xmlns:a="http://schemas.openxmlformats.org/drawingml/2006/main">
               <a:ext uri="{FF2B5EF4-FFF2-40B4-BE49-F238E27FC236}">
-                <a16:creationId xmlns:a16="http://schemas.microsoft.com/office/drawing/2014/main" id="{8E071FE9-5F30-4AE4-A081-D327A1D025AA}"/>
+                <a16:creationId xmlns:a16="http://schemas.microsoft.com/office/drawing/2014/main" id="{BDF22EAA-8D4D-4533-A423-CA6CF3906D04}"/>
               </a:ext>
             </a:extLst>
           </p:cNvPr>
@@ -6237,7 +6237,7 @@
           <p:cNvPr id="4" name="Rectangle 3">
             <a:extLst xmlns:a="http://schemas.openxmlformats.org/drawingml/2006/main">
               <a:ext uri="{FF2B5EF4-FFF2-40B4-BE49-F238E27FC236}">
-                <a16:creationId xmlns:a16="http://schemas.microsoft.com/office/drawing/2014/main" id="{9FAF43B8-DF3B-42C8-A126-A252DA5513E3}"/>
+                <a16:creationId xmlns:a16="http://schemas.microsoft.com/office/drawing/2014/main" id="{036043EB-3CC4-4BB1-95CB-9BC55AB4ABBE}"/>
               </a:ext>
             </a:extLst>
           </p:cNvPr>
@@ -6290,7 +6290,7 @@
           <p:cNvPr id="5" name="TextBox 4">
             <a:extLst xmlns:a="http://schemas.openxmlformats.org/drawingml/2006/main">
               <a:ext uri="{FF2B5EF4-FFF2-40B4-BE49-F238E27FC236}">
-                <a16:creationId xmlns:a16="http://schemas.microsoft.com/office/drawing/2014/main" id="{53F08947-F871-4E59-B8E2-D41E29BDB1E6}"/>
+                <a16:creationId xmlns:a16="http://schemas.microsoft.com/office/drawing/2014/main" id="{035A05AD-21CB-4867-9C38-7CE2C1479AB6}"/>
               </a:ext>
             </a:extLst>
           </p:cNvPr>
@@ -6353,7 +6353,7 @@
           <p:cNvPr id="6" name="shape_slide_11_reproducibility_1">
             <a:extLst xmlns:a="http://schemas.openxmlformats.org/drawingml/2006/main">
               <a:ext uri="{FF2B5EF4-FFF2-40B4-BE49-F238E27FC236}">
-                <a16:creationId xmlns:a16="http://schemas.microsoft.com/office/drawing/2014/main" id="{CA59C6E7-20C5-44AD-B947-48F9D5F4B1CF}"/>
+                <a16:creationId xmlns:a16="http://schemas.microsoft.com/office/drawing/2014/main" id="{1A4A23F3-DD8D-4A06-802C-76996444AA4B}"/>
               </a:ext>
             </a:extLst>
           </p:cNvPr>
@@ -6408,7 +6408,7 @@
           <p:cNvPr id="7" name="shape_slide_11_reproducibility_1_textbox">
             <a:extLst xmlns:a="http://schemas.openxmlformats.org/drawingml/2006/main">
               <a:ext uri="{FF2B5EF4-FFF2-40B4-BE49-F238E27FC236}">
-                <a16:creationId xmlns:a16="http://schemas.microsoft.com/office/drawing/2014/main" id="{C3808074-7DD9-4C5A-B309-42F2EF606495}"/>
+                <a16:creationId xmlns:a16="http://schemas.microsoft.com/office/drawing/2014/main" id="{22DE29F9-7AED-442C-8522-9311BCE9355E}"/>
               </a:ext>
             </a:extLst>
           </p:cNvPr>
@@ -6607,7 +6607,7 @@
           <p:cNvPr id="8" name="shape_slide_11_reproducibility_2">
             <a:extLst xmlns:a="http://schemas.openxmlformats.org/drawingml/2006/main">
               <a:ext uri="{FF2B5EF4-FFF2-40B4-BE49-F238E27FC236}">
-                <a16:creationId xmlns:a16="http://schemas.microsoft.com/office/drawing/2014/main" id="{19127BA4-9A42-4FC5-9C11-CE80248E6D89}"/>
+                <a16:creationId xmlns:a16="http://schemas.microsoft.com/office/drawing/2014/main" id="{8A0D1225-F9FB-4974-8C83-F15AFB37788B}"/>
               </a:ext>
             </a:extLst>
           </p:cNvPr>
@@ -6662,7 +6662,7 @@
           <p:cNvPr id="9" name="shape_slide_11_reproducibility_2_textbox">
             <a:extLst xmlns:a="http://schemas.openxmlformats.org/drawingml/2006/main">
               <a:ext uri="{FF2B5EF4-FFF2-40B4-BE49-F238E27FC236}">
-                <a16:creationId xmlns:a16="http://schemas.microsoft.com/office/drawing/2014/main" id="{7AD84FCF-9B9A-419B-BECE-86D7FB5725FE}"/>
+                <a16:creationId xmlns:a16="http://schemas.microsoft.com/office/drawing/2014/main" id="{93D7F555-C9AF-43DC-817C-D91BF0DD0AD9}"/>
               </a:ext>
             </a:extLst>
           </p:cNvPr>
@@ -6783,7 +6783,7 @@
     </p:spTree>
     <p:extLst>
       <p:ext uri="{BB962C8B-B14F-4D97-AF65-F5344CB8AC3E}">
-        <p14:creationId xmlns:p14="http://schemas.microsoft.com/office/powerpoint/2010/main" val="41047589"/>
+        <p14:creationId xmlns:p14="http://schemas.microsoft.com/office/powerpoint/2010/main" val="854830562"/>
       </p:ext>
     </p:extLst>
   </p:cSld>
@@ -6807,7 +6807,7 @@
           <p:cNvPr id="2" name="Rectangle 1">
             <a:extLst xmlns:a="http://schemas.openxmlformats.org/drawingml/2006/main">
               <a:ext uri="{FF2B5EF4-FFF2-40B4-BE49-F238E27FC236}">
-                <a16:creationId xmlns:a16="http://schemas.microsoft.com/office/drawing/2014/main" id="{AA8E2D4D-F011-4B2F-A1C1-5C3CF47E2629}"/>
+                <a16:creationId xmlns:a16="http://schemas.microsoft.com/office/drawing/2014/main" id="{0F7BC123-889A-4136-AE1F-AF9A53F871A6}"/>
               </a:ext>
             </a:extLst>
           </p:cNvPr>
@@ -6860,7 +6860,7 @@
           <p:cNvPr id="3" name="Rectangle 2">
             <a:extLst xmlns:a="http://schemas.openxmlformats.org/drawingml/2006/main">
               <a:ext uri="{FF2B5EF4-FFF2-40B4-BE49-F238E27FC236}">
-                <a16:creationId xmlns:a16="http://schemas.microsoft.com/office/drawing/2014/main" id="{2CAECEB4-3011-4731-AF5E-97B91F85E8B2}"/>
+                <a16:creationId xmlns:a16="http://schemas.microsoft.com/office/drawing/2014/main" id="{160D118F-B075-42FF-9164-C58F3DBFB3C4}"/>
               </a:ext>
             </a:extLst>
           </p:cNvPr>
@@ -6913,7 +6913,7 @@
           <p:cNvPr id="4" name="shape_slide_12_conclusion">
             <a:extLst xmlns:a="http://schemas.openxmlformats.org/drawingml/2006/main">
               <a:ext uri="{FF2B5EF4-FFF2-40B4-BE49-F238E27FC236}">
-                <a16:creationId xmlns:a16="http://schemas.microsoft.com/office/drawing/2014/main" id="{EFBEB6AC-46E4-49ED-B239-8D3EDB421AE4}"/>
+                <a16:creationId xmlns:a16="http://schemas.microsoft.com/office/drawing/2014/main" id="{3D9DA456-305A-4FB8-A28C-B8DA4719D60C}"/>
               </a:ext>
             </a:extLst>
           </p:cNvPr>
@@ -7110,7 +7110,7 @@
     </p:spTree>
     <p:extLst>
       <p:ext uri="{BB962C8B-B14F-4D97-AF65-F5344CB8AC3E}">
-        <p14:creationId xmlns:p14="http://schemas.microsoft.com/office/powerpoint/2010/main" val="1852466913"/>
+        <p14:creationId xmlns:p14="http://schemas.microsoft.com/office/powerpoint/2010/main" val="1786634205"/>
       </p:ext>
     </p:extLst>
   </p:cSld>
@@ -7134,7 +7134,7 @@
           <p:cNvPr id="2" name="Rectangle 1">
             <a:extLst xmlns:a="http://schemas.openxmlformats.org/drawingml/2006/main">
               <a:ext uri="{FF2B5EF4-FFF2-40B4-BE49-F238E27FC236}">
-                <a16:creationId xmlns:a16="http://schemas.microsoft.com/office/drawing/2014/main" id="{0C012B98-229C-4103-8E78-62A8D55E7273}"/>
+                <a16:creationId xmlns:a16="http://schemas.microsoft.com/office/drawing/2014/main" id="{D9860D5D-AA14-463B-A78C-92091B8CE933}"/>
               </a:ext>
             </a:extLst>
           </p:cNvPr>
@@ -7187,7 +7187,7 @@
           <p:cNvPr id="3" name="Rectangle 2">
             <a:extLst xmlns:a="http://schemas.openxmlformats.org/drawingml/2006/main">
               <a:ext uri="{FF2B5EF4-FFF2-40B4-BE49-F238E27FC236}">
-                <a16:creationId xmlns:a16="http://schemas.microsoft.com/office/drawing/2014/main" id="{AC4C26E2-FD4B-4D9E-B278-2758BEFBD682}"/>
+                <a16:creationId xmlns:a16="http://schemas.microsoft.com/office/drawing/2014/main" id="{0F856512-6CD1-4770-B737-4FAA3F020230}"/>
               </a:ext>
             </a:extLst>
           </p:cNvPr>
@@ -7240,7 +7240,7 @@
           <p:cNvPr id="4" name="Rectangle 3">
             <a:extLst xmlns:a="http://schemas.openxmlformats.org/drawingml/2006/main">
               <a:ext uri="{FF2B5EF4-FFF2-40B4-BE49-F238E27FC236}">
-                <a16:creationId xmlns:a16="http://schemas.microsoft.com/office/drawing/2014/main" id="{7A6219C9-BD14-43BE-A59B-A5F52F72B743}"/>
+                <a16:creationId xmlns:a16="http://schemas.microsoft.com/office/drawing/2014/main" id="{667CEF3C-C5C5-4EB2-8097-A232CF424DD1}"/>
               </a:ext>
             </a:extLst>
           </p:cNvPr>
@@ -7293,7 +7293,7 @@
           <p:cNvPr id="5" name="TextBox 4">
             <a:extLst xmlns:a="http://schemas.openxmlformats.org/drawingml/2006/main">
               <a:ext uri="{FF2B5EF4-FFF2-40B4-BE49-F238E27FC236}">
-                <a16:creationId xmlns:a16="http://schemas.microsoft.com/office/drawing/2014/main" id="{8A08BE3C-8783-446B-8887-15F10AFCCA39}"/>
+                <a16:creationId xmlns:a16="http://schemas.microsoft.com/office/drawing/2014/main" id="{501E9230-81E8-493C-AF81-87A95C529138}"/>
               </a:ext>
             </a:extLst>
           </p:cNvPr>
@@ -7356,7 +7356,7 @@
           <p:cNvPr id="6" name="shape_slide_2_problem">
             <a:extLst xmlns:a="http://schemas.openxmlformats.org/drawingml/2006/main">
               <a:ext uri="{FF2B5EF4-FFF2-40B4-BE49-F238E27FC236}">
-                <a16:creationId xmlns:a16="http://schemas.microsoft.com/office/drawing/2014/main" id="{5F022C2F-7216-4FC3-8415-205227B33796}"/>
+                <a16:creationId xmlns:a16="http://schemas.microsoft.com/office/drawing/2014/main" id="{22B2CB40-1BAA-4612-872C-7084C10163D4}"/>
               </a:ext>
             </a:extLst>
           </p:cNvPr>
@@ -7411,7 +7411,7 @@
           <p:cNvPr id="7" name="shape_slide_2_problem_textbox">
             <a:extLst xmlns:a="http://schemas.openxmlformats.org/drawingml/2006/main">
               <a:ext uri="{FF2B5EF4-FFF2-40B4-BE49-F238E27FC236}">
-                <a16:creationId xmlns:a16="http://schemas.microsoft.com/office/drawing/2014/main" id="{4BB42AF1-83EF-4CD6-8DFF-4A3E01F4A410}"/>
+                <a16:creationId xmlns:a16="http://schemas.microsoft.com/office/drawing/2014/main" id="{642A4797-6247-49D0-AC9D-A3F59185ED58}"/>
               </a:ext>
             </a:extLst>
           </p:cNvPr>
@@ -7515,7 +7515,7 @@
           <p:cNvPr id="8" name="shape_slide_2_challenge">
             <a:extLst xmlns:a="http://schemas.openxmlformats.org/drawingml/2006/main">
               <a:ext uri="{FF2B5EF4-FFF2-40B4-BE49-F238E27FC236}">
-                <a16:creationId xmlns:a16="http://schemas.microsoft.com/office/drawing/2014/main" id="{2A244573-738C-4C3A-9B19-C987CA2F7202}"/>
+                <a16:creationId xmlns:a16="http://schemas.microsoft.com/office/drawing/2014/main" id="{34FB1EDF-7410-4721-BD0E-4DA62E34EE39}"/>
               </a:ext>
             </a:extLst>
           </p:cNvPr>
@@ -7570,7 +7570,7 @@
           <p:cNvPr id="9" name="shape_slide_2_challenge_textbox">
             <a:extLst xmlns:a="http://schemas.openxmlformats.org/drawingml/2006/main">
               <a:ext uri="{FF2B5EF4-FFF2-40B4-BE49-F238E27FC236}">
-                <a16:creationId xmlns:a16="http://schemas.microsoft.com/office/drawing/2014/main" id="{18387E80-9DC8-4056-B733-F301F73E1B94}"/>
+                <a16:creationId xmlns:a16="http://schemas.microsoft.com/office/drawing/2014/main" id="{1294F231-4CF3-4B38-B801-7493218C6B35}"/>
               </a:ext>
             </a:extLst>
           </p:cNvPr>
@@ -7674,7 +7674,7 @@
           <p:cNvPr id="10" name="shape_slide_2_motivation">
             <a:extLst xmlns:a="http://schemas.openxmlformats.org/drawingml/2006/main">
               <a:ext uri="{FF2B5EF4-FFF2-40B4-BE49-F238E27FC236}">
-                <a16:creationId xmlns:a16="http://schemas.microsoft.com/office/drawing/2014/main" id="{F576A42F-22F0-4E9B-BF5B-91D2F41F75C8}"/>
+                <a16:creationId xmlns:a16="http://schemas.microsoft.com/office/drawing/2014/main" id="{970250AD-48C5-4066-A1F4-672B34C2A86B}"/>
               </a:ext>
             </a:extLst>
           </p:cNvPr>
@@ -7729,7 +7729,7 @@
           <p:cNvPr id="11" name="shape_slide_2_motivation_textbox">
             <a:extLst xmlns:a="http://schemas.openxmlformats.org/drawingml/2006/main">
               <a:ext uri="{FF2B5EF4-FFF2-40B4-BE49-F238E27FC236}">
-                <a16:creationId xmlns:a16="http://schemas.microsoft.com/office/drawing/2014/main" id="{420C1D12-B208-4E55-AB00-D5E6490035BF}"/>
+                <a16:creationId xmlns:a16="http://schemas.microsoft.com/office/drawing/2014/main" id="{526BEAD2-9576-4474-87B5-631C4B6AF215}"/>
               </a:ext>
             </a:extLst>
           </p:cNvPr>
@@ -7888,7 +7888,7 @@
     </p:spTree>
     <p:extLst>
       <p:ext uri="{BB962C8B-B14F-4D97-AF65-F5344CB8AC3E}">
-        <p14:creationId xmlns:p14="http://schemas.microsoft.com/office/powerpoint/2010/main" val="701525255"/>
+        <p14:creationId xmlns:p14="http://schemas.microsoft.com/office/powerpoint/2010/main" val="597052031"/>
       </p:ext>
     </p:extLst>
   </p:cSld>
@@ -7912,7 +7912,7 @@
           <p:cNvPr id="2" name="Rectangle 1">
             <a:extLst xmlns:a="http://schemas.openxmlformats.org/drawingml/2006/main">
               <a:ext uri="{FF2B5EF4-FFF2-40B4-BE49-F238E27FC236}">
-                <a16:creationId xmlns:a16="http://schemas.microsoft.com/office/drawing/2014/main" id="{CB1D51A0-6BCA-47F6-8E8D-A06EBB34765F}"/>
+                <a16:creationId xmlns:a16="http://schemas.microsoft.com/office/drawing/2014/main" id="{DC3B1ADB-2D4F-4639-BA9B-8FB7220057BC}"/>
               </a:ext>
             </a:extLst>
           </p:cNvPr>
@@ -7965,7 +7965,7 @@
           <p:cNvPr id="3" name="Rectangle 2">
             <a:extLst xmlns:a="http://schemas.openxmlformats.org/drawingml/2006/main">
               <a:ext uri="{FF2B5EF4-FFF2-40B4-BE49-F238E27FC236}">
-                <a16:creationId xmlns:a16="http://schemas.microsoft.com/office/drawing/2014/main" id="{1182F2B2-7396-46B4-921F-EC7AAAF99671}"/>
+                <a16:creationId xmlns:a16="http://schemas.microsoft.com/office/drawing/2014/main" id="{73E7BFCF-B1DF-47AC-AC39-0DD97412F6E2}"/>
               </a:ext>
             </a:extLst>
           </p:cNvPr>
@@ -8018,7 +8018,7 @@
           <p:cNvPr id="4" name="Rectangle 3">
             <a:extLst xmlns:a="http://schemas.openxmlformats.org/drawingml/2006/main">
               <a:ext uri="{FF2B5EF4-FFF2-40B4-BE49-F238E27FC236}">
-                <a16:creationId xmlns:a16="http://schemas.microsoft.com/office/drawing/2014/main" id="{3553858B-2E25-46EA-BCD2-9469ADCF395E}"/>
+                <a16:creationId xmlns:a16="http://schemas.microsoft.com/office/drawing/2014/main" id="{D5C1CEB2-FF58-404B-9E13-41A113320BA1}"/>
               </a:ext>
             </a:extLst>
           </p:cNvPr>
@@ -8071,7 +8071,7 @@
           <p:cNvPr id="5" name="TextBox 4">
             <a:extLst xmlns:a="http://schemas.openxmlformats.org/drawingml/2006/main">
               <a:ext uri="{FF2B5EF4-FFF2-40B4-BE49-F238E27FC236}">
-                <a16:creationId xmlns:a16="http://schemas.microsoft.com/office/drawing/2014/main" id="{75418BF0-7D1D-40D0-93B9-C3C55340B426}"/>
+                <a16:creationId xmlns:a16="http://schemas.microsoft.com/office/drawing/2014/main" id="{BE244286-F1F9-47B4-A95B-67EC493278FB}"/>
               </a:ext>
             </a:extLst>
           </p:cNvPr>
@@ -8134,7 +8134,7 @@
           <p:cNvPr id="6" name="shape_slide_3_baseline">
             <a:extLst xmlns:a="http://schemas.openxmlformats.org/drawingml/2006/main">
               <a:ext uri="{FF2B5EF4-FFF2-40B4-BE49-F238E27FC236}">
-                <a16:creationId xmlns:a16="http://schemas.microsoft.com/office/drawing/2014/main" id="{F6BCA81E-5D9A-4674-8855-6084E6A6B8B0}"/>
+                <a16:creationId xmlns:a16="http://schemas.microsoft.com/office/drawing/2014/main" id="{A54D5CF8-172D-4D4D-9712-2221DEF69725}"/>
               </a:ext>
             </a:extLst>
           </p:cNvPr>
@@ -8189,7 +8189,7 @@
           <p:cNvPr id="7" name="shape_slide_3_baseline_textbox">
             <a:extLst xmlns:a="http://schemas.openxmlformats.org/drawingml/2006/main">
               <a:ext uri="{FF2B5EF4-FFF2-40B4-BE49-F238E27FC236}">
-                <a16:creationId xmlns:a16="http://schemas.microsoft.com/office/drawing/2014/main" id="{9D3847D1-BD2B-4E15-AF27-B50EC26A6349}"/>
+                <a16:creationId xmlns:a16="http://schemas.microsoft.com/office/drawing/2014/main" id="{CF38B654-649A-4EFA-90D5-3F3D315F117F}"/>
               </a:ext>
             </a:extLst>
           </p:cNvPr>
@@ -8312,7 +8312,7 @@
           <p:cNvPr id="8" name="shape_slide_3_rag">
             <a:extLst xmlns:a="http://schemas.openxmlformats.org/drawingml/2006/main">
               <a:ext uri="{FF2B5EF4-FFF2-40B4-BE49-F238E27FC236}">
-                <a16:creationId xmlns:a16="http://schemas.microsoft.com/office/drawing/2014/main" id="{D50A07BA-AC22-48A6-B8EE-BB2C33814B2A}"/>
+                <a16:creationId xmlns:a16="http://schemas.microsoft.com/office/drawing/2014/main" id="{70A44026-6FBA-42D4-90AA-C6774128C391}"/>
               </a:ext>
             </a:extLst>
           </p:cNvPr>
@@ -8367,7 +8367,7 @@
           <p:cNvPr id="9" name="shape_slide_3_rag_textbox">
             <a:extLst xmlns:a="http://schemas.openxmlformats.org/drawingml/2006/main">
               <a:ext uri="{FF2B5EF4-FFF2-40B4-BE49-F238E27FC236}">
-                <a16:creationId xmlns:a16="http://schemas.microsoft.com/office/drawing/2014/main" id="{3F9F5751-1422-4AF7-B7CD-E9AA257C8A39}"/>
+                <a16:creationId xmlns:a16="http://schemas.microsoft.com/office/drawing/2014/main" id="{D8AEFE2A-132B-4707-A38F-D338033FA3F8}"/>
               </a:ext>
             </a:extLst>
           </p:cNvPr>
@@ -8509,7 +8509,7 @@
           <p:cNvPr id="10" name="shape_slide_3_invariants">
             <a:extLst xmlns:a="http://schemas.openxmlformats.org/drawingml/2006/main">
               <a:ext uri="{FF2B5EF4-FFF2-40B4-BE49-F238E27FC236}">
-                <a16:creationId xmlns:a16="http://schemas.microsoft.com/office/drawing/2014/main" id="{237A6BEC-9371-471B-A13A-DF137F4AB2E5}"/>
+                <a16:creationId xmlns:a16="http://schemas.microsoft.com/office/drawing/2014/main" id="{347FBC75-2C24-4A96-BB08-02A01E5E0DE2}"/>
               </a:ext>
             </a:extLst>
           </p:cNvPr>
@@ -8564,7 +8564,7 @@
           <p:cNvPr id="11" name="shape_slide_3_invariants_textbox">
             <a:extLst xmlns:a="http://schemas.openxmlformats.org/drawingml/2006/main">
               <a:ext uri="{FF2B5EF4-FFF2-40B4-BE49-F238E27FC236}">
-                <a16:creationId xmlns:a16="http://schemas.microsoft.com/office/drawing/2014/main" id="{4C9DA478-C79A-4494-94F0-D3D5481FA225}"/>
+                <a16:creationId xmlns:a16="http://schemas.microsoft.com/office/drawing/2014/main" id="{E3A80C4D-F61F-40AE-BC57-A2793494A6FC}"/>
               </a:ext>
             </a:extLst>
           </p:cNvPr>
@@ -8666,7 +8666,7 @@
     </p:spTree>
     <p:extLst>
       <p:ext uri="{BB962C8B-B14F-4D97-AF65-F5344CB8AC3E}">
-        <p14:creationId xmlns:p14="http://schemas.microsoft.com/office/powerpoint/2010/main" val="1796768019"/>
+        <p14:creationId xmlns:p14="http://schemas.microsoft.com/office/powerpoint/2010/main" val="1734230941"/>
       </p:ext>
     </p:extLst>
   </p:cSld>
@@ -8690,7 +8690,7 @@
           <p:cNvPr id="2" name="Rectangle 1">
             <a:extLst xmlns:a="http://schemas.openxmlformats.org/drawingml/2006/main">
               <a:ext uri="{FF2B5EF4-FFF2-40B4-BE49-F238E27FC236}">
-                <a16:creationId xmlns:a16="http://schemas.microsoft.com/office/drawing/2014/main" id="{4124A0DB-879B-4C44-946E-A241A22C88D8}"/>
+                <a16:creationId xmlns:a16="http://schemas.microsoft.com/office/drawing/2014/main" id="{6C5F7E5B-843A-44FD-8E6D-CAD1E53668C8}"/>
               </a:ext>
             </a:extLst>
           </p:cNvPr>
@@ -8743,7 +8743,7 @@
           <p:cNvPr id="3" name="Rectangle 2">
             <a:extLst xmlns:a="http://schemas.openxmlformats.org/drawingml/2006/main">
               <a:ext uri="{FF2B5EF4-FFF2-40B4-BE49-F238E27FC236}">
-                <a16:creationId xmlns:a16="http://schemas.microsoft.com/office/drawing/2014/main" id="{C1ECC9AF-068F-4719-B6DD-9E078242532D}"/>
+                <a16:creationId xmlns:a16="http://schemas.microsoft.com/office/drawing/2014/main" id="{4E231BDB-C353-4E1A-8116-A3AABB1C4E81}"/>
               </a:ext>
             </a:extLst>
           </p:cNvPr>
@@ -8796,7 +8796,7 @@
           <p:cNvPr id="4" name="Rectangle 3">
             <a:extLst xmlns:a="http://schemas.openxmlformats.org/drawingml/2006/main">
               <a:ext uri="{FF2B5EF4-FFF2-40B4-BE49-F238E27FC236}">
-                <a16:creationId xmlns:a16="http://schemas.microsoft.com/office/drawing/2014/main" id="{6A82C4FA-BB38-475E-9817-DA2F3A2BF10B}"/>
+                <a16:creationId xmlns:a16="http://schemas.microsoft.com/office/drawing/2014/main" id="{F9AF8943-16DD-41CD-A8DB-47FBF0695857}"/>
               </a:ext>
             </a:extLst>
           </p:cNvPr>
@@ -8849,7 +8849,7 @@
           <p:cNvPr id="5" name="TextBox 4">
             <a:extLst xmlns:a="http://schemas.openxmlformats.org/drawingml/2006/main">
               <a:ext uri="{FF2B5EF4-FFF2-40B4-BE49-F238E27FC236}">
-                <a16:creationId xmlns:a16="http://schemas.microsoft.com/office/drawing/2014/main" id="{04D23D65-76A2-4415-8902-597130830471}"/>
+                <a16:creationId xmlns:a16="http://schemas.microsoft.com/office/drawing/2014/main" id="{807AE98E-E888-44F3-82D7-EBE389C710D4}"/>
               </a:ext>
             </a:extLst>
           </p:cNvPr>
@@ -8912,7 +8912,7 @@
           <p:cNvPr id="6" name="shape_slide_4_dataset_topology">
             <a:extLst xmlns:a="http://schemas.openxmlformats.org/drawingml/2006/main">
               <a:ext uri="{FF2B5EF4-FFF2-40B4-BE49-F238E27FC236}">
-                <a16:creationId xmlns:a16="http://schemas.microsoft.com/office/drawing/2014/main" id="{5B8399A5-24D3-449F-AD3E-7052245E67F0}"/>
+                <a16:creationId xmlns:a16="http://schemas.microsoft.com/office/drawing/2014/main" id="{2C861B08-9903-42B1-8709-5BD301AE6B38}"/>
               </a:ext>
             </a:extLst>
           </p:cNvPr>
@@ -8967,7 +8967,7 @@
           <p:cNvPr id="7" name="shape_slide_4_dataset_topology_textbox">
             <a:extLst xmlns:a="http://schemas.openxmlformats.org/drawingml/2006/main">
               <a:ext uri="{FF2B5EF4-FFF2-40B4-BE49-F238E27FC236}">
-                <a16:creationId xmlns:a16="http://schemas.microsoft.com/office/drawing/2014/main" id="{4F020FF6-F651-44FF-B18C-EDA74DD1272A}"/>
+                <a16:creationId xmlns:a16="http://schemas.microsoft.com/office/drawing/2014/main" id="{9EE15A42-BA27-4631-AEB5-B19F290BE0F4}"/>
               </a:ext>
             </a:extLst>
           </p:cNvPr>
@@ -9147,7 +9147,7 @@
           <p:cNvPr id="8" name="shape_slide_4_representations">
             <a:extLst xmlns:a="http://schemas.openxmlformats.org/drawingml/2006/main">
               <a:ext uri="{FF2B5EF4-FFF2-40B4-BE49-F238E27FC236}">
-                <a16:creationId xmlns:a16="http://schemas.microsoft.com/office/drawing/2014/main" id="{AF3CD8FD-F7E1-47C6-BE21-2F42017FAB6F}"/>
+                <a16:creationId xmlns:a16="http://schemas.microsoft.com/office/drawing/2014/main" id="{698CF492-1F6D-45EE-B8A0-DA5AF2D6AD09}"/>
               </a:ext>
             </a:extLst>
           </p:cNvPr>
@@ -9202,7 +9202,7 @@
           <p:cNvPr id="9" name="shape_slide_4_representations_textbox">
             <a:extLst xmlns:a="http://schemas.openxmlformats.org/drawingml/2006/main">
               <a:ext uri="{FF2B5EF4-FFF2-40B4-BE49-F238E27FC236}">
-                <a16:creationId xmlns:a16="http://schemas.microsoft.com/office/drawing/2014/main" id="{7DF99EB8-4FB1-4C2E-B2A7-8270E2893F97}"/>
+                <a16:creationId xmlns:a16="http://schemas.microsoft.com/office/drawing/2014/main" id="{D083AB5C-7961-4B0D-9EE9-458CD507F14B}"/>
               </a:ext>
             </a:extLst>
           </p:cNvPr>
@@ -9361,7 +9361,7 @@
     </p:spTree>
     <p:extLst>
       <p:ext uri="{BB962C8B-B14F-4D97-AF65-F5344CB8AC3E}">
-        <p14:creationId xmlns:p14="http://schemas.microsoft.com/office/powerpoint/2010/main" val="1527800626"/>
+        <p14:creationId xmlns:p14="http://schemas.microsoft.com/office/powerpoint/2010/main" val="62891918"/>
       </p:ext>
     </p:extLst>
   </p:cSld>
@@ -9385,7 +9385,7 @@
           <p:cNvPr id="2" name="Rectangle 1">
             <a:extLst xmlns:a="http://schemas.openxmlformats.org/drawingml/2006/main">
               <a:ext uri="{FF2B5EF4-FFF2-40B4-BE49-F238E27FC236}">
-                <a16:creationId xmlns:a16="http://schemas.microsoft.com/office/drawing/2014/main" id="{076D9216-0770-4488-AE4B-723FE30720A4}"/>
+                <a16:creationId xmlns:a16="http://schemas.microsoft.com/office/drawing/2014/main" id="{2285CBF9-1B28-41AB-98A2-133CF5A71668}"/>
               </a:ext>
             </a:extLst>
           </p:cNvPr>
@@ -9438,7 +9438,7 @@
           <p:cNvPr id="3" name="Rectangle 2">
             <a:extLst xmlns:a="http://schemas.openxmlformats.org/drawingml/2006/main">
               <a:ext uri="{FF2B5EF4-FFF2-40B4-BE49-F238E27FC236}">
-                <a16:creationId xmlns:a16="http://schemas.microsoft.com/office/drawing/2014/main" id="{057A9CFC-7D8E-4A7C-887F-372ACC47BFE7}"/>
+                <a16:creationId xmlns:a16="http://schemas.microsoft.com/office/drawing/2014/main" id="{B3C99368-C1BF-47A8-A63C-762300747A1F}"/>
               </a:ext>
             </a:extLst>
           </p:cNvPr>
@@ -9491,7 +9491,7 @@
           <p:cNvPr id="4" name="Rectangle 3">
             <a:extLst xmlns:a="http://schemas.openxmlformats.org/drawingml/2006/main">
               <a:ext uri="{FF2B5EF4-FFF2-40B4-BE49-F238E27FC236}">
-                <a16:creationId xmlns:a16="http://schemas.microsoft.com/office/drawing/2014/main" id="{7DB58765-8DFE-4D0A-B6C6-59055CE0D786}"/>
+                <a16:creationId xmlns:a16="http://schemas.microsoft.com/office/drawing/2014/main" id="{9859301B-1BFB-4B9F-A326-01520B32BC5C}"/>
               </a:ext>
             </a:extLst>
           </p:cNvPr>
@@ -9544,7 +9544,7 @@
           <p:cNvPr id="5" name="TextBox 4">
             <a:extLst xmlns:a="http://schemas.openxmlformats.org/drawingml/2006/main">
               <a:ext uri="{FF2B5EF4-FFF2-40B4-BE49-F238E27FC236}">
-                <a16:creationId xmlns:a16="http://schemas.microsoft.com/office/drawing/2014/main" id="{6D98833D-F712-4693-AB4B-319B0D9F3F75}"/>
+                <a16:creationId xmlns:a16="http://schemas.microsoft.com/office/drawing/2014/main" id="{1ADF30DF-00C8-4D5B-B47A-9A86FD04061E}"/>
               </a:ext>
             </a:extLst>
           </p:cNvPr>
@@ -9607,7 +9607,7 @@
           <p:cNvPr id="6" name="shape_slide_5_decisions">
             <a:extLst xmlns:a="http://schemas.openxmlformats.org/drawingml/2006/main">
               <a:ext uri="{FF2B5EF4-FFF2-40B4-BE49-F238E27FC236}">
-                <a16:creationId xmlns:a16="http://schemas.microsoft.com/office/drawing/2014/main" id="{CEDA327F-6315-4BF2-950A-92271A408878}"/>
+                <a16:creationId xmlns:a16="http://schemas.microsoft.com/office/drawing/2014/main" id="{9692BF9B-FDC2-4EBE-A98E-733C74F4ED8F}"/>
               </a:ext>
             </a:extLst>
           </p:cNvPr>
@@ -9662,7 +9662,7 @@
           <p:cNvPr id="7" name="shape_slide_5_decisions_textbox">
             <a:extLst xmlns:a="http://schemas.openxmlformats.org/drawingml/2006/main">
               <a:ext uri="{FF2B5EF4-FFF2-40B4-BE49-F238E27FC236}">
-                <a16:creationId xmlns:a16="http://schemas.microsoft.com/office/drawing/2014/main" id="{663C6AD6-DB3B-4297-AD9C-7A59B5625A45}"/>
+                <a16:creationId xmlns:a16="http://schemas.microsoft.com/office/drawing/2014/main" id="{555AB002-4850-4D74-87D5-B3398319CEED}"/>
               </a:ext>
             </a:extLst>
           </p:cNvPr>
@@ -9880,7 +9880,7 @@
           <p:cNvPr id="8" name="shape_slide_5_criteria">
             <a:extLst xmlns:a="http://schemas.openxmlformats.org/drawingml/2006/main">
               <a:ext uri="{FF2B5EF4-FFF2-40B4-BE49-F238E27FC236}">
-                <a16:creationId xmlns:a16="http://schemas.microsoft.com/office/drawing/2014/main" id="{E6FCB89C-E050-4492-B070-1A9667796BAF}"/>
+                <a16:creationId xmlns:a16="http://schemas.microsoft.com/office/drawing/2014/main" id="{FC2F85B5-73A7-45EC-9492-0B0999FE7F6A}"/>
               </a:ext>
             </a:extLst>
           </p:cNvPr>
@@ -9935,7 +9935,7 @@
           <p:cNvPr id="9" name="shape_slide_5_criteria_textbox">
             <a:extLst xmlns:a="http://schemas.openxmlformats.org/drawingml/2006/main">
               <a:ext uri="{FF2B5EF4-FFF2-40B4-BE49-F238E27FC236}">
-                <a16:creationId xmlns:a16="http://schemas.microsoft.com/office/drawing/2014/main" id="{286BF638-88AC-4F80-BF8A-34D5EBFF403A}"/>
+                <a16:creationId xmlns:a16="http://schemas.microsoft.com/office/drawing/2014/main" id="{7EFFEEDA-DED2-4E41-9483-C2B7134023AD}"/>
               </a:ext>
             </a:extLst>
           </p:cNvPr>
@@ -10170,7 +10170,7 @@
     </p:spTree>
     <p:extLst>
       <p:ext uri="{BB962C8B-B14F-4D97-AF65-F5344CB8AC3E}">
-        <p14:creationId xmlns:p14="http://schemas.microsoft.com/office/powerpoint/2010/main" val="50173797"/>
+        <p14:creationId xmlns:p14="http://schemas.microsoft.com/office/powerpoint/2010/main" val="522908151"/>
       </p:ext>
     </p:extLst>
   </p:cSld>
@@ -10194,7 +10194,7 @@
           <p:cNvPr id="2" name="Rectangle 1">
             <a:extLst xmlns:a="http://schemas.openxmlformats.org/drawingml/2006/main">
               <a:ext uri="{FF2B5EF4-FFF2-40B4-BE49-F238E27FC236}">
-                <a16:creationId xmlns:a16="http://schemas.microsoft.com/office/drawing/2014/main" id="{C3E486CD-3397-4FB5-859E-B3B30002F216}"/>
+                <a16:creationId xmlns:a16="http://schemas.microsoft.com/office/drawing/2014/main" id="{D5C0A74A-3FE9-4DC2-9621-EC8AF604BFC6}"/>
               </a:ext>
             </a:extLst>
           </p:cNvPr>
@@ -10247,7 +10247,7 @@
           <p:cNvPr id="3" name="Rectangle 2">
             <a:extLst xmlns:a="http://schemas.openxmlformats.org/drawingml/2006/main">
               <a:ext uri="{FF2B5EF4-FFF2-40B4-BE49-F238E27FC236}">
-                <a16:creationId xmlns:a16="http://schemas.microsoft.com/office/drawing/2014/main" id="{C1298521-C471-45FA-A520-551E3D6C04D0}"/>
+                <a16:creationId xmlns:a16="http://schemas.microsoft.com/office/drawing/2014/main" id="{00023F21-F7B4-4643-A5B0-70FB389C8E2F}"/>
               </a:ext>
             </a:extLst>
           </p:cNvPr>
@@ -10300,7 +10300,7 @@
           <p:cNvPr id="4" name="Rectangle 3">
             <a:extLst xmlns:a="http://schemas.openxmlformats.org/drawingml/2006/main">
               <a:ext uri="{FF2B5EF4-FFF2-40B4-BE49-F238E27FC236}">
-                <a16:creationId xmlns:a16="http://schemas.microsoft.com/office/drawing/2014/main" id="{2023334A-6C0A-4270-A80F-67482FB3142D}"/>
+                <a16:creationId xmlns:a16="http://schemas.microsoft.com/office/drawing/2014/main" id="{8E2A45B4-BD57-4913-8011-2EA2C18128ED}"/>
               </a:ext>
             </a:extLst>
           </p:cNvPr>
@@ -10353,7 +10353,7 @@
           <p:cNvPr id="5" name="TextBox 4">
             <a:extLst xmlns:a="http://schemas.openxmlformats.org/drawingml/2006/main">
               <a:ext uri="{FF2B5EF4-FFF2-40B4-BE49-F238E27FC236}">
-                <a16:creationId xmlns:a16="http://schemas.microsoft.com/office/drawing/2014/main" id="{A3192074-C681-4122-939C-B0DF37942747}"/>
+                <a16:creationId xmlns:a16="http://schemas.microsoft.com/office/drawing/2014/main" id="{7B2B80E5-B628-482A-B583-59B3D611AC17}"/>
               </a:ext>
             </a:extLst>
           </p:cNvPr>
@@ -10416,7 +10416,7 @@
           <p:cNvPr id="6" name="shape_slide_6_retrieval_diagnostics">
             <a:extLst xmlns:a="http://schemas.openxmlformats.org/drawingml/2006/main">
               <a:ext uri="{FF2B5EF4-FFF2-40B4-BE49-F238E27FC236}">
-                <a16:creationId xmlns:a16="http://schemas.microsoft.com/office/drawing/2014/main" id="{A39246EB-6D62-4E5A-81B2-14B2D970A67B}"/>
+                <a16:creationId xmlns:a16="http://schemas.microsoft.com/office/drawing/2014/main" id="{5269648A-ABB6-4F1E-964F-7AA1A029519C}"/>
               </a:ext>
             </a:extLst>
           </p:cNvPr>
@@ -10471,7 +10471,7 @@
           <p:cNvPr id="7" name="shape_slide_6_retrieval_diagnostics_textbox">
             <a:extLst xmlns:a="http://schemas.openxmlformats.org/drawingml/2006/main">
               <a:ext uri="{FF2B5EF4-FFF2-40B4-BE49-F238E27FC236}">
-                <a16:creationId xmlns:a16="http://schemas.microsoft.com/office/drawing/2014/main" id="{0ADE7F6C-245B-4621-B320-3808E9245C76}"/>
+                <a16:creationId xmlns:a16="http://schemas.microsoft.com/office/drawing/2014/main" id="{75E10E25-5F79-4EE6-B728-E34E6E5089A2}"/>
               </a:ext>
             </a:extLst>
           </p:cNvPr>
@@ -10854,7 +10854,7 @@
           <p:nvPr/>
         </p:nvPicPr>
         <p:blipFill>
-          <a:blip xmlns:r="http://schemas.openxmlformats.org/officeDocument/2006/relationships" xmlns:a="http://schemas.openxmlformats.org/drawingml/2006/main" r:embed="R4c59f6c4b1f749f0"/>
+          <a:blip xmlns:r="http://schemas.openxmlformats.org/officeDocument/2006/relationships" xmlns:a="http://schemas.openxmlformats.org/drawingml/2006/main" r:embed="Rd9091f01d62c4d1b"/>
           <a:stretch xmlns:a="http://schemas.openxmlformats.org/drawingml/2006/main">
             <a:fillRect l="0" t="0" r="0" b="0"/>
           </a:stretch>
@@ -10874,7 +10874,7 @@
           <p:cNvPr id="9" name="shape_slide_6_context_scaling">
             <a:extLst xmlns:a="http://schemas.openxmlformats.org/drawingml/2006/main">
               <a:ext uri="{FF2B5EF4-FFF2-40B4-BE49-F238E27FC236}">
-                <a16:creationId xmlns:a16="http://schemas.microsoft.com/office/drawing/2014/main" id="{7DE23277-8635-425D-AF0F-8185DED692B6}"/>
+                <a16:creationId xmlns:a16="http://schemas.microsoft.com/office/drawing/2014/main" id="{E2DECDC9-54A7-4A2B-8996-193B0BBF734E}"/>
               </a:ext>
             </a:extLst>
           </p:cNvPr>
@@ -10929,7 +10929,7 @@
           <p:cNvPr id="10" name="shape_slide_6_context_scaling_textbox">
             <a:extLst xmlns:a="http://schemas.openxmlformats.org/drawingml/2006/main">
               <a:ext uri="{FF2B5EF4-FFF2-40B4-BE49-F238E27FC236}">
-                <a16:creationId xmlns:a16="http://schemas.microsoft.com/office/drawing/2014/main" id="{77A17C56-7F18-42E7-9FAB-A8F2BBDDA7E6}"/>
+                <a16:creationId xmlns:a16="http://schemas.microsoft.com/office/drawing/2014/main" id="{82D7EE5E-F029-4A80-9BEA-AFFA762EBB88}"/>
               </a:ext>
             </a:extLst>
           </p:cNvPr>
@@ -11015,7 +11015,7 @@
     </p:spTree>
     <p:extLst>
       <p:ext uri="{BB962C8B-B14F-4D97-AF65-F5344CB8AC3E}">
-        <p14:creationId xmlns:p14="http://schemas.microsoft.com/office/powerpoint/2010/main" val="2040619327"/>
+        <p14:creationId xmlns:p14="http://schemas.microsoft.com/office/powerpoint/2010/main" val="658342007"/>
       </p:ext>
     </p:extLst>
   </p:cSld>
@@ -11039,7 +11039,7 @@
           <p:cNvPr id="2" name="Rectangle 1">
             <a:extLst xmlns:a="http://schemas.openxmlformats.org/drawingml/2006/main">
               <a:ext uri="{FF2B5EF4-FFF2-40B4-BE49-F238E27FC236}">
-                <a16:creationId xmlns:a16="http://schemas.microsoft.com/office/drawing/2014/main" id="{EC9BFA92-BD38-401B-977D-0FABA4C9F009}"/>
+                <a16:creationId xmlns:a16="http://schemas.microsoft.com/office/drawing/2014/main" id="{4AB3B2FF-B265-4DDE-A18D-A83A84351F60}"/>
               </a:ext>
             </a:extLst>
           </p:cNvPr>
@@ -11092,7 +11092,7 @@
           <p:cNvPr id="3" name="Rectangle 2">
             <a:extLst xmlns:a="http://schemas.openxmlformats.org/drawingml/2006/main">
               <a:ext uri="{FF2B5EF4-FFF2-40B4-BE49-F238E27FC236}">
-                <a16:creationId xmlns:a16="http://schemas.microsoft.com/office/drawing/2014/main" id="{8BAD967C-783E-4246-90DA-087A599318F4}"/>
+                <a16:creationId xmlns:a16="http://schemas.microsoft.com/office/drawing/2014/main" id="{E46EC053-D54A-461A-BF90-F75620FA35C6}"/>
               </a:ext>
             </a:extLst>
           </p:cNvPr>
@@ -11145,7 +11145,7 @@
           <p:cNvPr id="4" name="Rectangle 3">
             <a:extLst xmlns:a="http://schemas.openxmlformats.org/drawingml/2006/main">
               <a:ext uri="{FF2B5EF4-FFF2-40B4-BE49-F238E27FC236}">
-                <a16:creationId xmlns:a16="http://schemas.microsoft.com/office/drawing/2014/main" id="{1DDA67C7-38D1-49DF-B9C5-97D4CFF7F34C}"/>
+                <a16:creationId xmlns:a16="http://schemas.microsoft.com/office/drawing/2014/main" id="{9AF15773-F842-4222-B6DD-ADC546BFB679}"/>
               </a:ext>
             </a:extLst>
           </p:cNvPr>
@@ -11198,7 +11198,7 @@
           <p:cNvPr id="5" name="TextBox 4">
             <a:extLst xmlns:a="http://schemas.openxmlformats.org/drawingml/2006/main">
               <a:ext uri="{FF2B5EF4-FFF2-40B4-BE49-F238E27FC236}">
-                <a16:creationId xmlns:a16="http://schemas.microsoft.com/office/drawing/2014/main" id="{34D0EB39-F8B0-4A64-87C1-94EB5D5398CD}"/>
+                <a16:creationId xmlns:a16="http://schemas.microsoft.com/office/drawing/2014/main" id="{4CB17A8D-8811-4394-B18B-77609CDE8649}"/>
               </a:ext>
             </a:extLst>
           </p:cNvPr>
@@ -11261,7 +11261,7 @@
           <p:cNvPr id="6" name="shape_slide_7_paired_analysis">
             <a:extLst xmlns:a="http://schemas.openxmlformats.org/drawingml/2006/main">
               <a:ext uri="{FF2B5EF4-FFF2-40B4-BE49-F238E27FC236}">
-                <a16:creationId xmlns:a16="http://schemas.microsoft.com/office/drawing/2014/main" id="{42BBCAEB-260C-4115-A868-08199EFBE09B}"/>
+                <a16:creationId xmlns:a16="http://schemas.microsoft.com/office/drawing/2014/main" id="{63D2C91B-4B54-4D87-A806-CCA15593C53B}"/>
               </a:ext>
             </a:extLst>
           </p:cNvPr>
@@ -11316,7 +11316,7 @@
           <p:cNvPr id="7" name="shape_slide_7_paired_analysis_textbox">
             <a:extLst xmlns:a="http://schemas.openxmlformats.org/drawingml/2006/main">
               <a:ext uri="{FF2B5EF4-FFF2-40B4-BE49-F238E27FC236}">
-                <a16:creationId xmlns:a16="http://schemas.microsoft.com/office/drawing/2014/main" id="{4D1191AA-6D49-4A0E-BA5E-068B3303A5EB}"/>
+                <a16:creationId xmlns:a16="http://schemas.microsoft.com/office/drawing/2014/main" id="{BF5AEE35-2956-4857-86DE-6848963A2077}"/>
               </a:ext>
             </a:extLst>
           </p:cNvPr>
@@ -11477,7 +11477,7 @@
           <p:cNvPr id="8" name="shape_slide_7_benign_drift">
             <a:extLst xmlns:a="http://schemas.openxmlformats.org/drawingml/2006/main">
               <a:ext uri="{FF2B5EF4-FFF2-40B4-BE49-F238E27FC236}">
-                <a16:creationId xmlns:a16="http://schemas.microsoft.com/office/drawing/2014/main" id="{AA62A256-E7D5-4E28-887D-821CD29F717C}"/>
+                <a16:creationId xmlns:a16="http://schemas.microsoft.com/office/drawing/2014/main" id="{A0436ECC-1FE6-47CB-AC8B-7C2CDA94E9F8}"/>
               </a:ext>
             </a:extLst>
           </p:cNvPr>
@@ -11532,7 +11532,7 @@
           <p:cNvPr id="9" name="shape_slide_7_benign_drift_textbox">
             <a:extLst xmlns:a="http://schemas.openxmlformats.org/drawingml/2006/main">
               <a:ext uri="{FF2B5EF4-FFF2-40B4-BE49-F238E27FC236}">
-                <a16:creationId xmlns:a16="http://schemas.microsoft.com/office/drawing/2014/main" id="{DEE1BE33-9595-4DA5-8240-200BC0E0A2E3}"/>
+                <a16:creationId xmlns:a16="http://schemas.microsoft.com/office/drawing/2014/main" id="{981CCDC5-B5F0-4D2A-80AB-58E27496CEDF}"/>
               </a:ext>
             </a:extLst>
           </p:cNvPr>
@@ -11826,7 +11826,7 @@
     </p:spTree>
     <p:extLst>
       <p:ext uri="{BB962C8B-B14F-4D97-AF65-F5344CB8AC3E}">
-        <p14:creationId xmlns:p14="http://schemas.microsoft.com/office/powerpoint/2010/main" val="1383921233"/>
+        <p14:creationId xmlns:p14="http://schemas.microsoft.com/office/powerpoint/2010/main" val="1138557687"/>
       </p:ext>
     </p:extLst>
   </p:cSld>
@@ -11850,7 +11850,7 @@
           <p:cNvPr id="2" name="Rectangle 1">
             <a:extLst xmlns:a="http://schemas.openxmlformats.org/drawingml/2006/main">
               <a:ext uri="{FF2B5EF4-FFF2-40B4-BE49-F238E27FC236}">
-                <a16:creationId xmlns:a16="http://schemas.microsoft.com/office/drawing/2014/main" id="{6409C979-A11C-4839-BE35-59BE247E7222}"/>
+                <a16:creationId xmlns:a16="http://schemas.microsoft.com/office/drawing/2014/main" id="{F1B7740D-D873-4A5B-A654-5F5AE3EFDF9D}"/>
               </a:ext>
             </a:extLst>
           </p:cNvPr>
@@ -11903,7 +11903,7 @@
           <p:cNvPr id="3" name="Rectangle 2">
             <a:extLst xmlns:a="http://schemas.openxmlformats.org/drawingml/2006/main">
               <a:ext uri="{FF2B5EF4-FFF2-40B4-BE49-F238E27FC236}">
-                <a16:creationId xmlns:a16="http://schemas.microsoft.com/office/drawing/2014/main" id="{34CB6138-3DAF-41A8-8F87-A3E1995E32DE}"/>
+                <a16:creationId xmlns:a16="http://schemas.microsoft.com/office/drawing/2014/main" id="{47EAE82E-FB42-4F30-9F72-15670FE60F77}"/>
               </a:ext>
             </a:extLst>
           </p:cNvPr>
@@ -11956,7 +11956,7 @@
           <p:cNvPr id="4" name="Rectangle 3">
             <a:extLst xmlns:a="http://schemas.openxmlformats.org/drawingml/2006/main">
               <a:ext uri="{FF2B5EF4-FFF2-40B4-BE49-F238E27FC236}">
-                <a16:creationId xmlns:a16="http://schemas.microsoft.com/office/drawing/2014/main" id="{C9010636-1A5C-41E2-BA5E-F82F1178BD48}"/>
+                <a16:creationId xmlns:a16="http://schemas.microsoft.com/office/drawing/2014/main" id="{FCC0FC20-C006-4077-BC75-AC16E5F25898}"/>
               </a:ext>
             </a:extLst>
           </p:cNvPr>
@@ -12009,7 +12009,7 @@
           <p:cNvPr id="5" name="TextBox 4">
             <a:extLst xmlns:a="http://schemas.openxmlformats.org/drawingml/2006/main">
               <a:ext uri="{FF2B5EF4-FFF2-40B4-BE49-F238E27FC236}">
-                <a16:creationId xmlns:a16="http://schemas.microsoft.com/office/drawing/2014/main" id="{C3BF3BD5-624B-432E-ABF5-5D58049A1D56}"/>
+                <a16:creationId xmlns:a16="http://schemas.microsoft.com/office/drawing/2014/main" id="{77058818-0720-4187-9ED0-6F43D2F94C10}"/>
               </a:ext>
             </a:extLst>
           </p:cNvPr>
@@ -12072,7 +12072,7 @@
           <p:cNvPr id="6" name="shape_slide_8_d2i_axes">
             <a:extLst xmlns:a="http://schemas.openxmlformats.org/drawingml/2006/main">
               <a:ext uri="{FF2B5EF4-FFF2-40B4-BE49-F238E27FC236}">
-                <a16:creationId xmlns:a16="http://schemas.microsoft.com/office/drawing/2014/main" id="{03778E68-6C07-4627-B932-3510A5CFBBDB}"/>
+                <a16:creationId xmlns:a16="http://schemas.microsoft.com/office/drawing/2014/main" id="{7D82CC3C-2808-4F8C-A823-1FB943860079}"/>
               </a:ext>
             </a:extLst>
           </p:cNvPr>
@@ -12127,7 +12127,7 @@
           <p:cNvPr id="7" name="shape_slide_8_d2i_axes_textbox">
             <a:extLst xmlns:a="http://schemas.openxmlformats.org/drawingml/2006/main">
               <a:ext uri="{FF2B5EF4-FFF2-40B4-BE49-F238E27FC236}">
-                <a16:creationId xmlns:a16="http://schemas.microsoft.com/office/drawing/2014/main" id="{5D04E167-9625-49A6-A7F2-E528ACA2EB12}"/>
+                <a16:creationId xmlns:a16="http://schemas.microsoft.com/office/drawing/2014/main" id="{F21A40AA-E8CA-45C3-8A76-2B6582897107}"/>
               </a:ext>
             </a:extLst>
           </p:cNvPr>
@@ -12250,7 +12250,7 @@
           <p:cNvPr id="8" name="shape_slide_8_conditional_accuracy">
             <a:extLst xmlns:a="http://schemas.openxmlformats.org/drawingml/2006/main">
               <a:ext uri="{FF2B5EF4-FFF2-40B4-BE49-F238E27FC236}">
-                <a16:creationId xmlns:a16="http://schemas.microsoft.com/office/drawing/2014/main" id="{2566F62D-5FA4-4439-A5AA-E799BD13CF1A}"/>
+                <a16:creationId xmlns:a16="http://schemas.microsoft.com/office/drawing/2014/main" id="{C4C6E9F9-AA36-439F-B592-E5B072EA298E}"/>
               </a:ext>
             </a:extLst>
           </p:cNvPr>
@@ -12305,7 +12305,7 @@
           <p:cNvPr id="9" name="shape_slide_8_conditional_accuracy_textbox">
             <a:extLst xmlns:a="http://schemas.openxmlformats.org/drawingml/2006/main">
               <a:ext uri="{FF2B5EF4-FFF2-40B4-BE49-F238E27FC236}">
-                <a16:creationId xmlns:a16="http://schemas.microsoft.com/office/drawing/2014/main" id="{DEEF1D4F-57E4-4C41-9E4A-3441048D7909}"/>
+                <a16:creationId xmlns:a16="http://schemas.microsoft.com/office/drawing/2014/main" id="{ECD75EBE-B24E-4DCD-80C8-B664D2134A38}"/>
               </a:ext>
             </a:extLst>
           </p:cNvPr>
@@ -12485,7 +12485,7 @@
           <p:cNvPr id="10" name="shape_slide_8_rq1_attribution">
             <a:extLst xmlns:a="http://schemas.openxmlformats.org/drawingml/2006/main">
               <a:ext uri="{FF2B5EF4-FFF2-40B4-BE49-F238E27FC236}">
-                <a16:creationId xmlns:a16="http://schemas.microsoft.com/office/drawing/2014/main" id="{1E99DCE5-63EA-40E2-BC6E-CB12EF181CA6}"/>
+                <a16:creationId xmlns:a16="http://schemas.microsoft.com/office/drawing/2014/main" id="{9D675636-6A5D-41C3-B059-03DFB429D306}"/>
               </a:ext>
             </a:extLst>
           </p:cNvPr>
@@ -12540,7 +12540,7 @@
           <p:cNvPr id="11" name="shape_slide_8_rq1_attribution_textbox">
             <a:extLst xmlns:a="http://schemas.openxmlformats.org/drawingml/2006/main">
               <a:ext uri="{FF2B5EF4-FFF2-40B4-BE49-F238E27FC236}">
-                <a16:creationId xmlns:a16="http://schemas.microsoft.com/office/drawing/2014/main" id="{9B88E60E-EDD1-4262-9B6B-B8F4831B537F}"/>
+                <a16:creationId xmlns:a16="http://schemas.microsoft.com/office/drawing/2014/main" id="{CC355C81-CB90-404B-B850-21E13EC4D696}"/>
               </a:ext>
             </a:extLst>
           </p:cNvPr>
@@ -12890,7 +12890,7 @@
     </p:spTree>
     <p:extLst>
       <p:ext uri="{BB962C8B-B14F-4D97-AF65-F5344CB8AC3E}">
-        <p14:creationId xmlns:p14="http://schemas.microsoft.com/office/powerpoint/2010/main" val="965067300"/>
+        <p14:creationId xmlns:p14="http://schemas.microsoft.com/office/powerpoint/2010/main" val="768966546"/>
       </p:ext>
     </p:extLst>
   </p:cSld>
@@ -12914,7 +12914,7 @@
           <p:cNvPr id="2" name="Rectangle 1">
             <a:extLst xmlns:a="http://schemas.openxmlformats.org/drawingml/2006/main">
               <a:ext uri="{FF2B5EF4-FFF2-40B4-BE49-F238E27FC236}">
-                <a16:creationId xmlns:a16="http://schemas.microsoft.com/office/drawing/2014/main" id="{96102E3E-086E-49F0-A510-0F5B4920F7F6}"/>
+                <a16:creationId xmlns:a16="http://schemas.microsoft.com/office/drawing/2014/main" id="{432DE8A3-5415-428C-8564-223D040AE09C}"/>
               </a:ext>
             </a:extLst>
           </p:cNvPr>
@@ -12967,7 +12967,7 @@
           <p:cNvPr id="3" name="Rectangle 2">
             <a:extLst xmlns:a="http://schemas.openxmlformats.org/drawingml/2006/main">
               <a:ext uri="{FF2B5EF4-FFF2-40B4-BE49-F238E27FC236}">
-                <a16:creationId xmlns:a16="http://schemas.microsoft.com/office/drawing/2014/main" id="{7EAC0A06-4624-4DA2-86A3-F87134DBD8C9}"/>
+                <a16:creationId xmlns:a16="http://schemas.microsoft.com/office/drawing/2014/main" id="{566999B2-D003-4766-BBF6-5F95172CA7F5}"/>
               </a:ext>
             </a:extLst>
           </p:cNvPr>
@@ -13020,7 +13020,7 @@
           <p:cNvPr id="4" name="Rectangle 3">
             <a:extLst xmlns:a="http://schemas.openxmlformats.org/drawingml/2006/main">
               <a:ext uri="{FF2B5EF4-FFF2-40B4-BE49-F238E27FC236}">
-                <a16:creationId xmlns:a16="http://schemas.microsoft.com/office/drawing/2014/main" id="{254716AD-2714-4BBA-B97C-B14CD711A369}"/>
+                <a16:creationId xmlns:a16="http://schemas.microsoft.com/office/drawing/2014/main" id="{3337BBDF-4A11-44AA-9C58-B1851C5C6D54}"/>
               </a:ext>
             </a:extLst>
           </p:cNvPr>
@@ -13073,7 +13073,7 @@
           <p:cNvPr id="5" name="TextBox 4">
             <a:extLst xmlns:a="http://schemas.openxmlformats.org/drawingml/2006/main">
               <a:ext uri="{FF2B5EF4-FFF2-40B4-BE49-F238E27FC236}">
-                <a16:creationId xmlns:a16="http://schemas.microsoft.com/office/drawing/2014/main" id="{56D4056E-B821-4849-9ADD-18D384047246}"/>
+                <a16:creationId xmlns:a16="http://schemas.microsoft.com/office/drawing/2014/main" id="{931A2F96-BE9F-4252-977F-9754EE9009EC}"/>
               </a:ext>
             </a:extLst>
           </p:cNvPr>
@@ -13136,7 +13136,7 @@
           <p:cNvPr id="6" name="shape_slide_9_rq3_resources">
             <a:extLst xmlns:a="http://schemas.openxmlformats.org/drawingml/2006/main">
               <a:ext uri="{FF2B5EF4-FFF2-40B4-BE49-F238E27FC236}">
-                <a16:creationId xmlns:a16="http://schemas.microsoft.com/office/drawing/2014/main" id="{80017D34-80C9-4A0E-ABC7-C9E979684D29}"/>
+                <a16:creationId xmlns:a16="http://schemas.microsoft.com/office/drawing/2014/main" id="{D01E631C-8C4B-4B0D-A548-EE262F9AC5D7}"/>
               </a:ext>
             </a:extLst>
           </p:cNvPr>
@@ -13191,7 +13191,7 @@
           <p:cNvPr id="7" name="shape_slide_9_rq3_resources_textbox">
             <a:extLst xmlns:a="http://schemas.openxmlformats.org/drawingml/2006/main">
               <a:ext uri="{FF2B5EF4-FFF2-40B4-BE49-F238E27FC236}">
-                <a16:creationId xmlns:a16="http://schemas.microsoft.com/office/drawing/2014/main" id="{BEEFF16A-F48E-4DDC-9F0F-CEEA5CE0ED19}"/>
+                <a16:creationId xmlns:a16="http://schemas.microsoft.com/office/drawing/2014/main" id="{2C8752F7-B378-4F93-81D8-27D0FE857C3F}"/>
               </a:ext>
             </a:extLst>
           </p:cNvPr>
@@ -13655,7 +13655,7 @@
           <p:nvPr/>
         </p:nvPicPr>
         <p:blipFill>
-          <a:blip xmlns:r="http://schemas.openxmlformats.org/officeDocument/2006/relationships" xmlns:a="http://schemas.openxmlformats.org/drawingml/2006/main" r:embed="Rd9a2422bd949420a"/>
+          <a:blip xmlns:r="http://schemas.openxmlformats.org/officeDocument/2006/relationships" xmlns:a="http://schemas.openxmlformats.org/drawingml/2006/main" r:embed="R2bbcc2f17a6f4165"/>
           <a:stretch xmlns:a="http://schemas.openxmlformats.org/drawingml/2006/main">
             <a:fillRect l="0" t="0" r="0" b="0"/>
           </a:stretch>
@@ -13675,7 +13675,7 @@
           <p:cNvPr id="9" name="shape_slide_9_accounting">
             <a:extLst xmlns:a="http://schemas.openxmlformats.org/drawingml/2006/main">
               <a:ext uri="{FF2B5EF4-FFF2-40B4-BE49-F238E27FC236}">
-                <a16:creationId xmlns:a16="http://schemas.microsoft.com/office/drawing/2014/main" id="{C6B051B1-598E-4F44-BDFC-AF56AB0B742B}"/>
+                <a16:creationId xmlns:a16="http://schemas.microsoft.com/office/drawing/2014/main" id="{4C0ABF0E-75AD-4573-B117-3EF0A29828CE}"/>
               </a:ext>
             </a:extLst>
           </p:cNvPr>
@@ -13730,7 +13730,7 @@
           <p:cNvPr id="10" name="shape_slide_9_accounting_textbox">
             <a:extLst xmlns:a="http://schemas.openxmlformats.org/drawingml/2006/main">
               <a:ext uri="{FF2B5EF4-FFF2-40B4-BE49-F238E27FC236}">
-                <a16:creationId xmlns:a16="http://schemas.microsoft.com/office/drawing/2014/main" id="{02D98A25-C4DF-477B-A1BA-50C06000BE46}"/>
+                <a16:creationId xmlns:a16="http://schemas.microsoft.com/office/drawing/2014/main" id="{1F282B5D-2F00-469F-917E-B7FB9BDEE839}"/>
               </a:ext>
             </a:extLst>
           </p:cNvPr>
@@ -13813,7 +13813,7 @@
     </p:spTree>
     <p:extLst>
       <p:ext uri="{BB962C8B-B14F-4D97-AF65-F5344CB8AC3E}">
-        <p14:creationId xmlns:p14="http://schemas.microsoft.com/office/powerpoint/2010/main" val="202859983"/>
+        <p14:creationId xmlns:p14="http://schemas.microsoft.com/office/powerpoint/2010/main" val="1946787635"/>
       </p:ext>
     </p:extLst>
   </p:cSld>

--- a/reports/evidence/fixture_populated_slides.pptx
+++ b/reports/evidence/fixture_populated_slides.pptx
@@ -2,24 +2,24 @@
 <file path=ppt/presentation.xml><?xml version="1.0" encoding="utf-8"?>
 <p:presentation xmlns:p="http://schemas.openxmlformats.org/presentationml/2006/main">
   <p:sldMasterIdLst>
-    <p:sldMasterId xmlns:r="http://schemas.openxmlformats.org/officeDocument/2006/relationships" id="2147483648" r:id="Rebefc75836174f1a"/>
+    <p:sldMasterId xmlns:r="http://schemas.openxmlformats.org/officeDocument/2006/relationships" id="2147483648" r:id="Rad193556d3a24043"/>
   </p:sldMasterIdLst>
   <p:notesMasterIdLst>
-    <p:notesMasterId xmlns:r="http://schemas.openxmlformats.org/officeDocument/2006/relationships" r:id="Ra1d2833b2cc4409a"/>
+    <p:notesMasterId xmlns:r="http://schemas.openxmlformats.org/officeDocument/2006/relationships" r:id="Rae59f90e512047c4"/>
   </p:notesMasterIdLst>
   <p:sldIdLst>
-    <p:sldId xmlns:r="http://schemas.openxmlformats.org/officeDocument/2006/relationships" id="256" r:id="R3f5a8671a3d8424d"/>
-    <p:sldId xmlns:r="http://schemas.openxmlformats.org/officeDocument/2006/relationships" id="257" r:id="Rf70e6d0425594080"/>
-    <p:sldId xmlns:r="http://schemas.openxmlformats.org/officeDocument/2006/relationships" id="258" r:id="R7d16815bfa3545b5"/>
-    <p:sldId xmlns:r="http://schemas.openxmlformats.org/officeDocument/2006/relationships" id="259" r:id="R0b8ee83ebe4b4a4e"/>
-    <p:sldId xmlns:r="http://schemas.openxmlformats.org/officeDocument/2006/relationships" id="260" r:id="R7a537e5bcc794282"/>
-    <p:sldId xmlns:r="http://schemas.openxmlformats.org/officeDocument/2006/relationships" id="261" r:id="R1e7201fcbfb14516"/>
-    <p:sldId xmlns:r="http://schemas.openxmlformats.org/officeDocument/2006/relationships" id="262" r:id="Rfdc486169bf54441"/>
-    <p:sldId xmlns:r="http://schemas.openxmlformats.org/officeDocument/2006/relationships" id="263" r:id="R8d1937e3c6b145f3"/>
-    <p:sldId xmlns:r="http://schemas.openxmlformats.org/officeDocument/2006/relationships" id="264" r:id="R839f58f7306d4df3"/>
-    <p:sldId xmlns:r="http://schemas.openxmlformats.org/officeDocument/2006/relationships" id="265" r:id="R4d0eb1bed2d3486e"/>
-    <p:sldId xmlns:r="http://schemas.openxmlformats.org/officeDocument/2006/relationships" id="266" r:id="Rb89fdf37a91e47e4"/>
-    <p:sldId xmlns:r="http://schemas.openxmlformats.org/officeDocument/2006/relationships" id="267" r:id="Rd51a58807c1f4791"/>
+    <p:sldId xmlns:r="http://schemas.openxmlformats.org/officeDocument/2006/relationships" id="256" r:id="Rcc9c892b1037460a"/>
+    <p:sldId xmlns:r="http://schemas.openxmlformats.org/officeDocument/2006/relationships" id="257" r:id="R5f7abd7c19844605"/>
+    <p:sldId xmlns:r="http://schemas.openxmlformats.org/officeDocument/2006/relationships" id="258" r:id="Rde46eecd609142c3"/>
+    <p:sldId xmlns:r="http://schemas.openxmlformats.org/officeDocument/2006/relationships" id="259" r:id="Rb5c44db43b1646b6"/>
+    <p:sldId xmlns:r="http://schemas.openxmlformats.org/officeDocument/2006/relationships" id="260" r:id="Re2c626d611974eb1"/>
+    <p:sldId xmlns:r="http://schemas.openxmlformats.org/officeDocument/2006/relationships" id="261" r:id="Rade29e1ba1a94c3b"/>
+    <p:sldId xmlns:r="http://schemas.openxmlformats.org/officeDocument/2006/relationships" id="262" r:id="R77ff31063a504293"/>
+    <p:sldId xmlns:r="http://schemas.openxmlformats.org/officeDocument/2006/relationships" id="263" r:id="R5c63f84e44554873"/>
+    <p:sldId xmlns:r="http://schemas.openxmlformats.org/officeDocument/2006/relationships" id="264" r:id="R7e39eb70558c4468"/>
+    <p:sldId xmlns:r="http://schemas.openxmlformats.org/officeDocument/2006/relationships" id="265" r:id="R7fed64784d3a4690"/>
+    <p:sldId xmlns:r="http://schemas.openxmlformats.org/officeDocument/2006/relationships" id="266" r:id="Rb2f6197246b64be9"/>
+    <p:sldId xmlns:r="http://schemas.openxmlformats.org/officeDocument/2006/relationships" id="267" r:id="Re74b63756aaf48b2"/>
   </p:sldIdLst>
   <p:sldSz cx="12191695" cy="6858000"/>
   <p:notesSz cx="6858000" cy="9144000"/>
@@ -1577,7 +1577,7 @@
           <p:cNvPr id="2" name="Title 1">
             <a:extLst xmlns:a="http://schemas.openxmlformats.org/drawingml/2006/main">
               <a:ext uri="{FF2B5EF4-FFF2-40B4-BE49-F238E27FC236}">
-                <a16:creationId xmlns:a16="http://schemas.microsoft.com/office/drawing/2014/main" id="{A5F65FD0-18D3-40A1-81D2-7DD331BA1459}"/>
+                <a16:creationId xmlns:a16="http://schemas.microsoft.com/office/drawing/2014/main" id="{54F03B12-7243-448A-88C2-02F6D3329074}"/>
               </a:ext>
             </a:extLst>
           </p:cNvPr>
@@ -1610,7 +1610,7 @@
           <p:cNvPr id="3" name="Subtitle 2">
             <a:extLst xmlns:a="http://schemas.openxmlformats.org/drawingml/2006/main">
               <a:ext uri="{FF2B5EF4-FFF2-40B4-BE49-F238E27FC236}">
-                <a16:creationId xmlns:a16="http://schemas.microsoft.com/office/drawing/2014/main" id="{CFD99702-E94B-4719-8127-BF1E1D645188}"/>
+                <a16:creationId xmlns:a16="http://schemas.microsoft.com/office/drawing/2014/main" id="{1F0B98F5-CCB6-4EF4-BC77-98FBEC6B8400}"/>
               </a:ext>
             </a:extLst>
           </p:cNvPr>
@@ -1734,7 +1734,7 @@
           <p:cNvPr id="4" name="Date Placeholder 3">
             <a:extLst xmlns:a="http://schemas.openxmlformats.org/drawingml/2006/main">
               <a:ext uri="{FF2B5EF4-FFF2-40B4-BE49-F238E27FC236}">
-                <a16:creationId xmlns:a16="http://schemas.microsoft.com/office/drawing/2014/main" id="{FA94C1BE-ECB6-4513-A15F-75A1C4B5AB71}"/>
+                <a16:creationId xmlns:a16="http://schemas.microsoft.com/office/drawing/2014/main" id="{4E98A180-8205-49FA-A964-7DFB1BD7F934}"/>
               </a:ext>
             </a:extLst>
           </p:cNvPr>
@@ -1762,7 +1762,7 @@
           <p:cNvPr id="5" name="Footer Placeholder 4">
             <a:extLst xmlns:a="http://schemas.openxmlformats.org/drawingml/2006/main">
               <a:ext uri="{FF2B5EF4-FFF2-40B4-BE49-F238E27FC236}">
-                <a16:creationId xmlns:a16="http://schemas.microsoft.com/office/drawing/2014/main" id="{96B2A07E-A8E9-46C3-9B24-A73BA9C75C38}"/>
+                <a16:creationId xmlns:a16="http://schemas.microsoft.com/office/drawing/2014/main" id="{89745A15-F5AD-4980-86AD-5F5048B325B1}"/>
               </a:ext>
             </a:extLst>
           </p:cNvPr>
@@ -1787,7 +1787,7 @@
           <p:cNvPr id="6" name="Slide Number Placeholder 5">
             <a:extLst xmlns:a="http://schemas.openxmlformats.org/drawingml/2006/main">
               <a:ext uri="{FF2B5EF4-FFF2-40B4-BE49-F238E27FC236}">
-                <a16:creationId xmlns:a16="http://schemas.microsoft.com/office/drawing/2014/main" id="{035E55D6-25E6-4D1C-8B83-1614A4DB5D0B}"/>
+                <a16:creationId xmlns:a16="http://schemas.microsoft.com/office/drawing/2014/main" id="{536241BB-B505-4C99-87C1-54448B613B03}"/>
               </a:ext>
             </a:extLst>
           </p:cNvPr>
@@ -1832,7 +1832,7 @@
           <p:cNvPr id="2" name="Title 1">
             <a:extLst xmlns:a="http://schemas.openxmlformats.org/drawingml/2006/main">
               <a:ext uri="{FF2B5EF4-FFF2-40B4-BE49-F238E27FC236}">
-                <a16:creationId xmlns:a16="http://schemas.microsoft.com/office/drawing/2014/main" id="{FAA4B837-300D-426B-A7C3-E148738F313D}"/>
+                <a16:creationId xmlns:a16="http://schemas.microsoft.com/office/drawing/2014/main" id="{C7D1DFCA-9CBF-427A-8341-1322B7689BC3}"/>
               </a:ext>
             </a:extLst>
           </p:cNvPr>
@@ -1860,7 +1860,7 @@
           <p:cNvPr id="3" name="Vertical Text Placeholder 2">
             <a:extLst xmlns:a="http://schemas.openxmlformats.org/drawingml/2006/main">
               <a:ext uri="{FF2B5EF4-FFF2-40B4-BE49-F238E27FC236}">
-                <a16:creationId xmlns:a16="http://schemas.microsoft.com/office/drawing/2014/main" id="{84D15B48-8FD4-4D43-8878-D2C96FF5CCA8}"/>
+                <a16:creationId xmlns:a16="http://schemas.microsoft.com/office/drawing/2014/main" id="{FA95821D-F9E5-41BE-96E8-CD331914B726}"/>
               </a:ext>
             </a:extLst>
           </p:cNvPr>
@@ -1923,7 +1923,7 @@
           <p:cNvPr id="4" name="Date Placeholder 3">
             <a:extLst xmlns:a="http://schemas.openxmlformats.org/drawingml/2006/main">
               <a:ext uri="{FF2B5EF4-FFF2-40B4-BE49-F238E27FC236}">
-                <a16:creationId xmlns:a16="http://schemas.microsoft.com/office/drawing/2014/main" id="{CDE0F18A-C1D2-4CB4-8E4D-3361546269A0}"/>
+                <a16:creationId xmlns:a16="http://schemas.microsoft.com/office/drawing/2014/main" id="{77AD88F8-A90B-4771-9850-FBF17603F88F}"/>
               </a:ext>
             </a:extLst>
           </p:cNvPr>
@@ -1951,7 +1951,7 @@
           <p:cNvPr id="5" name="Footer Placeholder 4">
             <a:extLst xmlns:a="http://schemas.openxmlformats.org/drawingml/2006/main">
               <a:ext uri="{FF2B5EF4-FFF2-40B4-BE49-F238E27FC236}">
-                <a16:creationId xmlns:a16="http://schemas.microsoft.com/office/drawing/2014/main" id="{DBEAA1F0-3328-48D2-9977-8B9A38BD874E}"/>
+                <a16:creationId xmlns:a16="http://schemas.microsoft.com/office/drawing/2014/main" id="{0421DF10-94EC-4736-99C5-CFEFA5C80D0D}"/>
               </a:ext>
             </a:extLst>
           </p:cNvPr>
@@ -1976,7 +1976,7 @@
           <p:cNvPr id="6" name="Slide Number Placeholder 5">
             <a:extLst xmlns:a="http://schemas.openxmlformats.org/drawingml/2006/main">
               <a:ext uri="{FF2B5EF4-FFF2-40B4-BE49-F238E27FC236}">
-                <a16:creationId xmlns:a16="http://schemas.microsoft.com/office/drawing/2014/main" id="{AC2A07CA-2E6D-4BE6-970C-3517401E911B}"/>
+                <a16:creationId xmlns:a16="http://schemas.microsoft.com/office/drawing/2014/main" id="{C1BFB7AF-DCB3-40F8-A33B-B7956606F6AE}"/>
               </a:ext>
             </a:extLst>
           </p:cNvPr>
@@ -2021,7 +2021,7 @@
           <p:cNvPr id="2" name="Vertical Title 1">
             <a:extLst xmlns:a="http://schemas.openxmlformats.org/drawingml/2006/main">
               <a:ext uri="{FF2B5EF4-FFF2-40B4-BE49-F238E27FC236}">
-                <a16:creationId xmlns:a16="http://schemas.microsoft.com/office/drawing/2014/main" id="{8EEBDC85-5C83-415B-9209-8107668138E8}"/>
+                <a16:creationId xmlns:a16="http://schemas.microsoft.com/office/drawing/2014/main" id="{6E67F6A4-15A5-44A2-9E14-51F4FDD7D415}"/>
               </a:ext>
             </a:extLst>
           </p:cNvPr>
@@ -2054,7 +2054,7 @@
           <p:cNvPr id="3" name="Vertical Text Placeholder 2">
             <a:extLst xmlns:a="http://schemas.openxmlformats.org/drawingml/2006/main">
               <a:ext uri="{FF2B5EF4-FFF2-40B4-BE49-F238E27FC236}">
-                <a16:creationId xmlns:a16="http://schemas.microsoft.com/office/drawing/2014/main" id="{2B1CA8F1-A9A7-4D6F-8BFD-84F21BAD6AD6}"/>
+                <a16:creationId xmlns:a16="http://schemas.microsoft.com/office/drawing/2014/main" id="{FA2DD4EF-A13C-44A9-ABEB-0F2F1250BF08}"/>
               </a:ext>
             </a:extLst>
           </p:cNvPr>
@@ -2122,7 +2122,7 @@
           <p:cNvPr id="4" name="Date Placeholder 3">
             <a:extLst xmlns:a="http://schemas.openxmlformats.org/drawingml/2006/main">
               <a:ext uri="{FF2B5EF4-FFF2-40B4-BE49-F238E27FC236}">
-                <a16:creationId xmlns:a16="http://schemas.microsoft.com/office/drawing/2014/main" id="{FA6A1A75-8BC2-4D0A-BBA8-43DDA347B40A}"/>
+                <a16:creationId xmlns:a16="http://schemas.microsoft.com/office/drawing/2014/main" id="{D4F3688D-A622-485A-BB2E-77C2FD2191EF}"/>
               </a:ext>
             </a:extLst>
           </p:cNvPr>
@@ -2150,7 +2150,7 @@
           <p:cNvPr id="5" name="Footer Placeholder 4">
             <a:extLst xmlns:a="http://schemas.openxmlformats.org/drawingml/2006/main">
               <a:ext uri="{FF2B5EF4-FFF2-40B4-BE49-F238E27FC236}">
-                <a16:creationId xmlns:a16="http://schemas.microsoft.com/office/drawing/2014/main" id="{738281CF-6176-403A-9169-4DAB269AA885}"/>
+                <a16:creationId xmlns:a16="http://schemas.microsoft.com/office/drawing/2014/main" id="{E4CAB964-8CB8-4F35-B710-1198079477B4}"/>
               </a:ext>
             </a:extLst>
           </p:cNvPr>
@@ -2175,7 +2175,7 @@
           <p:cNvPr id="6" name="Slide Number Placeholder 5">
             <a:extLst xmlns:a="http://schemas.openxmlformats.org/drawingml/2006/main">
               <a:ext uri="{FF2B5EF4-FFF2-40B4-BE49-F238E27FC236}">
-                <a16:creationId xmlns:a16="http://schemas.microsoft.com/office/drawing/2014/main" id="{38EBC3A9-2CD4-47AF-8E58-3E0D972B4703}"/>
+                <a16:creationId xmlns:a16="http://schemas.microsoft.com/office/drawing/2014/main" id="{2A2AEFAD-1A4D-454B-8158-989801E56293}"/>
               </a:ext>
             </a:extLst>
           </p:cNvPr>
@@ -2220,7 +2220,7 @@
           <p:cNvPr id="2" name="Title 1">
             <a:extLst xmlns:a="http://schemas.openxmlformats.org/drawingml/2006/main">
               <a:ext uri="{FF2B5EF4-FFF2-40B4-BE49-F238E27FC236}">
-                <a16:creationId xmlns:a16="http://schemas.microsoft.com/office/drawing/2014/main" id="{B67B8D94-4688-4146-BFE8-EDBD54BBD5A0}"/>
+                <a16:creationId xmlns:a16="http://schemas.microsoft.com/office/drawing/2014/main" id="{9B6FF9FF-875F-4312-BACA-D5B9D77ED431}"/>
               </a:ext>
             </a:extLst>
           </p:cNvPr>
@@ -2248,7 +2248,7 @@
           <p:cNvPr id="3" name="Content Placeholder 2">
             <a:extLst xmlns:a="http://schemas.openxmlformats.org/drawingml/2006/main">
               <a:ext uri="{FF2B5EF4-FFF2-40B4-BE49-F238E27FC236}">
-                <a16:creationId xmlns:a16="http://schemas.microsoft.com/office/drawing/2014/main" id="{5E8833FC-E042-461C-9FBE-4B0839EF442A}"/>
+                <a16:creationId xmlns:a16="http://schemas.microsoft.com/office/drawing/2014/main" id="{F4FA4164-6232-4B36-B23F-1526994C253E}"/>
               </a:ext>
             </a:extLst>
           </p:cNvPr>
@@ -2311,7 +2311,7 @@
           <p:cNvPr id="4" name="Date Placeholder 3">
             <a:extLst xmlns:a="http://schemas.openxmlformats.org/drawingml/2006/main">
               <a:ext uri="{FF2B5EF4-FFF2-40B4-BE49-F238E27FC236}">
-                <a16:creationId xmlns:a16="http://schemas.microsoft.com/office/drawing/2014/main" id="{1FF78225-5405-48B3-9720-3260F6036473}"/>
+                <a16:creationId xmlns:a16="http://schemas.microsoft.com/office/drawing/2014/main" id="{4A16A9CB-5307-4C46-B356-F105A17754ED}"/>
               </a:ext>
             </a:extLst>
           </p:cNvPr>
@@ -2339,7 +2339,7 @@
           <p:cNvPr id="5" name="Footer Placeholder 4">
             <a:extLst xmlns:a="http://schemas.openxmlformats.org/drawingml/2006/main">
               <a:ext uri="{FF2B5EF4-FFF2-40B4-BE49-F238E27FC236}">
-                <a16:creationId xmlns:a16="http://schemas.microsoft.com/office/drawing/2014/main" id="{C9508622-9065-4DD5-9E19-9BD0C5ACC8A6}"/>
+                <a16:creationId xmlns:a16="http://schemas.microsoft.com/office/drawing/2014/main" id="{1BDBAEE5-BFAD-426B-B62E-A257A07D0BBC}"/>
               </a:ext>
             </a:extLst>
           </p:cNvPr>
@@ -2364,7 +2364,7 @@
           <p:cNvPr id="6" name="Slide Number Placeholder 5">
             <a:extLst xmlns:a="http://schemas.openxmlformats.org/drawingml/2006/main">
               <a:ext uri="{FF2B5EF4-FFF2-40B4-BE49-F238E27FC236}">
-                <a16:creationId xmlns:a16="http://schemas.microsoft.com/office/drawing/2014/main" id="{7213BA54-BFA8-4ACF-AF21-404BB1F401C9}"/>
+                <a16:creationId xmlns:a16="http://schemas.microsoft.com/office/drawing/2014/main" id="{6765877F-ED6F-4DBE-B4AE-ABE584F3DB6D}"/>
               </a:ext>
             </a:extLst>
           </p:cNvPr>
@@ -2409,7 +2409,7 @@
           <p:cNvPr id="2" name="Title 1">
             <a:extLst xmlns:a="http://schemas.openxmlformats.org/drawingml/2006/main">
               <a:ext uri="{FF2B5EF4-FFF2-40B4-BE49-F238E27FC236}">
-                <a16:creationId xmlns:a16="http://schemas.microsoft.com/office/drawing/2014/main" id="{B2B74632-442F-4355-B638-9405A2AA8E14}"/>
+                <a16:creationId xmlns:a16="http://schemas.microsoft.com/office/drawing/2014/main" id="{0B8F94E9-93FD-4FB8-B0B0-5840F12F4A2D}"/>
               </a:ext>
             </a:extLst>
           </p:cNvPr>
@@ -2447,7 +2447,7 @@
           <p:cNvPr id="3" name="Text Placeholder 2">
             <a:extLst xmlns:a="http://schemas.openxmlformats.org/drawingml/2006/main">
               <a:ext uri="{FF2B5EF4-FFF2-40B4-BE49-F238E27FC236}">
-                <a16:creationId xmlns:a16="http://schemas.microsoft.com/office/drawing/2014/main" id="{C0240103-CAE5-4C62-9D8F-1A20D33CE43D}"/>
+                <a16:creationId xmlns:a16="http://schemas.microsoft.com/office/drawing/2014/main" id="{8D5DD8E8-5C51-4DF8-B705-2C05039744DF}"/>
               </a:ext>
             </a:extLst>
           </p:cNvPr>
@@ -2573,7 +2573,7 @@
           <p:cNvPr id="4" name="Date Placeholder 3">
             <a:extLst xmlns:a="http://schemas.openxmlformats.org/drawingml/2006/main">
               <a:ext uri="{FF2B5EF4-FFF2-40B4-BE49-F238E27FC236}">
-                <a16:creationId xmlns:a16="http://schemas.microsoft.com/office/drawing/2014/main" id="{3CF1F627-0305-4FD7-9BB2-66E1F7D8A181}"/>
+                <a16:creationId xmlns:a16="http://schemas.microsoft.com/office/drawing/2014/main" id="{ED3F615D-DA01-4272-8928-CCBFB406F4EA}"/>
               </a:ext>
             </a:extLst>
           </p:cNvPr>
@@ -2601,7 +2601,7 @@
           <p:cNvPr id="5" name="Footer Placeholder 4">
             <a:extLst xmlns:a="http://schemas.openxmlformats.org/drawingml/2006/main">
               <a:ext uri="{FF2B5EF4-FFF2-40B4-BE49-F238E27FC236}">
-                <a16:creationId xmlns:a16="http://schemas.microsoft.com/office/drawing/2014/main" id="{2D54A19D-BD09-4155-8B7A-6623FF02CFFE}"/>
+                <a16:creationId xmlns:a16="http://schemas.microsoft.com/office/drawing/2014/main" id="{A4090429-29F5-49AD-88D6-583C4633462A}"/>
               </a:ext>
             </a:extLst>
           </p:cNvPr>
@@ -2626,7 +2626,7 @@
           <p:cNvPr id="6" name="Slide Number Placeholder 5">
             <a:extLst xmlns:a="http://schemas.openxmlformats.org/drawingml/2006/main">
               <a:ext uri="{FF2B5EF4-FFF2-40B4-BE49-F238E27FC236}">
-                <a16:creationId xmlns:a16="http://schemas.microsoft.com/office/drawing/2014/main" id="{5069A511-726E-4BF2-BD17-1FC39AFA88BC}"/>
+                <a16:creationId xmlns:a16="http://schemas.microsoft.com/office/drawing/2014/main" id="{EF5261B8-D77A-4C4C-B5C5-D3450E605F40}"/>
               </a:ext>
             </a:extLst>
           </p:cNvPr>
@@ -2671,7 +2671,7 @@
           <p:cNvPr id="2" name="Title 1">
             <a:extLst xmlns:a="http://schemas.openxmlformats.org/drawingml/2006/main">
               <a:ext uri="{FF2B5EF4-FFF2-40B4-BE49-F238E27FC236}">
-                <a16:creationId xmlns:a16="http://schemas.microsoft.com/office/drawing/2014/main" id="{1A81C51C-F18E-4EEB-9F1A-2CAA2BF50D3A}"/>
+                <a16:creationId xmlns:a16="http://schemas.microsoft.com/office/drawing/2014/main" id="{65D0AB67-EA38-48B9-B15C-891E6E734EE9}"/>
               </a:ext>
             </a:extLst>
           </p:cNvPr>
@@ -2699,7 +2699,7 @@
           <p:cNvPr id="3" name="Content Placeholder 2">
             <a:extLst xmlns:a="http://schemas.openxmlformats.org/drawingml/2006/main">
               <a:ext uri="{FF2B5EF4-FFF2-40B4-BE49-F238E27FC236}">
-                <a16:creationId xmlns:a16="http://schemas.microsoft.com/office/drawing/2014/main" id="{FE2BDF15-6368-499D-B841-E23549123689}"/>
+                <a16:creationId xmlns:a16="http://schemas.microsoft.com/office/drawing/2014/main" id="{7C3DF601-7173-4BA9-88F9-02A362EE87D4}"/>
               </a:ext>
             </a:extLst>
           </p:cNvPr>
@@ -2804,7 +2804,7 @@
           <p:cNvPr id="4" name="Content Placeholder 3">
             <a:extLst xmlns:a="http://schemas.openxmlformats.org/drawingml/2006/main">
               <a:ext uri="{FF2B5EF4-FFF2-40B4-BE49-F238E27FC236}">
-                <a16:creationId xmlns:a16="http://schemas.microsoft.com/office/drawing/2014/main" id="{0C8B2580-A070-4E6C-A841-4BC6FD9744AD}"/>
+                <a16:creationId xmlns:a16="http://schemas.microsoft.com/office/drawing/2014/main" id="{6459DD36-18BD-4CFF-9B5C-77CCCF7AFE9D}"/>
               </a:ext>
             </a:extLst>
           </p:cNvPr>
@@ -2909,7 +2909,7 @@
           <p:cNvPr id="5" name="Date Placeholder 4">
             <a:extLst xmlns:a="http://schemas.openxmlformats.org/drawingml/2006/main">
               <a:ext uri="{FF2B5EF4-FFF2-40B4-BE49-F238E27FC236}">
-                <a16:creationId xmlns:a16="http://schemas.microsoft.com/office/drawing/2014/main" id="{7A3A53CD-7EA0-4DFC-B5A9-A6FCAEB41334}"/>
+                <a16:creationId xmlns:a16="http://schemas.microsoft.com/office/drawing/2014/main" id="{30C3ED9A-9EF5-4249-B52D-0671CDB6917D}"/>
               </a:ext>
             </a:extLst>
           </p:cNvPr>
@@ -2937,7 +2937,7 @@
           <p:cNvPr id="6" name="Footer Placeholder 5">
             <a:extLst xmlns:a="http://schemas.openxmlformats.org/drawingml/2006/main">
               <a:ext uri="{FF2B5EF4-FFF2-40B4-BE49-F238E27FC236}">
-                <a16:creationId xmlns:a16="http://schemas.microsoft.com/office/drawing/2014/main" id="{ACEC179D-4D00-4FFC-AA83-CAEBD38B6D02}"/>
+                <a16:creationId xmlns:a16="http://schemas.microsoft.com/office/drawing/2014/main" id="{01B6A607-6782-4F74-9970-241E2833ACE8}"/>
               </a:ext>
             </a:extLst>
           </p:cNvPr>
@@ -2962,7 +2962,7 @@
           <p:cNvPr id="7" name="Slide Number Placeholder 6">
             <a:extLst xmlns:a="http://schemas.openxmlformats.org/drawingml/2006/main">
               <a:ext uri="{FF2B5EF4-FFF2-40B4-BE49-F238E27FC236}">
-                <a16:creationId xmlns:a16="http://schemas.microsoft.com/office/drawing/2014/main" id="{37E75401-1A84-410A-90F7-B528D1662277}"/>
+                <a16:creationId xmlns:a16="http://schemas.microsoft.com/office/drawing/2014/main" id="{3BEF2BBF-8480-4C35-A8B3-11D980E3C776}"/>
               </a:ext>
             </a:extLst>
           </p:cNvPr>
@@ -3007,7 +3007,7 @@
           <p:cNvPr id="2" name="Title 1">
             <a:extLst xmlns:a="http://schemas.openxmlformats.org/drawingml/2006/main">
               <a:ext uri="{FF2B5EF4-FFF2-40B4-BE49-F238E27FC236}">
-                <a16:creationId xmlns:a16="http://schemas.microsoft.com/office/drawing/2014/main" id="{650BAE0C-5CF6-40D3-BC14-575E7EF316FA}"/>
+                <a16:creationId xmlns:a16="http://schemas.microsoft.com/office/drawing/2014/main" id="{1771B203-4114-4AA9-B583-13CECB511466}"/>
               </a:ext>
             </a:extLst>
           </p:cNvPr>
@@ -3040,7 +3040,7 @@
           <p:cNvPr id="3" name="Text Placeholder 2">
             <a:extLst xmlns:a="http://schemas.openxmlformats.org/drawingml/2006/main">
               <a:ext uri="{FF2B5EF4-FFF2-40B4-BE49-F238E27FC236}">
-                <a16:creationId xmlns:a16="http://schemas.microsoft.com/office/drawing/2014/main" id="{A403E099-C5C3-4478-BF9A-885D0F62F739}"/>
+                <a16:creationId xmlns:a16="http://schemas.microsoft.com/office/drawing/2014/main" id="{BD1F1253-BC65-46A8-A8A6-D5ABE0761314}"/>
               </a:ext>
             </a:extLst>
           </p:cNvPr>
@@ -3112,7 +3112,7 @@
           <p:cNvPr id="4" name="Content Placeholder 3">
             <a:extLst xmlns:a="http://schemas.openxmlformats.org/drawingml/2006/main">
               <a:ext uri="{FF2B5EF4-FFF2-40B4-BE49-F238E27FC236}">
-                <a16:creationId xmlns:a16="http://schemas.microsoft.com/office/drawing/2014/main" id="{41D7E936-D5B4-4A85-A1FF-18A8EEAC19F1}"/>
+                <a16:creationId xmlns:a16="http://schemas.microsoft.com/office/drawing/2014/main" id="{DD080C5C-8879-476C-9C7C-E9ECD5D4F1B4}"/>
               </a:ext>
             </a:extLst>
           </p:cNvPr>
@@ -3217,7 +3217,7 @@
           <p:cNvPr id="5" name="Text Placeholder 4">
             <a:extLst xmlns:a="http://schemas.openxmlformats.org/drawingml/2006/main">
               <a:ext uri="{FF2B5EF4-FFF2-40B4-BE49-F238E27FC236}">
-                <a16:creationId xmlns:a16="http://schemas.microsoft.com/office/drawing/2014/main" id="{59DA8200-7B6E-4D1D-AED5-38A72D0D1B35}"/>
+                <a16:creationId xmlns:a16="http://schemas.microsoft.com/office/drawing/2014/main" id="{B8E739A5-BEA5-4412-B0B0-881BA71D2666}"/>
               </a:ext>
             </a:extLst>
           </p:cNvPr>
@@ -3289,7 +3289,7 @@
           <p:cNvPr id="6" name="Content Placeholder 5">
             <a:extLst xmlns:a="http://schemas.openxmlformats.org/drawingml/2006/main">
               <a:ext uri="{FF2B5EF4-FFF2-40B4-BE49-F238E27FC236}">
-                <a16:creationId xmlns:a16="http://schemas.microsoft.com/office/drawing/2014/main" id="{38AB1871-58AA-47C0-B71D-97A8C3FDE63B}"/>
+                <a16:creationId xmlns:a16="http://schemas.microsoft.com/office/drawing/2014/main" id="{94AFA5E1-EBA2-4BE6-897F-0EDACC7A559D}"/>
               </a:ext>
             </a:extLst>
           </p:cNvPr>
@@ -3394,7 +3394,7 @@
           <p:cNvPr id="7" name="Date Placeholder 6">
             <a:extLst xmlns:a="http://schemas.openxmlformats.org/drawingml/2006/main">
               <a:ext uri="{FF2B5EF4-FFF2-40B4-BE49-F238E27FC236}">
-                <a16:creationId xmlns:a16="http://schemas.microsoft.com/office/drawing/2014/main" id="{87644B2C-B3CB-4127-9930-5ECC249D2903}"/>
+                <a16:creationId xmlns:a16="http://schemas.microsoft.com/office/drawing/2014/main" id="{B82B7635-EB43-4B61-B55C-557C64B3861A}"/>
               </a:ext>
             </a:extLst>
           </p:cNvPr>
@@ -3422,7 +3422,7 @@
           <p:cNvPr id="8" name="Footer Placeholder 7">
             <a:extLst xmlns:a="http://schemas.openxmlformats.org/drawingml/2006/main">
               <a:ext uri="{FF2B5EF4-FFF2-40B4-BE49-F238E27FC236}">
-                <a16:creationId xmlns:a16="http://schemas.microsoft.com/office/drawing/2014/main" id="{07AEB394-16FD-4B8D-B139-B0D95B73635A}"/>
+                <a16:creationId xmlns:a16="http://schemas.microsoft.com/office/drawing/2014/main" id="{F77AF853-0FE2-457B-BBC9-A5DC373B519C}"/>
               </a:ext>
             </a:extLst>
           </p:cNvPr>
@@ -3447,7 +3447,7 @@
           <p:cNvPr id="9" name="Slide Number Placeholder 8">
             <a:extLst xmlns:a="http://schemas.openxmlformats.org/drawingml/2006/main">
               <a:ext uri="{FF2B5EF4-FFF2-40B4-BE49-F238E27FC236}">
-                <a16:creationId xmlns:a16="http://schemas.microsoft.com/office/drawing/2014/main" id="{049C5653-B8EB-4584-ADD4-30B9DD7175B6}"/>
+                <a16:creationId xmlns:a16="http://schemas.microsoft.com/office/drawing/2014/main" id="{4DC66136-37E8-4AB7-8E13-9BAF9B1D4D0F}"/>
               </a:ext>
             </a:extLst>
           </p:cNvPr>
@@ -3492,7 +3492,7 @@
           <p:cNvPr id="2" name="Title 1">
             <a:extLst xmlns:a="http://schemas.openxmlformats.org/drawingml/2006/main">
               <a:ext uri="{FF2B5EF4-FFF2-40B4-BE49-F238E27FC236}">
-                <a16:creationId xmlns:a16="http://schemas.microsoft.com/office/drawing/2014/main" id="{9A79C238-B0B7-42BA-8E33-58FE3FD83561}"/>
+                <a16:creationId xmlns:a16="http://schemas.microsoft.com/office/drawing/2014/main" id="{FE82D91A-4923-431C-9C83-65755454D9B0}"/>
               </a:ext>
             </a:extLst>
           </p:cNvPr>
@@ -3520,7 +3520,7 @@
           <p:cNvPr id="3" name="Date Placeholder 2">
             <a:extLst xmlns:a="http://schemas.openxmlformats.org/drawingml/2006/main">
               <a:ext uri="{FF2B5EF4-FFF2-40B4-BE49-F238E27FC236}">
-                <a16:creationId xmlns:a16="http://schemas.microsoft.com/office/drawing/2014/main" id="{4A7B3E59-6FB6-4119-86F1-82F068CAF057}"/>
+                <a16:creationId xmlns:a16="http://schemas.microsoft.com/office/drawing/2014/main" id="{A409104B-C479-4F0F-861C-39AEC7101BA2}"/>
               </a:ext>
             </a:extLst>
           </p:cNvPr>
@@ -3548,7 +3548,7 @@
           <p:cNvPr id="4" name="Footer Placeholder 3">
             <a:extLst xmlns:a="http://schemas.openxmlformats.org/drawingml/2006/main">
               <a:ext uri="{FF2B5EF4-FFF2-40B4-BE49-F238E27FC236}">
-                <a16:creationId xmlns:a16="http://schemas.microsoft.com/office/drawing/2014/main" id="{2910D873-D102-4A33-8958-2F1DD1A472E5}"/>
+                <a16:creationId xmlns:a16="http://schemas.microsoft.com/office/drawing/2014/main" id="{078156E6-499A-41C4-B6C5-B638A6B5A2DC}"/>
               </a:ext>
             </a:extLst>
           </p:cNvPr>
@@ -3573,7 +3573,7 @@
           <p:cNvPr id="5" name="Slide Number Placeholder 4">
             <a:extLst xmlns:a="http://schemas.openxmlformats.org/drawingml/2006/main">
               <a:ext uri="{FF2B5EF4-FFF2-40B4-BE49-F238E27FC236}">
-                <a16:creationId xmlns:a16="http://schemas.microsoft.com/office/drawing/2014/main" id="{21F38A83-DCB0-42E8-B8E8-E613A1001756}"/>
+                <a16:creationId xmlns:a16="http://schemas.microsoft.com/office/drawing/2014/main" id="{F9D4F3F0-FF4B-4406-B3EB-3C7A8AB9416C}"/>
               </a:ext>
             </a:extLst>
           </p:cNvPr>
@@ -3618,7 +3618,7 @@
           <p:cNvPr id="2" name="Date Placeholder 1">
             <a:extLst xmlns:a="http://schemas.openxmlformats.org/drawingml/2006/main">
               <a:ext uri="{FF2B5EF4-FFF2-40B4-BE49-F238E27FC236}">
-                <a16:creationId xmlns:a16="http://schemas.microsoft.com/office/drawing/2014/main" id="{A4260A55-751B-4755-9CEF-81C147005B5D}"/>
+                <a16:creationId xmlns:a16="http://schemas.microsoft.com/office/drawing/2014/main" id="{10B339A7-EE3B-4235-8F3C-FB2E336E764D}"/>
               </a:ext>
             </a:extLst>
           </p:cNvPr>
@@ -3646,7 +3646,7 @@
           <p:cNvPr id="3" name="Footer Placeholder 2">
             <a:extLst xmlns:a="http://schemas.openxmlformats.org/drawingml/2006/main">
               <a:ext uri="{FF2B5EF4-FFF2-40B4-BE49-F238E27FC236}">
-                <a16:creationId xmlns:a16="http://schemas.microsoft.com/office/drawing/2014/main" id="{8348BB24-5C21-4318-8DEF-23F8E2C65856}"/>
+                <a16:creationId xmlns:a16="http://schemas.microsoft.com/office/drawing/2014/main" id="{74E2F900-7F59-4976-A79F-2E8A4C58FE81}"/>
               </a:ext>
             </a:extLst>
           </p:cNvPr>
@@ -3671,7 +3671,7 @@
           <p:cNvPr id="4" name="Slide Number Placeholder 3">
             <a:extLst xmlns:a="http://schemas.openxmlformats.org/drawingml/2006/main">
               <a:ext uri="{FF2B5EF4-FFF2-40B4-BE49-F238E27FC236}">
-                <a16:creationId xmlns:a16="http://schemas.microsoft.com/office/drawing/2014/main" id="{BE83BFA9-CBC7-4A9F-B92A-3277AF05F268}"/>
+                <a16:creationId xmlns:a16="http://schemas.microsoft.com/office/drawing/2014/main" id="{BB1C555D-9D60-4CC3-8062-073E8EFCE9D4}"/>
               </a:ext>
             </a:extLst>
           </p:cNvPr>
@@ -3716,7 +3716,7 @@
           <p:cNvPr id="2" name="Title 1">
             <a:extLst xmlns:a="http://schemas.openxmlformats.org/drawingml/2006/main">
               <a:ext uri="{FF2B5EF4-FFF2-40B4-BE49-F238E27FC236}">
-                <a16:creationId xmlns:a16="http://schemas.microsoft.com/office/drawing/2014/main" id="{B845A60D-DBFB-4C16-9CA2-DE225AA19252}"/>
+                <a16:creationId xmlns:a16="http://schemas.microsoft.com/office/drawing/2014/main" id="{65BF5BF5-96D6-4DDB-8D64-201B0319C415}"/>
               </a:ext>
             </a:extLst>
           </p:cNvPr>
@@ -3754,7 +3754,7 @@
           <p:cNvPr id="3" name="Content Placeholder 2">
             <a:extLst xmlns:a="http://schemas.openxmlformats.org/drawingml/2006/main">
               <a:ext uri="{FF2B5EF4-FFF2-40B4-BE49-F238E27FC236}">
-                <a16:creationId xmlns:a16="http://schemas.microsoft.com/office/drawing/2014/main" id="{E193F75F-C310-4633-900B-6E4627C49819}"/>
+                <a16:creationId xmlns:a16="http://schemas.microsoft.com/office/drawing/2014/main" id="{541736E2-53F5-4245-9CC4-C72306035975}"/>
               </a:ext>
             </a:extLst>
           </p:cNvPr>
@@ -3859,7 +3859,7 @@
           <p:cNvPr id="4" name="Text Placeholder 3">
             <a:extLst xmlns:a="http://schemas.openxmlformats.org/drawingml/2006/main">
               <a:ext uri="{FF2B5EF4-FFF2-40B4-BE49-F238E27FC236}">
-                <a16:creationId xmlns:a16="http://schemas.microsoft.com/office/drawing/2014/main" id="{4CDF1625-6F25-4C65-BC9E-8D92AE1E8E04}"/>
+                <a16:creationId xmlns:a16="http://schemas.microsoft.com/office/drawing/2014/main" id="{A504811D-462D-4183-85CC-C845CD704427}"/>
               </a:ext>
             </a:extLst>
           </p:cNvPr>
@@ -3931,7 +3931,7 @@
           <p:cNvPr id="5" name="Date Placeholder 4">
             <a:extLst xmlns:a="http://schemas.openxmlformats.org/drawingml/2006/main">
               <a:ext uri="{FF2B5EF4-FFF2-40B4-BE49-F238E27FC236}">
-                <a16:creationId xmlns:a16="http://schemas.microsoft.com/office/drawing/2014/main" id="{C3B515C6-37D6-453A-80CA-B7EAE8E86679}"/>
+                <a16:creationId xmlns:a16="http://schemas.microsoft.com/office/drawing/2014/main" id="{76F552F3-8440-4A26-AFDD-9CD497B7F20A}"/>
               </a:ext>
             </a:extLst>
           </p:cNvPr>
@@ -3959,7 +3959,7 @@
           <p:cNvPr id="6" name="Footer Placeholder 5">
             <a:extLst xmlns:a="http://schemas.openxmlformats.org/drawingml/2006/main">
               <a:ext uri="{FF2B5EF4-FFF2-40B4-BE49-F238E27FC236}">
-                <a16:creationId xmlns:a16="http://schemas.microsoft.com/office/drawing/2014/main" id="{612F0E3A-D0C7-4B78-A435-CBFF0648D2B8}"/>
+                <a16:creationId xmlns:a16="http://schemas.microsoft.com/office/drawing/2014/main" id="{8F0F0DD5-C925-4C03-A1BB-0FCDCAF0D54E}"/>
               </a:ext>
             </a:extLst>
           </p:cNvPr>
@@ -3984,7 +3984,7 @@
           <p:cNvPr id="7" name="Slide Number Placeholder 6">
             <a:extLst xmlns:a="http://schemas.openxmlformats.org/drawingml/2006/main">
               <a:ext uri="{FF2B5EF4-FFF2-40B4-BE49-F238E27FC236}">
-                <a16:creationId xmlns:a16="http://schemas.microsoft.com/office/drawing/2014/main" id="{CE2E0C7F-E08A-42DE-846D-CEE02EBB29EC}"/>
+                <a16:creationId xmlns:a16="http://schemas.microsoft.com/office/drawing/2014/main" id="{EB2F0106-24DE-4605-A6CF-8F1B970F65F7}"/>
               </a:ext>
             </a:extLst>
           </p:cNvPr>
@@ -4029,7 +4029,7 @@
           <p:cNvPr id="2" name="Title 1">
             <a:extLst xmlns:a="http://schemas.openxmlformats.org/drawingml/2006/main">
               <a:ext uri="{FF2B5EF4-FFF2-40B4-BE49-F238E27FC236}">
-                <a16:creationId xmlns:a16="http://schemas.microsoft.com/office/drawing/2014/main" id="{BCDA3500-A98E-42D7-915C-C4B94E996C15}"/>
+                <a16:creationId xmlns:a16="http://schemas.microsoft.com/office/drawing/2014/main" id="{24C4E417-A32D-4800-827A-34884CCDDA0F}"/>
               </a:ext>
             </a:extLst>
           </p:cNvPr>
@@ -4067,7 +4067,7 @@
           <p:cNvPr id="3" name="Picture Placeholder 2">
             <a:extLst xmlns:a="http://schemas.openxmlformats.org/drawingml/2006/main">
               <a:ext uri="{FF2B5EF4-FFF2-40B4-BE49-F238E27FC236}">
-                <a16:creationId xmlns:a16="http://schemas.microsoft.com/office/drawing/2014/main" id="{306C3FB7-879D-40F3-9EA3-F1E4C8096319}"/>
+                <a16:creationId xmlns:a16="http://schemas.microsoft.com/office/drawing/2014/main" id="{CBC4BB2B-314B-4E65-AA34-BA530E8CCA11}"/>
               </a:ext>
             </a:extLst>
           </p:cNvPr>
@@ -4134,7 +4134,7 @@
           <p:cNvPr id="4" name="Text Placeholder 3">
             <a:extLst xmlns:a="http://schemas.openxmlformats.org/drawingml/2006/main">
               <a:ext uri="{FF2B5EF4-FFF2-40B4-BE49-F238E27FC236}">
-                <a16:creationId xmlns:a16="http://schemas.microsoft.com/office/drawing/2014/main" id="{9A405AC1-9650-494E-B486-6AE02AA47C55}"/>
+                <a16:creationId xmlns:a16="http://schemas.microsoft.com/office/drawing/2014/main" id="{8C932EE7-4699-4B80-AEC3-7B55C3C24E5A}"/>
               </a:ext>
             </a:extLst>
           </p:cNvPr>
@@ -4206,7 +4206,7 @@
           <p:cNvPr id="5" name="Date Placeholder 4">
             <a:extLst xmlns:a="http://schemas.openxmlformats.org/drawingml/2006/main">
               <a:ext uri="{FF2B5EF4-FFF2-40B4-BE49-F238E27FC236}">
-                <a16:creationId xmlns:a16="http://schemas.microsoft.com/office/drawing/2014/main" id="{073E8210-4201-4218-9B6A-7F9D8789808B}"/>
+                <a16:creationId xmlns:a16="http://schemas.microsoft.com/office/drawing/2014/main" id="{958A5D28-233D-4D00-B50F-9FFB511AF003}"/>
               </a:ext>
             </a:extLst>
           </p:cNvPr>
@@ -4234,7 +4234,7 @@
           <p:cNvPr id="6" name="Footer Placeholder 5">
             <a:extLst xmlns:a="http://schemas.openxmlformats.org/drawingml/2006/main">
               <a:ext uri="{FF2B5EF4-FFF2-40B4-BE49-F238E27FC236}">
-                <a16:creationId xmlns:a16="http://schemas.microsoft.com/office/drawing/2014/main" id="{B71F4330-5262-4D4D-85B7-6CC100333AE1}"/>
+                <a16:creationId xmlns:a16="http://schemas.microsoft.com/office/drawing/2014/main" id="{683B2D78-E206-415A-9DB3-D7F30E9A2AA1}"/>
               </a:ext>
             </a:extLst>
           </p:cNvPr>
@@ -4259,7 +4259,7 @@
           <p:cNvPr id="7" name="Slide Number Placeholder 6">
             <a:extLst xmlns:a="http://schemas.openxmlformats.org/drawingml/2006/main">
               <a:ext uri="{FF2B5EF4-FFF2-40B4-BE49-F238E27FC236}">
-                <a16:creationId xmlns:a16="http://schemas.microsoft.com/office/drawing/2014/main" id="{1D504ADB-B612-4E95-A5D8-13BDAC41BD07}"/>
+                <a16:creationId xmlns:a16="http://schemas.microsoft.com/office/drawing/2014/main" id="{DECC86F9-BA55-4203-BCAE-21176AF7C8DF}"/>
               </a:ext>
             </a:extLst>
           </p:cNvPr>
@@ -4309,7 +4309,7 @@
           <p:cNvPr id="2" name="Title Placeholder 1">
             <a:extLst xmlns:a="http://schemas.openxmlformats.org/drawingml/2006/main">
               <a:ext uri="{FF2B5EF4-FFF2-40B4-BE49-F238E27FC236}">
-                <a16:creationId xmlns:a16="http://schemas.microsoft.com/office/drawing/2014/main" id="{1FC9767C-250C-4495-9E87-57F5E055A207}"/>
+                <a16:creationId xmlns:a16="http://schemas.microsoft.com/office/drawing/2014/main" id="{4F8E3EC9-0615-4052-A1A0-0B6DBC975779}"/>
               </a:ext>
             </a:extLst>
           </p:cNvPr>
@@ -4347,7 +4347,7 @@
           <p:cNvPr id="3" name="Text Placeholder 2">
             <a:extLst xmlns:a="http://schemas.openxmlformats.org/drawingml/2006/main">
               <a:ext uri="{FF2B5EF4-FFF2-40B4-BE49-F238E27FC236}">
-                <a16:creationId xmlns:a16="http://schemas.microsoft.com/office/drawing/2014/main" id="{E8594496-FF93-47D6-8431-1D7A177736D4}"/>
+                <a16:creationId xmlns:a16="http://schemas.microsoft.com/office/drawing/2014/main" id="{728292A3-0B46-4068-B388-0DFE8A6E885A}"/>
               </a:ext>
             </a:extLst>
           </p:cNvPr>
@@ -4420,7 +4420,7 @@
           <p:cNvPr id="4" name="Date Placeholder 3">
             <a:extLst xmlns:a="http://schemas.openxmlformats.org/drawingml/2006/main">
               <a:ext uri="{FF2B5EF4-FFF2-40B4-BE49-F238E27FC236}">
-                <a16:creationId xmlns:a16="http://schemas.microsoft.com/office/drawing/2014/main" id="{C3A523DF-00DB-4B51-B915-7654C6061530}"/>
+                <a16:creationId xmlns:a16="http://schemas.microsoft.com/office/drawing/2014/main" id="{0AA98101-8C6E-4D03-8ACB-9EC0212C229D}"/>
               </a:ext>
             </a:extLst>
           </p:cNvPr>
@@ -4467,7 +4467,7 @@
           <p:cNvPr id="5" name="Footer Placeholder 4">
             <a:extLst xmlns:a="http://schemas.openxmlformats.org/drawingml/2006/main">
               <a:ext uri="{FF2B5EF4-FFF2-40B4-BE49-F238E27FC236}">
-                <a16:creationId xmlns:a16="http://schemas.microsoft.com/office/drawing/2014/main" id="{86BDB433-D7B3-46F8-AD63-518BCB96CC60}"/>
+                <a16:creationId xmlns:a16="http://schemas.microsoft.com/office/drawing/2014/main" id="{DF1139C0-215D-4529-A960-4B8E369FA920}"/>
               </a:ext>
             </a:extLst>
           </p:cNvPr>
@@ -4511,7 +4511,7 @@
           <p:cNvPr id="6" name="Slide Number Placeholder 5">
             <a:extLst xmlns:a="http://schemas.openxmlformats.org/drawingml/2006/main">
               <a:ext uri="{FF2B5EF4-FFF2-40B4-BE49-F238E27FC236}">
-                <a16:creationId xmlns:a16="http://schemas.microsoft.com/office/drawing/2014/main" id="{1FFDEB83-1840-48E2-B4C1-025730A72DEB}"/>
+                <a16:creationId xmlns:a16="http://schemas.microsoft.com/office/drawing/2014/main" id="{B904CB97-9792-464E-804B-BFCA0CA69BCE}"/>
               </a:ext>
             </a:extLst>
           </p:cNvPr>
@@ -4557,17 +4557,17 @@
   </p:cSld>
   <p:clrMap bg1="lt1" tx1="dk1" bg2="lt2" tx2="dk2" accent1="accent1" accent2="accent2" accent3="accent3" accent4="accent4" accent5="accent5" accent6="accent6" hlink="hlink" folHlink="folHlink"/>
   <p:sldLayoutIdLst>
-    <p:sldLayoutId xmlns:r="http://schemas.openxmlformats.org/officeDocument/2006/relationships" id="2147483649" r:id="R6fbba830e2bf44f3"/>
-    <p:sldLayoutId xmlns:r="http://schemas.openxmlformats.org/officeDocument/2006/relationships" id="2147483650" r:id="Rcf53c79d937c43fd"/>
-    <p:sldLayoutId xmlns:r="http://schemas.openxmlformats.org/officeDocument/2006/relationships" id="2147483651" r:id="R6828dca130a14e71"/>
-    <p:sldLayoutId xmlns:r="http://schemas.openxmlformats.org/officeDocument/2006/relationships" id="2147483652" r:id="R655df3797908481c"/>
-    <p:sldLayoutId xmlns:r="http://schemas.openxmlformats.org/officeDocument/2006/relationships" id="2147483653" r:id="R165ab68bd1a9462e"/>
-    <p:sldLayoutId xmlns:r="http://schemas.openxmlformats.org/officeDocument/2006/relationships" id="2147483654" r:id="Rbe9c1803ed3a484e"/>
-    <p:sldLayoutId xmlns:r="http://schemas.openxmlformats.org/officeDocument/2006/relationships" id="2147483655" r:id="R62378c32967c40f9"/>
-    <p:sldLayoutId xmlns:r="http://schemas.openxmlformats.org/officeDocument/2006/relationships" id="2147483656" r:id="Rb464b537dd924951"/>
-    <p:sldLayoutId xmlns:r="http://schemas.openxmlformats.org/officeDocument/2006/relationships" id="2147483657" r:id="Rb7e5dac8e8864181"/>
-    <p:sldLayoutId xmlns:r="http://schemas.openxmlformats.org/officeDocument/2006/relationships" id="2147483658" r:id="R42536b05d6904da3"/>
-    <p:sldLayoutId xmlns:r="http://schemas.openxmlformats.org/officeDocument/2006/relationships" id="2147483659" r:id="R03348f632aee40c2"/>
+    <p:sldLayoutId xmlns:r="http://schemas.openxmlformats.org/officeDocument/2006/relationships" id="2147483649" r:id="R641dd68c061a4b22"/>
+    <p:sldLayoutId xmlns:r="http://schemas.openxmlformats.org/officeDocument/2006/relationships" id="2147483650" r:id="Rfbf963db5127439b"/>
+    <p:sldLayoutId xmlns:r="http://schemas.openxmlformats.org/officeDocument/2006/relationships" id="2147483651" r:id="R852e0b58281543cb"/>
+    <p:sldLayoutId xmlns:r="http://schemas.openxmlformats.org/officeDocument/2006/relationships" id="2147483652" r:id="Rd2cde7f02ed24c8b"/>
+    <p:sldLayoutId xmlns:r="http://schemas.openxmlformats.org/officeDocument/2006/relationships" id="2147483653" r:id="R6d4a82764a5343c5"/>
+    <p:sldLayoutId xmlns:r="http://schemas.openxmlformats.org/officeDocument/2006/relationships" id="2147483654" r:id="Rc8ae4e508c0c4a1e"/>
+    <p:sldLayoutId xmlns:r="http://schemas.openxmlformats.org/officeDocument/2006/relationships" id="2147483655" r:id="Rc187c0f60af04c4b"/>
+    <p:sldLayoutId xmlns:r="http://schemas.openxmlformats.org/officeDocument/2006/relationships" id="2147483656" r:id="Rafc82f9c3e824a0e"/>
+    <p:sldLayoutId xmlns:r="http://schemas.openxmlformats.org/officeDocument/2006/relationships" id="2147483657" r:id="R98bbe1c0d0c349ef"/>
+    <p:sldLayoutId xmlns:r="http://schemas.openxmlformats.org/officeDocument/2006/relationships" id="2147483658" r:id="Rb2ca8a53f286496e"/>
+    <p:sldLayoutId xmlns:r="http://schemas.openxmlformats.org/officeDocument/2006/relationships" id="2147483659" r:id="R3b0f731575a84a89"/>
   </p:sldLayoutIdLst>
   <p:txStyles>
     <p:titleStyle>
@@ -5113,7 +5113,7 @@
           <p:cNvPr id="2" name="Rectangle 1">
             <a:extLst xmlns:a="http://schemas.openxmlformats.org/drawingml/2006/main">
               <a:ext uri="{FF2B5EF4-FFF2-40B4-BE49-F238E27FC236}">
-                <a16:creationId xmlns:a16="http://schemas.microsoft.com/office/drawing/2014/main" id="{B959BA56-CF1D-4BBA-BF72-05061A0B98C7}"/>
+                <a16:creationId xmlns:a16="http://schemas.microsoft.com/office/drawing/2014/main" id="{42A5012E-F501-4884-B8D0-FD957C04F95D}"/>
               </a:ext>
             </a:extLst>
           </p:cNvPr>
@@ -5166,7 +5166,7 @@
           <p:cNvPr id="3" name="Rectangle 2">
             <a:extLst xmlns:a="http://schemas.openxmlformats.org/drawingml/2006/main">
               <a:ext uri="{FF2B5EF4-FFF2-40B4-BE49-F238E27FC236}">
-                <a16:creationId xmlns:a16="http://schemas.microsoft.com/office/drawing/2014/main" id="{E03CA2F5-909C-4654-97E4-CFC2F363E2C7}"/>
+                <a16:creationId xmlns:a16="http://schemas.microsoft.com/office/drawing/2014/main" id="{9EAE6E70-B8C4-41EF-8738-9F0A781BC292}"/>
               </a:ext>
             </a:extLst>
           </p:cNvPr>
@@ -5219,7 +5219,7 @@
           <p:cNvPr id="4" name="TextBox 3">
             <a:extLst xmlns:a="http://schemas.openxmlformats.org/drawingml/2006/main">
               <a:ext uri="{FF2B5EF4-FFF2-40B4-BE49-F238E27FC236}">
-                <a16:creationId xmlns:a16="http://schemas.microsoft.com/office/drawing/2014/main" id="{E60BEA90-4AE9-4815-8122-47B63F250575}"/>
+                <a16:creationId xmlns:a16="http://schemas.microsoft.com/office/drawing/2014/main" id="{AA60827C-175F-470F-8B6C-34160D524180}"/>
               </a:ext>
             </a:extLst>
           </p:cNvPr>
@@ -5321,7 +5321,7 @@
     </p:spTree>
     <p:extLst>
       <p:ext uri="{BB962C8B-B14F-4D97-AF65-F5344CB8AC3E}">
-        <p14:creationId xmlns:p14="http://schemas.microsoft.com/office/powerpoint/2010/main" val="747883721"/>
+        <p14:creationId xmlns:p14="http://schemas.microsoft.com/office/powerpoint/2010/main" val="609045976"/>
       </p:ext>
     </p:extLst>
   </p:cSld>
@@ -5345,7 +5345,7 @@
           <p:cNvPr id="2" name="Rectangle 1">
             <a:extLst xmlns:a="http://schemas.openxmlformats.org/drawingml/2006/main">
               <a:ext uri="{FF2B5EF4-FFF2-40B4-BE49-F238E27FC236}">
-                <a16:creationId xmlns:a16="http://schemas.microsoft.com/office/drawing/2014/main" id="{D035EBE8-53DD-45B4-88A8-DC99A6640FEC}"/>
+                <a16:creationId xmlns:a16="http://schemas.microsoft.com/office/drawing/2014/main" id="{5D2EAB22-A4A0-4DCF-AE9F-BA3CD9B6E43E}"/>
               </a:ext>
             </a:extLst>
           </p:cNvPr>
@@ -5398,7 +5398,7 @@
           <p:cNvPr id="3" name="Rectangle 2">
             <a:extLst xmlns:a="http://schemas.openxmlformats.org/drawingml/2006/main">
               <a:ext uri="{FF2B5EF4-FFF2-40B4-BE49-F238E27FC236}">
-                <a16:creationId xmlns:a16="http://schemas.microsoft.com/office/drawing/2014/main" id="{4CD44846-3032-4665-A874-9DB23538852C}"/>
+                <a16:creationId xmlns:a16="http://schemas.microsoft.com/office/drawing/2014/main" id="{6C34AC09-DD31-4C56-93DE-847575808F57}"/>
               </a:ext>
             </a:extLst>
           </p:cNvPr>
@@ -5451,7 +5451,7 @@
           <p:cNvPr id="4" name="Rectangle 3">
             <a:extLst xmlns:a="http://schemas.openxmlformats.org/drawingml/2006/main">
               <a:ext uri="{FF2B5EF4-FFF2-40B4-BE49-F238E27FC236}">
-                <a16:creationId xmlns:a16="http://schemas.microsoft.com/office/drawing/2014/main" id="{541B6A31-FE42-4FDC-BD2F-28666C6A4AF8}"/>
+                <a16:creationId xmlns:a16="http://schemas.microsoft.com/office/drawing/2014/main" id="{4AE62ED8-F209-458D-A331-B2CA33B62325}"/>
               </a:ext>
             </a:extLst>
           </p:cNvPr>
@@ -5504,7 +5504,7 @@
           <p:cNvPr id="5" name="TextBox 4">
             <a:extLst xmlns:a="http://schemas.openxmlformats.org/drawingml/2006/main">
               <a:ext uri="{FF2B5EF4-FFF2-40B4-BE49-F238E27FC236}">
-                <a16:creationId xmlns:a16="http://schemas.microsoft.com/office/drawing/2014/main" id="{201C9F79-B2CE-4488-B86D-42A035D4B0E3}"/>
+                <a16:creationId xmlns:a16="http://schemas.microsoft.com/office/drawing/2014/main" id="{3D8567FE-475C-4C26-841A-7A645CF6DA16}"/>
               </a:ext>
             </a:extLst>
           </p:cNvPr>
@@ -5567,7 +5567,7 @@
           <p:cNvPr id="6" name="Rounded Rectangle 5">
             <a:extLst xmlns:a="http://schemas.openxmlformats.org/drawingml/2006/main">
               <a:ext uri="{FF2B5EF4-FFF2-40B4-BE49-F238E27FC236}">
-                <a16:creationId xmlns:a16="http://schemas.microsoft.com/office/drawing/2014/main" id="{369C9FB8-3F1B-484C-82B2-7E43D80A6041}"/>
+                <a16:creationId xmlns:a16="http://schemas.microsoft.com/office/drawing/2014/main" id="{92312E06-7A06-4D14-9023-F0E3E9244882}"/>
               </a:ext>
             </a:extLst>
           </p:cNvPr>
@@ -5622,7 +5622,7 @@
           <p:cNvPr id="7" name="TextBox 6">
             <a:extLst xmlns:a="http://schemas.openxmlformats.org/drawingml/2006/main">
               <a:ext uri="{FF2B5EF4-FFF2-40B4-BE49-F238E27FC236}">
-                <a16:creationId xmlns:a16="http://schemas.microsoft.com/office/drawing/2014/main" id="{EB7D4578-8594-416E-B8F7-9F861D1E7A49}"/>
+                <a16:creationId xmlns:a16="http://schemas.microsoft.com/office/drawing/2014/main" id="{73B08BCB-9D70-4FA8-A4CA-A74A06F8AEE6}"/>
               </a:ext>
             </a:extLst>
           </p:cNvPr>
@@ -5726,7 +5726,7 @@
           <p:cNvPr id="8" name="Rounded Rectangle 7">
             <a:extLst xmlns:a="http://schemas.openxmlformats.org/drawingml/2006/main">
               <a:ext uri="{FF2B5EF4-FFF2-40B4-BE49-F238E27FC236}">
-                <a16:creationId xmlns:a16="http://schemas.microsoft.com/office/drawing/2014/main" id="{9CE6973E-3518-4EE3-A2D7-994A0E635478}"/>
+                <a16:creationId xmlns:a16="http://schemas.microsoft.com/office/drawing/2014/main" id="{E9B2F661-FAB9-4FDB-89F7-5030E06C08A0}"/>
               </a:ext>
             </a:extLst>
           </p:cNvPr>
@@ -5781,7 +5781,7 @@
           <p:cNvPr id="9" name="TextBox 8">
             <a:extLst xmlns:a="http://schemas.openxmlformats.org/drawingml/2006/main">
               <a:ext uri="{FF2B5EF4-FFF2-40B4-BE49-F238E27FC236}">
-                <a16:creationId xmlns:a16="http://schemas.microsoft.com/office/drawing/2014/main" id="{E0C36BE4-7CA5-458D-9FB0-5B698D16067D}"/>
+                <a16:creationId xmlns:a16="http://schemas.microsoft.com/office/drawing/2014/main" id="{F60E2F55-5208-4A6F-BAA0-2135F27E8BCC}"/>
               </a:ext>
             </a:extLst>
           </p:cNvPr>
@@ -5866,7 +5866,7 @@
           <p:cNvPr id="10" name="Rounded Rectangle 9">
             <a:extLst xmlns:a="http://schemas.openxmlformats.org/drawingml/2006/main">
               <a:ext uri="{FF2B5EF4-FFF2-40B4-BE49-F238E27FC236}">
-                <a16:creationId xmlns:a16="http://schemas.microsoft.com/office/drawing/2014/main" id="{CA95DEB7-E756-4724-B9F8-C29E83263C12}"/>
+                <a16:creationId xmlns:a16="http://schemas.microsoft.com/office/drawing/2014/main" id="{995070CC-715E-47D0-89E4-609179D903AA}"/>
               </a:ext>
             </a:extLst>
           </p:cNvPr>
@@ -5921,7 +5921,7 @@
           <p:cNvPr id="11" name="TextBox 10">
             <a:extLst xmlns:a="http://schemas.openxmlformats.org/drawingml/2006/main">
               <a:ext uri="{FF2B5EF4-FFF2-40B4-BE49-F238E27FC236}">
-                <a16:creationId xmlns:a16="http://schemas.microsoft.com/office/drawing/2014/main" id="{B5477A4D-0990-4359-B0BF-9E1814D8F50B}"/>
+                <a16:creationId xmlns:a16="http://schemas.microsoft.com/office/drawing/2014/main" id="{C9A92EC7-6C46-482D-8718-096498CBCF17}"/>
               </a:ext>
             </a:extLst>
           </p:cNvPr>
@@ -6023,7 +6023,7 @@
     </p:spTree>
     <p:extLst>
       <p:ext uri="{BB962C8B-B14F-4D97-AF65-F5344CB8AC3E}">
-        <p14:creationId xmlns:p14="http://schemas.microsoft.com/office/powerpoint/2010/main" val="1704285524"/>
+        <p14:creationId xmlns:p14="http://schemas.microsoft.com/office/powerpoint/2010/main" val="2140585371"/>
       </p:ext>
     </p:extLst>
   </p:cSld>
@@ -6047,7 +6047,7 @@
           <p:cNvPr id="2" name="Rectangle 1">
             <a:extLst xmlns:a="http://schemas.openxmlformats.org/drawingml/2006/main">
               <a:ext uri="{FF2B5EF4-FFF2-40B4-BE49-F238E27FC236}">
-                <a16:creationId xmlns:a16="http://schemas.microsoft.com/office/drawing/2014/main" id="{2FFABAE1-FF17-47D0-9C48-F05D44B445F4}"/>
+                <a16:creationId xmlns:a16="http://schemas.microsoft.com/office/drawing/2014/main" id="{17842A66-40FC-4CD3-B676-049C67B4A9AD}"/>
               </a:ext>
             </a:extLst>
           </p:cNvPr>
@@ -6100,7 +6100,7 @@
           <p:cNvPr id="3" name="Rectangle 2">
             <a:extLst xmlns:a="http://schemas.openxmlformats.org/drawingml/2006/main">
               <a:ext uri="{FF2B5EF4-FFF2-40B4-BE49-F238E27FC236}">
-                <a16:creationId xmlns:a16="http://schemas.microsoft.com/office/drawing/2014/main" id="{E27E8A66-3F9A-40AA-AA0C-9EFBDFBF7FD1}"/>
+                <a16:creationId xmlns:a16="http://schemas.microsoft.com/office/drawing/2014/main" id="{B12877F0-783C-4760-A681-2CB718917F3D}"/>
               </a:ext>
             </a:extLst>
           </p:cNvPr>
@@ -6153,7 +6153,7 @@
           <p:cNvPr id="4" name="Rectangle 3">
             <a:extLst xmlns:a="http://schemas.openxmlformats.org/drawingml/2006/main">
               <a:ext uri="{FF2B5EF4-FFF2-40B4-BE49-F238E27FC236}">
-                <a16:creationId xmlns:a16="http://schemas.microsoft.com/office/drawing/2014/main" id="{919A8047-8884-42B9-81E8-1815DF8B0DC3}"/>
+                <a16:creationId xmlns:a16="http://schemas.microsoft.com/office/drawing/2014/main" id="{2E233975-CEDA-4E56-B82C-A6F08F9FC944}"/>
               </a:ext>
             </a:extLst>
           </p:cNvPr>
@@ -6206,7 +6206,7 @@
           <p:cNvPr id="5" name="TextBox 4">
             <a:extLst xmlns:a="http://schemas.openxmlformats.org/drawingml/2006/main">
               <a:ext uri="{FF2B5EF4-FFF2-40B4-BE49-F238E27FC236}">
-                <a16:creationId xmlns:a16="http://schemas.microsoft.com/office/drawing/2014/main" id="{543EEE72-DEDE-4489-B2CD-A1F67E8ED7F5}"/>
+                <a16:creationId xmlns:a16="http://schemas.microsoft.com/office/drawing/2014/main" id="{78168635-ED8F-4C47-80E5-D7EB8098B03C}"/>
               </a:ext>
             </a:extLst>
           </p:cNvPr>
@@ -6269,7 +6269,7 @@
           <p:cNvPr id="6" name="Rounded Rectangle 5">
             <a:extLst xmlns:a="http://schemas.openxmlformats.org/drawingml/2006/main">
               <a:ext uri="{FF2B5EF4-FFF2-40B4-BE49-F238E27FC236}">
-                <a16:creationId xmlns:a16="http://schemas.microsoft.com/office/drawing/2014/main" id="{B9F91D04-F16A-434B-84B3-CA801F111095}"/>
+                <a16:creationId xmlns:a16="http://schemas.microsoft.com/office/drawing/2014/main" id="{A30A2A98-01C6-4C34-A9D5-DE9B4E2A6FBE}"/>
               </a:ext>
             </a:extLst>
           </p:cNvPr>
@@ -6324,7 +6324,7 @@
           <p:cNvPr id="7" name="TextBox 6">
             <a:extLst xmlns:a="http://schemas.openxmlformats.org/drawingml/2006/main">
               <a:ext uri="{FF2B5EF4-FFF2-40B4-BE49-F238E27FC236}">
-                <a16:creationId xmlns:a16="http://schemas.microsoft.com/office/drawing/2014/main" id="{99A98039-C969-434E-A561-AC2F6095A8BB}"/>
+                <a16:creationId xmlns:a16="http://schemas.microsoft.com/office/drawing/2014/main" id="{5F25891C-5EF6-4C89-928A-7D6BC6237C1A}"/>
               </a:ext>
             </a:extLst>
           </p:cNvPr>
@@ -6523,7 +6523,7 @@
           <p:cNvPr id="8" name="Rounded Rectangle 7">
             <a:extLst xmlns:a="http://schemas.openxmlformats.org/drawingml/2006/main">
               <a:ext uri="{FF2B5EF4-FFF2-40B4-BE49-F238E27FC236}">
-                <a16:creationId xmlns:a16="http://schemas.microsoft.com/office/drawing/2014/main" id="{834515B1-FA97-48DA-BC78-59A4E2D0CADB}"/>
+                <a16:creationId xmlns:a16="http://schemas.microsoft.com/office/drawing/2014/main" id="{C2DF8B07-5A2D-4F19-931B-202A37760045}"/>
               </a:ext>
             </a:extLst>
           </p:cNvPr>
@@ -6578,7 +6578,7 @@
           <p:cNvPr id="9" name="TextBox 8">
             <a:extLst xmlns:a="http://schemas.openxmlformats.org/drawingml/2006/main">
               <a:ext uri="{FF2B5EF4-FFF2-40B4-BE49-F238E27FC236}">
-                <a16:creationId xmlns:a16="http://schemas.microsoft.com/office/drawing/2014/main" id="{1ED0C34F-3BE1-4104-9DFC-C75BC952D566}"/>
+                <a16:creationId xmlns:a16="http://schemas.microsoft.com/office/drawing/2014/main" id="{4C690AC6-FC56-43CF-812F-0687775AD0E1}"/>
               </a:ext>
             </a:extLst>
           </p:cNvPr>
@@ -6699,7 +6699,7 @@
     </p:spTree>
     <p:extLst>
       <p:ext uri="{BB962C8B-B14F-4D97-AF65-F5344CB8AC3E}">
-        <p14:creationId xmlns:p14="http://schemas.microsoft.com/office/powerpoint/2010/main" val="1331033048"/>
+        <p14:creationId xmlns:p14="http://schemas.microsoft.com/office/powerpoint/2010/main" val="1162553579"/>
       </p:ext>
     </p:extLst>
   </p:cSld>
@@ -6723,7 +6723,7 @@
           <p:cNvPr id="2" name="Rectangle 1">
             <a:extLst xmlns:a="http://schemas.openxmlformats.org/drawingml/2006/main">
               <a:ext uri="{FF2B5EF4-FFF2-40B4-BE49-F238E27FC236}">
-                <a16:creationId xmlns:a16="http://schemas.microsoft.com/office/drawing/2014/main" id="{0BB52EC8-E2E4-4C5B-AD9C-34AA3201A407}"/>
+                <a16:creationId xmlns:a16="http://schemas.microsoft.com/office/drawing/2014/main" id="{4DEF8083-370F-47C0-AD0B-92A4B1D6A465}"/>
               </a:ext>
             </a:extLst>
           </p:cNvPr>
@@ -6776,7 +6776,7 @@
           <p:cNvPr id="3" name="Rectangle 2">
             <a:extLst xmlns:a="http://schemas.openxmlformats.org/drawingml/2006/main">
               <a:ext uri="{FF2B5EF4-FFF2-40B4-BE49-F238E27FC236}">
-                <a16:creationId xmlns:a16="http://schemas.microsoft.com/office/drawing/2014/main" id="{2A541938-7315-4F3B-B40E-D4C80FCC3527}"/>
+                <a16:creationId xmlns:a16="http://schemas.microsoft.com/office/drawing/2014/main" id="{008AE4E3-F502-4856-81E6-2DCC055E972B}"/>
               </a:ext>
             </a:extLst>
           </p:cNvPr>
@@ -6829,7 +6829,7 @@
           <p:cNvPr id="4" name="TextBox 3">
             <a:extLst xmlns:a="http://schemas.openxmlformats.org/drawingml/2006/main">
               <a:ext uri="{FF2B5EF4-FFF2-40B4-BE49-F238E27FC236}">
-                <a16:creationId xmlns:a16="http://schemas.microsoft.com/office/drawing/2014/main" id="{5F149EF5-3AB6-4FEB-9594-C48DA41E8A71}"/>
+                <a16:creationId xmlns:a16="http://schemas.microsoft.com/office/drawing/2014/main" id="{89E30DA1-D715-4954-A75C-B7004E9A6ED6}"/>
               </a:ext>
             </a:extLst>
           </p:cNvPr>
@@ -7007,7 +7007,7 @@
     </p:spTree>
     <p:extLst>
       <p:ext uri="{BB962C8B-B14F-4D97-AF65-F5344CB8AC3E}">
-        <p14:creationId xmlns:p14="http://schemas.microsoft.com/office/powerpoint/2010/main" val="635446557"/>
+        <p14:creationId xmlns:p14="http://schemas.microsoft.com/office/powerpoint/2010/main" val="1298610414"/>
       </p:ext>
     </p:extLst>
   </p:cSld>
@@ -7031,7 +7031,7 @@
           <p:cNvPr id="2" name="Rectangle 1">
             <a:extLst xmlns:a="http://schemas.openxmlformats.org/drawingml/2006/main">
               <a:ext uri="{FF2B5EF4-FFF2-40B4-BE49-F238E27FC236}">
-                <a16:creationId xmlns:a16="http://schemas.microsoft.com/office/drawing/2014/main" id="{A7AC01FD-E0BE-4CA2-9728-D1692C7CAAAC}"/>
+                <a16:creationId xmlns:a16="http://schemas.microsoft.com/office/drawing/2014/main" id="{7D1D252F-6EEF-43AF-B6AE-B413AEE39718}"/>
               </a:ext>
             </a:extLst>
           </p:cNvPr>
@@ -7084,7 +7084,7 @@
           <p:cNvPr id="3" name="Rectangle 2">
             <a:extLst xmlns:a="http://schemas.openxmlformats.org/drawingml/2006/main">
               <a:ext uri="{FF2B5EF4-FFF2-40B4-BE49-F238E27FC236}">
-                <a16:creationId xmlns:a16="http://schemas.microsoft.com/office/drawing/2014/main" id="{6CC34BA4-B19C-4589-88DA-4E1B06762FF2}"/>
+                <a16:creationId xmlns:a16="http://schemas.microsoft.com/office/drawing/2014/main" id="{56F170BA-C51C-4049-842B-A1A2FE9C880E}"/>
               </a:ext>
             </a:extLst>
           </p:cNvPr>
@@ -7137,7 +7137,7 @@
           <p:cNvPr id="4" name="Rectangle 3">
             <a:extLst xmlns:a="http://schemas.openxmlformats.org/drawingml/2006/main">
               <a:ext uri="{FF2B5EF4-FFF2-40B4-BE49-F238E27FC236}">
-                <a16:creationId xmlns:a16="http://schemas.microsoft.com/office/drawing/2014/main" id="{2B2E2DBE-53DE-46CA-A2FE-AF81E63281D7}"/>
+                <a16:creationId xmlns:a16="http://schemas.microsoft.com/office/drawing/2014/main" id="{D46F4130-8D2F-4B27-B5C0-E55E4303EF45}"/>
               </a:ext>
             </a:extLst>
           </p:cNvPr>
@@ -7190,7 +7190,7 @@
           <p:cNvPr id="5" name="TextBox 4">
             <a:extLst xmlns:a="http://schemas.openxmlformats.org/drawingml/2006/main">
               <a:ext uri="{FF2B5EF4-FFF2-40B4-BE49-F238E27FC236}">
-                <a16:creationId xmlns:a16="http://schemas.microsoft.com/office/drawing/2014/main" id="{AA7DD74E-589F-4D6E-ACBE-AD1FB904E681}"/>
+                <a16:creationId xmlns:a16="http://schemas.microsoft.com/office/drawing/2014/main" id="{BB754FD9-B1CD-4092-86FC-CBA92E02A1FC}"/>
               </a:ext>
             </a:extLst>
           </p:cNvPr>
@@ -7253,7 +7253,7 @@
           <p:cNvPr id="6" name="Rounded Rectangle 5">
             <a:extLst xmlns:a="http://schemas.openxmlformats.org/drawingml/2006/main">
               <a:ext uri="{FF2B5EF4-FFF2-40B4-BE49-F238E27FC236}">
-                <a16:creationId xmlns:a16="http://schemas.microsoft.com/office/drawing/2014/main" id="{4011CF02-8CDC-4560-814B-3DF01DA5CB27}"/>
+                <a16:creationId xmlns:a16="http://schemas.microsoft.com/office/drawing/2014/main" id="{7D1713FB-5752-458D-886A-6D2BC6A382DE}"/>
               </a:ext>
             </a:extLst>
           </p:cNvPr>
@@ -7308,7 +7308,7 @@
           <p:cNvPr id="7" name="TextBox 6">
             <a:extLst xmlns:a="http://schemas.openxmlformats.org/drawingml/2006/main">
               <a:ext uri="{FF2B5EF4-FFF2-40B4-BE49-F238E27FC236}">
-                <a16:creationId xmlns:a16="http://schemas.microsoft.com/office/drawing/2014/main" id="{96BA2453-E1DB-467A-B761-6586ACE30EEB}"/>
+                <a16:creationId xmlns:a16="http://schemas.microsoft.com/office/drawing/2014/main" id="{F5BC63CD-E050-4EE2-9DF5-6868909330D5}"/>
               </a:ext>
             </a:extLst>
           </p:cNvPr>
@@ -7412,7 +7412,7 @@
           <p:cNvPr id="8" name="Rounded Rectangle 7">
             <a:extLst xmlns:a="http://schemas.openxmlformats.org/drawingml/2006/main">
               <a:ext uri="{FF2B5EF4-FFF2-40B4-BE49-F238E27FC236}">
-                <a16:creationId xmlns:a16="http://schemas.microsoft.com/office/drawing/2014/main" id="{BE34707B-5640-4432-98F4-BB8D9766398D}"/>
+                <a16:creationId xmlns:a16="http://schemas.microsoft.com/office/drawing/2014/main" id="{C4497437-C3F5-4568-8C68-EBF5EA1A9695}"/>
               </a:ext>
             </a:extLst>
           </p:cNvPr>
@@ -7467,7 +7467,7 @@
           <p:cNvPr id="9" name="TextBox 8">
             <a:extLst xmlns:a="http://schemas.openxmlformats.org/drawingml/2006/main">
               <a:ext uri="{FF2B5EF4-FFF2-40B4-BE49-F238E27FC236}">
-                <a16:creationId xmlns:a16="http://schemas.microsoft.com/office/drawing/2014/main" id="{4C1E83E0-1E31-4190-82AD-F6539C12E080}"/>
+                <a16:creationId xmlns:a16="http://schemas.microsoft.com/office/drawing/2014/main" id="{929CD155-B89A-40E4-94B1-E7A34312C4C1}"/>
               </a:ext>
             </a:extLst>
           </p:cNvPr>
@@ -7571,7 +7571,7 @@
           <p:cNvPr id="10" name="Rounded Rectangle 9">
             <a:extLst xmlns:a="http://schemas.openxmlformats.org/drawingml/2006/main">
               <a:ext uri="{FF2B5EF4-FFF2-40B4-BE49-F238E27FC236}">
-                <a16:creationId xmlns:a16="http://schemas.microsoft.com/office/drawing/2014/main" id="{8AAE9A99-093F-466F-8395-A38F016D77F0}"/>
+                <a16:creationId xmlns:a16="http://schemas.microsoft.com/office/drawing/2014/main" id="{AC1BB927-667A-4E29-B694-AAE00F95F802}"/>
               </a:ext>
             </a:extLst>
           </p:cNvPr>
@@ -7626,7 +7626,7 @@
           <p:cNvPr id="11" name="TextBox 10">
             <a:extLst xmlns:a="http://schemas.openxmlformats.org/drawingml/2006/main">
               <a:ext uri="{FF2B5EF4-FFF2-40B4-BE49-F238E27FC236}">
-                <a16:creationId xmlns:a16="http://schemas.microsoft.com/office/drawing/2014/main" id="{99B55F59-54F1-4FB9-8401-146AA8BC7239}"/>
+                <a16:creationId xmlns:a16="http://schemas.microsoft.com/office/drawing/2014/main" id="{1C4EC508-D28D-4AFB-A25D-384808A9A8F3}"/>
               </a:ext>
             </a:extLst>
           </p:cNvPr>
@@ -7785,7 +7785,7 @@
     </p:spTree>
     <p:extLst>
       <p:ext uri="{BB962C8B-B14F-4D97-AF65-F5344CB8AC3E}">
-        <p14:creationId xmlns:p14="http://schemas.microsoft.com/office/powerpoint/2010/main" val="1056427338"/>
+        <p14:creationId xmlns:p14="http://schemas.microsoft.com/office/powerpoint/2010/main" val="678296405"/>
       </p:ext>
     </p:extLst>
   </p:cSld>
@@ -7809,7 +7809,7 @@
           <p:cNvPr id="2" name="Rectangle 1">
             <a:extLst xmlns:a="http://schemas.openxmlformats.org/drawingml/2006/main">
               <a:ext uri="{FF2B5EF4-FFF2-40B4-BE49-F238E27FC236}">
-                <a16:creationId xmlns:a16="http://schemas.microsoft.com/office/drawing/2014/main" id="{C8841C0A-8121-43F1-93A7-332460336295}"/>
+                <a16:creationId xmlns:a16="http://schemas.microsoft.com/office/drawing/2014/main" id="{224C11A0-358B-45CD-A664-E7E9D24277B3}"/>
               </a:ext>
             </a:extLst>
           </p:cNvPr>
@@ -7862,7 +7862,7 @@
           <p:cNvPr id="3" name="Rectangle 2">
             <a:extLst xmlns:a="http://schemas.openxmlformats.org/drawingml/2006/main">
               <a:ext uri="{FF2B5EF4-FFF2-40B4-BE49-F238E27FC236}">
-                <a16:creationId xmlns:a16="http://schemas.microsoft.com/office/drawing/2014/main" id="{ACBA789D-266C-46C4-A3A0-3A6D4EC0AB6A}"/>
+                <a16:creationId xmlns:a16="http://schemas.microsoft.com/office/drawing/2014/main" id="{606EB0B7-F878-439A-B8F0-E7F479FE0681}"/>
               </a:ext>
             </a:extLst>
           </p:cNvPr>
@@ -7915,7 +7915,7 @@
           <p:cNvPr id="4" name="Rectangle 3">
             <a:extLst xmlns:a="http://schemas.openxmlformats.org/drawingml/2006/main">
               <a:ext uri="{FF2B5EF4-FFF2-40B4-BE49-F238E27FC236}">
-                <a16:creationId xmlns:a16="http://schemas.microsoft.com/office/drawing/2014/main" id="{C4790685-BFFF-4697-9F29-2FC59E31D121}"/>
+                <a16:creationId xmlns:a16="http://schemas.microsoft.com/office/drawing/2014/main" id="{9DA8F699-2E7A-419A-A538-22CE67E2E651}"/>
               </a:ext>
             </a:extLst>
           </p:cNvPr>
@@ -7968,7 +7968,7 @@
           <p:cNvPr id="5" name="TextBox 4">
             <a:extLst xmlns:a="http://schemas.openxmlformats.org/drawingml/2006/main">
               <a:ext uri="{FF2B5EF4-FFF2-40B4-BE49-F238E27FC236}">
-                <a16:creationId xmlns:a16="http://schemas.microsoft.com/office/drawing/2014/main" id="{2D9861AB-3B2E-4344-A5DA-BF2C24F3FEDA}"/>
+                <a16:creationId xmlns:a16="http://schemas.microsoft.com/office/drawing/2014/main" id="{E7966DE4-0441-4832-A6B8-8116F7EDA7E5}"/>
               </a:ext>
             </a:extLst>
           </p:cNvPr>
@@ -8031,7 +8031,7 @@
           <p:cNvPr id="6" name="Rounded Rectangle 5">
             <a:extLst xmlns:a="http://schemas.openxmlformats.org/drawingml/2006/main">
               <a:ext uri="{FF2B5EF4-FFF2-40B4-BE49-F238E27FC236}">
-                <a16:creationId xmlns:a16="http://schemas.microsoft.com/office/drawing/2014/main" id="{98D1B0AD-3396-419F-AC44-1A621FCB296A}"/>
+                <a16:creationId xmlns:a16="http://schemas.microsoft.com/office/drawing/2014/main" id="{7CF9904A-AC49-4D8D-8687-75828AA94497}"/>
               </a:ext>
             </a:extLst>
           </p:cNvPr>
@@ -8086,7 +8086,7 @@
           <p:cNvPr id="7" name="TextBox 6">
             <a:extLst xmlns:a="http://schemas.openxmlformats.org/drawingml/2006/main">
               <a:ext uri="{FF2B5EF4-FFF2-40B4-BE49-F238E27FC236}">
-                <a16:creationId xmlns:a16="http://schemas.microsoft.com/office/drawing/2014/main" id="{306C2415-F573-4A41-8AAB-F155FF9274F9}"/>
+                <a16:creationId xmlns:a16="http://schemas.microsoft.com/office/drawing/2014/main" id="{D23664B5-9EC3-46D6-9166-F04B6FCA6039}"/>
               </a:ext>
             </a:extLst>
           </p:cNvPr>
@@ -8209,7 +8209,7 @@
           <p:cNvPr id="8" name="Rounded Rectangle 7">
             <a:extLst xmlns:a="http://schemas.openxmlformats.org/drawingml/2006/main">
               <a:ext uri="{FF2B5EF4-FFF2-40B4-BE49-F238E27FC236}">
-                <a16:creationId xmlns:a16="http://schemas.microsoft.com/office/drawing/2014/main" id="{FBD03D21-1E70-438C-ACB7-0FEEE1CEAFFF}"/>
+                <a16:creationId xmlns:a16="http://schemas.microsoft.com/office/drawing/2014/main" id="{D1782C88-7C96-4CF5-85EB-5CFAA31A3ECF}"/>
               </a:ext>
             </a:extLst>
           </p:cNvPr>
@@ -8264,7 +8264,7 @@
           <p:cNvPr id="9" name="TextBox 8">
             <a:extLst xmlns:a="http://schemas.openxmlformats.org/drawingml/2006/main">
               <a:ext uri="{FF2B5EF4-FFF2-40B4-BE49-F238E27FC236}">
-                <a16:creationId xmlns:a16="http://schemas.microsoft.com/office/drawing/2014/main" id="{87849F11-5B1A-42DD-B840-7DBCCB7C78D0}"/>
+                <a16:creationId xmlns:a16="http://schemas.microsoft.com/office/drawing/2014/main" id="{7C043E09-E320-4771-AFB2-5C86F8715538}"/>
               </a:ext>
             </a:extLst>
           </p:cNvPr>
@@ -8406,7 +8406,7 @@
           <p:cNvPr id="10" name="Rounded Rectangle 9">
             <a:extLst xmlns:a="http://schemas.openxmlformats.org/drawingml/2006/main">
               <a:ext uri="{FF2B5EF4-FFF2-40B4-BE49-F238E27FC236}">
-                <a16:creationId xmlns:a16="http://schemas.microsoft.com/office/drawing/2014/main" id="{543CB129-0D2D-4A90-BBFE-A8AA966953DA}"/>
+                <a16:creationId xmlns:a16="http://schemas.microsoft.com/office/drawing/2014/main" id="{C06F1E25-0708-41BE-A67A-50BFFBEF0168}"/>
               </a:ext>
             </a:extLst>
           </p:cNvPr>
@@ -8461,7 +8461,7 @@
           <p:cNvPr id="11" name="TextBox 10">
             <a:extLst xmlns:a="http://schemas.openxmlformats.org/drawingml/2006/main">
               <a:ext uri="{FF2B5EF4-FFF2-40B4-BE49-F238E27FC236}">
-                <a16:creationId xmlns:a16="http://schemas.microsoft.com/office/drawing/2014/main" id="{726D0067-9579-48ED-ACC0-A386053B2A38}"/>
+                <a16:creationId xmlns:a16="http://schemas.microsoft.com/office/drawing/2014/main" id="{C59B51A3-DF5A-44C4-95BE-30212002EDB7}"/>
               </a:ext>
             </a:extLst>
           </p:cNvPr>
@@ -8563,7 +8563,7 @@
     </p:spTree>
     <p:extLst>
       <p:ext uri="{BB962C8B-B14F-4D97-AF65-F5344CB8AC3E}">
-        <p14:creationId xmlns:p14="http://schemas.microsoft.com/office/powerpoint/2010/main" val="959810390"/>
+        <p14:creationId xmlns:p14="http://schemas.microsoft.com/office/powerpoint/2010/main" val="222286338"/>
       </p:ext>
     </p:extLst>
   </p:cSld>
@@ -8587,7 +8587,7 @@
           <p:cNvPr id="2" name="Rectangle 1">
             <a:extLst xmlns:a="http://schemas.openxmlformats.org/drawingml/2006/main">
               <a:ext uri="{FF2B5EF4-FFF2-40B4-BE49-F238E27FC236}">
-                <a16:creationId xmlns:a16="http://schemas.microsoft.com/office/drawing/2014/main" id="{1D192B5B-44D2-4E94-B034-C88E3D06D7D0}"/>
+                <a16:creationId xmlns:a16="http://schemas.microsoft.com/office/drawing/2014/main" id="{479CA8E0-4ED1-4A84-BA9E-2E2102742059}"/>
               </a:ext>
             </a:extLst>
           </p:cNvPr>
@@ -8640,7 +8640,7 @@
           <p:cNvPr id="3" name="Rectangle 2">
             <a:extLst xmlns:a="http://schemas.openxmlformats.org/drawingml/2006/main">
               <a:ext uri="{FF2B5EF4-FFF2-40B4-BE49-F238E27FC236}">
-                <a16:creationId xmlns:a16="http://schemas.microsoft.com/office/drawing/2014/main" id="{46C6F833-C7C4-498F-8B00-2E6B5D433EDF}"/>
+                <a16:creationId xmlns:a16="http://schemas.microsoft.com/office/drawing/2014/main" id="{70AADF4C-9EA9-4244-B947-4B92B0858DDF}"/>
               </a:ext>
             </a:extLst>
           </p:cNvPr>
@@ -8693,7 +8693,7 @@
           <p:cNvPr id="4" name="Rectangle 3">
             <a:extLst xmlns:a="http://schemas.openxmlformats.org/drawingml/2006/main">
               <a:ext uri="{FF2B5EF4-FFF2-40B4-BE49-F238E27FC236}">
-                <a16:creationId xmlns:a16="http://schemas.microsoft.com/office/drawing/2014/main" id="{A5FC2171-3405-42CB-841D-16B599E543C5}"/>
+                <a16:creationId xmlns:a16="http://schemas.microsoft.com/office/drawing/2014/main" id="{B30F3FD5-E8FB-4528-862D-D584ABE6C450}"/>
               </a:ext>
             </a:extLst>
           </p:cNvPr>
@@ -8746,7 +8746,7 @@
           <p:cNvPr id="5" name="TextBox 4">
             <a:extLst xmlns:a="http://schemas.openxmlformats.org/drawingml/2006/main">
               <a:ext uri="{FF2B5EF4-FFF2-40B4-BE49-F238E27FC236}">
-                <a16:creationId xmlns:a16="http://schemas.microsoft.com/office/drawing/2014/main" id="{3488690E-6EDA-4B87-B6CF-9FD154DA6C3C}"/>
+                <a16:creationId xmlns:a16="http://schemas.microsoft.com/office/drawing/2014/main" id="{AA0E46BA-735A-4B77-93E8-397616F1DCC2}"/>
               </a:ext>
             </a:extLst>
           </p:cNvPr>
@@ -8809,7 +8809,7 @@
           <p:cNvPr id="6" name="Rounded Rectangle 5">
             <a:extLst xmlns:a="http://schemas.openxmlformats.org/drawingml/2006/main">
               <a:ext uri="{FF2B5EF4-FFF2-40B4-BE49-F238E27FC236}">
-                <a16:creationId xmlns:a16="http://schemas.microsoft.com/office/drawing/2014/main" id="{EC891EDF-7372-4FF4-A822-5FD38EEA920E}"/>
+                <a16:creationId xmlns:a16="http://schemas.microsoft.com/office/drawing/2014/main" id="{9B3F83B5-C07B-430A-9FB0-C360C8E37C71}"/>
               </a:ext>
             </a:extLst>
           </p:cNvPr>
@@ -8864,7 +8864,7 @@
           <p:cNvPr id="7" name="TextBox 6">
             <a:extLst xmlns:a="http://schemas.openxmlformats.org/drawingml/2006/main">
               <a:ext uri="{FF2B5EF4-FFF2-40B4-BE49-F238E27FC236}">
-                <a16:creationId xmlns:a16="http://schemas.microsoft.com/office/drawing/2014/main" id="{7F89C87D-F1F9-42B8-A504-B5CCA3B2044A}"/>
+                <a16:creationId xmlns:a16="http://schemas.microsoft.com/office/drawing/2014/main" id="{14F297D0-5251-464C-A7C8-A1A03B927C2E}"/>
               </a:ext>
             </a:extLst>
           </p:cNvPr>
@@ -9044,7 +9044,7 @@
           <p:cNvPr id="8" name="Rounded Rectangle 7">
             <a:extLst xmlns:a="http://schemas.openxmlformats.org/drawingml/2006/main">
               <a:ext uri="{FF2B5EF4-FFF2-40B4-BE49-F238E27FC236}">
-                <a16:creationId xmlns:a16="http://schemas.microsoft.com/office/drawing/2014/main" id="{BE91E602-8DB9-4F0D-97FD-14CE432E1DD1}"/>
+                <a16:creationId xmlns:a16="http://schemas.microsoft.com/office/drawing/2014/main" id="{C5B3F7F0-D934-4570-ACBA-EDB812C71352}"/>
               </a:ext>
             </a:extLst>
           </p:cNvPr>
@@ -9099,7 +9099,7 @@
           <p:cNvPr id="9" name="TextBox 8">
             <a:extLst xmlns:a="http://schemas.openxmlformats.org/drawingml/2006/main">
               <a:ext uri="{FF2B5EF4-FFF2-40B4-BE49-F238E27FC236}">
-                <a16:creationId xmlns:a16="http://schemas.microsoft.com/office/drawing/2014/main" id="{44493409-4010-4B74-891D-4FF6A13E0B50}"/>
+                <a16:creationId xmlns:a16="http://schemas.microsoft.com/office/drawing/2014/main" id="{7C9052A8-4691-47C0-A96C-19936091A760}"/>
               </a:ext>
             </a:extLst>
           </p:cNvPr>
@@ -9258,7 +9258,7 @@
     </p:spTree>
     <p:extLst>
       <p:ext uri="{BB962C8B-B14F-4D97-AF65-F5344CB8AC3E}">
-        <p14:creationId xmlns:p14="http://schemas.microsoft.com/office/powerpoint/2010/main" val="1800285656"/>
+        <p14:creationId xmlns:p14="http://schemas.microsoft.com/office/powerpoint/2010/main" val="1386526191"/>
       </p:ext>
     </p:extLst>
   </p:cSld>
@@ -9282,7 +9282,7 @@
           <p:cNvPr id="2" name="Rectangle 1">
             <a:extLst xmlns:a="http://schemas.openxmlformats.org/drawingml/2006/main">
               <a:ext uri="{FF2B5EF4-FFF2-40B4-BE49-F238E27FC236}">
-                <a16:creationId xmlns:a16="http://schemas.microsoft.com/office/drawing/2014/main" id="{73C25C0E-13F2-41AC-83C7-2A720201EA8B}"/>
+                <a16:creationId xmlns:a16="http://schemas.microsoft.com/office/drawing/2014/main" id="{6B790C6F-807E-4710-B10E-A9B9FCDB8FC0}"/>
               </a:ext>
             </a:extLst>
           </p:cNvPr>
@@ -9335,7 +9335,7 @@
           <p:cNvPr id="3" name="Rectangle 2">
             <a:extLst xmlns:a="http://schemas.openxmlformats.org/drawingml/2006/main">
               <a:ext uri="{FF2B5EF4-FFF2-40B4-BE49-F238E27FC236}">
-                <a16:creationId xmlns:a16="http://schemas.microsoft.com/office/drawing/2014/main" id="{608ACB25-B67A-4075-97D7-F378711056A7}"/>
+                <a16:creationId xmlns:a16="http://schemas.microsoft.com/office/drawing/2014/main" id="{B0691EEE-F69E-4461-B4B9-9CC38746EAD5}"/>
               </a:ext>
             </a:extLst>
           </p:cNvPr>
@@ -9388,7 +9388,7 @@
           <p:cNvPr id="4" name="Rectangle 3">
             <a:extLst xmlns:a="http://schemas.openxmlformats.org/drawingml/2006/main">
               <a:ext uri="{FF2B5EF4-FFF2-40B4-BE49-F238E27FC236}">
-                <a16:creationId xmlns:a16="http://schemas.microsoft.com/office/drawing/2014/main" id="{E1836714-478B-4758-8DB7-73B834C1AF1E}"/>
+                <a16:creationId xmlns:a16="http://schemas.microsoft.com/office/drawing/2014/main" id="{372EADA5-AD91-49B1-98E3-CA6534C20E87}"/>
               </a:ext>
             </a:extLst>
           </p:cNvPr>
@@ -9441,7 +9441,7 @@
           <p:cNvPr id="5" name="TextBox 4">
             <a:extLst xmlns:a="http://schemas.openxmlformats.org/drawingml/2006/main">
               <a:ext uri="{FF2B5EF4-FFF2-40B4-BE49-F238E27FC236}">
-                <a16:creationId xmlns:a16="http://schemas.microsoft.com/office/drawing/2014/main" id="{9EC1CE0E-7802-4D66-B7F3-5ECF84544B74}"/>
+                <a16:creationId xmlns:a16="http://schemas.microsoft.com/office/drawing/2014/main" id="{25C6C941-B141-4AE2-B478-C4D9894E2A36}"/>
               </a:ext>
             </a:extLst>
           </p:cNvPr>
@@ -9504,7 +9504,7 @@
           <p:cNvPr id="6" name="Rounded Rectangle 5">
             <a:extLst xmlns:a="http://schemas.openxmlformats.org/drawingml/2006/main">
               <a:ext uri="{FF2B5EF4-FFF2-40B4-BE49-F238E27FC236}">
-                <a16:creationId xmlns:a16="http://schemas.microsoft.com/office/drawing/2014/main" id="{20F0CE78-A157-40B1-9997-D04A368A76B0}"/>
+                <a16:creationId xmlns:a16="http://schemas.microsoft.com/office/drawing/2014/main" id="{2310B402-8C30-41EE-85DD-AF91AFAEB133}"/>
               </a:ext>
             </a:extLst>
           </p:cNvPr>
@@ -9559,7 +9559,7 @@
           <p:cNvPr id="7" name="TextBox 6">
             <a:extLst xmlns:a="http://schemas.openxmlformats.org/drawingml/2006/main">
               <a:ext uri="{FF2B5EF4-FFF2-40B4-BE49-F238E27FC236}">
-                <a16:creationId xmlns:a16="http://schemas.microsoft.com/office/drawing/2014/main" id="{80ED5C56-902F-4DE7-87A8-51AD1278BD5D}"/>
+                <a16:creationId xmlns:a16="http://schemas.microsoft.com/office/drawing/2014/main" id="{87BC02AB-0220-4E04-B930-FD4076BEDE92}"/>
               </a:ext>
             </a:extLst>
           </p:cNvPr>
@@ -9777,7 +9777,7 @@
           <p:cNvPr id="8" name="Rounded Rectangle 7">
             <a:extLst xmlns:a="http://schemas.openxmlformats.org/drawingml/2006/main">
               <a:ext uri="{FF2B5EF4-FFF2-40B4-BE49-F238E27FC236}">
-                <a16:creationId xmlns:a16="http://schemas.microsoft.com/office/drawing/2014/main" id="{0D166698-49CD-4FD7-8428-6B25784EDE55}"/>
+                <a16:creationId xmlns:a16="http://schemas.microsoft.com/office/drawing/2014/main" id="{4F52DC95-E164-4E74-8218-B65458F8FD3C}"/>
               </a:ext>
             </a:extLst>
           </p:cNvPr>
@@ -9832,7 +9832,7 @@
           <p:cNvPr id="9" name="TextBox 8">
             <a:extLst xmlns:a="http://schemas.openxmlformats.org/drawingml/2006/main">
               <a:ext uri="{FF2B5EF4-FFF2-40B4-BE49-F238E27FC236}">
-                <a16:creationId xmlns:a16="http://schemas.microsoft.com/office/drawing/2014/main" id="{15362817-4121-4F9E-BBC7-7D29120F8A7F}"/>
+                <a16:creationId xmlns:a16="http://schemas.microsoft.com/office/drawing/2014/main" id="{9F305A22-BA44-4373-AA0C-C43118865D70}"/>
               </a:ext>
             </a:extLst>
           </p:cNvPr>
@@ -10067,7 +10067,7 @@
     </p:spTree>
     <p:extLst>
       <p:ext uri="{BB962C8B-B14F-4D97-AF65-F5344CB8AC3E}">
-        <p14:creationId xmlns:p14="http://schemas.microsoft.com/office/powerpoint/2010/main" val="790596602"/>
+        <p14:creationId xmlns:p14="http://schemas.microsoft.com/office/powerpoint/2010/main" val="1135468343"/>
       </p:ext>
     </p:extLst>
   </p:cSld>
@@ -10091,7 +10091,7 @@
           <p:cNvPr id="2" name="Rectangle 1">
             <a:extLst xmlns:a="http://schemas.openxmlformats.org/drawingml/2006/main">
               <a:ext uri="{FF2B5EF4-FFF2-40B4-BE49-F238E27FC236}">
-                <a16:creationId xmlns:a16="http://schemas.microsoft.com/office/drawing/2014/main" id="{4CA6AE8B-D4C7-4E5F-AC64-0A3C067FE971}"/>
+                <a16:creationId xmlns:a16="http://schemas.microsoft.com/office/drawing/2014/main" id="{DAA75F01-47E4-42BC-8621-52B8271A46C2}"/>
               </a:ext>
             </a:extLst>
           </p:cNvPr>
@@ -10144,7 +10144,7 @@
           <p:cNvPr id="3" name="Rectangle 2">
             <a:extLst xmlns:a="http://schemas.openxmlformats.org/drawingml/2006/main">
               <a:ext uri="{FF2B5EF4-FFF2-40B4-BE49-F238E27FC236}">
-                <a16:creationId xmlns:a16="http://schemas.microsoft.com/office/drawing/2014/main" id="{FFED41CC-2C50-4C61-A973-0B117D47086D}"/>
+                <a16:creationId xmlns:a16="http://schemas.microsoft.com/office/drawing/2014/main" id="{5B4DECA0-AADE-4A99-8F0A-3812BE01C345}"/>
               </a:ext>
             </a:extLst>
           </p:cNvPr>
@@ -10197,7 +10197,7 @@
           <p:cNvPr id="4" name="Rectangle 3">
             <a:extLst xmlns:a="http://schemas.openxmlformats.org/drawingml/2006/main">
               <a:ext uri="{FF2B5EF4-FFF2-40B4-BE49-F238E27FC236}">
-                <a16:creationId xmlns:a16="http://schemas.microsoft.com/office/drawing/2014/main" id="{3DA338A1-9970-4A2C-9CF5-F341174EF037}"/>
+                <a16:creationId xmlns:a16="http://schemas.microsoft.com/office/drawing/2014/main" id="{2BD3CD5C-30C7-4189-A8A2-DA9A7E952418}"/>
               </a:ext>
             </a:extLst>
           </p:cNvPr>
@@ -10250,7 +10250,7 @@
           <p:cNvPr id="5" name="TextBox 4">
             <a:extLst xmlns:a="http://schemas.openxmlformats.org/drawingml/2006/main">
               <a:ext uri="{FF2B5EF4-FFF2-40B4-BE49-F238E27FC236}">
-                <a16:creationId xmlns:a16="http://schemas.microsoft.com/office/drawing/2014/main" id="{9A663EF1-2EC3-4BF7-98FD-A559B2AA3362}"/>
+                <a16:creationId xmlns:a16="http://schemas.microsoft.com/office/drawing/2014/main" id="{7E24B770-25CF-438B-9BF8-4D19106C0207}"/>
               </a:ext>
             </a:extLst>
           </p:cNvPr>
@@ -10313,7 +10313,7 @@
           <p:cNvPr id="6" name="Rounded Rectangle 5">
             <a:extLst xmlns:a="http://schemas.openxmlformats.org/drawingml/2006/main">
               <a:ext uri="{FF2B5EF4-FFF2-40B4-BE49-F238E27FC236}">
-                <a16:creationId xmlns:a16="http://schemas.microsoft.com/office/drawing/2014/main" id="{7CB293FC-B124-43E0-B637-AE7B23DEAF3C}"/>
+                <a16:creationId xmlns:a16="http://schemas.microsoft.com/office/drawing/2014/main" id="{7DCDA2A5-B3F9-449E-A5A3-CB20A1AEAA37}"/>
               </a:ext>
             </a:extLst>
           </p:cNvPr>
@@ -10368,7 +10368,7 @@
           <p:cNvPr id="7" name="TextBox 6">
             <a:extLst xmlns:a="http://schemas.openxmlformats.org/drawingml/2006/main">
               <a:ext uri="{FF2B5EF4-FFF2-40B4-BE49-F238E27FC236}">
-                <a16:creationId xmlns:a16="http://schemas.microsoft.com/office/drawing/2014/main" id="{C1BD8FF2-B41F-49E9-B636-F7DEBA374647}"/>
+                <a16:creationId xmlns:a16="http://schemas.microsoft.com/office/drawing/2014/main" id="{201A21A8-2240-46EB-853A-6506C87F4FDD}"/>
               </a:ext>
             </a:extLst>
           </p:cNvPr>
@@ -10751,7 +10751,7 @@
           <p:nvPr/>
         </p:nvPicPr>
         <p:blipFill>
-          <a:blip xmlns:r="http://schemas.openxmlformats.org/officeDocument/2006/relationships" xmlns:a="http://schemas.openxmlformats.org/drawingml/2006/main" r:embed="Rf8ca018465404876"/>
+          <a:blip xmlns:r="http://schemas.openxmlformats.org/officeDocument/2006/relationships" xmlns:a="http://schemas.openxmlformats.org/drawingml/2006/main" r:embed="Rb7b31adc7fa445e6"/>
           <a:stretch xmlns:a="http://schemas.openxmlformats.org/drawingml/2006/main">
             <a:fillRect l="0" t="0" r="0" b="0"/>
           </a:stretch>
@@ -10771,7 +10771,7 @@
           <p:cNvPr id="9" name="Rounded Rectangle 8">
             <a:extLst xmlns:a="http://schemas.openxmlformats.org/drawingml/2006/main">
               <a:ext uri="{FF2B5EF4-FFF2-40B4-BE49-F238E27FC236}">
-                <a16:creationId xmlns:a16="http://schemas.microsoft.com/office/drawing/2014/main" id="{B8742DAB-DFAB-4305-8723-704851E29B11}"/>
+                <a16:creationId xmlns:a16="http://schemas.microsoft.com/office/drawing/2014/main" id="{D832EA41-84DA-4368-8870-76E5E9D0D612}"/>
               </a:ext>
             </a:extLst>
           </p:cNvPr>
@@ -10826,7 +10826,7 @@
           <p:cNvPr id="10" name="TextBox 9">
             <a:extLst xmlns:a="http://schemas.openxmlformats.org/drawingml/2006/main">
               <a:ext uri="{FF2B5EF4-FFF2-40B4-BE49-F238E27FC236}">
-                <a16:creationId xmlns:a16="http://schemas.microsoft.com/office/drawing/2014/main" id="{B8BB598D-CE33-4722-BC7B-E736F03F7EDE}"/>
+                <a16:creationId xmlns:a16="http://schemas.microsoft.com/office/drawing/2014/main" id="{59484C2A-FCDA-47A9-8A57-CFF15D9CAB86}"/>
               </a:ext>
             </a:extLst>
           </p:cNvPr>
@@ -10912,7 +10912,7 @@
     </p:spTree>
     <p:extLst>
       <p:ext uri="{BB962C8B-B14F-4D97-AF65-F5344CB8AC3E}">
-        <p14:creationId xmlns:p14="http://schemas.microsoft.com/office/powerpoint/2010/main" val="1574508850"/>
+        <p14:creationId xmlns:p14="http://schemas.microsoft.com/office/powerpoint/2010/main" val="927002700"/>
       </p:ext>
     </p:extLst>
   </p:cSld>
@@ -10936,7 +10936,7 @@
           <p:cNvPr id="2" name="Rectangle 1">
             <a:extLst xmlns:a="http://schemas.openxmlformats.org/drawingml/2006/main">
               <a:ext uri="{FF2B5EF4-FFF2-40B4-BE49-F238E27FC236}">
-                <a16:creationId xmlns:a16="http://schemas.microsoft.com/office/drawing/2014/main" id="{EF749E31-DF2B-4CE2-B277-C8D5EDCE3DAD}"/>
+                <a16:creationId xmlns:a16="http://schemas.microsoft.com/office/drawing/2014/main" id="{A66094EF-C050-4A23-827E-0BC0E74964CE}"/>
               </a:ext>
             </a:extLst>
           </p:cNvPr>
@@ -10989,7 +10989,7 @@
           <p:cNvPr id="3" name="Rectangle 2">
             <a:extLst xmlns:a="http://schemas.openxmlformats.org/drawingml/2006/main">
               <a:ext uri="{FF2B5EF4-FFF2-40B4-BE49-F238E27FC236}">
-                <a16:creationId xmlns:a16="http://schemas.microsoft.com/office/drawing/2014/main" id="{BB8176D1-A685-4159-BAA6-EA67002F8B0F}"/>
+                <a16:creationId xmlns:a16="http://schemas.microsoft.com/office/drawing/2014/main" id="{FC31F347-FE41-48D8-8AB1-84057D0C5822}"/>
               </a:ext>
             </a:extLst>
           </p:cNvPr>
@@ -11042,7 +11042,7 @@
           <p:cNvPr id="4" name="Rectangle 3">
             <a:extLst xmlns:a="http://schemas.openxmlformats.org/drawingml/2006/main">
               <a:ext uri="{FF2B5EF4-FFF2-40B4-BE49-F238E27FC236}">
-                <a16:creationId xmlns:a16="http://schemas.microsoft.com/office/drawing/2014/main" id="{72134F25-7D33-430E-871E-C2BAFA5A641C}"/>
+                <a16:creationId xmlns:a16="http://schemas.microsoft.com/office/drawing/2014/main" id="{325ACE00-949F-4B31-8561-72971106865F}"/>
               </a:ext>
             </a:extLst>
           </p:cNvPr>
@@ -11095,7 +11095,7 @@
           <p:cNvPr id="5" name="TextBox 4">
             <a:extLst xmlns:a="http://schemas.openxmlformats.org/drawingml/2006/main">
               <a:ext uri="{FF2B5EF4-FFF2-40B4-BE49-F238E27FC236}">
-                <a16:creationId xmlns:a16="http://schemas.microsoft.com/office/drawing/2014/main" id="{534A1B69-23AE-4926-BE62-625E12541ED2}"/>
+                <a16:creationId xmlns:a16="http://schemas.microsoft.com/office/drawing/2014/main" id="{034F361C-6299-40E2-8293-1B7844AB6063}"/>
               </a:ext>
             </a:extLst>
           </p:cNvPr>
@@ -11158,7 +11158,7 @@
           <p:cNvPr id="6" name="Rounded Rectangle 5">
             <a:extLst xmlns:a="http://schemas.openxmlformats.org/drawingml/2006/main">
               <a:ext uri="{FF2B5EF4-FFF2-40B4-BE49-F238E27FC236}">
-                <a16:creationId xmlns:a16="http://schemas.microsoft.com/office/drawing/2014/main" id="{70FE6936-B067-4C94-B924-95E7E5A7771F}"/>
+                <a16:creationId xmlns:a16="http://schemas.microsoft.com/office/drawing/2014/main" id="{E4127776-E111-4BFB-96C7-230A84DD9EF6}"/>
               </a:ext>
             </a:extLst>
           </p:cNvPr>
@@ -11213,7 +11213,7 @@
           <p:cNvPr id="7" name="TextBox 6">
             <a:extLst xmlns:a="http://schemas.openxmlformats.org/drawingml/2006/main">
               <a:ext uri="{FF2B5EF4-FFF2-40B4-BE49-F238E27FC236}">
-                <a16:creationId xmlns:a16="http://schemas.microsoft.com/office/drawing/2014/main" id="{A0C64D86-DC0F-44A1-A36A-A52831514462}"/>
+                <a16:creationId xmlns:a16="http://schemas.microsoft.com/office/drawing/2014/main" id="{473BC672-1F93-4522-8941-D6610F92FA5A}"/>
               </a:ext>
             </a:extLst>
           </p:cNvPr>
@@ -11450,7 +11450,7 @@
           <p:cNvPr id="8" name="Rounded Rectangle 7">
             <a:extLst xmlns:a="http://schemas.openxmlformats.org/drawingml/2006/main">
               <a:ext uri="{FF2B5EF4-FFF2-40B4-BE49-F238E27FC236}">
-                <a16:creationId xmlns:a16="http://schemas.microsoft.com/office/drawing/2014/main" id="{4D696FF7-697F-4BBE-8AC7-21428916BE2E}"/>
+                <a16:creationId xmlns:a16="http://schemas.microsoft.com/office/drawing/2014/main" id="{D3F16271-7EEA-44DC-9A88-293528D6A5A6}"/>
               </a:ext>
             </a:extLst>
           </p:cNvPr>
@@ -11505,7 +11505,7 @@
           <p:cNvPr id="9" name="TextBox 8">
             <a:extLst xmlns:a="http://schemas.openxmlformats.org/drawingml/2006/main">
               <a:ext uri="{FF2B5EF4-FFF2-40B4-BE49-F238E27FC236}">
-                <a16:creationId xmlns:a16="http://schemas.microsoft.com/office/drawing/2014/main" id="{A406CCC3-16F4-4801-B427-A743D4CD20E5}"/>
+                <a16:creationId xmlns:a16="http://schemas.microsoft.com/office/drawing/2014/main" id="{93D78E6A-B868-4C81-9615-189A3AA28C33}"/>
               </a:ext>
             </a:extLst>
           </p:cNvPr>
@@ -11840,7 +11840,7 @@
     </p:spTree>
     <p:extLst>
       <p:ext uri="{BB962C8B-B14F-4D97-AF65-F5344CB8AC3E}">
-        <p14:creationId xmlns:p14="http://schemas.microsoft.com/office/powerpoint/2010/main" val="814644868"/>
+        <p14:creationId xmlns:p14="http://schemas.microsoft.com/office/powerpoint/2010/main" val="43847148"/>
       </p:ext>
     </p:extLst>
   </p:cSld>
@@ -11864,7 +11864,7 @@
           <p:cNvPr id="2" name="Rectangle 1">
             <a:extLst xmlns:a="http://schemas.openxmlformats.org/drawingml/2006/main">
               <a:ext uri="{FF2B5EF4-FFF2-40B4-BE49-F238E27FC236}">
-                <a16:creationId xmlns:a16="http://schemas.microsoft.com/office/drawing/2014/main" id="{36197B92-FC50-4BE9-84BD-3756AC9ED8ED}"/>
+                <a16:creationId xmlns:a16="http://schemas.microsoft.com/office/drawing/2014/main" id="{E0C9DB31-0896-410A-A6DD-8D8FF5F64E6A}"/>
               </a:ext>
             </a:extLst>
           </p:cNvPr>
@@ -11917,7 +11917,7 @@
           <p:cNvPr id="3" name="Rectangle 2">
             <a:extLst xmlns:a="http://schemas.openxmlformats.org/drawingml/2006/main">
               <a:ext uri="{FF2B5EF4-FFF2-40B4-BE49-F238E27FC236}">
-                <a16:creationId xmlns:a16="http://schemas.microsoft.com/office/drawing/2014/main" id="{A265C8AC-CDA5-45D8-872F-B01EF59D4FA6}"/>
+                <a16:creationId xmlns:a16="http://schemas.microsoft.com/office/drawing/2014/main" id="{A233B85C-F72C-4A33-92A4-FEC071F3FBB9}"/>
               </a:ext>
             </a:extLst>
           </p:cNvPr>
@@ -11970,7 +11970,7 @@
           <p:cNvPr id="4" name="Rectangle 3">
             <a:extLst xmlns:a="http://schemas.openxmlformats.org/drawingml/2006/main">
               <a:ext uri="{FF2B5EF4-FFF2-40B4-BE49-F238E27FC236}">
-                <a16:creationId xmlns:a16="http://schemas.microsoft.com/office/drawing/2014/main" id="{67224D6E-37FC-4917-92F2-2CEC50164682}"/>
+                <a16:creationId xmlns:a16="http://schemas.microsoft.com/office/drawing/2014/main" id="{84B4329E-BE9B-44A6-B5EF-35E8824E6AC3}"/>
               </a:ext>
             </a:extLst>
           </p:cNvPr>
@@ -12023,7 +12023,7 @@
           <p:cNvPr id="5" name="TextBox 4">
             <a:extLst xmlns:a="http://schemas.openxmlformats.org/drawingml/2006/main">
               <a:ext uri="{FF2B5EF4-FFF2-40B4-BE49-F238E27FC236}">
-                <a16:creationId xmlns:a16="http://schemas.microsoft.com/office/drawing/2014/main" id="{E5BEDA46-FB4D-44B2-8344-1F3FA1C56DFA}"/>
+                <a16:creationId xmlns:a16="http://schemas.microsoft.com/office/drawing/2014/main" id="{ED50E690-E393-47D9-BB8C-604CCFE8EB1F}"/>
               </a:ext>
             </a:extLst>
           </p:cNvPr>
@@ -12086,7 +12086,7 @@
           <p:cNvPr id="6" name="Rounded Rectangle 5">
             <a:extLst xmlns:a="http://schemas.openxmlformats.org/drawingml/2006/main">
               <a:ext uri="{FF2B5EF4-FFF2-40B4-BE49-F238E27FC236}">
-                <a16:creationId xmlns:a16="http://schemas.microsoft.com/office/drawing/2014/main" id="{7DF6A05E-2962-4C5D-9DA5-C67EBA4C1EF2}"/>
+                <a16:creationId xmlns:a16="http://schemas.microsoft.com/office/drawing/2014/main" id="{41703622-104E-41F4-8A7B-DD5A6D201509}"/>
               </a:ext>
             </a:extLst>
           </p:cNvPr>
@@ -12141,7 +12141,7 @@
           <p:cNvPr id="7" name="TextBox 6">
             <a:extLst xmlns:a="http://schemas.openxmlformats.org/drawingml/2006/main">
               <a:ext uri="{FF2B5EF4-FFF2-40B4-BE49-F238E27FC236}">
-                <a16:creationId xmlns:a16="http://schemas.microsoft.com/office/drawing/2014/main" id="{117D281B-769C-4B40-9E0E-7ADAB76DFEF0}"/>
+                <a16:creationId xmlns:a16="http://schemas.microsoft.com/office/drawing/2014/main" id="{06CE1CCD-824D-4F3F-8F0D-8512D3991EE8}"/>
               </a:ext>
             </a:extLst>
           </p:cNvPr>
@@ -12264,7 +12264,7 @@
           <p:cNvPr id="8" name="Rounded Rectangle 7">
             <a:extLst xmlns:a="http://schemas.openxmlformats.org/drawingml/2006/main">
               <a:ext uri="{FF2B5EF4-FFF2-40B4-BE49-F238E27FC236}">
-                <a16:creationId xmlns:a16="http://schemas.microsoft.com/office/drawing/2014/main" id="{AD8C3C66-D82C-4A2D-A406-3CDB90BA53B0}"/>
+                <a16:creationId xmlns:a16="http://schemas.microsoft.com/office/drawing/2014/main" id="{02415EC1-84CC-4D01-9E2C-3F5F6DAC4289}"/>
               </a:ext>
             </a:extLst>
           </p:cNvPr>
@@ -12319,7 +12319,7 @@
           <p:cNvPr id="9" name="TextBox 8">
             <a:extLst xmlns:a="http://schemas.openxmlformats.org/drawingml/2006/main">
               <a:ext uri="{FF2B5EF4-FFF2-40B4-BE49-F238E27FC236}">
-                <a16:creationId xmlns:a16="http://schemas.microsoft.com/office/drawing/2014/main" id="{B5266489-C9B8-46CC-8143-993526F6790E}"/>
+                <a16:creationId xmlns:a16="http://schemas.microsoft.com/office/drawing/2014/main" id="{349115A2-991B-4EB0-8A1C-4DBDDA8890D7}"/>
               </a:ext>
             </a:extLst>
           </p:cNvPr>
@@ -12442,7 +12442,7 @@
           <p:cNvPr id="10" name="Rounded Rectangle 9">
             <a:extLst xmlns:a="http://schemas.openxmlformats.org/drawingml/2006/main">
               <a:ext uri="{FF2B5EF4-FFF2-40B4-BE49-F238E27FC236}">
-                <a16:creationId xmlns:a16="http://schemas.microsoft.com/office/drawing/2014/main" id="{5728ADA4-C967-467E-AC84-A56B9398D81E}"/>
+                <a16:creationId xmlns:a16="http://schemas.microsoft.com/office/drawing/2014/main" id="{2C9FB04E-1655-43C9-8970-A1E0A9E36CDD}"/>
               </a:ext>
             </a:extLst>
           </p:cNvPr>
@@ -12497,7 +12497,7 @@
           <p:cNvPr id="11" name="TextBox 10">
             <a:extLst xmlns:a="http://schemas.openxmlformats.org/drawingml/2006/main">
               <a:ext uri="{FF2B5EF4-FFF2-40B4-BE49-F238E27FC236}">
-                <a16:creationId xmlns:a16="http://schemas.microsoft.com/office/drawing/2014/main" id="{BEB37232-BC02-4E02-B428-B5DC86A7F808}"/>
+                <a16:creationId xmlns:a16="http://schemas.microsoft.com/office/drawing/2014/main" id="{1AC050B2-7F2E-4301-A3A2-29641A38CA9E}"/>
               </a:ext>
             </a:extLst>
           </p:cNvPr>
@@ -12847,7 +12847,7 @@
     </p:spTree>
     <p:extLst>
       <p:ext uri="{BB962C8B-B14F-4D97-AF65-F5344CB8AC3E}">
-        <p14:creationId xmlns:p14="http://schemas.microsoft.com/office/powerpoint/2010/main" val="154989256"/>
+        <p14:creationId xmlns:p14="http://schemas.microsoft.com/office/powerpoint/2010/main" val="2130239381"/>
       </p:ext>
     </p:extLst>
   </p:cSld>
@@ -12871,7 +12871,7 @@
           <p:cNvPr id="2" name="Rectangle 1">
             <a:extLst xmlns:a="http://schemas.openxmlformats.org/drawingml/2006/main">
               <a:ext uri="{FF2B5EF4-FFF2-40B4-BE49-F238E27FC236}">
-                <a16:creationId xmlns:a16="http://schemas.microsoft.com/office/drawing/2014/main" id="{8D28292C-D21B-4B40-854D-EEA25083F92F}"/>
+                <a16:creationId xmlns:a16="http://schemas.microsoft.com/office/drawing/2014/main" id="{A72AD196-45A2-4454-960B-5466D33267D6}"/>
               </a:ext>
             </a:extLst>
           </p:cNvPr>
@@ -12924,7 +12924,7 @@
           <p:cNvPr id="3" name="Rectangle 2">
             <a:extLst xmlns:a="http://schemas.openxmlformats.org/drawingml/2006/main">
               <a:ext uri="{FF2B5EF4-FFF2-40B4-BE49-F238E27FC236}">
-                <a16:creationId xmlns:a16="http://schemas.microsoft.com/office/drawing/2014/main" id="{5F58E0FD-EFE6-400F-80FE-1747392F6CDC}"/>
+                <a16:creationId xmlns:a16="http://schemas.microsoft.com/office/drawing/2014/main" id="{4E0D622C-80B6-4AC9-A859-DDA40A8BF15A}"/>
               </a:ext>
             </a:extLst>
           </p:cNvPr>
@@ -12977,7 +12977,7 @@
           <p:cNvPr id="4" name="Rectangle 3">
             <a:extLst xmlns:a="http://schemas.openxmlformats.org/drawingml/2006/main">
               <a:ext uri="{FF2B5EF4-FFF2-40B4-BE49-F238E27FC236}">
-                <a16:creationId xmlns:a16="http://schemas.microsoft.com/office/drawing/2014/main" id="{6BFEF9BB-1D00-4C27-9BDB-D1169294BD63}"/>
+                <a16:creationId xmlns:a16="http://schemas.microsoft.com/office/drawing/2014/main" id="{5F3F4070-EEBF-4CCE-8621-B67EAB3225CB}"/>
               </a:ext>
             </a:extLst>
           </p:cNvPr>
@@ -13030,7 +13030,7 @@
           <p:cNvPr id="5" name="TextBox 4">
             <a:extLst xmlns:a="http://schemas.openxmlformats.org/drawingml/2006/main">
               <a:ext uri="{FF2B5EF4-FFF2-40B4-BE49-F238E27FC236}">
-                <a16:creationId xmlns:a16="http://schemas.microsoft.com/office/drawing/2014/main" id="{15CB8889-BD42-4A57-8759-B3955D40DD19}"/>
+                <a16:creationId xmlns:a16="http://schemas.microsoft.com/office/drawing/2014/main" id="{28B98CD6-F55C-4C4D-88A1-9CF12F70E71B}"/>
               </a:ext>
             </a:extLst>
           </p:cNvPr>
@@ -13093,7 +13093,7 @@
           <p:cNvPr id="6" name="Rounded Rectangle 5">
             <a:extLst xmlns:a="http://schemas.openxmlformats.org/drawingml/2006/main">
               <a:ext uri="{FF2B5EF4-FFF2-40B4-BE49-F238E27FC236}">
-                <a16:creationId xmlns:a16="http://schemas.microsoft.com/office/drawing/2014/main" id="{34975B01-D92D-45C2-BE88-487F21B95A54}"/>
+                <a16:creationId xmlns:a16="http://schemas.microsoft.com/office/drawing/2014/main" id="{99F3482E-63EF-4DB0-B895-5DA01A9A53FB}"/>
               </a:ext>
             </a:extLst>
           </p:cNvPr>
@@ -13148,7 +13148,7 @@
           <p:cNvPr id="7" name="TextBox 6">
             <a:extLst xmlns:a="http://schemas.openxmlformats.org/drawingml/2006/main">
               <a:ext uri="{FF2B5EF4-FFF2-40B4-BE49-F238E27FC236}">
-                <a16:creationId xmlns:a16="http://schemas.microsoft.com/office/drawing/2014/main" id="{4893621C-C620-4095-B126-79EDCD09B4CD}"/>
+                <a16:creationId xmlns:a16="http://schemas.microsoft.com/office/drawing/2014/main" id="{095118F2-5B36-45AB-84CF-41692014427A}"/>
               </a:ext>
             </a:extLst>
           </p:cNvPr>
@@ -13612,7 +13612,7 @@
           <p:nvPr/>
         </p:nvPicPr>
         <p:blipFill>
-          <a:blip xmlns:r="http://schemas.openxmlformats.org/officeDocument/2006/relationships" xmlns:a="http://schemas.openxmlformats.org/drawingml/2006/main" r:embed="R58da3dcd2ff14277"/>
+          <a:blip xmlns:r="http://schemas.openxmlformats.org/officeDocument/2006/relationships" xmlns:a="http://schemas.openxmlformats.org/drawingml/2006/main" r:embed="R538ba8edd3b54af9"/>
           <a:stretch xmlns:a="http://schemas.openxmlformats.org/drawingml/2006/main">
             <a:fillRect l="0" t="0" r="0" b="0"/>
           </a:stretch>
@@ -13632,7 +13632,7 @@
           <p:cNvPr id="9" name="Rounded Rectangle 8">
             <a:extLst xmlns:a="http://schemas.openxmlformats.org/drawingml/2006/main">
               <a:ext uri="{FF2B5EF4-FFF2-40B4-BE49-F238E27FC236}">
-                <a16:creationId xmlns:a16="http://schemas.microsoft.com/office/drawing/2014/main" id="{386CC619-F029-481F-BF92-EC25D11F687A}"/>
+                <a16:creationId xmlns:a16="http://schemas.microsoft.com/office/drawing/2014/main" id="{71B48DA7-709C-44ED-AD42-93564DBA5A8E}"/>
               </a:ext>
             </a:extLst>
           </p:cNvPr>
@@ -13687,7 +13687,7 @@
           <p:cNvPr id="10" name="TextBox 9">
             <a:extLst xmlns:a="http://schemas.openxmlformats.org/drawingml/2006/main">
               <a:ext uri="{FF2B5EF4-FFF2-40B4-BE49-F238E27FC236}">
-                <a16:creationId xmlns:a16="http://schemas.microsoft.com/office/drawing/2014/main" id="{ECBFEA72-0D73-4D75-BEF1-391478E99CA4}"/>
+                <a16:creationId xmlns:a16="http://schemas.microsoft.com/office/drawing/2014/main" id="{676C7DEA-AC78-4A90-9290-0ADD7D15C00F}"/>
               </a:ext>
             </a:extLst>
           </p:cNvPr>
@@ -13770,7 +13770,7 @@
     </p:spTree>
     <p:extLst>
       <p:ext uri="{BB962C8B-B14F-4D97-AF65-F5344CB8AC3E}">
-        <p14:creationId xmlns:p14="http://schemas.microsoft.com/office/powerpoint/2010/main" val="1182244350"/>
+        <p14:creationId xmlns:p14="http://schemas.microsoft.com/office/powerpoint/2010/main" val="1328505445"/>
       </p:ext>
     </p:extLst>
   </p:cSld>
